--- a/site/downloads/pixan-bank-deck-large-fi.pptx
+++ b/site/downloads/pixan-bank-deck-large-fi.pptx
@@ -3386,7 +3386,7 @@
                 </a:solidFill>
                 <a:latin typeface="Aptos"/>
               </a:rPr>
-              <a:t>2026.07.22-7</a:t>
+              <a:t>2026.07.22-8</a:t>
             </a:r>
           </a:p>
         </p:txBody>
@@ -3740,7 +3740,7 @@
                 </a:solidFill>
                 <a:latin typeface="Aptos"/>
               </a:rPr>
-              <a:t>Julkinen riippumaton evidenssikooste · 2026.07.22-7 · 2026-07-22 · Lähteet: RPX; CNIPA guidance; EPO family</a:t>
+              <a:t>Julkinen riippumaton evidenssikooste · 2026.07.22-8 · 2026-07-22 · Lähteet: RPX; CNIPA guidance; EPO family</a:t>
             </a:r>
           </a:p>
         </p:txBody>
@@ -4220,7 +4220,7 @@
                 </a:solidFill>
                 <a:latin typeface="Aptos"/>
               </a:rPr>
-              <a:t>Julkinen riippumaton evidenssikooste · 2026.07.22-7 · 2026-07-22 · Lähteet: IP Australia; PRH; EPO; USPTO</a:t>
+              <a:t>Julkinen riippumaton evidenssikooste · 2026.07.22-8 · 2026-07-22 · Lähteet: IP Australia; PRH; EPO; EPO / UPC; USPTO</a:t>
             </a:r>
           </a:p>
         </p:txBody>
@@ -4420,7 +4420,7 @@
                         </a:defRPr>
                       </a:pPr>
                       <a:r>
-                        <a:t>Vahvista maksu, kuitti ja uusi rekisteriote</a:t>
+                        <a:t>Vahvista Australian seuraava uusiminen heti</a:t>
                       </a:r>
                     </a:p>
                   </a:txBody>
@@ -4494,7 +4494,7 @@
                         </a:defRPr>
                       </a:pPr>
                       <a:r>
-                        <a:t>Maksa 14. vuosimaksu ja arkistoi kuitti</a:t>
+                        <a:t>Suomen 14. vuosimaksu erääntyy</a:t>
                       </a:r>
                     </a:p>
                   </a:txBody>
@@ -4568,7 +4568,7 @@
                         </a:defRPr>
                       </a:pPr>
                       <a:r>
-                        <a:t>Täsmäytä kaikki kansalliset oikeudet</a:t>
+                        <a:t>Täsmäytä jokainen eurooppalainen kansallinen oikeus ennen maksukierrosta</a:t>
                       </a:r>
                     </a:p>
                   </a:txBody>
@@ -4642,7 +4642,7 @@
                         </a:defRPr>
                       </a:pPr>
                       <a:r>
-                        <a:t>Vahvista 7,5 vuoden ylläpitomaksu</a:t>
+                        <a:t>Vahvista ja hoida Yhdysvaltain 7,5 vuoden ylläpitomaksu</a:t>
                       </a:r>
                     </a:p>
                   </a:txBody>
@@ -4775,7 +4775,7 @@
                 </a:solidFill>
                 <a:latin typeface="Aptos"/>
               </a:rPr>
-              <a:t>Atlas kattaa maailman tutkimusrunkona, ei vielä markkina-arvona</a:t>
+              <a:t>Atlas: 195 maata (UN193+VA+PS); tutkimusrunko ei ole markkina-arvo</a:t>
             </a:r>
           </a:p>
         </p:txBody>
@@ -4900,7 +4900,7 @@
                 </a:solidFill>
                 <a:latin typeface="Aptos"/>
               </a:rPr>
-              <a:t>Julkinen riippumaton evidenssikooste · 2026.07.22-7 · 2026-07-22 · Lähteet: UN; Atlas</a:t>
+              <a:t>Julkinen riippumaton evidenssikooste · 2026.07.22-8 · 2026-07-22 · Lähteet: UN; Atlas</a:t>
             </a:r>
           </a:p>
         </p:txBody>
@@ -4949,7 +4949,7 @@
         <p:spPr>
           <a:xfrm>
             <a:off x="530352" y="1719072"/>
-            <a:ext cx="3532632" cy="1371600"/>
+            <a:ext cx="2585466" cy="1371600"/>
           </a:xfrm>
           <a:prstGeom prst="roundRect">
             <a:avLst>
@@ -4996,7 +4996,7 @@
         <p:spPr>
           <a:xfrm>
             <a:off x="694944" y="1883664"/>
-            <a:ext cx="3203448" cy="530352"/>
+            <a:ext cx="2256282" cy="530352"/>
           </a:xfrm>
           <a:prstGeom prst="rect">
             <a:avLst/>
@@ -5017,7 +5017,7 @@
                 </a:solidFill>
                 <a:latin typeface="Aptos"/>
               </a:rPr>
-              <a:t>195</a:t>
+              <a:t>5</a:t>
             </a:r>
           </a:p>
         </p:txBody>
@@ -5031,7 +5031,7 @@
         <p:spPr>
           <a:xfrm>
             <a:off x="694944" y="2468879"/>
-            <a:ext cx="3203448" cy="438912"/>
+            <a:ext cx="2256282" cy="438912"/>
           </a:xfrm>
           <a:prstGeom prst="rect">
             <a:avLst/>
@@ -5052,7 +5052,7 @@
                 </a:solidFill>
                 <a:latin typeface="Aptos"/>
               </a:rPr>
-              <a:t>maata universumissa</a:t>
+              <a:t>A-luokan maata</a:t>
             </a:r>
           </a:p>
         </p:txBody>
@@ -5065,8 +5065,8 @@
         </p:nvSpPr>
         <p:spPr>
           <a:xfrm>
-            <a:off x="4319016" y="1719072"/>
-            <a:ext cx="3532632" cy="1371600"/>
+            <a:off x="3371850" y="1719072"/>
+            <a:ext cx="2585466" cy="1371600"/>
           </a:xfrm>
           <a:prstGeom prst="roundRect">
             <a:avLst>
@@ -5112,8 +5112,8 @@
         </p:nvSpPr>
         <p:spPr>
           <a:xfrm>
-            <a:off x="4483608" y="1883664"/>
-            <a:ext cx="3203448" cy="530352"/>
+            <a:off x="3536442" y="1883664"/>
+            <a:ext cx="2256282" cy="530352"/>
           </a:xfrm>
           <a:prstGeom prst="rect">
             <a:avLst/>
@@ -5134,7 +5134,7 @@
                 </a:solidFill>
                 <a:latin typeface="Aptos"/>
               </a:rPr>
-              <a:t>37</a:t>
+              <a:t>13</a:t>
             </a:r>
           </a:p>
         </p:txBody>
@@ -5147,8 +5147,8 @@
         </p:nvSpPr>
         <p:spPr>
           <a:xfrm>
-            <a:off x="4483608" y="2468879"/>
-            <a:ext cx="3203448" cy="438912"/>
+            <a:off x="3536442" y="2468879"/>
+            <a:ext cx="2256282" cy="438912"/>
           </a:xfrm>
           <a:prstGeom prst="rect">
             <a:avLst/>
@@ -5169,7 +5169,7 @@
                 </a:solidFill>
                 <a:latin typeface="Aptos"/>
               </a:rPr>
-              <a:t>evidenssimerkintää</a:t>
+              <a:t>B-luokan maata</a:t>
             </a:r>
           </a:p>
         </p:txBody>
@@ -5182,8 +5182,8 @@
         </p:nvSpPr>
         <p:spPr>
           <a:xfrm>
-            <a:off x="8107680" y="1719072"/>
-            <a:ext cx="3532632" cy="1371600"/>
+            <a:off x="6213348" y="1719072"/>
+            <a:ext cx="2585466" cy="1371600"/>
           </a:xfrm>
           <a:prstGeom prst="roundRect">
             <a:avLst>
@@ -5229,8 +5229,8 @@
         </p:nvSpPr>
         <p:spPr>
           <a:xfrm>
-            <a:off x="8272272" y="1883664"/>
-            <a:ext cx="3203448" cy="530352"/>
+            <a:off x="6377940" y="1883664"/>
+            <a:ext cx="2256282" cy="530352"/>
           </a:xfrm>
           <a:prstGeom prst="rect">
             <a:avLst/>
@@ -5251,6 +5251,123 @@
                 </a:solidFill>
                 <a:latin typeface="Aptos"/>
               </a:rPr>
+              <a:t>19</a:t>
+            </a:r>
+          </a:p>
+        </p:txBody>
+      </p:sp>
+      <p:sp>
+        <p:nvSpPr>
+          <p:cNvPr id="16" name="TextBox 15"/>
+          <p:cNvSpPr txBox="1"/>
+          <p:nvPr/>
+        </p:nvSpPr>
+        <p:spPr>
+          <a:xfrm>
+            <a:off x="6377940" y="2468879"/>
+            <a:ext cx="2256282" cy="438912"/>
+          </a:xfrm>
+          <a:prstGeom prst="rect">
+            <a:avLst/>
+          </a:prstGeom>
+          <a:noFill/>
+        </p:spPr>
+        <p:txBody>
+          <a:bodyPr wrap="square" lIns="36576" rIns="36576" tIns="36576" bIns="36576" anchor="t">
+            <a:spAutoFit/>
+          </a:bodyPr>
+          <a:lstStyle/>
+          <a:p>
+            <a:pPr algn="l"/>
+            <a:r>
+              <a:rPr sz="1400" b="0">
+                <a:solidFill>
+                  <a:srgbClr val="5B6B75"/>
+                </a:solidFill>
+                <a:latin typeface="Aptos"/>
+              </a:rPr>
+              <a:t>C-luokan maata</a:t>
+            </a:r>
+          </a:p>
+        </p:txBody>
+      </p:sp>
+      <p:sp>
+        <p:nvSpPr>
+          <p:cNvPr id="17" name="Rounded Rectangle 16"/>
+          <p:cNvSpPr/>
+          <p:nvPr/>
+        </p:nvSpPr>
+        <p:spPr>
+          <a:xfrm>
+            <a:off x="9054846" y="1719072"/>
+            <a:ext cx="2585466" cy="1371600"/>
+          </a:xfrm>
+          <a:prstGeom prst="roundRect">
+            <a:avLst>
+              <a:gd name="adj" fmla="val 8000"/>
+            </a:avLst>
+          </a:prstGeom>
+          <a:solidFill>
+            <a:srgbClr val="F6F9FA"/>
+          </a:solidFill>
+          <a:ln>
+            <a:solidFill>
+              <a:srgbClr val="CBD8DE"/>
+            </a:solidFill>
+          </a:ln>
+        </p:spPr>
+        <p:style>
+          <a:lnRef idx="1">
+            <a:schemeClr val="accent1"/>
+          </a:lnRef>
+          <a:fillRef idx="3">
+            <a:schemeClr val="accent1"/>
+          </a:fillRef>
+          <a:effectRef idx="2">
+            <a:schemeClr val="accent1"/>
+          </a:effectRef>
+          <a:fontRef idx="minor">
+            <a:schemeClr val="lt1"/>
+          </a:fontRef>
+        </p:style>
+        <p:txBody>
+          <a:bodyPr rtlCol="0" anchor="ctr"/>
+          <a:lstStyle/>
+          <a:p>
+            <a:pPr algn="ctr"/>
+          </a:p>
+        </p:txBody>
+      </p:sp>
+      <p:sp>
+        <p:nvSpPr>
+          <p:cNvPr id="18" name="TextBox 17"/>
+          <p:cNvSpPr txBox="1"/>
+          <p:nvPr/>
+        </p:nvSpPr>
+        <p:spPr>
+          <a:xfrm>
+            <a:off x="9219438" y="1883664"/>
+            <a:ext cx="2256282" cy="530352"/>
+          </a:xfrm>
+          <a:prstGeom prst="rect">
+            <a:avLst/>
+          </a:prstGeom>
+          <a:noFill/>
+        </p:spPr>
+        <p:txBody>
+          <a:bodyPr wrap="square" lIns="36576" rIns="36576" tIns="36576" bIns="36576" anchor="t">
+            <a:spAutoFit/>
+          </a:bodyPr>
+          <a:lstStyle/>
+          <a:p>
+            <a:pPr algn="l"/>
+            <a:r>
+              <a:rPr sz="2700" b="1">
+                <a:solidFill>
+                  <a:srgbClr val="138A72"/>
+                </a:solidFill>
+                <a:latin typeface="Aptos"/>
+              </a:rPr>
               <a:t>158</a:t>
             </a:r>
           </a:p>
@@ -5258,14 +5375,14 @@
       </p:sp>
       <p:sp>
         <p:nvSpPr>
-          <p:cNvPr id="16" name="TextBox 15"/>
-          <p:cNvSpPr txBox="1"/>
-          <p:nvPr/>
-        </p:nvSpPr>
-        <p:spPr>
-          <a:xfrm>
-            <a:off x="8272272" y="2468879"/>
-            <a:ext cx="3203448" cy="438912"/>
+          <p:cNvPr id="19" name="TextBox 18"/>
+          <p:cNvSpPr txBox="1"/>
+          <p:nvPr/>
+        </p:nvSpPr>
+        <p:spPr>
+          <a:xfrm>
+            <a:off x="9219438" y="2468879"/>
+            <a:ext cx="2256282" cy="438912"/>
           </a:xfrm>
           <a:prstGeom prst="rect">
             <a:avLst/>
@@ -5293,7 +5410,7 @@
       </p:sp>
       <p:sp>
         <p:nvSpPr>
-          <p:cNvPr id="17" name="TextBox 16"/>
+          <p:cNvPr id="20" name="TextBox 19"/>
           <p:cNvSpPr txBox="1"/>
           <p:nvPr/>
         </p:nvSpPr>
@@ -5321,14 +5438,14 @@
                 </a:solidFill>
                 <a:latin typeface="Aptos"/>
               </a:rPr>
-              <a:t>Kattavuus tarkoittaa tutkimusrivejä; useimmista maista puuttuu virallinen vuosimyynti.</a:t>
-            </a:r>
-          </a:p>
-        </p:txBody>
-      </p:sp>
-      <p:sp>
-        <p:nvSpPr>
-          <p:cNvPr id="18" name="Rounded Rectangle 17"/>
+              <a:t>37 evidenssimerkintää; universumin YK-osuus on 193 jäsenvaltiota.</a:t>
+            </a:r>
+          </a:p>
+        </p:txBody>
+      </p:sp>
+      <p:sp>
+        <p:nvSpPr>
+          <p:cNvPr id="21" name="Rounded Rectangle 20"/>
           <p:cNvSpPr/>
           <p:nvPr/>
         </p:nvSpPr>
@@ -5375,7 +5492,7 @@
       </p:sp>
       <p:sp>
         <p:nvSpPr>
-          <p:cNvPr id="19" name="TextBox 18"/>
+          <p:cNvPr id="22" name="TextBox 21"/>
           <p:cNvSpPr txBox="1"/>
           <p:nvPr/>
         </p:nvSpPr>
@@ -5410,7 +5527,7 @@
       </p:sp>
       <p:sp>
         <p:nvSpPr>
-          <p:cNvPr id="20" name="TextBox 19"/>
+          <p:cNvPr id="23" name="TextBox 22"/>
           <p:cNvSpPr txBox="1"/>
           <p:nvPr/>
         </p:nvSpPr>
@@ -5526,7 +5643,7 @@
                 </a:solidFill>
                 <a:latin typeface="Aptos"/>
               </a:rPr>
-              <a:t>Viiden maan viralliset havainnot mittaavat eri asioita</a:t>
+              <a:t>Viralliset havainnot 5 maasta mittaavat eri asioita</a:t>
             </a:r>
           </a:p>
         </p:txBody>
@@ -5651,7 +5768,7 @@
                 </a:solidFill>
                 <a:latin typeface="Aptos"/>
               </a:rPr>
-              <a:t>Julkinen riippumaton evidenssikooste · 2026.07.22-7 · 2026-07-22 · Lähteet: Health Canada; Destatis; Vero; Sejm; Ruotsin hallitus</a:t>
+              <a:t>Julkinen riippumaton evidenssikooste · 2026.07.22-8 · 2026-07-22 · Lähteet: Health Canada; Destatis; Vero; Sejm; Ruotsin hallitus</a:t>
             </a:r>
           </a:p>
         </p:txBody>
@@ -5851,7 +5968,7 @@
                         </a:defRPr>
                       </a:pPr>
                       <a:r>
-                        <a:t>1.16 mrd CAD toimitusarvo; 1.252 milj. l nestettä</a:t>
+                        <a:t>1,16 mrd CAD toimitusarvo; 1 251 843 l nestettä</a:t>
                       </a:r>
                     </a:p>
                   </a:txBody>
@@ -5925,7 +6042,7 @@
                         </a:defRPr>
                       </a:pPr>
                       <a:r>
-                        <a:t>1.241 milj. l → 1.518 milj. l verotettua nestettä</a:t>
+                        <a:t>1,241 milj. l → 1,518 milj. l verotettua nestettä</a:t>
                       </a:r>
                     </a:p>
                   </a:txBody>
@@ -5999,7 +6116,7 @@
                         </a:defRPr>
                       </a:pPr>
                       <a:r>
-                        <a:t>11 801,062 l; 3,540 milj. € valmisteveroa</a:t>
+                        <a:t>11 801,062 l; 3,54 milj. EUR valmisteveroa</a:t>
                       </a:r>
                     </a:p>
                   </a:txBody>
@@ -6073,7 +6190,7 @@
                         </a:defRPr>
                       </a:pPr>
                       <a:r>
-                        <a:t>805 441 l; 993,1 milj. PLN e-nesteveroa</a:t>
+                        <a:t>805 441 l; 993,1 milj. PLN valmisteveroa</a:t>
                       </a:r>
                     </a:p>
                   </a:txBody>
@@ -6405,7 +6522,7 @@
                 </a:solidFill>
                 <a:latin typeface="Aptos"/>
               </a:rPr>
-              <a:t>Julkinen riippumaton evidenssikooste · 2026.07.22-7 · 2026-07-22 · Lähteet: Health Canada 2024</a:t>
+              <a:t>Julkinen riippumaton evidenssikooste · 2026.07.22-8 · 2026-07-22 · Lähteet: Health Canada 2024</a:t>
             </a:r>
           </a:p>
         </p:txBody>
@@ -6522,7 +6639,7 @@
                 </a:solidFill>
                 <a:latin typeface="Aptos"/>
               </a:rPr>
-              <a:t>1.16 mrd CAD</a:t>
+              <a:t>1,16 mrd CAD</a:t>
             </a:r>
           </a:p>
         </p:txBody>
@@ -6639,7 +6756,7 @@
                 </a:solidFill>
                 <a:latin typeface="Aptos"/>
               </a:rPr>
-              <a:t>118,9 milj.</a:t>
+              <a:t>118,9 milj. yks.</a:t>
             </a:r>
           </a:p>
         </p:txBody>
@@ -6674,7 +6791,7 @@
                 </a:solidFill>
                 <a:latin typeface="Aptos"/>
               </a:rPr>
-              <a:t>raportoitua yksikköä</a:t>
+              <a:t>raportoitua yksikkömäärää</a:t>
             </a:r>
           </a:p>
         </p:txBody>
@@ -6756,7 +6873,7 @@
                 </a:solidFill>
                 <a:latin typeface="Aptos"/>
               </a:rPr>
-              <a:t>1.252 milj. l</a:t>
+              <a:t>1,252 milj. l</a:t>
             </a:r>
           </a:p>
         </p:txBody>
@@ -6826,7 +6943,7 @@
                 </a:solidFill>
                 <a:latin typeface="Aptos"/>
               </a:rPr>
-              <a:t>Virallinen koko vuoden havainto kattaa neljä vaping-tuoteryhmää.</a:t>
+              <a:t>Virallinen koko vuoden toimitusarvo tukku- tai vähittäismyyjille kaikissa neljässä raportoidussa tuoteryhmässä.</a:t>
             </a:r>
           </a:p>
         </p:txBody>
@@ -6943,7 +7060,7 @@
                 </a:solidFill>
                 <a:latin typeface="Aptos"/>
               </a:rPr>
-              <a:t>Tukku-/vähittäismyyjille toimitettu arvo ei ole kuluttajien kassamyynti; varasto, kate ja kanava on täsmäytettävä.</a:t>
+              <a:t>Virallinen koko vuoden toimitusarvo tukku- tai vähittäismyyjille kaikissa neljässä raportoidussa tuoteryhmässä. Kyse ei ole kuluttajien vähittäisostoista, ja Health Canada voi tarkistaa tietoa.</a:t>
             </a:r>
           </a:p>
         </p:txBody>
@@ -7156,7 +7273,7 @@
                 </a:solidFill>
                 <a:latin typeface="Aptos"/>
               </a:rPr>
-              <a:t>Julkinen riippumaton evidenssikooste · 2026.07.22-7 · 2026-07-22 · Lähteet: Destatis 73411-0003</a:t>
+              <a:t>Julkinen riippumaton evidenssikooste · 2026.07.22-8 · 2026-07-22 · Lähteet: Destatis</a:t>
             </a:r>
           </a:p>
         </p:txBody>
@@ -7357,7 +7474,7 @@
                         </a:defRPr>
                       </a:pPr>
                       <a:r>
-                        <a:t>1.241 milj. l</a:t>
+                        <a:t>1,241 milj. l</a:t>
                       </a:r>
                     </a:p>
                   </a:txBody>
@@ -7381,7 +7498,7 @@
                         </a:defRPr>
                       </a:pPr>
                       <a:r>
-                        <a:t>201 milj. €</a:t>
+                        <a:t>201 milj. EUR</a:t>
                       </a:r>
                     </a:p>
                   </a:txBody>
@@ -7455,7 +7572,7 @@
                         </a:defRPr>
                       </a:pPr>
                       <a:r>
-                        <a:t>1.284 milj. l</a:t>
+                        <a:t>1,284 milj. l</a:t>
                       </a:r>
                     </a:p>
                   </a:txBody>
@@ -7479,7 +7596,7 @@
                         </a:defRPr>
                       </a:pPr>
                       <a:r>
-                        <a:t>266 milj. €</a:t>
+                        <a:t>266 milj. EUR</a:t>
                       </a:r>
                     </a:p>
                   </a:txBody>
@@ -7553,7 +7670,7 @@
                         </a:defRPr>
                       </a:pPr>
                       <a:r>
-                        <a:t>1.518 milj. l</a:t>
+                        <a:t>1,518 milj. l</a:t>
                       </a:r>
                     </a:p>
                   </a:txBody>
@@ -7577,7 +7694,7 @@
                         </a:defRPr>
                       </a:pPr>
                       <a:r>
-                        <a:t>404 milj. €</a:t>
+                        <a:t>404 milj. EUR</a:t>
                       </a:r>
                     </a:p>
                   </a:txBody>
@@ -7859,7 +7976,7 @@
                 </a:solidFill>
                 <a:latin typeface="Aptos"/>
               </a:rPr>
-              <a:t>Julkinen riippumaton evidenssikooste · 2026.07.22-7 · 2026-07-22 · Lähteet: Destatis; inTaste-hintapisteet</a:t>
+              <a:t>Julkinen riippumaton evidenssikooste · 2026.07.22-8 · 2026-07-22 · Lähteet: Destatis; inTaste.de</a:t>
             </a:r>
           </a:p>
         </p:txBody>
@@ -7976,7 +8093,7 @@
                 </a:solidFill>
                 <a:latin typeface="Aptos"/>
               </a:rPr>
-              <a:t>667.9 M€</a:t>
+              <a:t>667,92 milj. EUR</a:t>
             </a:r>
           </a:p>
         </p:txBody>
@@ -8011,7 +8128,7 @@
                 </a:solidFill>
                 <a:latin typeface="Aptos"/>
               </a:rPr>
-              <a:t>0,44 €/ml</a:t>
+              <a:t>0,44 EUR/ml</a:t>
             </a:r>
           </a:p>
         </p:txBody>
@@ -8093,7 +8210,7 @@
                 </a:solidFill>
                 <a:latin typeface="Aptos"/>
               </a:rPr>
-              <a:t>1 199.2 M€</a:t>
+              <a:t>1 199,22 milj. EUR</a:t>
             </a:r>
           </a:p>
         </p:txBody>
@@ -8128,7 +8245,7 @@
                 </a:solidFill>
                 <a:latin typeface="Aptos"/>
               </a:rPr>
-              <a:t>0,79 €/ml</a:t>
+              <a:t>0,79 EUR/ml</a:t>
             </a:r>
           </a:p>
         </p:txBody>
@@ -8210,7 +8327,7 @@
                 </a:solidFill>
                 <a:latin typeface="Aptos"/>
               </a:rPr>
-              <a:t>1 654.6 M€</a:t>
+              <a:t>1 654,62 milj. EUR</a:t>
             </a:r>
           </a:p>
         </p:txBody>
@@ -8245,7 +8362,7 @@
                 </a:solidFill>
                 <a:latin typeface="Aptos"/>
               </a:rPr>
-              <a:t>1,09 €/ml</a:t>
+              <a:t>1,09 EUR/ml</a:t>
             </a:r>
           </a:p>
         </p:txBody>
@@ -8397,7 +8514,7 @@
                 </a:solidFill>
                 <a:latin typeface="Aptos"/>
               </a:rPr>
-              <a:t>Vuoden 2025 alustava määrä kerrotaan kolmella yhden verkkokaupan vuoden 2026 hinnalla. Confidence = low; laitteet ja useita kanava-/mix-tekijöitä puuttuu.</a:t>
+              <a:t>Ei havaittua myyntiä. Laskelma kertoo vuoden 2025 alustavan verotetun nestemäärän kolmella yksittäisellä saksalaisen verkkokaupan vuoden 2026 hinnalla. Vuosiero, yhden kaupan hintakori, tuotejakauma ja pois rajatut tuoteryhmät tekevät luottamustasosta matalan.</a:t>
             </a:r>
           </a:p>
         </p:txBody>
@@ -8610,7 +8727,7 @@
                 </a:solidFill>
                 <a:latin typeface="Aptos"/>
               </a:rPr>
-              <a:t>Julkinen riippumaton evidenssikooste · 2026.07.22-7 · 2026-07-22 · Lähteet: IMARC; Grand View Research; Fortune Business Insights</a:t>
+              <a:t>Julkinen riippumaton evidenssikooste · 2026.07.22-8 · 2026-07-22 · Lähteet: IMARC; GVR; Fortune</a:t>
             </a:r>
           </a:p>
         </p:txBody>
@@ -8727,7 +8844,7 @@
                 </a:solidFill>
                 <a:latin typeface="Aptos"/>
               </a:rPr>
-              <a:t>$26,0 mrd</a:t>
+              <a:t>26,0 mrd USD</a:t>
             </a:r>
           </a:p>
         </p:txBody>
@@ -8844,7 +8961,7 @@
                 </a:solidFill>
                 <a:latin typeface="Aptos"/>
               </a:rPr>
-              <a:t>$45,7 mrd</a:t>
+              <a:t>45,7 mrd USD</a:t>
             </a:r>
           </a:p>
         </p:txBody>
@@ -8961,7 +9078,7 @@
                 </a:solidFill>
                 <a:latin typeface="Aptos"/>
               </a:rPr>
-              <a:t>$46,32 mrd</a:t>
+              <a:t>46,32 mrd USD</a:t>
             </a:r>
           </a:p>
         </p:txBody>
@@ -9236,7 +9353,7 @@
                 </a:solidFill>
                 <a:latin typeface="Aptos"/>
               </a:rPr>
-              <a:t>Hyväksyttävä maailmanestimaatti tarvitsee vähintään kolme yhteensopivaa luovuttajaa</a:t>
+              <a:t>Hyväksyttävä maailmanestimaatti tarvitsee vähintään 3 yhteensopivaa luovuttajaa</a:t>
             </a:r>
           </a:p>
         </p:txBody>
@@ -9361,7 +9478,7 @@
                 </a:solidFill>
                 <a:latin typeface="Aptos"/>
               </a:rPr>
-              <a:t>Julkinen riippumaton evidenssikooste · 2026.07.22-7 · 2026-07-22 · Lähteet: Market-values modelReadiness</a:t>
+              <a:t>Julkinen riippumaton evidenssikooste · 2026.07.22-8 · 2026-07-22 · Lähteet: Market-values modelReadiness</a:t>
             </a:r>
           </a:p>
         </p:txBody>
@@ -9841,7 +9958,7 @@
                 </a:solidFill>
                 <a:latin typeface="Aptos"/>
               </a:rPr>
-              <a:t>Julkinen riippumaton evidenssikooste · 2026.07.22-7 · 2026-07-22 · Lähteet: WIPO valuation; Evidence Register</a:t>
+              <a:t>Julkinen riippumaton evidenssikooste · 2026.07.22-8 · 2026-07-22 · Lähteet: WIPO valuation; Evidence Register</a:t>
             </a:r>
           </a:p>
         </p:txBody>
@@ -10189,7 +10306,7 @@
                         </a:defRPr>
                       </a:pPr>
                       <a:r>
-                        <a:t>Rajattu Saksan näyttö</a:t>
+                        <a:t>Rajattu näyttö: Saksa</a:t>
                       </a:r>
                     </a:p>
                   </a:txBody>
@@ -10595,7 +10712,7 @@
                 </a:solidFill>
                 <a:latin typeface="Aptos"/>
               </a:rPr>
-              <a:t>Julkinen riippumaton evidenssikooste · 2026.07.22-7 · 2026-07-22 · Lähteet: EPO; Saksan tuomiot; WIPO</a:t>
+              <a:t>Julkinen riippumaton evidenssikooste · 2026.07.22-8 · 2026-07-22 · Lähteet: EPO; Saksa — viralliset tuomiot; WIPO</a:t>
             </a:r>
           </a:p>
         </p:txBody>
@@ -10707,7 +10824,7 @@
               </a:defRPr>
             </a:pPr>
             <a:r>
-              <a:t>•  EPO:n muutettu B2-patentti ja Saksan ratkaisut muodostavat harvinaisen vahvan oikeusnäytön ankkurin.</a:t>
+              <a:t>•  EPO:n muutettu EP3032975B2 ja Saksan kaksi virallista ratkaisua muodostavat oikeusnäytön ankkurin.</a:t>
             </a:r>
           </a:p>
           <a:p>
@@ -10726,7 +10843,7 @@
               </a:defRPr>
             </a:pPr>
             <a:r>
-              <a:t>•  Markkina-aineisto kattaa 195 maan tutkimusrungon, mutta yhteismitallista vähittäisarvoa ei vielä ole.</a:t>
+              <a:t>•  Markkina-aineisto kattaa 195 maan tutkimusrungon, mutta yhteismitallisia retail-luovuttajia on 0.</a:t>
             </a:r>
           </a:p>
           <a:p>
@@ -11075,7 +11192,7 @@
                 </a:solidFill>
                 <a:latin typeface="Aptos"/>
               </a:rPr>
-              <a:t>Julkinen riippumaton evidenssikooste · 2026.07.22-7 · 2026-07-22 · Lähteet: WIPO licensing; IP Finance</a:t>
+              <a:t>Julkinen riippumaton evidenssikooste · 2026.07.22-8 · 2026-07-22 · Lähteet: WIPO licensing; IP Finance</a:t>
             </a:r>
           </a:p>
         </p:txBody>
@@ -11555,7 +11672,7 @@
                 </a:solidFill>
                 <a:latin typeface="Aptos"/>
               </a:rPr>
-              <a:t>Julkinen riippumaton evidenssikooste · 2026.07.22-7 · 2026-07-22 · Lähteet: Evidence Register; EPO</a:t>
+              <a:t>Julkinen riippumaton evidenssikooste · 2026.07.22-8 · 2026-07-22 · Lähteet: Evidence Register; EPO</a:t>
             </a:r>
           </a:p>
         </p:txBody>
@@ -12235,7 +12352,7 @@
                 </a:solidFill>
                 <a:latin typeface="Aptos"/>
               </a:rPr>
-              <a:t>Julkinen riippumaton evidenssikooste · 2026.07.22-7 · 2026-07-22 · Lähteet: EP3032975B2; Saksan tuomio</a:t>
+              <a:t>Julkinen riippumaton evidenssikooste · 2026.07.22-8 · 2026-07-22 · Lähteet: EP3032975B2; 7 O 3341/24</a:t>
             </a:r>
           </a:p>
         </p:txBody>
@@ -13126,7 +13243,7 @@
                 </a:solidFill>
                 <a:latin typeface="Aptos"/>
               </a:rPr>
-              <a:t>Julkinen riippumaton evidenssikooste · 2026.07.22-7 · 2026-07-22 · Lähteet: WIPO dispute resolution; EPO IPscore</a:t>
+              <a:t>Julkinen riippumaton evidenssikooste · 2026.07.22-8 · 2026-07-22 · Lähteet: WIPO dispute resolution; EPO IPscore</a:t>
             </a:r>
           </a:p>
         </p:txBody>
@@ -14017,7 +14134,7 @@
                 </a:solidFill>
                 <a:latin typeface="Aptos"/>
               </a:rPr>
-              <a:t>Julkinen riippumaton evidenssikooste · 2026.07.22-7 · 2026-07-22 · Lähteet: WIPO licensing; IP Finance; TPLF mapping</a:t>
+              <a:t>Julkinen riippumaton evidenssikooste · 2026.07.22-8 · 2026-07-22 · Lähteet: WIPO licensing; IP Finance; TPLF mapping</a:t>
             </a:r>
           </a:p>
         </p:txBody>
@@ -14771,7 +14888,7 @@
                 </a:solidFill>
                 <a:latin typeface="Aptos"/>
               </a:rPr>
-              <a:t>Julkinen riippumaton evidenssikooste · 2026.07.22-7 · 2026-07-22 · Lähteet: Evidence Register; WIPO valuation</a:t>
+              <a:t>Julkinen riippumaton evidenssikooste · 2026.07.22-8 · 2026-07-22 · Lähteet: Evidence Register; WIPO valuation</a:t>
             </a:r>
           </a:p>
         </p:txBody>
@@ -15599,7 +15716,7 @@
                 </a:solidFill>
                 <a:latin typeface="Aptos"/>
               </a:rPr>
-              <a:t>Julkinen riippumaton evidenssikooste · 2026.07.22-7 · 2026-07-22 · Lähteet: WIPO valuation</a:t>
+              <a:t>Julkinen riippumaton evidenssikooste · 2026.07.22-8 · 2026-07-22 · Lähteet: WIPO valuation</a:t>
             </a:r>
           </a:p>
         </p:txBody>
@@ -16498,7 +16615,7 @@
                 </a:solidFill>
                 <a:latin typeface="Aptos"/>
               </a:rPr>
-              <a:t>Julkinen riippumaton evidenssikooste · 2026.07.22-7 · 2026-07-22 · Lähteet: Evidence Register</a:t>
+              <a:t>Julkinen riippumaton evidenssikooste · 2026.07.22-8 · 2026-07-22 · Lähteet: Evidence Register</a:t>
             </a:r>
           </a:p>
         </p:txBody>
@@ -17252,7 +17369,7 @@
                 </a:solidFill>
                 <a:latin typeface="Aptos"/>
               </a:rPr>
-              <a:t>Julkinen riippumaton evidenssikooste · 2026.07.22-7 · 2026-07-22 · Lähteet: Evidence Register</a:t>
+              <a:t>Julkinen riippumaton evidenssikooste · 2026.07.22-8 · 2026-07-22 · Lähteet: Evidence Register</a:t>
             </a:r>
           </a:p>
         </p:txBody>
@@ -18080,7 +18197,7 @@
                 </a:solidFill>
                 <a:latin typeface="Aptos"/>
               </a:rPr>
-              <a:t>Julkinen riippumaton evidenssikooste · 2026.07.22-7 · 2026-07-22 · Lähteet: Evidence Register; changelog</a:t>
+              <a:t>Julkinen riippumaton evidenssikooste · 2026.07.22-8 · 2026-07-22 · Lähteet: Evidence Register; changelog</a:t>
             </a:r>
           </a:p>
         </p:txBody>
@@ -18971,7 +19088,7 @@
                 </a:solidFill>
                 <a:latin typeface="Aptos"/>
               </a:rPr>
-              <a:t>Julkinen riippumaton evidenssikooste · 2026.07.22-7 · 2026-07-22 · Lähteet: EPO; DE 8 Ni 18/24; DE 7 O 3341/24</a:t>
+              <a:t>Julkinen riippumaton evidenssikooste · 2026.07.22-8 · 2026-07-22 · Lähteet: EPO; 8 Ni 18/24 (EP); 7 O 3341/24</a:t>
             </a:r>
           </a:p>
         </p:txBody>
@@ -19123,7 +19240,7 @@
                         </a:defRPr>
                       </a:pPr>
                       <a:r>
-                        <a:t>EPO pysytti patentin muutettuna</a:t>
+                        <a:t>EPO:n keskitetty riitautus päättyi patentin pysyttämiseen muutettuna</a:t>
                       </a:r>
                     </a:p>
                   </a:txBody>
@@ -19197,7 +19314,7 @@
                         </a:defRPr>
                       </a:pPr>
                       <a:r>
-                        <a:t>Saksan mitätöintiratkaisu</a:t>
+                        <a:t>Mitätöintikanne hylättiin; valitus vireillä</a:t>
                       </a:r>
                     </a:p>
                   </a:txBody>
@@ -19271,7 +19388,7 @@
                         </a:defRPr>
                       </a:pPr>
                       <a:r>
-                        <a:t>Saksan loukkausratkaisu</a:t>
+                        <a:t>Tarkasteltujen tuotteiden todettiin loukkaavan patenttia</a:t>
                       </a:r>
                     </a:p>
                   </a:txBody>
@@ -19502,7 +19619,7 @@
               </a:defRPr>
             </a:pPr>
             <a:r>
-              <a:t>•  Vahva lähtökohta: dokumentoitu patenttiydin ja virallista Saksan oikeusnäyttöä.</a:t>
+              <a:t>•  Vahva lähtökohta: dokumentoitu patenttiydin ja Saksan virallista oikeusnäyttöä.</a:t>
             </a:r>
           </a:p>
           <a:p>
@@ -19594,7 +19711,7 @@
                 </a:solidFill>
                 <a:latin typeface="Aptos"/>
               </a:rPr>
-              <a:t>Versio 2026.07.22-7 · 2026-07-22 · 30 / 30</a:t>
+              <a:t>Versio 2026.07.22-8 · 2026-07-22 · 30 / 30</a:t>
             </a:r>
           </a:p>
         </p:txBody>
@@ -19807,7 +19924,7 @@
                 </a:solidFill>
                 <a:latin typeface="Aptos"/>
               </a:rPr>
-              <a:t>Julkinen riippumaton evidenssikooste · 2026.07.22-7 · 2026-07-22 · Lähteet: Evidence Register; WIPO</a:t>
+              <a:t>Julkinen riippumaton evidenssikooste · 2026.07.22-8 · 2026-07-22 · Lähteet: Evidence Register; WIPO</a:t>
             </a:r>
           </a:p>
         </p:txBody>
@@ -19938,7 +20055,7 @@
               </a:defRPr>
             </a:pPr>
             <a:r>
-              <a:t>•  Tuote- ja myyntikytkentä on vahvistettu vain rajatusti Saksan tuomiossa.</a:t>
+              <a:t>•  Tuote- ja myyntikytkentä on vahvistettu vain rajatusti: Saksa, 7 O 3341/24.</a:t>
             </a:r>
           </a:p>
           <a:p>
@@ -20287,7 +20404,7 @@
                 </a:solidFill>
                 <a:latin typeface="Aptos"/>
               </a:rPr>
-              <a:t>Julkinen riippumaton evidenssikooste · 2026.07.22-7 · 2026-07-22 · Lähteet: EP3032975B2</a:t>
+              <a:t>Julkinen riippumaton evidenssikooste · 2026.07.22-8 · 2026-07-22 · Lähteet: EP3032975B2</a:t>
             </a:r>
           </a:p>
         </p:txBody>
@@ -20767,7 +20884,7 @@
                 </a:solidFill>
                 <a:latin typeface="Aptos"/>
               </a:rPr>
-              <a:t>Julkinen riippumaton evidenssikooste · 2026.07.22-7 · 2026-07-22 · Lähteet: EP3032975B2</a:t>
+              <a:t>Julkinen riippumaton evidenssikooste · 2026.07.22-8 · 2026-07-22 · Lähteet: EP3032975B2</a:t>
             </a:r>
           </a:p>
         </p:txBody>
@@ -21521,7 +21638,7 @@
                 </a:solidFill>
                 <a:latin typeface="Aptos"/>
               </a:rPr>
-              <a:t>Julkinen riippumaton evidenssikooste · 2026.07.22-7 · 2026-07-22 · Lähteet: EPO Register; B2</a:t>
+              <a:t>Julkinen riippumaton evidenssikooste · 2026.07.22-8 · 2026-07-22 · Lähteet: EPO Register; B2</a:t>
             </a:r>
           </a:p>
         </p:txBody>
@@ -21942,7 +22059,7 @@
                 </a:solidFill>
                 <a:latin typeface="Aptos"/>
               </a:rPr>
-              <a:t>EPO:n keskitetty väite- ja valitusmenettely on päättynyt.</a:t>
+              <a:t>EPO:n keskitetty väite- ja valitusmenettely päättynyt; kansallinen myöntämisen jälkeinen tila on erillinen.</a:t>
             </a:r>
           </a:p>
         </p:txBody>
@@ -22272,7 +22389,7 @@
                 </a:solidFill>
                 <a:latin typeface="Aptos"/>
               </a:rPr>
-              <a:t>Julkinen riippumaton evidenssikooste · 2026.07.22-7 · 2026-07-22 · Lähteet: EPO family; kansalliset rekisterit</a:t>
+              <a:t>Julkinen riippumaton evidenssikooste · 2026.07.22-8 · 2026-07-22 · Lähteet: EPO family; kansalliset rekisterit</a:t>
             </a:r>
           </a:p>
         </p:txBody>
@@ -22321,7 +22438,7 @@
         <p:spPr>
           <a:xfrm>
             <a:off x="530352" y="1719072"/>
-            <a:ext cx="3532632" cy="1371600"/>
+            <a:ext cx="2585466" cy="1371600"/>
           </a:xfrm>
           <a:prstGeom prst="roundRect">
             <a:avLst>
@@ -22368,7 +22485,7 @@
         <p:spPr>
           <a:xfrm>
             <a:off x="694944" y="1883664"/>
-            <a:ext cx="3203448" cy="530352"/>
+            <a:ext cx="2256282" cy="530352"/>
           </a:xfrm>
           <a:prstGeom prst="rect">
             <a:avLst/>
@@ -22403,7 +22520,7 @@
         <p:spPr>
           <a:xfrm>
             <a:off x="694944" y="2468879"/>
-            <a:ext cx="3203448" cy="438912"/>
+            <a:ext cx="2256282" cy="438912"/>
           </a:xfrm>
           <a:prstGeom prst="rect">
             <a:avLst/>
@@ -22437,8 +22554,8 @@
         </p:nvSpPr>
         <p:spPr>
           <a:xfrm>
-            <a:off x="4319016" y="1719072"/>
-            <a:ext cx="3532632" cy="1371600"/>
+            <a:off x="3371850" y="1719072"/>
+            <a:ext cx="2585466" cy="1371600"/>
           </a:xfrm>
           <a:prstGeom prst="roundRect">
             <a:avLst>
@@ -22484,8 +22601,8 @@
         </p:nvSpPr>
         <p:spPr>
           <a:xfrm>
-            <a:off x="4483608" y="1883664"/>
-            <a:ext cx="3203448" cy="530352"/>
+            <a:off x="3536442" y="1883664"/>
+            <a:ext cx="2256282" cy="530352"/>
           </a:xfrm>
           <a:prstGeom prst="rect">
             <a:avLst/>
@@ -22519,8 +22636,8 @@
         </p:nvSpPr>
         <p:spPr>
           <a:xfrm>
-            <a:off x="4483608" y="2468879"/>
-            <a:ext cx="3203448" cy="438912"/>
+            <a:off x="3536442" y="2468879"/>
+            <a:ext cx="2256282" cy="438912"/>
           </a:xfrm>
           <a:prstGeom prst="rect">
             <a:avLst/>
@@ -22541,7 +22658,7 @@
                 </a:solidFill>
                 <a:latin typeface="Aptos"/>
               </a:rPr>
-              <a:t>kansallista rekisteritarkistusta</a:t>
+              <a:t>tunnistettua menettelyä</a:t>
             </a:r>
           </a:p>
         </p:txBody>
@@ -22554,8 +22671,8 @@
         </p:nvSpPr>
         <p:spPr>
           <a:xfrm>
-            <a:off x="8107680" y="1719072"/>
-            <a:ext cx="3532632" cy="1371600"/>
+            <a:off x="6213348" y="1719072"/>
+            <a:ext cx="2585466" cy="1371600"/>
           </a:xfrm>
           <a:prstGeom prst="roundRect">
             <a:avLst>
@@ -22601,8 +22718,8 @@
         </p:nvSpPr>
         <p:spPr>
           <a:xfrm>
-            <a:off x="8272272" y="1883664"/>
-            <a:ext cx="3203448" cy="530352"/>
+            <a:off x="6377940" y="1883664"/>
+            <a:ext cx="2256282" cy="530352"/>
           </a:xfrm>
           <a:prstGeom prst="rect">
             <a:avLst/>
@@ -22623,6 +22740,123 @@
                 </a:solidFill>
                 <a:latin typeface="Aptos"/>
               </a:rPr>
+              <a:t>4</a:t>
+            </a:r>
+          </a:p>
+        </p:txBody>
+      </p:sp>
+      <p:sp>
+        <p:nvSpPr>
+          <p:cNvPr id="16" name="TextBox 15"/>
+          <p:cNvSpPr txBox="1"/>
+          <p:nvPr/>
+        </p:nvSpPr>
+        <p:spPr>
+          <a:xfrm>
+            <a:off x="6377940" y="2468879"/>
+            <a:ext cx="2256282" cy="438912"/>
+          </a:xfrm>
+          <a:prstGeom prst="rect">
+            <a:avLst/>
+          </a:prstGeom>
+          <a:noFill/>
+        </p:spPr>
+        <p:txBody>
+          <a:bodyPr wrap="square" lIns="36576" rIns="36576" tIns="36576" bIns="36576" anchor="t">
+            <a:spAutoFit/>
+          </a:bodyPr>
+          <a:lstStyle/>
+          <a:p>
+            <a:pPr algn="l"/>
+            <a:r>
+              <a:rPr sz="1400" b="0">
+                <a:solidFill>
+                  <a:srgbClr val="5B6B75"/>
+                </a:solidFill>
+                <a:latin typeface="Aptos"/>
+              </a:rPr>
+              <a:t>virallista kansallista rekisteritarkistusta</a:t>
+            </a:r>
+          </a:p>
+        </p:txBody>
+      </p:sp>
+      <p:sp>
+        <p:nvSpPr>
+          <p:cNvPr id="17" name="Rounded Rectangle 16"/>
+          <p:cNvSpPr/>
+          <p:nvPr/>
+        </p:nvSpPr>
+        <p:spPr>
+          <a:xfrm>
+            <a:off x="9054846" y="1719072"/>
+            <a:ext cx="2585466" cy="1371600"/>
+          </a:xfrm>
+          <a:prstGeom prst="roundRect">
+            <a:avLst>
+              <a:gd name="adj" fmla="val 8000"/>
+            </a:avLst>
+          </a:prstGeom>
+          <a:solidFill>
+            <a:srgbClr val="F6F9FA"/>
+          </a:solidFill>
+          <a:ln>
+            <a:solidFill>
+              <a:srgbClr val="CBD8DE"/>
+            </a:solidFill>
+          </a:ln>
+        </p:spPr>
+        <p:style>
+          <a:lnRef idx="1">
+            <a:schemeClr val="accent1"/>
+          </a:lnRef>
+          <a:fillRef idx="3">
+            <a:schemeClr val="accent1"/>
+          </a:fillRef>
+          <a:effectRef idx="2">
+            <a:schemeClr val="accent1"/>
+          </a:effectRef>
+          <a:fontRef idx="minor">
+            <a:schemeClr val="lt1"/>
+          </a:fontRef>
+        </p:style>
+        <p:txBody>
+          <a:bodyPr rtlCol="0" anchor="ctr"/>
+          <a:lstStyle/>
+          <a:p>
+            <a:pPr algn="ctr"/>
+          </a:p>
+        </p:txBody>
+      </p:sp>
+      <p:sp>
+        <p:nvSpPr>
+          <p:cNvPr id="18" name="TextBox 17"/>
+          <p:cNvSpPr txBox="1"/>
+          <p:nvPr/>
+        </p:nvSpPr>
+        <p:spPr>
+          <a:xfrm>
+            <a:off x="9219438" y="1883664"/>
+            <a:ext cx="2256282" cy="530352"/>
+          </a:xfrm>
+          <a:prstGeom prst="rect">
+            <a:avLst/>
+          </a:prstGeom>
+          <a:noFill/>
+        </p:spPr>
+        <p:txBody>
+          <a:bodyPr wrap="square" lIns="36576" rIns="36576" tIns="36576" bIns="36576" anchor="t">
+            <a:spAutoFit/>
+          </a:bodyPr>
+          <a:lstStyle/>
+          <a:p>
+            <a:pPr algn="l"/>
+            <a:r>
+              <a:rPr sz="2700" b="1">
+                <a:solidFill>
+                  <a:srgbClr val="138A72"/>
+                </a:solidFill>
+                <a:latin typeface="Aptos"/>
+              </a:rPr>
               <a:t>?</a:t>
             </a:r>
           </a:p>
@@ -22630,14 +22864,14 @@
       </p:sp>
       <p:sp>
         <p:nvSpPr>
-          <p:cNvPr id="16" name="TextBox 15"/>
-          <p:cNvSpPr txBox="1"/>
-          <p:nvPr/>
-        </p:nvSpPr>
-        <p:spPr>
-          <a:xfrm>
-            <a:off x="8272272" y="2468879"/>
-            <a:ext cx="3203448" cy="438912"/>
+          <p:cNvPr id="19" name="TextBox 18"/>
+          <p:cNvSpPr txBox="1"/>
+          <p:nvPr/>
+        </p:nvSpPr>
+        <p:spPr>
+          <a:xfrm>
+            <a:off x="9219438" y="2468879"/>
+            <a:ext cx="2256282" cy="438912"/>
           </a:xfrm>
           <a:prstGeom prst="rect">
             <a:avLst/>
@@ -22665,7 +22899,7 @@
       </p:sp>
       <p:sp>
         <p:nvSpPr>
-          <p:cNvPr id="17" name="TextBox 16"/>
+          <p:cNvPr id="20" name="TextBox 19"/>
           <p:cNvSpPr txBox="1"/>
           <p:nvPr/>
         </p:nvSpPr>
@@ -22700,7 +22934,7 @@
       </p:sp>
       <p:sp>
         <p:nvSpPr>
-          <p:cNvPr id="18" name="Rounded Rectangle 17"/>
+          <p:cNvPr id="21" name="Rounded Rectangle 20"/>
           <p:cNvSpPr/>
           <p:nvPr/>
         </p:nvSpPr>
@@ -22747,7 +22981,7 @@
       </p:sp>
       <p:sp>
         <p:nvSpPr>
-          <p:cNvPr id="19" name="TextBox 18"/>
+          <p:cNvPr id="22" name="TextBox 21"/>
           <p:cNvSpPr txBox="1"/>
           <p:nvPr/>
         </p:nvSpPr>
@@ -22782,7 +23016,7 @@
       </p:sp>
       <p:sp>
         <p:nvSpPr>
-          <p:cNvPr id="20" name="TextBox 19"/>
+          <p:cNvPr id="23" name="TextBox 22"/>
           <p:cNvSpPr txBox="1"/>
           <p:nvPr/>
         </p:nvSpPr>
@@ -23023,7 +23257,7 @@
                 </a:solidFill>
                 <a:latin typeface="Aptos"/>
               </a:rPr>
-              <a:t>Julkinen riippumaton evidenssikooste · 2026.07.22-7 · 2026-07-22 · Lähteet: Viralliset Saksan tuomiot</a:t>
+              <a:t>Julkinen riippumaton evidenssikooste · 2026.07.22-8 · 2026-07-22 · Lähteet: Viralliset tuomiot: 8 Ni 18/24 (EP); 7 O 3341/24</a:t>
             </a:r>
           </a:p>
         </p:txBody>
@@ -23101,7 +23335,7 @@
                         </a:defRPr>
                       </a:pPr>
                       <a:r>
-                        <a:t>Ratkaisu</a:t>
+                        <a:t>Viite</a:t>
                       </a:r>
                     </a:p>
                   </a:txBody>
@@ -23125,7 +23359,7 @@
                         </a:defRPr>
                       </a:pPr>
                       <a:r>
-                        <a:t>Vahvistettu</a:t>
+                        <a:t>Virallinen tapahtuma</a:t>
                       </a:r>
                     </a:p>
                   </a:txBody>
@@ -23149,7 +23383,7 @@
                         </a:defRPr>
                       </a:pPr>
                       <a:r>
-                        <a:t>Avoin</a:t>
+                        <a:t>Rajaus ja lopullisuus</a:t>
                       </a:r>
                     </a:p>
                   </a:txBody>
@@ -23199,7 +23433,7 @@
                         </a:defRPr>
                       </a:pPr>
                       <a:r>
-                        <a:t>Mitätöintikanne hylättiin 14.1.2026</a:t>
+                        <a:t>Mitätöintikanne hylättiin; valitus vireillä (14.1.2026)</a:t>
                       </a:r>
                     </a:p>
                   </a:txBody>
@@ -23223,7 +23457,7 @@
                         </a:defRPr>
                       </a:pPr>
                       <a:r>
-                        <a:t>BGH-valitus X ZR 21/26</a:t>
+                        <a:t>Virallinen tuomio hylkäsi EP3032975B2:n Saksan osaa koskevan mitättömyyskanteen. Virallinen rekisteri mainitsee valituksen liittovaltion ylimpään tuomioistuimeen asianumerolla X ZR 21/26. Ei lainvoimainen BGH-valituksen ollessa vireillä.</a:t>
                       </a:r>
                     </a:p>
                   </a:txBody>
@@ -23273,7 +23507,7 @@
                         </a:defRPr>
                       </a:pPr>
                       <a:r>
-                        <a:t>Vaatimusten 1 ja 6 loukkaus tarkastelluissa tuotteissa</a:t>
+                        <a:t>Tarkasteltujen tuotteiden todettiin loukkaavan patenttia (2.4.2026)</a:t>
                       </a:r>
                     </a:p>
                   </a:txBody>
@@ -23297,7 +23531,7 @@
                         </a:defRPr>
                       </a:pPr>
                       <a:r>
-                        <a:t>Valitustila, lainvoima, täytäntöönpano, maksu</a:t>
+                        <a:t>Virallinen tuomio katsoi tarkasteltujen tuotteiden loukkaavan vaatimuksia 1 ja 6 välittömästi ja täydentävien osien osalta välillisesti sekä määräsi tuomiossa luetellut oikeusseuraamukset. Virallinen tuomio on saatavilla; valitustilaa, lainvoimaisuutta ja täytäntöönpanoa ei ole tässä julkaisussa riippumattomasti vahvistettu.</a:t>
                       </a:r>
                     </a:p>
                   </a:txBody>

--- a/site/downloads/pixan-bank-deck-large-fi.pptx
+++ b/site/downloads/pixan-bank-deck-large-fi.pptx
@@ -3386,7 +3386,7 @@
                 </a:solidFill>
                 <a:latin typeface="Aptos"/>
               </a:rPr>
-              <a:t>2026.07.22-8</a:t>
+              <a:t>2026.07.22-9</a:t>
             </a:r>
           </a:p>
         </p:txBody>
@@ -3740,7 +3740,7 @@
                 </a:solidFill>
                 <a:latin typeface="Aptos"/>
               </a:rPr>
-              <a:t>Julkinen riippumaton evidenssikooste · 2026.07.22-8 · 2026-07-22 · Lähteet: RPX; CNIPA guidance; EPO family</a:t>
+              <a:t>Julkinen riippumaton evidenssikooste · 2026.07.22-9 · 2026-07-22 · Lähteet: RPX; CNIPA guidance; EPO family</a:t>
             </a:r>
           </a:p>
         </p:txBody>
@@ -4220,7 +4220,7 @@
                 </a:solidFill>
                 <a:latin typeface="Aptos"/>
               </a:rPr>
-              <a:t>Julkinen riippumaton evidenssikooste · 2026.07.22-8 · 2026-07-22 · Lähteet: IP Australia; PRH; EPO; EPO / UPC; USPTO</a:t>
+              <a:t>Julkinen riippumaton evidenssikooste · 2026.07.22-9 · 2026-07-22 · Lähteet: IP Australia; PRH; EPO; EPO / UPC; USPTO</a:t>
             </a:r>
           </a:p>
         </p:txBody>
@@ -4900,7 +4900,7 @@
                 </a:solidFill>
                 <a:latin typeface="Aptos"/>
               </a:rPr>
-              <a:t>Julkinen riippumaton evidenssikooste · 2026.07.22-8 · 2026-07-22 · Lähteet: UN; Atlas</a:t>
+              <a:t>Julkinen riippumaton evidenssikooste · 2026.07.22-9 · 2026-07-22 · Lähteet: UN; Atlas</a:t>
             </a:r>
           </a:p>
         </p:txBody>
@@ -5768,7 +5768,7 @@
                 </a:solidFill>
                 <a:latin typeface="Aptos"/>
               </a:rPr>
-              <a:t>Julkinen riippumaton evidenssikooste · 2026.07.22-8 · 2026-07-22 · Lähteet: Health Canada; Destatis; Vero; Sejm; Ruotsin hallitus</a:t>
+              <a:t>Julkinen riippumaton evidenssikooste · 2026.07.22-9 · 2026-07-22 · Lähteet: Health Canada; Destatis; Vero; Sejm; Ruotsin hallitus</a:t>
             </a:r>
           </a:p>
         </p:txBody>
@@ -6522,7 +6522,7 @@
                 </a:solidFill>
                 <a:latin typeface="Aptos"/>
               </a:rPr>
-              <a:t>Julkinen riippumaton evidenssikooste · 2026.07.22-8 · 2026-07-22 · Lähteet: Health Canada 2024</a:t>
+              <a:t>Julkinen riippumaton evidenssikooste · 2026.07.22-9 · 2026-07-22 · Lähteet: Health Canada 2024</a:t>
             </a:r>
           </a:p>
         </p:txBody>
@@ -7273,7 +7273,7 @@
                 </a:solidFill>
                 <a:latin typeface="Aptos"/>
               </a:rPr>
-              <a:t>Julkinen riippumaton evidenssikooste · 2026.07.22-8 · 2026-07-22 · Lähteet: Destatis</a:t>
+              <a:t>Julkinen riippumaton evidenssikooste · 2026.07.22-9 · 2026-07-22 · Lähteet: Destatis</a:t>
             </a:r>
           </a:p>
         </p:txBody>
@@ -7976,7 +7976,7 @@
                 </a:solidFill>
                 <a:latin typeface="Aptos"/>
               </a:rPr>
-              <a:t>Julkinen riippumaton evidenssikooste · 2026.07.22-8 · 2026-07-22 · Lähteet: Destatis; inTaste.de</a:t>
+              <a:t>Julkinen riippumaton evidenssikooste · 2026.07.22-9 · 2026-07-22 · Lähteet: Destatis; inTaste.de</a:t>
             </a:r>
           </a:p>
         </p:txBody>
@@ -8727,7 +8727,7 @@
                 </a:solidFill>
                 <a:latin typeface="Aptos"/>
               </a:rPr>
-              <a:t>Julkinen riippumaton evidenssikooste · 2026.07.22-8 · 2026-07-22 · Lähteet: IMARC; GVR; Fortune</a:t>
+              <a:t>Julkinen riippumaton evidenssikooste · 2026.07.22-9 · 2026-07-22 · Lähteet: IMARC; GVR; Fortune</a:t>
             </a:r>
           </a:p>
         </p:txBody>
@@ -9478,7 +9478,7 @@
                 </a:solidFill>
                 <a:latin typeface="Aptos"/>
               </a:rPr>
-              <a:t>Julkinen riippumaton evidenssikooste · 2026.07.22-8 · 2026-07-22 · Lähteet: Market-values modelReadiness</a:t>
+              <a:t>Julkinen riippumaton evidenssikooste · 2026.07.22-9 · 2026-07-22 · Lähteet: Market-values modelReadiness</a:t>
             </a:r>
           </a:p>
         </p:txBody>
@@ -9958,7 +9958,7 @@
                 </a:solidFill>
                 <a:latin typeface="Aptos"/>
               </a:rPr>
-              <a:t>Julkinen riippumaton evidenssikooste · 2026.07.22-8 · 2026-07-22 · Lähteet: WIPO valuation; Evidence Register</a:t>
+              <a:t>Julkinen riippumaton evidenssikooste · 2026.07.22-9 · 2026-07-22 · Lähteet: WIPO valuation; Evidence Register</a:t>
             </a:r>
           </a:p>
         </p:txBody>
@@ -10712,7 +10712,7 @@
                 </a:solidFill>
                 <a:latin typeface="Aptos"/>
               </a:rPr>
-              <a:t>Julkinen riippumaton evidenssikooste · 2026.07.22-8 · 2026-07-22 · Lähteet: EPO; Saksa — viralliset tuomiot; WIPO</a:t>
+              <a:t>Julkinen riippumaton evidenssikooste · 2026.07.22-9 · 2026-07-22 · Lähteet: EPO; Saksa — viralliset tuomiot; WIPO</a:t>
             </a:r>
           </a:p>
         </p:txBody>
@@ -11192,7 +11192,7 @@
                 </a:solidFill>
                 <a:latin typeface="Aptos"/>
               </a:rPr>
-              <a:t>Julkinen riippumaton evidenssikooste · 2026.07.22-8 · 2026-07-22 · Lähteet: WIPO licensing; IP Finance</a:t>
+              <a:t>Julkinen riippumaton evidenssikooste · 2026.07.22-9 · 2026-07-22 · Lähteet: WIPO licensing; IP Finance</a:t>
             </a:r>
           </a:p>
         </p:txBody>
@@ -11672,7 +11672,7 @@
                 </a:solidFill>
                 <a:latin typeface="Aptos"/>
               </a:rPr>
-              <a:t>Julkinen riippumaton evidenssikooste · 2026.07.22-8 · 2026-07-22 · Lähteet: Evidence Register; EPO</a:t>
+              <a:t>Julkinen riippumaton evidenssikooste · 2026.07.22-9 · 2026-07-22 · Lähteet: Evidence Register; EPO</a:t>
             </a:r>
           </a:p>
         </p:txBody>
@@ -12352,7 +12352,7 @@
                 </a:solidFill>
                 <a:latin typeface="Aptos"/>
               </a:rPr>
-              <a:t>Julkinen riippumaton evidenssikooste · 2026.07.22-8 · 2026-07-22 · Lähteet: EP3032975B2; 7 O 3341/24</a:t>
+              <a:t>Julkinen riippumaton evidenssikooste · 2026.07.22-9 · 2026-07-22 · Lähteet: EP3032975B2; 7 O 3341/24</a:t>
             </a:r>
           </a:p>
         </p:txBody>
@@ -13243,7 +13243,7 @@
                 </a:solidFill>
                 <a:latin typeface="Aptos"/>
               </a:rPr>
-              <a:t>Julkinen riippumaton evidenssikooste · 2026.07.22-8 · 2026-07-22 · Lähteet: WIPO dispute resolution; EPO IPscore</a:t>
+              <a:t>Julkinen riippumaton evidenssikooste · 2026.07.22-9 · 2026-07-22 · Lähteet: WIPO dispute resolution; EPO IPscore</a:t>
             </a:r>
           </a:p>
         </p:txBody>
@@ -14134,7 +14134,7 @@
                 </a:solidFill>
                 <a:latin typeface="Aptos"/>
               </a:rPr>
-              <a:t>Julkinen riippumaton evidenssikooste · 2026.07.22-8 · 2026-07-22 · Lähteet: WIPO licensing; IP Finance; TPLF mapping</a:t>
+              <a:t>Julkinen riippumaton evidenssikooste · 2026.07.22-9 · 2026-07-22 · Lähteet: WIPO licensing; IP Finance; TPLF mapping</a:t>
             </a:r>
           </a:p>
         </p:txBody>
@@ -14888,7 +14888,7 @@
                 </a:solidFill>
                 <a:latin typeface="Aptos"/>
               </a:rPr>
-              <a:t>Julkinen riippumaton evidenssikooste · 2026.07.22-8 · 2026-07-22 · Lähteet: Evidence Register; WIPO valuation</a:t>
+              <a:t>Julkinen riippumaton evidenssikooste · 2026.07.22-9 · 2026-07-22 · Lähteet: Evidence Register; WIPO valuation</a:t>
             </a:r>
           </a:p>
         </p:txBody>
@@ -15716,7 +15716,7 @@
                 </a:solidFill>
                 <a:latin typeface="Aptos"/>
               </a:rPr>
-              <a:t>Julkinen riippumaton evidenssikooste · 2026.07.22-8 · 2026-07-22 · Lähteet: WIPO valuation</a:t>
+              <a:t>Julkinen riippumaton evidenssikooste · 2026.07.22-9 · 2026-07-22 · Lähteet: WIPO valuation</a:t>
             </a:r>
           </a:p>
         </p:txBody>
@@ -16615,7 +16615,7 @@
                 </a:solidFill>
                 <a:latin typeface="Aptos"/>
               </a:rPr>
-              <a:t>Julkinen riippumaton evidenssikooste · 2026.07.22-8 · 2026-07-22 · Lähteet: Evidence Register</a:t>
+              <a:t>Julkinen riippumaton evidenssikooste · 2026.07.22-9 · 2026-07-22 · Lähteet: Evidence Register</a:t>
             </a:r>
           </a:p>
         </p:txBody>
@@ -17369,7 +17369,7 @@
                 </a:solidFill>
                 <a:latin typeface="Aptos"/>
               </a:rPr>
-              <a:t>Julkinen riippumaton evidenssikooste · 2026.07.22-8 · 2026-07-22 · Lähteet: Evidence Register</a:t>
+              <a:t>Julkinen riippumaton evidenssikooste · 2026.07.22-9 · 2026-07-22 · Lähteet: Evidence Register</a:t>
             </a:r>
           </a:p>
         </p:txBody>
@@ -18197,7 +18197,7 @@
                 </a:solidFill>
                 <a:latin typeface="Aptos"/>
               </a:rPr>
-              <a:t>Julkinen riippumaton evidenssikooste · 2026.07.22-8 · 2026-07-22 · Lähteet: Evidence Register; changelog</a:t>
+              <a:t>Julkinen riippumaton evidenssikooste · 2026.07.22-9 · 2026-07-22 · Lähteet: Evidence Register; changelog</a:t>
             </a:r>
           </a:p>
         </p:txBody>
@@ -19088,7 +19088,7 @@
                 </a:solidFill>
                 <a:latin typeface="Aptos"/>
               </a:rPr>
-              <a:t>Julkinen riippumaton evidenssikooste · 2026.07.22-8 · 2026-07-22 · Lähteet: EPO; 8 Ni 18/24 (EP); 7 O 3341/24</a:t>
+              <a:t>Julkinen riippumaton evidenssikooste · 2026.07.22-9 · 2026-07-22 · Lähteet: EPO; 8 Ni 18/24 (EP); 7 O 3341/24</a:t>
             </a:r>
           </a:p>
         </p:txBody>
@@ -19711,7 +19711,7 @@
                 </a:solidFill>
                 <a:latin typeface="Aptos"/>
               </a:rPr>
-              <a:t>Versio 2026.07.22-8 · 2026-07-22 · 30 / 30</a:t>
+              <a:t>Versio 2026.07.22-9 · 2026-07-22 · 30 / 30</a:t>
             </a:r>
           </a:p>
         </p:txBody>
@@ -19924,7 +19924,7 @@
                 </a:solidFill>
                 <a:latin typeface="Aptos"/>
               </a:rPr>
-              <a:t>Julkinen riippumaton evidenssikooste · 2026.07.22-8 · 2026-07-22 · Lähteet: Evidence Register; WIPO</a:t>
+              <a:t>Julkinen riippumaton evidenssikooste · 2026.07.22-9 · 2026-07-22 · Lähteet: Evidence Register; WIPO</a:t>
             </a:r>
           </a:p>
         </p:txBody>
@@ -20404,7 +20404,7 @@
                 </a:solidFill>
                 <a:latin typeface="Aptos"/>
               </a:rPr>
-              <a:t>Julkinen riippumaton evidenssikooste · 2026.07.22-8 · 2026-07-22 · Lähteet: EP3032975B2</a:t>
+              <a:t>Julkinen riippumaton evidenssikooste · 2026.07.22-9 · 2026-07-22 · Lähteet: EP3032975B2</a:t>
             </a:r>
           </a:p>
         </p:txBody>
@@ -20884,7 +20884,7 @@
                 </a:solidFill>
                 <a:latin typeface="Aptos"/>
               </a:rPr>
-              <a:t>Julkinen riippumaton evidenssikooste · 2026.07.22-8 · 2026-07-22 · Lähteet: EP3032975B2</a:t>
+              <a:t>Julkinen riippumaton evidenssikooste · 2026.07.22-9 · 2026-07-22 · Lähteet: EP3032975B2</a:t>
             </a:r>
           </a:p>
         </p:txBody>
@@ -21638,7 +21638,7 @@
                 </a:solidFill>
                 <a:latin typeface="Aptos"/>
               </a:rPr>
-              <a:t>Julkinen riippumaton evidenssikooste · 2026.07.22-8 · 2026-07-22 · Lähteet: EPO Register; B2</a:t>
+              <a:t>Julkinen riippumaton evidenssikooste · 2026.07.22-9 · 2026-07-22 · Lähteet: EPO Register; B2</a:t>
             </a:r>
           </a:p>
         </p:txBody>
@@ -22389,7 +22389,7 @@
                 </a:solidFill>
                 <a:latin typeface="Aptos"/>
               </a:rPr>
-              <a:t>Julkinen riippumaton evidenssikooste · 2026.07.22-8 · 2026-07-22 · Lähteet: EPO family; kansalliset rekisterit</a:t>
+              <a:t>Julkinen riippumaton evidenssikooste · 2026.07.22-9 · 2026-07-22 · Lähteet: EPO family; kansalliset rekisterit</a:t>
             </a:r>
           </a:p>
         </p:txBody>
@@ -23257,7 +23257,7 @@
                 </a:solidFill>
                 <a:latin typeface="Aptos"/>
               </a:rPr>
-              <a:t>Julkinen riippumaton evidenssikooste · 2026.07.22-8 · 2026-07-22 · Lähteet: Viralliset tuomiot: 8 Ni 18/24 (EP); 7 O 3341/24</a:t>
+              <a:t>Julkinen riippumaton evidenssikooste · 2026.07.22-9 · 2026-07-22 · Lähteet: Viralliset tuomiot: 8 Ni 18/24 (EP); 7 O 3341/24</a:t>
             </a:r>
           </a:p>
         </p:txBody>

--- a/site/downloads/pixan-bank-deck-large-fi.pptx
+++ b/site/downloads/pixan-bank-deck-large-fi.pptx
@@ -3386,7 +3386,7 @@
                 </a:solidFill>
                 <a:latin typeface="Aptos"/>
               </a:rPr>
-              <a:t>2026.07.22-9</a:t>
+              <a:t>2026.07.23-10</a:t>
             </a:r>
           </a:p>
         </p:txBody>
@@ -3740,7 +3740,7 @@
                 </a:solidFill>
                 <a:latin typeface="Aptos"/>
               </a:rPr>
-              <a:t>Julkinen riippumaton evidenssikooste · 2026.07.22-9 · 2026-07-22 · Lähteet: RPX; CNIPA guidance; EPO family</a:t>
+              <a:t>Julkinen riippumaton evidenssikooste · 2026.07.23-10 · 2026-07-22 · Lähteet: RPX; CNIPA guidance; EPO family</a:t>
             </a:r>
           </a:p>
         </p:txBody>
@@ -4220,7 +4220,7 @@
                 </a:solidFill>
                 <a:latin typeface="Aptos"/>
               </a:rPr>
-              <a:t>Julkinen riippumaton evidenssikooste · 2026.07.22-9 · 2026-07-22 · Lähteet: IP Australia; PRH; EPO; EPO / UPC; USPTO</a:t>
+              <a:t>Julkinen riippumaton evidenssikooste · 2026.07.23-10 · 2026-07-22 · Lähteet: IP Australia; PRH; EPO; EPO / UPC; USPTO</a:t>
             </a:r>
           </a:p>
         </p:txBody>
@@ -4900,7 +4900,7 @@
                 </a:solidFill>
                 <a:latin typeface="Aptos"/>
               </a:rPr>
-              <a:t>Julkinen riippumaton evidenssikooste · 2026.07.22-9 · 2026-07-22 · Lähteet: UN; Atlas</a:t>
+              <a:t>Julkinen riippumaton evidenssikooste · 2026.07.23-10 · 2026-07-22 · Lähteet: UN; Atlas</a:t>
             </a:r>
           </a:p>
         </p:txBody>
@@ -5768,7 +5768,7 @@
                 </a:solidFill>
                 <a:latin typeface="Aptos"/>
               </a:rPr>
-              <a:t>Julkinen riippumaton evidenssikooste · 2026.07.22-9 · 2026-07-22 · Lähteet: Health Canada; Destatis; Vero; Sejm; Ruotsin hallitus</a:t>
+              <a:t>Julkinen riippumaton evidenssikooste · 2026.07.23-10 · 2026-07-22 · Lähteet: Health Canada; Destatis; Vero; Sejm; Ruotsin hallitus</a:t>
             </a:r>
           </a:p>
         </p:txBody>
@@ -6522,7 +6522,7 @@
                 </a:solidFill>
                 <a:latin typeface="Aptos"/>
               </a:rPr>
-              <a:t>Julkinen riippumaton evidenssikooste · 2026.07.22-9 · 2026-07-22 · Lähteet: Health Canada 2024</a:t>
+              <a:t>Julkinen riippumaton evidenssikooste · 2026.07.23-10 · 2026-07-22 · Lähteet: Health Canada 2024</a:t>
             </a:r>
           </a:p>
         </p:txBody>
@@ -7273,7 +7273,7 @@
                 </a:solidFill>
                 <a:latin typeface="Aptos"/>
               </a:rPr>
-              <a:t>Julkinen riippumaton evidenssikooste · 2026.07.22-9 · 2026-07-22 · Lähteet: Destatis</a:t>
+              <a:t>Julkinen riippumaton evidenssikooste · 2026.07.23-10 · 2026-07-22 · Lähteet: Destatis</a:t>
             </a:r>
           </a:p>
         </p:txBody>
@@ -7976,7 +7976,7 @@
                 </a:solidFill>
                 <a:latin typeface="Aptos"/>
               </a:rPr>
-              <a:t>Julkinen riippumaton evidenssikooste · 2026.07.22-9 · 2026-07-22 · Lähteet: Destatis; inTaste.de</a:t>
+              <a:t>Julkinen riippumaton evidenssikooste · 2026.07.23-10 · 2026-07-22 · Lähteet: Destatis; inTaste.de</a:t>
             </a:r>
           </a:p>
         </p:txBody>
@@ -8727,7 +8727,7 @@
                 </a:solidFill>
                 <a:latin typeface="Aptos"/>
               </a:rPr>
-              <a:t>Julkinen riippumaton evidenssikooste · 2026.07.22-9 · 2026-07-22 · Lähteet: IMARC; GVR; Fortune</a:t>
+              <a:t>Julkinen riippumaton evidenssikooste · 2026.07.23-10 · 2026-07-22 · Lähteet: IMARC; GVR; Fortune</a:t>
             </a:r>
           </a:p>
         </p:txBody>
@@ -9478,7 +9478,7 @@
                 </a:solidFill>
                 <a:latin typeface="Aptos"/>
               </a:rPr>
-              <a:t>Julkinen riippumaton evidenssikooste · 2026.07.22-9 · 2026-07-22 · Lähteet: Market-values modelReadiness</a:t>
+              <a:t>Julkinen riippumaton evidenssikooste · 2026.07.23-10 · 2026-07-22 · Lähteet: Market-values modelReadiness</a:t>
             </a:r>
           </a:p>
         </p:txBody>
@@ -9958,7 +9958,7 @@
                 </a:solidFill>
                 <a:latin typeface="Aptos"/>
               </a:rPr>
-              <a:t>Julkinen riippumaton evidenssikooste · 2026.07.22-9 · 2026-07-22 · Lähteet: WIPO valuation; Evidence Register</a:t>
+              <a:t>Julkinen riippumaton evidenssikooste · 2026.07.23-10 · 2026-07-22 · Lähteet: WIPO valuation; Evidence Register</a:t>
             </a:r>
           </a:p>
         </p:txBody>
@@ -10712,7 +10712,7 @@
                 </a:solidFill>
                 <a:latin typeface="Aptos"/>
               </a:rPr>
-              <a:t>Julkinen riippumaton evidenssikooste · 2026.07.22-9 · 2026-07-22 · Lähteet: EPO; Saksa — viralliset tuomiot; WIPO</a:t>
+              <a:t>Julkinen riippumaton evidenssikooste · 2026.07.23-10 · 2026-07-22 · Lähteet: EPO; Saksa — viralliset tuomiot; WIPO</a:t>
             </a:r>
           </a:p>
         </p:txBody>
@@ -11192,7 +11192,7 @@
                 </a:solidFill>
                 <a:latin typeface="Aptos"/>
               </a:rPr>
-              <a:t>Julkinen riippumaton evidenssikooste · 2026.07.22-9 · 2026-07-22 · Lähteet: WIPO licensing; IP Finance</a:t>
+              <a:t>Julkinen riippumaton evidenssikooste · 2026.07.23-10 · 2026-07-22 · Lähteet: WIPO licensing; IP Finance</a:t>
             </a:r>
           </a:p>
         </p:txBody>
@@ -11672,7 +11672,7 @@
                 </a:solidFill>
                 <a:latin typeface="Aptos"/>
               </a:rPr>
-              <a:t>Julkinen riippumaton evidenssikooste · 2026.07.22-9 · 2026-07-22 · Lähteet: Evidence Register; EPO</a:t>
+              <a:t>Julkinen riippumaton evidenssikooste · 2026.07.23-10 · 2026-07-22 · Lähteet: Evidence Register; EPO</a:t>
             </a:r>
           </a:p>
         </p:txBody>
@@ -12352,7 +12352,7 @@
                 </a:solidFill>
                 <a:latin typeface="Aptos"/>
               </a:rPr>
-              <a:t>Julkinen riippumaton evidenssikooste · 2026.07.22-9 · 2026-07-22 · Lähteet: EP3032975B2; 7 O 3341/24</a:t>
+              <a:t>Julkinen riippumaton evidenssikooste · 2026.07.23-10 · 2026-07-22 · Lähteet: EP3032975B2; 7 O 3341/24</a:t>
             </a:r>
           </a:p>
         </p:txBody>
@@ -13243,7 +13243,7 @@
                 </a:solidFill>
                 <a:latin typeface="Aptos"/>
               </a:rPr>
-              <a:t>Julkinen riippumaton evidenssikooste · 2026.07.22-9 · 2026-07-22 · Lähteet: WIPO dispute resolution; EPO IPscore</a:t>
+              <a:t>Julkinen riippumaton evidenssikooste · 2026.07.23-10 · 2026-07-22 · Lähteet: WIPO dispute resolution; EPO IPscore</a:t>
             </a:r>
           </a:p>
         </p:txBody>
@@ -14134,7 +14134,7 @@
                 </a:solidFill>
                 <a:latin typeface="Aptos"/>
               </a:rPr>
-              <a:t>Julkinen riippumaton evidenssikooste · 2026.07.22-9 · 2026-07-22 · Lähteet: WIPO licensing; IP Finance; TPLF mapping</a:t>
+              <a:t>Julkinen riippumaton evidenssikooste · 2026.07.23-10 · 2026-07-22 · Lähteet: WIPO licensing; IP Finance; TPLF mapping</a:t>
             </a:r>
           </a:p>
         </p:txBody>
@@ -14888,7 +14888,7 @@
                 </a:solidFill>
                 <a:latin typeface="Aptos"/>
               </a:rPr>
-              <a:t>Julkinen riippumaton evidenssikooste · 2026.07.22-9 · 2026-07-22 · Lähteet: Evidence Register; WIPO valuation</a:t>
+              <a:t>Julkinen riippumaton evidenssikooste · 2026.07.23-10 · 2026-07-22 · Lähteet: Evidence Register; WIPO valuation</a:t>
             </a:r>
           </a:p>
         </p:txBody>
@@ -15716,7 +15716,7 @@
                 </a:solidFill>
                 <a:latin typeface="Aptos"/>
               </a:rPr>
-              <a:t>Julkinen riippumaton evidenssikooste · 2026.07.22-9 · 2026-07-22 · Lähteet: WIPO valuation</a:t>
+              <a:t>Julkinen riippumaton evidenssikooste · 2026.07.23-10 · 2026-07-22 · Lähteet: WIPO valuation</a:t>
             </a:r>
           </a:p>
         </p:txBody>
@@ -16615,7 +16615,7 @@
                 </a:solidFill>
                 <a:latin typeface="Aptos"/>
               </a:rPr>
-              <a:t>Julkinen riippumaton evidenssikooste · 2026.07.22-9 · 2026-07-22 · Lähteet: Evidence Register</a:t>
+              <a:t>Julkinen riippumaton evidenssikooste · 2026.07.23-10 · 2026-07-22 · Lähteet: Evidence Register</a:t>
             </a:r>
           </a:p>
         </p:txBody>
@@ -17369,7 +17369,7 @@
                 </a:solidFill>
                 <a:latin typeface="Aptos"/>
               </a:rPr>
-              <a:t>Julkinen riippumaton evidenssikooste · 2026.07.22-9 · 2026-07-22 · Lähteet: Evidence Register</a:t>
+              <a:t>Julkinen riippumaton evidenssikooste · 2026.07.23-10 · 2026-07-22 · Lähteet: Evidence Register</a:t>
             </a:r>
           </a:p>
         </p:txBody>
@@ -18197,7 +18197,7 @@
                 </a:solidFill>
                 <a:latin typeface="Aptos"/>
               </a:rPr>
-              <a:t>Julkinen riippumaton evidenssikooste · 2026.07.22-9 · 2026-07-22 · Lähteet: Evidence Register; changelog</a:t>
+              <a:t>Julkinen riippumaton evidenssikooste · 2026.07.23-10 · 2026-07-22 · Lähteet: Evidence Register; changelog</a:t>
             </a:r>
           </a:p>
         </p:txBody>
@@ -19088,7 +19088,7 @@
                 </a:solidFill>
                 <a:latin typeface="Aptos"/>
               </a:rPr>
-              <a:t>Julkinen riippumaton evidenssikooste · 2026.07.22-9 · 2026-07-22 · Lähteet: EPO; 8 Ni 18/24 (EP); 7 O 3341/24</a:t>
+              <a:t>Julkinen riippumaton evidenssikooste · 2026.07.23-10 · 2026-07-22 · Lähteet: EPO; 8 Ni 18/24 (EP); 7 O 3341/24</a:t>
             </a:r>
           </a:p>
         </p:txBody>
@@ -19711,7 +19711,7 @@
                 </a:solidFill>
                 <a:latin typeface="Aptos"/>
               </a:rPr>
-              <a:t>Versio 2026.07.22-9 · 2026-07-22 · 30 / 30</a:t>
+              <a:t>Versio 2026.07.23-10 · 2026-07-22 · 30 / 30</a:t>
             </a:r>
           </a:p>
         </p:txBody>
@@ -19924,7 +19924,7 @@
                 </a:solidFill>
                 <a:latin typeface="Aptos"/>
               </a:rPr>
-              <a:t>Julkinen riippumaton evidenssikooste · 2026.07.22-9 · 2026-07-22 · Lähteet: Evidence Register; WIPO</a:t>
+              <a:t>Julkinen riippumaton evidenssikooste · 2026.07.23-10 · 2026-07-22 · Lähteet: Evidence Register; WIPO</a:t>
             </a:r>
           </a:p>
         </p:txBody>
@@ -20404,7 +20404,7 @@
                 </a:solidFill>
                 <a:latin typeface="Aptos"/>
               </a:rPr>
-              <a:t>Julkinen riippumaton evidenssikooste · 2026.07.22-9 · 2026-07-22 · Lähteet: EP3032975B2</a:t>
+              <a:t>Julkinen riippumaton evidenssikooste · 2026.07.23-10 · 2026-07-22 · Lähteet: EP3032975B2</a:t>
             </a:r>
           </a:p>
         </p:txBody>
@@ -20884,7 +20884,7 @@
                 </a:solidFill>
                 <a:latin typeface="Aptos"/>
               </a:rPr>
-              <a:t>Julkinen riippumaton evidenssikooste · 2026.07.22-9 · 2026-07-22 · Lähteet: EP3032975B2</a:t>
+              <a:t>Julkinen riippumaton evidenssikooste · 2026.07.23-10 · 2026-07-22 · Lähteet: EP3032975B2</a:t>
             </a:r>
           </a:p>
         </p:txBody>
@@ -21638,7 +21638,7 @@
                 </a:solidFill>
                 <a:latin typeface="Aptos"/>
               </a:rPr>
-              <a:t>Julkinen riippumaton evidenssikooste · 2026.07.22-9 · 2026-07-22 · Lähteet: EPO Register; B2</a:t>
+              <a:t>Julkinen riippumaton evidenssikooste · 2026.07.23-10 · 2026-07-22 · Lähteet: EPO Register; B2</a:t>
             </a:r>
           </a:p>
         </p:txBody>
@@ -22389,7 +22389,7 @@
                 </a:solidFill>
                 <a:latin typeface="Aptos"/>
               </a:rPr>
-              <a:t>Julkinen riippumaton evidenssikooste · 2026.07.22-9 · 2026-07-22 · Lähteet: EPO family; kansalliset rekisterit</a:t>
+              <a:t>Julkinen riippumaton evidenssikooste · 2026.07.23-10 · 2026-07-22 · Lähteet: EPO family; kansalliset rekisterit</a:t>
             </a:r>
           </a:p>
         </p:txBody>
@@ -23257,7 +23257,7 @@
                 </a:solidFill>
                 <a:latin typeface="Aptos"/>
               </a:rPr>
-              <a:t>Julkinen riippumaton evidenssikooste · 2026.07.22-9 · 2026-07-22 · Lähteet: Viralliset tuomiot: 8 Ni 18/24 (EP); 7 O 3341/24</a:t>
+              <a:t>Julkinen riippumaton evidenssikooste · 2026.07.23-10 · 2026-07-22 · Lähteet: Viralliset tuomiot: 8 Ni 18/24 (EP); 7 O 3341/24</a:t>
             </a:r>
           </a:p>
         </p:txBody>

--- a/site/downloads/pixan-bank-deck-large-fi.pptx
+++ b/site/downloads/pixan-bank-deck-large-fi.pptx
@@ -3386,7 +3386,7 @@
                 </a:solidFill>
                 <a:latin typeface="Aptos"/>
               </a:rPr>
-              <a:t>2026.07.23-10</a:t>
+              <a:t>2026.07.23-11</a:t>
             </a:r>
           </a:p>
         </p:txBody>
@@ -3740,7 +3740,7 @@
                 </a:solidFill>
                 <a:latin typeface="Aptos"/>
               </a:rPr>
-              <a:t>Julkinen riippumaton evidenssikooste · 2026.07.23-10 · 2026-07-22 · Lähteet: RPX; CNIPA guidance; EPO family</a:t>
+              <a:t>Julkinen riippumaton evidenssikooste · 2026.07.23-11 · 2026-07-22 · Lähteet: RPX; CNIPA guidance; EPO family</a:t>
             </a:r>
           </a:p>
         </p:txBody>
@@ -4220,7 +4220,7 @@
                 </a:solidFill>
                 <a:latin typeface="Aptos"/>
               </a:rPr>
-              <a:t>Julkinen riippumaton evidenssikooste · 2026.07.23-10 · 2026-07-22 · Lähteet: IP Australia; PRH; EPO; EPO / UPC; USPTO</a:t>
+              <a:t>Julkinen riippumaton evidenssikooste · 2026.07.23-11 · 2026-07-22 · Lähteet: IP Australia; PRH; EPO; EPO / UPC; USPTO</a:t>
             </a:r>
           </a:p>
         </p:txBody>
@@ -4900,7 +4900,7 @@
                 </a:solidFill>
                 <a:latin typeface="Aptos"/>
               </a:rPr>
-              <a:t>Julkinen riippumaton evidenssikooste · 2026.07.23-10 · 2026-07-22 · Lähteet: UN; Atlas</a:t>
+              <a:t>Julkinen riippumaton evidenssikooste · 2026.07.23-11 · 2026-07-22 · Lähteet: UN; Atlas</a:t>
             </a:r>
           </a:p>
         </p:txBody>
@@ -5768,7 +5768,7 @@
                 </a:solidFill>
                 <a:latin typeface="Aptos"/>
               </a:rPr>
-              <a:t>Julkinen riippumaton evidenssikooste · 2026.07.23-10 · 2026-07-22 · Lähteet: Health Canada; Destatis; Vero; Sejm; Ruotsin hallitus</a:t>
+              <a:t>Julkinen riippumaton evidenssikooste · 2026.07.23-11 · 2026-07-22 · Lähteet: Health Canada; Destatis; Vero; Sejm; Ruotsin hallitus</a:t>
             </a:r>
           </a:p>
         </p:txBody>
@@ -6522,7 +6522,7 @@
                 </a:solidFill>
                 <a:latin typeface="Aptos"/>
               </a:rPr>
-              <a:t>Julkinen riippumaton evidenssikooste · 2026.07.23-10 · 2026-07-22 · Lähteet: Health Canada 2024</a:t>
+              <a:t>Julkinen riippumaton evidenssikooste · 2026.07.23-11 · 2026-07-22 · Lähteet: Health Canada 2024</a:t>
             </a:r>
           </a:p>
         </p:txBody>
@@ -7273,7 +7273,7 @@
                 </a:solidFill>
                 <a:latin typeface="Aptos"/>
               </a:rPr>
-              <a:t>Julkinen riippumaton evidenssikooste · 2026.07.23-10 · 2026-07-22 · Lähteet: Destatis</a:t>
+              <a:t>Julkinen riippumaton evidenssikooste · 2026.07.23-11 · 2026-07-22 · Lähteet: Destatis</a:t>
             </a:r>
           </a:p>
         </p:txBody>
@@ -7976,7 +7976,7 @@
                 </a:solidFill>
                 <a:latin typeface="Aptos"/>
               </a:rPr>
-              <a:t>Julkinen riippumaton evidenssikooste · 2026.07.23-10 · 2026-07-22 · Lähteet: Destatis; inTaste.de</a:t>
+              <a:t>Julkinen riippumaton evidenssikooste · 2026.07.23-11 · 2026-07-22 · Lähteet: Destatis; inTaste.de</a:t>
             </a:r>
           </a:p>
         </p:txBody>
@@ -8727,7 +8727,7 @@
                 </a:solidFill>
                 <a:latin typeface="Aptos"/>
               </a:rPr>
-              <a:t>Julkinen riippumaton evidenssikooste · 2026.07.23-10 · 2026-07-22 · Lähteet: IMARC; GVR; Fortune</a:t>
+              <a:t>Julkinen riippumaton evidenssikooste · 2026.07.23-11 · 2026-07-22 · Lähteet: IMARC; GVR; Fortune</a:t>
             </a:r>
           </a:p>
         </p:txBody>
@@ -9478,7 +9478,7 @@
                 </a:solidFill>
                 <a:latin typeface="Aptos"/>
               </a:rPr>
-              <a:t>Julkinen riippumaton evidenssikooste · 2026.07.23-10 · 2026-07-22 · Lähteet: Market-values modelReadiness</a:t>
+              <a:t>Julkinen riippumaton evidenssikooste · 2026.07.23-11 · 2026-07-22 · Lähteet: Market-values modelReadiness</a:t>
             </a:r>
           </a:p>
         </p:txBody>
@@ -9958,7 +9958,7 @@
                 </a:solidFill>
                 <a:latin typeface="Aptos"/>
               </a:rPr>
-              <a:t>Julkinen riippumaton evidenssikooste · 2026.07.23-10 · 2026-07-22 · Lähteet: WIPO valuation; Evidence Register</a:t>
+              <a:t>Julkinen riippumaton evidenssikooste · 2026.07.23-11 · 2026-07-22 · Lähteet: WIPO valuation; Evidence Register</a:t>
             </a:r>
           </a:p>
         </p:txBody>
@@ -10712,7 +10712,7 @@
                 </a:solidFill>
                 <a:latin typeface="Aptos"/>
               </a:rPr>
-              <a:t>Julkinen riippumaton evidenssikooste · 2026.07.23-10 · 2026-07-22 · Lähteet: EPO; Saksa — viralliset tuomiot; WIPO</a:t>
+              <a:t>Julkinen riippumaton evidenssikooste · 2026.07.23-11 · 2026-07-22 · Lähteet: EPO; Saksa — viralliset tuomiot; WIPO</a:t>
             </a:r>
           </a:p>
         </p:txBody>
@@ -11192,7 +11192,7 @@
                 </a:solidFill>
                 <a:latin typeface="Aptos"/>
               </a:rPr>
-              <a:t>Julkinen riippumaton evidenssikooste · 2026.07.23-10 · 2026-07-22 · Lähteet: WIPO licensing; IP Finance</a:t>
+              <a:t>Julkinen riippumaton evidenssikooste · 2026.07.23-11 · 2026-07-22 · Lähteet: WIPO licensing; IP Finance</a:t>
             </a:r>
           </a:p>
         </p:txBody>
@@ -11672,7 +11672,7 @@
                 </a:solidFill>
                 <a:latin typeface="Aptos"/>
               </a:rPr>
-              <a:t>Julkinen riippumaton evidenssikooste · 2026.07.23-10 · 2026-07-22 · Lähteet: Evidence Register; EPO</a:t>
+              <a:t>Julkinen riippumaton evidenssikooste · 2026.07.23-11 · 2026-07-22 · Lähteet: Evidence Register; EPO</a:t>
             </a:r>
           </a:p>
         </p:txBody>
@@ -12352,7 +12352,7 @@
                 </a:solidFill>
                 <a:latin typeface="Aptos"/>
               </a:rPr>
-              <a:t>Julkinen riippumaton evidenssikooste · 2026.07.23-10 · 2026-07-22 · Lähteet: EP3032975B2; 7 O 3341/24</a:t>
+              <a:t>Julkinen riippumaton evidenssikooste · 2026.07.23-11 · 2026-07-22 · Lähteet: EP3032975B2; 7 O 3341/24</a:t>
             </a:r>
           </a:p>
         </p:txBody>
@@ -13243,7 +13243,7 @@
                 </a:solidFill>
                 <a:latin typeface="Aptos"/>
               </a:rPr>
-              <a:t>Julkinen riippumaton evidenssikooste · 2026.07.23-10 · 2026-07-22 · Lähteet: WIPO dispute resolution; EPO IPscore</a:t>
+              <a:t>Julkinen riippumaton evidenssikooste · 2026.07.23-11 · 2026-07-22 · Lähteet: WIPO dispute resolution; EPO IPscore</a:t>
             </a:r>
           </a:p>
         </p:txBody>
@@ -14134,7 +14134,7 @@
                 </a:solidFill>
                 <a:latin typeface="Aptos"/>
               </a:rPr>
-              <a:t>Julkinen riippumaton evidenssikooste · 2026.07.23-10 · 2026-07-22 · Lähteet: WIPO licensing; IP Finance; TPLF mapping</a:t>
+              <a:t>Julkinen riippumaton evidenssikooste · 2026.07.23-11 · 2026-07-22 · Lähteet: WIPO licensing; IP Finance; TPLF mapping</a:t>
             </a:r>
           </a:p>
         </p:txBody>
@@ -14888,7 +14888,7 @@
                 </a:solidFill>
                 <a:latin typeface="Aptos"/>
               </a:rPr>
-              <a:t>Julkinen riippumaton evidenssikooste · 2026.07.23-10 · 2026-07-22 · Lähteet: Evidence Register; WIPO valuation</a:t>
+              <a:t>Julkinen riippumaton evidenssikooste · 2026.07.23-11 · 2026-07-22 · Lähteet: Evidence Register; WIPO valuation</a:t>
             </a:r>
           </a:p>
         </p:txBody>
@@ -15716,7 +15716,7 @@
                 </a:solidFill>
                 <a:latin typeface="Aptos"/>
               </a:rPr>
-              <a:t>Julkinen riippumaton evidenssikooste · 2026.07.23-10 · 2026-07-22 · Lähteet: WIPO valuation</a:t>
+              <a:t>Julkinen riippumaton evidenssikooste · 2026.07.23-11 · 2026-07-22 · Lähteet: WIPO valuation</a:t>
             </a:r>
           </a:p>
         </p:txBody>
@@ -16615,7 +16615,7 @@
                 </a:solidFill>
                 <a:latin typeface="Aptos"/>
               </a:rPr>
-              <a:t>Julkinen riippumaton evidenssikooste · 2026.07.23-10 · 2026-07-22 · Lähteet: Evidence Register</a:t>
+              <a:t>Julkinen riippumaton evidenssikooste · 2026.07.23-11 · 2026-07-22 · Lähteet: Evidence Register</a:t>
             </a:r>
           </a:p>
         </p:txBody>
@@ -17369,7 +17369,7 @@
                 </a:solidFill>
                 <a:latin typeface="Aptos"/>
               </a:rPr>
-              <a:t>Julkinen riippumaton evidenssikooste · 2026.07.23-10 · 2026-07-22 · Lähteet: Evidence Register</a:t>
+              <a:t>Julkinen riippumaton evidenssikooste · 2026.07.23-11 · 2026-07-22 · Lähteet: Evidence Register</a:t>
             </a:r>
           </a:p>
         </p:txBody>
@@ -18197,7 +18197,7 @@
                 </a:solidFill>
                 <a:latin typeface="Aptos"/>
               </a:rPr>
-              <a:t>Julkinen riippumaton evidenssikooste · 2026.07.23-10 · 2026-07-22 · Lähteet: Evidence Register; changelog</a:t>
+              <a:t>Julkinen riippumaton evidenssikooste · 2026.07.23-11 · 2026-07-22 · Lähteet: Evidence Register; changelog</a:t>
             </a:r>
           </a:p>
         </p:txBody>
@@ -19088,7 +19088,7 @@
                 </a:solidFill>
                 <a:latin typeface="Aptos"/>
               </a:rPr>
-              <a:t>Julkinen riippumaton evidenssikooste · 2026.07.23-10 · 2026-07-22 · Lähteet: EPO; 8 Ni 18/24 (EP); 7 O 3341/24</a:t>
+              <a:t>Julkinen riippumaton evidenssikooste · 2026.07.23-11 · 2026-07-22 · Lähteet: EPO; 8 Ni 18/24 (EP); 7 O 3341/24</a:t>
             </a:r>
           </a:p>
         </p:txBody>
@@ -19711,7 +19711,7 @@
                 </a:solidFill>
                 <a:latin typeface="Aptos"/>
               </a:rPr>
-              <a:t>Versio 2026.07.23-10 · 2026-07-22 · 30 / 30</a:t>
+              <a:t>Versio 2026.07.23-11 · 2026-07-22 · 30 / 30</a:t>
             </a:r>
           </a:p>
         </p:txBody>
@@ -19924,7 +19924,7 @@
                 </a:solidFill>
                 <a:latin typeface="Aptos"/>
               </a:rPr>
-              <a:t>Julkinen riippumaton evidenssikooste · 2026.07.23-10 · 2026-07-22 · Lähteet: Evidence Register; WIPO</a:t>
+              <a:t>Julkinen riippumaton evidenssikooste · 2026.07.23-11 · 2026-07-22 · Lähteet: Evidence Register; WIPO</a:t>
             </a:r>
           </a:p>
         </p:txBody>
@@ -20404,7 +20404,7 @@
                 </a:solidFill>
                 <a:latin typeface="Aptos"/>
               </a:rPr>
-              <a:t>Julkinen riippumaton evidenssikooste · 2026.07.23-10 · 2026-07-22 · Lähteet: EP3032975B2</a:t>
+              <a:t>Julkinen riippumaton evidenssikooste · 2026.07.23-11 · 2026-07-22 · Lähteet: EP3032975B2</a:t>
             </a:r>
           </a:p>
         </p:txBody>
@@ -20884,7 +20884,7 @@
                 </a:solidFill>
                 <a:latin typeface="Aptos"/>
               </a:rPr>
-              <a:t>Julkinen riippumaton evidenssikooste · 2026.07.23-10 · 2026-07-22 · Lähteet: EP3032975B2</a:t>
+              <a:t>Julkinen riippumaton evidenssikooste · 2026.07.23-11 · 2026-07-22 · Lähteet: EP3032975B2</a:t>
             </a:r>
           </a:p>
         </p:txBody>
@@ -21638,7 +21638,7 @@
                 </a:solidFill>
                 <a:latin typeface="Aptos"/>
               </a:rPr>
-              <a:t>Julkinen riippumaton evidenssikooste · 2026.07.23-10 · 2026-07-22 · Lähteet: EPO Register; B2</a:t>
+              <a:t>Julkinen riippumaton evidenssikooste · 2026.07.23-11 · 2026-07-22 · Lähteet: EPO Register; B2</a:t>
             </a:r>
           </a:p>
         </p:txBody>
@@ -22389,7 +22389,7 @@
                 </a:solidFill>
                 <a:latin typeface="Aptos"/>
               </a:rPr>
-              <a:t>Julkinen riippumaton evidenssikooste · 2026.07.23-10 · 2026-07-22 · Lähteet: EPO family; kansalliset rekisterit</a:t>
+              <a:t>Julkinen riippumaton evidenssikooste · 2026.07.23-11 · 2026-07-22 · Lähteet: EPO family; kansalliset rekisterit</a:t>
             </a:r>
           </a:p>
         </p:txBody>
@@ -23257,7 +23257,7 @@
                 </a:solidFill>
                 <a:latin typeface="Aptos"/>
               </a:rPr>
-              <a:t>Julkinen riippumaton evidenssikooste · 2026.07.23-10 · 2026-07-22 · Lähteet: Viralliset tuomiot: 8 Ni 18/24 (EP); 7 O 3341/24</a:t>
+              <a:t>Julkinen riippumaton evidenssikooste · 2026.07.23-11 · 2026-07-22 · Lähteet: Viralliset tuomiot: 8 Ni 18/24 (EP); 7 O 3341/24</a:t>
             </a:r>
           </a:p>
         </p:txBody>

--- a/site/downloads/pixan-bank-deck-large-fi.pptx
+++ b/site/downloads/pixan-bank-deck-large-fi.pptx
@@ -3386,7 +3386,7 @@
                 </a:solidFill>
                 <a:latin typeface="Aptos"/>
               </a:rPr>
-              <a:t>2026.07.23-11</a:t>
+              <a:t>2026.07.23-12</a:t>
             </a:r>
           </a:p>
         </p:txBody>
@@ -3740,7 +3740,7 @@
                 </a:solidFill>
                 <a:latin typeface="Aptos"/>
               </a:rPr>
-              <a:t>Julkinen riippumaton evidenssikooste · 2026.07.23-11 · 2026-07-22 · Lähteet: RPX; CNIPA guidance; EPO family</a:t>
+              <a:t>Julkinen riippumaton evidenssikooste · 2026.07.23-12 · 2026-07-22 · Lähteet: RPX; CNIPA guidance; EPO family</a:t>
             </a:r>
           </a:p>
         </p:txBody>
@@ -4220,7 +4220,7 @@
                 </a:solidFill>
                 <a:latin typeface="Aptos"/>
               </a:rPr>
-              <a:t>Julkinen riippumaton evidenssikooste · 2026.07.23-11 · 2026-07-22 · Lähteet: IP Australia; PRH; EPO; EPO / UPC; USPTO</a:t>
+              <a:t>Julkinen riippumaton evidenssikooste · 2026.07.23-12 · 2026-07-22 · Lähteet: IP Australia; PRH; EPO; EPO / UPC; USPTO</a:t>
             </a:r>
           </a:p>
         </p:txBody>
@@ -4900,7 +4900,7 @@
                 </a:solidFill>
                 <a:latin typeface="Aptos"/>
               </a:rPr>
-              <a:t>Julkinen riippumaton evidenssikooste · 2026.07.23-11 · 2026-07-22 · Lähteet: UN; Atlas</a:t>
+              <a:t>Julkinen riippumaton evidenssikooste · 2026.07.23-12 · 2026-07-22 · Lähteet: UN; Atlas</a:t>
             </a:r>
           </a:p>
         </p:txBody>
@@ -5768,7 +5768,7 @@
                 </a:solidFill>
                 <a:latin typeface="Aptos"/>
               </a:rPr>
-              <a:t>Julkinen riippumaton evidenssikooste · 2026.07.23-11 · 2026-07-22 · Lähteet: Health Canada; Destatis; Vero; Sejm; Ruotsin hallitus</a:t>
+              <a:t>Julkinen riippumaton evidenssikooste · 2026.07.23-12 · 2026-07-22 · Lähteet: Health Canada; Destatis; Vero; Sejm; Ruotsin hallitus</a:t>
             </a:r>
           </a:p>
         </p:txBody>
@@ -6522,7 +6522,7 @@
                 </a:solidFill>
                 <a:latin typeface="Aptos"/>
               </a:rPr>
-              <a:t>Julkinen riippumaton evidenssikooste · 2026.07.23-11 · 2026-07-22 · Lähteet: Health Canada 2024</a:t>
+              <a:t>Julkinen riippumaton evidenssikooste · 2026.07.23-12 · 2026-07-22 · Lähteet: Health Canada 2024</a:t>
             </a:r>
           </a:p>
         </p:txBody>
@@ -7273,7 +7273,7 @@
                 </a:solidFill>
                 <a:latin typeface="Aptos"/>
               </a:rPr>
-              <a:t>Julkinen riippumaton evidenssikooste · 2026.07.23-11 · 2026-07-22 · Lähteet: Destatis</a:t>
+              <a:t>Julkinen riippumaton evidenssikooste · 2026.07.23-12 · 2026-07-22 · Lähteet: Destatis</a:t>
             </a:r>
           </a:p>
         </p:txBody>
@@ -7976,7 +7976,7 @@
                 </a:solidFill>
                 <a:latin typeface="Aptos"/>
               </a:rPr>
-              <a:t>Julkinen riippumaton evidenssikooste · 2026.07.23-11 · 2026-07-22 · Lähteet: Destatis; inTaste.de</a:t>
+              <a:t>Julkinen riippumaton evidenssikooste · 2026.07.23-12 · 2026-07-22 · Lähteet: Destatis; inTaste.de</a:t>
             </a:r>
           </a:p>
         </p:txBody>
@@ -8727,7 +8727,7 @@
                 </a:solidFill>
                 <a:latin typeface="Aptos"/>
               </a:rPr>
-              <a:t>Julkinen riippumaton evidenssikooste · 2026.07.23-11 · 2026-07-22 · Lähteet: IMARC; GVR; Fortune</a:t>
+              <a:t>Julkinen riippumaton evidenssikooste · 2026.07.23-12 · 2026-07-22 · Lähteet: IMARC; GVR; Fortune</a:t>
             </a:r>
           </a:p>
         </p:txBody>
@@ -9478,7 +9478,7 @@
                 </a:solidFill>
                 <a:latin typeface="Aptos"/>
               </a:rPr>
-              <a:t>Julkinen riippumaton evidenssikooste · 2026.07.23-11 · 2026-07-22 · Lähteet: Market-values modelReadiness</a:t>
+              <a:t>Julkinen riippumaton evidenssikooste · 2026.07.23-12 · 2026-07-22 · Lähteet: Market-values modelReadiness</a:t>
             </a:r>
           </a:p>
         </p:txBody>
@@ -9958,7 +9958,7 @@
                 </a:solidFill>
                 <a:latin typeface="Aptos"/>
               </a:rPr>
-              <a:t>Julkinen riippumaton evidenssikooste · 2026.07.23-11 · 2026-07-22 · Lähteet: WIPO valuation; Evidence Register</a:t>
+              <a:t>Julkinen riippumaton evidenssikooste · 2026.07.23-12 · 2026-07-22 · Lähteet: WIPO valuation; Evidence Register</a:t>
             </a:r>
           </a:p>
         </p:txBody>
@@ -10712,7 +10712,7 @@
                 </a:solidFill>
                 <a:latin typeface="Aptos"/>
               </a:rPr>
-              <a:t>Julkinen riippumaton evidenssikooste · 2026.07.23-11 · 2026-07-22 · Lähteet: EPO; Saksa — viralliset tuomiot; WIPO</a:t>
+              <a:t>Julkinen riippumaton evidenssikooste · 2026.07.23-12 · 2026-07-22 · Lähteet: EPO; Saksa — viralliset tuomiot; WIPO</a:t>
             </a:r>
           </a:p>
         </p:txBody>
@@ -11192,7 +11192,7 @@
                 </a:solidFill>
                 <a:latin typeface="Aptos"/>
               </a:rPr>
-              <a:t>Julkinen riippumaton evidenssikooste · 2026.07.23-11 · 2026-07-22 · Lähteet: WIPO licensing; IP Finance</a:t>
+              <a:t>Julkinen riippumaton evidenssikooste · 2026.07.23-12 · 2026-07-22 · Lähteet: WIPO licensing; IP Finance</a:t>
             </a:r>
           </a:p>
         </p:txBody>
@@ -11672,7 +11672,7 @@
                 </a:solidFill>
                 <a:latin typeface="Aptos"/>
               </a:rPr>
-              <a:t>Julkinen riippumaton evidenssikooste · 2026.07.23-11 · 2026-07-22 · Lähteet: Evidence Register; EPO</a:t>
+              <a:t>Julkinen riippumaton evidenssikooste · 2026.07.23-12 · 2026-07-22 · Lähteet: Evidence Register; EPO</a:t>
             </a:r>
           </a:p>
         </p:txBody>
@@ -12352,7 +12352,7 @@
                 </a:solidFill>
                 <a:latin typeface="Aptos"/>
               </a:rPr>
-              <a:t>Julkinen riippumaton evidenssikooste · 2026.07.23-11 · 2026-07-22 · Lähteet: EP3032975B2; 7 O 3341/24</a:t>
+              <a:t>Julkinen riippumaton evidenssikooste · 2026.07.23-12 · 2026-07-22 · Lähteet: EP3032975B2; 7 O 3341/24</a:t>
             </a:r>
           </a:p>
         </p:txBody>
@@ -13243,7 +13243,7 @@
                 </a:solidFill>
                 <a:latin typeface="Aptos"/>
               </a:rPr>
-              <a:t>Julkinen riippumaton evidenssikooste · 2026.07.23-11 · 2026-07-22 · Lähteet: WIPO dispute resolution; EPO IPscore</a:t>
+              <a:t>Julkinen riippumaton evidenssikooste · 2026.07.23-12 · 2026-07-22 · Lähteet: WIPO dispute resolution; EPO IPscore</a:t>
             </a:r>
           </a:p>
         </p:txBody>
@@ -14134,7 +14134,7 @@
                 </a:solidFill>
                 <a:latin typeface="Aptos"/>
               </a:rPr>
-              <a:t>Julkinen riippumaton evidenssikooste · 2026.07.23-11 · 2026-07-22 · Lähteet: WIPO licensing; IP Finance; TPLF mapping</a:t>
+              <a:t>Julkinen riippumaton evidenssikooste · 2026.07.23-12 · 2026-07-22 · Lähteet: WIPO licensing; IP Finance; TPLF mapping</a:t>
             </a:r>
           </a:p>
         </p:txBody>
@@ -14888,7 +14888,7 @@
                 </a:solidFill>
                 <a:latin typeface="Aptos"/>
               </a:rPr>
-              <a:t>Julkinen riippumaton evidenssikooste · 2026.07.23-11 · 2026-07-22 · Lähteet: Evidence Register; WIPO valuation</a:t>
+              <a:t>Julkinen riippumaton evidenssikooste · 2026.07.23-12 · 2026-07-22 · Lähteet: Evidence Register; WIPO valuation</a:t>
             </a:r>
           </a:p>
         </p:txBody>
@@ -15716,7 +15716,7 @@
                 </a:solidFill>
                 <a:latin typeface="Aptos"/>
               </a:rPr>
-              <a:t>Julkinen riippumaton evidenssikooste · 2026.07.23-11 · 2026-07-22 · Lähteet: WIPO valuation</a:t>
+              <a:t>Julkinen riippumaton evidenssikooste · 2026.07.23-12 · 2026-07-22 · Lähteet: WIPO valuation</a:t>
             </a:r>
           </a:p>
         </p:txBody>
@@ -16615,7 +16615,7 @@
                 </a:solidFill>
                 <a:latin typeface="Aptos"/>
               </a:rPr>
-              <a:t>Julkinen riippumaton evidenssikooste · 2026.07.23-11 · 2026-07-22 · Lähteet: Evidence Register</a:t>
+              <a:t>Julkinen riippumaton evidenssikooste · 2026.07.23-12 · 2026-07-22 · Lähteet: Evidence Register</a:t>
             </a:r>
           </a:p>
         </p:txBody>
@@ -17369,7 +17369,7 @@
                 </a:solidFill>
                 <a:latin typeface="Aptos"/>
               </a:rPr>
-              <a:t>Julkinen riippumaton evidenssikooste · 2026.07.23-11 · 2026-07-22 · Lähteet: Evidence Register</a:t>
+              <a:t>Julkinen riippumaton evidenssikooste · 2026.07.23-12 · 2026-07-22 · Lähteet: Evidence Register</a:t>
             </a:r>
           </a:p>
         </p:txBody>
@@ -18197,7 +18197,7 @@
                 </a:solidFill>
                 <a:latin typeface="Aptos"/>
               </a:rPr>
-              <a:t>Julkinen riippumaton evidenssikooste · 2026.07.23-11 · 2026-07-22 · Lähteet: Evidence Register; changelog</a:t>
+              <a:t>Julkinen riippumaton evidenssikooste · 2026.07.23-12 · 2026-07-22 · Lähteet: Evidence Register; changelog</a:t>
             </a:r>
           </a:p>
         </p:txBody>
@@ -19088,7 +19088,7 @@
                 </a:solidFill>
                 <a:latin typeface="Aptos"/>
               </a:rPr>
-              <a:t>Julkinen riippumaton evidenssikooste · 2026.07.23-11 · 2026-07-22 · Lähteet: EPO; 8 Ni 18/24 (EP); 7 O 3341/24</a:t>
+              <a:t>Julkinen riippumaton evidenssikooste · 2026.07.23-12 · 2026-07-22 · Lähteet: EPO; 8 Ni 18/24 (EP); 7 O 3341/24</a:t>
             </a:r>
           </a:p>
         </p:txBody>
@@ -19711,7 +19711,7 @@
                 </a:solidFill>
                 <a:latin typeface="Aptos"/>
               </a:rPr>
-              <a:t>Versio 2026.07.23-11 · 2026-07-22 · 30 / 30</a:t>
+              <a:t>Versio 2026.07.23-12 · 2026-07-22 · 30 / 30</a:t>
             </a:r>
           </a:p>
         </p:txBody>
@@ -19924,7 +19924,7 @@
                 </a:solidFill>
                 <a:latin typeface="Aptos"/>
               </a:rPr>
-              <a:t>Julkinen riippumaton evidenssikooste · 2026.07.23-11 · 2026-07-22 · Lähteet: Evidence Register; WIPO</a:t>
+              <a:t>Julkinen riippumaton evidenssikooste · 2026.07.23-12 · 2026-07-22 · Lähteet: Evidence Register; WIPO</a:t>
             </a:r>
           </a:p>
         </p:txBody>
@@ -20404,7 +20404,7 @@
                 </a:solidFill>
                 <a:latin typeface="Aptos"/>
               </a:rPr>
-              <a:t>Julkinen riippumaton evidenssikooste · 2026.07.23-11 · 2026-07-22 · Lähteet: EP3032975B2</a:t>
+              <a:t>Julkinen riippumaton evidenssikooste · 2026.07.23-12 · 2026-07-22 · Lähteet: EP3032975B2</a:t>
             </a:r>
           </a:p>
         </p:txBody>
@@ -20884,7 +20884,7 @@
                 </a:solidFill>
                 <a:latin typeface="Aptos"/>
               </a:rPr>
-              <a:t>Julkinen riippumaton evidenssikooste · 2026.07.23-11 · 2026-07-22 · Lähteet: EP3032975B2</a:t>
+              <a:t>Julkinen riippumaton evidenssikooste · 2026.07.23-12 · 2026-07-22 · Lähteet: EP3032975B2</a:t>
             </a:r>
           </a:p>
         </p:txBody>
@@ -21638,7 +21638,7 @@
                 </a:solidFill>
                 <a:latin typeface="Aptos"/>
               </a:rPr>
-              <a:t>Julkinen riippumaton evidenssikooste · 2026.07.23-11 · 2026-07-22 · Lähteet: EPO Register; B2</a:t>
+              <a:t>Julkinen riippumaton evidenssikooste · 2026.07.23-12 · 2026-07-22 · Lähteet: EPO Register; B2</a:t>
             </a:r>
           </a:p>
         </p:txBody>
@@ -22389,7 +22389,7 @@
                 </a:solidFill>
                 <a:latin typeface="Aptos"/>
               </a:rPr>
-              <a:t>Julkinen riippumaton evidenssikooste · 2026.07.23-11 · 2026-07-22 · Lähteet: EPO family; kansalliset rekisterit</a:t>
+              <a:t>Julkinen riippumaton evidenssikooste · 2026.07.23-12 · 2026-07-22 · Lähteet: EPO family; kansalliset rekisterit</a:t>
             </a:r>
           </a:p>
         </p:txBody>
@@ -23257,7 +23257,7 @@
                 </a:solidFill>
                 <a:latin typeface="Aptos"/>
               </a:rPr>
-              <a:t>Julkinen riippumaton evidenssikooste · 2026.07.23-11 · 2026-07-22 · Lähteet: Viralliset tuomiot: 8 Ni 18/24 (EP); 7 O 3341/24</a:t>
+              <a:t>Julkinen riippumaton evidenssikooste · 2026.07.23-12 · 2026-07-22 · Lähteet: Viralliset tuomiot: 8 Ni 18/24 (EP); 7 O 3341/24</a:t>
             </a:r>
           </a:p>
         </p:txBody>

--- a/site/downloads/pixan-bank-deck-large-fi.pptx
+++ b/site/downloads/pixan-bank-deck-large-fi.pptx
@@ -3386,7 +3386,7 @@
                 </a:solidFill>
                 <a:latin typeface="Aptos"/>
               </a:rPr>
-              <a:t>2026.07.23-12</a:t>
+              <a:t>2026.07.23-13</a:t>
             </a:r>
           </a:p>
         </p:txBody>
@@ -3740,7 +3740,7 @@
                 </a:solidFill>
                 <a:latin typeface="Aptos"/>
               </a:rPr>
-              <a:t>Julkinen riippumaton evidenssikooste · 2026.07.23-12 · 2026-07-22 · Lähteet: RPX; CNIPA guidance; EPO family</a:t>
+              <a:t>Julkinen riippumaton evidenssikooste · 2026.07.23-13 · 2026-07-22 · Lähteet: RPX; CNIPA guidance; EPO family</a:t>
             </a:r>
           </a:p>
         </p:txBody>
@@ -4220,7 +4220,7 @@
                 </a:solidFill>
                 <a:latin typeface="Aptos"/>
               </a:rPr>
-              <a:t>Julkinen riippumaton evidenssikooste · 2026.07.23-12 · 2026-07-22 · Lähteet: IP Australia; PRH; EPO; EPO / UPC; USPTO</a:t>
+              <a:t>Julkinen riippumaton evidenssikooste · 2026.07.23-13 · 2026-07-22 · Lähteet: IP Australia; PRH; EPO; EPO / UPC; USPTO</a:t>
             </a:r>
           </a:p>
         </p:txBody>
@@ -4900,7 +4900,7 @@
                 </a:solidFill>
                 <a:latin typeface="Aptos"/>
               </a:rPr>
-              <a:t>Julkinen riippumaton evidenssikooste · 2026.07.23-12 · 2026-07-22 · Lähteet: UN; Atlas</a:t>
+              <a:t>Julkinen riippumaton evidenssikooste · 2026.07.23-13 · 2026-07-22 · Lähteet: UN; Atlas</a:t>
             </a:r>
           </a:p>
         </p:txBody>
@@ -5768,7 +5768,7 @@
                 </a:solidFill>
                 <a:latin typeface="Aptos"/>
               </a:rPr>
-              <a:t>Julkinen riippumaton evidenssikooste · 2026.07.23-12 · 2026-07-22 · Lähteet: Health Canada; Destatis; Vero; Sejm; Ruotsin hallitus</a:t>
+              <a:t>Julkinen riippumaton evidenssikooste · 2026.07.23-13 · 2026-07-22 · Lähteet: Health Canada; Destatis; Vero; Sejm; Ruotsin hallitus</a:t>
             </a:r>
           </a:p>
         </p:txBody>
@@ -6522,7 +6522,7 @@
                 </a:solidFill>
                 <a:latin typeface="Aptos"/>
               </a:rPr>
-              <a:t>Julkinen riippumaton evidenssikooste · 2026.07.23-12 · 2026-07-22 · Lähteet: Health Canada 2024</a:t>
+              <a:t>Julkinen riippumaton evidenssikooste · 2026.07.23-13 · 2026-07-22 · Lähteet: Health Canada 2024</a:t>
             </a:r>
           </a:p>
         </p:txBody>
@@ -7273,7 +7273,7 @@
                 </a:solidFill>
                 <a:latin typeface="Aptos"/>
               </a:rPr>
-              <a:t>Julkinen riippumaton evidenssikooste · 2026.07.23-12 · 2026-07-22 · Lähteet: Destatis</a:t>
+              <a:t>Julkinen riippumaton evidenssikooste · 2026.07.23-13 · 2026-07-22 · Lähteet: Destatis</a:t>
             </a:r>
           </a:p>
         </p:txBody>
@@ -7976,7 +7976,7 @@
                 </a:solidFill>
                 <a:latin typeface="Aptos"/>
               </a:rPr>
-              <a:t>Julkinen riippumaton evidenssikooste · 2026.07.23-12 · 2026-07-22 · Lähteet: Destatis; inTaste.de</a:t>
+              <a:t>Julkinen riippumaton evidenssikooste · 2026.07.23-13 · 2026-07-22 · Lähteet: Destatis; inTaste.de</a:t>
             </a:r>
           </a:p>
         </p:txBody>
@@ -8727,7 +8727,7 @@
                 </a:solidFill>
                 <a:latin typeface="Aptos"/>
               </a:rPr>
-              <a:t>Julkinen riippumaton evidenssikooste · 2026.07.23-12 · 2026-07-22 · Lähteet: IMARC; GVR; Fortune</a:t>
+              <a:t>Julkinen riippumaton evidenssikooste · 2026.07.23-13 · 2026-07-22 · Lähteet: IMARC; GVR; Fortune</a:t>
             </a:r>
           </a:p>
         </p:txBody>
@@ -9478,7 +9478,7 @@
                 </a:solidFill>
                 <a:latin typeface="Aptos"/>
               </a:rPr>
-              <a:t>Julkinen riippumaton evidenssikooste · 2026.07.23-12 · 2026-07-22 · Lähteet: Market-values modelReadiness</a:t>
+              <a:t>Julkinen riippumaton evidenssikooste · 2026.07.23-13 · 2026-07-22 · Lähteet: Market-values modelReadiness</a:t>
             </a:r>
           </a:p>
         </p:txBody>
@@ -9958,7 +9958,7 @@
                 </a:solidFill>
                 <a:latin typeface="Aptos"/>
               </a:rPr>
-              <a:t>Julkinen riippumaton evidenssikooste · 2026.07.23-12 · 2026-07-22 · Lähteet: WIPO valuation; Evidence Register</a:t>
+              <a:t>Julkinen riippumaton evidenssikooste · 2026.07.23-13 · 2026-07-22 · Lähteet: WIPO valuation; Evidence Register</a:t>
             </a:r>
           </a:p>
         </p:txBody>
@@ -10712,7 +10712,7 @@
                 </a:solidFill>
                 <a:latin typeface="Aptos"/>
               </a:rPr>
-              <a:t>Julkinen riippumaton evidenssikooste · 2026.07.23-12 · 2026-07-22 · Lähteet: EPO; Saksa — viralliset tuomiot; WIPO</a:t>
+              <a:t>Julkinen riippumaton evidenssikooste · 2026.07.23-13 · 2026-07-22 · Lähteet: EPO; Saksa — viralliset tuomiot; WIPO</a:t>
             </a:r>
           </a:p>
         </p:txBody>
@@ -11192,7 +11192,7 @@
                 </a:solidFill>
                 <a:latin typeface="Aptos"/>
               </a:rPr>
-              <a:t>Julkinen riippumaton evidenssikooste · 2026.07.23-12 · 2026-07-22 · Lähteet: WIPO licensing; IP Finance</a:t>
+              <a:t>Julkinen riippumaton evidenssikooste · 2026.07.23-13 · 2026-07-22 · Lähteet: WIPO licensing; IP Finance</a:t>
             </a:r>
           </a:p>
         </p:txBody>
@@ -11672,7 +11672,7 @@
                 </a:solidFill>
                 <a:latin typeface="Aptos"/>
               </a:rPr>
-              <a:t>Julkinen riippumaton evidenssikooste · 2026.07.23-12 · 2026-07-22 · Lähteet: Evidence Register; EPO</a:t>
+              <a:t>Julkinen riippumaton evidenssikooste · 2026.07.23-13 · 2026-07-22 · Lähteet: Evidence Register; EPO</a:t>
             </a:r>
           </a:p>
         </p:txBody>
@@ -12352,7 +12352,7 @@
                 </a:solidFill>
                 <a:latin typeface="Aptos"/>
               </a:rPr>
-              <a:t>Julkinen riippumaton evidenssikooste · 2026.07.23-12 · 2026-07-22 · Lähteet: EP3032975B2; 7 O 3341/24</a:t>
+              <a:t>Julkinen riippumaton evidenssikooste · 2026.07.23-13 · 2026-07-22 · Lähteet: EP3032975B2; 7 O 3341/24</a:t>
             </a:r>
           </a:p>
         </p:txBody>
@@ -13243,7 +13243,7 @@
                 </a:solidFill>
                 <a:latin typeface="Aptos"/>
               </a:rPr>
-              <a:t>Julkinen riippumaton evidenssikooste · 2026.07.23-12 · 2026-07-22 · Lähteet: WIPO dispute resolution; EPO IPscore</a:t>
+              <a:t>Julkinen riippumaton evidenssikooste · 2026.07.23-13 · 2026-07-22 · Lähteet: WIPO dispute resolution; EPO IPscore</a:t>
             </a:r>
           </a:p>
         </p:txBody>
@@ -14134,7 +14134,7 @@
                 </a:solidFill>
                 <a:latin typeface="Aptos"/>
               </a:rPr>
-              <a:t>Julkinen riippumaton evidenssikooste · 2026.07.23-12 · 2026-07-22 · Lähteet: WIPO licensing; IP Finance; TPLF mapping</a:t>
+              <a:t>Julkinen riippumaton evidenssikooste · 2026.07.23-13 · 2026-07-22 · Lähteet: WIPO licensing; IP Finance; TPLF mapping</a:t>
             </a:r>
           </a:p>
         </p:txBody>
@@ -14888,7 +14888,7 @@
                 </a:solidFill>
                 <a:latin typeface="Aptos"/>
               </a:rPr>
-              <a:t>Julkinen riippumaton evidenssikooste · 2026.07.23-12 · 2026-07-22 · Lähteet: Evidence Register; WIPO valuation</a:t>
+              <a:t>Julkinen riippumaton evidenssikooste · 2026.07.23-13 · 2026-07-22 · Lähteet: Evidence Register; WIPO valuation</a:t>
             </a:r>
           </a:p>
         </p:txBody>
@@ -15716,7 +15716,7 @@
                 </a:solidFill>
                 <a:latin typeface="Aptos"/>
               </a:rPr>
-              <a:t>Julkinen riippumaton evidenssikooste · 2026.07.23-12 · 2026-07-22 · Lähteet: WIPO valuation</a:t>
+              <a:t>Julkinen riippumaton evidenssikooste · 2026.07.23-13 · 2026-07-22 · Lähteet: WIPO valuation</a:t>
             </a:r>
           </a:p>
         </p:txBody>
@@ -16615,7 +16615,7 @@
                 </a:solidFill>
                 <a:latin typeface="Aptos"/>
               </a:rPr>
-              <a:t>Julkinen riippumaton evidenssikooste · 2026.07.23-12 · 2026-07-22 · Lähteet: Evidence Register</a:t>
+              <a:t>Julkinen riippumaton evidenssikooste · 2026.07.23-13 · 2026-07-22 · Lähteet: Evidence Register</a:t>
             </a:r>
           </a:p>
         </p:txBody>
@@ -17369,7 +17369,7 @@
                 </a:solidFill>
                 <a:latin typeface="Aptos"/>
               </a:rPr>
-              <a:t>Julkinen riippumaton evidenssikooste · 2026.07.23-12 · 2026-07-22 · Lähteet: Evidence Register</a:t>
+              <a:t>Julkinen riippumaton evidenssikooste · 2026.07.23-13 · 2026-07-22 · Lähteet: Evidence Register</a:t>
             </a:r>
           </a:p>
         </p:txBody>
@@ -18197,7 +18197,7 @@
                 </a:solidFill>
                 <a:latin typeface="Aptos"/>
               </a:rPr>
-              <a:t>Julkinen riippumaton evidenssikooste · 2026.07.23-12 · 2026-07-22 · Lähteet: Evidence Register; changelog</a:t>
+              <a:t>Julkinen riippumaton evidenssikooste · 2026.07.23-13 · 2026-07-22 · Lähteet: Evidence Register; changelog</a:t>
             </a:r>
           </a:p>
         </p:txBody>
@@ -19088,7 +19088,7 @@
                 </a:solidFill>
                 <a:latin typeface="Aptos"/>
               </a:rPr>
-              <a:t>Julkinen riippumaton evidenssikooste · 2026.07.23-12 · 2026-07-22 · Lähteet: EPO; 8 Ni 18/24 (EP); 7 O 3341/24</a:t>
+              <a:t>Julkinen riippumaton evidenssikooste · 2026.07.23-13 · 2026-07-22 · Lähteet: EPO; 8 Ni 18/24 (EP); 7 O 3341/24</a:t>
             </a:r>
           </a:p>
         </p:txBody>
@@ -19711,7 +19711,7 @@
                 </a:solidFill>
                 <a:latin typeface="Aptos"/>
               </a:rPr>
-              <a:t>Versio 2026.07.23-12 · 2026-07-22 · 30 / 30</a:t>
+              <a:t>Versio 2026.07.23-13 · 2026-07-22 · 30 / 30</a:t>
             </a:r>
           </a:p>
         </p:txBody>
@@ -19924,7 +19924,7 @@
                 </a:solidFill>
                 <a:latin typeface="Aptos"/>
               </a:rPr>
-              <a:t>Julkinen riippumaton evidenssikooste · 2026.07.23-12 · 2026-07-22 · Lähteet: Evidence Register; WIPO</a:t>
+              <a:t>Julkinen riippumaton evidenssikooste · 2026.07.23-13 · 2026-07-22 · Lähteet: Evidence Register; WIPO</a:t>
             </a:r>
           </a:p>
         </p:txBody>
@@ -20404,7 +20404,7 @@
                 </a:solidFill>
                 <a:latin typeface="Aptos"/>
               </a:rPr>
-              <a:t>Julkinen riippumaton evidenssikooste · 2026.07.23-12 · 2026-07-22 · Lähteet: EP3032975B2</a:t>
+              <a:t>Julkinen riippumaton evidenssikooste · 2026.07.23-13 · 2026-07-22 · Lähteet: EP3032975B2</a:t>
             </a:r>
           </a:p>
         </p:txBody>
@@ -20884,7 +20884,7 @@
                 </a:solidFill>
                 <a:latin typeface="Aptos"/>
               </a:rPr>
-              <a:t>Julkinen riippumaton evidenssikooste · 2026.07.23-12 · 2026-07-22 · Lähteet: EP3032975B2</a:t>
+              <a:t>Julkinen riippumaton evidenssikooste · 2026.07.23-13 · 2026-07-22 · Lähteet: EP3032975B2</a:t>
             </a:r>
           </a:p>
         </p:txBody>
@@ -21638,7 +21638,7 @@
                 </a:solidFill>
                 <a:latin typeface="Aptos"/>
               </a:rPr>
-              <a:t>Julkinen riippumaton evidenssikooste · 2026.07.23-12 · 2026-07-22 · Lähteet: EPO Register; B2</a:t>
+              <a:t>Julkinen riippumaton evidenssikooste · 2026.07.23-13 · 2026-07-22 · Lähteet: EPO Register; B2</a:t>
             </a:r>
           </a:p>
         </p:txBody>
@@ -22389,7 +22389,7 @@
                 </a:solidFill>
                 <a:latin typeface="Aptos"/>
               </a:rPr>
-              <a:t>Julkinen riippumaton evidenssikooste · 2026.07.23-12 · 2026-07-22 · Lähteet: EPO family; kansalliset rekisterit</a:t>
+              <a:t>Julkinen riippumaton evidenssikooste · 2026.07.23-13 · 2026-07-22 · Lähteet: EPO family; kansalliset rekisterit</a:t>
             </a:r>
           </a:p>
         </p:txBody>
@@ -23257,7 +23257,7 @@
                 </a:solidFill>
                 <a:latin typeface="Aptos"/>
               </a:rPr>
-              <a:t>Julkinen riippumaton evidenssikooste · 2026.07.23-12 · 2026-07-22 · Lähteet: Viralliset tuomiot: 8 Ni 18/24 (EP); 7 O 3341/24</a:t>
+              <a:t>Julkinen riippumaton evidenssikooste · 2026.07.23-13 · 2026-07-22 · Lähteet: Viralliset tuomiot: 8 Ni 18/24 (EP); 7 O 3341/24</a:t>
             </a:r>
           </a:p>
         </p:txBody>

--- a/site/downloads/pixan-bank-deck-large-fi.pptx
+++ b/site/downloads/pixan-bank-deck-large-fi.pptx
@@ -3386,7 +3386,7 @@
                 </a:solidFill>
                 <a:latin typeface="Aptos"/>
               </a:rPr>
-              <a:t>2026.07.23-13</a:t>
+              <a:t>2026.07.23-14</a:t>
             </a:r>
           </a:p>
         </p:txBody>
@@ -3740,7 +3740,7 @@
                 </a:solidFill>
                 <a:latin typeface="Aptos"/>
               </a:rPr>
-              <a:t>Julkinen riippumaton evidenssikooste · 2026.07.23-13 · 2026-07-22 · Lähteet: RPX; CNIPA guidance; EPO family</a:t>
+              <a:t>Julkinen riippumaton evidenssikooste · 2026.07.23-14 · 2026-07-22 · Lähteet: RPX; CNIPA guidance; EPO family</a:t>
             </a:r>
           </a:p>
         </p:txBody>
@@ -4220,7 +4220,7 @@
                 </a:solidFill>
                 <a:latin typeface="Aptos"/>
               </a:rPr>
-              <a:t>Julkinen riippumaton evidenssikooste · 2026.07.23-13 · 2026-07-22 · Lähteet: IP Australia; PRH; EPO; EPO / UPC; USPTO</a:t>
+              <a:t>Julkinen riippumaton evidenssikooste · 2026.07.23-14 · 2026-07-22 · Lähteet: IP Australia; PRH; EPO; EPO / UPC; USPTO</a:t>
             </a:r>
           </a:p>
         </p:txBody>
@@ -4900,7 +4900,7 @@
                 </a:solidFill>
                 <a:latin typeface="Aptos"/>
               </a:rPr>
-              <a:t>Julkinen riippumaton evidenssikooste · 2026.07.23-13 · 2026-07-22 · Lähteet: UN; Atlas</a:t>
+              <a:t>Julkinen riippumaton evidenssikooste · 2026.07.23-14 · 2026-07-22 · Lähteet: UN; Atlas</a:t>
             </a:r>
           </a:p>
         </p:txBody>
@@ -5768,7 +5768,7 @@
                 </a:solidFill>
                 <a:latin typeface="Aptos"/>
               </a:rPr>
-              <a:t>Julkinen riippumaton evidenssikooste · 2026.07.23-13 · 2026-07-22 · Lähteet: Health Canada; Destatis; Vero; Sejm; Ruotsin hallitus</a:t>
+              <a:t>Julkinen riippumaton evidenssikooste · 2026.07.23-14 · 2026-07-22 · Lähteet: Health Canada; Destatis; Vero; Sejm; Ruotsin hallitus</a:t>
             </a:r>
           </a:p>
         </p:txBody>
@@ -6522,7 +6522,7 @@
                 </a:solidFill>
                 <a:latin typeface="Aptos"/>
               </a:rPr>
-              <a:t>Julkinen riippumaton evidenssikooste · 2026.07.23-13 · 2026-07-22 · Lähteet: Health Canada 2024</a:t>
+              <a:t>Julkinen riippumaton evidenssikooste · 2026.07.23-14 · 2026-07-22 · Lähteet: Health Canada 2024</a:t>
             </a:r>
           </a:p>
         </p:txBody>
@@ -6750,7 +6750,7 @@
           <a:p>
             <a:pPr algn="l"/>
             <a:r>
-              <a:rPr sz="2700" b="1">
+              <a:rPr sz="2250" b="1">
                 <a:solidFill>
                   <a:srgbClr val="0D5F86"/>
                 </a:solidFill>
@@ -7273,7 +7273,7 @@
                 </a:solidFill>
                 <a:latin typeface="Aptos"/>
               </a:rPr>
-              <a:t>Julkinen riippumaton evidenssikooste · 2026.07.23-13 · 2026-07-22 · Lähteet: Destatis</a:t>
+              <a:t>Julkinen riippumaton evidenssikooste · 2026.07.23-14 · 2026-07-22 · Lähteet: Destatis</a:t>
             </a:r>
           </a:p>
         </p:txBody>
@@ -7976,7 +7976,7 @@
                 </a:solidFill>
                 <a:latin typeface="Aptos"/>
               </a:rPr>
-              <a:t>Julkinen riippumaton evidenssikooste · 2026.07.23-13 · 2026-07-22 · Lähteet: Destatis; inTaste.de</a:t>
+              <a:t>Julkinen riippumaton evidenssikooste · 2026.07.23-14 · 2026-07-22 · Lähteet: Destatis; inTaste.de</a:t>
             </a:r>
           </a:p>
         </p:txBody>
@@ -8087,7 +8087,7 @@
           <a:p>
             <a:pPr algn="l"/>
             <a:r>
-              <a:rPr sz="2700" b="1">
+              <a:rPr sz="2250" b="1">
                 <a:solidFill>
                   <a:srgbClr val="00A4A6"/>
                 </a:solidFill>
@@ -8204,7 +8204,7 @@
           <a:p>
             <a:pPr algn="l"/>
             <a:r>
-              <a:rPr sz="2700" b="1">
+              <a:rPr sz="2250" b="1">
                 <a:solidFill>
                   <a:srgbClr val="0D5F86"/>
                 </a:solidFill>
@@ -8321,7 +8321,7 @@
           <a:p>
             <a:pPr algn="l"/>
             <a:r>
-              <a:rPr sz="2700" b="1">
+              <a:rPr sz="2250" b="1">
                 <a:solidFill>
                   <a:srgbClr val="F4B942"/>
                 </a:solidFill>
@@ -8727,7 +8727,7 @@
                 </a:solidFill>
                 <a:latin typeface="Aptos"/>
               </a:rPr>
-              <a:t>Julkinen riippumaton evidenssikooste · 2026.07.23-13 · 2026-07-22 · Lähteet: IMARC; GVR; Fortune</a:t>
+              <a:t>Julkinen riippumaton evidenssikooste · 2026.07.23-14 · 2026-07-22 · Lähteet: IMARC; GVR; Fortune</a:t>
             </a:r>
           </a:p>
         </p:txBody>
@@ -9478,7 +9478,7 @@
                 </a:solidFill>
                 <a:latin typeface="Aptos"/>
               </a:rPr>
-              <a:t>Julkinen riippumaton evidenssikooste · 2026.07.23-13 · 2026-07-22 · Lähteet: Market-values modelReadiness</a:t>
+              <a:t>Julkinen riippumaton evidenssikooste · 2026.07.23-14 · 2026-07-22 · Lähteet: Market-values modelReadiness</a:t>
             </a:r>
           </a:p>
         </p:txBody>
@@ -9958,7 +9958,7 @@
                 </a:solidFill>
                 <a:latin typeface="Aptos"/>
               </a:rPr>
-              <a:t>Julkinen riippumaton evidenssikooste · 2026.07.23-13 · 2026-07-22 · Lähteet: WIPO valuation; Evidence Register</a:t>
+              <a:t>Julkinen riippumaton evidenssikooste · 2026.07.23-14 · 2026-07-22 · Lähteet: WIPO valuation; Evidence Register</a:t>
             </a:r>
           </a:p>
         </p:txBody>
@@ -10712,7 +10712,7 @@
                 </a:solidFill>
                 <a:latin typeface="Aptos"/>
               </a:rPr>
-              <a:t>Julkinen riippumaton evidenssikooste · 2026.07.23-13 · 2026-07-22 · Lähteet: EPO; Saksa — viralliset tuomiot; WIPO</a:t>
+              <a:t>Julkinen riippumaton evidenssikooste · 2026.07.23-14 · 2026-07-22 · Lähteet: EPO; Saksa — viralliset tuomiot; WIPO</a:t>
             </a:r>
           </a:p>
         </p:txBody>
@@ -11192,7 +11192,7 @@
                 </a:solidFill>
                 <a:latin typeface="Aptos"/>
               </a:rPr>
-              <a:t>Julkinen riippumaton evidenssikooste · 2026.07.23-13 · 2026-07-22 · Lähteet: WIPO licensing; IP Finance</a:t>
+              <a:t>Julkinen riippumaton evidenssikooste · 2026.07.23-14 · 2026-07-22 · Lähteet: WIPO licensing; IP Finance</a:t>
             </a:r>
           </a:p>
         </p:txBody>
@@ -11672,7 +11672,7 @@
                 </a:solidFill>
                 <a:latin typeface="Aptos"/>
               </a:rPr>
-              <a:t>Julkinen riippumaton evidenssikooste · 2026.07.23-13 · 2026-07-22 · Lähteet: Evidence Register; EPO</a:t>
+              <a:t>Julkinen riippumaton evidenssikooste · 2026.07.23-14 · 2026-07-22 · Lähteet: Evidence Register; EPO</a:t>
             </a:r>
           </a:p>
         </p:txBody>
@@ -12352,7 +12352,7 @@
                 </a:solidFill>
                 <a:latin typeface="Aptos"/>
               </a:rPr>
-              <a:t>Julkinen riippumaton evidenssikooste · 2026.07.23-13 · 2026-07-22 · Lähteet: EP3032975B2; 7 O 3341/24</a:t>
+              <a:t>Julkinen riippumaton evidenssikooste · 2026.07.23-14 · 2026-07-22 · Lähteet: EP3032975B2; 7 O 3341/24</a:t>
             </a:r>
           </a:p>
         </p:txBody>
@@ -13243,7 +13243,7 @@
                 </a:solidFill>
                 <a:latin typeface="Aptos"/>
               </a:rPr>
-              <a:t>Julkinen riippumaton evidenssikooste · 2026.07.23-13 · 2026-07-22 · Lähteet: WIPO dispute resolution; EPO IPscore</a:t>
+              <a:t>Julkinen riippumaton evidenssikooste · 2026.07.23-14 · 2026-07-22 · Lähteet: WIPO dispute resolution; EPO IPscore</a:t>
             </a:r>
           </a:p>
         </p:txBody>
@@ -14134,7 +14134,7 @@
                 </a:solidFill>
                 <a:latin typeface="Aptos"/>
               </a:rPr>
-              <a:t>Julkinen riippumaton evidenssikooste · 2026.07.23-13 · 2026-07-22 · Lähteet: WIPO licensing; IP Finance; TPLF mapping</a:t>
+              <a:t>Julkinen riippumaton evidenssikooste · 2026.07.23-14 · 2026-07-22 · Lähteet: WIPO licensing; IP Finance; TPLF mapping</a:t>
             </a:r>
           </a:p>
         </p:txBody>
@@ -14888,7 +14888,7 @@
                 </a:solidFill>
                 <a:latin typeface="Aptos"/>
               </a:rPr>
-              <a:t>Julkinen riippumaton evidenssikooste · 2026.07.23-13 · 2026-07-22 · Lähteet: Evidence Register; WIPO valuation</a:t>
+              <a:t>Julkinen riippumaton evidenssikooste · 2026.07.23-14 · 2026-07-22 · Lähteet: Evidence Register; WIPO valuation</a:t>
             </a:r>
           </a:p>
         </p:txBody>
@@ -15716,7 +15716,7 @@
                 </a:solidFill>
                 <a:latin typeface="Aptos"/>
               </a:rPr>
-              <a:t>Julkinen riippumaton evidenssikooste · 2026.07.23-13 · 2026-07-22 · Lähteet: WIPO valuation</a:t>
+              <a:t>Julkinen riippumaton evidenssikooste · 2026.07.23-14 · 2026-07-22 · Lähteet: WIPO valuation</a:t>
             </a:r>
           </a:p>
         </p:txBody>
@@ -16615,7 +16615,7 @@
                 </a:solidFill>
                 <a:latin typeface="Aptos"/>
               </a:rPr>
-              <a:t>Julkinen riippumaton evidenssikooste · 2026.07.23-13 · 2026-07-22 · Lähteet: Evidence Register</a:t>
+              <a:t>Julkinen riippumaton evidenssikooste · 2026.07.23-14 · 2026-07-22 · Lähteet: Evidence Register</a:t>
             </a:r>
           </a:p>
         </p:txBody>
@@ -17369,7 +17369,7 @@
                 </a:solidFill>
                 <a:latin typeface="Aptos"/>
               </a:rPr>
-              <a:t>Julkinen riippumaton evidenssikooste · 2026.07.23-13 · 2026-07-22 · Lähteet: Evidence Register</a:t>
+              <a:t>Julkinen riippumaton evidenssikooste · 2026.07.23-14 · 2026-07-22 · Lähteet: Evidence Register</a:t>
             </a:r>
           </a:p>
         </p:txBody>
@@ -18197,7 +18197,7 @@
                 </a:solidFill>
                 <a:latin typeface="Aptos"/>
               </a:rPr>
-              <a:t>Julkinen riippumaton evidenssikooste · 2026.07.23-13 · 2026-07-22 · Lähteet: Evidence Register; changelog</a:t>
+              <a:t>Julkinen riippumaton evidenssikooste · 2026.07.23-14 · 2026-07-22 · Lähteet: Evidence Register; changelog</a:t>
             </a:r>
           </a:p>
         </p:txBody>
@@ -19088,7 +19088,7 @@
                 </a:solidFill>
                 <a:latin typeface="Aptos"/>
               </a:rPr>
-              <a:t>Julkinen riippumaton evidenssikooste · 2026.07.23-13 · 2026-07-22 · Lähteet: EPO; 8 Ni 18/24 (EP); 7 O 3341/24</a:t>
+              <a:t>Julkinen riippumaton evidenssikooste · 2026.07.23-14 · 2026-07-22 · Lähteet: EPO; 8 Ni 18/24 (EP); 7 O 3341/24</a:t>
             </a:r>
           </a:p>
         </p:txBody>
@@ -19711,7 +19711,7 @@
                 </a:solidFill>
                 <a:latin typeface="Aptos"/>
               </a:rPr>
-              <a:t>Versio 2026.07.23-13 · 2026-07-22 · 30 / 30</a:t>
+              <a:t>Versio 2026.07.23-14 · 2026-07-22 · 30 / 30</a:t>
             </a:r>
           </a:p>
         </p:txBody>
@@ -19924,7 +19924,7 @@
                 </a:solidFill>
                 <a:latin typeface="Aptos"/>
               </a:rPr>
-              <a:t>Julkinen riippumaton evidenssikooste · 2026.07.23-13 · 2026-07-22 · Lähteet: Evidence Register; WIPO</a:t>
+              <a:t>Julkinen riippumaton evidenssikooste · 2026.07.23-14 · 2026-07-22 · Lähteet: Evidence Register; WIPO</a:t>
             </a:r>
           </a:p>
         </p:txBody>
@@ -20404,7 +20404,7 @@
                 </a:solidFill>
                 <a:latin typeface="Aptos"/>
               </a:rPr>
-              <a:t>Julkinen riippumaton evidenssikooste · 2026.07.23-13 · 2026-07-22 · Lähteet: EP3032975B2</a:t>
+              <a:t>Julkinen riippumaton evidenssikooste · 2026.07.23-14 · 2026-07-22 · Lähteet: EP3032975B2</a:t>
             </a:r>
           </a:p>
         </p:txBody>
@@ -20884,7 +20884,7 @@
                 </a:solidFill>
                 <a:latin typeface="Aptos"/>
               </a:rPr>
-              <a:t>Julkinen riippumaton evidenssikooste · 2026.07.23-13 · 2026-07-22 · Lähteet: EP3032975B2</a:t>
+              <a:t>Julkinen riippumaton evidenssikooste · 2026.07.23-14 · 2026-07-22 · Lähteet: EP3032975B2</a:t>
             </a:r>
           </a:p>
         </p:txBody>
@@ -21638,7 +21638,7 @@
                 </a:solidFill>
                 <a:latin typeface="Aptos"/>
               </a:rPr>
-              <a:t>Julkinen riippumaton evidenssikooste · 2026.07.23-13 · 2026-07-22 · Lähteet: EPO Register; B2</a:t>
+              <a:t>Julkinen riippumaton evidenssikooste · 2026.07.23-14 · 2026-07-22 · Lähteet: EPO Register; B2</a:t>
             </a:r>
           </a:p>
         </p:txBody>
@@ -22389,7 +22389,7 @@
                 </a:solidFill>
                 <a:latin typeface="Aptos"/>
               </a:rPr>
-              <a:t>Julkinen riippumaton evidenssikooste · 2026.07.23-13 · 2026-07-22 · Lähteet: EPO family; kansalliset rekisterit</a:t>
+              <a:t>Julkinen riippumaton evidenssikooste · 2026.07.23-14 · 2026-07-22 · Lähteet: EPO family; kansalliset rekisterit</a:t>
             </a:r>
           </a:p>
         </p:txBody>
@@ -23257,7 +23257,7 @@
                 </a:solidFill>
                 <a:latin typeface="Aptos"/>
               </a:rPr>
-              <a:t>Julkinen riippumaton evidenssikooste · 2026.07.23-13 · 2026-07-22 · Lähteet: Viralliset tuomiot: 8 Ni 18/24 (EP); 7 O 3341/24</a:t>
+              <a:t>Julkinen riippumaton evidenssikooste · 2026.07.23-14 · 2026-07-22 · Lähteet: Viralliset tuomiot: 8 Ni 18/24 (EP); 7 O 3341/24</a:t>
             </a:r>
           </a:p>
         </p:txBody>

--- a/site/downloads/pixan-bank-deck-large-fi.pptx
+++ b/site/downloads/pixan-bank-deck-large-fi.pptx
@@ -3386,7 +3386,7 @@
                 </a:solidFill>
                 <a:latin typeface="Aptos"/>
               </a:rPr>
-              <a:t>2026.07.23-14</a:t>
+              <a:t>2026.07.23-15</a:t>
             </a:r>
           </a:p>
         </p:txBody>
@@ -3740,7 +3740,7 @@
                 </a:solidFill>
                 <a:latin typeface="Aptos"/>
               </a:rPr>
-              <a:t>Julkinen riippumaton evidenssikooste · 2026.07.23-14 · 2026-07-22 · Lähteet: RPX; CNIPA guidance; EPO family</a:t>
+              <a:t>Julkinen riippumaton evidenssikooste · 2026.07.23-15 · 2026-07-22 · Lähteet: RPX; CNIPA guidance; EPO family</a:t>
             </a:r>
           </a:p>
         </p:txBody>
@@ -4074,7 +4074,7 @@
         <p:spPr>
           <a:xfrm>
             <a:off x="502920" y="621792"/>
-            <a:ext cx="11109960" cy="548640"/>
+            <a:ext cx="11109960" cy="804672"/>
           </a:xfrm>
           <a:prstGeom prst="rect">
             <a:avLst/>
@@ -4089,7 +4089,7 @@
           <a:p>
             <a:pPr algn="l"/>
             <a:r>
-              <a:rPr sz="3400" b="1">
+              <a:rPr sz="3000" b="1">
                 <a:solidFill>
                   <a:srgbClr val="071A2B"/>
                 </a:solidFill>
@@ -4108,7 +4108,7 @@
         </p:nvSpPr>
         <p:spPr>
           <a:xfrm>
-            <a:off x="502920" y="1225296"/>
+            <a:off x="502920" y="1444752"/>
             <a:ext cx="960120" cy="50292"/>
           </a:xfrm>
           <a:prstGeom prst="rect">
@@ -4220,7 +4220,7 @@
                 </a:solidFill>
                 <a:latin typeface="Aptos"/>
               </a:rPr>
-              <a:t>Julkinen riippumaton evidenssikooste · 2026.07.23-14 · 2026-07-22 · Lähteet: IP Australia; PRH; EPO; EPO / UPC; USPTO</a:t>
+              <a:t>Julkinen riippumaton evidenssikooste · 2026.07.23-15 · 2026-07-22 · Lähteet: IP Australia; PRH; EPO; EPO / UPC; USPTO</a:t>
             </a:r>
           </a:p>
         </p:txBody>
@@ -4269,8 +4269,8 @@
           <p:nvPr/>
         </p:nvGraphicFramePr>
         <p:xfrm>
-          <a:off x="530352" y="1536192"/>
-          <a:ext cx="11109958" cy="3977636"/>
+          <a:off x="530352" y="1719072"/>
+          <a:ext cx="11109958" cy="3794760"/>
         </p:xfrm>
         <a:graphic>
           <a:graphicData uri="http://schemas.openxmlformats.org/drawingml/2006/table">
@@ -4357,7 +4357,7 @@
                   </a:tcPr>
                 </a:tc>
               </a:tr>
-              <a:tr h="884681">
+              <a:tr h="838962">
                 <a:tc>
                   <a:txBody>
                     <a:bodyPr/>
@@ -4431,7 +4431,7 @@
                   </a:tcPr>
                 </a:tc>
               </a:tr>
-              <a:tr h="884681">
+              <a:tr h="838962">
                 <a:tc>
                   <a:txBody>
                     <a:bodyPr/>
@@ -4505,7 +4505,7 @@
                   </a:tcPr>
                 </a:tc>
               </a:tr>
-              <a:tr h="884681">
+              <a:tr h="838962">
                 <a:tc>
                   <a:txBody>
                     <a:bodyPr/>
@@ -4579,7 +4579,7 @@
                   </a:tcPr>
                 </a:tc>
               </a:tr>
-              <a:tr h="884681">
+              <a:tr h="838962">
                 <a:tc>
                   <a:txBody>
                     <a:bodyPr/>
@@ -4900,7 +4900,7 @@
                 </a:solidFill>
                 <a:latin typeface="Aptos"/>
               </a:rPr>
-              <a:t>Julkinen riippumaton evidenssikooste · 2026.07.23-14 · 2026-07-22 · Lähteet: UN; Atlas</a:t>
+              <a:t>Julkinen riippumaton evidenssikooste · 2026.07.23-15 · 2026-07-22 · Lähteet: UN; Atlas</a:t>
             </a:r>
           </a:p>
         </p:txBody>
@@ -5768,7 +5768,7 @@
                 </a:solidFill>
                 <a:latin typeface="Aptos"/>
               </a:rPr>
-              <a:t>Julkinen riippumaton evidenssikooste · 2026.07.23-14 · 2026-07-22 · Lähteet: Health Canada; Destatis; Vero; Sejm; Ruotsin hallitus</a:t>
+              <a:t>Julkinen riippumaton evidenssikooste · 2026.07.23-15 · 2026-07-22 · Lähteet: Health Canada; Destatis; Vero; Sejm; Ruotsin hallitus</a:t>
             </a:r>
           </a:p>
         </p:txBody>
@@ -6522,7 +6522,7 @@
                 </a:solidFill>
                 <a:latin typeface="Aptos"/>
               </a:rPr>
-              <a:t>Julkinen riippumaton evidenssikooste · 2026.07.23-14 · 2026-07-22 · Lähteet: Health Canada 2024</a:t>
+              <a:t>Julkinen riippumaton evidenssikooste · 2026.07.23-15 · 2026-07-22 · Lähteet: Health Canada 2024</a:t>
             </a:r>
           </a:p>
         </p:txBody>
@@ -7127,7 +7127,7 @@
         <p:spPr>
           <a:xfrm>
             <a:off x="502920" y="621792"/>
-            <a:ext cx="11109960" cy="548640"/>
+            <a:ext cx="11109960" cy="804672"/>
           </a:xfrm>
           <a:prstGeom prst="rect">
             <a:avLst/>
@@ -7142,7 +7142,7 @@
           <a:p>
             <a:pPr algn="l"/>
             <a:r>
-              <a:rPr sz="3400" b="1">
+              <a:rPr sz="3000" b="1">
                 <a:solidFill>
                   <a:srgbClr val="071A2B"/>
                 </a:solidFill>
@@ -7161,7 +7161,7 @@
         </p:nvSpPr>
         <p:spPr>
           <a:xfrm>
-            <a:off x="502920" y="1225296"/>
+            <a:off x="502920" y="1444752"/>
             <a:ext cx="960120" cy="50292"/>
           </a:xfrm>
           <a:prstGeom prst="rect">
@@ -7273,7 +7273,7 @@
                 </a:solidFill>
                 <a:latin typeface="Aptos"/>
               </a:rPr>
-              <a:t>Julkinen riippumaton evidenssikooste · 2026.07.23-14 · 2026-07-22 · Lähteet: Destatis</a:t>
+              <a:t>Julkinen riippumaton evidenssikooste · 2026.07.23-15 · 2026-07-22 · Lähteet: Destatis</a:t>
             </a:r>
           </a:p>
         </p:txBody>
@@ -7322,8 +7322,8 @@
           <p:nvPr/>
         </p:nvGraphicFramePr>
         <p:xfrm>
-          <a:off x="530352" y="1536192"/>
-          <a:ext cx="11109958" cy="3977637"/>
+          <a:off x="530352" y="1719072"/>
+          <a:ext cx="11109958" cy="3794760"/>
         </p:xfrm>
         <a:graphic>
           <a:graphicData uri="http://schemas.openxmlformats.org/drawingml/2006/table">
@@ -7435,7 +7435,7 @@
                   </a:tcPr>
                 </a:tc>
               </a:tr>
-              <a:tr h="1179575">
+              <a:tr h="1118616">
                 <a:tc>
                   <a:txBody>
                     <a:bodyPr/>
@@ -7533,7 +7533,7 @@
                   </a:tcPr>
                 </a:tc>
               </a:tr>
-              <a:tr h="1179575">
+              <a:tr h="1118616">
                 <a:tc>
                   <a:txBody>
                     <a:bodyPr/>
@@ -7631,7 +7631,7 @@
                   </a:tcPr>
                 </a:tc>
               </a:tr>
-              <a:tr h="1179575">
+              <a:tr h="1118616">
                 <a:tc>
                   <a:txBody>
                     <a:bodyPr/>
@@ -7976,7 +7976,7 @@
                 </a:solidFill>
                 <a:latin typeface="Aptos"/>
               </a:rPr>
-              <a:t>Julkinen riippumaton evidenssikooste · 2026.07.23-14 · 2026-07-22 · Lähteet: Destatis; inTaste.de</a:t>
+              <a:t>Julkinen riippumaton evidenssikooste · 2026.07.23-15 · 2026-07-22 · Lähteet: Destatis; inTaste.de</a:t>
             </a:r>
           </a:p>
         </p:txBody>
@@ -8727,7 +8727,7 @@
                 </a:solidFill>
                 <a:latin typeface="Aptos"/>
               </a:rPr>
-              <a:t>Julkinen riippumaton evidenssikooste · 2026.07.23-14 · 2026-07-22 · Lähteet: IMARC; GVR; Fortune</a:t>
+              <a:t>Julkinen riippumaton evidenssikooste · 2026.07.23-15 · 2026-07-22 · Lähteet: IMARC; GVR; Fortune</a:t>
             </a:r>
           </a:p>
         </p:txBody>
@@ -9478,7 +9478,7 @@
                 </a:solidFill>
                 <a:latin typeface="Aptos"/>
               </a:rPr>
-              <a:t>Julkinen riippumaton evidenssikooste · 2026.07.23-14 · 2026-07-22 · Lähteet: Market-values modelReadiness</a:t>
+              <a:t>Julkinen riippumaton evidenssikooste · 2026.07.23-15 · 2026-07-22 · Lähteet: Market-values modelReadiness</a:t>
             </a:r>
           </a:p>
         </p:txBody>
@@ -9812,7 +9812,7 @@
         <p:spPr>
           <a:xfrm>
             <a:off x="502920" y="621792"/>
-            <a:ext cx="11109960" cy="548640"/>
+            <a:ext cx="11109960" cy="804672"/>
           </a:xfrm>
           <a:prstGeom prst="rect">
             <a:avLst/>
@@ -9827,7 +9827,7 @@
           <a:p>
             <a:pPr algn="l"/>
             <a:r>
-              <a:rPr sz="3400" b="1">
+              <a:rPr sz="3000" b="1">
                 <a:solidFill>
                   <a:srgbClr val="071A2B"/>
                 </a:solidFill>
@@ -9846,7 +9846,7 @@
         </p:nvSpPr>
         <p:spPr>
           <a:xfrm>
-            <a:off x="502920" y="1225296"/>
+            <a:off x="502920" y="1444752"/>
             <a:ext cx="960120" cy="50292"/>
           </a:xfrm>
           <a:prstGeom prst="rect">
@@ -9958,7 +9958,7 @@
                 </a:solidFill>
                 <a:latin typeface="Aptos"/>
               </a:rPr>
-              <a:t>Julkinen riippumaton evidenssikooste · 2026.07.23-14 · 2026-07-22 · Lähteet: WIPO valuation; Evidence Register</a:t>
+              <a:t>Julkinen riippumaton evidenssikooste · 2026.07.23-15 · 2026-07-22 · Lähteet: WIPO valuation; Evidence Register</a:t>
             </a:r>
           </a:p>
         </p:txBody>
@@ -10007,8 +10007,8 @@
           <p:nvPr/>
         </p:nvGraphicFramePr>
         <p:xfrm>
-          <a:off x="530352" y="1536192"/>
-          <a:ext cx="11109960" cy="3977637"/>
+          <a:off x="530352" y="1719072"/>
+          <a:ext cx="11109960" cy="3794757"/>
         </p:xfrm>
         <a:graphic>
           <a:graphicData uri="http://schemas.openxmlformats.org/drawingml/2006/table">
@@ -10095,7 +10095,7 @@
                   </a:tcPr>
                 </a:tc>
               </a:tr>
-              <a:tr h="707745">
+              <a:tr h="671169">
                 <a:tc>
                   <a:txBody>
                     <a:bodyPr/>
@@ -10169,7 +10169,7 @@
                   </a:tcPr>
                 </a:tc>
               </a:tr>
-              <a:tr h="707745">
+              <a:tr h="671169">
                 <a:tc>
                   <a:txBody>
                     <a:bodyPr/>
@@ -10243,7 +10243,7 @@
                   </a:tcPr>
                 </a:tc>
               </a:tr>
-              <a:tr h="707745">
+              <a:tr h="671169">
                 <a:tc>
                   <a:txBody>
                     <a:bodyPr/>
@@ -10317,7 +10317,7 @@
                   </a:tcPr>
                 </a:tc>
               </a:tr>
-              <a:tr h="707745">
+              <a:tr h="671169">
                 <a:tc>
                   <a:txBody>
                     <a:bodyPr/>
@@ -10391,7 +10391,7 @@
                   </a:tcPr>
                 </a:tc>
               </a:tr>
-              <a:tr h="707745">
+              <a:tr h="671169">
                 <a:tc>
                   <a:txBody>
                     <a:bodyPr/>
@@ -10712,7 +10712,7 @@
                 </a:solidFill>
                 <a:latin typeface="Aptos"/>
               </a:rPr>
-              <a:t>Julkinen riippumaton evidenssikooste · 2026.07.23-14 · 2026-07-22 · Lähteet: EPO; Saksa — viralliset tuomiot; WIPO</a:t>
+              <a:t>Julkinen riippumaton evidenssikooste · 2026.07.23-15 · 2026-07-22 · Lähteet: EPO; Saksa — viralliset tuomiot; WIPO</a:t>
             </a:r>
           </a:p>
         </p:txBody>
@@ -11192,7 +11192,7 @@
                 </a:solidFill>
                 <a:latin typeface="Aptos"/>
               </a:rPr>
-              <a:t>Julkinen riippumaton evidenssikooste · 2026.07.23-14 · 2026-07-22 · Lähteet: WIPO licensing; IP Finance</a:t>
+              <a:t>Julkinen riippumaton evidenssikooste · 2026.07.23-15 · 2026-07-22 · Lähteet: WIPO licensing; IP Finance</a:t>
             </a:r>
           </a:p>
         </p:txBody>
@@ -11526,7 +11526,7 @@
         <p:spPr>
           <a:xfrm>
             <a:off x="502920" y="621792"/>
-            <a:ext cx="11109960" cy="548640"/>
+            <a:ext cx="11109960" cy="804672"/>
           </a:xfrm>
           <a:prstGeom prst="rect">
             <a:avLst/>
@@ -11541,7 +11541,7 @@
           <a:p>
             <a:pPr algn="l"/>
             <a:r>
-              <a:rPr sz="3400" b="1">
+              <a:rPr sz="3000" b="1">
                 <a:solidFill>
                   <a:srgbClr val="071A2B"/>
                 </a:solidFill>
@@ -11560,7 +11560,7 @@
         </p:nvSpPr>
         <p:spPr>
           <a:xfrm>
-            <a:off x="502920" y="1225296"/>
+            <a:off x="502920" y="1444752"/>
             <a:ext cx="960120" cy="50292"/>
           </a:xfrm>
           <a:prstGeom prst="rect">
@@ -11672,7 +11672,7 @@
                 </a:solidFill>
                 <a:latin typeface="Aptos"/>
               </a:rPr>
-              <a:t>Julkinen riippumaton evidenssikooste · 2026.07.23-14 · 2026-07-22 · Lähteet: Evidence Register; EPO</a:t>
+              <a:t>Julkinen riippumaton evidenssikooste · 2026.07.23-15 · 2026-07-22 · Lähteet: Evidence Register; EPO</a:t>
             </a:r>
           </a:p>
         </p:txBody>
@@ -11721,8 +11721,8 @@
           <p:nvPr/>
         </p:nvGraphicFramePr>
         <p:xfrm>
-          <a:off x="530352" y="1536192"/>
-          <a:ext cx="11109958" cy="3977636"/>
+          <a:off x="530352" y="1719072"/>
+          <a:ext cx="11109958" cy="3794760"/>
         </p:xfrm>
         <a:graphic>
           <a:graphicData uri="http://schemas.openxmlformats.org/drawingml/2006/table">
@@ -11809,7 +11809,7 @@
                   </a:tcPr>
                 </a:tc>
               </a:tr>
-              <a:tr h="884681">
+              <a:tr h="838962">
                 <a:tc>
                   <a:txBody>
                     <a:bodyPr/>
@@ -11883,7 +11883,7 @@
                   </a:tcPr>
                 </a:tc>
               </a:tr>
-              <a:tr h="884681">
+              <a:tr h="838962">
                 <a:tc>
                   <a:txBody>
                     <a:bodyPr/>
@@ -11957,7 +11957,7 @@
                   </a:tcPr>
                 </a:tc>
               </a:tr>
-              <a:tr h="884681">
+              <a:tr h="838962">
                 <a:tc>
                   <a:txBody>
                     <a:bodyPr/>
@@ -12031,7 +12031,7 @@
                   </a:tcPr>
                 </a:tc>
               </a:tr>
-              <a:tr h="884681">
+              <a:tr h="838962">
                 <a:tc>
                   <a:txBody>
                     <a:bodyPr/>
@@ -12352,7 +12352,7 @@
                 </a:solidFill>
                 <a:latin typeface="Aptos"/>
               </a:rPr>
-              <a:t>Julkinen riippumaton evidenssikooste · 2026.07.23-14 · 2026-07-22 · Lähteet: EP3032975B2; 7 O 3341/24</a:t>
+              <a:t>Julkinen riippumaton evidenssikooste · 2026.07.23-15 · 2026-07-22 · Lähteet: EP3032975B2; 7 O 3341/24</a:t>
             </a:r>
           </a:p>
         </p:txBody>
@@ -13243,7 +13243,7 @@
                 </a:solidFill>
                 <a:latin typeface="Aptos"/>
               </a:rPr>
-              <a:t>Julkinen riippumaton evidenssikooste · 2026.07.23-14 · 2026-07-22 · Lähteet: WIPO dispute resolution; EPO IPscore</a:t>
+              <a:t>Julkinen riippumaton evidenssikooste · 2026.07.23-15 · 2026-07-22 · Lähteet: WIPO dispute resolution; EPO IPscore</a:t>
             </a:r>
           </a:p>
         </p:txBody>
@@ -13988,7 +13988,7 @@
         <p:spPr>
           <a:xfrm>
             <a:off x="502920" y="621792"/>
-            <a:ext cx="11109960" cy="548640"/>
+            <a:ext cx="11109960" cy="804672"/>
           </a:xfrm>
           <a:prstGeom prst="rect">
             <a:avLst/>
@@ -14003,7 +14003,7 @@
           <a:p>
             <a:pPr algn="l"/>
             <a:r>
-              <a:rPr sz="3400" b="1">
+              <a:rPr sz="3000" b="1">
                 <a:solidFill>
                   <a:srgbClr val="071A2B"/>
                 </a:solidFill>
@@ -14022,7 +14022,7 @@
         </p:nvSpPr>
         <p:spPr>
           <a:xfrm>
-            <a:off x="502920" y="1225296"/>
+            <a:off x="502920" y="1444752"/>
             <a:ext cx="960120" cy="50292"/>
           </a:xfrm>
           <a:prstGeom prst="rect">
@@ -14134,7 +14134,7 @@
                 </a:solidFill>
                 <a:latin typeface="Aptos"/>
               </a:rPr>
-              <a:t>Julkinen riippumaton evidenssikooste · 2026.07.23-14 · 2026-07-22 · Lähteet: WIPO licensing; IP Finance; TPLF mapping</a:t>
+              <a:t>Julkinen riippumaton evidenssikooste · 2026.07.23-15 · 2026-07-22 · Lähteet: WIPO licensing; IP Finance; TPLF mapping</a:t>
             </a:r>
           </a:p>
         </p:txBody>
@@ -14183,8 +14183,8 @@
           <p:nvPr/>
         </p:nvGraphicFramePr>
         <p:xfrm>
-          <a:off x="530352" y="1536192"/>
-          <a:ext cx="11109959" cy="3977637"/>
+          <a:off x="530352" y="1719072"/>
+          <a:ext cx="11109959" cy="3794757"/>
         </p:xfrm>
         <a:graphic>
           <a:graphicData uri="http://schemas.openxmlformats.org/drawingml/2006/table">
@@ -14271,7 +14271,7 @@
                   </a:tcPr>
                 </a:tc>
               </a:tr>
-              <a:tr h="707745">
+              <a:tr h="671169">
                 <a:tc>
                   <a:txBody>
                     <a:bodyPr/>
@@ -14345,7 +14345,7 @@
                   </a:tcPr>
                 </a:tc>
               </a:tr>
-              <a:tr h="707745">
+              <a:tr h="671169">
                 <a:tc>
                   <a:txBody>
                     <a:bodyPr/>
@@ -14419,7 +14419,7 @@
                   </a:tcPr>
                 </a:tc>
               </a:tr>
-              <a:tr h="707745">
+              <a:tr h="671169">
                 <a:tc>
                   <a:txBody>
                     <a:bodyPr/>
@@ -14493,7 +14493,7 @@
                   </a:tcPr>
                 </a:tc>
               </a:tr>
-              <a:tr h="707745">
+              <a:tr h="671169">
                 <a:tc>
                   <a:txBody>
                     <a:bodyPr/>
@@ -14567,7 +14567,7 @@
                   </a:tcPr>
                 </a:tc>
               </a:tr>
-              <a:tr h="707745">
+              <a:tr h="671169">
                 <a:tc>
                   <a:txBody>
                     <a:bodyPr/>
@@ -14888,7 +14888,7 @@
                 </a:solidFill>
                 <a:latin typeface="Aptos"/>
               </a:rPr>
-              <a:t>Julkinen riippumaton evidenssikooste · 2026.07.23-14 · 2026-07-22 · Lähteet: Evidence Register; WIPO valuation</a:t>
+              <a:t>Julkinen riippumaton evidenssikooste · 2026.07.23-15 · 2026-07-22 · Lähteet: Evidence Register; WIPO valuation</a:t>
             </a:r>
           </a:p>
         </p:txBody>
@@ -15716,7 +15716,7 @@
                 </a:solidFill>
                 <a:latin typeface="Aptos"/>
               </a:rPr>
-              <a:t>Julkinen riippumaton evidenssikooste · 2026.07.23-14 · 2026-07-22 · Lähteet: WIPO valuation</a:t>
+              <a:t>Julkinen riippumaton evidenssikooste · 2026.07.23-15 · 2026-07-22 · Lähteet: WIPO valuation</a:t>
             </a:r>
           </a:p>
         </p:txBody>
@@ -16469,7 +16469,7 @@
         <p:spPr>
           <a:xfrm>
             <a:off x="502920" y="621792"/>
-            <a:ext cx="11109960" cy="548640"/>
+            <a:ext cx="11109960" cy="804672"/>
           </a:xfrm>
           <a:prstGeom prst="rect">
             <a:avLst/>
@@ -16484,7 +16484,7 @@
           <a:p>
             <a:pPr algn="l"/>
             <a:r>
-              <a:rPr sz="3400" b="1">
+              <a:rPr sz="3000" b="1">
                 <a:solidFill>
                   <a:srgbClr val="071A2B"/>
                 </a:solidFill>
@@ -16503,7 +16503,7 @@
         </p:nvSpPr>
         <p:spPr>
           <a:xfrm>
-            <a:off x="502920" y="1225296"/>
+            <a:off x="502920" y="1444752"/>
             <a:ext cx="960120" cy="50292"/>
           </a:xfrm>
           <a:prstGeom prst="rect">
@@ -16615,7 +16615,7 @@
                 </a:solidFill>
                 <a:latin typeface="Aptos"/>
               </a:rPr>
-              <a:t>Julkinen riippumaton evidenssikooste · 2026.07.23-14 · 2026-07-22 · Lähteet: Evidence Register</a:t>
+              <a:t>Julkinen riippumaton evidenssikooste · 2026.07.23-15 · 2026-07-22 · Lähteet: Evidence Register</a:t>
             </a:r>
           </a:p>
         </p:txBody>
@@ -16664,8 +16664,8 @@
           <p:nvPr/>
         </p:nvGraphicFramePr>
         <p:xfrm>
-          <a:off x="530352" y="1536192"/>
-          <a:ext cx="11109959" cy="3977637"/>
+          <a:off x="530352" y="1719072"/>
+          <a:ext cx="11109959" cy="3794757"/>
         </p:xfrm>
         <a:graphic>
           <a:graphicData uri="http://schemas.openxmlformats.org/drawingml/2006/table">
@@ -16752,7 +16752,7 @@
                   </a:tcPr>
                 </a:tc>
               </a:tr>
-              <a:tr h="707745">
+              <a:tr h="671169">
                 <a:tc>
                   <a:txBody>
                     <a:bodyPr/>
@@ -16826,7 +16826,7 @@
                   </a:tcPr>
                 </a:tc>
               </a:tr>
-              <a:tr h="707745">
+              <a:tr h="671169">
                 <a:tc>
                   <a:txBody>
                     <a:bodyPr/>
@@ -16900,7 +16900,7 @@
                   </a:tcPr>
                 </a:tc>
               </a:tr>
-              <a:tr h="707745">
+              <a:tr h="671169">
                 <a:tc>
                   <a:txBody>
                     <a:bodyPr/>
@@ -16974,7 +16974,7 @@
                   </a:tcPr>
                 </a:tc>
               </a:tr>
-              <a:tr h="707745">
+              <a:tr h="671169">
                 <a:tc>
                   <a:txBody>
                     <a:bodyPr/>
@@ -17048,7 +17048,7 @@
                   </a:tcPr>
                 </a:tc>
               </a:tr>
-              <a:tr h="707745">
+              <a:tr h="671169">
                 <a:tc>
                   <a:txBody>
                     <a:bodyPr/>
@@ -17223,7 +17223,7 @@
         <p:spPr>
           <a:xfrm>
             <a:off x="502920" y="621792"/>
-            <a:ext cx="11109960" cy="548640"/>
+            <a:ext cx="11109960" cy="804672"/>
           </a:xfrm>
           <a:prstGeom prst="rect">
             <a:avLst/>
@@ -17238,7 +17238,7 @@
           <a:p>
             <a:pPr algn="l"/>
             <a:r>
-              <a:rPr sz="3400" b="1">
+              <a:rPr sz="3000" b="1">
                 <a:solidFill>
                   <a:srgbClr val="071A2B"/>
                 </a:solidFill>
@@ -17257,7 +17257,7 @@
         </p:nvSpPr>
         <p:spPr>
           <a:xfrm>
-            <a:off x="502920" y="1225296"/>
+            <a:off x="502920" y="1444752"/>
             <a:ext cx="960120" cy="50292"/>
           </a:xfrm>
           <a:prstGeom prst="rect">
@@ -17369,7 +17369,7 @@
                 </a:solidFill>
                 <a:latin typeface="Aptos"/>
               </a:rPr>
-              <a:t>Julkinen riippumaton evidenssikooste · 2026.07.23-14 · 2026-07-22 · Lähteet: Evidence Register</a:t>
+              <a:t>Julkinen riippumaton evidenssikooste · 2026.07.23-15 · 2026-07-22 · Lähteet: Evidence Register</a:t>
             </a:r>
           </a:p>
         </p:txBody>
@@ -17418,8 +17418,8 @@
           <p:nvPr/>
         </p:nvGraphicFramePr>
         <p:xfrm>
-          <a:off x="530352" y="1536192"/>
-          <a:ext cx="11109958" cy="3977634"/>
+          <a:off x="530352" y="1719072"/>
+          <a:ext cx="11109958" cy="3794760"/>
         </p:xfrm>
         <a:graphic>
           <a:graphicData uri="http://schemas.openxmlformats.org/drawingml/2006/table">
@@ -17506,7 +17506,7 @@
                   </a:tcPr>
                 </a:tc>
               </a:tr>
-              <a:tr h="589787">
+              <a:tr h="559308">
                 <a:tc>
                   <a:txBody>
                     <a:bodyPr/>
@@ -17580,7 +17580,7 @@
                   </a:tcPr>
                 </a:tc>
               </a:tr>
-              <a:tr h="589787">
+              <a:tr h="559308">
                 <a:tc>
                   <a:txBody>
                     <a:bodyPr/>
@@ -17654,7 +17654,7 @@
                   </a:tcPr>
                 </a:tc>
               </a:tr>
-              <a:tr h="589787">
+              <a:tr h="559308">
                 <a:tc>
                   <a:txBody>
                     <a:bodyPr/>
@@ -17728,7 +17728,7 @@
                   </a:tcPr>
                 </a:tc>
               </a:tr>
-              <a:tr h="589787">
+              <a:tr h="559308">
                 <a:tc>
                   <a:txBody>
                     <a:bodyPr/>
@@ -17802,7 +17802,7 @@
                   </a:tcPr>
                 </a:tc>
               </a:tr>
-              <a:tr h="589787">
+              <a:tr h="559308">
                 <a:tc>
                   <a:txBody>
                     <a:bodyPr/>
@@ -17876,7 +17876,7 @@
                   </a:tcPr>
                 </a:tc>
               </a:tr>
-              <a:tr h="589787">
+              <a:tr h="559308">
                 <a:tc>
                   <a:txBody>
                     <a:bodyPr/>
@@ -18197,7 +18197,7 @@
                 </a:solidFill>
                 <a:latin typeface="Aptos"/>
               </a:rPr>
-              <a:t>Julkinen riippumaton evidenssikooste · 2026.07.23-14 · 2026-07-22 · Lähteet: Evidence Register; changelog</a:t>
+              <a:t>Julkinen riippumaton evidenssikooste · 2026.07.23-15 · 2026-07-22 · Lähteet: Evidence Register; changelog</a:t>
             </a:r>
           </a:p>
         </p:txBody>
@@ -18942,7 +18942,7 @@
         <p:spPr>
           <a:xfrm>
             <a:off x="502920" y="621792"/>
-            <a:ext cx="11109960" cy="548640"/>
+            <a:ext cx="11109960" cy="804672"/>
           </a:xfrm>
           <a:prstGeom prst="rect">
             <a:avLst/>
@@ -18957,7 +18957,7 @@
           <a:p>
             <a:pPr algn="l"/>
             <a:r>
-              <a:rPr sz="3400" b="1">
+              <a:rPr sz="3000" b="1">
                 <a:solidFill>
                   <a:srgbClr val="071A2B"/>
                 </a:solidFill>
@@ -18976,7 +18976,7 @@
         </p:nvSpPr>
         <p:spPr>
           <a:xfrm>
-            <a:off x="502920" y="1225296"/>
+            <a:off x="502920" y="1444752"/>
             <a:ext cx="960120" cy="50292"/>
           </a:xfrm>
           <a:prstGeom prst="rect">
@@ -19088,7 +19088,7 @@
                 </a:solidFill>
                 <a:latin typeface="Aptos"/>
               </a:rPr>
-              <a:t>Julkinen riippumaton evidenssikooste · 2026.07.23-14 · 2026-07-22 · Lähteet: EPO; 8 Ni 18/24 (EP); 7 O 3341/24</a:t>
+              <a:t>Julkinen riippumaton evidenssikooste · 2026.07.23-15 · 2026-07-22 · Lähteet: EPO; 8 Ni 18/24 (EP); 7 O 3341/24</a:t>
             </a:r>
           </a:p>
         </p:txBody>
@@ -19137,8 +19137,8 @@
           <p:nvPr/>
         </p:nvGraphicFramePr>
         <p:xfrm>
-          <a:off x="530352" y="1536192"/>
-          <a:ext cx="11109959" cy="3977637"/>
+          <a:off x="530352" y="1719072"/>
+          <a:ext cx="11109959" cy="3794760"/>
         </p:xfrm>
         <a:graphic>
           <a:graphicData uri="http://schemas.openxmlformats.org/drawingml/2006/table">
@@ -19225,7 +19225,7 @@
                   </a:tcPr>
                 </a:tc>
               </a:tr>
-              <a:tr h="1179575">
+              <a:tr h="1118616">
                 <a:tc>
                   <a:txBody>
                     <a:bodyPr/>
@@ -19299,7 +19299,7 @@
                   </a:tcPr>
                 </a:tc>
               </a:tr>
-              <a:tr h="1179575">
+              <a:tr h="1118616">
                 <a:tc>
                   <a:txBody>
                     <a:bodyPr/>
@@ -19373,7 +19373,7 @@
                   </a:tcPr>
                 </a:tc>
               </a:tr>
-              <a:tr h="1179575">
+              <a:tr h="1118616">
                 <a:tc>
                   <a:txBody>
                     <a:bodyPr/>
@@ -19711,7 +19711,7 @@
                 </a:solidFill>
                 <a:latin typeface="Aptos"/>
               </a:rPr>
-              <a:t>Versio 2026.07.23-14 · 2026-07-22 · 30 / 30</a:t>
+              <a:t>Versio 2026.07.23-15 · 2026-07-22 · 30 / 30</a:t>
             </a:r>
           </a:p>
         </p:txBody>
@@ -19924,7 +19924,7 @@
                 </a:solidFill>
                 <a:latin typeface="Aptos"/>
               </a:rPr>
-              <a:t>Julkinen riippumaton evidenssikooste · 2026.07.23-14 · 2026-07-22 · Lähteet: Evidence Register; WIPO</a:t>
+              <a:t>Julkinen riippumaton evidenssikooste · 2026.07.23-15 · 2026-07-22 · Lähteet: Evidence Register; WIPO</a:t>
             </a:r>
           </a:p>
         </p:txBody>
@@ -20404,7 +20404,7 @@
                 </a:solidFill>
                 <a:latin typeface="Aptos"/>
               </a:rPr>
-              <a:t>Julkinen riippumaton evidenssikooste · 2026.07.23-14 · 2026-07-22 · Lähteet: EP3032975B2</a:t>
+              <a:t>Julkinen riippumaton evidenssikooste · 2026.07.23-15 · 2026-07-22 · Lähteet: EP3032975B2</a:t>
             </a:r>
           </a:p>
         </p:txBody>
@@ -20738,7 +20738,7 @@
         <p:spPr>
           <a:xfrm>
             <a:off x="502920" y="621792"/>
-            <a:ext cx="11109960" cy="548640"/>
+            <a:ext cx="11109960" cy="804672"/>
           </a:xfrm>
           <a:prstGeom prst="rect">
             <a:avLst/>
@@ -20753,7 +20753,7 @@
           <a:p>
             <a:pPr algn="l"/>
             <a:r>
-              <a:rPr sz="3400" b="1">
+              <a:rPr sz="3000" b="1">
                 <a:solidFill>
                   <a:srgbClr val="071A2B"/>
                 </a:solidFill>
@@ -20772,7 +20772,7 @@
         </p:nvSpPr>
         <p:spPr>
           <a:xfrm>
-            <a:off x="502920" y="1225296"/>
+            <a:off x="502920" y="1444752"/>
             <a:ext cx="960120" cy="50292"/>
           </a:xfrm>
           <a:prstGeom prst="rect">
@@ -20884,7 +20884,7 @@
                 </a:solidFill>
                 <a:latin typeface="Aptos"/>
               </a:rPr>
-              <a:t>Julkinen riippumaton evidenssikooste · 2026.07.23-14 · 2026-07-22 · Lähteet: EP3032975B2</a:t>
+              <a:t>Julkinen riippumaton evidenssikooste · 2026.07.23-15 · 2026-07-22 · Lähteet: EP3032975B2</a:t>
             </a:r>
           </a:p>
         </p:txBody>
@@ -20933,8 +20933,8 @@
           <p:nvPr/>
         </p:nvGraphicFramePr>
         <p:xfrm>
-          <a:off x="530352" y="1536192"/>
-          <a:ext cx="11109959" cy="3977637"/>
+          <a:off x="530352" y="1719072"/>
+          <a:ext cx="11109959" cy="3794757"/>
         </p:xfrm>
         <a:graphic>
           <a:graphicData uri="http://schemas.openxmlformats.org/drawingml/2006/table">
@@ -21021,7 +21021,7 @@
                   </a:tcPr>
                 </a:tc>
               </a:tr>
-              <a:tr h="707745">
+              <a:tr h="671169">
                 <a:tc>
                   <a:txBody>
                     <a:bodyPr/>
@@ -21095,7 +21095,7 @@
                   </a:tcPr>
                 </a:tc>
               </a:tr>
-              <a:tr h="707745">
+              <a:tr h="671169">
                 <a:tc>
                   <a:txBody>
                     <a:bodyPr/>
@@ -21169,7 +21169,7 @@
                   </a:tcPr>
                 </a:tc>
               </a:tr>
-              <a:tr h="707745">
+              <a:tr h="671169">
                 <a:tc>
                   <a:txBody>
                     <a:bodyPr/>
@@ -21243,7 +21243,7 @@
                   </a:tcPr>
                 </a:tc>
               </a:tr>
-              <a:tr h="707745">
+              <a:tr h="671169">
                 <a:tc>
                   <a:txBody>
                     <a:bodyPr/>
@@ -21317,7 +21317,7 @@
                   </a:tcPr>
                 </a:tc>
               </a:tr>
-              <a:tr h="707745">
+              <a:tr h="671169">
                 <a:tc>
                   <a:txBody>
                     <a:bodyPr/>
@@ -21638,7 +21638,7 @@
                 </a:solidFill>
                 <a:latin typeface="Aptos"/>
               </a:rPr>
-              <a:t>Julkinen riippumaton evidenssikooste · 2026.07.23-14 · 2026-07-22 · Lähteet: EPO Register; B2</a:t>
+              <a:t>Julkinen riippumaton evidenssikooste · 2026.07.23-15 · 2026-07-22 · Lähteet: EPO Register; B2</a:t>
             </a:r>
           </a:p>
         </p:txBody>
@@ -22389,7 +22389,7 @@
                 </a:solidFill>
                 <a:latin typeface="Aptos"/>
               </a:rPr>
-              <a:t>Julkinen riippumaton evidenssikooste · 2026.07.23-14 · 2026-07-22 · Lähteet: EPO family; kansalliset rekisterit</a:t>
+              <a:t>Julkinen riippumaton evidenssikooste · 2026.07.23-15 · 2026-07-22 · Lähteet: EPO family; kansalliset rekisterit</a:t>
             </a:r>
           </a:p>
         </p:txBody>
@@ -23111,7 +23111,7 @@
         <p:spPr>
           <a:xfrm>
             <a:off x="502920" y="621792"/>
-            <a:ext cx="11109960" cy="548640"/>
+            <a:ext cx="11109960" cy="804672"/>
           </a:xfrm>
           <a:prstGeom prst="rect">
             <a:avLst/>
@@ -23126,7 +23126,7 @@
           <a:p>
             <a:pPr algn="l"/>
             <a:r>
-              <a:rPr sz="3400" b="1">
+              <a:rPr sz="3000" b="1">
                 <a:solidFill>
                   <a:srgbClr val="071A2B"/>
                 </a:solidFill>
@@ -23145,7 +23145,7 @@
         </p:nvSpPr>
         <p:spPr>
           <a:xfrm>
-            <a:off x="502920" y="1225296"/>
+            <a:off x="502920" y="1444752"/>
             <a:ext cx="960120" cy="50292"/>
           </a:xfrm>
           <a:prstGeom prst="rect">
@@ -23257,7 +23257,7 @@
                 </a:solidFill>
                 <a:latin typeface="Aptos"/>
               </a:rPr>
-              <a:t>Julkinen riippumaton evidenssikooste · 2026.07.23-14 · 2026-07-22 · Lähteet: Viralliset tuomiot: 8 Ni 18/24 (EP); 7 O 3341/24</a:t>
+              <a:t>Julkinen riippumaton evidenssikooste · 2026.07.23-15 · 2026-07-22 · Lähteet: Viralliset tuomiot: 8 Ni 18/24 (EP); 7 O 3341/24</a:t>
             </a:r>
           </a:p>
         </p:txBody>
@@ -23306,8 +23306,8 @@
           <p:nvPr/>
         </p:nvGraphicFramePr>
         <p:xfrm>
-          <a:off x="530352" y="1536192"/>
-          <a:ext cx="11109959" cy="3977638"/>
+          <a:off x="530352" y="1719072"/>
+          <a:ext cx="11109959" cy="3794760"/>
         </p:xfrm>
         <a:graphic>
           <a:graphicData uri="http://schemas.openxmlformats.org/drawingml/2006/table">
@@ -23394,7 +23394,7 @@
                   </a:tcPr>
                 </a:tc>
               </a:tr>
-              <a:tr h="1769363">
+              <a:tr h="1677924">
                 <a:tc>
                   <a:txBody>
                     <a:bodyPr/>
@@ -23468,7 +23468,7 @@
                   </a:tcPr>
                 </a:tc>
               </a:tr>
-              <a:tr h="1769363">
+              <a:tr h="1677924">
                 <a:tc>
                   <a:txBody>
                     <a:bodyPr/>

--- a/site/downloads/pixan-bank-deck-large-fi.pptx
+++ b/site/downloads/pixan-bank-deck-large-fi.pptx
@@ -3386,7 +3386,7 @@
                 </a:solidFill>
                 <a:latin typeface="Aptos"/>
               </a:rPr>
-              <a:t>2026.07.23-15</a:t>
+              <a:t>2026.07.23-16</a:t>
             </a:r>
           </a:p>
         </p:txBody>
@@ -3740,7 +3740,7 @@
                 </a:solidFill>
                 <a:latin typeface="Aptos"/>
               </a:rPr>
-              <a:t>Julkinen riippumaton evidenssikooste · 2026.07.23-15 · 2026-07-22 · Lähteet: RPX; CNIPA guidance; EPO family</a:t>
+              <a:t>Julkinen riippumaton evidenssikooste · 2026.07.23-16 · 2026-07-22 · Lähteet: RPX; CNIPA guidance; EPO family</a:t>
             </a:r>
           </a:p>
         </p:txBody>
@@ -4220,7 +4220,7 @@
                 </a:solidFill>
                 <a:latin typeface="Aptos"/>
               </a:rPr>
-              <a:t>Julkinen riippumaton evidenssikooste · 2026.07.23-15 · 2026-07-22 · Lähteet: IP Australia; PRH; EPO; EPO / UPC; USPTO</a:t>
+              <a:t>Julkinen riippumaton evidenssikooste · 2026.07.23-16 · 2026-07-22 · Lähteet: IP Australia; PRH; EPO; EPO / UPC; USPTO</a:t>
             </a:r>
           </a:p>
         </p:txBody>
@@ -4900,7 +4900,7 @@
                 </a:solidFill>
                 <a:latin typeface="Aptos"/>
               </a:rPr>
-              <a:t>Julkinen riippumaton evidenssikooste · 2026.07.23-15 · 2026-07-22 · Lähteet: UN; Atlas</a:t>
+              <a:t>Julkinen riippumaton evidenssikooste · 2026.07.23-16 · 2026-07-22 · Lähteet: UN; Atlas</a:t>
             </a:r>
           </a:p>
         </p:txBody>
@@ -5768,7 +5768,7 @@
                 </a:solidFill>
                 <a:latin typeface="Aptos"/>
               </a:rPr>
-              <a:t>Julkinen riippumaton evidenssikooste · 2026.07.23-15 · 2026-07-22 · Lähteet: Health Canada; Destatis; Vero; Sejm; Ruotsin hallitus</a:t>
+              <a:t>Julkinen riippumaton evidenssikooste · 2026.07.23-16 · 2026-07-22 · Lähteet: Health Canada; Destatis; Vero; Sejm; Ruotsin hallitus</a:t>
             </a:r>
           </a:p>
         </p:txBody>
@@ -6522,7 +6522,7 @@
                 </a:solidFill>
                 <a:latin typeface="Aptos"/>
               </a:rPr>
-              <a:t>Julkinen riippumaton evidenssikooste · 2026.07.23-15 · 2026-07-22 · Lähteet: Health Canada 2024</a:t>
+              <a:t>Julkinen riippumaton evidenssikooste · 2026.07.23-16 · 2026-07-22 · Lähteet: Health Canada 2024</a:t>
             </a:r>
           </a:p>
         </p:txBody>
@@ -7273,7 +7273,7 @@
                 </a:solidFill>
                 <a:latin typeface="Aptos"/>
               </a:rPr>
-              <a:t>Julkinen riippumaton evidenssikooste · 2026.07.23-15 · 2026-07-22 · Lähteet: Destatis</a:t>
+              <a:t>Julkinen riippumaton evidenssikooste · 2026.07.23-16 · 2026-07-22 · Lähteet: Destatis</a:t>
             </a:r>
           </a:p>
         </p:txBody>
@@ -7976,7 +7976,7 @@
                 </a:solidFill>
                 <a:latin typeface="Aptos"/>
               </a:rPr>
-              <a:t>Julkinen riippumaton evidenssikooste · 2026.07.23-15 · 2026-07-22 · Lähteet: Destatis; inTaste.de</a:t>
+              <a:t>Julkinen riippumaton evidenssikooste · 2026.07.23-16 · 2026-07-22 · Lähteet: Destatis; inTaste.de</a:t>
             </a:r>
           </a:p>
         </p:txBody>
@@ -8727,7 +8727,7 @@
                 </a:solidFill>
                 <a:latin typeface="Aptos"/>
               </a:rPr>
-              <a:t>Julkinen riippumaton evidenssikooste · 2026.07.23-15 · 2026-07-22 · Lähteet: IMARC; GVR; Fortune</a:t>
+              <a:t>Julkinen riippumaton evidenssikooste · 2026.07.23-16 · 2026-07-22 · Lähteet: IMARC; GVR; Fortune</a:t>
             </a:r>
           </a:p>
         </p:txBody>
@@ -9478,7 +9478,7 @@
                 </a:solidFill>
                 <a:latin typeface="Aptos"/>
               </a:rPr>
-              <a:t>Julkinen riippumaton evidenssikooste · 2026.07.23-15 · 2026-07-22 · Lähteet: Market-values modelReadiness</a:t>
+              <a:t>Julkinen riippumaton evidenssikooste · 2026.07.23-16 · 2026-07-22 · Lähteet: Market-values modelReadiness</a:t>
             </a:r>
           </a:p>
         </p:txBody>
@@ -9958,7 +9958,7 @@
                 </a:solidFill>
                 <a:latin typeface="Aptos"/>
               </a:rPr>
-              <a:t>Julkinen riippumaton evidenssikooste · 2026.07.23-15 · 2026-07-22 · Lähteet: WIPO valuation; Evidence Register</a:t>
+              <a:t>Julkinen riippumaton evidenssikooste · 2026.07.23-16 · 2026-07-22 · Lähteet: WIPO valuation; Evidence Register</a:t>
             </a:r>
           </a:p>
         </p:txBody>
@@ -10712,7 +10712,7 @@
                 </a:solidFill>
                 <a:latin typeface="Aptos"/>
               </a:rPr>
-              <a:t>Julkinen riippumaton evidenssikooste · 2026.07.23-15 · 2026-07-22 · Lähteet: EPO; Saksa — viralliset tuomiot; WIPO</a:t>
+              <a:t>Julkinen riippumaton evidenssikooste · 2026.07.23-16 · 2026-07-22 · Lähteet: EPO; Saksa — viralliset tuomiot; WIPO</a:t>
             </a:r>
           </a:p>
         </p:txBody>
@@ -11192,7 +11192,7 @@
                 </a:solidFill>
                 <a:latin typeface="Aptos"/>
               </a:rPr>
-              <a:t>Julkinen riippumaton evidenssikooste · 2026.07.23-15 · 2026-07-22 · Lähteet: WIPO licensing; IP Finance</a:t>
+              <a:t>Julkinen riippumaton evidenssikooste · 2026.07.23-16 · 2026-07-22 · Lähteet: WIPO licensing; IP Finance</a:t>
             </a:r>
           </a:p>
         </p:txBody>
@@ -11672,7 +11672,7 @@
                 </a:solidFill>
                 <a:latin typeface="Aptos"/>
               </a:rPr>
-              <a:t>Julkinen riippumaton evidenssikooste · 2026.07.23-15 · 2026-07-22 · Lähteet: Evidence Register; EPO</a:t>
+              <a:t>Julkinen riippumaton evidenssikooste · 2026.07.23-16 · 2026-07-22 · Lähteet: Evidence Register; EPO</a:t>
             </a:r>
           </a:p>
         </p:txBody>
@@ -12352,7 +12352,7 @@
                 </a:solidFill>
                 <a:latin typeface="Aptos"/>
               </a:rPr>
-              <a:t>Julkinen riippumaton evidenssikooste · 2026.07.23-15 · 2026-07-22 · Lähteet: EP3032975B2; 7 O 3341/24</a:t>
+              <a:t>Julkinen riippumaton evidenssikooste · 2026.07.23-16 · 2026-07-22 · Lähteet: EP3032975B2; 7 O 3341/24</a:t>
             </a:r>
           </a:p>
         </p:txBody>
@@ -13243,7 +13243,7 @@
                 </a:solidFill>
                 <a:latin typeface="Aptos"/>
               </a:rPr>
-              <a:t>Julkinen riippumaton evidenssikooste · 2026.07.23-15 · 2026-07-22 · Lähteet: WIPO dispute resolution; EPO IPscore</a:t>
+              <a:t>Julkinen riippumaton evidenssikooste · 2026.07.23-16 · 2026-07-22 · Lähteet: WIPO dispute resolution; EPO IPscore</a:t>
             </a:r>
           </a:p>
         </p:txBody>
@@ -14134,7 +14134,7 @@
                 </a:solidFill>
                 <a:latin typeface="Aptos"/>
               </a:rPr>
-              <a:t>Julkinen riippumaton evidenssikooste · 2026.07.23-15 · 2026-07-22 · Lähteet: WIPO licensing; IP Finance; TPLF mapping</a:t>
+              <a:t>Julkinen riippumaton evidenssikooste · 2026.07.23-16 · 2026-07-22 · Lähteet: WIPO licensing; IP Finance; TPLF mapping</a:t>
             </a:r>
           </a:p>
         </p:txBody>
@@ -14888,7 +14888,7 @@
                 </a:solidFill>
                 <a:latin typeface="Aptos"/>
               </a:rPr>
-              <a:t>Julkinen riippumaton evidenssikooste · 2026.07.23-15 · 2026-07-22 · Lähteet: Evidence Register; WIPO valuation</a:t>
+              <a:t>Julkinen riippumaton evidenssikooste · 2026.07.23-16 · 2026-07-22 · Lähteet: Evidence Register; WIPO valuation</a:t>
             </a:r>
           </a:p>
         </p:txBody>
@@ -15716,7 +15716,7 @@
                 </a:solidFill>
                 <a:latin typeface="Aptos"/>
               </a:rPr>
-              <a:t>Julkinen riippumaton evidenssikooste · 2026.07.23-15 · 2026-07-22 · Lähteet: WIPO valuation</a:t>
+              <a:t>Julkinen riippumaton evidenssikooste · 2026.07.23-16 · 2026-07-22 · Lähteet: WIPO valuation</a:t>
             </a:r>
           </a:p>
         </p:txBody>
@@ -16615,7 +16615,7 @@
                 </a:solidFill>
                 <a:latin typeface="Aptos"/>
               </a:rPr>
-              <a:t>Julkinen riippumaton evidenssikooste · 2026.07.23-15 · 2026-07-22 · Lähteet: Evidence Register</a:t>
+              <a:t>Julkinen riippumaton evidenssikooste · 2026.07.23-16 · 2026-07-22 · Lähteet: Evidence Register</a:t>
             </a:r>
           </a:p>
         </p:txBody>
@@ -17369,7 +17369,7 @@
                 </a:solidFill>
                 <a:latin typeface="Aptos"/>
               </a:rPr>
-              <a:t>Julkinen riippumaton evidenssikooste · 2026.07.23-15 · 2026-07-22 · Lähteet: Evidence Register</a:t>
+              <a:t>Julkinen riippumaton evidenssikooste · 2026.07.23-16 · 2026-07-22 · Lähteet: Evidence Register</a:t>
             </a:r>
           </a:p>
         </p:txBody>
@@ -18197,7 +18197,7 @@
                 </a:solidFill>
                 <a:latin typeface="Aptos"/>
               </a:rPr>
-              <a:t>Julkinen riippumaton evidenssikooste · 2026.07.23-15 · 2026-07-22 · Lähteet: Evidence Register; changelog</a:t>
+              <a:t>Julkinen riippumaton evidenssikooste · 2026.07.23-16 · 2026-07-22 · Lähteet: Evidence Register; changelog</a:t>
             </a:r>
           </a:p>
         </p:txBody>
@@ -19088,7 +19088,7 @@
                 </a:solidFill>
                 <a:latin typeface="Aptos"/>
               </a:rPr>
-              <a:t>Julkinen riippumaton evidenssikooste · 2026.07.23-15 · 2026-07-22 · Lähteet: EPO; 8 Ni 18/24 (EP); 7 O 3341/24</a:t>
+              <a:t>Julkinen riippumaton evidenssikooste · 2026.07.23-16 · 2026-07-22 · Lähteet: EPO; 8 Ni 18/24 (EP); 7 O 3341/24</a:t>
             </a:r>
           </a:p>
         </p:txBody>
@@ -19711,7 +19711,7 @@
                 </a:solidFill>
                 <a:latin typeface="Aptos"/>
               </a:rPr>
-              <a:t>Versio 2026.07.23-15 · 2026-07-22 · 30 / 30</a:t>
+              <a:t>Versio 2026.07.23-16 · 2026-07-22 · 30 / 30</a:t>
             </a:r>
           </a:p>
         </p:txBody>
@@ -19924,7 +19924,7 @@
                 </a:solidFill>
                 <a:latin typeface="Aptos"/>
               </a:rPr>
-              <a:t>Julkinen riippumaton evidenssikooste · 2026.07.23-15 · 2026-07-22 · Lähteet: Evidence Register; WIPO</a:t>
+              <a:t>Julkinen riippumaton evidenssikooste · 2026.07.23-16 · 2026-07-22 · Lähteet: Evidence Register; WIPO</a:t>
             </a:r>
           </a:p>
         </p:txBody>
@@ -20404,7 +20404,7 @@
                 </a:solidFill>
                 <a:latin typeface="Aptos"/>
               </a:rPr>
-              <a:t>Julkinen riippumaton evidenssikooste · 2026.07.23-15 · 2026-07-22 · Lähteet: EP3032975B2</a:t>
+              <a:t>Julkinen riippumaton evidenssikooste · 2026.07.23-16 · 2026-07-22 · Lähteet: EP3032975B2</a:t>
             </a:r>
           </a:p>
         </p:txBody>
@@ -20884,7 +20884,7 @@
                 </a:solidFill>
                 <a:latin typeface="Aptos"/>
               </a:rPr>
-              <a:t>Julkinen riippumaton evidenssikooste · 2026.07.23-15 · 2026-07-22 · Lähteet: EP3032975B2</a:t>
+              <a:t>Julkinen riippumaton evidenssikooste · 2026.07.23-16 · 2026-07-22 · Lähteet: EP3032975B2</a:t>
             </a:r>
           </a:p>
         </p:txBody>
@@ -21638,7 +21638,7 @@
                 </a:solidFill>
                 <a:latin typeface="Aptos"/>
               </a:rPr>
-              <a:t>Julkinen riippumaton evidenssikooste · 2026.07.23-15 · 2026-07-22 · Lähteet: EPO Register; B2</a:t>
+              <a:t>Julkinen riippumaton evidenssikooste · 2026.07.23-16 · 2026-07-22 · Lähteet: EPO Register; B2</a:t>
             </a:r>
           </a:p>
         </p:txBody>
@@ -22389,7 +22389,7 @@
                 </a:solidFill>
                 <a:latin typeface="Aptos"/>
               </a:rPr>
-              <a:t>Julkinen riippumaton evidenssikooste · 2026.07.23-15 · 2026-07-22 · Lähteet: EPO family; kansalliset rekisterit</a:t>
+              <a:t>Julkinen riippumaton evidenssikooste · 2026.07.23-16 · 2026-07-22 · Lähteet: EPO family; kansalliset rekisterit</a:t>
             </a:r>
           </a:p>
         </p:txBody>
@@ -23257,7 +23257,7 @@
                 </a:solidFill>
                 <a:latin typeface="Aptos"/>
               </a:rPr>
-              <a:t>Julkinen riippumaton evidenssikooste · 2026.07.23-15 · 2026-07-22 · Lähteet: Viralliset tuomiot: 8 Ni 18/24 (EP); 7 O 3341/24</a:t>
+              <a:t>Julkinen riippumaton evidenssikooste · 2026.07.23-16 · 2026-07-22 · Lähteet: Viralliset tuomiot: 8 Ni 18/24 (EP); 7 O 3341/24</a:t>
             </a:r>
           </a:p>
         </p:txBody>

--- a/site/downloads/pixan-bank-deck-large-fi.pptx
+++ b/site/downloads/pixan-bank-deck-large-fi.pptx
@@ -3386,7 +3386,7 @@
                 </a:solidFill>
                 <a:latin typeface="Aptos"/>
               </a:rPr>
-              <a:t>2026.07.23-16</a:t>
+              <a:t>2026.07.24-17</a:t>
             </a:r>
           </a:p>
         </p:txBody>
@@ -3421,7 +3421,7 @@
                 </a:solidFill>
                 <a:latin typeface="Aptos"/>
               </a:rPr>
-              <a:t>Päivitetty 2026-07-22
+              <a:t>Päivitetty 2026-07-24
 30 diaa · suomeksi</a:t>
             </a:r>
           </a:p>
@@ -3740,7 +3740,7 @@
                 </a:solidFill>
                 <a:latin typeface="Aptos"/>
               </a:rPr>
-              <a:t>Julkinen riippumaton evidenssikooste · 2026.07.23-16 · 2026-07-22 · Lähteet: RPX; CNIPA guidance; EPO family</a:t>
+              <a:t>Julkinen riippumaton evidenssikooste · 2026.07.24-17 · 2026-07-24 · Lähteet: RPX; CNIPA guidance; EPO family</a:t>
             </a:r>
           </a:p>
         </p:txBody>
@@ -4108,7 +4108,7 @@
         </p:nvSpPr>
         <p:spPr>
           <a:xfrm>
-            <a:off x="502920" y="1444752"/>
+            <a:off x="502920" y="1554480"/>
             <a:ext cx="960120" cy="50292"/>
           </a:xfrm>
           <a:prstGeom prst="rect">
@@ -4220,7 +4220,7 @@
                 </a:solidFill>
                 <a:latin typeface="Aptos"/>
               </a:rPr>
-              <a:t>Julkinen riippumaton evidenssikooste · 2026.07.23-16 · 2026-07-22 · Lähteet: IP Australia; PRH; EPO; EPO / UPC; USPTO</a:t>
+              <a:t>Julkinen riippumaton evidenssikooste · 2026.07.24-17 · 2026-07-24 · Lähteet: IP Australia; PRH; EPO; EPO / UPC; USPTO</a:t>
             </a:r>
           </a:p>
         </p:txBody>
@@ -4900,7 +4900,7 @@
                 </a:solidFill>
                 <a:latin typeface="Aptos"/>
               </a:rPr>
-              <a:t>Julkinen riippumaton evidenssikooste · 2026.07.23-16 · 2026-07-22 · Lähteet: UN; Atlas</a:t>
+              <a:t>Julkinen riippumaton evidenssikooste · 2026.07.24-17 · 2026-07-24 · Lähteet: UN; Atlas</a:t>
             </a:r>
           </a:p>
         </p:txBody>
@@ -5622,7 +5622,7 @@
         <p:spPr>
           <a:xfrm>
             <a:off x="502920" y="621792"/>
-            <a:ext cx="11109960" cy="548640"/>
+            <a:ext cx="11109960" cy="804672"/>
           </a:xfrm>
           <a:prstGeom prst="rect">
             <a:avLst/>
@@ -5637,13 +5637,13 @@
           <a:p>
             <a:pPr algn="l"/>
             <a:r>
-              <a:rPr sz="3400" b="1">
+              <a:rPr sz="3000" b="1">
                 <a:solidFill>
                   <a:srgbClr val="071A2B"/>
                 </a:solidFill>
                 <a:latin typeface="Aptos"/>
               </a:rPr>
-              <a:t>Viralliset havainnot 5 maasta mittaavat eri asioita</a:t>
+              <a:t>20 virallista havaintoa 6 maasta mittaavat eri asioita</a:t>
             </a:r>
           </a:p>
         </p:txBody>
@@ -5656,7 +5656,7 @@
         </p:nvSpPr>
         <p:spPr>
           <a:xfrm>
-            <a:off x="502920" y="1225296"/>
+            <a:off x="502920" y="1554480"/>
             <a:ext cx="960120" cy="50292"/>
           </a:xfrm>
           <a:prstGeom prst="rect">
@@ -5768,7 +5768,7 @@
                 </a:solidFill>
                 <a:latin typeface="Aptos"/>
               </a:rPr>
-              <a:t>Julkinen riippumaton evidenssikooste · 2026.07.23-16 · 2026-07-22 · Lähteet: Health Canada; Destatis; Vero; Sejm; Ruotsin hallitus</a:t>
+              <a:t>Julkinen riippumaton evidenssikooste · 2026.07.24-17 · 2026-07-24 · Lähteet: Health Canada; New Zealand Ministry of Health; Destatis; Vero; Sejm; Ruotsin hallitus</a:t>
             </a:r>
           </a:p>
         </p:txBody>
@@ -5817,8 +5817,8 @@
           <p:nvPr/>
         </p:nvGraphicFramePr>
         <p:xfrm>
-          <a:off x="530352" y="1536192"/>
-          <a:ext cx="11109960" cy="3977637"/>
+          <a:off x="530352" y="1719072"/>
+          <a:ext cx="11109960" cy="3794760"/>
         </p:xfrm>
         <a:graphic>
           <a:graphicData uri="http://schemas.openxmlformats.org/drawingml/2006/table">
@@ -5905,7 +5905,7 @@
                   </a:tcPr>
                 </a:tc>
               </a:tr>
-              <a:tr h="707745">
+              <a:tr h="559308">
                 <a:tc>
                   <a:txBody>
                     <a:bodyPr/>
@@ -5979,7 +5979,7 @@
                   </a:tcPr>
                 </a:tc>
               </a:tr>
-              <a:tr h="707745">
+              <a:tr h="559308">
                 <a:tc>
                   <a:txBody>
                     <a:bodyPr/>
@@ -6053,7 +6053,7 @@
                   </a:tcPr>
                 </a:tc>
               </a:tr>
-              <a:tr h="707745">
+              <a:tr h="559308">
                 <a:tc>
                   <a:txBody>
                     <a:bodyPr/>
@@ -6127,7 +6127,7 @@
                   </a:tcPr>
                 </a:tc>
               </a:tr>
-              <a:tr h="707745">
+              <a:tr h="559308">
                 <a:tc>
                   <a:txBody>
                     <a:bodyPr/>
@@ -6142,7 +6142,7 @@
                         </a:defRPr>
                       </a:pPr>
                       <a:r>
-                        <a:t>Puola</a:t>
+                        <a:t>Uusi-Seelanti</a:t>
                       </a:r>
                     </a:p>
                   </a:txBody>
@@ -6166,7 +6166,7 @@
                         </a:defRPr>
                       </a:pPr>
                       <a:r>
-                        <a:t>2023 / 2025</a:t>
+                        <a:t>2022–2024</a:t>
                       </a:r>
                     </a:p>
                   </a:txBody>
@@ -6190,7 +6190,7 @@
                         </a:defRPr>
                       </a:pPr>
                       <a:r>
-                        <a:t>805 441 l; 993,1 milj. PLN valmisteveroa</a:t>
+                        <a:t>otsikko vähintään 280 milj. NZD; 280,685 milj. NZD 29 tiedoston raakasumma; 264,561 milj. NZD toistorivien poistamisen herkkyys, ei korjattu estimaatti</a:t>
                       </a:r>
                     </a:p>
                   </a:txBody>
@@ -6201,7 +6201,7 @@
                   </a:tcPr>
                 </a:tc>
               </a:tr>
-              <a:tr h="707745">
+              <a:tr h="559308">
                 <a:tc>
                   <a:txBody>
                     <a:bodyPr/>
@@ -6216,7 +6216,7 @@
                         </a:defRPr>
                       </a:pPr>
                       <a:r>
-                        <a:t>Ruotsi</a:t>
+                        <a:t>Puola</a:t>
                       </a:r>
                     </a:p>
                   </a:txBody>
@@ -6240,7 +6240,7 @@
                         </a:defRPr>
                       </a:pPr>
                       <a:r>
-                        <a:t>2024</a:t>
+                        <a:t>2023 / 2025</a:t>
                       </a:r>
                     </a:p>
                   </a:txBody>
@@ -6264,13 +6264,87 @@
                         </a:defRPr>
                       </a:pPr>
                       <a:r>
+                        <a:t>805 441 l; 993,1 milj. PLN valmisteveroa</a:t>
+                      </a:r>
+                    </a:p>
+                  </a:txBody>
+                  <a:tcPr marL="73152" marR="73152" marT="36576" marB="36576">
+                    <a:solidFill>
+                      <a:srgbClr val="FFFFFF"/>
+                    </a:solidFill>
+                  </a:tcPr>
+                </a:tc>
+              </a:tr>
+              <a:tr h="559308">
+                <a:tc>
+                  <a:txBody>
+                    <a:bodyPr/>
+                    <a:lstStyle/>
+                    <a:p>
+                      <a:pPr algn="l">
+                        <a:defRPr sz="1320">
+                          <a:solidFill>
+                            <a:srgbClr val="182935"/>
+                          </a:solidFill>
+                          <a:latin typeface="Aptos"/>
+                        </a:defRPr>
+                      </a:pPr>
+                      <a:r>
+                        <a:t>Ruotsi</a:t>
+                      </a:r>
+                    </a:p>
+                  </a:txBody>
+                  <a:tcPr marL="73152" marR="73152" marT="36576" marB="36576">
+                    <a:solidFill>
+                      <a:srgbClr val="F6F9FA"/>
+                    </a:solidFill>
+                  </a:tcPr>
+                </a:tc>
+                <a:tc>
+                  <a:txBody>
+                    <a:bodyPr/>
+                    <a:lstStyle/>
+                    <a:p>
+                      <a:pPr algn="l">
+                        <a:defRPr sz="1320">
+                          <a:solidFill>
+                            <a:srgbClr val="182935"/>
+                          </a:solidFill>
+                          <a:latin typeface="Aptos"/>
+                        </a:defRPr>
+                      </a:pPr>
+                      <a:r>
+                        <a:t>2024</a:t>
+                      </a:r>
+                    </a:p>
+                  </a:txBody>
+                  <a:tcPr marL="73152" marR="73152" marT="36576" marB="36576">
+                    <a:solidFill>
+                      <a:srgbClr val="F6F9FA"/>
+                    </a:solidFill>
+                  </a:tcPr>
+                </a:tc>
+                <a:tc>
+                  <a:txBody>
+                    <a:bodyPr/>
+                    <a:lstStyle/>
+                    <a:p>
+                      <a:pPr algn="l">
+                        <a:defRPr sz="1320">
+                          <a:solidFill>
+                            <a:srgbClr val="182935"/>
+                          </a:solidFill>
+                          <a:latin typeface="Aptos"/>
+                        </a:defRPr>
+                      </a:pPr>
+                      <a:r>
                         <a:t>26 000 l; 80 milj. SEK valmisteveroa</a:t>
                       </a:r>
                     </a:p>
                   </a:txBody>
                   <a:tcPr marL="73152" marR="73152" marT="36576" marB="36576">
                     <a:solidFill>
-                      <a:srgbClr val="FFFFFF"/>
+                      <a:srgbClr val="F6F9FA"/>
                     </a:solidFill>
                   </a:tcPr>
                 </a:tc>
@@ -6522,7 +6596,7 @@
                 </a:solidFill>
                 <a:latin typeface="Aptos"/>
               </a:rPr>
-              <a:t>Julkinen riippumaton evidenssikooste · 2026.07.23-16 · 2026-07-22 · Lähteet: Health Canada 2024</a:t>
+              <a:t>Julkinen riippumaton evidenssikooste · 2026.07.24-17 · 2026-07-24 · Lähteet: Health Canada 2024</a:t>
             </a:r>
           </a:p>
         </p:txBody>
@@ -7161,7 +7235,7 @@
         </p:nvSpPr>
         <p:spPr>
           <a:xfrm>
-            <a:off x="502920" y="1444752"/>
+            <a:off x="502920" y="1554480"/>
             <a:ext cx="960120" cy="50292"/>
           </a:xfrm>
           <a:prstGeom prst="rect">
@@ -7273,7 +7347,7 @@
                 </a:solidFill>
                 <a:latin typeface="Aptos"/>
               </a:rPr>
-              <a:t>Julkinen riippumaton evidenssikooste · 2026.07.23-16 · 2026-07-22 · Lähteet: Destatis</a:t>
+              <a:t>Julkinen riippumaton evidenssikooste · 2026.07.24-17 · 2026-07-24 · Lähteet: Destatis</a:t>
             </a:r>
           </a:p>
         </p:txBody>
@@ -7976,7 +8050,7 @@
                 </a:solidFill>
                 <a:latin typeface="Aptos"/>
               </a:rPr>
-              <a:t>Julkinen riippumaton evidenssikooste · 2026.07.23-16 · 2026-07-22 · Lähteet: Destatis; inTaste.de</a:t>
+              <a:t>Julkinen riippumaton evidenssikooste · 2026.07.24-17 · 2026-07-24 · Lähteet: Destatis; inTaste.de</a:t>
             </a:r>
           </a:p>
         </p:txBody>
@@ -8727,7 +8801,7 @@
                 </a:solidFill>
                 <a:latin typeface="Aptos"/>
               </a:rPr>
-              <a:t>Julkinen riippumaton evidenssikooste · 2026.07.23-16 · 2026-07-22 · Lähteet: IMARC; GVR; Fortune</a:t>
+              <a:t>Julkinen riippumaton evidenssikooste · 2026.07.24-17 · 2026-07-24 · Lähteet: IMARC; GVR; Fortune; European Commission</a:t>
             </a:r>
           </a:p>
         </p:txBody>
@@ -8776,7 +8850,7 @@
         <p:spPr>
           <a:xfrm>
             <a:off x="530352" y="1719072"/>
-            <a:ext cx="3532632" cy="1371600"/>
+            <a:ext cx="2585466" cy="1371600"/>
           </a:xfrm>
           <a:prstGeom prst="roundRect">
             <a:avLst>
@@ -8823,7 +8897,7 @@
         <p:spPr>
           <a:xfrm>
             <a:off x="694944" y="1883664"/>
-            <a:ext cx="3203448" cy="530352"/>
+            <a:ext cx="2256282" cy="530352"/>
           </a:xfrm>
           <a:prstGeom prst="rect">
             <a:avLst/>
@@ -8858,7 +8932,7 @@
         <p:spPr>
           <a:xfrm>
             <a:off x="694944" y="2468879"/>
-            <a:ext cx="3203448" cy="438912"/>
+            <a:ext cx="2256282" cy="438912"/>
           </a:xfrm>
           <a:prstGeom prst="rect">
             <a:avLst/>
@@ -8892,8 +8966,8 @@
         </p:nvSpPr>
         <p:spPr>
           <a:xfrm>
-            <a:off x="4319016" y="1719072"/>
-            <a:ext cx="3532632" cy="1371600"/>
+            <a:off x="3371850" y="1719072"/>
+            <a:ext cx="2585466" cy="1371600"/>
           </a:xfrm>
           <a:prstGeom prst="roundRect">
             <a:avLst>
@@ -8939,8 +9013,8 @@
         </p:nvSpPr>
         <p:spPr>
           <a:xfrm>
-            <a:off x="4483608" y="1883664"/>
-            <a:ext cx="3203448" cy="530352"/>
+            <a:off x="3536442" y="1883664"/>
+            <a:ext cx="2256282" cy="530352"/>
           </a:xfrm>
           <a:prstGeom prst="rect">
             <a:avLst/>
@@ -8974,8 +9048,8 @@
         </p:nvSpPr>
         <p:spPr>
           <a:xfrm>
-            <a:off x="4483608" y="2468879"/>
-            <a:ext cx="3203448" cy="438912"/>
+            <a:off x="3536442" y="2468879"/>
+            <a:ext cx="2256282" cy="438912"/>
           </a:xfrm>
           <a:prstGeom prst="rect">
             <a:avLst/>
@@ -9009,8 +9083,8 @@
         </p:nvSpPr>
         <p:spPr>
           <a:xfrm>
-            <a:off x="8107680" y="1719072"/>
-            <a:ext cx="3532632" cy="1371600"/>
+            <a:off x="6213348" y="1719072"/>
+            <a:ext cx="2585466" cy="1371600"/>
           </a:xfrm>
           <a:prstGeom prst="roundRect">
             <a:avLst>
@@ -9056,8 +9130,8 @@
         </p:nvSpPr>
         <p:spPr>
           <a:xfrm>
-            <a:off x="8272272" y="1883664"/>
-            <a:ext cx="3203448" cy="530352"/>
+            <a:off x="6377940" y="1883664"/>
+            <a:ext cx="2256282" cy="530352"/>
           </a:xfrm>
           <a:prstGeom prst="rect">
             <a:avLst/>
@@ -9091,8 +9165,8 @@
         </p:nvSpPr>
         <p:spPr>
           <a:xfrm>
-            <a:off x="8272272" y="2468879"/>
-            <a:ext cx="3203448" cy="438912"/>
+            <a:off x="6377940" y="2468879"/>
+            <a:ext cx="2256282" cy="438912"/>
           </a:xfrm>
           <a:prstGeom prst="rect">
             <a:avLst/>
@@ -9120,7 +9194,124 @@
       </p:sp>
       <p:sp>
         <p:nvSpPr>
-          <p:cNvPr id="17" name="TextBox 16"/>
+          <p:cNvPr id="17" name="Rounded Rectangle 16"/>
+          <p:cNvSpPr/>
+          <p:nvPr/>
+        </p:nvSpPr>
+        <p:spPr>
+          <a:xfrm>
+            <a:off x="9054846" y="1719072"/>
+            <a:ext cx="2585466" cy="1371600"/>
+          </a:xfrm>
+          <a:prstGeom prst="roundRect">
+            <a:avLst>
+              <a:gd name="adj" fmla="val 8000"/>
+            </a:avLst>
+          </a:prstGeom>
+          <a:solidFill>
+            <a:srgbClr val="F6F9FA"/>
+          </a:solidFill>
+          <a:ln>
+            <a:solidFill>
+              <a:srgbClr val="CBD8DE"/>
+            </a:solidFill>
+          </a:ln>
+        </p:spPr>
+        <p:style>
+          <a:lnRef idx="1">
+            <a:schemeClr val="accent1"/>
+          </a:lnRef>
+          <a:fillRef idx="3">
+            <a:schemeClr val="accent1"/>
+          </a:fillRef>
+          <a:effectRef idx="2">
+            <a:schemeClr val="accent1"/>
+          </a:effectRef>
+          <a:fontRef idx="minor">
+            <a:schemeClr val="lt1"/>
+          </a:fontRef>
+        </p:style>
+        <p:txBody>
+          <a:bodyPr rtlCol="0" anchor="ctr"/>
+          <a:lstStyle/>
+          <a:p>
+            <a:pPr algn="ctr"/>
+          </a:p>
+        </p:txBody>
+      </p:sp>
+      <p:sp>
+        <p:nvSpPr>
+          <p:cNvPr id="18" name="TextBox 17"/>
+          <p:cNvSpPr txBox="1"/>
+          <p:nvPr/>
+        </p:nvSpPr>
+        <p:spPr>
+          <a:xfrm>
+            <a:off x="9219438" y="1883664"/>
+            <a:ext cx="2256282" cy="530352"/>
+          </a:xfrm>
+          <a:prstGeom prst="rect">
+            <a:avLst/>
+          </a:prstGeom>
+          <a:noFill/>
+        </p:spPr>
+        <p:txBody>
+          <a:bodyPr wrap="square" lIns="36576" rIns="36576" tIns="36576" bIns="36576" anchor="t">
+            <a:spAutoFit/>
+          </a:bodyPr>
+          <a:lstStyle/>
+          <a:p>
+            <a:pPr algn="l"/>
+            <a:r>
+              <a:rPr sz="2700" b="1">
+                <a:solidFill>
+                  <a:srgbClr val="138A72"/>
+                </a:solidFill>
+                <a:latin typeface="Aptos"/>
+              </a:rPr>
+              <a:t>4,99 mrd EUR</a:t>
+            </a:r>
+          </a:p>
+        </p:txBody>
+      </p:sp>
+      <p:sp>
+        <p:nvSpPr>
+          <p:cNvPr id="19" name="TextBox 18"/>
+          <p:cNvSpPr txBox="1"/>
+          <p:nvPr/>
+        </p:nvSpPr>
+        <p:spPr>
+          <a:xfrm>
+            <a:off x="9219438" y="2468879"/>
+            <a:ext cx="2256282" cy="438912"/>
+          </a:xfrm>
+          <a:prstGeom prst="rect">
+            <a:avLst/>
+          </a:prstGeom>
+          <a:noFill/>
+        </p:spPr>
+        <p:txBody>
+          <a:bodyPr wrap="square" lIns="36576" rIns="36576" tIns="36576" bIns="36576" anchor="t">
+            <a:spAutoFit/>
+          </a:bodyPr>
+          <a:lstStyle/>
+          <a:p>
+            <a:pPr algn="l"/>
+            <a:r>
+              <a:rPr sz="1400" b="0">
+                <a:solidFill>
+                  <a:srgbClr val="5B6B75"/>
+                </a:solidFill>
+                <a:latin typeface="Aptos"/>
+              </a:rPr>
+              <a:t>EU-komission vertailuarvo 2023</a:t>
+            </a:r>
+          </a:p>
+        </p:txBody>
+      </p:sp>
+      <p:sp>
+        <p:nvSpPr>
+          <p:cNvPr id="20" name="TextBox 19"/>
           <p:cNvSpPr txBox="1"/>
           <p:nvPr/>
         </p:nvSpPr>
@@ -9148,14 +9339,14 @@
                 </a:solidFill>
                 <a:latin typeface="Aptos"/>
               </a:rPr>
-              <a:t>Haarukka on leveä, koska tuoterajaukset ja metodit voivat poiketa.</a:t>
-            </a:r>
-          </a:p>
-        </p:txBody>
-      </p:sp>
-      <p:sp>
-        <p:nvSpPr>
-          <p:cNvPr id="18" name="Rounded Rectangle 17"/>
+              <a:t>EU:n vertailuarvo tukee mittaluokan ristiintarkistusta; kaupallinen haarukka on leveä, koska tuoterajaukset ja metodit voivat poiketa.</a:t>
+            </a:r>
+          </a:p>
+        </p:txBody>
+      </p:sp>
+      <p:sp>
+        <p:nvSpPr>
+          <p:cNvPr id="21" name="Rounded Rectangle 20"/>
           <p:cNvSpPr/>
           <p:nvPr/>
         </p:nvSpPr>
@@ -9202,7 +9393,7 @@
       </p:sp>
       <p:sp>
         <p:nvSpPr>
-          <p:cNvPr id="19" name="TextBox 18"/>
+          <p:cNvPr id="22" name="TextBox 21"/>
           <p:cNvSpPr txBox="1"/>
           <p:nvPr/>
         </p:nvSpPr>
@@ -9237,7 +9428,7 @@
       </p:sp>
       <p:sp>
         <p:nvSpPr>
-          <p:cNvPr id="20" name="TextBox 19"/>
+          <p:cNvPr id="23" name="TextBox 22"/>
           <p:cNvSpPr txBox="1"/>
           <p:nvPr/>
         </p:nvSpPr>
@@ -9265,7 +9456,7 @@
                 </a:solidFill>
                 <a:latin typeface="Aptos"/>
               </a:rPr>
-              <a:t>Arvioita verrataan keskenään. Niitä ei summata, eikä haarukkaa käytetä automaattisesti rojaltipohjana.</a:t>
+              <a:t>EU-luku perustuu kaupalliseen Euromonitor 2025 -aineistoon; Kypros, Luxemburg ja Malta puuttuvat. Se ei ole kansallinen luovuttajamarkkina. Arvioita verrataan, ei summata tai käytetä automaattisesti rojaltipohjana.</a:t>
             </a:r>
           </a:p>
         </p:txBody>
@@ -9478,7 +9669,7 @@
                 </a:solidFill>
                 <a:latin typeface="Aptos"/>
               </a:rPr>
-              <a:t>Julkinen riippumaton evidenssikooste · 2026.07.23-16 · 2026-07-22 · Lähteet: Market-values modelReadiness</a:t>
+              <a:t>Julkinen riippumaton evidenssikooste · 2026.07.24-17 · 2026-07-24 · Lähteet: Market-values modelReadiness, donorProtocol ja donorCandidates</a:t>
             </a:r>
           </a:p>
         </p:txBody>
@@ -9548,7 +9739,7 @@
                 </a:solidFill>
                 <a:latin typeface="Aptos"/>
               </a:rPr>
-              <a:t>Nykyinen comparable consumer-retail donor count on 0; hard gate ei täyty.</a:t>
+              <a:t>Nykyinen hyväksytty donor-portti on 0/3; kaikki 4 ehdokasta jäivät ulkopuolelle.</a:t>
             </a:r>
           </a:p>
         </p:txBody>
@@ -9590,7 +9781,7 @@
               </a:defRPr>
             </a:pPr>
             <a:r>
-              <a:t>•  Sama tuoterajaus ja kalenterivuosi.</a:t>
+              <a:t>•  Jokaisen ehdokkaan on läpäistävä kaikki 10 ehtoa (D1–D10).</a:t>
             </a:r>
           </a:p>
           <a:p>
@@ -9609,7 +9800,7 @@
               </a:defRPr>
             </a:pPr>
             <a:r>
-              <a:t>•  Kuluttajavähittäisarvo, ei toimitus-, vero- tai volyymiproxy.</a:t>
+              <a:t>•  Uusi-Seelantin 280,685 milj. NZD raakasumma ja 264,561 milj. NZD toistoriviherkkyys eivät ole puhdistettu estimaatti; EU:n vertailuarvo, Kanadan toimitusproxy ja Saksan nestemalli hylättiin myös luovuttajina.</a:t>
             </a:r>
           </a:p>
           <a:p>
@@ -9628,7 +9819,7 @@
               </a:defRPr>
             </a:pPr>
             <a:r>
-              <a:t>•  Alue- ja sääntelytyyppien peitto sekä suora validointi suurissa talouksissa.</a:t>
+              <a:t>•  Alue- ja sääntelytyyppien peitto sekä suora validointi suurissa talouksissa vaaditaan vielä.</a:t>
             </a:r>
           </a:p>
         </p:txBody>
@@ -9846,7 +10037,7 @@
         </p:nvSpPr>
         <p:spPr>
           <a:xfrm>
-            <a:off x="502920" y="1444752"/>
+            <a:off x="502920" y="1554480"/>
             <a:ext cx="960120" cy="50292"/>
           </a:xfrm>
           <a:prstGeom prst="rect">
@@ -9958,7 +10149,7 @@
                 </a:solidFill>
                 <a:latin typeface="Aptos"/>
               </a:rPr>
-              <a:t>Julkinen riippumaton evidenssikooste · 2026.07.23-16 · 2026-07-22 · Lähteet: WIPO valuation; Evidence Register</a:t>
+              <a:t>Julkinen riippumaton evidenssikooste · 2026.07.24-17 · 2026-07-24 · Lähteet: WIPO valuation; Evidence Register</a:t>
             </a:r>
           </a:p>
         </p:txBody>
@@ -10712,7 +10903,7 @@
                 </a:solidFill>
                 <a:latin typeface="Aptos"/>
               </a:rPr>
-              <a:t>Julkinen riippumaton evidenssikooste · 2026.07.23-16 · 2026-07-22 · Lähteet: EPO; Saksa — viralliset tuomiot; WIPO</a:t>
+              <a:t>Julkinen riippumaton evidenssikooste · 2026.07.24-17 · 2026-07-24 · Lähteet: EPO; Saksa — viralliset tuomiot; WIPO</a:t>
             </a:r>
           </a:p>
         </p:txBody>
@@ -10843,7 +11034,7 @@
               </a:defRPr>
             </a:pPr>
             <a:r>
-              <a:t>•  Markkina-aineisto kattaa 195 maan tutkimusrungon, mutta yhteismitallisia retail-luovuttajia on 0.</a:t>
+              <a:t>•  Markkina-aineistossa on 20 virallista vuosihavaintoa 6 maasta, mutta luovuttajaportti on 0/3.</a:t>
             </a:r>
           </a:p>
           <a:p>
@@ -11192,7 +11383,7 @@
                 </a:solidFill>
                 <a:latin typeface="Aptos"/>
               </a:rPr>
-              <a:t>Julkinen riippumaton evidenssikooste · 2026.07.23-16 · 2026-07-22 · Lähteet: WIPO licensing; IP Finance</a:t>
+              <a:t>Julkinen riippumaton evidenssikooste · 2026.07.24-17 · 2026-07-24 · Lähteet: WIPO licensing; IP Finance</a:t>
             </a:r>
           </a:p>
         </p:txBody>
@@ -11560,7 +11751,7 @@
         </p:nvSpPr>
         <p:spPr>
           <a:xfrm>
-            <a:off x="502920" y="1444752"/>
+            <a:off x="502920" y="1554480"/>
             <a:ext cx="960120" cy="50292"/>
           </a:xfrm>
           <a:prstGeom prst="rect">
@@ -11672,7 +11863,7 @@
                 </a:solidFill>
                 <a:latin typeface="Aptos"/>
               </a:rPr>
-              <a:t>Julkinen riippumaton evidenssikooste · 2026.07.23-16 · 2026-07-22 · Lähteet: Evidence Register; EPO</a:t>
+              <a:t>Julkinen riippumaton evidenssikooste · 2026.07.24-17 · 2026-07-24 · Lähteet: Evidence Register; EPO</a:t>
             </a:r>
           </a:p>
         </p:txBody>
@@ -12352,7 +12543,7 @@
                 </a:solidFill>
                 <a:latin typeface="Aptos"/>
               </a:rPr>
-              <a:t>Julkinen riippumaton evidenssikooste · 2026.07.23-16 · 2026-07-22 · Lähteet: EP3032975B2; 7 O 3341/24</a:t>
+              <a:t>Julkinen riippumaton evidenssikooste · 2026.07.24-17 · 2026-07-24 · Lähteet: EP3032975B2; 7 O 3341/24</a:t>
             </a:r>
           </a:p>
         </p:txBody>
@@ -13243,7 +13434,7 @@
                 </a:solidFill>
                 <a:latin typeface="Aptos"/>
               </a:rPr>
-              <a:t>Julkinen riippumaton evidenssikooste · 2026.07.23-16 · 2026-07-22 · Lähteet: WIPO dispute resolution; EPO IPscore</a:t>
+              <a:t>Julkinen riippumaton evidenssikooste · 2026.07.24-17 · 2026-07-24 · Lähteet: WIPO dispute resolution; EPO IPscore</a:t>
             </a:r>
           </a:p>
         </p:txBody>
@@ -14022,7 +14213,7 @@
         </p:nvSpPr>
         <p:spPr>
           <a:xfrm>
-            <a:off x="502920" y="1444752"/>
+            <a:off x="502920" y="1554480"/>
             <a:ext cx="960120" cy="50292"/>
           </a:xfrm>
           <a:prstGeom prst="rect">
@@ -14134,7 +14325,7 @@
                 </a:solidFill>
                 <a:latin typeface="Aptos"/>
               </a:rPr>
-              <a:t>Julkinen riippumaton evidenssikooste · 2026.07.23-16 · 2026-07-22 · Lähteet: WIPO licensing; IP Finance; TPLF mapping</a:t>
+              <a:t>Julkinen riippumaton evidenssikooste · 2026.07.24-17 · 2026-07-24 · Lähteet: WIPO licensing; IP Finance; TPLF mapping</a:t>
             </a:r>
           </a:p>
         </p:txBody>
@@ -14888,7 +15079,7 @@
                 </a:solidFill>
                 <a:latin typeface="Aptos"/>
               </a:rPr>
-              <a:t>Julkinen riippumaton evidenssikooste · 2026.07.23-16 · 2026-07-22 · Lähteet: Evidence Register; WIPO valuation</a:t>
+              <a:t>Julkinen riippumaton evidenssikooste · 2026.07.24-17 · 2026-07-24 · Lähteet: Evidence Register; WIPO valuation</a:t>
             </a:r>
           </a:p>
         </p:txBody>
@@ -15716,7 +15907,7 @@
                 </a:solidFill>
                 <a:latin typeface="Aptos"/>
               </a:rPr>
-              <a:t>Julkinen riippumaton evidenssikooste · 2026.07.23-16 · 2026-07-22 · Lähteet: WIPO valuation</a:t>
+              <a:t>Julkinen riippumaton evidenssikooste · 2026.07.24-17 · 2026-07-24 · Lähteet: WIPO valuation</a:t>
             </a:r>
           </a:p>
         </p:txBody>
@@ -16503,7 +16694,7 @@
         </p:nvSpPr>
         <p:spPr>
           <a:xfrm>
-            <a:off x="502920" y="1444752"/>
+            <a:off x="502920" y="1554480"/>
             <a:ext cx="960120" cy="50292"/>
           </a:xfrm>
           <a:prstGeom prst="rect">
@@ -16615,7 +16806,7 @@
                 </a:solidFill>
                 <a:latin typeface="Aptos"/>
               </a:rPr>
-              <a:t>Julkinen riippumaton evidenssikooste · 2026.07.23-16 · 2026-07-22 · Lähteet: Evidence Register</a:t>
+              <a:t>Julkinen riippumaton evidenssikooste · 2026.07.24-17 · 2026-07-24 · Lähteet: Evidence Register</a:t>
             </a:r>
           </a:p>
         </p:txBody>
@@ -17257,7 +17448,7 @@
         </p:nvSpPr>
         <p:spPr>
           <a:xfrm>
-            <a:off x="502920" y="1444752"/>
+            <a:off x="502920" y="1554480"/>
             <a:ext cx="960120" cy="50292"/>
           </a:xfrm>
           <a:prstGeom prst="rect">
@@ -17369,7 +17560,7 @@
                 </a:solidFill>
                 <a:latin typeface="Aptos"/>
               </a:rPr>
-              <a:t>Julkinen riippumaton evidenssikooste · 2026.07.23-16 · 2026-07-22 · Lähteet: Evidence Register</a:t>
+              <a:t>Julkinen riippumaton evidenssikooste · 2026.07.24-17 · 2026-07-24 · Lähteet: Evidence Register</a:t>
             </a:r>
           </a:p>
         </p:txBody>
@@ -18197,7 +18388,7 @@
                 </a:solidFill>
                 <a:latin typeface="Aptos"/>
               </a:rPr>
-              <a:t>Julkinen riippumaton evidenssikooste · 2026.07.23-16 · 2026-07-22 · Lähteet: Evidence Register; changelog</a:t>
+              <a:t>Julkinen riippumaton evidenssikooste · 2026.07.24-17 · 2026-07-24 · Lähteet: Evidence Register; changelog</a:t>
             </a:r>
           </a:p>
         </p:txBody>
@@ -18976,7 +19167,7 @@
         </p:nvSpPr>
         <p:spPr>
           <a:xfrm>
-            <a:off x="502920" y="1444752"/>
+            <a:off x="502920" y="1554480"/>
             <a:ext cx="960120" cy="50292"/>
           </a:xfrm>
           <a:prstGeom prst="rect">
@@ -19088,7 +19279,7 @@
                 </a:solidFill>
                 <a:latin typeface="Aptos"/>
               </a:rPr>
-              <a:t>Julkinen riippumaton evidenssikooste · 2026.07.23-16 · 2026-07-22 · Lähteet: EPO; 8 Ni 18/24 (EP); 7 O 3341/24</a:t>
+              <a:t>Julkinen riippumaton evidenssikooste · 2026.07.24-17 · 2026-07-24 · Lähteet: EPO; 8 Ni 18/24 (EP); 7 O 3341/24</a:t>
             </a:r>
           </a:p>
         </p:txBody>
@@ -19711,7 +19902,7 @@
                 </a:solidFill>
                 <a:latin typeface="Aptos"/>
               </a:rPr>
-              <a:t>Versio 2026.07.23-16 · 2026-07-22 · 30 / 30</a:t>
+              <a:t>Versio 2026.07.24-17 · 2026-07-24 · 30 / 30</a:t>
             </a:r>
           </a:p>
         </p:txBody>
@@ -19924,7 +20115,7 @@
                 </a:solidFill>
                 <a:latin typeface="Aptos"/>
               </a:rPr>
-              <a:t>Julkinen riippumaton evidenssikooste · 2026.07.23-16 · 2026-07-22 · Lähteet: Evidence Register; WIPO</a:t>
+              <a:t>Julkinen riippumaton evidenssikooste · 2026.07.24-17 · 2026-07-24 · Lähteet: Evidence Register; WIPO</a:t>
             </a:r>
           </a:p>
         </p:txBody>
@@ -20404,7 +20595,7 @@
                 </a:solidFill>
                 <a:latin typeface="Aptos"/>
               </a:rPr>
-              <a:t>Julkinen riippumaton evidenssikooste · 2026.07.23-16 · 2026-07-22 · Lähteet: EP3032975B2</a:t>
+              <a:t>Julkinen riippumaton evidenssikooste · 2026.07.24-17 · 2026-07-24 · Lähteet: EP3032975B2</a:t>
             </a:r>
           </a:p>
         </p:txBody>
@@ -20772,7 +20963,7 @@
         </p:nvSpPr>
         <p:spPr>
           <a:xfrm>
-            <a:off x="502920" y="1444752"/>
+            <a:off x="502920" y="1554480"/>
             <a:ext cx="960120" cy="50292"/>
           </a:xfrm>
           <a:prstGeom prst="rect">
@@ -20884,7 +21075,7 @@
                 </a:solidFill>
                 <a:latin typeface="Aptos"/>
               </a:rPr>
-              <a:t>Julkinen riippumaton evidenssikooste · 2026.07.23-16 · 2026-07-22 · Lähteet: EP3032975B2</a:t>
+              <a:t>Julkinen riippumaton evidenssikooste · 2026.07.24-17 · 2026-07-24 · Lähteet: EP3032975B2</a:t>
             </a:r>
           </a:p>
         </p:txBody>
@@ -21638,7 +21829,7 @@
                 </a:solidFill>
                 <a:latin typeface="Aptos"/>
               </a:rPr>
-              <a:t>Julkinen riippumaton evidenssikooste · 2026.07.23-16 · 2026-07-22 · Lähteet: EPO Register; B2</a:t>
+              <a:t>Julkinen riippumaton evidenssikooste · 2026.07.24-17 · 2026-07-24 · Lähteet: EPO Register; B2</a:t>
             </a:r>
           </a:p>
         </p:txBody>
@@ -22389,7 +22580,7 @@
                 </a:solidFill>
                 <a:latin typeface="Aptos"/>
               </a:rPr>
-              <a:t>Julkinen riippumaton evidenssikooste · 2026.07.23-16 · 2026-07-22 · Lähteet: EPO family; kansalliset rekisterit</a:t>
+              <a:t>Julkinen riippumaton evidenssikooste · 2026.07.24-17 · 2026-07-24 · Lähteet: EPO family; kansalliset rekisterit</a:t>
             </a:r>
           </a:p>
         </p:txBody>
@@ -23145,7 +23336,7 @@
         </p:nvSpPr>
         <p:spPr>
           <a:xfrm>
-            <a:off x="502920" y="1444752"/>
+            <a:off x="502920" y="1554480"/>
             <a:ext cx="960120" cy="50292"/>
           </a:xfrm>
           <a:prstGeom prst="rect">
@@ -23257,7 +23448,7 @@
                 </a:solidFill>
                 <a:latin typeface="Aptos"/>
               </a:rPr>
-              <a:t>Julkinen riippumaton evidenssikooste · 2026.07.23-16 · 2026-07-22 · Lähteet: Viralliset tuomiot: 8 Ni 18/24 (EP); 7 O 3341/24</a:t>
+              <a:t>Julkinen riippumaton evidenssikooste · 2026.07.24-17 · 2026-07-24 · Lähteet: Viralliset tuomiot: 8 Ni 18/24 (EP); 7 O 3341/24</a:t>
             </a:r>
           </a:p>
         </p:txBody>

--- a/site/downloads/pixan-bank-deck-large-fi.pptx
+++ b/site/downloads/pixan-bank-deck-large-fi.pptx
@@ -2,42 +2,42 @@
 <file path=ppt/presentation.xml><?xml version="1.0" encoding="utf-8"?>
 <p:presentation xmlns:p="http://schemas.openxmlformats.org/presentationml/2006/main">
   <p:sldMasterIdLst>
-    <p:sldMasterId xmlns:r="http://schemas.openxmlformats.org/officeDocument/2006/relationships" id="2147483648" r:id="R74b3bb88109c4eca"/>
+    <p:sldMasterId xmlns:r="http://schemas.openxmlformats.org/officeDocument/2006/relationships" id="2147483648" r:id="Re6ec81c0563f4770"/>
   </p:sldMasterIdLst>
   <p:notesMasterIdLst>
-    <p:notesMasterId xmlns:r="http://schemas.openxmlformats.org/officeDocument/2006/relationships" r:id="R58d9d00062a84bbf"/>
+    <p:notesMasterId xmlns:r="http://schemas.openxmlformats.org/officeDocument/2006/relationships" r:id="Rb15975d75ca74fae"/>
   </p:notesMasterIdLst>
   <p:sldIdLst>
-    <p:sldId xmlns:r="http://schemas.openxmlformats.org/officeDocument/2006/relationships" id="256" r:id="Rfce4ba8163364418"/>
-    <p:sldId xmlns:r="http://schemas.openxmlformats.org/officeDocument/2006/relationships" id="257" r:id="Reefd356088444c41"/>
-    <p:sldId xmlns:r="http://schemas.openxmlformats.org/officeDocument/2006/relationships" id="258" r:id="Raf3ef9a5d684489f"/>
-    <p:sldId xmlns:r="http://schemas.openxmlformats.org/officeDocument/2006/relationships" id="259" r:id="Rb683c1d5d7064e56"/>
-    <p:sldId xmlns:r="http://schemas.openxmlformats.org/officeDocument/2006/relationships" id="260" r:id="R3e1ca9c7d2d54cf3"/>
-    <p:sldId xmlns:r="http://schemas.openxmlformats.org/officeDocument/2006/relationships" id="261" r:id="R811fd5d4f9ba4c9f"/>
-    <p:sldId xmlns:r="http://schemas.openxmlformats.org/officeDocument/2006/relationships" id="262" r:id="R814477d600e24e80"/>
-    <p:sldId xmlns:r="http://schemas.openxmlformats.org/officeDocument/2006/relationships" id="263" r:id="R81b3b1804cf642ad"/>
-    <p:sldId xmlns:r="http://schemas.openxmlformats.org/officeDocument/2006/relationships" id="264" r:id="Rfa4837a056094088"/>
-    <p:sldId xmlns:r="http://schemas.openxmlformats.org/officeDocument/2006/relationships" id="265" r:id="R8dabc61329fe4818"/>
-    <p:sldId xmlns:r="http://schemas.openxmlformats.org/officeDocument/2006/relationships" id="266" r:id="Rd91395cb123745a4"/>
-    <p:sldId xmlns:r="http://schemas.openxmlformats.org/officeDocument/2006/relationships" id="267" r:id="R3f93eb2228254860"/>
-    <p:sldId xmlns:r="http://schemas.openxmlformats.org/officeDocument/2006/relationships" id="268" r:id="R15184b979ca14378"/>
-    <p:sldId xmlns:r="http://schemas.openxmlformats.org/officeDocument/2006/relationships" id="269" r:id="R70197a6ed7694cd8"/>
-    <p:sldId xmlns:r="http://schemas.openxmlformats.org/officeDocument/2006/relationships" id="270" r:id="R9bcfcf5993ae4aad"/>
-    <p:sldId xmlns:r="http://schemas.openxmlformats.org/officeDocument/2006/relationships" id="271" r:id="R3b477a5fb1424766"/>
-    <p:sldId xmlns:r="http://schemas.openxmlformats.org/officeDocument/2006/relationships" id="272" r:id="Rc1d6a8d57b714fe2"/>
-    <p:sldId xmlns:r="http://schemas.openxmlformats.org/officeDocument/2006/relationships" id="273" r:id="R80c0205a35204133"/>
-    <p:sldId xmlns:r="http://schemas.openxmlformats.org/officeDocument/2006/relationships" id="274" r:id="Rd81210da9efb4fe4"/>
-    <p:sldId xmlns:r="http://schemas.openxmlformats.org/officeDocument/2006/relationships" id="275" r:id="R0e4c4f943f284186"/>
-    <p:sldId xmlns:r="http://schemas.openxmlformats.org/officeDocument/2006/relationships" id="276" r:id="Re61d22d692d64a9c"/>
-    <p:sldId xmlns:r="http://schemas.openxmlformats.org/officeDocument/2006/relationships" id="277" r:id="R40bb05febd1745c8"/>
-    <p:sldId xmlns:r="http://schemas.openxmlformats.org/officeDocument/2006/relationships" id="278" r:id="R64edc49f79b449a8"/>
-    <p:sldId xmlns:r="http://schemas.openxmlformats.org/officeDocument/2006/relationships" id="279" r:id="R6d2c5ebe46f7480f"/>
-    <p:sldId xmlns:r="http://schemas.openxmlformats.org/officeDocument/2006/relationships" id="280" r:id="R9a7c53d03a0b4222"/>
-    <p:sldId xmlns:r="http://schemas.openxmlformats.org/officeDocument/2006/relationships" id="281" r:id="R333f749bc5c04da0"/>
-    <p:sldId xmlns:r="http://schemas.openxmlformats.org/officeDocument/2006/relationships" id="282" r:id="R578c91c4a1a54f3d"/>
-    <p:sldId xmlns:r="http://schemas.openxmlformats.org/officeDocument/2006/relationships" id="283" r:id="R809748290d334a82"/>
-    <p:sldId xmlns:r="http://schemas.openxmlformats.org/officeDocument/2006/relationships" id="284" r:id="R60f9e5e1f7cd4ef5"/>
-    <p:sldId xmlns:r="http://schemas.openxmlformats.org/officeDocument/2006/relationships" id="285" r:id="R832f1997acef4f10"/>
+    <p:sldId xmlns:r="http://schemas.openxmlformats.org/officeDocument/2006/relationships" id="256" r:id="R74b36a0f2f874d4f"/>
+    <p:sldId xmlns:r="http://schemas.openxmlformats.org/officeDocument/2006/relationships" id="257" r:id="R73e02e652b7544ed"/>
+    <p:sldId xmlns:r="http://schemas.openxmlformats.org/officeDocument/2006/relationships" id="258" r:id="R0457ebd931aa4f7f"/>
+    <p:sldId xmlns:r="http://schemas.openxmlformats.org/officeDocument/2006/relationships" id="259" r:id="Re253f506c78d424f"/>
+    <p:sldId xmlns:r="http://schemas.openxmlformats.org/officeDocument/2006/relationships" id="260" r:id="Rfc4809d44eac4074"/>
+    <p:sldId xmlns:r="http://schemas.openxmlformats.org/officeDocument/2006/relationships" id="261" r:id="Rd3d05252da484f6d"/>
+    <p:sldId xmlns:r="http://schemas.openxmlformats.org/officeDocument/2006/relationships" id="262" r:id="R74b829c403ec445a"/>
+    <p:sldId xmlns:r="http://schemas.openxmlformats.org/officeDocument/2006/relationships" id="263" r:id="R9b11cbb8c63c4d3b"/>
+    <p:sldId xmlns:r="http://schemas.openxmlformats.org/officeDocument/2006/relationships" id="264" r:id="R4822a90a01f24030"/>
+    <p:sldId xmlns:r="http://schemas.openxmlformats.org/officeDocument/2006/relationships" id="265" r:id="R4abf3ce86b164722"/>
+    <p:sldId xmlns:r="http://schemas.openxmlformats.org/officeDocument/2006/relationships" id="266" r:id="R4ce489a8aab94260"/>
+    <p:sldId xmlns:r="http://schemas.openxmlformats.org/officeDocument/2006/relationships" id="267" r:id="R08799807fe334802"/>
+    <p:sldId xmlns:r="http://schemas.openxmlformats.org/officeDocument/2006/relationships" id="268" r:id="R07bdc2c7ab0841a4"/>
+    <p:sldId xmlns:r="http://schemas.openxmlformats.org/officeDocument/2006/relationships" id="269" r:id="Rb1d774a37b014293"/>
+    <p:sldId xmlns:r="http://schemas.openxmlformats.org/officeDocument/2006/relationships" id="270" r:id="R0cdc073cbf5d4d9a"/>
+    <p:sldId xmlns:r="http://schemas.openxmlformats.org/officeDocument/2006/relationships" id="271" r:id="R92a39eee6b3d490f"/>
+    <p:sldId xmlns:r="http://schemas.openxmlformats.org/officeDocument/2006/relationships" id="272" r:id="Rd254e7a9a51d4082"/>
+    <p:sldId xmlns:r="http://schemas.openxmlformats.org/officeDocument/2006/relationships" id="273" r:id="Rad3acaf7800d4c5c"/>
+    <p:sldId xmlns:r="http://schemas.openxmlformats.org/officeDocument/2006/relationships" id="274" r:id="Rb75d8c3ae4b14882"/>
+    <p:sldId xmlns:r="http://schemas.openxmlformats.org/officeDocument/2006/relationships" id="275" r:id="Rf31d0d71a4514676"/>
+    <p:sldId xmlns:r="http://schemas.openxmlformats.org/officeDocument/2006/relationships" id="276" r:id="R352fffc617dc45fb"/>
+    <p:sldId xmlns:r="http://schemas.openxmlformats.org/officeDocument/2006/relationships" id="277" r:id="R81586ef6cc2349e4"/>
+    <p:sldId xmlns:r="http://schemas.openxmlformats.org/officeDocument/2006/relationships" id="278" r:id="R617decc9ab9d40fb"/>
+    <p:sldId xmlns:r="http://schemas.openxmlformats.org/officeDocument/2006/relationships" id="279" r:id="Rae50bc785716452d"/>
+    <p:sldId xmlns:r="http://schemas.openxmlformats.org/officeDocument/2006/relationships" id="280" r:id="R66cc67b607c44d04"/>
+    <p:sldId xmlns:r="http://schemas.openxmlformats.org/officeDocument/2006/relationships" id="281" r:id="R2eae9375d73a4970"/>
+    <p:sldId xmlns:r="http://schemas.openxmlformats.org/officeDocument/2006/relationships" id="282" r:id="Rd110fc2be39d4bae"/>
+    <p:sldId xmlns:r="http://schemas.openxmlformats.org/officeDocument/2006/relationships" id="283" r:id="Rfebf253b6d0e436b"/>
+    <p:sldId xmlns:r="http://schemas.openxmlformats.org/officeDocument/2006/relationships" id="284" r:id="Rc68d8e4427bf4e44"/>
+    <p:sldId xmlns:r="http://schemas.openxmlformats.org/officeDocument/2006/relationships" id="285" r:id="Recf16b6430a142cc"/>
   </p:sldIdLst>
   <p:sldSz cx="12191999" cy="6858000"/>
   <p:notesSz cx="6858000" cy="9144000"/>
@@ -524,6 +524,11 @@
           </a:p>
           <a:p xmlns:a="http://schemas.openxmlformats.org/drawingml/2006/main">
             <a:r>
+              <a:t>- https://www150.statcan.gc.ca/t1/tbl1/en/tv.action?pid=2010007101</a:t>
+            </a:r>
+          </a:p>
+          <a:p xmlns:a="http://schemas.openxmlformats.org/drawingml/2006/main">
+            <a:r>
               <a:t>- https://www.ftc.gov/reports/e-cigarette-report-2021</a:t>
             </a:r>
           </a:p>
@@ -554,6 +559,11 @@
           </a:p>
           <a:p xmlns:a="http://schemas.openxmlformats.org/drawingml/2006/main">
             <a:r>
+              <a:t>- https://data-api.ecb.europa.eu/service/data/EXR/A.CAD.EUR.SP00.A?startPeriod=2024&amp;endPeriod=2024&amp;format=csvdata</a:t>
+            </a:r>
+          </a:p>
+          <a:p xmlns:a="http://schemas.openxmlformats.org/drawingml/2006/main">
+            <a:r>
               <a:t/>
             </a:r>
           </a:p>
@@ -580,6 +590,11 @@
           <a:p xmlns:a="http://schemas.openxmlformats.org/drawingml/2006/main">
             <a:r>
               <a:t>- USD 2021: ECB-EXR-A-USD-EUR-SP00-A-2021 · 1.1827403100775 currency units per EUR</a:t>
+            </a:r>
+          </a:p>
+          <a:p xmlns:a="http://schemas.openxmlformats.org/drawingml/2006/main">
+            <a:r>
+              <a:t>- CAD 2024: ECB-EXR-A-CAD-EUR-SP00-A-2024 · 1.482110546875 currency units per EUR</a:t>
             </a:r>
           </a:p>
         </p:txBody>
@@ -679,6 +694,11 @@
           </a:p>
           <a:p xmlns:a="http://schemas.openxmlformats.org/drawingml/2006/main">
             <a:r>
+              <a:t>- https://www150.statcan.gc.ca/t1/tbl1/en/tv.action?pid=2010007101</a:t>
+            </a:r>
+          </a:p>
+          <a:p xmlns:a="http://schemas.openxmlformats.org/drawingml/2006/main">
+            <a:r>
               <a:t>- https://www.ftc.gov/reports/e-cigarette-report-2021</a:t>
             </a:r>
           </a:p>
@@ -709,6 +729,11 @@
           </a:p>
           <a:p xmlns:a="http://schemas.openxmlformats.org/drawingml/2006/main">
             <a:r>
+              <a:t>- https://data-api.ecb.europa.eu/service/data/EXR/A.CAD.EUR.SP00.A?startPeriod=2024&amp;endPeriod=2024&amp;format=csvdata</a:t>
+            </a:r>
+          </a:p>
+          <a:p xmlns:a="http://schemas.openxmlformats.org/drawingml/2006/main">
+            <a:r>
               <a:t/>
             </a:r>
           </a:p>
@@ -735,6 +760,11 @@
           <a:p xmlns:a="http://schemas.openxmlformats.org/drawingml/2006/main">
             <a:r>
               <a:t>- USD 2021: ECB-EXR-A-USD-EUR-SP00-A-2021 · 1.1827403100775 currency units per EUR</a:t>
+            </a:r>
+          </a:p>
+          <a:p xmlns:a="http://schemas.openxmlformats.org/drawingml/2006/main">
+            <a:r>
+              <a:t>- CAD 2024: ECB-EXR-A-CAD-EUR-SP00-A-2024 · 1.482110546875 currency units per EUR</a:t>
             </a:r>
           </a:p>
         </p:txBody>
@@ -834,6 +864,11 @@
           </a:p>
           <a:p xmlns:a="http://schemas.openxmlformats.org/drawingml/2006/main">
             <a:r>
+              <a:t>- https://www150.statcan.gc.ca/t1/tbl1/en/tv.action?pid=2010007101</a:t>
+            </a:r>
+          </a:p>
+          <a:p xmlns:a="http://schemas.openxmlformats.org/drawingml/2006/main">
+            <a:r>
               <a:t>- https://www.ftc.gov/reports/e-cigarette-report-2021</a:t>
             </a:r>
           </a:p>
@@ -864,6 +899,11 @@
           </a:p>
           <a:p xmlns:a="http://schemas.openxmlformats.org/drawingml/2006/main">
             <a:r>
+              <a:t>- https://data-api.ecb.europa.eu/service/data/EXR/A.CAD.EUR.SP00.A?startPeriod=2024&amp;endPeriod=2024&amp;format=csvdata</a:t>
+            </a:r>
+          </a:p>
+          <a:p xmlns:a="http://schemas.openxmlformats.org/drawingml/2006/main">
+            <a:r>
               <a:t/>
             </a:r>
           </a:p>
@@ -890,6 +930,11 @@
           <a:p xmlns:a="http://schemas.openxmlformats.org/drawingml/2006/main">
             <a:r>
               <a:t>- USD 2021: ECB-EXR-A-USD-EUR-SP00-A-2021 · 1.1827403100775 currency units per EUR</a:t>
+            </a:r>
+          </a:p>
+          <a:p xmlns:a="http://schemas.openxmlformats.org/drawingml/2006/main">
+            <a:r>
+              <a:t>- CAD 2024: ECB-EXR-A-CAD-EUR-SP00-A-2024 · 1.482110546875 currency units per EUR</a:t>
             </a:r>
           </a:p>
         </p:txBody>
@@ -989,6 +1034,11 @@
           </a:p>
           <a:p xmlns:a="http://schemas.openxmlformats.org/drawingml/2006/main">
             <a:r>
+              <a:t>- https://www150.statcan.gc.ca/t1/tbl1/en/tv.action?pid=2010007101</a:t>
+            </a:r>
+          </a:p>
+          <a:p xmlns:a="http://schemas.openxmlformats.org/drawingml/2006/main">
+            <a:r>
               <a:t>- https://www.ftc.gov/reports/e-cigarette-report-2021</a:t>
             </a:r>
           </a:p>
@@ -1019,6 +1069,11 @@
           </a:p>
           <a:p xmlns:a="http://schemas.openxmlformats.org/drawingml/2006/main">
             <a:r>
+              <a:t>- https://data-api.ecb.europa.eu/service/data/EXR/A.CAD.EUR.SP00.A?startPeriod=2024&amp;endPeriod=2024&amp;format=csvdata</a:t>
+            </a:r>
+          </a:p>
+          <a:p xmlns:a="http://schemas.openxmlformats.org/drawingml/2006/main">
+            <a:r>
               <a:t/>
             </a:r>
           </a:p>
@@ -1045,6 +1100,11 @@
           <a:p xmlns:a="http://schemas.openxmlformats.org/drawingml/2006/main">
             <a:r>
               <a:t>- USD 2021: ECB-EXR-A-USD-EUR-SP00-A-2021 · 1.1827403100775 currency units per EUR</a:t>
+            </a:r>
+          </a:p>
+          <a:p xmlns:a="http://schemas.openxmlformats.org/drawingml/2006/main">
+            <a:r>
+              <a:t>- CAD 2024: ECB-EXR-A-CAD-EUR-SP00-A-2024 · 1.482110546875 currency units per EUR</a:t>
             </a:r>
           </a:p>
         </p:txBody>
@@ -1144,6 +1204,11 @@
           </a:p>
           <a:p xmlns:a="http://schemas.openxmlformats.org/drawingml/2006/main">
             <a:r>
+              <a:t>- https://www150.statcan.gc.ca/t1/tbl1/en/tv.action?pid=2010007101</a:t>
+            </a:r>
+          </a:p>
+          <a:p xmlns:a="http://schemas.openxmlformats.org/drawingml/2006/main">
+            <a:r>
               <a:t>- https://www.ftc.gov/reports/e-cigarette-report-2021</a:t>
             </a:r>
           </a:p>
@@ -1174,6 +1239,11 @@
           </a:p>
           <a:p xmlns:a="http://schemas.openxmlformats.org/drawingml/2006/main">
             <a:r>
+              <a:t>- https://data-api.ecb.europa.eu/service/data/EXR/A.CAD.EUR.SP00.A?startPeriod=2024&amp;endPeriod=2024&amp;format=csvdata</a:t>
+            </a:r>
+          </a:p>
+          <a:p xmlns:a="http://schemas.openxmlformats.org/drawingml/2006/main">
+            <a:r>
               <a:t/>
             </a:r>
           </a:p>
@@ -1200,6 +1270,11 @@
           <a:p xmlns:a="http://schemas.openxmlformats.org/drawingml/2006/main">
             <a:r>
               <a:t>- USD 2021: ECB-EXR-A-USD-EUR-SP00-A-2021 · 1.1827403100775 currency units per EUR</a:t>
+            </a:r>
+          </a:p>
+          <a:p xmlns:a="http://schemas.openxmlformats.org/drawingml/2006/main">
+            <a:r>
+              <a:t>- CAD 2024: ECB-EXR-A-CAD-EUR-SP00-A-2024 · 1.482110546875 currency units per EUR</a:t>
             </a:r>
           </a:p>
         </p:txBody>
@@ -1299,6 +1374,11 @@
           </a:p>
           <a:p xmlns:a="http://schemas.openxmlformats.org/drawingml/2006/main">
             <a:r>
+              <a:t>- https://www150.statcan.gc.ca/t1/tbl1/en/tv.action?pid=2010007101</a:t>
+            </a:r>
+          </a:p>
+          <a:p xmlns:a="http://schemas.openxmlformats.org/drawingml/2006/main">
+            <a:r>
               <a:t>- https://www.ftc.gov/reports/e-cigarette-report-2021</a:t>
             </a:r>
           </a:p>
@@ -1329,6 +1409,11 @@
           </a:p>
           <a:p xmlns:a="http://schemas.openxmlformats.org/drawingml/2006/main">
             <a:r>
+              <a:t>- https://data-api.ecb.europa.eu/service/data/EXR/A.CAD.EUR.SP00.A?startPeriod=2024&amp;endPeriod=2024&amp;format=csvdata</a:t>
+            </a:r>
+          </a:p>
+          <a:p xmlns:a="http://schemas.openxmlformats.org/drawingml/2006/main">
+            <a:r>
               <a:t/>
             </a:r>
           </a:p>
@@ -1355,6 +1440,11 @@
           <a:p xmlns:a="http://schemas.openxmlformats.org/drawingml/2006/main">
             <a:r>
               <a:t>- USD 2021: ECB-EXR-A-USD-EUR-SP00-A-2021 · 1.1827403100775 currency units per EUR</a:t>
+            </a:r>
+          </a:p>
+          <a:p xmlns:a="http://schemas.openxmlformats.org/drawingml/2006/main">
+            <a:r>
+              <a:t>- CAD 2024: ECB-EXR-A-CAD-EUR-SP00-A-2024 · 1.482110546875 currency units per EUR</a:t>
             </a:r>
           </a:p>
         </p:txBody>
@@ -1454,6 +1544,11 @@
           </a:p>
           <a:p xmlns:a="http://schemas.openxmlformats.org/drawingml/2006/main">
             <a:r>
+              <a:t>- https://www150.statcan.gc.ca/t1/tbl1/en/tv.action?pid=2010007101</a:t>
+            </a:r>
+          </a:p>
+          <a:p xmlns:a="http://schemas.openxmlformats.org/drawingml/2006/main">
+            <a:r>
               <a:t>- https://www.ftc.gov/reports/e-cigarette-report-2021</a:t>
             </a:r>
           </a:p>
@@ -1484,6 +1579,11 @@
           </a:p>
           <a:p xmlns:a="http://schemas.openxmlformats.org/drawingml/2006/main">
             <a:r>
+              <a:t>- https://data-api.ecb.europa.eu/service/data/EXR/A.CAD.EUR.SP00.A?startPeriod=2024&amp;endPeriod=2024&amp;format=csvdata</a:t>
+            </a:r>
+          </a:p>
+          <a:p xmlns:a="http://schemas.openxmlformats.org/drawingml/2006/main">
+            <a:r>
               <a:t/>
             </a:r>
           </a:p>
@@ -1510,6 +1610,11 @@
           <a:p xmlns:a="http://schemas.openxmlformats.org/drawingml/2006/main">
             <a:r>
               <a:t>- USD 2021: ECB-EXR-A-USD-EUR-SP00-A-2021 · 1.1827403100775 currency units per EUR</a:t>
+            </a:r>
+          </a:p>
+          <a:p xmlns:a="http://schemas.openxmlformats.org/drawingml/2006/main">
+            <a:r>
+              <a:t>- CAD 2024: ECB-EXR-A-CAD-EUR-SP00-A-2024 · 1.482110546875 currency units per EUR</a:t>
             </a:r>
           </a:p>
         </p:txBody>
@@ -1609,6 +1714,11 @@
           </a:p>
           <a:p xmlns:a="http://schemas.openxmlformats.org/drawingml/2006/main">
             <a:r>
+              <a:t>- https://www150.statcan.gc.ca/t1/tbl1/en/tv.action?pid=2010007101</a:t>
+            </a:r>
+          </a:p>
+          <a:p xmlns:a="http://schemas.openxmlformats.org/drawingml/2006/main">
+            <a:r>
               <a:t>- https://www.ftc.gov/reports/e-cigarette-report-2021</a:t>
             </a:r>
           </a:p>
@@ -1639,6 +1749,11 @@
           </a:p>
           <a:p xmlns:a="http://schemas.openxmlformats.org/drawingml/2006/main">
             <a:r>
+              <a:t>- https://data-api.ecb.europa.eu/service/data/EXR/A.CAD.EUR.SP00.A?startPeriod=2024&amp;endPeriod=2024&amp;format=csvdata</a:t>
+            </a:r>
+          </a:p>
+          <a:p xmlns:a="http://schemas.openxmlformats.org/drawingml/2006/main">
+            <a:r>
               <a:t/>
             </a:r>
           </a:p>
@@ -1665,6 +1780,11 @@
           <a:p xmlns:a="http://schemas.openxmlformats.org/drawingml/2006/main">
             <a:r>
               <a:t>- USD 2021: ECB-EXR-A-USD-EUR-SP00-A-2021 · 1.1827403100775 currency units per EUR</a:t>
+            </a:r>
+          </a:p>
+          <a:p xmlns:a="http://schemas.openxmlformats.org/drawingml/2006/main">
+            <a:r>
+              <a:t>- CAD 2024: ECB-EXR-A-CAD-EUR-SP00-A-2024 · 1.482110546875 currency units per EUR</a:t>
             </a:r>
           </a:p>
         </p:txBody>
@@ -1764,6 +1884,11 @@
           </a:p>
           <a:p xmlns:a="http://schemas.openxmlformats.org/drawingml/2006/main">
             <a:r>
+              <a:t>- https://www150.statcan.gc.ca/t1/tbl1/en/tv.action?pid=2010007101</a:t>
+            </a:r>
+          </a:p>
+          <a:p xmlns:a="http://schemas.openxmlformats.org/drawingml/2006/main">
+            <a:r>
               <a:t>- https://www.ftc.gov/reports/e-cigarette-report-2021</a:t>
             </a:r>
           </a:p>
@@ -1794,6 +1919,11 @@
           </a:p>
           <a:p xmlns:a="http://schemas.openxmlformats.org/drawingml/2006/main">
             <a:r>
+              <a:t>- https://data-api.ecb.europa.eu/service/data/EXR/A.CAD.EUR.SP00.A?startPeriod=2024&amp;endPeriod=2024&amp;format=csvdata</a:t>
+            </a:r>
+          </a:p>
+          <a:p xmlns:a="http://schemas.openxmlformats.org/drawingml/2006/main">
+            <a:r>
               <a:t/>
             </a:r>
           </a:p>
@@ -1820,6 +1950,11 @@
           <a:p xmlns:a="http://schemas.openxmlformats.org/drawingml/2006/main">
             <a:r>
               <a:t>- USD 2021: ECB-EXR-A-USD-EUR-SP00-A-2021 · 1.1827403100775 currency units per EUR</a:t>
+            </a:r>
+          </a:p>
+          <a:p xmlns:a="http://schemas.openxmlformats.org/drawingml/2006/main">
+            <a:r>
+              <a:t>- CAD 2024: ECB-EXR-A-CAD-EUR-SP00-A-2024 · 1.482110546875 currency units per EUR</a:t>
             </a:r>
           </a:p>
         </p:txBody>
@@ -1919,6 +2054,11 @@
           </a:p>
           <a:p xmlns:a="http://schemas.openxmlformats.org/drawingml/2006/main">
             <a:r>
+              <a:t>- https://www150.statcan.gc.ca/t1/tbl1/en/tv.action?pid=2010007101</a:t>
+            </a:r>
+          </a:p>
+          <a:p xmlns:a="http://schemas.openxmlformats.org/drawingml/2006/main">
+            <a:r>
               <a:t>- https://www.ftc.gov/reports/e-cigarette-report-2021</a:t>
             </a:r>
           </a:p>
@@ -1949,6 +2089,11 @@
           </a:p>
           <a:p xmlns:a="http://schemas.openxmlformats.org/drawingml/2006/main">
             <a:r>
+              <a:t>- https://data-api.ecb.europa.eu/service/data/EXR/A.CAD.EUR.SP00.A?startPeriod=2024&amp;endPeriod=2024&amp;format=csvdata</a:t>
+            </a:r>
+          </a:p>
+          <a:p xmlns:a="http://schemas.openxmlformats.org/drawingml/2006/main">
+            <a:r>
               <a:t/>
             </a:r>
           </a:p>
@@ -1975,6 +2120,11 @@
           <a:p xmlns:a="http://schemas.openxmlformats.org/drawingml/2006/main">
             <a:r>
               <a:t>- USD 2021: ECB-EXR-A-USD-EUR-SP00-A-2021 · 1.1827403100775 currency units per EUR</a:t>
+            </a:r>
+          </a:p>
+          <a:p xmlns:a="http://schemas.openxmlformats.org/drawingml/2006/main">
+            <a:r>
+              <a:t>- CAD 2024: ECB-EXR-A-CAD-EUR-SP00-A-2024 · 1.482110546875 currency units per EUR</a:t>
             </a:r>
           </a:p>
         </p:txBody>
@@ -2074,6 +2224,11 @@
           </a:p>
           <a:p xmlns:a="http://schemas.openxmlformats.org/drawingml/2006/main">
             <a:r>
+              <a:t>- https://www150.statcan.gc.ca/t1/tbl1/en/tv.action?pid=2010007101</a:t>
+            </a:r>
+          </a:p>
+          <a:p xmlns:a="http://schemas.openxmlformats.org/drawingml/2006/main">
+            <a:r>
               <a:t>- https://www.ftc.gov/reports/e-cigarette-report-2021</a:t>
             </a:r>
           </a:p>
@@ -2104,6 +2259,11 @@
           </a:p>
           <a:p xmlns:a="http://schemas.openxmlformats.org/drawingml/2006/main">
             <a:r>
+              <a:t>- https://data-api.ecb.europa.eu/service/data/EXR/A.CAD.EUR.SP00.A?startPeriod=2024&amp;endPeriod=2024&amp;format=csvdata</a:t>
+            </a:r>
+          </a:p>
+          <a:p xmlns:a="http://schemas.openxmlformats.org/drawingml/2006/main">
+            <a:r>
               <a:t/>
             </a:r>
           </a:p>
@@ -2130,6 +2290,11 @@
           <a:p xmlns:a="http://schemas.openxmlformats.org/drawingml/2006/main">
             <a:r>
               <a:t>- USD 2021: ECB-EXR-A-USD-EUR-SP00-A-2021 · 1.1827403100775 currency units per EUR</a:t>
+            </a:r>
+          </a:p>
+          <a:p xmlns:a="http://schemas.openxmlformats.org/drawingml/2006/main">
+            <a:r>
+              <a:t>- CAD 2024: ECB-EXR-A-CAD-EUR-SP00-A-2024 · 1.482110546875 currency units per EUR</a:t>
             </a:r>
           </a:p>
         </p:txBody>
@@ -2229,6 +2394,11 @@
           </a:p>
           <a:p xmlns:a="http://schemas.openxmlformats.org/drawingml/2006/main">
             <a:r>
+              <a:t>- https://www150.statcan.gc.ca/t1/tbl1/en/tv.action?pid=2010007101</a:t>
+            </a:r>
+          </a:p>
+          <a:p xmlns:a="http://schemas.openxmlformats.org/drawingml/2006/main">
+            <a:r>
               <a:t>- https://www.ftc.gov/reports/e-cigarette-report-2021</a:t>
             </a:r>
           </a:p>
@@ -2259,6 +2429,11 @@
           </a:p>
           <a:p xmlns:a="http://schemas.openxmlformats.org/drawingml/2006/main">
             <a:r>
+              <a:t>- https://data-api.ecb.europa.eu/service/data/EXR/A.CAD.EUR.SP00.A?startPeriod=2024&amp;endPeriod=2024&amp;format=csvdata</a:t>
+            </a:r>
+          </a:p>
+          <a:p xmlns:a="http://schemas.openxmlformats.org/drawingml/2006/main">
+            <a:r>
               <a:t/>
             </a:r>
           </a:p>
@@ -2285,6 +2460,11 @@
           <a:p xmlns:a="http://schemas.openxmlformats.org/drawingml/2006/main">
             <a:r>
               <a:t>- USD 2021: ECB-EXR-A-USD-EUR-SP00-A-2021 · 1.1827403100775 currency units per EUR</a:t>
+            </a:r>
+          </a:p>
+          <a:p xmlns:a="http://schemas.openxmlformats.org/drawingml/2006/main">
+            <a:r>
+              <a:t>- CAD 2024: ECB-EXR-A-CAD-EUR-SP00-A-2024 · 1.482110546875 currency units per EUR</a:t>
             </a:r>
           </a:p>
         </p:txBody>
@@ -2384,6 +2564,11 @@
           </a:p>
           <a:p xmlns:a="http://schemas.openxmlformats.org/drawingml/2006/main">
             <a:r>
+              <a:t>- https://www150.statcan.gc.ca/t1/tbl1/en/tv.action?pid=2010007101</a:t>
+            </a:r>
+          </a:p>
+          <a:p xmlns:a="http://schemas.openxmlformats.org/drawingml/2006/main">
+            <a:r>
               <a:t>- https://www.ftc.gov/reports/e-cigarette-report-2021</a:t>
             </a:r>
           </a:p>
@@ -2414,6 +2599,11 @@
           </a:p>
           <a:p xmlns:a="http://schemas.openxmlformats.org/drawingml/2006/main">
             <a:r>
+              <a:t>- https://data-api.ecb.europa.eu/service/data/EXR/A.CAD.EUR.SP00.A?startPeriod=2024&amp;endPeriod=2024&amp;format=csvdata</a:t>
+            </a:r>
+          </a:p>
+          <a:p xmlns:a="http://schemas.openxmlformats.org/drawingml/2006/main">
+            <a:r>
               <a:t/>
             </a:r>
           </a:p>
@@ -2440,6 +2630,11 @@
           <a:p xmlns:a="http://schemas.openxmlformats.org/drawingml/2006/main">
             <a:r>
               <a:t>- USD 2021: ECB-EXR-A-USD-EUR-SP00-A-2021 · 1.1827403100775 currency units per EUR</a:t>
+            </a:r>
+          </a:p>
+          <a:p xmlns:a="http://schemas.openxmlformats.org/drawingml/2006/main">
+            <a:r>
+              <a:t>- CAD 2024: ECB-EXR-A-CAD-EUR-SP00-A-2024 · 1.482110546875 currency units per EUR</a:t>
             </a:r>
           </a:p>
         </p:txBody>
@@ -2539,6 +2734,11 @@
           </a:p>
           <a:p xmlns:a="http://schemas.openxmlformats.org/drawingml/2006/main">
             <a:r>
+              <a:t>- https://www150.statcan.gc.ca/t1/tbl1/en/tv.action?pid=2010007101</a:t>
+            </a:r>
+          </a:p>
+          <a:p xmlns:a="http://schemas.openxmlformats.org/drawingml/2006/main">
+            <a:r>
               <a:t>- https://www.ftc.gov/reports/e-cigarette-report-2021</a:t>
             </a:r>
           </a:p>
@@ -2569,6 +2769,11 @@
           </a:p>
           <a:p xmlns:a="http://schemas.openxmlformats.org/drawingml/2006/main">
             <a:r>
+              <a:t>- https://data-api.ecb.europa.eu/service/data/EXR/A.CAD.EUR.SP00.A?startPeriod=2024&amp;endPeriod=2024&amp;format=csvdata</a:t>
+            </a:r>
+          </a:p>
+          <a:p xmlns:a="http://schemas.openxmlformats.org/drawingml/2006/main">
+            <a:r>
               <a:t/>
             </a:r>
           </a:p>
@@ -2595,6 +2800,11 @@
           <a:p xmlns:a="http://schemas.openxmlformats.org/drawingml/2006/main">
             <a:r>
               <a:t>- USD 2021: ECB-EXR-A-USD-EUR-SP00-A-2021 · 1.1827403100775 currency units per EUR</a:t>
+            </a:r>
+          </a:p>
+          <a:p xmlns:a="http://schemas.openxmlformats.org/drawingml/2006/main">
+            <a:r>
+              <a:t>- CAD 2024: ECB-EXR-A-CAD-EUR-SP00-A-2024 · 1.482110546875 currency units per EUR</a:t>
             </a:r>
           </a:p>
         </p:txBody>
@@ -2694,6 +2904,11 @@
           </a:p>
           <a:p xmlns:a="http://schemas.openxmlformats.org/drawingml/2006/main">
             <a:r>
+              <a:t>- https://www150.statcan.gc.ca/t1/tbl1/en/tv.action?pid=2010007101</a:t>
+            </a:r>
+          </a:p>
+          <a:p xmlns:a="http://schemas.openxmlformats.org/drawingml/2006/main">
+            <a:r>
               <a:t>- https://www.ftc.gov/reports/e-cigarette-report-2021</a:t>
             </a:r>
           </a:p>
@@ -2724,6 +2939,11 @@
           </a:p>
           <a:p xmlns:a="http://schemas.openxmlformats.org/drawingml/2006/main">
             <a:r>
+              <a:t>- https://data-api.ecb.europa.eu/service/data/EXR/A.CAD.EUR.SP00.A?startPeriod=2024&amp;endPeriod=2024&amp;format=csvdata</a:t>
+            </a:r>
+          </a:p>
+          <a:p xmlns:a="http://schemas.openxmlformats.org/drawingml/2006/main">
+            <a:r>
               <a:t/>
             </a:r>
           </a:p>
@@ -2750,6 +2970,11 @@
           <a:p xmlns:a="http://schemas.openxmlformats.org/drawingml/2006/main">
             <a:r>
               <a:t>- USD 2021: ECB-EXR-A-USD-EUR-SP00-A-2021 · 1.1827403100775 currency units per EUR</a:t>
+            </a:r>
+          </a:p>
+          <a:p xmlns:a="http://schemas.openxmlformats.org/drawingml/2006/main">
+            <a:r>
+              <a:t>- CAD 2024: ECB-EXR-A-CAD-EUR-SP00-A-2024 · 1.482110546875 currency units per EUR</a:t>
             </a:r>
           </a:p>
         </p:txBody>
@@ -2849,6 +3074,11 @@
           </a:p>
           <a:p xmlns:a="http://schemas.openxmlformats.org/drawingml/2006/main">
             <a:r>
+              <a:t>- https://www150.statcan.gc.ca/t1/tbl1/en/tv.action?pid=2010007101</a:t>
+            </a:r>
+          </a:p>
+          <a:p xmlns:a="http://schemas.openxmlformats.org/drawingml/2006/main">
+            <a:r>
               <a:t>- https://www.ftc.gov/reports/e-cigarette-report-2021</a:t>
             </a:r>
           </a:p>
@@ -2879,6 +3109,11 @@
           </a:p>
           <a:p xmlns:a="http://schemas.openxmlformats.org/drawingml/2006/main">
             <a:r>
+              <a:t>- https://data-api.ecb.europa.eu/service/data/EXR/A.CAD.EUR.SP00.A?startPeriod=2024&amp;endPeriod=2024&amp;format=csvdata</a:t>
+            </a:r>
+          </a:p>
+          <a:p xmlns:a="http://schemas.openxmlformats.org/drawingml/2006/main">
+            <a:r>
               <a:t/>
             </a:r>
           </a:p>
@@ -2905,6 +3140,11 @@
           <a:p xmlns:a="http://schemas.openxmlformats.org/drawingml/2006/main">
             <a:r>
               <a:t>- USD 2021: ECB-EXR-A-USD-EUR-SP00-A-2021 · 1.1827403100775 currency units per EUR</a:t>
+            </a:r>
+          </a:p>
+          <a:p xmlns:a="http://schemas.openxmlformats.org/drawingml/2006/main">
+            <a:r>
+              <a:t>- CAD 2024: ECB-EXR-A-CAD-EUR-SP00-A-2024 · 1.482110546875 currency units per EUR</a:t>
             </a:r>
           </a:p>
         </p:txBody>
@@ -3004,6 +3244,11 @@
           </a:p>
           <a:p xmlns:a="http://schemas.openxmlformats.org/drawingml/2006/main">
             <a:r>
+              <a:t>- https://www150.statcan.gc.ca/t1/tbl1/en/tv.action?pid=2010007101</a:t>
+            </a:r>
+          </a:p>
+          <a:p xmlns:a="http://schemas.openxmlformats.org/drawingml/2006/main">
+            <a:r>
               <a:t>- https://www.ftc.gov/reports/e-cigarette-report-2021</a:t>
             </a:r>
           </a:p>
@@ -3034,6 +3279,11 @@
           </a:p>
           <a:p xmlns:a="http://schemas.openxmlformats.org/drawingml/2006/main">
             <a:r>
+              <a:t>- https://data-api.ecb.europa.eu/service/data/EXR/A.CAD.EUR.SP00.A?startPeriod=2024&amp;endPeriod=2024&amp;format=csvdata</a:t>
+            </a:r>
+          </a:p>
+          <a:p xmlns:a="http://schemas.openxmlformats.org/drawingml/2006/main">
+            <a:r>
               <a:t/>
             </a:r>
           </a:p>
@@ -3060,6 +3310,11 @@
           <a:p xmlns:a="http://schemas.openxmlformats.org/drawingml/2006/main">
             <a:r>
               <a:t>- USD 2021: ECB-EXR-A-USD-EUR-SP00-A-2021 · 1.1827403100775 currency units per EUR</a:t>
+            </a:r>
+          </a:p>
+          <a:p xmlns:a="http://schemas.openxmlformats.org/drawingml/2006/main">
+            <a:r>
+              <a:t>- CAD 2024: ECB-EXR-A-CAD-EUR-SP00-A-2024 · 1.482110546875 currency units per EUR</a:t>
             </a:r>
           </a:p>
         </p:txBody>
@@ -3159,6 +3414,11 @@
           </a:p>
           <a:p xmlns:a="http://schemas.openxmlformats.org/drawingml/2006/main">
             <a:r>
+              <a:t>- https://www150.statcan.gc.ca/t1/tbl1/en/tv.action?pid=2010007101</a:t>
+            </a:r>
+          </a:p>
+          <a:p xmlns:a="http://schemas.openxmlformats.org/drawingml/2006/main">
+            <a:r>
               <a:t>- https://www.ftc.gov/reports/e-cigarette-report-2021</a:t>
             </a:r>
           </a:p>
@@ -3189,6 +3449,11 @@
           </a:p>
           <a:p xmlns:a="http://schemas.openxmlformats.org/drawingml/2006/main">
             <a:r>
+              <a:t>- https://data-api.ecb.europa.eu/service/data/EXR/A.CAD.EUR.SP00.A?startPeriod=2024&amp;endPeriod=2024&amp;format=csvdata</a:t>
+            </a:r>
+          </a:p>
+          <a:p xmlns:a="http://schemas.openxmlformats.org/drawingml/2006/main">
+            <a:r>
               <a:t/>
             </a:r>
           </a:p>
@@ -3215,6 +3480,11 @@
           <a:p xmlns:a="http://schemas.openxmlformats.org/drawingml/2006/main">
             <a:r>
               <a:t>- USD 2021: ECB-EXR-A-USD-EUR-SP00-A-2021 · 1.1827403100775 currency units per EUR</a:t>
+            </a:r>
+          </a:p>
+          <a:p xmlns:a="http://schemas.openxmlformats.org/drawingml/2006/main">
+            <a:r>
+              <a:t>- CAD 2024: ECB-EXR-A-CAD-EUR-SP00-A-2024 · 1.482110546875 currency units per EUR</a:t>
             </a:r>
           </a:p>
         </p:txBody>
@@ -3314,6 +3584,11 @@
           </a:p>
           <a:p xmlns:a="http://schemas.openxmlformats.org/drawingml/2006/main">
             <a:r>
+              <a:t>- https://www150.statcan.gc.ca/t1/tbl1/en/tv.action?pid=2010007101</a:t>
+            </a:r>
+          </a:p>
+          <a:p xmlns:a="http://schemas.openxmlformats.org/drawingml/2006/main">
+            <a:r>
               <a:t>- https://www.ftc.gov/reports/e-cigarette-report-2021</a:t>
             </a:r>
           </a:p>
@@ -3344,6 +3619,11 @@
           </a:p>
           <a:p xmlns:a="http://schemas.openxmlformats.org/drawingml/2006/main">
             <a:r>
+              <a:t>- https://data-api.ecb.europa.eu/service/data/EXR/A.CAD.EUR.SP00.A?startPeriod=2024&amp;endPeriod=2024&amp;format=csvdata</a:t>
+            </a:r>
+          </a:p>
+          <a:p xmlns:a="http://schemas.openxmlformats.org/drawingml/2006/main">
+            <a:r>
               <a:t/>
             </a:r>
           </a:p>
@@ -3370,6 +3650,11 @@
           <a:p xmlns:a="http://schemas.openxmlformats.org/drawingml/2006/main">
             <a:r>
               <a:t>- USD 2021: ECB-EXR-A-USD-EUR-SP00-A-2021 · 1.1827403100775 currency units per EUR</a:t>
+            </a:r>
+          </a:p>
+          <a:p xmlns:a="http://schemas.openxmlformats.org/drawingml/2006/main">
+            <a:r>
+              <a:t>- CAD 2024: ECB-EXR-A-CAD-EUR-SP00-A-2024 · 1.482110546875 currency units per EUR</a:t>
             </a:r>
           </a:p>
         </p:txBody>
@@ -3469,6 +3754,11 @@
           </a:p>
           <a:p xmlns:a="http://schemas.openxmlformats.org/drawingml/2006/main">
             <a:r>
+              <a:t>- https://www150.statcan.gc.ca/t1/tbl1/en/tv.action?pid=2010007101</a:t>
+            </a:r>
+          </a:p>
+          <a:p xmlns:a="http://schemas.openxmlformats.org/drawingml/2006/main">
+            <a:r>
               <a:t>- https://www.ftc.gov/reports/e-cigarette-report-2021</a:t>
             </a:r>
           </a:p>
@@ -3499,6 +3789,11 @@
           </a:p>
           <a:p xmlns:a="http://schemas.openxmlformats.org/drawingml/2006/main">
             <a:r>
+              <a:t>- https://data-api.ecb.europa.eu/service/data/EXR/A.CAD.EUR.SP00.A?startPeriod=2024&amp;endPeriod=2024&amp;format=csvdata</a:t>
+            </a:r>
+          </a:p>
+          <a:p xmlns:a="http://schemas.openxmlformats.org/drawingml/2006/main">
+            <a:r>
               <a:t/>
             </a:r>
           </a:p>
@@ -3525,6 +3820,11 @@
           <a:p xmlns:a="http://schemas.openxmlformats.org/drawingml/2006/main">
             <a:r>
               <a:t>- USD 2021: ECB-EXR-A-USD-EUR-SP00-A-2021 · 1.1827403100775 currency units per EUR</a:t>
+            </a:r>
+          </a:p>
+          <a:p xmlns:a="http://schemas.openxmlformats.org/drawingml/2006/main">
+            <a:r>
+              <a:t>- CAD 2024: ECB-EXR-A-CAD-EUR-SP00-A-2024 · 1.482110546875 currency units per EUR</a:t>
             </a:r>
           </a:p>
         </p:txBody>
@@ -3624,6 +3924,11 @@
           </a:p>
           <a:p xmlns:a="http://schemas.openxmlformats.org/drawingml/2006/main">
             <a:r>
+              <a:t>- https://www150.statcan.gc.ca/t1/tbl1/en/tv.action?pid=2010007101</a:t>
+            </a:r>
+          </a:p>
+          <a:p xmlns:a="http://schemas.openxmlformats.org/drawingml/2006/main">
+            <a:r>
               <a:t>- https://www.ftc.gov/reports/e-cigarette-report-2021</a:t>
             </a:r>
           </a:p>
@@ -3654,6 +3959,11 @@
           </a:p>
           <a:p xmlns:a="http://schemas.openxmlformats.org/drawingml/2006/main">
             <a:r>
+              <a:t>- https://data-api.ecb.europa.eu/service/data/EXR/A.CAD.EUR.SP00.A?startPeriod=2024&amp;endPeriod=2024&amp;format=csvdata</a:t>
+            </a:r>
+          </a:p>
+          <a:p xmlns:a="http://schemas.openxmlformats.org/drawingml/2006/main">
+            <a:r>
               <a:t/>
             </a:r>
           </a:p>
@@ -3680,6 +3990,11 @@
           <a:p xmlns:a="http://schemas.openxmlformats.org/drawingml/2006/main">
             <a:r>
               <a:t>- USD 2021: ECB-EXR-A-USD-EUR-SP00-A-2021 · 1.1827403100775 currency units per EUR</a:t>
+            </a:r>
+          </a:p>
+          <a:p xmlns:a="http://schemas.openxmlformats.org/drawingml/2006/main">
+            <a:r>
+              <a:t>- CAD 2024: ECB-EXR-A-CAD-EUR-SP00-A-2024 · 1.482110546875 currency units per EUR</a:t>
             </a:r>
           </a:p>
         </p:txBody>
@@ -3779,6 +4094,11 @@
           </a:p>
           <a:p xmlns:a="http://schemas.openxmlformats.org/drawingml/2006/main">
             <a:r>
+              <a:t>- https://www150.statcan.gc.ca/t1/tbl1/en/tv.action?pid=2010007101</a:t>
+            </a:r>
+          </a:p>
+          <a:p xmlns:a="http://schemas.openxmlformats.org/drawingml/2006/main">
+            <a:r>
               <a:t>- https://www.ftc.gov/reports/e-cigarette-report-2021</a:t>
             </a:r>
           </a:p>
@@ -3809,6 +4129,11 @@
           </a:p>
           <a:p xmlns:a="http://schemas.openxmlformats.org/drawingml/2006/main">
             <a:r>
+              <a:t>- https://data-api.ecb.europa.eu/service/data/EXR/A.CAD.EUR.SP00.A?startPeriod=2024&amp;endPeriod=2024&amp;format=csvdata</a:t>
+            </a:r>
+          </a:p>
+          <a:p xmlns:a="http://schemas.openxmlformats.org/drawingml/2006/main">
+            <a:r>
               <a:t/>
             </a:r>
           </a:p>
@@ -3835,6 +4160,11 @@
           <a:p xmlns:a="http://schemas.openxmlformats.org/drawingml/2006/main">
             <a:r>
               <a:t>- USD 2021: ECB-EXR-A-USD-EUR-SP00-A-2021 · 1.1827403100775 currency units per EUR</a:t>
+            </a:r>
+          </a:p>
+          <a:p xmlns:a="http://schemas.openxmlformats.org/drawingml/2006/main">
+            <a:r>
+              <a:t>- CAD 2024: ECB-EXR-A-CAD-EUR-SP00-A-2024 · 1.482110546875 currency units per EUR</a:t>
             </a:r>
           </a:p>
         </p:txBody>
@@ -3934,6 +4264,11 @@
           </a:p>
           <a:p xmlns:a="http://schemas.openxmlformats.org/drawingml/2006/main">
             <a:r>
+              <a:t>- https://www150.statcan.gc.ca/t1/tbl1/en/tv.action?pid=2010007101</a:t>
+            </a:r>
+          </a:p>
+          <a:p xmlns:a="http://schemas.openxmlformats.org/drawingml/2006/main">
+            <a:r>
               <a:t>- https://www.ftc.gov/reports/e-cigarette-report-2021</a:t>
             </a:r>
           </a:p>
@@ -3964,6 +4299,11 @@
           </a:p>
           <a:p xmlns:a="http://schemas.openxmlformats.org/drawingml/2006/main">
             <a:r>
+              <a:t>- https://data-api.ecb.europa.eu/service/data/EXR/A.CAD.EUR.SP00.A?startPeriod=2024&amp;endPeriod=2024&amp;format=csvdata</a:t>
+            </a:r>
+          </a:p>
+          <a:p xmlns:a="http://schemas.openxmlformats.org/drawingml/2006/main">
+            <a:r>
               <a:t/>
             </a:r>
           </a:p>
@@ -3990,6 +4330,11 @@
           <a:p xmlns:a="http://schemas.openxmlformats.org/drawingml/2006/main">
             <a:r>
               <a:t>- USD 2021: ECB-EXR-A-USD-EUR-SP00-A-2021 · 1.1827403100775 currency units per EUR</a:t>
+            </a:r>
+          </a:p>
+          <a:p xmlns:a="http://schemas.openxmlformats.org/drawingml/2006/main">
+            <a:r>
+              <a:t>- CAD 2024: ECB-EXR-A-CAD-EUR-SP00-A-2024 · 1.482110546875 currency units per EUR</a:t>
             </a:r>
           </a:p>
         </p:txBody>
@@ -4089,6 +4434,11 @@
           </a:p>
           <a:p xmlns:a="http://schemas.openxmlformats.org/drawingml/2006/main">
             <a:r>
+              <a:t>- https://www150.statcan.gc.ca/t1/tbl1/en/tv.action?pid=2010007101</a:t>
+            </a:r>
+          </a:p>
+          <a:p xmlns:a="http://schemas.openxmlformats.org/drawingml/2006/main">
+            <a:r>
               <a:t>- https://www.ftc.gov/reports/e-cigarette-report-2021</a:t>
             </a:r>
           </a:p>
@@ -4119,6 +4469,11 @@
           </a:p>
           <a:p xmlns:a="http://schemas.openxmlformats.org/drawingml/2006/main">
             <a:r>
+              <a:t>- https://data-api.ecb.europa.eu/service/data/EXR/A.CAD.EUR.SP00.A?startPeriod=2024&amp;endPeriod=2024&amp;format=csvdata</a:t>
+            </a:r>
+          </a:p>
+          <a:p xmlns:a="http://schemas.openxmlformats.org/drawingml/2006/main">
+            <a:r>
               <a:t/>
             </a:r>
           </a:p>
@@ -4145,6 +4500,11 @@
           <a:p xmlns:a="http://schemas.openxmlformats.org/drawingml/2006/main">
             <a:r>
               <a:t>- USD 2021: ECB-EXR-A-USD-EUR-SP00-A-2021 · 1.1827403100775 currency units per EUR</a:t>
+            </a:r>
+          </a:p>
+          <a:p xmlns:a="http://schemas.openxmlformats.org/drawingml/2006/main">
+            <a:r>
+              <a:t>- CAD 2024: ECB-EXR-A-CAD-EUR-SP00-A-2024 · 1.482110546875 currency units per EUR</a:t>
             </a:r>
           </a:p>
         </p:txBody>
@@ -4244,6 +4604,11 @@
           </a:p>
           <a:p xmlns:a="http://schemas.openxmlformats.org/drawingml/2006/main">
             <a:r>
+              <a:t>- https://www150.statcan.gc.ca/t1/tbl1/en/tv.action?pid=2010007101</a:t>
+            </a:r>
+          </a:p>
+          <a:p xmlns:a="http://schemas.openxmlformats.org/drawingml/2006/main">
+            <a:r>
               <a:t>- https://www.ftc.gov/reports/e-cigarette-report-2021</a:t>
             </a:r>
           </a:p>
@@ -4274,6 +4639,11 @@
           </a:p>
           <a:p xmlns:a="http://schemas.openxmlformats.org/drawingml/2006/main">
             <a:r>
+              <a:t>- https://data-api.ecb.europa.eu/service/data/EXR/A.CAD.EUR.SP00.A?startPeriod=2024&amp;endPeriod=2024&amp;format=csvdata</a:t>
+            </a:r>
+          </a:p>
+          <a:p xmlns:a="http://schemas.openxmlformats.org/drawingml/2006/main">
+            <a:r>
               <a:t/>
             </a:r>
           </a:p>
@@ -4300,6 +4670,11 @@
           <a:p xmlns:a="http://schemas.openxmlformats.org/drawingml/2006/main">
             <a:r>
               <a:t>- USD 2021: ECB-EXR-A-USD-EUR-SP00-A-2021 · 1.1827403100775 currency units per EUR</a:t>
+            </a:r>
+          </a:p>
+          <a:p xmlns:a="http://schemas.openxmlformats.org/drawingml/2006/main">
+            <a:r>
+              <a:t>- CAD 2024: ECB-EXR-A-CAD-EUR-SP00-A-2024 · 1.482110546875 currency units per EUR</a:t>
             </a:r>
           </a:p>
         </p:txBody>
@@ -4399,6 +4774,11 @@
           </a:p>
           <a:p xmlns:a="http://schemas.openxmlformats.org/drawingml/2006/main">
             <a:r>
+              <a:t>- https://www150.statcan.gc.ca/t1/tbl1/en/tv.action?pid=2010007101</a:t>
+            </a:r>
+          </a:p>
+          <a:p xmlns:a="http://schemas.openxmlformats.org/drawingml/2006/main">
+            <a:r>
               <a:t>- https://www.ftc.gov/reports/e-cigarette-report-2021</a:t>
             </a:r>
           </a:p>
@@ -4429,6 +4809,11 @@
           </a:p>
           <a:p xmlns:a="http://schemas.openxmlformats.org/drawingml/2006/main">
             <a:r>
+              <a:t>- https://data-api.ecb.europa.eu/service/data/EXR/A.CAD.EUR.SP00.A?startPeriod=2024&amp;endPeriod=2024&amp;format=csvdata</a:t>
+            </a:r>
+          </a:p>
+          <a:p xmlns:a="http://schemas.openxmlformats.org/drawingml/2006/main">
+            <a:r>
               <a:t/>
             </a:r>
           </a:p>
@@ -4455,6 +4840,11 @@
           <a:p xmlns:a="http://schemas.openxmlformats.org/drawingml/2006/main">
             <a:r>
               <a:t>- USD 2021: ECB-EXR-A-USD-EUR-SP00-A-2021 · 1.1827403100775 currency units per EUR</a:t>
+            </a:r>
+          </a:p>
+          <a:p xmlns:a="http://schemas.openxmlformats.org/drawingml/2006/main">
+            <a:r>
+              <a:t>- CAD 2024: ECB-EXR-A-CAD-EUR-SP00-A-2024 · 1.482110546875 currency units per EUR</a:t>
             </a:r>
           </a:p>
         </p:txBody>
@@ -4554,6 +4944,11 @@
           </a:p>
           <a:p xmlns:a="http://schemas.openxmlformats.org/drawingml/2006/main">
             <a:r>
+              <a:t>- https://www150.statcan.gc.ca/t1/tbl1/en/tv.action?pid=2010007101</a:t>
+            </a:r>
+          </a:p>
+          <a:p xmlns:a="http://schemas.openxmlformats.org/drawingml/2006/main">
+            <a:r>
               <a:t>- https://www.ftc.gov/reports/e-cigarette-report-2021</a:t>
             </a:r>
           </a:p>
@@ -4584,6 +4979,11 @@
           </a:p>
           <a:p xmlns:a="http://schemas.openxmlformats.org/drawingml/2006/main">
             <a:r>
+              <a:t>- https://data-api.ecb.europa.eu/service/data/EXR/A.CAD.EUR.SP00.A?startPeriod=2024&amp;endPeriod=2024&amp;format=csvdata</a:t>
+            </a:r>
+          </a:p>
+          <a:p xmlns:a="http://schemas.openxmlformats.org/drawingml/2006/main">
+            <a:r>
               <a:t/>
             </a:r>
           </a:p>
@@ -4610,6 +5010,11 @@
           <a:p xmlns:a="http://schemas.openxmlformats.org/drawingml/2006/main">
             <a:r>
               <a:t>- USD 2021: ECB-EXR-A-USD-EUR-SP00-A-2021 · 1.1827403100775 currency units per EUR</a:t>
+            </a:r>
+          </a:p>
+          <a:p xmlns:a="http://schemas.openxmlformats.org/drawingml/2006/main">
+            <a:r>
+              <a:t>- CAD 2024: ECB-EXR-A-CAD-EUR-SP00-A-2024 · 1.482110546875 currency units per EUR</a:t>
             </a:r>
           </a:p>
         </p:txBody>
@@ -4709,6 +5114,11 @@
           </a:p>
           <a:p xmlns:a="http://schemas.openxmlformats.org/drawingml/2006/main">
             <a:r>
+              <a:t>- https://www150.statcan.gc.ca/t1/tbl1/en/tv.action?pid=2010007101</a:t>
+            </a:r>
+          </a:p>
+          <a:p xmlns:a="http://schemas.openxmlformats.org/drawingml/2006/main">
+            <a:r>
               <a:t>- https://www.ftc.gov/reports/e-cigarette-report-2021</a:t>
             </a:r>
           </a:p>
@@ -4739,6 +5149,11 @@
           </a:p>
           <a:p xmlns:a="http://schemas.openxmlformats.org/drawingml/2006/main">
             <a:r>
+              <a:t>- https://data-api.ecb.europa.eu/service/data/EXR/A.CAD.EUR.SP00.A?startPeriod=2024&amp;endPeriod=2024&amp;format=csvdata</a:t>
+            </a:r>
+          </a:p>
+          <a:p xmlns:a="http://schemas.openxmlformats.org/drawingml/2006/main">
+            <a:r>
               <a:t/>
             </a:r>
           </a:p>
@@ -4765,6 +5180,11 @@
           <a:p xmlns:a="http://schemas.openxmlformats.org/drawingml/2006/main">
             <a:r>
               <a:t>- USD 2021: ECB-EXR-A-USD-EUR-SP00-A-2021 · 1.1827403100775 currency units per EUR</a:t>
+            </a:r>
+          </a:p>
+          <a:p xmlns:a="http://schemas.openxmlformats.org/drawingml/2006/main">
+            <a:r>
+              <a:t>- CAD 2024: ECB-EXR-A-CAD-EUR-SP00-A-2024 · 1.482110546875 currency units per EUR</a:t>
             </a:r>
           </a:p>
         </p:txBody>
@@ -4864,6 +5284,11 @@
           </a:p>
           <a:p xmlns:a="http://schemas.openxmlformats.org/drawingml/2006/main">
             <a:r>
+              <a:t>- https://www150.statcan.gc.ca/t1/tbl1/en/tv.action?pid=2010007101</a:t>
+            </a:r>
+          </a:p>
+          <a:p xmlns:a="http://schemas.openxmlformats.org/drawingml/2006/main">
+            <a:r>
               <a:t>- https://www.ftc.gov/reports/e-cigarette-report-2021</a:t>
             </a:r>
           </a:p>
@@ -4894,6 +5319,11 @@
           </a:p>
           <a:p xmlns:a="http://schemas.openxmlformats.org/drawingml/2006/main">
             <a:r>
+              <a:t>- https://data-api.ecb.europa.eu/service/data/EXR/A.CAD.EUR.SP00.A?startPeriod=2024&amp;endPeriod=2024&amp;format=csvdata</a:t>
+            </a:r>
+          </a:p>
+          <a:p xmlns:a="http://schemas.openxmlformats.org/drawingml/2006/main">
+            <a:r>
               <a:t/>
             </a:r>
           </a:p>
@@ -4920,6 +5350,11 @@
           <a:p xmlns:a="http://schemas.openxmlformats.org/drawingml/2006/main">
             <a:r>
               <a:t>- USD 2021: ECB-EXR-A-USD-EUR-SP00-A-2021 · 1.1827403100775 currency units per EUR</a:t>
+            </a:r>
+          </a:p>
+          <a:p xmlns:a="http://schemas.openxmlformats.org/drawingml/2006/main">
+            <a:r>
+              <a:t>- CAD 2024: ECB-EXR-A-CAD-EUR-SP00-A-2024 · 1.482110546875 currency units per EUR</a:t>
             </a:r>
           </a:p>
         </p:txBody>
@@ -5019,6 +5454,11 @@
           </a:p>
           <a:p xmlns:a="http://schemas.openxmlformats.org/drawingml/2006/main">
             <a:r>
+              <a:t>- https://www150.statcan.gc.ca/t1/tbl1/en/tv.action?pid=2010007101</a:t>
+            </a:r>
+          </a:p>
+          <a:p xmlns:a="http://schemas.openxmlformats.org/drawingml/2006/main">
+            <a:r>
               <a:t>- https://www.ftc.gov/reports/e-cigarette-report-2021</a:t>
             </a:r>
           </a:p>
@@ -5049,6 +5489,11 @@
           </a:p>
           <a:p xmlns:a="http://schemas.openxmlformats.org/drawingml/2006/main">
             <a:r>
+              <a:t>- https://data-api.ecb.europa.eu/service/data/EXR/A.CAD.EUR.SP00.A?startPeriod=2024&amp;endPeriod=2024&amp;format=csvdata</a:t>
+            </a:r>
+          </a:p>
+          <a:p xmlns:a="http://schemas.openxmlformats.org/drawingml/2006/main">
+            <a:r>
               <a:t/>
             </a:r>
           </a:p>
@@ -5075,6 +5520,11 @@
           <a:p xmlns:a="http://schemas.openxmlformats.org/drawingml/2006/main">
             <a:r>
               <a:t>- USD 2021: ECB-EXR-A-USD-EUR-SP00-A-2021 · 1.1827403100775 currency units per EUR</a:t>
+            </a:r>
+          </a:p>
+          <a:p xmlns:a="http://schemas.openxmlformats.org/drawingml/2006/main">
+            <a:r>
+              <a:t>- CAD 2024: ECB-EXR-A-CAD-EUR-SP00-A-2024 · 1.482110546875 currency units per EUR</a:t>
             </a:r>
           </a:p>
         </p:txBody>
@@ -5121,7 +5571,7 @@
           <p:cNvPr id="2" name="Title 1">
             <a:extLst xmlns:a="http://schemas.openxmlformats.org/drawingml/2006/main">
               <a:ext uri="{FF2B5EF4-FFF2-40B4-BE49-F238E27FC236}">
-                <a16:creationId xmlns:a16="http://schemas.microsoft.com/office/drawing/2014/main" id="{92BEE6FA-BA1B-4B07-8910-DE3CC894A013}"/>
+                <a16:creationId xmlns:a16="http://schemas.microsoft.com/office/drawing/2014/main" id="{CE6AAB35-34CB-4F3B-B69B-063F88E5D851}"/>
               </a:ext>
             </a:extLst>
           </p:cNvPr>
@@ -5153,7 +5603,7 @@
           <p:cNvPr id="3" name="Subtitle 2">
             <a:extLst xmlns:a="http://schemas.openxmlformats.org/drawingml/2006/main">
               <a:ext uri="{FF2B5EF4-FFF2-40B4-BE49-F238E27FC236}">
-                <a16:creationId xmlns:a16="http://schemas.microsoft.com/office/drawing/2014/main" id="{038E3B7E-C5BD-4C62-8E4F-2132CB3D866E}"/>
+                <a16:creationId xmlns:a16="http://schemas.microsoft.com/office/drawing/2014/main" id="{EFC6B596-215C-4B10-A59F-F1D280B7ED4E}"/>
               </a:ext>
             </a:extLst>
           </p:cNvPr>
@@ -5276,7 +5726,7 @@
           <p:cNvPr id="4" name="Date Placeholder 3">
             <a:extLst xmlns:a="http://schemas.openxmlformats.org/drawingml/2006/main">
               <a:ext uri="{FF2B5EF4-FFF2-40B4-BE49-F238E27FC236}">
-                <a16:creationId xmlns:a16="http://schemas.microsoft.com/office/drawing/2014/main" id="{FFFEF389-6E60-4F4A-9598-50F21CD9E0C7}"/>
+                <a16:creationId xmlns:a16="http://schemas.microsoft.com/office/drawing/2014/main" id="{1BD30AE9-A4AC-4BB6-81BC-26095099B53D}"/>
               </a:ext>
             </a:extLst>
           </p:cNvPr>
@@ -5303,7 +5753,7 @@
           <p:cNvPr id="5" name="Footer Placeholder 4">
             <a:extLst xmlns:a="http://schemas.openxmlformats.org/drawingml/2006/main">
               <a:ext uri="{FF2B5EF4-FFF2-40B4-BE49-F238E27FC236}">
-                <a16:creationId xmlns:a16="http://schemas.microsoft.com/office/drawing/2014/main" id="{F072EDD6-91CF-4DAF-AA56-3D4DB61A8078}"/>
+                <a16:creationId xmlns:a16="http://schemas.microsoft.com/office/drawing/2014/main" id="{C26BEA2B-3563-4026-B7AA-D1780B73B3BA}"/>
               </a:ext>
             </a:extLst>
           </p:cNvPr>
@@ -5326,7 +5776,7 @@
           <p:cNvPr id="6" name="Slide Number Placeholder 5">
             <a:extLst xmlns:a="http://schemas.openxmlformats.org/drawingml/2006/main">
               <a:ext uri="{FF2B5EF4-FFF2-40B4-BE49-F238E27FC236}">
-                <a16:creationId xmlns:a16="http://schemas.microsoft.com/office/drawing/2014/main" id="{FFAEDA05-7B39-4491-9ABB-EDCB74FEA636}"/>
+                <a16:creationId xmlns:a16="http://schemas.microsoft.com/office/drawing/2014/main" id="{54711E1A-6EB9-410A-9250-C395EC6794F0}"/>
               </a:ext>
             </a:extLst>
           </p:cNvPr>
@@ -5370,7 +5820,7 @@
           <p:cNvPr id="2" name="Title 1">
             <a:extLst xmlns:a="http://schemas.openxmlformats.org/drawingml/2006/main">
               <a:ext uri="{FF2B5EF4-FFF2-40B4-BE49-F238E27FC236}">
-                <a16:creationId xmlns:a16="http://schemas.microsoft.com/office/drawing/2014/main" id="{60729C1E-1AA3-4D1D-AA0A-28DC8BC782BB}"/>
+                <a16:creationId xmlns:a16="http://schemas.microsoft.com/office/drawing/2014/main" id="{F02170A4-3E94-404B-B5BE-38B8D4D91C9A}"/>
               </a:ext>
             </a:extLst>
           </p:cNvPr>
@@ -5397,7 +5847,7 @@
           <p:cNvPr id="3" name="Vertical Text Placeholder 2">
             <a:extLst xmlns:a="http://schemas.openxmlformats.org/drawingml/2006/main">
               <a:ext uri="{FF2B5EF4-FFF2-40B4-BE49-F238E27FC236}">
-                <a16:creationId xmlns:a16="http://schemas.microsoft.com/office/drawing/2014/main" id="{D3BCE040-887F-4FC3-8E17-D2D68642F1A9}"/>
+                <a16:creationId xmlns:a16="http://schemas.microsoft.com/office/drawing/2014/main" id="{CE671606-2905-4269-AF15-9648EB4A1447}"/>
               </a:ext>
             </a:extLst>
           </p:cNvPr>
@@ -5459,7 +5909,7 @@
           <p:cNvPr id="4" name="Date Placeholder 3">
             <a:extLst xmlns:a="http://schemas.openxmlformats.org/drawingml/2006/main">
               <a:ext uri="{FF2B5EF4-FFF2-40B4-BE49-F238E27FC236}">
-                <a16:creationId xmlns:a16="http://schemas.microsoft.com/office/drawing/2014/main" id="{861858B0-D6A7-4065-9BFE-4C8E59236606}"/>
+                <a16:creationId xmlns:a16="http://schemas.microsoft.com/office/drawing/2014/main" id="{B9E8BA3B-2A8E-4C93-AA9C-98B5E126C22B}"/>
               </a:ext>
             </a:extLst>
           </p:cNvPr>
@@ -5486,7 +5936,7 @@
           <p:cNvPr id="5" name="Footer Placeholder 4">
             <a:extLst xmlns:a="http://schemas.openxmlformats.org/drawingml/2006/main">
               <a:ext uri="{FF2B5EF4-FFF2-40B4-BE49-F238E27FC236}">
-                <a16:creationId xmlns:a16="http://schemas.microsoft.com/office/drawing/2014/main" id="{10AB8BC8-AA22-4A56-8AE9-8A8479DF0EA0}"/>
+                <a16:creationId xmlns:a16="http://schemas.microsoft.com/office/drawing/2014/main" id="{F407A7F3-0066-4C6D-BE04-9CF288F68836}"/>
               </a:ext>
             </a:extLst>
           </p:cNvPr>
@@ -5509,7 +5959,7 @@
           <p:cNvPr id="6" name="Slide Number Placeholder 5">
             <a:extLst xmlns:a="http://schemas.openxmlformats.org/drawingml/2006/main">
               <a:ext uri="{FF2B5EF4-FFF2-40B4-BE49-F238E27FC236}">
-                <a16:creationId xmlns:a16="http://schemas.microsoft.com/office/drawing/2014/main" id="{B0F7D30C-BDD7-4D3B-9FB6-D1EF872A51E0}"/>
+                <a16:creationId xmlns:a16="http://schemas.microsoft.com/office/drawing/2014/main" id="{EC1BAF96-9E65-4768-8DDB-AD4524F04780}"/>
               </a:ext>
             </a:extLst>
           </p:cNvPr>
@@ -5553,7 +6003,7 @@
           <p:cNvPr id="2" name="Vertical Title 1">
             <a:extLst xmlns:a="http://schemas.openxmlformats.org/drawingml/2006/main">
               <a:ext uri="{FF2B5EF4-FFF2-40B4-BE49-F238E27FC236}">
-                <a16:creationId xmlns:a16="http://schemas.microsoft.com/office/drawing/2014/main" id="{511E22D0-B0F8-4B5A-AE6D-F1EF04E69B32}"/>
+                <a16:creationId xmlns:a16="http://schemas.microsoft.com/office/drawing/2014/main" id="{6EAC18BD-1234-4DF2-8182-E5F6F38381FB}"/>
               </a:ext>
             </a:extLst>
           </p:cNvPr>
@@ -5585,7 +6035,7 @@
           <p:cNvPr id="3" name="Vertical Text Placeholder 2">
             <a:extLst xmlns:a="http://schemas.openxmlformats.org/drawingml/2006/main">
               <a:ext uri="{FF2B5EF4-FFF2-40B4-BE49-F238E27FC236}">
-                <a16:creationId xmlns:a16="http://schemas.microsoft.com/office/drawing/2014/main" id="{56F2D9F0-BF8F-4BF1-B615-BE0228FE6380}"/>
+                <a16:creationId xmlns:a16="http://schemas.microsoft.com/office/drawing/2014/main" id="{DA56A32A-5822-4002-8E59-DF117706077C}"/>
               </a:ext>
             </a:extLst>
           </p:cNvPr>
@@ -5652,7 +6102,7 @@
           <p:cNvPr id="4" name="Date Placeholder 3">
             <a:extLst xmlns:a="http://schemas.openxmlformats.org/drawingml/2006/main">
               <a:ext uri="{FF2B5EF4-FFF2-40B4-BE49-F238E27FC236}">
-                <a16:creationId xmlns:a16="http://schemas.microsoft.com/office/drawing/2014/main" id="{CAD4E65A-8387-4B5C-8549-2EB1A46BC83F}"/>
+                <a16:creationId xmlns:a16="http://schemas.microsoft.com/office/drawing/2014/main" id="{2B53A692-BD27-46FB-AA01-D05BBE5DEB26}"/>
               </a:ext>
             </a:extLst>
           </p:cNvPr>
@@ -5679,7 +6129,7 @@
           <p:cNvPr id="5" name="Footer Placeholder 4">
             <a:extLst xmlns:a="http://schemas.openxmlformats.org/drawingml/2006/main">
               <a:ext uri="{FF2B5EF4-FFF2-40B4-BE49-F238E27FC236}">
-                <a16:creationId xmlns:a16="http://schemas.microsoft.com/office/drawing/2014/main" id="{71FE5073-2E61-4002-80B5-33331D852534}"/>
+                <a16:creationId xmlns:a16="http://schemas.microsoft.com/office/drawing/2014/main" id="{DD8B7764-4496-4546-9CFB-E3DD85854B50}"/>
               </a:ext>
             </a:extLst>
           </p:cNvPr>
@@ -5702,7 +6152,7 @@
           <p:cNvPr id="6" name="Slide Number Placeholder 5">
             <a:extLst xmlns:a="http://schemas.openxmlformats.org/drawingml/2006/main">
               <a:ext uri="{FF2B5EF4-FFF2-40B4-BE49-F238E27FC236}">
-                <a16:creationId xmlns:a16="http://schemas.microsoft.com/office/drawing/2014/main" id="{36E35025-DF31-441F-AD4D-0029CD804C65}"/>
+                <a16:creationId xmlns:a16="http://schemas.microsoft.com/office/drawing/2014/main" id="{6AFCB7A7-AC48-48BF-B277-1D32651BBFB2}"/>
               </a:ext>
             </a:extLst>
           </p:cNvPr>
@@ -5746,7 +6196,7 @@
           <p:cNvPr id="2" name="Title 1">
             <a:extLst xmlns:a="http://schemas.openxmlformats.org/drawingml/2006/main">
               <a:ext uri="{FF2B5EF4-FFF2-40B4-BE49-F238E27FC236}">
-                <a16:creationId xmlns:a16="http://schemas.microsoft.com/office/drawing/2014/main" id="{66931101-A01E-45C2-B9FF-6624475292AD}"/>
+                <a16:creationId xmlns:a16="http://schemas.microsoft.com/office/drawing/2014/main" id="{074F64F6-261A-4626-BF71-8FBFD1F926F5}"/>
               </a:ext>
             </a:extLst>
           </p:cNvPr>
@@ -5773,7 +6223,7 @@
           <p:cNvPr id="3" name="Content Placeholder 2">
             <a:extLst xmlns:a="http://schemas.openxmlformats.org/drawingml/2006/main">
               <a:ext uri="{FF2B5EF4-FFF2-40B4-BE49-F238E27FC236}">
-                <a16:creationId xmlns:a16="http://schemas.microsoft.com/office/drawing/2014/main" id="{FB9392DB-32B4-4EC9-938A-B5CE687F2644}"/>
+                <a16:creationId xmlns:a16="http://schemas.microsoft.com/office/drawing/2014/main" id="{122482D8-1E6B-4972-8287-CBBDEAACB5FA}"/>
               </a:ext>
             </a:extLst>
           </p:cNvPr>
@@ -5835,7 +6285,7 @@
           <p:cNvPr id="4" name="Date Placeholder 3">
             <a:extLst xmlns:a="http://schemas.openxmlformats.org/drawingml/2006/main">
               <a:ext uri="{FF2B5EF4-FFF2-40B4-BE49-F238E27FC236}">
-                <a16:creationId xmlns:a16="http://schemas.microsoft.com/office/drawing/2014/main" id="{4865DEAC-C5DA-4724-A5DC-0418EC73BD48}"/>
+                <a16:creationId xmlns:a16="http://schemas.microsoft.com/office/drawing/2014/main" id="{CEB19647-2774-4D08-9E25-6B3DBE8E37AF}"/>
               </a:ext>
             </a:extLst>
           </p:cNvPr>
@@ -5862,7 +6312,7 @@
           <p:cNvPr id="5" name="Footer Placeholder 4">
             <a:extLst xmlns:a="http://schemas.openxmlformats.org/drawingml/2006/main">
               <a:ext uri="{FF2B5EF4-FFF2-40B4-BE49-F238E27FC236}">
-                <a16:creationId xmlns:a16="http://schemas.microsoft.com/office/drawing/2014/main" id="{6F1A1D36-6E60-4C23-BC55-10DAD77933BE}"/>
+                <a16:creationId xmlns:a16="http://schemas.microsoft.com/office/drawing/2014/main" id="{D6A5FC51-B267-4DF1-B853-A899176F49D1}"/>
               </a:ext>
             </a:extLst>
           </p:cNvPr>
@@ -5885,7 +6335,7 @@
           <p:cNvPr id="6" name="Slide Number Placeholder 5">
             <a:extLst xmlns:a="http://schemas.openxmlformats.org/drawingml/2006/main">
               <a:ext uri="{FF2B5EF4-FFF2-40B4-BE49-F238E27FC236}">
-                <a16:creationId xmlns:a16="http://schemas.microsoft.com/office/drawing/2014/main" id="{E2FEB32E-2E41-42F5-B24E-20797B2CD6F0}"/>
+                <a16:creationId xmlns:a16="http://schemas.microsoft.com/office/drawing/2014/main" id="{72E8B189-73BE-4A56-81B3-89169E929965}"/>
               </a:ext>
             </a:extLst>
           </p:cNvPr>
@@ -5929,7 +6379,7 @@
           <p:cNvPr id="2" name="Title 1">
             <a:extLst xmlns:a="http://schemas.openxmlformats.org/drawingml/2006/main">
               <a:ext uri="{FF2B5EF4-FFF2-40B4-BE49-F238E27FC236}">
-                <a16:creationId xmlns:a16="http://schemas.microsoft.com/office/drawing/2014/main" id="{0D254079-6A59-4281-8867-62BCAB86F3E8}"/>
+                <a16:creationId xmlns:a16="http://schemas.microsoft.com/office/drawing/2014/main" id="{CB5F7A55-9034-48F3-9732-7649CA97C95F}"/>
               </a:ext>
             </a:extLst>
           </p:cNvPr>
@@ -5966,7 +6416,7 @@
           <p:cNvPr id="3" name="Text Placeholder 2">
             <a:extLst xmlns:a="http://schemas.openxmlformats.org/drawingml/2006/main">
               <a:ext uri="{FF2B5EF4-FFF2-40B4-BE49-F238E27FC236}">
-                <a16:creationId xmlns:a16="http://schemas.microsoft.com/office/drawing/2014/main" id="{5E7BF34F-C255-4F28-A09B-269825DA3C95}"/>
+                <a16:creationId xmlns:a16="http://schemas.microsoft.com/office/drawing/2014/main" id="{0DA88FFC-5757-4273-9F84-3CD38B6E765D}"/>
               </a:ext>
             </a:extLst>
           </p:cNvPr>
@@ -6092,7 +6542,7 @@
           <p:cNvPr id="4" name="Date Placeholder 3">
             <a:extLst xmlns:a="http://schemas.openxmlformats.org/drawingml/2006/main">
               <a:ext uri="{FF2B5EF4-FFF2-40B4-BE49-F238E27FC236}">
-                <a16:creationId xmlns:a16="http://schemas.microsoft.com/office/drawing/2014/main" id="{66FA10EF-4942-4CEA-AE66-5FB329C16D48}"/>
+                <a16:creationId xmlns:a16="http://schemas.microsoft.com/office/drawing/2014/main" id="{F4F3E793-8DB6-43C9-BF5F-6E43189F0243}"/>
               </a:ext>
             </a:extLst>
           </p:cNvPr>
@@ -6119,7 +6569,7 @@
           <p:cNvPr id="5" name="Footer Placeholder 4">
             <a:extLst xmlns:a="http://schemas.openxmlformats.org/drawingml/2006/main">
               <a:ext uri="{FF2B5EF4-FFF2-40B4-BE49-F238E27FC236}">
-                <a16:creationId xmlns:a16="http://schemas.microsoft.com/office/drawing/2014/main" id="{B08D7A35-322D-4D01-91AF-7ED0B437E870}"/>
+                <a16:creationId xmlns:a16="http://schemas.microsoft.com/office/drawing/2014/main" id="{31760D2F-279B-4D9D-9E51-7FED1B5AD2EB}"/>
               </a:ext>
             </a:extLst>
           </p:cNvPr>
@@ -6142,7 +6592,7 @@
           <p:cNvPr id="6" name="Slide Number Placeholder 5">
             <a:extLst xmlns:a="http://schemas.openxmlformats.org/drawingml/2006/main">
               <a:ext uri="{FF2B5EF4-FFF2-40B4-BE49-F238E27FC236}">
-                <a16:creationId xmlns:a16="http://schemas.microsoft.com/office/drawing/2014/main" id="{F8C30864-0040-44F8-9125-7975D9A79BE9}"/>
+                <a16:creationId xmlns:a16="http://schemas.microsoft.com/office/drawing/2014/main" id="{0F6330B8-2855-4F23-B1AA-08EACE033B40}"/>
               </a:ext>
             </a:extLst>
           </p:cNvPr>
@@ -6186,7 +6636,7 @@
           <p:cNvPr id="2" name="Title 1">
             <a:extLst xmlns:a="http://schemas.openxmlformats.org/drawingml/2006/main">
               <a:ext uri="{FF2B5EF4-FFF2-40B4-BE49-F238E27FC236}">
-                <a16:creationId xmlns:a16="http://schemas.microsoft.com/office/drawing/2014/main" id="{EF09DE46-B13F-4254-8646-99BCDEA76AEC}"/>
+                <a16:creationId xmlns:a16="http://schemas.microsoft.com/office/drawing/2014/main" id="{E48FA9D9-AB95-47F2-B7B9-6AB035B4BD61}"/>
               </a:ext>
             </a:extLst>
           </p:cNvPr>
@@ -6213,7 +6663,7 @@
           <p:cNvPr id="3" name="Content Placeholder 2">
             <a:extLst xmlns:a="http://schemas.openxmlformats.org/drawingml/2006/main">
               <a:ext uri="{FF2B5EF4-FFF2-40B4-BE49-F238E27FC236}">
-                <a16:creationId xmlns:a16="http://schemas.microsoft.com/office/drawing/2014/main" id="{13F9E2A9-AAD2-4C91-B3F7-865932447FB1}"/>
+                <a16:creationId xmlns:a16="http://schemas.microsoft.com/office/drawing/2014/main" id="{95A8A2B8-AB08-4CD3-A70B-C3A5ECE52C45}"/>
               </a:ext>
             </a:extLst>
           </p:cNvPr>
@@ -6317,7 +6767,7 @@
           <p:cNvPr id="4" name="Content Placeholder 3">
             <a:extLst xmlns:a="http://schemas.openxmlformats.org/drawingml/2006/main">
               <a:ext uri="{FF2B5EF4-FFF2-40B4-BE49-F238E27FC236}">
-                <a16:creationId xmlns:a16="http://schemas.microsoft.com/office/drawing/2014/main" id="{58F4D8E3-AA84-4EB6-A05A-94891FB4E215}"/>
+                <a16:creationId xmlns:a16="http://schemas.microsoft.com/office/drawing/2014/main" id="{733AA9C8-479B-4C9F-86D2-D0EDBA2AE694}"/>
               </a:ext>
             </a:extLst>
           </p:cNvPr>
@@ -6421,7 +6871,7 @@
           <p:cNvPr id="5" name="Date Placeholder 4">
             <a:extLst xmlns:a="http://schemas.openxmlformats.org/drawingml/2006/main">
               <a:ext uri="{FF2B5EF4-FFF2-40B4-BE49-F238E27FC236}">
-                <a16:creationId xmlns:a16="http://schemas.microsoft.com/office/drawing/2014/main" id="{BC1ED9B4-1254-4BF0-B13E-B21D6AA59976}"/>
+                <a16:creationId xmlns:a16="http://schemas.microsoft.com/office/drawing/2014/main" id="{FB5DD40B-9592-49EE-981F-F6C542D28903}"/>
               </a:ext>
             </a:extLst>
           </p:cNvPr>
@@ -6448,7 +6898,7 @@
           <p:cNvPr id="6" name="Footer Placeholder 5">
             <a:extLst xmlns:a="http://schemas.openxmlformats.org/drawingml/2006/main">
               <a:ext uri="{FF2B5EF4-FFF2-40B4-BE49-F238E27FC236}">
-                <a16:creationId xmlns:a16="http://schemas.microsoft.com/office/drawing/2014/main" id="{ED42EFEB-00E6-49B4-B93C-687B8BF616F1}"/>
+                <a16:creationId xmlns:a16="http://schemas.microsoft.com/office/drawing/2014/main" id="{E8A85D55-D180-4B64-B1BD-B035188E7B76}"/>
               </a:ext>
             </a:extLst>
           </p:cNvPr>
@@ -6471,7 +6921,7 @@
           <p:cNvPr id="7" name="Slide Number Placeholder 6">
             <a:extLst xmlns:a="http://schemas.openxmlformats.org/drawingml/2006/main">
               <a:ext uri="{FF2B5EF4-FFF2-40B4-BE49-F238E27FC236}">
-                <a16:creationId xmlns:a16="http://schemas.microsoft.com/office/drawing/2014/main" id="{AABBC61C-47FD-428D-AE9D-B9904D3B4971}"/>
+                <a16:creationId xmlns:a16="http://schemas.microsoft.com/office/drawing/2014/main" id="{B633AC06-148A-4975-9525-3E610A4F930C}"/>
               </a:ext>
             </a:extLst>
           </p:cNvPr>
@@ -6515,7 +6965,7 @@
           <p:cNvPr id="2" name="Title 1">
             <a:extLst xmlns:a="http://schemas.openxmlformats.org/drawingml/2006/main">
               <a:ext uri="{FF2B5EF4-FFF2-40B4-BE49-F238E27FC236}">
-                <a16:creationId xmlns:a16="http://schemas.microsoft.com/office/drawing/2014/main" id="{6A8C45A3-4365-41EB-B505-A845680422E5}"/>
+                <a16:creationId xmlns:a16="http://schemas.microsoft.com/office/drawing/2014/main" id="{CD3BB5DF-8A66-4F1F-9E7B-D0182922A856}"/>
               </a:ext>
             </a:extLst>
           </p:cNvPr>
@@ -6547,7 +6997,7 @@
           <p:cNvPr id="3" name="Text Placeholder 2">
             <a:extLst xmlns:a="http://schemas.openxmlformats.org/drawingml/2006/main">
               <a:ext uri="{FF2B5EF4-FFF2-40B4-BE49-F238E27FC236}">
-                <a16:creationId xmlns:a16="http://schemas.microsoft.com/office/drawing/2014/main" id="{F4C84C90-F9AC-4150-92D9-E4AB6B6D17F5}"/>
+                <a16:creationId xmlns:a16="http://schemas.microsoft.com/office/drawing/2014/main" id="{6F481179-FC25-4F3B-857D-F6E8E67F15F8}"/>
               </a:ext>
             </a:extLst>
           </p:cNvPr>
@@ -6619,7 +7069,7 @@
           <p:cNvPr id="4" name="Content Placeholder 3">
             <a:extLst xmlns:a="http://schemas.openxmlformats.org/drawingml/2006/main">
               <a:ext uri="{FF2B5EF4-FFF2-40B4-BE49-F238E27FC236}">
-                <a16:creationId xmlns:a16="http://schemas.microsoft.com/office/drawing/2014/main" id="{C8BE20DA-30F6-4B81-A99F-3DE3336B00AD}"/>
+                <a16:creationId xmlns:a16="http://schemas.microsoft.com/office/drawing/2014/main" id="{A9A5EE78-608D-4F05-8936-CE549E69DC10}"/>
               </a:ext>
             </a:extLst>
           </p:cNvPr>
@@ -6723,7 +7173,7 @@
           <p:cNvPr id="5" name="Text Placeholder 4">
             <a:extLst xmlns:a="http://schemas.openxmlformats.org/drawingml/2006/main">
               <a:ext uri="{FF2B5EF4-FFF2-40B4-BE49-F238E27FC236}">
-                <a16:creationId xmlns:a16="http://schemas.microsoft.com/office/drawing/2014/main" id="{F4F524A7-1EE0-4E08-B036-6A8684AF4258}"/>
+                <a16:creationId xmlns:a16="http://schemas.microsoft.com/office/drawing/2014/main" id="{A68C30FB-CBAD-4D41-AD3D-22B98084417C}"/>
               </a:ext>
             </a:extLst>
           </p:cNvPr>
@@ -6795,7 +7245,7 @@
           <p:cNvPr id="6" name="Content Placeholder 5">
             <a:extLst xmlns:a="http://schemas.openxmlformats.org/drawingml/2006/main">
               <a:ext uri="{FF2B5EF4-FFF2-40B4-BE49-F238E27FC236}">
-                <a16:creationId xmlns:a16="http://schemas.microsoft.com/office/drawing/2014/main" id="{A95C47B1-A51A-4612-AE0E-77FD044FDA76}"/>
+                <a16:creationId xmlns:a16="http://schemas.microsoft.com/office/drawing/2014/main" id="{F75B9ADE-E2DF-4E1F-9DBD-43249A632886}"/>
               </a:ext>
             </a:extLst>
           </p:cNvPr>
@@ -6899,7 +7349,7 @@
           <p:cNvPr id="7" name="Date Placeholder 6">
             <a:extLst xmlns:a="http://schemas.openxmlformats.org/drawingml/2006/main">
               <a:ext uri="{FF2B5EF4-FFF2-40B4-BE49-F238E27FC236}">
-                <a16:creationId xmlns:a16="http://schemas.microsoft.com/office/drawing/2014/main" id="{1A3031A5-B970-40D5-BE30-6BF49E977F1E}"/>
+                <a16:creationId xmlns:a16="http://schemas.microsoft.com/office/drawing/2014/main" id="{F397D497-6F2F-403D-8E81-816EE5498B7A}"/>
               </a:ext>
             </a:extLst>
           </p:cNvPr>
@@ -6926,7 +7376,7 @@
           <p:cNvPr id="8" name="Footer Placeholder 7">
             <a:extLst xmlns:a="http://schemas.openxmlformats.org/drawingml/2006/main">
               <a:ext uri="{FF2B5EF4-FFF2-40B4-BE49-F238E27FC236}">
-                <a16:creationId xmlns:a16="http://schemas.microsoft.com/office/drawing/2014/main" id="{28D1D62C-958C-45B1-9DBF-4885413BFBD4}"/>
+                <a16:creationId xmlns:a16="http://schemas.microsoft.com/office/drawing/2014/main" id="{3F7AF743-EBB3-4659-A8C9-7B38D1D516C3}"/>
               </a:ext>
             </a:extLst>
           </p:cNvPr>
@@ -6949,7 +7399,7 @@
           <p:cNvPr id="9" name="Slide Number Placeholder 8">
             <a:extLst xmlns:a="http://schemas.openxmlformats.org/drawingml/2006/main">
               <a:ext uri="{FF2B5EF4-FFF2-40B4-BE49-F238E27FC236}">
-                <a16:creationId xmlns:a16="http://schemas.microsoft.com/office/drawing/2014/main" id="{BD9E0209-90DF-4820-8E6B-BCB46022ED3F}"/>
+                <a16:creationId xmlns:a16="http://schemas.microsoft.com/office/drawing/2014/main" id="{85636DAC-0968-4448-9487-5918A32445BA}"/>
               </a:ext>
             </a:extLst>
           </p:cNvPr>
@@ -6993,7 +7443,7 @@
           <p:cNvPr id="2" name="Title 1">
             <a:extLst xmlns:a="http://schemas.openxmlformats.org/drawingml/2006/main">
               <a:ext uri="{FF2B5EF4-FFF2-40B4-BE49-F238E27FC236}">
-                <a16:creationId xmlns:a16="http://schemas.microsoft.com/office/drawing/2014/main" id="{4552B032-EEC8-455B-82A5-0D65B982C530}"/>
+                <a16:creationId xmlns:a16="http://schemas.microsoft.com/office/drawing/2014/main" id="{E9FC5616-4289-40D3-AEFB-B20C5C6F8091}"/>
               </a:ext>
             </a:extLst>
           </p:cNvPr>
@@ -7020,7 +7470,7 @@
           <p:cNvPr id="3" name="Date Placeholder 2">
             <a:extLst xmlns:a="http://schemas.openxmlformats.org/drawingml/2006/main">
               <a:ext uri="{FF2B5EF4-FFF2-40B4-BE49-F238E27FC236}">
-                <a16:creationId xmlns:a16="http://schemas.microsoft.com/office/drawing/2014/main" id="{0B6887FE-CE24-4096-B020-202A6CF8729A}"/>
+                <a16:creationId xmlns:a16="http://schemas.microsoft.com/office/drawing/2014/main" id="{5422FA08-8B47-47F9-9388-B197178D6ABE}"/>
               </a:ext>
             </a:extLst>
           </p:cNvPr>
@@ -7047,7 +7497,7 @@
           <p:cNvPr id="4" name="Footer Placeholder 3">
             <a:extLst xmlns:a="http://schemas.openxmlformats.org/drawingml/2006/main">
               <a:ext uri="{FF2B5EF4-FFF2-40B4-BE49-F238E27FC236}">
-                <a16:creationId xmlns:a16="http://schemas.microsoft.com/office/drawing/2014/main" id="{F8112AA3-2059-45E0-BB32-84A0DD9BB5D0}"/>
+                <a16:creationId xmlns:a16="http://schemas.microsoft.com/office/drawing/2014/main" id="{56EB1212-1757-4712-B5EE-1814FBA30EEC}"/>
               </a:ext>
             </a:extLst>
           </p:cNvPr>
@@ -7070,7 +7520,7 @@
           <p:cNvPr id="5" name="Slide Number Placeholder 4">
             <a:extLst xmlns:a="http://schemas.openxmlformats.org/drawingml/2006/main">
               <a:ext uri="{FF2B5EF4-FFF2-40B4-BE49-F238E27FC236}">
-                <a16:creationId xmlns:a16="http://schemas.microsoft.com/office/drawing/2014/main" id="{C2EF6C64-300C-4D56-A99C-9623E3566C2C}"/>
+                <a16:creationId xmlns:a16="http://schemas.microsoft.com/office/drawing/2014/main" id="{F860D78D-DA18-4530-AEB1-E4F0D052BE0A}"/>
               </a:ext>
             </a:extLst>
           </p:cNvPr>
@@ -7114,7 +7564,7 @@
           <p:cNvPr id="2" name="Date Placeholder 1">
             <a:extLst xmlns:a="http://schemas.openxmlformats.org/drawingml/2006/main">
               <a:ext uri="{FF2B5EF4-FFF2-40B4-BE49-F238E27FC236}">
-                <a16:creationId xmlns:a16="http://schemas.microsoft.com/office/drawing/2014/main" id="{1330559B-2CA0-426A-A5BD-131537D28FDB}"/>
+                <a16:creationId xmlns:a16="http://schemas.microsoft.com/office/drawing/2014/main" id="{E49FA172-093B-475E-97C2-465C27F6316F}"/>
               </a:ext>
             </a:extLst>
           </p:cNvPr>
@@ -7141,7 +7591,7 @@
           <p:cNvPr id="3" name="Footer Placeholder 2">
             <a:extLst xmlns:a="http://schemas.openxmlformats.org/drawingml/2006/main">
               <a:ext uri="{FF2B5EF4-FFF2-40B4-BE49-F238E27FC236}">
-                <a16:creationId xmlns:a16="http://schemas.microsoft.com/office/drawing/2014/main" id="{12A1BCED-44F0-4F63-BA67-98154B3204A0}"/>
+                <a16:creationId xmlns:a16="http://schemas.microsoft.com/office/drawing/2014/main" id="{20BE5525-621C-425E-8721-A6550E8CF5D8}"/>
               </a:ext>
             </a:extLst>
           </p:cNvPr>
@@ -7164,7 +7614,7 @@
           <p:cNvPr id="4" name="Slide Number Placeholder 3">
             <a:extLst xmlns:a="http://schemas.openxmlformats.org/drawingml/2006/main">
               <a:ext uri="{FF2B5EF4-FFF2-40B4-BE49-F238E27FC236}">
-                <a16:creationId xmlns:a16="http://schemas.microsoft.com/office/drawing/2014/main" id="{F814ACA8-FC61-42CF-9733-5509FC5F0F68}"/>
+                <a16:creationId xmlns:a16="http://schemas.microsoft.com/office/drawing/2014/main" id="{832396B6-8811-4691-B440-A34B5BDB78CD}"/>
               </a:ext>
             </a:extLst>
           </p:cNvPr>
@@ -7208,7 +7658,7 @@
           <p:cNvPr id="2" name="Title 1">
             <a:extLst xmlns:a="http://schemas.openxmlformats.org/drawingml/2006/main">
               <a:ext uri="{FF2B5EF4-FFF2-40B4-BE49-F238E27FC236}">
-                <a16:creationId xmlns:a16="http://schemas.microsoft.com/office/drawing/2014/main" id="{B2FCB533-A23E-42DD-A971-94925C02D64D}"/>
+                <a16:creationId xmlns:a16="http://schemas.microsoft.com/office/drawing/2014/main" id="{EC2750C0-F963-43F5-9032-733577465C44}"/>
               </a:ext>
             </a:extLst>
           </p:cNvPr>
@@ -7245,7 +7695,7 @@
           <p:cNvPr id="3" name="Content Placeholder 2">
             <a:extLst xmlns:a="http://schemas.openxmlformats.org/drawingml/2006/main">
               <a:ext uri="{FF2B5EF4-FFF2-40B4-BE49-F238E27FC236}">
-                <a16:creationId xmlns:a16="http://schemas.microsoft.com/office/drawing/2014/main" id="{ED6B39EC-F2B6-427E-A98D-7E6975820E82}"/>
+                <a16:creationId xmlns:a16="http://schemas.microsoft.com/office/drawing/2014/main" id="{6C055D82-E91D-4C1B-B9FC-9F09BFCDA988}"/>
               </a:ext>
             </a:extLst>
           </p:cNvPr>
@@ -7349,7 +7799,7 @@
           <p:cNvPr id="4" name="Text Placeholder 3">
             <a:extLst xmlns:a="http://schemas.openxmlformats.org/drawingml/2006/main">
               <a:ext uri="{FF2B5EF4-FFF2-40B4-BE49-F238E27FC236}">
-                <a16:creationId xmlns:a16="http://schemas.microsoft.com/office/drawing/2014/main" id="{3F45D869-79D5-4155-B87C-DF8190769F69}"/>
+                <a16:creationId xmlns:a16="http://schemas.microsoft.com/office/drawing/2014/main" id="{5468EF46-494A-403D-8CE6-E44E892DC1BD}"/>
               </a:ext>
             </a:extLst>
           </p:cNvPr>
@@ -7421,7 +7871,7 @@
           <p:cNvPr id="5" name="Date Placeholder 4">
             <a:extLst xmlns:a="http://schemas.openxmlformats.org/drawingml/2006/main">
               <a:ext uri="{FF2B5EF4-FFF2-40B4-BE49-F238E27FC236}">
-                <a16:creationId xmlns:a16="http://schemas.microsoft.com/office/drawing/2014/main" id="{972E683B-F1F2-4383-B2DC-670AB8515651}"/>
+                <a16:creationId xmlns:a16="http://schemas.microsoft.com/office/drawing/2014/main" id="{14B0E290-4B4D-4F6D-A4AE-3A0311B36DE9}"/>
               </a:ext>
             </a:extLst>
           </p:cNvPr>
@@ -7448,7 +7898,7 @@
           <p:cNvPr id="6" name="Footer Placeholder 5">
             <a:extLst xmlns:a="http://schemas.openxmlformats.org/drawingml/2006/main">
               <a:ext uri="{FF2B5EF4-FFF2-40B4-BE49-F238E27FC236}">
-                <a16:creationId xmlns:a16="http://schemas.microsoft.com/office/drawing/2014/main" id="{3A89129E-39A8-47C2-81FF-C394138320FF}"/>
+                <a16:creationId xmlns:a16="http://schemas.microsoft.com/office/drawing/2014/main" id="{90003DAD-D008-44C9-89E2-76CC9BC0CA99}"/>
               </a:ext>
             </a:extLst>
           </p:cNvPr>
@@ -7471,7 +7921,7 @@
           <p:cNvPr id="7" name="Slide Number Placeholder 6">
             <a:extLst xmlns:a="http://schemas.openxmlformats.org/drawingml/2006/main">
               <a:ext uri="{FF2B5EF4-FFF2-40B4-BE49-F238E27FC236}">
-                <a16:creationId xmlns:a16="http://schemas.microsoft.com/office/drawing/2014/main" id="{72B2C0AC-D8CB-4952-A063-3C86A4033E0A}"/>
+                <a16:creationId xmlns:a16="http://schemas.microsoft.com/office/drawing/2014/main" id="{A2E7CD67-DAF4-46E2-B720-24E8F629B79C}"/>
               </a:ext>
             </a:extLst>
           </p:cNvPr>
@@ -7515,7 +7965,7 @@
           <p:cNvPr id="2" name="Title 1">
             <a:extLst xmlns:a="http://schemas.openxmlformats.org/drawingml/2006/main">
               <a:ext uri="{FF2B5EF4-FFF2-40B4-BE49-F238E27FC236}">
-                <a16:creationId xmlns:a16="http://schemas.microsoft.com/office/drawing/2014/main" id="{0FA15830-9BF8-4D97-97FB-8C2635DE9F68}"/>
+                <a16:creationId xmlns:a16="http://schemas.microsoft.com/office/drawing/2014/main" id="{EE6E1710-5FED-404C-8BB4-6484F846C826}"/>
               </a:ext>
             </a:extLst>
           </p:cNvPr>
@@ -7552,7 +8002,7 @@
           <p:cNvPr id="3" name="Picture Placeholder 2">
             <a:extLst xmlns:a="http://schemas.openxmlformats.org/drawingml/2006/main">
               <a:ext uri="{FF2B5EF4-FFF2-40B4-BE49-F238E27FC236}">
-                <a16:creationId xmlns:a16="http://schemas.microsoft.com/office/drawing/2014/main" id="{6D40EAF3-81FD-4361-A1CB-1F172843B765}"/>
+                <a16:creationId xmlns:a16="http://schemas.microsoft.com/office/drawing/2014/main" id="{7BED9E64-48DE-4934-A42F-AE9C2164F6EA}"/>
               </a:ext>
             </a:extLst>
           </p:cNvPr>
@@ -7617,7 +8067,7 @@
           <p:cNvPr id="4" name="Text Placeholder 3">
             <a:extLst xmlns:a="http://schemas.openxmlformats.org/drawingml/2006/main">
               <a:ext uri="{FF2B5EF4-FFF2-40B4-BE49-F238E27FC236}">
-                <a16:creationId xmlns:a16="http://schemas.microsoft.com/office/drawing/2014/main" id="{C2D77533-D00D-4A36-A29A-FF430DFDC83F}"/>
+                <a16:creationId xmlns:a16="http://schemas.microsoft.com/office/drawing/2014/main" id="{3C946B4C-A5DC-4E41-866A-B254D96A3785}"/>
               </a:ext>
             </a:extLst>
           </p:cNvPr>
@@ -7689,7 +8139,7 @@
           <p:cNvPr id="5" name="Date Placeholder 4">
             <a:extLst xmlns:a="http://schemas.openxmlformats.org/drawingml/2006/main">
               <a:ext uri="{FF2B5EF4-FFF2-40B4-BE49-F238E27FC236}">
-                <a16:creationId xmlns:a16="http://schemas.microsoft.com/office/drawing/2014/main" id="{E2C4C482-DA08-4467-84DF-54D7C601FB43}"/>
+                <a16:creationId xmlns:a16="http://schemas.microsoft.com/office/drawing/2014/main" id="{BF3B0DB5-32A1-4EE2-8E74-2D45A64408D7}"/>
               </a:ext>
             </a:extLst>
           </p:cNvPr>
@@ -7716,7 +8166,7 @@
           <p:cNvPr id="6" name="Footer Placeholder 5">
             <a:extLst xmlns:a="http://schemas.openxmlformats.org/drawingml/2006/main">
               <a:ext uri="{FF2B5EF4-FFF2-40B4-BE49-F238E27FC236}">
-                <a16:creationId xmlns:a16="http://schemas.microsoft.com/office/drawing/2014/main" id="{213460D2-A875-4A56-A09F-86C66F793DBB}"/>
+                <a16:creationId xmlns:a16="http://schemas.microsoft.com/office/drawing/2014/main" id="{7CFA3D04-A8E0-41D9-AEB1-D58449640EA8}"/>
               </a:ext>
             </a:extLst>
           </p:cNvPr>
@@ -7739,7 +8189,7 @@
           <p:cNvPr id="7" name="Slide Number Placeholder 6">
             <a:extLst xmlns:a="http://schemas.openxmlformats.org/drawingml/2006/main">
               <a:ext uri="{FF2B5EF4-FFF2-40B4-BE49-F238E27FC236}">
-                <a16:creationId xmlns:a16="http://schemas.microsoft.com/office/drawing/2014/main" id="{D2CF988A-E8E4-441D-A457-3A11DCB4E17C}"/>
+                <a16:creationId xmlns:a16="http://schemas.microsoft.com/office/drawing/2014/main" id="{530CA0CE-484C-4CA1-BEEF-6E95C5AABF9A}"/>
               </a:ext>
             </a:extLst>
           </p:cNvPr>
@@ -7788,7 +8238,7 @@
           <p:cNvPr id="2" name="Title Placeholder 1">
             <a:extLst xmlns:a="http://schemas.openxmlformats.org/drawingml/2006/main">
               <a:ext uri="{FF2B5EF4-FFF2-40B4-BE49-F238E27FC236}">
-                <a16:creationId xmlns:a16="http://schemas.microsoft.com/office/drawing/2014/main" id="{B29838D6-0296-4BCF-B2B4-DE482323427A}"/>
+                <a16:creationId xmlns:a16="http://schemas.microsoft.com/office/drawing/2014/main" id="{DD5CBAA7-BB01-45A0-91E9-EE261BBF6ADA}"/>
               </a:ext>
             </a:extLst>
           </p:cNvPr>
@@ -7825,7 +8275,7 @@
           <p:cNvPr id="3" name="Text Placeholder 2">
             <a:extLst xmlns:a="http://schemas.openxmlformats.org/drawingml/2006/main">
               <a:ext uri="{FF2B5EF4-FFF2-40B4-BE49-F238E27FC236}">
-                <a16:creationId xmlns:a16="http://schemas.microsoft.com/office/drawing/2014/main" id="{5ADA3EA5-5AD0-4A01-8271-89870C5DBCAA}"/>
+                <a16:creationId xmlns:a16="http://schemas.microsoft.com/office/drawing/2014/main" id="{D11CFDC0-13BB-433A-8D6C-06B81AB36FC3}"/>
               </a:ext>
             </a:extLst>
           </p:cNvPr>
@@ -7897,7 +8347,7 @@
           <p:cNvPr id="4" name="Date Placeholder 3">
             <a:extLst xmlns:a="http://schemas.openxmlformats.org/drawingml/2006/main">
               <a:ext uri="{FF2B5EF4-FFF2-40B4-BE49-F238E27FC236}">
-                <a16:creationId xmlns:a16="http://schemas.microsoft.com/office/drawing/2014/main" id="{EF56C101-9EDD-4D93-B858-A099337054C4}"/>
+                <a16:creationId xmlns:a16="http://schemas.microsoft.com/office/drawing/2014/main" id="{C29983C4-F749-42C3-812C-1FB4D6ACD641}"/>
               </a:ext>
             </a:extLst>
           </p:cNvPr>
@@ -7943,7 +8393,7 @@
           <p:cNvPr id="5" name="Footer Placeholder 4">
             <a:extLst xmlns:a="http://schemas.openxmlformats.org/drawingml/2006/main">
               <a:ext uri="{FF2B5EF4-FFF2-40B4-BE49-F238E27FC236}">
-                <a16:creationId xmlns:a16="http://schemas.microsoft.com/office/drawing/2014/main" id="{6CC90142-953D-4BB4-8E81-FA4CDFA9217F}"/>
+                <a16:creationId xmlns:a16="http://schemas.microsoft.com/office/drawing/2014/main" id="{37C34DC9-2EE4-4023-8AB7-80516CAB8B70}"/>
               </a:ext>
             </a:extLst>
           </p:cNvPr>
@@ -7985,7 +8435,7 @@
           <p:cNvPr id="6" name="Slide Number Placeholder 5">
             <a:extLst xmlns:a="http://schemas.openxmlformats.org/drawingml/2006/main">
               <a:ext uri="{FF2B5EF4-FFF2-40B4-BE49-F238E27FC236}">
-                <a16:creationId xmlns:a16="http://schemas.microsoft.com/office/drawing/2014/main" id="{BD734E8B-502F-4067-B44D-F23F59A2B814}"/>
+                <a16:creationId xmlns:a16="http://schemas.microsoft.com/office/drawing/2014/main" id="{135E538B-97EC-42AC-983D-22BE96C759B1}"/>
               </a:ext>
             </a:extLst>
           </p:cNvPr>
@@ -8030,17 +8480,17 @@
   </p:cSld>
   <p:clrMap bg1="lt1" tx1="dk1" bg2="lt2" tx2="dk2" accent1="accent1" accent2="accent2" accent3="accent3" accent4="accent4" accent5="accent5" accent6="accent6" hlink="hlink" folHlink="folHlink"/>
   <p:sldLayoutIdLst>
-    <p:sldLayoutId xmlns:r="http://schemas.openxmlformats.org/officeDocument/2006/relationships" id="2147483649" r:id="Rda45e1073eae43cf"/>
-    <p:sldLayoutId xmlns:r="http://schemas.openxmlformats.org/officeDocument/2006/relationships" id="2147483650" r:id="R4dbedb0f6b5d4aab"/>
-    <p:sldLayoutId xmlns:r="http://schemas.openxmlformats.org/officeDocument/2006/relationships" id="2147483651" r:id="Rbb467bd1d44a492e"/>
-    <p:sldLayoutId xmlns:r="http://schemas.openxmlformats.org/officeDocument/2006/relationships" id="2147483652" r:id="R904f21e7033741da"/>
-    <p:sldLayoutId xmlns:r="http://schemas.openxmlformats.org/officeDocument/2006/relationships" id="2147483653" r:id="R67e1a659afd84256"/>
-    <p:sldLayoutId xmlns:r="http://schemas.openxmlformats.org/officeDocument/2006/relationships" id="2147483654" r:id="R2bc63be60d1e4116"/>
-    <p:sldLayoutId xmlns:r="http://schemas.openxmlformats.org/officeDocument/2006/relationships" id="2147483655" r:id="Rf5a55ca92e854a49"/>
-    <p:sldLayoutId xmlns:r="http://schemas.openxmlformats.org/officeDocument/2006/relationships" id="2147483656" r:id="Rf126461b0d5d47ff"/>
-    <p:sldLayoutId xmlns:r="http://schemas.openxmlformats.org/officeDocument/2006/relationships" id="2147483657" r:id="R0893433824034064"/>
-    <p:sldLayoutId xmlns:r="http://schemas.openxmlformats.org/officeDocument/2006/relationships" id="2147483658" r:id="R0ee126ab271d4aac"/>
-    <p:sldLayoutId xmlns:r="http://schemas.openxmlformats.org/officeDocument/2006/relationships" id="2147483659" r:id="Rde825390f1cf4a66"/>
+    <p:sldLayoutId xmlns:r="http://schemas.openxmlformats.org/officeDocument/2006/relationships" id="2147483649" r:id="Re964e034c65f4e24"/>
+    <p:sldLayoutId xmlns:r="http://schemas.openxmlformats.org/officeDocument/2006/relationships" id="2147483650" r:id="R37e947766b374794"/>
+    <p:sldLayoutId xmlns:r="http://schemas.openxmlformats.org/officeDocument/2006/relationships" id="2147483651" r:id="Reec8e4d42b8f4875"/>
+    <p:sldLayoutId xmlns:r="http://schemas.openxmlformats.org/officeDocument/2006/relationships" id="2147483652" r:id="R7a8554b63d0240d8"/>
+    <p:sldLayoutId xmlns:r="http://schemas.openxmlformats.org/officeDocument/2006/relationships" id="2147483653" r:id="Rfc816aedf1dc4a34"/>
+    <p:sldLayoutId xmlns:r="http://schemas.openxmlformats.org/officeDocument/2006/relationships" id="2147483654" r:id="R0263386b5e524afa"/>
+    <p:sldLayoutId xmlns:r="http://schemas.openxmlformats.org/officeDocument/2006/relationships" id="2147483655" r:id="Rf9ae501a07784574"/>
+    <p:sldLayoutId xmlns:r="http://schemas.openxmlformats.org/officeDocument/2006/relationships" id="2147483656" r:id="R7611cb4118a940d6"/>
+    <p:sldLayoutId xmlns:r="http://schemas.openxmlformats.org/officeDocument/2006/relationships" id="2147483657" r:id="R66246c0dba044f18"/>
+    <p:sldLayoutId xmlns:r="http://schemas.openxmlformats.org/officeDocument/2006/relationships" id="2147483658" r:id="R88a8b6aa87a64f66"/>
+    <p:sldLayoutId xmlns:r="http://schemas.openxmlformats.org/officeDocument/2006/relationships" id="2147483659" r:id="Rca59ba79647b4ed7"/>
   </p:sldLayoutIdLst>
   <p:txStyles>
     <p:titleStyle>
@@ -8593,7 +9043,7 @@
           <p:cNvPr id="2" name="Rectangle 1">
             <a:extLst xmlns:a="http://schemas.openxmlformats.org/drawingml/2006/main">
               <a:ext uri="{FF2B5EF4-FFF2-40B4-BE49-F238E27FC236}">
-                <a16:creationId xmlns:a16="http://schemas.microsoft.com/office/drawing/2014/main" id="{40304B7B-6059-4CE5-BC66-321591B9F825}"/>
+                <a16:creationId xmlns:a16="http://schemas.microsoft.com/office/drawing/2014/main" id="{57FFAE4F-ABFC-4A30-80F2-6BA7668A9A0D}"/>
               </a:ext>
             </a:extLst>
           </p:cNvPr>
@@ -8648,7 +9098,7 @@
           <p:cNvPr id="3" name="TextBox 2">
             <a:extLst xmlns:a="http://schemas.openxmlformats.org/drawingml/2006/main">
               <a:ext uri="{FF2B5EF4-FFF2-40B4-BE49-F238E27FC236}">
-                <a16:creationId xmlns:a16="http://schemas.microsoft.com/office/drawing/2014/main" id="{3900FDA5-B2EF-4114-BE8F-0300DB1A45E8}"/>
+                <a16:creationId xmlns:a16="http://schemas.microsoft.com/office/drawing/2014/main" id="{088F86B9-8EB9-4BAF-8898-48F643027C34}"/>
               </a:ext>
             </a:extLst>
           </p:cNvPr>
@@ -8695,7 +9145,7 @@
           <p:cNvPr id="4" name="TextBox 3">
             <a:extLst xmlns:a="http://schemas.openxmlformats.org/drawingml/2006/main">
               <a:ext uri="{FF2B5EF4-FFF2-40B4-BE49-F238E27FC236}">
-                <a16:creationId xmlns:a16="http://schemas.microsoft.com/office/drawing/2014/main" id="{FC91153E-0008-46EF-A364-05EBBF4A7838}"/>
+                <a16:creationId xmlns:a16="http://schemas.microsoft.com/office/drawing/2014/main" id="{96A8D2AF-3870-4FFD-9AA3-7DB0CA2CD1CA}"/>
               </a:ext>
             </a:extLst>
           </p:cNvPr>
@@ -8743,7 +9193,7 @@
           <p:cNvPr id="5" name="TextBox 4">
             <a:extLst xmlns:a="http://schemas.openxmlformats.org/drawingml/2006/main">
               <a:ext uri="{FF2B5EF4-FFF2-40B4-BE49-F238E27FC236}">
-                <a16:creationId xmlns:a16="http://schemas.microsoft.com/office/drawing/2014/main" id="{69E2C3B3-9E2B-4EB8-8622-7B2258F7312B}"/>
+                <a16:creationId xmlns:a16="http://schemas.microsoft.com/office/drawing/2014/main" id="{B3859DAA-4C8C-498C-9592-D91088BBC37A}"/>
               </a:ext>
             </a:extLst>
           </p:cNvPr>
@@ -8790,7 +9240,7 @@
           <p:cNvPr id="6" name="Rectangle 5">
             <a:extLst xmlns:a="http://schemas.openxmlformats.org/drawingml/2006/main">
               <a:ext uri="{FF2B5EF4-FFF2-40B4-BE49-F238E27FC236}">
-                <a16:creationId xmlns:a16="http://schemas.microsoft.com/office/drawing/2014/main" id="{D9975013-89CA-448E-B217-D98425C82907}"/>
+                <a16:creationId xmlns:a16="http://schemas.microsoft.com/office/drawing/2014/main" id="{9882C8CC-B03C-4BF6-9205-A5888014403B}"/>
               </a:ext>
             </a:extLst>
           </p:cNvPr>
@@ -8845,7 +9295,7 @@
           <p:cNvPr id="7" name="TextBox 6">
             <a:extLst xmlns:a="http://schemas.openxmlformats.org/drawingml/2006/main">
               <a:ext uri="{FF2B5EF4-FFF2-40B4-BE49-F238E27FC236}">
-                <a16:creationId xmlns:a16="http://schemas.microsoft.com/office/drawing/2014/main" id="{A4581F1B-F624-4DB7-9ECE-8330E4F9FBDC}"/>
+                <a16:creationId xmlns:a16="http://schemas.microsoft.com/office/drawing/2014/main" id="{49489331-4A24-4E44-ADAC-233B88AC0C13}"/>
               </a:ext>
             </a:extLst>
           </p:cNvPr>
@@ -8892,7 +9342,7 @@
           <p:cNvPr id="8" name="TextBox 7">
             <a:extLst xmlns:a="http://schemas.openxmlformats.org/drawingml/2006/main">
               <a:ext uri="{FF2B5EF4-FFF2-40B4-BE49-F238E27FC236}">
-                <a16:creationId xmlns:a16="http://schemas.microsoft.com/office/drawing/2014/main" id="{E8183906-E278-4E41-88B0-9F619DBA21B6}"/>
+                <a16:creationId xmlns:a16="http://schemas.microsoft.com/office/drawing/2014/main" id="{8F893D12-A11F-4E66-9723-E7D25E7C3653}"/>
               </a:ext>
             </a:extLst>
           </p:cNvPr>
@@ -8929,7 +9379,7 @@
                 <a:ea typeface="Aptos"/>
                 <a:cs typeface="Aptos"/>
               </a:rPr>
-              <a:t>2026.07.24-18</a:t>
+              <a:t>2026.07.24-19</a:t>
             </a:r>
           </a:p>
         </p:txBody>
@@ -8939,7 +9389,7 @@
           <p:cNvPr id="9" name="TextBox 8">
             <a:extLst xmlns:a="http://schemas.openxmlformats.org/drawingml/2006/main">
               <a:ext uri="{FF2B5EF4-FFF2-40B4-BE49-F238E27FC236}">
-                <a16:creationId xmlns:a16="http://schemas.microsoft.com/office/drawing/2014/main" id="{1FB17E63-99CA-4782-B77E-630727858DF5}"/>
+                <a16:creationId xmlns:a16="http://schemas.microsoft.com/office/drawing/2014/main" id="{253C5555-D5BE-4233-8804-419D3A330832}"/>
               </a:ext>
             </a:extLst>
           </p:cNvPr>
@@ -8987,7 +9437,7 @@
           <p:cNvPr id="10" name="TextBox 9">
             <a:extLst xmlns:a="http://schemas.openxmlformats.org/drawingml/2006/main">
               <a:ext uri="{FF2B5EF4-FFF2-40B4-BE49-F238E27FC236}">
-                <a16:creationId xmlns:a16="http://schemas.microsoft.com/office/drawing/2014/main" id="{4F5135DC-18B1-4524-9592-50ED9459BAE3}"/>
+                <a16:creationId xmlns:a16="http://schemas.microsoft.com/office/drawing/2014/main" id="{B37A7CC8-04FF-4081-8803-89F5319387FD}"/>
               </a:ext>
             </a:extLst>
           </p:cNvPr>
@@ -9034,7 +9484,7 @@
           <p:cNvPr id="11" name="TextBox 10">
             <a:extLst xmlns:a="http://schemas.openxmlformats.org/drawingml/2006/main">
               <a:ext uri="{FF2B5EF4-FFF2-40B4-BE49-F238E27FC236}">
-                <a16:creationId xmlns:a16="http://schemas.microsoft.com/office/drawing/2014/main" id="{072451EB-0D1B-43D9-88FD-A0660597040C}"/>
+                <a16:creationId xmlns:a16="http://schemas.microsoft.com/office/drawing/2014/main" id="{E8D77314-9089-4958-AB6D-ECBF10CBAC0C}"/>
               </a:ext>
             </a:extLst>
           </p:cNvPr>
@@ -9081,7 +9531,7 @@
           <p:cNvPr id="12" name="TextBox 11">
             <a:extLst xmlns:a="http://schemas.openxmlformats.org/drawingml/2006/main">
               <a:ext uri="{FF2B5EF4-FFF2-40B4-BE49-F238E27FC236}">
-                <a16:creationId xmlns:a16="http://schemas.microsoft.com/office/drawing/2014/main" id="{6D190320-D85A-4032-87FF-D2259C85CD22}"/>
+                <a16:creationId xmlns:a16="http://schemas.microsoft.com/office/drawing/2014/main" id="{A6BB2D43-6885-4659-B3CE-7BB890075F75}"/>
               </a:ext>
             </a:extLst>
           </p:cNvPr>
@@ -9126,7 +9576,7 @@
     </p:spTree>
     <p:extLst>
       <p:ext uri="{BB962C8B-B14F-4D97-AF65-F5344CB8AC3E}">
-        <p14:creationId xmlns:p14="http://schemas.microsoft.com/office/powerpoint/2010/main" val="782063438"/>
+        <p14:creationId xmlns:p14="http://schemas.microsoft.com/office/powerpoint/2010/main" val="1602012321"/>
       </p:ext>
     </p:extLst>
   </p:cSld>
@@ -9150,7 +9600,7 @@
           <p:cNvPr id="2" name="TextBox 1">
             <a:extLst xmlns:a="http://schemas.openxmlformats.org/drawingml/2006/main">
               <a:ext uri="{FF2B5EF4-FFF2-40B4-BE49-F238E27FC236}">
-                <a16:creationId xmlns:a16="http://schemas.microsoft.com/office/drawing/2014/main" id="{1DB49275-E71A-473E-A3C1-8C828ACE1DA5}"/>
+                <a16:creationId xmlns:a16="http://schemas.microsoft.com/office/drawing/2014/main" id="{967DEDFB-FB10-4284-8355-E36CC48F215C}"/>
               </a:ext>
             </a:extLst>
           </p:cNvPr>
@@ -9197,7 +9647,7 @@
           <p:cNvPr id="3" name="TextBox 2">
             <a:extLst xmlns:a="http://schemas.openxmlformats.org/drawingml/2006/main">
               <a:ext uri="{FF2B5EF4-FFF2-40B4-BE49-F238E27FC236}">
-                <a16:creationId xmlns:a16="http://schemas.microsoft.com/office/drawing/2014/main" id="{75114AC4-7DD9-4813-9BAF-AA38298F7957}"/>
+                <a16:creationId xmlns:a16="http://schemas.microsoft.com/office/drawing/2014/main" id="{EA151EFD-8231-48FB-A0B9-A657E2F84FC3}"/>
               </a:ext>
             </a:extLst>
           </p:cNvPr>
@@ -9244,7 +9694,7 @@
           <p:cNvPr id="4" name="Rectangle 3">
             <a:extLst xmlns:a="http://schemas.openxmlformats.org/drawingml/2006/main">
               <a:ext uri="{FF2B5EF4-FFF2-40B4-BE49-F238E27FC236}">
-                <a16:creationId xmlns:a16="http://schemas.microsoft.com/office/drawing/2014/main" id="{08D420EF-745B-4E25-A3F2-87B74675D7D3}"/>
+                <a16:creationId xmlns:a16="http://schemas.microsoft.com/office/drawing/2014/main" id="{02D07E96-801A-49E8-B904-9F305D4E1289}"/>
               </a:ext>
             </a:extLst>
           </p:cNvPr>
@@ -9299,7 +9749,7 @@
           <p:cNvPr id="5" name="Rectangle 4">
             <a:extLst xmlns:a="http://schemas.openxmlformats.org/drawingml/2006/main">
               <a:ext uri="{FF2B5EF4-FFF2-40B4-BE49-F238E27FC236}">
-                <a16:creationId xmlns:a16="http://schemas.microsoft.com/office/drawing/2014/main" id="{FD2C6B9B-F7B9-4601-AEAC-277D424718DE}"/>
+                <a16:creationId xmlns:a16="http://schemas.microsoft.com/office/drawing/2014/main" id="{CF4DE62A-993C-49E4-BDE1-6E3CA7FB9E5B}"/>
               </a:ext>
             </a:extLst>
           </p:cNvPr>
@@ -9354,7 +9804,7 @@
           <p:cNvPr id="6" name="TextBox 5">
             <a:extLst xmlns:a="http://schemas.openxmlformats.org/drawingml/2006/main">
               <a:ext uri="{FF2B5EF4-FFF2-40B4-BE49-F238E27FC236}">
-                <a16:creationId xmlns:a16="http://schemas.microsoft.com/office/drawing/2014/main" id="{05A1C54B-0FA9-498B-BAED-824241321496}"/>
+                <a16:creationId xmlns:a16="http://schemas.microsoft.com/office/drawing/2014/main" id="{9C232697-AE9B-4D3C-8951-9A230C830BEA}"/>
               </a:ext>
             </a:extLst>
           </p:cNvPr>
@@ -9391,7 +9841,7 @@
                 <a:ea typeface="Aptos"/>
                 <a:cs typeface="Aptos"/>
               </a:rPr>
-              <a:t>Julkinen riippumaton evidenssikooste · 2026.07.24-18 · 2026-07-24 · Lähteet: RPX; CNIPA guidance; EPO family</a:t>
+              <a:t>Julkinen riippumaton evidenssikooste · 2026.07.24-19 · 2026-07-24 · Lähteet: RPX; CNIPA guidance; EPO family</a:t>
             </a:r>
           </a:p>
         </p:txBody>
@@ -9401,7 +9851,7 @@
           <p:cNvPr id="7" name="TextBox 6">
             <a:extLst xmlns:a="http://schemas.openxmlformats.org/drawingml/2006/main">
               <a:ext uri="{FF2B5EF4-FFF2-40B4-BE49-F238E27FC236}">
-                <a16:creationId xmlns:a16="http://schemas.microsoft.com/office/drawing/2014/main" id="{BB2106C8-DD09-44EE-A338-00C2CEC1477D}"/>
+                <a16:creationId xmlns:a16="http://schemas.microsoft.com/office/drawing/2014/main" id="{01992038-12B9-4FE8-98B7-5362FB767813}"/>
               </a:ext>
             </a:extLst>
           </p:cNvPr>
@@ -9448,7 +9898,7 @@
           <p:cNvPr id="8" name="TextBox 7">
             <a:extLst xmlns:a="http://schemas.openxmlformats.org/drawingml/2006/main">
               <a:ext uri="{FF2B5EF4-FFF2-40B4-BE49-F238E27FC236}">
-                <a16:creationId xmlns:a16="http://schemas.microsoft.com/office/drawing/2014/main" id="{F81B3A0A-68C0-4871-B13C-F3D3F5E9A22C}"/>
+                <a16:creationId xmlns:a16="http://schemas.microsoft.com/office/drawing/2014/main" id="{8D6E9DDE-A90C-4F33-8533-CBEE57A6A477}"/>
               </a:ext>
             </a:extLst>
           </p:cNvPr>
@@ -9495,7 +9945,7 @@
           <p:cNvPr id="9" name="TextBox 8">
             <a:extLst xmlns:a="http://schemas.openxmlformats.org/drawingml/2006/main">
               <a:ext uri="{FF2B5EF4-FFF2-40B4-BE49-F238E27FC236}">
-                <a16:creationId xmlns:a16="http://schemas.microsoft.com/office/drawing/2014/main" id="{939F8853-812B-48EC-89AC-CD4D0EAE6545}"/>
+                <a16:creationId xmlns:a16="http://schemas.microsoft.com/office/drawing/2014/main" id="{69C39E98-E95F-42C0-8CA0-4E89A92F83CE}"/>
               </a:ext>
             </a:extLst>
           </p:cNvPr>
@@ -9592,7 +10042,7 @@
           <p:cNvPr id="10" name="Rounded Rectangle 9">
             <a:extLst xmlns:a="http://schemas.openxmlformats.org/drawingml/2006/main">
               <a:ext uri="{FF2B5EF4-FFF2-40B4-BE49-F238E27FC236}">
-                <a16:creationId xmlns:a16="http://schemas.microsoft.com/office/drawing/2014/main" id="{029EBEB7-1947-4875-B187-4E2D2E744A0D}"/>
+                <a16:creationId xmlns:a16="http://schemas.microsoft.com/office/drawing/2014/main" id="{18A3EE31-39BA-44CE-833A-77F1484548CC}"/>
               </a:ext>
             </a:extLst>
           </p:cNvPr>
@@ -9649,7 +10099,7 @@
           <p:cNvPr id="11" name="TextBox 10">
             <a:extLst xmlns:a="http://schemas.openxmlformats.org/drawingml/2006/main">
               <a:ext uri="{FF2B5EF4-FFF2-40B4-BE49-F238E27FC236}">
-                <a16:creationId xmlns:a16="http://schemas.microsoft.com/office/drawing/2014/main" id="{6830C199-B7C3-4A1B-8F7E-44CFB13CEEFA}"/>
+                <a16:creationId xmlns:a16="http://schemas.microsoft.com/office/drawing/2014/main" id="{6E15F6E0-9917-45EB-84E0-691FDEB218A2}"/>
               </a:ext>
             </a:extLst>
           </p:cNvPr>
@@ -9696,7 +10146,7 @@
           <p:cNvPr id="12" name="TextBox 11">
             <a:extLst xmlns:a="http://schemas.openxmlformats.org/drawingml/2006/main">
               <a:ext uri="{FF2B5EF4-FFF2-40B4-BE49-F238E27FC236}">
-                <a16:creationId xmlns:a16="http://schemas.microsoft.com/office/drawing/2014/main" id="{8401A208-CC65-40EC-A77E-9B5652542BF0}"/>
+                <a16:creationId xmlns:a16="http://schemas.microsoft.com/office/drawing/2014/main" id="{242A9EB7-95E2-4172-A92F-DD984045E65B}"/>
               </a:ext>
             </a:extLst>
           </p:cNvPr>
@@ -9741,7 +10191,7 @@
     </p:spTree>
     <p:extLst>
       <p:ext uri="{BB962C8B-B14F-4D97-AF65-F5344CB8AC3E}">
-        <p14:creationId xmlns:p14="http://schemas.microsoft.com/office/powerpoint/2010/main" val="1800700066"/>
+        <p14:creationId xmlns:p14="http://schemas.microsoft.com/office/powerpoint/2010/main" val="605450914"/>
       </p:ext>
     </p:extLst>
   </p:cSld>
@@ -9765,7 +10215,7 @@
           <p:cNvPr id="2" name="TextBox 1">
             <a:extLst xmlns:a="http://schemas.openxmlformats.org/drawingml/2006/main">
               <a:ext uri="{FF2B5EF4-FFF2-40B4-BE49-F238E27FC236}">
-                <a16:creationId xmlns:a16="http://schemas.microsoft.com/office/drawing/2014/main" id="{8DF077C1-8386-4CB5-90F6-7737AC224EF8}"/>
+                <a16:creationId xmlns:a16="http://schemas.microsoft.com/office/drawing/2014/main" id="{B8306A35-CAFB-42ED-836B-910B49B0BE92}"/>
               </a:ext>
             </a:extLst>
           </p:cNvPr>
@@ -9812,7 +10262,7 @@
           <p:cNvPr id="3" name="TextBox 2">
             <a:extLst xmlns:a="http://schemas.openxmlformats.org/drawingml/2006/main">
               <a:ext uri="{FF2B5EF4-FFF2-40B4-BE49-F238E27FC236}">
-                <a16:creationId xmlns:a16="http://schemas.microsoft.com/office/drawing/2014/main" id="{39A8F69A-4B2F-484D-A438-AB5A6AC44C61}"/>
+                <a16:creationId xmlns:a16="http://schemas.microsoft.com/office/drawing/2014/main" id="{E4314E07-6B85-4C98-96A4-55BDC5B1A061}"/>
               </a:ext>
             </a:extLst>
           </p:cNvPr>
@@ -9859,7 +10309,7 @@
           <p:cNvPr id="4" name="Rectangle 3">
             <a:extLst xmlns:a="http://schemas.openxmlformats.org/drawingml/2006/main">
               <a:ext uri="{FF2B5EF4-FFF2-40B4-BE49-F238E27FC236}">
-                <a16:creationId xmlns:a16="http://schemas.microsoft.com/office/drawing/2014/main" id="{692942C3-B49A-4E03-9951-9520D14265B6}"/>
+                <a16:creationId xmlns:a16="http://schemas.microsoft.com/office/drawing/2014/main" id="{F9F0E9B0-1812-4DE8-B22E-74DBE1B870D8}"/>
               </a:ext>
             </a:extLst>
           </p:cNvPr>
@@ -9914,7 +10364,7 @@
           <p:cNvPr id="5" name="Rectangle 4">
             <a:extLst xmlns:a="http://schemas.openxmlformats.org/drawingml/2006/main">
               <a:ext uri="{FF2B5EF4-FFF2-40B4-BE49-F238E27FC236}">
-                <a16:creationId xmlns:a16="http://schemas.microsoft.com/office/drawing/2014/main" id="{08E2F3A4-7DE3-4D7A-BDD3-511FD853C2B7}"/>
+                <a16:creationId xmlns:a16="http://schemas.microsoft.com/office/drawing/2014/main" id="{3D363E84-CC60-4AE3-8AF9-02864C4C7BAB}"/>
               </a:ext>
             </a:extLst>
           </p:cNvPr>
@@ -9969,7 +10419,7 @@
           <p:cNvPr id="6" name="TextBox 5">
             <a:extLst xmlns:a="http://schemas.openxmlformats.org/drawingml/2006/main">
               <a:ext uri="{FF2B5EF4-FFF2-40B4-BE49-F238E27FC236}">
-                <a16:creationId xmlns:a16="http://schemas.microsoft.com/office/drawing/2014/main" id="{B42C937A-5DAE-4D0E-80B2-4FAA698F6A5E}"/>
+                <a16:creationId xmlns:a16="http://schemas.microsoft.com/office/drawing/2014/main" id="{B3FCFA1C-FC17-4B06-9E54-3A410A0CF86E}"/>
               </a:ext>
             </a:extLst>
           </p:cNvPr>
@@ -10006,7 +10456,7 @@
                 <a:ea typeface="Aptos"/>
                 <a:cs typeface="Aptos"/>
               </a:rPr>
-              <a:t>Julkinen riippumaton evidenssikooste · 2026.07.24-18 · 2026-07-24 · Lähteet: IP Australia; PRH; EPO; EPO / UPC; USPTO</a:t>
+              <a:t>Julkinen riippumaton evidenssikooste · 2026.07.24-19 · 2026-07-24 · Lähteet: IP Australia; PRH; EPO; EPO / UPC; USPTO</a:t>
             </a:r>
           </a:p>
         </p:txBody>
@@ -10016,7 +10466,7 @@
           <p:cNvPr id="7" name="TextBox 6">
             <a:extLst xmlns:a="http://schemas.openxmlformats.org/drawingml/2006/main">
               <a:ext uri="{FF2B5EF4-FFF2-40B4-BE49-F238E27FC236}">
-                <a16:creationId xmlns:a16="http://schemas.microsoft.com/office/drawing/2014/main" id="{E053E01D-E0E0-47CF-B2F4-D128345F878E}"/>
+                <a16:creationId xmlns:a16="http://schemas.microsoft.com/office/drawing/2014/main" id="{A788C330-ED1A-446C-86DB-E222AB1C5F4A}"/>
               </a:ext>
             </a:extLst>
           </p:cNvPr>
@@ -10503,7 +10953,7 @@
           <p:cNvPr id="9" name="TextBox 8">
             <a:extLst xmlns:a="http://schemas.openxmlformats.org/drawingml/2006/main">
               <a:ext uri="{FF2B5EF4-FFF2-40B4-BE49-F238E27FC236}">
-                <a16:creationId xmlns:a16="http://schemas.microsoft.com/office/drawing/2014/main" id="{C4CF40BF-4679-470B-9D22-8EB64B037E28}"/>
+                <a16:creationId xmlns:a16="http://schemas.microsoft.com/office/drawing/2014/main" id="{67DFF41E-9B88-4F93-A22A-0CCD2F0E2152}"/>
               </a:ext>
             </a:extLst>
           </p:cNvPr>
@@ -10548,7 +10998,7 @@
     </p:spTree>
     <p:extLst>
       <p:ext uri="{BB962C8B-B14F-4D97-AF65-F5344CB8AC3E}">
-        <p14:creationId xmlns:p14="http://schemas.microsoft.com/office/powerpoint/2010/main" val="1672397647"/>
+        <p14:creationId xmlns:p14="http://schemas.microsoft.com/office/powerpoint/2010/main" val="258064822"/>
       </p:ext>
     </p:extLst>
   </p:cSld>
@@ -10572,7 +11022,7 @@
           <p:cNvPr id="2" name="TextBox 1">
             <a:extLst xmlns:a="http://schemas.openxmlformats.org/drawingml/2006/main">
               <a:ext uri="{FF2B5EF4-FFF2-40B4-BE49-F238E27FC236}">
-                <a16:creationId xmlns:a16="http://schemas.microsoft.com/office/drawing/2014/main" id="{AF3FEA7C-6F8D-4D5E-A95A-227A44208FA7}"/>
+                <a16:creationId xmlns:a16="http://schemas.microsoft.com/office/drawing/2014/main" id="{EA1246CD-194F-486E-87EE-1E16426B166E}"/>
               </a:ext>
             </a:extLst>
           </p:cNvPr>
@@ -10619,7 +11069,7 @@
           <p:cNvPr id="3" name="TextBox 2">
             <a:extLst xmlns:a="http://schemas.openxmlformats.org/drawingml/2006/main">
               <a:ext uri="{FF2B5EF4-FFF2-40B4-BE49-F238E27FC236}">
-                <a16:creationId xmlns:a16="http://schemas.microsoft.com/office/drawing/2014/main" id="{DFFE800B-A3CF-4806-8C97-6C7C56FC3072}"/>
+                <a16:creationId xmlns:a16="http://schemas.microsoft.com/office/drawing/2014/main" id="{F1778BDB-92AD-43C8-8E09-A65A9DC7F140}"/>
               </a:ext>
             </a:extLst>
           </p:cNvPr>
@@ -10631,7 +11081,7 @@
         <p:spPr>
           <a:xfrm xmlns:a="http://schemas.openxmlformats.org/drawingml/2006/main">
             <a:off x="502920" y="621792"/>
-            <a:ext cx="11109960" cy="548640"/>
+            <a:ext cx="11109960" cy="591312"/>
           </a:xfrm>
           <a:prstGeom xmlns:a="http://schemas.openxmlformats.org/drawingml/2006/main" prst="rect">
             <a:avLst/>
@@ -10639,8 +11089,8 @@
           <a:noFill xmlns:a="http://schemas.openxmlformats.org/drawingml/2006/main"/>
         </p:spPr>
         <p:txBody>
-          <a:bodyPr xmlns:a="http://schemas.openxmlformats.org/drawingml/2006/main" wrap="square" lIns="36576" tIns="36576" rIns="36576" bIns="36576" anchor="t">
-            <a:spAutoFit/>
+          <a:bodyPr xmlns:a="http://schemas.openxmlformats.org/drawingml/2006/main" wrap="none" lIns="36576" tIns="36576" rIns="36576" bIns="36576" anchor="t">
+            <a:normAutofit fontScale="100000"/>
           </a:bodyPr>
           <a:lstStyle xmlns:a="http://schemas.openxmlformats.org/drawingml/2006/main"/>
           <a:p xmlns:a="http://schemas.openxmlformats.org/drawingml/2006/main">
@@ -10648,7 +11098,7 @@
               <a:buNone/>
             </a:pPr>
             <a:r>
-              <a:rPr sz="3400" b="1">
+              <a:rPr sz="2400" b="1">
                 <a:solidFill>
                   <a:srgbClr val="071A2B"/>
                 </a:solidFill>
@@ -10656,7 +11106,7 @@
                 <a:ea typeface="Aptos"/>
                 <a:cs typeface="Aptos"/>
               </a:rPr>
-              <a:t>Atlas: 195 maata (UN193+VA+PS); tutkimusrunko ei ole markkina-arvo</a:t>
+              <a:t>Atlas kattaa 195 maata; ei markkina-arvoa</a:t>
             </a:r>
           </a:p>
         </p:txBody>
@@ -10666,7 +11116,7 @@
           <p:cNvPr id="4" name="Rectangle 3">
             <a:extLst xmlns:a="http://schemas.openxmlformats.org/drawingml/2006/main">
               <a:ext uri="{FF2B5EF4-FFF2-40B4-BE49-F238E27FC236}">
-                <a16:creationId xmlns:a16="http://schemas.microsoft.com/office/drawing/2014/main" id="{AB433AA5-84C2-421D-BF6D-38FB4A9D54DA}"/>
+                <a16:creationId xmlns:a16="http://schemas.microsoft.com/office/drawing/2014/main" id="{BA8C9282-821A-40AD-94BC-B6C368F42C7C}"/>
               </a:ext>
             </a:extLst>
           </p:cNvPr>
@@ -10721,7 +11171,7 @@
           <p:cNvPr id="5" name="Rectangle 4">
             <a:extLst xmlns:a="http://schemas.openxmlformats.org/drawingml/2006/main">
               <a:ext uri="{FF2B5EF4-FFF2-40B4-BE49-F238E27FC236}">
-                <a16:creationId xmlns:a16="http://schemas.microsoft.com/office/drawing/2014/main" id="{6A7C1946-2567-47FC-A041-700F09758316}"/>
+                <a16:creationId xmlns:a16="http://schemas.microsoft.com/office/drawing/2014/main" id="{69F5DE85-D20C-4BBD-A975-59BDC5E4775B}"/>
               </a:ext>
             </a:extLst>
           </p:cNvPr>
@@ -10776,7 +11226,7 @@
           <p:cNvPr id="6" name="TextBox 5">
             <a:extLst xmlns:a="http://schemas.openxmlformats.org/drawingml/2006/main">
               <a:ext uri="{FF2B5EF4-FFF2-40B4-BE49-F238E27FC236}">
-                <a16:creationId xmlns:a16="http://schemas.microsoft.com/office/drawing/2014/main" id="{BE601034-000E-480E-B21B-C28F23E75ADE}"/>
+                <a16:creationId xmlns:a16="http://schemas.microsoft.com/office/drawing/2014/main" id="{26F2A1B0-77C9-436A-AC74-487C6E5DB9F6}"/>
               </a:ext>
             </a:extLst>
           </p:cNvPr>
@@ -10813,7 +11263,7 @@
                 <a:ea typeface="Aptos"/>
                 <a:cs typeface="Aptos"/>
               </a:rPr>
-              <a:t>Julkinen riippumaton evidenssikooste · 2026.07.24-18 · 2026-07-24 · Lähteet: UN; Atlas</a:t>
+              <a:t>Julkinen riippumaton evidenssikooste · 2026.07.24-19 · 2026-07-24 · Lähteet: UN; Atlas</a:t>
             </a:r>
           </a:p>
         </p:txBody>
@@ -10823,7 +11273,7 @@
           <p:cNvPr id="7" name="TextBox 6">
             <a:extLst xmlns:a="http://schemas.openxmlformats.org/drawingml/2006/main">
               <a:ext uri="{FF2B5EF4-FFF2-40B4-BE49-F238E27FC236}">
-                <a16:creationId xmlns:a16="http://schemas.microsoft.com/office/drawing/2014/main" id="{2FB77097-1CD6-4AD6-B67A-9C4EDEB2A5A8}"/>
+                <a16:creationId xmlns:a16="http://schemas.microsoft.com/office/drawing/2014/main" id="{C60F8BFB-AB9A-4DC6-BAF2-394A387904D4}"/>
               </a:ext>
             </a:extLst>
           </p:cNvPr>
@@ -10870,7 +11320,7 @@
           <p:cNvPr id="8" name="Rounded Rectangle 7">
             <a:extLst xmlns:a="http://schemas.openxmlformats.org/drawingml/2006/main">
               <a:ext uri="{FF2B5EF4-FFF2-40B4-BE49-F238E27FC236}">
-                <a16:creationId xmlns:a16="http://schemas.microsoft.com/office/drawing/2014/main" id="{2ACF8DB4-DA11-40E7-A6D5-8041F922B698}"/>
+                <a16:creationId xmlns:a16="http://schemas.microsoft.com/office/drawing/2014/main" id="{35A2980D-5DFB-430C-8176-6E50146A7E7D}"/>
               </a:ext>
             </a:extLst>
           </p:cNvPr>
@@ -10927,7 +11377,7 @@
           <p:cNvPr id="9" name="TextBox 8">
             <a:extLst xmlns:a="http://schemas.openxmlformats.org/drawingml/2006/main">
               <a:ext uri="{FF2B5EF4-FFF2-40B4-BE49-F238E27FC236}">
-                <a16:creationId xmlns:a16="http://schemas.microsoft.com/office/drawing/2014/main" id="{012A1A44-ECAA-440F-98A0-D138EF74A274}"/>
+                <a16:creationId xmlns:a16="http://schemas.microsoft.com/office/drawing/2014/main" id="{113884B5-9F86-42B0-89A5-66375E47C3BD}"/>
               </a:ext>
             </a:extLst>
           </p:cNvPr>
@@ -10974,7 +11424,7 @@
           <p:cNvPr id="10" name="TextBox 9">
             <a:extLst xmlns:a="http://schemas.openxmlformats.org/drawingml/2006/main">
               <a:ext uri="{FF2B5EF4-FFF2-40B4-BE49-F238E27FC236}">
-                <a16:creationId xmlns:a16="http://schemas.microsoft.com/office/drawing/2014/main" id="{E05503BF-4C5C-4CD6-9048-4D15E0D4874C}"/>
+                <a16:creationId xmlns:a16="http://schemas.microsoft.com/office/drawing/2014/main" id="{40D8306C-5F12-401F-9C6A-2F085253FF85}"/>
               </a:ext>
             </a:extLst>
           </p:cNvPr>
@@ -11021,7 +11471,7 @@
           <p:cNvPr id="11" name="Rounded Rectangle 10">
             <a:extLst xmlns:a="http://schemas.openxmlformats.org/drawingml/2006/main">
               <a:ext uri="{FF2B5EF4-FFF2-40B4-BE49-F238E27FC236}">
-                <a16:creationId xmlns:a16="http://schemas.microsoft.com/office/drawing/2014/main" id="{C03A0583-1650-41AE-9368-187192D34678}"/>
+                <a16:creationId xmlns:a16="http://schemas.microsoft.com/office/drawing/2014/main" id="{DB00DB14-A4DA-41E0-8B1C-F540B6AB023D}"/>
               </a:ext>
             </a:extLst>
           </p:cNvPr>
@@ -11078,7 +11528,7 @@
           <p:cNvPr id="12" name="TextBox 11">
             <a:extLst xmlns:a="http://schemas.openxmlformats.org/drawingml/2006/main">
               <a:ext uri="{FF2B5EF4-FFF2-40B4-BE49-F238E27FC236}">
-                <a16:creationId xmlns:a16="http://schemas.microsoft.com/office/drawing/2014/main" id="{0F5D87CF-7EAC-4BAE-96D9-ADCE7592B486}"/>
+                <a16:creationId xmlns:a16="http://schemas.microsoft.com/office/drawing/2014/main" id="{8DDDFF1F-4277-45CD-959F-BFCC651C4D39}"/>
               </a:ext>
             </a:extLst>
           </p:cNvPr>
@@ -11125,7 +11575,7 @@
           <p:cNvPr id="13" name="TextBox 12">
             <a:extLst xmlns:a="http://schemas.openxmlformats.org/drawingml/2006/main">
               <a:ext uri="{FF2B5EF4-FFF2-40B4-BE49-F238E27FC236}">
-                <a16:creationId xmlns:a16="http://schemas.microsoft.com/office/drawing/2014/main" id="{4A3BD94D-0DE1-426D-9D71-C4A7E343DE75}"/>
+                <a16:creationId xmlns:a16="http://schemas.microsoft.com/office/drawing/2014/main" id="{63C1467C-C7B3-4C94-ADC0-9D551E4FBF1E}"/>
               </a:ext>
             </a:extLst>
           </p:cNvPr>
@@ -11172,7 +11622,7 @@
           <p:cNvPr id="14" name="Rounded Rectangle 13">
             <a:extLst xmlns:a="http://schemas.openxmlformats.org/drawingml/2006/main">
               <a:ext uri="{FF2B5EF4-FFF2-40B4-BE49-F238E27FC236}">
-                <a16:creationId xmlns:a16="http://schemas.microsoft.com/office/drawing/2014/main" id="{143E575D-2021-4D91-946E-41F0282005EE}"/>
+                <a16:creationId xmlns:a16="http://schemas.microsoft.com/office/drawing/2014/main" id="{C38EE3DC-84C3-46CE-8AEC-BB14B91B8EF3}"/>
               </a:ext>
             </a:extLst>
           </p:cNvPr>
@@ -11229,7 +11679,7 @@
           <p:cNvPr id="15" name="TextBox 14">
             <a:extLst xmlns:a="http://schemas.openxmlformats.org/drawingml/2006/main">
               <a:ext uri="{FF2B5EF4-FFF2-40B4-BE49-F238E27FC236}">
-                <a16:creationId xmlns:a16="http://schemas.microsoft.com/office/drawing/2014/main" id="{3155AA9B-F114-4D66-80C1-10AE98317A13}"/>
+                <a16:creationId xmlns:a16="http://schemas.microsoft.com/office/drawing/2014/main" id="{1EFA7360-0356-4329-B62A-C3218F43E1E5}"/>
               </a:ext>
             </a:extLst>
           </p:cNvPr>
@@ -11276,7 +11726,7 @@
           <p:cNvPr id="16" name="TextBox 15">
             <a:extLst xmlns:a="http://schemas.openxmlformats.org/drawingml/2006/main">
               <a:ext uri="{FF2B5EF4-FFF2-40B4-BE49-F238E27FC236}">
-                <a16:creationId xmlns:a16="http://schemas.microsoft.com/office/drawing/2014/main" id="{E68B6BB1-AA54-4987-98AD-1DC8DC9CC427}"/>
+                <a16:creationId xmlns:a16="http://schemas.microsoft.com/office/drawing/2014/main" id="{1DDEB0ED-0E34-48C2-B022-E4B8993B58CB}"/>
               </a:ext>
             </a:extLst>
           </p:cNvPr>
@@ -11323,7 +11773,7 @@
           <p:cNvPr id="17" name="Rounded Rectangle 16">
             <a:extLst xmlns:a="http://schemas.openxmlformats.org/drawingml/2006/main">
               <a:ext uri="{FF2B5EF4-FFF2-40B4-BE49-F238E27FC236}">
-                <a16:creationId xmlns:a16="http://schemas.microsoft.com/office/drawing/2014/main" id="{3AE19757-E59F-47F9-9C29-1789F7EF0000}"/>
+                <a16:creationId xmlns:a16="http://schemas.microsoft.com/office/drawing/2014/main" id="{5F3743EE-680C-4EC8-8B13-483EB6CA8D8F}"/>
               </a:ext>
             </a:extLst>
           </p:cNvPr>
@@ -11380,7 +11830,7 @@
           <p:cNvPr id="18" name="TextBox 17">
             <a:extLst xmlns:a="http://schemas.openxmlformats.org/drawingml/2006/main">
               <a:ext uri="{FF2B5EF4-FFF2-40B4-BE49-F238E27FC236}">
-                <a16:creationId xmlns:a16="http://schemas.microsoft.com/office/drawing/2014/main" id="{869C0A8D-64CF-4FE6-A982-068AD188803C}"/>
+                <a16:creationId xmlns:a16="http://schemas.microsoft.com/office/drawing/2014/main" id="{6C46EB0B-C3B2-4BE0-A863-FA3192E3F0D2}"/>
               </a:ext>
             </a:extLst>
           </p:cNvPr>
@@ -11427,7 +11877,7 @@
           <p:cNvPr id="19" name="TextBox 18">
             <a:extLst xmlns:a="http://schemas.openxmlformats.org/drawingml/2006/main">
               <a:ext uri="{FF2B5EF4-FFF2-40B4-BE49-F238E27FC236}">
-                <a16:creationId xmlns:a16="http://schemas.microsoft.com/office/drawing/2014/main" id="{12934235-BBF1-4BA2-A095-5213658B18EE}"/>
+                <a16:creationId xmlns:a16="http://schemas.microsoft.com/office/drawing/2014/main" id="{6365B2F9-3A5B-4B1E-8990-0E8D87FA5B0D}"/>
               </a:ext>
             </a:extLst>
           </p:cNvPr>
@@ -11474,7 +11924,7 @@
           <p:cNvPr id="20" name="TextBox 19">
             <a:extLst xmlns:a="http://schemas.openxmlformats.org/drawingml/2006/main">
               <a:ext uri="{FF2B5EF4-FFF2-40B4-BE49-F238E27FC236}">
-                <a16:creationId xmlns:a16="http://schemas.microsoft.com/office/drawing/2014/main" id="{17D115D2-9707-46DF-AF66-70A5AD270CA2}"/>
+                <a16:creationId xmlns:a16="http://schemas.microsoft.com/office/drawing/2014/main" id="{CBA967D5-40B4-4732-8068-AB7E93783845}"/>
               </a:ext>
             </a:extLst>
           </p:cNvPr>
@@ -11521,7 +11971,7 @@
           <p:cNvPr id="21" name="Rounded Rectangle 20">
             <a:extLst xmlns:a="http://schemas.openxmlformats.org/drawingml/2006/main">
               <a:ext uri="{FF2B5EF4-FFF2-40B4-BE49-F238E27FC236}">
-                <a16:creationId xmlns:a16="http://schemas.microsoft.com/office/drawing/2014/main" id="{CA3BC30D-A04F-4B52-B0E7-E49468C04610}"/>
+                <a16:creationId xmlns:a16="http://schemas.microsoft.com/office/drawing/2014/main" id="{76725135-9D28-4A09-B12E-555C45461FD9}"/>
               </a:ext>
             </a:extLst>
           </p:cNvPr>
@@ -11578,7 +12028,7 @@
           <p:cNvPr id="22" name="TextBox 21">
             <a:extLst xmlns:a="http://schemas.openxmlformats.org/drawingml/2006/main">
               <a:ext uri="{FF2B5EF4-FFF2-40B4-BE49-F238E27FC236}">
-                <a16:creationId xmlns:a16="http://schemas.microsoft.com/office/drawing/2014/main" id="{8A86E385-2961-4EFB-8E03-CB035AB5D87A}"/>
+                <a16:creationId xmlns:a16="http://schemas.microsoft.com/office/drawing/2014/main" id="{54D0B5EF-78C5-401B-A9D8-90D0404BFF2D}"/>
               </a:ext>
             </a:extLst>
           </p:cNvPr>
@@ -11625,7 +12075,7 @@
           <p:cNvPr id="23" name="TextBox 22">
             <a:extLst xmlns:a="http://schemas.openxmlformats.org/drawingml/2006/main">
               <a:ext uri="{FF2B5EF4-FFF2-40B4-BE49-F238E27FC236}">
-                <a16:creationId xmlns:a16="http://schemas.microsoft.com/office/drawing/2014/main" id="{97BFFD9F-43EE-4072-B66E-38A82D621800}"/>
+                <a16:creationId xmlns:a16="http://schemas.microsoft.com/office/drawing/2014/main" id="{1F642D4B-13D9-4438-B201-E12993FBC56F}"/>
               </a:ext>
             </a:extLst>
           </p:cNvPr>
@@ -11670,7 +12120,7 @@
     </p:spTree>
     <p:extLst>
       <p:ext uri="{BB962C8B-B14F-4D97-AF65-F5344CB8AC3E}">
-        <p14:creationId xmlns:p14="http://schemas.microsoft.com/office/powerpoint/2010/main" val="1321605003"/>
+        <p14:creationId xmlns:p14="http://schemas.microsoft.com/office/powerpoint/2010/main" val="1660562578"/>
       </p:ext>
     </p:extLst>
   </p:cSld>
@@ -11694,7 +12144,7 @@
           <p:cNvPr id="2" name="TextBox 1">
             <a:extLst xmlns:a="http://schemas.openxmlformats.org/drawingml/2006/main">
               <a:ext uri="{FF2B5EF4-FFF2-40B4-BE49-F238E27FC236}">
-                <a16:creationId xmlns:a16="http://schemas.microsoft.com/office/drawing/2014/main" id="{FC0385FF-F17E-403D-B8DE-FD4F49230DFA}"/>
+                <a16:creationId xmlns:a16="http://schemas.microsoft.com/office/drawing/2014/main" id="{9647B05A-3292-4E2C-B60C-4AE2C52631DC}"/>
               </a:ext>
             </a:extLst>
           </p:cNvPr>
@@ -11741,7 +12191,7 @@
           <p:cNvPr id="3" name="TextBox 2">
             <a:extLst xmlns:a="http://schemas.openxmlformats.org/drawingml/2006/main">
               <a:ext uri="{FF2B5EF4-FFF2-40B4-BE49-F238E27FC236}">
-                <a16:creationId xmlns:a16="http://schemas.microsoft.com/office/drawing/2014/main" id="{CB42B0FC-2604-4D7D-8203-3176451E7E21}"/>
+                <a16:creationId xmlns:a16="http://schemas.microsoft.com/office/drawing/2014/main" id="{C06517C2-4699-418A-840C-5EE6C7BEC33D}"/>
               </a:ext>
             </a:extLst>
           </p:cNvPr>
@@ -11778,7 +12228,7 @@
                 <a:ea typeface="Aptos"/>
                 <a:cs typeface="Aptos"/>
               </a:rPr>
-              <a:t>Valitut viralliset reitit: 27 havaintoa 7 maasta</a:t>
+              <a:t>Valitut viralliset reitit: 34 havaintoa 7 maasta</a:t>
             </a:r>
           </a:p>
         </p:txBody>
@@ -11788,7 +12238,7 @@
           <p:cNvPr id="4" name="Rectangle 3">
             <a:extLst xmlns:a="http://schemas.openxmlformats.org/drawingml/2006/main">
               <a:ext uri="{FF2B5EF4-FFF2-40B4-BE49-F238E27FC236}">
-                <a16:creationId xmlns:a16="http://schemas.microsoft.com/office/drawing/2014/main" id="{4CE9B7DF-F8C4-48BC-9200-B47D3D7862BA}"/>
+                <a16:creationId xmlns:a16="http://schemas.microsoft.com/office/drawing/2014/main" id="{678E2B45-F538-402C-A5A6-522615F5969C}"/>
               </a:ext>
             </a:extLst>
           </p:cNvPr>
@@ -11843,7 +12293,7 @@
           <p:cNvPr id="5" name="Rectangle 4">
             <a:extLst xmlns:a="http://schemas.openxmlformats.org/drawingml/2006/main">
               <a:ext uri="{FF2B5EF4-FFF2-40B4-BE49-F238E27FC236}">
-                <a16:creationId xmlns:a16="http://schemas.microsoft.com/office/drawing/2014/main" id="{4F1342AD-1E08-4DAC-AE4E-9CD837AD0EA8}"/>
+                <a16:creationId xmlns:a16="http://schemas.microsoft.com/office/drawing/2014/main" id="{B2671702-8501-4E65-A031-44B9E13A1956}"/>
               </a:ext>
             </a:extLst>
           </p:cNvPr>
@@ -11898,7 +12348,7 @@
           <p:cNvPr id="6" name="TextBox 5">
             <a:extLst xmlns:a="http://schemas.openxmlformats.org/drawingml/2006/main">
               <a:ext uri="{FF2B5EF4-FFF2-40B4-BE49-F238E27FC236}">
-                <a16:creationId xmlns:a16="http://schemas.microsoft.com/office/drawing/2014/main" id="{3C634936-B9CE-4629-A37C-FB3162340B61}"/>
+                <a16:creationId xmlns:a16="http://schemas.microsoft.com/office/drawing/2014/main" id="{31940224-4363-4465-BBE9-82AF9F342AD8}"/>
               </a:ext>
             </a:extLst>
           </p:cNvPr>
@@ -11935,7 +12385,7 @@
                 <a:ea typeface="Aptos"/>
                 <a:cs typeface="Aptos"/>
               </a:rPr>
-              <a:t>Julkinen riippumaton evidenssikooste · 2026.07.24-18 · 2026-07-24 · Lähteet: Health Canada; New Zealand Ministry of Health; Destatis; Vero; Sejm; FTC</a:t>
+              <a:t>Julkinen riippumaton evidenssikooste · 2026.07.24-19 · 2026-07-24 · Lähteet: Statistics Canada; Health Canada; New Zealand Ministry of Health; Destatis; Vero; Sejm; FTC</a:t>
             </a:r>
           </a:p>
         </p:txBody>
@@ -11945,7 +12395,7 @@
           <p:cNvPr id="7" name="TextBox 6">
             <a:extLst xmlns:a="http://schemas.openxmlformats.org/drawingml/2006/main">
               <a:ext uri="{FF2B5EF4-FFF2-40B4-BE49-F238E27FC236}">
-                <a16:creationId xmlns:a16="http://schemas.microsoft.com/office/drawing/2014/main" id="{CCA62815-24D5-44D2-9E32-A2B9F6AE2D42}"/>
+                <a16:creationId xmlns:a16="http://schemas.microsoft.com/office/drawing/2014/main" id="{116D07C9-9EE1-44D2-A9C5-839BE1D267EA}"/>
               </a:ext>
             </a:extLst>
           </p:cNvPr>
@@ -12136,7 +12586,7 @@
                           <a:ea typeface="Aptos"/>
                           <a:cs typeface="Aptos"/>
                         </a:rPr>
-                        <a:t>2024</a:t>
+                        <a:t>2019–2025</a:t>
                       </a:r>
                     </a:p>
                   </a:txBody>
@@ -12163,7 +12613,7 @@
                           <a:ea typeface="Aptos"/>
                           <a:cs typeface="Aptos"/>
                         </a:rPr>
-                        <a:t>1,16 mrd CAD toimitusarvo; 1 251 843 l nestettä</a:t>
+                        <a:t>StatsCan retail 2024: 1,219 mrd CAD (≈822,6 milj. EUR; ECB 2024); kaikki neljännekset E-laatua. Health Canada -toimitukset: 1,161 mrd CAD (≈783,2 milj. EUR; ECB 2024), 5,03 % alemmat; silta avoin</a:t>
                       </a:r>
                     </a:p>
                   </a:txBody>
@@ -12598,7 +13048,7 @@
           <p:cNvPr id="9" name="TextBox 8">
             <a:extLst xmlns:a="http://schemas.openxmlformats.org/drawingml/2006/main">
               <a:ext uri="{FF2B5EF4-FFF2-40B4-BE49-F238E27FC236}">
-                <a16:creationId xmlns:a16="http://schemas.microsoft.com/office/drawing/2014/main" id="{31B0B56E-65C1-484F-A462-950118CF843D}"/>
+                <a16:creationId xmlns:a16="http://schemas.microsoft.com/office/drawing/2014/main" id="{9D57836F-5F69-477D-A98B-F17FA1BE6C45}"/>
               </a:ext>
             </a:extLst>
           </p:cNvPr>
@@ -12643,7 +13093,7 @@
     </p:spTree>
     <p:extLst>
       <p:ext uri="{BB962C8B-B14F-4D97-AF65-F5344CB8AC3E}">
-        <p14:creationId xmlns:p14="http://schemas.microsoft.com/office/powerpoint/2010/main" val="1284891075"/>
+        <p14:creationId xmlns:p14="http://schemas.microsoft.com/office/powerpoint/2010/main" val="2006120499"/>
       </p:ext>
     </p:extLst>
   </p:cSld>
@@ -12667,7 +13117,7 @@
           <p:cNvPr id="2" name="TextBox 1">
             <a:extLst xmlns:a="http://schemas.openxmlformats.org/drawingml/2006/main">
               <a:ext uri="{FF2B5EF4-FFF2-40B4-BE49-F238E27FC236}">
-                <a16:creationId xmlns:a16="http://schemas.microsoft.com/office/drawing/2014/main" id="{67D6D2EC-01F2-4108-BC4B-E0C219D96D98}"/>
+                <a16:creationId xmlns:a16="http://schemas.microsoft.com/office/drawing/2014/main" id="{791C76BF-4A03-465E-A26B-994C71D98E5B}"/>
               </a:ext>
             </a:extLst>
           </p:cNvPr>
@@ -12714,7 +13164,7 @@
           <p:cNvPr id="3" name="TextBox 2">
             <a:extLst xmlns:a="http://schemas.openxmlformats.org/drawingml/2006/main">
               <a:ext uri="{FF2B5EF4-FFF2-40B4-BE49-F238E27FC236}">
-                <a16:creationId xmlns:a16="http://schemas.microsoft.com/office/drawing/2014/main" id="{B276780E-6EC8-4D8D-995B-09DD610B4371}"/>
+                <a16:creationId xmlns:a16="http://schemas.microsoft.com/office/drawing/2014/main" id="{AF2C5E43-207C-47C7-9EC2-1C5A7066CC10}"/>
               </a:ext>
             </a:extLst>
           </p:cNvPr>
@@ -12726,7 +13176,7 @@
         <p:spPr>
           <a:xfrm xmlns:a="http://schemas.openxmlformats.org/drawingml/2006/main">
             <a:off x="502920" y="621792"/>
-            <a:ext cx="11109960" cy="548640"/>
+            <a:ext cx="11109960" cy="591312"/>
           </a:xfrm>
           <a:prstGeom xmlns:a="http://schemas.openxmlformats.org/drawingml/2006/main" prst="rect">
             <a:avLst/>
@@ -12734,8 +13184,8 @@
           <a:noFill xmlns:a="http://schemas.openxmlformats.org/drawingml/2006/main"/>
         </p:spPr>
         <p:txBody>
-          <a:bodyPr xmlns:a="http://schemas.openxmlformats.org/drawingml/2006/main" wrap="square" lIns="36576" tIns="36576" rIns="36576" bIns="36576" anchor="t">
-            <a:spAutoFit/>
+          <a:bodyPr xmlns:a="http://schemas.openxmlformats.org/drawingml/2006/main" wrap="none" lIns="36576" tIns="36576" rIns="36576" bIns="36576" anchor="t">
+            <a:normAutofit fontScale="100000"/>
           </a:bodyPr>
           <a:lstStyle xmlns:a="http://schemas.openxmlformats.org/drawingml/2006/main"/>
           <a:p xmlns:a="http://schemas.openxmlformats.org/drawingml/2006/main">
@@ -12743,7 +13193,7 @@
               <a:buNone/>
             </a:pPr>
             <a:r>
-              <a:rPr sz="3400" b="1">
+              <a:rPr sz="2400" b="1">
                 <a:solidFill>
                   <a:srgbClr val="071A2B"/>
                 </a:solidFill>
@@ -12751,7 +13201,7 @@
                 <a:ea typeface="Aptos"/>
                 <a:cs typeface="Aptos"/>
               </a:rPr>
-              <a:t>Kanada on vahva toimitusmyynnin ankkuri, ei retail-arvon luovuttaja</a:t>
+              <a:t>Kanadalla on retail- ja toimitusankkurit</a:t>
             </a:r>
           </a:p>
         </p:txBody>
@@ -12761,7 +13211,7 @@
           <p:cNvPr id="4" name="Rectangle 3">
             <a:extLst xmlns:a="http://schemas.openxmlformats.org/drawingml/2006/main">
               <a:ext uri="{FF2B5EF4-FFF2-40B4-BE49-F238E27FC236}">
-                <a16:creationId xmlns:a16="http://schemas.microsoft.com/office/drawing/2014/main" id="{0FECC00C-3070-4B60-9CCF-50EE0C18AE14}"/>
+                <a16:creationId xmlns:a16="http://schemas.microsoft.com/office/drawing/2014/main" id="{D5505083-CD9B-4D4F-AF50-EE1BE2AF931C}"/>
               </a:ext>
             </a:extLst>
           </p:cNvPr>
@@ -12816,7 +13266,7 @@
           <p:cNvPr id="5" name="Rectangle 4">
             <a:extLst xmlns:a="http://schemas.openxmlformats.org/drawingml/2006/main">
               <a:ext uri="{FF2B5EF4-FFF2-40B4-BE49-F238E27FC236}">
-                <a16:creationId xmlns:a16="http://schemas.microsoft.com/office/drawing/2014/main" id="{66F24FFE-A197-4CE1-815F-8DAEA8FA982B}"/>
+                <a16:creationId xmlns:a16="http://schemas.microsoft.com/office/drawing/2014/main" id="{185DDC3B-F336-457C-A176-307BEED5CF13}"/>
               </a:ext>
             </a:extLst>
           </p:cNvPr>
@@ -12871,7 +13321,7 @@
           <p:cNvPr id="6" name="TextBox 5">
             <a:extLst xmlns:a="http://schemas.openxmlformats.org/drawingml/2006/main">
               <a:ext uri="{FF2B5EF4-FFF2-40B4-BE49-F238E27FC236}">
-                <a16:creationId xmlns:a16="http://schemas.microsoft.com/office/drawing/2014/main" id="{9857003A-7984-4C51-9916-5310A37F5395}"/>
+                <a16:creationId xmlns:a16="http://schemas.microsoft.com/office/drawing/2014/main" id="{599ABAE1-ED46-4093-AD5A-B97A279ADF15}"/>
               </a:ext>
             </a:extLst>
           </p:cNvPr>
@@ -12908,7 +13358,7 @@
                 <a:ea typeface="Aptos"/>
                 <a:cs typeface="Aptos"/>
               </a:rPr>
-              <a:t>Julkinen riippumaton evidenssikooste · 2026.07.24-18 · 2026-07-24 · Lähteet: Health Canada 2024</a:t>
+              <a:t>Julkinen riippumaton evidenssikooste · 2026.07.24-19 · 2026-07-24 · Lähteet: Statistics Canada; Health Canada 2024</a:t>
             </a:r>
           </a:p>
         </p:txBody>
@@ -12918,7 +13368,7 @@
           <p:cNvPr id="7" name="TextBox 6">
             <a:extLst xmlns:a="http://schemas.openxmlformats.org/drawingml/2006/main">
               <a:ext uri="{FF2B5EF4-FFF2-40B4-BE49-F238E27FC236}">
-                <a16:creationId xmlns:a16="http://schemas.microsoft.com/office/drawing/2014/main" id="{3C82145F-4B43-46B5-8BEF-86FA8BBBAE6A}"/>
+                <a16:creationId xmlns:a16="http://schemas.microsoft.com/office/drawing/2014/main" id="{D29D23E7-2FC3-40DC-9448-C841938039CC}"/>
               </a:ext>
             </a:extLst>
           </p:cNvPr>
@@ -12965,7 +13415,7 @@
           <p:cNvPr id="8" name="Rounded Rectangle 7">
             <a:extLst xmlns:a="http://schemas.openxmlformats.org/drawingml/2006/main">
               <a:ext uri="{FF2B5EF4-FFF2-40B4-BE49-F238E27FC236}">
-                <a16:creationId xmlns:a16="http://schemas.microsoft.com/office/drawing/2014/main" id="{1726BF5F-52E0-4884-B230-38722E304ACE}"/>
+                <a16:creationId xmlns:a16="http://schemas.microsoft.com/office/drawing/2014/main" id="{6CB51190-4AD4-4F62-843F-0AADD10B6EEA}"/>
               </a:ext>
             </a:extLst>
           </p:cNvPr>
@@ -13022,7 +13472,7 @@
           <p:cNvPr id="9" name="TextBox 8">
             <a:extLst xmlns:a="http://schemas.openxmlformats.org/drawingml/2006/main">
               <a:ext uri="{FF2B5EF4-FFF2-40B4-BE49-F238E27FC236}">
-                <a16:creationId xmlns:a16="http://schemas.microsoft.com/office/drawing/2014/main" id="{4182089F-0F61-4CCF-BC36-BAF000150478}"/>
+                <a16:creationId xmlns:a16="http://schemas.microsoft.com/office/drawing/2014/main" id="{B01A18B6-1C39-4646-BEC8-9A186AC84B94}"/>
               </a:ext>
             </a:extLst>
           </p:cNvPr>
@@ -13059,7 +13509,7 @@
                 <a:ea typeface="Aptos"/>
                 <a:cs typeface="Aptos"/>
               </a:rPr>
-              <a:t>1,16 mrd CAD</a:t>
+              <a:t>1,219 mrd CAD</a:t>
             </a:r>
           </a:p>
         </p:txBody>
@@ -13069,7 +13519,7 @@
           <p:cNvPr id="10" name="TextBox 9">
             <a:extLst xmlns:a="http://schemas.openxmlformats.org/drawingml/2006/main">
               <a:ext uri="{FF2B5EF4-FFF2-40B4-BE49-F238E27FC236}">
-                <a16:creationId xmlns:a16="http://schemas.microsoft.com/office/drawing/2014/main" id="{F12F1756-6427-43A4-8AE3-86587ADF567E}"/>
+                <a16:creationId xmlns:a16="http://schemas.microsoft.com/office/drawing/2014/main" id="{CCA1D5F5-207E-4450-AB8D-C6551C23A6C8}"/>
               </a:ext>
             </a:extLst>
           </p:cNvPr>
@@ -13081,7 +13531,7 @@
         <p:spPr>
           <a:xfrm xmlns:a="http://schemas.openxmlformats.org/drawingml/2006/main">
             <a:off x="694944" y="2468879"/>
-            <a:ext cx="3203448" cy="438912"/>
+            <a:ext cx="3203448" cy="499872"/>
           </a:xfrm>
           <a:prstGeom xmlns:a="http://schemas.openxmlformats.org/drawingml/2006/main" prst="rect">
             <a:avLst/>
@@ -13106,7 +13556,7 @@
                 <a:ea typeface="Aptos"/>
                 <a:cs typeface="Aptos"/>
               </a:rPr>
-              <a:t>valmistaja-/maahantuojatoimitukset</a:t>
+              <a:t>kuluttajavähittäismyynti · ≈822,6 milj. EUR</a:t>
             </a:r>
           </a:p>
         </p:txBody>
@@ -13116,7 +13566,7 @@
           <p:cNvPr id="11" name="Rounded Rectangle 10">
             <a:extLst xmlns:a="http://schemas.openxmlformats.org/drawingml/2006/main">
               <a:ext uri="{FF2B5EF4-FFF2-40B4-BE49-F238E27FC236}">
-                <a16:creationId xmlns:a16="http://schemas.microsoft.com/office/drawing/2014/main" id="{2E393587-C859-4EF5-BC3A-DFF30EBD5195}"/>
+                <a16:creationId xmlns:a16="http://schemas.microsoft.com/office/drawing/2014/main" id="{0FDCC7B9-F27F-4341-94C7-092B2BABDDE9}"/>
               </a:ext>
             </a:extLst>
           </p:cNvPr>
@@ -13173,7 +13623,7 @@
           <p:cNvPr id="12" name="TextBox 11">
             <a:extLst xmlns:a="http://schemas.openxmlformats.org/drawingml/2006/main">
               <a:ext uri="{FF2B5EF4-FFF2-40B4-BE49-F238E27FC236}">
-                <a16:creationId xmlns:a16="http://schemas.microsoft.com/office/drawing/2014/main" id="{D7FBBA9C-F609-43EE-A944-CC1437C542F9}"/>
+                <a16:creationId xmlns:a16="http://schemas.microsoft.com/office/drawing/2014/main" id="{4FDDEA89-B175-417C-BF12-3971D8C24612}"/>
               </a:ext>
             </a:extLst>
           </p:cNvPr>
@@ -13210,7 +13660,7 @@
                 <a:ea typeface="Aptos"/>
                 <a:cs typeface="Aptos"/>
               </a:rPr>
-              <a:t>118,9 milj. yks.</a:t>
+              <a:t>1,161 mrd CAD</a:t>
             </a:r>
           </a:p>
         </p:txBody>
@@ -13220,7 +13670,7 @@
           <p:cNvPr id="13" name="TextBox 12">
             <a:extLst xmlns:a="http://schemas.openxmlformats.org/drawingml/2006/main">
               <a:ext uri="{FF2B5EF4-FFF2-40B4-BE49-F238E27FC236}">
-                <a16:creationId xmlns:a16="http://schemas.microsoft.com/office/drawing/2014/main" id="{72770B95-87EC-43FF-ABCD-23A3E752FB44}"/>
+                <a16:creationId xmlns:a16="http://schemas.microsoft.com/office/drawing/2014/main" id="{CCC99DF8-C303-49A0-B26B-01287AE66403}"/>
               </a:ext>
             </a:extLst>
           </p:cNvPr>
@@ -13257,7 +13707,7 @@
                 <a:ea typeface="Aptos"/>
                 <a:cs typeface="Aptos"/>
               </a:rPr>
-              <a:t>raportoitua yksikkömäärää</a:t>
+              <a:t>toimitukset · ≈783,2 milj. EUR</a:t>
             </a:r>
           </a:p>
         </p:txBody>
@@ -13267,7 +13717,7 @@
           <p:cNvPr id="14" name="Rounded Rectangle 13">
             <a:extLst xmlns:a="http://schemas.openxmlformats.org/drawingml/2006/main">
               <a:ext uri="{FF2B5EF4-FFF2-40B4-BE49-F238E27FC236}">
-                <a16:creationId xmlns:a16="http://schemas.microsoft.com/office/drawing/2014/main" id="{7A2A7F1D-D097-4F41-9457-EEBF6F18552B}"/>
+                <a16:creationId xmlns:a16="http://schemas.microsoft.com/office/drawing/2014/main" id="{E94A0F28-E331-432A-ADE1-DD7C549B53F0}"/>
               </a:ext>
             </a:extLst>
           </p:cNvPr>
@@ -13324,7 +13774,7 @@
           <p:cNvPr id="15" name="TextBox 14">
             <a:extLst xmlns:a="http://schemas.openxmlformats.org/drawingml/2006/main">
               <a:ext uri="{FF2B5EF4-FFF2-40B4-BE49-F238E27FC236}">
-                <a16:creationId xmlns:a16="http://schemas.microsoft.com/office/drawing/2014/main" id="{343E79DD-F076-4D72-BF80-687BDDCE59C2}"/>
+                <a16:creationId xmlns:a16="http://schemas.microsoft.com/office/drawing/2014/main" id="{E9DE5C48-053A-4827-BC18-4B457500A921}"/>
               </a:ext>
             </a:extLst>
           </p:cNvPr>
@@ -13361,7 +13811,7 @@
                 <a:ea typeface="Aptos"/>
                 <a:cs typeface="Aptos"/>
               </a:rPr>
-              <a:t>1,252 milj. l</a:t>
+              <a:t>118,9 milj. yks.</a:t>
             </a:r>
           </a:p>
         </p:txBody>
@@ -13371,7 +13821,7 @@
           <p:cNvPr id="16" name="TextBox 15">
             <a:extLst xmlns:a="http://schemas.openxmlformats.org/drawingml/2006/main">
               <a:ext uri="{FF2B5EF4-FFF2-40B4-BE49-F238E27FC236}">
-                <a16:creationId xmlns:a16="http://schemas.microsoft.com/office/drawing/2014/main" id="{3598453A-A84F-45A2-A158-6392EDAAE7DA}"/>
+                <a16:creationId xmlns:a16="http://schemas.microsoft.com/office/drawing/2014/main" id="{A11264A3-9B96-4599-8CA3-0A9C9F382839}"/>
               </a:ext>
             </a:extLst>
           </p:cNvPr>
@@ -13408,7 +13858,7 @@
                 <a:ea typeface="Aptos"/>
                 <a:cs typeface="Aptos"/>
               </a:rPr>
-              <a:t>raportoitua nestettä</a:t>
+              <a:t>lisäksi 1,252 milj. litraa</a:t>
             </a:r>
           </a:p>
         </p:txBody>
@@ -13418,7 +13868,7 @@
           <p:cNvPr id="17" name="TextBox 16">
             <a:extLst xmlns:a="http://schemas.openxmlformats.org/drawingml/2006/main">
               <a:ext uri="{FF2B5EF4-FFF2-40B4-BE49-F238E27FC236}">
-                <a16:creationId xmlns:a16="http://schemas.microsoft.com/office/drawing/2014/main" id="{E4059574-9667-44BB-9D5E-886BC4457234}"/>
+                <a16:creationId xmlns:a16="http://schemas.microsoft.com/office/drawing/2014/main" id="{AB80A6F8-CEC3-4CCC-9FD6-72F0DB618392}"/>
               </a:ext>
             </a:extLst>
           </p:cNvPr>
@@ -13430,7 +13880,7 @@
         <p:spPr>
           <a:xfrm xmlns:a="http://schemas.openxmlformats.org/drawingml/2006/main">
             <a:off x="566928" y="3529584"/>
-            <a:ext cx="10927080" cy="786384"/>
+            <a:ext cx="10927080" cy="835152"/>
           </a:xfrm>
           <a:prstGeom xmlns:a="http://schemas.openxmlformats.org/drawingml/2006/main" prst="rect">
             <a:avLst/>
@@ -13455,7 +13905,7 @@
                 <a:ea typeface="Aptos"/>
                 <a:cs typeface="Aptos"/>
               </a:rPr>
-              <a:t>Virallinen koko vuoden toimitusarvo tukku- tai vähittäismyyjille kaikissa neljässä raportoidussa tuoteryhmässä.</a:t>
+              <a:t>Retail ylittää toimitukset 58,4 milj. CAD (+5,03 %); laatu-, kanava-, scope- ja verokysymykset pitävät Kanadan donor-luvun ulkopuolella.</a:t>
             </a:r>
           </a:p>
         </p:txBody>
@@ -13465,7 +13915,7 @@
           <p:cNvPr id="18" name="Rounded Rectangle 17">
             <a:extLst xmlns:a="http://schemas.openxmlformats.org/drawingml/2006/main">
               <a:ext uri="{FF2B5EF4-FFF2-40B4-BE49-F238E27FC236}">
-                <a16:creationId xmlns:a16="http://schemas.microsoft.com/office/drawing/2014/main" id="{9B863FF8-2393-4C13-A951-173722F59321}"/>
+                <a16:creationId xmlns:a16="http://schemas.microsoft.com/office/drawing/2014/main" id="{46DC02E8-CD55-49BF-9969-DB3DCF1C49E1}"/>
               </a:ext>
             </a:extLst>
           </p:cNvPr>
@@ -13522,7 +13972,7 @@
           <p:cNvPr id="19" name="TextBox 18">
             <a:extLst xmlns:a="http://schemas.openxmlformats.org/drawingml/2006/main">
               <a:ext uri="{FF2B5EF4-FFF2-40B4-BE49-F238E27FC236}">
-                <a16:creationId xmlns:a16="http://schemas.microsoft.com/office/drawing/2014/main" id="{F92DF0EE-292A-4117-B0E4-99A63ADF44CA}"/>
+                <a16:creationId xmlns:a16="http://schemas.microsoft.com/office/drawing/2014/main" id="{FD150826-AF91-4176-8F50-DDD9F414D27E}"/>
               </a:ext>
             </a:extLst>
           </p:cNvPr>
@@ -13569,7 +14019,7 @@
           <p:cNvPr id="20" name="TextBox 19">
             <a:extLst xmlns:a="http://schemas.openxmlformats.org/drawingml/2006/main">
               <a:ext uri="{FF2B5EF4-FFF2-40B4-BE49-F238E27FC236}">
-                <a16:creationId xmlns:a16="http://schemas.microsoft.com/office/drawing/2014/main" id="{2D6B587A-2164-4FE7-AFA0-F17971368125}"/>
+                <a16:creationId xmlns:a16="http://schemas.microsoft.com/office/drawing/2014/main" id="{1116151A-BC24-4107-BE21-F18098843473}"/>
               </a:ext>
             </a:extLst>
           </p:cNvPr>
@@ -13581,7 +14031,7 @@
         <p:spPr>
           <a:xfrm xmlns:a="http://schemas.openxmlformats.org/drawingml/2006/main">
             <a:off x="731520" y="5038344"/>
-            <a:ext cx="10597896" cy="521207"/>
+            <a:ext cx="10597896" cy="530352"/>
           </a:xfrm>
           <a:prstGeom xmlns:a="http://schemas.openxmlformats.org/drawingml/2006/main" prst="rect">
             <a:avLst/>
@@ -13606,7 +14056,7 @@
                 <a:ea typeface="Aptos"/>
                 <a:cs typeface="Aptos"/>
               </a:rPr>
-              <a:t>Virallinen koko vuoden toimitusarvo tukku- tai vähittäismyyjille kaikissa neljässä raportoidussa tuoteryhmässä. Kyse ei ole kuluttajien vähittäisostoista, ja Health Canada voi tarkistaa tietoa.</a:t>
+              <a:t>Statistics Canadan retail-sarja ja Health Canadan toimitukset ovat eri tapahtumatasoja. Kaikki vuoden 2024 RCS-neljännekset ovat E-laatua; silta on avoin.</a:t>
             </a:r>
           </a:p>
         </p:txBody>
@@ -13614,7 +14064,7 @@
     </p:spTree>
     <p:extLst>
       <p:ext uri="{BB962C8B-B14F-4D97-AF65-F5344CB8AC3E}">
-        <p14:creationId xmlns:p14="http://schemas.microsoft.com/office/powerpoint/2010/main" val="1578960311"/>
+        <p14:creationId xmlns:p14="http://schemas.microsoft.com/office/powerpoint/2010/main" val="1019636562"/>
       </p:ext>
     </p:extLst>
   </p:cSld>
@@ -13638,7 +14088,7 @@
           <p:cNvPr id="2" name="TextBox 1">
             <a:extLst xmlns:a="http://schemas.openxmlformats.org/drawingml/2006/main">
               <a:ext uri="{FF2B5EF4-FFF2-40B4-BE49-F238E27FC236}">
-                <a16:creationId xmlns:a16="http://schemas.microsoft.com/office/drawing/2014/main" id="{3C4EF214-519C-477E-AF06-F1A74A0FD98C}"/>
+                <a16:creationId xmlns:a16="http://schemas.microsoft.com/office/drawing/2014/main" id="{A98183F8-B096-4163-93D9-20D60281EE05}"/>
               </a:ext>
             </a:extLst>
           </p:cNvPr>
@@ -13685,7 +14135,7 @@
           <p:cNvPr id="3" name="TextBox 2">
             <a:extLst xmlns:a="http://schemas.openxmlformats.org/drawingml/2006/main">
               <a:ext uri="{FF2B5EF4-FFF2-40B4-BE49-F238E27FC236}">
-                <a16:creationId xmlns:a16="http://schemas.microsoft.com/office/drawing/2014/main" id="{7298FC5E-2F8B-45D5-AF90-9DC967B08E33}"/>
+                <a16:creationId xmlns:a16="http://schemas.microsoft.com/office/drawing/2014/main" id="{B49EADFB-84E9-4C79-8B2A-4DDE3CD4DA53}"/>
               </a:ext>
             </a:extLst>
           </p:cNvPr>
@@ -13732,7 +14182,7 @@
           <p:cNvPr id="4" name="Rectangle 3">
             <a:extLst xmlns:a="http://schemas.openxmlformats.org/drawingml/2006/main">
               <a:ext uri="{FF2B5EF4-FFF2-40B4-BE49-F238E27FC236}">
-                <a16:creationId xmlns:a16="http://schemas.microsoft.com/office/drawing/2014/main" id="{1879D9E9-371D-4F5E-9BE6-2065D72C2D26}"/>
+                <a16:creationId xmlns:a16="http://schemas.microsoft.com/office/drawing/2014/main" id="{E3BC0AB6-3D0A-4B85-9DBC-C82C149788CA}"/>
               </a:ext>
             </a:extLst>
           </p:cNvPr>
@@ -13787,7 +14237,7 @@
           <p:cNvPr id="5" name="Rectangle 4">
             <a:extLst xmlns:a="http://schemas.openxmlformats.org/drawingml/2006/main">
               <a:ext uri="{FF2B5EF4-FFF2-40B4-BE49-F238E27FC236}">
-                <a16:creationId xmlns:a16="http://schemas.microsoft.com/office/drawing/2014/main" id="{0552FD33-759A-4478-868C-31434EC2C823}"/>
+                <a16:creationId xmlns:a16="http://schemas.microsoft.com/office/drawing/2014/main" id="{7287ECC9-5E81-498F-AA2A-172F71AFA914}"/>
               </a:ext>
             </a:extLst>
           </p:cNvPr>
@@ -13842,7 +14292,7 @@
           <p:cNvPr id="6" name="TextBox 5">
             <a:extLst xmlns:a="http://schemas.openxmlformats.org/drawingml/2006/main">
               <a:ext uri="{FF2B5EF4-FFF2-40B4-BE49-F238E27FC236}">
-                <a16:creationId xmlns:a16="http://schemas.microsoft.com/office/drawing/2014/main" id="{09AA8A0C-56C2-49ED-95F3-E8E89EA413ED}"/>
+                <a16:creationId xmlns:a16="http://schemas.microsoft.com/office/drawing/2014/main" id="{29D52361-7804-483A-926F-A65D5DF7059C}"/>
               </a:ext>
             </a:extLst>
           </p:cNvPr>
@@ -13879,7 +14329,7 @@
                 <a:ea typeface="Aptos"/>
                 <a:cs typeface="Aptos"/>
               </a:rPr>
-              <a:t>Julkinen riippumaton evidenssikooste · 2026.07.24-18 · 2026-07-24 · Lähteet: Destatis</a:t>
+              <a:t>Julkinen riippumaton evidenssikooste · 2026.07.24-19 · 2026-07-24 · Lähteet: Destatis</a:t>
             </a:r>
           </a:p>
         </p:txBody>
@@ -13889,7 +14339,7 @@
           <p:cNvPr id="7" name="TextBox 6">
             <a:extLst xmlns:a="http://schemas.openxmlformats.org/drawingml/2006/main">
               <a:ext uri="{FF2B5EF4-FFF2-40B4-BE49-F238E27FC236}">
-                <a16:creationId xmlns:a16="http://schemas.microsoft.com/office/drawing/2014/main" id="{B94F151B-DB42-4575-94A1-85442A0BD531}"/>
+                <a16:creationId xmlns:a16="http://schemas.microsoft.com/office/drawing/2014/main" id="{8CC5D511-6E36-46C8-B7D8-292466B5AB68}"/>
               </a:ext>
             </a:extLst>
           </p:cNvPr>
@@ -14402,7 +14852,7 @@
           <p:cNvPr id="9" name="TextBox 8">
             <a:extLst xmlns:a="http://schemas.openxmlformats.org/drawingml/2006/main">
               <a:ext uri="{FF2B5EF4-FFF2-40B4-BE49-F238E27FC236}">
-                <a16:creationId xmlns:a16="http://schemas.microsoft.com/office/drawing/2014/main" id="{68289B53-6F50-4B45-9C71-D5203E5F8E04}"/>
+                <a16:creationId xmlns:a16="http://schemas.microsoft.com/office/drawing/2014/main" id="{B655D55B-B767-447A-A8FE-DB224E51FFB4}"/>
               </a:ext>
             </a:extLst>
           </p:cNvPr>
@@ -14447,7 +14897,7 @@
     </p:spTree>
     <p:extLst>
       <p:ext uri="{BB962C8B-B14F-4D97-AF65-F5344CB8AC3E}">
-        <p14:creationId xmlns:p14="http://schemas.microsoft.com/office/powerpoint/2010/main" val="2058753743"/>
+        <p14:creationId xmlns:p14="http://schemas.microsoft.com/office/powerpoint/2010/main" val="395189689"/>
       </p:ext>
     </p:extLst>
   </p:cSld>
@@ -14471,7 +14921,7 @@
           <p:cNvPr id="2" name="TextBox 1">
             <a:extLst xmlns:a="http://schemas.openxmlformats.org/drawingml/2006/main">
               <a:ext uri="{FF2B5EF4-FFF2-40B4-BE49-F238E27FC236}">
-                <a16:creationId xmlns:a16="http://schemas.microsoft.com/office/drawing/2014/main" id="{40787B03-E00D-4712-8091-6D64A6DFA8E4}"/>
+                <a16:creationId xmlns:a16="http://schemas.microsoft.com/office/drawing/2014/main" id="{EA777F8F-69D7-4A18-B121-B6CAA205D50A}"/>
               </a:ext>
             </a:extLst>
           </p:cNvPr>
@@ -14518,7 +14968,7 @@
           <p:cNvPr id="3" name="TextBox 2">
             <a:extLst xmlns:a="http://schemas.openxmlformats.org/drawingml/2006/main">
               <a:ext uri="{FF2B5EF4-FFF2-40B4-BE49-F238E27FC236}">
-                <a16:creationId xmlns:a16="http://schemas.microsoft.com/office/drawing/2014/main" id="{A802A203-F971-4231-A1C4-C825284D2007}"/>
+                <a16:creationId xmlns:a16="http://schemas.microsoft.com/office/drawing/2014/main" id="{5BEAE664-747E-4A7D-8500-B9F13DD72FDB}"/>
               </a:ext>
             </a:extLst>
           </p:cNvPr>
@@ -14530,7 +14980,7 @@
         <p:spPr>
           <a:xfrm xmlns:a="http://schemas.openxmlformats.org/drawingml/2006/main">
             <a:off x="502920" y="621792"/>
-            <a:ext cx="11109960" cy="548640"/>
+            <a:ext cx="11109960" cy="591312"/>
           </a:xfrm>
           <a:prstGeom xmlns:a="http://schemas.openxmlformats.org/drawingml/2006/main" prst="rect">
             <a:avLst/>
@@ -14538,8 +14988,8 @@
           <a:noFill xmlns:a="http://schemas.openxmlformats.org/drawingml/2006/main"/>
         </p:spPr>
         <p:txBody>
-          <a:bodyPr xmlns:a="http://schemas.openxmlformats.org/drawingml/2006/main" wrap="square" lIns="36576" tIns="36576" rIns="36576" bIns="36576" anchor="t">
-            <a:spAutoFit/>
+          <a:bodyPr xmlns:a="http://schemas.openxmlformats.org/drawingml/2006/main" wrap="none" lIns="36576" tIns="36576" rIns="36576" bIns="36576" anchor="t">
+            <a:normAutofit fontScale="100000"/>
           </a:bodyPr>
           <a:lstStyle xmlns:a="http://schemas.openxmlformats.org/drawingml/2006/main"/>
           <a:p xmlns:a="http://schemas.openxmlformats.org/drawingml/2006/main">
@@ -14547,7 +14997,7 @@
               <a:buNone/>
             </a:pPr>
             <a:r>
-              <a:rPr sz="3400" b="1">
+              <a:rPr sz="2400" b="1">
                 <a:solidFill>
                   <a:srgbClr val="071A2B"/>
                 </a:solidFill>
@@ -14555,7 +15005,7 @@
                 <a:ea typeface="Aptos"/>
                 <a:cs typeface="Aptos"/>
               </a:rPr>
-              <a:t>Saksan mallihaitari näyttää herkkyyden — ei havaittua myyntiä</a:t>
+              <a:t>Saksan malli näyttää herkkyyden, ei myyntiä</a:t>
             </a:r>
           </a:p>
         </p:txBody>
@@ -14565,7 +15015,7 @@
           <p:cNvPr id="4" name="Rectangle 3">
             <a:extLst xmlns:a="http://schemas.openxmlformats.org/drawingml/2006/main">
               <a:ext uri="{FF2B5EF4-FFF2-40B4-BE49-F238E27FC236}">
-                <a16:creationId xmlns:a16="http://schemas.microsoft.com/office/drawing/2014/main" id="{BB6C7745-FFD0-441B-B7E5-665B76111767}"/>
+                <a16:creationId xmlns:a16="http://schemas.microsoft.com/office/drawing/2014/main" id="{7AFC5ADD-494E-4E93-9950-47CAF41AB67F}"/>
               </a:ext>
             </a:extLst>
           </p:cNvPr>
@@ -14620,7 +15070,7 @@
           <p:cNvPr id="5" name="Rectangle 4">
             <a:extLst xmlns:a="http://schemas.openxmlformats.org/drawingml/2006/main">
               <a:ext uri="{FF2B5EF4-FFF2-40B4-BE49-F238E27FC236}">
-                <a16:creationId xmlns:a16="http://schemas.microsoft.com/office/drawing/2014/main" id="{890D5870-8EEC-4A93-9CCA-D402D275B8DE}"/>
+                <a16:creationId xmlns:a16="http://schemas.microsoft.com/office/drawing/2014/main" id="{81817B9A-CFAB-4E33-8B5E-5ADB471DB0CE}"/>
               </a:ext>
             </a:extLst>
           </p:cNvPr>
@@ -14675,7 +15125,7 @@
           <p:cNvPr id="6" name="TextBox 5">
             <a:extLst xmlns:a="http://schemas.openxmlformats.org/drawingml/2006/main">
               <a:ext uri="{FF2B5EF4-FFF2-40B4-BE49-F238E27FC236}">
-                <a16:creationId xmlns:a16="http://schemas.microsoft.com/office/drawing/2014/main" id="{A7513142-924D-4149-8A49-698186CE3895}"/>
+                <a16:creationId xmlns:a16="http://schemas.microsoft.com/office/drawing/2014/main" id="{1D1981CA-497D-4939-9387-00756C365229}"/>
               </a:ext>
             </a:extLst>
           </p:cNvPr>
@@ -14712,7 +15162,7 @@
                 <a:ea typeface="Aptos"/>
                 <a:cs typeface="Aptos"/>
               </a:rPr>
-              <a:t>Julkinen riippumaton evidenssikooste · 2026.07.24-18 · 2026-07-24 · Lähteet: Destatis; inTaste.de</a:t>
+              <a:t>Julkinen riippumaton evidenssikooste · 2026.07.24-19 · 2026-07-24 · Lähteet: Destatis; inTaste.de</a:t>
             </a:r>
           </a:p>
         </p:txBody>
@@ -14722,7 +15172,7 @@
           <p:cNvPr id="7" name="TextBox 6">
             <a:extLst xmlns:a="http://schemas.openxmlformats.org/drawingml/2006/main">
               <a:ext uri="{FF2B5EF4-FFF2-40B4-BE49-F238E27FC236}">
-                <a16:creationId xmlns:a16="http://schemas.microsoft.com/office/drawing/2014/main" id="{D06B22E0-5D45-4901-8038-C1E64E13505E}"/>
+                <a16:creationId xmlns:a16="http://schemas.microsoft.com/office/drawing/2014/main" id="{87062B3A-B2B0-414D-985C-4CABFFD1712E}"/>
               </a:ext>
             </a:extLst>
           </p:cNvPr>
@@ -14769,7 +15219,7 @@
           <p:cNvPr id="8" name="Rounded Rectangle 7">
             <a:extLst xmlns:a="http://schemas.openxmlformats.org/drawingml/2006/main">
               <a:ext uri="{FF2B5EF4-FFF2-40B4-BE49-F238E27FC236}">
-                <a16:creationId xmlns:a16="http://schemas.microsoft.com/office/drawing/2014/main" id="{8A0F2E25-4A11-46F0-AB80-D6739399B25A}"/>
+                <a16:creationId xmlns:a16="http://schemas.microsoft.com/office/drawing/2014/main" id="{323C05E8-DFE7-43CB-9707-4BA0F8E70445}"/>
               </a:ext>
             </a:extLst>
           </p:cNvPr>
@@ -14826,7 +15276,7 @@
           <p:cNvPr id="9" name="TextBox 8">
             <a:extLst xmlns:a="http://schemas.openxmlformats.org/drawingml/2006/main">
               <a:ext uri="{FF2B5EF4-FFF2-40B4-BE49-F238E27FC236}">
-                <a16:creationId xmlns:a16="http://schemas.microsoft.com/office/drawing/2014/main" id="{1C3EB1CA-F67D-4827-9308-0666D73CCC1D}"/>
+                <a16:creationId xmlns:a16="http://schemas.microsoft.com/office/drawing/2014/main" id="{4D8F72F4-7D5E-4F36-9D4F-8ACEAFB88097}"/>
               </a:ext>
             </a:extLst>
           </p:cNvPr>
@@ -14873,7 +15323,7 @@
           <p:cNvPr id="10" name="TextBox 9">
             <a:extLst xmlns:a="http://schemas.openxmlformats.org/drawingml/2006/main">
               <a:ext uri="{FF2B5EF4-FFF2-40B4-BE49-F238E27FC236}">
-                <a16:creationId xmlns:a16="http://schemas.microsoft.com/office/drawing/2014/main" id="{7C476E61-38F1-4BFC-8F83-CDE8321D2331}"/>
+                <a16:creationId xmlns:a16="http://schemas.microsoft.com/office/drawing/2014/main" id="{F652428F-23DC-421E-A8F3-8C547DDDBDA1}"/>
               </a:ext>
             </a:extLst>
           </p:cNvPr>
@@ -14920,7 +15370,7 @@
           <p:cNvPr id="11" name="Rounded Rectangle 10">
             <a:extLst xmlns:a="http://schemas.openxmlformats.org/drawingml/2006/main">
               <a:ext uri="{FF2B5EF4-FFF2-40B4-BE49-F238E27FC236}">
-                <a16:creationId xmlns:a16="http://schemas.microsoft.com/office/drawing/2014/main" id="{14621808-A7F2-4DA5-8ACF-D6012F0206D5}"/>
+                <a16:creationId xmlns:a16="http://schemas.microsoft.com/office/drawing/2014/main" id="{3D2C3854-90BA-4C88-90B5-81D26D77E3F7}"/>
               </a:ext>
             </a:extLst>
           </p:cNvPr>
@@ -14977,7 +15427,7 @@
           <p:cNvPr id="12" name="TextBox 11">
             <a:extLst xmlns:a="http://schemas.openxmlformats.org/drawingml/2006/main">
               <a:ext uri="{FF2B5EF4-FFF2-40B4-BE49-F238E27FC236}">
-                <a16:creationId xmlns:a16="http://schemas.microsoft.com/office/drawing/2014/main" id="{E4A96BF7-F18F-4F90-BF2D-2301178DD2B4}"/>
+                <a16:creationId xmlns:a16="http://schemas.microsoft.com/office/drawing/2014/main" id="{3C78407F-2C9E-4E54-8DA2-DA5FFA7FD153}"/>
               </a:ext>
             </a:extLst>
           </p:cNvPr>
@@ -15024,7 +15474,7 @@
           <p:cNvPr id="13" name="TextBox 12">
             <a:extLst xmlns:a="http://schemas.openxmlformats.org/drawingml/2006/main">
               <a:ext uri="{FF2B5EF4-FFF2-40B4-BE49-F238E27FC236}">
-                <a16:creationId xmlns:a16="http://schemas.microsoft.com/office/drawing/2014/main" id="{25080D8F-24E3-4B3D-98A9-88005E04AA39}"/>
+                <a16:creationId xmlns:a16="http://schemas.microsoft.com/office/drawing/2014/main" id="{A171EF63-E6DE-43E0-9638-7838273063CC}"/>
               </a:ext>
             </a:extLst>
           </p:cNvPr>
@@ -15071,7 +15521,7 @@
           <p:cNvPr id="14" name="Rounded Rectangle 13">
             <a:extLst xmlns:a="http://schemas.openxmlformats.org/drawingml/2006/main">
               <a:ext uri="{FF2B5EF4-FFF2-40B4-BE49-F238E27FC236}">
-                <a16:creationId xmlns:a16="http://schemas.microsoft.com/office/drawing/2014/main" id="{1C577106-2B39-4BDC-A2AD-2CF9BAB06004}"/>
+                <a16:creationId xmlns:a16="http://schemas.microsoft.com/office/drawing/2014/main" id="{57C34C0C-D689-4ECE-BB1F-B4BA59975C22}"/>
               </a:ext>
             </a:extLst>
           </p:cNvPr>
@@ -15128,7 +15578,7 @@
           <p:cNvPr id="15" name="TextBox 14">
             <a:extLst xmlns:a="http://schemas.openxmlformats.org/drawingml/2006/main">
               <a:ext uri="{FF2B5EF4-FFF2-40B4-BE49-F238E27FC236}">
-                <a16:creationId xmlns:a16="http://schemas.microsoft.com/office/drawing/2014/main" id="{7C289441-01E1-480A-943D-21A4EBB0D2B4}"/>
+                <a16:creationId xmlns:a16="http://schemas.microsoft.com/office/drawing/2014/main" id="{01092048-2A57-429A-9558-FCE030E8CB9A}"/>
               </a:ext>
             </a:extLst>
           </p:cNvPr>
@@ -15175,7 +15625,7 @@
           <p:cNvPr id="16" name="TextBox 15">
             <a:extLst xmlns:a="http://schemas.openxmlformats.org/drawingml/2006/main">
               <a:ext uri="{FF2B5EF4-FFF2-40B4-BE49-F238E27FC236}">
-                <a16:creationId xmlns:a16="http://schemas.microsoft.com/office/drawing/2014/main" id="{D514E86B-2C94-4BD1-877E-808AB31D2D48}"/>
+                <a16:creationId xmlns:a16="http://schemas.microsoft.com/office/drawing/2014/main" id="{9B78F24F-3E1B-44E5-88FE-F98D4F5FEA46}"/>
               </a:ext>
             </a:extLst>
           </p:cNvPr>
@@ -15222,7 +15672,7 @@
           <p:cNvPr id="17" name="TextBox 16">
             <a:extLst xmlns:a="http://schemas.openxmlformats.org/drawingml/2006/main">
               <a:ext uri="{FF2B5EF4-FFF2-40B4-BE49-F238E27FC236}">
-                <a16:creationId xmlns:a16="http://schemas.microsoft.com/office/drawing/2014/main" id="{57727EF4-5A82-406B-8FA7-0C5211AF2189}"/>
+                <a16:creationId xmlns:a16="http://schemas.microsoft.com/office/drawing/2014/main" id="{241AF807-BAD6-4CED-8BDC-A8EB46773DDB}"/>
               </a:ext>
             </a:extLst>
           </p:cNvPr>
@@ -15269,7 +15719,7 @@
           <p:cNvPr id="18" name="Rounded Rectangle 17">
             <a:extLst xmlns:a="http://schemas.openxmlformats.org/drawingml/2006/main">
               <a:ext uri="{FF2B5EF4-FFF2-40B4-BE49-F238E27FC236}">
-                <a16:creationId xmlns:a16="http://schemas.microsoft.com/office/drawing/2014/main" id="{8114CB21-2D70-420C-ABC3-D6D320C3C6E7}"/>
+                <a16:creationId xmlns:a16="http://schemas.microsoft.com/office/drawing/2014/main" id="{C9DFBBCA-4C52-4E59-8241-D7016E68862E}"/>
               </a:ext>
             </a:extLst>
           </p:cNvPr>
@@ -15326,7 +15776,7 @@
           <p:cNvPr id="19" name="TextBox 18">
             <a:extLst xmlns:a="http://schemas.openxmlformats.org/drawingml/2006/main">
               <a:ext uri="{FF2B5EF4-FFF2-40B4-BE49-F238E27FC236}">
-                <a16:creationId xmlns:a16="http://schemas.microsoft.com/office/drawing/2014/main" id="{B960C7DA-9822-41F1-84E6-51781BB0E247}"/>
+                <a16:creationId xmlns:a16="http://schemas.microsoft.com/office/drawing/2014/main" id="{B30EBAA5-DFBF-41EB-81B5-0323C92BDCF6}"/>
               </a:ext>
             </a:extLst>
           </p:cNvPr>
@@ -15373,7 +15823,7 @@
           <p:cNvPr id="20" name="TextBox 19">
             <a:extLst xmlns:a="http://schemas.openxmlformats.org/drawingml/2006/main">
               <a:ext uri="{FF2B5EF4-FFF2-40B4-BE49-F238E27FC236}">
-                <a16:creationId xmlns:a16="http://schemas.microsoft.com/office/drawing/2014/main" id="{AC70871C-A333-40FC-8489-5CF4BB465FC3}"/>
+                <a16:creationId xmlns:a16="http://schemas.microsoft.com/office/drawing/2014/main" id="{D9028757-7962-4D86-BCDD-A61790CCD465}"/>
               </a:ext>
             </a:extLst>
           </p:cNvPr>
@@ -15385,7 +15835,7 @@
         <p:spPr>
           <a:xfrm xmlns:a="http://schemas.openxmlformats.org/drawingml/2006/main">
             <a:off x="731520" y="5038344"/>
-            <a:ext cx="10597896" cy="521207"/>
+            <a:ext cx="10597896" cy="530352"/>
           </a:xfrm>
           <a:prstGeom xmlns:a="http://schemas.openxmlformats.org/drawingml/2006/main" prst="rect">
             <a:avLst/>
@@ -15402,7 +15852,7 @@
               <a:buNone/>
             </a:pPr>
             <a:r>
-              <a:rPr sz="1500" b="0">
+              <a:rPr sz="1350" b="0">
                 <a:solidFill>
                   <a:srgbClr val="182935"/>
                 </a:solidFill>
@@ -15410,7 +15860,7 @@
                 <a:ea typeface="Aptos"/>
                 <a:cs typeface="Aptos"/>
               </a:rPr>
-              <a:t>Ei havaittua myyntiä. Laskelma kertoo vuoden 2025 alustavan verotetun nestemäärän kolmella yksittäisellä saksalaisen verkkokaupan vuoden 2026 hinnalla. Vuosiero, yhden kaupan hintakori, tuotejakauma ja pois rajatut tuoteryhmät tekevät luottamustasosta matalan.</a:t>
+              <a:t>Ei havaittua myyntiä. Laskelma käyttää vuoden 2025 alustavaa verotettua nestemäärää ja kolmea verkkokaupan vuoden 2026 hintaa. Rajattu tuotejakauma ja poikkeava ajankohta pitävät luottamustason matalana.</a:t>
             </a:r>
           </a:p>
         </p:txBody>
@@ -15418,7 +15868,7 @@
     </p:spTree>
     <p:extLst>
       <p:ext uri="{BB962C8B-B14F-4D97-AF65-F5344CB8AC3E}">
-        <p14:creationId xmlns:p14="http://schemas.microsoft.com/office/powerpoint/2010/main" val="998220351"/>
+        <p14:creationId xmlns:p14="http://schemas.microsoft.com/office/powerpoint/2010/main" val="556428308"/>
       </p:ext>
     </p:extLst>
   </p:cSld>
@@ -15442,7 +15892,7 @@
           <p:cNvPr id="2" name="TextBox 1">
             <a:extLst xmlns:a="http://schemas.openxmlformats.org/drawingml/2006/main">
               <a:ext uri="{FF2B5EF4-FFF2-40B4-BE49-F238E27FC236}">
-                <a16:creationId xmlns:a16="http://schemas.microsoft.com/office/drawing/2014/main" id="{EEF2CC67-BB33-4600-89C7-F620148275E7}"/>
+                <a16:creationId xmlns:a16="http://schemas.microsoft.com/office/drawing/2014/main" id="{6CF64D06-77D1-4129-9C37-50875E30E81E}"/>
               </a:ext>
             </a:extLst>
           </p:cNvPr>
@@ -15489,7 +15939,7 @@
           <p:cNvPr id="3" name="TextBox 2">
             <a:extLst xmlns:a="http://schemas.openxmlformats.org/drawingml/2006/main">
               <a:ext uri="{FF2B5EF4-FFF2-40B4-BE49-F238E27FC236}">
-                <a16:creationId xmlns:a16="http://schemas.microsoft.com/office/drawing/2014/main" id="{D6E08E3C-11E3-4867-8061-FFDB7E2983EA}"/>
+                <a16:creationId xmlns:a16="http://schemas.microsoft.com/office/drawing/2014/main" id="{DEB2CF04-0E23-4583-B5EB-044A183E5120}"/>
               </a:ext>
             </a:extLst>
           </p:cNvPr>
@@ -15501,7 +15951,7 @@
         <p:spPr>
           <a:xfrm xmlns:a="http://schemas.openxmlformats.org/drawingml/2006/main">
             <a:off x="502920" y="621792"/>
-            <a:ext cx="11109960" cy="548640"/>
+            <a:ext cx="11109960" cy="591312"/>
           </a:xfrm>
           <a:prstGeom xmlns:a="http://schemas.openxmlformats.org/drawingml/2006/main" prst="rect">
             <a:avLst/>
@@ -15509,8 +15959,8 @@
           <a:noFill xmlns:a="http://schemas.openxmlformats.org/drawingml/2006/main"/>
         </p:spPr>
         <p:txBody>
-          <a:bodyPr xmlns:a="http://schemas.openxmlformats.org/drawingml/2006/main" wrap="square" lIns="36576" tIns="36576" rIns="36576" bIns="36576" anchor="t">
-            <a:spAutoFit/>
+          <a:bodyPr xmlns:a="http://schemas.openxmlformats.org/drawingml/2006/main" wrap="none" lIns="36576" tIns="36576" rIns="36576" bIns="36576" anchor="t">
+            <a:normAutofit fontScale="100000"/>
           </a:bodyPr>
           <a:lstStyle xmlns:a="http://schemas.openxmlformats.org/drawingml/2006/main"/>
           <a:p xmlns:a="http://schemas.openxmlformats.org/drawingml/2006/main">
@@ -15518,7 +15968,7 @@
               <a:buNone/>
             </a:pPr>
             <a:r>
-              <a:rPr sz="3400" b="1">
+              <a:rPr sz="2400" b="1">
                 <a:solidFill>
                   <a:srgbClr val="071A2B"/>
                 </a:solidFill>
@@ -15526,7 +15976,7 @@
                 <a:ea typeface="Aptos"/>
                 <a:cs typeface="Aptos"/>
               </a:rPr>
-              <a:t>Kaupalliset globaaliarviot ovat sanity check, eivät oma estimaatti</a:t>
+              <a:t>Globaalit arviot ovat ristiintarkistus</a:t>
             </a:r>
           </a:p>
         </p:txBody>
@@ -15536,7 +15986,7 @@
           <p:cNvPr id="4" name="Rectangle 3">
             <a:extLst xmlns:a="http://schemas.openxmlformats.org/drawingml/2006/main">
               <a:ext uri="{FF2B5EF4-FFF2-40B4-BE49-F238E27FC236}">
-                <a16:creationId xmlns:a16="http://schemas.microsoft.com/office/drawing/2014/main" id="{3C6D8AE1-5CEB-4B5D-A4A4-18084B367155}"/>
+                <a16:creationId xmlns:a16="http://schemas.microsoft.com/office/drawing/2014/main" id="{55B15C01-D483-4E4F-8197-433E47EBDC6C}"/>
               </a:ext>
             </a:extLst>
           </p:cNvPr>
@@ -15591,7 +16041,7 @@
           <p:cNvPr id="5" name="Rectangle 4">
             <a:extLst xmlns:a="http://schemas.openxmlformats.org/drawingml/2006/main">
               <a:ext uri="{FF2B5EF4-FFF2-40B4-BE49-F238E27FC236}">
-                <a16:creationId xmlns:a16="http://schemas.microsoft.com/office/drawing/2014/main" id="{374F5BF3-94A5-4DF7-8096-46BD01AD9C00}"/>
+                <a16:creationId xmlns:a16="http://schemas.microsoft.com/office/drawing/2014/main" id="{FC38EDA3-406E-41A1-9C75-AB7A4993ADE3}"/>
               </a:ext>
             </a:extLst>
           </p:cNvPr>
@@ -15646,7 +16096,7 @@
           <p:cNvPr id="6" name="TextBox 5">
             <a:extLst xmlns:a="http://schemas.openxmlformats.org/drawingml/2006/main">
               <a:ext uri="{FF2B5EF4-FFF2-40B4-BE49-F238E27FC236}">
-                <a16:creationId xmlns:a16="http://schemas.microsoft.com/office/drawing/2014/main" id="{414D395D-D894-4EA7-80E0-2444D8FE1791}"/>
+                <a16:creationId xmlns:a16="http://schemas.microsoft.com/office/drawing/2014/main" id="{BD2FE5E9-64FB-47E3-BED6-4D132D8CD8D9}"/>
               </a:ext>
             </a:extLst>
           </p:cNvPr>
@@ -15683,7 +16133,7 @@
                 <a:ea typeface="Aptos"/>
                 <a:cs typeface="Aptos"/>
               </a:rPr>
-              <a:t>Julkinen riippumaton evidenssikooste · 2026.07.24-18 · 2026-07-24 · Lähteet: IMARC; GVR; Fortune; European Commission</a:t>
+              <a:t>Julkinen riippumaton evidenssikooste · 2026.07.24-19 · 2026-07-24 · Lähteet: IMARC; GVR; Fortune; European Commission</a:t>
             </a:r>
           </a:p>
         </p:txBody>
@@ -15693,7 +16143,7 @@
           <p:cNvPr id="7" name="TextBox 6">
             <a:extLst xmlns:a="http://schemas.openxmlformats.org/drawingml/2006/main">
               <a:ext uri="{FF2B5EF4-FFF2-40B4-BE49-F238E27FC236}">
-                <a16:creationId xmlns:a16="http://schemas.microsoft.com/office/drawing/2014/main" id="{FC9C7455-53FD-430C-A9DE-DCD1D9A0179E}"/>
+                <a16:creationId xmlns:a16="http://schemas.microsoft.com/office/drawing/2014/main" id="{D286D5D1-90B8-405B-8727-A38C9A2EE0CE}"/>
               </a:ext>
             </a:extLst>
           </p:cNvPr>
@@ -15740,7 +16190,7 @@
           <p:cNvPr id="8" name="Rounded Rectangle 7">
             <a:extLst xmlns:a="http://schemas.openxmlformats.org/drawingml/2006/main">
               <a:ext uri="{FF2B5EF4-FFF2-40B4-BE49-F238E27FC236}">
-                <a16:creationId xmlns:a16="http://schemas.microsoft.com/office/drawing/2014/main" id="{5427F8E6-F398-43FA-AB84-9EB362C78EAA}"/>
+                <a16:creationId xmlns:a16="http://schemas.microsoft.com/office/drawing/2014/main" id="{22DB20F6-6CF7-4354-8528-5FFBD68AB47E}"/>
               </a:ext>
             </a:extLst>
           </p:cNvPr>
@@ -15797,7 +16247,7 @@
           <p:cNvPr id="9" name="TextBox 8">
             <a:extLst xmlns:a="http://schemas.openxmlformats.org/drawingml/2006/main">
               <a:ext uri="{FF2B5EF4-FFF2-40B4-BE49-F238E27FC236}">
-                <a16:creationId xmlns:a16="http://schemas.microsoft.com/office/drawing/2014/main" id="{618463C2-91C0-4322-BCDF-D9F724B1C52A}"/>
+                <a16:creationId xmlns:a16="http://schemas.microsoft.com/office/drawing/2014/main" id="{B1331B94-13E8-40CD-B381-9CC29E9B0605}"/>
               </a:ext>
             </a:extLst>
           </p:cNvPr>
@@ -15817,8 +16267,8 @@
           <a:noFill xmlns:a="http://schemas.openxmlformats.org/drawingml/2006/main"/>
         </p:spPr>
         <p:txBody>
-          <a:bodyPr xmlns:a="http://schemas.openxmlformats.org/drawingml/2006/main" wrap="square" lIns="36576" tIns="36576" rIns="36576" bIns="36576" anchor="t">
-            <a:spAutoFit/>
+          <a:bodyPr xmlns:a="http://schemas.openxmlformats.org/drawingml/2006/main" wrap="none" lIns="36576" tIns="36576" rIns="36576" bIns="36576" anchor="t">
+            <a:normAutofit fontScale="100000"/>
           </a:bodyPr>
           <a:lstStyle xmlns:a="http://schemas.openxmlformats.org/drawingml/2006/main"/>
           <a:p xmlns:a="http://schemas.openxmlformats.org/drawingml/2006/main">
@@ -15826,7 +16276,7 @@
               <a:buNone/>
             </a:pPr>
             <a:r>
-              <a:rPr sz="2700" b="1">
+              <a:rPr sz="2100" b="1">
                 <a:solidFill>
                   <a:srgbClr val="00A4A6"/>
                 </a:solidFill>
@@ -15844,7 +16294,7 @@
           <p:cNvPr id="10" name="TextBox 9">
             <a:extLst xmlns:a="http://schemas.openxmlformats.org/drawingml/2006/main">
               <a:ext uri="{FF2B5EF4-FFF2-40B4-BE49-F238E27FC236}">
-                <a16:creationId xmlns:a16="http://schemas.microsoft.com/office/drawing/2014/main" id="{90D717C0-FE20-402E-9D53-596A88E5F0B1}"/>
+                <a16:creationId xmlns:a16="http://schemas.microsoft.com/office/drawing/2014/main" id="{BD6A2339-1055-4196-AEA2-2F095A02B8F6}"/>
               </a:ext>
             </a:extLst>
           </p:cNvPr>
@@ -15891,7 +16341,7 @@
           <p:cNvPr id="11" name="Rounded Rectangle 10">
             <a:extLst xmlns:a="http://schemas.openxmlformats.org/drawingml/2006/main">
               <a:ext uri="{FF2B5EF4-FFF2-40B4-BE49-F238E27FC236}">
-                <a16:creationId xmlns:a16="http://schemas.microsoft.com/office/drawing/2014/main" id="{0A245022-E7CA-4966-8B23-04EA7FDD824A}"/>
+                <a16:creationId xmlns:a16="http://schemas.microsoft.com/office/drawing/2014/main" id="{8151FB06-C681-49AA-B158-97F2D593DEE4}"/>
               </a:ext>
             </a:extLst>
           </p:cNvPr>
@@ -15948,7 +16398,7 @@
           <p:cNvPr id="12" name="TextBox 11">
             <a:extLst xmlns:a="http://schemas.openxmlformats.org/drawingml/2006/main">
               <a:ext uri="{FF2B5EF4-FFF2-40B4-BE49-F238E27FC236}">
-                <a16:creationId xmlns:a16="http://schemas.microsoft.com/office/drawing/2014/main" id="{81CB4366-F395-43CA-88D1-F3F384E2A589}"/>
+                <a16:creationId xmlns:a16="http://schemas.microsoft.com/office/drawing/2014/main" id="{E0EB87CC-1A83-4E07-9615-EB52A722A5F3}"/>
               </a:ext>
             </a:extLst>
           </p:cNvPr>
@@ -15968,8 +16418,8 @@
           <a:noFill xmlns:a="http://schemas.openxmlformats.org/drawingml/2006/main"/>
         </p:spPr>
         <p:txBody>
-          <a:bodyPr xmlns:a="http://schemas.openxmlformats.org/drawingml/2006/main" wrap="square" lIns="36576" tIns="36576" rIns="36576" bIns="36576" anchor="t">
-            <a:spAutoFit/>
+          <a:bodyPr xmlns:a="http://schemas.openxmlformats.org/drawingml/2006/main" wrap="none" lIns="36576" tIns="36576" rIns="36576" bIns="36576" anchor="t">
+            <a:normAutofit fontScale="100000"/>
           </a:bodyPr>
           <a:lstStyle xmlns:a="http://schemas.openxmlformats.org/drawingml/2006/main"/>
           <a:p xmlns:a="http://schemas.openxmlformats.org/drawingml/2006/main">
@@ -15977,7 +16427,7 @@
               <a:buNone/>
             </a:pPr>
             <a:r>
-              <a:rPr sz="2700" b="1">
+              <a:rPr sz="2100" b="1">
                 <a:solidFill>
                   <a:srgbClr val="0D5F86"/>
                 </a:solidFill>
@@ -15995,7 +16445,7 @@
           <p:cNvPr id="13" name="TextBox 12">
             <a:extLst xmlns:a="http://schemas.openxmlformats.org/drawingml/2006/main">
               <a:ext uri="{FF2B5EF4-FFF2-40B4-BE49-F238E27FC236}">
-                <a16:creationId xmlns:a16="http://schemas.microsoft.com/office/drawing/2014/main" id="{C55D3183-2E6C-4686-8EEB-F0255745C9F9}"/>
+                <a16:creationId xmlns:a16="http://schemas.microsoft.com/office/drawing/2014/main" id="{4C5A1732-7321-4CDE-8D73-A7439AC8BCF2}"/>
               </a:ext>
             </a:extLst>
           </p:cNvPr>
@@ -16042,7 +16492,7 @@
           <p:cNvPr id="14" name="Rounded Rectangle 13">
             <a:extLst xmlns:a="http://schemas.openxmlformats.org/drawingml/2006/main">
               <a:ext uri="{FF2B5EF4-FFF2-40B4-BE49-F238E27FC236}">
-                <a16:creationId xmlns:a16="http://schemas.microsoft.com/office/drawing/2014/main" id="{5F36F1FD-96D2-421D-975F-70116FD2ED73}"/>
+                <a16:creationId xmlns:a16="http://schemas.microsoft.com/office/drawing/2014/main" id="{0CCE0830-D6ED-4303-91CE-1E75E3CA7A19}"/>
               </a:ext>
             </a:extLst>
           </p:cNvPr>
@@ -16099,7 +16549,7 @@
           <p:cNvPr id="15" name="TextBox 14">
             <a:extLst xmlns:a="http://schemas.openxmlformats.org/drawingml/2006/main">
               <a:ext uri="{FF2B5EF4-FFF2-40B4-BE49-F238E27FC236}">
-                <a16:creationId xmlns:a16="http://schemas.microsoft.com/office/drawing/2014/main" id="{675B3A12-A0FF-4CD9-9DF5-F09D3488F7AE}"/>
+                <a16:creationId xmlns:a16="http://schemas.microsoft.com/office/drawing/2014/main" id="{FDC423D7-DEF7-40B6-A45D-99BCB8DDAB2B}"/>
               </a:ext>
             </a:extLst>
           </p:cNvPr>
@@ -16119,8 +16569,8 @@
           <a:noFill xmlns:a="http://schemas.openxmlformats.org/drawingml/2006/main"/>
         </p:spPr>
         <p:txBody>
-          <a:bodyPr xmlns:a="http://schemas.openxmlformats.org/drawingml/2006/main" wrap="square" lIns="36576" tIns="36576" rIns="36576" bIns="36576" anchor="t">
-            <a:spAutoFit/>
+          <a:bodyPr xmlns:a="http://schemas.openxmlformats.org/drawingml/2006/main" wrap="none" lIns="36576" tIns="36576" rIns="36576" bIns="36576" anchor="t">
+            <a:normAutofit fontScale="100000"/>
           </a:bodyPr>
           <a:lstStyle xmlns:a="http://schemas.openxmlformats.org/drawingml/2006/main"/>
           <a:p xmlns:a="http://schemas.openxmlformats.org/drawingml/2006/main">
@@ -16128,7 +16578,7 @@
               <a:buNone/>
             </a:pPr>
             <a:r>
-              <a:rPr sz="2700" b="1">
+              <a:rPr sz="2100" b="1">
                 <a:solidFill>
                   <a:srgbClr val="F4B942"/>
                 </a:solidFill>
@@ -16146,7 +16596,7 @@
           <p:cNvPr id="16" name="TextBox 15">
             <a:extLst xmlns:a="http://schemas.openxmlformats.org/drawingml/2006/main">
               <a:ext uri="{FF2B5EF4-FFF2-40B4-BE49-F238E27FC236}">
-                <a16:creationId xmlns:a16="http://schemas.microsoft.com/office/drawing/2014/main" id="{E0C55099-102F-4F0D-A3AE-B26098B0021C}"/>
+                <a16:creationId xmlns:a16="http://schemas.microsoft.com/office/drawing/2014/main" id="{1E477CB3-65F2-44AB-A226-2D77EC1AE2DE}"/>
               </a:ext>
             </a:extLst>
           </p:cNvPr>
@@ -16193,7 +16643,7 @@
           <p:cNvPr id="17" name="Rounded Rectangle 16">
             <a:extLst xmlns:a="http://schemas.openxmlformats.org/drawingml/2006/main">
               <a:ext uri="{FF2B5EF4-FFF2-40B4-BE49-F238E27FC236}">
-                <a16:creationId xmlns:a16="http://schemas.microsoft.com/office/drawing/2014/main" id="{297461E5-9956-484A-A725-8CFCDBCBB686}"/>
+                <a16:creationId xmlns:a16="http://schemas.microsoft.com/office/drawing/2014/main" id="{E7991B17-0873-47D1-B20A-F8A653BC91D4}"/>
               </a:ext>
             </a:extLst>
           </p:cNvPr>
@@ -16250,7 +16700,7 @@
           <p:cNvPr id="18" name="TextBox 17">
             <a:extLst xmlns:a="http://schemas.openxmlformats.org/drawingml/2006/main">
               <a:ext uri="{FF2B5EF4-FFF2-40B4-BE49-F238E27FC236}">
-                <a16:creationId xmlns:a16="http://schemas.microsoft.com/office/drawing/2014/main" id="{01C5774A-883C-4BF9-BEDF-17C8E3F573FF}"/>
+                <a16:creationId xmlns:a16="http://schemas.microsoft.com/office/drawing/2014/main" id="{9AE5F793-0680-418A-A2CD-A654E8DC9D94}"/>
               </a:ext>
             </a:extLst>
           </p:cNvPr>
@@ -16270,8 +16720,8 @@
           <a:noFill xmlns:a="http://schemas.openxmlformats.org/drawingml/2006/main"/>
         </p:spPr>
         <p:txBody>
-          <a:bodyPr xmlns:a="http://schemas.openxmlformats.org/drawingml/2006/main" wrap="square" lIns="36576" tIns="36576" rIns="36576" bIns="36576" anchor="t">
-            <a:spAutoFit/>
+          <a:bodyPr xmlns:a="http://schemas.openxmlformats.org/drawingml/2006/main" wrap="none" lIns="36576" tIns="36576" rIns="36576" bIns="36576" anchor="t">
+            <a:normAutofit fontScale="100000"/>
           </a:bodyPr>
           <a:lstStyle xmlns:a="http://schemas.openxmlformats.org/drawingml/2006/main"/>
           <a:p xmlns:a="http://schemas.openxmlformats.org/drawingml/2006/main">
@@ -16279,7 +16729,7 @@
               <a:buNone/>
             </a:pPr>
             <a:r>
-              <a:rPr sz="2700" b="1">
+              <a:rPr sz="2100" b="1">
                 <a:solidFill>
                   <a:srgbClr val="138A72"/>
                 </a:solidFill>
@@ -16297,7 +16747,7 @@
           <p:cNvPr id="19" name="TextBox 18">
             <a:extLst xmlns:a="http://schemas.openxmlformats.org/drawingml/2006/main">
               <a:ext uri="{FF2B5EF4-FFF2-40B4-BE49-F238E27FC236}">
-                <a16:creationId xmlns:a16="http://schemas.microsoft.com/office/drawing/2014/main" id="{A907ABB1-E0B8-4C2A-BBE8-E89409B3E7FB}"/>
+                <a16:creationId xmlns:a16="http://schemas.microsoft.com/office/drawing/2014/main" id="{96A6070B-7725-4984-B271-19BEFE4DE741}"/>
               </a:ext>
             </a:extLst>
           </p:cNvPr>
@@ -16344,7 +16794,7 @@
           <p:cNvPr id="20" name="TextBox 19">
             <a:extLst xmlns:a="http://schemas.openxmlformats.org/drawingml/2006/main">
               <a:ext uri="{FF2B5EF4-FFF2-40B4-BE49-F238E27FC236}">
-                <a16:creationId xmlns:a16="http://schemas.microsoft.com/office/drawing/2014/main" id="{8D89D4F1-C000-49E4-9318-815A1CC31F0E}"/>
+                <a16:creationId xmlns:a16="http://schemas.microsoft.com/office/drawing/2014/main" id="{2E843E04-BD18-41B3-A77E-2CD7D4C8A2D9}"/>
               </a:ext>
             </a:extLst>
           </p:cNvPr>
@@ -16391,7 +16841,7 @@
           <p:cNvPr id="21" name="Rounded Rectangle 20">
             <a:extLst xmlns:a="http://schemas.openxmlformats.org/drawingml/2006/main">
               <a:ext uri="{FF2B5EF4-FFF2-40B4-BE49-F238E27FC236}">
-                <a16:creationId xmlns:a16="http://schemas.microsoft.com/office/drawing/2014/main" id="{34160503-7910-480A-B8B8-49D2436CDA3E}"/>
+                <a16:creationId xmlns:a16="http://schemas.microsoft.com/office/drawing/2014/main" id="{2E7EB8B8-6340-4727-94F6-BB7745832DE6}"/>
               </a:ext>
             </a:extLst>
           </p:cNvPr>
@@ -16448,7 +16898,7 @@
           <p:cNvPr id="22" name="TextBox 21">
             <a:extLst xmlns:a="http://schemas.openxmlformats.org/drawingml/2006/main">
               <a:ext uri="{FF2B5EF4-FFF2-40B4-BE49-F238E27FC236}">
-                <a16:creationId xmlns:a16="http://schemas.microsoft.com/office/drawing/2014/main" id="{E2F48FBD-4893-4834-B6B8-BBEBF60E68D9}"/>
+                <a16:creationId xmlns:a16="http://schemas.microsoft.com/office/drawing/2014/main" id="{50A363B3-68B0-4F0B-8804-01DE5072399D}"/>
               </a:ext>
             </a:extLst>
           </p:cNvPr>
@@ -16495,7 +16945,7 @@
           <p:cNvPr id="23" name="TextBox 22">
             <a:extLst xmlns:a="http://schemas.openxmlformats.org/drawingml/2006/main">
               <a:ext uri="{FF2B5EF4-FFF2-40B4-BE49-F238E27FC236}">
-                <a16:creationId xmlns:a16="http://schemas.microsoft.com/office/drawing/2014/main" id="{3A622566-69C1-484A-9714-05B561FA951B}"/>
+                <a16:creationId xmlns:a16="http://schemas.microsoft.com/office/drawing/2014/main" id="{EBAA7392-2340-4628-A2A1-5262A2687442}"/>
               </a:ext>
             </a:extLst>
           </p:cNvPr>
@@ -16540,7 +16990,7 @@
     </p:spTree>
     <p:extLst>
       <p:ext uri="{BB962C8B-B14F-4D97-AF65-F5344CB8AC3E}">
-        <p14:creationId xmlns:p14="http://schemas.microsoft.com/office/powerpoint/2010/main" val="717175254"/>
+        <p14:creationId xmlns:p14="http://schemas.microsoft.com/office/powerpoint/2010/main" val="2139963025"/>
       </p:ext>
     </p:extLst>
   </p:cSld>
@@ -16564,7 +17014,7 @@
           <p:cNvPr id="2" name="TextBox 1">
             <a:extLst xmlns:a="http://schemas.openxmlformats.org/drawingml/2006/main">
               <a:ext uri="{FF2B5EF4-FFF2-40B4-BE49-F238E27FC236}">
-                <a16:creationId xmlns:a16="http://schemas.microsoft.com/office/drawing/2014/main" id="{0EF3B6FE-413B-40BE-9505-23699E1B1216}"/>
+                <a16:creationId xmlns:a16="http://schemas.microsoft.com/office/drawing/2014/main" id="{DB7F539A-FE76-4BB7-9F90-AE075993E713}"/>
               </a:ext>
             </a:extLst>
           </p:cNvPr>
@@ -16611,7 +17061,7 @@
           <p:cNvPr id="3" name="TextBox 2">
             <a:extLst xmlns:a="http://schemas.openxmlformats.org/drawingml/2006/main">
               <a:ext uri="{FF2B5EF4-FFF2-40B4-BE49-F238E27FC236}">
-                <a16:creationId xmlns:a16="http://schemas.microsoft.com/office/drawing/2014/main" id="{EF2EF38E-816C-4720-9295-CA467CF21CEA}"/>
+                <a16:creationId xmlns:a16="http://schemas.microsoft.com/office/drawing/2014/main" id="{86444AB3-A1C0-4E05-86D7-EE3926EFAACE}"/>
               </a:ext>
             </a:extLst>
           </p:cNvPr>
@@ -16623,7 +17073,7 @@
         <p:spPr>
           <a:xfrm xmlns:a="http://schemas.openxmlformats.org/drawingml/2006/main">
             <a:off x="502920" y="621792"/>
-            <a:ext cx="11109960" cy="548640"/>
+            <a:ext cx="11109960" cy="591312"/>
           </a:xfrm>
           <a:prstGeom xmlns:a="http://schemas.openxmlformats.org/drawingml/2006/main" prst="rect">
             <a:avLst/>
@@ -16631,8 +17081,8 @@
           <a:noFill xmlns:a="http://schemas.openxmlformats.org/drawingml/2006/main"/>
         </p:spPr>
         <p:txBody>
-          <a:bodyPr xmlns:a="http://schemas.openxmlformats.org/drawingml/2006/main" wrap="square" lIns="36576" tIns="36576" rIns="36576" bIns="36576" anchor="t">
-            <a:spAutoFit/>
+          <a:bodyPr xmlns:a="http://schemas.openxmlformats.org/drawingml/2006/main" wrap="none" lIns="36576" tIns="36576" rIns="36576" bIns="36576" anchor="t">
+            <a:normAutofit fontScale="100000"/>
           </a:bodyPr>
           <a:lstStyle xmlns:a="http://schemas.openxmlformats.org/drawingml/2006/main"/>
           <a:p xmlns:a="http://schemas.openxmlformats.org/drawingml/2006/main">
@@ -16640,7 +17090,7 @@
               <a:buNone/>
             </a:pPr>
             <a:r>
-              <a:rPr sz="3400" b="1">
+              <a:rPr sz="2400" b="1">
                 <a:solidFill>
                   <a:srgbClr val="071A2B"/>
                 </a:solidFill>
@@ -16648,7 +17098,7 @@
                 <a:ea typeface="Aptos"/>
                 <a:cs typeface="Aptos"/>
               </a:rPr>
-              <a:t>Hyväksyttävä maailmanestimaatti tarvitsee vähintään 3 yhteensopivaa luovuttajaa</a:t>
+              <a:t>Maailmanestimaatti vaatii vähintään 3 donoria</a:t>
             </a:r>
           </a:p>
         </p:txBody>
@@ -16658,7 +17108,7 @@
           <p:cNvPr id="4" name="Rectangle 3">
             <a:extLst xmlns:a="http://schemas.openxmlformats.org/drawingml/2006/main">
               <a:ext uri="{FF2B5EF4-FFF2-40B4-BE49-F238E27FC236}">
-                <a16:creationId xmlns:a16="http://schemas.microsoft.com/office/drawing/2014/main" id="{D46575FF-1198-4A8C-AAA7-F2C31D5FE0F7}"/>
+                <a16:creationId xmlns:a16="http://schemas.microsoft.com/office/drawing/2014/main" id="{2316DD25-547B-4B80-A79C-F670F6603FE8}"/>
               </a:ext>
             </a:extLst>
           </p:cNvPr>
@@ -16713,7 +17163,7 @@
           <p:cNvPr id="5" name="Rectangle 4">
             <a:extLst xmlns:a="http://schemas.openxmlformats.org/drawingml/2006/main">
               <a:ext uri="{FF2B5EF4-FFF2-40B4-BE49-F238E27FC236}">
-                <a16:creationId xmlns:a16="http://schemas.microsoft.com/office/drawing/2014/main" id="{86BDE356-41F2-4FB0-B905-79C70E22A839}"/>
+                <a16:creationId xmlns:a16="http://schemas.microsoft.com/office/drawing/2014/main" id="{4E385806-F98F-4E9E-8709-783601673B5B}"/>
               </a:ext>
             </a:extLst>
           </p:cNvPr>
@@ -16768,7 +17218,7 @@
           <p:cNvPr id="6" name="TextBox 5">
             <a:extLst xmlns:a="http://schemas.openxmlformats.org/drawingml/2006/main">
               <a:ext uri="{FF2B5EF4-FFF2-40B4-BE49-F238E27FC236}">
-                <a16:creationId xmlns:a16="http://schemas.microsoft.com/office/drawing/2014/main" id="{85D80846-DEA8-4265-99FA-21B8B9910841}"/>
+                <a16:creationId xmlns:a16="http://schemas.microsoft.com/office/drawing/2014/main" id="{F0620C04-13E1-467B-8A00-F0F57BCF838A}"/>
               </a:ext>
             </a:extLst>
           </p:cNvPr>
@@ -16805,7 +17255,7 @@
                 <a:ea typeface="Aptos"/>
                 <a:cs typeface="Aptos"/>
               </a:rPr>
-              <a:t>Julkinen riippumaton evidenssikooste · 2026.07.24-18 · 2026-07-24 · Lähteet: Market-values modelReadiness, donorProtocol ja donorCandidates</a:t>
+              <a:t>Julkinen riippumaton evidenssikooste · 2026.07.24-19 · 2026-07-24 · Lähteet: Market-values modelReadiness, donorProtocol ja donorCandidates</a:t>
             </a:r>
           </a:p>
         </p:txBody>
@@ -16815,7 +17265,7 @@
           <p:cNvPr id="7" name="TextBox 6">
             <a:extLst xmlns:a="http://schemas.openxmlformats.org/drawingml/2006/main">
               <a:ext uri="{FF2B5EF4-FFF2-40B4-BE49-F238E27FC236}">
-                <a16:creationId xmlns:a16="http://schemas.microsoft.com/office/drawing/2014/main" id="{55376115-CDDA-479C-B338-264AA1BDFEB7}"/>
+                <a16:creationId xmlns:a16="http://schemas.microsoft.com/office/drawing/2014/main" id="{9C58FC48-0F6B-439A-B370-D0D7DC3F9039}"/>
               </a:ext>
             </a:extLst>
           </p:cNvPr>
@@ -16862,7 +17312,7 @@
           <p:cNvPr id="8" name="TextBox 7">
             <a:extLst xmlns:a="http://schemas.openxmlformats.org/drawingml/2006/main">
               <a:ext uri="{FF2B5EF4-FFF2-40B4-BE49-F238E27FC236}">
-                <a16:creationId xmlns:a16="http://schemas.microsoft.com/office/drawing/2014/main" id="{F8280878-880D-4BF8-99E6-5C01E8B547A0}"/>
+                <a16:creationId xmlns:a16="http://schemas.microsoft.com/office/drawing/2014/main" id="{FEC2840E-4F86-4952-A29A-C6953B273AFB}"/>
               </a:ext>
             </a:extLst>
           </p:cNvPr>
@@ -16909,7 +17359,7 @@
           <p:cNvPr id="9" name="TextBox 8">
             <a:extLst xmlns:a="http://schemas.openxmlformats.org/drawingml/2006/main">
               <a:ext uri="{FF2B5EF4-FFF2-40B4-BE49-F238E27FC236}">
-                <a16:creationId xmlns:a16="http://schemas.microsoft.com/office/drawing/2014/main" id="{7D2AC3BA-6BB7-474A-B4E6-75764412D52F}"/>
+                <a16:creationId xmlns:a16="http://schemas.microsoft.com/office/drawing/2014/main" id="{F6B2B394-AA48-4F01-9AEF-1F8B4B4B892A}"/>
               </a:ext>
             </a:extLst>
           </p:cNvPr>
@@ -17006,7 +17456,7 @@
           <p:cNvPr id="10" name="Rounded Rectangle 9">
             <a:extLst xmlns:a="http://schemas.openxmlformats.org/drawingml/2006/main">
               <a:ext uri="{FF2B5EF4-FFF2-40B4-BE49-F238E27FC236}">
-                <a16:creationId xmlns:a16="http://schemas.microsoft.com/office/drawing/2014/main" id="{3CDC39B8-FAF5-48D7-BAAB-3C826912A4F1}"/>
+                <a16:creationId xmlns:a16="http://schemas.microsoft.com/office/drawing/2014/main" id="{500BE90F-F88B-40AF-969B-BED533A7EDBE}"/>
               </a:ext>
             </a:extLst>
           </p:cNvPr>
@@ -17063,7 +17513,7 @@
           <p:cNvPr id="11" name="TextBox 10">
             <a:extLst xmlns:a="http://schemas.openxmlformats.org/drawingml/2006/main">
               <a:ext uri="{FF2B5EF4-FFF2-40B4-BE49-F238E27FC236}">
-                <a16:creationId xmlns:a16="http://schemas.microsoft.com/office/drawing/2014/main" id="{313F98E7-CFBC-44E0-83D9-9F5A543E0CF7}"/>
+                <a16:creationId xmlns:a16="http://schemas.microsoft.com/office/drawing/2014/main" id="{1B12D713-5ED5-4F27-AB2E-EB97F6C2628B}"/>
               </a:ext>
             </a:extLst>
           </p:cNvPr>
@@ -17110,7 +17560,7 @@
           <p:cNvPr id="12" name="TextBox 11">
             <a:extLst xmlns:a="http://schemas.openxmlformats.org/drawingml/2006/main">
               <a:ext uri="{FF2B5EF4-FFF2-40B4-BE49-F238E27FC236}">
-                <a16:creationId xmlns:a16="http://schemas.microsoft.com/office/drawing/2014/main" id="{6BA38C91-35F1-4548-9242-24D700E629A4}"/>
+                <a16:creationId xmlns:a16="http://schemas.microsoft.com/office/drawing/2014/main" id="{E0CC1F48-DCDB-4AAB-8E48-DFF8D410DE94}"/>
               </a:ext>
             </a:extLst>
           </p:cNvPr>
@@ -17155,7 +17605,7 @@
     </p:spTree>
     <p:extLst>
       <p:ext uri="{BB962C8B-B14F-4D97-AF65-F5344CB8AC3E}">
-        <p14:creationId xmlns:p14="http://schemas.microsoft.com/office/powerpoint/2010/main" val="512825886"/>
+        <p14:creationId xmlns:p14="http://schemas.microsoft.com/office/powerpoint/2010/main" val="383079312"/>
       </p:ext>
     </p:extLst>
   </p:cSld>
@@ -17179,7 +17629,7 @@
           <p:cNvPr id="2" name="TextBox 1">
             <a:extLst xmlns:a="http://schemas.openxmlformats.org/drawingml/2006/main">
               <a:ext uri="{FF2B5EF4-FFF2-40B4-BE49-F238E27FC236}">
-                <a16:creationId xmlns:a16="http://schemas.microsoft.com/office/drawing/2014/main" id="{11B49FCF-FE88-4E1B-AE0C-60B8C9FD8BC1}"/>
+                <a16:creationId xmlns:a16="http://schemas.microsoft.com/office/drawing/2014/main" id="{77F327A0-2E00-4F19-A4D8-A40EFE5B1BC2}"/>
               </a:ext>
             </a:extLst>
           </p:cNvPr>
@@ -17226,7 +17676,7 @@
           <p:cNvPr id="3" name="TextBox 2">
             <a:extLst xmlns:a="http://schemas.openxmlformats.org/drawingml/2006/main">
               <a:ext uri="{FF2B5EF4-FFF2-40B4-BE49-F238E27FC236}">
-                <a16:creationId xmlns:a16="http://schemas.microsoft.com/office/drawing/2014/main" id="{20D65ED8-2687-4FEB-9F14-16E4B9950D4D}"/>
+                <a16:creationId xmlns:a16="http://schemas.microsoft.com/office/drawing/2014/main" id="{DCBC7872-CD69-4085-99A1-9E627B248ECE}"/>
               </a:ext>
             </a:extLst>
           </p:cNvPr>
@@ -17273,7 +17723,7 @@
           <p:cNvPr id="4" name="Rectangle 3">
             <a:extLst xmlns:a="http://schemas.openxmlformats.org/drawingml/2006/main">
               <a:ext uri="{FF2B5EF4-FFF2-40B4-BE49-F238E27FC236}">
-                <a16:creationId xmlns:a16="http://schemas.microsoft.com/office/drawing/2014/main" id="{E87A7D28-85D1-4E4B-8B24-169AB6E4D4F6}"/>
+                <a16:creationId xmlns:a16="http://schemas.microsoft.com/office/drawing/2014/main" id="{DD96E165-E579-47F2-80C2-12943F53A76B}"/>
               </a:ext>
             </a:extLst>
           </p:cNvPr>
@@ -17328,7 +17778,7 @@
           <p:cNvPr id="5" name="Rectangle 4">
             <a:extLst xmlns:a="http://schemas.openxmlformats.org/drawingml/2006/main">
               <a:ext uri="{FF2B5EF4-FFF2-40B4-BE49-F238E27FC236}">
-                <a16:creationId xmlns:a16="http://schemas.microsoft.com/office/drawing/2014/main" id="{CCC2C5DA-471B-4DBC-A85A-FF05F63E156D}"/>
+                <a16:creationId xmlns:a16="http://schemas.microsoft.com/office/drawing/2014/main" id="{935B6F4D-DD30-4A92-81FA-AD856DDD6FCA}"/>
               </a:ext>
             </a:extLst>
           </p:cNvPr>
@@ -17383,7 +17833,7 @@
           <p:cNvPr id="6" name="TextBox 5">
             <a:extLst xmlns:a="http://schemas.openxmlformats.org/drawingml/2006/main">
               <a:ext uri="{FF2B5EF4-FFF2-40B4-BE49-F238E27FC236}">
-                <a16:creationId xmlns:a16="http://schemas.microsoft.com/office/drawing/2014/main" id="{43C1ACAC-5F21-4955-BDE5-B816E6080771}"/>
+                <a16:creationId xmlns:a16="http://schemas.microsoft.com/office/drawing/2014/main" id="{F2CD20F8-C3D1-4659-86BF-68BC0ACB0885}"/>
               </a:ext>
             </a:extLst>
           </p:cNvPr>
@@ -17420,7 +17870,7 @@
                 <a:ea typeface="Aptos"/>
                 <a:cs typeface="Aptos"/>
               </a:rPr>
-              <a:t>Julkinen riippumaton evidenssikooste · 2026.07.24-18 · 2026-07-24 · Lähteet: WIPO valuation; Evidence Register</a:t>
+              <a:t>Julkinen riippumaton evidenssikooste · 2026.07.24-19 · 2026-07-24 · Lähteet: WIPO valuation; Evidence Register</a:t>
             </a:r>
           </a:p>
         </p:txBody>
@@ -17430,7 +17880,7 @@
           <p:cNvPr id="7" name="TextBox 6">
             <a:extLst xmlns:a="http://schemas.openxmlformats.org/drawingml/2006/main">
               <a:ext uri="{FF2B5EF4-FFF2-40B4-BE49-F238E27FC236}">
-                <a16:creationId xmlns:a16="http://schemas.microsoft.com/office/drawing/2014/main" id="{B3205EC9-1308-4592-B692-3A59ED8E36B0}"/>
+                <a16:creationId xmlns:a16="http://schemas.microsoft.com/office/drawing/2014/main" id="{604DC9FE-B2C9-487A-958A-ADDAD0FF4919}"/>
               </a:ext>
             </a:extLst>
           </p:cNvPr>
@@ -18000,7 +18450,7 @@
           <p:cNvPr id="9" name="TextBox 8">
             <a:extLst xmlns:a="http://schemas.openxmlformats.org/drawingml/2006/main">
               <a:ext uri="{FF2B5EF4-FFF2-40B4-BE49-F238E27FC236}">
-                <a16:creationId xmlns:a16="http://schemas.microsoft.com/office/drawing/2014/main" id="{50AA5226-6F9C-4625-B35A-40FAF0113735}"/>
+                <a16:creationId xmlns:a16="http://schemas.microsoft.com/office/drawing/2014/main" id="{005D4707-E220-4C01-B1F0-CEF0D9F01368}"/>
               </a:ext>
             </a:extLst>
           </p:cNvPr>
@@ -18045,7 +18495,7 @@
     </p:spTree>
     <p:extLst>
       <p:ext uri="{BB962C8B-B14F-4D97-AF65-F5344CB8AC3E}">
-        <p14:creationId xmlns:p14="http://schemas.microsoft.com/office/powerpoint/2010/main" val="7710824"/>
+        <p14:creationId xmlns:p14="http://schemas.microsoft.com/office/powerpoint/2010/main" val="2140578604"/>
       </p:ext>
     </p:extLst>
   </p:cSld>
@@ -18069,7 +18519,7 @@
           <p:cNvPr id="2" name="TextBox 1">
             <a:extLst xmlns:a="http://schemas.openxmlformats.org/drawingml/2006/main">
               <a:ext uri="{FF2B5EF4-FFF2-40B4-BE49-F238E27FC236}">
-                <a16:creationId xmlns:a16="http://schemas.microsoft.com/office/drawing/2014/main" id="{4DCA332B-6093-47A1-B881-EBF30C57DC65}"/>
+                <a16:creationId xmlns:a16="http://schemas.microsoft.com/office/drawing/2014/main" id="{4B0A5F6A-C0B4-47C1-B2E3-DE7F2F424808}"/>
               </a:ext>
             </a:extLst>
           </p:cNvPr>
@@ -18116,7 +18566,7 @@
           <p:cNvPr id="3" name="TextBox 2">
             <a:extLst xmlns:a="http://schemas.openxmlformats.org/drawingml/2006/main">
               <a:ext uri="{FF2B5EF4-FFF2-40B4-BE49-F238E27FC236}">
-                <a16:creationId xmlns:a16="http://schemas.microsoft.com/office/drawing/2014/main" id="{0710EF61-B448-4085-AE69-D4E0C4AECE9C}"/>
+                <a16:creationId xmlns:a16="http://schemas.microsoft.com/office/drawing/2014/main" id="{797ABE53-B0FF-4C60-9128-5616A68DBA99}"/>
               </a:ext>
             </a:extLst>
           </p:cNvPr>
@@ -18128,7 +18578,7 @@
         <p:spPr>
           <a:xfrm xmlns:a="http://schemas.openxmlformats.org/drawingml/2006/main">
             <a:off x="502920" y="621792"/>
-            <a:ext cx="11109960" cy="548640"/>
+            <a:ext cx="11109960" cy="591312"/>
           </a:xfrm>
           <a:prstGeom xmlns:a="http://schemas.openxmlformats.org/drawingml/2006/main" prst="rect">
             <a:avLst/>
@@ -18136,8 +18586,8 @@
           <a:noFill xmlns:a="http://schemas.openxmlformats.org/drawingml/2006/main"/>
         </p:spPr>
         <p:txBody>
-          <a:bodyPr xmlns:a="http://schemas.openxmlformats.org/drawingml/2006/main" wrap="square" lIns="36576" tIns="36576" rIns="36576" bIns="36576" anchor="t">
-            <a:spAutoFit/>
+          <a:bodyPr xmlns:a="http://schemas.openxmlformats.org/drawingml/2006/main" wrap="none" lIns="36576" tIns="36576" rIns="36576" bIns="36576" anchor="t">
+            <a:normAutofit fontScale="100000"/>
           </a:bodyPr>
           <a:lstStyle xmlns:a="http://schemas.openxmlformats.org/drawingml/2006/main"/>
           <a:p xmlns:a="http://schemas.openxmlformats.org/drawingml/2006/main">
@@ -18145,7 +18595,7 @@
               <a:buNone/>
             </a:pPr>
             <a:r>
-              <a:rPr sz="3400" b="1">
+              <a:rPr sz="2400" b="1">
                 <a:solidFill>
                   <a:srgbClr val="071A2B"/>
                 </a:solidFill>
@@ -18153,7 +18603,7 @@
                 <a:ea typeface="Aptos"/>
                 <a:cs typeface="Aptos"/>
               </a:rPr>
-              <a:t>Rahoitettavuus on mahdollisuus, ei nykyinen johtopäätös</a:t>
+              <a:t>Rahoitettavuus on mahdollisuus, ei johtopäätös</a:t>
             </a:r>
           </a:p>
         </p:txBody>
@@ -18163,7 +18613,7 @@
           <p:cNvPr id="4" name="Rectangle 3">
             <a:extLst xmlns:a="http://schemas.openxmlformats.org/drawingml/2006/main">
               <a:ext uri="{FF2B5EF4-FFF2-40B4-BE49-F238E27FC236}">
-                <a16:creationId xmlns:a16="http://schemas.microsoft.com/office/drawing/2014/main" id="{2164593D-5E5F-499D-A889-6746E54A7080}"/>
+                <a16:creationId xmlns:a16="http://schemas.microsoft.com/office/drawing/2014/main" id="{8A0E8A60-B698-4C86-928A-462E5DC9B9AE}"/>
               </a:ext>
             </a:extLst>
           </p:cNvPr>
@@ -18218,7 +18668,7 @@
           <p:cNvPr id="5" name="Rectangle 4">
             <a:extLst xmlns:a="http://schemas.openxmlformats.org/drawingml/2006/main">
               <a:ext uri="{FF2B5EF4-FFF2-40B4-BE49-F238E27FC236}">
-                <a16:creationId xmlns:a16="http://schemas.microsoft.com/office/drawing/2014/main" id="{E6BD66C6-B46D-4100-860F-15EFABC8502E}"/>
+                <a16:creationId xmlns:a16="http://schemas.microsoft.com/office/drawing/2014/main" id="{18F403DF-9122-400C-89A5-E138281E8D78}"/>
               </a:ext>
             </a:extLst>
           </p:cNvPr>
@@ -18273,7 +18723,7 @@
           <p:cNvPr id="6" name="TextBox 5">
             <a:extLst xmlns:a="http://schemas.openxmlformats.org/drawingml/2006/main">
               <a:ext uri="{FF2B5EF4-FFF2-40B4-BE49-F238E27FC236}">
-                <a16:creationId xmlns:a16="http://schemas.microsoft.com/office/drawing/2014/main" id="{C595F0F4-37F6-4530-983D-230566178301}"/>
+                <a16:creationId xmlns:a16="http://schemas.microsoft.com/office/drawing/2014/main" id="{556534B0-977E-4AED-B907-3CD411F04317}"/>
               </a:ext>
             </a:extLst>
           </p:cNvPr>
@@ -18310,7 +18760,7 @@
                 <a:ea typeface="Aptos"/>
                 <a:cs typeface="Aptos"/>
               </a:rPr>
-              <a:t>Julkinen riippumaton evidenssikooste · 2026.07.24-18 · 2026-07-24 · Lähteet: EPO; Saksa — viralliset tuomiot; WIPO</a:t>
+              <a:t>Julkinen riippumaton evidenssikooste · 2026.07.24-19 · 2026-07-24 · Lähteet: EPO; Saksa — viralliset tuomiot; WIPO</a:t>
             </a:r>
           </a:p>
         </p:txBody>
@@ -18320,7 +18770,7 @@
           <p:cNvPr id="7" name="TextBox 6">
             <a:extLst xmlns:a="http://schemas.openxmlformats.org/drawingml/2006/main">
               <a:ext uri="{FF2B5EF4-FFF2-40B4-BE49-F238E27FC236}">
-                <a16:creationId xmlns:a16="http://schemas.microsoft.com/office/drawing/2014/main" id="{ECFA8058-79B0-4CD3-A990-0DBF34ED3C0D}"/>
+                <a16:creationId xmlns:a16="http://schemas.microsoft.com/office/drawing/2014/main" id="{184848A1-CFE8-4FEE-98D9-830FAC2415E9}"/>
               </a:ext>
             </a:extLst>
           </p:cNvPr>
@@ -18367,7 +18817,7 @@
           <p:cNvPr id="8" name="TextBox 7">
             <a:extLst xmlns:a="http://schemas.openxmlformats.org/drawingml/2006/main">
               <a:ext uri="{FF2B5EF4-FFF2-40B4-BE49-F238E27FC236}">
-                <a16:creationId xmlns:a16="http://schemas.microsoft.com/office/drawing/2014/main" id="{9F360381-D57A-4A77-935F-4AA62AC90F51}"/>
+                <a16:creationId xmlns:a16="http://schemas.microsoft.com/office/drawing/2014/main" id="{FE18A172-DA83-45FC-A1DA-1A6F557F9579}"/>
               </a:ext>
             </a:extLst>
           </p:cNvPr>
@@ -18414,7 +18864,7 @@
           <p:cNvPr id="9" name="TextBox 8">
             <a:extLst xmlns:a="http://schemas.openxmlformats.org/drawingml/2006/main">
               <a:ext uri="{FF2B5EF4-FFF2-40B4-BE49-F238E27FC236}">
-                <a16:creationId xmlns:a16="http://schemas.microsoft.com/office/drawing/2014/main" id="{0C39267F-F9CC-4186-8A20-9C3C19F1564D}"/>
+                <a16:creationId xmlns:a16="http://schemas.microsoft.com/office/drawing/2014/main" id="{64976E51-E49A-4544-A84B-8B28906EE392}"/>
               </a:ext>
             </a:extLst>
           </p:cNvPr>
@@ -18479,7 +18929,7 @@
               </a:defRPr>
             </a:pPr>
             <a:r>
-              <a:t>•  Markkina-aineistossa on 27 virallista vuosihavaintoa 7 maasta, mutta luovuttajaportti on 0/3.</a:t>
+              <a:t>•  Markkina-aineistossa on 34 virallista vuosihavaintoa 7 maasta, mutta luovuttajaportti on 0/3.</a:t>
             </a:r>
           </a:p>
           <a:p xmlns:a="http://schemas.openxmlformats.org/drawingml/2006/main">
@@ -18511,7 +18961,7 @@
           <p:cNvPr id="10" name="Rounded Rectangle 9">
             <a:extLst xmlns:a="http://schemas.openxmlformats.org/drawingml/2006/main">
               <a:ext uri="{FF2B5EF4-FFF2-40B4-BE49-F238E27FC236}">
-                <a16:creationId xmlns:a16="http://schemas.microsoft.com/office/drawing/2014/main" id="{1CCEB1FA-4409-4C4D-8127-69875ACACC3B}"/>
+                <a16:creationId xmlns:a16="http://schemas.microsoft.com/office/drawing/2014/main" id="{DA935AC4-0558-4BBA-92A7-3F99E30B8CF9}"/>
               </a:ext>
             </a:extLst>
           </p:cNvPr>
@@ -18568,7 +19018,7 @@
           <p:cNvPr id="11" name="TextBox 10">
             <a:extLst xmlns:a="http://schemas.openxmlformats.org/drawingml/2006/main">
               <a:ext uri="{FF2B5EF4-FFF2-40B4-BE49-F238E27FC236}">
-                <a16:creationId xmlns:a16="http://schemas.microsoft.com/office/drawing/2014/main" id="{35C5C1E6-31C6-4B5C-AC2B-3F9A293D4E38}"/>
+                <a16:creationId xmlns:a16="http://schemas.microsoft.com/office/drawing/2014/main" id="{29CA7040-2FEF-4346-82C9-A0818AB9698B}"/>
               </a:ext>
             </a:extLst>
           </p:cNvPr>
@@ -18615,7 +19065,7 @@
           <p:cNvPr id="12" name="TextBox 11">
             <a:extLst xmlns:a="http://schemas.openxmlformats.org/drawingml/2006/main">
               <a:ext uri="{FF2B5EF4-FFF2-40B4-BE49-F238E27FC236}">
-                <a16:creationId xmlns:a16="http://schemas.microsoft.com/office/drawing/2014/main" id="{D5FFB50F-950E-41BE-8B0A-77CE354FADA6}"/>
+                <a16:creationId xmlns:a16="http://schemas.microsoft.com/office/drawing/2014/main" id="{09434903-4A76-497D-8933-600C7CA4A1C6}"/>
               </a:ext>
             </a:extLst>
           </p:cNvPr>
@@ -18660,7 +19110,7 @@
     </p:spTree>
     <p:extLst>
       <p:ext uri="{BB962C8B-B14F-4D97-AF65-F5344CB8AC3E}">
-        <p14:creationId xmlns:p14="http://schemas.microsoft.com/office/powerpoint/2010/main" val="610052235"/>
+        <p14:creationId xmlns:p14="http://schemas.microsoft.com/office/powerpoint/2010/main" val="1694506201"/>
       </p:ext>
     </p:extLst>
   </p:cSld>
@@ -18684,7 +19134,7 @@
           <p:cNvPr id="2" name="TextBox 1">
             <a:extLst xmlns:a="http://schemas.openxmlformats.org/drawingml/2006/main">
               <a:ext uri="{FF2B5EF4-FFF2-40B4-BE49-F238E27FC236}">
-                <a16:creationId xmlns:a16="http://schemas.microsoft.com/office/drawing/2014/main" id="{3743DA86-7214-40A6-B5D7-779CD9799B24}"/>
+                <a16:creationId xmlns:a16="http://schemas.microsoft.com/office/drawing/2014/main" id="{D4F05FD6-706E-4C03-9A83-112124C321DE}"/>
               </a:ext>
             </a:extLst>
           </p:cNvPr>
@@ -18731,7 +19181,7 @@
           <p:cNvPr id="3" name="TextBox 2">
             <a:extLst xmlns:a="http://schemas.openxmlformats.org/drawingml/2006/main">
               <a:ext uri="{FF2B5EF4-FFF2-40B4-BE49-F238E27FC236}">
-                <a16:creationId xmlns:a16="http://schemas.microsoft.com/office/drawing/2014/main" id="{4F482FF7-F90E-42BD-8FA5-671A1F7F0979}"/>
+                <a16:creationId xmlns:a16="http://schemas.microsoft.com/office/drawing/2014/main" id="{93D66E4F-2109-42BA-BBED-4B8C02BB756D}"/>
               </a:ext>
             </a:extLst>
           </p:cNvPr>
@@ -18743,7 +19193,7 @@
         <p:spPr>
           <a:xfrm xmlns:a="http://schemas.openxmlformats.org/drawingml/2006/main">
             <a:off x="502920" y="621792"/>
-            <a:ext cx="11109960" cy="548640"/>
+            <a:ext cx="11109960" cy="591312"/>
           </a:xfrm>
           <a:prstGeom xmlns:a="http://schemas.openxmlformats.org/drawingml/2006/main" prst="rect">
             <a:avLst/>
@@ -18751,8 +19201,8 @@
           <a:noFill xmlns:a="http://schemas.openxmlformats.org/drawingml/2006/main"/>
         </p:spPr>
         <p:txBody>
-          <a:bodyPr xmlns:a="http://schemas.openxmlformats.org/drawingml/2006/main" wrap="square" lIns="36576" tIns="36576" rIns="36576" bIns="36576" anchor="t">
-            <a:spAutoFit/>
+          <a:bodyPr xmlns:a="http://schemas.openxmlformats.org/drawingml/2006/main" wrap="none" lIns="36576" tIns="36576" rIns="36576" bIns="36576" anchor="t">
+            <a:normAutofit fontScale="100000"/>
           </a:bodyPr>
           <a:lstStyle xmlns:a="http://schemas.openxmlformats.org/drawingml/2006/main"/>
           <a:p xmlns:a="http://schemas.openxmlformats.org/drawingml/2006/main">
@@ -18760,7 +19210,7 @@
               <a:buNone/>
             </a:pPr>
             <a:r>
-              <a:rPr sz="3400" b="1">
+              <a:rPr sz="2400" b="1">
                 <a:solidFill>
                   <a:srgbClr val="071A2B"/>
                 </a:solidFill>
@@ -18768,7 +19218,7 @@
                 <a:ea typeface="Aptos"/>
                 <a:cs typeface="Aptos"/>
               </a:rPr>
-              <a:t>Mahdolliset asiakkaat ovat hypoteeseja, eivät vielä näyttöä</a:t>
+              <a:t>Asiakassegmentit ovat vielä hypoteeseja</a:t>
             </a:r>
           </a:p>
         </p:txBody>
@@ -18778,7 +19228,7 @@
           <p:cNvPr id="4" name="Rectangle 3">
             <a:extLst xmlns:a="http://schemas.openxmlformats.org/drawingml/2006/main">
               <a:ext uri="{FF2B5EF4-FFF2-40B4-BE49-F238E27FC236}">
-                <a16:creationId xmlns:a16="http://schemas.microsoft.com/office/drawing/2014/main" id="{7A856052-92F5-4199-85A6-AE34FC4C92B1}"/>
+                <a16:creationId xmlns:a16="http://schemas.microsoft.com/office/drawing/2014/main" id="{0E127EE5-3474-40D3-BB65-B6ACAFCEB2FA}"/>
               </a:ext>
             </a:extLst>
           </p:cNvPr>
@@ -18833,7 +19283,7 @@
           <p:cNvPr id="5" name="Rectangle 4">
             <a:extLst xmlns:a="http://schemas.openxmlformats.org/drawingml/2006/main">
               <a:ext uri="{FF2B5EF4-FFF2-40B4-BE49-F238E27FC236}">
-                <a16:creationId xmlns:a16="http://schemas.microsoft.com/office/drawing/2014/main" id="{769E7C6F-0DA7-4C38-9ED5-90325AB551C1}"/>
+                <a16:creationId xmlns:a16="http://schemas.microsoft.com/office/drawing/2014/main" id="{5ECCD9A8-260F-421F-A8CA-BDF9B4A7F888}"/>
               </a:ext>
             </a:extLst>
           </p:cNvPr>
@@ -18888,7 +19338,7 @@
           <p:cNvPr id="6" name="TextBox 5">
             <a:extLst xmlns:a="http://schemas.openxmlformats.org/drawingml/2006/main">
               <a:ext uri="{FF2B5EF4-FFF2-40B4-BE49-F238E27FC236}">
-                <a16:creationId xmlns:a16="http://schemas.microsoft.com/office/drawing/2014/main" id="{4AC968E6-56D1-4FFF-9864-B798CAD9A62D}"/>
+                <a16:creationId xmlns:a16="http://schemas.microsoft.com/office/drawing/2014/main" id="{07B8B7EC-24B4-4D20-9599-5724D0BE8B61}"/>
               </a:ext>
             </a:extLst>
           </p:cNvPr>
@@ -18925,7 +19375,7 @@
                 <a:ea typeface="Aptos"/>
                 <a:cs typeface="Aptos"/>
               </a:rPr>
-              <a:t>Julkinen riippumaton evidenssikooste · 2026.07.24-18 · 2026-07-24 · Lähteet: WIPO licensing; IP Finance</a:t>
+              <a:t>Julkinen riippumaton evidenssikooste · 2026.07.24-19 · 2026-07-24 · Lähteet: WIPO licensing; IP Finance</a:t>
             </a:r>
           </a:p>
         </p:txBody>
@@ -18935,7 +19385,7 @@
           <p:cNvPr id="7" name="TextBox 6">
             <a:extLst xmlns:a="http://schemas.openxmlformats.org/drawingml/2006/main">
               <a:ext uri="{FF2B5EF4-FFF2-40B4-BE49-F238E27FC236}">
-                <a16:creationId xmlns:a16="http://schemas.microsoft.com/office/drawing/2014/main" id="{952F7506-CC68-4407-AE9B-33B9E8C50986}"/>
+                <a16:creationId xmlns:a16="http://schemas.microsoft.com/office/drawing/2014/main" id="{983F1872-366A-48E7-96B0-D51212F167E7}"/>
               </a:ext>
             </a:extLst>
           </p:cNvPr>
@@ -18982,7 +19432,7 @@
           <p:cNvPr id="8" name="TextBox 7">
             <a:extLst xmlns:a="http://schemas.openxmlformats.org/drawingml/2006/main">
               <a:ext uri="{FF2B5EF4-FFF2-40B4-BE49-F238E27FC236}">
-                <a16:creationId xmlns:a16="http://schemas.microsoft.com/office/drawing/2014/main" id="{8780DE79-1A2C-4AD8-BA05-2C37489F4F60}"/>
+                <a16:creationId xmlns:a16="http://schemas.microsoft.com/office/drawing/2014/main" id="{8C528B18-DD14-4E7E-9B7F-226D592C3D85}"/>
               </a:ext>
             </a:extLst>
           </p:cNvPr>
@@ -19029,7 +19479,7 @@
           <p:cNvPr id="9" name="TextBox 8">
             <a:extLst xmlns:a="http://schemas.openxmlformats.org/drawingml/2006/main">
               <a:ext uri="{FF2B5EF4-FFF2-40B4-BE49-F238E27FC236}">
-                <a16:creationId xmlns:a16="http://schemas.microsoft.com/office/drawing/2014/main" id="{82281630-420E-44FF-B383-2208E363D5FB}"/>
+                <a16:creationId xmlns:a16="http://schemas.microsoft.com/office/drawing/2014/main" id="{C537561A-927A-4816-AE37-ACC78DFCA517}"/>
               </a:ext>
             </a:extLst>
           </p:cNvPr>
@@ -19126,7 +19576,7 @@
           <p:cNvPr id="10" name="Rounded Rectangle 9">
             <a:extLst xmlns:a="http://schemas.openxmlformats.org/drawingml/2006/main">
               <a:ext uri="{FF2B5EF4-FFF2-40B4-BE49-F238E27FC236}">
-                <a16:creationId xmlns:a16="http://schemas.microsoft.com/office/drawing/2014/main" id="{534D835B-F816-4BB1-BD81-0C6F074E6138}"/>
+                <a16:creationId xmlns:a16="http://schemas.microsoft.com/office/drawing/2014/main" id="{E668767E-AF78-47E6-93A8-35945C6BD00D}"/>
               </a:ext>
             </a:extLst>
           </p:cNvPr>
@@ -19183,7 +19633,7 @@
           <p:cNvPr id="11" name="TextBox 10">
             <a:extLst xmlns:a="http://schemas.openxmlformats.org/drawingml/2006/main">
               <a:ext uri="{FF2B5EF4-FFF2-40B4-BE49-F238E27FC236}">
-                <a16:creationId xmlns:a16="http://schemas.microsoft.com/office/drawing/2014/main" id="{9C9881EC-F9B6-486B-A2B9-6DEFF7645FE4}"/>
+                <a16:creationId xmlns:a16="http://schemas.microsoft.com/office/drawing/2014/main" id="{AD47EEF4-39F7-4342-A643-23EC67882AE9}"/>
               </a:ext>
             </a:extLst>
           </p:cNvPr>
@@ -19230,7 +19680,7 @@
           <p:cNvPr id="12" name="TextBox 11">
             <a:extLst xmlns:a="http://schemas.openxmlformats.org/drawingml/2006/main">
               <a:ext uri="{FF2B5EF4-FFF2-40B4-BE49-F238E27FC236}">
-                <a16:creationId xmlns:a16="http://schemas.microsoft.com/office/drawing/2014/main" id="{DCC1A963-1FC0-4232-BEF9-C6A4F94AB0AD}"/>
+                <a16:creationId xmlns:a16="http://schemas.microsoft.com/office/drawing/2014/main" id="{700F3A12-6A28-41C8-B556-52658E4104BB}"/>
               </a:ext>
             </a:extLst>
           </p:cNvPr>
@@ -19275,7 +19725,7 @@
     </p:spTree>
     <p:extLst>
       <p:ext uri="{BB962C8B-B14F-4D97-AF65-F5344CB8AC3E}">
-        <p14:creationId xmlns:p14="http://schemas.microsoft.com/office/powerpoint/2010/main" val="1176457649"/>
+        <p14:creationId xmlns:p14="http://schemas.microsoft.com/office/powerpoint/2010/main" val="1537991781"/>
       </p:ext>
     </p:extLst>
   </p:cSld>
@@ -19299,7 +19749,7 @@
           <p:cNvPr id="2" name="TextBox 1">
             <a:extLst xmlns:a="http://schemas.openxmlformats.org/drawingml/2006/main">
               <a:ext uri="{FF2B5EF4-FFF2-40B4-BE49-F238E27FC236}">
-                <a16:creationId xmlns:a16="http://schemas.microsoft.com/office/drawing/2014/main" id="{BC1786BC-00B4-417E-8787-74214C80905F}"/>
+                <a16:creationId xmlns:a16="http://schemas.microsoft.com/office/drawing/2014/main" id="{F491AB73-78F4-42C6-A16B-D3E7B1CFCD45}"/>
               </a:ext>
             </a:extLst>
           </p:cNvPr>
@@ -19346,7 +19796,7 @@
           <p:cNvPr id="3" name="TextBox 2">
             <a:extLst xmlns:a="http://schemas.openxmlformats.org/drawingml/2006/main">
               <a:ext uri="{FF2B5EF4-FFF2-40B4-BE49-F238E27FC236}">
-                <a16:creationId xmlns:a16="http://schemas.microsoft.com/office/drawing/2014/main" id="{3D7821C2-1127-4885-AFC4-DEEE2E25BEB4}"/>
+                <a16:creationId xmlns:a16="http://schemas.microsoft.com/office/drawing/2014/main" id="{1408358D-906E-4DDC-8BB5-252A96EE6E48}"/>
               </a:ext>
             </a:extLst>
           </p:cNvPr>
@@ -19393,7 +19843,7 @@
           <p:cNvPr id="4" name="Rectangle 3">
             <a:extLst xmlns:a="http://schemas.openxmlformats.org/drawingml/2006/main">
               <a:ext uri="{FF2B5EF4-FFF2-40B4-BE49-F238E27FC236}">
-                <a16:creationId xmlns:a16="http://schemas.microsoft.com/office/drawing/2014/main" id="{8A2D5FF7-38A4-4F2A-9B1A-4103438C9174}"/>
+                <a16:creationId xmlns:a16="http://schemas.microsoft.com/office/drawing/2014/main" id="{18EC0822-7D97-4380-9C5E-5205060A2512}"/>
               </a:ext>
             </a:extLst>
           </p:cNvPr>
@@ -19448,7 +19898,7 @@
           <p:cNvPr id="5" name="Rectangle 4">
             <a:extLst xmlns:a="http://schemas.openxmlformats.org/drawingml/2006/main">
               <a:ext uri="{FF2B5EF4-FFF2-40B4-BE49-F238E27FC236}">
-                <a16:creationId xmlns:a16="http://schemas.microsoft.com/office/drawing/2014/main" id="{074622A8-7457-4114-BCAA-EDC514E08206}"/>
+                <a16:creationId xmlns:a16="http://schemas.microsoft.com/office/drawing/2014/main" id="{7F6EBA0D-4EF4-4E49-9647-ABDC7EA8680C}"/>
               </a:ext>
             </a:extLst>
           </p:cNvPr>
@@ -19503,7 +19953,7 @@
           <p:cNvPr id="6" name="TextBox 5">
             <a:extLst xmlns:a="http://schemas.openxmlformats.org/drawingml/2006/main">
               <a:ext uri="{FF2B5EF4-FFF2-40B4-BE49-F238E27FC236}">
-                <a16:creationId xmlns:a16="http://schemas.microsoft.com/office/drawing/2014/main" id="{D5E04FAB-F6A2-4E41-88A0-11FA7236980A}"/>
+                <a16:creationId xmlns:a16="http://schemas.microsoft.com/office/drawing/2014/main" id="{6E5530F5-0C07-4DBA-B9B5-E7E3137FC5B5}"/>
               </a:ext>
             </a:extLst>
           </p:cNvPr>
@@ -19540,7 +19990,7 @@
                 <a:ea typeface="Aptos"/>
                 <a:cs typeface="Aptos"/>
               </a:rPr>
-              <a:t>Julkinen riippumaton evidenssikooste · 2026.07.24-18 · 2026-07-24 · Lähteet: Evidence Register; EPO</a:t>
+              <a:t>Julkinen riippumaton evidenssikooste · 2026.07.24-19 · 2026-07-24 · Lähteet: Evidence Register; EPO</a:t>
             </a:r>
           </a:p>
         </p:txBody>
@@ -19550,7 +20000,7 @@
           <p:cNvPr id="7" name="TextBox 6">
             <a:extLst xmlns:a="http://schemas.openxmlformats.org/drawingml/2006/main">
               <a:ext uri="{FF2B5EF4-FFF2-40B4-BE49-F238E27FC236}">
-                <a16:creationId xmlns:a16="http://schemas.microsoft.com/office/drawing/2014/main" id="{8AE4E2B2-05CF-4682-8F61-40F188CFA19A}"/>
+                <a16:creationId xmlns:a16="http://schemas.microsoft.com/office/drawing/2014/main" id="{AD932F5E-19E3-4399-BE01-56CE9D9552AA}"/>
               </a:ext>
             </a:extLst>
           </p:cNvPr>
@@ -20037,7 +20487,7 @@
           <p:cNvPr id="9" name="TextBox 8">
             <a:extLst xmlns:a="http://schemas.openxmlformats.org/drawingml/2006/main">
               <a:ext uri="{FF2B5EF4-FFF2-40B4-BE49-F238E27FC236}">
-                <a16:creationId xmlns:a16="http://schemas.microsoft.com/office/drawing/2014/main" id="{0798AF01-CA50-494C-8FBA-5607EB5A24B8}"/>
+                <a16:creationId xmlns:a16="http://schemas.microsoft.com/office/drawing/2014/main" id="{26B30E72-951F-4D7A-AB56-C9F4EF6581F0}"/>
               </a:ext>
             </a:extLst>
           </p:cNvPr>
@@ -20082,7 +20532,7 @@
     </p:spTree>
     <p:extLst>
       <p:ext uri="{BB962C8B-B14F-4D97-AF65-F5344CB8AC3E}">
-        <p14:creationId xmlns:p14="http://schemas.microsoft.com/office/powerpoint/2010/main" val="337277604"/>
+        <p14:creationId xmlns:p14="http://schemas.microsoft.com/office/powerpoint/2010/main" val="869614383"/>
       </p:ext>
     </p:extLst>
   </p:cSld>
@@ -20106,7 +20556,7 @@
           <p:cNvPr id="2" name="TextBox 1">
             <a:extLst xmlns:a="http://schemas.openxmlformats.org/drawingml/2006/main">
               <a:ext uri="{FF2B5EF4-FFF2-40B4-BE49-F238E27FC236}">
-                <a16:creationId xmlns:a16="http://schemas.microsoft.com/office/drawing/2014/main" id="{98A1C54F-C6A2-4EA0-A1EE-2ED4D27B21D1}"/>
+                <a16:creationId xmlns:a16="http://schemas.microsoft.com/office/drawing/2014/main" id="{CB468B77-C87D-440F-87B2-B39707692365}"/>
               </a:ext>
             </a:extLst>
           </p:cNvPr>
@@ -20153,7 +20603,7 @@
           <p:cNvPr id="3" name="TextBox 2">
             <a:extLst xmlns:a="http://schemas.openxmlformats.org/drawingml/2006/main">
               <a:ext uri="{FF2B5EF4-FFF2-40B4-BE49-F238E27FC236}">
-                <a16:creationId xmlns:a16="http://schemas.microsoft.com/office/drawing/2014/main" id="{82C527E5-CE8B-4A4B-9053-896D2D85D9B3}"/>
+                <a16:creationId xmlns:a16="http://schemas.microsoft.com/office/drawing/2014/main" id="{ECEA9AC0-4376-4901-86D0-B150AC9FF37F}"/>
               </a:ext>
             </a:extLst>
           </p:cNvPr>
@@ -20165,7 +20615,7 @@
         <p:spPr>
           <a:xfrm xmlns:a="http://schemas.openxmlformats.org/drawingml/2006/main">
             <a:off x="502920" y="621792"/>
-            <a:ext cx="11109960" cy="548640"/>
+            <a:ext cx="11109960" cy="591312"/>
           </a:xfrm>
           <a:prstGeom xmlns:a="http://schemas.openxmlformats.org/drawingml/2006/main" prst="rect">
             <a:avLst/>
@@ -20173,8 +20623,8 @@
           <a:noFill xmlns:a="http://schemas.openxmlformats.org/drawingml/2006/main"/>
         </p:spPr>
         <p:txBody>
-          <a:bodyPr xmlns:a="http://schemas.openxmlformats.org/drawingml/2006/main" wrap="square" lIns="36576" tIns="36576" rIns="36576" bIns="36576" anchor="t">
-            <a:spAutoFit/>
+          <a:bodyPr xmlns:a="http://schemas.openxmlformats.org/drawingml/2006/main" wrap="none" lIns="36576" tIns="36576" rIns="36576" bIns="36576" anchor="t">
+            <a:normAutofit fontScale="100000"/>
           </a:bodyPr>
           <a:lstStyle xmlns:a="http://schemas.openxmlformats.org/drawingml/2006/main"/>
           <a:p xmlns:a="http://schemas.openxmlformats.org/drawingml/2006/main">
@@ -20182,7 +20632,7 @@
               <a:buNone/>
             </a:pPr>
             <a:r>
-              <a:rPr sz="3400" b="1">
+              <a:rPr sz="2400" b="1">
                 <a:solidFill>
                   <a:srgbClr val="071A2B"/>
                 </a:solidFill>
@@ -20190,7 +20640,7 @@
                 <a:ea typeface="Aptos"/>
                 <a:cs typeface="Aptos"/>
               </a:rPr>
-              <a:t>Tuotevalidointi rakentuu katkeamattomaksi todisteketjuksi</a:t>
+              <a:t>Tuotevalidointi tarvitsee katkeamattoman ketjun</a:t>
             </a:r>
           </a:p>
         </p:txBody>
@@ -20200,7 +20650,7 @@
           <p:cNvPr id="4" name="Rectangle 3">
             <a:extLst xmlns:a="http://schemas.openxmlformats.org/drawingml/2006/main">
               <a:ext uri="{FF2B5EF4-FFF2-40B4-BE49-F238E27FC236}">
-                <a16:creationId xmlns:a16="http://schemas.microsoft.com/office/drawing/2014/main" id="{20FE64DD-12DF-417F-A390-1B032B0855D9}"/>
+                <a16:creationId xmlns:a16="http://schemas.microsoft.com/office/drawing/2014/main" id="{3B86FF7F-2340-4153-ADCC-685FD4943449}"/>
               </a:ext>
             </a:extLst>
           </p:cNvPr>
@@ -20255,7 +20705,7 @@
           <p:cNvPr id="5" name="Rectangle 4">
             <a:extLst xmlns:a="http://schemas.openxmlformats.org/drawingml/2006/main">
               <a:ext uri="{FF2B5EF4-FFF2-40B4-BE49-F238E27FC236}">
-                <a16:creationId xmlns:a16="http://schemas.microsoft.com/office/drawing/2014/main" id="{F53D8479-5F15-446C-B39D-28B2EA0DA114}"/>
+                <a16:creationId xmlns:a16="http://schemas.microsoft.com/office/drawing/2014/main" id="{66B1294C-B7D5-44CC-98DA-E60A8855A9FE}"/>
               </a:ext>
             </a:extLst>
           </p:cNvPr>
@@ -20310,7 +20760,7 @@
           <p:cNvPr id="6" name="TextBox 5">
             <a:extLst xmlns:a="http://schemas.openxmlformats.org/drawingml/2006/main">
               <a:ext uri="{FF2B5EF4-FFF2-40B4-BE49-F238E27FC236}">
-                <a16:creationId xmlns:a16="http://schemas.microsoft.com/office/drawing/2014/main" id="{3BB328E2-502B-4C29-9E7E-57D30E21E791}"/>
+                <a16:creationId xmlns:a16="http://schemas.microsoft.com/office/drawing/2014/main" id="{F3AF2C68-86B5-4A23-BD6D-EF2E20DA23F0}"/>
               </a:ext>
             </a:extLst>
           </p:cNvPr>
@@ -20347,7 +20797,7 @@
                 <a:ea typeface="Aptos"/>
                 <a:cs typeface="Aptos"/>
               </a:rPr>
-              <a:t>Julkinen riippumaton evidenssikooste · 2026.07.24-18 · 2026-07-24 · Lähteet: EP3032975B2; 7 O 3341/24</a:t>
+              <a:t>Julkinen riippumaton evidenssikooste · 2026.07.24-19 · 2026-07-24 · Lähteet: EP3032975B2; 7 O 3341/24</a:t>
             </a:r>
           </a:p>
         </p:txBody>
@@ -20357,7 +20807,7 @@
           <p:cNvPr id="7" name="TextBox 6">
             <a:extLst xmlns:a="http://schemas.openxmlformats.org/drawingml/2006/main">
               <a:ext uri="{FF2B5EF4-FFF2-40B4-BE49-F238E27FC236}">
-                <a16:creationId xmlns:a16="http://schemas.microsoft.com/office/drawing/2014/main" id="{9239CEB5-EB2E-4720-B6EE-B0FA3BCE4F99}"/>
+                <a16:creationId xmlns:a16="http://schemas.microsoft.com/office/drawing/2014/main" id="{E76442FE-C4EF-4B97-AAF1-6476F688A403}"/>
               </a:ext>
             </a:extLst>
           </p:cNvPr>
@@ -20404,7 +20854,7 @@
           <p:cNvPr id="8" name="Rounded Rectangle 7">
             <a:extLst xmlns:a="http://schemas.openxmlformats.org/drawingml/2006/main">
               <a:ext uri="{FF2B5EF4-FFF2-40B4-BE49-F238E27FC236}">
-                <a16:creationId xmlns:a16="http://schemas.microsoft.com/office/drawing/2014/main" id="{4D1EACB0-1501-4092-9667-162CF0D6F09E}"/>
+                <a16:creationId xmlns:a16="http://schemas.microsoft.com/office/drawing/2014/main" id="{8862448C-3CE3-4FBD-B33A-F0A1055D17B9}"/>
               </a:ext>
             </a:extLst>
           </p:cNvPr>
@@ -20461,7 +20911,7 @@
           <p:cNvPr id="9" name="TextBox 8">
             <a:extLst xmlns:a="http://schemas.openxmlformats.org/drawingml/2006/main">
               <a:ext uri="{FF2B5EF4-FFF2-40B4-BE49-F238E27FC236}">
-                <a16:creationId xmlns:a16="http://schemas.microsoft.com/office/drawing/2014/main" id="{A16550F1-4591-40E2-ACAD-C7273AA0D779}"/>
+                <a16:creationId xmlns:a16="http://schemas.microsoft.com/office/drawing/2014/main" id="{6FE5E7CB-19F0-438A-8EF9-3C3BD748EE7D}"/>
               </a:ext>
             </a:extLst>
           </p:cNvPr>
@@ -20508,7 +20958,7 @@
           <p:cNvPr id="10" name="TextBox 9">
             <a:extLst xmlns:a="http://schemas.openxmlformats.org/drawingml/2006/main">
               <a:ext uri="{FF2B5EF4-FFF2-40B4-BE49-F238E27FC236}">
-                <a16:creationId xmlns:a16="http://schemas.microsoft.com/office/drawing/2014/main" id="{4B6C9456-A382-47C1-8542-41D471A7CC87}"/>
+                <a16:creationId xmlns:a16="http://schemas.microsoft.com/office/drawing/2014/main" id="{8CEBF345-4A2F-453F-8F0C-6C1246D09CF7}"/>
               </a:ext>
             </a:extLst>
           </p:cNvPr>
@@ -20555,7 +21005,7 @@
           <p:cNvPr id="11" name="TextBox 10">
             <a:extLst xmlns:a="http://schemas.openxmlformats.org/drawingml/2006/main">
               <a:ext uri="{FF2B5EF4-FFF2-40B4-BE49-F238E27FC236}">
-                <a16:creationId xmlns:a16="http://schemas.microsoft.com/office/drawing/2014/main" id="{2AADF1C1-9C2D-4C5D-9D4C-EDCE0B82D373}"/>
+                <a16:creationId xmlns:a16="http://schemas.microsoft.com/office/drawing/2014/main" id="{147CF21F-91D4-4557-AB41-6520E948F6B8}"/>
               </a:ext>
             </a:extLst>
           </p:cNvPr>
@@ -20602,7 +21052,7 @@
           <p:cNvPr id="12" name="Rounded Rectangle 11">
             <a:extLst xmlns:a="http://schemas.openxmlformats.org/drawingml/2006/main">
               <a:ext uri="{FF2B5EF4-FFF2-40B4-BE49-F238E27FC236}">
-                <a16:creationId xmlns:a16="http://schemas.microsoft.com/office/drawing/2014/main" id="{14A19BC4-2E50-4BC2-BD87-5E7EC9D7B418}"/>
+                <a16:creationId xmlns:a16="http://schemas.microsoft.com/office/drawing/2014/main" id="{25D6E178-D4E8-47E6-A350-117C0F269392}"/>
               </a:ext>
             </a:extLst>
           </p:cNvPr>
@@ -20659,7 +21109,7 @@
           <p:cNvPr id="13" name="TextBox 12">
             <a:extLst xmlns:a="http://schemas.openxmlformats.org/drawingml/2006/main">
               <a:ext uri="{FF2B5EF4-FFF2-40B4-BE49-F238E27FC236}">
-                <a16:creationId xmlns:a16="http://schemas.microsoft.com/office/drawing/2014/main" id="{B0FC2E85-981E-4B4A-A4BD-0E8C9CB0039C}"/>
+                <a16:creationId xmlns:a16="http://schemas.microsoft.com/office/drawing/2014/main" id="{7515A110-DF04-4B79-8D40-37EB81A40D76}"/>
               </a:ext>
             </a:extLst>
           </p:cNvPr>
@@ -20706,7 +21156,7 @@
           <p:cNvPr id="14" name="TextBox 13">
             <a:extLst xmlns:a="http://schemas.openxmlformats.org/drawingml/2006/main">
               <a:ext uri="{FF2B5EF4-FFF2-40B4-BE49-F238E27FC236}">
-                <a16:creationId xmlns:a16="http://schemas.microsoft.com/office/drawing/2014/main" id="{B36B220C-DA2C-46E0-BBDB-34E06DB8994A}"/>
+                <a16:creationId xmlns:a16="http://schemas.microsoft.com/office/drawing/2014/main" id="{50417AF6-5061-483D-AA6D-87780234542F}"/>
               </a:ext>
             </a:extLst>
           </p:cNvPr>
@@ -20753,7 +21203,7 @@
           <p:cNvPr id="15" name="TextBox 14">
             <a:extLst xmlns:a="http://schemas.openxmlformats.org/drawingml/2006/main">
               <a:ext uri="{FF2B5EF4-FFF2-40B4-BE49-F238E27FC236}">
-                <a16:creationId xmlns:a16="http://schemas.microsoft.com/office/drawing/2014/main" id="{E6DA0D5E-299D-439B-A9C0-C3582D84E1F6}"/>
+                <a16:creationId xmlns:a16="http://schemas.microsoft.com/office/drawing/2014/main" id="{E0F8C0C4-FBCA-4094-A7C4-5846BE0A536B}"/>
               </a:ext>
             </a:extLst>
           </p:cNvPr>
@@ -20800,7 +21250,7 @@
           <p:cNvPr id="16" name="Rounded Rectangle 15">
             <a:extLst xmlns:a="http://schemas.openxmlformats.org/drawingml/2006/main">
               <a:ext uri="{FF2B5EF4-FFF2-40B4-BE49-F238E27FC236}">
-                <a16:creationId xmlns:a16="http://schemas.microsoft.com/office/drawing/2014/main" id="{02FAB409-3B11-4AEF-8BB5-D1DF4DEA446F}"/>
+                <a16:creationId xmlns:a16="http://schemas.microsoft.com/office/drawing/2014/main" id="{C48DFA48-6C04-4747-801A-445212A061EF}"/>
               </a:ext>
             </a:extLst>
           </p:cNvPr>
@@ -20857,7 +21307,7 @@
           <p:cNvPr id="17" name="TextBox 16">
             <a:extLst xmlns:a="http://schemas.openxmlformats.org/drawingml/2006/main">
               <a:ext uri="{FF2B5EF4-FFF2-40B4-BE49-F238E27FC236}">
-                <a16:creationId xmlns:a16="http://schemas.microsoft.com/office/drawing/2014/main" id="{4E7A4AFE-D3ED-48EF-B6B6-F7B152DC73AD}"/>
+                <a16:creationId xmlns:a16="http://schemas.microsoft.com/office/drawing/2014/main" id="{7307DF07-FE06-4FA6-B93D-5FB1B3B003DB}"/>
               </a:ext>
             </a:extLst>
           </p:cNvPr>
@@ -20904,7 +21354,7 @@
           <p:cNvPr id="18" name="TextBox 17">
             <a:extLst xmlns:a="http://schemas.openxmlformats.org/drawingml/2006/main">
               <a:ext uri="{FF2B5EF4-FFF2-40B4-BE49-F238E27FC236}">
-                <a16:creationId xmlns:a16="http://schemas.microsoft.com/office/drawing/2014/main" id="{BBB50330-C9DD-463A-A21A-07F7C8EF323A}"/>
+                <a16:creationId xmlns:a16="http://schemas.microsoft.com/office/drawing/2014/main" id="{84BF9A2C-BC68-4AEF-9DFD-ECBF3387E7EB}"/>
               </a:ext>
             </a:extLst>
           </p:cNvPr>
@@ -20951,7 +21401,7 @@
           <p:cNvPr id="19" name="TextBox 18">
             <a:extLst xmlns:a="http://schemas.openxmlformats.org/drawingml/2006/main">
               <a:ext uri="{FF2B5EF4-FFF2-40B4-BE49-F238E27FC236}">
-                <a16:creationId xmlns:a16="http://schemas.microsoft.com/office/drawing/2014/main" id="{3522F07E-DC75-47A3-9BF1-FA5171AF5BB5}"/>
+                <a16:creationId xmlns:a16="http://schemas.microsoft.com/office/drawing/2014/main" id="{375EE7EA-4F9E-47E5-985A-0BB3C81C73E6}"/>
               </a:ext>
             </a:extLst>
           </p:cNvPr>
@@ -20998,7 +21448,7 @@
           <p:cNvPr id="20" name="Rounded Rectangle 19">
             <a:extLst xmlns:a="http://schemas.openxmlformats.org/drawingml/2006/main">
               <a:ext uri="{FF2B5EF4-FFF2-40B4-BE49-F238E27FC236}">
-                <a16:creationId xmlns:a16="http://schemas.microsoft.com/office/drawing/2014/main" id="{78D02288-6DC0-4AC0-991D-1C370C61394D}"/>
+                <a16:creationId xmlns:a16="http://schemas.microsoft.com/office/drawing/2014/main" id="{74F77ACA-77A4-422B-9480-992EEE8BE778}"/>
               </a:ext>
             </a:extLst>
           </p:cNvPr>
@@ -21055,7 +21505,7 @@
           <p:cNvPr id="21" name="TextBox 20">
             <a:extLst xmlns:a="http://schemas.openxmlformats.org/drawingml/2006/main">
               <a:ext uri="{FF2B5EF4-FFF2-40B4-BE49-F238E27FC236}">
-                <a16:creationId xmlns:a16="http://schemas.microsoft.com/office/drawing/2014/main" id="{1ED77A90-3149-4A49-9907-CCC0FD3D350E}"/>
+                <a16:creationId xmlns:a16="http://schemas.microsoft.com/office/drawing/2014/main" id="{82EFB405-14F3-48E4-9436-220B1650A617}"/>
               </a:ext>
             </a:extLst>
           </p:cNvPr>
@@ -21102,7 +21552,7 @@
           <p:cNvPr id="22" name="TextBox 21">
             <a:extLst xmlns:a="http://schemas.openxmlformats.org/drawingml/2006/main">
               <a:ext uri="{FF2B5EF4-FFF2-40B4-BE49-F238E27FC236}">
-                <a16:creationId xmlns:a16="http://schemas.microsoft.com/office/drawing/2014/main" id="{C9832EDB-36D8-4FA2-8456-19B78F4078F8}"/>
+                <a16:creationId xmlns:a16="http://schemas.microsoft.com/office/drawing/2014/main" id="{9EB22F6B-0DDC-4538-8F52-CD5660D55781}"/>
               </a:ext>
             </a:extLst>
           </p:cNvPr>
@@ -21149,7 +21599,7 @@
           <p:cNvPr id="23" name="TextBox 22">
             <a:extLst xmlns:a="http://schemas.openxmlformats.org/drawingml/2006/main">
               <a:ext uri="{FF2B5EF4-FFF2-40B4-BE49-F238E27FC236}">
-                <a16:creationId xmlns:a16="http://schemas.microsoft.com/office/drawing/2014/main" id="{E351527A-50F8-4224-B698-2AE6A88DA4E7}"/>
+                <a16:creationId xmlns:a16="http://schemas.microsoft.com/office/drawing/2014/main" id="{21032831-43A7-4742-869A-FD119762DDC3}"/>
               </a:ext>
             </a:extLst>
           </p:cNvPr>
@@ -21196,7 +21646,7 @@
           <p:cNvPr id="24" name="TextBox 23">
             <a:extLst xmlns:a="http://schemas.openxmlformats.org/drawingml/2006/main">
               <a:ext uri="{FF2B5EF4-FFF2-40B4-BE49-F238E27FC236}">
-                <a16:creationId xmlns:a16="http://schemas.microsoft.com/office/drawing/2014/main" id="{C293CB47-1B4B-4045-979D-823C5A7638C3}"/>
+                <a16:creationId xmlns:a16="http://schemas.microsoft.com/office/drawing/2014/main" id="{38E8A98D-E4EB-437C-BEB0-DE0706AE6B39}"/>
               </a:ext>
             </a:extLst>
           </p:cNvPr>
@@ -21241,7 +21691,7 @@
     </p:spTree>
     <p:extLst>
       <p:ext uri="{BB962C8B-B14F-4D97-AF65-F5344CB8AC3E}">
-        <p14:creationId xmlns:p14="http://schemas.microsoft.com/office/powerpoint/2010/main" val="1440187406"/>
+        <p14:creationId xmlns:p14="http://schemas.microsoft.com/office/powerpoint/2010/main" val="1433670521"/>
       </p:ext>
     </p:extLst>
   </p:cSld>
@@ -21265,7 +21715,7 @@
           <p:cNvPr id="2" name="TextBox 1">
             <a:extLst xmlns:a="http://schemas.openxmlformats.org/drawingml/2006/main">
               <a:ext uri="{FF2B5EF4-FFF2-40B4-BE49-F238E27FC236}">
-                <a16:creationId xmlns:a16="http://schemas.microsoft.com/office/drawing/2014/main" id="{0C51AB16-C2E7-47A5-8BAF-73A06301BE71}"/>
+                <a16:creationId xmlns:a16="http://schemas.microsoft.com/office/drawing/2014/main" id="{1DD24788-C006-49DB-B665-659852BAE4BF}"/>
               </a:ext>
             </a:extLst>
           </p:cNvPr>
@@ -21312,7 +21762,7 @@
           <p:cNvPr id="3" name="TextBox 2">
             <a:extLst xmlns:a="http://schemas.openxmlformats.org/drawingml/2006/main">
               <a:ext uri="{FF2B5EF4-FFF2-40B4-BE49-F238E27FC236}">
-                <a16:creationId xmlns:a16="http://schemas.microsoft.com/office/drawing/2014/main" id="{EB8F3ABA-7FAB-4A22-A243-B5FCB4013337}"/>
+                <a16:creationId xmlns:a16="http://schemas.microsoft.com/office/drawing/2014/main" id="{54F20BC1-18BE-4493-9FD0-F6162140A15E}"/>
               </a:ext>
             </a:extLst>
           </p:cNvPr>
@@ -21359,7 +21809,7 @@
           <p:cNvPr id="4" name="Rectangle 3">
             <a:extLst xmlns:a="http://schemas.openxmlformats.org/drawingml/2006/main">
               <a:ext uri="{FF2B5EF4-FFF2-40B4-BE49-F238E27FC236}">
-                <a16:creationId xmlns:a16="http://schemas.microsoft.com/office/drawing/2014/main" id="{DDF549BC-6ABA-491C-863C-9521982DD536}"/>
+                <a16:creationId xmlns:a16="http://schemas.microsoft.com/office/drawing/2014/main" id="{4E373F4F-28DF-4E46-8202-80A1F8C6D56C}"/>
               </a:ext>
             </a:extLst>
           </p:cNvPr>
@@ -21414,7 +21864,7 @@
           <p:cNvPr id="5" name="Rectangle 4">
             <a:extLst xmlns:a="http://schemas.openxmlformats.org/drawingml/2006/main">
               <a:ext uri="{FF2B5EF4-FFF2-40B4-BE49-F238E27FC236}">
-                <a16:creationId xmlns:a16="http://schemas.microsoft.com/office/drawing/2014/main" id="{D43BC7ED-43C4-4B38-B450-99A7A40D6A78}"/>
+                <a16:creationId xmlns:a16="http://schemas.microsoft.com/office/drawing/2014/main" id="{F1770C5D-978C-4677-A85C-3C9FF290C09D}"/>
               </a:ext>
             </a:extLst>
           </p:cNvPr>
@@ -21469,7 +21919,7 @@
           <p:cNvPr id="6" name="TextBox 5">
             <a:extLst xmlns:a="http://schemas.openxmlformats.org/drawingml/2006/main">
               <a:ext uri="{FF2B5EF4-FFF2-40B4-BE49-F238E27FC236}">
-                <a16:creationId xmlns:a16="http://schemas.microsoft.com/office/drawing/2014/main" id="{1DE69B80-85B6-4644-B2EC-34968B662773}"/>
+                <a16:creationId xmlns:a16="http://schemas.microsoft.com/office/drawing/2014/main" id="{1AA282D1-9255-41AC-A002-0FCE98D18A7D}"/>
               </a:ext>
             </a:extLst>
           </p:cNvPr>
@@ -21506,7 +21956,7 @@
                 <a:ea typeface="Aptos"/>
                 <a:cs typeface="Aptos"/>
               </a:rPr>
-              <a:t>Julkinen riippumaton evidenssikooste · 2026.07.24-18 · 2026-07-24 · Lähteet: WIPO dispute resolution; EPO IPscore</a:t>
+              <a:t>Julkinen riippumaton evidenssikooste · 2026.07.24-19 · 2026-07-24 · Lähteet: WIPO dispute resolution; EPO IPscore</a:t>
             </a:r>
           </a:p>
         </p:txBody>
@@ -21516,7 +21966,7 @@
           <p:cNvPr id="7" name="TextBox 6">
             <a:extLst xmlns:a="http://schemas.openxmlformats.org/drawingml/2006/main">
               <a:ext uri="{FF2B5EF4-FFF2-40B4-BE49-F238E27FC236}">
-                <a16:creationId xmlns:a16="http://schemas.microsoft.com/office/drawing/2014/main" id="{2403D2BC-F28D-4166-995D-5CFD7799D5D5}"/>
+                <a16:creationId xmlns:a16="http://schemas.microsoft.com/office/drawing/2014/main" id="{BB9C2613-1F69-43C5-A298-93124F307475}"/>
               </a:ext>
             </a:extLst>
           </p:cNvPr>
@@ -21563,7 +22013,7 @@
           <p:cNvPr id="8" name="Rounded Rectangle 7">
             <a:extLst xmlns:a="http://schemas.openxmlformats.org/drawingml/2006/main">
               <a:ext uri="{FF2B5EF4-FFF2-40B4-BE49-F238E27FC236}">
-                <a16:creationId xmlns:a16="http://schemas.microsoft.com/office/drawing/2014/main" id="{46B4E531-7BD3-4FC3-B224-E92E6C980DE1}"/>
+                <a16:creationId xmlns:a16="http://schemas.microsoft.com/office/drawing/2014/main" id="{B0506B8F-D12F-4B6E-833F-6ED3E1898AE7}"/>
               </a:ext>
             </a:extLst>
           </p:cNvPr>
@@ -21620,7 +22070,7 @@
           <p:cNvPr id="9" name="TextBox 8">
             <a:extLst xmlns:a="http://schemas.openxmlformats.org/drawingml/2006/main">
               <a:ext uri="{FF2B5EF4-FFF2-40B4-BE49-F238E27FC236}">
-                <a16:creationId xmlns:a16="http://schemas.microsoft.com/office/drawing/2014/main" id="{23442810-37E6-4F31-993B-51ACE6E1A4BA}"/>
+                <a16:creationId xmlns:a16="http://schemas.microsoft.com/office/drawing/2014/main" id="{7C53BB99-AAF0-4AA3-90D5-A75D766BA7B7}"/>
               </a:ext>
             </a:extLst>
           </p:cNvPr>
@@ -21667,7 +22117,7 @@
           <p:cNvPr id="10" name="TextBox 9">
             <a:extLst xmlns:a="http://schemas.openxmlformats.org/drawingml/2006/main">
               <a:ext uri="{FF2B5EF4-FFF2-40B4-BE49-F238E27FC236}">
-                <a16:creationId xmlns:a16="http://schemas.microsoft.com/office/drawing/2014/main" id="{09CFC918-3A3D-4FE1-998E-0560754000E8}"/>
+                <a16:creationId xmlns:a16="http://schemas.microsoft.com/office/drawing/2014/main" id="{BBD6661E-3E12-4535-A1DF-E8E00A03BCB3}"/>
               </a:ext>
             </a:extLst>
           </p:cNvPr>
@@ -21714,7 +22164,7 @@
           <p:cNvPr id="11" name="TextBox 10">
             <a:extLst xmlns:a="http://schemas.openxmlformats.org/drawingml/2006/main">
               <a:ext uri="{FF2B5EF4-FFF2-40B4-BE49-F238E27FC236}">
-                <a16:creationId xmlns:a16="http://schemas.microsoft.com/office/drawing/2014/main" id="{D0692C75-1585-4FAC-BA19-55F92C1AD372}"/>
+                <a16:creationId xmlns:a16="http://schemas.microsoft.com/office/drawing/2014/main" id="{67B458BE-8FA5-4094-B2AD-CC4F2D44B1A1}"/>
               </a:ext>
             </a:extLst>
           </p:cNvPr>
@@ -21761,7 +22211,7 @@
           <p:cNvPr id="12" name="Rounded Rectangle 11">
             <a:extLst xmlns:a="http://schemas.openxmlformats.org/drawingml/2006/main">
               <a:ext uri="{FF2B5EF4-FFF2-40B4-BE49-F238E27FC236}">
-                <a16:creationId xmlns:a16="http://schemas.microsoft.com/office/drawing/2014/main" id="{495CB5E6-807A-4B3C-BBA5-72387BF1D4B7}"/>
+                <a16:creationId xmlns:a16="http://schemas.microsoft.com/office/drawing/2014/main" id="{F7082515-48F6-493D-86E9-4F36C95AD570}"/>
               </a:ext>
             </a:extLst>
           </p:cNvPr>
@@ -21818,7 +22268,7 @@
           <p:cNvPr id="13" name="TextBox 12">
             <a:extLst xmlns:a="http://schemas.openxmlformats.org/drawingml/2006/main">
               <a:ext uri="{FF2B5EF4-FFF2-40B4-BE49-F238E27FC236}">
-                <a16:creationId xmlns:a16="http://schemas.microsoft.com/office/drawing/2014/main" id="{1641802B-947C-44E3-89AE-E14CAC39ED00}"/>
+                <a16:creationId xmlns:a16="http://schemas.microsoft.com/office/drawing/2014/main" id="{21C609C6-D86B-42DD-B6F2-74584014F8BD}"/>
               </a:ext>
             </a:extLst>
           </p:cNvPr>
@@ -21865,7 +22315,7 @@
           <p:cNvPr id="14" name="TextBox 13">
             <a:extLst xmlns:a="http://schemas.openxmlformats.org/drawingml/2006/main">
               <a:ext uri="{FF2B5EF4-FFF2-40B4-BE49-F238E27FC236}">
-                <a16:creationId xmlns:a16="http://schemas.microsoft.com/office/drawing/2014/main" id="{CF847769-14A9-4060-AB45-6E3BBD3BEAEC}"/>
+                <a16:creationId xmlns:a16="http://schemas.microsoft.com/office/drawing/2014/main" id="{9B28E98A-FAA3-4970-8236-53A1EBCED0D0}"/>
               </a:ext>
             </a:extLst>
           </p:cNvPr>
@@ -21912,7 +22362,7 @@
           <p:cNvPr id="15" name="TextBox 14">
             <a:extLst xmlns:a="http://schemas.openxmlformats.org/drawingml/2006/main">
               <a:ext uri="{FF2B5EF4-FFF2-40B4-BE49-F238E27FC236}">
-                <a16:creationId xmlns:a16="http://schemas.microsoft.com/office/drawing/2014/main" id="{B315D378-EF2A-4A0E-98CC-983894144E61}"/>
+                <a16:creationId xmlns:a16="http://schemas.microsoft.com/office/drawing/2014/main" id="{1ABE9ACA-E389-43AC-AE61-19BA130D1A6D}"/>
               </a:ext>
             </a:extLst>
           </p:cNvPr>
@@ -21959,7 +22409,7 @@
           <p:cNvPr id="16" name="Rounded Rectangle 15">
             <a:extLst xmlns:a="http://schemas.openxmlformats.org/drawingml/2006/main">
               <a:ext uri="{FF2B5EF4-FFF2-40B4-BE49-F238E27FC236}">
-                <a16:creationId xmlns:a16="http://schemas.microsoft.com/office/drawing/2014/main" id="{17537ABF-BAA3-4B99-8174-76DFA4A4EF18}"/>
+                <a16:creationId xmlns:a16="http://schemas.microsoft.com/office/drawing/2014/main" id="{495BE5DC-E725-4724-A085-10B565A99DA8}"/>
               </a:ext>
             </a:extLst>
           </p:cNvPr>
@@ -22016,7 +22466,7 @@
           <p:cNvPr id="17" name="TextBox 16">
             <a:extLst xmlns:a="http://schemas.openxmlformats.org/drawingml/2006/main">
               <a:ext uri="{FF2B5EF4-FFF2-40B4-BE49-F238E27FC236}">
-                <a16:creationId xmlns:a16="http://schemas.microsoft.com/office/drawing/2014/main" id="{0B8198B2-B26E-49A1-9857-E9796261AC49}"/>
+                <a16:creationId xmlns:a16="http://schemas.microsoft.com/office/drawing/2014/main" id="{BD240892-EA26-45EA-98DB-B3CB25C0508B}"/>
               </a:ext>
             </a:extLst>
           </p:cNvPr>
@@ -22063,7 +22513,7 @@
           <p:cNvPr id="18" name="TextBox 17">
             <a:extLst xmlns:a="http://schemas.openxmlformats.org/drawingml/2006/main">
               <a:ext uri="{FF2B5EF4-FFF2-40B4-BE49-F238E27FC236}">
-                <a16:creationId xmlns:a16="http://schemas.microsoft.com/office/drawing/2014/main" id="{09C8A6BE-5A9C-446A-8E63-54E9925CC6F7}"/>
+                <a16:creationId xmlns:a16="http://schemas.microsoft.com/office/drawing/2014/main" id="{D08BB05A-73F4-481C-A168-6ABBF2CE1793}"/>
               </a:ext>
             </a:extLst>
           </p:cNvPr>
@@ -22110,7 +22560,7 @@
           <p:cNvPr id="19" name="TextBox 18">
             <a:extLst xmlns:a="http://schemas.openxmlformats.org/drawingml/2006/main">
               <a:ext uri="{FF2B5EF4-FFF2-40B4-BE49-F238E27FC236}">
-                <a16:creationId xmlns:a16="http://schemas.microsoft.com/office/drawing/2014/main" id="{8671E1F2-7245-4561-AA4F-10F47D4426FD}"/>
+                <a16:creationId xmlns:a16="http://schemas.microsoft.com/office/drawing/2014/main" id="{4BBB2444-8E61-43F6-BB13-02350659BE0F}"/>
               </a:ext>
             </a:extLst>
           </p:cNvPr>
@@ -22157,7 +22607,7 @@
           <p:cNvPr id="20" name="Rounded Rectangle 19">
             <a:extLst xmlns:a="http://schemas.openxmlformats.org/drawingml/2006/main">
               <a:ext uri="{FF2B5EF4-FFF2-40B4-BE49-F238E27FC236}">
-                <a16:creationId xmlns:a16="http://schemas.microsoft.com/office/drawing/2014/main" id="{9AC3A49D-FFB2-46E9-8A5D-BFD841B641A3}"/>
+                <a16:creationId xmlns:a16="http://schemas.microsoft.com/office/drawing/2014/main" id="{445345CE-A01D-4739-AB56-42FBEFA25CFE}"/>
               </a:ext>
             </a:extLst>
           </p:cNvPr>
@@ -22214,7 +22664,7 @@
           <p:cNvPr id="21" name="TextBox 20">
             <a:extLst xmlns:a="http://schemas.openxmlformats.org/drawingml/2006/main">
               <a:ext uri="{FF2B5EF4-FFF2-40B4-BE49-F238E27FC236}">
-                <a16:creationId xmlns:a16="http://schemas.microsoft.com/office/drawing/2014/main" id="{8D36292A-D2D8-4F9E-9298-77C8B0C5F69C}"/>
+                <a16:creationId xmlns:a16="http://schemas.microsoft.com/office/drawing/2014/main" id="{6DC68F94-B989-4E58-9E7C-F090F7959D02}"/>
               </a:ext>
             </a:extLst>
           </p:cNvPr>
@@ -22261,7 +22711,7 @@
           <p:cNvPr id="22" name="TextBox 21">
             <a:extLst xmlns:a="http://schemas.openxmlformats.org/drawingml/2006/main">
               <a:ext uri="{FF2B5EF4-FFF2-40B4-BE49-F238E27FC236}">
-                <a16:creationId xmlns:a16="http://schemas.microsoft.com/office/drawing/2014/main" id="{67CBA492-D8A5-47F9-B1D7-193241F815C2}"/>
+                <a16:creationId xmlns:a16="http://schemas.microsoft.com/office/drawing/2014/main" id="{75E48A78-BB34-4232-ACFE-EA41E6004BA2}"/>
               </a:ext>
             </a:extLst>
           </p:cNvPr>
@@ -22308,7 +22758,7 @@
           <p:cNvPr id="23" name="TextBox 22">
             <a:extLst xmlns:a="http://schemas.openxmlformats.org/drawingml/2006/main">
               <a:ext uri="{FF2B5EF4-FFF2-40B4-BE49-F238E27FC236}">
-                <a16:creationId xmlns:a16="http://schemas.microsoft.com/office/drawing/2014/main" id="{FECDFC63-4E05-4902-A456-849B2B2782C6}"/>
+                <a16:creationId xmlns:a16="http://schemas.microsoft.com/office/drawing/2014/main" id="{B9AB8F85-0583-48BE-A458-27515D1AC1A9}"/>
               </a:ext>
             </a:extLst>
           </p:cNvPr>
@@ -22355,7 +22805,7 @@
           <p:cNvPr id="24" name="TextBox 23">
             <a:extLst xmlns:a="http://schemas.openxmlformats.org/drawingml/2006/main">
               <a:ext uri="{FF2B5EF4-FFF2-40B4-BE49-F238E27FC236}">
-                <a16:creationId xmlns:a16="http://schemas.microsoft.com/office/drawing/2014/main" id="{D4CB1398-DAAE-416F-B31B-8BCD4CB8661D}"/>
+                <a16:creationId xmlns:a16="http://schemas.microsoft.com/office/drawing/2014/main" id="{2A639712-5C28-4E32-888E-6642C524FA74}"/>
               </a:ext>
             </a:extLst>
           </p:cNvPr>
@@ -22400,7 +22850,7 @@
     </p:spTree>
     <p:extLst>
       <p:ext uri="{BB962C8B-B14F-4D97-AF65-F5344CB8AC3E}">
-        <p14:creationId xmlns:p14="http://schemas.microsoft.com/office/powerpoint/2010/main" val="339179179"/>
+        <p14:creationId xmlns:p14="http://schemas.microsoft.com/office/powerpoint/2010/main" val="1780142872"/>
       </p:ext>
     </p:extLst>
   </p:cSld>
@@ -22424,7 +22874,7 @@
           <p:cNvPr id="2" name="TextBox 1">
             <a:extLst xmlns:a="http://schemas.openxmlformats.org/drawingml/2006/main">
               <a:ext uri="{FF2B5EF4-FFF2-40B4-BE49-F238E27FC236}">
-                <a16:creationId xmlns:a16="http://schemas.microsoft.com/office/drawing/2014/main" id="{64243A5F-6F13-4281-ACD3-145612E2E08E}"/>
+                <a16:creationId xmlns:a16="http://schemas.microsoft.com/office/drawing/2014/main" id="{72636EC2-99DD-4E2A-B86F-E8E95F05E96E}"/>
               </a:ext>
             </a:extLst>
           </p:cNvPr>
@@ -22471,7 +22921,7 @@
           <p:cNvPr id="3" name="TextBox 2">
             <a:extLst xmlns:a="http://schemas.openxmlformats.org/drawingml/2006/main">
               <a:ext uri="{FF2B5EF4-FFF2-40B4-BE49-F238E27FC236}">
-                <a16:creationId xmlns:a16="http://schemas.microsoft.com/office/drawing/2014/main" id="{AF1DD7C3-0549-4A2D-8B06-A5EE1FBC4D35}"/>
+                <a16:creationId xmlns:a16="http://schemas.microsoft.com/office/drawing/2014/main" id="{E51EEE56-6ADE-458A-A0BC-7FF78E8FB86A}"/>
               </a:ext>
             </a:extLst>
           </p:cNvPr>
@@ -22518,7 +22968,7 @@
           <p:cNvPr id="4" name="Rectangle 3">
             <a:extLst xmlns:a="http://schemas.openxmlformats.org/drawingml/2006/main">
               <a:ext uri="{FF2B5EF4-FFF2-40B4-BE49-F238E27FC236}">
-                <a16:creationId xmlns:a16="http://schemas.microsoft.com/office/drawing/2014/main" id="{F7A25E15-A449-4926-8B46-7A5C6BCA8FF6}"/>
+                <a16:creationId xmlns:a16="http://schemas.microsoft.com/office/drawing/2014/main" id="{244C947B-968F-4E4A-BD46-94F367601A89}"/>
               </a:ext>
             </a:extLst>
           </p:cNvPr>
@@ -22573,7 +23023,7 @@
           <p:cNvPr id="5" name="Rectangle 4">
             <a:extLst xmlns:a="http://schemas.openxmlformats.org/drawingml/2006/main">
               <a:ext uri="{FF2B5EF4-FFF2-40B4-BE49-F238E27FC236}">
-                <a16:creationId xmlns:a16="http://schemas.microsoft.com/office/drawing/2014/main" id="{CFC70A60-C8A8-4C12-8C4E-225327344577}"/>
+                <a16:creationId xmlns:a16="http://schemas.microsoft.com/office/drawing/2014/main" id="{4F5389DD-58B4-44AB-B487-28DA588578BF}"/>
               </a:ext>
             </a:extLst>
           </p:cNvPr>
@@ -22628,7 +23078,7 @@
           <p:cNvPr id="6" name="TextBox 5">
             <a:extLst xmlns:a="http://schemas.openxmlformats.org/drawingml/2006/main">
               <a:ext uri="{FF2B5EF4-FFF2-40B4-BE49-F238E27FC236}">
-                <a16:creationId xmlns:a16="http://schemas.microsoft.com/office/drawing/2014/main" id="{5207F420-A7B5-4710-A2C0-5A9C776FA87E}"/>
+                <a16:creationId xmlns:a16="http://schemas.microsoft.com/office/drawing/2014/main" id="{247D7F61-4ECE-4354-84CF-4EB01674AD2C}"/>
               </a:ext>
             </a:extLst>
           </p:cNvPr>
@@ -22665,7 +23115,7 @@
                 <a:ea typeface="Aptos"/>
                 <a:cs typeface="Aptos"/>
               </a:rPr>
-              <a:t>Julkinen riippumaton evidenssikooste · 2026.07.24-18 · 2026-07-24 · Lähteet: WIPO licensing; IP Finance; TPLF mapping</a:t>
+              <a:t>Julkinen riippumaton evidenssikooste · 2026.07.24-19 · 2026-07-24 · Lähteet: WIPO licensing; IP Finance; TPLF mapping</a:t>
             </a:r>
           </a:p>
         </p:txBody>
@@ -22675,7 +23125,7 @@
           <p:cNvPr id="7" name="TextBox 6">
             <a:extLst xmlns:a="http://schemas.openxmlformats.org/drawingml/2006/main">
               <a:ext uri="{FF2B5EF4-FFF2-40B4-BE49-F238E27FC236}">
-                <a16:creationId xmlns:a16="http://schemas.microsoft.com/office/drawing/2014/main" id="{001C0EE1-C040-4232-BD39-7C4A7A1D28FB}"/>
+                <a16:creationId xmlns:a16="http://schemas.microsoft.com/office/drawing/2014/main" id="{25C3C098-5654-4634-9236-A6EE719C04E2}"/>
               </a:ext>
             </a:extLst>
           </p:cNvPr>
@@ -23245,7 +23695,7 @@
           <p:cNvPr id="9" name="TextBox 8">
             <a:extLst xmlns:a="http://schemas.openxmlformats.org/drawingml/2006/main">
               <a:ext uri="{FF2B5EF4-FFF2-40B4-BE49-F238E27FC236}">
-                <a16:creationId xmlns:a16="http://schemas.microsoft.com/office/drawing/2014/main" id="{B0B2BA50-ADFE-48A2-B25A-CD8C2B0CEB5A}"/>
+                <a16:creationId xmlns:a16="http://schemas.microsoft.com/office/drawing/2014/main" id="{B2D82AC3-85ED-4CA2-A34C-C0CA7A3CDB92}"/>
               </a:ext>
             </a:extLst>
           </p:cNvPr>
@@ -23290,7 +23740,7 @@
     </p:spTree>
     <p:extLst>
       <p:ext uri="{BB962C8B-B14F-4D97-AF65-F5344CB8AC3E}">
-        <p14:creationId xmlns:p14="http://schemas.microsoft.com/office/powerpoint/2010/main" val="1381967398"/>
+        <p14:creationId xmlns:p14="http://schemas.microsoft.com/office/powerpoint/2010/main" val="1034020357"/>
       </p:ext>
     </p:extLst>
   </p:cSld>
@@ -23314,7 +23764,7 @@
           <p:cNvPr id="2" name="TextBox 1">
             <a:extLst xmlns:a="http://schemas.openxmlformats.org/drawingml/2006/main">
               <a:ext uri="{FF2B5EF4-FFF2-40B4-BE49-F238E27FC236}">
-                <a16:creationId xmlns:a16="http://schemas.microsoft.com/office/drawing/2014/main" id="{F9A688C2-E5EF-4699-9347-37E766A07A11}"/>
+                <a16:creationId xmlns:a16="http://schemas.microsoft.com/office/drawing/2014/main" id="{4D296B98-7108-4953-A4BD-46399658D2C4}"/>
               </a:ext>
             </a:extLst>
           </p:cNvPr>
@@ -23361,7 +23811,7 @@
           <p:cNvPr id="3" name="TextBox 2">
             <a:extLst xmlns:a="http://schemas.openxmlformats.org/drawingml/2006/main">
               <a:ext uri="{FF2B5EF4-FFF2-40B4-BE49-F238E27FC236}">
-                <a16:creationId xmlns:a16="http://schemas.microsoft.com/office/drawing/2014/main" id="{D8CFA3D8-397D-422A-B444-EB96DA57BA2A}"/>
+                <a16:creationId xmlns:a16="http://schemas.microsoft.com/office/drawing/2014/main" id="{E2009194-4E58-4FDB-AF09-F12D79C5CF47}"/>
               </a:ext>
             </a:extLst>
           </p:cNvPr>
@@ -23408,7 +23858,7 @@
           <p:cNvPr id="4" name="Rectangle 3">
             <a:extLst xmlns:a="http://schemas.openxmlformats.org/drawingml/2006/main">
               <a:ext uri="{FF2B5EF4-FFF2-40B4-BE49-F238E27FC236}">
-                <a16:creationId xmlns:a16="http://schemas.microsoft.com/office/drawing/2014/main" id="{D366C856-34E1-4BCD-9638-922B6CF8CF77}"/>
+                <a16:creationId xmlns:a16="http://schemas.microsoft.com/office/drawing/2014/main" id="{6444240F-C236-4E07-BD9C-DD3CD3ADDFFF}"/>
               </a:ext>
             </a:extLst>
           </p:cNvPr>
@@ -23463,7 +23913,7 @@
           <p:cNvPr id="5" name="Rectangle 4">
             <a:extLst xmlns:a="http://schemas.openxmlformats.org/drawingml/2006/main">
               <a:ext uri="{FF2B5EF4-FFF2-40B4-BE49-F238E27FC236}">
-                <a16:creationId xmlns:a16="http://schemas.microsoft.com/office/drawing/2014/main" id="{E0C6CD26-4A4C-4055-B179-EBC0F677F4DB}"/>
+                <a16:creationId xmlns:a16="http://schemas.microsoft.com/office/drawing/2014/main" id="{76CADFCD-BC27-4663-876C-C831A703D5EC}"/>
               </a:ext>
             </a:extLst>
           </p:cNvPr>
@@ -23518,7 +23968,7 @@
           <p:cNvPr id="6" name="TextBox 5">
             <a:extLst xmlns:a="http://schemas.openxmlformats.org/drawingml/2006/main">
               <a:ext uri="{FF2B5EF4-FFF2-40B4-BE49-F238E27FC236}">
-                <a16:creationId xmlns:a16="http://schemas.microsoft.com/office/drawing/2014/main" id="{63A1DFB7-2699-4774-A8EF-736A57F5F7DD}"/>
+                <a16:creationId xmlns:a16="http://schemas.microsoft.com/office/drawing/2014/main" id="{74CDB364-F0FD-4F93-A0C7-8C025919F149}"/>
               </a:ext>
             </a:extLst>
           </p:cNvPr>
@@ -23555,7 +24005,7 @@
                 <a:ea typeface="Aptos"/>
                 <a:cs typeface="Aptos"/>
               </a:rPr>
-              <a:t>Julkinen riippumaton evidenssikooste · 2026.07.24-18 · 2026-07-24 · Lähteet: Evidence Register; WIPO valuation</a:t>
+              <a:t>Julkinen riippumaton evidenssikooste · 2026.07.24-19 · 2026-07-24 · Lähteet: Evidence Register; WIPO valuation</a:t>
             </a:r>
           </a:p>
         </p:txBody>
@@ -23565,7 +24015,7 @@
           <p:cNvPr id="7" name="TextBox 6">
             <a:extLst xmlns:a="http://schemas.openxmlformats.org/drawingml/2006/main">
               <a:ext uri="{FF2B5EF4-FFF2-40B4-BE49-F238E27FC236}">
-                <a16:creationId xmlns:a16="http://schemas.microsoft.com/office/drawing/2014/main" id="{CFF5E908-8FED-4332-AA28-3045A7755ED3}"/>
+                <a16:creationId xmlns:a16="http://schemas.microsoft.com/office/drawing/2014/main" id="{25D4B384-266D-4F28-A7A8-DF0915B95433}"/>
               </a:ext>
             </a:extLst>
           </p:cNvPr>
@@ -24218,7 +24668,7 @@
           <p:cNvPr id="9" name="TextBox 8">
             <a:extLst xmlns:a="http://schemas.openxmlformats.org/drawingml/2006/main">
               <a:ext uri="{FF2B5EF4-FFF2-40B4-BE49-F238E27FC236}">
-                <a16:creationId xmlns:a16="http://schemas.microsoft.com/office/drawing/2014/main" id="{8D901255-5913-4867-B9E4-184F77DCB13B}"/>
+                <a16:creationId xmlns:a16="http://schemas.microsoft.com/office/drawing/2014/main" id="{39028D12-9CB0-4829-973A-CDE5771E4CEE}"/>
               </a:ext>
             </a:extLst>
           </p:cNvPr>
@@ -24263,7 +24713,7 @@
     </p:spTree>
     <p:extLst>
       <p:ext uri="{BB962C8B-B14F-4D97-AF65-F5344CB8AC3E}">
-        <p14:creationId xmlns:p14="http://schemas.microsoft.com/office/powerpoint/2010/main" val="875120868"/>
+        <p14:creationId xmlns:p14="http://schemas.microsoft.com/office/powerpoint/2010/main" val="1879152718"/>
       </p:ext>
     </p:extLst>
   </p:cSld>
@@ -24287,7 +24737,7 @@
           <p:cNvPr id="2" name="TextBox 1">
             <a:extLst xmlns:a="http://schemas.openxmlformats.org/drawingml/2006/main">
               <a:ext uri="{FF2B5EF4-FFF2-40B4-BE49-F238E27FC236}">
-                <a16:creationId xmlns:a16="http://schemas.microsoft.com/office/drawing/2014/main" id="{25B22741-1535-4E99-9532-1D5F2C60218C}"/>
+                <a16:creationId xmlns:a16="http://schemas.microsoft.com/office/drawing/2014/main" id="{71D658A9-CEE4-40BA-BC76-E339A874BF9A}"/>
               </a:ext>
             </a:extLst>
           </p:cNvPr>
@@ -24334,7 +24784,7 @@
           <p:cNvPr id="3" name="TextBox 2">
             <a:extLst xmlns:a="http://schemas.openxmlformats.org/drawingml/2006/main">
               <a:ext uri="{FF2B5EF4-FFF2-40B4-BE49-F238E27FC236}">
-                <a16:creationId xmlns:a16="http://schemas.microsoft.com/office/drawing/2014/main" id="{6BA6A11C-7670-4CCB-8940-90AE6DB8CC24}"/>
+                <a16:creationId xmlns:a16="http://schemas.microsoft.com/office/drawing/2014/main" id="{B8572C14-3C0B-42EB-B8A0-01781437F687}"/>
               </a:ext>
             </a:extLst>
           </p:cNvPr>
@@ -24381,7 +24831,7 @@
           <p:cNvPr id="4" name="Rectangle 3">
             <a:extLst xmlns:a="http://schemas.openxmlformats.org/drawingml/2006/main">
               <a:ext uri="{FF2B5EF4-FFF2-40B4-BE49-F238E27FC236}">
-                <a16:creationId xmlns:a16="http://schemas.microsoft.com/office/drawing/2014/main" id="{DC45EA8C-2EB8-49CB-AD88-CED73E41406B}"/>
+                <a16:creationId xmlns:a16="http://schemas.microsoft.com/office/drawing/2014/main" id="{F214C1B5-BD7A-4D80-BE3A-E7FC43141A3F}"/>
               </a:ext>
             </a:extLst>
           </p:cNvPr>
@@ -24436,7 +24886,7 @@
           <p:cNvPr id="5" name="Rectangle 4">
             <a:extLst xmlns:a="http://schemas.openxmlformats.org/drawingml/2006/main">
               <a:ext uri="{FF2B5EF4-FFF2-40B4-BE49-F238E27FC236}">
-                <a16:creationId xmlns:a16="http://schemas.microsoft.com/office/drawing/2014/main" id="{88930A51-D5FF-4A56-A4F5-2D36B1D4428B}"/>
+                <a16:creationId xmlns:a16="http://schemas.microsoft.com/office/drawing/2014/main" id="{E2ED9FB3-EA9E-4CB8-87A5-4D0962D3B222}"/>
               </a:ext>
             </a:extLst>
           </p:cNvPr>
@@ -24491,7 +24941,7 @@
           <p:cNvPr id="6" name="TextBox 5">
             <a:extLst xmlns:a="http://schemas.openxmlformats.org/drawingml/2006/main">
               <a:ext uri="{FF2B5EF4-FFF2-40B4-BE49-F238E27FC236}">
-                <a16:creationId xmlns:a16="http://schemas.microsoft.com/office/drawing/2014/main" id="{05EA7323-4D17-4FD4-924F-FB6A440DE946}"/>
+                <a16:creationId xmlns:a16="http://schemas.microsoft.com/office/drawing/2014/main" id="{4D442D5C-AF51-4755-ABC1-0CDAC0FD36A1}"/>
               </a:ext>
             </a:extLst>
           </p:cNvPr>
@@ -24528,7 +24978,7 @@
                 <a:ea typeface="Aptos"/>
                 <a:cs typeface="Aptos"/>
               </a:rPr>
-              <a:t>Julkinen riippumaton evidenssikooste · 2026.07.24-18 · 2026-07-24 · Lähteet: WIPO valuation</a:t>
+              <a:t>Julkinen riippumaton evidenssikooste · 2026.07.24-19 · 2026-07-24 · Lähteet: WIPO valuation</a:t>
             </a:r>
           </a:p>
         </p:txBody>
@@ -24538,7 +24988,7 @@
           <p:cNvPr id="7" name="TextBox 6">
             <a:extLst xmlns:a="http://schemas.openxmlformats.org/drawingml/2006/main">
               <a:ext uri="{FF2B5EF4-FFF2-40B4-BE49-F238E27FC236}">
-                <a16:creationId xmlns:a16="http://schemas.microsoft.com/office/drawing/2014/main" id="{D5EC70D9-6ECA-4475-89DF-B2E61BE8F413}"/>
+                <a16:creationId xmlns:a16="http://schemas.microsoft.com/office/drawing/2014/main" id="{E11F4DEB-8549-40A9-A346-74BB043463E6}"/>
               </a:ext>
             </a:extLst>
           </p:cNvPr>
@@ -25271,7 +25721,7 @@
           <p:cNvPr id="9" name="TextBox 8">
             <a:extLst xmlns:a="http://schemas.openxmlformats.org/drawingml/2006/main">
               <a:ext uri="{FF2B5EF4-FFF2-40B4-BE49-F238E27FC236}">
-                <a16:creationId xmlns:a16="http://schemas.microsoft.com/office/drawing/2014/main" id="{D88301C1-BD59-4E4A-BB47-5249AD75379E}"/>
+                <a16:creationId xmlns:a16="http://schemas.microsoft.com/office/drawing/2014/main" id="{CE5E7BCC-F20E-45C1-A112-0CB5086EBAF2}"/>
               </a:ext>
             </a:extLst>
           </p:cNvPr>
@@ -25316,7 +25766,7 @@
     </p:spTree>
     <p:extLst>
       <p:ext uri="{BB962C8B-B14F-4D97-AF65-F5344CB8AC3E}">
-        <p14:creationId xmlns:p14="http://schemas.microsoft.com/office/powerpoint/2010/main" val="914548385"/>
+        <p14:creationId xmlns:p14="http://schemas.microsoft.com/office/powerpoint/2010/main" val="2011755891"/>
       </p:ext>
     </p:extLst>
   </p:cSld>
@@ -25340,7 +25790,7 @@
           <p:cNvPr id="2" name="TextBox 1">
             <a:extLst xmlns:a="http://schemas.openxmlformats.org/drawingml/2006/main">
               <a:ext uri="{FF2B5EF4-FFF2-40B4-BE49-F238E27FC236}">
-                <a16:creationId xmlns:a16="http://schemas.microsoft.com/office/drawing/2014/main" id="{82568ADC-4E8E-424D-86D2-E14122F91825}"/>
+                <a16:creationId xmlns:a16="http://schemas.microsoft.com/office/drawing/2014/main" id="{43CF31F7-E370-44E5-9AE6-5AE10DBB7AF0}"/>
               </a:ext>
             </a:extLst>
           </p:cNvPr>
@@ -25387,7 +25837,7 @@
           <p:cNvPr id="3" name="TextBox 2">
             <a:extLst xmlns:a="http://schemas.openxmlformats.org/drawingml/2006/main">
               <a:ext uri="{FF2B5EF4-FFF2-40B4-BE49-F238E27FC236}">
-                <a16:creationId xmlns:a16="http://schemas.microsoft.com/office/drawing/2014/main" id="{53E25C54-37CE-4432-9F0B-4425E9695D0C}"/>
+                <a16:creationId xmlns:a16="http://schemas.microsoft.com/office/drawing/2014/main" id="{385161BE-9833-4A87-879A-A0331C5AF1E8}"/>
               </a:ext>
             </a:extLst>
           </p:cNvPr>
@@ -25434,7 +25884,7 @@
           <p:cNvPr id="4" name="Rectangle 3">
             <a:extLst xmlns:a="http://schemas.openxmlformats.org/drawingml/2006/main">
               <a:ext uri="{FF2B5EF4-FFF2-40B4-BE49-F238E27FC236}">
-                <a16:creationId xmlns:a16="http://schemas.microsoft.com/office/drawing/2014/main" id="{8B134DF3-0F9A-46D8-BCF0-ECCC49D73293}"/>
+                <a16:creationId xmlns:a16="http://schemas.microsoft.com/office/drawing/2014/main" id="{E56243CE-2186-443A-B457-3EE00B66C611}"/>
               </a:ext>
             </a:extLst>
           </p:cNvPr>
@@ -25489,7 +25939,7 @@
           <p:cNvPr id="5" name="Rectangle 4">
             <a:extLst xmlns:a="http://schemas.openxmlformats.org/drawingml/2006/main">
               <a:ext uri="{FF2B5EF4-FFF2-40B4-BE49-F238E27FC236}">
-                <a16:creationId xmlns:a16="http://schemas.microsoft.com/office/drawing/2014/main" id="{27F11841-7F1F-4C9E-B204-B26DDF2B92C7}"/>
+                <a16:creationId xmlns:a16="http://schemas.microsoft.com/office/drawing/2014/main" id="{AE53DA74-980D-4F4E-8AFC-B6819F6E5127}"/>
               </a:ext>
             </a:extLst>
           </p:cNvPr>
@@ -25544,7 +25994,7 @@
           <p:cNvPr id="6" name="TextBox 5">
             <a:extLst xmlns:a="http://schemas.openxmlformats.org/drawingml/2006/main">
               <a:ext uri="{FF2B5EF4-FFF2-40B4-BE49-F238E27FC236}">
-                <a16:creationId xmlns:a16="http://schemas.microsoft.com/office/drawing/2014/main" id="{F350248F-A0D8-4560-9325-94A56527202F}"/>
+                <a16:creationId xmlns:a16="http://schemas.microsoft.com/office/drawing/2014/main" id="{85A97433-5C9E-4192-B11D-C8EA724B79E2}"/>
               </a:ext>
             </a:extLst>
           </p:cNvPr>
@@ -25581,7 +26031,7 @@
                 <a:ea typeface="Aptos"/>
                 <a:cs typeface="Aptos"/>
               </a:rPr>
-              <a:t>Julkinen riippumaton evidenssikooste · 2026.07.24-18 · 2026-07-24 · Lähteet: Evidence Register</a:t>
+              <a:t>Julkinen riippumaton evidenssikooste · 2026.07.24-19 · 2026-07-24 · Lähteet: Evidence Register</a:t>
             </a:r>
           </a:p>
         </p:txBody>
@@ -25591,7 +26041,7 @@
           <p:cNvPr id="7" name="TextBox 6">
             <a:extLst xmlns:a="http://schemas.openxmlformats.org/drawingml/2006/main">
               <a:ext uri="{FF2B5EF4-FFF2-40B4-BE49-F238E27FC236}">
-                <a16:creationId xmlns:a16="http://schemas.microsoft.com/office/drawing/2014/main" id="{238D9BCA-1527-4B3D-B683-2A174729AACB}"/>
+                <a16:creationId xmlns:a16="http://schemas.microsoft.com/office/drawing/2014/main" id="{E5E4F6C5-2069-4CB7-913D-4927F7980510}"/>
               </a:ext>
             </a:extLst>
           </p:cNvPr>
@@ -26161,7 +26611,7 @@
           <p:cNvPr id="9" name="TextBox 8">
             <a:extLst xmlns:a="http://schemas.openxmlformats.org/drawingml/2006/main">
               <a:ext uri="{FF2B5EF4-FFF2-40B4-BE49-F238E27FC236}">
-                <a16:creationId xmlns:a16="http://schemas.microsoft.com/office/drawing/2014/main" id="{59B0E7D6-FDB7-4E5A-A5D9-322E8EC30714}"/>
+                <a16:creationId xmlns:a16="http://schemas.microsoft.com/office/drawing/2014/main" id="{4E38BF82-7CDA-4C81-AFEA-BC9D8C739595}"/>
               </a:ext>
             </a:extLst>
           </p:cNvPr>
@@ -26206,7 +26656,7 @@
     </p:spTree>
     <p:extLst>
       <p:ext uri="{BB962C8B-B14F-4D97-AF65-F5344CB8AC3E}">
-        <p14:creationId xmlns:p14="http://schemas.microsoft.com/office/powerpoint/2010/main" val="1274451090"/>
+        <p14:creationId xmlns:p14="http://schemas.microsoft.com/office/powerpoint/2010/main" val="1430400932"/>
       </p:ext>
     </p:extLst>
   </p:cSld>
@@ -26230,7 +26680,7 @@
           <p:cNvPr id="2" name="TextBox 1">
             <a:extLst xmlns:a="http://schemas.openxmlformats.org/drawingml/2006/main">
               <a:ext uri="{FF2B5EF4-FFF2-40B4-BE49-F238E27FC236}">
-                <a16:creationId xmlns:a16="http://schemas.microsoft.com/office/drawing/2014/main" id="{74BE8D5C-8DF3-4D0E-99E8-841AF2B7A023}"/>
+                <a16:creationId xmlns:a16="http://schemas.microsoft.com/office/drawing/2014/main" id="{47EE18FB-2D9D-4640-8B3B-BA10F9F297B2}"/>
               </a:ext>
             </a:extLst>
           </p:cNvPr>
@@ -26277,7 +26727,7 @@
           <p:cNvPr id="3" name="TextBox 2">
             <a:extLst xmlns:a="http://schemas.openxmlformats.org/drawingml/2006/main">
               <a:ext uri="{FF2B5EF4-FFF2-40B4-BE49-F238E27FC236}">
-                <a16:creationId xmlns:a16="http://schemas.microsoft.com/office/drawing/2014/main" id="{ABA30582-EDDD-4AC2-8123-1B453BC3B278}"/>
+                <a16:creationId xmlns:a16="http://schemas.microsoft.com/office/drawing/2014/main" id="{4F36A81A-2E16-463A-AE7A-DA55164CEC6E}"/>
               </a:ext>
             </a:extLst>
           </p:cNvPr>
@@ -26324,7 +26774,7 @@
           <p:cNvPr id="4" name="Rectangle 3">
             <a:extLst xmlns:a="http://schemas.openxmlformats.org/drawingml/2006/main">
               <a:ext uri="{FF2B5EF4-FFF2-40B4-BE49-F238E27FC236}">
-                <a16:creationId xmlns:a16="http://schemas.microsoft.com/office/drawing/2014/main" id="{2E36ED69-FCE8-49A4-AE05-65F83D367A7F}"/>
+                <a16:creationId xmlns:a16="http://schemas.microsoft.com/office/drawing/2014/main" id="{25C1087F-AFA3-4A2A-AC06-89DF2AAB5175}"/>
               </a:ext>
             </a:extLst>
           </p:cNvPr>
@@ -26379,7 +26829,7 @@
           <p:cNvPr id="5" name="Rectangle 4">
             <a:extLst xmlns:a="http://schemas.openxmlformats.org/drawingml/2006/main">
               <a:ext uri="{FF2B5EF4-FFF2-40B4-BE49-F238E27FC236}">
-                <a16:creationId xmlns:a16="http://schemas.microsoft.com/office/drawing/2014/main" id="{7FE1C43E-F286-4852-A651-9847F05CCC9B}"/>
+                <a16:creationId xmlns:a16="http://schemas.microsoft.com/office/drawing/2014/main" id="{658B0ED8-735C-4A8E-B925-F7A619DC248A}"/>
               </a:ext>
             </a:extLst>
           </p:cNvPr>
@@ -26434,7 +26884,7 @@
           <p:cNvPr id="6" name="TextBox 5">
             <a:extLst xmlns:a="http://schemas.openxmlformats.org/drawingml/2006/main">
               <a:ext uri="{FF2B5EF4-FFF2-40B4-BE49-F238E27FC236}">
-                <a16:creationId xmlns:a16="http://schemas.microsoft.com/office/drawing/2014/main" id="{4C7A89DF-558B-4440-936D-BFD192BE23EE}"/>
+                <a16:creationId xmlns:a16="http://schemas.microsoft.com/office/drawing/2014/main" id="{E0F8549E-A872-49CE-9884-B06139CAEA94}"/>
               </a:ext>
             </a:extLst>
           </p:cNvPr>
@@ -26471,7 +26921,7 @@
                 <a:ea typeface="Aptos"/>
                 <a:cs typeface="Aptos"/>
               </a:rPr>
-              <a:t>Julkinen riippumaton evidenssikooste · 2026.07.24-18 · 2026-07-24 · Lähteet: Evidence Register</a:t>
+              <a:t>Julkinen riippumaton evidenssikooste · 2026.07.24-19 · 2026-07-24 · Lähteet: Evidence Register</a:t>
             </a:r>
           </a:p>
         </p:txBody>
@@ -26481,7 +26931,7 @@
           <p:cNvPr id="7" name="TextBox 6">
             <a:extLst xmlns:a="http://schemas.openxmlformats.org/drawingml/2006/main">
               <a:ext uri="{FF2B5EF4-FFF2-40B4-BE49-F238E27FC236}">
-                <a16:creationId xmlns:a16="http://schemas.microsoft.com/office/drawing/2014/main" id="{9EFF6458-2022-403F-A828-9F7D0DF2F3C6}"/>
+                <a16:creationId xmlns:a16="http://schemas.microsoft.com/office/drawing/2014/main" id="{674075B9-0BC6-47D2-A150-177454B101B9}"/>
               </a:ext>
             </a:extLst>
           </p:cNvPr>
@@ -27134,7 +27584,7 @@
           <p:cNvPr id="9" name="TextBox 8">
             <a:extLst xmlns:a="http://schemas.openxmlformats.org/drawingml/2006/main">
               <a:ext uri="{FF2B5EF4-FFF2-40B4-BE49-F238E27FC236}">
-                <a16:creationId xmlns:a16="http://schemas.microsoft.com/office/drawing/2014/main" id="{3022F10D-C73F-41D2-931B-D4387C554B04}"/>
+                <a16:creationId xmlns:a16="http://schemas.microsoft.com/office/drawing/2014/main" id="{D340CAD2-EECE-4D6A-8218-D3C6AF812A7D}"/>
               </a:ext>
             </a:extLst>
           </p:cNvPr>
@@ -27179,7 +27629,7 @@
     </p:spTree>
     <p:extLst>
       <p:ext uri="{BB962C8B-B14F-4D97-AF65-F5344CB8AC3E}">
-        <p14:creationId xmlns:p14="http://schemas.microsoft.com/office/powerpoint/2010/main" val="1699592239"/>
+        <p14:creationId xmlns:p14="http://schemas.microsoft.com/office/powerpoint/2010/main" val="1820419739"/>
       </p:ext>
     </p:extLst>
   </p:cSld>
@@ -27203,7 +27653,7 @@
           <p:cNvPr id="2" name="TextBox 1">
             <a:extLst xmlns:a="http://schemas.openxmlformats.org/drawingml/2006/main">
               <a:ext uri="{FF2B5EF4-FFF2-40B4-BE49-F238E27FC236}">
-                <a16:creationId xmlns:a16="http://schemas.microsoft.com/office/drawing/2014/main" id="{4CA47C84-DF59-47FB-AD40-3B555AD7AB79}"/>
+                <a16:creationId xmlns:a16="http://schemas.microsoft.com/office/drawing/2014/main" id="{4910299E-D606-418B-BDC9-35DED3E87181}"/>
               </a:ext>
             </a:extLst>
           </p:cNvPr>
@@ -27250,7 +27700,7 @@
           <p:cNvPr id="3" name="TextBox 2">
             <a:extLst xmlns:a="http://schemas.openxmlformats.org/drawingml/2006/main">
               <a:ext uri="{FF2B5EF4-FFF2-40B4-BE49-F238E27FC236}">
-                <a16:creationId xmlns:a16="http://schemas.microsoft.com/office/drawing/2014/main" id="{A585D150-D09C-4FB1-84E8-20A075C55F47}"/>
+                <a16:creationId xmlns:a16="http://schemas.microsoft.com/office/drawing/2014/main" id="{3D438379-C70B-4157-9566-90B90046DF89}"/>
               </a:ext>
             </a:extLst>
           </p:cNvPr>
@@ -27262,7 +27712,7 @@
         <p:spPr>
           <a:xfrm xmlns:a="http://schemas.openxmlformats.org/drawingml/2006/main">
             <a:off x="502920" y="621792"/>
-            <a:ext cx="11109960" cy="548640"/>
+            <a:ext cx="11109960" cy="591312"/>
           </a:xfrm>
           <a:prstGeom xmlns:a="http://schemas.openxmlformats.org/drawingml/2006/main" prst="rect">
             <a:avLst/>
@@ -27270,8 +27720,8 @@
           <a:noFill xmlns:a="http://schemas.openxmlformats.org/drawingml/2006/main"/>
         </p:spPr>
         <p:txBody>
-          <a:bodyPr xmlns:a="http://schemas.openxmlformats.org/drawingml/2006/main" wrap="square" lIns="36576" tIns="36576" rIns="36576" bIns="36576" anchor="t">
-            <a:spAutoFit/>
+          <a:bodyPr xmlns:a="http://schemas.openxmlformats.org/drawingml/2006/main" wrap="none" lIns="36576" tIns="36576" rIns="36576" bIns="36576" anchor="t">
+            <a:normAutofit fontScale="100000"/>
           </a:bodyPr>
           <a:lstStyle xmlns:a="http://schemas.openxmlformats.org/drawingml/2006/main"/>
           <a:p xmlns:a="http://schemas.openxmlformats.org/drawingml/2006/main">
@@ -27279,7 +27729,7 @@
               <a:buNone/>
             </a:pPr>
             <a:r>
-              <a:rPr sz="3400" b="1">
+              <a:rPr sz="2400" b="1">
                 <a:solidFill>
                   <a:srgbClr val="071A2B"/>
                 </a:solidFill>
@@ -27287,7 +27737,7 @@
                 <a:ea typeface="Aptos"/>
                 <a:cs typeface="Aptos"/>
               </a:rPr>
-              <a:t>90 päivän ohjelma muuttaa aukot päätöskelpoisiksi kontrolleiksi</a:t>
+              <a:t>90 päivää muuttaa aukot kontrolleiksi</a:t>
             </a:r>
           </a:p>
         </p:txBody>
@@ -27297,7 +27747,7 @@
           <p:cNvPr id="4" name="Rectangle 3">
             <a:extLst xmlns:a="http://schemas.openxmlformats.org/drawingml/2006/main">
               <a:ext uri="{FF2B5EF4-FFF2-40B4-BE49-F238E27FC236}">
-                <a16:creationId xmlns:a16="http://schemas.microsoft.com/office/drawing/2014/main" id="{29826832-A498-470A-8197-605C63D9D569}"/>
+                <a16:creationId xmlns:a16="http://schemas.microsoft.com/office/drawing/2014/main" id="{1B89B6DB-7654-40F3-9140-23A86EAB3C12}"/>
               </a:ext>
             </a:extLst>
           </p:cNvPr>
@@ -27352,7 +27802,7 @@
           <p:cNvPr id="5" name="Rectangle 4">
             <a:extLst xmlns:a="http://schemas.openxmlformats.org/drawingml/2006/main">
               <a:ext uri="{FF2B5EF4-FFF2-40B4-BE49-F238E27FC236}">
-                <a16:creationId xmlns:a16="http://schemas.microsoft.com/office/drawing/2014/main" id="{E62006EC-0FAB-4C8F-8DE3-62C27D9AC558}"/>
+                <a16:creationId xmlns:a16="http://schemas.microsoft.com/office/drawing/2014/main" id="{33393190-6B16-4016-AEC9-069087A2D0D8}"/>
               </a:ext>
             </a:extLst>
           </p:cNvPr>
@@ -27407,7 +27857,7 @@
           <p:cNvPr id="6" name="TextBox 5">
             <a:extLst xmlns:a="http://schemas.openxmlformats.org/drawingml/2006/main">
               <a:ext uri="{FF2B5EF4-FFF2-40B4-BE49-F238E27FC236}">
-                <a16:creationId xmlns:a16="http://schemas.microsoft.com/office/drawing/2014/main" id="{C5CF3B10-A2C7-482F-A73F-A44F6FDBA289}"/>
+                <a16:creationId xmlns:a16="http://schemas.microsoft.com/office/drawing/2014/main" id="{EDCC2DA9-18ED-41B2-BA0C-BF361A9A7CB0}"/>
               </a:ext>
             </a:extLst>
           </p:cNvPr>
@@ -27444,7 +27894,7 @@
                 <a:ea typeface="Aptos"/>
                 <a:cs typeface="Aptos"/>
               </a:rPr>
-              <a:t>Julkinen riippumaton evidenssikooste · 2026.07.24-18 · 2026-07-24 · Lähteet: Evidence Register; changelog</a:t>
+              <a:t>Julkinen riippumaton evidenssikooste · 2026.07.24-19 · 2026-07-24 · Lähteet: Evidence Register; changelog</a:t>
             </a:r>
           </a:p>
         </p:txBody>
@@ -27454,7 +27904,7 @@
           <p:cNvPr id="7" name="TextBox 6">
             <a:extLst xmlns:a="http://schemas.openxmlformats.org/drawingml/2006/main">
               <a:ext uri="{FF2B5EF4-FFF2-40B4-BE49-F238E27FC236}">
-                <a16:creationId xmlns:a16="http://schemas.microsoft.com/office/drawing/2014/main" id="{CA36976C-5634-4288-9E0C-279B0978CFE6}"/>
+                <a16:creationId xmlns:a16="http://schemas.microsoft.com/office/drawing/2014/main" id="{A159E39A-D001-415F-80AF-CB983AC6CC5C}"/>
               </a:ext>
             </a:extLst>
           </p:cNvPr>
@@ -27501,7 +27951,7 @@
           <p:cNvPr id="8" name="Rounded Rectangle 7">
             <a:extLst xmlns:a="http://schemas.openxmlformats.org/drawingml/2006/main">
               <a:ext uri="{FF2B5EF4-FFF2-40B4-BE49-F238E27FC236}">
-                <a16:creationId xmlns:a16="http://schemas.microsoft.com/office/drawing/2014/main" id="{0D56098A-099F-4140-8929-B1BE320E184A}"/>
+                <a16:creationId xmlns:a16="http://schemas.microsoft.com/office/drawing/2014/main" id="{C7D7DCFE-08D4-4A28-B9EF-78F0811459F9}"/>
               </a:ext>
             </a:extLst>
           </p:cNvPr>
@@ -27558,7 +28008,7 @@
           <p:cNvPr id="9" name="TextBox 8">
             <a:extLst xmlns:a="http://schemas.openxmlformats.org/drawingml/2006/main">
               <a:ext uri="{FF2B5EF4-FFF2-40B4-BE49-F238E27FC236}">
-                <a16:creationId xmlns:a16="http://schemas.microsoft.com/office/drawing/2014/main" id="{77F0541D-0424-4403-ABFD-DF3F1FB98A06}"/>
+                <a16:creationId xmlns:a16="http://schemas.microsoft.com/office/drawing/2014/main" id="{0EA8636D-21D8-42F1-A07D-F77F74342116}"/>
               </a:ext>
             </a:extLst>
           </p:cNvPr>
@@ -27605,7 +28055,7 @@
           <p:cNvPr id="10" name="TextBox 9">
             <a:extLst xmlns:a="http://schemas.openxmlformats.org/drawingml/2006/main">
               <a:ext uri="{FF2B5EF4-FFF2-40B4-BE49-F238E27FC236}">
-                <a16:creationId xmlns:a16="http://schemas.microsoft.com/office/drawing/2014/main" id="{D7B8CE1E-B671-45E4-96AC-33B8FC80E025}"/>
+                <a16:creationId xmlns:a16="http://schemas.microsoft.com/office/drawing/2014/main" id="{D83D6B62-025B-4928-8976-2643C31C1F74}"/>
               </a:ext>
             </a:extLst>
           </p:cNvPr>
@@ -27652,7 +28102,7 @@
           <p:cNvPr id="11" name="TextBox 10">
             <a:extLst xmlns:a="http://schemas.openxmlformats.org/drawingml/2006/main">
               <a:ext uri="{FF2B5EF4-FFF2-40B4-BE49-F238E27FC236}">
-                <a16:creationId xmlns:a16="http://schemas.microsoft.com/office/drawing/2014/main" id="{91773197-B2CE-4A41-ADB4-7382810AE6C2}"/>
+                <a16:creationId xmlns:a16="http://schemas.microsoft.com/office/drawing/2014/main" id="{8E8F8819-B02E-4040-A2D7-B78E1A6E388A}"/>
               </a:ext>
             </a:extLst>
           </p:cNvPr>
@@ -27699,7 +28149,7 @@
           <p:cNvPr id="12" name="Rounded Rectangle 11">
             <a:extLst xmlns:a="http://schemas.openxmlformats.org/drawingml/2006/main">
               <a:ext uri="{FF2B5EF4-FFF2-40B4-BE49-F238E27FC236}">
-                <a16:creationId xmlns:a16="http://schemas.microsoft.com/office/drawing/2014/main" id="{7DC636E5-1AAE-4B03-B978-618970988AC2}"/>
+                <a16:creationId xmlns:a16="http://schemas.microsoft.com/office/drawing/2014/main" id="{A86F69CA-A6C4-4D15-B894-0D99A5CE689C}"/>
               </a:ext>
             </a:extLst>
           </p:cNvPr>
@@ -27756,7 +28206,7 @@
           <p:cNvPr id="13" name="TextBox 12">
             <a:extLst xmlns:a="http://schemas.openxmlformats.org/drawingml/2006/main">
               <a:ext uri="{FF2B5EF4-FFF2-40B4-BE49-F238E27FC236}">
-                <a16:creationId xmlns:a16="http://schemas.microsoft.com/office/drawing/2014/main" id="{B2CD2982-88FD-4427-81C0-23B2BEAB2C0B}"/>
+                <a16:creationId xmlns:a16="http://schemas.microsoft.com/office/drawing/2014/main" id="{784A4F71-F3CE-49B1-A9A3-31079A99AB45}"/>
               </a:ext>
             </a:extLst>
           </p:cNvPr>
@@ -27803,7 +28253,7 @@
           <p:cNvPr id="14" name="TextBox 13">
             <a:extLst xmlns:a="http://schemas.openxmlformats.org/drawingml/2006/main">
               <a:ext uri="{FF2B5EF4-FFF2-40B4-BE49-F238E27FC236}">
-                <a16:creationId xmlns:a16="http://schemas.microsoft.com/office/drawing/2014/main" id="{5B444C85-03AD-425C-903A-334A6374A1BB}"/>
+                <a16:creationId xmlns:a16="http://schemas.microsoft.com/office/drawing/2014/main" id="{22DAF340-368B-4EA4-9537-4F40AC81D9F7}"/>
               </a:ext>
             </a:extLst>
           </p:cNvPr>
@@ -27850,7 +28300,7 @@
           <p:cNvPr id="15" name="TextBox 14">
             <a:extLst xmlns:a="http://schemas.openxmlformats.org/drawingml/2006/main">
               <a:ext uri="{FF2B5EF4-FFF2-40B4-BE49-F238E27FC236}">
-                <a16:creationId xmlns:a16="http://schemas.microsoft.com/office/drawing/2014/main" id="{B7E71216-1AD8-4378-A668-5BB97E9CC746}"/>
+                <a16:creationId xmlns:a16="http://schemas.microsoft.com/office/drawing/2014/main" id="{455430F4-674A-4A19-8875-EE920AF8FC60}"/>
               </a:ext>
             </a:extLst>
           </p:cNvPr>
@@ -27897,7 +28347,7 @@
           <p:cNvPr id="16" name="Rounded Rectangle 15">
             <a:extLst xmlns:a="http://schemas.openxmlformats.org/drawingml/2006/main">
               <a:ext uri="{FF2B5EF4-FFF2-40B4-BE49-F238E27FC236}">
-                <a16:creationId xmlns:a16="http://schemas.microsoft.com/office/drawing/2014/main" id="{67375B7B-5D3A-475E-8C80-06281423A539}"/>
+                <a16:creationId xmlns:a16="http://schemas.microsoft.com/office/drawing/2014/main" id="{0F30B8C3-A9A3-4EA7-AB23-A16A4ACEAFF8}"/>
               </a:ext>
             </a:extLst>
           </p:cNvPr>
@@ -27954,7 +28404,7 @@
           <p:cNvPr id="17" name="TextBox 16">
             <a:extLst xmlns:a="http://schemas.openxmlformats.org/drawingml/2006/main">
               <a:ext uri="{FF2B5EF4-FFF2-40B4-BE49-F238E27FC236}">
-                <a16:creationId xmlns:a16="http://schemas.microsoft.com/office/drawing/2014/main" id="{7C338CA9-E5DB-4FC1-BDA7-04A4F76A8E7D}"/>
+                <a16:creationId xmlns:a16="http://schemas.microsoft.com/office/drawing/2014/main" id="{DE1BB2EF-BA0B-4F0D-B626-5FA3E3DE1708}"/>
               </a:ext>
             </a:extLst>
           </p:cNvPr>
@@ -28001,7 +28451,7 @@
           <p:cNvPr id="18" name="TextBox 17">
             <a:extLst xmlns:a="http://schemas.openxmlformats.org/drawingml/2006/main">
               <a:ext uri="{FF2B5EF4-FFF2-40B4-BE49-F238E27FC236}">
-                <a16:creationId xmlns:a16="http://schemas.microsoft.com/office/drawing/2014/main" id="{CC81614C-1BBE-4FE0-AC25-422CF0728C85}"/>
+                <a16:creationId xmlns:a16="http://schemas.microsoft.com/office/drawing/2014/main" id="{9449D0FC-5122-4A1C-9F82-F3A201C56721}"/>
               </a:ext>
             </a:extLst>
           </p:cNvPr>
@@ -28048,7 +28498,7 @@
           <p:cNvPr id="19" name="TextBox 18">
             <a:extLst xmlns:a="http://schemas.openxmlformats.org/drawingml/2006/main">
               <a:ext uri="{FF2B5EF4-FFF2-40B4-BE49-F238E27FC236}">
-                <a16:creationId xmlns:a16="http://schemas.microsoft.com/office/drawing/2014/main" id="{F6164C5B-5BDC-4274-A35B-C99E66E97CB4}"/>
+                <a16:creationId xmlns:a16="http://schemas.microsoft.com/office/drawing/2014/main" id="{5251D8D5-3EB2-454C-8FB1-EAB3C0DDACE5}"/>
               </a:ext>
             </a:extLst>
           </p:cNvPr>
@@ -28095,7 +28545,7 @@
           <p:cNvPr id="20" name="Rounded Rectangle 19">
             <a:extLst xmlns:a="http://schemas.openxmlformats.org/drawingml/2006/main">
               <a:ext uri="{FF2B5EF4-FFF2-40B4-BE49-F238E27FC236}">
-                <a16:creationId xmlns:a16="http://schemas.microsoft.com/office/drawing/2014/main" id="{506822D0-3C63-4179-9F47-D6B4CCF26569}"/>
+                <a16:creationId xmlns:a16="http://schemas.microsoft.com/office/drawing/2014/main" id="{D3C43F52-C3E6-4C44-B1E4-190334A92798}"/>
               </a:ext>
             </a:extLst>
           </p:cNvPr>
@@ -28152,7 +28602,7 @@
           <p:cNvPr id="21" name="TextBox 20">
             <a:extLst xmlns:a="http://schemas.openxmlformats.org/drawingml/2006/main">
               <a:ext uri="{FF2B5EF4-FFF2-40B4-BE49-F238E27FC236}">
-                <a16:creationId xmlns:a16="http://schemas.microsoft.com/office/drawing/2014/main" id="{E0A9B3B4-162D-41AA-A996-EA6D2641C412}"/>
+                <a16:creationId xmlns:a16="http://schemas.microsoft.com/office/drawing/2014/main" id="{D245FEC3-BAB3-4488-9024-11BF17E658F9}"/>
               </a:ext>
             </a:extLst>
           </p:cNvPr>
@@ -28199,7 +28649,7 @@
           <p:cNvPr id="22" name="TextBox 21">
             <a:extLst xmlns:a="http://schemas.openxmlformats.org/drawingml/2006/main">
               <a:ext uri="{FF2B5EF4-FFF2-40B4-BE49-F238E27FC236}">
-                <a16:creationId xmlns:a16="http://schemas.microsoft.com/office/drawing/2014/main" id="{FFB0CD7E-31EF-43DE-9FF7-DA321C47D02A}"/>
+                <a16:creationId xmlns:a16="http://schemas.microsoft.com/office/drawing/2014/main" id="{C7E977CD-331A-47FC-9DD7-AB0814281F3B}"/>
               </a:ext>
             </a:extLst>
           </p:cNvPr>
@@ -28246,7 +28696,7 @@
           <p:cNvPr id="23" name="TextBox 22">
             <a:extLst xmlns:a="http://schemas.openxmlformats.org/drawingml/2006/main">
               <a:ext uri="{FF2B5EF4-FFF2-40B4-BE49-F238E27FC236}">
-                <a16:creationId xmlns:a16="http://schemas.microsoft.com/office/drawing/2014/main" id="{D2AD698F-25A9-4959-B6B5-E211FEBA10C7}"/>
+                <a16:creationId xmlns:a16="http://schemas.microsoft.com/office/drawing/2014/main" id="{26A99C1C-C4C3-43B7-A2AC-11BAB02C7949}"/>
               </a:ext>
             </a:extLst>
           </p:cNvPr>
@@ -28293,7 +28743,7 @@
           <p:cNvPr id="24" name="TextBox 23">
             <a:extLst xmlns:a="http://schemas.openxmlformats.org/drawingml/2006/main">
               <a:ext uri="{FF2B5EF4-FFF2-40B4-BE49-F238E27FC236}">
-                <a16:creationId xmlns:a16="http://schemas.microsoft.com/office/drawing/2014/main" id="{392D6892-8A64-465E-A51C-854F55C8B48D}"/>
+                <a16:creationId xmlns:a16="http://schemas.microsoft.com/office/drawing/2014/main" id="{64D5640E-E05E-488C-82C9-8E450669F334}"/>
               </a:ext>
             </a:extLst>
           </p:cNvPr>
@@ -28338,7 +28788,7 @@
     </p:spTree>
     <p:extLst>
       <p:ext uri="{BB962C8B-B14F-4D97-AF65-F5344CB8AC3E}">
-        <p14:creationId xmlns:p14="http://schemas.microsoft.com/office/powerpoint/2010/main" val="208755269"/>
+        <p14:creationId xmlns:p14="http://schemas.microsoft.com/office/powerpoint/2010/main" val="2105714055"/>
       </p:ext>
     </p:extLst>
   </p:cSld>
@@ -28362,7 +28812,7 @@
           <p:cNvPr id="2" name="TextBox 1">
             <a:extLst xmlns:a="http://schemas.openxmlformats.org/drawingml/2006/main">
               <a:ext uri="{FF2B5EF4-FFF2-40B4-BE49-F238E27FC236}">
-                <a16:creationId xmlns:a16="http://schemas.microsoft.com/office/drawing/2014/main" id="{8DA60882-4233-435F-A463-FDCDC8252D11}"/>
+                <a16:creationId xmlns:a16="http://schemas.microsoft.com/office/drawing/2014/main" id="{3F3E9535-9A64-44AF-B7E1-203C02B92B03}"/>
               </a:ext>
             </a:extLst>
           </p:cNvPr>
@@ -28409,7 +28859,7 @@
           <p:cNvPr id="3" name="TextBox 2">
             <a:extLst xmlns:a="http://schemas.openxmlformats.org/drawingml/2006/main">
               <a:ext uri="{FF2B5EF4-FFF2-40B4-BE49-F238E27FC236}">
-                <a16:creationId xmlns:a16="http://schemas.microsoft.com/office/drawing/2014/main" id="{2065D398-25BD-4AFD-9EEE-9B0CA0A5F236}"/>
+                <a16:creationId xmlns:a16="http://schemas.microsoft.com/office/drawing/2014/main" id="{13CE201A-943F-430C-B62C-CAEC234629B2}"/>
               </a:ext>
             </a:extLst>
           </p:cNvPr>
@@ -28456,7 +28906,7 @@
           <p:cNvPr id="4" name="Rectangle 3">
             <a:extLst xmlns:a="http://schemas.openxmlformats.org/drawingml/2006/main">
               <a:ext uri="{FF2B5EF4-FFF2-40B4-BE49-F238E27FC236}">
-                <a16:creationId xmlns:a16="http://schemas.microsoft.com/office/drawing/2014/main" id="{049BC370-0110-4994-809A-ACCACD98CE5B}"/>
+                <a16:creationId xmlns:a16="http://schemas.microsoft.com/office/drawing/2014/main" id="{85FECCBB-D57F-418F-95F3-EBD0608B7A7D}"/>
               </a:ext>
             </a:extLst>
           </p:cNvPr>
@@ -28511,7 +28961,7 @@
           <p:cNvPr id="5" name="Rectangle 4">
             <a:extLst xmlns:a="http://schemas.openxmlformats.org/drawingml/2006/main">
               <a:ext uri="{FF2B5EF4-FFF2-40B4-BE49-F238E27FC236}">
-                <a16:creationId xmlns:a16="http://schemas.microsoft.com/office/drawing/2014/main" id="{6B40E43E-6A63-44E6-AC91-CBC958325409}"/>
+                <a16:creationId xmlns:a16="http://schemas.microsoft.com/office/drawing/2014/main" id="{045C31AB-9F7E-427F-8881-86098C1A7B9B}"/>
               </a:ext>
             </a:extLst>
           </p:cNvPr>
@@ -28566,7 +29016,7 @@
           <p:cNvPr id="6" name="TextBox 5">
             <a:extLst xmlns:a="http://schemas.openxmlformats.org/drawingml/2006/main">
               <a:ext uri="{FF2B5EF4-FFF2-40B4-BE49-F238E27FC236}">
-                <a16:creationId xmlns:a16="http://schemas.microsoft.com/office/drawing/2014/main" id="{CD5864BE-F758-4763-A242-F163676C5307}"/>
+                <a16:creationId xmlns:a16="http://schemas.microsoft.com/office/drawing/2014/main" id="{BE6137E4-3682-4CDB-85D6-A56496339216}"/>
               </a:ext>
             </a:extLst>
           </p:cNvPr>
@@ -28603,7 +29053,7 @@
                 <a:ea typeface="Aptos"/>
                 <a:cs typeface="Aptos"/>
               </a:rPr>
-              <a:t>Julkinen riippumaton evidenssikooste · 2026.07.24-18 · 2026-07-24 · Lähteet: EPO; 8 Ni 18/24 (EP); 7 O 3341/24</a:t>
+              <a:t>Julkinen riippumaton evidenssikooste · 2026.07.24-19 · 2026-07-24 · Lähteet: EPO; 8 Ni 18/24 (EP); 7 O 3341/24</a:t>
             </a:r>
           </a:p>
         </p:txBody>
@@ -28613,7 +29063,7 @@
           <p:cNvPr id="7" name="TextBox 6">
             <a:extLst xmlns:a="http://schemas.openxmlformats.org/drawingml/2006/main">
               <a:ext uri="{FF2B5EF4-FFF2-40B4-BE49-F238E27FC236}">
-                <a16:creationId xmlns:a16="http://schemas.microsoft.com/office/drawing/2014/main" id="{7EA21D65-20FA-4308-8F66-3A96BBE904AD}"/>
+                <a16:creationId xmlns:a16="http://schemas.microsoft.com/office/drawing/2014/main" id="{B0F6FF27-8DF5-428E-903D-7ACBE5873284}"/>
               </a:ext>
             </a:extLst>
           </p:cNvPr>
@@ -29017,7 +29467,7 @@
           <p:cNvPr id="9" name="TextBox 8">
             <a:extLst xmlns:a="http://schemas.openxmlformats.org/drawingml/2006/main">
               <a:ext uri="{FF2B5EF4-FFF2-40B4-BE49-F238E27FC236}">
-                <a16:creationId xmlns:a16="http://schemas.microsoft.com/office/drawing/2014/main" id="{DF0054CD-DDA9-4E7F-AFCD-6FFF293DC5E0}"/>
+                <a16:creationId xmlns:a16="http://schemas.microsoft.com/office/drawing/2014/main" id="{29CD01B2-916F-476F-83A7-7265AE3F4503}"/>
               </a:ext>
             </a:extLst>
           </p:cNvPr>
@@ -29062,7 +29512,7 @@
     </p:spTree>
     <p:extLst>
       <p:ext uri="{BB962C8B-B14F-4D97-AF65-F5344CB8AC3E}">
-        <p14:creationId xmlns:p14="http://schemas.microsoft.com/office/powerpoint/2010/main" val="362326078"/>
+        <p14:creationId xmlns:p14="http://schemas.microsoft.com/office/powerpoint/2010/main" val="1947042971"/>
       </p:ext>
     </p:extLst>
   </p:cSld>
@@ -29093,7 +29543,7 @@
           <p:cNvPr id="2" name="TextBox 1">
             <a:extLst xmlns:a="http://schemas.openxmlformats.org/drawingml/2006/main">
               <a:ext uri="{FF2B5EF4-FFF2-40B4-BE49-F238E27FC236}">
-                <a16:creationId xmlns:a16="http://schemas.microsoft.com/office/drawing/2014/main" id="{7BCF5497-7DB9-46ED-804E-89339C976C4A}"/>
+                <a16:creationId xmlns:a16="http://schemas.microsoft.com/office/drawing/2014/main" id="{327B96C5-8B42-481C-A7BD-3D9DB0C3BF19}"/>
               </a:ext>
             </a:extLst>
           </p:cNvPr>
@@ -29140,7 +29590,7 @@
           <p:cNvPr id="3" name="TextBox 2">
             <a:extLst xmlns:a="http://schemas.openxmlformats.org/drawingml/2006/main">
               <a:ext uri="{FF2B5EF4-FFF2-40B4-BE49-F238E27FC236}">
-                <a16:creationId xmlns:a16="http://schemas.microsoft.com/office/drawing/2014/main" id="{69161C52-C20E-499F-A7C8-8ACAC4853EFB}"/>
+                <a16:creationId xmlns:a16="http://schemas.microsoft.com/office/drawing/2014/main" id="{970F58A9-4FAD-41A8-92C9-BCB273737EB3}"/>
               </a:ext>
             </a:extLst>
           </p:cNvPr>
@@ -29187,7 +29637,7 @@
           <p:cNvPr id="4" name="TextBox 3">
             <a:extLst xmlns:a="http://schemas.openxmlformats.org/drawingml/2006/main">
               <a:ext uri="{FF2B5EF4-FFF2-40B4-BE49-F238E27FC236}">
-                <a16:creationId xmlns:a16="http://schemas.microsoft.com/office/drawing/2014/main" id="{C221BC9A-6708-49D7-BD9A-2034968AB1F5}"/>
+                <a16:creationId xmlns:a16="http://schemas.microsoft.com/office/drawing/2014/main" id="{48ED9622-7D42-4C55-9B64-2872AF6EB7B2}"/>
               </a:ext>
             </a:extLst>
           </p:cNvPr>
@@ -29306,7 +29756,7 @@
           <p:cNvPr id="5" name="TextBox 4">
             <a:extLst xmlns:a="http://schemas.openxmlformats.org/drawingml/2006/main">
               <a:ext uri="{FF2B5EF4-FFF2-40B4-BE49-F238E27FC236}">
-                <a16:creationId xmlns:a16="http://schemas.microsoft.com/office/drawing/2014/main" id="{6A3B3518-1748-4423-BCE5-07AEBF88AC7C}"/>
+                <a16:creationId xmlns:a16="http://schemas.microsoft.com/office/drawing/2014/main" id="{742FBFA6-634E-4022-B2E4-3E857563EFC2}"/>
               </a:ext>
             </a:extLst>
           </p:cNvPr>
@@ -29343,7 +29793,7 @@
                 <a:ea typeface="Aptos"/>
                 <a:cs typeface="Aptos"/>
               </a:rPr>
-              <a:t>Versio 2026.07.24-18 · 2026-07-24 · 30 / 30</a:t>
+              <a:t>Versio 2026.07.24-19 · 2026-07-24 · 30 / 30</a:t>
             </a:r>
           </a:p>
         </p:txBody>
@@ -29351,7 +29801,7 @@
     </p:spTree>
     <p:extLst>
       <p:ext uri="{BB962C8B-B14F-4D97-AF65-F5344CB8AC3E}">
-        <p14:creationId xmlns:p14="http://schemas.microsoft.com/office/powerpoint/2010/main" val="790164107"/>
+        <p14:creationId xmlns:p14="http://schemas.microsoft.com/office/powerpoint/2010/main" val="1708089576"/>
       </p:ext>
     </p:extLst>
   </p:cSld>
@@ -29375,7 +29825,7 @@
           <p:cNvPr id="2" name="TextBox 1">
             <a:extLst xmlns:a="http://schemas.openxmlformats.org/drawingml/2006/main">
               <a:ext uri="{FF2B5EF4-FFF2-40B4-BE49-F238E27FC236}">
-                <a16:creationId xmlns:a16="http://schemas.microsoft.com/office/drawing/2014/main" id="{EEDBFEB0-AC6C-47B9-BEE7-B175AD9E2038}"/>
+                <a16:creationId xmlns:a16="http://schemas.microsoft.com/office/drawing/2014/main" id="{C6E9F5D8-443E-416B-994C-BB3B3B47404D}"/>
               </a:ext>
             </a:extLst>
           </p:cNvPr>
@@ -29422,7 +29872,7 @@
           <p:cNvPr id="3" name="TextBox 2">
             <a:extLst xmlns:a="http://schemas.openxmlformats.org/drawingml/2006/main">
               <a:ext uri="{FF2B5EF4-FFF2-40B4-BE49-F238E27FC236}">
-                <a16:creationId xmlns:a16="http://schemas.microsoft.com/office/drawing/2014/main" id="{7653FFAE-ECAB-4BEE-9102-97A77D7A90BE}"/>
+                <a16:creationId xmlns:a16="http://schemas.microsoft.com/office/drawing/2014/main" id="{F3FA69BB-C145-46ED-8209-A8BAAC47B556}"/>
               </a:ext>
             </a:extLst>
           </p:cNvPr>
@@ -29434,7 +29884,7 @@
         <p:spPr>
           <a:xfrm xmlns:a="http://schemas.openxmlformats.org/drawingml/2006/main">
             <a:off x="502920" y="621792"/>
-            <a:ext cx="11109960" cy="548640"/>
+            <a:ext cx="11109960" cy="591312"/>
           </a:xfrm>
           <a:prstGeom xmlns:a="http://schemas.openxmlformats.org/drawingml/2006/main" prst="rect">
             <a:avLst/>
@@ -29442,8 +29892,8 @@
           <a:noFill xmlns:a="http://schemas.openxmlformats.org/drawingml/2006/main"/>
         </p:spPr>
         <p:txBody>
-          <a:bodyPr xmlns:a="http://schemas.openxmlformats.org/drawingml/2006/main" wrap="square" lIns="36576" tIns="36576" rIns="36576" bIns="36576" anchor="t">
-            <a:spAutoFit/>
+          <a:bodyPr xmlns:a="http://schemas.openxmlformats.org/drawingml/2006/main" wrap="none" lIns="36576" tIns="36576" rIns="36576" bIns="36576" anchor="t">
+            <a:normAutofit fontScale="100000"/>
           </a:bodyPr>
           <a:lstStyle xmlns:a="http://schemas.openxmlformats.org/drawingml/2006/main"/>
           <a:p xmlns:a="http://schemas.openxmlformats.org/drawingml/2006/main">
@@ -29451,7 +29901,7 @@
               <a:buNone/>
             </a:pPr>
             <a:r>
-              <a:rPr sz="3400" b="1">
+              <a:rPr sz="2400" b="1">
                 <a:solidFill>
                   <a:srgbClr val="071A2B"/>
                 </a:solidFill>
@@ -29459,7 +29909,7 @@
                 <a:ea typeface="Aptos"/>
                 <a:cs typeface="Aptos"/>
               </a:rPr>
-              <a:t>Todennusketju katkeaa tällä hetkellä ennen kassavirtaa</a:t>
+              <a:t>Todennusketju katkeaa ennen kassavirtaa</a:t>
             </a:r>
           </a:p>
         </p:txBody>
@@ -29469,7 +29919,7 @@
           <p:cNvPr id="4" name="Rectangle 3">
             <a:extLst xmlns:a="http://schemas.openxmlformats.org/drawingml/2006/main">
               <a:ext uri="{FF2B5EF4-FFF2-40B4-BE49-F238E27FC236}">
-                <a16:creationId xmlns:a16="http://schemas.microsoft.com/office/drawing/2014/main" id="{61DF5FD6-2EFD-492E-908D-2728347E778B}"/>
+                <a16:creationId xmlns:a16="http://schemas.microsoft.com/office/drawing/2014/main" id="{1F698AA4-4769-48F9-8F0B-4C27C95066E0}"/>
               </a:ext>
             </a:extLst>
           </p:cNvPr>
@@ -29524,7 +29974,7 @@
           <p:cNvPr id="5" name="Rectangle 4">
             <a:extLst xmlns:a="http://schemas.openxmlformats.org/drawingml/2006/main">
               <a:ext uri="{FF2B5EF4-FFF2-40B4-BE49-F238E27FC236}">
-                <a16:creationId xmlns:a16="http://schemas.microsoft.com/office/drawing/2014/main" id="{6852B178-5F8B-4562-BB21-D582AE710934}"/>
+                <a16:creationId xmlns:a16="http://schemas.microsoft.com/office/drawing/2014/main" id="{A5980600-208A-4CAD-B2D9-41DDA9BFD247}"/>
               </a:ext>
             </a:extLst>
           </p:cNvPr>
@@ -29579,7 +30029,7 @@
           <p:cNvPr id="6" name="TextBox 5">
             <a:extLst xmlns:a="http://schemas.openxmlformats.org/drawingml/2006/main">
               <a:ext uri="{FF2B5EF4-FFF2-40B4-BE49-F238E27FC236}">
-                <a16:creationId xmlns:a16="http://schemas.microsoft.com/office/drawing/2014/main" id="{C648551A-0AD5-4CB1-91AC-A10098D0349A}"/>
+                <a16:creationId xmlns:a16="http://schemas.microsoft.com/office/drawing/2014/main" id="{1996BF47-23D8-4E1A-BC0E-A9C4C81FA4C7}"/>
               </a:ext>
             </a:extLst>
           </p:cNvPr>
@@ -29616,7 +30066,7 @@
                 <a:ea typeface="Aptos"/>
                 <a:cs typeface="Aptos"/>
               </a:rPr>
-              <a:t>Julkinen riippumaton evidenssikooste · 2026.07.24-18 · 2026-07-24 · Lähteet: Evidence Register; WIPO</a:t>
+              <a:t>Julkinen riippumaton evidenssikooste · 2026.07.24-19 · 2026-07-24 · Lähteet: Evidence Register; WIPO</a:t>
             </a:r>
           </a:p>
         </p:txBody>
@@ -29626,7 +30076,7 @@
           <p:cNvPr id="7" name="TextBox 6">
             <a:extLst xmlns:a="http://schemas.openxmlformats.org/drawingml/2006/main">
               <a:ext uri="{FF2B5EF4-FFF2-40B4-BE49-F238E27FC236}">
-                <a16:creationId xmlns:a16="http://schemas.microsoft.com/office/drawing/2014/main" id="{FA914103-4A0C-4800-B402-F9FF74B9E26F}"/>
+                <a16:creationId xmlns:a16="http://schemas.microsoft.com/office/drawing/2014/main" id="{FF9D193B-3F55-4750-AD23-B7C643B58D53}"/>
               </a:ext>
             </a:extLst>
           </p:cNvPr>
@@ -29673,7 +30123,7 @@
           <p:cNvPr id="8" name="TextBox 7">
             <a:extLst xmlns:a="http://schemas.openxmlformats.org/drawingml/2006/main">
               <a:ext uri="{FF2B5EF4-FFF2-40B4-BE49-F238E27FC236}">
-                <a16:creationId xmlns:a16="http://schemas.microsoft.com/office/drawing/2014/main" id="{9268A11A-2357-4C46-9174-F07AE3E0F675}"/>
+                <a16:creationId xmlns:a16="http://schemas.microsoft.com/office/drawing/2014/main" id="{52EEE6FC-65F4-4C9C-B1D5-80373CF74633}"/>
               </a:ext>
             </a:extLst>
           </p:cNvPr>
@@ -29720,7 +30170,7 @@
           <p:cNvPr id="9" name="TextBox 8">
             <a:extLst xmlns:a="http://schemas.openxmlformats.org/drawingml/2006/main">
               <a:ext uri="{FF2B5EF4-FFF2-40B4-BE49-F238E27FC236}">
-                <a16:creationId xmlns:a16="http://schemas.microsoft.com/office/drawing/2014/main" id="{B19E608E-8869-46CC-A644-19A65A9161BC}"/>
+                <a16:creationId xmlns:a16="http://schemas.microsoft.com/office/drawing/2014/main" id="{B471C712-B46D-4CBB-BC6E-D692BA6C55BA}"/>
               </a:ext>
             </a:extLst>
           </p:cNvPr>
@@ -29817,7 +30267,7 @@
           <p:cNvPr id="10" name="Rounded Rectangle 9">
             <a:extLst xmlns:a="http://schemas.openxmlformats.org/drawingml/2006/main">
               <a:ext uri="{FF2B5EF4-FFF2-40B4-BE49-F238E27FC236}">
-                <a16:creationId xmlns:a16="http://schemas.microsoft.com/office/drawing/2014/main" id="{CF59E235-24DC-41BC-A8B6-2AA2B8AC21D0}"/>
+                <a16:creationId xmlns:a16="http://schemas.microsoft.com/office/drawing/2014/main" id="{561B8388-8255-4420-AB31-CB33D0731CA3}"/>
               </a:ext>
             </a:extLst>
           </p:cNvPr>
@@ -29874,7 +30324,7 @@
           <p:cNvPr id="11" name="TextBox 10">
             <a:extLst xmlns:a="http://schemas.openxmlformats.org/drawingml/2006/main">
               <a:ext uri="{FF2B5EF4-FFF2-40B4-BE49-F238E27FC236}">
-                <a16:creationId xmlns:a16="http://schemas.microsoft.com/office/drawing/2014/main" id="{A4E45029-627A-4902-9DDB-27138656CDCE}"/>
+                <a16:creationId xmlns:a16="http://schemas.microsoft.com/office/drawing/2014/main" id="{851595ED-D36D-4BD6-81A8-4ACB5EFD7DD3}"/>
               </a:ext>
             </a:extLst>
           </p:cNvPr>
@@ -29921,7 +30371,7 @@
           <p:cNvPr id="12" name="TextBox 11">
             <a:extLst xmlns:a="http://schemas.openxmlformats.org/drawingml/2006/main">
               <a:ext uri="{FF2B5EF4-FFF2-40B4-BE49-F238E27FC236}">
-                <a16:creationId xmlns:a16="http://schemas.microsoft.com/office/drawing/2014/main" id="{832C1A20-C22C-4184-BFEA-2E6EF43C5404}"/>
+                <a16:creationId xmlns:a16="http://schemas.microsoft.com/office/drawing/2014/main" id="{7CA03B1F-6DCA-47F9-895F-6678461C24C8}"/>
               </a:ext>
             </a:extLst>
           </p:cNvPr>
@@ -29966,7 +30416,7 @@
     </p:spTree>
     <p:extLst>
       <p:ext uri="{BB962C8B-B14F-4D97-AF65-F5344CB8AC3E}">
-        <p14:creationId xmlns:p14="http://schemas.microsoft.com/office/powerpoint/2010/main" val="1544213978"/>
+        <p14:creationId xmlns:p14="http://schemas.microsoft.com/office/powerpoint/2010/main" val="698994544"/>
       </p:ext>
     </p:extLst>
   </p:cSld>
@@ -29990,7 +30440,7 @@
           <p:cNvPr id="2" name="TextBox 1">
             <a:extLst xmlns:a="http://schemas.openxmlformats.org/drawingml/2006/main">
               <a:ext uri="{FF2B5EF4-FFF2-40B4-BE49-F238E27FC236}">
-                <a16:creationId xmlns:a16="http://schemas.microsoft.com/office/drawing/2014/main" id="{869CBAD2-2974-4B2F-9C06-7AEF65B977E0}"/>
+                <a16:creationId xmlns:a16="http://schemas.microsoft.com/office/drawing/2014/main" id="{CC109938-4FE3-4549-8719-34A6BF063637}"/>
               </a:ext>
             </a:extLst>
           </p:cNvPr>
@@ -30037,7 +30487,7 @@
           <p:cNvPr id="3" name="TextBox 2">
             <a:extLst xmlns:a="http://schemas.openxmlformats.org/drawingml/2006/main">
               <a:ext uri="{FF2B5EF4-FFF2-40B4-BE49-F238E27FC236}">
-                <a16:creationId xmlns:a16="http://schemas.microsoft.com/office/drawing/2014/main" id="{ECFE21A2-9F40-4EEF-9EF1-438B1B84F474}"/>
+                <a16:creationId xmlns:a16="http://schemas.microsoft.com/office/drawing/2014/main" id="{7D6D8616-9DC3-4BA1-9CD7-13FCDC70EB9B}"/>
               </a:ext>
             </a:extLst>
           </p:cNvPr>
@@ -30049,7 +30499,7 @@
         <p:spPr>
           <a:xfrm xmlns:a="http://schemas.openxmlformats.org/drawingml/2006/main">
             <a:off x="502920" y="621792"/>
-            <a:ext cx="11109960" cy="548640"/>
+            <a:ext cx="11109960" cy="591312"/>
           </a:xfrm>
           <a:prstGeom xmlns:a="http://schemas.openxmlformats.org/drawingml/2006/main" prst="rect">
             <a:avLst/>
@@ -30057,8 +30507,8 @@
           <a:noFill xmlns:a="http://schemas.openxmlformats.org/drawingml/2006/main"/>
         </p:spPr>
         <p:txBody>
-          <a:bodyPr xmlns:a="http://schemas.openxmlformats.org/drawingml/2006/main" wrap="square" lIns="36576" tIns="36576" rIns="36576" bIns="36576" anchor="t">
-            <a:spAutoFit/>
+          <a:bodyPr xmlns:a="http://schemas.openxmlformats.org/drawingml/2006/main" wrap="none" lIns="36576" tIns="36576" rIns="36576" bIns="36576" anchor="t">
+            <a:normAutofit fontScale="100000"/>
           </a:bodyPr>
           <a:lstStyle xmlns:a="http://schemas.openxmlformats.org/drawingml/2006/main"/>
           <a:p xmlns:a="http://schemas.openxmlformats.org/drawingml/2006/main">
@@ -30066,7 +30516,7 @@
               <a:buNone/>
             </a:pPr>
             <a:r>
-              <a:rPr sz="3400" b="1">
+              <a:rPr sz="2400" b="1">
                 <a:solidFill>
                   <a:srgbClr val="071A2B"/>
                 </a:solidFill>
@@ -30074,7 +30524,7 @@
                 <a:ea typeface="Aptos"/>
                 <a:cs typeface="Aptos"/>
               </a:rPr>
-              <a:t>Patentoitu ratkaisu ohjaa lämmitystehoa resistanssitiedon avulla</a:t>
+              <a:t>Patentoitu ratkaisu ohjaa tehoa resistanssitiedolla</a:t>
             </a:r>
           </a:p>
         </p:txBody>
@@ -30084,7 +30534,7 @@
           <p:cNvPr id="4" name="Rectangle 3">
             <a:extLst xmlns:a="http://schemas.openxmlformats.org/drawingml/2006/main">
               <a:ext uri="{FF2B5EF4-FFF2-40B4-BE49-F238E27FC236}">
-                <a16:creationId xmlns:a16="http://schemas.microsoft.com/office/drawing/2014/main" id="{FED47339-7600-4884-BB89-E1C920C42ACE}"/>
+                <a16:creationId xmlns:a16="http://schemas.microsoft.com/office/drawing/2014/main" id="{B5595A79-87C9-47A1-A892-99DA0CD1D118}"/>
               </a:ext>
             </a:extLst>
           </p:cNvPr>
@@ -30139,7 +30589,7 @@
           <p:cNvPr id="5" name="Rectangle 4">
             <a:extLst xmlns:a="http://schemas.openxmlformats.org/drawingml/2006/main">
               <a:ext uri="{FF2B5EF4-FFF2-40B4-BE49-F238E27FC236}">
-                <a16:creationId xmlns:a16="http://schemas.microsoft.com/office/drawing/2014/main" id="{99C95DDB-03AD-4260-9DFE-431EBD2EE48F}"/>
+                <a16:creationId xmlns:a16="http://schemas.microsoft.com/office/drawing/2014/main" id="{05629F87-EBF9-4925-BA9C-B239135C9CEB}"/>
               </a:ext>
             </a:extLst>
           </p:cNvPr>
@@ -30194,7 +30644,7 @@
           <p:cNvPr id="6" name="TextBox 5">
             <a:extLst xmlns:a="http://schemas.openxmlformats.org/drawingml/2006/main">
               <a:ext uri="{FF2B5EF4-FFF2-40B4-BE49-F238E27FC236}">
-                <a16:creationId xmlns:a16="http://schemas.microsoft.com/office/drawing/2014/main" id="{78D872ED-B0A4-45BF-8F49-23AEC7246E6A}"/>
+                <a16:creationId xmlns:a16="http://schemas.microsoft.com/office/drawing/2014/main" id="{57F193D4-123D-455D-827D-3CA4A9A90548}"/>
               </a:ext>
             </a:extLst>
           </p:cNvPr>
@@ -30231,7 +30681,7 @@
                 <a:ea typeface="Aptos"/>
                 <a:cs typeface="Aptos"/>
               </a:rPr>
-              <a:t>Julkinen riippumaton evidenssikooste · 2026.07.24-18 · 2026-07-24 · Lähteet: EP3032975B2</a:t>
+              <a:t>Julkinen riippumaton evidenssikooste · 2026.07.24-19 · 2026-07-24 · Lähteet: EP3032975B2</a:t>
             </a:r>
           </a:p>
         </p:txBody>
@@ -30241,7 +30691,7 @@
           <p:cNvPr id="7" name="TextBox 6">
             <a:extLst xmlns:a="http://schemas.openxmlformats.org/drawingml/2006/main">
               <a:ext uri="{FF2B5EF4-FFF2-40B4-BE49-F238E27FC236}">
-                <a16:creationId xmlns:a16="http://schemas.microsoft.com/office/drawing/2014/main" id="{40CD4D7E-BA85-40B6-B56E-33CA3C500FA0}"/>
+                <a16:creationId xmlns:a16="http://schemas.microsoft.com/office/drawing/2014/main" id="{B4D70EA7-CD36-40FB-A16D-DD5BAFCE7F9A}"/>
               </a:ext>
             </a:extLst>
           </p:cNvPr>
@@ -30288,7 +30738,7 @@
           <p:cNvPr id="8" name="TextBox 7">
             <a:extLst xmlns:a="http://schemas.openxmlformats.org/drawingml/2006/main">
               <a:ext uri="{FF2B5EF4-FFF2-40B4-BE49-F238E27FC236}">
-                <a16:creationId xmlns:a16="http://schemas.microsoft.com/office/drawing/2014/main" id="{010D75B1-4B04-4A80-947F-4516D4FBE374}"/>
+                <a16:creationId xmlns:a16="http://schemas.microsoft.com/office/drawing/2014/main" id="{C9C0B7AB-0850-4D20-9B9B-EC749FE1D891}"/>
               </a:ext>
             </a:extLst>
           </p:cNvPr>
@@ -30335,7 +30785,7 @@
           <p:cNvPr id="9" name="TextBox 8">
             <a:extLst xmlns:a="http://schemas.openxmlformats.org/drawingml/2006/main">
               <a:ext uri="{FF2B5EF4-FFF2-40B4-BE49-F238E27FC236}">
-                <a16:creationId xmlns:a16="http://schemas.microsoft.com/office/drawing/2014/main" id="{70D67D47-5DC5-442F-ABF8-F017D910B6DF}"/>
+                <a16:creationId xmlns:a16="http://schemas.microsoft.com/office/drawing/2014/main" id="{8BD593F2-0C66-44F8-BB92-7A88314DFED1}"/>
               </a:ext>
             </a:extLst>
           </p:cNvPr>
@@ -30432,7 +30882,7 @@
           <p:cNvPr id="10" name="Rounded Rectangle 9">
             <a:extLst xmlns:a="http://schemas.openxmlformats.org/drawingml/2006/main">
               <a:ext uri="{FF2B5EF4-FFF2-40B4-BE49-F238E27FC236}">
-                <a16:creationId xmlns:a16="http://schemas.microsoft.com/office/drawing/2014/main" id="{A68CF266-FB75-4772-B44A-3B5FDE03769B}"/>
+                <a16:creationId xmlns:a16="http://schemas.microsoft.com/office/drawing/2014/main" id="{80834F18-FA94-4BF2-8150-3B5B1ABCB3CD}"/>
               </a:ext>
             </a:extLst>
           </p:cNvPr>
@@ -30489,7 +30939,7 @@
           <p:cNvPr id="11" name="TextBox 10">
             <a:extLst xmlns:a="http://schemas.openxmlformats.org/drawingml/2006/main">
               <a:ext uri="{FF2B5EF4-FFF2-40B4-BE49-F238E27FC236}">
-                <a16:creationId xmlns:a16="http://schemas.microsoft.com/office/drawing/2014/main" id="{B9EE9E7F-7976-4890-8654-F2100466842D}"/>
+                <a16:creationId xmlns:a16="http://schemas.microsoft.com/office/drawing/2014/main" id="{A8A2D3E2-3E8B-4197-9A06-D4C99E64E307}"/>
               </a:ext>
             </a:extLst>
           </p:cNvPr>
@@ -30536,7 +30986,7 @@
           <p:cNvPr id="12" name="TextBox 11">
             <a:extLst xmlns:a="http://schemas.openxmlformats.org/drawingml/2006/main">
               <a:ext uri="{FF2B5EF4-FFF2-40B4-BE49-F238E27FC236}">
-                <a16:creationId xmlns:a16="http://schemas.microsoft.com/office/drawing/2014/main" id="{992C3567-FF4E-492A-BB49-F89C9EC3B966}"/>
+                <a16:creationId xmlns:a16="http://schemas.microsoft.com/office/drawing/2014/main" id="{B159DF3A-7D36-4C90-966B-8213C3E2D0FD}"/>
               </a:ext>
             </a:extLst>
           </p:cNvPr>
@@ -30581,7 +31031,7 @@
     </p:spTree>
     <p:extLst>
       <p:ext uri="{BB962C8B-B14F-4D97-AF65-F5344CB8AC3E}">
-        <p14:creationId xmlns:p14="http://schemas.microsoft.com/office/powerpoint/2010/main" val="1687442009"/>
+        <p14:creationId xmlns:p14="http://schemas.microsoft.com/office/powerpoint/2010/main" val="969101256"/>
       </p:ext>
     </p:extLst>
   </p:cSld>
@@ -30605,7 +31055,7 @@
           <p:cNvPr id="2" name="TextBox 1">
             <a:extLst xmlns:a="http://schemas.openxmlformats.org/drawingml/2006/main">
               <a:ext uri="{FF2B5EF4-FFF2-40B4-BE49-F238E27FC236}">
-                <a16:creationId xmlns:a16="http://schemas.microsoft.com/office/drawing/2014/main" id="{288CB8E0-BD2D-4B4D-AD7C-F287207170F0}"/>
+                <a16:creationId xmlns:a16="http://schemas.microsoft.com/office/drawing/2014/main" id="{43BF8E84-8019-4C67-A02A-BFBA56235A4F}"/>
               </a:ext>
             </a:extLst>
           </p:cNvPr>
@@ -30652,7 +31102,7 @@
           <p:cNvPr id="3" name="TextBox 2">
             <a:extLst xmlns:a="http://schemas.openxmlformats.org/drawingml/2006/main">
               <a:ext uri="{FF2B5EF4-FFF2-40B4-BE49-F238E27FC236}">
-                <a16:creationId xmlns:a16="http://schemas.microsoft.com/office/drawing/2014/main" id="{8742545E-2BAC-480B-8EDC-48D6ED3846AC}"/>
+                <a16:creationId xmlns:a16="http://schemas.microsoft.com/office/drawing/2014/main" id="{B98199CA-DCC9-4D25-834C-87CC2420BDB3}"/>
               </a:ext>
             </a:extLst>
           </p:cNvPr>
@@ -30699,7 +31149,7 @@
           <p:cNvPr id="4" name="Rectangle 3">
             <a:extLst xmlns:a="http://schemas.openxmlformats.org/drawingml/2006/main">
               <a:ext uri="{FF2B5EF4-FFF2-40B4-BE49-F238E27FC236}">
-                <a16:creationId xmlns:a16="http://schemas.microsoft.com/office/drawing/2014/main" id="{810533A8-C6D1-4ADA-A008-43A134333133}"/>
+                <a16:creationId xmlns:a16="http://schemas.microsoft.com/office/drawing/2014/main" id="{A3217065-BA99-4625-8C61-09D623A7AC59}"/>
               </a:ext>
             </a:extLst>
           </p:cNvPr>
@@ -30754,7 +31204,7 @@
           <p:cNvPr id="5" name="Rectangle 4">
             <a:extLst xmlns:a="http://schemas.openxmlformats.org/drawingml/2006/main">
               <a:ext uri="{FF2B5EF4-FFF2-40B4-BE49-F238E27FC236}">
-                <a16:creationId xmlns:a16="http://schemas.microsoft.com/office/drawing/2014/main" id="{CB460DED-0EED-4CB1-9A45-2EFC9B7E0D94}"/>
+                <a16:creationId xmlns:a16="http://schemas.microsoft.com/office/drawing/2014/main" id="{04745F6B-1D0C-4F5B-88FB-1A3E2616382D}"/>
               </a:ext>
             </a:extLst>
           </p:cNvPr>
@@ -30809,7 +31259,7 @@
           <p:cNvPr id="6" name="TextBox 5">
             <a:extLst xmlns:a="http://schemas.openxmlformats.org/drawingml/2006/main">
               <a:ext uri="{FF2B5EF4-FFF2-40B4-BE49-F238E27FC236}">
-                <a16:creationId xmlns:a16="http://schemas.microsoft.com/office/drawing/2014/main" id="{060A8BF9-8F72-459D-8D36-B7998C5888FC}"/>
+                <a16:creationId xmlns:a16="http://schemas.microsoft.com/office/drawing/2014/main" id="{076F2374-5C86-4220-84B0-6AAA8DB6BBF7}"/>
               </a:ext>
             </a:extLst>
           </p:cNvPr>
@@ -30846,7 +31296,7 @@
                 <a:ea typeface="Aptos"/>
                 <a:cs typeface="Aptos"/>
               </a:rPr>
-              <a:t>Julkinen riippumaton evidenssikooste · 2026.07.24-18 · 2026-07-24 · Lähteet: EP3032975B2</a:t>
+              <a:t>Julkinen riippumaton evidenssikooste · 2026.07.24-19 · 2026-07-24 · Lähteet: EP3032975B2</a:t>
             </a:r>
           </a:p>
         </p:txBody>
@@ -30856,7 +31306,7 @@
           <p:cNvPr id="7" name="TextBox 6">
             <a:extLst xmlns:a="http://schemas.openxmlformats.org/drawingml/2006/main">
               <a:ext uri="{FF2B5EF4-FFF2-40B4-BE49-F238E27FC236}">
-                <a16:creationId xmlns:a16="http://schemas.microsoft.com/office/drawing/2014/main" id="{A790DDD7-87E4-4D54-960A-76024A3B86B3}"/>
+                <a16:creationId xmlns:a16="http://schemas.microsoft.com/office/drawing/2014/main" id="{A484D729-9952-40EB-908D-3CEF7101EF6B}"/>
               </a:ext>
             </a:extLst>
           </p:cNvPr>
@@ -31426,7 +31876,7 @@
           <p:cNvPr id="9" name="TextBox 8">
             <a:extLst xmlns:a="http://schemas.openxmlformats.org/drawingml/2006/main">
               <a:ext uri="{FF2B5EF4-FFF2-40B4-BE49-F238E27FC236}">
-                <a16:creationId xmlns:a16="http://schemas.microsoft.com/office/drawing/2014/main" id="{A49DC8DC-29BC-4EA9-9733-261BF160578B}"/>
+                <a16:creationId xmlns:a16="http://schemas.microsoft.com/office/drawing/2014/main" id="{98DEBB15-0753-41BC-AC18-7A5E5F3DB8C8}"/>
               </a:ext>
             </a:extLst>
           </p:cNvPr>
@@ -31471,7 +31921,7 @@
     </p:spTree>
     <p:extLst>
       <p:ext uri="{BB962C8B-B14F-4D97-AF65-F5344CB8AC3E}">
-        <p14:creationId xmlns:p14="http://schemas.microsoft.com/office/powerpoint/2010/main" val="2106409609"/>
+        <p14:creationId xmlns:p14="http://schemas.microsoft.com/office/powerpoint/2010/main" val="1386730628"/>
       </p:ext>
     </p:extLst>
   </p:cSld>
@@ -31495,7 +31945,7 @@
           <p:cNvPr id="2" name="TextBox 1">
             <a:extLst xmlns:a="http://schemas.openxmlformats.org/drawingml/2006/main">
               <a:ext uri="{FF2B5EF4-FFF2-40B4-BE49-F238E27FC236}">
-                <a16:creationId xmlns:a16="http://schemas.microsoft.com/office/drawing/2014/main" id="{2D4CE8E2-8E2F-4D32-A679-F9EA851BFF0C}"/>
+                <a16:creationId xmlns:a16="http://schemas.microsoft.com/office/drawing/2014/main" id="{6A836B07-500B-400D-9346-6039E139D5D5}"/>
               </a:ext>
             </a:extLst>
           </p:cNvPr>
@@ -31542,7 +31992,7 @@
           <p:cNvPr id="3" name="TextBox 2">
             <a:extLst xmlns:a="http://schemas.openxmlformats.org/drawingml/2006/main">
               <a:ext uri="{FF2B5EF4-FFF2-40B4-BE49-F238E27FC236}">
-                <a16:creationId xmlns:a16="http://schemas.microsoft.com/office/drawing/2014/main" id="{5A418CEC-5318-4A49-9FB2-3B60EA26B813}"/>
+                <a16:creationId xmlns:a16="http://schemas.microsoft.com/office/drawing/2014/main" id="{ABDF915D-371B-44AB-9937-99A30ED1F5BD}"/>
               </a:ext>
             </a:extLst>
           </p:cNvPr>
@@ -31554,7 +32004,7 @@
         <p:spPr>
           <a:xfrm xmlns:a="http://schemas.openxmlformats.org/drawingml/2006/main">
             <a:off x="502920" y="621792"/>
-            <a:ext cx="11109960" cy="548640"/>
+            <a:ext cx="11109960" cy="591312"/>
           </a:xfrm>
           <a:prstGeom xmlns:a="http://schemas.openxmlformats.org/drawingml/2006/main" prst="rect">
             <a:avLst/>
@@ -31562,8 +32012,8 @@
           <a:noFill xmlns:a="http://schemas.openxmlformats.org/drawingml/2006/main"/>
         </p:spPr>
         <p:txBody>
-          <a:bodyPr xmlns:a="http://schemas.openxmlformats.org/drawingml/2006/main" wrap="square" lIns="36576" tIns="36576" rIns="36576" bIns="36576" anchor="t">
-            <a:spAutoFit/>
+          <a:bodyPr xmlns:a="http://schemas.openxmlformats.org/drawingml/2006/main" wrap="none" lIns="36576" tIns="36576" rIns="36576" bIns="36576" anchor="t">
+            <a:normAutofit fontScale="100000"/>
           </a:bodyPr>
           <a:lstStyle xmlns:a="http://schemas.openxmlformats.org/drawingml/2006/main"/>
           <a:p xmlns:a="http://schemas.openxmlformats.org/drawingml/2006/main">
@@ -31571,7 +32021,7 @@
               <a:buNone/>
             </a:pPr>
             <a:r>
-              <a:rPr sz="3400" b="1">
+              <a:rPr sz="2400" b="1">
                 <a:solidFill>
                   <a:srgbClr val="071A2B"/>
                 </a:solidFill>
@@ -31579,7 +32029,7 @@
                 <a:ea typeface="Aptos"/>
                 <a:cs typeface="Aptos"/>
               </a:rPr>
-              <a:t>IP-historian ydintapahtumat ovat virallisesti jäljitettävissä</a:t>
+              <a:t>IP-historian ydintapahtumat ovat jäljitettävissä</a:t>
             </a:r>
           </a:p>
         </p:txBody>
@@ -31589,7 +32039,7 @@
           <p:cNvPr id="4" name="Rectangle 3">
             <a:extLst xmlns:a="http://schemas.openxmlformats.org/drawingml/2006/main">
               <a:ext uri="{FF2B5EF4-FFF2-40B4-BE49-F238E27FC236}">
-                <a16:creationId xmlns:a16="http://schemas.microsoft.com/office/drawing/2014/main" id="{CD56670A-ADE8-4C08-88C5-EA6BEF188F9B}"/>
+                <a16:creationId xmlns:a16="http://schemas.microsoft.com/office/drawing/2014/main" id="{1118F028-095F-44A6-B153-675FF40B13B7}"/>
               </a:ext>
             </a:extLst>
           </p:cNvPr>
@@ -31644,7 +32094,7 @@
           <p:cNvPr id="5" name="Rectangle 4">
             <a:extLst xmlns:a="http://schemas.openxmlformats.org/drawingml/2006/main">
               <a:ext uri="{FF2B5EF4-FFF2-40B4-BE49-F238E27FC236}">
-                <a16:creationId xmlns:a16="http://schemas.microsoft.com/office/drawing/2014/main" id="{B3498047-B8D9-4594-AD21-DB06B25D2B66}"/>
+                <a16:creationId xmlns:a16="http://schemas.microsoft.com/office/drawing/2014/main" id="{AAD4A01C-CFE2-40EB-982A-09F5FCBC30A5}"/>
               </a:ext>
             </a:extLst>
           </p:cNvPr>
@@ -31699,7 +32149,7 @@
           <p:cNvPr id="6" name="TextBox 5">
             <a:extLst xmlns:a="http://schemas.openxmlformats.org/drawingml/2006/main">
               <a:ext uri="{FF2B5EF4-FFF2-40B4-BE49-F238E27FC236}">
-                <a16:creationId xmlns:a16="http://schemas.microsoft.com/office/drawing/2014/main" id="{1C82DB03-D7EA-41DB-B301-2F4F8C535FA0}"/>
+                <a16:creationId xmlns:a16="http://schemas.microsoft.com/office/drawing/2014/main" id="{B4D18838-7C54-467D-A634-539A90963BDA}"/>
               </a:ext>
             </a:extLst>
           </p:cNvPr>
@@ -31736,7 +32186,7 @@
                 <a:ea typeface="Aptos"/>
                 <a:cs typeface="Aptos"/>
               </a:rPr>
-              <a:t>Julkinen riippumaton evidenssikooste · 2026.07.24-18 · 2026-07-24 · Lähteet: EPO Register; B2</a:t>
+              <a:t>Julkinen riippumaton evidenssikooste · 2026.07.24-19 · 2026-07-24 · Lähteet: EPO Register; B2</a:t>
             </a:r>
           </a:p>
         </p:txBody>
@@ -31746,7 +32196,7 @@
           <p:cNvPr id="7" name="TextBox 6">
             <a:extLst xmlns:a="http://schemas.openxmlformats.org/drawingml/2006/main">
               <a:ext uri="{FF2B5EF4-FFF2-40B4-BE49-F238E27FC236}">
-                <a16:creationId xmlns:a16="http://schemas.microsoft.com/office/drawing/2014/main" id="{A571BB77-63D1-455D-ACBE-9DCA09708CF6}"/>
+                <a16:creationId xmlns:a16="http://schemas.microsoft.com/office/drawing/2014/main" id="{E39884BF-23B5-4078-B6AD-A33F0674E3CD}"/>
               </a:ext>
             </a:extLst>
           </p:cNvPr>
@@ -31793,7 +32243,7 @@
           <p:cNvPr id="8" name="Rounded Rectangle 7">
             <a:extLst xmlns:a="http://schemas.openxmlformats.org/drawingml/2006/main">
               <a:ext uri="{FF2B5EF4-FFF2-40B4-BE49-F238E27FC236}">
-                <a16:creationId xmlns:a16="http://schemas.microsoft.com/office/drawing/2014/main" id="{FA60F7E4-68C4-486C-B6DA-1B1B6EC6D458}"/>
+                <a16:creationId xmlns:a16="http://schemas.microsoft.com/office/drawing/2014/main" id="{8E80D677-4814-4158-BFD3-220698210966}"/>
               </a:ext>
             </a:extLst>
           </p:cNvPr>
@@ -31850,7 +32300,7 @@
           <p:cNvPr id="9" name="TextBox 8">
             <a:extLst xmlns:a="http://schemas.openxmlformats.org/drawingml/2006/main">
               <a:ext uri="{FF2B5EF4-FFF2-40B4-BE49-F238E27FC236}">
-                <a16:creationId xmlns:a16="http://schemas.microsoft.com/office/drawing/2014/main" id="{2447F1FB-3BD6-4864-BED9-DB2C81513AFE}"/>
+                <a16:creationId xmlns:a16="http://schemas.microsoft.com/office/drawing/2014/main" id="{92C5FE45-0CAF-46A5-ADA8-5D7F38609689}"/>
               </a:ext>
             </a:extLst>
           </p:cNvPr>
@@ -31897,7 +32347,7 @@
           <p:cNvPr id="10" name="TextBox 9">
             <a:extLst xmlns:a="http://schemas.openxmlformats.org/drawingml/2006/main">
               <a:ext uri="{FF2B5EF4-FFF2-40B4-BE49-F238E27FC236}">
-                <a16:creationId xmlns:a16="http://schemas.microsoft.com/office/drawing/2014/main" id="{6D8B3A2D-5497-4457-BF91-02D9C7947C1E}"/>
+                <a16:creationId xmlns:a16="http://schemas.microsoft.com/office/drawing/2014/main" id="{261E171C-295F-40FD-8E62-B7B2C2E25AF8}"/>
               </a:ext>
             </a:extLst>
           </p:cNvPr>
@@ -31944,7 +32394,7 @@
           <p:cNvPr id="11" name="Rounded Rectangle 10">
             <a:extLst xmlns:a="http://schemas.openxmlformats.org/drawingml/2006/main">
               <a:ext uri="{FF2B5EF4-FFF2-40B4-BE49-F238E27FC236}">
-                <a16:creationId xmlns:a16="http://schemas.microsoft.com/office/drawing/2014/main" id="{73901F8A-F5D2-4353-9B27-7312E98BF63F}"/>
+                <a16:creationId xmlns:a16="http://schemas.microsoft.com/office/drawing/2014/main" id="{E20DD1E8-9BFA-45E6-8467-43B7391236DA}"/>
               </a:ext>
             </a:extLst>
           </p:cNvPr>
@@ -32001,7 +32451,7 @@
           <p:cNvPr id="12" name="TextBox 11">
             <a:extLst xmlns:a="http://schemas.openxmlformats.org/drawingml/2006/main">
               <a:ext uri="{FF2B5EF4-FFF2-40B4-BE49-F238E27FC236}">
-                <a16:creationId xmlns:a16="http://schemas.microsoft.com/office/drawing/2014/main" id="{6E9AFF9B-43BC-48F9-97A2-C018DE8130E8}"/>
+                <a16:creationId xmlns:a16="http://schemas.microsoft.com/office/drawing/2014/main" id="{C5304931-752B-41A7-8909-254F882700E2}"/>
               </a:ext>
             </a:extLst>
           </p:cNvPr>
@@ -32048,7 +32498,7 @@
           <p:cNvPr id="13" name="TextBox 12">
             <a:extLst xmlns:a="http://schemas.openxmlformats.org/drawingml/2006/main">
               <a:ext uri="{FF2B5EF4-FFF2-40B4-BE49-F238E27FC236}">
-                <a16:creationId xmlns:a16="http://schemas.microsoft.com/office/drawing/2014/main" id="{9C799778-573D-4C27-B3E8-7474873CA425}"/>
+                <a16:creationId xmlns:a16="http://schemas.microsoft.com/office/drawing/2014/main" id="{49E49AC1-3AA8-4C55-AA95-649ED59998A6}"/>
               </a:ext>
             </a:extLst>
           </p:cNvPr>
@@ -32095,7 +32545,7 @@
           <p:cNvPr id="14" name="Rounded Rectangle 13">
             <a:extLst xmlns:a="http://schemas.openxmlformats.org/drawingml/2006/main">
               <a:ext uri="{FF2B5EF4-FFF2-40B4-BE49-F238E27FC236}">
-                <a16:creationId xmlns:a16="http://schemas.microsoft.com/office/drawing/2014/main" id="{4FA08936-A482-4513-839B-19C5A3F9651E}"/>
+                <a16:creationId xmlns:a16="http://schemas.microsoft.com/office/drawing/2014/main" id="{5D74AE86-D686-4F77-A535-A349DB1557C7}"/>
               </a:ext>
             </a:extLst>
           </p:cNvPr>
@@ -32152,7 +32602,7 @@
           <p:cNvPr id="15" name="TextBox 14">
             <a:extLst xmlns:a="http://schemas.openxmlformats.org/drawingml/2006/main">
               <a:ext uri="{FF2B5EF4-FFF2-40B4-BE49-F238E27FC236}">
-                <a16:creationId xmlns:a16="http://schemas.microsoft.com/office/drawing/2014/main" id="{DEDEB941-FFDB-47CE-8B97-98F23E596611}"/>
+                <a16:creationId xmlns:a16="http://schemas.microsoft.com/office/drawing/2014/main" id="{1F10CD86-EBB9-4702-9CE9-2E6275A82170}"/>
               </a:ext>
             </a:extLst>
           </p:cNvPr>
@@ -32199,7 +32649,7 @@
           <p:cNvPr id="16" name="TextBox 15">
             <a:extLst xmlns:a="http://schemas.openxmlformats.org/drawingml/2006/main">
               <a:ext uri="{FF2B5EF4-FFF2-40B4-BE49-F238E27FC236}">
-                <a16:creationId xmlns:a16="http://schemas.microsoft.com/office/drawing/2014/main" id="{F7ED838E-64FD-4621-BD02-0E60BFE7818A}"/>
+                <a16:creationId xmlns:a16="http://schemas.microsoft.com/office/drawing/2014/main" id="{601F5B24-DEAA-4846-82F8-2EDFCF9107FF}"/>
               </a:ext>
             </a:extLst>
           </p:cNvPr>
@@ -32246,7 +32696,7 @@
           <p:cNvPr id="17" name="TextBox 16">
             <a:extLst xmlns:a="http://schemas.openxmlformats.org/drawingml/2006/main">
               <a:ext uri="{FF2B5EF4-FFF2-40B4-BE49-F238E27FC236}">
-                <a16:creationId xmlns:a16="http://schemas.microsoft.com/office/drawing/2014/main" id="{0F54F936-0E81-49B3-9D02-17452C552506}"/>
+                <a16:creationId xmlns:a16="http://schemas.microsoft.com/office/drawing/2014/main" id="{BA55A60F-6EE9-4BAD-B3C6-591AA83F224B}"/>
               </a:ext>
             </a:extLst>
           </p:cNvPr>
@@ -32293,7 +32743,7 @@
           <p:cNvPr id="18" name="Rounded Rectangle 17">
             <a:extLst xmlns:a="http://schemas.openxmlformats.org/drawingml/2006/main">
               <a:ext uri="{FF2B5EF4-FFF2-40B4-BE49-F238E27FC236}">
-                <a16:creationId xmlns:a16="http://schemas.microsoft.com/office/drawing/2014/main" id="{B0AF699E-A65C-47F3-B95E-B309E0A30E22}"/>
+                <a16:creationId xmlns:a16="http://schemas.microsoft.com/office/drawing/2014/main" id="{D6651583-E6EA-45AF-937C-CAB79EABB0E5}"/>
               </a:ext>
             </a:extLst>
           </p:cNvPr>
@@ -32350,7 +32800,7 @@
           <p:cNvPr id="19" name="TextBox 18">
             <a:extLst xmlns:a="http://schemas.openxmlformats.org/drawingml/2006/main">
               <a:ext uri="{FF2B5EF4-FFF2-40B4-BE49-F238E27FC236}">
-                <a16:creationId xmlns:a16="http://schemas.microsoft.com/office/drawing/2014/main" id="{5BA39308-8A9D-49D5-B413-B9CF6C4AA91B}"/>
+                <a16:creationId xmlns:a16="http://schemas.microsoft.com/office/drawing/2014/main" id="{420D523D-802D-4458-8EB0-C8ECB602A951}"/>
               </a:ext>
             </a:extLst>
           </p:cNvPr>
@@ -32397,7 +32847,7 @@
           <p:cNvPr id="20" name="TextBox 19">
             <a:extLst xmlns:a="http://schemas.openxmlformats.org/drawingml/2006/main">
               <a:ext uri="{FF2B5EF4-FFF2-40B4-BE49-F238E27FC236}">
-                <a16:creationId xmlns:a16="http://schemas.microsoft.com/office/drawing/2014/main" id="{7B8DC2B4-246A-4F2B-AE5C-AC60D4AEBE5E}"/>
+                <a16:creationId xmlns:a16="http://schemas.microsoft.com/office/drawing/2014/main" id="{95E28CAE-EC5C-49BC-BFB7-3173BC4EE18B}"/>
               </a:ext>
             </a:extLst>
           </p:cNvPr>
@@ -32442,7 +32892,7 @@
     </p:spTree>
     <p:extLst>
       <p:ext uri="{BB962C8B-B14F-4D97-AF65-F5344CB8AC3E}">
-        <p14:creationId xmlns:p14="http://schemas.microsoft.com/office/powerpoint/2010/main" val="1995134686"/>
+        <p14:creationId xmlns:p14="http://schemas.microsoft.com/office/powerpoint/2010/main" val="1588574314"/>
       </p:ext>
     </p:extLst>
   </p:cSld>
@@ -32466,7 +32916,7 @@
           <p:cNvPr id="2" name="TextBox 1">
             <a:extLst xmlns:a="http://schemas.openxmlformats.org/drawingml/2006/main">
               <a:ext uri="{FF2B5EF4-FFF2-40B4-BE49-F238E27FC236}">
-                <a16:creationId xmlns:a16="http://schemas.microsoft.com/office/drawing/2014/main" id="{1B76A3DF-93AE-417B-A361-F71E381B804D}"/>
+                <a16:creationId xmlns:a16="http://schemas.microsoft.com/office/drawing/2014/main" id="{57225426-863F-4539-8E33-065B37273FEF}"/>
               </a:ext>
             </a:extLst>
           </p:cNvPr>
@@ -32513,7 +32963,7 @@
           <p:cNvPr id="3" name="TextBox 2">
             <a:extLst xmlns:a="http://schemas.openxmlformats.org/drawingml/2006/main">
               <a:ext uri="{FF2B5EF4-FFF2-40B4-BE49-F238E27FC236}">
-                <a16:creationId xmlns:a16="http://schemas.microsoft.com/office/drawing/2014/main" id="{F0943A05-5FBA-4228-8156-570B51DF5BA1}"/>
+                <a16:creationId xmlns:a16="http://schemas.microsoft.com/office/drawing/2014/main" id="{DD72A9ED-FE2B-406D-8014-33679EA08F2F}"/>
               </a:ext>
             </a:extLst>
           </p:cNvPr>
@@ -32525,7 +32975,7 @@
         <p:spPr>
           <a:xfrm xmlns:a="http://schemas.openxmlformats.org/drawingml/2006/main">
             <a:off x="502920" y="621792"/>
-            <a:ext cx="11109960" cy="548640"/>
+            <a:ext cx="11109960" cy="591312"/>
           </a:xfrm>
           <a:prstGeom xmlns:a="http://schemas.openxmlformats.org/drawingml/2006/main" prst="rect">
             <a:avLst/>
@@ -32533,8 +32983,8 @@
           <a:noFill xmlns:a="http://schemas.openxmlformats.org/drawingml/2006/main"/>
         </p:spPr>
         <p:txBody>
-          <a:bodyPr xmlns:a="http://schemas.openxmlformats.org/drawingml/2006/main" wrap="square" lIns="36576" tIns="36576" rIns="36576" bIns="36576" anchor="t">
-            <a:spAutoFit/>
+          <a:bodyPr xmlns:a="http://schemas.openxmlformats.org/drawingml/2006/main" wrap="none" lIns="36576" tIns="36576" rIns="36576" bIns="36576" anchor="t">
+            <a:normAutofit fontScale="100000"/>
           </a:bodyPr>
           <a:lstStyle xmlns:a="http://schemas.openxmlformats.org/drawingml/2006/main"/>
           <a:p xmlns:a="http://schemas.openxmlformats.org/drawingml/2006/main">
@@ -32542,7 +32992,7 @@
               <a:buNone/>
             </a:pPr>
             <a:r>
-              <a:rPr sz="3400" b="1">
+              <a:rPr sz="2400" b="1">
                 <a:solidFill>
                   <a:srgbClr val="071A2B"/>
                 </a:solidFill>
@@ -32550,7 +33000,7 @@
                 <a:ea typeface="Aptos"/>
                 <a:cs typeface="Aptos"/>
               </a:rPr>
-              <a:t>Perhejulkaisuja on 22 — voimassa olevien maiden määrää ei vielä väitetä</a:t>
+              <a:t>Patenttiperhe: 22 julkaisua, maapeitto avoin</a:t>
             </a:r>
           </a:p>
         </p:txBody>
@@ -32560,7 +33010,7 @@
           <p:cNvPr id="4" name="Rectangle 3">
             <a:extLst xmlns:a="http://schemas.openxmlformats.org/drawingml/2006/main">
               <a:ext uri="{FF2B5EF4-FFF2-40B4-BE49-F238E27FC236}">
-                <a16:creationId xmlns:a16="http://schemas.microsoft.com/office/drawing/2014/main" id="{BF72ED16-B57A-48CD-A42E-D7AA51C3F309}"/>
+                <a16:creationId xmlns:a16="http://schemas.microsoft.com/office/drawing/2014/main" id="{680DDEC4-9825-4B0C-9BE0-70AA6EEE0B08}"/>
               </a:ext>
             </a:extLst>
           </p:cNvPr>
@@ -32615,7 +33065,7 @@
           <p:cNvPr id="5" name="Rectangle 4">
             <a:extLst xmlns:a="http://schemas.openxmlformats.org/drawingml/2006/main">
               <a:ext uri="{FF2B5EF4-FFF2-40B4-BE49-F238E27FC236}">
-                <a16:creationId xmlns:a16="http://schemas.microsoft.com/office/drawing/2014/main" id="{0A8BB1A1-0F53-47BE-B8CB-F495A7AF0546}"/>
+                <a16:creationId xmlns:a16="http://schemas.microsoft.com/office/drawing/2014/main" id="{9415EA80-4602-40F5-98B9-0DA01F0C2B5D}"/>
               </a:ext>
             </a:extLst>
           </p:cNvPr>
@@ -32670,7 +33120,7 @@
           <p:cNvPr id="6" name="TextBox 5">
             <a:extLst xmlns:a="http://schemas.openxmlformats.org/drawingml/2006/main">
               <a:ext uri="{FF2B5EF4-FFF2-40B4-BE49-F238E27FC236}">
-                <a16:creationId xmlns:a16="http://schemas.microsoft.com/office/drawing/2014/main" id="{344A4C28-8BDF-462D-9175-9D5F238EC0D0}"/>
+                <a16:creationId xmlns:a16="http://schemas.microsoft.com/office/drawing/2014/main" id="{4C34A4B5-FFC5-4CEC-AED4-E0A22BC84141}"/>
               </a:ext>
             </a:extLst>
           </p:cNvPr>
@@ -32707,7 +33157,7 @@
                 <a:ea typeface="Aptos"/>
                 <a:cs typeface="Aptos"/>
               </a:rPr>
-              <a:t>Julkinen riippumaton evidenssikooste · 2026.07.24-18 · 2026-07-24 · Lähteet: EPO family; kansalliset rekisterit</a:t>
+              <a:t>Julkinen riippumaton evidenssikooste · 2026.07.24-19 · 2026-07-24 · Lähteet: EPO family; kansalliset rekisterit</a:t>
             </a:r>
           </a:p>
         </p:txBody>
@@ -32717,7 +33167,7 @@
           <p:cNvPr id="7" name="TextBox 6">
             <a:extLst xmlns:a="http://schemas.openxmlformats.org/drawingml/2006/main">
               <a:ext uri="{FF2B5EF4-FFF2-40B4-BE49-F238E27FC236}">
-                <a16:creationId xmlns:a16="http://schemas.microsoft.com/office/drawing/2014/main" id="{CED135BC-F7E0-4E64-BBFB-D0A512B81029}"/>
+                <a16:creationId xmlns:a16="http://schemas.microsoft.com/office/drawing/2014/main" id="{BD53C3DF-79BF-4944-AABB-A923982DEFC3}"/>
               </a:ext>
             </a:extLst>
           </p:cNvPr>
@@ -32764,7 +33214,7 @@
           <p:cNvPr id="8" name="Rounded Rectangle 7">
             <a:extLst xmlns:a="http://schemas.openxmlformats.org/drawingml/2006/main">
               <a:ext uri="{FF2B5EF4-FFF2-40B4-BE49-F238E27FC236}">
-                <a16:creationId xmlns:a16="http://schemas.microsoft.com/office/drawing/2014/main" id="{BADE2DD7-8BD0-4D49-AB76-AF5984E7F379}"/>
+                <a16:creationId xmlns:a16="http://schemas.microsoft.com/office/drawing/2014/main" id="{5DF5C0FE-FD95-4551-BCE0-811901BAEAAA}"/>
               </a:ext>
             </a:extLst>
           </p:cNvPr>
@@ -32821,7 +33271,7 @@
           <p:cNvPr id="9" name="TextBox 8">
             <a:extLst xmlns:a="http://schemas.openxmlformats.org/drawingml/2006/main">
               <a:ext uri="{FF2B5EF4-FFF2-40B4-BE49-F238E27FC236}">
-                <a16:creationId xmlns:a16="http://schemas.microsoft.com/office/drawing/2014/main" id="{280DD83A-959C-4C71-A727-941DDDE8C47A}"/>
+                <a16:creationId xmlns:a16="http://schemas.microsoft.com/office/drawing/2014/main" id="{CB2C8B33-F0D4-4967-8510-5ED11E202F47}"/>
               </a:ext>
             </a:extLst>
           </p:cNvPr>
@@ -32868,7 +33318,7 @@
           <p:cNvPr id="10" name="TextBox 9">
             <a:extLst xmlns:a="http://schemas.openxmlformats.org/drawingml/2006/main">
               <a:ext uri="{FF2B5EF4-FFF2-40B4-BE49-F238E27FC236}">
-                <a16:creationId xmlns:a16="http://schemas.microsoft.com/office/drawing/2014/main" id="{46DD23E6-F00D-4061-B73A-9A90E7B03769}"/>
+                <a16:creationId xmlns:a16="http://schemas.microsoft.com/office/drawing/2014/main" id="{C3228124-BA13-4B7A-AF88-CFA3C4691561}"/>
               </a:ext>
             </a:extLst>
           </p:cNvPr>
@@ -32915,7 +33365,7 @@
           <p:cNvPr id="11" name="Rounded Rectangle 10">
             <a:extLst xmlns:a="http://schemas.openxmlformats.org/drawingml/2006/main">
               <a:ext uri="{FF2B5EF4-FFF2-40B4-BE49-F238E27FC236}">
-                <a16:creationId xmlns:a16="http://schemas.microsoft.com/office/drawing/2014/main" id="{F09FEF5F-2D42-4914-9DD1-09773A47A70C}"/>
+                <a16:creationId xmlns:a16="http://schemas.microsoft.com/office/drawing/2014/main" id="{AF59E739-98D4-4856-BFF3-B62D5C759D25}"/>
               </a:ext>
             </a:extLst>
           </p:cNvPr>
@@ -32972,7 +33422,7 @@
           <p:cNvPr id="12" name="TextBox 11">
             <a:extLst xmlns:a="http://schemas.openxmlformats.org/drawingml/2006/main">
               <a:ext uri="{FF2B5EF4-FFF2-40B4-BE49-F238E27FC236}">
-                <a16:creationId xmlns:a16="http://schemas.microsoft.com/office/drawing/2014/main" id="{906385D7-DABF-44FE-A37F-A93DE138BEF8}"/>
+                <a16:creationId xmlns:a16="http://schemas.microsoft.com/office/drawing/2014/main" id="{689D9216-71E7-4819-BCCE-8B3B25910ED0}"/>
               </a:ext>
             </a:extLst>
           </p:cNvPr>
@@ -33019,7 +33469,7 @@
           <p:cNvPr id="13" name="TextBox 12">
             <a:extLst xmlns:a="http://schemas.openxmlformats.org/drawingml/2006/main">
               <a:ext uri="{FF2B5EF4-FFF2-40B4-BE49-F238E27FC236}">
-                <a16:creationId xmlns:a16="http://schemas.microsoft.com/office/drawing/2014/main" id="{CD71FC08-862C-4E48-BCAC-163D32C58CA0}"/>
+                <a16:creationId xmlns:a16="http://schemas.microsoft.com/office/drawing/2014/main" id="{A31A3AB2-59AE-4258-AA72-C02A1948BFD6}"/>
               </a:ext>
             </a:extLst>
           </p:cNvPr>
@@ -33066,7 +33516,7 @@
           <p:cNvPr id="14" name="Rounded Rectangle 13">
             <a:extLst xmlns:a="http://schemas.openxmlformats.org/drawingml/2006/main">
               <a:ext uri="{FF2B5EF4-FFF2-40B4-BE49-F238E27FC236}">
-                <a16:creationId xmlns:a16="http://schemas.microsoft.com/office/drawing/2014/main" id="{C3EA85B1-C852-4011-803C-A9932CFA7387}"/>
+                <a16:creationId xmlns:a16="http://schemas.microsoft.com/office/drawing/2014/main" id="{85C85606-9655-40F0-AFA9-5C6BBEC2ECBC}"/>
               </a:ext>
             </a:extLst>
           </p:cNvPr>
@@ -33123,7 +33573,7 @@
           <p:cNvPr id="15" name="TextBox 14">
             <a:extLst xmlns:a="http://schemas.openxmlformats.org/drawingml/2006/main">
               <a:ext uri="{FF2B5EF4-FFF2-40B4-BE49-F238E27FC236}">
-                <a16:creationId xmlns:a16="http://schemas.microsoft.com/office/drawing/2014/main" id="{77A198CB-4212-40DA-884D-36F42E5F597F}"/>
+                <a16:creationId xmlns:a16="http://schemas.microsoft.com/office/drawing/2014/main" id="{39D288A2-6035-4EA0-91C9-188B2F16CC72}"/>
               </a:ext>
             </a:extLst>
           </p:cNvPr>
@@ -33170,7 +33620,7 @@
           <p:cNvPr id="16" name="TextBox 15">
             <a:extLst xmlns:a="http://schemas.openxmlformats.org/drawingml/2006/main">
               <a:ext uri="{FF2B5EF4-FFF2-40B4-BE49-F238E27FC236}">
-                <a16:creationId xmlns:a16="http://schemas.microsoft.com/office/drawing/2014/main" id="{7B8F24F5-909F-46D3-ADC1-BE9D343CB2FE}"/>
+                <a16:creationId xmlns:a16="http://schemas.microsoft.com/office/drawing/2014/main" id="{49AB9772-849A-4B1C-984A-DA612A856DBA}"/>
               </a:ext>
             </a:extLst>
           </p:cNvPr>
@@ -33217,7 +33667,7 @@
           <p:cNvPr id="17" name="Rounded Rectangle 16">
             <a:extLst xmlns:a="http://schemas.openxmlformats.org/drawingml/2006/main">
               <a:ext uri="{FF2B5EF4-FFF2-40B4-BE49-F238E27FC236}">
-                <a16:creationId xmlns:a16="http://schemas.microsoft.com/office/drawing/2014/main" id="{5034D96B-2664-406B-AE50-0D85D27E24F8}"/>
+                <a16:creationId xmlns:a16="http://schemas.microsoft.com/office/drawing/2014/main" id="{8DD0A45E-C3D7-43A3-8A70-14CA52C2E5AE}"/>
               </a:ext>
             </a:extLst>
           </p:cNvPr>
@@ -33274,7 +33724,7 @@
           <p:cNvPr id="18" name="TextBox 17">
             <a:extLst xmlns:a="http://schemas.openxmlformats.org/drawingml/2006/main">
               <a:ext uri="{FF2B5EF4-FFF2-40B4-BE49-F238E27FC236}">
-                <a16:creationId xmlns:a16="http://schemas.microsoft.com/office/drawing/2014/main" id="{AD2ABDAC-1077-4607-B4EC-A162DE0236FF}"/>
+                <a16:creationId xmlns:a16="http://schemas.microsoft.com/office/drawing/2014/main" id="{5277356B-999B-4323-92BF-A5A73142333D}"/>
               </a:ext>
             </a:extLst>
           </p:cNvPr>
@@ -33321,7 +33771,7 @@
           <p:cNvPr id="19" name="TextBox 18">
             <a:extLst xmlns:a="http://schemas.openxmlformats.org/drawingml/2006/main">
               <a:ext uri="{FF2B5EF4-FFF2-40B4-BE49-F238E27FC236}">
-                <a16:creationId xmlns:a16="http://schemas.microsoft.com/office/drawing/2014/main" id="{5E260565-9E48-4095-BB10-EF7A5A2584FA}"/>
+                <a16:creationId xmlns:a16="http://schemas.microsoft.com/office/drawing/2014/main" id="{51826FE6-455F-4B6F-9CD6-F47ECFBCB2AA}"/>
               </a:ext>
             </a:extLst>
           </p:cNvPr>
@@ -33368,7 +33818,7 @@
           <p:cNvPr id="20" name="TextBox 19">
             <a:extLst xmlns:a="http://schemas.openxmlformats.org/drawingml/2006/main">
               <a:ext uri="{FF2B5EF4-FFF2-40B4-BE49-F238E27FC236}">
-                <a16:creationId xmlns:a16="http://schemas.microsoft.com/office/drawing/2014/main" id="{726185B1-BAF6-4157-B106-D4BC516E530A}"/>
+                <a16:creationId xmlns:a16="http://schemas.microsoft.com/office/drawing/2014/main" id="{89799EE5-CEE1-4793-9F0B-64B3B4FFDCC3}"/>
               </a:ext>
             </a:extLst>
           </p:cNvPr>
@@ -33415,7 +33865,7 @@
           <p:cNvPr id="21" name="Rounded Rectangle 20">
             <a:extLst xmlns:a="http://schemas.openxmlformats.org/drawingml/2006/main">
               <a:ext uri="{FF2B5EF4-FFF2-40B4-BE49-F238E27FC236}">
-                <a16:creationId xmlns:a16="http://schemas.microsoft.com/office/drawing/2014/main" id="{C7A66189-75B3-4ADA-BD90-961E705E9228}"/>
+                <a16:creationId xmlns:a16="http://schemas.microsoft.com/office/drawing/2014/main" id="{06088E52-6EB2-4A4D-8F96-8557D6A59388}"/>
               </a:ext>
             </a:extLst>
           </p:cNvPr>
@@ -33472,7 +33922,7 @@
           <p:cNvPr id="22" name="TextBox 21">
             <a:extLst xmlns:a="http://schemas.openxmlformats.org/drawingml/2006/main">
               <a:ext uri="{FF2B5EF4-FFF2-40B4-BE49-F238E27FC236}">
-                <a16:creationId xmlns:a16="http://schemas.microsoft.com/office/drawing/2014/main" id="{5FA7F94A-C68D-4FAC-A686-B230A92AAC35}"/>
+                <a16:creationId xmlns:a16="http://schemas.microsoft.com/office/drawing/2014/main" id="{1612C503-1618-4D7E-AA53-1E50C21597BB}"/>
               </a:ext>
             </a:extLst>
           </p:cNvPr>
@@ -33519,7 +33969,7 @@
           <p:cNvPr id="23" name="TextBox 22">
             <a:extLst xmlns:a="http://schemas.openxmlformats.org/drawingml/2006/main">
               <a:ext uri="{FF2B5EF4-FFF2-40B4-BE49-F238E27FC236}">
-                <a16:creationId xmlns:a16="http://schemas.microsoft.com/office/drawing/2014/main" id="{F142B969-9A10-4B44-AC77-4D04B4539166}"/>
+                <a16:creationId xmlns:a16="http://schemas.microsoft.com/office/drawing/2014/main" id="{B1EC8FB4-9B7D-417E-A598-65F78A20EC39}"/>
               </a:ext>
             </a:extLst>
           </p:cNvPr>
@@ -33564,7 +34014,7 @@
     </p:spTree>
     <p:extLst>
       <p:ext uri="{BB962C8B-B14F-4D97-AF65-F5344CB8AC3E}">
-        <p14:creationId xmlns:p14="http://schemas.microsoft.com/office/powerpoint/2010/main" val="369063485"/>
+        <p14:creationId xmlns:p14="http://schemas.microsoft.com/office/powerpoint/2010/main" val="95610899"/>
       </p:ext>
     </p:extLst>
   </p:cSld>
@@ -33588,7 +34038,7 @@
           <p:cNvPr id="2" name="TextBox 1">
             <a:extLst xmlns:a="http://schemas.openxmlformats.org/drawingml/2006/main">
               <a:ext uri="{FF2B5EF4-FFF2-40B4-BE49-F238E27FC236}">
-                <a16:creationId xmlns:a16="http://schemas.microsoft.com/office/drawing/2014/main" id="{54BC6819-F13F-4C3D-84D1-EE09C8A27EE7}"/>
+                <a16:creationId xmlns:a16="http://schemas.microsoft.com/office/drawing/2014/main" id="{1ED10F3D-23B0-437B-B25D-51B5C8131F2F}"/>
               </a:ext>
             </a:extLst>
           </p:cNvPr>
@@ -33635,7 +34085,7 @@
           <p:cNvPr id="3" name="TextBox 2">
             <a:extLst xmlns:a="http://schemas.openxmlformats.org/drawingml/2006/main">
               <a:ext uri="{FF2B5EF4-FFF2-40B4-BE49-F238E27FC236}">
-                <a16:creationId xmlns:a16="http://schemas.microsoft.com/office/drawing/2014/main" id="{08B3CDCC-10A9-42EE-93B0-82EC71DEBA7D}"/>
+                <a16:creationId xmlns:a16="http://schemas.microsoft.com/office/drawing/2014/main" id="{AA43570D-D08A-4E5B-ACF4-7B059AE5075E}"/>
               </a:ext>
             </a:extLst>
           </p:cNvPr>
@@ -33682,7 +34132,7 @@
           <p:cNvPr id="4" name="Rectangle 3">
             <a:extLst xmlns:a="http://schemas.openxmlformats.org/drawingml/2006/main">
               <a:ext uri="{FF2B5EF4-FFF2-40B4-BE49-F238E27FC236}">
-                <a16:creationId xmlns:a16="http://schemas.microsoft.com/office/drawing/2014/main" id="{60174CDD-BC8A-4F94-A367-90B815AF566D}"/>
+                <a16:creationId xmlns:a16="http://schemas.microsoft.com/office/drawing/2014/main" id="{687CE7D4-C4EA-43B7-97C0-CBE3696857D3}"/>
               </a:ext>
             </a:extLst>
           </p:cNvPr>
@@ -33737,7 +34187,7 @@
           <p:cNvPr id="5" name="Rectangle 4">
             <a:extLst xmlns:a="http://schemas.openxmlformats.org/drawingml/2006/main">
               <a:ext uri="{FF2B5EF4-FFF2-40B4-BE49-F238E27FC236}">
-                <a16:creationId xmlns:a16="http://schemas.microsoft.com/office/drawing/2014/main" id="{95B35D83-167C-496A-B424-D6B43CEB5AD5}"/>
+                <a16:creationId xmlns:a16="http://schemas.microsoft.com/office/drawing/2014/main" id="{C72A0CD2-0A4F-4B49-9C0F-72E9D54DA6EF}"/>
               </a:ext>
             </a:extLst>
           </p:cNvPr>
@@ -33792,7 +34242,7 @@
           <p:cNvPr id="6" name="TextBox 5">
             <a:extLst xmlns:a="http://schemas.openxmlformats.org/drawingml/2006/main">
               <a:ext uri="{FF2B5EF4-FFF2-40B4-BE49-F238E27FC236}">
-                <a16:creationId xmlns:a16="http://schemas.microsoft.com/office/drawing/2014/main" id="{B82E4A46-9543-4FB7-A723-60031756A135}"/>
+                <a16:creationId xmlns:a16="http://schemas.microsoft.com/office/drawing/2014/main" id="{B6466ED3-C447-4381-964B-F6FDABFE63A0}"/>
               </a:ext>
             </a:extLst>
           </p:cNvPr>
@@ -33829,7 +34279,7 @@
                 <a:ea typeface="Aptos"/>
                 <a:cs typeface="Aptos"/>
               </a:rPr>
-              <a:t>Julkinen riippumaton evidenssikooste · 2026.07.24-18 · 2026-07-24 · Lähteet: Viralliset tuomiot: 8 Ni 18/24 (EP); 7 O 3341/24</a:t>
+              <a:t>Julkinen riippumaton evidenssikooste · 2026.07.24-19 · 2026-07-24 · Lähteet: Viralliset tuomiot: 8 Ni 18/24 (EP); 7 O 3341/24</a:t>
             </a:r>
           </a:p>
         </p:txBody>
@@ -33839,7 +34289,7 @@
           <p:cNvPr id="7" name="TextBox 6">
             <a:extLst xmlns:a="http://schemas.openxmlformats.org/drawingml/2006/main">
               <a:ext uri="{FF2B5EF4-FFF2-40B4-BE49-F238E27FC236}">
-                <a16:creationId xmlns:a16="http://schemas.microsoft.com/office/drawing/2014/main" id="{7C6D0483-63E2-4E91-9BF1-92421BCB335E}"/>
+                <a16:creationId xmlns:a16="http://schemas.microsoft.com/office/drawing/2014/main" id="{64A1148C-D9B8-485C-8811-F10C1272E555}"/>
               </a:ext>
             </a:extLst>
           </p:cNvPr>
@@ -34160,7 +34610,7 @@
           <p:cNvPr id="9" name="TextBox 8">
             <a:extLst xmlns:a="http://schemas.openxmlformats.org/drawingml/2006/main">
               <a:ext uri="{FF2B5EF4-FFF2-40B4-BE49-F238E27FC236}">
-                <a16:creationId xmlns:a16="http://schemas.microsoft.com/office/drawing/2014/main" id="{FFD245CA-F6AC-4D40-B14B-D91479E62E68}"/>
+                <a16:creationId xmlns:a16="http://schemas.microsoft.com/office/drawing/2014/main" id="{00EB99FC-85B9-42AA-855D-06FAADBF4414}"/>
               </a:ext>
             </a:extLst>
           </p:cNvPr>
@@ -34205,7 +34655,7 @@
     </p:spTree>
     <p:extLst>
       <p:ext uri="{BB962C8B-B14F-4D97-AF65-F5344CB8AC3E}">
-        <p14:creationId xmlns:p14="http://schemas.microsoft.com/office/powerpoint/2010/main" val="788613527"/>
+        <p14:creationId xmlns:p14="http://schemas.microsoft.com/office/powerpoint/2010/main" val="1894910294"/>
       </p:ext>
     </p:extLst>
   </p:cSld>

--- a/site/downloads/pixan-bank-deck-large-fi.pptx
+++ b/site/downloads/pixan-bank-deck-large-fi.pptx
@@ -2,42 +2,42 @@
 <file path=ppt/presentation.xml><?xml version="1.0" encoding="utf-8"?>
 <p:presentation xmlns:p="http://schemas.openxmlformats.org/presentationml/2006/main">
   <p:sldMasterIdLst>
-    <p:sldMasterId xmlns:r="http://schemas.openxmlformats.org/officeDocument/2006/relationships" id="2147483648" r:id="Re6ec81c0563f4770"/>
+    <p:sldMasterId xmlns:r="http://schemas.openxmlformats.org/officeDocument/2006/relationships" id="2147483648" r:id="R488d1192e9a64965"/>
   </p:sldMasterIdLst>
   <p:notesMasterIdLst>
-    <p:notesMasterId xmlns:r="http://schemas.openxmlformats.org/officeDocument/2006/relationships" r:id="Rb15975d75ca74fae"/>
+    <p:notesMasterId xmlns:r="http://schemas.openxmlformats.org/officeDocument/2006/relationships" r:id="R9ff28bfa7953445b"/>
   </p:notesMasterIdLst>
   <p:sldIdLst>
-    <p:sldId xmlns:r="http://schemas.openxmlformats.org/officeDocument/2006/relationships" id="256" r:id="R74b36a0f2f874d4f"/>
-    <p:sldId xmlns:r="http://schemas.openxmlformats.org/officeDocument/2006/relationships" id="257" r:id="R73e02e652b7544ed"/>
-    <p:sldId xmlns:r="http://schemas.openxmlformats.org/officeDocument/2006/relationships" id="258" r:id="R0457ebd931aa4f7f"/>
-    <p:sldId xmlns:r="http://schemas.openxmlformats.org/officeDocument/2006/relationships" id="259" r:id="Re253f506c78d424f"/>
-    <p:sldId xmlns:r="http://schemas.openxmlformats.org/officeDocument/2006/relationships" id="260" r:id="Rfc4809d44eac4074"/>
-    <p:sldId xmlns:r="http://schemas.openxmlformats.org/officeDocument/2006/relationships" id="261" r:id="Rd3d05252da484f6d"/>
-    <p:sldId xmlns:r="http://schemas.openxmlformats.org/officeDocument/2006/relationships" id="262" r:id="R74b829c403ec445a"/>
-    <p:sldId xmlns:r="http://schemas.openxmlformats.org/officeDocument/2006/relationships" id="263" r:id="R9b11cbb8c63c4d3b"/>
-    <p:sldId xmlns:r="http://schemas.openxmlformats.org/officeDocument/2006/relationships" id="264" r:id="R4822a90a01f24030"/>
-    <p:sldId xmlns:r="http://schemas.openxmlformats.org/officeDocument/2006/relationships" id="265" r:id="R4abf3ce86b164722"/>
-    <p:sldId xmlns:r="http://schemas.openxmlformats.org/officeDocument/2006/relationships" id="266" r:id="R4ce489a8aab94260"/>
-    <p:sldId xmlns:r="http://schemas.openxmlformats.org/officeDocument/2006/relationships" id="267" r:id="R08799807fe334802"/>
-    <p:sldId xmlns:r="http://schemas.openxmlformats.org/officeDocument/2006/relationships" id="268" r:id="R07bdc2c7ab0841a4"/>
-    <p:sldId xmlns:r="http://schemas.openxmlformats.org/officeDocument/2006/relationships" id="269" r:id="Rb1d774a37b014293"/>
-    <p:sldId xmlns:r="http://schemas.openxmlformats.org/officeDocument/2006/relationships" id="270" r:id="R0cdc073cbf5d4d9a"/>
-    <p:sldId xmlns:r="http://schemas.openxmlformats.org/officeDocument/2006/relationships" id="271" r:id="R92a39eee6b3d490f"/>
-    <p:sldId xmlns:r="http://schemas.openxmlformats.org/officeDocument/2006/relationships" id="272" r:id="Rd254e7a9a51d4082"/>
-    <p:sldId xmlns:r="http://schemas.openxmlformats.org/officeDocument/2006/relationships" id="273" r:id="Rad3acaf7800d4c5c"/>
-    <p:sldId xmlns:r="http://schemas.openxmlformats.org/officeDocument/2006/relationships" id="274" r:id="Rb75d8c3ae4b14882"/>
-    <p:sldId xmlns:r="http://schemas.openxmlformats.org/officeDocument/2006/relationships" id="275" r:id="Rf31d0d71a4514676"/>
-    <p:sldId xmlns:r="http://schemas.openxmlformats.org/officeDocument/2006/relationships" id="276" r:id="R352fffc617dc45fb"/>
-    <p:sldId xmlns:r="http://schemas.openxmlformats.org/officeDocument/2006/relationships" id="277" r:id="R81586ef6cc2349e4"/>
-    <p:sldId xmlns:r="http://schemas.openxmlformats.org/officeDocument/2006/relationships" id="278" r:id="R617decc9ab9d40fb"/>
-    <p:sldId xmlns:r="http://schemas.openxmlformats.org/officeDocument/2006/relationships" id="279" r:id="Rae50bc785716452d"/>
-    <p:sldId xmlns:r="http://schemas.openxmlformats.org/officeDocument/2006/relationships" id="280" r:id="R66cc67b607c44d04"/>
-    <p:sldId xmlns:r="http://schemas.openxmlformats.org/officeDocument/2006/relationships" id="281" r:id="R2eae9375d73a4970"/>
-    <p:sldId xmlns:r="http://schemas.openxmlformats.org/officeDocument/2006/relationships" id="282" r:id="Rd110fc2be39d4bae"/>
-    <p:sldId xmlns:r="http://schemas.openxmlformats.org/officeDocument/2006/relationships" id="283" r:id="Rfebf253b6d0e436b"/>
-    <p:sldId xmlns:r="http://schemas.openxmlformats.org/officeDocument/2006/relationships" id="284" r:id="Rc68d8e4427bf4e44"/>
-    <p:sldId xmlns:r="http://schemas.openxmlformats.org/officeDocument/2006/relationships" id="285" r:id="Recf16b6430a142cc"/>
+    <p:sldId xmlns:r="http://schemas.openxmlformats.org/officeDocument/2006/relationships" id="256" r:id="R2d259526b0af4e49"/>
+    <p:sldId xmlns:r="http://schemas.openxmlformats.org/officeDocument/2006/relationships" id="257" r:id="R26012d20aa814105"/>
+    <p:sldId xmlns:r="http://schemas.openxmlformats.org/officeDocument/2006/relationships" id="258" r:id="Re1c082454cf343d1"/>
+    <p:sldId xmlns:r="http://schemas.openxmlformats.org/officeDocument/2006/relationships" id="259" r:id="R597cc974f8844857"/>
+    <p:sldId xmlns:r="http://schemas.openxmlformats.org/officeDocument/2006/relationships" id="260" r:id="Rcc2c7b703c954dfc"/>
+    <p:sldId xmlns:r="http://schemas.openxmlformats.org/officeDocument/2006/relationships" id="261" r:id="Rdf7787504bfb447c"/>
+    <p:sldId xmlns:r="http://schemas.openxmlformats.org/officeDocument/2006/relationships" id="262" r:id="R21a5b8edd3384b0f"/>
+    <p:sldId xmlns:r="http://schemas.openxmlformats.org/officeDocument/2006/relationships" id="263" r:id="R7e2a872e7ccd4c62"/>
+    <p:sldId xmlns:r="http://schemas.openxmlformats.org/officeDocument/2006/relationships" id="264" r:id="R3c777ffeb2594cd0"/>
+    <p:sldId xmlns:r="http://schemas.openxmlformats.org/officeDocument/2006/relationships" id="265" r:id="Ra38e14d83b8a42d9"/>
+    <p:sldId xmlns:r="http://schemas.openxmlformats.org/officeDocument/2006/relationships" id="266" r:id="Rb7197dfe93fa46db"/>
+    <p:sldId xmlns:r="http://schemas.openxmlformats.org/officeDocument/2006/relationships" id="267" r:id="Re6785a28ccb84fd0"/>
+    <p:sldId xmlns:r="http://schemas.openxmlformats.org/officeDocument/2006/relationships" id="268" r:id="Ra533544f2a6d48d2"/>
+    <p:sldId xmlns:r="http://schemas.openxmlformats.org/officeDocument/2006/relationships" id="269" r:id="Rc5acd8c7643b47a4"/>
+    <p:sldId xmlns:r="http://schemas.openxmlformats.org/officeDocument/2006/relationships" id="270" r:id="R05764585ff7a48ef"/>
+    <p:sldId xmlns:r="http://schemas.openxmlformats.org/officeDocument/2006/relationships" id="271" r:id="Rc90a960395704af6"/>
+    <p:sldId xmlns:r="http://schemas.openxmlformats.org/officeDocument/2006/relationships" id="272" r:id="R5125545eda6c4a73"/>
+    <p:sldId xmlns:r="http://schemas.openxmlformats.org/officeDocument/2006/relationships" id="273" r:id="R944234f0196b4030"/>
+    <p:sldId xmlns:r="http://schemas.openxmlformats.org/officeDocument/2006/relationships" id="274" r:id="R9a27de9bd8084c3b"/>
+    <p:sldId xmlns:r="http://schemas.openxmlformats.org/officeDocument/2006/relationships" id="275" r:id="Re289b7bfc5574fb2"/>
+    <p:sldId xmlns:r="http://schemas.openxmlformats.org/officeDocument/2006/relationships" id="276" r:id="R6be72d0bfc56405c"/>
+    <p:sldId xmlns:r="http://schemas.openxmlformats.org/officeDocument/2006/relationships" id="277" r:id="R896da85fad0c4c3d"/>
+    <p:sldId xmlns:r="http://schemas.openxmlformats.org/officeDocument/2006/relationships" id="278" r:id="R7374604b406e4b9a"/>
+    <p:sldId xmlns:r="http://schemas.openxmlformats.org/officeDocument/2006/relationships" id="279" r:id="R91fa996f48b04926"/>
+    <p:sldId xmlns:r="http://schemas.openxmlformats.org/officeDocument/2006/relationships" id="280" r:id="Re17cef12f4354d46"/>
+    <p:sldId xmlns:r="http://schemas.openxmlformats.org/officeDocument/2006/relationships" id="281" r:id="R3fb49aef6e0047ab"/>
+    <p:sldId xmlns:r="http://schemas.openxmlformats.org/officeDocument/2006/relationships" id="282" r:id="R9e2503e3a91d4dfd"/>
+    <p:sldId xmlns:r="http://schemas.openxmlformats.org/officeDocument/2006/relationships" id="283" r:id="R4c749e6818534d31"/>
+    <p:sldId xmlns:r="http://schemas.openxmlformats.org/officeDocument/2006/relationships" id="284" r:id="R7cd07b06bcad4255"/>
+    <p:sldId xmlns:r="http://schemas.openxmlformats.org/officeDocument/2006/relationships" id="285" r:id="R1c0bc427f2b2446d"/>
   </p:sldIdLst>
   <p:sldSz cx="12191999" cy="6858000"/>
   <p:notesSz cx="6858000" cy="9144000"/>
@@ -5571,7 +5571,7 @@
           <p:cNvPr id="2" name="Title 1">
             <a:extLst xmlns:a="http://schemas.openxmlformats.org/drawingml/2006/main">
               <a:ext uri="{FF2B5EF4-FFF2-40B4-BE49-F238E27FC236}">
-                <a16:creationId xmlns:a16="http://schemas.microsoft.com/office/drawing/2014/main" id="{CE6AAB35-34CB-4F3B-B69B-063F88E5D851}"/>
+                <a16:creationId xmlns:a16="http://schemas.microsoft.com/office/drawing/2014/main" id="{8263673F-499F-4627-AC08-4F9EA89B4D34}"/>
               </a:ext>
             </a:extLst>
           </p:cNvPr>
@@ -5603,7 +5603,7 @@
           <p:cNvPr id="3" name="Subtitle 2">
             <a:extLst xmlns:a="http://schemas.openxmlformats.org/drawingml/2006/main">
               <a:ext uri="{FF2B5EF4-FFF2-40B4-BE49-F238E27FC236}">
-                <a16:creationId xmlns:a16="http://schemas.microsoft.com/office/drawing/2014/main" id="{EFC6B596-215C-4B10-A59F-F1D280B7ED4E}"/>
+                <a16:creationId xmlns:a16="http://schemas.microsoft.com/office/drawing/2014/main" id="{DEE9C1AC-6EBC-4A02-ADE3-127B153890F9}"/>
               </a:ext>
             </a:extLst>
           </p:cNvPr>
@@ -5726,7 +5726,7 @@
           <p:cNvPr id="4" name="Date Placeholder 3">
             <a:extLst xmlns:a="http://schemas.openxmlformats.org/drawingml/2006/main">
               <a:ext uri="{FF2B5EF4-FFF2-40B4-BE49-F238E27FC236}">
-                <a16:creationId xmlns:a16="http://schemas.microsoft.com/office/drawing/2014/main" id="{1BD30AE9-A4AC-4BB6-81BC-26095099B53D}"/>
+                <a16:creationId xmlns:a16="http://schemas.microsoft.com/office/drawing/2014/main" id="{9DD439CF-ACFA-4BB0-B9D3-E9BAAE150AA5}"/>
               </a:ext>
             </a:extLst>
           </p:cNvPr>
@@ -5753,7 +5753,7 @@
           <p:cNvPr id="5" name="Footer Placeholder 4">
             <a:extLst xmlns:a="http://schemas.openxmlformats.org/drawingml/2006/main">
               <a:ext uri="{FF2B5EF4-FFF2-40B4-BE49-F238E27FC236}">
-                <a16:creationId xmlns:a16="http://schemas.microsoft.com/office/drawing/2014/main" id="{C26BEA2B-3563-4026-B7AA-D1780B73B3BA}"/>
+                <a16:creationId xmlns:a16="http://schemas.microsoft.com/office/drawing/2014/main" id="{E5E4F4B6-5DA5-4CD0-BEB1-B7F230607053}"/>
               </a:ext>
             </a:extLst>
           </p:cNvPr>
@@ -5776,7 +5776,7 @@
           <p:cNvPr id="6" name="Slide Number Placeholder 5">
             <a:extLst xmlns:a="http://schemas.openxmlformats.org/drawingml/2006/main">
               <a:ext uri="{FF2B5EF4-FFF2-40B4-BE49-F238E27FC236}">
-                <a16:creationId xmlns:a16="http://schemas.microsoft.com/office/drawing/2014/main" id="{54711E1A-6EB9-410A-9250-C395EC6794F0}"/>
+                <a16:creationId xmlns:a16="http://schemas.microsoft.com/office/drawing/2014/main" id="{BC7CC9C8-F2C8-43E6-8A01-833A0550B8ED}"/>
               </a:ext>
             </a:extLst>
           </p:cNvPr>
@@ -5820,7 +5820,7 @@
           <p:cNvPr id="2" name="Title 1">
             <a:extLst xmlns:a="http://schemas.openxmlformats.org/drawingml/2006/main">
               <a:ext uri="{FF2B5EF4-FFF2-40B4-BE49-F238E27FC236}">
-                <a16:creationId xmlns:a16="http://schemas.microsoft.com/office/drawing/2014/main" id="{F02170A4-3E94-404B-B5BE-38B8D4D91C9A}"/>
+                <a16:creationId xmlns:a16="http://schemas.microsoft.com/office/drawing/2014/main" id="{78201C7E-1CEA-4633-8CF4-3A0FB301E5EA}"/>
               </a:ext>
             </a:extLst>
           </p:cNvPr>
@@ -5847,7 +5847,7 @@
           <p:cNvPr id="3" name="Vertical Text Placeholder 2">
             <a:extLst xmlns:a="http://schemas.openxmlformats.org/drawingml/2006/main">
               <a:ext uri="{FF2B5EF4-FFF2-40B4-BE49-F238E27FC236}">
-                <a16:creationId xmlns:a16="http://schemas.microsoft.com/office/drawing/2014/main" id="{CE671606-2905-4269-AF15-9648EB4A1447}"/>
+                <a16:creationId xmlns:a16="http://schemas.microsoft.com/office/drawing/2014/main" id="{24B36470-9AEE-4F57-8F02-99C5A1C10B9C}"/>
               </a:ext>
             </a:extLst>
           </p:cNvPr>
@@ -5909,7 +5909,7 @@
           <p:cNvPr id="4" name="Date Placeholder 3">
             <a:extLst xmlns:a="http://schemas.openxmlformats.org/drawingml/2006/main">
               <a:ext uri="{FF2B5EF4-FFF2-40B4-BE49-F238E27FC236}">
-                <a16:creationId xmlns:a16="http://schemas.microsoft.com/office/drawing/2014/main" id="{B9E8BA3B-2A8E-4C93-AA9C-98B5E126C22B}"/>
+                <a16:creationId xmlns:a16="http://schemas.microsoft.com/office/drawing/2014/main" id="{96686FFF-2064-4AA1-A2DA-642709AC7E7F}"/>
               </a:ext>
             </a:extLst>
           </p:cNvPr>
@@ -5936,7 +5936,7 @@
           <p:cNvPr id="5" name="Footer Placeholder 4">
             <a:extLst xmlns:a="http://schemas.openxmlformats.org/drawingml/2006/main">
               <a:ext uri="{FF2B5EF4-FFF2-40B4-BE49-F238E27FC236}">
-                <a16:creationId xmlns:a16="http://schemas.microsoft.com/office/drawing/2014/main" id="{F407A7F3-0066-4C6D-BE04-9CF288F68836}"/>
+                <a16:creationId xmlns:a16="http://schemas.microsoft.com/office/drawing/2014/main" id="{70768E06-EDA1-47C8-B27D-71A913B6E2E3}"/>
               </a:ext>
             </a:extLst>
           </p:cNvPr>
@@ -5959,7 +5959,7 @@
           <p:cNvPr id="6" name="Slide Number Placeholder 5">
             <a:extLst xmlns:a="http://schemas.openxmlformats.org/drawingml/2006/main">
               <a:ext uri="{FF2B5EF4-FFF2-40B4-BE49-F238E27FC236}">
-                <a16:creationId xmlns:a16="http://schemas.microsoft.com/office/drawing/2014/main" id="{EC1BAF96-9E65-4768-8DDB-AD4524F04780}"/>
+                <a16:creationId xmlns:a16="http://schemas.microsoft.com/office/drawing/2014/main" id="{8E540F9B-6BAD-479E-AF2A-ABE8A0986ED4}"/>
               </a:ext>
             </a:extLst>
           </p:cNvPr>
@@ -6003,7 +6003,7 @@
           <p:cNvPr id="2" name="Vertical Title 1">
             <a:extLst xmlns:a="http://schemas.openxmlformats.org/drawingml/2006/main">
               <a:ext uri="{FF2B5EF4-FFF2-40B4-BE49-F238E27FC236}">
-                <a16:creationId xmlns:a16="http://schemas.microsoft.com/office/drawing/2014/main" id="{6EAC18BD-1234-4DF2-8182-E5F6F38381FB}"/>
+                <a16:creationId xmlns:a16="http://schemas.microsoft.com/office/drawing/2014/main" id="{794D9A2D-F1F1-4A6E-A069-6939576A1E6D}"/>
               </a:ext>
             </a:extLst>
           </p:cNvPr>
@@ -6035,7 +6035,7 @@
           <p:cNvPr id="3" name="Vertical Text Placeholder 2">
             <a:extLst xmlns:a="http://schemas.openxmlformats.org/drawingml/2006/main">
               <a:ext uri="{FF2B5EF4-FFF2-40B4-BE49-F238E27FC236}">
-                <a16:creationId xmlns:a16="http://schemas.microsoft.com/office/drawing/2014/main" id="{DA56A32A-5822-4002-8E59-DF117706077C}"/>
+                <a16:creationId xmlns:a16="http://schemas.microsoft.com/office/drawing/2014/main" id="{75D922AD-6840-46E2-A692-AD2F242A6288}"/>
               </a:ext>
             </a:extLst>
           </p:cNvPr>
@@ -6102,7 +6102,7 @@
           <p:cNvPr id="4" name="Date Placeholder 3">
             <a:extLst xmlns:a="http://schemas.openxmlformats.org/drawingml/2006/main">
               <a:ext uri="{FF2B5EF4-FFF2-40B4-BE49-F238E27FC236}">
-                <a16:creationId xmlns:a16="http://schemas.microsoft.com/office/drawing/2014/main" id="{2B53A692-BD27-46FB-AA01-D05BBE5DEB26}"/>
+                <a16:creationId xmlns:a16="http://schemas.microsoft.com/office/drawing/2014/main" id="{FE2FF5AE-BEF3-4658-9873-4B014ED44C65}"/>
               </a:ext>
             </a:extLst>
           </p:cNvPr>
@@ -6129,7 +6129,7 @@
           <p:cNvPr id="5" name="Footer Placeholder 4">
             <a:extLst xmlns:a="http://schemas.openxmlformats.org/drawingml/2006/main">
               <a:ext uri="{FF2B5EF4-FFF2-40B4-BE49-F238E27FC236}">
-                <a16:creationId xmlns:a16="http://schemas.microsoft.com/office/drawing/2014/main" id="{DD8B7764-4496-4546-9CFB-E3DD85854B50}"/>
+                <a16:creationId xmlns:a16="http://schemas.microsoft.com/office/drawing/2014/main" id="{DD218969-F9FB-45A7-A995-35400539AD60}"/>
               </a:ext>
             </a:extLst>
           </p:cNvPr>
@@ -6152,7 +6152,7 @@
           <p:cNvPr id="6" name="Slide Number Placeholder 5">
             <a:extLst xmlns:a="http://schemas.openxmlformats.org/drawingml/2006/main">
               <a:ext uri="{FF2B5EF4-FFF2-40B4-BE49-F238E27FC236}">
-                <a16:creationId xmlns:a16="http://schemas.microsoft.com/office/drawing/2014/main" id="{6AFCB7A7-AC48-48BF-B277-1D32651BBFB2}"/>
+                <a16:creationId xmlns:a16="http://schemas.microsoft.com/office/drawing/2014/main" id="{E9FA6DD4-CC45-4D1E-8425-B3AFEB4C0339}"/>
               </a:ext>
             </a:extLst>
           </p:cNvPr>
@@ -6196,7 +6196,7 @@
           <p:cNvPr id="2" name="Title 1">
             <a:extLst xmlns:a="http://schemas.openxmlformats.org/drawingml/2006/main">
               <a:ext uri="{FF2B5EF4-FFF2-40B4-BE49-F238E27FC236}">
-                <a16:creationId xmlns:a16="http://schemas.microsoft.com/office/drawing/2014/main" id="{074F64F6-261A-4626-BF71-8FBFD1F926F5}"/>
+                <a16:creationId xmlns:a16="http://schemas.microsoft.com/office/drawing/2014/main" id="{127E9C3E-ABE5-4C90-BB84-CBFA03909ED8}"/>
               </a:ext>
             </a:extLst>
           </p:cNvPr>
@@ -6223,7 +6223,7 @@
           <p:cNvPr id="3" name="Content Placeholder 2">
             <a:extLst xmlns:a="http://schemas.openxmlformats.org/drawingml/2006/main">
               <a:ext uri="{FF2B5EF4-FFF2-40B4-BE49-F238E27FC236}">
-                <a16:creationId xmlns:a16="http://schemas.microsoft.com/office/drawing/2014/main" id="{122482D8-1E6B-4972-8287-CBBDEAACB5FA}"/>
+                <a16:creationId xmlns:a16="http://schemas.microsoft.com/office/drawing/2014/main" id="{3D697725-B083-4FB7-86DB-51500BCBB8DC}"/>
               </a:ext>
             </a:extLst>
           </p:cNvPr>
@@ -6285,7 +6285,7 @@
           <p:cNvPr id="4" name="Date Placeholder 3">
             <a:extLst xmlns:a="http://schemas.openxmlformats.org/drawingml/2006/main">
               <a:ext uri="{FF2B5EF4-FFF2-40B4-BE49-F238E27FC236}">
-                <a16:creationId xmlns:a16="http://schemas.microsoft.com/office/drawing/2014/main" id="{CEB19647-2774-4D08-9E25-6B3DBE8E37AF}"/>
+                <a16:creationId xmlns:a16="http://schemas.microsoft.com/office/drawing/2014/main" id="{1144C0AA-780B-481F-9B27-97E88DA5A9A3}"/>
               </a:ext>
             </a:extLst>
           </p:cNvPr>
@@ -6312,7 +6312,7 @@
           <p:cNvPr id="5" name="Footer Placeholder 4">
             <a:extLst xmlns:a="http://schemas.openxmlformats.org/drawingml/2006/main">
               <a:ext uri="{FF2B5EF4-FFF2-40B4-BE49-F238E27FC236}">
-                <a16:creationId xmlns:a16="http://schemas.microsoft.com/office/drawing/2014/main" id="{D6A5FC51-B267-4DF1-B853-A899176F49D1}"/>
+                <a16:creationId xmlns:a16="http://schemas.microsoft.com/office/drawing/2014/main" id="{E3E8ECF1-1F8C-4F23-88BF-6D1ED687B55A}"/>
               </a:ext>
             </a:extLst>
           </p:cNvPr>
@@ -6335,7 +6335,7 @@
           <p:cNvPr id="6" name="Slide Number Placeholder 5">
             <a:extLst xmlns:a="http://schemas.openxmlformats.org/drawingml/2006/main">
               <a:ext uri="{FF2B5EF4-FFF2-40B4-BE49-F238E27FC236}">
-                <a16:creationId xmlns:a16="http://schemas.microsoft.com/office/drawing/2014/main" id="{72E8B189-73BE-4A56-81B3-89169E929965}"/>
+                <a16:creationId xmlns:a16="http://schemas.microsoft.com/office/drawing/2014/main" id="{2BEA34A5-4DA8-44C2-9970-9811724EDBD6}"/>
               </a:ext>
             </a:extLst>
           </p:cNvPr>
@@ -6379,7 +6379,7 @@
           <p:cNvPr id="2" name="Title 1">
             <a:extLst xmlns:a="http://schemas.openxmlformats.org/drawingml/2006/main">
               <a:ext uri="{FF2B5EF4-FFF2-40B4-BE49-F238E27FC236}">
-                <a16:creationId xmlns:a16="http://schemas.microsoft.com/office/drawing/2014/main" id="{CB5F7A55-9034-48F3-9732-7649CA97C95F}"/>
+                <a16:creationId xmlns:a16="http://schemas.microsoft.com/office/drawing/2014/main" id="{34AE017E-B941-44F6-B267-AA3FB19BDF32}"/>
               </a:ext>
             </a:extLst>
           </p:cNvPr>
@@ -6416,7 +6416,7 @@
           <p:cNvPr id="3" name="Text Placeholder 2">
             <a:extLst xmlns:a="http://schemas.openxmlformats.org/drawingml/2006/main">
               <a:ext uri="{FF2B5EF4-FFF2-40B4-BE49-F238E27FC236}">
-                <a16:creationId xmlns:a16="http://schemas.microsoft.com/office/drawing/2014/main" id="{0DA88FFC-5757-4273-9F84-3CD38B6E765D}"/>
+                <a16:creationId xmlns:a16="http://schemas.microsoft.com/office/drawing/2014/main" id="{58E13A6A-73CD-4784-A588-6C6DD01F07C4}"/>
               </a:ext>
             </a:extLst>
           </p:cNvPr>
@@ -6542,7 +6542,7 @@
           <p:cNvPr id="4" name="Date Placeholder 3">
             <a:extLst xmlns:a="http://schemas.openxmlformats.org/drawingml/2006/main">
               <a:ext uri="{FF2B5EF4-FFF2-40B4-BE49-F238E27FC236}">
-                <a16:creationId xmlns:a16="http://schemas.microsoft.com/office/drawing/2014/main" id="{F4F3E793-8DB6-43C9-BF5F-6E43189F0243}"/>
+                <a16:creationId xmlns:a16="http://schemas.microsoft.com/office/drawing/2014/main" id="{09813860-2728-47E1-82CD-16EE75DB1E53}"/>
               </a:ext>
             </a:extLst>
           </p:cNvPr>
@@ -6569,7 +6569,7 @@
           <p:cNvPr id="5" name="Footer Placeholder 4">
             <a:extLst xmlns:a="http://schemas.openxmlformats.org/drawingml/2006/main">
               <a:ext uri="{FF2B5EF4-FFF2-40B4-BE49-F238E27FC236}">
-                <a16:creationId xmlns:a16="http://schemas.microsoft.com/office/drawing/2014/main" id="{31760D2F-279B-4D9D-9E51-7FED1B5AD2EB}"/>
+                <a16:creationId xmlns:a16="http://schemas.microsoft.com/office/drawing/2014/main" id="{E753C593-760A-4C49-95B1-C8AA759D2CBF}"/>
               </a:ext>
             </a:extLst>
           </p:cNvPr>
@@ -6592,7 +6592,7 @@
           <p:cNvPr id="6" name="Slide Number Placeholder 5">
             <a:extLst xmlns:a="http://schemas.openxmlformats.org/drawingml/2006/main">
               <a:ext uri="{FF2B5EF4-FFF2-40B4-BE49-F238E27FC236}">
-                <a16:creationId xmlns:a16="http://schemas.microsoft.com/office/drawing/2014/main" id="{0F6330B8-2855-4F23-B1AA-08EACE033B40}"/>
+                <a16:creationId xmlns:a16="http://schemas.microsoft.com/office/drawing/2014/main" id="{ED329989-5AFC-4C05-B935-C7CB68F1535F}"/>
               </a:ext>
             </a:extLst>
           </p:cNvPr>
@@ -6636,7 +6636,7 @@
           <p:cNvPr id="2" name="Title 1">
             <a:extLst xmlns:a="http://schemas.openxmlformats.org/drawingml/2006/main">
               <a:ext uri="{FF2B5EF4-FFF2-40B4-BE49-F238E27FC236}">
-                <a16:creationId xmlns:a16="http://schemas.microsoft.com/office/drawing/2014/main" id="{E48FA9D9-AB95-47F2-B7B9-6AB035B4BD61}"/>
+                <a16:creationId xmlns:a16="http://schemas.microsoft.com/office/drawing/2014/main" id="{2649038F-6921-4FAC-8D0B-FB13E36572B7}"/>
               </a:ext>
             </a:extLst>
           </p:cNvPr>
@@ -6663,7 +6663,7 @@
           <p:cNvPr id="3" name="Content Placeholder 2">
             <a:extLst xmlns:a="http://schemas.openxmlformats.org/drawingml/2006/main">
               <a:ext uri="{FF2B5EF4-FFF2-40B4-BE49-F238E27FC236}">
-                <a16:creationId xmlns:a16="http://schemas.microsoft.com/office/drawing/2014/main" id="{95A8A2B8-AB08-4CD3-A70B-C3A5ECE52C45}"/>
+                <a16:creationId xmlns:a16="http://schemas.microsoft.com/office/drawing/2014/main" id="{50CCC6C5-4E07-42C5-82F0-2B2DDAE2651F}"/>
               </a:ext>
             </a:extLst>
           </p:cNvPr>
@@ -6767,7 +6767,7 @@
           <p:cNvPr id="4" name="Content Placeholder 3">
             <a:extLst xmlns:a="http://schemas.openxmlformats.org/drawingml/2006/main">
               <a:ext uri="{FF2B5EF4-FFF2-40B4-BE49-F238E27FC236}">
-                <a16:creationId xmlns:a16="http://schemas.microsoft.com/office/drawing/2014/main" id="{733AA9C8-479B-4C9F-86D2-D0EDBA2AE694}"/>
+                <a16:creationId xmlns:a16="http://schemas.microsoft.com/office/drawing/2014/main" id="{7B866D4D-7EBE-4712-825D-48E88A35AAE3}"/>
               </a:ext>
             </a:extLst>
           </p:cNvPr>
@@ -6871,7 +6871,7 @@
           <p:cNvPr id="5" name="Date Placeholder 4">
             <a:extLst xmlns:a="http://schemas.openxmlformats.org/drawingml/2006/main">
               <a:ext uri="{FF2B5EF4-FFF2-40B4-BE49-F238E27FC236}">
-                <a16:creationId xmlns:a16="http://schemas.microsoft.com/office/drawing/2014/main" id="{FB5DD40B-9592-49EE-981F-F6C542D28903}"/>
+                <a16:creationId xmlns:a16="http://schemas.microsoft.com/office/drawing/2014/main" id="{A03C4742-96AA-4455-AC7E-2232E6000576}"/>
               </a:ext>
             </a:extLst>
           </p:cNvPr>
@@ -6898,7 +6898,7 @@
           <p:cNvPr id="6" name="Footer Placeholder 5">
             <a:extLst xmlns:a="http://schemas.openxmlformats.org/drawingml/2006/main">
               <a:ext uri="{FF2B5EF4-FFF2-40B4-BE49-F238E27FC236}">
-                <a16:creationId xmlns:a16="http://schemas.microsoft.com/office/drawing/2014/main" id="{E8A85D55-D180-4B64-B1BD-B035188E7B76}"/>
+                <a16:creationId xmlns:a16="http://schemas.microsoft.com/office/drawing/2014/main" id="{3AB41752-EF2E-4099-ABC0-921F833A6718}"/>
               </a:ext>
             </a:extLst>
           </p:cNvPr>
@@ -6921,7 +6921,7 @@
           <p:cNvPr id="7" name="Slide Number Placeholder 6">
             <a:extLst xmlns:a="http://schemas.openxmlformats.org/drawingml/2006/main">
               <a:ext uri="{FF2B5EF4-FFF2-40B4-BE49-F238E27FC236}">
-                <a16:creationId xmlns:a16="http://schemas.microsoft.com/office/drawing/2014/main" id="{B633AC06-148A-4975-9525-3E610A4F930C}"/>
+                <a16:creationId xmlns:a16="http://schemas.microsoft.com/office/drawing/2014/main" id="{2683337A-59ED-46A8-9CC5-8B5525DCAFB3}"/>
               </a:ext>
             </a:extLst>
           </p:cNvPr>
@@ -6965,7 +6965,7 @@
           <p:cNvPr id="2" name="Title 1">
             <a:extLst xmlns:a="http://schemas.openxmlformats.org/drawingml/2006/main">
               <a:ext uri="{FF2B5EF4-FFF2-40B4-BE49-F238E27FC236}">
-                <a16:creationId xmlns:a16="http://schemas.microsoft.com/office/drawing/2014/main" id="{CD3BB5DF-8A66-4F1F-9E7B-D0182922A856}"/>
+                <a16:creationId xmlns:a16="http://schemas.microsoft.com/office/drawing/2014/main" id="{015CD957-9E18-4138-BC91-0AE46F7C9FF7}"/>
               </a:ext>
             </a:extLst>
           </p:cNvPr>
@@ -6997,7 +6997,7 @@
           <p:cNvPr id="3" name="Text Placeholder 2">
             <a:extLst xmlns:a="http://schemas.openxmlformats.org/drawingml/2006/main">
               <a:ext uri="{FF2B5EF4-FFF2-40B4-BE49-F238E27FC236}">
-                <a16:creationId xmlns:a16="http://schemas.microsoft.com/office/drawing/2014/main" id="{6F481179-FC25-4F3B-857D-F6E8E67F15F8}"/>
+                <a16:creationId xmlns:a16="http://schemas.microsoft.com/office/drawing/2014/main" id="{C6433F4D-B510-47C7-9C19-D4E5FD175979}"/>
               </a:ext>
             </a:extLst>
           </p:cNvPr>
@@ -7069,7 +7069,7 @@
           <p:cNvPr id="4" name="Content Placeholder 3">
             <a:extLst xmlns:a="http://schemas.openxmlformats.org/drawingml/2006/main">
               <a:ext uri="{FF2B5EF4-FFF2-40B4-BE49-F238E27FC236}">
-                <a16:creationId xmlns:a16="http://schemas.microsoft.com/office/drawing/2014/main" id="{A9A5EE78-608D-4F05-8936-CE549E69DC10}"/>
+                <a16:creationId xmlns:a16="http://schemas.microsoft.com/office/drawing/2014/main" id="{36E92D24-F38E-4505-8166-5BD4877F87BD}"/>
               </a:ext>
             </a:extLst>
           </p:cNvPr>
@@ -7173,7 +7173,7 @@
           <p:cNvPr id="5" name="Text Placeholder 4">
             <a:extLst xmlns:a="http://schemas.openxmlformats.org/drawingml/2006/main">
               <a:ext uri="{FF2B5EF4-FFF2-40B4-BE49-F238E27FC236}">
-                <a16:creationId xmlns:a16="http://schemas.microsoft.com/office/drawing/2014/main" id="{A68C30FB-CBAD-4D41-AD3D-22B98084417C}"/>
+                <a16:creationId xmlns:a16="http://schemas.microsoft.com/office/drawing/2014/main" id="{094C28AB-3895-4201-AA71-35EAEE5042C2}"/>
               </a:ext>
             </a:extLst>
           </p:cNvPr>
@@ -7245,7 +7245,7 @@
           <p:cNvPr id="6" name="Content Placeholder 5">
             <a:extLst xmlns:a="http://schemas.openxmlformats.org/drawingml/2006/main">
               <a:ext uri="{FF2B5EF4-FFF2-40B4-BE49-F238E27FC236}">
-                <a16:creationId xmlns:a16="http://schemas.microsoft.com/office/drawing/2014/main" id="{F75B9ADE-E2DF-4E1F-9DBD-43249A632886}"/>
+                <a16:creationId xmlns:a16="http://schemas.microsoft.com/office/drawing/2014/main" id="{26D91733-90BA-475F-A727-B9A43D03BF83}"/>
               </a:ext>
             </a:extLst>
           </p:cNvPr>
@@ -7349,7 +7349,7 @@
           <p:cNvPr id="7" name="Date Placeholder 6">
             <a:extLst xmlns:a="http://schemas.openxmlformats.org/drawingml/2006/main">
               <a:ext uri="{FF2B5EF4-FFF2-40B4-BE49-F238E27FC236}">
-                <a16:creationId xmlns:a16="http://schemas.microsoft.com/office/drawing/2014/main" id="{F397D497-6F2F-403D-8E81-816EE5498B7A}"/>
+                <a16:creationId xmlns:a16="http://schemas.microsoft.com/office/drawing/2014/main" id="{2166EFFD-5982-4DA0-AEF4-2046B3501D3C}"/>
               </a:ext>
             </a:extLst>
           </p:cNvPr>
@@ -7376,7 +7376,7 @@
           <p:cNvPr id="8" name="Footer Placeholder 7">
             <a:extLst xmlns:a="http://schemas.openxmlformats.org/drawingml/2006/main">
               <a:ext uri="{FF2B5EF4-FFF2-40B4-BE49-F238E27FC236}">
-                <a16:creationId xmlns:a16="http://schemas.microsoft.com/office/drawing/2014/main" id="{3F7AF743-EBB3-4659-A8C9-7B38D1D516C3}"/>
+                <a16:creationId xmlns:a16="http://schemas.microsoft.com/office/drawing/2014/main" id="{BE8A6E0D-C46F-448A-A725-11EB0FE9D132}"/>
               </a:ext>
             </a:extLst>
           </p:cNvPr>
@@ -7399,7 +7399,7 @@
           <p:cNvPr id="9" name="Slide Number Placeholder 8">
             <a:extLst xmlns:a="http://schemas.openxmlformats.org/drawingml/2006/main">
               <a:ext uri="{FF2B5EF4-FFF2-40B4-BE49-F238E27FC236}">
-                <a16:creationId xmlns:a16="http://schemas.microsoft.com/office/drawing/2014/main" id="{85636DAC-0968-4448-9487-5918A32445BA}"/>
+                <a16:creationId xmlns:a16="http://schemas.microsoft.com/office/drawing/2014/main" id="{6ED2A2F7-171E-4371-A9B0-30CE771C3DEE}"/>
               </a:ext>
             </a:extLst>
           </p:cNvPr>
@@ -7443,7 +7443,7 @@
           <p:cNvPr id="2" name="Title 1">
             <a:extLst xmlns:a="http://schemas.openxmlformats.org/drawingml/2006/main">
               <a:ext uri="{FF2B5EF4-FFF2-40B4-BE49-F238E27FC236}">
-                <a16:creationId xmlns:a16="http://schemas.microsoft.com/office/drawing/2014/main" id="{E9FC5616-4289-40D3-AEFB-B20C5C6F8091}"/>
+                <a16:creationId xmlns:a16="http://schemas.microsoft.com/office/drawing/2014/main" id="{1FC07671-3E41-490A-A347-DD0551490B93}"/>
               </a:ext>
             </a:extLst>
           </p:cNvPr>
@@ -7470,7 +7470,7 @@
           <p:cNvPr id="3" name="Date Placeholder 2">
             <a:extLst xmlns:a="http://schemas.openxmlformats.org/drawingml/2006/main">
               <a:ext uri="{FF2B5EF4-FFF2-40B4-BE49-F238E27FC236}">
-                <a16:creationId xmlns:a16="http://schemas.microsoft.com/office/drawing/2014/main" id="{5422FA08-8B47-47F9-9388-B197178D6ABE}"/>
+                <a16:creationId xmlns:a16="http://schemas.microsoft.com/office/drawing/2014/main" id="{A52F4771-80FD-4519-B141-09D6FFDE037B}"/>
               </a:ext>
             </a:extLst>
           </p:cNvPr>
@@ -7497,7 +7497,7 @@
           <p:cNvPr id="4" name="Footer Placeholder 3">
             <a:extLst xmlns:a="http://schemas.openxmlformats.org/drawingml/2006/main">
               <a:ext uri="{FF2B5EF4-FFF2-40B4-BE49-F238E27FC236}">
-                <a16:creationId xmlns:a16="http://schemas.microsoft.com/office/drawing/2014/main" id="{56EB1212-1757-4712-B5EE-1814FBA30EEC}"/>
+                <a16:creationId xmlns:a16="http://schemas.microsoft.com/office/drawing/2014/main" id="{86D9B4B7-235C-44A6-AFBA-E15CE40497EF}"/>
               </a:ext>
             </a:extLst>
           </p:cNvPr>
@@ -7520,7 +7520,7 @@
           <p:cNvPr id="5" name="Slide Number Placeholder 4">
             <a:extLst xmlns:a="http://schemas.openxmlformats.org/drawingml/2006/main">
               <a:ext uri="{FF2B5EF4-FFF2-40B4-BE49-F238E27FC236}">
-                <a16:creationId xmlns:a16="http://schemas.microsoft.com/office/drawing/2014/main" id="{F860D78D-DA18-4530-AEB1-E4F0D052BE0A}"/>
+                <a16:creationId xmlns:a16="http://schemas.microsoft.com/office/drawing/2014/main" id="{30F54E6D-4566-4F8D-B2A8-35C32B516A6F}"/>
               </a:ext>
             </a:extLst>
           </p:cNvPr>
@@ -7564,7 +7564,7 @@
           <p:cNvPr id="2" name="Date Placeholder 1">
             <a:extLst xmlns:a="http://schemas.openxmlformats.org/drawingml/2006/main">
               <a:ext uri="{FF2B5EF4-FFF2-40B4-BE49-F238E27FC236}">
-                <a16:creationId xmlns:a16="http://schemas.microsoft.com/office/drawing/2014/main" id="{E49FA172-093B-475E-97C2-465C27F6316F}"/>
+                <a16:creationId xmlns:a16="http://schemas.microsoft.com/office/drawing/2014/main" id="{93B8DCB6-8CA9-4023-8A45-44F8A1A0E71E}"/>
               </a:ext>
             </a:extLst>
           </p:cNvPr>
@@ -7591,7 +7591,7 @@
           <p:cNvPr id="3" name="Footer Placeholder 2">
             <a:extLst xmlns:a="http://schemas.openxmlformats.org/drawingml/2006/main">
               <a:ext uri="{FF2B5EF4-FFF2-40B4-BE49-F238E27FC236}">
-                <a16:creationId xmlns:a16="http://schemas.microsoft.com/office/drawing/2014/main" id="{20BE5525-621C-425E-8721-A6550E8CF5D8}"/>
+                <a16:creationId xmlns:a16="http://schemas.microsoft.com/office/drawing/2014/main" id="{499181E6-6E8D-4AC7-AF16-E24023214319}"/>
               </a:ext>
             </a:extLst>
           </p:cNvPr>
@@ -7614,7 +7614,7 @@
           <p:cNvPr id="4" name="Slide Number Placeholder 3">
             <a:extLst xmlns:a="http://schemas.openxmlformats.org/drawingml/2006/main">
               <a:ext uri="{FF2B5EF4-FFF2-40B4-BE49-F238E27FC236}">
-                <a16:creationId xmlns:a16="http://schemas.microsoft.com/office/drawing/2014/main" id="{832396B6-8811-4691-B440-A34B5BDB78CD}"/>
+                <a16:creationId xmlns:a16="http://schemas.microsoft.com/office/drawing/2014/main" id="{A8EE6930-D6E1-4B01-AA92-34BB985BCDF9}"/>
               </a:ext>
             </a:extLst>
           </p:cNvPr>
@@ -7658,7 +7658,7 @@
           <p:cNvPr id="2" name="Title 1">
             <a:extLst xmlns:a="http://schemas.openxmlformats.org/drawingml/2006/main">
               <a:ext uri="{FF2B5EF4-FFF2-40B4-BE49-F238E27FC236}">
-                <a16:creationId xmlns:a16="http://schemas.microsoft.com/office/drawing/2014/main" id="{EC2750C0-F963-43F5-9032-733577465C44}"/>
+                <a16:creationId xmlns:a16="http://schemas.microsoft.com/office/drawing/2014/main" id="{1CC65E03-848E-4EE6-9899-D3051272F47A}"/>
               </a:ext>
             </a:extLst>
           </p:cNvPr>
@@ -7695,7 +7695,7 @@
           <p:cNvPr id="3" name="Content Placeholder 2">
             <a:extLst xmlns:a="http://schemas.openxmlformats.org/drawingml/2006/main">
               <a:ext uri="{FF2B5EF4-FFF2-40B4-BE49-F238E27FC236}">
-                <a16:creationId xmlns:a16="http://schemas.microsoft.com/office/drawing/2014/main" id="{6C055D82-E91D-4C1B-B9FC-9F09BFCDA988}"/>
+                <a16:creationId xmlns:a16="http://schemas.microsoft.com/office/drawing/2014/main" id="{B32F8A3C-C486-4EEC-B80A-1312D1A9BC09}"/>
               </a:ext>
             </a:extLst>
           </p:cNvPr>
@@ -7799,7 +7799,7 @@
           <p:cNvPr id="4" name="Text Placeholder 3">
             <a:extLst xmlns:a="http://schemas.openxmlformats.org/drawingml/2006/main">
               <a:ext uri="{FF2B5EF4-FFF2-40B4-BE49-F238E27FC236}">
-                <a16:creationId xmlns:a16="http://schemas.microsoft.com/office/drawing/2014/main" id="{5468EF46-494A-403D-8CE6-E44E892DC1BD}"/>
+                <a16:creationId xmlns:a16="http://schemas.microsoft.com/office/drawing/2014/main" id="{4FC224A1-06A1-4A27-8211-B0B0815D54B3}"/>
               </a:ext>
             </a:extLst>
           </p:cNvPr>
@@ -7871,7 +7871,7 @@
           <p:cNvPr id="5" name="Date Placeholder 4">
             <a:extLst xmlns:a="http://schemas.openxmlformats.org/drawingml/2006/main">
               <a:ext uri="{FF2B5EF4-FFF2-40B4-BE49-F238E27FC236}">
-                <a16:creationId xmlns:a16="http://schemas.microsoft.com/office/drawing/2014/main" id="{14B0E290-4B4D-4F6D-A4AE-3A0311B36DE9}"/>
+                <a16:creationId xmlns:a16="http://schemas.microsoft.com/office/drawing/2014/main" id="{1E04CC91-EE33-4362-879B-1CFA1C458A47}"/>
               </a:ext>
             </a:extLst>
           </p:cNvPr>
@@ -7898,7 +7898,7 @@
           <p:cNvPr id="6" name="Footer Placeholder 5">
             <a:extLst xmlns:a="http://schemas.openxmlformats.org/drawingml/2006/main">
               <a:ext uri="{FF2B5EF4-FFF2-40B4-BE49-F238E27FC236}">
-                <a16:creationId xmlns:a16="http://schemas.microsoft.com/office/drawing/2014/main" id="{90003DAD-D008-44C9-89E2-76CC9BC0CA99}"/>
+                <a16:creationId xmlns:a16="http://schemas.microsoft.com/office/drawing/2014/main" id="{25E8C2C3-B491-4859-B11F-7889CB7F027C}"/>
               </a:ext>
             </a:extLst>
           </p:cNvPr>
@@ -7921,7 +7921,7 @@
           <p:cNvPr id="7" name="Slide Number Placeholder 6">
             <a:extLst xmlns:a="http://schemas.openxmlformats.org/drawingml/2006/main">
               <a:ext uri="{FF2B5EF4-FFF2-40B4-BE49-F238E27FC236}">
-                <a16:creationId xmlns:a16="http://schemas.microsoft.com/office/drawing/2014/main" id="{A2E7CD67-DAF4-46E2-B720-24E8F629B79C}"/>
+                <a16:creationId xmlns:a16="http://schemas.microsoft.com/office/drawing/2014/main" id="{217E93C1-1166-4181-AC03-6E33D831A6A8}"/>
               </a:ext>
             </a:extLst>
           </p:cNvPr>
@@ -7965,7 +7965,7 @@
           <p:cNvPr id="2" name="Title 1">
             <a:extLst xmlns:a="http://schemas.openxmlformats.org/drawingml/2006/main">
               <a:ext uri="{FF2B5EF4-FFF2-40B4-BE49-F238E27FC236}">
-                <a16:creationId xmlns:a16="http://schemas.microsoft.com/office/drawing/2014/main" id="{EE6E1710-5FED-404C-8BB4-6484F846C826}"/>
+                <a16:creationId xmlns:a16="http://schemas.microsoft.com/office/drawing/2014/main" id="{0C17F755-9AA7-451B-9C5D-3A32D6E4C649}"/>
               </a:ext>
             </a:extLst>
           </p:cNvPr>
@@ -8002,7 +8002,7 @@
           <p:cNvPr id="3" name="Picture Placeholder 2">
             <a:extLst xmlns:a="http://schemas.openxmlformats.org/drawingml/2006/main">
               <a:ext uri="{FF2B5EF4-FFF2-40B4-BE49-F238E27FC236}">
-                <a16:creationId xmlns:a16="http://schemas.microsoft.com/office/drawing/2014/main" id="{7BED9E64-48DE-4934-A42F-AE9C2164F6EA}"/>
+                <a16:creationId xmlns:a16="http://schemas.microsoft.com/office/drawing/2014/main" id="{01FFFA9C-0F99-436F-B5BB-8A26A16FF87C}"/>
               </a:ext>
             </a:extLst>
           </p:cNvPr>
@@ -8067,7 +8067,7 @@
           <p:cNvPr id="4" name="Text Placeholder 3">
             <a:extLst xmlns:a="http://schemas.openxmlformats.org/drawingml/2006/main">
               <a:ext uri="{FF2B5EF4-FFF2-40B4-BE49-F238E27FC236}">
-                <a16:creationId xmlns:a16="http://schemas.microsoft.com/office/drawing/2014/main" id="{3C946B4C-A5DC-4E41-866A-B254D96A3785}"/>
+                <a16:creationId xmlns:a16="http://schemas.microsoft.com/office/drawing/2014/main" id="{DD958C7D-C6BB-4381-9159-FB02B19E6697}"/>
               </a:ext>
             </a:extLst>
           </p:cNvPr>
@@ -8139,7 +8139,7 @@
           <p:cNvPr id="5" name="Date Placeholder 4">
             <a:extLst xmlns:a="http://schemas.openxmlformats.org/drawingml/2006/main">
               <a:ext uri="{FF2B5EF4-FFF2-40B4-BE49-F238E27FC236}">
-                <a16:creationId xmlns:a16="http://schemas.microsoft.com/office/drawing/2014/main" id="{BF3B0DB5-32A1-4EE2-8E74-2D45A64408D7}"/>
+                <a16:creationId xmlns:a16="http://schemas.microsoft.com/office/drawing/2014/main" id="{2702CD81-2603-4849-B616-82FDBA2B2DD5}"/>
               </a:ext>
             </a:extLst>
           </p:cNvPr>
@@ -8166,7 +8166,7 @@
           <p:cNvPr id="6" name="Footer Placeholder 5">
             <a:extLst xmlns:a="http://schemas.openxmlformats.org/drawingml/2006/main">
               <a:ext uri="{FF2B5EF4-FFF2-40B4-BE49-F238E27FC236}">
-                <a16:creationId xmlns:a16="http://schemas.microsoft.com/office/drawing/2014/main" id="{7CFA3D04-A8E0-41D9-AEB1-D58449640EA8}"/>
+                <a16:creationId xmlns:a16="http://schemas.microsoft.com/office/drawing/2014/main" id="{1E161D9D-EFF5-4DC1-89F5-2FC88FE2D16C}"/>
               </a:ext>
             </a:extLst>
           </p:cNvPr>
@@ -8189,7 +8189,7 @@
           <p:cNvPr id="7" name="Slide Number Placeholder 6">
             <a:extLst xmlns:a="http://schemas.openxmlformats.org/drawingml/2006/main">
               <a:ext uri="{FF2B5EF4-FFF2-40B4-BE49-F238E27FC236}">
-                <a16:creationId xmlns:a16="http://schemas.microsoft.com/office/drawing/2014/main" id="{530CA0CE-484C-4CA1-BEEF-6E95C5AABF9A}"/>
+                <a16:creationId xmlns:a16="http://schemas.microsoft.com/office/drawing/2014/main" id="{A9D01989-6FC9-488C-A78C-2BC22A20168A}"/>
               </a:ext>
             </a:extLst>
           </p:cNvPr>
@@ -8238,7 +8238,7 @@
           <p:cNvPr id="2" name="Title Placeholder 1">
             <a:extLst xmlns:a="http://schemas.openxmlformats.org/drawingml/2006/main">
               <a:ext uri="{FF2B5EF4-FFF2-40B4-BE49-F238E27FC236}">
-                <a16:creationId xmlns:a16="http://schemas.microsoft.com/office/drawing/2014/main" id="{DD5CBAA7-BB01-45A0-91E9-EE261BBF6ADA}"/>
+                <a16:creationId xmlns:a16="http://schemas.microsoft.com/office/drawing/2014/main" id="{6D1E895C-4D40-4FA4-BAA5-BC46A83937A1}"/>
               </a:ext>
             </a:extLst>
           </p:cNvPr>
@@ -8275,7 +8275,7 @@
           <p:cNvPr id="3" name="Text Placeholder 2">
             <a:extLst xmlns:a="http://schemas.openxmlformats.org/drawingml/2006/main">
               <a:ext uri="{FF2B5EF4-FFF2-40B4-BE49-F238E27FC236}">
-                <a16:creationId xmlns:a16="http://schemas.microsoft.com/office/drawing/2014/main" id="{D11CFDC0-13BB-433A-8D6C-06B81AB36FC3}"/>
+                <a16:creationId xmlns:a16="http://schemas.microsoft.com/office/drawing/2014/main" id="{386B3368-B9C7-4C30-8D1E-2E39A1B81D3F}"/>
               </a:ext>
             </a:extLst>
           </p:cNvPr>
@@ -8347,7 +8347,7 @@
           <p:cNvPr id="4" name="Date Placeholder 3">
             <a:extLst xmlns:a="http://schemas.openxmlformats.org/drawingml/2006/main">
               <a:ext uri="{FF2B5EF4-FFF2-40B4-BE49-F238E27FC236}">
-                <a16:creationId xmlns:a16="http://schemas.microsoft.com/office/drawing/2014/main" id="{C29983C4-F749-42C3-812C-1FB4D6ACD641}"/>
+                <a16:creationId xmlns:a16="http://schemas.microsoft.com/office/drawing/2014/main" id="{1FCA353C-ECF3-456B-B19D-3157F6946E0E}"/>
               </a:ext>
             </a:extLst>
           </p:cNvPr>
@@ -8393,7 +8393,7 @@
           <p:cNvPr id="5" name="Footer Placeholder 4">
             <a:extLst xmlns:a="http://schemas.openxmlformats.org/drawingml/2006/main">
               <a:ext uri="{FF2B5EF4-FFF2-40B4-BE49-F238E27FC236}">
-                <a16:creationId xmlns:a16="http://schemas.microsoft.com/office/drawing/2014/main" id="{37C34DC9-2EE4-4023-8AB7-80516CAB8B70}"/>
+                <a16:creationId xmlns:a16="http://schemas.microsoft.com/office/drawing/2014/main" id="{29C61CDA-5AC8-4480-AC96-027E6369F130}"/>
               </a:ext>
             </a:extLst>
           </p:cNvPr>
@@ -8435,7 +8435,7 @@
           <p:cNvPr id="6" name="Slide Number Placeholder 5">
             <a:extLst xmlns:a="http://schemas.openxmlformats.org/drawingml/2006/main">
               <a:ext uri="{FF2B5EF4-FFF2-40B4-BE49-F238E27FC236}">
-                <a16:creationId xmlns:a16="http://schemas.microsoft.com/office/drawing/2014/main" id="{135E538B-97EC-42AC-983D-22BE96C759B1}"/>
+                <a16:creationId xmlns:a16="http://schemas.microsoft.com/office/drawing/2014/main" id="{65A01255-CB14-4DBF-A66A-524C4977A207}"/>
               </a:ext>
             </a:extLst>
           </p:cNvPr>
@@ -8480,17 +8480,17 @@
   </p:cSld>
   <p:clrMap bg1="lt1" tx1="dk1" bg2="lt2" tx2="dk2" accent1="accent1" accent2="accent2" accent3="accent3" accent4="accent4" accent5="accent5" accent6="accent6" hlink="hlink" folHlink="folHlink"/>
   <p:sldLayoutIdLst>
-    <p:sldLayoutId xmlns:r="http://schemas.openxmlformats.org/officeDocument/2006/relationships" id="2147483649" r:id="Re964e034c65f4e24"/>
-    <p:sldLayoutId xmlns:r="http://schemas.openxmlformats.org/officeDocument/2006/relationships" id="2147483650" r:id="R37e947766b374794"/>
-    <p:sldLayoutId xmlns:r="http://schemas.openxmlformats.org/officeDocument/2006/relationships" id="2147483651" r:id="Reec8e4d42b8f4875"/>
-    <p:sldLayoutId xmlns:r="http://schemas.openxmlformats.org/officeDocument/2006/relationships" id="2147483652" r:id="R7a8554b63d0240d8"/>
-    <p:sldLayoutId xmlns:r="http://schemas.openxmlformats.org/officeDocument/2006/relationships" id="2147483653" r:id="Rfc816aedf1dc4a34"/>
-    <p:sldLayoutId xmlns:r="http://schemas.openxmlformats.org/officeDocument/2006/relationships" id="2147483654" r:id="R0263386b5e524afa"/>
-    <p:sldLayoutId xmlns:r="http://schemas.openxmlformats.org/officeDocument/2006/relationships" id="2147483655" r:id="Rf9ae501a07784574"/>
-    <p:sldLayoutId xmlns:r="http://schemas.openxmlformats.org/officeDocument/2006/relationships" id="2147483656" r:id="R7611cb4118a940d6"/>
-    <p:sldLayoutId xmlns:r="http://schemas.openxmlformats.org/officeDocument/2006/relationships" id="2147483657" r:id="R66246c0dba044f18"/>
-    <p:sldLayoutId xmlns:r="http://schemas.openxmlformats.org/officeDocument/2006/relationships" id="2147483658" r:id="R88a8b6aa87a64f66"/>
-    <p:sldLayoutId xmlns:r="http://schemas.openxmlformats.org/officeDocument/2006/relationships" id="2147483659" r:id="Rca59ba79647b4ed7"/>
+    <p:sldLayoutId xmlns:r="http://schemas.openxmlformats.org/officeDocument/2006/relationships" id="2147483649" r:id="R27ee727429774bd7"/>
+    <p:sldLayoutId xmlns:r="http://schemas.openxmlformats.org/officeDocument/2006/relationships" id="2147483650" r:id="R7f2185f89b9c4621"/>
+    <p:sldLayoutId xmlns:r="http://schemas.openxmlformats.org/officeDocument/2006/relationships" id="2147483651" r:id="Rc092b4fd80bb4ef9"/>
+    <p:sldLayoutId xmlns:r="http://schemas.openxmlformats.org/officeDocument/2006/relationships" id="2147483652" r:id="Re434f5302fde465d"/>
+    <p:sldLayoutId xmlns:r="http://schemas.openxmlformats.org/officeDocument/2006/relationships" id="2147483653" r:id="R662026a5267c453f"/>
+    <p:sldLayoutId xmlns:r="http://schemas.openxmlformats.org/officeDocument/2006/relationships" id="2147483654" r:id="R9b64257ecd0d47bb"/>
+    <p:sldLayoutId xmlns:r="http://schemas.openxmlformats.org/officeDocument/2006/relationships" id="2147483655" r:id="Rf23b090d0143480d"/>
+    <p:sldLayoutId xmlns:r="http://schemas.openxmlformats.org/officeDocument/2006/relationships" id="2147483656" r:id="R233fbce6e7ac43b0"/>
+    <p:sldLayoutId xmlns:r="http://schemas.openxmlformats.org/officeDocument/2006/relationships" id="2147483657" r:id="Rd9742d72e9a54353"/>
+    <p:sldLayoutId xmlns:r="http://schemas.openxmlformats.org/officeDocument/2006/relationships" id="2147483658" r:id="Rc771b1dfe55745ea"/>
+    <p:sldLayoutId xmlns:r="http://schemas.openxmlformats.org/officeDocument/2006/relationships" id="2147483659" r:id="Rea68209749334d24"/>
   </p:sldLayoutIdLst>
   <p:txStyles>
     <p:titleStyle>
@@ -9043,7 +9043,7 @@
           <p:cNvPr id="2" name="Rectangle 1">
             <a:extLst xmlns:a="http://schemas.openxmlformats.org/drawingml/2006/main">
               <a:ext uri="{FF2B5EF4-FFF2-40B4-BE49-F238E27FC236}">
-                <a16:creationId xmlns:a16="http://schemas.microsoft.com/office/drawing/2014/main" id="{57FFAE4F-ABFC-4A30-80F2-6BA7668A9A0D}"/>
+                <a16:creationId xmlns:a16="http://schemas.microsoft.com/office/drawing/2014/main" id="{0B938F37-36A9-483B-AB38-F35E0D23FF8A}"/>
               </a:ext>
             </a:extLst>
           </p:cNvPr>
@@ -9098,7 +9098,7 @@
           <p:cNvPr id="3" name="TextBox 2">
             <a:extLst xmlns:a="http://schemas.openxmlformats.org/drawingml/2006/main">
               <a:ext uri="{FF2B5EF4-FFF2-40B4-BE49-F238E27FC236}">
-                <a16:creationId xmlns:a16="http://schemas.microsoft.com/office/drawing/2014/main" id="{088F86B9-8EB9-4BAF-8898-48F643027C34}"/>
+                <a16:creationId xmlns:a16="http://schemas.microsoft.com/office/drawing/2014/main" id="{8C562B1D-B4DD-464F-A7C3-C3754EE2BA3A}"/>
               </a:ext>
             </a:extLst>
           </p:cNvPr>
@@ -9145,7 +9145,7 @@
           <p:cNvPr id="4" name="TextBox 3">
             <a:extLst xmlns:a="http://schemas.openxmlformats.org/drawingml/2006/main">
               <a:ext uri="{FF2B5EF4-FFF2-40B4-BE49-F238E27FC236}">
-                <a16:creationId xmlns:a16="http://schemas.microsoft.com/office/drawing/2014/main" id="{96A8D2AF-3870-4FFD-9AA3-7DB0CA2CD1CA}"/>
+                <a16:creationId xmlns:a16="http://schemas.microsoft.com/office/drawing/2014/main" id="{B7469489-3EFF-480E-B833-765DEDF29EA1}"/>
               </a:ext>
             </a:extLst>
           </p:cNvPr>
@@ -9193,7 +9193,7 @@
           <p:cNvPr id="5" name="TextBox 4">
             <a:extLst xmlns:a="http://schemas.openxmlformats.org/drawingml/2006/main">
               <a:ext uri="{FF2B5EF4-FFF2-40B4-BE49-F238E27FC236}">
-                <a16:creationId xmlns:a16="http://schemas.microsoft.com/office/drawing/2014/main" id="{B3859DAA-4C8C-498C-9592-D91088BBC37A}"/>
+                <a16:creationId xmlns:a16="http://schemas.microsoft.com/office/drawing/2014/main" id="{0BBD5AE9-5EE4-4901-AD42-84A8E959A2D0}"/>
               </a:ext>
             </a:extLst>
           </p:cNvPr>
@@ -9240,7 +9240,7 @@
           <p:cNvPr id="6" name="Rectangle 5">
             <a:extLst xmlns:a="http://schemas.openxmlformats.org/drawingml/2006/main">
               <a:ext uri="{FF2B5EF4-FFF2-40B4-BE49-F238E27FC236}">
-                <a16:creationId xmlns:a16="http://schemas.microsoft.com/office/drawing/2014/main" id="{9882C8CC-B03C-4BF6-9205-A5888014403B}"/>
+                <a16:creationId xmlns:a16="http://schemas.microsoft.com/office/drawing/2014/main" id="{4606A679-B6BD-4C19-B1D5-AAFE9BFB52C6}"/>
               </a:ext>
             </a:extLst>
           </p:cNvPr>
@@ -9295,7 +9295,7 @@
           <p:cNvPr id="7" name="TextBox 6">
             <a:extLst xmlns:a="http://schemas.openxmlformats.org/drawingml/2006/main">
               <a:ext uri="{FF2B5EF4-FFF2-40B4-BE49-F238E27FC236}">
-                <a16:creationId xmlns:a16="http://schemas.microsoft.com/office/drawing/2014/main" id="{49489331-4A24-4E44-ADAC-233B88AC0C13}"/>
+                <a16:creationId xmlns:a16="http://schemas.microsoft.com/office/drawing/2014/main" id="{3DD5EC39-D8C5-4D7B-AC94-72C6A1404559}"/>
               </a:ext>
             </a:extLst>
           </p:cNvPr>
@@ -9342,7 +9342,7 @@
           <p:cNvPr id="8" name="TextBox 7">
             <a:extLst xmlns:a="http://schemas.openxmlformats.org/drawingml/2006/main">
               <a:ext uri="{FF2B5EF4-FFF2-40B4-BE49-F238E27FC236}">
-                <a16:creationId xmlns:a16="http://schemas.microsoft.com/office/drawing/2014/main" id="{8F893D12-A11F-4E66-9723-E7D25E7C3653}"/>
+                <a16:creationId xmlns:a16="http://schemas.microsoft.com/office/drawing/2014/main" id="{4E3B3646-4038-403F-861E-2C8DB8BB3287}"/>
               </a:ext>
             </a:extLst>
           </p:cNvPr>
@@ -9379,7 +9379,7 @@
                 <a:ea typeface="Aptos"/>
                 <a:cs typeface="Aptos"/>
               </a:rPr>
-              <a:t>2026.07.24-19</a:t>
+              <a:t>2026.07.24-20</a:t>
             </a:r>
           </a:p>
         </p:txBody>
@@ -9389,7 +9389,7 @@
           <p:cNvPr id="9" name="TextBox 8">
             <a:extLst xmlns:a="http://schemas.openxmlformats.org/drawingml/2006/main">
               <a:ext uri="{FF2B5EF4-FFF2-40B4-BE49-F238E27FC236}">
-                <a16:creationId xmlns:a16="http://schemas.microsoft.com/office/drawing/2014/main" id="{253C5555-D5BE-4233-8804-419D3A330832}"/>
+                <a16:creationId xmlns:a16="http://schemas.microsoft.com/office/drawing/2014/main" id="{F27AC17D-F1C7-41A2-AF35-B798604C05DA}"/>
               </a:ext>
             </a:extLst>
           </p:cNvPr>
@@ -9437,7 +9437,7 @@
           <p:cNvPr id="10" name="TextBox 9">
             <a:extLst xmlns:a="http://schemas.openxmlformats.org/drawingml/2006/main">
               <a:ext uri="{FF2B5EF4-FFF2-40B4-BE49-F238E27FC236}">
-                <a16:creationId xmlns:a16="http://schemas.microsoft.com/office/drawing/2014/main" id="{B37A7CC8-04FF-4081-8803-89F5319387FD}"/>
+                <a16:creationId xmlns:a16="http://schemas.microsoft.com/office/drawing/2014/main" id="{76B72A3D-C3CE-4B6B-BEBF-B31AA2FFABEA}"/>
               </a:ext>
             </a:extLst>
           </p:cNvPr>
@@ -9484,7 +9484,7 @@
           <p:cNvPr id="11" name="TextBox 10">
             <a:extLst xmlns:a="http://schemas.openxmlformats.org/drawingml/2006/main">
               <a:ext uri="{FF2B5EF4-FFF2-40B4-BE49-F238E27FC236}">
-                <a16:creationId xmlns:a16="http://schemas.microsoft.com/office/drawing/2014/main" id="{E8D77314-9089-4958-AB6D-ECBF10CBAC0C}"/>
+                <a16:creationId xmlns:a16="http://schemas.microsoft.com/office/drawing/2014/main" id="{F66B3C2A-0676-43F8-9515-534599B62B50}"/>
               </a:ext>
             </a:extLst>
           </p:cNvPr>
@@ -9531,7 +9531,7 @@
           <p:cNvPr id="12" name="TextBox 11">
             <a:extLst xmlns:a="http://schemas.openxmlformats.org/drawingml/2006/main">
               <a:ext uri="{FF2B5EF4-FFF2-40B4-BE49-F238E27FC236}">
-                <a16:creationId xmlns:a16="http://schemas.microsoft.com/office/drawing/2014/main" id="{A6BB2D43-6885-4659-B3CE-7BB890075F75}"/>
+                <a16:creationId xmlns:a16="http://schemas.microsoft.com/office/drawing/2014/main" id="{860D3BBD-DD26-4E00-80A9-D40E6D216B1D}"/>
               </a:ext>
             </a:extLst>
           </p:cNvPr>
@@ -9576,7 +9576,7 @@
     </p:spTree>
     <p:extLst>
       <p:ext uri="{BB962C8B-B14F-4D97-AF65-F5344CB8AC3E}">
-        <p14:creationId xmlns:p14="http://schemas.microsoft.com/office/powerpoint/2010/main" val="1602012321"/>
+        <p14:creationId xmlns:p14="http://schemas.microsoft.com/office/powerpoint/2010/main" val="65555388"/>
       </p:ext>
     </p:extLst>
   </p:cSld>
@@ -9600,7 +9600,7 @@
           <p:cNvPr id="2" name="TextBox 1">
             <a:extLst xmlns:a="http://schemas.openxmlformats.org/drawingml/2006/main">
               <a:ext uri="{FF2B5EF4-FFF2-40B4-BE49-F238E27FC236}">
-                <a16:creationId xmlns:a16="http://schemas.microsoft.com/office/drawing/2014/main" id="{967DEDFB-FB10-4284-8355-E36CC48F215C}"/>
+                <a16:creationId xmlns:a16="http://schemas.microsoft.com/office/drawing/2014/main" id="{62323FCA-77D4-4FA5-8B81-052BAB324FBE}"/>
               </a:ext>
             </a:extLst>
           </p:cNvPr>
@@ -9647,7 +9647,7 @@
           <p:cNvPr id="3" name="TextBox 2">
             <a:extLst xmlns:a="http://schemas.openxmlformats.org/drawingml/2006/main">
               <a:ext uri="{FF2B5EF4-FFF2-40B4-BE49-F238E27FC236}">
-                <a16:creationId xmlns:a16="http://schemas.microsoft.com/office/drawing/2014/main" id="{EA151EFD-8231-48FB-A0B9-A657E2F84FC3}"/>
+                <a16:creationId xmlns:a16="http://schemas.microsoft.com/office/drawing/2014/main" id="{DC323406-DF86-4784-AADB-6A502910A27F}"/>
               </a:ext>
             </a:extLst>
           </p:cNvPr>
@@ -9694,7 +9694,7 @@
           <p:cNvPr id="4" name="Rectangle 3">
             <a:extLst xmlns:a="http://schemas.openxmlformats.org/drawingml/2006/main">
               <a:ext uri="{FF2B5EF4-FFF2-40B4-BE49-F238E27FC236}">
-                <a16:creationId xmlns:a16="http://schemas.microsoft.com/office/drawing/2014/main" id="{02D07E96-801A-49E8-B904-9F305D4E1289}"/>
+                <a16:creationId xmlns:a16="http://schemas.microsoft.com/office/drawing/2014/main" id="{030E314B-54C0-4568-ABD5-620010E1D6FC}"/>
               </a:ext>
             </a:extLst>
           </p:cNvPr>
@@ -9749,7 +9749,7 @@
           <p:cNvPr id="5" name="Rectangle 4">
             <a:extLst xmlns:a="http://schemas.openxmlformats.org/drawingml/2006/main">
               <a:ext uri="{FF2B5EF4-FFF2-40B4-BE49-F238E27FC236}">
-                <a16:creationId xmlns:a16="http://schemas.microsoft.com/office/drawing/2014/main" id="{CF4DE62A-993C-49E4-BDE1-6E3CA7FB9E5B}"/>
+                <a16:creationId xmlns:a16="http://schemas.microsoft.com/office/drawing/2014/main" id="{A952E6F8-0057-4FAA-92CE-60F39B3FA04A}"/>
               </a:ext>
             </a:extLst>
           </p:cNvPr>
@@ -9804,7 +9804,7 @@
           <p:cNvPr id="6" name="TextBox 5">
             <a:extLst xmlns:a="http://schemas.openxmlformats.org/drawingml/2006/main">
               <a:ext uri="{FF2B5EF4-FFF2-40B4-BE49-F238E27FC236}">
-                <a16:creationId xmlns:a16="http://schemas.microsoft.com/office/drawing/2014/main" id="{9C232697-AE9B-4D3C-8951-9A230C830BEA}"/>
+                <a16:creationId xmlns:a16="http://schemas.microsoft.com/office/drawing/2014/main" id="{5BF121DB-2353-463C-82D8-8C1956F1634C}"/>
               </a:ext>
             </a:extLst>
           </p:cNvPr>
@@ -9841,7 +9841,7 @@
                 <a:ea typeface="Aptos"/>
                 <a:cs typeface="Aptos"/>
               </a:rPr>
-              <a:t>Julkinen riippumaton evidenssikooste · 2026.07.24-19 · 2026-07-24 · Lähteet: RPX; CNIPA guidance; EPO family</a:t>
+              <a:t>Julkinen riippumaton evidenssikooste · 2026.07.24-20 · 2026-07-24 · Lähteet: RPX; CNIPA guidance; EPO family</a:t>
             </a:r>
           </a:p>
         </p:txBody>
@@ -9851,7 +9851,7 @@
           <p:cNvPr id="7" name="TextBox 6">
             <a:extLst xmlns:a="http://schemas.openxmlformats.org/drawingml/2006/main">
               <a:ext uri="{FF2B5EF4-FFF2-40B4-BE49-F238E27FC236}">
-                <a16:creationId xmlns:a16="http://schemas.microsoft.com/office/drawing/2014/main" id="{01992038-12B9-4FE8-98B7-5362FB767813}"/>
+                <a16:creationId xmlns:a16="http://schemas.microsoft.com/office/drawing/2014/main" id="{BCF93DE6-BE48-421F-92F8-1695716B1BC1}"/>
               </a:ext>
             </a:extLst>
           </p:cNvPr>
@@ -9898,7 +9898,7 @@
           <p:cNvPr id="8" name="TextBox 7">
             <a:extLst xmlns:a="http://schemas.openxmlformats.org/drawingml/2006/main">
               <a:ext uri="{FF2B5EF4-FFF2-40B4-BE49-F238E27FC236}">
-                <a16:creationId xmlns:a16="http://schemas.microsoft.com/office/drawing/2014/main" id="{8D6E9DDE-A90C-4F33-8533-CBEE57A6A477}"/>
+                <a16:creationId xmlns:a16="http://schemas.microsoft.com/office/drawing/2014/main" id="{95B95E9E-1A25-426A-9AF4-2CA4F1ED6C0D}"/>
               </a:ext>
             </a:extLst>
           </p:cNvPr>
@@ -9945,7 +9945,7 @@
           <p:cNvPr id="9" name="TextBox 8">
             <a:extLst xmlns:a="http://schemas.openxmlformats.org/drawingml/2006/main">
               <a:ext uri="{FF2B5EF4-FFF2-40B4-BE49-F238E27FC236}">
-                <a16:creationId xmlns:a16="http://schemas.microsoft.com/office/drawing/2014/main" id="{69C39E98-E95F-42C0-8CA0-4E89A92F83CE}"/>
+                <a16:creationId xmlns:a16="http://schemas.microsoft.com/office/drawing/2014/main" id="{250B8F40-86C1-4418-81BB-EF84D2DCD294}"/>
               </a:ext>
             </a:extLst>
           </p:cNvPr>
@@ -10042,7 +10042,7 @@
           <p:cNvPr id="10" name="Rounded Rectangle 9">
             <a:extLst xmlns:a="http://schemas.openxmlformats.org/drawingml/2006/main">
               <a:ext uri="{FF2B5EF4-FFF2-40B4-BE49-F238E27FC236}">
-                <a16:creationId xmlns:a16="http://schemas.microsoft.com/office/drawing/2014/main" id="{18A3EE31-39BA-44CE-833A-77F1484548CC}"/>
+                <a16:creationId xmlns:a16="http://schemas.microsoft.com/office/drawing/2014/main" id="{19A5DCAC-D354-4548-AE1E-A47D45FD0059}"/>
               </a:ext>
             </a:extLst>
           </p:cNvPr>
@@ -10099,7 +10099,7 @@
           <p:cNvPr id="11" name="TextBox 10">
             <a:extLst xmlns:a="http://schemas.openxmlformats.org/drawingml/2006/main">
               <a:ext uri="{FF2B5EF4-FFF2-40B4-BE49-F238E27FC236}">
-                <a16:creationId xmlns:a16="http://schemas.microsoft.com/office/drawing/2014/main" id="{6E15F6E0-9917-45EB-84E0-691FDEB218A2}"/>
+                <a16:creationId xmlns:a16="http://schemas.microsoft.com/office/drawing/2014/main" id="{3DEE45A0-5A49-49FB-B3FB-D262CA7A2114}"/>
               </a:ext>
             </a:extLst>
           </p:cNvPr>
@@ -10146,7 +10146,7 @@
           <p:cNvPr id="12" name="TextBox 11">
             <a:extLst xmlns:a="http://schemas.openxmlformats.org/drawingml/2006/main">
               <a:ext uri="{FF2B5EF4-FFF2-40B4-BE49-F238E27FC236}">
-                <a16:creationId xmlns:a16="http://schemas.microsoft.com/office/drawing/2014/main" id="{242A9EB7-95E2-4172-A92F-DD984045E65B}"/>
+                <a16:creationId xmlns:a16="http://schemas.microsoft.com/office/drawing/2014/main" id="{2E4ADA37-8C31-470E-A231-B5F8636F3F5E}"/>
               </a:ext>
             </a:extLst>
           </p:cNvPr>
@@ -10191,7 +10191,7 @@
     </p:spTree>
     <p:extLst>
       <p:ext uri="{BB962C8B-B14F-4D97-AF65-F5344CB8AC3E}">
-        <p14:creationId xmlns:p14="http://schemas.microsoft.com/office/powerpoint/2010/main" val="605450914"/>
+        <p14:creationId xmlns:p14="http://schemas.microsoft.com/office/powerpoint/2010/main" val="1156979042"/>
       </p:ext>
     </p:extLst>
   </p:cSld>
@@ -10215,7 +10215,7 @@
           <p:cNvPr id="2" name="TextBox 1">
             <a:extLst xmlns:a="http://schemas.openxmlformats.org/drawingml/2006/main">
               <a:ext uri="{FF2B5EF4-FFF2-40B4-BE49-F238E27FC236}">
-                <a16:creationId xmlns:a16="http://schemas.microsoft.com/office/drawing/2014/main" id="{B8306A35-CAFB-42ED-836B-910B49B0BE92}"/>
+                <a16:creationId xmlns:a16="http://schemas.microsoft.com/office/drawing/2014/main" id="{61DBA525-38EC-4AF9-BE7D-C096F0142520}"/>
               </a:ext>
             </a:extLst>
           </p:cNvPr>
@@ -10262,7 +10262,7 @@
           <p:cNvPr id="3" name="TextBox 2">
             <a:extLst xmlns:a="http://schemas.openxmlformats.org/drawingml/2006/main">
               <a:ext uri="{FF2B5EF4-FFF2-40B4-BE49-F238E27FC236}">
-                <a16:creationId xmlns:a16="http://schemas.microsoft.com/office/drawing/2014/main" id="{E4314E07-6B85-4C98-96A4-55BDC5B1A061}"/>
+                <a16:creationId xmlns:a16="http://schemas.microsoft.com/office/drawing/2014/main" id="{D6ABF60E-22A3-443F-97B5-836E53ED2ABD}"/>
               </a:ext>
             </a:extLst>
           </p:cNvPr>
@@ -10309,7 +10309,7 @@
           <p:cNvPr id="4" name="Rectangle 3">
             <a:extLst xmlns:a="http://schemas.openxmlformats.org/drawingml/2006/main">
               <a:ext uri="{FF2B5EF4-FFF2-40B4-BE49-F238E27FC236}">
-                <a16:creationId xmlns:a16="http://schemas.microsoft.com/office/drawing/2014/main" id="{F9F0E9B0-1812-4DE8-B22E-74DBE1B870D8}"/>
+                <a16:creationId xmlns:a16="http://schemas.microsoft.com/office/drawing/2014/main" id="{AA666DF6-AB55-4049-AA48-74C88F718958}"/>
               </a:ext>
             </a:extLst>
           </p:cNvPr>
@@ -10364,7 +10364,7 @@
           <p:cNvPr id="5" name="Rectangle 4">
             <a:extLst xmlns:a="http://schemas.openxmlformats.org/drawingml/2006/main">
               <a:ext uri="{FF2B5EF4-FFF2-40B4-BE49-F238E27FC236}">
-                <a16:creationId xmlns:a16="http://schemas.microsoft.com/office/drawing/2014/main" id="{3D363E84-CC60-4AE3-8AF9-02864C4C7BAB}"/>
+                <a16:creationId xmlns:a16="http://schemas.microsoft.com/office/drawing/2014/main" id="{893ADCB8-D592-4A71-B3EC-3441A892D1E4}"/>
               </a:ext>
             </a:extLst>
           </p:cNvPr>
@@ -10419,7 +10419,7 @@
           <p:cNvPr id="6" name="TextBox 5">
             <a:extLst xmlns:a="http://schemas.openxmlformats.org/drawingml/2006/main">
               <a:ext uri="{FF2B5EF4-FFF2-40B4-BE49-F238E27FC236}">
-                <a16:creationId xmlns:a16="http://schemas.microsoft.com/office/drawing/2014/main" id="{B3FCFA1C-FC17-4B06-9E54-3A410A0CF86E}"/>
+                <a16:creationId xmlns:a16="http://schemas.microsoft.com/office/drawing/2014/main" id="{B00DAC41-C504-4A74-A87E-AD866355EF98}"/>
               </a:ext>
             </a:extLst>
           </p:cNvPr>
@@ -10456,7 +10456,7 @@
                 <a:ea typeface="Aptos"/>
                 <a:cs typeface="Aptos"/>
               </a:rPr>
-              <a:t>Julkinen riippumaton evidenssikooste · 2026.07.24-19 · 2026-07-24 · Lähteet: IP Australia; PRH; EPO; EPO / UPC; USPTO</a:t>
+              <a:t>Julkinen riippumaton evidenssikooste · 2026.07.24-20 · 2026-07-24 · Lähteet: IP Australia; PRH; EPO; EPO / UPC; USPTO</a:t>
             </a:r>
           </a:p>
         </p:txBody>
@@ -10466,7 +10466,7 @@
           <p:cNvPr id="7" name="TextBox 6">
             <a:extLst xmlns:a="http://schemas.openxmlformats.org/drawingml/2006/main">
               <a:ext uri="{FF2B5EF4-FFF2-40B4-BE49-F238E27FC236}">
-                <a16:creationId xmlns:a16="http://schemas.microsoft.com/office/drawing/2014/main" id="{A788C330-ED1A-446C-86DB-E222AB1C5F4A}"/>
+                <a16:creationId xmlns:a16="http://schemas.microsoft.com/office/drawing/2014/main" id="{CC8113A7-8837-481E-9B8C-A12B58F41B28}"/>
               </a:ext>
             </a:extLst>
           </p:cNvPr>
@@ -10953,7 +10953,7 @@
           <p:cNvPr id="9" name="TextBox 8">
             <a:extLst xmlns:a="http://schemas.openxmlformats.org/drawingml/2006/main">
               <a:ext uri="{FF2B5EF4-FFF2-40B4-BE49-F238E27FC236}">
-                <a16:creationId xmlns:a16="http://schemas.microsoft.com/office/drawing/2014/main" id="{67DFF41E-9B88-4F93-A22A-0CCD2F0E2152}"/>
+                <a16:creationId xmlns:a16="http://schemas.microsoft.com/office/drawing/2014/main" id="{69C9731C-5596-40D5-8643-A64461C5EF76}"/>
               </a:ext>
             </a:extLst>
           </p:cNvPr>
@@ -10998,7 +10998,7 @@
     </p:spTree>
     <p:extLst>
       <p:ext uri="{BB962C8B-B14F-4D97-AF65-F5344CB8AC3E}">
-        <p14:creationId xmlns:p14="http://schemas.microsoft.com/office/powerpoint/2010/main" val="258064822"/>
+        <p14:creationId xmlns:p14="http://schemas.microsoft.com/office/powerpoint/2010/main" val="181971307"/>
       </p:ext>
     </p:extLst>
   </p:cSld>
@@ -11022,7 +11022,7 @@
           <p:cNvPr id="2" name="TextBox 1">
             <a:extLst xmlns:a="http://schemas.openxmlformats.org/drawingml/2006/main">
               <a:ext uri="{FF2B5EF4-FFF2-40B4-BE49-F238E27FC236}">
-                <a16:creationId xmlns:a16="http://schemas.microsoft.com/office/drawing/2014/main" id="{EA1246CD-194F-486E-87EE-1E16426B166E}"/>
+                <a16:creationId xmlns:a16="http://schemas.microsoft.com/office/drawing/2014/main" id="{BC8B0C28-3A56-46EA-813C-08FA1D1D50F9}"/>
               </a:ext>
             </a:extLst>
           </p:cNvPr>
@@ -11069,7 +11069,7 @@
           <p:cNvPr id="3" name="TextBox 2">
             <a:extLst xmlns:a="http://schemas.openxmlformats.org/drawingml/2006/main">
               <a:ext uri="{FF2B5EF4-FFF2-40B4-BE49-F238E27FC236}">
-                <a16:creationId xmlns:a16="http://schemas.microsoft.com/office/drawing/2014/main" id="{F1778BDB-92AD-43C8-8E09-A65A9DC7F140}"/>
+                <a16:creationId xmlns:a16="http://schemas.microsoft.com/office/drawing/2014/main" id="{B7C519E4-0BE3-4E09-9E34-0397F69499D1}"/>
               </a:ext>
             </a:extLst>
           </p:cNvPr>
@@ -11116,7 +11116,7 @@
           <p:cNvPr id="4" name="Rectangle 3">
             <a:extLst xmlns:a="http://schemas.openxmlformats.org/drawingml/2006/main">
               <a:ext uri="{FF2B5EF4-FFF2-40B4-BE49-F238E27FC236}">
-                <a16:creationId xmlns:a16="http://schemas.microsoft.com/office/drawing/2014/main" id="{BA8C9282-821A-40AD-94BC-B6C368F42C7C}"/>
+                <a16:creationId xmlns:a16="http://schemas.microsoft.com/office/drawing/2014/main" id="{78E8F868-1ACC-4AAA-AEA5-216A9A126069}"/>
               </a:ext>
             </a:extLst>
           </p:cNvPr>
@@ -11171,7 +11171,7 @@
           <p:cNvPr id="5" name="Rectangle 4">
             <a:extLst xmlns:a="http://schemas.openxmlformats.org/drawingml/2006/main">
               <a:ext uri="{FF2B5EF4-FFF2-40B4-BE49-F238E27FC236}">
-                <a16:creationId xmlns:a16="http://schemas.microsoft.com/office/drawing/2014/main" id="{69F5DE85-D20C-4BBD-A975-59BDC5E4775B}"/>
+                <a16:creationId xmlns:a16="http://schemas.microsoft.com/office/drawing/2014/main" id="{A0CA0EA4-14C9-43D8-8E18-9237912384E1}"/>
               </a:ext>
             </a:extLst>
           </p:cNvPr>
@@ -11226,7 +11226,7 @@
           <p:cNvPr id="6" name="TextBox 5">
             <a:extLst xmlns:a="http://schemas.openxmlformats.org/drawingml/2006/main">
               <a:ext uri="{FF2B5EF4-FFF2-40B4-BE49-F238E27FC236}">
-                <a16:creationId xmlns:a16="http://schemas.microsoft.com/office/drawing/2014/main" id="{26F2A1B0-77C9-436A-AC74-487C6E5DB9F6}"/>
+                <a16:creationId xmlns:a16="http://schemas.microsoft.com/office/drawing/2014/main" id="{40054201-FF0A-48AA-B0D5-4EAA2CBAF2AD}"/>
               </a:ext>
             </a:extLst>
           </p:cNvPr>
@@ -11263,7 +11263,7 @@
                 <a:ea typeface="Aptos"/>
                 <a:cs typeface="Aptos"/>
               </a:rPr>
-              <a:t>Julkinen riippumaton evidenssikooste · 2026.07.24-19 · 2026-07-24 · Lähteet: UN; Atlas</a:t>
+              <a:t>Julkinen riippumaton evidenssikooste · 2026.07.24-20 · 2026-07-24 · Lähteet: UN; Atlas</a:t>
             </a:r>
           </a:p>
         </p:txBody>
@@ -11273,7 +11273,7 @@
           <p:cNvPr id="7" name="TextBox 6">
             <a:extLst xmlns:a="http://schemas.openxmlformats.org/drawingml/2006/main">
               <a:ext uri="{FF2B5EF4-FFF2-40B4-BE49-F238E27FC236}">
-                <a16:creationId xmlns:a16="http://schemas.microsoft.com/office/drawing/2014/main" id="{C60F8BFB-AB9A-4DC6-BAF2-394A387904D4}"/>
+                <a16:creationId xmlns:a16="http://schemas.microsoft.com/office/drawing/2014/main" id="{166D3F49-9FBC-4A26-9520-7D30159EA7FD}"/>
               </a:ext>
             </a:extLst>
           </p:cNvPr>
@@ -11320,7 +11320,7 @@
           <p:cNvPr id="8" name="Rounded Rectangle 7">
             <a:extLst xmlns:a="http://schemas.openxmlformats.org/drawingml/2006/main">
               <a:ext uri="{FF2B5EF4-FFF2-40B4-BE49-F238E27FC236}">
-                <a16:creationId xmlns:a16="http://schemas.microsoft.com/office/drawing/2014/main" id="{35A2980D-5DFB-430C-8176-6E50146A7E7D}"/>
+                <a16:creationId xmlns:a16="http://schemas.microsoft.com/office/drawing/2014/main" id="{CFA0FAC2-48FD-44D1-8C63-F0FAC88B3C15}"/>
               </a:ext>
             </a:extLst>
           </p:cNvPr>
@@ -11377,7 +11377,7 @@
           <p:cNvPr id="9" name="TextBox 8">
             <a:extLst xmlns:a="http://schemas.openxmlformats.org/drawingml/2006/main">
               <a:ext uri="{FF2B5EF4-FFF2-40B4-BE49-F238E27FC236}">
-                <a16:creationId xmlns:a16="http://schemas.microsoft.com/office/drawing/2014/main" id="{113884B5-9F86-42B0-89A5-66375E47C3BD}"/>
+                <a16:creationId xmlns:a16="http://schemas.microsoft.com/office/drawing/2014/main" id="{E8A6D075-B6A9-496D-BAF5-3444D04FB180}"/>
               </a:ext>
             </a:extLst>
           </p:cNvPr>
@@ -11424,7 +11424,7 @@
           <p:cNvPr id="10" name="TextBox 9">
             <a:extLst xmlns:a="http://schemas.openxmlformats.org/drawingml/2006/main">
               <a:ext uri="{FF2B5EF4-FFF2-40B4-BE49-F238E27FC236}">
-                <a16:creationId xmlns:a16="http://schemas.microsoft.com/office/drawing/2014/main" id="{40D8306C-5F12-401F-9C6A-2F085253FF85}"/>
+                <a16:creationId xmlns:a16="http://schemas.microsoft.com/office/drawing/2014/main" id="{6BA5A785-F22C-41E7-8E12-762F7F9F5F16}"/>
               </a:ext>
             </a:extLst>
           </p:cNvPr>
@@ -11471,7 +11471,7 @@
           <p:cNvPr id="11" name="Rounded Rectangle 10">
             <a:extLst xmlns:a="http://schemas.openxmlformats.org/drawingml/2006/main">
               <a:ext uri="{FF2B5EF4-FFF2-40B4-BE49-F238E27FC236}">
-                <a16:creationId xmlns:a16="http://schemas.microsoft.com/office/drawing/2014/main" id="{DB00DB14-A4DA-41E0-8B1C-F540B6AB023D}"/>
+                <a16:creationId xmlns:a16="http://schemas.microsoft.com/office/drawing/2014/main" id="{8B7AFA96-1AD9-4530-A109-F488668BFFF9}"/>
               </a:ext>
             </a:extLst>
           </p:cNvPr>
@@ -11528,7 +11528,7 @@
           <p:cNvPr id="12" name="TextBox 11">
             <a:extLst xmlns:a="http://schemas.openxmlformats.org/drawingml/2006/main">
               <a:ext uri="{FF2B5EF4-FFF2-40B4-BE49-F238E27FC236}">
-                <a16:creationId xmlns:a16="http://schemas.microsoft.com/office/drawing/2014/main" id="{8DDDFF1F-4277-45CD-959F-BFCC651C4D39}"/>
+                <a16:creationId xmlns:a16="http://schemas.microsoft.com/office/drawing/2014/main" id="{FB8956E8-E4B4-4C21-90E2-789A595C3C8B}"/>
               </a:ext>
             </a:extLst>
           </p:cNvPr>
@@ -11575,7 +11575,7 @@
           <p:cNvPr id="13" name="TextBox 12">
             <a:extLst xmlns:a="http://schemas.openxmlformats.org/drawingml/2006/main">
               <a:ext uri="{FF2B5EF4-FFF2-40B4-BE49-F238E27FC236}">
-                <a16:creationId xmlns:a16="http://schemas.microsoft.com/office/drawing/2014/main" id="{63C1467C-C7B3-4C94-ADC0-9D551E4FBF1E}"/>
+                <a16:creationId xmlns:a16="http://schemas.microsoft.com/office/drawing/2014/main" id="{1F7D9C5F-32B2-444D-A2D2-40A7002334F7}"/>
               </a:ext>
             </a:extLst>
           </p:cNvPr>
@@ -11622,7 +11622,7 @@
           <p:cNvPr id="14" name="Rounded Rectangle 13">
             <a:extLst xmlns:a="http://schemas.openxmlformats.org/drawingml/2006/main">
               <a:ext uri="{FF2B5EF4-FFF2-40B4-BE49-F238E27FC236}">
-                <a16:creationId xmlns:a16="http://schemas.microsoft.com/office/drawing/2014/main" id="{C38EE3DC-84C3-46CE-8AEC-BB14B91B8EF3}"/>
+                <a16:creationId xmlns:a16="http://schemas.microsoft.com/office/drawing/2014/main" id="{D9D47900-6634-4633-8AEB-2D9CBDD2423B}"/>
               </a:ext>
             </a:extLst>
           </p:cNvPr>
@@ -11679,7 +11679,7 @@
           <p:cNvPr id="15" name="TextBox 14">
             <a:extLst xmlns:a="http://schemas.openxmlformats.org/drawingml/2006/main">
               <a:ext uri="{FF2B5EF4-FFF2-40B4-BE49-F238E27FC236}">
-                <a16:creationId xmlns:a16="http://schemas.microsoft.com/office/drawing/2014/main" id="{1EFA7360-0356-4329-B62A-C3218F43E1E5}"/>
+                <a16:creationId xmlns:a16="http://schemas.microsoft.com/office/drawing/2014/main" id="{CE745A54-340D-428A-812E-EC4254EEED2F}"/>
               </a:ext>
             </a:extLst>
           </p:cNvPr>
@@ -11726,7 +11726,7 @@
           <p:cNvPr id="16" name="TextBox 15">
             <a:extLst xmlns:a="http://schemas.openxmlformats.org/drawingml/2006/main">
               <a:ext uri="{FF2B5EF4-FFF2-40B4-BE49-F238E27FC236}">
-                <a16:creationId xmlns:a16="http://schemas.microsoft.com/office/drawing/2014/main" id="{1DDEB0ED-0E34-48C2-B022-E4B8993B58CB}"/>
+                <a16:creationId xmlns:a16="http://schemas.microsoft.com/office/drawing/2014/main" id="{FF90AF52-1E63-4A8F-B265-7CB5C45B491F}"/>
               </a:ext>
             </a:extLst>
           </p:cNvPr>
@@ -11773,7 +11773,7 @@
           <p:cNvPr id="17" name="Rounded Rectangle 16">
             <a:extLst xmlns:a="http://schemas.openxmlformats.org/drawingml/2006/main">
               <a:ext uri="{FF2B5EF4-FFF2-40B4-BE49-F238E27FC236}">
-                <a16:creationId xmlns:a16="http://schemas.microsoft.com/office/drawing/2014/main" id="{5F3743EE-680C-4EC8-8B13-483EB6CA8D8F}"/>
+                <a16:creationId xmlns:a16="http://schemas.microsoft.com/office/drawing/2014/main" id="{8BEFC6FD-DF5F-485C-9184-1014F17FCC19}"/>
               </a:ext>
             </a:extLst>
           </p:cNvPr>
@@ -11830,7 +11830,7 @@
           <p:cNvPr id="18" name="TextBox 17">
             <a:extLst xmlns:a="http://schemas.openxmlformats.org/drawingml/2006/main">
               <a:ext uri="{FF2B5EF4-FFF2-40B4-BE49-F238E27FC236}">
-                <a16:creationId xmlns:a16="http://schemas.microsoft.com/office/drawing/2014/main" id="{6C46EB0B-C3B2-4BE0-A863-FA3192E3F0D2}"/>
+                <a16:creationId xmlns:a16="http://schemas.microsoft.com/office/drawing/2014/main" id="{F5CFA177-8D5D-48AD-8964-F856C8047EBE}"/>
               </a:ext>
             </a:extLst>
           </p:cNvPr>
@@ -11877,7 +11877,7 @@
           <p:cNvPr id="19" name="TextBox 18">
             <a:extLst xmlns:a="http://schemas.openxmlformats.org/drawingml/2006/main">
               <a:ext uri="{FF2B5EF4-FFF2-40B4-BE49-F238E27FC236}">
-                <a16:creationId xmlns:a16="http://schemas.microsoft.com/office/drawing/2014/main" id="{6365B2F9-3A5B-4B1E-8990-0E8D87FA5B0D}"/>
+                <a16:creationId xmlns:a16="http://schemas.microsoft.com/office/drawing/2014/main" id="{03DDCB95-1FD6-4F2B-9D24-CDA0D620DB52}"/>
               </a:ext>
             </a:extLst>
           </p:cNvPr>
@@ -11924,7 +11924,7 @@
           <p:cNvPr id="20" name="TextBox 19">
             <a:extLst xmlns:a="http://schemas.openxmlformats.org/drawingml/2006/main">
               <a:ext uri="{FF2B5EF4-FFF2-40B4-BE49-F238E27FC236}">
-                <a16:creationId xmlns:a16="http://schemas.microsoft.com/office/drawing/2014/main" id="{CBA967D5-40B4-4732-8068-AB7E93783845}"/>
+                <a16:creationId xmlns:a16="http://schemas.microsoft.com/office/drawing/2014/main" id="{CDE1CFFC-7A85-45CD-A268-09FF7C2177E7}"/>
               </a:ext>
             </a:extLst>
           </p:cNvPr>
@@ -11971,7 +11971,7 @@
           <p:cNvPr id="21" name="Rounded Rectangle 20">
             <a:extLst xmlns:a="http://schemas.openxmlformats.org/drawingml/2006/main">
               <a:ext uri="{FF2B5EF4-FFF2-40B4-BE49-F238E27FC236}">
-                <a16:creationId xmlns:a16="http://schemas.microsoft.com/office/drawing/2014/main" id="{76725135-9D28-4A09-B12E-555C45461FD9}"/>
+                <a16:creationId xmlns:a16="http://schemas.microsoft.com/office/drawing/2014/main" id="{1D0B8368-FD20-4F91-BEAA-51D577C80EB4}"/>
               </a:ext>
             </a:extLst>
           </p:cNvPr>
@@ -12028,7 +12028,7 @@
           <p:cNvPr id="22" name="TextBox 21">
             <a:extLst xmlns:a="http://schemas.openxmlformats.org/drawingml/2006/main">
               <a:ext uri="{FF2B5EF4-FFF2-40B4-BE49-F238E27FC236}">
-                <a16:creationId xmlns:a16="http://schemas.microsoft.com/office/drawing/2014/main" id="{54D0B5EF-78C5-401B-A9D8-90D0404BFF2D}"/>
+                <a16:creationId xmlns:a16="http://schemas.microsoft.com/office/drawing/2014/main" id="{6D2B58E1-6D1F-4398-B0BE-9602E8C85AF4}"/>
               </a:ext>
             </a:extLst>
           </p:cNvPr>
@@ -12075,7 +12075,7 @@
           <p:cNvPr id="23" name="TextBox 22">
             <a:extLst xmlns:a="http://schemas.openxmlformats.org/drawingml/2006/main">
               <a:ext uri="{FF2B5EF4-FFF2-40B4-BE49-F238E27FC236}">
-                <a16:creationId xmlns:a16="http://schemas.microsoft.com/office/drawing/2014/main" id="{1F642D4B-13D9-4438-B201-E12993FBC56F}"/>
+                <a16:creationId xmlns:a16="http://schemas.microsoft.com/office/drawing/2014/main" id="{13B4E639-8C9F-40A7-9B15-0C19B8494252}"/>
               </a:ext>
             </a:extLst>
           </p:cNvPr>
@@ -12120,7 +12120,7 @@
     </p:spTree>
     <p:extLst>
       <p:ext uri="{BB962C8B-B14F-4D97-AF65-F5344CB8AC3E}">
-        <p14:creationId xmlns:p14="http://schemas.microsoft.com/office/powerpoint/2010/main" val="1660562578"/>
+        <p14:creationId xmlns:p14="http://schemas.microsoft.com/office/powerpoint/2010/main" val="1450657840"/>
       </p:ext>
     </p:extLst>
   </p:cSld>
@@ -12144,7 +12144,7 @@
           <p:cNvPr id="2" name="TextBox 1">
             <a:extLst xmlns:a="http://schemas.openxmlformats.org/drawingml/2006/main">
               <a:ext uri="{FF2B5EF4-FFF2-40B4-BE49-F238E27FC236}">
-                <a16:creationId xmlns:a16="http://schemas.microsoft.com/office/drawing/2014/main" id="{9647B05A-3292-4E2C-B60C-4AE2C52631DC}"/>
+                <a16:creationId xmlns:a16="http://schemas.microsoft.com/office/drawing/2014/main" id="{2C94FC3C-57A1-47B4-BF42-F7B0728BAEC8}"/>
               </a:ext>
             </a:extLst>
           </p:cNvPr>
@@ -12191,7 +12191,7 @@
           <p:cNvPr id="3" name="TextBox 2">
             <a:extLst xmlns:a="http://schemas.openxmlformats.org/drawingml/2006/main">
               <a:ext uri="{FF2B5EF4-FFF2-40B4-BE49-F238E27FC236}">
-                <a16:creationId xmlns:a16="http://schemas.microsoft.com/office/drawing/2014/main" id="{C06517C2-4699-418A-840C-5EE6C7BEC33D}"/>
+                <a16:creationId xmlns:a16="http://schemas.microsoft.com/office/drawing/2014/main" id="{4C81910F-849B-4363-8323-9FB7A0E2F769}"/>
               </a:ext>
             </a:extLst>
           </p:cNvPr>
@@ -12238,7 +12238,7 @@
           <p:cNvPr id="4" name="Rectangle 3">
             <a:extLst xmlns:a="http://schemas.openxmlformats.org/drawingml/2006/main">
               <a:ext uri="{FF2B5EF4-FFF2-40B4-BE49-F238E27FC236}">
-                <a16:creationId xmlns:a16="http://schemas.microsoft.com/office/drawing/2014/main" id="{678E2B45-F538-402C-A5A6-522615F5969C}"/>
+                <a16:creationId xmlns:a16="http://schemas.microsoft.com/office/drawing/2014/main" id="{73AB9490-D07B-46A6-A3E7-F96A1DD536C2}"/>
               </a:ext>
             </a:extLst>
           </p:cNvPr>
@@ -12293,7 +12293,7 @@
           <p:cNvPr id="5" name="Rectangle 4">
             <a:extLst xmlns:a="http://schemas.openxmlformats.org/drawingml/2006/main">
               <a:ext uri="{FF2B5EF4-FFF2-40B4-BE49-F238E27FC236}">
-                <a16:creationId xmlns:a16="http://schemas.microsoft.com/office/drawing/2014/main" id="{B2671702-8501-4E65-A031-44B9E13A1956}"/>
+                <a16:creationId xmlns:a16="http://schemas.microsoft.com/office/drawing/2014/main" id="{FE3977FC-C5F9-4820-92E9-0A798D7A3A4B}"/>
               </a:ext>
             </a:extLst>
           </p:cNvPr>
@@ -12348,7 +12348,7 @@
           <p:cNvPr id="6" name="TextBox 5">
             <a:extLst xmlns:a="http://schemas.openxmlformats.org/drawingml/2006/main">
               <a:ext uri="{FF2B5EF4-FFF2-40B4-BE49-F238E27FC236}">
-                <a16:creationId xmlns:a16="http://schemas.microsoft.com/office/drawing/2014/main" id="{31940224-4363-4465-BBE9-82AF9F342AD8}"/>
+                <a16:creationId xmlns:a16="http://schemas.microsoft.com/office/drawing/2014/main" id="{46B9D90A-E10A-4A81-BD3D-F66FA930BF3C}"/>
               </a:ext>
             </a:extLst>
           </p:cNvPr>
@@ -12385,7 +12385,7 @@
                 <a:ea typeface="Aptos"/>
                 <a:cs typeface="Aptos"/>
               </a:rPr>
-              <a:t>Julkinen riippumaton evidenssikooste · 2026.07.24-19 · 2026-07-24 · Lähteet: Statistics Canada; Health Canada; New Zealand Ministry of Health; Destatis; Vero; Sejm; FTC</a:t>
+              <a:t>Julkinen riippumaton evidenssikooste · 2026.07.24-20 · 2026-07-24 · Lähteet: Statistics Canada; Health Canada; New Zealand Ministry of Health; Destatis; Vero; Sejm; FTC</a:t>
             </a:r>
           </a:p>
         </p:txBody>
@@ -12395,7 +12395,7 @@
           <p:cNvPr id="7" name="TextBox 6">
             <a:extLst xmlns:a="http://schemas.openxmlformats.org/drawingml/2006/main">
               <a:ext uri="{FF2B5EF4-FFF2-40B4-BE49-F238E27FC236}">
-                <a16:creationId xmlns:a16="http://schemas.microsoft.com/office/drawing/2014/main" id="{116D07C9-9EE1-44D2-A9C5-839BE1D267EA}"/>
+                <a16:creationId xmlns:a16="http://schemas.microsoft.com/office/drawing/2014/main" id="{F3855BFC-8241-413D-883E-632CED364ECC}"/>
               </a:ext>
             </a:extLst>
           </p:cNvPr>
@@ -13048,7 +13048,7 @@
           <p:cNvPr id="9" name="TextBox 8">
             <a:extLst xmlns:a="http://schemas.openxmlformats.org/drawingml/2006/main">
               <a:ext uri="{FF2B5EF4-FFF2-40B4-BE49-F238E27FC236}">
-                <a16:creationId xmlns:a16="http://schemas.microsoft.com/office/drawing/2014/main" id="{9D57836F-5F69-477D-A98B-F17FA1BE6C45}"/>
+                <a16:creationId xmlns:a16="http://schemas.microsoft.com/office/drawing/2014/main" id="{4E1F3667-57AC-4D1F-BBDF-D071CEE06FAD}"/>
               </a:ext>
             </a:extLst>
           </p:cNvPr>
@@ -13093,7 +13093,7 @@
     </p:spTree>
     <p:extLst>
       <p:ext uri="{BB962C8B-B14F-4D97-AF65-F5344CB8AC3E}">
-        <p14:creationId xmlns:p14="http://schemas.microsoft.com/office/powerpoint/2010/main" val="2006120499"/>
+        <p14:creationId xmlns:p14="http://schemas.microsoft.com/office/powerpoint/2010/main" val="288021402"/>
       </p:ext>
     </p:extLst>
   </p:cSld>
@@ -13117,7 +13117,7 @@
           <p:cNvPr id="2" name="TextBox 1">
             <a:extLst xmlns:a="http://schemas.openxmlformats.org/drawingml/2006/main">
               <a:ext uri="{FF2B5EF4-FFF2-40B4-BE49-F238E27FC236}">
-                <a16:creationId xmlns:a16="http://schemas.microsoft.com/office/drawing/2014/main" id="{791C76BF-4A03-465E-A26B-994C71D98E5B}"/>
+                <a16:creationId xmlns:a16="http://schemas.microsoft.com/office/drawing/2014/main" id="{6D1E84A9-FE37-49DF-8B4C-E4C448D330B0}"/>
               </a:ext>
             </a:extLst>
           </p:cNvPr>
@@ -13164,7 +13164,7 @@
           <p:cNvPr id="3" name="TextBox 2">
             <a:extLst xmlns:a="http://schemas.openxmlformats.org/drawingml/2006/main">
               <a:ext uri="{FF2B5EF4-FFF2-40B4-BE49-F238E27FC236}">
-                <a16:creationId xmlns:a16="http://schemas.microsoft.com/office/drawing/2014/main" id="{AF2C5E43-207C-47C7-9EC2-1C5A7066CC10}"/>
+                <a16:creationId xmlns:a16="http://schemas.microsoft.com/office/drawing/2014/main" id="{2FD28F76-59D1-4284-A115-E3B3ACC95C6C}"/>
               </a:ext>
             </a:extLst>
           </p:cNvPr>
@@ -13211,7 +13211,7 @@
           <p:cNvPr id="4" name="Rectangle 3">
             <a:extLst xmlns:a="http://schemas.openxmlformats.org/drawingml/2006/main">
               <a:ext uri="{FF2B5EF4-FFF2-40B4-BE49-F238E27FC236}">
-                <a16:creationId xmlns:a16="http://schemas.microsoft.com/office/drawing/2014/main" id="{D5505083-CD9B-4D4F-AF50-EE1BE2AF931C}"/>
+                <a16:creationId xmlns:a16="http://schemas.microsoft.com/office/drawing/2014/main" id="{B607B7B5-A3AC-4F29-AE9E-8F172A04F19C}"/>
               </a:ext>
             </a:extLst>
           </p:cNvPr>
@@ -13266,7 +13266,7 @@
           <p:cNvPr id="5" name="Rectangle 4">
             <a:extLst xmlns:a="http://schemas.openxmlformats.org/drawingml/2006/main">
               <a:ext uri="{FF2B5EF4-FFF2-40B4-BE49-F238E27FC236}">
-                <a16:creationId xmlns:a16="http://schemas.microsoft.com/office/drawing/2014/main" id="{185DDC3B-F336-457C-A176-307BEED5CF13}"/>
+                <a16:creationId xmlns:a16="http://schemas.microsoft.com/office/drawing/2014/main" id="{9D897D09-BF4F-4EC5-AEF0-4AC878335F2D}"/>
               </a:ext>
             </a:extLst>
           </p:cNvPr>
@@ -13321,7 +13321,7 @@
           <p:cNvPr id="6" name="TextBox 5">
             <a:extLst xmlns:a="http://schemas.openxmlformats.org/drawingml/2006/main">
               <a:ext uri="{FF2B5EF4-FFF2-40B4-BE49-F238E27FC236}">
-                <a16:creationId xmlns:a16="http://schemas.microsoft.com/office/drawing/2014/main" id="{599ABAE1-ED46-4093-AD5A-B97A279ADF15}"/>
+                <a16:creationId xmlns:a16="http://schemas.microsoft.com/office/drawing/2014/main" id="{56348B9A-3BAB-4A41-B215-BF1FC1D97D32}"/>
               </a:ext>
             </a:extLst>
           </p:cNvPr>
@@ -13358,7 +13358,7 @@
                 <a:ea typeface="Aptos"/>
                 <a:cs typeface="Aptos"/>
               </a:rPr>
-              <a:t>Julkinen riippumaton evidenssikooste · 2026.07.24-19 · 2026-07-24 · Lähteet: Statistics Canada; Health Canada 2024</a:t>
+              <a:t>Julkinen riippumaton evidenssikooste · 2026.07.24-20 · 2026-07-24 · Lähteet: Statistics Canada; Health Canada 2024</a:t>
             </a:r>
           </a:p>
         </p:txBody>
@@ -13368,7 +13368,7 @@
           <p:cNvPr id="7" name="TextBox 6">
             <a:extLst xmlns:a="http://schemas.openxmlformats.org/drawingml/2006/main">
               <a:ext uri="{FF2B5EF4-FFF2-40B4-BE49-F238E27FC236}">
-                <a16:creationId xmlns:a16="http://schemas.microsoft.com/office/drawing/2014/main" id="{D29D23E7-2FC3-40DC-9448-C841938039CC}"/>
+                <a16:creationId xmlns:a16="http://schemas.microsoft.com/office/drawing/2014/main" id="{640E0EA9-AA79-4CD7-9724-96321AA19FCE}"/>
               </a:ext>
             </a:extLst>
           </p:cNvPr>
@@ -13415,7 +13415,7 @@
           <p:cNvPr id="8" name="Rounded Rectangle 7">
             <a:extLst xmlns:a="http://schemas.openxmlformats.org/drawingml/2006/main">
               <a:ext uri="{FF2B5EF4-FFF2-40B4-BE49-F238E27FC236}">
-                <a16:creationId xmlns:a16="http://schemas.microsoft.com/office/drawing/2014/main" id="{6CB51190-4AD4-4F62-843F-0AADD10B6EEA}"/>
+                <a16:creationId xmlns:a16="http://schemas.microsoft.com/office/drawing/2014/main" id="{919492DB-2BF9-46DB-8F04-085679DDC62D}"/>
               </a:ext>
             </a:extLst>
           </p:cNvPr>
@@ -13472,7 +13472,7 @@
           <p:cNvPr id="9" name="TextBox 8">
             <a:extLst xmlns:a="http://schemas.openxmlformats.org/drawingml/2006/main">
               <a:ext uri="{FF2B5EF4-FFF2-40B4-BE49-F238E27FC236}">
-                <a16:creationId xmlns:a16="http://schemas.microsoft.com/office/drawing/2014/main" id="{B01A18B6-1C39-4646-BEC8-9A186AC84B94}"/>
+                <a16:creationId xmlns:a16="http://schemas.microsoft.com/office/drawing/2014/main" id="{D0C89BE5-9B29-45F5-B62A-2A6927D5AB8C}"/>
               </a:ext>
             </a:extLst>
           </p:cNvPr>
@@ -13519,7 +13519,7 @@
           <p:cNvPr id="10" name="TextBox 9">
             <a:extLst xmlns:a="http://schemas.openxmlformats.org/drawingml/2006/main">
               <a:ext uri="{FF2B5EF4-FFF2-40B4-BE49-F238E27FC236}">
-                <a16:creationId xmlns:a16="http://schemas.microsoft.com/office/drawing/2014/main" id="{CCA1D5F5-207E-4450-AB8D-C6551C23A6C8}"/>
+                <a16:creationId xmlns:a16="http://schemas.microsoft.com/office/drawing/2014/main" id="{D1E8E49B-E8BA-4E25-960C-935045ADBB08}"/>
               </a:ext>
             </a:extLst>
           </p:cNvPr>
@@ -13566,7 +13566,7 @@
           <p:cNvPr id="11" name="Rounded Rectangle 10">
             <a:extLst xmlns:a="http://schemas.openxmlformats.org/drawingml/2006/main">
               <a:ext uri="{FF2B5EF4-FFF2-40B4-BE49-F238E27FC236}">
-                <a16:creationId xmlns:a16="http://schemas.microsoft.com/office/drawing/2014/main" id="{0FDCC7B9-F27F-4341-94C7-092B2BABDDE9}"/>
+                <a16:creationId xmlns:a16="http://schemas.microsoft.com/office/drawing/2014/main" id="{3ECD1FA1-28A3-4F55-BAFB-DAD6525657FF}"/>
               </a:ext>
             </a:extLst>
           </p:cNvPr>
@@ -13623,7 +13623,7 @@
           <p:cNvPr id="12" name="TextBox 11">
             <a:extLst xmlns:a="http://schemas.openxmlformats.org/drawingml/2006/main">
               <a:ext uri="{FF2B5EF4-FFF2-40B4-BE49-F238E27FC236}">
-                <a16:creationId xmlns:a16="http://schemas.microsoft.com/office/drawing/2014/main" id="{4FDDEA89-B175-417C-BF12-3971D8C24612}"/>
+                <a16:creationId xmlns:a16="http://schemas.microsoft.com/office/drawing/2014/main" id="{B2B6B929-7AD6-43D3-92DD-5A85620747F8}"/>
               </a:ext>
             </a:extLst>
           </p:cNvPr>
@@ -13670,7 +13670,7 @@
           <p:cNvPr id="13" name="TextBox 12">
             <a:extLst xmlns:a="http://schemas.openxmlformats.org/drawingml/2006/main">
               <a:ext uri="{FF2B5EF4-FFF2-40B4-BE49-F238E27FC236}">
-                <a16:creationId xmlns:a16="http://schemas.microsoft.com/office/drawing/2014/main" id="{CCC99DF8-C303-49A0-B26B-01287AE66403}"/>
+                <a16:creationId xmlns:a16="http://schemas.microsoft.com/office/drawing/2014/main" id="{B90E6B03-F334-4984-8E5D-EC09B941FE34}"/>
               </a:ext>
             </a:extLst>
           </p:cNvPr>
@@ -13717,7 +13717,7 @@
           <p:cNvPr id="14" name="Rounded Rectangle 13">
             <a:extLst xmlns:a="http://schemas.openxmlformats.org/drawingml/2006/main">
               <a:ext uri="{FF2B5EF4-FFF2-40B4-BE49-F238E27FC236}">
-                <a16:creationId xmlns:a16="http://schemas.microsoft.com/office/drawing/2014/main" id="{E94A0F28-E331-432A-ADE1-DD7C549B53F0}"/>
+                <a16:creationId xmlns:a16="http://schemas.microsoft.com/office/drawing/2014/main" id="{1D9930FA-3A4B-435A-B5BD-B7C293838A4B}"/>
               </a:ext>
             </a:extLst>
           </p:cNvPr>
@@ -13774,7 +13774,7 @@
           <p:cNvPr id="15" name="TextBox 14">
             <a:extLst xmlns:a="http://schemas.openxmlformats.org/drawingml/2006/main">
               <a:ext uri="{FF2B5EF4-FFF2-40B4-BE49-F238E27FC236}">
-                <a16:creationId xmlns:a16="http://schemas.microsoft.com/office/drawing/2014/main" id="{E9DE5C48-053A-4827-BC18-4B457500A921}"/>
+                <a16:creationId xmlns:a16="http://schemas.microsoft.com/office/drawing/2014/main" id="{36C50EB4-C38D-4F76-B8A1-0B50C5B6F1E2}"/>
               </a:ext>
             </a:extLst>
           </p:cNvPr>
@@ -13821,7 +13821,7 @@
           <p:cNvPr id="16" name="TextBox 15">
             <a:extLst xmlns:a="http://schemas.openxmlformats.org/drawingml/2006/main">
               <a:ext uri="{FF2B5EF4-FFF2-40B4-BE49-F238E27FC236}">
-                <a16:creationId xmlns:a16="http://schemas.microsoft.com/office/drawing/2014/main" id="{A11264A3-9B96-4599-8CA3-0A9C9F382839}"/>
+                <a16:creationId xmlns:a16="http://schemas.microsoft.com/office/drawing/2014/main" id="{22F902C2-F9EF-45F8-994D-D5F2B4D052EF}"/>
               </a:ext>
             </a:extLst>
           </p:cNvPr>
@@ -13868,7 +13868,7 @@
           <p:cNvPr id="17" name="TextBox 16">
             <a:extLst xmlns:a="http://schemas.openxmlformats.org/drawingml/2006/main">
               <a:ext uri="{FF2B5EF4-FFF2-40B4-BE49-F238E27FC236}">
-                <a16:creationId xmlns:a16="http://schemas.microsoft.com/office/drawing/2014/main" id="{AB80A6F8-CEC3-4CCC-9FD6-72F0DB618392}"/>
+                <a16:creationId xmlns:a16="http://schemas.microsoft.com/office/drawing/2014/main" id="{12945322-D475-4C3C-B05C-43C22F8D3E8B}"/>
               </a:ext>
             </a:extLst>
           </p:cNvPr>
@@ -13915,7 +13915,7 @@
           <p:cNvPr id="18" name="Rounded Rectangle 17">
             <a:extLst xmlns:a="http://schemas.openxmlformats.org/drawingml/2006/main">
               <a:ext uri="{FF2B5EF4-FFF2-40B4-BE49-F238E27FC236}">
-                <a16:creationId xmlns:a16="http://schemas.microsoft.com/office/drawing/2014/main" id="{46DC02E8-CD55-49BF-9969-DB3DCF1C49E1}"/>
+                <a16:creationId xmlns:a16="http://schemas.microsoft.com/office/drawing/2014/main" id="{3B4A9E67-AFEB-449B-AEFD-D610751D4787}"/>
               </a:ext>
             </a:extLst>
           </p:cNvPr>
@@ -13972,7 +13972,7 @@
           <p:cNvPr id="19" name="TextBox 18">
             <a:extLst xmlns:a="http://schemas.openxmlformats.org/drawingml/2006/main">
               <a:ext uri="{FF2B5EF4-FFF2-40B4-BE49-F238E27FC236}">
-                <a16:creationId xmlns:a16="http://schemas.microsoft.com/office/drawing/2014/main" id="{FD150826-AF91-4176-8F50-DDD9F414D27E}"/>
+                <a16:creationId xmlns:a16="http://schemas.microsoft.com/office/drawing/2014/main" id="{2A0FF938-9C7F-4DC7-827A-4DA2E7531366}"/>
               </a:ext>
             </a:extLst>
           </p:cNvPr>
@@ -14019,7 +14019,7 @@
           <p:cNvPr id="20" name="TextBox 19">
             <a:extLst xmlns:a="http://schemas.openxmlformats.org/drawingml/2006/main">
               <a:ext uri="{FF2B5EF4-FFF2-40B4-BE49-F238E27FC236}">
-                <a16:creationId xmlns:a16="http://schemas.microsoft.com/office/drawing/2014/main" id="{1116151A-BC24-4107-BE21-F18098843473}"/>
+                <a16:creationId xmlns:a16="http://schemas.microsoft.com/office/drawing/2014/main" id="{8089F536-EFAF-4802-AFF4-4A36FEA47276}"/>
               </a:ext>
             </a:extLst>
           </p:cNvPr>
@@ -14064,7 +14064,7 @@
     </p:spTree>
     <p:extLst>
       <p:ext uri="{BB962C8B-B14F-4D97-AF65-F5344CB8AC3E}">
-        <p14:creationId xmlns:p14="http://schemas.microsoft.com/office/powerpoint/2010/main" val="1019636562"/>
+        <p14:creationId xmlns:p14="http://schemas.microsoft.com/office/powerpoint/2010/main" val="202645654"/>
       </p:ext>
     </p:extLst>
   </p:cSld>
@@ -14088,7 +14088,7 @@
           <p:cNvPr id="2" name="TextBox 1">
             <a:extLst xmlns:a="http://schemas.openxmlformats.org/drawingml/2006/main">
               <a:ext uri="{FF2B5EF4-FFF2-40B4-BE49-F238E27FC236}">
-                <a16:creationId xmlns:a16="http://schemas.microsoft.com/office/drawing/2014/main" id="{A98183F8-B096-4163-93D9-20D60281EE05}"/>
+                <a16:creationId xmlns:a16="http://schemas.microsoft.com/office/drawing/2014/main" id="{91C07FAA-6922-4CFD-96EA-8902D45428B6}"/>
               </a:ext>
             </a:extLst>
           </p:cNvPr>
@@ -14135,7 +14135,7 @@
           <p:cNvPr id="3" name="TextBox 2">
             <a:extLst xmlns:a="http://schemas.openxmlformats.org/drawingml/2006/main">
               <a:ext uri="{FF2B5EF4-FFF2-40B4-BE49-F238E27FC236}">
-                <a16:creationId xmlns:a16="http://schemas.microsoft.com/office/drawing/2014/main" id="{B49EADFB-84E9-4C79-8B2A-4DDE3CD4DA53}"/>
+                <a16:creationId xmlns:a16="http://schemas.microsoft.com/office/drawing/2014/main" id="{12AC912D-C016-4F7F-8453-7D3E690D8737}"/>
               </a:ext>
             </a:extLst>
           </p:cNvPr>
@@ -14182,7 +14182,7 @@
           <p:cNvPr id="4" name="Rectangle 3">
             <a:extLst xmlns:a="http://schemas.openxmlformats.org/drawingml/2006/main">
               <a:ext uri="{FF2B5EF4-FFF2-40B4-BE49-F238E27FC236}">
-                <a16:creationId xmlns:a16="http://schemas.microsoft.com/office/drawing/2014/main" id="{E3BC0AB6-3D0A-4B85-9DBC-C82C149788CA}"/>
+                <a16:creationId xmlns:a16="http://schemas.microsoft.com/office/drawing/2014/main" id="{218CB836-A1A9-4C6E-8399-7E1A69A3C431}"/>
               </a:ext>
             </a:extLst>
           </p:cNvPr>
@@ -14237,7 +14237,7 @@
           <p:cNvPr id="5" name="Rectangle 4">
             <a:extLst xmlns:a="http://schemas.openxmlformats.org/drawingml/2006/main">
               <a:ext uri="{FF2B5EF4-FFF2-40B4-BE49-F238E27FC236}">
-                <a16:creationId xmlns:a16="http://schemas.microsoft.com/office/drawing/2014/main" id="{7287ECC9-5E81-498F-AA2A-172F71AFA914}"/>
+                <a16:creationId xmlns:a16="http://schemas.microsoft.com/office/drawing/2014/main" id="{EE114921-9DBB-47A1-B85C-D263737A4517}"/>
               </a:ext>
             </a:extLst>
           </p:cNvPr>
@@ -14292,7 +14292,7 @@
           <p:cNvPr id="6" name="TextBox 5">
             <a:extLst xmlns:a="http://schemas.openxmlformats.org/drawingml/2006/main">
               <a:ext uri="{FF2B5EF4-FFF2-40B4-BE49-F238E27FC236}">
-                <a16:creationId xmlns:a16="http://schemas.microsoft.com/office/drawing/2014/main" id="{29D52361-7804-483A-926F-A65D5DF7059C}"/>
+                <a16:creationId xmlns:a16="http://schemas.microsoft.com/office/drawing/2014/main" id="{D8CA8D82-EDDF-4A21-8EEB-41991F9C40B4}"/>
               </a:ext>
             </a:extLst>
           </p:cNvPr>
@@ -14329,7 +14329,7 @@
                 <a:ea typeface="Aptos"/>
                 <a:cs typeface="Aptos"/>
               </a:rPr>
-              <a:t>Julkinen riippumaton evidenssikooste · 2026.07.24-19 · 2026-07-24 · Lähteet: Destatis</a:t>
+              <a:t>Julkinen riippumaton evidenssikooste · 2026.07.24-20 · 2026-07-24 · Lähteet: Destatis</a:t>
             </a:r>
           </a:p>
         </p:txBody>
@@ -14339,7 +14339,7 @@
           <p:cNvPr id="7" name="TextBox 6">
             <a:extLst xmlns:a="http://schemas.openxmlformats.org/drawingml/2006/main">
               <a:ext uri="{FF2B5EF4-FFF2-40B4-BE49-F238E27FC236}">
-                <a16:creationId xmlns:a16="http://schemas.microsoft.com/office/drawing/2014/main" id="{8CC5D511-6E36-46C8-B7D8-292466B5AB68}"/>
+                <a16:creationId xmlns:a16="http://schemas.microsoft.com/office/drawing/2014/main" id="{E7A2C7C5-A87A-4430-9692-DC950D350771}"/>
               </a:ext>
             </a:extLst>
           </p:cNvPr>
@@ -14852,7 +14852,7 @@
           <p:cNvPr id="9" name="TextBox 8">
             <a:extLst xmlns:a="http://schemas.openxmlformats.org/drawingml/2006/main">
               <a:ext uri="{FF2B5EF4-FFF2-40B4-BE49-F238E27FC236}">
-                <a16:creationId xmlns:a16="http://schemas.microsoft.com/office/drawing/2014/main" id="{B655D55B-B767-447A-A8FE-DB224E51FFB4}"/>
+                <a16:creationId xmlns:a16="http://schemas.microsoft.com/office/drawing/2014/main" id="{2EA710DE-426F-4CA6-B0C4-588E79B93940}"/>
               </a:ext>
             </a:extLst>
           </p:cNvPr>
@@ -14897,7 +14897,7 @@
     </p:spTree>
     <p:extLst>
       <p:ext uri="{BB962C8B-B14F-4D97-AF65-F5344CB8AC3E}">
-        <p14:creationId xmlns:p14="http://schemas.microsoft.com/office/powerpoint/2010/main" val="395189689"/>
+        <p14:creationId xmlns:p14="http://schemas.microsoft.com/office/powerpoint/2010/main" val="1794675182"/>
       </p:ext>
     </p:extLst>
   </p:cSld>
@@ -14921,7 +14921,7 @@
           <p:cNvPr id="2" name="TextBox 1">
             <a:extLst xmlns:a="http://schemas.openxmlformats.org/drawingml/2006/main">
               <a:ext uri="{FF2B5EF4-FFF2-40B4-BE49-F238E27FC236}">
-                <a16:creationId xmlns:a16="http://schemas.microsoft.com/office/drawing/2014/main" id="{EA777F8F-69D7-4A18-B121-B6CAA205D50A}"/>
+                <a16:creationId xmlns:a16="http://schemas.microsoft.com/office/drawing/2014/main" id="{D00FCA0A-56C8-4F9E-A098-DC272E83060D}"/>
               </a:ext>
             </a:extLst>
           </p:cNvPr>
@@ -14968,7 +14968,7 @@
           <p:cNvPr id="3" name="TextBox 2">
             <a:extLst xmlns:a="http://schemas.openxmlformats.org/drawingml/2006/main">
               <a:ext uri="{FF2B5EF4-FFF2-40B4-BE49-F238E27FC236}">
-                <a16:creationId xmlns:a16="http://schemas.microsoft.com/office/drawing/2014/main" id="{5BEAE664-747E-4A7D-8500-B9F13DD72FDB}"/>
+                <a16:creationId xmlns:a16="http://schemas.microsoft.com/office/drawing/2014/main" id="{3F857A1C-8F20-4386-BF0B-6BE363DF6AF3}"/>
               </a:ext>
             </a:extLst>
           </p:cNvPr>
@@ -15015,7 +15015,7 @@
           <p:cNvPr id="4" name="Rectangle 3">
             <a:extLst xmlns:a="http://schemas.openxmlformats.org/drawingml/2006/main">
               <a:ext uri="{FF2B5EF4-FFF2-40B4-BE49-F238E27FC236}">
-                <a16:creationId xmlns:a16="http://schemas.microsoft.com/office/drawing/2014/main" id="{7AFC5ADD-494E-4E93-9950-47CAF41AB67F}"/>
+                <a16:creationId xmlns:a16="http://schemas.microsoft.com/office/drawing/2014/main" id="{30656DF2-FEDD-4EC4-9AE7-C58DB1AEE26D}"/>
               </a:ext>
             </a:extLst>
           </p:cNvPr>
@@ -15070,7 +15070,7 @@
           <p:cNvPr id="5" name="Rectangle 4">
             <a:extLst xmlns:a="http://schemas.openxmlformats.org/drawingml/2006/main">
               <a:ext uri="{FF2B5EF4-FFF2-40B4-BE49-F238E27FC236}">
-                <a16:creationId xmlns:a16="http://schemas.microsoft.com/office/drawing/2014/main" id="{81817B9A-CFAB-4E33-8B5E-5ADB471DB0CE}"/>
+                <a16:creationId xmlns:a16="http://schemas.microsoft.com/office/drawing/2014/main" id="{D3A15D57-644A-460D-A636-263BC40A1A69}"/>
               </a:ext>
             </a:extLst>
           </p:cNvPr>
@@ -15125,7 +15125,7 @@
           <p:cNvPr id="6" name="TextBox 5">
             <a:extLst xmlns:a="http://schemas.openxmlformats.org/drawingml/2006/main">
               <a:ext uri="{FF2B5EF4-FFF2-40B4-BE49-F238E27FC236}">
-                <a16:creationId xmlns:a16="http://schemas.microsoft.com/office/drawing/2014/main" id="{1D1981CA-497D-4939-9387-00756C365229}"/>
+                <a16:creationId xmlns:a16="http://schemas.microsoft.com/office/drawing/2014/main" id="{8DE5375F-5420-44FF-AE30-7CC8AFB8E658}"/>
               </a:ext>
             </a:extLst>
           </p:cNvPr>
@@ -15162,7 +15162,7 @@
                 <a:ea typeface="Aptos"/>
                 <a:cs typeface="Aptos"/>
               </a:rPr>
-              <a:t>Julkinen riippumaton evidenssikooste · 2026.07.24-19 · 2026-07-24 · Lähteet: Destatis; inTaste.de</a:t>
+              <a:t>Julkinen riippumaton evidenssikooste · 2026.07.24-20 · 2026-07-24 · Lähteet: Destatis; inTaste.de</a:t>
             </a:r>
           </a:p>
         </p:txBody>
@@ -15172,7 +15172,7 @@
           <p:cNvPr id="7" name="TextBox 6">
             <a:extLst xmlns:a="http://schemas.openxmlformats.org/drawingml/2006/main">
               <a:ext uri="{FF2B5EF4-FFF2-40B4-BE49-F238E27FC236}">
-                <a16:creationId xmlns:a16="http://schemas.microsoft.com/office/drawing/2014/main" id="{87062B3A-B2B0-414D-985C-4CABFFD1712E}"/>
+                <a16:creationId xmlns:a16="http://schemas.microsoft.com/office/drawing/2014/main" id="{B4EF4705-93F4-4356-8F47-AAAF3F5DBCEE}"/>
               </a:ext>
             </a:extLst>
           </p:cNvPr>
@@ -15219,7 +15219,7 @@
           <p:cNvPr id="8" name="Rounded Rectangle 7">
             <a:extLst xmlns:a="http://schemas.openxmlformats.org/drawingml/2006/main">
               <a:ext uri="{FF2B5EF4-FFF2-40B4-BE49-F238E27FC236}">
-                <a16:creationId xmlns:a16="http://schemas.microsoft.com/office/drawing/2014/main" id="{323C05E8-DFE7-43CB-9707-4BA0F8E70445}"/>
+                <a16:creationId xmlns:a16="http://schemas.microsoft.com/office/drawing/2014/main" id="{481D7C65-E35B-4DBD-9627-FEC99D93A369}"/>
               </a:ext>
             </a:extLst>
           </p:cNvPr>
@@ -15276,7 +15276,7 @@
           <p:cNvPr id="9" name="TextBox 8">
             <a:extLst xmlns:a="http://schemas.openxmlformats.org/drawingml/2006/main">
               <a:ext uri="{FF2B5EF4-FFF2-40B4-BE49-F238E27FC236}">
-                <a16:creationId xmlns:a16="http://schemas.microsoft.com/office/drawing/2014/main" id="{4D8F72F4-7D5E-4F36-9D4F-8ACEAFB88097}"/>
+                <a16:creationId xmlns:a16="http://schemas.microsoft.com/office/drawing/2014/main" id="{B8BF0E32-ADF5-4126-B80E-448DAB703C80}"/>
               </a:ext>
             </a:extLst>
           </p:cNvPr>
@@ -15323,7 +15323,7 @@
           <p:cNvPr id="10" name="TextBox 9">
             <a:extLst xmlns:a="http://schemas.openxmlformats.org/drawingml/2006/main">
               <a:ext uri="{FF2B5EF4-FFF2-40B4-BE49-F238E27FC236}">
-                <a16:creationId xmlns:a16="http://schemas.microsoft.com/office/drawing/2014/main" id="{F652428F-23DC-421E-A8F3-8C547DDDBDA1}"/>
+                <a16:creationId xmlns:a16="http://schemas.microsoft.com/office/drawing/2014/main" id="{B5970D9A-CB0B-47DD-8E97-8995475A7BC4}"/>
               </a:ext>
             </a:extLst>
           </p:cNvPr>
@@ -15370,7 +15370,7 @@
           <p:cNvPr id="11" name="Rounded Rectangle 10">
             <a:extLst xmlns:a="http://schemas.openxmlformats.org/drawingml/2006/main">
               <a:ext uri="{FF2B5EF4-FFF2-40B4-BE49-F238E27FC236}">
-                <a16:creationId xmlns:a16="http://schemas.microsoft.com/office/drawing/2014/main" id="{3D2C3854-90BA-4C88-90B5-81D26D77E3F7}"/>
+                <a16:creationId xmlns:a16="http://schemas.microsoft.com/office/drawing/2014/main" id="{5E911738-8281-4EB0-AB08-005F502B2374}"/>
               </a:ext>
             </a:extLst>
           </p:cNvPr>
@@ -15427,7 +15427,7 @@
           <p:cNvPr id="12" name="TextBox 11">
             <a:extLst xmlns:a="http://schemas.openxmlformats.org/drawingml/2006/main">
               <a:ext uri="{FF2B5EF4-FFF2-40B4-BE49-F238E27FC236}">
-                <a16:creationId xmlns:a16="http://schemas.microsoft.com/office/drawing/2014/main" id="{3C78407F-2C9E-4E54-8DA2-DA5FFA7FD153}"/>
+                <a16:creationId xmlns:a16="http://schemas.microsoft.com/office/drawing/2014/main" id="{B00F9AED-72B4-4F07-98DF-B501BBDC03D8}"/>
               </a:ext>
             </a:extLst>
           </p:cNvPr>
@@ -15474,7 +15474,7 @@
           <p:cNvPr id="13" name="TextBox 12">
             <a:extLst xmlns:a="http://schemas.openxmlformats.org/drawingml/2006/main">
               <a:ext uri="{FF2B5EF4-FFF2-40B4-BE49-F238E27FC236}">
-                <a16:creationId xmlns:a16="http://schemas.microsoft.com/office/drawing/2014/main" id="{A171EF63-E6DE-43E0-9638-7838273063CC}"/>
+                <a16:creationId xmlns:a16="http://schemas.microsoft.com/office/drawing/2014/main" id="{E5B076DA-59A8-43C8-8262-75A1621F207A}"/>
               </a:ext>
             </a:extLst>
           </p:cNvPr>
@@ -15521,7 +15521,7 @@
           <p:cNvPr id="14" name="Rounded Rectangle 13">
             <a:extLst xmlns:a="http://schemas.openxmlformats.org/drawingml/2006/main">
               <a:ext uri="{FF2B5EF4-FFF2-40B4-BE49-F238E27FC236}">
-                <a16:creationId xmlns:a16="http://schemas.microsoft.com/office/drawing/2014/main" id="{57C34C0C-D689-4ECE-BB1F-B4BA59975C22}"/>
+                <a16:creationId xmlns:a16="http://schemas.microsoft.com/office/drawing/2014/main" id="{BA79EEA9-A150-419E-A5C5-706B9C98888C}"/>
               </a:ext>
             </a:extLst>
           </p:cNvPr>
@@ -15578,7 +15578,7 @@
           <p:cNvPr id="15" name="TextBox 14">
             <a:extLst xmlns:a="http://schemas.openxmlformats.org/drawingml/2006/main">
               <a:ext uri="{FF2B5EF4-FFF2-40B4-BE49-F238E27FC236}">
-                <a16:creationId xmlns:a16="http://schemas.microsoft.com/office/drawing/2014/main" id="{01092048-2A57-429A-9558-FCE030E8CB9A}"/>
+                <a16:creationId xmlns:a16="http://schemas.microsoft.com/office/drawing/2014/main" id="{71F3E263-5096-4DE7-BD1D-1B2830F233A9}"/>
               </a:ext>
             </a:extLst>
           </p:cNvPr>
@@ -15625,7 +15625,7 @@
           <p:cNvPr id="16" name="TextBox 15">
             <a:extLst xmlns:a="http://schemas.openxmlformats.org/drawingml/2006/main">
               <a:ext uri="{FF2B5EF4-FFF2-40B4-BE49-F238E27FC236}">
-                <a16:creationId xmlns:a16="http://schemas.microsoft.com/office/drawing/2014/main" id="{9B78F24F-3E1B-44E5-88FE-F98D4F5FEA46}"/>
+                <a16:creationId xmlns:a16="http://schemas.microsoft.com/office/drawing/2014/main" id="{52F965FB-23EE-41C2-A3DF-B3ECC66E524D}"/>
               </a:ext>
             </a:extLst>
           </p:cNvPr>
@@ -15672,7 +15672,7 @@
           <p:cNvPr id="17" name="TextBox 16">
             <a:extLst xmlns:a="http://schemas.openxmlformats.org/drawingml/2006/main">
               <a:ext uri="{FF2B5EF4-FFF2-40B4-BE49-F238E27FC236}">
-                <a16:creationId xmlns:a16="http://schemas.microsoft.com/office/drawing/2014/main" id="{241AF807-BAD6-4CED-8BDC-A8EB46773DDB}"/>
+                <a16:creationId xmlns:a16="http://schemas.microsoft.com/office/drawing/2014/main" id="{C8D3BCD9-5F6B-4E03-AAE3-BE17B0C1A6BB}"/>
               </a:ext>
             </a:extLst>
           </p:cNvPr>
@@ -15719,7 +15719,7 @@
           <p:cNvPr id="18" name="Rounded Rectangle 17">
             <a:extLst xmlns:a="http://schemas.openxmlformats.org/drawingml/2006/main">
               <a:ext uri="{FF2B5EF4-FFF2-40B4-BE49-F238E27FC236}">
-                <a16:creationId xmlns:a16="http://schemas.microsoft.com/office/drawing/2014/main" id="{C9DFBBCA-4C52-4E59-8241-D7016E68862E}"/>
+                <a16:creationId xmlns:a16="http://schemas.microsoft.com/office/drawing/2014/main" id="{36DA7108-6153-41AB-9198-EB44DCCE145E}"/>
               </a:ext>
             </a:extLst>
           </p:cNvPr>
@@ -15776,7 +15776,7 @@
           <p:cNvPr id="19" name="TextBox 18">
             <a:extLst xmlns:a="http://schemas.openxmlformats.org/drawingml/2006/main">
               <a:ext uri="{FF2B5EF4-FFF2-40B4-BE49-F238E27FC236}">
-                <a16:creationId xmlns:a16="http://schemas.microsoft.com/office/drawing/2014/main" id="{B30EBAA5-DFBF-41EB-81B5-0323C92BDCF6}"/>
+                <a16:creationId xmlns:a16="http://schemas.microsoft.com/office/drawing/2014/main" id="{B8423541-7F5D-43DE-96A9-5C6050BEF708}"/>
               </a:ext>
             </a:extLst>
           </p:cNvPr>
@@ -15823,7 +15823,7 @@
           <p:cNvPr id="20" name="TextBox 19">
             <a:extLst xmlns:a="http://schemas.openxmlformats.org/drawingml/2006/main">
               <a:ext uri="{FF2B5EF4-FFF2-40B4-BE49-F238E27FC236}">
-                <a16:creationId xmlns:a16="http://schemas.microsoft.com/office/drawing/2014/main" id="{D9028757-7962-4D86-BCDD-A61790CCD465}"/>
+                <a16:creationId xmlns:a16="http://schemas.microsoft.com/office/drawing/2014/main" id="{C62B3FC0-8D08-4576-A8E5-7F6FC7ABCF22}"/>
               </a:ext>
             </a:extLst>
           </p:cNvPr>
@@ -15868,7 +15868,7 @@
     </p:spTree>
     <p:extLst>
       <p:ext uri="{BB962C8B-B14F-4D97-AF65-F5344CB8AC3E}">
-        <p14:creationId xmlns:p14="http://schemas.microsoft.com/office/powerpoint/2010/main" val="556428308"/>
+        <p14:creationId xmlns:p14="http://schemas.microsoft.com/office/powerpoint/2010/main" val="974504377"/>
       </p:ext>
     </p:extLst>
   </p:cSld>
@@ -15892,7 +15892,7 @@
           <p:cNvPr id="2" name="TextBox 1">
             <a:extLst xmlns:a="http://schemas.openxmlformats.org/drawingml/2006/main">
               <a:ext uri="{FF2B5EF4-FFF2-40B4-BE49-F238E27FC236}">
-                <a16:creationId xmlns:a16="http://schemas.microsoft.com/office/drawing/2014/main" id="{6CF64D06-77D1-4129-9C37-50875E30E81E}"/>
+                <a16:creationId xmlns:a16="http://schemas.microsoft.com/office/drawing/2014/main" id="{44947909-319B-41B4-8F5B-FEF96B22E904}"/>
               </a:ext>
             </a:extLst>
           </p:cNvPr>
@@ -15939,7 +15939,7 @@
           <p:cNvPr id="3" name="TextBox 2">
             <a:extLst xmlns:a="http://schemas.openxmlformats.org/drawingml/2006/main">
               <a:ext uri="{FF2B5EF4-FFF2-40B4-BE49-F238E27FC236}">
-                <a16:creationId xmlns:a16="http://schemas.microsoft.com/office/drawing/2014/main" id="{DEB2CF04-0E23-4583-B5EB-044A183E5120}"/>
+                <a16:creationId xmlns:a16="http://schemas.microsoft.com/office/drawing/2014/main" id="{531A23E7-F0C7-40F9-B399-26E6AAE963C2}"/>
               </a:ext>
             </a:extLst>
           </p:cNvPr>
@@ -15986,7 +15986,7 @@
           <p:cNvPr id="4" name="Rectangle 3">
             <a:extLst xmlns:a="http://schemas.openxmlformats.org/drawingml/2006/main">
               <a:ext uri="{FF2B5EF4-FFF2-40B4-BE49-F238E27FC236}">
-                <a16:creationId xmlns:a16="http://schemas.microsoft.com/office/drawing/2014/main" id="{55B15C01-D483-4E4F-8197-433E47EBDC6C}"/>
+                <a16:creationId xmlns:a16="http://schemas.microsoft.com/office/drawing/2014/main" id="{80F7AD57-3F47-47CF-A9EE-35066FABB577}"/>
               </a:ext>
             </a:extLst>
           </p:cNvPr>
@@ -16041,7 +16041,7 @@
           <p:cNvPr id="5" name="Rectangle 4">
             <a:extLst xmlns:a="http://schemas.openxmlformats.org/drawingml/2006/main">
               <a:ext uri="{FF2B5EF4-FFF2-40B4-BE49-F238E27FC236}">
-                <a16:creationId xmlns:a16="http://schemas.microsoft.com/office/drawing/2014/main" id="{FC38EDA3-406E-41A1-9C75-AB7A4993ADE3}"/>
+                <a16:creationId xmlns:a16="http://schemas.microsoft.com/office/drawing/2014/main" id="{FA1D8C6A-CAF4-46AB-85D1-6A2987E26D44}"/>
               </a:ext>
             </a:extLst>
           </p:cNvPr>
@@ -16096,7 +16096,7 @@
           <p:cNvPr id="6" name="TextBox 5">
             <a:extLst xmlns:a="http://schemas.openxmlformats.org/drawingml/2006/main">
               <a:ext uri="{FF2B5EF4-FFF2-40B4-BE49-F238E27FC236}">
-                <a16:creationId xmlns:a16="http://schemas.microsoft.com/office/drawing/2014/main" id="{BD2FE5E9-64FB-47E3-BED6-4D132D8CD8D9}"/>
+                <a16:creationId xmlns:a16="http://schemas.microsoft.com/office/drawing/2014/main" id="{5DA43B04-5113-4117-AFF2-6177DBF26119}"/>
               </a:ext>
             </a:extLst>
           </p:cNvPr>
@@ -16133,7 +16133,7 @@
                 <a:ea typeface="Aptos"/>
                 <a:cs typeface="Aptos"/>
               </a:rPr>
-              <a:t>Julkinen riippumaton evidenssikooste · 2026.07.24-19 · 2026-07-24 · Lähteet: IMARC; GVR; Fortune; European Commission</a:t>
+              <a:t>Julkinen riippumaton evidenssikooste · 2026.07.24-20 · 2026-07-24 · Lähteet: IMARC; GVR; Fortune; European Commission</a:t>
             </a:r>
           </a:p>
         </p:txBody>
@@ -16143,7 +16143,7 @@
           <p:cNvPr id="7" name="TextBox 6">
             <a:extLst xmlns:a="http://schemas.openxmlformats.org/drawingml/2006/main">
               <a:ext uri="{FF2B5EF4-FFF2-40B4-BE49-F238E27FC236}">
-                <a16:creationId xmlns:a16="http://schemas.microsoft.com/office/drawing/2014/main" id="{D286D5D1-90B8-405B-8727-A38C9A2EE0CE}"/>
+                <a16:creationId xmlns:a16="http://schemas.microsoft.com/office/drawing/2014/main" id="{E0160C9B-8883-4EE7-B056-C3AF8F835AB1}"/>
               </a:ext>
             </a:extLst>
           </p:cNvPr>
@@ -16190,7 +16190,7 @@
           <p:cNvPr id="8" name="Rounded Rectangle 7">
             <a:extLst xmlns:a="http://schemas.openxmlformats.org/drawingml/2006/main">
               <a:ext uri="{FF2B5EF4-FFF2-40B4-BE49-F238E27FC236}">
-                <a16:creationId xmlns:a16="http://schemas.microsoft.com/office/drawing/2014/main" id="{22DB20F6-6CF7-4354-8528-5FFBD68AB47E}"/>
+                <a16:creationId xmlns:a16="http://schemas.microsoft.com/office/drawing/2014/main" id="{B60633CC-5CAE-4AF7-8F59-3C9E66EFBC35}"/>
               </a:ext>
             </a:extLst>
           </p:cNvPr>
@@ -16247,7 +16247,7 @@
           <p:cNvPr id="9" name="TextBox 8">
             <a:extLst xmlns:a="http://schemas.openxmlformats.org/drawingml/2006/main">
               <a:ext uri="{FF2B5EF4-FFF2-40B4-BE49-F238E27FC236}">
-                <a16:creationId xmlns:a16="http://schemas.microsoft.com/office/drawing/2014/main" id="{B1331B94-13E8-40CD-B381-9CC29E9B0605}"/>
+                <a16:creationId xmlns:a16="http://schemas.microsoft.com/office/drawing/2014/main" id="{49692032-B05D-4FA8-BDEF-06D7D38E37FD}"/>
               </a:ext>
             </a:extLst>
           </p:cNvPr>
@@ -16294,7 +16294,7 @@
           <p:cNvPr id="10" name="TextBox 9">
             <a:extLst xmlns:a="http://schemas.openxmlformats.org/drawingml/2006/main">
               <a:ext uri="{FF2B5EF4-FFF2-40B4-BE49-F238E27FC236}">
-                <a16:creationId xmlns:a16="http://schemas.microsoft.com/office/drawing/2014/main" id="{BD6A2339-1055-4196-AEA2-2F095A02B8F6}"/>
+                <a16:creationId xmlns:a16="http://schemas.microsoft.com/office/drawing/2014/main" id="{0019D536-CC5A-4A89-95D1-011B3B600A59}"/>
               </a:ext>
             </a:extLst>
           </p:cNvPr>
@@ -16341,7 +16341,7 @@
           <p:cNvPr id="11" name="Rounded Rectangle 10">
             <a:extLst xmlns:a="http://schemas.openxmlformats.org/drawingml/2006/main">
               <a:ext uri="{FF2B5EF4-FFF2-40B4-BE49-F238E27FC236}">
-                <a16:creationId xmlns:a16="http://schemas.microsoft.com/office/drawing/2014/main" id="{8151FB06-C681-49AA-B158-97F2D593DEE4}"/>
+                <a16:creationId xmlns:a16="http://schemas.microsoft.com/office/drawing/2014/main" id="{4E531204-C7AC-4EF5-B3A1-867AC9CC4278}"/>
               </a:ext>
             </a:extLst>
           </p:cNvPr>
@@ -16398,7 +16398,7 @@
           <p:cNvPr id="12" name="TextBox 11">
             <a:extLst xmlns:a="http://schemas.openxmlformats.org/drawingml/2006/main">
               <a:ext uri="{FF2B5EF4-FFF2-40B4-BE49-F238E27FC236}">
-                <a16:creationId xmlns:a16="http://schemas.microsoft.com/office/drawing/2014/main" id="{E0EB87CC-1A83-4E07-9615-EB52A722A5F3}"/>
+                <a16:creationId xmlns:a16="http://schemas.microsoft.com/office/drawing/2014/main" id="{4EA5F743-46B9-4E86-B461-7529A3A02E28}"/>
               </a:ext>
             </a:extLst>
           </p:cNvPr>
@@ -16445,7 +16445,7 @@
           <p:cNvPr id="13" name="TextBox 12">
             <a:extLst xmlns:a="http://schemas.openxmlformats.org/drawingml/2006/main">
               <a:ext uri="{FF2B5EF4-FFF2-40B4-BE49-F238E27FC236}">
-                <a16:creationId xmlns:a16="http://schemas.microsoft.com/office/drawing/2014/main" id="{4C5A1732-7321-4CDE-8D73-A7439AC8BCF2}"/>
+                <a16:creationId xmlns:a16="http://schemas.microsoft.com/office/drawing/2014/main" id="{BDD9502F-758F-4E45-B4B1-E7D4F3B69E1F}"/>
               </a:ext>
             </a:extLst>
           </p:cNvPr>
@@ -16492,7 +16492,7 @@
           <p:cNvPr id="14" name="Rounded Rectangle 13">
             <a:extLst xmlns:a="http://schemas.openxmlformats.org/drawingml/2006/main">
               <a:ext uri="{FF2B5EF4-FFF2-40B4-BE49-F238E27FC236}">
-                <a16:creationId xmlns:a16="http://schemas.microsoft.com/office/drawing/2014/main" id="{0CCE0830-D6ED-4303-91CE-1E75E3CA7A19}"/>
+                <a16:creationId xmlns:a16="http://schemas.microsoft.com/office/drawing/2014/main" id="{5CCD5475-B008-42BF-B24D-B2981259E306}"/>
               </a:ext>
             </a:extLst>
           </p:cNvPr>
@@ -16549,7 +16549,7 @@
           <p:cNvPr id="15" name="TextBox 14">
             <a:extLst xmlns:a="http://schemas.openxmlformats.org/drawingml/2006/main">
               <a:ext uri="{FF2B5EF4-FFF2-40B4-BE49-F238E27FC236}">
-                <a16:creationId xmlns:a16="http://schemas.microsoft.com/office/drawing/2014/main" id="{FDC423D7-DEF7-40B6-A45D-99BCB8DDAB2B}"/>
+                <a16:creationId xmlns:a16="http://schemas.microsoft.com/office/drawing/2014/main" id="{F5403BF8-8143-4017-9969-D6163E9CD63A}"/>
               </a:ext>
             </a:extLst>
           </p:cNvPr>
@@ -16596,7 +16596,7 @@
           <p:cNvPr id="16" name="TextBox 15">
             <a:extLst xmlns:a="http://schemas.openxmlformats.org/drawingml/2006/main">
               <a:ext uri="{FF2B5EF4-FFF2-40B4-BE49-F238E27FC236}">
-                <a16:creationId xmlns:a16="http://schemas.microsoft.com/office/drawing/2014/main" id="{1E477CB3-65F2-44AB-A226-2D77EC1AE2DE}"/>
+                <a16:creationId xmlns:a16="http://schemas.microsoft.com/office/drawing/2014/main" id="{9074DA08-AD9A-4F58-B605-5E3A0FF0589B}"/>
               </a:ext>
             </a:extLst>
           </p:cNvPr>
@@ -16643,7 +16643,7 @@
           <p:cNvPr id="17" name="Rounded Rectangle 16">
             <a:extLst xmlns:a="http://schemas.openxmlformats.org/drawingml/2006/main">
               <a:ext uri="{FF2B5EF4-FFF2-40B4-BE49-F238E27FC236}">
-                <a16:creationId xmlns:a16="http://schemas.microsoft.com/office/drawing/2014/main" id="{E7991B17-0873-47D1-B20A-F8A653BC91D4}"/>
+                <a16:creationId xmlns:a16="http://schemas.microsoft.com/office/drawing/2014/main" id="{C981BD7E-75C9-44D0-A20C-71BF0F64B2C7}"/>
               </a:ext>
             </a:extLst>
           </p:cNvPr>
@@ -16700,7 +16700,7 @@
           <p:cNvPr id="18" name="TextBox 17">
             <a:extLst xmlns:a="http://schemas.openxmlformats.org/drawingml/2006/main">
               <a:ext uri="{FF2B5EF4-FFF2-40B4-BE49-F238E27FC236}">
-                <a16:creationId xmlns:a16="http://schemas.microsoft.com/office/drawing/2014/main" id="{9AE5F793-0680-418A-A2CD-A654E8DC9D94}"/>
+                <a16:creationId xmlns:a16="http://schemas.microsoft.com/office/drawing/2014/main" id="{558555D1-FAB7-4595-A9B2-2D235A9D8A10}"/>
               </a:ext>
             </a:extLst>
           </p:cNvPr>
@@ -16747,7 +16747,7 @@
           <p:cNvPr id="19" name="TextBox 18">
             <a:extLst xmlns:a="http://schemas.openxmlformats.org/drawingml/2006/main">
               <a:ext uri="{FF2B5EF4-FFF2-40B4-BE49-F238E27FC236}">
-                <a16:creationId xmlns:a16="http://schemas.microsoft.com/office/drawing/2014/main" id="{96A6070B-7725-4984-B271-19BEFE4DE741}"/>
+                <a16:creationId xmlns:a16="http://schemas.microsoft.com/office/drawing/2014/main" id="{08C6ACCF-3392-4014-AF93-FEF8D840F102}"/>
               </a:ext>
             </a:extLst>
           </p:cNvPr>
@@ -16794,7 +16794,7 @@
           <p:cNvPr id="20" name="TextBox 19">
             <a:extLst xmlns:a="http://schemas.openxmlformats.org/drawingml/2006/main">
               <a:ext uri="{FF2B5EF4-FFF2-40B4-BE49-F238E27FC236}">
-                <a16:creationId xmlns:a16="http://schemas.microsoft.com/office/drawing/2014/main" id="{2E843E04-BD18-41B3-A77E-2CD7D4C8A2D9}"/>
+                <a16:creationId xmlns:a16="http://schemas.microsoft.com/office/drawing/2014/main" id="{F2B90B76-E323-4D91-89C1-4AF4B13679A6}"/>
               </a:ext>
             </a:extLst>
           </p:cNvPr>
@@ -16841,7 +16841,7 @@
           <p:cNvPr id="21" name="Rounded Rectangle 20">
             <a:extLst xmlns:a="http://schemas.openxmlformats.org/drawingml/2006/main">
               <a:ext uri="{FF2B5EF4-FFF2-40B4-BE49-F238E27FC236}">
-                <a16:creationId xmlns:a16="http://schemas.microsoft.com/office/drawing/2014/main" id="{2E7EB8B8-6340-4727-94F6-BB7745832DE6}"/>
+                <a16:creationId xmlns:a16="http://schemas.microsoft.com/office/drawing/2014/main" id="{C67B6673-E7BA-438C-99C4-EAC8FC0EE329}"/>
               </a:ext>
             </a:extLst>
           </p:cNvPr>
@@ -16898,7 +16898,7 @@
           <p:cNvPr id="22" name="TextBox 21">
             <a:extLst xmlns:a="http://schemas.openxmlformats.org/drawingml/2006/main">
               <a:ext uri="{FF2B5EF4-FFF2-40B4-BE49-F238E27FC236}">
-                <a16:creationId xmlns:a16="http://schemas.microsoft.com/office/drawing/2014/main" id="{50A363B3-68B0-4F0B-8804-01DE5072399D}"/>
+                <a16:creationId xmlns:a16="http://schemas.microsoft.com/office/drawing/2014/main" id="{0867112B-9436-458F-895E-449689036B55}"/>
               </a:ext>
             </a:extLst>
           </p:cNvPr>
@@ -16945,7 +16945,7 @@
           <p:cNvPr id="23" name="TextBox 22">
             <a:extLst xmlns:a="http://schemas.openxmlformats.org/drawingml/2006/main">
               <a:ext uri="{FF2B5EF4-FFF2-40B4-BE49-F238E27FC236}">
-                <a16:creationId xmlns:a16="http://schemas.microsoft.com/office/drawing/2014/main" id="{EBAA7392-2340-4628-A2A1-5262A2687442}"/>
+                <a16:creationId xmlns:a16="http://schemas.microsoft.com/office/drawing/2014/main" id="{65DD4287-9F1C-47E6-BB8F-B687B9BB3C32}"/>
               </a:ext>
             </a:extLst>
           </p:cNvPr>
@@ -16990,7 +16990,7 @@
     </p:spTree>
     <p:extLst>
       <p:ext uri="{BB962C8B-B14F-4D97-AF65-F5344CB8AC3E}">
-        <p14:creationId xmlns:p14="http://schemas.microsoft.com/office/powerpoint/2010/main" val="2139963025"/>
+        <p14:creationId xmlns:p14="http://schemas.microsoft.com/office/powerpoint/2010/main" val="2106125401"/>
       </p:ext>
     </p:extLst>
   </p:cSld>
@@ -17014,7 +17014,7 @@
           <p:cNvPr id="2" name="TextBox 1">
             <a:extLst xmlns:a="http://schemas.openxmlformats.org/drawingml/2006/main">
               <a:ext uri="{FF2B5EF4-FFF2-40B4-BE49-F238E27FC236}">
-                <a16:creationId xmlns:a16="http://schemas.microsoft.com/office/drawing/2014/main" id="{DB7F539A-FE76-4BB7-9F90-AE075993E713}"/>
+                <a16:creationId xmlns:a16="http://schemas.microsoft.com/office/drawing/2014/main" id="{BAED85D1-3C94-4EFE-982F-4359BBBC1B75}"/>
               </a:ext>
             </a:extLst>
           </p:cNvPr>
@@ -17061,7 +17061,7 @@
           <p:cNvPr id="3" name="TextBox 2">
             <a:extLst xmlns:a="http://schemas.openxmlformats.org/drawingml/2006/main">
               <a:ext uri="{FF2B5EF4-FFF2-40B4-BE49-F238E27FC236}">
-                <a16:creationId xmlns:a16="http://schemas.microsoft.com/office/drawing/2014/main" id="{86444AB3-A1C0-4E05-86D7-EE3926EFAACE}"/>
+                <a16:creationId xmlns:a16="http://schemas.microsoft.com/office/drawing/2014/main" id="{D4DF3FCC-79C1-4258-9B84-19920D1768D5}"/>
               </a:ext>
             </a:extLst>
           </p:cNvPr>
@@ -17108,7 +17108,7 @@
           <p:cNvPr id="4" name="Rectangle 3">
             <a:extLst xmlns:a="http://schemas.openxmlformats.org/drawingml/2006/main">
               <a:ext uri="{FF2B5EF4-FFF2-40B4-BE49-F238E27FC236}">
-                <a16:creationId xmlns:a16="http://schemas.microsoft.com/office/drawing/2014/main" id="{2316DD25-547B-4B80-A79C-F670F6603FE8}"/>
+                <a16:creationId xmlns:a16="http://schemas.microsoft.com/office/drawing/2014/main" id="{7D2A4A30-B96E-4D69-B1B6-86981C093362}"/>
               </a:ext>
             </a:extLst>
           </p:cNvPr>
@@ -17163,7 +17163,7 @@
           <p:cNvPr id="5" name="Rectangle 4">
             <a:extLst xmlns:a="http://schemas.openxmlformats.org/drawingml/2006/main">
               <a:ext uri="{FF2B5EF4-FFF2-40B4-BE49-F238E27FC236}">
-                <a16:creationId xmlns:a16="http://schemas.microsoft.com/office/drawing/2014/main" id="{4E385806-F98F-4E9E-8709-783601673B5B}"/>
+                <a16:creationId xmlns:a16="http://schemas.microsoft.com/office/drawing/2014/main" id="{825CB2E5-8B60-4B73-B59C-B7D4EB0A0BAB}"/>
               </a:ext>
             </a:extLst>
           </p:cNvPr>
@@ -17218,7 +17218,7 @@
           <p:cNvPr id="6" name="TextBox 5">
             <a:extLst xmlns:a="http://schemas.openxmlformats.org/drawingml/2006/main">
               <a:ext uri="{FF2B5EF4-FFF2-40B4-BE49-F238E27FC236}">
-                <a16:creationId xmlns:a16="http://schemas.microsoft.com/office/drawing/2014/main" id="{F0620C04-13E1-467B-8A00-F0F57BCF838A}"/>
+                <a16:creationId xmlns:a16="http://schemas.microsoft.com/office/drawing/2014/main" id="{01628151-AB61-4910-B70B-B94F61F5E354}"/>
               </a:ext>
             </a:extLst>
           </p:cNvPr>
@@ -17255,7 +17255,7 @@
                 <a:ea typeface="Aptos"/>
                 <a:cs typeface="Aptos"/>
               </a:rPr>
-              <a:t>Julkinen riippumaton evidenssikooste · 2026.07.24-19 · 2026-07-24 · Lähteet: Market-values modelReadiness, donorProtocol ja donorCandidates</a:t>
+              <a:t>Julkinen riippumaton evidenssikooste · 2026.07.24-20 · 2026-07-24 · Lähteet: Market-values modelReadiness, donorProtocol ja donorCandidates</a:t>
             </a:r>
           </a:p>
         </p:txBody>
@@ -17265,7 +17265,7 @@
           <p:cNvPr id="7" name="TextBox 6">
             <a:extLst xmlns:a="http://schemas.openxmlformats.org/drawingml/2006/main">
               <a:ext uri="{FF2B5EF4-FFF2-40B4-BE49-F238E27FC236}">
-                <a16:creationId xmlns:a16="http://schemas.microsoft.com/office/drawing/2014/main" id="{9C58FC48-0F6B-439A-B370-D0D7DC3F9039}"/>
+                <a16:creationId xmlns:a16="http://schemas.microsoft.com/office/drawing/2014/main" id="{E3CE3B78-20E1-44EC-9BC9-7F45EE56B1C2}"/>
               </a:ext>
             </a:extLst>
           </p:cNvPr>
@@ -17312,7 +17312,7 @@
           <p:cNvPr id="8" name="TextBox 7">
             <a:extLst xmlns:a="http://schemas.openxmlformats.org/drawingml/2006/main">
               <a:ext uri="{FF2B5EF4-FFF2-40B4-BE49-F238E27FC236}">
-                <a16:creationId xmlns:a16="http://schemas.microsoft.com/office/drawing/2014/main" id="{FEC2840E-4F86-4952-A29A-C6953B273AFB}"/>
+                <a16:creationId xmlns:a16="http://schemas.microsoft.com/office/drawing/2014/main" id="{FB4D1006-BF82-43FB-B12A-998572DB582E}"/>
               </a:ext>
             </a:extLst>
           </p:cNvPr>
@@ -17359,7 +17359,7 @@
           <p:cNvPr id="9" name="TextBox 8">
             <a:extLst xmlns:a="http://schemas.openxmlformats.org/drawingml/2006/main">
               <a:ext uri="{FF2B5EF4-FFF2-40B4-BE49-F238E27FC236}">
-                <a16:creationId xmlns:a16="http://schemas.microsoft.com/office/drawing/2014/main" id="{F6B2B394-AA48-4F01-9AEF-1F8B4B4B892A}"/>
+                <a16:creationId xmlns:a16="http://schemas.microsoft.com/office/drawing/2014/main" id="{9BAC7AB2-1C48-44FF-8DB6-C71E7AF2767E}"/>
               </a:ext>
             </a:extLst>
           </p:cNvPr>
@@ -17456,7 +17456,7 @@
           <p:cNvPr id="10" name="Rounded Rectangle 9">
             <a:extLst xmlns:a="http://schemas.openxmlformats.org/drawingml/2006/main">
               <a:ext uri="{FF2B5EF4-FFF2-40B4-BE49-F238E27FC236}">
-                <a16:creationId xmlns:a16="http://schemas.microsoft.com/office/drawing/2014/main" id="{500BE90F-F88B-40AF-969B-BED533A7EDBE}"/>
+                <a16:creationId xmlns:a16="http://schemas.microsoft.com/office/drawing/2014/main" id="{2E75376B-A139-4A3E-B811-DB5AD3F88F91}"/>
               </a:ext>
             </a:extLst>
           </p:cNvPr>
@@ -17513,7 +17513,7 @@
           <p:cNvPr id="11" name="TextBox 10">
             <a:extLst xmlns:a="http://schemas.openxmlformats.org/drawingml/2006/main">
               <a:ext uri="{FF2B5EF4-FFF2-40B4-BE49-F238E27FC236}">
-                <a16:creationId xmlns:a16="http://schemas.microsoft.com/office/drawing/2014/main" id="{1B12D713-5ED5-4F27-AB2E-EB97F6C2628B}"/>
+                <a16:creationId xmlns:a16="http://schemas.microsoft.com/office/drawing/2014/main" id="{B1A5854B-67A7-4FC3-97A1-A5CDDF70BEDD}"/>
               </a:ext>
             </a:extLst>
           </p:cNvPr>
@@ -17560,7 +17560,7 @@
           <p:cNvPr id="12" name="TextBox 11">
             <a:extLst xmlns:a="http://schemas.openxmlformats.org/drawingml/2006/main">
               <a:ext uri="{FF2B5EF4-FFF2-40B4-BE49-F238E27FC236}">
-                <a16:creationId xmlns:a16="http://schemas.microsoft.com/office/drawing/2014/main" id="{E0CC1F48-DCDB-4AAB-8E48-DFF8D410DE94}"/>
+                <a16:creationId xmlns:a16="http://schemas.microsoft.com/office/drawing/2014/main" id="{10F8F236-2D83-4044-924B-6BC9ED4B7B69}"/>
               </a:ext>
             </a:extLst>
           </p:cNvPr>
@@ -17605,7 +17605,7 @@
     </p:spTree>
     <p:extLst>
       <p:ext uri="{BB962C8B-B14F-4D97-AF65-F5344CB8AC3E}">
-        <p14:creationId xmlns:p14="http://schemas.microsoft.com/office/powerpoint/2010/main" val="383079312"/>
+        <p14:creationId xmlns:p14="http://schemas.microsoft.com/office/powerpoint/2010/main" val="746678485"/>
       </p:ext>
     </p:extLst>
   </p:cSld>
@@ -17629,7 +17629,7 @@
           <p:cNvPr id="2" name="TextBox 1">
             <a:extLst xmlns:a="http://schemas.openxmlformats.org/drawingml/2006/main">
               <a:ext uri="{FF2B5EF4-FFF2-40B4-BE49-F238E27FC236}">
-                <a16:creationId xmlns:a16="http://schemas.microsoft.com/office/drawing/2014/main" id="{77F327A0-2E00-4F19-A4D8-A40EFE5B1BC2}"/>
+                <a16:creationId xmlns:a16="http://schemas.microsoft.com/office/drawing/2014/main" id="{0B30552D-FAA4-4458-AD70-F963DE476C1A}"/>
               </a:ext>
             </a:extLst>
           </p:cNvPr>
@@ -17676,7 +17676,7 @@
           <p:cNvPr id="3" name="TextBox 2">
             <a:extLst xmlns:a="http://schemas.openxmlformats.org/drawingml/2006/main">
               <a:ext uri="{FF2B5EF4-FFF2-40B4-BE49-F238E27FC236}">
-                <a16:creationId xmlns:a16="http://schemas.microsoft.com/office/drawing/2014/main" id="{DCBC7872-CD69-4085-99A1-9E627B248ECE}"/>
+                <a16:creationId xmlns:a16="http://schemas.microsoft.com/office/drawing/2014/main" id="{D008B3D3-6BA2-46F3-BBA9-331AF7ADF783}"/>
               </a:ext>
             </a:extLst>
           </p:cNvPr>
@@ -17723,7 +17723,7 @@
           <p:cNvPr id="4" name="Rectangle 3">
             <a:extLst xmlns:a="http://schemas.openxmlformats.org/drawingml/2006/main">
               <a:ext uri="{FF2B5EF4-FFF2-40B4-BE49-F238E27FC236}">
-                <a16:creationId xmlns:a16="http://schemas.microsoft.com/office/drawing/2014/main" id="{DD96E165-E579-47F2-80C2-12943F53A76B}"/>
+                <a16:creationId xmlns:a16="http://schemas.microsoft.com/office/drawing/2014/main" id="{391C3E09-E893-4A7E-BA93-08DEC3BDB4B9}"/>
               </a:ext>
             </a:extLst>
           </p:cNvPr>
@@ -17778,7 +17778,7 @@
           <p:cNvPr id="5" name="Rectangle 4">
             <a:extLst xmlns:a="http://schemas.openxmlformats.org/drawingml/2006/main">
               <a:ext uri="{FF2B5EF4-FFF2-40B4-BE49-F238E27FC236}">
-                <a16:creationId xmlns:a16="http://schemas.microsoft.com/office/drawing/2014/main" id="{935B6F4D-DD30-4A92-81FA-AD856DDD6FCA}"/>
+                <a16:creationId xmlns:a16="http://schemas.microsoft.com/office/drawing/2014/main" id="{CD6A8457-39EC-4531-A913-5201BB64E965}"/>
               </a:ext>
             </a:extLst>
           </p:cNvPr>
@@ -17833,7 +17833,7 @@
           <p:cNvPr id="6" name="TextBox 5">
             <a:extLst xmlns:a="http://schemas.openxmlformats.org/drawingml/2006/main">
               <a:ext uri="{FF2B5EF4-FFF2-40B4-BE49-F238E27FC236}">
-                <a16:creationId xmlns:a16="http://schemas.microsoft.com/office/drawing/2014/main" id="{F2CD20F8-C3D1-4659-86BF-68BC0ACB0885}"/>
+                <a16:creationId xmlns:a16="http://schemas.microsoft.com/office/drawing/2014/main" id="{FF2283A1-CD47-4C57-909E-289FB1F921D6}"/>
               </a:ext>
             </a:extLst>
           </p:cNvPr>
@@ -17870,7 +17870,7 @@
                 <a:ea typeface="Aptos"/>
                 <a:cs typeface="Aptos"/>
               </a:rPr>
-              <a:t>Julkinen riippumaton evidenssikooste · 2026.07.24-19 · 2026-07-24 · Lähteet: WIPO valuation; Evidence Register</a:t>
+              <a:t>Julkinen riippumaton evidenssikooste · 2026.07.24-20 · 2026-07-24 · Lähteet: WIPO valuation; Evidence Register</a:t>
             </a:r>
           </a:p>
         </p:txBody>
@@ -17880,7 +17880,7 @@
           <p:cNvPr id="7" name="TextBox 6">
             <a:extLst xmlns:a="http://schemas.openxmlformats.org/drawingml/2006/main">
               <a:ext uri="{FF2B5EF4-FFF2-40B4-BE49-F238E27FC236}">
-                <a16:creationId xmlns:a16="http://schemas.microsoft.com/office/drawing/2014/main" id="{604DC9FE-B2C9-487A-958A-ADDAD0FF4919}"/>
+                <a16:creationId xmlns:a16="http://schemas.microsoft.com/office/drawing/2014/main" id="{0B318A70-F753-4BBE-9653-06F16368A985}"/>
               </a:ext>
             </a:extLst>
           </p:cNvPr>
@@ -18450,7 +18450,7 @@
           <p:cNvPr id="9" name="TextBox 8">
             <a:extLst xmlns:a="http://schemas.openxmlformats.org/drawingml/2006/main">
               <a:ext uri="{FF2B5EF4-FFF2-40B4-BE49-F238E27FC236}">
-                <a16:creationId xmlns:a16="http://schemas.microsoft.com/office/drawing/2014/main" id="{005D4707-E220-4C01-B1F0-CEF0D9F01368}"/>
+                <a16:creationId xmlns:a16="http://schemas.microsoft.com/office/drawing/2014/main" id="{C47E7813-8875-430C-AC35-53470FC110CE}"/>
               </a:ext>
             </a:extLst>
           </p:cNvPr>
@@ -18495,7 +18495,7 @@
     </p:spTree>
     <p:extLst>
       <p:ext uri="{BB962C8B-B14F-4D97-AF65-F5344CB8AC3E}">
-        <p14:creationId xmlns:p14="http://schemas.microsoft.com/office/powerpoint/2010/main" val="2140578604"/>
+        <p14:creationId xmlns:p14="http://schemas.microsoft.com/office/powerpoint/2010/main" val="1969951559"/>
       </p:ext>
     </p:extLst>
   </p:cSld>
@@ -18519,7 +18519,7 @@
           <p:cNvPr id="2" name="TextBox 1">
             <a:extLst xmlns:a="http://schemas.openxmlformats.org/drawingml/2006/main">
               <a:ext uri="{FF2B5EF4-FFF2-40B4-BE49-F238E27FC236}">
-                <a16:creationId xmlns:a16="http://schemas.microsoft.com/office/drawing/2014/main" id="{4B0A5F6A-C0B4-47C1-B2E3-DE7F2F424808}"/>
+                <a16:creationId xmlns:a16="http://schemas.microsoft.com/office/drawing/2014/main" id="{B89E0AD3-894A-47F9-85AD-500440E0D9D8}"/>
               </a:ext>
             </a:extLst>
           </p:cNvPr>
@@ -18566,7 +18566,7 @@
           <p:cNvPr id="3" name="TextBox 2">
             <a:extLst xmlns:a="http://schemas.openxmlformats.org/drawingml/2006/main">
               <a:ext uri="{FF2B5EF4-FFF2-40B4-BE49-F238E27FC236}">
-                <a16:creationId xmlns:a16="http://schemas.microsoft.com/office/drawing/2014/main" id="{797ABE53-B0FF-4C60-9128-5616A68DBA99}"/>
+                <a16:creationId xmlns:a16="http://schemas.microsoft.com/office/drawing/2014/main" id="{1A94473E-8308-4E69-AC72-679602EA9C49}"/>
               </a:ext>
             </a:extLst>
           </p:cNvPr>
@@ -18613,7 +18613,7 @@
           <p:cNvPr id="4" name="Rectangle 3">
             <a:extLst xmlns:a="http://schemas.openxmlformats.org/drawingml/2006/main">
               <a:ext uri="{FF2B5EF4-FFF2-40B4-BE49-F238E27FC236}">
-                <a16:creationId xmlns:a16="http://schemas.microsoft.com/office/drawing/2014/main" id="{8A0E8A60-B698-4C86-928A-462E5DC9B9AE}"/>
+                <a16:creationId xmlns:a16="http://schemas.microsoft.com/office/drawing/2014/main" id="{AA66C874-B56D-4B0D-963C-07E87E10B87B}"/>
               </a:ext>
             </a:extLst>
           </p:cNvPr>
@@ -18668,7 +18668,7 @@
           <p:cNvPr id="5" name="Rectangle 4">
             <a:extLst xmlns:a="http://schemas.openxmlformats.org/drawingml/2006/main">
               <a:ext uri="{FF2B5EF4-FFF2-40B4-BE49-F238E27FC236}">
-                <a16:creationId xmlns:a16="http://schemas.microsoft.com/office/drawing/2014/main" id="{18F403DF-9122-400C-89A5-E138281E8D78}"/>
+                <a16:creationId xmlns:a16="http://schemas.microsoft.com/office/drawing/2014/main" id="{4CE2BBD6-2DC1-44B2-948A-38F59257F306}"/>
               </a:ext>
             </a:extLst>
           </p:cNvPr>
@@ -18723,7 +18723,7 @@
           <p:cNvPr id="6" name="TextBox 5">
             <a:extLst xmlns:a="http://schemas.openxmlformats.org/drawingml/2006/main">
               <a:ext uri="{FF2B5EF4-FFF2-40B4-BE49-F238E27FC236}">
-                <a16:creationId xmlns:a16="http://schemas.microsoft.com/office/drawing/2014/main" id="{556534B0-977E-4AED-B907-3CD411F04317}"/>
+                <a16:creationId xmlns:a16="http://schemas.microsoft.com/office/drawing/2014/main" id="{C017C405-0791-467F-AEA2-538C9954FCAE}"/>
               </a:ext>
             </a:extLst>
           </p:cNvPr>
@@ -18760,7 +18760,7 @@
                 <a:ea typeface="Aptos"/>
                 <a:cs typeface="Aptos"/>
               </a:rPr>
-              <a:t>Julkinen riippumaton evidenssikooste · 2026.07.24-19 · 2026-07-24 · Lähteet: EPO; Saksa — viralliset tuomiot; WIPO</a:t>
+              <a:t>Julkinen riippumaton evidenssikooste · 2026.07.24-20 · 2026-07-24 · Lähteet: EPO; Saksa — viralliset tuomiot; WIPO</a:t>
             </a:r>
           </a:p>
         </p:txBody>
@@ -18770,7 +18770,7 @@
           <p:cNvPr id="7" name="TextBox 6">
             <a:extLst xmlns:a="http://schemas.openxmlformats.org/drawingml/2006/main">
               <a:ext uri="{FF2B5EF4-FFF2-40B4-BE49-F238E27FC236}">
-                <a16:creationId xmlns:a16="http://schemas.microsoft.com/office/drawing/2014/main" id="{184848A1-CFE8-4FEE-98D9-830FAC2415E9}"/>
+                <a16:creationId xmlns:a16="http://schemas.microsoft.com/office/drawing/2014/main" id="{6B5032B0-1827-4E00-A744-CF2247466A53}"/>
               </a:ext>
             </a:extLst>
           </p:cNvPr>
@@ -18817,7 +18817,7 @@
           <p:cNvPr id="8" name="TextBox 7">
             <a:extLst xmlns:a="http://schemas.openxmlformats.org/drawingml/2006/main">
               <a:ext uri="{FF2B5EF4-FFF2-40B4-BE49-F238E27FC236}">
-                <a16:creationId xmlns:a16="http://schemas.microsoft.com/office/drawing/2014/main" id="{FE18A172-DA83-45FC-A1DA-1A6F557F9579}"/>
+                <a16:creationId xmlns:a16="http://schemas.microsoft.com/office/drawing/2014/main" id="{4BBB6EBE-9035-4A3C-9237-4CA258E76E80}"/>
               </a:ext>
             </a:extLst>
           </p:cNvPr>
@@ -18864,7 +18864,7 @@
           <p:cNvPr id="9" name="TextBox 8">
             <a:extLst xmlns:a="http://schemas.openxmlformats.org/drawingml/2006/main">
               <a:ext uri="{FF2B5EF4-FFF2-40B4-BE49-F238E27FC236}">
-                <a16:creationId xmlns:a16="http://schemas.microsoft.com/office/drawing/2014/main" id="{64976E51-E49A-4544-A84B-8B28906EE392}"/>
+                <a16:creationId xmlns:a16="http://schemas.microsoft.com/office/drawing/2014/main" id="{B4174022-DBBD-4AF8-83F9-C2E8E3573BC3}"/>
               </a:ext>
             </a:extLst>
           </p:cNvPr>
@@ -18961,7 +18961,7 @@
           <p:cNvPr id="10" name="Rounded Rectangle 9">
             <a:extLst xmlns:a="http://schemas.openxmlformats.org/drawingml/2006/main">
               <a:ext uri="{FF2B5EF4-FFF2-40B4-BE49-F238E27FC236}">
-                <a16:creationId xmlns:a16="http://schemas.microsoft.com/office/drawing/2014/main" id="{DA935AC4-0558-4BBA-92A7-3F99E30B8CF9}"/>
+                <a16:creationId xmlns:a16="http://schemas.microsoft.com/office/drawing/2014/main" id="{EFB036E4-1A8D-44BB-88DC-B01F67473DDC}"/>
               </a:ext>
             </a:extLst>
           </p:cNvPr>
@@ -19018,7 +19018,7 @@
           <p:cNvPr id="11" name="TextBox 10">
             <a:extLst xmlns:a="http://schemas.openxmlformats.org/drawingml/2006/main">
               <a:ext uri="{FF2B5EF4-FFF2-40B4-BE49-F238E27FC236}">
-                <a16:creationId xmlns:a16="http://schemas.microsoft.com/office/drawing/2014/main" id="{29CA7040-2FEF-4346-82C9-A0818AB9698B}"/>
+                <a16:creationId xmlns:a16="http://schemas.microsoft.com/office/drawing/2014/main" id="{6A3D8F61-9408-4C4E-B5B9-2B04D8AB8A04}"/>
               </a:ext>
             </a:extLst>
           </p:cNvPr>
@@ -19065,7 +19065,7 @@
           <p:cNvPr id="12" name="TextBox 11">
             <a:extLst xmlns:a="http://schemas.openxmlformats.org/drawingml/2006/main">
               <a:ext uri="{FF2B5EF4-FFF2-40B4-BE49-F238E27FC236}">
-                <a16:creationId xmlns:a16="http://schemas.microsoft.com/office/drawing/2014/main" id="{09434903-4A76-497D-8933-600C7CA4A1C6}"/>
+                <a16:creationId xmlns:a16="http://schemas.microsoft.com/office/drawing/2014/main" id="{CE5CC4A8-C047-4B14-9F4C-5DFCBF9DEBB1}"/>
               </a:ext>
             </a:extLst>
           </p:cNvPr>
@@ -19110,7 +19110,7 @@
     </p:spTree>
     <p:extLst>
       <p:ext uri="{BB962C8B-B14F-4D97-AF65-F5344CB8AC3E}">
-        <p14:creationId xmlns:p14="http://schemas.microsoft.com/office/powerpoint/2010/main" val="1694506201"/>
+        <p14:creationId xmlns:p14="http://schemas.microsoft.com/office/powerpoint/2010/main" val="1883177472"/>
       </p:ext>
     </p:extLst>
   </p:cSld>
@@ -19134,7 +19134,7 @@
           <p:cNvPr id="2" name="TextBox 1">
             <a:extLst xmlns:a="http://schemas.openxmlformats.org/drawingml/2006/main">
               <a:ext uri="{FF2B5EF4-FFF2-40B4-BE49-F238E27FC236}">
-                <a16:creationId xmlns:a16="http://schemas.microsoft.com/office/drawing/2014/main" id="{D4F05FD6-706E-4C03-9A83-112124C321DE}"/>
+                <a16:creationId xmlns:a16="http://schemas.microsoft.com/office/drawing/2014/main" id="{75D7F0CF-1B7A-45CC-91EB-3D20C5FB5FB6}"/>
               </a:ext>
             </a:extLst>
           </p:cNvPr>
@@ -19181,7 +19181,7 @@
           <p:cNvPr id="3" name="TextBox 2">
             <a:extLst xmlns:a="http://schemas.openxmlformats.org/drawingml/2006/main">
               <a:ext uri="{FF2B5EF4-FFF2-40B4-BE49-F238E27FC236}">
-                <a16:creationId xmlns:a16="http://schemas.microsoft.com/office/drawing/2014/main" id="{93D66E4F-2109-42BA-BBED-4B8C02BB756D}"/>
+                <a16:creationId xmlns:a16="http://schemas.microsoft.com/office/drawing/2014/main" id="{460EE18F-30AF-4C26-A035-405B4F943AFC}"/>
               </a:ext>
             </a:extLst>
           </p:cNvPr>
@@ -19228,7 +19228,7 @@
           <p:cNvPr id="4" name="Rectangle 3">
             <a:extLst xmlns:a="http://schemas.openxmlformats.org/drawingml/2006/main">
               <a:ext uri="{FF2B5EF4-FFF2-40B4-BE49-F238E27FC236}">
-                <a16:creationId xmlns:a16="http://schemas.microsoft.com/office/drawing/2014/main" id="{0E127EE5-3474-40D3-BB65-B6ACAFCEB2FA}"/>
+                <a16:creationId xmlns:a16="http://schemas.microsoft.com/office/drawing/2014/main" id="{59DDA4AC-6EE4-408A-83B9-97A5AF6D8573}"/>
               </a:ext>
             </a:extLst>
           </p:cNvPr>
@@ -19283,7 +19283,7 @@
           <p:cNvPr id="5" name="Rectangle 4">
             <a:extLst xmlns:a="http://schemas.openxmlformats.org/drawingml/2006/main">
               <a:ext uri="{FF2B5EF4-FFF2-40B4-BE49-F238E27FC236}">
-                <a16:creationId xmlns:a16="http://schemas.microsoft.com/office/drawing/2014/main" id="{5ECCD9A8-260F-421F-A8CA-BDF9B4A7F888}"/>
+                <a16:creationId xmlns:a16="http://schemas.microsoft.com/office/drawing/2014/main" id="{5D09F58A-62A4-43E0-B62A-76697D0D194D}"/>
               </a:ext>
             </a:extLst>
           </p:cNvPr>
@@ -19338,7 +19338,7 @@
           <p:cNvPr id="6" name="TextBox 5">
             <a:extLst xmlns:a="http://schemas.openxmlformats.org/drawingml/2006/main">
               <a:ext uri="{FF2B5EF4-FFF2-40B4-BE49-F238E27FC236}">
-                <a16:creationId xmlns:a16="http://schemas.microsoft.com/office/drawing/2014/main" id="{07B8B7EC-24B4-4D20-9599-5724D0BE8B61}"/>
+                <a16:creationId xmlns:a16="http://schemas.microsoft.com/office/drawing/2014/main" id="{EE5FAE66-3994-4D0C-BE76-55081E40F0C0}"/>
               </a:ext>
             </a:extLst>
           </p:cNvPr>
@@ -19375,7 +19375,7 @@
                 <a:ea typeface="Aptos"/>
                 <a:cs typeface="Aptos"/>
               </a:rPr>
-              <a:t>Julkinen riippumaton evidenssikooste · 2026.07.24-19 · 2026-07-24 · Lähteet: WIPO licensing; IP Finance</a:t>
+              <a:t>Julkinen riippumaton evidenssikooste · 2026.07.24-20 · 2026-07-24 · Lähteet: WIPO licensing; IP Finance</a:t>
             </a:r>
           </a:p>
         </p:txBody>
@@ -19385,7 +19385,7 @@
           <p:cNvPr id="7" name="TextBox 6">
             <a:extLst xmlns:a="http://schemas.openxmlformats.org/drawingml/2006/main">
               <a:ext uri="{FF2B5EF4-FFF2-40B4-BE49-F238E27FC236}">
-                <a16:creationId xmlns:a16="http://schemas.microsoft.com/office/drawing/2014/main" id="{983F1872-366A-48E7-96B0-D51212F167E7}"/>
+                <a16:creationId xmlns:a16="http://schemas.microsoft.com/office/drawing/2014/main" id="{84250408-4BA5-4FA6-87FA-C28A6A3BE797}"/>
               </a:ext>
             </a:extLst>
           </p:cNvPr>
@@ -19432,7 +19432,7 @@
           <p:cNvPr id="8" name="TextBox 7">
             <a:extLst xmlns:a="http://schemas.openxmlformats.org/drawingml/2006/main">
               <a:ext uri="{FF2B5EF4-FFF2-40B4-BE49-F238E27FC236}">
-                <a16:creationId xmlns:a16="http://schemas.microsoft.com/office/drawing/2014/main" id="{8C528B18-DD14-4E7E-9B7F-226D592C3D85}"/>
+                <a16:creationId xmlns:a16="http://schemas.microsoft.com/office/drawing/2014/main" id="{25E9415C-8A34-4DA8-949A-2F17461FF5A2}"/>
               </a:ext>
             </a:extLst>
           </p:cNvPr>
@@ -19479,7 +19479,7 @@
           <p:cNvPr id="9" name="TextBox 8">
             <a:extLst xmlns:a="http://schemas.openxmlformats.org/drawingml/2006/main">
               <a:ext uri="{FF2B5EF4-FFF2-40B4-BE49-F238E27FC236}">
-                <a16:creationId xmlns:a16="http://schemas.microsoft.com/office/drawing/2014/main" id="{C537561A-927A-4816-AE37-ACC78DFCA517}"/>
+                <a16:creationId xmlns:a16="http://schemas.microsoft.com/office/drawing/2014/main" id="{2C943609-A9F6-4479-8843-F13E84FD1453}"/>
               </a:ext>
             </a:extLst>
           </p:cNvPr>
@@ -19576,7 +19576,7 @@
           <p:cNvPr id="10" name="Rounded Rectangle 9">
             <a:extLst xmlns:a="http://schemas.openxmlformats.org/drawingml/2006/main">
               <a:ext uri="{FF2B5EF4-FFF2-40B4-BE49-F238E27FC236}">
-                <a16:creationId xmlns:a16="http://schemas.microsoft.com/office/drawing/2014/main" id="{E668767E-AF78-47E6-93A8-35945C6BD00D}"/>
+                <a16:creationId xmlns:a16="http://schemas.microsoft.com/office/drawing/2014/main" id="{EA245A79-24E7-4AA3-BCA9-193FFD0B4858}"/>
               </a:ext>
             </a:extLst>
           </p:cNvPr>
@@ -19633,7 +19633,7 @@
           <p:cNvPr id="11" name="TextBox 10">
             <a:extLst xmlns:a="http://schemas.openxmlformats.org/drawingml/2006/main">
               <a:ext uri="{FF2B5EF4-FFF2-40B4-BE49-F238E27FC236}">
-                <a16:creationId xmlns:a16="http://schemas.microsoft.com/office/drawing/2014/main" id="{AD47EEF4-39F7-4342-A643-23EC67882AE9}"/>
+                <a16:creationId xmlns:a16="http://schemas.microsoft.com/office/drawing/2014/main" id="{965EC082-3EC2-4F37-BCA8-AAF9319A8B2D}"/>
               </a:ext>
             </a:extLst>
           </p:cNvPr>
@@ -19680,7 +19680,7 @@
           <p:cNvPr id="12" name="TextBox 11">
             <a:extLst xmlns:a="http://schemas.openxmlformats.org/drawingml/2006/main">
               <a:ext uri="{FF2B5EF4-FFF2-40B4-BE49-F238E27FC236}">
-                <a16:creationId xmlns:a16="http://schemas.microsoft.com/office/drawing/2014/main" id="{700F3A12-6A28-41C8-B556-52658E4104BB}"/>
+                <a16:creationId xmlns:a16="http://schemas.microsoft.com/office/drawing/2014/main" id="{0849AFE7-677B-4E35-A149-12185DE493E2}"/>
               </a:ext>
             </a:extLst>
           </p:cNvPr>
@@ -19725,7 +19725,7 @@
     </p:spTree>
     <p:extLst>
       <p:ext uri="{BB962C8B-B14F-4D97-AF65-F5344CB8AC3E}">
-        <p14:creationId xmlns:p14="http://schemas.microsoft.com/office/powerpoint/2010/main" val="1537991781"/>
+        <p14:creationId xmlns:p14="http://schemas.microsoft.com/office/powerpoint/2010/main" val="1345040658"/>
       </p:ext>
     </p:extLst>
   </p:cSld>
@@ -19749,7 +19749,7 @@
           <p:cNvPr id="2" name="TextBox 1">
             <a:extLst xmlns:a="http://schemas.openxmlformats.org/drawingml/2006/main">
               <a:ext uri="{FF2B5EF4-FFF2-40B4-BE49-F238E27FC236}">
-                <a16:creationId xmlns:a16="http://schemas.microsoft.com/office/drawing/2014/main" id="{F491AB73-78F4-42C6-A16B-D3E7B1CFCD45}"/>
+                <a16:creationId xmlns:a16="http://schemas.microsoft.com/office/drawing/2014/main" id="{848AE8F0-200A-4122-BCE6-4E02B878E980}"/>
               </a:ext>
             </a:extLst>
           </p:cNvPr>
@@ -19796,7 +19796,7 @@
           <p:cNvPr id="3" name="TextBox 2">
             <a:extLst xmlns:a="http://schemas.openxmlformats.org/drawingml/2006/main">
               <a:ext uri="{FF2B5EF4-FFF2-40B4-BE49-F238E27FC236}">
-                <a16:creationId xmlns:a16="http://schemas.microsoft.com/office/drawing/2014/main" id="{1408358D-906E-4DDC-8BB5-252A96EE6E48}"/>
+                <a16:creationId xmlns:a16="http://schemas.microsoft.com/office/drawing/2014/main" id="{0C1F66D1-DEA6-43BB-B627-6F2F7ACA4C79}"/>
               </a:ext>
             </a:extLst>
           </p:cNvPr>
@@ -19843,7 +19843,7 @@
           <p:cNvPr id="4" name="Rectangle 3">
             <a:extLst xmlns:a="http://schemas.openxmlformats.org/drawingml/2006/main">
               <a:ext uri="{FF2B5EF4-FFF2-40B4-BE49-F238E27FC236}">
-                <a16:creationId xmlns:a16="http://schemas.microsoft.com/office/drawing/2014/main" id="{18EC0822-7D97-4380-9C5E-5205060A2512}"/>
+                <a16:creationId xmlns:a16="http://schemas.microsoft.com/office/drawing/2014/main" id="{7E2A1241-437A-4FF9-8F85-9F562FB61854}"/>
               </a:ext>
             </a:extLst>
           </p:cNvPr>
@@ -19898,7 +19898,7 @@
           <p:cNvPr id="5" name="Rectangle 4">
             <a:extLst xmlns:a="http://schemas.openxmlformats.org/drawingml/2006/main">
               <a:ext uri="{FF2B5EF4-FFF2-40B4-BE49-F238E27FC236}">
-                <a16:creationId xmlns:a16="http://schemas.microsoft.com/office/drawing/2014/main" id="{7F6EBA0D-4EF4-4E49-9647-ABDC7EA8680C}"/>
+                <a16:creationId xmlns:a16="http://schemas.microsoft.com/office/drawing/2014/main" id="{33CBED44-8146-4E3A-9C73-C644E1D26E17}"/>
               </a:ext>
             </a:extLst>
           </p:cNvPr>
@@ -19953,7 +19953,7 @@
           <p:cNvPr id="6" name="TextBox 5">
             <a:extLst xmlns:a="http://schemas.openxmlformats.org/drawingml/2006/main">
               <a:ext uri="{FF2B5EF4-FFF2-40B4-BE49-F238E27FC236}">
-                <a16:creationId xmlns:a16="http://schemas.microsoft.com/office/drawing/2014/main" id="{6E5530F5-0C07-4DBA-B9B5-E7E3137FC5B5}"/>
+                <a16:creationId xmlns:a16="http://schemas.microsoft.com/office/drawing/2014/main" id="{DD0A72A0-D270-403F-9089-17E86AB13660}"/>
               </a:ext>
             </a:extLst>
           </p:cNvPr>
@@ -19990,7 +19990,7 @@
                 <a:ea typeface="Aptos"/>
                 <a:cs typeface="Aptos"/>
               </a:rPr>
-              <a:t>Julkinen riippumaton evidenssikooste · 2026.07.24-19 · 2026-07-24 · Lähteet: Evidence Register; EPO</a:t>
+              <a:t>Julkinen riippumaton evidenssikooste · 2026.07.24-20 · 2026-07-24 · Lähteet: Evidence Register; EPO</a:t>
             </a:r>
           </a:p>
         </p:txBody>
@@ -20000,7 +20000,7 @@
           <p:cNvPr id="7" name="TextBox 6">
             <a:extLst xmlns:a="http://schemas.openxmlformats.org/drawingml/2006/main">
               <a:ext uri="{FF2B5EF4-FFF2-40B4-BE49-F238E27FC236}">
-                <a16:creationId xmlns:a16="http://schemas.microsoft.com/office/drawing/2014/main" id="{AD932F5E-19E3-4399-BE01-56CE9D9552AA}"/>
+                <a16:creationId xmlns:a16="http://schemas.microsoft.com/office/drawing/2014/main" id="{39BAA597-A88E-4A2D-8905-BA2248442020}"/>
               </a:ext>
             </a:extLst>
           </p:cNvPr>
@@ -20487,7 +20487,7 @@
           <p:cNvPr id="9" name="TextBox 8">
             <a:extLst xmlns:a="http://schemas.openxmlformats.org/drawingml/2006/main">
               <a:ext uri="{FF2B5EF4-FFF2-40B4-BE49-F238E27FC236}">
-                <a16:creationId xmlns:a16="http://schemas.microsoft.com/office/drawing/2014/main" id="{26B30E72-951F-4D7A-AB56-C9F4EF6581F0}"/>
+                <a16:creationId xmlns:a16="http://schemas.microsoft.com/office/drawing/2014/main" id="{983A8224-F368-4EA5-80E1-F163970DBE5C}"/>
               </a:ext>
             </a:extLst>
           </p:cNvPr>
@@ -20532,7 +20532,7 @@
     </p:spTree>
     <p:extLst>
       <p:ext uri="{BB962C8B-B14F-4D97-AF65-F5344CB8AC3E}">
-        <p14:creationId xmlns:p14="http://schemas.microsoft.com/office/powerpoint/2010/main" val="869614383"/>
+        <p14:creationId xmlns:p14="http://schemas.microsoft.com/office/powerpoint/2010/main" val="907035686"/>
       </p:ext>
     </p:extLst>
   </p:cSld>
@@ -20556,7 +20556,7 @@
           <p:cNvPr id="2" name="TextBox 1">
             <a:extLst xmlns:a="http://schemas.openxmlformats.org/drawingml/2006/main">
               <a:ext uri="{FF2B5EF4-FFF2-40B4-BE49-F238E27FC236}">
-                <a16:creationId xmlns:a16="http://schemas.microsoft.com/office/drawing/2014/main" id="{CB468B77-C87D-440F-87B2-B39707692365}"/>
+                <a16:creationId xmlns:a16="http://schemas.microsoft.com/office/drawing/2014/main" id="{7F3D1574-2ECE-4BA5-92B9-006FF484E782}"/>
               </a:ext>
             </a:extLst>
           </p:cNvPr>
@@ -20603,7 +20603,7 @@
           <p:cNvPr id="3" name="TextBox 2">
             <a:extLst xmlns:a="http://schemas.openxmlformats.org/drawingml/2006/main">
               <a:ext uri="{FF2B5EF4-FFF2-40B4-BE49-F238E27FC236}">
-                <a16:creationId xmlns:a16="http://schemas.microsoft.com/office/drawing/2014/main" id="{ECEA9AC0-4376-4901-86D0-B150AC9FF37F}"/>
+                <a16:creationId xmlns:a16="http://schemas.microsoft.com/office/drawing/2014/main" id="{A87278F0-E5B7-46BF-BD51-75B1D0C6EF52}"/>
               </a:ext>
             </a:extLst>
           </p:cNvPr>
@@ -20650,7 +20650,7 @@
           <p:cNvPr id="4" name="Rectangle 3">
             <a:extLst xmlns:a="http://schemas.openxmlformats.org/drawingml/2006/main">
               <a:ext uri="{FF2B5EF4-FFF2-40B4-BE49-F238E27FC236}">
-                <a16:creationId xmlns:a16="http://schemas.microsoft.com/office/drawing/2014/main" id="{3B86FF7F-2340-4153-ADCC-685FD4943449}"/>
+                <a16:creationId xmlns:a16="http://schemas.microsoft.com/office/drawing/2014/main" id="{E9C391FE-1AB1-4BB9-89F0-DBC38E665477}"/>
               </a:ext>
             </a:extLst>
           </p:cNvPr>
@@ -20705,7 +20705,7 @@
           <p:cNvPr id="5" name="Rectangle 4">
             <a:extLst xmlns:a="http://schemas.openxmlformats.org/drawingml/2006/main">
               <a:ext uri="{FF2B5EF4-FFF2-40B4-BE49-F238E27FC236}">
-                <a16:creationId xmlns:a16="http://schemas.microsoft.com/office/drawing/2014/main" id="{66B1294C-B7D5-44CC-98DA-E60A8855A9FE}"/>
+                <a16:creationId xmlns:a16="http://schemas.microsoft.com/office/drawing/2014/main" id="{57AF4980-88FA-4094-9ABD-088220A07E21}"/>
               </a:ext>
             </a:extLst>
           </p:cNvPr>
@@ -20760,7 +20760,7 @@
           <p:cNvPr id="6" name="TextBox 5">
             <a:extLst xmlns:a="http://schemas.openxmlformats.org/drawingml/2006/main">
               <a:ext uri="{FF2B5EF4-FFF2-40B4-BE49-F238E27FC236}">
-                <a16:creationId xmlns:a16="http://schemas.microsoft.com/office/drawing/2014/main" id="{F3AF2C68-86B5-4A23-BD6D-EF2E20DA23F0}"/>
+                <a16:creationId xmlns:a16="http://schemas.microsoft.com/office/drawing/2014/main" id="{526DF04C-4238-4D07-B6CA-0CACE15CC650}"/>
               </a:ext>
             </a:extLst>
           </p:cNvPr>
@@ -20797,7 +20797,7 @@
                 <a:ea typeface="Aptos"/>
                 <a:cs typeface="Aptos"/>
               </a:rPr>
-              <a:t>Julkinen riippumaton evidenssikooste · 2026.07.24-19 · 2026-07-24 · Lähteet: EP3032975B2; 7 O 3341/24</a:t>
+              <a:t>Julkinen riippumaton evidenssikooste · 2026.07.24-20 · 2026-07-24 · Lähteet: EP3032975B2; 7 O 3341/24</a:t>
             </a:r>
           </a:p>
         </p:txBody>
@@ -20807,7 +20807,7 @@
           <p:cNvPr id="7" name="TextBox 6">
             <a:extLst xmlns:a="http://schemas.openxmlformats.org/drawingml/2006/main">
               <a:ext uri="{FF2B5EF4-FFF2-40B4-BE49-F238E27FC236}">
-                <a16:creationId xmlns:a16="http://schemas.microsoft.com/office/drawing/2014/main" id="{E76442FE-C4EF-4B97-AAF1-6476F688A403}"/>
+                <a16:creationId xmlns:a16="http://schemas.microsoft.com/office/drawing/2014/main" id="{46B9E293-07DD-4806-BBBD-8B02FC3DC9CF}"/>
               </a:ext>
             </a:extLst>
           </p:cNvPr>
@@ -20854,7 +20854,7 @@
           <p:cNvPr id="8" name="Rounded Rectangle 7">
             <a:extLst xmlns:a="http://schemas.openxmlformats.org/drawingml/2006/main">
               <a:ext uri="{FF2B5EF4-FFF2-40B4-BE49-F238E27FC236}">
-                <a16:creationId xmlns:a16="http://schemas.microsoft.com/office/drawing/2014/main" id="{8862448C-3CE3-4FBD-B33A-F0A1055D17B9}"/>
+                <a16:creationId xmlns:a16="http://schemas.microsoft.com/office/drawing/2014/main" id="{59510592-70FA-40E8-A623-B844E42E17C5}"/>
               </a:ext>
             </a:extLst>
           </p:cNvPr>
@@ -20911,7 +20911,7 @@
           <p:cNvPr id="9" name="TextBox 8">
             <a:extLst xmlns:a="http://schemas.openxmlformats.org/drawingml/2006/main">
               <a:ext uri="{FF2B5EF4-FFF2-40B4-BE49-F238E27FC236}">
-                <a16:creationId xmlns:a16="http://schemas.microsoft.com/office/drawing/2014/main" id="{6FE5E7CB-19F0-438A-8EF9-3C3BD748EE7D}"/>
+                <a16:creationId xmlns:a16="http://schemas.microsoft.com/office/drawing/2014/main" id="{67561CD6-D4F1-4151-B6D0-00ABF616EDC0}"/>
               </a:ext>
             </a:extLst>
           </p:cNvPr>
@@ -20958,7 +20958,7 @@
           <p:cNvPr id="10" name="TextBox 9">
             <a:extLst xmlns:a="http://schemas.openxmlformats.org/drawingml/2006/main">
               <a:ext uri="{FF2B5EF4-FFF2-40B4-BE49-F238E27FC236}">
-                <a16:creationId xmlns:a16="http://schemas.microsoft.com/office/drawing/2014/main" id="{8CEBF345-4A2F-453F-8F0C-6C1246D09CF7}"/>
+                <a16:creationId xmlns:a16="http://schemas.microsoft.com/office/drawing/2014/main" id="{86AE85D7-C12D-41AB-8360-601724AA86CB}"/>
               </a:ext>
             </a:extLst>
           </p:cNvPr>
@@ -21005,7 +21005,7 @@
           <p:cNvPr id="11" name="TextBox 10">
             <a:extLst xmlns:a="http://schemas.openxmlformats.org/drawingml/2006/main">
               <a:ext uri="{FF2B5EF4-FFF2-40B4-BE49-F238E27FC236}">
-                <a16:creationId xmlns:a16="http://schemas.microsoft.com/office/drawing/2014/main" id="{147CF21F-91D4-4557-AB41-6520E948F6B8}"/>
+                <a16:creationId xmlns:a16="http://schemas.microsoft.com/office/drawing/2014/main" id="{2447A484-4DF2-4412-B151-A59C289CC72E}"/>
               </a:ext>
             </a:extLst>
           </p:cNvPr>
@@ -21052,7 +21052,7 @@
           <p:cNvPr id="12" name="Rounded Rectangle 11">
             <a:extLst xmlns:a="http://schemas.openxmlformats.org/drawingml/2006/main">
               <a:ext uri="{FF2B5EF4-FFF2-40B4-BE49-F238E27FC236}">
-                <a16:creationId xmlns:a16="http://schemas.microsoft.com/office/drawing/2014/main" id="{25D6E178-D4E8-47E6-A350-117C0F269392}"/>
+                <a16:creationId xmlns:a16="http://schemas.microsoft.com/office/drawing/2014/main" id="{0A7FFE01-CA64-4618-A963-694170A2A53C}"/>
               </a:ext>
             </a:extLst>
           </p:cNvPr>
@@ -21109,7 +21109,7 @@
           <p:cNvPr id="13" name="TextBox 12">
             <a:extLst xmlns:a="http://schemas.openxmlformats.org/drawingml/2006/main">
               <a:ext uri="{FF2B5EF4-FFF2-40B4-BE49-F238E27FC236}">
-                <a16:creationId xmlns:a16="http://schemas.microsoft.com/office/drawing/2014/main" id="{7515A110-DF04-4B79-8D40-37EB81A40D76}"/>
+                <a16:creationId xmlns:a16="http://schemas.microsoft.com/office/drawing/2014/main" id="{071ECD59-48BF-4931-8EA3-F878F6326CD2}"/>
               </a:ext>
             </a:extLst>
           </p:cNvPr>
@@ -21156,7 +21156,7 @@
           <p:cNvPr id="14" name="TextBox 13">
             <a:extLst xmlns:a="http://schemas.openxmlformats.org/drawingml/2006/main">
               <a:ext uri="{FF2B5EF4-FFF2-40B4-BE49-F238E27FC236}">
-                <a16:creationId xmlns:a16="http://schemas.microsoft.com/office/drawing/2014/main" id="{50417AF6-5061-483D-AA6D-87780234542F}"/>
+                <a16:creationId xmlns:a16="http://schemas.microsoft.com/office/drawing/2014/main" id="{5818A4AA-4B7F-45C2-A336-3E7C8F362491}"/>
               </a:ext>
             </a:extLst>
           </p:cNvPr>
@@ -21203,7 +21203,7 @@
           <p:cNvPr id="15" name="TextBox 14">
             <a:extLst xmlns:a="http://schemas.openxmlformats.org/drawingml/2006/main">
               <a:ext uri="{FF2B5EF4-FFF2-40B4-BE49-F238E27FC236}">
-                <a16:creationId xmlns:a16="http://schemas.microsoft.com/office/drawing/2014/main" id="{E0F8C0C4-FBCA-4094-A7C4-5846BE0A536B}"/>
+                <a16:creationId xmlns:a16="http://schemas.microsoft.com/office/drawing/2014/main" id="{ACE0DF85-A183-45F4-BC2A-90E6F3B4C451}"/>
               </a:ext>
             </a:extLst>
           </p:cNvPr>
@@ -21250,7 +21250,7 @@
           <p:cNvPr id="16" name="Rounded Rectangle 15">
             <a:extLst xmlns:a="http://schemas.openxmlformats.org/drawingml/2006/main">
               <a:ext uri="{FF2B5EF4-FFF2-40B4-BE49-F238E27FC236}">
-                <a16:creationId xmlns:a16="http://schemas.microsoft.com/office/drawing/2014/main" id="{C48DFA48-6C04-4747-801A-445212A061EF}"/>
+                <a16:creationId xmlns:a16="http://schemas.microsoft.com/office/drawing/2014/main" id="{51D88C8D-529B-4BD5-96BB-0E7EAA9BD9B9}"/>
               </a:ext>
             </a:extLst>
           </p:cNvPr>
@@ -21307,7 +21307,7 @@
           <p:cNvPr id="17" name="TextBox 16">
             <a:extLst xmlns:a="http://schemas.openxmlformats.org/drawingml/2006/main">
               <a:ext uri="{FF2B5EF4-FFF2-40B4-BE49-F238E27FC236}">
-                <a16:creationId xmlns:a16="http://schemas.microsoft.com/office/drawing/2014/main" id="{7307DF07-FE06-4FA6-B93D-5FB1B3B003DB}"/>
+                <a16:creationId xmlns:a16="http://schemas.microsoft.com/office/drawing/2014/main" id="{C9968B3A-7E98-4AB2-9887-403ADE5D6BEF}"/>
               </a:ext>
             </a:extLst>
           </p:cNvPr>
@@ -21354,7 +21354,7 @@
           <p:cNvPr id="18" name="TextBox 17">
             <a:extLst xmlns:a="http://schemas.openxmlformats.org/drawingml/2006/main">
               <a:ext uri="{FF2B5EF4-FFF2-40B4-BE49-F238E27FC236}">
-                <a16:creationId xmlns:a16="http://schemas.microsoft.com/office/drawing/2014/main" id="{84BF9A2C-BC68-4AEF-9DFD-ECBF3387E7EB}"/>
+                <a16:creationId xmlns:a16="http://schemas.microsoft.com/office/drawing/2014/main" id="{639936C5-3D98-4728-A180-FF2E6749648F}"/>
               </a:ext>
             </a:extLst>
           </p:cNvPr>
@@ -21401,7 +21401,7 @@
           <p:cNvPr id="19" name="TextBox 18">
             <a:extLst xmlns:a="http://schemas.openxmlformats.org/drawingml/2006/main">
               <a:ext uri="{FF2B5EF4-FFF2-40B4-BE49-F238E27FC236}">
-                <a16:creationId xmlns:a16="http://schemas.microsoft.com/office/drawing/2014/main" id="{375EE7EA-4F9E-47E5-985A-0BB3C81C73E6}"/>
+                <a16:creationId xmlns:a16="http://schemas.microsoft.com/office/drawing/2014/main" id="{12B053B9-9858-4822-9A18-C813CA3F5D47}"/>
               </a:ext>
             </a:extLst>
           </p:cNvPr>
@@ -21448,7 +21448,7 @@
           <p:cNvPr id="20" name="Rounded Rectangle 19">
             <a:extLst xmlns:a="http://schemas.openxmlformats.org/drawingml/2006/main">
               <a:ext uri="{FF2B5EF4-FFF2-40B4-BE49-F238E27FC236}">
-                <a16:creationId xmlns:a16="http://schemas.microsoft.com/office/drawing/2014/main" id="{74F77ACA-77A4-422B-9480-992EEE8BE778}"/>
+                <a16:creationId xmlns:a16="http://schemas.microsoft.com/office/drawing/2014/main" id="{D482B7A5-EA35-4067-8787-7940E346EDA7}"/>
               </a:ext>
             </a:extLst>
           </p:cNvPr>
@@ -21505,7 +21505,7 @@
           <p:cNvPr id="21" name="TextBox 20">
             <a:extLst xmlns:a="http://schemas.openxmlformats.org/drawingml/2006/main">
               <a:ext uri="{FF2B5EF4-FFF2-40B4-BE49-F238E27FC236}">
-                <a16:creationId xmlns:a16="http://schemas.microsoft.com/office/drawing/2014/main" id="{82EFB405-14F3-48E4-9436-220B1650A617}"/>
+                <a16:creationId xmlns:a16="http://schemas.microsoft.com/office/drawing/2014/main" id="{DF6AAD96-9D70-427B-94FD-3BD5D7D0AA3B}"/>
               </a:ext>
             </a:extLst>
           </p:cNvPr>
@@ -21552,7 +21552,7 @@
           <p:cNvPr id="22" name="TextBox 21">
             <a:extLst xmlns:a="http://schemas.openxmlformats.org/drawingml/2006/main">
               <a:ext uri="{FF2B5EF4-FFF2-40B4-BE49-F238E27FC236}">
-                <a16:creationId xmlns:a16="http://schemas.microsoft.com/office/drawing/2014/main" id="{9EB22F6B-0DDC-4538-8F52-CD5660D55781}"/>
+                <a16:creationId xmlns:a16="http://schemas.microsoft.com/office/drawing/2014/main" id="{4A4E49AC-8CBB-47B1-919F-06B181DE1F62}"/>
               </a:ext>
             </a:extLst>
           </p:cNvPr>
@@ -21599,7 +21599,7 @@
           <p:cNvPr id="23" name="TextBox 22">
             <a:extLst xmlns:a="http://schemas.openxmlformats.org/drawingml/2006/main">
               <a:ext uri="{FF2B5EF4-FFF2-40B4-BE49-F238E27FC236}">
-                <a16:creationId xmlns:a16="http://schemas.microsoft.com/office/drawing/2014/main" id="{21032831-43A7-4742-869A-FD119762DDC3}"/>
+                <a16:creationId xmlns:a16="http://schemas.microsoft.com/office/drawing/2014/main" id="{629EDA99-76EE-4756-9A5C-F21D18E73C5F}"/>
               </a:ext>
             </a:extLst>
           </p:cNvPr>
@@ -21646,7 +21646,7 @@
           <p:cNvPr id="24" name="TextBox 23">
             <a:extLst xmlns:a="http://schemas.openxmlformats.org/drawingml/2006/main">
               <a:ext uri="{FF2B5EF4-FFF2-40B4-BE49-F238E27FC236}">
-                <a16:creationId xmlns:a16="http://schemas.microsoft.com/office/drawing/2014/main" id="{38E8A98D-E4EB-437C-BEB0-DE0706AE6B39}"/>
+                <a16:creationId xmlns:a16="http://schemas.microsoft.com/office/drawing/2014/main" id="{13EFCEAB-CE6F-4448-80B0-BD76E951E3CF}"/>
               </a:ext>
             </a:extLst>
           </p:cNvPr>
@@ -21691,7 +21691,7 @@
     </p:spTree>
     <p:extLst>
       <p:ext uri="{BB962C8B-B14F-4D97-AF65-F5344CB8AC3E}">
-        <p14:creationId xmlns:p14="http://schemas.microsoft.com/office/powerpoint/2010/main" val="1433670521"/>
+        <p14:creationId xmlns:p14="http://schemas.microsoft.com/office/powerpoint/2010/main" val="1208677723"/>
       </p:ext>
     </p:extLst>
   </p:cSld>
@@ -21715,7 +21715,7 @@
           <p:cNvPr id="2" name="TextBox 1">
             <a:extLst xmlns:a="http://schemas.openxmlformats.org/drawingml/2006/main">
               <a:ext uri="{FF2B5EF4-FFF2-40B4-BE49-F238E27FC236}">
-                <a16:creationId xmlns:a16="http://schemas.microsoft.com/office/drawing/2014/main" id="{1DD24788-C006-49DB-B665-659852BAE4BF}"/>
+                <a16:creationId xmlns:a16="http://schemas.microsoft.com/office/drawing/2014/main" id="{B3FCC5F6-480D-4EED-B7CD-D40045DC0446}"/>
               </a:ext>
             </a:extLst>
           </p:cNvPr>
@@ -21762,7 +21762,7 @@
           <p:cNvPr id="3" name="TextBox 2">
             <a:extLst xmlns:a="http://schemas.openxmlformats.org/drawingml/2006/main">
               <a:ext uri="{FF2B5EF4-FFF2-40B4-BE49-F238E27FC236}">
-                <a16:creationId xmlns:a16="http://schemas.microsoft.com/office/drawing/2014/main" id="{54F20BC1-18BE-4493-9FD0-F6162140A15E}"/>
+                <a16:creationId xmlns:a16="http://schemas.microsoft.com/office/drawing/2014/main" id="{D4E8741C-1A80-44DA-93E5-B28B7CA12AD2}"/>
               </a:ext>
             </a:extLst>
           </p:cNvPr>
@@ -21809,7 +21809,7 @@
           <p:cNvPr id="4" name="Rectangle 3">
             <a:extLst xmlns:a="http://schemas.openxmlformats.org/drawingml/2006/main">
               <a:ext uri="{FF2B5EF4-FFF2-40B4-BE49-F238E27FC236}">
-                <a16:creationId xmlns:a16="http://schemas.microsoft.com/office/drawing/2014/main" id="{4E373F4F-28DF-4E46-8202-80A1F8C6D56C}"/>
+                <a16:creationId xmlns:a16="http://schemas.microsoft.com/office/drawing/2014/main" id="{BC8290B7-B92F-4D37-8199-211ADDFCFACC}"/>
               </a:ext>
             </a:extLst>
           </p:cNvPr>
@@ -21864,7 +21864,7 @@
           <p:cNvPr id="5" name="Rectangle 4">
             <a:extLst xmlns:a="http://schemas.openxmlformats.org/drawingml/2006/main">
               <a:ext uri="{FF2B5EF4-FFF2-40B4-BE49-F238E27FC236}">
-                <a16:creationId xmlns:a16="http://schemas.microsoft.com/office/drawing/2014/main" id="{F1770C5D-978C-4677-A85C-3C9FF290C09D}"/>
+                <a16:creationId xmlns:a16="http://schemas.microsoft.com/office/drawing/2014/main" id="{4C9C236A-EFDA-4ECC-B7BB-D70D47ED16EA}"/>
               </a:ext>
             </a:extLst>
           </p:cNvPr>
@@ -21919,7 +21919,7 @@
           <p:cNvPr id="6" name="TextBox 5">
             <a:extLst xmlns:a="http://schemas.openxmlformats.org/drawingml/2006/main">
               <a:ext uri="{FF2B5EF4-FFF2-40B4-BE49-F238E27FC236}">
-                <a16:creationId xmlns:a16="http://schemas.microsoft.com/office/drawing/2014/main" id="{1AA282D1-9255-41AC-A002-0FCE98D18A7D}"/>
+                <a16:creationId xmlns:a16="http://schemas.microsoft.com/office/drawing/2014/main" id="{A58BC071-2525-48FB-BA84-36FAA79DAD7F}"/>
               </a:ext>
             </a:extLst>
           </p:cNvPr>
@@ -21956,7 +21956,7 @@
                 <a:ea typeface="Aptos"/>
                 <a:cs typeface="Aptos"/>
               </a:rPr>
-              <a:t>Julkinen riippumaton evidenssikooste · 2026.07.24-19 · 2026-07-24 · Lähteet: WIPO dispute resolution; EPO IPscore</a:t>
+              <a:t>Julkinen riippumaton evidenssikooste · 2026.07.24-20 · 2026-07-24 · Lähteet: WIPO dispute resolution; EPO IPscore</a:t>
             </a:r>
           </a:p>
         </p:txBody>
@@ -21966,7 +21966,7 @@
           <p:cNvPr id="7" name="TextBox 6">
             <a:extLst xmlns:a="http://schemas.openxmlformats.org/drawingml/2006/main">
               <a:ext uri="{FF2B5EF4-FFF2-40B4-BE49-F238E27FC236}">
-                <a16:creationId xmlns:a16="http://schemas.microsoft.com/office/drawing/2014/main" id="{BB9C2613-1F69-43C5-A298-93124F307475}"/>
+                <a16:creationId xmlns:a16="http://schemas.microsoft.com/office/drawing/2014/main" id="{D7337746-1218-404F-89AB-1D24B70B7E0A}"/>
               </a:ext>
             </a:extLst>
           </p:cNvPr>
@@ -22013,7 +22013,7 @@
           <p:cNvPr id="8" name="Rounded Rectangle 7">
             <a:extLst xmlns:a="http://schemas.openxmlformats.org/drawingml/2006/main">
               <a:ext uri="{FF2B5EF4-FFF2-40B4-BE49-F238E27FC236}">
-                <a16:creationId xmlns:a16="http://schemas.microsoft.com/office/drawing/2014/main" id="{B0506B8F-D12F-4B6E-833F-6ED3E1898AE7}"/>
+                <a16:creationId xmlns:a16="http://schemas.microsoft.com/office/drawing/2014/main" id="{6A65728E-E1FB-433A-92FF-59D24FB1764A}"/>
               </a:ext>
             </a:extLst>
           </p:cNvPr>
@@ -22070,7 +22070,7 @@
           <p:cNvPr id="9" name="TextBox 8">
             <a:extLst xmlns:a="http://schemas.openxmlformats.org/drawingml/2006/main">
               <a:ext uri="{FF2B5EF4-FFF2-40B4-BE49-F238E27FC236}">
-                <a16:creationId xmlns:a16="http://schemas.microsoft.com/office/drawing/2014/main" id="{7C53BB99-AAF0-4AA3-90D5-A75D766BA7B7}"/>
+                <a16:creationId xmlns:a16="http://schemas.microsoft.com/office/drawing/2014/main" id="{15A8B2CF-0CC0-4E99-9342-4DB4C9173B1C}"/>
               </a:ext>
             </a:extLst>
           </p:cNvPr>
@@ -22117,7 +22117,7 @@
           <p:cNvPr id="10" name="TextBox 9">
             <a:extLst xmlns:a="http://schemas.openxmlformats.org/drawingml/2006/main">
               <a:ext uri="{FF2B5EF4-FFF2-40B4-BE49-F238E27FC236}">
-                <a16:creationId xmlns:a16="http://schemas.microsoft.com/office/drawing/2014/main" id="{BBD6661E-3E12-4535-A1DF-E8E00A03BCB3}"/>
+                <a16:creationId xmlns:a16="http://schemas.microsoft.com/office/drawing/2014/main" id="{2E889AE1-F800-4992-9CB9-EDD2D9176C1D}"/>
               </a:ext>
             </a:extLst>
           </p:cNvPr>
@@ -22164,7 +22164,7 @@
           <p:cNvPr id="11" name="TextBox 10">
             <a:extLst xmlns:a="http://schemas.openxmlformats.org/drawingml/2006/main">
               <a:ext uri="{FF2B5EF4-FFF2-40B4-BE49-F238E27FC236}">
-                <a16:creationId xmlns:a16="http://schemas.microsoft.com/office/drawing/2014/main" id="{67B458BE-8FA5-4094-B2AD-CC4F2D44B1A1}"/>
+                <a16:creationId xmlns:a16="http://schemas.microsoft.com/office/drawing/2014/main" id="{4250D36D-275D-494B-B937-AD43B920B84F}"/>
               </a:ext>
             </a:extLst>
           </p:cNvPr>
@@ -22211,7 +22211,7 @@
           <p:cNvPr id="12" name="Rounded Rectangle 11">
             <a:extLst xmlns:a="http://schemas.openxmlformats.org/drawingml/2006/main">
               <a:ext uri="{FF2B5EF4-FFF2-40B4-BE49-F238E27FC236}">
-                <a16:creationId xmlns:a16="http://schemas.microsoft.com/office/drawing/2014/main" id="{F7082515-48F6-493D-86E9-4F36C95AD570}"/>
+                <a16:creationId xmlns:a16="http://schemas.microsoft.com/office/drawing/2014/main" id="{11EC37EE-4CA5-4BD0-8EC5-605B2F99F6E9}"/>
               </a:ext>
             </a:extLst>
           </p:cNvPr>
@@ -22268,7 +22268,7 @@
           <p:cNvPr id="13" name="TextBox 12">
             <a:extLst xmlns:a="http://schemas.openxmlformats.org/drawingml/2006/main">
               <a:ext uri="{FF2B5EF4-FFF2-40B4-BE49-F238E27FC236}">
-                <a16:creationId xmlns:a16="http://schemas.microsoft.com/office/drawing/2014/main" id="{21C609C6-D86B-42DD-B6F2-74584014F8BD}"/>
+                <a16:creationId xmlns:a16="http://schemas.microsoft.com/office/drawing/2014/main" id="{973D4BD5-C1F3-44E5-9B98-AC81B02CD494}"/>
               </a:ext>
             </a:extLst>
           </p:cNvPr>
@@ -22315,7 +22315,7 @@
           <p:cNvPr id="14" name="TextBox 13">
             <a:extLst xmlns:a="http://schemas.openxmlformats.org/drawingml/2006/main">
               <a:ext uri="{FF2B5EF4-FFF2-40B4-BE49-F238E27FC236}">
-                <a16:creationId xmlns:a16="http://schemas.microsoft.com/office/drawing/2014/main" id="{9B28E98A-FAA3-4970-8236-53A1EBCED0D0}"/>
+                <a16:creationId xmlns:a16="http://schemas.microsoft.com/office/drawing/2014/main" id="{3A0E7B80-76E1-468F-9DA9-55CA524D8BB4}"/>
               </a:ext>
             </a:extLst>
           </p:cNvPr>
@@ -22362,7 +22362,7 @@
           <p:cNvPr id="15" name="TextBox 14">
             <a:extLst xmlns:a="http://schemas.openxmlformats.org/drawingml/2006/main">
               <a:ext uri="{FF2B5EF4-FFF2-40B4-BE49-F238E27FC236}">
-                <a16:creationId xmlns:a16="http://schemas.microsoft.com/office/drawing/2014/main" id="{1ABE9ACA-E389-43AC-AE61-19BA130D1A6D}"/>
+                <a16:creationId xmlns:a16="http://schemas.microsoft.com/office/drawing/2014/main" id="{BC4755C4-7949-4CCA-B4B7-B58AA9744D93}"/>
               </a:ext>
             </a:extLst>
           </p:cNvPr>
@@ -22409,7 +22409,7 @@
           <p:cNvPr id="16" name="Rounded Rectangle 15">
             <a:extLst xmlns:a="http://schemas.openxmlformats.org/drawingml/2006/main">
               <a:ext uri="{FF2B5EF4-FFF2-40B4-BE49-F238E27FC236}">
-                <a16:creationId xmlns:a16="http://schemas.microsoft.com/office/drawing/2014/main" id="{495BE5DC-E725-4724-A085-10B565A99DA8}"/>
+                <a16:creationId xmlns:a16="http://schemas.microsoft.com/office/drawing/2014/main" id="{B11222A1-D118-471B-864C-9F9C9D82F35A}"/>
               </a:ext>
             </a:extLst>
           </p:cNvPr>
@@ -22466,7 +22466,7 @@
           <p:cNvPr id="17" name="TextBox 16">
             <a:extLst xmlns:a="http://schemas.openxmlformats.org/drawingml/2006/main">
               <a:ext uri="{FF2B5EF4-FFF2-40B4-BE49-F238E27FC236}">
-                <a16:creationId xmlns:a16="http://schemas.microsoft.com/office/drawing/2014/main" id="{BD240892-EA26-45EA-98DB-B3CB25C0508B}"/>
+                <a16:creationId xmlns:a16="http://schemas.microsoft.com/office/drawing/2014/main" id="{98B91F73-573F-4D12-B6BC-9587420CF19D}"/>
               </a:ext>
             </a:extLst>
           </p:cNvPr>
@@ -22513,7 +22513,7 @@
           <p:cNvPr id="18" name="TextBox 17">
             <a:extLst xmlns:a="http://schemas.openxmlformats.org/drawingml/2006/main">
               <a:ext uri="{FF2B5EF4-FFF2-40B4-BE49-F238E27FC236}">
-                <a16:creationId xmlns:a16="http://schemas.microsoft.com/office/drawing/2014/main" id="{D08BB05A-73F4-481C-A168-6ABBF2CE1793}"/>
+                <a16:creationId xmlns:a16="http://schemas.microsoft.com/office/drawing/2014/main" id="{EE7FE563-23AB-4EDD-97CA-6D09FA18625D}"/>
               </a:ext>
             </a:extLst>
           </p:cNvPr>
@@ -22560,7 +22560,7 @@
           <p:cNvPr id="19" name="TextBox 18">
             <a:extLst xmlns:a="http://schemas.openxmlformats.org/drawingml/2006/main">
               <a:ext uri="{FF2B5EF4-FFF2-40B4-BE49-F238E27FC236}">
-                <a16:creationId xmlns:a16="http://schemas.microsoft.com/office/drawing/2014/main" id="{4BBB2444-8E61-43F6-BB13-02350659BE0F}"/>
+                <a16:creationId xmlns:a16="http://schemas.microsoft.com/office/drawing/2014/main" id="{4A12DBBC-0E41-4571-9DA6-C68B364F7A43}"/>
               </a:ext>
             </a:extLst>
           </p:cNvPr>
@@ -22607,7 +22607,7 @@
           <p:cNvPr id="20" name="Rounded Rectangle 19">
             <a:extLst xmlns:a="http://schemas.openxmlformats.org/drawingml/2006/main">
               <a:ext uri="{FF2B5EF4-FFF2-40B4-BE49-F238E27FC236}">
-                <a16:creationId xmlns:a16="http://schemas.microsoft.com/office/drawing/2014/main" id="{445345CE-A01D-4739-AB56-42FBEFA25CFE}"/>
+                <a16:creationId xmlns:a16="http://schemas.microsoft.com/office/drawing/2014/main" id="{C589F1CB-C4FB-47C2-BBAF-6D2FB441C3A2}"/>
               </a:ext>
             </a:extLst>
           </p:cNvPr>
@@ -22664,7 +22664,7 @@
           <p:cNvPr id="21" name="TextBox 20">
             <a:extLst xmlns:a="http://schemas.openxmlformats.org/drawingml/2006/main">
               <a:ext uri="{FF2B5EF4-FFF2-40B4-BE49-F238E27FC236}">
-                <a16:creationId xmlns:a16="http://schemas.microsoft.com/office/drawing/2014/main" id="{6DC68F94-B989-4E58-9E7C-F090F7959D02}"/>
+                <a16:creationId xmlns:a16="http://schemas.microsoft.com/office/drawing/2014/main" id="{C70902FC-AF54-43B1-AC1D-659AFFCBC400}"/>
               </a:ext>
             </a:extLst>
           </p:cNvPr>
@@ -22711,7 +22711,7 @@
           <p:cNvPr id="22" name="TextBox 21">
             <a:extLst xmlns:a="http://schemas.openxmlformats.org/drawingml/2006/main">
               <a:ext uri="{FF2B5EF4-FFF2-40B4-BE49-F238E27FC236}">
-                <a16:creationId xmlns:a16="http://schemas.microsoft.com/office/drawing/2014/main" id="{75E48A78-BB34-4232-ACFE-EA41E6004BA2}"/>
+                <a16:creationId xmlns:a16="http://schemas.microsoft.com/office/drawing/2014/main" id="{4CB47E05-0921-4D06-8E47-43D0B53B0D7B}"/>
               </a:ext>
             </a:extLst>
           </p:cNvPr>
@@ -22758,7 +22758,7 @@
           <p:cNvPr id="23" name="TextBox 22">
             <a:extLst xmlns:a="http://schemas.openxmlformats.org/drawingml/2006/main">
               <a:ext uri="{FF2B5EF4-FFF2-40B4-BE49-F238E27FC236}">
-                <a16:creationId xmlns:a16="http://schemas.microsoft.com/office/drawing/2014/main" id="{B9AB8F85-0583-48BE-A458-27515D1AC1A9}"/>
+                <a16:creationId xmlns:a16="http://schemas.microsoft.com/office/drawing/2014/main" id="{5D365A7C-748B-4DB3-AE9E-017C829020F7}"/>
               </a:ext>
             </a:extLst>
           </p:cNvPr>
@@ -22805,7 +22805,7 @@
           <p:cNvPr id="24" name="TextBox 23">
             <a:extLst xmlns:a="http://schemas.openxmlformats.org/drawingml/2006/main">
               <a:ext uri="{FF2B5EF4-FFF2-40B4-BE49-F238E27FC236}">
-                <a16:creationId xmlns:a16="http://schemas.microsoft.com/office/drawing/2014/main" id="{2A639712-5C28-4E32-888E-6642C524FA74}"/>
+                <a16:creationId xmlns:a16="http://schemas.microsoft.com/office/drawing/2014/main" id="{A81CC85E-3F15-484B-BCD2-84692CF07E77}"/>
               </a:ext>
             </a:extLst>
           </p:cNvPr>
@@ -22850,7 +22850,7 @@
     </p:spTree>
     <p:extLst>
       <p:ext uri="{BB962C8B-B14F-4D97-AF65-F5344CB8AC3E}">
-        <p14:creationId xmlns:p14="http://schemas.microsoft.com/office/powerpoint/2010/main" val="1780142872"/>
+        <p14:creationId xmlns:p14="http://schemas.microsoft.com/office/powerpoint/2010/main" val="1905716766"/>
       </p:ext>
     </p:extLst>
   </p:cSld>
@@ -22874,7 +22874,7 @@
           <p:cNvPr id="2" name="TextBox 1">
             <a:extLst xmlns:a="http://schemas.openxmlformats.org/drawingml/2006/main">
               <a:ext uri="{FF2B5EF4-FFF2-40B4-BE49-F238E27FC236}">
-                <a16:creationId xmlns:a16="http://schemas.microsoft.com/office/drawing/2014/main" id="{72636EC2-99DD-4E2A-B86F-E8E95F05E96E}"/>
+                <a16:creationId xmlns:a16="http://schemas.microsoft.com/office/drawing/2014/main" id="{74189021-603E-496E-B29A-D1B1A7F893B7}"/>
               </a:ext>
             </a:extLst>
           </p:cNvPr>
@@ -22921,7 +22921,7 @@
           <p:cNvPr id="3" name="TextBox 2">
             <a:extLst xmlns:a="http://schemas.openxmlformats.org/drawingml/2006/main">
               <a:ext uri="{FF2B5EF4-FFF2-40B4-BE49-F238E27FC236}">
-                <a16:creationId xmlns:a16="http://schemas.microsoft.com/office/drawing/2014/main" id="{E51EEE56-6ADE-458A-A0BC-7FF78E8FB86A}"/>
+                <a16:creationId xmlns:a16="http://schemas.microsoft.com/office/drawing/2014/main" id="{C62F45E1-2D43-43BB-A6E5-8B4ABE8D91C7}"/>
               </a:ext>
             </a:extLst>
           </p:cNvPr>
@@ -22968,7 +22968,7 @@
           <p:cNvPr id="4" name="Rectangle 3">
             <a:extLst xmlns:a="http://schemas.openxmlformats.org/drawingml/2006/main">
               <a:ext uri="{FF2B5EF4-FFF2-40B4-BE49-F238E27FC236}">
-                <a16:creationId xmlns:a16="http://schemas.microsoft.com/office/drawing/2014/main" id="{244C947B-968F-4E4A-BD46-94F367601A89}"/>
+                <a16:creationId xmlns:a16="http://schemas.microsoft.com/office/drawing/2014/main" id="{946901BB-0905-4B94-A781-557CFCF5CDA0}"/>
               </a:ext>
             </a:extLst>
           </p:cNvPr>
@@ -23023,7 +23023,7 @@
           <p:cNvPr id="5" name="Rectangle 4">
             <a:extLst xmlns:a="http://schemas.openxmlformats.org/drawingml/2006/main">
               <a:ext uri="{FF2B5EF4-FFF2-40B4-BE49-F238E27FC236}">
-                <a16:creationId xmlns:a16="http://schemas.microsoft.com/office/drawing/2014/main" id="{4F5389DD-58B4-44AB-B487-28DA588578BF}"/>
+                <a16:creationId xmlns:a16="http://schemas.microsoft.com/office/drawing/2014/main" id="{0EA6CD17-3AD1-4A40-9742-CD0B19D301B9}"/>
               </a:ext>
             </a:extLst>
           </p:cNvPr>
@@ -23078,7 +23078,7 @@
           <p:cNvPr id="6" name="TextBox 5">
             <a:extLst xmlns:a="http://schemas.openxmlformats.org/drawingml/2006/main">
               <a:ext uri="{FF2B5EF4-FFF2-40B4-BE49-F238E27FC236}">
-                <a16:creationId xmlns:a16="http://schemas.microsoft.com/office/drawing/2014/main" id="{247D7F61-4ECE-4354-84CF-4EB01674AD2C}"/>
+                <a16:creationId xmlns:a16="http://schemas.microsoft.com/office/drawing/2014/main" id="{89FC2B57-04B9-4C8C-8CC6-E9F224F8ECF6}"/>
               </a:ext>
             </a:extLst>
           </p:cNvPr>
@@ -23115,7 +23115,7 @@
                 <a:ea typeface="Aptos"/>
                 <a:cs typeface="Aptos"/>
               </a:rPr>
-              <a:t>Julkinen riippumaton evidenssikooste · 2026.07.24-19 · 2026-07-24 · Lähteet: WIPO licensing; IP Finance; TPLF mapping</a:t>
+              <a:t>Julkinen riippumaton evidenssikooste · 2026.07.24-20 · 2026-07-24 · Lähteet: WIPO licensing; IP Finance; TPLF mapping</a:t>
             </a:r>
           </a:p>
         </p:txBody>
@@ -23125,7 +23125,7 @@
           <p:cNvPr id="7" name="TextBox 6">
             <a:extLst xmlns:a="http://schemas.openxmlformats.org/drawingml/2006/main">
               <a:ext uri="{FF2B5EF4-FFF2-40B4-BE49-F238E27FC236}">
-                <a16:creationId xmlns:a16="http://schemas.microsoft.com/office/drawing/2014/main" id="{25C3C098-5654-4634-9236-A6EE719C04E2}"/>
+                <a16:creationId xmlns:a16="http://schemas.microsoft.com/office/drawing/2014/main" id="{582CDE32-1FDA-49C4-8E77-A3455551248C}"/>
               </a:ext>
             </a:extLst>
           </p:cNvPr>
@@ -23695,7 +23695,7 @@
           <p:cNvPr id="9" name="TextBox 8">
             <a:extLst xmlns:a="http://schemas.openxmlformats.org/drawingml/2006/main">
               <a:ext uri="{FF2B5EF4-FFF2-40B4-BE49-F238E27FC236}">
-                <a16:creationId xmlns:a16="http://schemas.microsoft.com/office/drawing/2014/main" id="{B2D82AC3-85ED-4CA2-A34C-C0CA7A3CDB92}"/>
+                <a16:creationId xmlns:a16="http://schemas.microsoft.com/office/drawing/2014/main" id="{786A7291-A47C-4F4F-9732-922CA8694A22}"/>
               </a:ext>
             </a:extLst>
           </p:cNvPr>
@@ -23740,7 +23740,7 @@
     </p:spTree>
     <p:extLst>
       <p:ext uri="{BB962C8B-B14F-4D97-AF65-F5344CB8AC3E}">
-        <p14:creationId xmlns:p14="http://schemas.microsoft.com/office/powerpoint/2010/main" val="1034020357"/>
+        <p14:creationId xmlns:p14="http://schemas.microsoft.com/office/powerpoint/2010/main" val="849710358"/>
       </p:ext>
     </p:extLst>
   </p:cSld>
@@ -23764,7 +23764,7 @@
           <p:cNvPr id="2" name="TextBox 1">
             <a:extLst xmlns:a="http://schemas.openxmlformats.org/drawingml/2006/main">
               <a:ext uri="{FF2B5EF4-FFF2-40B4-BE49-F238E27FC236}">
-                <a16:creationId xmlns:a16="http://schemas.microsoft.com/office/drawing/2014/main" id="{4D296B98-7108-4953-A4BD-46399658D2C4}"/>
+                <a16:creationId xmlns:a16="http://schemas.microsoft.com/office/drawing/2014/main" id="{4E48D3FF-8C25-4A4E-ADB7-6BF30E387BE1}"/>
               </a:ext>
             </a:extLst>
           </p:cNvPr>
@@ -23811,7 +23811,7 @@
           <p:cNvPr id="3" name="TextBox 2">
             <a:extLst xmlns:a="http://schemas.openxmlformats.org/drawingml/2006/main">
               <a:ext uri="{FF2B5EF4-FFF2-40B4-BE49-F238E27FC236}">
-                <a16:creationId xmlns:a16="http://schemas.microsoft.com/office/drawing/2014/main" id="{E2009194-4E58-4FDB-AF09-F12D79C5CF47}"/>
+                <a16:creationId xmlns:a16="http://schemas.microsoft.com/office/drawing/2014/main" id="{16D6488F-6F97-4215-8D47-92732B24D423}"/>
               </a:ext>
             </a:extLst>
           </p:cNvPr>
@@ -23858,7 +23858,7 @@
           <p:cNvPr id="4" name="Rectangle 3">
             <a:extLst xmlns:a="http://schemas.openxmlformats.org/drawingml/2006/main">
               <a:ext uri="{FF2B5EF4-FFF2-40B4-BE49-F238E27FC236}">
-                <a16:creationId xmlns:a16="http://schemas.microsoft.com/office/drawing/2014/main" id="{6444240F-C236-4E07-BD9C-DD3CD3ADDFFF}"/>
+                <a16:creationId xmlns:a16="http://schemas.microsoft.com/office/drawing/2014/main" id="{C1C8394E-3CF9-49A4-BB67-C4C61082CFE7}"/>
               </a:ext>
             </a:extLst>
           </p:cNvPr>
@@ -23913,7 +23913,7 @@
           <p:cNvPr id="5" name="Rectangle 4">
             <a:extLst xmlns:a="http://schemas.openxmlformats.org/drawingml/2006/main">
               <a:ext uri="{FF2B5EF4-FFF2-40B4-BE49-F238E27FC236}">
-                <a16:creationId xmlns:a16="http://schemas.microsoft.com/office/drawing/2014/main" id="{76CADFCD-BC27-4663-876C-C831A703D5EC}"/>
+                <a16:creationId xmlns:a16="http://schemas.microsoft.com/office/drawing/2014/main" id="{66901DE3-C303-4FFB-9D18-1915C54F64EB}"/>
               </a:ext>
             </a:extLst>
           </p:cNvPr>
@@ -23968,7 +23968,7 @@
           <p:cNvPr id="6" name="TextBox 5">
             <a:extLst xmlns:a="http://schemas.openxmlformats.org/drawingml/2006/main">
               <a:ext uri="{FF2B5EF4-FFF2-40B4-BE49-F238E27FC236}">
-                <a16:creationId xmlns:a16="http://schemas.microsoft.com/office/drawing/2014/main" id="{74CDB364-F0FD-4F93-A0C7-8C025919F149}"/>
+                <a16:creationId xmlns:a16="http://schemas.microsoft.com/office/drawing/2014/main" id="{D7FE12C2-5D64-45D7-AAC2-4F19E46012AE}"/>
               </a:ext>
             </a:extLst>
           </p:cNvPr>
@@ -24005,7 +24005,7 @@
                 <a:ea typeface="Aptos"/>
                 <a:cs typeface="Aptos"/>
               </a:rPr>
-              <a:t>Julkinen riippumaton evidenssikooste · 2026.07.24-19 · 2026-07-24 · Lähteet: Evidence Register; WIPO valuation</a:t>
+              <a:t>Julkinen riippumaton evidenssikooste · 2026.07.24-20 · 2026-07-24 · Lähteet: Evidence Register; WIPO valuation</a:t>
             </a:r>
           </a:p>
         </p:txBody>
@@ -24015,7 +24015,7 @@
           <p:cNvPr id="7" name="TextBox 6">
             <a:extLst xmlns:a="http://schemas.openxmlformats.org/drawingml/2006/main">
               <a:ext uri="{FF2B5EF4-FFF2-40B4-BE49-F238E27FC236}">
-                <a16:creationId xmlns:a16="http://schemas.microsoft.com/office/drawing/2014/main" id="{25D4B384-266D-4F28-A7A8-DF0915B95433}"/>
+                <a16:creationId xmlns:a16="http://schemas.microsoft.com/office/drawing/2014/main" id="{A2F9583A-6811-4322-954C-F92C1D4BBC13}"/>
               </a:ext>
             </a:extLst>
           </p:cNvPr>
@@ -24668,7 +24668,7 @@
           <p:cNvPr id="9" name="TextBox 8">
             <a:extLst xmlns:a="http://schemas.openxmlformats.org/drawingml/2006/main">
               <a:ext uri="{FF2B5EF4-FFF2-40B4-BE49-F238E27FC236}">
-                <a16:creationId xmlns:a16="http://schemas.microsoft.com/office/drawing/2014/main" id="{39028D12-9CB0-4829-973A-CDE5771E4CEE}"/>
+                <a16:creationId xmlns:a16="http://schemas.microsoft.com/office/drawing/2014/main" id="{CFBD3D22-2CB3-4C5F-A268-F34A512A4FB6}"/>
               </a:ext>
             </a:extLst>
           </p:cNvPr>
@@ -24713,7 +24713,7 @@
     </p:spTree>
     <p:extLst>
       <p:ext uri="{BB962C8B-B14F-4D97-AF65-F5344CB8AC3E}">
-        <p14:creationId xmlns:p14="http://schemas.microsoft.com/office/powerpoint/2010/main" val="1879152718"/>
+        <p14:creationId xmlns:p14="http://schemas.microsoft.com/office/powerpoint/2010/main" val="786570971"/>
       </p:ext>
     </p:extLst>
   </p:cSld>
@@ -24737,7 +24737,7 @@
           <p:cNvPr id="2" name="TextBox 1">
             <a:extLst xmlns:a="http://schemas.openxmlformats.org/drawingml/2006/main">
               <a:ext uri="{FF2B5EF4-FFF2-40B4-BE49-F238E27FC236}">
-                <a16:creationId xmlns:a16="http://schemas.microsoft.com/office/drawing/2014/main" id="{71D658A9-CEE4-40BA-BC76-E339A874BF9A}"/>
+                <a16:creationId xmlns:a16="http://schemas.microsoft.com/office/drawing/2014/main" id="{B0C37848-09DA-4DB8-A545-3F7B37697996}"/>
               </a:ext>
             </a:extLst>
           </p:cNvPr>
@@ -24784,7 +24784,7 @@
           <p:cNvPr id="3" name="TextBox 2">
             <a:extLst xmlns:a="http://schemas.openxmlformats.org/drawingml/2006/main">
               <a:ext uri="{FF2B5EF4-FFF2-40B4-BE49-F238E27FC236}">
-                <a16:creationId xmlns:a16="http://schemas.microsoft.com/office/drawing/2014/main" id="{B8572C14-3C0B-42EB-B8A0-01781437F687}"/>
+                <a16:creationId xmlns:a16="http://schemas.microsoft.com/office/drawing/2014/main" id="{A44ADD56-C0BC-44EC-9867-5B545199670A}"/>
               </a:ext>
             </a:extLst>
           </p:cNvPr>
@@ -24831,7 +24831,7 @@
           <p:cNvPr id="4" name="Rectangle 3">
             <a:extLst xmlns:a="http://schemas.openxmlformats.org/drawingml/2006/main">
               <a:ext uri="{FF2B5EF4-FFF2-40B4-BE49-F238E27FC236}">
-                <a16:creationId xmlns:a16="http://schemas.microsoft.com/office/drawing/2014/main" id="{F214C1B5-BD7A-4D80-BE3A-E7FC43141A3F}"/>
+                <a16:creationId xmlns:a16="http://schemas.microsoft.com/office/drawing/2014/main" id="{379B8370-992D-4559-ABD1-E750F043C377}"/>
               </a:ext>
             </a:extLst>
           </p:cNvPr>
@@ -24886,7 +24886,7 @@
           <p:cNvPr id="5" name="Rectangle 4">
             <a:extLst xmlns:a="http://schemas.openxmlformats.org/drawingml/2006/main">
               <a:ext uri="{FF2B5EF4-FFF2-40B4-BE49-F238E27FC236}">
-                <a16:creationId xmlns:a16="http://schemas.microsoft.com/office/drawing/2014/main" id="{E2ED9FB3-EA9E-4CB8-87A5-4D0962D3B222}"/>
+                <a16:creationId xmlns:a16="http://schemas.microsoft.com/office/drawing/2014/main" id="{DD8BF3D6-5666-46F8-A8D0-98875A5EF80F}"/>
               </a:ext>
             </a:extLst>
           </p:cNvPr>
@@ -24941,7 +24941,7 @@
           <p:cNvPr id="6" name="TextBox 5">
             <a:extLst xmlns:a="http://schemas.openxmlformats.org/drawingml/2006/main">
               <a:ext uri="{FF2B5EF4-FFF2-40B4-BE49-F238E27FC236}">
-                <a16:creationId xmlns:a16="http://schemas.microsoft.com/office/drawing/2014/main" id="{4D442D5C-AF51-4755-ABC1-0CDAC0FD36A1}"/>
+                <a16:creationId xmlns:a16="http://schemas.microsoft.com/office/drawing/2014/main" id="{A03B69C5-DA03-4DF3-93C0-011A8AAC4244}"/>
               </a:ext>
             </a:extLst>
           </p:cNvPr>
@@ -24978,7 +24978,7 @@
                 <a:ea typeface="Aptos"/>
                 <a:cs typeface="Aptos"/>
               </a:rPr>
-              <a:t>Julkinen riippumaton evidenssikooste · 2026.07.24-19 · 2026-07-24 · Lähteet: WIPO valuation</a:t>
+              <a:t>Julkinen riippumaton evidenssikooste · 2026.07.24-20 · 2026-07-24 · Lähteet: WIPO valuation</a:t>
             </a:r>
           </a:p>
         </p:txBody>
@@ -24988,7 +24988,7 @@
           <p:cNvPr id="7" name="TextBox 6">
             <a:extLst xmlns:a="http://schemas.openxmlformats.org/drawingml/2006/main">
               <a:ext uri="{FF2B5EF4-FFF2-40B4-BE49-F238E27FC236}">
-                <a16:creationId xmlns:a16="http://schemas.microsoft.com/office/drawing/2014/main" id="{E11F4DEB-8549-40A9-A346-74BB043463E6}"/>
+                <a16:creationId xmlns:a16="http://schemas.microsoft.com/office/drawing/2014/main" id="{D39B54A0-124D-48EE-B9CB-4ECBDBC74E1D}"/>
               </a:ext>
             </a:extLst>
           </p:cNvPr>
@@ -25721,7 +25721,7 @@
           <p:cNvPr id="9" name="TextBox 8">
             <a:extLst xmlns:a="http://schemas.openxmlformats.org/drawingml/2006/main">
               <a:ext uri="{FF2B5EF4-FFF2-40B4-BE49-F238E27FC236}">
-                <a16:creationId xmlns:a16="http://schemas.microsoft.com/office/drawing/2014/main" id="{CE5E7BCC-F20E-45C1-A112-0CB5086EBAF2}"/>
+                <a16:creationId xmlns:a16="http://schemas.microsoft.com/office/drawing/2014/main" id="{1C221DE7-D94D-4DDB-982C-BFF2442DBAD0}"/>
               </a:ext>
             </a:extLst>
           </p:cNvPr>
@@ -25766,7 +25766,7 @@
     </p:spTree>
     <p:extLst>
       <p:ext uri="{BB962C8B-B14F-4D97-AF65-F5344CB8AC3E}">
-        <p14:creationId xmlns:p14="http://schemas.microsoft.com/office/powerpoint/2010/main" val="2011755891"/>
+        <p14:creationId xmlns:p14="http://schemas.microsoft.com/office/powerpoint/2010/main" val="1468141974"/>
       </p:ext>
     </p:extLst>
   </p:cSld>
@@ -25790,7 +25790,7 @@
           <p:cNvPr id="2" name="TextBox 1">
             <a:extLst xmlns:a="http://schemas.openxmlformats.org/drawingml/2006/main">
               <a:ext uri="{FF2B5EF4-FFF2-40B4-BE49-F238E27FC236}">
-                <a16:creationId xmlns:a16="http://schemas.microsoft.com/office/drawing/2014/main" id="{43CF31F7-E370-44E5-9AE6-5AE10DBB7AF0}"/>
+                <a16:creationId xmlns:a16="http://schemas.microsoft.com/office/drawing/2014/main" id="{3DB84208-5E2D-4638-91CF-00B4F25AD63C}"/>
               </a:ext>
             </a:extLst>
           </p:cNvPr>
@@ -25837,7 +25837,7 @@
           <p:cNvPr id="3" name="TextBox 2">
             <a:extLst xmlns:a="http://schemas.openxmlformats.org/drawingml/2006/main">
               <a:ext uri="{FF2B5EF4-FFF2-40B4-BE49-F238E27FC236}">
-                <a16:creationId xmlns:a16="http://schemas.microsoft.com/office/drawing/2014/main" id="{385161BE-9833-4A87-879A-A0331C5AF1E8}"/>
+                <a16:creationId xmlns:a16="http://schemas.microsoft.com/office/drawing/2014/main" id="{D00C3F3E-84D8-4F9D-A9E5-042D787478DD}"/>
               </a:ext>
             </a:extLst>
           </p:cNvPr>
@@ -25884,7 +25884,7 @@
           <p:cNvPr id="4" name="Rectangle 3">
             <a:extLst xmlns:a="http://schemas.openxmlformats.org/drawingml/2006/main">
               <a:ext uri="{FF2B5EF4-FFF2-40B4-BE49-F238E27FC236}">
-                <a16:creationId xmlns:a16="http://schemas.microsoft.com/office/drawing/2014/main" id="{E56243CE-2186-443A-B457-3EE00B66C611}"/>
+                <a16:creationId xmlns:a16="http://schemas.microsoft.com/office/drawing/2014/main" id="{05F989CD-A2E1-410F-9B33-09DEFA8AFBD6}"/>
               </a:ext>
             </a:extLst>
           </p:cNvPr>
@@ -25939,7 +25939,7 @@
           <p:cNvPr id="5" name="Rectangle 4">
             <a:extLst xmlns:a="http://schemas.openxmlformats.org/drawingml/2006/main">
               <a:ext uri="{FF2B5EF4-FFF2-40B4-BE49-F238E27FC236}">
-                <a16:creationId xmlns:a16="http://schemas.microsoft.com/office/drawing/2014/main" id="{AE53DA74-980D-4F4E-8AFC-B6819F6E5127}"/>
+                <a16:creationId xmlns:a16="http://schemas.microsoft.com/office/drawing/2014/main" id="{74379B73-ACFC-445C-AEE6-A3AE83C079A5}"/>
               </a:ext>
             </a:extLst>
           </p:cNvPr>
@@ -25994,7 +25994,7 @@
           <p:cNvPr id="6" name="TextBox 5">
             <a:extLst xmlns:a="http://schemas.openxmlformats.org/drawingml/2006/main">
               <a:ext uri="{FF2B5EF4-FFF2-40B4-BE49-F238E27FC236}">
-                <a16:creationId xmlns:a16="http://schemas.microsoft.com/office/drawing/2014/main" id="{85A97433-5C9E-4192-B11D-C8EA724B79E2}"/>
+                <a16:creationId xmlns:a16="http://schemas.microsoft.com/office/drawing/2014/main" id="{1DA78B7B-7A2A-406D-B3E4-F089923286D1}"/>
               </a:ext>
             </a:extLst>
           </p:cNvPr>
@@ -26031,7 +26031,7 @@
                 <a:ea typeface="Aptos"/>
                 <a:cs typeface="Aptos"/>
               </a:rPr>
-              <a:t>Julkinen riippumaton evidenssikooste · 2026.07.24-19 · 2026-07-24 · Lähteet: Evidence Register</a:t>
+              <a:t>Julkinen riippumaton evidenssikooste · 2026.07.24-20 · 2026-07-24 · Lähteet: Evidence Register</a:t>
             </a:r>
           </a:p>
         </p:txBody>
@@ -26041,7 +26041,7 @@
           <p:cNvPr id="7" name="TextBox 6">
             <a:extLst xmlns:a="http://schemas.openxmlformats.org/drawingml/2006/main">
               <a:ext uri="{FF2B5EF4-FFF2-40B4-BE49-F238E27FC236}">
-                <a16:creationId xmlns:a16="http://schemas.microsoft.com/office/drawing/2014/main" id="{E5E4F6C5-2069-4CB7-913D-4927F7980510}"/>
+                <a16:creationId xmlns:a16="http://schemas.microsoft.com/office/drawing/2014/main" id="{FACDBB3B-41AA-4680-A10F-F408333443F4}"/>
               </a:ext>
             </a:extLst>
           </p:cNvPr>
@@ -26611,7 +26611,7 @@
           <p:cNvPr id="9" name="TextBox 8">
             <a:extLst xmlns:a="http://schemas.openxmlformats.org/drawingml/2006/main">
               <a:ext uri="{FF2B5EF4-FFF2-40B4-BE49-F238E27FC236}">
-                <a16:creationId xmlns:a16="http://schemas.microsoft.com/office/drawing/2014/main" id="{4E38BF82-7CDA-4C81-AFEA-BC9D8C739595}"/>
+                <a16:creationId xmlns:a16="http://schemas.microsoft.com/office/drawing/2014/main" id="{BFF4BC1E-903B-44C1-8895-045B5A56E444}"/>
               </a:ext>
             </a:extLst>
           </p:cNvPr>
@@ -26656,7 +26656,7 @@
     </p:spTree>
     <p:extLst>
       <p:ext uri="{BB962C8B-B14F-4D97-AF65-F5344CB8AC3E}">
-        <p14:creationId xmlns:p14="http://schemas.microsoft.com/office/powerpoint/2010/main" val="1430400932"/>
+        <p14:creationId xmlns:p14="http://schemas.microsoft.com/office/powerpoint/2010/main" val="874265498"/>
       </p:ext>
     </p:extLst>
   </p:cSld>
@@ -26680,7 +26680,7 @@
           <p:cNvPr id="2" name="TextBox 1">
             <a:extLst xmlns:a="http://schemas.openxmlformats.org/drawingml/2006/main">
               <a:ext uri="{FF2B5EF4-FFF2-40B4-BE49-F238E27FC236}">
-                <a16:creationId xmlns:a16="http://schemas.microsoft.com/office/drawing/2014/main" id="{47EE18FB-2D9D-4640-8B3B-BA10F9F297B2}"/>
+                <a16:creationId xmlns:a16="http://schemas.microsoft.com/office/drawing/2014/main" id="{D019EBAA-EAF6-44A3-A523-FAD9E701345A}"/>
               </a:ext>
             </a:extLst>
           </p:cNvPr>
@@ -26727,7 +26727,7 @@
           <p:cNvPr id="3" name="TextBox 2">
             <a:extLst xmlns:a="http://schemas.openxmlformats.org/drawingml/2006/main">
               <a:ext uri="{FF2B5EF4-FFF2-40B4-BE49-F238E27FC236}">
-                <a16:creationId xmlns:a16="http://schemas.microsoft.com/office/drawing/2014/main" id="{4F36A81A-2E16-463A-AE7A-DA55164CEC6E}"/>
+                <a16:creationId xmlns:a16="http://schemas.microsoft.com/office/drawing/2014/main" id="{3C13FB1A-1492-4BDF-A20F-64835E97ED01}"/>
               </a:ext>
             </a:extLst>
           </p:cNvPr>
@@ -26774,7 +26774,7 @@
           <p:cNvPr id="4" name="Rectangle 3">
             <a:extLst xmlns:a="http://schemas.openxmlformats.org/drawingml/2006/main">
               <a:ext uri="{FF2B5EF4-FFF2-40B4-BE49-F238E27FC236}">
-                <a16:creationId xmlns:a16="http://schemas.microsoft.com/office/drawing/2014/main" id="{25C1087F-AFA3-4A2A-AC06-89DF2AAB5175}"/>
+                <a16:creationId xmlns:a16="http://schemas.microsoft.com/office/drawing/2014/main" id="{C267141C-5759-4A31-95FE-F3CB7FB51C18}"/>
               </a:ext>
             </a:extLst>
           </p:cNvPr>
@@ -26829,7 +26829,7 @@
           <p:cNvPr id="5" name="Rectangle 4">
             <a:extLst xmlns:a="http://schemas.openxmlformats.org/drawingml/2006/main">
               <a:ext uri="{FF2B5EF4-FFF2-40B4-BE49-F238E27FC236}">
-                <a16:creationId xmlns:a16="http://schemas.microsoft.com/office/drawing/2014/main" id="{658B0ED8-735C-4A8E-B925-F7A619DC248A}"/>
+                <a16:creationId xmlns:a16="http://schemas.microsoft.com/office/drawing/2014/main" id="{4D666255-8A97-4B51-A758-0DFEC769D665}"/>
               </a:ext>
             </a:extLst>
           </p:cNvPr>
@@ -26884,7 +26884,7 @@
           <p:cNvPr id="6" name="TextBox 5">
             <a:extLst xmlns:a="http://schemas.openxmlformats.org/drawingml/2006/main">
               <a:ext uri="{FF2B5EF4-FFF2-40B4-BE49-F238E27FC236}">
-                <a16:creationId xmlns:a16="http://schemas.microsoft.com/office/drawing/2014/main" id="{E0F8549E-A872-49CE-9884-B06139CAEA94}"/>
+                <a16:creationId xmlns:a16="http://schemas.microsoft.com/office/drawing/2014/main" id="{7A4C7F38-DE8B-43AE-85FA-252637630A9C}"/>
               </a:ext>
             </a:extLst>
           </p:cNvPr>
@@ -26921,7 +26921,7 @@
                 <a:ea typeface="Aptos"/>
                 <a:cs typeface="Aptos"/>
               </a:rPr>
-              <a:t>Julkinen riippumaton evidenssikooste · 2026.07.24-19 · 2026-07-24 · Lähteet: Evidence Register</a:t>
+              <a:t>Julkinen riippumaton evidenssikooste · 2026.07.24-20 · 2026-07-24 · Lähteet: Evidence Register</a:t>
             </a:r>
           </a:p>
         </p:txBody>
@@ -26931,7 +26931,7 @@
           <p:cNvPr id="7" name="TextBox 6">
             <a:extLst xmlns:a="http://schemas.openxmlformats.org/drawingml/2006/main">
               <a:ext uri="{FF2B5EF4-FFF2-40B4-BE49-F238E27FC236}">
-                <a16:creationId xmlns:a16="http://schemas.microsoft.com/office/drawing/2014/main" id="{674075B9-0BC6-47D2-A150-177454B101B9}"/>
+                <a16:creationId xmlns:a16="http://schemas.microsoft.com/office/drawing/2014/main" id="{2B6CF3B6-CFA9-472C-A9A5-4FDF43D87E80}"/>
               </a:ext>
             </a:extLst>
           </p:cNvPr>
@@ -27584,7 +27584,7 @@
           <p:cNvPr id="9" name="TextBox 8">
             <a:extLst xmlns:a="http://schemas.openxmlformats.org/drawingml/2006/main">
               <a:ext uri="{FF2B5EF4-FFF2-40B4-BE49-F238E27FC236}">
-                <a16:creationId xmlns:a16="http://schemas.microsoft.com/office/drawing/2014/main" id="{D340CAD2-EECE-4D6A-8218-D3C6AF812A7D}"/>
+                <a16:creationId xmlns:a16="http://schemas.microsoft.com/office/drawing/2014/main" id="{AE3053F7-164E-470A-ABF3-83C4E1BB7FC8}"/>
               </a:ext>
             </a:extLst>
           </p:cNvPr>
@@ -27629,7 +27629,7 @@
     </p:spTree>
     <p:extLst>
       <p:ext uri="{BB962C8B-B14F-4D97-AF65-F5344CB8AC3E}">
-        <p14:creationId xmlns:p14="http://schemas.microsoft.com/office/powerpoint/2010/main" val="1820419739"/>
+        <p14:creationId xmlns:p14="http://schemas.microsoft.com/office/powerpoint/2010/main" val="1379093346"/>
       </p:ext>
     </p:extLst>
   </p:cSld>
@@ -27653,7 +27653,7 @@
           <p:cNvPr id="2" name="TextBox 1">
             <a:extLst xmlns:a="http://schemas.openxmlformats.org/drawingml/2006/main">
               <a:ext uri="{FF2B5EF4-FFF2-40B4-BE49-F238E27FC236}">
-                <a16:creationId xmlns:a16="http://schemas.microsoft.com/office/drawing/2014/main" id="{4910299E-D606-418B-BDC9-35DED3E87181}"/>
+                <a16:creationId xmlns:a16="http://schemas.microsoft.com/office/drawing/2014/main" id="{F3E730E9-D368-4BF9-8256-1EF6BF6AA6D3}"/>
               </a:ext>
             </a:extLst>
           </p:cNvPr>
@@ -27700,7 +27700,7 @@
           <p:cNvPr id="3" name="TextBox 2">
             <a:extLst xmlns:a="http://schemas.openxmlformats.org/drawingml/2006/main">
               <a:ext uri="{FF2B5EF4-FFF2-40B4-BE49-F238E27FC236}">
-                <a16:creationId xmlns:a16="http://schemas.microsoft.com/office/drawing/2014/main" id="{3D438379-C70B-4157-9566-90B90046DF89}"/>
+                <a16:creationId xmlns:a16="http://schemas.microsoft.com/office/drawing/2014/main" id="{16AD14F9-D35D-4920-AEAE-E572D875E20C}"/>
               </a:ext>
             </a:extLst>
           </p:cNvPr>
@@ -27747,7 +27747,7 @@
           <p:cNvPr id="4" name="Rectangle 3">
             <a:extLst xmlns:a="http://schemas.openxmlformats.org/drawingml/2006/main">
               <a:ext uri="{FF2B5EF4-FFF2-40B4-BE49-F238E27FC236}">
-                <a16:creationId xmlns:a16="http://schemas.microsoft.com/office/drawing/2014/main" id="{1B89B6DB-7654-40F3-9140-23A86EAB3C12}"/>
+                <a16:creationId xmlns:a16="http://schemas.microsoft.com/office/drawing/2014/main" id="{77891FE7-0F99-4F5E-84E7-762353F60FF3}"/>
               </a:ext>
             </a:extLst>
           </p:cNvPr>
@@ -27802,7 +27802,7 @@
           <p:cNvPr id="5" name="Rectangle 4">
             <a:extLst xmlns:a="http://schemas.openxmlformats.org/drawingml/2006/main">
               <a:ext uri="{FF2B5EF4-FFF2-40B4-BE49-F238E27FC236}">
-                <a16:creationId xmlns:a16="http://schemas.microsoft.com/office/drawing/2014/main" id="{33393190-6B16-4016-AEC9-069087A2D0D8}"/>
+                <a16:creationId xmlns:a16="http://schemas.microsoft.com/office/drawing/2014/main" id="{2B0C14E9-9619-4FAF-8492-558C272D981E}"/>
               </a:ext>
             </a:extLst>
           </p:cNvPr>
@@ -27857,7 +27857,7 @@
           <p:cNvPr id="6" name="TextBox 5">
             <a:extLst xmlns:a="http://schemas.openxmlformats.org/drawingml/2006/main">
               <a:ext uri="{FF2B5EF4-FFF2-40B4-BE49-F238E27FC236}">
-                <a16:creationId xmlns:a16="http://schemas.microsoft.com/office/drawing/2014/main" id="{EDCC2DA9-18ED-41B2-BA0C-BF361A9A7CB0}"/>
+                <a16:creationId xmlns:a16="http://schemas.microsoft.com/office/drawing/2014/main" id="{9717B2A8-63F8-4CBC-B07A-C2C65EAB29F7}"/>
               </a:ext>
             </a:extLst>
           </p:cNvPr>
@@ -27894,7 +27894,7 @@
                 <a:ea typeface="Aptos"/>
                 <a:cs typeface="Aptos"/>
               </a:rPr>
-              <a:t>Julkinen riippumaton evidenssikooste · 2026.07.24-19 · 2026-07-24 · Lähteet: Evidence Register; changelog</a:t>
+              <a:t>Julkinen riippumaton evidenssikooste · 2026.07.24-20 · 2026-07-24 · Lähteet: Evidence Register; changelog</a:t>
             </a:r>
           </a:p>
         </p:txBody>
@@ -27904,7 +27904,7 @@
           <p:cNvPr id="7" name="TextBox 6">
             <a:extLst xmlns:a="http://schemas.openxmlformats.org/drawingml/2006/main">
               <a:ext uri="{FF2B5EF4-FFF2-40B4-BE49-F238E27FC236}">
-                <a16:creationId xmlns:a16="http://schemas.microsoft.com/office/drawing/2014/main" id="{A159E39A-D001-415F-80AF-CB983AC6CC5C}"/>
+                <a16:creationId xmlns:a16="http://schemas.microsoft.com/office/drawing/2014/main" id="{14CF9C4A-CD6F-443B-8F35-1090A11C4167}"/>
               </a:ext>
             </a:extLst>
           </p:cNvPr>
@@ -27951,7 +27951,7 @@
           <p:cNvPr id="8" name="Rounded Rectangle 7">
             <a:extLst xmlns:a="http://schemas.openxmlformats.org/drawingml/2006/main">
               <a:ext uri="{FF2B5EF4-FFF2-40B4-BE49-F238E27FC236}">
-                <a16:creationId xmlns:a16="http://schemas.microsoft.com/office/drawing/2014/main" id="{C7D7DCFE-08D4-4A28-B9EF-78F0811459F9}"/>
+                <a16:creationId xmlns:a16="http://schemas.microsoft.com/office/drawing/2014/main" id="{00C4CD21-AF76-4D8F-8BD4-98C74C2AD36A}"/>
               </a:ext>
             </a:extLst>
           </p:cNvPr>
@@ -28008,7 +28008,7 @@
           <p:cNvPr id="9" name="TextBox 8">
             <a:extLst xmlns:a="http://schemas.openxmlformats.org/drawingml/2006/main">
               <a:ext uri="{FF2B5EF4-FFF2-40B4-BE49-F238E27FC236}">
-                <a16:creationId xmlns:a16="http://schemas.microsoft.com/office/drawing/2014/main" id="{0EA8636D-21D8-42F1-A07D-F77F74342116}"/>
+                <a16:creationId xmlns:a16="http://schemas.microsoft.com/office/drawing/2014/main" id="{5A8A2AAE-951B-4F44-80DA-C8295493F84D}"/>
               </a:ext>
             </a:extLst>
           </p:cNvPr>
@@ -28055,7 +28055,7 @@
           <p:cNvPr id="10" name="TextBox 9">
             <a:extLst xmlns:a="http://schemas.openxmlformats.org/drawingml/2006/main">
               <a:ext uri="{FF2B5EF4-FFF2-40B4-BE49-F238E27FC236}">
-                <a16:creationId xmlns:a16="http://schemas.microsoft.com/office/drawing/2014/main" id="{D83D6B62-025B-4928-8976-2643C31C1F74}"/>
+                <a16:creationId xmlns:a16="http://schemas.microsoft.com/office/drawing/2014/main" id="{894559DB-D397-4764-B258-26B56D7ACB19}"/>
               </a:ext>
             </a:extLst>
           </p:cNvPr>
@@ -28102,7 +28102,7 @@
           <p:cNvPr id="11" name="TextBox 10">
             <a:extLst xmlns:a="http://schemas.openxmlformats.org/drawingml/2006/main">
               <a:ext uri="{FF2B5EF4-FFF2-40B4-BE49-F238E27FC236}">
-                <a16:creationId xmlns:a16="http://schemas.microsoft.com/office/drawing/2014/main" id="{8E8F8819-B02E-4040-A2D7-B78E1A6E388A}"/>
+                <a16:creationId xmlns:a16="http://schemas.microsoft.com/office/drawing/2014/main" id="{AB2033FB-DE03-4143-87AF-204AFF4C20B4}"/>
               </a:ext>
             </a:extLst>
           </p:cNvPr>
@@ -28149,7 +28149,7 @@
           <p:cNvPr id="12" name="Rounded Rectangle 11">
             <a:extLst xmlns:a="http://schemas.openxmlformats.org/drawingml/2006/main">
               <a:ext uri="{FF2B5EF4-FFF2-40B4-BE49-F238E27FC236}">
-                <a16:creationId xmlns:a16="http://schemas.microsoft.com/office/drawing/2014/main" id="{A86F69CA-A6C4-4D15-B894-0D99A5CE689C}"/>
+                <a16:creationId xmlns:a16="http://schemas.microsoft.com/office/drawing/2014/main" id="{4CBCD23F-33B2-4CFA-AD5D-A77E38DBF651}"/>
               </a:ext>
             </a:extLst>
           </p:cNvPr>
@@ -28206,7 +28206,7 @@
           <p:cNvPr id="13" name="TextBox 12">
             <a:extLst xmlns:a="http://schemas.openxmlformats.org/drawingml/2006/main">
               <a:ext uri="{FF2B5EF4-FFF2-40B4-BE49-F238E27FC236}">
-                <a16:creationId xmlns:a16="http://schemas.microsoft.com/office/drawing/2014/main" id="{784A4F71-F3CE-49B1-A9A3-31079A99AB45}"/>
+                <a16:creationId xmlns:a16="http://schemas.microsoft.com/office/drawing/2014/main" id="{4C201F4E-5DD9-4933-802F-77DF3AC4A513}"/>
               </a:ext>
             </a:extLst>
           </p:cNvPr>
@@ -28253,7 +28253,7 @@
           <p:cNvPr id="14" name="TextBox 13">
             <a:extLst xmlns:a="http://schemas.openxmlformats.org/drawingml/2006/main">
               <a:ext uri="{FF2B5EF4-FFF2-40B4-BE49-F238E27FC236}">
-                <a16:creationId xmlns:a16="http://schemas.microsoft.com/office/drawing/2014/main" id="{22DAF340-368B-4EA4-9537-4F40AC81D9F7}"/>
+                <a16:creationId xmlns:a16="http://schemas.microsoft.com/office/drawing/2014/main" id="{992DE2BC-0F4E-40E7-9FAC-53EA3DDE16C7}"/>
               </a:ext>
             </a:extLst>
           </p:cNvPr>
@@ -28300,7 +28300,7 @@
           <p:cNvPr id="15" name="TextBox 14">
             <a:extLst xmlns:a="http://schemas.openxmlformats.org/drawingml/2006/main">
               <a:ext uri="{FF2B5EF4-FFF2-40B4-BE49-F238E27FC236}">
-                <a16:creationId xmlns:a16="http://schemas.microsoft.com/office/drawing/2014/main" id="{455430F4-674A-4A19-8875-EE920AF8FC60}"/>
+                <a16:creationId xmlns:a16="http://schemas.microsoft.com/office/drawing/2014/main" id="{CF037200-B9FE-4F28-89A5-968A007E8F12}"/>
               </a:ext>
             </a:extLst>
           </p:cNvPr>
@@ -28347,7 +28347,7 @@
           <p:cNvPr id="16" name="Rounded Rectangle 15">
             <a:extLst xmlns:a="http://schemas.openxmlformats.org/drawingml/2006/main">
               <a:ext uri="{FF2B5EF4-FFF2-40B4-BE49-F238E27FC236}">
-                <a16:creationId xmlns:a16="http://schemas.microsoft.com/office/drawing/2014/main" id="{0F30B8C3-A9A3-4EA7-AB23-A16A4ACEAFF8}"/>
+                <a16:creationId xmlns:a16="http://schemas.microsoft.com/office/drawing/2014/main" id="{F2436DD2-24DA-475B-A2B3-993116DC9424}"/>
               </a:ext>
             </a:extLst>
           </p:cNvPr>
@@ -28404,7 +28404,7 @@
           <p:cNvPr id="17" name="TextBox 16">
             <a:extLst xmlns:a="http://schemas.openxmlformats.org/drawingml/2006/main">
               <a:ext uri="{FF2B5EF4-FFF2-40B4-BE49-F238E27FC236}">
-                <a16:creationId xmlns:a16="http://schemas.microsoft.com/office/drawing/2014/main" id="{DE1BB2EF-BA0B-4F0D-B626-5FA3E3DE1708}"/>
+                <a16:creationId xmlns:a16="http://schemas.microsoft.com/office/drawing/2014/main" id="{E6A51A16-29B3-4C37-B130-A639373DF8CA}"/>
               </a:ext>
             </a:extLst>
           </p:cNvPr>
@@ -28451,7 +28451,7 @@
           <p:cNvPr id="18" name="TextBox 17">
             <a:extLst xmlns:a="http://schemas.openxmlformats.org/drawingml/2006/main">
               <a:ext uri="{FF2B5EF4-FFF2-40B4-BE49-F238E27FC236}">
-                <a16:creationId xmlns:a16="http://schemas.microsoft.com/office/drawing/2014/main" id="{9449D0FC-5122-4A1C-9F82-F3A201C56721}"/>
+                <a16:creationId xmlns:a16="http://schemas.microsoft.com/office/drawing/2014/main" id="{1ADDAD40-482A-414C-BB1D-3BFEB9221516}"/>
               </a:ext>
             </a:extLst>
           </p:cNvPr>
@@ -28498,7 +28498,7 @@
           <p:cNvPr id="19" name="TextBox 18">
             <a:extLst xmlns:a="http://schemas.openxmlformats.org/drawingml/2006/main">
               <a:ext uri="{FF2B5EF4-FFF2-40B4-BE49-F238E27FC236}">
-                <a16:creationId xmlns:a16="http://schemas.microsoft.com/office/drawing/2014/main" id="{5251D8D5-3EB2-454C-8FB1-EAB3C0DDACE5}"/>
+                <a16:creationId xmlns:a16="http://schemas.microsoft.com/office/drawing/2014/main" id="{9E97F099-FFDE-4250-BEF1-6BFA66CF190E}"/>
               </a:ext>
             </a:extLst>
           </p:cNvPr>
@@ -28545,7 +28545,7 @@
           <p:cNvPr id="20" name="Rounded Rectangle 19">
             <a:extLst xmlns:a="http://schemas.openxmlformats.org/drawingml/2006/main">
               <a:ext uri="{FF2B5EF4-FFF2-40B4-BE49-F238E27FC236}">
-                <a16:creationId xmlns:a16="http://schemas.microsoft.com/office/drawing/2014/main" id="{D3C43F52-C3E6-4C44-B1E4-190334A92798}"/>
+                <a16:creationId xmlns:a16="http://schemas.microsoft.com/office/drawing/2014/main" id="{EA05DC32-5739-4EF5-A956-54C8CAD9705D}"/>
               </a:ext>
             </a:extLst>
           </p:cNvPr>
@@ -28602,7 +28602,7 @@
           <p:cNvPr id="21" name="TextBox 20">
             <a:extLst xmlns:a="http://schemas.openxmlformats.org/drawingml/2006/main">
               <a:ext uri="{FF2B5EF4-FFF2-40B4-BE49-F238E27FC236}">
-                <a16:creationId xmlns:a16="http://schemas.microsoft.com/office/drawing/2014/main" id="{D245FEC3-BAB3-4488-9024-11BF17E658F9}"/>
+                <a16:creationId xmlns:a16="http://schemas.microsoft.com/office/drawing/2014/main" id="{380CB702-5D36-4289-B513-8B26683EC829}"/>
               </a:ext>
             </a:extLst>
           </p:cNvPr>
@@ -28649,7 +28649,7 @@
           <p:cNvPr id="22" name="TextBox 21">
             <a:extLst xmlns:a="http://schemas.openxmlformats.org/drawingml/2006/main">
               <a:ext uri="{FF2B5EF4-FFF2-40B4-BE49-F238E27FC236}">
-                <a16:creationId xmlns:a16="http://schemas.microsoft.com/office/drawing/2014/main" id="{C7E977CD-331A-47FC-9DD7-AB0814281F3B}"/>
+                <a16:creationId xmlns:a16="http://schemas.microsoft.com/office/drawing/2014/main" id="{A58E4663-F823-48B1-B0BB-082EDB12643C}"/>
               </a:ext>
             </a:extLst>
           </p:cNvPr>
@@ -28696,7 +28696,7 @@
           <p:cNvPr id="23" name="TextBox 22">
             <a:extLst xmlns:a="http://schemas.openxmlformats.org/drawingml/2006/main">
               <a:ext uri="{FF2B5EF4-FFF2-40B4-BE49-F238E27FC236}">
-                <a16:creationId xmlns:a16="http://schemas.microsoft.com/office/drawing/2014/main" id="{26A99C1C-C4C3-43B7-A2AC-11BAB02C7949}"/>
+                <a16:creationId xmlns:a16="http://schemas.microsoft.com/office/drawing/2014/main" id="{3926ED5D-9B13-4E11-A85A-4114EFC94A1B}"/>
               </a:ext>
             </a:extLst>
           </p:cNvPr>
@@ -28743,7 +28743,7 @@
           <p:cNvPr id="24" name="TextBox 23">
             <a:extLst xmlns:a="http://schemas.openxmlformats.org/drawingml/2006/main">
               <a:ext uri="{FF2B5EF4-FFF2-40B4-BE49-F238E27FC236}">
-                <a16:creationId xmlns:a16="http://schemas.microsoft.com/office/drawing/2014/main" id="{64D5640E-E05E-488C-82C9-8E450669F334}"/>
+                <a16:creationId xmlns:a16="http://schemas.microsoft.com/office/drawing/2014/main" id="{C616727E-BA1C-4D62-B93D-3A5079C09D26}"/>
               </a:ext>
             </a:extLst>
           </p:cNvPr>
@@ -28788,7 +28788,7 @@
     </p:spTree>
     <p:extLst>
       <p:ext uri="{BB962C8B-B14F-4D97-AF65-F5344CB8AC3E}">
-        <p14:creationId xmlns:p14="http://schemas.microsoft.com/office/powerpoint/2010/main" val="2105714055"/>
+        <p14:creationId xmlns:p14="http://schemas.microsoft.com/office/powerpoint/2010/main" val="321596649"/>
       </p:ext>
     </p:extLst>
   </p:cSld>
@@ -28812,7 +28812,7 @@
           <p:cNvPr id="2" name="TextBox 1">
             <a:extLst xmlns:a="http://schemas.openxmlformats.org/drawingml/2006/main">
               <a:ext uri="{FF2B5EF4-FFF2-40B4-BE49-F238E27FC236}">
-                <a16:creationId xmlns:a16="http://schemas.microsoft.com/office/drawing/2014/main" id="{3F3E9535-9A64-44AF-B7E1-203C02B92B03}"/>
+                <a16:creationId xmlns:a16="http://schemas.microsoft.com/office/drawing/2014/main" id="{9CE51233-D9B9-4F19-956E-D7226C004637}"/>
               </a:ext>
             </a:extLst>
           </p:cNvPr>
@@ -28859,7 +28859,7 @@
           <p:cNvPr id="3" name="TextBox 2">
             <a:extLst xmlns:a="http://schemas.openxmlformats.org/drawingml/2006/main">
               <a:ext uri="{FF2B5EF4-FFF2-40B4-BE49-F238E27FC236}">
-                <a16:creationId xmlns:a16="http://schemas.microsoft.com/office/drawing/2014/main" id="{13CE201A-943F-430C-B62C-CAEC234629B2}"/>
+                <a16:creationId xmlns:a16="http://schemas.microsoft.com/office/drawing/2014/main" id="{567859C3-8B8D-4A83-9F90-F9DCC99C3C3F}"/>
               </a:ext>
             </a:extLst>
           </p:cNvPr>
@@ -28906,7 +28906,7 @@
           <p:cNvPr id="4" name="Rectangle 3">
             <a:extLst xmlns:a="http://schemas.openxmlformats.org/drawingml/2006/main">
               <a:ext uri="{FF2B5EF4-FFF2-40B4-BE49-F238E27FC236}">
-                <a16:creationId xmlns:a16="http://schemas.microsoft.com/office/drawing/2014/main" id="{85FECCBB-D57F-418F-95F3-EBD0608B7A7D}"/>
+                <a16:creationId xmlns:a16="http://schemas.microsoft.com/office/drawing/2014/main" id="{EC0879B5-53C7-4847-B702-6F2C44A3FB27}"/>
               </a:ext>
             </a:extLst>
           </p:cNvPr>
@@ -28961,7 +28961,7 @@
           <p:cNvPr id="5" name="Rectangle 4">
             <a:extLst xmlns:a="http://schemas.openxmlformats.org/drawingml/2006/main">
               <a:ext uri="{FF2B5EF4-FFF2-40B4-BE49-F238E27FC236}">
-                <a16:creationId xmlns:a16="http://schemas.microsoft.com/office/drawing/2014/main" id="{045C31AB-9F7E-427F-8881-86098C1A7B9B}"/>
+                <a16:creationId xmlns:a16="http://schemas.microsoft.com/office/drawing/2014/main" id="{CCCE5BB4-90A2-4AFC-9BEE-A1B4C6A72DE7}"/>
               </a:ext>
             </a:extLst>
           </p:cNvPr>
@@ -29016,7 +29016,7 @@
           <p:cNvPr id="6" name="TextBox 5">
             <a:extLst xmlns:a="http://schemas.openxmlformats.org/drawingml/2006/main">
               <a:ext uri="{FF2B5EF4-FFF2-40B4-BE49-F238E27FC236}">
-                <a16:creationId xmlns:a16="http://schemas.microsoft.com/office/drawing/2014/main" id="{BE6137E4-3682-4CDB-85D6-A56496339216}"/>
+                <a16:creationId xmlns:a16="http://schemas.microsoft.com/office/drawing/2014/main" id="{776622F5-9908-4DA0-86A8-3212FB37AB82}"/>
               </a:ext>
             </a:extLst>
           </p:cNvPr>
@@ -29053,7 +29053,7 @@
                 <a:ea typeface="Aptos"/>
                 <a:cs typeface="Aptos"/>
               </a:rPr>
-              <a:t>Julkinen riippumaton evidenssikooste · 2026.07.24-19 · 2026-07-24 · Lähteet: EPO; 8 Ni 18/24 (EP); 7 O 3341/24</a:t>
+              <a:t>Julkinen riippumaton evidenssikooste · 2026.07.24-20 · 2026-07-24 · Lähteet: EPO; 8 Ni 18/24 (EP); 7 O 3341/24</a:t>
             </a:r>
           </a:p>
         </p:txBody>
@@ -29063,7 +29063,7 @@
           <p:cNvPr id="7" name="TextBox 6">
             <a:extLst xmlns:a="http://schemas.openxmlformats.org/drawingml/2006/main">
               <a:ext uri="{FF2B5EF4-FFF2-40B4-BE49-F238E27FC236}">
-                <a16:creationId xmlns:a16="http://schemas.microsoft.com/office/drawing/2014/main" id="{B0F6FF27-8DF5-428E-903D-7ACBE5873284}"/>
+                <a16:creationId xmlns:a16="http://schemas.microsoft.com/office/drawing/2014/main" id="{8889BB79-E1F6-410E-9960-E01F2FF42833}"/>
               </a:ext>
             </a:extLst>
           </p:cNvPr>
@@ -29467,7 +29467,7 @@
           <p:cNvPr id="9" name="TextBox 8">
             <a:extLst xmlns:a="http://schemas.openxmlformats.org/drawingml/2006/main">
               <a:ext uri="{FF2B5EF4-FFF2-40B4-BE49-F238E27FC236}">
-                <a16:creationId xmlns:a16="http://schemas.microsoft.com/office/drawing/2014/main" id="{29CD01B2-916F-476F-83A7-7265AE3F4503}"/>
+                <a16:creationId xmlns:a16="http://schemas.microsoft.com/office/drawing/2014/main" id="{8C71A6C4-F53C-41E6-988A-A7918682FE2D}"/>
               </a:ext>
             </a:extLst>
           </p:cNvPr>
@@ -29512,7 +29512,7 @@
     </p:spTree>
     <p:extLst>
       <p:ext uri="{BB962C8B-B14F-4D97-AF65-F5344CB8AC3E}">
-        <p14:creationId xmlns:p14="http://schemas.microsoft.com/office/powerpoint/2010/main" val="1947042971"/>
+        <p14:creationId xmlns:p14="http://schemas.microsoft.com/office/powerpoint/2010/main" val="1298014076"/>
       </p:ext>
     </p:extLst>
   </p:cSld>
@@ -29543,7 +29543,7 @@
           <p:cNvPr id="2" name="TextBox 1">
             <a:extLst xmlns:a="http://schemas.openxmlformats.org/drawingml/2006/main">
               <a:ext uri="{FF2B5EF4-FFF2-40B4-BE49-F238E27FC236}">
-                <a16:creationId xmlns:a16="http://schemas.microsoft.com/office/drawing/2014/main" id="{327B96C5-8B42-481C-A7BD-3D9DB0C3BF19}"/>
+                <a16:creationId xmlns:a16="http://schemas.microsoft.com/office/drawing/2014/main" id="{CD1CC814-26E8-40E5-9BAB-DED64C0A0868}"/>
               </a:ext>
             </a:extLst>
           </p:cNvPr>
@@ -29590,7 +29590,7 @@
           <p:cNvPr id="3" name="TextBox 2">
             <a:extLst xmlns:a="http://schemas.openxmlformats.org/drawingml/2006/main">
               <a:ext uri="{FF2B5EF4-FFF2-40B4-BE49-F238E27FC236}">
-                <a16:creationId xmlns:a16="http://schemas.microsoft.com/office/drawing/2014/main" id="{970F58A9-4FAD-41A8-92C9-BCB273737EB3}"/>
+                <a16:creationId xmlns:a16="http://schemas.microsoft.com/office/drawing/2014/main" id="{C0C893F9-06DF-49D3-B77F-A11B33A48987}"/>
               </a:ext>
             </a:extLst>
           </p:cNvPr>
@@ -29637,7 +29637,7 @@
           <p:cNvPr id="4" name="TextBox 3">
             <a:extLst xmlns:a="http://schemas.openxmlformats.org/drawingml/2006/main">
               <a:ext uri="{FF2B5EF4-FFF2-40B4-BE49-F238E27FC236}">
-                <a16:creationId xmlns:a16="http://schemas.microsoft.com/office/drawing/2014/main" id="{48ED9622-7D42-4C55-9B64-2872AF6EB7B2}"/>
+                <a16:creationId xmlns:a16="http://schemas.microsoft.com/office/drawing/2014/main" id="{257A049C-E05F-4278-8DDA-749AB2DD9E7C}"/>
               </a:ext>
             </a:extLst>
           </p:cNvPr>
@@ -29756,7 +29756,7 @@
           <p:cNvPr id="5" name="TextBox 4">
             <a:extLst xmlns:a="http://schemas.openxmlformats.org/drawingml/2006/main">
               <a:ext uri="{FF2B5EF4-FFF2-40B4-BE49-F238E27FC236}">
-                <a16:creationId xmlns:a16="http://schemas.microsoft.com/office/drawing/2014/main" id="{742FBFA6-634E-4022-B2E4-3E857563EFC2}"/>
+                <a16:creationId xmlns:a16="http://schemas.microsoft.com/office/drawing/2014/main" id="{2B295E1A-DE26-4922-9924-DAD0A587A9D4}"/>
               </a:ext>
             </a:extLst>
           </p:cNvPr>
@@ -29793,7 +29793,7 @@
                 <a:ea typeface="Aptos"/>
                 <a:cs typeface="Aptos"/>
               </a:rPr>
-              <a:t>Versio 2026.07.24-19 · 2026-07-24 · 30 / 30</a:t>
+              <a:t>Versio 2026.07.24-20 · 2026-07-24 · 30 / 30</a:t>
             </a:r>
           </a:p>
         </p:txBody>
@@ -29801,7 +29801,7 @@
     </p:spTree>
     <p:extLst>
       <p:ext uri="{BB962C8B-B14F-4D97-AF65-F5344CB8AC3E}">
-        <p14:creationId xmlns:p14="http://schemas.microsoft.com/office/powerpoint/2010/main" val="1708089576"/>
+        <p14:creationId xmlns:p14="http://schemas.microsoft.com/office/powerpoint/2010/main" val="1716641101"/>
       </p:ext>
     </p:extLst>
   </p:cSld>
@@ -29825,7 +29825,7 @@
           <p:cNvPr id="2" name="TextBox 1">
             <a:extLst xmlns:a="http://schemas.openxmlformats.org/drawingml/2006/main">
               <a:ext uri="{FF2B5EF4-FFF2-40B4-BE49-F238E27FC236}">
-                <a16:creationId xmlns:a16="http://schemas.microsoft.com/office/drawing/2014/main" id="{C6E9F5D8-443E-416B-994C-BB3B3B47404D}"/>
+                <a16:creationId xmlns:a16="http://schemas.microsoft.com/office/drawing/2014/main" id="{3F8154E4-438C-4F8E-9896-5474B8E62727}"/>
               </a:ext>
             </a:extLst>
           </p:cNvPr>
@@ -29872,7 +29872,7 @@
           <p:cNvPr id="3" name="TextBox 2">
             <a:extLst xmlns:a="http://schemas.openxmlformats.org/drawingml/2006/main">
               <a:ext uri="{FF2B5EF4-FFF2-40B4-BE49-F238E27FC236}">
-                <a16:creationId xmlns:a16="http://schemas.microsoft.com/office/drawing/2014/main" id="{F3FA69BB-C145-46ED-8209-A8BAAC47B556}"/>
+                <a16:creationId xmlns:a16="http://schemas.microsoft.com/office/drawing/2014/main" id="{F3F50B5E-7AF3-4255-9706-87318FFD1CD9}"/>
               </a:ext>
             </a:extLst>
           </p:cNvPr>
@@ -29919,7 +29919,7 @@
           <p:cNvPr id="4" name="Rectangle 3">
             <a:extLst xmlns:a="http://schemas.openxmlformats.org/drawingml/2006/main">
               <a:ext uri="{FF2B5EF4-FFF2-40B4-BE49-F238E27FC236}">
-                <a16:creationId xmlns:a16="http://schemas.microsoft.com/office/drawing/2014/main" id="{1F698AA4-4769-48F9-8F0B-4C27C95066E0}"/>
+                <a16:creationId xmlns:a16="http://schemas.microsoft.com/office/drawing/2014/main" id="{21051BC3-5063-45DC-B7DC-E57081D4F415}"/>
               </a:ext>
             </a:extLst>
           </p:cNvPr>
@@ -29974,7 +29974,7 @@
           <p:cNvPr id="5" name="Rectangle 4">
             <a:extLst xmlns:a="http://schemas.openxmlformats.org/drawingml/2006/main">
               <a:ext uri="{FF2B5EF4-FFF2-40B4-BE49-F238E27FC236}">
-                <a16:creationId xmlns:a16="http://schemas.microsoft.com/office/drawing/2014/main" id="{A5980600-208A-4CAD-B2D9-41DDA9BFD247}"/>
+                <a16:creationId xmlns:a16="http://schemas.microsoft.com/office/drawing/2014/main" id="{B8F682C8-2001-4EFD-81DB-9F497CF0C19D}"/>
               </a:ext>
             </a:extLst>
           </p:cNvPr>
@@ -30029,7 +30029,7 @@
           <p:cNvPr id="6" name="TextBox 5">
             <a:extLst xmlns:a="http://schemas.openxmlformats.org/drawingml/2006/main">
               <a:ext uri="{FF2B5EF4-FFF2-40B4-BE49-F238E27FC236}">
-                <a16:creationId xmlns:a16="http://schemas.microsoft.com/office/drawing/2014/main" id="{1996BF47-23D8-4E1A-BC0E-A9C4C81FA4C7}"/>
+                <a16:creationId xmlns:a16="http://schemas.microsoft.com/office/drawing/2014/main" id="{2953CC70-242C-4C91-BB2B-BD31A92C9BA1}"/>
               </a:ext>
             </a:extLst>
           </p:cNvPr>
@@ -30066,7 +30066,7 @@
                 <a:ea typeface="Aptos"/>
                 <a:cs typeface="Aptos"/>
               </a:rPr>
-              <a:t>Julkinen riippumaton evidenssikooste · 2026.07.24-19 · 2026-07-24 · Lähteet: Evidence Register; WIPO</a:t>
+              <a:t>Julkinen riippumaton evidenssikooste · 2026.07.24-20 · 2026-07-24 · Lähteet: Evidence Register; WIPO</a:t>
             </a:r>
           </a:p>
         </p:txBody>
@@ -30076,7 +30076,7 @@
           <p:cNvPr id="7" name="TextBox 6">
             <a:extLst xmlns:a="http://schemas.openxmlformats.org/drawingml/2006/main">
               <a:ext uri="{FF2B5EF4-FFF2-40B4-BE49-F238E27FC236}">
-                <a16:creationId xmlns:a16="http://schemas.microsoft.com/office/drawing/2014/main" id="{FF9D193B-3F55-4750-AD23-B7C643B58D53}"/>
+                <a16:creationId xmlns:a16="http://schemas.microsoft.com/office/drawing/2014/main" id="{30890762-5EAB-430A-A424-69CC4FABA423}"/>
               </a:ext>
             </a:extLst>
           </p:cNvPr>
@@ -30123,7 +30123,7 @@
           <p:cNvPr id="8" name="TextBox 7">
             <a:extLst xmlns:a="http://schemas.openxmlformats.org/drawingml/2006/main">
               <a:ext uri="{FF2B5EF4-FFF2-40B4-BE49-F238E27FC236}">
-                <a16:creationId xmlns:a16="http://schemas.microsoft.com/office/drawing/2014/main" id="{52EEE6FC-65F4-4C9C-B1D5-80373CF74633}"/>
+                <a16:creationId xmlns:a16="http://schemas.microsoft.com/office/drawing/2014/main" id="{119F4BB7-B049-4540-BF6C-C98633EA7129}"/>
               </a:ext>
             </a:extLst>
           </p:cNvPr>
@@ -30170,7 +30170,7 @@
           <p:cNvPr id="9" name="TextBox 8">
             <a:extLst xmlns:a="http://schemas.openxmlformats.org/drawingml/2006/main">
               <a:ext uri="{FF2B5EF4-FFF2-40B4-BE49-F238E27FC236}">
-                <a16:creationId xmlns:a16="http://schemas.microsoft.com/office/drawing/2014/main" id="{B471C712-B46D-4CBB-BC6E-D692BA6C55BA}"/>
+                <a16:creationId xmlns:a16="http://schemas.microsoft.com/office/drawing/2014/main" id="{6EF66C47-98B5-4595-891C-304EBEC26213}"/>
               </a:ext>
             </a:extLst>
           </p:cNvPr>
@@ -30267,7 +30267,7 @@
           <p:cNvPr id="10" name="Rounded Rectangle 9">
             <a:extLst xmlns:a="http://schemas.openxmlformats.org/drawingml/2006/main">
               <a:ext uri="{FF2B5EF4-FFF2-40B4-BE49-F238E27FC236}">
-                <a16:creationId xmlns:a16="http://schemas.microsoft.com/office/drawing/2014/main" id="{561B8388-8255-4420-AB31-CB33D0731CA3}"/>
+                <a16:creationId xmlns:a16="http://schemas.microsoft.com/office/drawing/2014/main" id="{A1FFD67B-D82F-4B42-BB95-2B81114A506D}"/>
               </a:ext>
             </a:extLst>
           </p:cNvPr>
@@ -30324,7 +30324,7 @@
           <p:cNvPr id="11" name="TextBox 10">
             <a:extLst xmlns:a="http://schemas.openxmlformats.org/drawingml/2006/main">
               <a:ext uri="{FF2B5EF4-FFF2-40B4-BE49-F238E27FC236}">
-                <a16:creationId xmlns:a16="http://schemas.microsoft.com/office/drawing/2014/main" id="{851595ED-D36D-4BD6-81A8-4ACB5EFD7DD3}"/>
+                <a16:creationId xmlns:a16="http://schemas.microsoft.com/office/drawing/2014/main" id="{E8571A7E-E50A-44D1-938F-23AE75C0DD7C}"/>
               </a:ext>
             </a:extLst>
           </p:cNvPr>
@@ -30371,7 +30371,7 @@
           <p:cNvPr id="12" name="TextBox 11">
             <a:extLst xmlns:a="http://schemas.openxmlformats.org/drawingml/2006/main">
               <a:ext uri="{FF2B5EF4-FFF2-40B4-BE49-F238E27FC236}">
-                <a16:creationId xmlns:a16="http://schemas.microsoft.com/office/drawing/2014/main" id="{7CA03B1F-6DCA-47F9-895F-6678461C24C8}"/>
+                <a16:creationId xmlns:a16="http://schemas.microsoft.com/office/drawing/2014/main" id="{1D6030E3-D80B-4C5F-8EEE-97EC14A87DF6}"/>
               </a:ext>
             </a:extLst>
           </p:cNvPr>
@@ -30416,7 +30416,7 @@
     </p:spTree>
     <p:extLst>
       <p:ext uri="{BB962C8B-B14F-4D97-AF65-F5344CB8AC3E}">
-        <p14:creationId xmlns:p14="http://schemas.microsoft.com/office/powerpoint/2010/main" val="698994544"/>
+        <p14:creationId xmlns:p14="http://schemas.microsoft.com/office/powerpoint/2010/main" val="759041312"/>
       </p:ext>
     </p:extLst>
   </p:cSld>
@@ -30440,7 +30440,7 @@
           <p:cNvPr id="2" name="TextBox 1">
             <a:extLst xmlns:a="http://schemas.openxmlformats.org/drawingml/2006/main">
               <a:ext uri="{FF2B5EF4-FFF2-40B4-BE49-F238E27FC236}">
-                <a16:creationId xmlns:a16="http://schemas.microsoft.com/office/drawing/2014/main" id="{CC109938-4FE3-4549-8719-34A6BF063637}"/>
+                <a16:creationId xmlns:a16="http://schemas.microsoft.com/office/drawing/2014/main" id="{39EBEE27-5E50-448D-9925-3D74EAE42FD0}"/>
               </a:ext>
             </a:extLst>
           </p:cNvPr>
@@ -30487,7 +30487,7 @@
           <p:cNvPr id="3" name="TextBox 2">
             <a:extLst xmlns:a="http://schemas.openxmlformats.org/drawingml/2006/main">
               <a:ext uri="{FF2B5EF4-FFF2-40B4-BE49-F238E27FC236}">
-                <a16:creationId xmlns:a16="http://schemas.microsoft.com/office/drawing/2014/main" id="{7D6D8616-9DC3-4BA1-9CD7-13FCDC70EB9B}"/>
+                <a16:creationId xmlns:a16="http://schemas.microsoft.com/office/drawing/2014/main" id="{B94AA2D1-15FF-42AB-B7DF-A574230B42A2}"/>
               </a:ext>
             </a:extLst>
           </p:cNvPr>
@@ -30534,7 +30534,7 @@
           <p:cNvPr id="4" name="Rectangle 3">
             <a:extLst xmlns:a="http://schemas.openxmlformats.org/drawingml/2006/main">
               <a:ext uri="{FF2B5EF4-FFF2-40B4-BE49-F238E27FC236}">
-                <a16:creationId xmlns:a16="http://schemas.microsoft.com/office/drawing/2014/main" id="{B5595A79-87C9-47A1-A892-99DA0CD1D118}"/>
+                <a16:creationId xmlns:a16="http://schemas.microsoft.com/office/drawing/2014/main" id="{CBD0E055-739B-4BF4-B9AC-968A8AB5A48F}"/>
               </a:ext>
             </a:extLst>
           </p:cNvPr>
@@ -30589,7 +30589,7 @@
           <p:cNvPr id="5" name="Rectangle 4">
             <a:extLst xmlns:a="http://schemas.openxmlformats.org/drawingml/2006/main">
               <a:ext uri="{FF2B5EF4-FFF2-40B4-BE49-F238E27FC236}">
-                <a16:creationId xmlns:a16="http://schemas.microsoft.com/office/drawing/2014/main" id="{05629F87-EBF9-4925-BA9C-B239135C9CEB}"/>
+                <a16:creationId xmlns:a16="http://schemas.microsoft.com/office/drawing/2014/main" id="{04A894D0-907A-42B0-9634-B731B375D2BA}"/>
               </a:ext>
             </a:extLst>
           </p:cNvPr>
@@ -30644,7 +30644,7 @@
           <p:cNvPr id="6" name="TextBox 5">
             <a:extLst xmlns:a="http://schemas.openxmlformats.org/drawingml/2006/main">
               <a:ext uri="{FF2B5EF4-FFF2-40B4-BE49-F238E27FC236}">
-                <a16:creationId xmlns:a16="http://schemas.microsoft.com/office/drawing/2014/main" id="{57F193D4-123D-455D-827D-3CA4A9A90548}"/>
+                <a16:creationId xmlns:a16="http://schemas.microsoft.com/office/drawing/2014/main" id="{EFE302CF-E220-405A-AAD0-B89B4B19E3A2}"/>
               </a:ext>
             </a:extLst>
           </p:cNvPr>
@@ -30681,7 +30681,7 @@
                 <a:ea typeface="Aptos"/>
                 <a:cs typeface="Aptos"/>
               </a:rPr>
-              <a:t>Julkinen riippumaton evidenssikooste · 2026.07.24-19 · 2026-07-24 · Lähteet: EP3032975B2</a:t>
+              <a:t>Julkinen riippumaton evidenssikooste · 2026.07.24-20 · 2026-07-24 · Lähteet: EP3032975B2</a:t>
             </a:r>
           </a:p>
         </p:txBody>
@@ -30691,7 +30691,7 @@
           <p:cNvPr id="7" name="TextBox 6">
             <a:extLst xmlns:a="http://schemas.openxmlformats.org/drawingml/2006/main">
               <a:ext uri="{FF2B5EF4-FFF2-40B4-BE49-F238E27FC236}">
-                <a16:creationId xmlns:a16="http://schemas.microsoft.com/office/drawing/2014/main" id="{B4D70EA7-CD36-40FB-A16D-DD5BAFCE7F9A}"/>
+                <a16:creationId xmlns:a16="http://schemas.microsoft.com/office/drawing/2014/main" id="{C22104D4-F4E1-48DC-AE68-0D4C44BE7218}"/>
               </a:ext>
             </a:extLst>
           </p:cNvPr>
@@ -30738,7 +30738,7 @@
           <p:cNvPr id="8" name="TextBox 7">
             <a:extLst xmlns:a="http://schemas.openxmlformats.org/drawingml/2006/main">
               <a:ext uri="{FF2B5EF4-FFF2-40B4-BE49-F238E27FC236}">
-                <a16:creationId xmlns:a16="http://schemas.microsoft.com/office/drawing/2014/main" id="{C9C0B7AB-0850-4D20-9B9B-EC749FE1D891}"/>
+                <a16:creationId xmlns:a16="http://schemas.microsoft.com/office/drawing/2014/main" id="{7BAF1E44-C9BB-4F93-BCBF-C39432688B46}"/>
               </a:ext>
             </a:extLst>
           </p:cNvPr>
@@ -30785,7 +30785,7 @@
           <p:cNvPr id="9" name="TextBox 8">
             <a:extLst xmlns:a="http://schemas.openxmlformats.org/drawingml/2006/main">
               <a:ext uri="{FF2B5EF4-FFF2-40B4-BE49-F238E27FC236}">
-                <a16:creationId xmlns:a16="http://schemas.microsoft.com/office/drawing/2014/main" id="{8BD593F2-0C66-44F8-BB92-7A88314DFED1}"/>
+                <a16:creationId xmlns:a16="http://schemas.microsoft.com/office/drawing/2014/main" id="{E8E29D9D-F863-4859-8279-FDC4AFD80043}"/>
               </a:ext>
             </a:extLst>
           </p:cNvPr>
@@ -30882,7 +30882,7 @@
           <p:cNvPr id="10" name="Rounded Rectangle 9">
             <a:extLst xmlns:a="http://schemas.openxmlformats.org/drawingml/2006/main">
               <a:ext uri="{FF2B5EF4-FFF2-40B4-BE49-F238E27FC236}">
-                <a16:creationId xmlns:a16="http://schemas.microsoft.com/office/drawing/2014/main" id="{80834F18-FA94-4BF2-8150-3B5B1ABCB3CD}"/>
+                <a16:creationId xmlns:a16="http://schemas.microsoft.com/office/drawing/2014/main" id="{B881E9BB-05CF-47AC-B373-F9FE08F9A84B}"/>
               </a:ext>
             </a:extLst>
           </p:cNvPr>
@@ -30939,7 +30939,7 @@
           <p:cNvPr id="11" name="TextBox 10">
             <a:extLst xmlns:a="http://schemas.openxmlformats.org/drawingml/2006/main">
               <a:ext uri="{FF2B5EF4-FFF2-40B4-BE49-F238E27FC236}">
-                <a16:creationId xmlns:a16="http://schemas.microsoft.com/office/drawing/2014/main" id="{A8A2D3E2-3E8B-4197-9A06-D4C99E64E307}"/>
+                <a16:creationId xmlns:a16="http://schemas.microsoft.com/office/drawing/2014/main" id="{5797EE86-5F89-4C1F-8277-2BA7D1ACDF8D}"/>
               </a:ext>
             </a:extLst>
           </p:cNvPr>
@@ -30986,7 +30986,7 @@
           <p:cNvPr id="12" name="TextBox 11">
             <a:extLst xmlns:a="http://schemas.openxmlformats.org/drawingml/2006/main">
               <a:ext uri="{FF2B5EF4-FFF2-40B4-BE49-F238E27FC236}">
-                <a16:creationId xmlns:a16="http://schemas.microsoft.com/office/drawing/2014/main" id="{B159DF3A-7D36-4C90-966B-8213C3E2D0FD}"/>
+                <a16:creationId xmlns:a16="http://schemas.microsoft.com/office/drawing/2014/main" id="{6D271C89-319E-424D-A451-BC75D54C1542}"/>
               </a:ext>
             </a:extLst>
           </p:cNvPr>
@@ -31031,7 +31031,7 @@
     </p:spTree>
     <p:extLst>
       <p:ext uri="{BB962C8B-B14F-4D97-AF65-F5344CB8AC3E}">
-        <p14:creationId xmlns:p14="http://schemas.microsoft.com/office/powerpoint/2010/main" val="969101256"/>
+        <p14:creationId xmlns:p14="http://schemas.microsoft.com/office/powerpoint/2010/main" val="992762806"/>
       </p:ext>
     </p:extLst>
   </p:cSld>
@@ -31055,7 +31055,7 @@
           <p:cNvPr id="2" name="TextBox 1">
             <a:extLst xmlns:a="http://schemas.openxmlformats.org/drawingml/2006/main">
               <a:ext uri="{FF2B5EF4-FFF2-40B4-BE49-F238E27FC236}">
-                <a16:creationId xmlns:a16="http://schemas.microsoft.com/office/drawing/2014/main" id="{43BF8E84-8019-4C67-A02A-BFBA56235A4F}"/>
+                <a16:creationId xmlns:a16="http://schemas.microsoft.com/office/drawing/2014/main" id="{5DB23D99-53F3-47DE-A128-CCFEDD17358C}"/>
               </a:ext>
             </a:extLst>
           </p:cNvPr>
@@ -31102,7 +31102,7 @@
           <p:cNvPr id="3" name="TextBox 2">
             <a:extLst xmlns:a="http://schemas.openxmlformats.org/drawingml/2006/main">
               <a:ext uri="{FF2B5EF4-FFF2-40B4-BE49-F238E27FC236}">
-                <a16:creationId xmlns:a16="http://schemas.microsoft.com/office/drawing/2014/main" id="{B98199CA-DCC9-4D25-834C-87CC2420BDB3}"/>
+                <a16:creationId xmlns:a16="http://schemas.microsoft.com/office/drawing/2014/main" id="{97AC3098-90A7-48C8-8237-906C6C682490}"/>
               </a:ext>
             </a:extLst>
           </p:cNvPr>
@@ -31149,7 +31149,7 @@
           <p:cNvPr id="4" name="Rectangle 3">
             <a:extLst xmlns:a="http://schemas.openxmlformats.org/drawingml/2006/main">
               <a:ext uri="{FF2B5EF4-FFF2-40B4-BE49-F238E27FC236}">
-                <a16:creationId xmlns:a16="http://schemas.microsoft.com/office/drawing/2014/main" id="{A3217065-BA99-4625-8C61-09D623A7AC59}"/>
+                <a16:creationId xmlns:a16="http://schemas.microsoft.com/office/drawing/2014/main" id="{0F45742C-E0F2-42ED-BD56-2E9B8816BE0A}"/>
               </a:ext>
             </a:extLst>
           </p:cNvPr>
@@ -31204,7 +31204,7 @@
           <p:cNvPr id="5" name="Rectangle 4">
             <a:extLst xmlns:a="http://schemas.openxmlformats.org/drawingml/2006/main">
               <a:ext uri="{FF2B5EF4-FFF2-40B4-BE49-F238E27FC236}">
-                <a16:creationId xmlns:a16="http://schemas.microsoft.com/office/drawing/2014/main" id="{04745F6B-1D0C-4F5B-88FB-1A3E2616382D}"/>
+                <a16:creationId xmlns:a16="http://schemas.microsoft.com/office/drawing/2014/main" id="{2AD447A0-998F-4ED7-A823-ADB3BC22BAE3}"/>
               </a:ext>
             </a:extLst>
           </p:cNvPr>
@@ -31259,7 +31259,7 @@
           <p:cNvPr id="6" name="TextBox 5">
             <a:extLst xmlns:a="http://schemas.openxmlformats.org/drawingml/2006/main">
               <a:ext uri="{FF2B5EF4-FFF2-40B4-BE49-F238E27FC236}">
-                <a16:creationId xmlns:a16="http://schemas.microsoft.com/office/drawing/2014/main" id="{076F2374-5C86-4220-84B0-6AAA8DB6BBF7}"/>
+                <a16:creationId xmlns:a16="http://schemas.microsoft.com/office/drawing/2014/main" id="{62E41758-94C8-4255-8B6E-96AF94B5B7A4}"/>
               </a:ext>
             </a:extLst>
           </p:cNvPr>
@@ -31296,7 +31296,7 @@
                 <a:ea typeface="Aptos"/>
                 <a:cs typeface="Aptos"/>
               </a:rPr>
-              <a:t>Julkinen riippumaton evidenssikooste · 2026.07.24-19 · 2026-07-24 · Lähteet: EP3032975B2</a:t>
+              <a:t>Julkinen riippumaton evidenssikooste · 2026.07.24-20 · 2026-07-24 · Lähteet: EP3032975B2</a:t>
             </a:r>
           </a:p>
         </p:txBody>
@@ -31306,7 +31306,7 @@
           <p:cNvPr id="7" name="TextBox 6">
             <a:extLst xmlns:a="http://schemas.openxmlformats.org/drawingml/2006/main">
               <a:ext uri="{FF2B5EF4-FFF2-40B4-BE49-F238E27FC236}">
-                <a16:creationId xmlns:a16="http://schemas.microsoft.com/office/drawing/2014/main" id="{A484D729-9952-40EB-908D-3CEF7101EF6B}"/>
+                <a16:creationId xmlns:a16="http://schemas.microsoft.com/office/drawing/2014/main" id="{0F632F4E-7B9E-47E5-B378-B430A218DF54}"/>
               </a:ext>
             </a:extLst>
           </p:cNvPr>
@@ -31876,7 +31876,7 @@
           <p:cNvPr id="9" name="TextBox 8">
             <a:extLst xmlns:a="http://schemas.openxmlformats.org/drawingml/2006/main">
               <a:ext uri="{FF2B5EF4-FFF2-40B4-BE49-F238E27FC236}">
-                <a16:creationId xmlns:a16="http://schemas.microsoft.com/office/drawing/2014/main" id="{98DEBB15-0753-41BC-AC18-7A5E5F3DB8C8}"/>
+                <a16:creationId xmlns:a16="http://schemas.microsoft.com/office/drawing/2014/main" id="{E32A536A-0EA5-48D5-87ED-0218428E3667}"/>
               </a:ext>
             </a:extLst>
           </p:cNvPr>
@@ -31921,7 +31921,7 @@
     </p:spTree>
     <p:extLst>
       <p:ext uri="{BB962C8B-B14F-4D97-AF65-F5344CB8AC3E}">
-        <p14:creationId xmlns:p14="http://schemas.microsoft.com/office/powerpoint/2010/main" val="1386730628"/>
+        <p14:creationId xmlns:p14="http://schemas.microsoft.com/office/powerpoint/2010/main" val="1245783480"/>
       </p:ext>
     </p:extLst>
   </p:cSld>
@@ -31945,7 +31945,7 @@
           <p:cNvPr id="2" name="TextBox 1">
             <a:extLst xmlns:a="http://schemas.openxmlformats.org/drawingml/2006/main">
               <a:ext uri="{FF2B5EF4-FFF2-40B4-BE49-F238E27FC236}">
-                <a16:creationId xmlns:a16="http://schemas.microsoft.com/office/drawing/2014/main" id="{6A836B07-500B-400D-9346-6039E139D5D5}"/>
+                <a16:creationId xmlns:a16="http://schemas.microsoft.com/office/drawing/2014/main" id="{4698E276-6AEB-43A0-9CBC-87FDBBAB5FD5}"/>
               </a:ext>
             </a:extLst>
           </p:cNvPr>
@@ -31992,7 +31992,7 @@
           <p:cNvPr id="3" name="TextBox 2">
             <a:extLst xmlns:a="http://schemas.openxmlformats.org/drawingml/2006/main">
               <a:ext uri="{FF2B5EF4-FFF2-40B4-BE49-F238E27FC236}">
-                <a16:creationId xmlns:a16="http://schemas.microsoft.com/office/drawing/2014/main" id="{ABDF915D-371B-44AB-9937-99A30ED1F5BD}"/>
+                <a16:creationId xmlns:a16="http://schemas.microsoft.com/office/drawing/2014/main" id="{5898BAE3-4A0C-45EF-9F00-99D89AE3E4E9}"/>
               </a:ext>
             </a:extLst>
           </p:cNvPr>
@@ -32039,7 +32039,7 @@
           <p:cNvPr id="4" name="Rectangle 3">
             <a:extLst xmlns:a="http://schemas.openxmlformats.org/drawingml/2006/main">
               <a:ext uri="{FF2B5EF4-FFF2-40B4-BE49-F238E27FC236}">
-                <a16:creationId xmlns:a16="http://schemas.microsoft.com/office/drawing/2014/main" id="{1118F028-095F-44A6-B153-675FF40B13B7}"/>
+                <a16:creationId xmlns:a16="http://schemas.microsoft.com/office/drawing/2014/main" id="{A2BEE312-AE35-4A12-89BB-F59D49B5D97B}"/>
               </a:ext>
             </a:extLst>
           </p:cNvPr>
@@ -32094,7 +32094,7 @@
           <p:cNvPr id="5" name="Rectangle 4">
             <a:extLst xmlns:a="http://schemas.openxmlformats.org/drawingml/2006/main">
               <a:ext uri="{FF2B5EF4-FFF2-40B4-BE49-F238E27FC236}">
-                <a16:creationId xmlns:a16="http://schemas.microsoft.com/office/drawing/2014/main" id="{AAD4A01C-CFE2-40EB-982A-09F5FCBC30A5}"/>
+                <a16:creationId xmlns:a16="http://schemas.microsoft.com/office/drawing/2014/main" id="{7F8E21BE-9638-4365-9CFD-9733CC917143}"/>
               </a:ext>
             </a:extLst>
           </p:cNvPr>
@@ -32149,7 +32149,7 @@
           <p:cNvPr id="6" name="TextBox 5">
             <a:extLst xmlns:a="http://schemas.openxmlformats.org/drawingml/2006/main">
               <a:ext uri="{FF2B5EF4-FFF2-40B4-BE49-F238E27FC236}">
-                <a16:creationId xmlns:a16="http://schemas.microsoft.com/office/drawing/2014/main" id="{B4D18838-7C54-467D-A634-539A90963BDA}"/>
+                <a16:creationId xmlns:a16="http://schemas.microsoft.com/office/drawing/2014/main" id="{6152B4FE-EB5E-433D-9EBD-B19D8F3B8CDA}"/>
               </a:ext>
             </a:extLst>
           </p:cNvPr>
@@ -32186,7 +32186,7 @@
                 <a:ea typeface="Aptos"/>
                 <a:cs typeface="Aptos"/>
               </a:rPr>
-              <a:t>Julkinen riippumaton evidenssikooste · 2026.07.24-19 · 2026-07-24 · Lähteet: EPO Register; B2</a:t>
+              <a:t>Julkinen riippumaton evidenssikooste · 2026.07.24-20 · 2026-07-24 · Lähteet: EPO Register; B2</a:t>
             </a:r>
           </a:p>
         </p:txBody>
@@ -32196,7 +32196,7 @@
           <p:cNvPr id="7" name="TextBox 6">
             <a:extLst xmlns:a="http://schemas.openxmlformats.org/drawingml/2006/main">
               <a:ext uri="{FF2B5EF4-FFF2-40B4-BE49-F238E27FC236}">
-                <a16:creationId xmlns:a16="http://schemas.microsoft.com/office/drawing/2014/main" id="{E39884BF-23B5-4078-B6AD-A33F0674E3CD}"/>
+                <a16:creationId xmlns:a16="http://schemas.microsoft.com/office/drawing/2014/main" id="{3DDC4FF6-A6A2-474C-B608-08507286C318}"/>
               </a:ext>
             </a:extLst>
           </p:cNvPr>
@@ -32243,7 +32243,7 @@
           <p:cNvPr id="8" name="Rounded Rectangle 7">
             <a:extLst xmlns:a="http://schemas.openxmlformats.org/drawingml/2006/main">
               <a:ext uri="{FF2B5EF4-FFF2-40B4-BE49-F238E27FC236}">
-                <a16:creationId xmlns:a16="http://schemas.microsoft.com/office/drawing/2014/main" id="{8E80D677-4814-4158-BFD3-220698210966}"/>
+                <a16:creationId xmlns:a16="http://schemas.microsoft.com/office/drawing/2014/main" id="{56C87431-07C6-4E1E-A482-C3955D1BEA47}"/>
               </a:ext>
             </a:extLst>
           </p:cNvPr>
@@ -32300,7 +32300,7 @@
           <p:cNvPr id="9" name="TextBox 8">
             <a:extLst xmlns:a="http://schemas.openxmlformats.org/drawingml/2006/main">
               <a:ext uri="{FF2B5EF4-FFF2-40B4-BE49-F238E27FC236}">
-                <a16:creationId xmlns:a16="http://schemas.microsoft.com/office/drawing/2014/main" id="{92C5FE45-0CAF-46A5-ADA8-5D7F38609689}"/>
+                <a16:creationId xmlns:a16="http://schemas.microsoft.com/office/drawing/2014/main" id="{C2D39CFD-7301-4E70-B364-A6E99D7ED306}"/>
               </a:ext>
             </a:extLst>
           </p:cNvPr>
@@ -32347,7 +32347,7 @@
           <p:cNvPr id="10" name="TextBox 9">
             <a:extLst xmlns:a="http://schemas.openxmlformats.org/drawingml/2006/main">
               <a:ext uri="{FF2B5EF4-FFF2-40B4-BE49-F238E27FC236}">
-                <a16:creationId xmlns:a16="http://schemas.microsoft.com/office/drawing/2014/main" id="{261E171C-295F-40FD-8E62-B7B2C2E25AF8}"/>
+                <a16:creationId xmlns:a16="http://schemas.microsoft.com/office/drawing/2014/main" id="{173615FC-8A0F-4351-AD81-01DAD6E7A2F2}"/>
               </a:ext>
             </a:extLst>
           </p:cNvPr>
@@ -32394,7 +32394,7 @@
           <p:cNvPr id="11" name="Rounded Rectangle 10">
             <a:extLst xmlns:a="http://schemas.openxmlformats.org/drawingml/2006/main">
               <a:ext uri="{FF2B5EF4-FFF2-40B4-BE49-F238E27FC236}">
-                <a16:creationId xmlns:a16="http://schemas.microsoft.com/office/drawing/2014/main" id="{E20DD1E8-9BFA-45E6-8467-43B7391236DA}"/>
+                <a16:creationId xmlns:a16="http://schemas.microsoft.com/office/drawing/2014/main" id="{958A4790-829D-4EA9-AE7A-8633370E6F09}"/>
               </a:ext>
             </a:extLst>
           </p:cNvPr>
@@ -32451,7 +32451,7 @@
           <p:cNvPr id="12" name="TextBox 11">
             <a:extLst xmlns:a="http://schemas.openxmlformats.org/drawingml/2006/main">
               <a:ext uri="{FF2B5EF4-FFF2-40B4-BE49-F238E27FC236}">
-                <a16:creationId xmlns:a16="http://schemas.microsoft.com/office/drawing/2014/main" id="{C5304931-752B-41A7-8909-254F882700E2}"/>
+                <a16:creationId xmlns:a16="http://schemas.microsoft.com/office/drawing/2014/main" id="{A2B4F0FD-BE72-491A-BFB5-2983606B97EF}"/>
               </a:ext>
             </a:extLst>
           </p:cNvPr>
@@ -32498,7 +32498,7 @@
           <p:cNvPr id="13" name="TextBox 12">
             <a:extLst xmlns:a="http://schemas.openxmlformats.org/drawingml/2006/main">
               <a:ext uri="{FF2B5EF4-FFF2-40B4-BE49-F238E27FC236}">
-                <a16:creationId xmlns:a16="http://schemas.microsoft.com/office/drawing/2014/main" id="{49E49AC1-3AA8-4C55-AA95-649ED59998A6}"/>
+                <a16:creationId xmlns:a16="http://schemas.microsoft.com/office/drawing/2014/main" id="{01583D7E-18B4-4FED-B0A1-F528A38CC332}"/>
               </a:ext>
             </a:extLst>
           </p:cNvPr>
@@ -32545,7 +32545,7 @@
           <p:cNvPr id="14" name="Rounded Rectangle 13">
             <a:extLst xmlns:a="http://schemas.openxmlformats.org/drawingml/2006/main">
               <a:ext uri="{FF2B5EF4-FFF2-40B4-BE49-F238E27FC236}">
-                <a16:creationId xmlns:a16="http://schemas.microsoft.com/office/drawing/2014/main" id="{5D74AE86-D686-4F77-A535-A349DB1557C7}"/>
+                <a16:creationId xmlns:a16="http://schemas.microsoft.com/office/drawing/2014/main" id="{C9A71C59-CC37-4FEE-95B7-4AAFF9E968C0}"/>
               </a:ext>
             </a:extLst>
           </p:cNvPr>
@@ -32602,7 +32602,7 @@
           <p:cNvPr id="15" name="TextBox 14">
             <a:extLst xmlns:a="http://schemas.openxmlformats.org/drawingml/2006/main">
               <a:ext uri="{FF2B5EF4-FFF2-40B4-BE49-F238E27FC236}">
-                <a16:creationId xmlns:a16="http://schemas.microsoft.com/office/drawing/2014/main" id="{1F10CD86-EBB9-4702-9CE9-2E6275A82170}"/>
+                <a16:creationId xmlns:a16="http://schemas.microsoft.com/office/drawing/2014/main" id="{66FEF3C7-2811-4896-8731-FB384DD17CA0}"/>
               </a:ext>
             </a:extLst>
           </p:cNvPr>
@@ -32649,7 +32649,7 @@
           <p:cNvPr id="16" name="TextBox 15">
             <a:extLst xmlns:a="http://schemas.openxmlformats.org/drawingml/2006/main">
               <a:ext uri="{FF2B5EF4-FFF2-40B4-BE49-F238E27FC236}">
-                <a16:creationId xmlns:a16="http://schemas.microsoft.com/office/drawing/2014/main" id="{601F5B24-DEAA-4846-82F8-2EDFCF9107FF}"/>
+                <a16:creationId xmlns:a16="http://schemas.microsoft.com/office/drawing/2014/main" id="{BA0AEE86-8CC1-46D6-9666-F253288AFE33}"/>
               </a:ext>
             </a:extLst>
           </p:cNvPr>
@@ -32696,7 +32696,7 @@
           <p:cNvPr id="17" name="TextBox 16">
             <a:extLst xmlns:a="http://schemas.openxmlformats.org/drawingml/2006/main">
               <a:ext uri="{FF2B5EF4-FFF2-40B4-BE49-F238E27FC236}">
-                <a16:creationId xmlns:a16="http://schemas.microsoft.com/office/drawing/2014/main" id="{BA55A60F-6EE9-4BAD-B3C6-591AA83F224B}"/>
+                <a16:creationId xmlns:a16="http://schemas.microsoft.com/office/drawing/2014/main" id="{AC52F217-5C33-4C62-9985-36FF44900A1B}"/>
               </a:ext>
             </a:extLst>
           </p:cNvPr>
@@ -32743,7 +32743,7 @@
           <p:cNvPr id="18" name="Rounded Rectangle 17">
             <a:extLst xmlns:a="http://schemas.openxmlformats.org/drawingml/2006/main">
               <a:ext uri="{FF2B5EF4-FFF2-40B4-BE49-F238E27FC236}">
-                <a16:creationId xmlns:a16="http://schemas.microsoft.com/office/drawing/2014/main" id="{D6651583-E6EA-45AF-937C-CAB79EABB0E5}"/>
+                <a16:creationId xmlns:a16="http://schemas.microsoft.com/office/drawing/2014/main" id="{5AFCC17A-6F0B-44D1-924B-7CB5480D8E0E}"/>
               </a:ext>
             </a:extLst>
           </p:cNvPr>
@@ -32800,7 +32800,7 @@
           <p:cNvPr id="19" name="TextBox 18">
             <a:extLst xmlns:a="http://schemas.openxmlformats.org/drawingml/2006/main">
               <a:ext uri="{FF2B5EF4-FFF2-40B4-BE49-F238E27FC236}">
-                <a16:creationId xmlns:a16="http://schemas.microsoft.com/office/drawing/2014/main" id="{420D523D-802D-4458-8EB0-C8ECB602A951}"/>
+                <a16:creationId xmlns:a16="http://schemas.microsoft.com/office/drawing/2014/main" id="{E50B45C2-64C2-4118-AA05-4C183372B813}"/>
               </a:ext>
             </a:extLst>
           </p:cNvPr>
@@ -32847,7 +32847,7 @@
           <p:cNvPr id="20" name="TextBox 19">
             <a:extLst xmlns:a="http://schemas.openxmlformats.org/drawingml/2006/main">
               <a:ext uri="{FF2B5EF4-FFF2-40B4-BE49-F238E27FC236}">
-                <a16:creationId xmlns:a16="http://schemas.microsoft.com/office/drawing/2014/main" id="{95E28CAE-EC5C-49BC-BFB7-3173BC4EE18B}"/>
+                <a16:creationId xmlns:a16="http://schemas.microsoft.com/office/drawing/2014/main" id="{BC38900F-1F90-4C1F-84CA-8EB1A07F8A6C}"/>
               </a:ext>
             </a:extLst>
           </p:cNvPr>
@@ -32892,7 +32892,7 @@
     </p:spTree>
     <p:extLst>
       <p:ext uri="{BB962C8B-B14F-4D97-AF65-F5344CB8AC3E}">
-        <p14:creationId xmlns:p14="http://schemas.microsoft.com/office/powerpoint/2010/main" val="1588574314"/>
+        <p14:creationId xmlns:p14="http://schemas.microsoft.com/office/powerpoint/2010/main" val="1120266598"/>
       </p:ext>
     </p:extLst>
   </p:cSld>
@@ -32916,7 +32916,7 @@
           <p:cNvPr id="2" name="TextBox 1">
             <a:extLst xmlns:a="http://schemas.openxmlformats.org/drawingml/2006/main">
               <a:ext uri="{FF2B5EF4-FFF2-40B4-BE49-F238E27FC236}">
-                <a16:creationId xmlns:a16="http://schemas.microsoft.com/office/drawing/2014/main" id="{57225426-863F-4539-8E33-065B37273FEF}"/>
+                <a16:creationId xmlns:a16="http://schemas.microsoft.com/office/drawing/2014/main" id="{727FD32D-8E22-4A3B-A213-DB412565DDF0}"/>
               </a:ext>
             </a:extLst>
           </p:cNvPr>
@@ -32963,7 +32963,7 @@
           <p:cNvPr id="3" name="TextBox 2">
             <a:extLst xmlns:a="http://schemas.openxmlformats.org/drawingml/2006/main">
               <a:ext uri="{FF2B5EF4-FFF2-40B4-BE49-F238E27FC236}">
-                <a16:creationId xmlns:a16="http://schemas.microsoft.com/office/drawing/2014/main" id="{DD72A9ED-FE2B-406D-8014-33679EA08F2F}"/>
+                <a16:creationId xmlns:a16="http://schemas.microsoft.com/office/drawing/2014/main" id="{A81A6B31-F4D7-4B82-A4BA-C0F13BF6E090}"/>
               </a:ext>
             </a:extLst>
           </p:cNvPr>
@@ -33010,7 +33010,7 @@
           <p:cNvPr id="4" name="Rectangle 3">
             <a:extLst xmlns:a="http://schemas.openxmlformats.org/drawingml/2006/main">
               <a:ext uri="{FF2B5EF4-FFF2-40B4-BE49-F238E27FC236}">
-                <a16:creationId xmlns:a16="http://schemas.microsoft.com/office/drawing/2014/main" id="{680DDEC4-9825-4B0C-9BE0-70AA6EEE0B08}"/>
+                <a16:creationId xmlns:a16="http://schemas.microsoft.com/office/drawing/2014/main" id="{4F9CC23B-85AA-493E-ACCD-AF6FC350DC98}"/>
               </a:ext>
             </a:extLst>
           </p:cNvPr>
@@ -33065,7 +33065,7 @@
           <p:cNvPr id="5" name="Rectangle 4">
             <a:extLst xmlns:a="http://schemas.openxmlformats.org/drawingml/2006/main">
               <a:ext uri="{FF2B5EF4-FFF2-40B4-BE49-F238E27FC236}">
-                <a16:creationId xmlns:a16="http://schemas.microsoft.com/office/drawing/2014/main" id="{9415EA80-4602-40F5-98B9-0DA01F0C2B5D}"/>
+                <a16:creationId xmlns:a16="http://schemas.microsoft.com/office/drawing/2014/main" id="{F6011ABB-677E-4E7C-860C-4380287B1440}"/>
               </a:ext>
             </a:extLst>
           </p:cNvPr>
@@ -33120,7 +33120,7 @@
           <p:cNvPr id="6" name="TextBox 5">
             <a:extLst xmlns:a="http://schemas.openxmlformats.org/drawingml/2006/main">
               <a:ext uri="{FF2B5EF4-FFF2-40B4-BE49-F238E27FC236}">
-                <a16:creationId xmlns:a16="http://schemas.microsoft.com/office/drawing/2014/main" id="{4C34A4B5-FFC5-4CEC-AED4-E0A22BC84141}"/>
+                <a16:creationId xmlns:a16="http://schemas.microsoft.com/office/drawing/2014/main" id="{9928DC17-E959-47F1-B7E0-F7AA1D295997}"/>
               </a:ext>
             </a:extLst>
           </p:cNvPr>
@@ -33157,7 +33157,7 @@
                 <a:ea typeface="Aptos"/>
                 <a:cs typeface="Aptos"/>
               </a:rPr>
-              <a:t>Julkinen riippumaton evidenssikooste · 2026.07.24-19 · 2026-07-24 · Lähteet: EPO family; kansalliset rekisterit</a:t>
+              <a:t>Julkinen riippumaton evidenssikooste · 2026.07.24-20 · 2026-07-24 · Lähteet: EPO family; kansalliset rekisterit</a:t>
             </a:r>
           </a:p>
         </p:txBody>
@@ -33167,7 +33167,7 @@
           <p:cNvPr id="7" name="TextBox 6">
             <a:extLst xmlns:a="http://schemas.openxmlformats.org/drawingml/2006/main">
               <a:ext uri="{FF2B5EF4-FFF2-40B4-BE49-F238E27FC236}">
-                <a16:creationId xmlns:a16="http://schemas.microsoft.com/office/drawing/2014/main" id="{BD53C3DF-79BF-4944-AABB-A923982DEFC3}"/>
+                <a16:creationId xmlns:a16="http://schemas.microsoft.com/office/drawing/2014/main" id="{228B47BF-1072-4B6F-81C9-735BFD82AB27}"/>
               </a:ext>
             </a:extLst>
           </p:cNvPr>
@@ -33214,7 +33214,7 @@
           <p:cNvPr id="8" name="Rounded Rectangle 7">
             <a:extLst xmlns:a="http://schemas.openxmlformats.org/drawingml/2006/main">
               <a:ext uri="{FF2B5EF4-FFF2-40B4-BE49-F238E27FC236}">
-                <a16:creationId xmlns:a16="http://schemas.microsoft.com/office/drawing/2014/main" id="{5DF5C0FE-FD95-4551-BCE0-811901BAEAAA}"/>
+                <a16:creationId xmlns:a16="http://schemas.microsoft.com/office/drawing/2014/main" id="{3F603813-0068-4F8C-8DB3-1F5E44558539}"/>
               </a:ext>
             </a:extLst>
           </p:cNvPr>
@@ -33271,7 +33271,7 @@
           <p:cNvPr id="9" name="TextBox 8">
             <a:extLst xmlns:a="http://schemas.openxmlformats.org/drawingml/2006/main">
               <a:ext uri="{FF2B5EF4-FFF2-40B4-BE49-F238E27FC236}">
-                <a16:creationId xmlns:a16="http://schemas.microsoft.com/office/drawing/2014/main" id="{CB2C8B33-F0D4-4967-8510-5ED11E202F47}"/>
+                <a16:creationId xmlns:a16="http://schemas.microsoft.com/office/drawing/2014/main" id="{0451FC0A-8724-4C5E-9E42-3C69CE93832E}"/>
               </a:ext>
             </a:extLst>
           </p:cNvPr>
@@ -33318,7 +33318,7 @@
           <p:cNvPr id="10" name="TextBox 9">
             <a:extLst xmlns:a="http://schemas.openxmlformats.org/drawingml/2006/main">
               <a:ext uri="{FF2B5EF4-FFF2-40B4-BE49-F238E27FC236}">
-                <a16:creationId xmlns:a16="http://schemas.microsoft.com/office/drawing/2014/main" id="{C3228124-BA13-4B7A-AF88-CFA3C4691561}"/>
+                <a16:creationId xmlns:a16="http://schemas.microsoft.com/office/drawing/2014/main" id="{5634A007-5773-4FD6-B956-10F397A547C0}"/>
               </a:ext>
             </a:extLst>
           </p:cNvPr>
@@ -33365,7 +33365,7 @@
           <p:cNvPr id="11" name="Rounded Rectangle 10">
             <a:extLst xmlns:a="http://schemas.openxmlformats.org/drawingml/2006/main">
               <a:ext uri="{FF2B5EF4-FFF2-40B4-BE49-F238E27FC236}">
-                <a16:creationId xmlns:a16="http://schemas.microsoft.com/office/drawing/2014/main" id="{AF59E739-98D4-4856-BFF3-B62D5C759D25}"/>
+                <a16:creationId xmlns:a16="http://schemas.microsoft.com/office/drawing/2014/main" id="{A015947F-DFDA-46EB-832A-9DCB790D3F2A}"/>
               </a:ext>
             </a:extLst>
           </p:cNvPr>
@@ -33422,7 +33422,7 @@
           <p:cNvPr id="12" name="TextBox 11">
             <a:extLst xmlns:a="http://schemas.openxmlformats.org/drawingml/2006/main">
               <a:ext uri="{FF2B5EF4-FFF2-40B4-BE49-F238E27FC236}">
-                <a16:creationId xmlns:a16="http://schemas.microsoft.com/office/drawing/2014/main" id="{689D9216-71E7-4819-BCCE-8B3B25910ED0}"/>
+                <a16:creationId xmlns:a16="http://schemas.microsoft.com/office/drawing/2014/main" id="{AA6DEAD5-526B-493C-A5AD-212CDCB1391A}"/>
               </a:ext>
             </a:extLst>
           </p:cNvPr>
@@ -33469,7 +33469,7 @@
           <p:cNvPr id="13" name="TextBox 12">
             <a:extLst xmlns:a="http://schemas.openxmlformats.org/drawingml/2006/main">
               <a:ext uri="{FF2B5EF4-FFF2-40B4-BE49-F238E27FC236}">
-                <a16:creationId xmlns:a16="http://schemas.microsoft.com/office/drawing/2014/main" id="{A31A3AB2-59AE-4258-AA72-C02A1948BFD6}"/>
+                <a16:creationId xmlns:a16="http://schemas.microsoft.com/office/drawing/2014/main" id="{6A62BE38-4EED-4BEC-A999-A143D68024D0}"/>
               </a:ext>
             </a:extLst>
           </p:cNvPr>
@@ -33516,7 +33516,7 @@
           <p:cNvPr id="14" name="Rounded Rectangle 13">
             <a:extLst xmlns:a="http://schemas.openxmlformats.org/drawingml/2006/main">
               <a:ext uri="{FF2B5EF4-FFF2-40B4-BE49-F238E27FC236}">
-                <a16:creationId xmlns:a16="http://schemas.microsoft.com/office/drawing/2014/main" id="{85C85606-9655-40F0-AFA9-5C6BBEC2ECBC}"/>
+                <a16:creationId xmlns:a16="http://schemas.microsoft.com/office/drawing/2014/main" id="{889C2F2D-04C2-4F00-B8CE-8646A43C7234}"/>
               </a:ext>
             </a:extLst>
           </p:cNvPr>
@@ -33573,7 +33573,7 @@
           <p:cNvPr id="15" name="TextBox 14">
             <a:extLst xmlns:a="http://schemas.openxmlformats.org/drawingml/2006/main">
               <a:ext uri="{FF2B5EF4-FFF2-40B4-BE49-F238E27FC236}">
-                <a16:creationId xmlns:a16="http://schemas.microsoft.com/office/drawing/2014/main" id="{39D288A2-6035-4EA0-91C9-188B2F16CC72}"/>
+                <a16:creationId xmlns:a16="http://schemas.microsoft.com/office/drawing/2014/main" id="{CB15AB78-8E44-4D9D-B1D1-F54577699E0D}"/>
               </a:ext>
             </a:extLst>
           </p:cNvPr>
@@ -33620,7 +33620,7 @@
           <p:cNvPr id="16" name="TextBox 15">
             <a:extLst xmlns:a="http://schemas.openxmlformats.org/drawingml/2006/main">
               <a:ext uri="{FF2B5EF4-FFF2-40B4-BE49-F238E27FC236}">
-                <a16:creationId xmlns:a16="http://schemas.microsoft.com/office/drawing/2014/main" id="{49AB9772-849A-4B1C-984A-DA612A856DBA}"/>
+                <a16:creationId xmlns:a16="http://schemas.microsoft.com/office/drawing/2014/main" id="{D028C666-1F40-4CD6-B6B0-ECF82459C22A}"/>
               </a:ext>
             </a:extLst>
           </p:cNvPr>
@@ -33667,7 +33667,7 @@
           <p:cNvPr id="17" name="Rounded Rectangle 16">
             <a:extLst xmlns:a="http://schemas.openxmlformats.org/drawingml/2006/main">
               <a:ext uri="{FF2B5EF4-FFF2-40B4-BE49-F238E27FC236}">
-                <a16:creationId xmlns:a16="http://schemas.microsoft.com/office/drawing/2014/main" id="{8DD0A45E-C3D7-43A3-8A70-14CA52C2E5AE}"/>
+                <a16:creationId xmlns:a16="http://schemas.microsoft.com/office/drawing/2014/main" id="{DB17DCFB-0673-4D3D-858A-D2CFA6FAB800}"/>
               </a:ext>
             </a:extLst>
           </p:cNvPr>
@@ -33724,7 +33724,7 @@
           <p:cNvPr id="18" name="TextBox 17">
             <a:extLst xmlns:a="http://schemas.openxmlformats.org/drawingml/2006/main">
               <a:ext uri="{FF2B5EF4-FFF2-40B4-BE49-F238E27FC236}">
-                <a16:creationId xmlns:a16="http://schemas.microsoft.com/office/drawing/2014/main" id="{5277356B-999B-4323-92BF-A5A73142333D}"/>
+                <a16:creationId xmlns:a16="http://schemas.microsoft.com/office/drawing/2014/main" id="{C35DFF6C-EA50-4B79-9E14-8003FF00FFC0}"/>
               </a:ext>
             </a:extLst>
           </p:cNvPr>
@@ -33771,7 +33771,7 @@
           <p:cNvPr id="19" name="TextBox 18">
             <a:extLst xmlns:a="http://schemas.openxmlformats.org/drawingml/2006/main">
               <a:ext uri="{FF2B5EF4-FFF2-40B4-BE49-F238E27FC236}">
-                <a16:creationId xmlns:a16="http://schemas.microsoft.com/office/drawing/2014/main" id="{51826FE6-455F-4B6F-9CD6-F47ECFBCB2AA}"/>
+                <a16:creationId xmlns:a16="http://schemas.microsoft.com/office/drawing/2014/main" id="{2C98A2B4-D9BC-4DC0-B605-77F65A85477F}"/>
               </a:ext>
             </a:extLst>
           </p:cNvPr>
@@ -33818,7 +33818,7 @@
           <p:cNvPr id="20" name="TextBox 19">
             <a:extLst xmlns:a="http://schemas.openxmlformats.org/drawingml/2006/main">
               <a:ext uri="{FF2B5EF4-FFF2-40B4-BE49-F238E27FC236}">
-                <a16:creationId xmlns:a16="http://schemas.microsoft.com/office/drawing/2014/main" id="{89799EE5-CEE1-4793-9F0B-64B3B4FFDCC3}"/>
+                <a16:creationId xmlns:a16="http://schemas.microsoft.com/office/drawing/2014/main" id="{DED57D22-D233-459F-938C-6995FD82265C}"/>
               </a:ext>
             </a:extLst>
           </p:cNvPr>
@@ -33865,7 +33865,7 @@
           <p:cNvPr id="21" name="Rounded Rectangle 20">
             <a:extLst xmlns:a="http://schemas.openxmlformats.org/drawingml/2006/main">
               <a:ext uri="{FF2B5EF4-FFF2-40B4-BE49-F238E27FC236}">
-                <a16:creationId xmlns:a16="http://schemas.microsoft.com/office/drawing/2014/main" id="{06088E52-6EB2-4A4D-8F96-8557D6A59388}"/>
+                <a16:creationId xmlns:a16="http://schemas.microsoft.com/office/drawing/2014/main" id="{3BFE6974-BEB8-4148-A87D-740FB7C112F4}"/>
               </a:ext>
             </a:extLst>
           </p:cNvPr>
@@ -33922,7 +33922,7 @@
           <p:cNvPr id="22" name="TextBox 21">
             <a:extLst xmlns:a="http://schemas.openxmlformats.org/drawingml/2006/main">
               <a:ext uri="{FF2B5EF4-FFF2-40B4-BE49-F238E27FC236}">
-                <a16:creationId xmlns:a16="http://schemas.microsoft.com/office/drawing/2014/main" id="{1612C503-1618-4D7E-AA53-1E50C21597BB}"/>
+                <a16:creationId xmlns:a16="http://schemas.microsoft.com/office/drawing/2014/main" id="{AC6D5ACB-CFF6-4B19-B29C-941CE09E34E7}"/>
               </a:ext>
             </a:extLst>
           </p:cNvPr>
@@ -33969,7 +33969,7 @@
           <p:cNvPr id="23" name="TextBox 22">
             <a:extLst xmlns:a="http://schemas.openxmlformats.org/drawingml/2006/main">
               <a:ext uri="{FF2B5EF4-FFF2-40B4-BE49-F238E27FC236}">
-                <a16:creationId xmlns:a16="http://schemas.microsoft.com/office/drawing/2014/main" id="{B1EC8FB4-9B7D-417E-A598-65F78A20EC39}"/>
+                <a16:creationId xmlns:a16="http://schemas.microsoft.com/office/drawing/2014/main" id="{8CDC4EB7-6CBC-4431-B723-DC60A12E408A}"/>
               </a:ext>
             </a:extLst>
           </p:cNvPr>
@@ -34014,7 +34014,7 @@
     </p:spTree>
     <p:extLst>
       <p:ext uri="{BB962C8B-B14F-4D97-AF65-F5344CB8AC3E}">
-        <p14:creationId xmlns:p14="http://schemas.microsoft.com/office/powerpoint/2010/main" val="95610899"/>
+        <p14:creationId xmlns:p14="http://schemas.microsoft.com/office/powerpoint/2010/main" val="237904141"/>
       </p:ext>
     </p:extLst>
   </p:cSld>
@@ -34038,7 +34038,7 @@
           <p:cNvPr id="2" name="TextBox 1">
             <a:extLst xmlns:a="http://schemas.openxmlformats.org/drawingml/2006/main">
               <a:ext uri="{FF2B5EF4-FFF2-40B4-BE49-F238E27FC236}">
-                <a16:creationId xmlns:a16="http://schemas.microsoft.com/office/drawing/2014/main" id="{1ED10F3D-23B0-437B-B25D-51B5C8131F2F}"/>
+                <a16:creationId xmlns:a16="http://schemas.microsoft.com/office/drawing/2014/main" id="{E2B765EC-AF65-4B1F-927E-530C14F6BED9}"/>
               </a:ext>
             </a:extLst>
           </p:cNvPr>
@@ -34085,7 +34085,7 @@
           <p:cNvPr id="3" name="TextBox 2">
             <a:extLst xmlns:a="http://schemas.openxmlformats.org/drawingml/2006/main">
               <a:ext uri="{FF2B5EF4-FFF2-40B4-BE49-F238E27FC236}">
-                <a16:creationId xmlns:a16="http://schemas.microsoft.com/office/drawing/2014/main" id="{AA43570D-D08A-4E5B-ACF4-7B059AE5075E}"/>
+                <a16:creationId xmlns:a16="http://schemas.microsoft.com/office/drawing/2014/main" id="{0B58D49D-75DF-4434-9E02-B262F682A0DF}"/>
               </a:ext>
             </a:extLst>
           </p:cNvPr>
@@ -34132,7 +34132,7 @@
           <p:cNvPr id="4" name="Rectangle 3">
             <a:extLst xmlns:a="http://schemas.openxmlformats.org/drawingml/2006/main">
               <a:ext uri="{FF2B5EF4-FFF2-40B4-BE49-F238E27FC236}">
-                <a16:creationId xmlns:a16="http://schemas.microsoft.com/office/drawing/2014/main" id="{687CE7D4-C4EA-43B7-97C0-CBE3696857D3}"/>
+                <a16:creationId xmlns:a16="http://schemas.microsoft.com/office/drawing/2014/main" id="{AC3C7721-B493-4EA0-A881-1C804A51DAC3}"/>
               </a:ext>
             </a:extLst>
           </p:cNvPr>
@@ -34187,7 +34187,7 @@
           <p:cNvPr id="5" name="Rectangle 4">
             <a:extLst xmlns:a="http://schemas.openxmlformats.org/drawingml/2006/main">
               <a:ext uri="{FF2B5EF4-FFF2-40B4-BE49-F238E27FC236}">
-                <a16:creationId xmlns:a16="http://schemas.microsoft.com/office/drawing/2014/main" id="{C72A0CD2-0A4F-4B49-9C0F-72E9D54DA6EF}"/>
+                <a16:creationId xmlns:a16="http://schemas.microsoft.com/office/drawing/2014/main" id="{5E1AEE62-5DE2-4187-B939-5BA0C5F7806D}"/>
               </a:ext>
             </a:extLst>
           </p:cNvPr>
@@ -34242,7 +34242,7 @@
           <p:cNvPr id="6" name="TextBox 5">
             <a:extLst xmlns:a="http://schemas.openxmlformats.org/drawingml/2006/main">
               <a:ext uri="{FF2B5EF4-FFF2-40B4-BE49-F238E27FC236}">
-                <a16:creationId xmlns:a16="http://schemas.microsoft.com/office/drawing/2014/main" id="{B6466ED3-C447-4381-964B-F6FDABFE63A0}"/>
+                <a16:creationId xmlns:a16="http://schemas.microsoft.com/office/drawing/2014/main" id="{33998BB5-C20E-4308-9583-7C9B012D3EDC}"/>
               </a:ext>
             </a:extLst>
           </p:cNvPr>
@@ -34279,7 +34279,7 @@
                 <a:ea typeface="Aptos"/>
                 <a:cs typeface="Aptos"/>
               </a:rPr>
-              <a:t>Julkinen riippumaton evidenssikooste · 2026.07.24-19 · 2026-07-24 · Lähteet: Viralliset tuomiot: 8 Ni 18/24 (EP); 7 O 3341/24</a:t>
+              <a:t>Julkinen riippumaton evidenssikooste · 2026.07.24-20 · 2026-07-24 · Lähteet: Viralliset tuomiot: 8 Ni 18/24 (EP); 7 O 3341/24</a:t>
             </a:r>
           </a:p>
         </p:txBody>
@@ -34289,7 +34289,7 @@
           <p:cNvPr id="7" name="TextBox 6">
             <a:extLst xmlns:a="http://schemas.openxmlformats.org/drawingml/2006/main">
               <a:ext uri="{FF2B5EF4-FFF2-40B4-BE49-F238E27FC236}">
-                <a16:creationId xmlns:a16="http://schemas.microsoft.com/office/drawing/2014/main" id="{64A1148C-D9B8-485C-8811-F10C1272E555}"/>
+                <a16:creationId xmlns:a16="http://schemas.microsoft.com/office/drawing/2014/main" id="{E8511290-5945-4122-AF99-970EFD5B1569}"/>
               </a:ext>
             </a:extLst>
           </p:cNvPr>
@@ -34610,7 +34610,7 @@
           <p:cNvPr id="9" name="TextBox 8">
             <a:extLst xmlns:a="http://schemas.openxmlformats.org/drawingml/2006/main">
               <a:ext uri="{FF2B5EF4-FFF2-40B4-BE49-F238E27FC236}">
-                <a16:creationId xmlns:a16="http://schemas.microsoft.com/office/drawing/2014/main" id="{00EB99FC-85B9-42AA-855D-06FAADBF4414}"/>
+                <a16:creationId xmlns:a16="http://schemas.microsoft.com/office/drawing/2014/main" id="{ECB26DD9-AB64-4DDF-9D16-B208063A0061}"/>
               </a:ext>
             </a:extLst>
           </p:cNvPr>
@@ -34655,7 +34655,7 @@
     </p:spTree>
     <p:extLst>
       <p:ext uri="{BB962C8B-B14F-4D97-AF65-F5344CB8AC3E}">
-        <p14:creationId xmlns:p14="http://schemas.microsoft.com/office/powerpoint/2010/main" val="1894910294"/>
+        <p14:creationId xmlns:p14="http://schemas.microsoft.com/office/powerpoint/2010/main" val="2073455470"/>
       </p:ext>
     </p:extLst>
   </p:cSld>

--- a/site/downloads/pixan-bank-deck-large-fi.pptx
+++ b/site/downloads/pixan-bank-deck-large-fi.pptx
@@ -2,42 +2,42 @@
 <file path=ppt/presentation.xml><?xml version="1.0" encoding="utf-8"?>
 <p:presentation xmlns:p="http://schemas.openxmlformats.org/presentationml/2006/main">
   <p:sldMasterIdLst>
-    <p:sldMasterId xmlns:r="http://schemas.openxmlformats.org/officeDocument/2006/relationships" id="2147483648" r:id="R488d1192e9a64965"/>
+    <p:sldMasterId xmlns:r="http://schemas.openxmlformats.org/officeDocument/2006/relationships" id="2147483648" r:id="R9c894c71107042cc"/>
   </p:sldMasterIdLst>
   <p:notesMasterIdLst>
-    <p:notesMasterId xmlns:r="http://schemas.openxmlformats.org/officeDocument/2006/relationships" r:id="R9ff28bfa7953445b"/>
+    <p:notesMasterId xmlns:r="http://schemas.openxmlformats.org/officeDocument/2006/relationships" r:id="R023bc75353ca41d0"/>
   </p:notesMasterIdLst>
   <p:sldIdLst>
-    <p:sldId xmlns:r="http://schemas.openxmlformats.org/officeDocument/2006/relationships" id="256" r:id="R2d259526b0af4e49"/>
-    <p:sldId xmlns:r="http://schemas.openxmlformats.org/officeDocument/2006/relationships" id="257" r:id="R26012d20aa814105"/>
-    <p:sldId xmlns:r="http://schemas.openxmlformats.org/officeDocument/2006/relationships" id="258" r:id="Re1c082454cf343d1"/>
-    <p:sldId xmlns:r="http://schemas.openxmlformats.org/officeDocument/2006/relationships" id="259" r:id="R597cc974f8844857"/>
-    <p:sldId xmlns:r="http://schemas.openxmlformats.org/officeDocument/2006/relationships" id="260" r:id="Rcc2c7b703c954dfc"/>
-    <p:sldId xmlns:r="http://schemas.openxmlformats.org/officeDocument/2006/relationships" id="261" r:id="Rdf7787504bfb447c"/>
-    <p:sldId xmlns:r="http://schemas.openxmlformats.org/officeDocument/2006/relationships" id="262" r:id="R21a5b8edd3384b0f"/>
-    <p:sldId xmlns:r="http://schemas.openxmlformats.org/officeDocument/2006/relationships" id="263" r:id="R7e2a872e7ccd4c62"/>
-    <p:sldId xmlns:r="http://schemas.openxmlformats.org/officeDocument/2006/relationships" id="264" r:id="R3c777ffeb2594cd0"/>
-    <p:sldId xmlns:r="http://schemas.openxmlformats.org/officeDocument/2006/relationships" id="265" r:id="Ra38e14d83b8a42d9"/>
-    <p:sldId xmlns:r="http://schemas.openxmlformats.org/officeDocument/2006/relationships" id="266" r:id="Rb7197dfe93fa46db"/>
-    <p:sldId xmlns:r="http://schemas.openxmlformats.org/officeDocument/2006/relationships" id="267" r:id="Re6785a28ccb84fd0"/>
-    <p:sldId xmlns:r="http://schemas.openxmlformats.org/officeDocument/2006/relationships" id="268" r:id="Ra533544f2a6d48d2"/>
-    <p:sldId xmlns:r="http://schemas.openxmlformats.org/officeDocument/2006/relationships" id="269" r:id="Rc5acd8c7643b47a4"/>
-    <p:sldId xmlns:r="http://schemas.openxmlformats.org/officeDocument/2006/relationships" id="270" r:id="R05764585ff7a48ef"/>
-    <p:sldId xmlns:r="http://schemas.openxmlformats.org/officeDocument/2006/relationships" id="271" r:id="Rc90a960395704af6"/>
-    <p:sldId xmlns:r="http://schemas.openxmlformats.org/officeDocument/2006/relationships" id="272" r:id="R5125545eda6c4a73"/>
-    <p:sldId xmlns:r="http://schemas.openxmlformats.org/officeDocument/2006/relationships" id="273" r:id="R944234f0196b4030"/>
-    <p:sldId xmlns:r="http://schemas.openxmlformats.org/officeDocument/2006/relationships" id="274" r:id="R9a27de9bd8084c3b"/>
-    <p:sldId xmlns:r="http://schemas.openxmlformats.org/officeDocument/2006/relationships" id="275" r:id="Re289b7bfc5574fb2"/>
-    <p:sldId xmlns:r="http://schemas.openxmlformats.org/officeDocument/2006/relationships" id="276" r:id="R6be72d0bfc56405c"/>
-    <p:sldId xmlns:r="http://schemas.openxmlformats.org/officeDocument/2006/relationships" id="277" r:id="R896da85fad0c4c3d"/>
-    <p:sldId xmlns:r="http://schemas.openxmlformats.org/officeDocument/2006/relationships" id="278" r:id="R7374604b406e4b9a"/>
-    <p:sldId xmlns:r="http://schemas.openxmlformats.org/officeDocument/2006/relationships" id="279" r:id="R91fa996f48b04926"/>
-    <p:sldId xmlns:r="http://schemas.openxmlformats.org/officeDocument/2006/relationships" id="280" r:id="Re17cef12f4354d46"/>
-    <p:sldId xmlns:r="http://schemas.openxmlformats.org/officeDocument/2006/relationships" id="281" r:id="R3fb49aef6e0047ab"/>
-    <p:sldId xmlns:r="http://schemas.openxmlformats.org/officeDocument/2006/relationships" id="282" r:id="R9e2503e3a91d4dfd"/>
-    <p:sldId xmlns:r="http://schemas.openxmlformats.org/officeDocument/2006/relationships" id="283" r:id="R4c749e6818534d31"/>
-    <p:sldId xmlns:r="http://schemas.openxmlformats.org/officeDocument/2006/relationships" id="284" r:id="R7cd07b06bcad4255"/>
-    <p:sldId xmlns:r="http://schemas.openxmlformats.org/officeDocument/2006/relationships" id="285" r:id="R1c0bc427f2b2446d"/>
+    <p:sldId xmlns:r="http://schemas.openxmlformats.org/officeDocument/2006/relationships" id="256" r:id="R19079d2ed5f9474a"/>
+    <p:sldId xmlns:r="http://schemas.openxmlformats.org/officeDocument/2006/relationships" id="257" r:id="R6e56e127c56d49ab"/>
+    <p:sldId xmlns:r="http://schemas.openxmlformats.org/officeDocument/2006/relationships" id="258" r:id="Rea48488fd7554fc2"/>
+    <p:sldId xmlns:r="http://schemas.openxmlformats.org/officeDocument/2006/relationships" id="259" r:id="Re31b57a423f04310"/>
+    <p:sldId xmlns:r="http://schemas.openxmlformats.org/officeDocument/2006/relationships" id="260" r:id="Rfb2e39e1b8ae4d32"/>
+    <p:sldId xmlns:r="http://schemas.openxmlformats.org/officeDocument/2006/relationships" id="261" r:id="Rb1406ef8e7424af2"/>
+    <p:sldId xmlns:r="http://schemas.openxmlformats.org/officeDocument/2006/relationships" id="262" r:id="Rbcaf93e689a34247"/>
+    <p:sldId xmlns:r="http://schemas.openxmlformats.org/officeDocument/2006/relationships" id="263" r:id="R20d37395ca934cbc"/>
+    <p:sldId xmlns:r="http://schemas.openxmlformats.org/officeDocument/2006/relationships" id="264" r:id="Rfc946cb778a54794"/>
+    <p:sldId xmlns:r="http://schemas.openxmlformats.org/officeDocument/2006/relationships" id="265" r:id="R6aef8eeb5c724910"/>
+    <p:sldId xmlns:r="http://schemas.openxmlformats.org/officeDocument/2006/relationships" id="266" r:id="R643a04cb56c946e8"/>
+    <p:sldId xmlns:r="http://schemas.openxmlformats.org/officeDocument/2006/relationships" id="267" r:id="Rf80a2eb58f9a4be0"/>
+    <p:sldId xmlns:r="http://schemas.openxmlformats.org/officeDocument/2006/relationships" id="268" r:id="R5a95732c4cfb4c91"/>
+    <p:sldId xmlns:r="http://schemas.openxmlformats.org/officeDocument/2006/relationships" id="269" r:id="R133cd66d655942b3"/>
+    <p:sldId xmlns:r="http://schemas.openxmlformats.org/officeDocument/2006/relationships" id="270" r:id="R91067bf7dacb4f76"/>
+    <p:sldId xmlns:r="http://schemas.openxmlformats.org/officeDocument/2006/relationships" id="271" r:id="R878281c95461483c"/>
+    <p:sldId xmlns:r="http://schemas.openxmlformats.org/officeDocument/2006/relationships" id="272" r:id="Ra158bd4d68a84a96"/>
+    <p:sldId xmlns:r="http://schemas.openxmlformats.org/officeDocument/2006/relationships" id="273" r:id="Ra67760eb438444ff"/>
+    <p:sldId xmlns:r="http://schemas.openxmlformats.org/officeDocument/2006/relationships" id="274" r:id="R44626c82c8054ef6"/>
+    <p:sldId xmlns:r="http://schemas.openxmlformats.org/officeDocument/2006/relationships" id="275" r:id="R9a405b74c41d4ea2"/>
+    <p:sldId xmlns:r="http://schemas.openxmlformats.org/officeDocument/2006/relationships" id="276" r:id="Ra7de1744071a4065"/>
+    <p:sldId xmlns:r="http://schemas.openxmlformats.org/officeDocument/2006/relationships" id="277" r:id="Red2c48c4020d4537"/>
+    <p:sldId xmlns:r="http://schemas.openxmlformats.org/officeDocument/2006/relationships" id="278" r:id="R01bea6ec23614cdd"/>
+    <p:sldId xmlns:r="http://schemas.openxmlformats.org/officeDocument/2006/relationships" id="279" r:id="Ra7fcbe26efee4902"/>
+    <p:sldId xmlns:r="http://schemas.openxmlformats.org/officeDocument/2006/relationships" id="280" r:id="R4a07eb88a4b34d2c"/>
+    <p:sldId xmlns:r="http://schemas.openxmlformats.org/officeDocument/2006/relationships" id="281" r:id="Rd12e9198ea554274"/>
+    <p:sldId xmlns:r="http://schemas.openxmlformats.org/officeDocument/2006/relationships" id="282" r:id="Rd8917c56d4234577"/>
+    <p:sldId xmlns:r="http://schemas.openxmlformats.org/officeDocument/2006/relationships" id="283" r:id="R896d1a3d8e5b4ff5"/>
+    <p:sldId xmlns:r="http://schemas.openxmlformats.org/officeDocument/2006/relationships" id="284" r:id="R0c6024aec81547e7"/>
+    <p:sldId xmlns:r="http://schemas.openxmlformats.org/officeDocument/2006/relationships" id="285" r:id="R6be3f41cb9ad4dd3"/>
   </p:sldIdLst>
   <p:sldSz cx="12191999" cy="6858000"/>
   <p:notesSz cx="6858000" cy="9144000"/>
@@ -5571,7 +5571,7 @@
           <p:cNvPr id="2" name="Title 1">
             <a:extLst xmlns:a="http://schemas.openxmlformats.org/drawingml/2006/main">
               <a:ext uri="{FF2B5EF4-FFF2-40B4-BE49-F238E27FC236}">
-                <a16:creationId xmlns:a16="http://schemas.microsoft.com/office/drawing/2014/main" id="{8263673F-499F-4627-AC08-4F9EA89B4D34}"/>
+                <a16:creationId xmlns:a16="http://schemas.microsoft.com/office/drawing/2014/main" id="{D0815720-35D7-47AB-9F9A-D486A584B0A4}"/>
               </a:ext>
             </a:extLst>
           </p:cNvPr>
@@ -5603,7 +5603,7 @@
           <p:cNvPr id="3" name="Subtitle 2">
             <a:extLst xmlns:a="http://schemas.openxmlformats.org/drawingml/2006/main">
               <a:ext uri="{FF2B5EF4-FFF2-40B4-BE49-F238E27FC236}">
-                <a16:creationId xmlns:a16="http://schemas.microsoft.com/office/drawing/2014/main" id="{DEE9C1AC-6EBC-4A02-ADE3-127B153890F9}"/>
+                <a16:creationId xmlns:a16="http://schemas.microsoft.com/office/drawing/2014/main" id="{1EE26F2F-90AB-426B-AC2B-CD50A1A10232}"/>
               </a:ext>
             </a:extLst>
           </p:cNvPr>
@@ -5726,7 +5726,7 @@
           <p:cNvPr id="4" name="Date Placeholder 3">
             <a:extLst xmlns:a="http://schemas.openxmlformats.org/drawingml/2006/main">
               <a:ext uri="{FF2B5EF4-FFF2-40B4-BE49-F238E27FC236}">
-                <a16:creationId xmlns:a16="http://schemas.microsoft.com/office/drawing/2014/main" id="{9DD439CF-ACFA-4BB0-B9D3-E9BAAE150AA5}"/>
+                <a16:creationId xmlns:a16="http://schemas.microsoft.com/office/drawing/2014/main" id="{3CED671A-15D8-4BCA-B615-19920DFBE30E}"/>
               </a:ext>
             </a:extLst>
           </p:cNvPr>
@@ -5753,7 +5753,7 @@
           <p:cNvPr id="5" name="Footer Placeholder 4">
             <a:extLst xmlns:a="http://schemas.openxmlformats.org/drawingml/2006/main">
               <a:ext uri="{FF2B5EF4-FFF2-40B4-BE49-F238E27FC236}">
-                <a16:creationId xmlns:a16="http://schemas.microsoft.com/office/drawing/2014/main" id="{E5E4F4B6-5DA5-4CD0-BEB1-B7F230607053}"/>
+                <a16:creationId xmlns:a16="http://schemas.microsoft.com/office/drawing/2014/main" id="{991EAE9A-34DA-42DE-B010-0F516AE6C971}"/>
               </a:ext>
             </a:extLst>
           </p:cNvPr>
@@ -5776,7 +5776,7 @@
           <p:cNvPr id="6" name="Slide Number Placeholder 5">
             <a:extLst xmlns:a="http://schemas.openxmlformats.org/drawingml/2006/main">
               <a:ext uri="{FF2B5EF4-FFF2-40B4-BE49-F238E27FC236}">
-                <a16:creationId xmlns:a16="http://schemas.microsoft.com/office/drawing/2014/main" id="{BC7CC9C8-F2C8-43E6-8A01-833A0550B8ED}"/>
+                <a16:creationId xmlns:a16="http://schemas.microsoft.com/office/drawing/2014/main" id="{B027887F-2A18-48EF-8C3D-D96AB9E1BEC3}"/>
               </a:ext>
             </a:extLst>
           </p:cNvPr>
@@ -5820,7 +5820,7 @@
           <p:cNvPr id="2" name="Title 1">
             <a:extLst xmlns:a="http://schemas.openxmlformats.org/drawingml/2006/main">
               <a:ext uri="{FF2B5EF4-FFF2-40B4-BE49-F238E27FC236}">
-                <a16:creationId xmlns:a16="http://schemas.microsoft.com/office/drawing/2014/main" id="{78201C7E-1CEA-4633-8CF4-3A0FB301E5EA}"/>
+                <a16:creationId xmlns:a16="http://schemas.microsoft.com/office/drawing/2014/main" id="{02C2AC1E-1754-4F66-8C50-EE9237CB9E99}"/>
               </a:ext>
             </a:extLst>
           </p:cNvPr>
@@ -5847,7 +5847,7 @@
           <p:cNvPr id="3" name="Vertical Text Placeholder 2">
             <a:extLst xmlns:a="http://schemas.openxmlformats.org/drawingml/2006/main">
               <a:ext uri="{FF2B5EF4-FFF2-40B4-BE49-F238E27FC236}">
-                <a16:creationId xmlns:a16="http://schemas.microsoft.com/office/drawing/2014/main" id="{24B36470-9AEE-4F57-8F02-99C5A1C10B9C}"/>
+                <a16:creationId xmlns:a16="http://schemas.microsoft.com/office/drawing/2014/main" id="{4BD07FD3-0534-4C36-BF89-15C4119F94CC}"/>
               </a:ext>
             </a:extLst>
           </p:cNvPr>
@@ -5909,7 +5909,7 @@
           <p:cNvPr id="4" name="Date Placeholder 3">
             <a:extLst xmlns:a="http://schemas.openxmlformats.org/drawingml/2006/main">
               <a:ext uri="{FF2B5EF4-FFF2-40B4-BE49-F238E27FC236}">
-                <a16:creationId xmlns:a16="http://schemas.microsoft.com/office/drawing/2014/main" id="{96686FFF-2064-4AA1-A2DA-642709AC7E7F}"/>
+                <a16:creationId xmlns:a16="http://schemas.microsoft.com/office/drawing/2014/main" id="{2CE428B5-0393-4EFF-88EA-E9D86EB73821}"/>
               </a:ext>
             </a:extLst>
           </p:cNvPr>
@@ -5936,7 +5936,7 @@
           <p:cNvPr id="5" name="Footer Placeholder 4">
             <a:extLst xmlns:a="http://schemas.openxmlformats.org/drawingml/2006/main">
               <a:ext uri="{FF2B5EF4-FFF2-40B4-BE49-F238E27FC236}">
-                <a16:creationId xmlns:a16="http://schemas.microsoft.com/office/drawing/2014/main" id="{70768E06-EDA1-47C8-B27D-71A913B6E2E3}"/>
+                <a16:creationId xmlns:a16="http://schemas.microsoft.com/office/drawing/2014/main" id="{8C2E03AB-8222-4418-A043-30E24AAED1EB}"/>
               </a:ext>
             </a:extLst>
           </p:cNvPr>
@@ -5959,7 +5959,7 @@
           <p:cNvPr id="6" name="Slide Number Placeholder 5">
             <a:extLst xmlns:a="http://schemas.openxmlformats.org/drawingml/2006/main">
               <a:ext uri="{FF2B5EF4-FFF2-40B4-BE49-F238E27FC236}">
-                <a16:creationId xmlns:a16="http://schemas.microsoft.com/office/drawing/2014/main" id="{8E540F9B-6BAD-479E-AF2A-ABE8A0986ED4}"/>
+                <a16:creationId xmlns:a16="http://schemas.microsoft.com/office/drawing/2014/main" id="{96A91AF6-F18F-4ADE-B877-70E0531E596C}"/>
               </a:ext>
             </a:extLst>
           </p:cNvPr>
@@ -6003,7 +6003,7 @@
           <p:cNvPr id="2" name="Vertical Title 1">
             <a:extLst xmlns:a="http://schemas.openxmlformats.org/drawingml/2006/main">
               <a:ext uri="{FF2B5EF4-FFF2-40B4-BE49-F238E27FC236}">
-                <a16:creationId xmlns:a16="http://schemas.microsoft.com/office/drawing/2014/main" id="{794D9A2D-F1F1-4A6E-A069-6939576A1E6D}"/>
+                <a16:creationId xmlns:a16="http://schemas.microsoft.com/office/drawing/2014/main" id="{C717A0C2-C42E-4FA9-8FEF-5FD3ACD6C1F1}"/>
               </a:ext>
             </a:extLst>
           </p:cNvPr>
@@ -6035,7 +6035,7 @@
           <p:cNvPr id="3" name="Vertical Text Placeholder 2">
             <a:extLst xmlns:a="http://schemas.openxmlformats.org/drawingml/2006/main">
               <a:ext uri="{FF2B5EF4-FFF2-40B4-BE49-F238E27FC236}">
-                <a16:creationId xmlns:a16="http://schemas.microsoft.com/office/drawing/2014/main" id="{75D922AD-6840-46E2-A692-AD2F242A6288}"/>
+                <a16:creationId xmlns:a16="http://schemas.microsoft.com/office/drawing/2014/main" id="{4DD874B8-A421-4599-959C-ADF4AEA58081}"/>
               </a:ext>
             </a:extLst>
           </p:cNvPr>
@@ -6102,7 +6102,7 @@
           <p:cNvPr id="4" name="Date Placeholder 3">
             <a:extLst xmlns:a="http://schemas.openxmlformats.org/drawingml/2006/main">
               <a:ext uri="{FF2B5EF4-FFF2-40B4-BE49-F238E27FC236}">
-                <a16:creationId xmlns:a16="http://schemas.microsoft.com/office/drawing/2014/main" id="{FE2FF5AE-BEF3-4658-9873-4B014ED44C65}"/>
+                <a16:creationId xmlns:a16="http://schemas.microsoft.com/office/drawing/2014/main" id="{BF4C971D-CE7E-4DCA-8DFC-3D896502AF9B}"/>
               </a:ext>
             </a:extLst>
           </p:cNvPr>
@@ -6129,7 +6129,7 @@
           <p:cNvPr id="5" name="Footer Placeholder 4">
             <a:extLst xmlns:a="http://schemas.openxmlformats.org/drawingml/2006/main">
               <a:ext uri="{FF2B5EF4-FFF2-40B4-BE49-F238E27FC236}">
-                <a16:creationId xmlns:a16="http://schemas.microsoft.com/office/drawing/2014/main" id="{DD218969-F9FB-45A7-A995-35400539AD60}"/>
+                <a16:creationId xmlns:a16="http://schemas.microsoft.com/office/drawing/2014/main" id="{E8835A79-466C-41D2-A5E4-88DE67A04115}"/>
               </a:ext>
             </a:extLst>
           </p:cNvPr>
@@ -6152,7 +6152,7 @@
           <p:cNvPr id="6" name="Slide Number Placeholder 5">
             <a:extLst xmlns:a="http://schemas.openxmlformats.org/drawingml/2006/main">
               <a:ext uri="{FF2B5EF4-FFF2-40B4-BE49-F238E27FC236}">
-                <a16:creationId xmlns:a16="http://schemas.microsoft.com/office/drawing/2014/main" id="{E9FA6DD4-CC45-4D1E-8425-B3AFEB4C0339}"/>
+                <a16:creationId xmlns:a16="http://schemas.microsoft.com/office/drawing/2014/main" id="{4B3028CF-4674-4691-81E7-A414F06F3D09}"/>
               </a:ext>
             </a:extLst>
           </p:cNvPr>
@@ -6196,7 +6196,7 @@
           <p:cNvPr id="2" name="Title 1">
             <a:extLst xmlns:a="http://schemas.openxmlformats.org/drawingml/2006/main">
               <a:ext uri="{FF2B5EF4-FFF2-40B4-BE49-F238E27FC236}">
-                <a16:creationId xmlns:a16="http://schemas.microsoft.com/office/drawing/2014/main" id="{127E9C3E-ABE5-4C90-BB84-CBFA03909ED8}"/>
+                <a16:creationId xmlns:a16="http://schemas.microsoft.com/office/drawing/2014/main" id="{E2360C37-B7E9-485C-AF4B-4F8F13207BD1}"/>
               </a:ext>
             </a:extLst>
           </p:cNvPr>
@@ -6223,7 +6223,7 @@
           <p:cNvPr id="3" name="Content Placeholder 2">
             <a:extLst xmlns:a="http://schemas.openxmlformats.org/drawingml/2006/main">
               <a:ext uri="{FF2B5EF4-FFF2-40B4-BE49-F238E27FC236}">
-                <a16:creationId xmlns:a16="http://schemas.microsoft.com/office/drawing/2014/main" id="{3D697725-B083-4FB7-86DB-51500BCBB8DC}"/>
+                <a16:creationId xmlns:a16="http://schemas.microsoft.com/office/drawing/2014/main" id="{5313F309-8D23-4E77-B33C-F519569CE5F2}"/>
               </a:ext>
             </a:extLst>
           </p:cNvPr>
@@ -6285,7 +6285,7 @@
           <p:cNvPr id="4" name="Date Placeholder 3">
             <a:extLst xmlns:a="http://schemas.openxmlformats.org/drawingml/2006/main">
               <a:ext uri="{FF2B5EF4-FFF2-40B4-BE49-F238E27FC236}">
-                <a16:creationId xmlns:a16="http://schemas.microsoft.com/office/drawing/2014/main" id="{1144C0AA-780B-481F-9B27-97E88DA5A9A3}"/>
+                <a16:creationId xmlns:a16="http://schemas.microsoft.com/office/drawing/2014/main" id="{4D23BFE3-9759-43F9-BAE8-3E24D5A2A30C}"/>
               </a:ext>
             </a:extLst>
           </p:cNvPr>
@@ -6312,7 +6312,7 @@
           <p:cNvPr id="5" name="Footer Placeholder 4">
             <a:extLst xmlns:a="http://schemas.openxmlformats.org/drawingml/2006/main">
               <a:ext uri="{FF2B5EF4-FFF2-40B4-BE49-F238E27FC236}">
-                <a16:creationId xmlns:a16="http://schemas.microsoft.com/office/drawing/2014/main" id="{E3E8ECF1-1F8C-4F23-88BF-6D1ED687B55A}"/>
+                <a16:creationId xmlns:a16="http://schemas.microsoft.com/office/drawing/2014/main" id="{7F59D010-627F-4ABF-BB64-36FD3DD07EF9}"/>
               </a:ext>
             </a:extLst>
           </p:cNvPr>
@@ -6335,7 +6335,7 @@
           <p:cNvPr id="6" name="Slide Number Placeholder 5">
             <a:extLst xmlns:a="http://schemas.openxmlformats.org/drawingml/2006/main">
               <a:ext uri="{FF2B5EF4-FFF2-40B4-BE49-F238E27FC236}">
-                <a16:creationId xmlns:a16="http://schemas.microsoft.com/office/drawing/2014/main" id="{2BEA34A5-4DA8-44C2-9970-9811724EDBD6}"/>
+                <a16:creationId xmlns:a16="http://schemas.microsoft.com/office/drawing/2014/main" id="{3B70FE0E-46E7-4AF1-A926-F693B7DFB9BB}"/>
               </a:ext>
             </a:extLst>
           </p:cNvPr>
@@ -6379,7 +6379,7 @@
           <p:cNvPr id="2" name="Title 1">
             <a:extLst xmlns:a="http://schemas.openxmlformats.org/drawingml/2006/main">
               <a:ext uri="{FF2B5EF4-FFF2-40B4-BE49-F238E27FC236}">
-                <a16:creationId xmlns:a16="http://schemas.microsoft.com/office/drawing/2014/main" id="{34AE017E-B941-44F6-B267-AA3FB19BDF32}"/>
+                <a16:creationId xmlns:a16="http://schemas.microsoft.com/office/drawing/2014/main" id="{F1097C91-9BEB-4797-9F25-37076920805C}"/>
               </a:ext>
             </a:extLst>
           </p:cNvPr>
@@ -6416,7 +6416,7 @@
           <p:cNvPr id="3" name="Text Placeholder 2">
             <a:extLst xmlns:a="http://schemas.openxmlformats.org/drawingml/2006/main">
               <a:ext uri="{FF2B5EF4-FFF2-40B4-BE49-F238E27FC236}">
-                <a16:creationId xmlns:a16="http://schemas.microsoft.com/office/drawing/2014/main" id="{58E13A6A-73CD-4784-A588-6C6DD01F07C4}"/>
+                <a16:creationId xmlns:a16="http://schemas.microsoft.com/office/drawing/2014/main" id="{87D79443-DC08-49DF-A65B-27AB168637EF}"/>
               </a:ext>
             </a:extLst>
           </p:cNvPr>
@@ -6542,7 +6542,7 @@
           <p:cNvPr id="4" name="Date Placeholder 3">
             <a:extLst xmlns:a="http://schemas.openxmlformats.org/drawingml/2006/main">
               <a:ext uri="{FF2B5EF4-FFF2-40B4-BE49-F238E27FC236}">
-                <a16:creationId xmlns:a16="http://schemas.microsoft.com/office/drawing/2014/main" id="{09813860-2728-47E1-82CD-16EE75DB1E53}"/>
+                <a16:creationId xmlns:a16="http://schemas.microsoft.com/office/drawing/2014/main" id="{6808628F-6C09-4269-9A2C-38C87BAFBA81}"/>
               </a:ext>
             </a:extLst>
           </p:cNvPr>
@@ -6569,7 +6569,7 @@
           <p:cNvPr id="5" name="Footer Placeholder 4">
             <a:extLst xmlns:a="http://schemas.openxmlformats.org/drawingml/2006/main">
               <a:ext uri="{FF2B5EF4-FFF2-40B4-BE49-F238E27FC236}">
-                <a16:creationId xmlns:a16="http://schemas.microsoft.com/office/drawing/2014/main" id="{E753C593-760A-4C49-95B1-C8AA759D2CBF}"/>
+                <a16:creationId xmlns:a16="http://schemas.microsoft.com/office/drawing/2014/main" id="{17F9BEAB-207E-4165-B415-34B3A67FC6BE}"/>
               </a:ext>
             </a:extLst>
           </p:cNvPr>
@@ -6592,7 +6592,7 @@
           <p:cNvPr id="6" name="Slide Number Placeholder 5">
             <a:extLst xmlns:a="http://schemas.openxmlformats.org/drawingml/2006/main">
               <a:ext uri="{FF2B5EF4-FFF2-40B4-BE49-F238E27FC236}">
-                <a16:creationId xmlns:a16="http://schemas.microsoft.com/office/drawing/2014/main" id="{ED329989-5AFC-4C05-B935-C7CB68F1535F}"/>
+                <a16:creationId xmlns:a16="http://schemas.microsoft.com/office/drawing/2014/main" id="{4A8CCB54-C424-44FA-8F8C-D8A2D45F151F}"/>
               </a:ext>
             </a:extLst>
           </p:cNvPr>
@@ -6636,7 +6636,7 @@
           <p:cNvPr id="2" name="Title 1">
             <a:extLst xmlns:a="http://schemas.openxmlformats.org/drawingml/2006/main">
               <a:ext uri="{FF2B5EF4-FFF2-40B4-BE49-F238E27FC236}">
-                <a16:creationId xmlns:a16="http://schemas.microsoft.com/office/drawing/2014/main" id="{2649038F-6921-4FAC-8D0B-FB13E36572B7}"/>
+                <a16:creationId xmlns:a16="http://schemas.microsoft.com/office/drawing/2014/main" id="{F9B6843B-C454-4307-BEBE-47ABBA5CF08C}"/>
               </a:ext>
             </a:extLst>
           </p:cNvPr>
@@ -6663,7 +6663,7 @@
           <p:cNvPr id="3" name="Content Placeholder 2">
             <a:extLst xmlns:a="http://schemas.openxmlformats.org/drawingml/2006/main">
               <a:ext uri="{FF2B5EF4-FFF2-40B4-BE49-F238E27FC236}">
-                <a16:creationId xmlns:a16="http://schemas.microsoft.com/office/drawing/2014/main" id="{50CCC6C5-4E07-42C5-82F0-2B2DDAE2651F}"/>
+                <a16:creationId xmlns:a16="http://schemas.microsoft.com/office/drawing/2014/main" id="{F390AF5F-296B-499C-9889-27775BCF87D9}"/>
               </a:ext>
             </a:extLst>
           </p:cNvPr>
@@ -6767,7 +6767,7 @@
           <p:cNvPr id="4" name="Content Placeholder 3">
             <a:extLst xmlns:a="http://schemas.openxmlformats.org/drawingml/2006/main">
               <a:ext uri="{FF2B5EF4-FFF2-40B4-BE49-F238E27FC236}">
-                <a16:creationId xmlns:a16="http://schemas.microsoft.com/office/drawing/2014/main" id="{7B866D4D-7EBE-4712-825D-48E88A35AAE3}"/>
+                <a16:creationId xmlns:a16="http://schemas.microsoft.com/office/drawing/2014/main" id="{89492772-587D-4DD4-BC45-58AE9D993882}"/>
               </a:ext>
             </a:extLst>
           </p:cNvPr>
@@ -6871,7 +6871,7 @@
           <p:cNvPr id="5" name="Date Placeholder 4">
             <a:extLst xmlns:a="http://schemas.openxmlformats.org/drawingml/2006/main">
               <a:ext uri="{FF2B5EF4-FFF2-40B4-BE49-F238E27FC236}">
-                <a16:creationId xmlns:a16="http://schemas.microsoft.com/office/drawing/2014/main" id="{A03C4742-96AA-4455-AC7E-2232E6000576}"/>
+                <a16:creationId xmlns:a16="http://schemas.microsoft.com/office/drawing/2014/main" id="{DEF4CE6A-F011-4A93-9273-C805BD6B6308}"/>
               </a:ext>
             </a:extLst>
           </p:cNvPr>
@@ -6898,7 +6898,7 @@
           <p:cNvPr id="6" name="Footer Placeholder 5">
             <a:extLst xmlns:a="http://schemas.openxmlformats.org/drawingml/2006/main">
               <a:ext uri="{FF2B5EF4-FFF2-40B4-BE49-F238E27FC236}">
-                <a16:creationId xmlns:a16="http://schemas.microsoft.com/office/drawing/2014/main" id="{3AB41752-EF2E-4099-ABC0-921F833A6718}"/>
+                <a16:creationId xmlns:a16="http://schemas.microsoft.com/office/drawing/2014/main" id="{4A967537-CE81-46C3-8573-F6CF4AB35779}"/>
               </a:ext>
             </a:extLst>
           </p:cNvPr>
@@ -6921,7 +6921,7 @@
           <p:cNvPr id="7" name="Slide Number Placeholder 6">
             <a:extLst xmlns:a="http://schemas.openxmlformats.org/drawingml/2006/main">
               <a:ext uri="{FF2B5EF4-FFF2-40B4-BE49-F238E27FC236}">
-                <a16:creationId xmlns:a16="http://schemas.microsoft.com/office/drawing/2014/main" id="{2683337A-59ED-46A8-9CC5-8B5525DCAFB3}"/>
+                <a16:creationId xmlns:a16="http://schemas.microsoft.com/office/drawing/2014/main" id="{8993D110-51D2-46D9-9CD6-1C0823816284}"/>
               </a:ext>
             </a:extLst>
           </p:cNvPr>
@@ -6965,7 +6965,7 @@
           <p:cNvPr id="2" name="Title 1">
             <a:extLst xmlns:a="http://schemas.openxmlformats.org/drawingml/2006/main">
               <a:ext uri="{FF2B5EF4-FFF2-40B4-BE49-F238E27FC236}">
-                <a16:creationId xmlns:a16="http://schemas.microsoft.com/office/drawing/2014/main" id="{015CD957-9E18-4138-BC91-0AE46F7C9FF7}"/>
+                <a16:creationId xmlns:a16="http://schemas.microsoft.com/office/drawing/2014/main" id="{7638EBC6-64F7-4F25-B27A-8C444FCC3A55}"/>
               </a:ext>
             </a:extLst>
           </p:cNvPr>
@@ -6997,7 +6997,7 @@
           <p:cNvPr id="3" name="Text Placeholder 2">
             <a:extLst xmlns:a="http://schemas.openxmlformats.org/drawingml/2006/main">
               <a:ext uri="{FF2B5EF4-FFF2-40B4-BE49-F238E27FC236}">
-                <a16:creationId xmlns:a16="http://schemas.microsoft.com/office/drawing/2014/main" id="{C6433F4D-B510-47C7-9C19-D4E5FD175979}"/>
+                <a16:creationId xmlns:a16="http://schemas.microsoft.com/office/drawing/2014/main" id="{6A16C816-9BD9-49B8-9297-1421F8CB81C7}"/>
               </a:ext>
             </a:extLst>
           </p:cNvPr>
@@ -7069,7 +7069,7 @@
           <p:cNvPr id="4" name="Content Placeholder 3">
             <a:extLst xmlns:a="http://schemas.openxmlformats.org/drawingml/2006/main">
               <a:ext uri="{FF2B5EF4-FFF2-40B4-BE49-F238E27FC236}">
-                <a16:creationId xmlns:a16="http://schemas.microsoft.com/office/drawing/2014/main" id="{36E92D24-F38E-4505-8166-5BD4877F87BD}"/>
+                <a16:creationId xmlns:a16="http://schemas.microsoft.com/office/drawing/2014/main" id="{EE0ECA8B-8918-424F-B6C5-C0981053B763}"/>
               </a:ext>
             </a:extLst>
           </p:cNvPr>
@@ -7173,7 +7173,7 @@
           <p:cNvPr id="5" name="Text Placeholder 4">
             <a:extLst xmlns:a="http://schemas.openxmlformats.org/drawingml/2006/main">
               <a:ext uri="{FF2B5EF4-FFF2-40B4-BE49-F238E27FC236}">
-                <a16:creationId xmlns:a16="http://schemas.microsoft.com/office/drawing/2014/main" id="{094C28AB-3895-4201-AA71-35EAEE5042C2}"/>
+                <a16:creationId xmlns:a16="http://schemas.microsoft.com/office/drawing/2014/main" id="{58E1C61B-8A13-4B03-A198-4DA99A3B5D05}"/>
               </a:ext>
             </a:extLst>
           </p:cNvPr>
@@ -7245,7 +7245,7 @@
           <p:cNvPr id="6" name="Content Placeholder 5">
             <a:extLst xmlns:a="http://schemas.openxmlformats.org/drawingml/2006/main">
               <a:ext uri="{FF2B5EF4-FFF2-40B4-BE49-F238E27FC236}">
-                <a16:creationId xmlns:a16="http://schemas.microsoft.com/office/drawing/2014/main" id="{26D91733-90BA-475F-A727-B9A43D03BF83}"/>
+                <a16:creationId xmlns:a16="http://schemas.microsoft.com/office/drawing/2014/main" id="{FF784C1D-F1EA-4160-BD83-E145A7F2EDEF}"/>
               </a:ext>
             </a:extLst>
           </p:cNvPr>
@@ -7349,7 +7349,7 @@
           <p:cNvPr id="7" name="Date Placeholder 6">
             <a:extLst xmlns:a="http://schemas.openxmlformats.org/drawingml/2006/main">
               <a:ext uri="{FF2B5EF4-FFF2-40B4-BE49-F238E27FC236}">
-                <a16:creationId xmlns:a16="http://schemas.microsoft.com/office/drawing/2014/main" id="{2166EFFD-5982-4DA0-AEF4-2046B3501D3C}"/>
+                <a16:creationId xmlns:a16="http://schemas.microsoft.com/office/drawing/2014/main" id="{2EB468C9-FB26-4A89-9E18-898B76E8BEBF}"/>
               </a:ext>
             </a:extLst>
           </p:cNvPr>
@@ -7376,7 +7376,7 @@
           <p:cNvPr id="8" name="Footer Placeholder 7">
             <a:extLst xmlns:a="http://schemas.openxmlformats.org/drawingml/2006/main">
               <a:ext uri="{FF2B5EF4-FFF2-40B4-BE49-F238E27FC236}">
-                <a16:creationId xmlns:a16="http://schemas.microsoft.com/office/drawing/2014/main" id="{BE8A6E0D-C46F-448A-A725-11EB0FE9D132}"/>
+                <a16:creationId xmlns:a16="http://schemas.microsoft.com/office/drawing/2014/main" id="{49863939-2468-4D63-A8B0-4AA466D468E9}"/>
               </a:ext>
             </a:extLst>
           </p:cNvPr>
@@ -7399,7 +7399,7 @@
           <p:cNvPr id="9" name="Slide Number Placeholder 8">
             <a:extLst xmlns:a="http://schemas.openxmlformats.org/drawingml/2006/main">
               <a:ext uri="{FF2B5EF4-FFF2-40B4-BE49-F238E27FC236}">
-                <a16:creationId xmlns:a16="http://schemas.microsoft.com/office/drawing/2014/main" id="{6ED2A2F7-171E-4371-A9B0-30CE771C3DEE}"/>
+                <a16:creationId xmlns:a16="http://schemas.microsoft.com/office/drawing/2014/main" id="{0C8A1039-A24E-4B09-8E56-298EFEDB735F}"/>
               </a:ext>
             </a:extLst>
           </p:cNvPr>
@@ -7443,7 +7443,7 @@
           <p:cNvPr id="2" name="Title 1">
             <a:extLst xmlns:a="http://schemas.openxmlformats.org/drawingml/2006/main">
               <a:ext uri="{FF2B5EF4-FFF2-40B4-BE49-F238E27FC236}">
-                <a16:creationId xmlns:a16="http://schemas.microsoft.com/office/drawing/2014/main" id="{1FC07671-3E41-490A-A347-DD0551490B93}"/>
+                <a16:creationId xmlns:a16="http://schemas.microsoft.com/office/drawing/2014/main" id="{4DA4D943-ECFD-4600-98B7-03E7F1DDE1B0}"/>
               </a:ext>
             </a:extLst>
           </p:cNvPr>
@@ -7470,7 +7470,7 @@
           <p:cNvPr id="3" name="Date Placeholder 2">
             <a:extLst xmlns:a="http://schemas.openxmlformats.org/drawingml/2006/main">
               <a:ext uri="{FF2B5EF4-FFF2-40B4-BE49-F238E27FC236}">
-                <a16:creationId xmlns:a16="http://schemas.microsoft.com/office/drawing/2014/main" id="{A52F4771-80FD-4519-B141-09D6FFDE037B}"/>
+                <a16:creationId xmlns:a16="http://schemas.microsoft.com/office/drawing/2014/main" id="{9D224667-A7C7-4E92-BCC7-753000CB3BF9}"/>
               </a:ext>
             </a:extLst>
           </p:cNvPr>
@@ -7497,7 +7497,7 @@
           <p:cNvPr id="4" name="Footer Placeholder 3">
             <a:extLst xmlns:a="http://schemas.openxmlformats.org/drawingml/2006/main">
               <a:ext uri="{FF2B5EF4-FFF2-40B4-BE49-F238E27FC236}">
-                <a16:creationId xmlns:a16="http://schemas.microsoft.com/office/drawing/2014/main" id="{86D9B4B7-235C-44A6-AFBA-E15CE40497EF}"/>
+                <a16:creationId xmlns:a16="http://schemas.microsoft.com/office/drawing/2014/main" id="{DFFBA738-0040-4A96-BFB1-DA14993B143C}"/>
               </a:ext>
             </a:extLst>
           </p:cNvPr>
@@ -7520,7 +7520,7 @@
           <p:cNvPr id="5" name="Slide Number Placeholder 4">
             <a:extLst xmlns:a="http://schemas.openxmlformats.org/drawingml/2006/main">
               <a:ext uri="{FF2B5EF4-FFF2-40B4-BE49-F238E27FC236}">
-                <a16:creationId xmlns:a16="http://schemas.microsoft.com/office/drawing/2014/main" id="{30F54E6D-4566-4F8D-B2A8-35C32B516A6F}"/>
+                <a16:creationId xmlns:a16="http://schemas.microsoft.com/office/drawing/2014/main" id="{2A93CB04-8A2A-4C82-87AC-3117BEAC0518}"/>
               </a:ext>
             </a:extLst>
           </p:cNvPr>
@@ -7564,7 +7564,7 @@
           <p:cNvPr id="2" name="Date Placeholder 1">
             <a:extLst xmlns:a="http://schemas.openxmlformats.org/drawingml/2006/main">
               <a:ext uri="{FF2B5EF4-FFF2-40B4-BE49-F238E27FC236}">
-                <a16:creationId xmlns:a16="http://schemas.microsoft.com/office/drawing/2014/main" id="{93B8DCB6-8CA9-4023-8A45-44F8A1A0E71E}"/>
+                <a16:creationId xmlns:a16="http://schemas.microsoft.com/office/drawing/2014/main" id="{DEB5A4AE-0104-4589-AF72-9EEDF9A21FB2}"/>
               </a:ext>
             </a:extLst>
           </p:cNvPr>
@@ -7591,7 +7591,7 @@
           <p:cNvPr id="3" name="Footer Placeholder 2">
             <a:extLst xmlns:a="http://schemas.openxmlformats.org/drawingml/2006/main">
               <a:ext uri="{FF2B5EF4-FFF2-40B4-BE49-F238E27FC236}">
-                <a16:creationId xmlns:a16="http://schemas.microsoft.com/office/drawing/2014/main" id="{499181E6-6E8D-4AC7-AF16-E24023214319}"/>
+                <a16:creationId xmlns:a16="http://schemas.microsoft.com/office/drawing/2014/main" id="{3E82B34A-F846-4E57-AEC0-983715F6CABF}"/>
               </a:ext>
             </a:extLst>
           </p:cNvPr>
@@ -7614,7 +7614,7 @@
           <p:cNvPr id="4" name="Slide Number Placeholder 3">
             <a:extLst xmlns:a="http://schemas.openxmlformats.org/drawingml/2006/main">
               <a:ext uri="{FF2B5EF4-FFF2-40B4-BE49-F238E27FC236}">
-                <a16:creationId xmlns:a16="http://schemas.microsoft.com/office/drawing/2014/main" id="{A8EE6930-D6E1-4B01-AA92-34BB985BCDF9}"/>
+                <a16:creationId xmlns:a16="http://schemas.microsoft.com/office/drawing/2014/main" id="{324D920B-ED70-43FF-ABF5-E67B8C11B4B9}"/>
               </a:ext>
             </a:extLst>
           </p:cNvPr>
@@ -7658,7 +7658,7 @@
           <p:cNvPr id="2" name="Title 1">
             <a:extLst xmlns:a="http://schemas.openxmlformats.org/drawingml/2006/main">
               <a:ext uri="{FF2B5EF4-FFF2-40B4-BE49-F238E27FC236}">
-                <a16:creationId xmlns:a16="http://schemas.microsoft.com/office/drawing/2014/main" id="{1CC65E03-848E-4EE6-9899-D3051272F47A}"/>
+                <a16:creationId xmlns:a16="http://schemas.microsoft.com/office/drawing/2014/main" id="{94166E5B-1F1D-4788-B234-3EFC33E3B027}"/>
               </a:ext>
             </a:extLst>
           </p:cNvPr>
@@ -7695,7 +7695,7 @@
           <p:cNvPr id="3" name="Content Placeholder 2">
             <a:extLst xmlns:a="http://schemas.openxmlformats.org/drawingml/2006/main">
               <a:ext uri="{FF2B5EF4-FFF2-40B4-BE49-F238E27FC236}">
-                <a16:creationId xmlns:a16="http://schemas.microsoft.com/office/drawing/2014/main" id="{B32F8A3C-C486-4EEC-B80A-1312D1A9BC09}"/>
+                <a16:creationId xmlns:a16="http://schemas.microsoft.com/office/drawing/2014/main" id="{967547F2-0484-4438-A3AF-25639660D824}"/>
               </a:ext>
             </a:extLst>
           </p:cNvPr>
@@ -7799,7 +7799,7 @@
           <p:cNvPr id="4" name="Text Placeholder 3">
             <a:extLst xmlns:a="http://schemas.openxmlformats.org/drawingml/2006/main">
               <a:ext uri="{FF2B5EF4-FFF2-40B4-BE49-F238E27FC236}">
-                <a16:creationId xmlns:a16="http://schemas.microsoft.com/office/drawing/2014/main" id="{4FC224A1-06A1-4A27-8211-B0B0815D54B3}"/>
+                <a16:creationId xmlns:a16="http://schemas.microsoft.com/office/drawing/2014/main" id="{8E43178A-0F80-4919-AD9B-C66F960AB179}"/>
               </a:ext>
             </a:extLst>
           </p:cNvPr>
@@ -7871,7 +7871,7 @@
           <p:cNvPr id="5" name="Date Placeholder 4">
             <a:extLst xmlns:a="http://schemas.openxmlformats.org/drawingml/2006/main">
               <a:ext uri="{FF2B5EF4-FFF2-40B4-BE49-F238E27FC236}">
-                <a16:creationId xmlns:a16="http://schemas.microsoft.com/office/drawing/2014/main" id="{1E04CC91-EE33-4362-879B-1CFA1C458A47}"/>
+                <a16:creationId xmlns:a16="http://schemas.microsoft.com/office/drawing/2014/main" id="{7E4853E6-0ABD-4C38-89CA-E72D023B4B68}"/>
               </a:ext>
             </a:extLst>
           </p:cNvPr>
@@ -7898,7 +7898,7 @@
           <p:cNvPr id="6" name="Footer Placeholder 5">
             <a:extLst xmlns:a="http://schemas.openxmlformats.org/drawingml/2006/main">
               <a:ext uri="{FF2B5EF4-FFF2-40B4-BE49-F238E27FC236}">
-                <a16:creationId xmlns:a16="http://schemas.microsoft.com/office/drawing/2014/main" id="{25E8C2C3-B491-4859-B11F-7889CB7F027C}"/>
+                <a16:creationId xmlns:a16="http://schemas.microsoft.com/office/drawing/2014/main" id="{E1B2B4FE-E678-4D1B-A538-6B618E81E1D5}"/>
               </a:ext>
             </a:extLst>
           </p:cNvPr>
@@ -7921,7 +7921,7 @@
           <p:cNvPr id="7" name="Slide Number Placeholder 6">
             <a:extLst xmlns:a="http://schemas.openxmlformats.org/drawingml/2006/main">
               <a:ext uri="{FF2B5EF4-FFF2-40B4-BE49-F238E27FC236}">
-                <a16:creationId xmlns:a16="http://schemas.microsoft.com/office/drawing/2014/main" id="{217E93C1-1166-4181-AC03-6E33D831A6A8}"/>
+                <a16:creationId xmlns:a16="http://schemas.microsoft.com/office/drawing/2014/main" id="{790B146F-A3B8-4764-AF98-1C43E311E194}"/>
               </a:ext>
             </a:extLst>
           </p:cNvPr>
@@ -7965,7 +7965,7 @@
           <p:cNvPr id="2" name="Title 1">
             <a:extLst xmlns:a="http://schemas.openxmlformats.org/drawingml/2006/main">
               <a:ext uri="{FF2B5EF4-FFF2-40B4-BE49-F238E27FC236}">
-                <a16:creationId xmlns:a16="http://schemas.microsoft.com/office/drawing/2014/main" id="{0C17F755-9AA7-451B-9C5D-3A32D6E4C649}"/>
+                <a16:creationId xmlns:a16="http://schemas.microsoft.com/office/drawing/2014/main" id="{8E1DA40D-8840-420A-BFDB-8593661FAB64}"/>
               </a:ext>
             </a:extLst>
           </p:cNvPr>
@@ -8002,7 +8002,7 @@
           <p:cNvPr id="3" name="Picture Placeholder 2">
             <a:extLst xmlns:a="http://schemas.openxmlformats.org/drawingml/2006/main">
               <a:ext uri="{FF2B5EF4-FFF2-40B4-BE49-F238E27FC236}">
-                <a16:creationId xmlns:a16="http://schemas.microsoft.com/office/drawing/2014/main" id="{01FFFA9C-0F99-436F-B5BB-8A26A16FF87C}"/>
+                <a16:creationId xmlns:a16="http://schemas.microsoft.com/office/drawing/2014/main" id="{6D4FBB96-E047-4A34-8401-C10D43FB2B6F}"/>
               </a:ext>
             </a:extLst>
           </p:cNvPr>
@@ -8067,7 +8067,7 @@
           <p:cNvPr id="4" name="Text Placeholder 3">
             <a:extLst xmlns:a="http://schemas.openxmlformats.org/drawingml/2006/main">
               <a:ext uri="{FF2B5EF4-FFF2-40B4-BE49-F238E27FC236}">
-                <a16:creationId xmlns:a16="http://schemas.microsoft.com/office/drawing/2014/main" id="{DD958C7D-C6BB-4381-9159-FB02B19E6697}"/>
+                <a16:creationId xmlns:a16="http://schemas.microsoft.com/office/drawing/2014/main" id="{D05D1B57-5371-4322-B7DB-FB9BF8C6A5EE}"/>
               </a:ext>
             </a:extLst>
           </p:cNvPr>
@@ -8139,7 +8139,7 @@
           <p:cNvPr id="5" name="Date Placeholder 4">
             <a:extLst xmlns:a="http://schemas.openxmlformats.org/drawingml/2006/main">
               <a:ext uri="{FF2B5EF4-FFF2-40B4-BE49-F238E27FC236}">
-                <a16:creationId xmlns:a16="http://schemas.microsoft.com/office/drawing/2014/main" id="{2702CD81-2603-4849-B616-82FDBA2B2DD5}"/>
+                <a16:creationId xmlns:a16="http://schemas.microsoft.com/office/drawing/2014/main" id="{C950766E-B75B-4E99-81BC-5ABD172F2877}"/>
               </a:ext>
             </a:extLst>
           </p:cNvPr>
@@ -8166,7 +8166,7 @@
           <p:cNvPr id="6" name="Footer Placeholder 5">
             <a:extLst xmlns:a="http://schemas.openxmlformats.org/drawingml/2006/main">
               <a:ext uri="{FF2B5EF4-FFF2-40B4-BE49-F238E27FC236}">
-                <a16:creationId xmlns:a16="http://schemas.microsoft.com/office/drawing/2014/main" id="{1E161D9D-EFF5-4DC1-89F5-2FC88FE2D16C}"/>
+                <a16:creationId xmlns:a16="http://schemas.microsoft.com/office/drawing/2014/main" id="{12BED30D-ECAB-4AE2-8A91-D390E35A4B7B}"/>
               </a:ext>
             </a:extLst>
           </p:cNvPr>
@@ -8189,7 +8189,7 @@
           <p:cNvPr id="7" name="Slide Number Placeholder 6">
             <a:extLst xmlns:a="http://schemas.openxmlformats.org/drawingml/2006/main">
               <a:ext uri="{FF2B5EF4-FFF2-40B4-BE49-F238E27FC236}">
-                <a16:creationId xmlns:a16="http://schemas.microsoft.com/office/drawing/2014/main" id="{A9D01989-6FC9-488C-A78C-2BC22A20168A}"/>
+                <a16:creationId xmlns:a16="http://schemas.microsoft.com/office/drawing/2014/main" id="{6377FAA4-0FEC-426B-8F69-7C6BD907FF01}"/>
               </a:ext>
             </a:extLst>
           </p:cNvPr>
@@ -8238,7 +8238,7 @@
           <p:cNvPr id="2" name="Title Placeholder 1">
             <a:extLst xmlns:a="http://schemas.openxmlformats.org/drawingml/2006/main">
               <a:ext uri="{FF2B5EF4-FFF2-40B4-BE49-F238E27FC236}">
-                <a16:creationId xmlns:a16="http://schemas.microsoft.com/office/drawing/2014/main" id="{6D1E895C-4D40-4FA4-BAA5-BC46A83937A1}"/>
+                <a16:creationId xmlns:a16="http://schemas.microsoft.com/office/drawing/2014/main" id="{E6D598FD-11FA-4F67-B510-7478A3C5B469}"/>
               </a:ext>
             </a:extLst>
           </p:cNvPr>
@@ -8275,7 +8275,7 @@
           <p:cNvPr id="3" name="Text Placeholder 2">
             <a:extLst xmlns:a="http://schemas.openxmlformats.org/drawingml/2006/main">
               <a:ext uri="{FF2B5EF4-FFF2-40B4-BE49-F238E27FC236}">
-                <a16:creationId xmlns:a16="http://schemas.microsoft.com/office/drawing/2014/main" id="{386B3368-B9C7-4C30-8D1E-2E39A1B81D3F}"/>
+                <a16:creationId xmlns:a16="http://schemas.microsoft.com/office/drawing/2014/main" id="{1BBEB3AF-8606-48F5-BFE1-20B120DEA509}"/>
               </a:ext>
             </a:extLst>
           </p:cNvPr>
@@ -8347,7 +8347,7 @@
           <p:cNvPr id="4" name="Date Placeholder 3">
             <a:extLst xmlns:a="http://schemas.openxmlformats.org/drawingml/2006/main">
               <a:ext uri="{FF2B5EF4-FFF2-40B4-BE49-F238E27FC236}">
-                <a16:creationId xmlns:a16="http://schemas.microsoft.com/office/drawing/2014/main" id="{1FCA353C-ECF3-456B-B19D-3157F6946E0E}"/>
+                <a16:creationId xmlns:a16="http://schemas.microsoft.com/office/drawing/2014/main" id="{2C06F3A9-9C81-4054-8F67-B8F66A07DC39}"/>
               </a:ext>
             </a:extLst>
           </p:cNvPr>
@@ -8393,7 +8393,7 @@
           <p:cNvPr id="5" name="Footer Placeholder 4">
             <a:extLst xmlns:a="http://schemas.openxmlformats.org/drawingml/2006/main">
               <a:ext uri="{FF2B5EF4-FFF2-40B4-BE49-F238E27FC236}">
-                <a16:creationId xmlns:a16="http://schemas.microsoft.com/office/drawing/2014/main" id="{29C61CDA-5AC8-4480-AC96-027E6369F130}"/>
+                <a16:creationId xmlns:a16="http://schemas.microsoft.com/office/drawing/2014/main" id="{57809F09-2253-44B8-8698-72335A39D558}"/>
               </a:ext>
             </a:extLst>
           </p:cNvPr>
@@ -8435,7 +8435,7 @@
           <p:cNvPr id="6" name="Slide Number Placeholder 5">
             <a:extLst xmlns:a="http://schemas.openxmlformats.org/drawingml/2006/main">
               <a:ext uri="{FF2B5EF4-FFF2-40B4-BE49-F238E27FC236}">
-                <a16:creationId xmlns:a16="http://schemas.microsoft.com/office/drawing/2014/main" id="{65A01255-CB14-4DBF-A66A-524C4977A207}"/>
+                <a16:creationId xmlns:a16="http://schemas.microsoft.com/office/drawing/2014/main" id="{81B69F8B-341F-4193-907F-1C4DE1936CCE}"/>
               </a:ext>
             </a:extLst>
           </p:cNvPr>
@@ -8480,17 +8480,17 @@
   </p:cSld>
   <p:clrMap bg1="lt1" tx1="dk1" bg2="lt2" tx2="dk2" accent1="accent1" accent2="accent2" accent3="accent3" accent4="accent4" accent5="accent5" accent6="accent6" hlink="hlink" folHlink="folHlink"/>
   <p:sldLayoutIdLst>
-    <p:sldLayoutId xmlns:r="http://schemas.openxmlformats.org/officeDocument/2006/relationships" id="2147483649" r:id="R27ee727429774bd7"/>
-    <p:sldLayoutId xmlns:r="http://schemas.openxmlformats.org/officeDocument/2006/relationships" id="2147483650" r:id="R7f2185f89b9c4621"/>
-    <p:sldLayoutId xmlns:r="http://schemas.openxmlformats.org/officeDocument/2006/relationships" id="2147483651" r:id="Rc092b4fd80bb4ef9"/>
-    <p:sldLayoutId xmlns:r="http://schemas.openxmlformats.org/officeDocument/2006/relationships" id="2147483652" r:id="Re434f5302fde465d"/>
-    <p:sldLayoutId xmlns:r="http://schemas.openxmlformats.org/officeDocument/2006/relationships" id="2147483653" r:id="R662026a5267c453f"/>
-    <p:sldLayoutId xmlns:r="http://schemas.openxmlformats.org/officeDocument/2006/relationships" id="2147483654" r:id="R9b64257ecd0d47bb"/>
-    <p:sldLayoutId xmlns:r="http://schemas.openxmlformats.org/officeDocument/2006/relationships" id="2147483655" r:id="Rf23b090d0143480d"/>
-    <p:sldLayoutId xmlns:r="http://schemas.openxmlformats.org/officeDocument/2006/relationships" id="2147483656" r:id="R233fbce6e7ac43b0"/>
-    <p:sldLayoutId xmlns:r="http://schemas.openxmlformats.org/officeDocument/2006/relationships" id="2147483657" r:id="Rd9742d72e9a54353"/>
-    <p:sldLayoutId xmlns:r="http://schemas.openxmlformats.org/officeDocument/2006/relationships" id="2147483658" r:id="Rc771b1dfe55745ea"/>
-    <p:sldLayoutId xmlns:r="http://schemas.openxmlformats.org/officeDocument/2006/relationships" id="2147483659" r:id="Rea68209749334d24"/>
+    <p:sldLayoutId xmlns:r="http://schemas.openxmlformats.org/officeDocument/2006/relationships" id="2147483649" r:id="Rf539fb30d8fa4d25"/>
+    <p:sldLayoutId xmlns:r="http://schemas.openxmlformats.org/officeDocument/2006/relationships" id="2147483650" r:id="Rd2a820b5140148df"/>
+    <p:sldLayoutId xmlns:r="http://schemas.openxmlformats.org/officeDocument/2006/relationships" id="2147483651" r:id="R9d8b5543be5248b3"/>
+    <p:sldLayoutId xmlns:r="http://schemas.openxmlformats.org/officeDocument/2006/relationships" id="2147483652" r:id="R76f96a4384f44996"/>
+    <p:sldLayoutId xmlns:r="http://schemas.openxmlformats.org/officeDocument/2006/relationships" id="2147483653" r:id="Re93b844baa19494b"/>
+    <p:sldLayoutId xmlns:r="http://schemas.openxmlformats.org/officeDocument/2006/relationships" id="2147483654" r:id="Rcb2b54168a63457e"/>
+    <p:sldLayoutId xmlns:r="http://schemas.openxmlformats.org/officeDocument/2006/relationships" id="2147483655" r:id="R7086249235f34ee5"/>
+    <p:sldLayoutId xmlns:r="http://schemas.openxmlformats.org/officeDocument/2006/relationships" id="2147483656" r:id="R11d7e4b4bb2e4db6"/>
+    <p:sldLayoutId xmlns:r="http://schemas.openxmlformats.org/officeDocument/2006/relationships" id="2147483657" r:id="R1e70447e8a2e4eee"/>
+    <p:sldLayoutId xmlns:r="http://schemas.openxmlformats.org/officeDocument/2006/relationships" id="2147483658" r:id="R66d3e065738045b3"/>
+    <p:sldLayoutId xmlns:r="http://schemas.openxmlformats.org/officeDocument/2006/relationships" id="2147483659" r:id="R33bc419b734e4eb3"/>
   </p:sldLayoutIdLst>
   <p:txStyles>
     <p:titleStyle>
@@ -9043,7 +9043,7 @@
           <p:cNvPr id="2" name="Rectangle 1">
             <a:extLst xmlns:a="http://schemas.openxmlformats.org/drawingml/2006/main">
               <a:ext uri="{FF2B5EF4-FFF2-40B4-BE49-F238E27FC236}">
-                <a16:creationId xmlns:a16="http://schemas.microsoft.com/office/drawing/2014/main" id="{0B938F37-36A9-483B-AB38-F35E0D23FF8A}"/>
+                <a16:creationId xmlns:a16="http://schemas.microsoft.com/office/drawing/2014/main" id="{E511A9B0-DBAB-469B-8BAE-127EEB9A2357}"/>
               </a:ext>
             </a:extLst>
           </p:cNvPr>
@@ -9098,7 +9098,7 @@
           <p:cNvPr id="3" name="TextBox 2">
             <a:extLst xmlns:a="http://schemas.openxmlformats.org/drawingml/2006/main">
               <a:ext uri="{FF2B5EF4-FFF2-40B4-BE49-F238E27FC236}">
-                <a16:creationId xmlns:a16="http://schemas.microsoft.com/office/drawing/2014/main" id="{8C562B1D-B4DD-464F-A7C3-C3754EE2BA3A}"/>
+                <a16:creationId xmlns:a16="http://schemas.microsoft.com/office/drawing/2014/main" id="{7F42237C-4AB0-42B8-B5A4-86E492DA4853}"/>
               </a:ext>
             </a:extLst>
           </p:cNvPr>
@@ -9145,7 +9145,7 @@
           <p:cNvPr id="4" name="TextBox 3">
             <a:extLst xmlns:a="http://schemas.openxmlformats.org/drawingml/2006/main">
               <a:ext uri="{FF2B5EF4-FFF2-40B4-BE49-F238E27FC236}">
-                <a16:creationId xmlns:a16="http://schemas.microsoft.com/office/drawing/2014/main" id="{B7469489-3EFF-480E-B833-765DEDF29EA1}"/>
+                <a16:creationId xmlns:a16="http://schemas.microsoft.com/office/drawing/2014/main" id="{402EDB86-F83E-4DE9-9A1B-691FFFC8771E}"/>
               </a:ext>
             </a:extLst>
           </p:cNvPr>
@@ -9193,7 +9193,7 @@
           <p:cNvPr id="5" name="TextBox 4">
             <a:extLst xmlns:a="http://schemas.openxmlformats.org/drawingml/2006/main">
               <a:ext uri="{FF2B5EF4-FFF2-40B4-BE49-F238E27FC236}">
-                <a16:creationId xmlns:a16="http://schemas.microsoft.com/office/drawing/2014/main" id="{0BBD5AE9-5EE4-4901-AD42-84A8E959A2D0}"/>
+                <a16:creationId xmlns:a16="http://schemas.microsoft.com/office/drawing/2014/main" id="{6DAC7BA3-8A0C-4672-9FBC-E5F73EFB5D42}"/>
               </a:ext>
             </a:extLst>
           </p:cNvPr>
@@ -9240,7 +9240,7 @@
           <p:cNvPr id="6" name="Rectangle 5">
             <a:extLst xmlns:a="http://schemas.openxmlformats.org/drawingml/2006/main">
               <a:ext uri="{FF2B5EF4-FFF2-40B4-BE49-F238E27FC236}">
-                <a16:creationId xmlns:a16="http://schemas.microsoft.com/office/drawing/2014/main" id="{4606A679-B6BD-4C19-B1D5-AAFE9BFB52C6}"/>
+                <a16:creationId xmlns:a16="http://schemas.microsoft.com/office/drawing/2014/main" id="{F84E4700-170E-412B-8CEA-26E4B6A51A19}"/>
               </a:ext>
             </a:extLst>
           </p:cNvPr>
@@ -9295,7 +9295,7 @@
           <p:cNvPr id="7" name="TextBox 6">
             <a:extLst xmlns:a="http://schemas.openxmlformats.org/drawingml/2006/main">
               <a:ext uri="{FF2B5EF4-FFF2-40B4-BE49-F238E27FC236}">
-                <a16:creationId xmlns:a16="http://schemas.microsoft.com/office/drawing/2014/main" id="{3DD5EC39-D8C5-4D7B-AC94-72C6A1404559}"/>
+                <a16:creationId xmlns:a16="http://schemas.microsoft.com/office/drawing/2014/main" id="{DE263E8A-8796-4E79-9F35-33A818B45599}"/>
               </a:ext>
             </a:extLst>
           </p:cNvPr>
@@ -9342,7 +9342,7 @@
           <p:cNvPr id="8" name="TextBox 7">
             <a:extLst xmlns:a="http://schemas.openxmlformats.org/drawingml/2006/main">
               <a:ext uri="{FF2B5EF4-FFF2-40B4-BE49-F238E27FC236}">
-                <a16:creationId xmlns:a16="http://schemas.microsoft.com/office/drawing/2014/main" id="{4E3B3646-4038-403F-861E-2C8DB8BB3287}"/>
+                <a16:creationId xmlns:a16="http://schemas.microsoft.com/office/drawing/2014/main" id="{B387FA1F-18E5-42FC-B651-1FA4FA12BCDC}"/>
               </a:ext>
             </a:extLst>
           </p:cNvPr>
@@ -9379,7 +9379,7 @@
                 <a:ea typeface="Aptos"/>
                 <a:cs typeface="Aptos"/>
               </a:rPr>
-              <a:t>2026.07.24-20</a:t>
+              <a:t>2026.07.24-21</a:t>
             </a:r>
           </a:p>
         </p:txBody>
@@ -9389,7 +9389,7 @@
           <p:cNvPr id="9" name="TextBox 8">
             <a:extLst xmlns:a="http://schemas.openxmlformats.org/drawingml/2006/main">
               <a:ext uri="{FF2B5EF4-FFF2-40B4-BE49-F238E27FC236}">
-                <a16:creationId xmlns:a16="http://schemas.microsoft.com/office/drawing/2014/main" id="{F27AC17D-F1C7-41A2-AF35-B798604C05DA}"/>
+                <a16:creationId xmlns:a16="http://schemas.microsoft.com/office/drawing/2014/main" id="{7C5E6E29-D8A7-4E02-9A2A-81594EDA99DA}"/>
               </a:ext>
             </a:extLst>
           </p:cNvPr>
@@ -9437,7 +9437,7 @@
           <p:cNvPr id="10" name="TextBox 9">
             <a:extLst xmlns:a="http://schemas.openxmlformats.org/drawingml/2006/main">
               <a:ext uri="{FF2B5EF4-FFF2-40B4-BE49-F238E27FC236}">
-                <a16:creationId xmlns:a16="http://schemas.microsoft.com/office/drawing/2014/main" id="{76B72A3D-C3CE-4B6B-BEBF-B31AA2FFABEA}"/>
+                <a16:creationId xmlns:a16="http://schemas.microsoft.com/office/drawing/2014/main" id="{CFE06209-0470-41F7-BF5C-AB7EA289A7DF}"/>
               </a:ext>
             </a:extLst>
           </p:cNvPr>
@@ -9484,7 +9484,7 @@
           <p:cNvPr id="11" name="TextBox 10">
             <a:extLst xmlns:a="http://schemas.openxmlformats.org/drawingml/2006/main">
               <a:ext uri="{FF2B5EF4-FFF2-40B4-BE49-F238E27FC236}">
-                <a16:creationId xmlns:a16="http://schemas.microsoft.com/office/drawing/2014/main" id="{F66B3C2A-0676-43F8-9515-534599B62B50}"/>
+                <a16:creationId xmlns:a16="http://schemas.microsoft.com/office/drawing/2014/main" id="{4DE11E59-3D8F-412E-B75C-CD2FA1BDAF1B}"/>
               </a:ext>
             </a:extLst>
           </p:cNvPr>
@@ -9531,7 +9531,7 @@
           <p:cNvPr id="12" name="TextBox 11">
             <a:extLst xmlns:a="http://schemas.openxmlformats.org/drawingml/2006/main">
               <a:ext uri="{FF2B5EF4-FFF2-40B4-BE49-F238E27FC236}">
-                <a16:creationId xmlns:a16="http://schemas.microsoft.com/office/drawing/2014/main" id="{860D3BBD-DD26-4E00-80A9-D40E6D216B1D}"/>
+                <a16:creationId xmlns:a16="http://schemas.microsoft.com/office/drawing/2014/main" id="{B07C7063-E5E2-40DF-AA0B-E2712BA8E38B}"/>
               </a:ext>
             </a:extLst>
           </p:cNvPr>
@@ -9576,7 +9576,7 @@
     </p:spTree>
     <p:extLst>
       <p:ext uri="{BB962C8B-B14F-4D97-AF65-F5344CB8AC3E}">
-        <p14:creationId xmlns:p14="http://schemas.microsoft.com/office/powerpoint/2010/main" val="65555388"/>
+        <p14:creationId xmlns:p14="http://schemas.microsoft.com/office/powerpoint/2010/main" val="204832985"/>
       </p:ext>
     </p:extLst>
   </p:cSld>
@@ -9600,7 +9600,7 @@
           <p:cNvPr id="2" name="TextBox 1">
             <a:extLst xmlns:a="http://schemas.openxmlformats.org/drawingml/2006/main">
               <a:ext uri="{FF2B5EF4-FFF2-40B4-BE49-F238E27FC236}">
-                <a16:creationId xmlns:a16="http://schemas.microsoft.com/office/drawing/2014/main" id="{62323FCA-77D4-4FA5-8B81-052BAB324FBE}"/>
+                <a16:creationId xmlns:a16="http://schemas.microsoft.com/office/drawing/2014/main" id="{43B34AAC-EB71-463B-B90A-0B0A5178D805}"/>
               </a:ext>
             </a:extLst>
           </p:cNvPr>
@@ -9647,7 +9647,7 @@
           <p:cNvPr id="3" name="TextBox 2">
             <a:extLst xmlns:a="http://schemas.openxmlformats.org/drawingml/2006/main">
               <a:ext uri="{FF2B5EF4-FFF2-40B4-BE49-F238E27FC236}">
-                <a16:creationId xmlns:a16="http://schemas.microsoft.com/office/drawing/2014/main" id="{DC323406-DF86-4784-AADB-6A502910A27F}"/>
+                <a16:creationId xmlns:a16="http://schemas.microsoft.com/office/drawing/2014/main" id="{E6004B96-F78C-4D9C-8E75-56D642ABAF5E}"/>
               </a:ext>
             </a:extLst>
           </p:cNvPr>
@@ -9694,7 +9694,7 @@
           <p:cNvPr id="4" name="Rectangle 3">
             <a:extLst xmlns:a="http://schemas.openxmlformats.org/drawingml/2006/main">
               <a:ext uri="{FF2B5EF4-FFF2-40B4-BE49-F238E27FC236}">
-                <a16:creationId xmlns:a16="http://schemas.microsoft.com/office/drawing/2014/main" id="{030E314B-54C0-4568-ABD5-620010E1D6FC}"/>
+                <a16:creationId xmlns:a16="http://schemas.microsoft.com/office/drawing/2014/main" id="{60794E05-BB2D-4625-B009-4AEB937C7E81}"/>
               </a:ext>
             </a:extLst>
           </p:cNvPr>
@@ -9749,7 +9749,7 @@
           <p:cNvPr id="5" name="Rectangle 4">
             <a:extLst xmlns:a="http://schemas.openxmlformats.org/drawingml/2006/main">
               <a:ext uri="{FF2B5EF4-FFF2-40B4-BE49-F238E27FC236}">
-                <a16:creationId xmlns:a16="http://schemas.microsoft.com/office/drawing/2014/main" id="{A952E6F8-0057-4FAA-92CE-60F39B3FA04A}"/>
+                <a16:creationId xmlns:a16="http://schemas.microsoft.com/office/drawing/2014/main" id="{EABBBE08-6F1A-4F72-AB1B-2C67FA85B8DB}"/>
               </a:ext>
             </a:extLst>
           </p:cNvPr>
@@ -9804,7 +9804,7 @@
           <p:cNvPr id="6" name="TextBox 5">
             <a:extLst xmlns:a="http://schemas.openxmlformats.org/drawingml/2006/main">
               <a:ext uri="{FF2B5EF4-FFF2-40B4-BE49-F238E27FC236}">
-                <a16:creationId xmlns:a16="http://schemas.microsoft.com/office/drawing/2014/main" id="{5BF121DB-2353-463C-82D8-8C1956F1634C}"/>
+                <a16:creationId xmlns:a16="http://schemas.microsoft.com/office/drawing/2014/main" id="{C428A051-262A-4F6B-8074-99EF0A6D03F6}"/>
               </a:ext>
             </a:extLst>
           </p:cNvPr>
@@ -9841,7 +9841,7 @@
                 <a:ea typeface="Aptos"/>
                 <a:cs typeface="Aptos"/>
               </a:rPr>
-              <a:t>Julkinen riippumaton evidenssikooste · 2026.07.24-20 · 2026-07-24 · Lähteet: RPX; CNIPA guidance; EPO family</a:t>
+              <a:t>Julkinen riippumaton evidenssikooste · 2026.07.24-21 · 2026-07-24 · Lähteet: RPX; CNIPA guidance; EPO family</a:t>
             </a:r>
           </a:p>
         </p:txBody>
@@ -9851,7 +9851,7 @@
           <p:cNvPr id="7" name="TextBox 6">
             <a:extLst xmlns:a="http://schemas.openxmlformats.org/drawingml/2006/main">
               <a:ext uri="{FF2B5EF4-FFF2-40B4-BE49-F238E27FC236}">
-                <a16:creationId xmlns:a16="http://schemas.microsoft.com/office/drawing/2014/main" id="{BCF93DE6-BE48-421F-92F8-1695716B1BC1}"/>
+                <a16:creationId xmlns:a16="http://schemas.microsoft.com/office/drawing/2014/main" id="{F1A7AA4B-0F94-4621-AC3C-47F46F26B76C}"/>
               </a:ext>
             </a:extLst>
           </p:cNvPr>
@@ -9898,7 +9898,7 @@
           <p:cNvPr id="8" name="TextBox 7">
             <a:extLst xmlns:a="http://schemas.openxmlformats.org/drawingml/2006/main">
               <a:ext uri="{FF2B5EF4-FFF2-40B4-BE49-F238E27FC236}">
-                <a16:creationId xmlns:a16="http://schemas.microsoft.com/office/drawing/2014/main" id="{95B95E9E-1A25-426A-9AF4-2CA4F1ED6C0D}"/>
+                <a16:creationId xmlns:a16="http://schemas.microsoft.com/office/drawing/2014/main" id="{2CA95096-D557-4DF3-970C-3D629BE086D9}"/>
               </a:ext>
             </a:extLst>
           </p:cNvPr>
@@ -9945,7 +9945,7 @@
           <p:cNvPr id="9" name="TextBox 8">
             <a:extLst xmlns:a="http://schemas.openxmlformats.org/drawingml/2006/main">
               <a:ext uri="{FF2B5EF4-FFF2-40B4-BE49-F238E27FC236}">
-                <a16:creationId xmlns:a16="http://schemas.microsoft.com/office/drawing/2014/main" id="{250B8F40-86C1-4418-81BB-EF84D2DCD294}"/>
+                <a16:creationId xmlns:a16="http://schemas.microsoft.com/office/drawing/2014/main" id="{877955E0-F8C5-4E64-9AD0-86E8D70F7272}"/>
               </a:ext>
             </a:extLst>
           </p:cNvPr>
@@ -10042,7 +10042,7 @@
           <p:cNvPr id="10" name="Rounded Rectangle 9">
             <a:extLst xmlns:a="http://schemas.openxmlformats.org/drawingml/2006/main">
               <a:ext uri="{FF2B5EF4-FFF2-40B4-BE49-F238E27FC236}">
-                <a16:creationId xmlns:a16="http://schemas.microsoft.com/office/drawing/2014/main" id="{19A5DCAC-D354-4548-AE1E-A47D45FD0059}"/>
+                <a16:creationId xmlns:a16="http://schemas.microsoft.com/office/drawing/2014/main" id="{A5922C31-063A-46B4-AEDF-7545729A2168}"/>
               </a:ext>
             </a:extLst>
           </p:cNvPr>
@@ -10099,7 +10099,7 @@
           <p:cNvPr id="11" name="TextBox 10">
             <a:extLst xmlns:a="http://schemas.openxmlformats.org/drawingml/2006/main">
               <a:ext uri="{FF2B5EF4-FFF2-40B4-BE49-F238E27FC236}">
-                <a16:creationId xmlns:a16="http://schemas.microsoft.com/office/drawing/2014/main" id="{3DEE45A0-5A49-49FB-B3FB-D262CA7A2114}"/>
+                <a16:creationId xmlns:a16="http://schemas.microsoft.com/office/drawing/2014/main" id="{6075B93C-CB1E-4E63-AAD7-984AB47BC6D0}"/>
               </a:ext>
             </a:extLst>
           </p:cNvPr>
@@ -10146,7 +10146,7 @@
           <p:cNvPr id="12" name="TextBox 11">
             <a:extLst xmlns:a="http://schemas.openxmlformats.org/drawingml/2006/main">
               <a:ext uri="{FF2B5EF4-FFF2-40B4-BE49-F238E27FC236}">
-                <a16:creationId xmlns:a16="http://schemas.microsoft.com/office/drawing/2014/main" id="{2E4ADA37-8C31-470E-A231-B5F8636F3F5E}"/>
+                <a16:creationId xmlns:a16="http://schemas.microsoft.com/office/drawing/2014/main" id="{0514631B-33B2-4140-AF1E-90E26EF43FE3}"/>
               </a:ext>
             </a:extLst>
           </p:cNvPr>
@@ -10191,7 +10191,7 @@
     </p:spTree>
     <p:extLst>
       <p:ext uri="{BB962C8B-B14F-4D97-AF65-F5344CB8AC3E}">
-        <p14:creationId xmlns:p14="http://schemas.microsoft.com/office/powerpoint/2010/main" val="1156979042"/>
+        <p14:creationId xmlns:p14="http://schemas.microsoft.com/office/powerpoint/2010/main" val="982340429"/>
       </p:ext>
     </p:extLst>
   </p:cSld>
@@ -10215,7 +10215,7 @@
           <p:cNvPr id="2" name="TextBox 1">
             <a:extLst xmlns:a="http://schemas.openxmlformats.org/drawingml/2006/main">
               <a:ext uri="{FF2B5EF4-FFF2-40B4-BE49-F238E27FC236}">
-                <a16:creationId xmlns:a16="http://schemas.microsoft.com/office/drawing/2014/main" id="{61DBA525-38EC-4AF9-BE7D-C096F0142520}"/>
+                <a16:creationId xmlns:a16="http://schemas.microsoft.com/office/drawing/2014/main" id="{22808EC8-CE6B-45FE-A814-7299F62B1E4C}"/>
               </a:ext>
             </a:extLst>
           </p:cNvPr>
@@ -10262,7 +10262,7 @@
           <p:cNvPr id="3" name="TextBox 2">
             <a:extLst xmlns:a="http://schemas.openxmlformats.org/drawingml/2006/main">
               <a:ext uri="{FF2B5EF4-FFF2-40B4-BE49-F238E27FC236}">
-                <a16:creationId xmlns:a16="http://schemas.microsoft.com/office/drawing/2014/main" id="{D6ABF60E-22A3-443F-97B5-836E53ED2ABD}"/>
+                <a16:creationId xmlns:a16="http://schemas.microsoft.com/office/drawing/2014/main" id="{95B1C79F-9CFC-4C1D-BD63-11FC0386308A}"/>
               </a:ext>
             </a:extLst>
           </p:cNvPr>
@@ -10309,7 +10309,7 @@
           <p:cNvPr id="4" name="Rectangle 3">
             <a:extLst xmlns:a="http://schemas.openxmlformats.org/drawingml/2006/main">
               <a:ext uri="{FF2B5EF4-FFF2-40B4-BE49-F238E27FC236}">
-                <a16:creationId xmlns:a16="http://schemas.microsoft.com/office/drawing/2014/main" id="{AA666DF6-AB55-4049-AA48-74C88F718958}"/>
+                <a16:creationId xmlns:a16="http://schemas.microsoft.com/office/drawing/2014/main" id="{6EBB6765-FA7B-4EC3-8DA2-5E1B5F74F3E6}"/>
               </a:ext>
             </a:extLst>
           </p:cNvPr>
@@ -10364,7 +10364,7 @@
           <p:cNvPr id="5" name="Rectangle 4">
             <a:extLst xmlns:a="http://schemas.openxmlformats.org/drawingml/2006/main">
               <a:ext uri="{FF2B5EF4-FFF2-40B4-BE49-F238E27FC236}">
-                <a16:creationId xmlns:a16="http://schemas.microsoft.com/office/drawing/2014/main" id="{893ADCB8-D592-4A71-B3EC-3441A892D1E4}"/>
+                <a16:creationId xmlns:a16="http://schemas.microsoft.com/office/drawing/2014/main" id="{BE85F07F-8F6A-494D-BE5B-78FF8BD7BC4B}"/>
               </a:ext>
             </a:extLst>
           </p:cNvPr>
@@ -10419,7 +10419,7 @@
           <p:cNvPr id="6" name="TextBox 5">
             <a:extLst xmlns:a="http://schemas.openxmlformats.org/drawingml/2006/main">
               <a:ext uri="{FF2B5EF4-FFF2-40B4-BE49-F238E27FC236}">
-                <a16:creationId xmlns:a16="http://schemas.microsoft.com/office/drawing/2014/main" id="{B00DAC41-C504-4A74-A87E-AD866355EF98}"/>
+                <a16:creationId xmlns:a16="http://schemas.microsoft.com/office/drawing/2014/main" id="{3BC326E1-C17A-4161-83B6-B943C1E6E95A}"/>
               </a:ext>
             </a:extLst>
           </p:cNvPr>
@@ -10456,7 +10456,7 @@
                 <a:ea typeface="Aptos"/>
                 <a:cs typeface="Aptos"/>
               </a:rPr>
-              <a:t>Julkinen riippumaton evidenssikooste · 2026.07.24-20 · 2026-07-24 · Lähteet: IP Australia; PRH; EPO; EPO / UPC; USPTO</a:t>
+              <a:t>Julkinen riippumaton evidenssikooste · 2026.07.24-21 · 2026-07-24 · Lähteet: IP Australia; PRH; EPO; EPO / UPC; USPTO</a:t>
             </a:r>
           </a:p>
         </p:txBody>
@@ -10466,7 +10466,7 @@
           <p:cNvPr id="7" name="TextBox 6">
             <a:extLst xmlns:a="http://schemas.openxmlformats.org/drawingml/2006/main">
               <a:ext uri="{FF2B5EF4-FFF2-40B4-BE49-F238E27FC236}">
-                <a16:creationId xmlns:a16="http://schemas.microsoft.com/office/drawing/2014/main" id="{CC8113A7-8837-481E-9B8C-A12B58F41B28}"/>
+                <a16:creationId xmlns:a16="http://schemas.microsoft.com/office/drawing/2014/main" id="{1F85E47C-79C4-4FAC-B4B1-8339CA28F7F7}"/>
               </a:ext>
             </a:extLst>
           </p:cNvPr>
@@ -10953,7 +10953,7 @@
           <p:cNvPr id="9" name="TextBox 8">
             <a:extLst xmlns:a="http://schemas.openxmlformats.org/drawingml/2006/main">
               <a:ext uri="{FF2B5EF4-FFF2-40B4-BE49-F238E27FC236}">
-                <a16:creationId xmlns:a16="http://schemas.microsoft.com/office/drawing/2014/main" id="{69C9731C-5596-40D5-8643-A64461C5EF76}"/>
+                <a16:creationId xmlns:a16="http://schemas.microsoft.com/office/drawing/2014/main" id="{F06138B6-5C64-4596-9A77-FF7B06B6E4A9}"/>
               </a:ext>
             </a:extLst>
           </p:cNvPr>
@@ -10998,7 +10998,7 @@
     </p:spTree>
     <p:extLst>
       <p:ext uri="{BB962C8B-B14F-4D97-AF65-F5344CB8AC3E}">
-        <p14:creationId xmlns:p14="http://schemas.microsoft.com/office/powerpoint/2010/main" val="181971307"/>
+        <p14:creationId xmlns:p14="http://schemas.microsoft.com/office/powerpoint/2010/main" val="1643662956"/>
       </p:ext>
     </p:extLst>
   </p:cSld>
@@ -11022,7 +11022,7 @@
           <p:cNvPr id="2" name="TextBox 1">
             <a:extLst xmlns:a="http://schemas.openxmlformats.org/drawingml/2006/main">
               <a:ext uri="{FF2B5EF4-FFF2-40B4-BE49-F238E27FC236}">
-                <a16:creationId xmlns:a16="http://schemas.microsoft.com/office/drawing/2014/main" id="{BC8B0C28-3A56-46EA-813C-08FA1D1D50F9}"/>
+                <a16:creationId xmlns:a16="http://schemas.microsoft.com/office/drawing/2014/main" id="{20271595-4D71-48DA-9D29-D60C71BB7CD5}"/>
               </a:ext>
             </a:extLst>
           </p:cNvPr>
@@ -11069,7 +11069,7 @@
           <p:cNvPr id="3" name="TextBox 2">
             <a:extLst xmlns:a="http://schemas.openxmlformats.org/drawingml/2006/main">
               <a:ext uri="{FF2B5EF4-FFF2-40B4-BE49-F238E27FC236}">
-                <a16:creationId xmlns:a16="http://schemas.microsoft.com/office/drawing/2014/main" id="{B7C519E4-0BE3-4E09-9E34-0397F69499D1}"/>
+                <a16:creationId xmlns:a16="http://schemas.microsoft.com/office/drawing/2014/main" id="{EF364B76-965D-44ED-B4E8-4415771D963D}"/>
               </a:ext>
             </a:extLst>
           </p:cNvPr>
@@ -11116,7 +11116,7 @@
           <p:cNvPr id="4" name="Rectangle 3">
             <a:extLst xmlns:a="http://schemas.openxmlformats.org/drawingml/2006/main">
               <a:ext uri="{FF2B5EF4-FFF2-40B4-BE49-F238E27FC236}">
-                <a16:creationId xmlns:a16="http://schemas.microsoft.com/office/drawing/2014/main" id="{78E8F868-1ACC-4AAA-AEA5-216A9A126069}"/>
+                <a16:creationId xmlns:a16="http://schemas.microsoft.com/office/drawing/2014/main" id="{CD9CFA9A-00D4-47B2-A3DB-DD52AE212238}"/>
               </a:ext>
             </a:extLst>
           </p:cNvPr>
@@ -11171,7 +11171,7 @@
           <p:cNvPr id="5" name="Rectangle 4">
             <a:extLst xmlns:a="http://schemas.openxmlformats.org/drawingml/2006/main">
               <a:ext uri="{FF2B5EF4-FFF2-40B4-BE49-F238E27FC236}">
-                <a16:creationId xmlns:a16="http://schemas.microsoft.com/office/drawing/2014/main" id="{A0CA0EA4-14C9-43D8-8E18-9237912384E1}"/>
+                <a16:creationId xmlns:a16="http://schemas.microsoft.com/office/drawing/2014/main" id="{45D0932E-D99B-4DDD-887D-AF41DDC0DB34}"/>
               </a:ext>
             </a:extLst>
           </p:cNvPr>
@@ -11226,7 +11226,7 @@
           <p:cNvPr id="6" name="TextBox 5">
             <a:extLst xmlns:a="http://schemas.openxmlformats.org/drawingml/2006/main">
               <a:ext uri="{FF2B5EF4-FFF2-40B4-BE49-F238E27FC236}">
-                <a16:creationId xmlns:a16="http://schemas.microsoft.com/office/drawing/2014/main" id="{40054201-FF0A-48AA-B0D5-4EAA2CBAF2AD}"/>
+                <a16:creationId xmlns:a16="http://schemas.microsoft.com/office/drawing/2014/main" id="{1FC4A198-C42A-4B23-A16A-049111F33841}"/>
               </a:ext>
             </a:extLst>
           </p:cNvPr>
@@ -11263,7 +11263,7 @@
                 <a:ea typeface="Aptos"/>
                 <a:cs typeface="Aptos"/>
               </a:rPr>
-              <a:t>Julkinen riippumaton evidenssikooste · 2026.07.24-20 · 2026-07-24 · Lähteet: UN; Atlas</a:t>
+              <a:t>Julkinen riippumaton evidenssikooste · 2026.07.24-21 · 2026-07-24 · Lähteet: UN; Atlas</a:t>
             </a:r>
           </a:p>
         </p:txBody>
@@ -11273,7 +11273,7 @@
           <p:cNvPr id="7" name="TextBox 6">
             <a:extLst xmlns:a="http://schemas.openxmlformats.org/drawingml/2006/main">
               <a:ext uri="{FF2B5EF4-FFF2-40B4-BE49-F238E27FC236}">
-                <a16:creationId xmlns:a16="http://schemas.microsoft.com/office/drawing/2014/main" id="{166D3F49-9FBC-4A26-9520-7D30159EA7FD}"/>
+                <a16:creationId xmlns:a16="http://schemas.microsoft.com/office/drawing/2014/main" id="{5C624823-2BB7-4289-954C-7B5BCA66843A}"/>
               </a:ext>
             </a:extLst>
           </p:cNvPr>
@@ -11320,7 +11320,7 @@
           <p:cNvPr id="8" name="Rounded Rectangle 7">
             <a:extLst xmlns:a="http://schemas.openxmlformats.org/drawingml/2006/main">
               <a:ext uri="{FF2B5EF4-FFF2-40B4-BE49-F238E27FC236}">
-                <a16:creationId xmlns:a16="http://schemas.microsoft.com/office/drawing/2014/main" id="{CFA0FAC2-48FD-44D1-8C63-F0FAC88B3C15}"/>
+                <a16:creationId xmlns:a16="http://schemas.microsoft.com/office/drawing/2014/main" id="{10E38E74-5494-4E61-AE5E-43B538EAAF53}"/>
               </a:ext>
             </a:extLst>
           </p:cNvPr>
@@ -11377,7 +11377,7 @@
           <p:cNvPr id="9" name="TextBox 8">
             <a:extLst xmlns:a="http://schemas.openxmlformats.org/drawingml/2006/main">
               <a:ext uri="{FF2B5EF4-FFF2-40B4-BE49-F238E27FC236}">
-                <a16:creationId xmlns:a16="http://schemas.microsoft.com/office/drawing/2014/main" id="{E8A6D075-B6A9-496D-BAF5-3444D04FB180}"/>
+                <a16:creationId xmlns:a16="http://schemas.microsoft.com/office/drawing/2014/main" id="{9CFA29D4-695D-4DA2-8AC0-9E7B91ADA560}"/>
               </a:ext>
             </a:extLst>
           </p:cNvPr>
@@ -11424,7 +11424,7 @@
           <p:cNvPr id="10" name="TextBox 9">
             <a:extLst xmlns:a="http://schemas.openxmlformats.org/drawingml/2006/main">
               <a:ext uri="{FF2B5EF4-FFF2-40B4-BE49-F238E27FC236}">
-                <a16:creationId xmlns:a16="http://schemas.microsoft.com/office/drawing/2014/main" id="{6BA5A785-F22C-41E7-8E12-762F7F9F5F16}"/>
+                <a16:creationId xmlns:a16="http://schemas.microsoft.com/office/drawing/2014/main" id="{9A001C9D-4BA8-4BA7-ADC0-1B31998D4639}"/>
               </a:ext>
             </a:extLst>
           </p:cNvPr>
@@ -11471,7 +11471,7 @@
           <p:cNvPr id="11" name="Rounded Rectangle 10">
             <a:extLst xmlns:a="http://schemas.openxmlformats.org/drawingml/2006/main">
               <a:ext uri="{FF2B5EF4-FFF2-40B4-BE49-F238E27FC236}">
-                <a16:creationId xmlns:a16="http://schemas.microsoft.com/office/drawing/2014/main" id="{8B7AFA96-1AD9-4530-A109-F488668BFFF9}"/>
+                <a16:creationId xmlns:a16="http://schemas.microsoft.com/office/drawing/2014/main" id="{DF0EDA77-50C1-4B2D-97C0-665D8B51C1D0}"/>
               </a:ext>
             </a:extLst>
           </p:cNvPr>
@@ -11528,7 +11528,7 @@
           <p:cNvPr id="12" name="TextBox 11">
             <a:extLst xmlns:a="http://schemas.openxmlformats.org/drawingml/2006/main">
               <a:ext uri="{FF2B5EF4-FFF2-40B4-BE49-F238E27FC236}">
-                <a16:creationId xmlns:a16="http://schemas.microsoft.com/office/drawing/2014/main" id="{FB8956E8-E4B4-4C21-90E2-789A595C3C8B}"/>
+                <a16:creationId xmlns:a16="http://schemas.microsoft.com/office/drawing/2014/main" id="{0944EA07-E082-4B08-820F-30A440C35513}"/>
               </a:ext>
             </a:extLst>
           </p:cNvPr>
@@ -11575,7 +11575,7 @@
           <p:cNvPr id="13" name="TextBox 12">
             <a:extLst xmlns:a="http://schemas.openxmlformats.org/drawingml/2006/main">
               <a:ext uri="{FF2B5EF4-FFF2-40B4-BE49-F238E27FC236}">
-                <a16:creationId xmlns:a16="http://schemas.microsoft.com/office/drawing/2014/main" id="{1F7D9C5F-32B2-444D-A2D2-40A7002334F7}"/>
+                <a16:creationId xmlns:a16="http://schemas.microsoft.com/office/drawing/2014/main" id="{2F74DDAA-FF4B-4484-A103-F2AAE5B25BD8}"/>
               </a:ext>
             </a:extLst>
           </p:cNvPr>
@@ -11622,7 +11622,7 @@
           <p:cNvPr id="14" name="Rounded Rectangle 13">
             <a:extLst xmlns:a="http://schemas.openxmlformats.org/drawingml/2006/main">
               <a:ext uri="{FF2B5EF4-FFF2-40B4-BE49-F238E27FC236}">
-                <a16:creationId xmlns:a16="http://schemas.microsoft.com/office/drawing/2014/main" id="{D9D47900-6634-4633-8AEB-2D9CBDD2423B}"/>
+                <a16:creationId xmlns:a16="http://schemas.microsoft.com/office/drawing/2014/main" id="{ABCE9775-356F-428C-ACA7-39458903B6D7}"/>
               </a:ext>
             </a:extLst>
           </p:cNvPr>
@@ -11679,7 +11679,7 @@
           <p:cNvPr id="15" name="TextBox 14">
             <a:extLst xmlns:a="http://schemas.openxmlformats.org/drawingml/2006/main">
               <a:ext uri="{FF2B5EF4-FFF2-40B4-BE49-F238E27FC236}">
-                <a16:creationId xmlns:a16="http://schemas.microsoft.com/office/drawing/2014/main" id="{CE745A54-340D-428A-812E-EC4254EEED2F}"/>
+                <a16:creationId xmlns:a16="http://schemas.microsoft.com/office/drawing/2014/main" id="{5F4095FB-76CA-4AA5-9165-7C12006DABBB}"/>
               </a:ext>
             </a:extLst>
           </p:cNvPr>
@@ -11726,7 +11726,7 @@
           <p:cNvPr id="16" name="TextBox 15">
             <a:extLst xmlns:a="http://schemas.openxmlformats.org/drawingml/2006/main">
               <a:ext uri="{FF2B5EF4-FFF2-40B4-BE49-F238E27FC236}">
-                <a16:creationId xmlns:a16="http://schemas.microsoft.com/office/drawing/2014/main" id="{FF90AF52-1E63-4A8F-B265-7CB5C45B491F}"/>
+                <a16:creationId xmlns:a16="http://schemas.microsoft.com/office/drawing/2014/main" id="{2E9C19AF-2008-4CE4-9B7C-E20A36C56DC4}"/>
               </a:ext>
             </a:extLst>
           </p:cNvPr>
@@ -11773,7 +11773,7 @@
           <p:cNvPr id="17" name="Rounded Rectangle 16">
             <a:extLst xmlns:a="http://schemas.openxmlformats.org/drawingml/2006/main">
               <a:ext uri="{FF2B5EF4-FFF2-40B4-BE49-F238E27FC236}">
-                <a16:creationId xmlns:a16="http://schemas.microsoft.com/office/drawing/2014/main" id="{8BEFC6FD-DF5F-485C-9184-1014F17FCC19}"/>
+                <a16:creationId xmlns:a16="http://schemas.microsoft.com/office/drawing/2014/main" id="{4A785202-7671-4616-9E01-A260794023F1}"/>
               </a:ext>
             </a:extLst>
           </p:cNvPr>
@@ -11830,7 +11830,7 @@
           <p:cNvPr id="18" name="TextBox 17">
             <a:extLst xmlns:a="http://schemas.openxmlformats.org/drawingml/2006/main">
               <a:ext uri="{FF2B5EF4-FFF2-40B4-BE49-F238E27FC236}">
-                <a16:creationId xmlns:a16="http://schemas.microsoft.com/office/drawing/2014/main" id="{F5CFA177-8D5D-48AD-8964-F856C8047EBE}"/>
+                <a16:creationId xmlns:a16="http://schemas.microsoft.com/office/drawing/2014/main" id="{4995EE60-89AB-40DE-8BB0-D2F40EC8DD00}"/>
               </a:ext>
             </a:extLst>
           </p:cNvPr>
@@ -11877,7 +11877,7 @@
           <p:cNvPr id="19" name="TextBox 18">
             <a:extLst xmlns:a="http://schemas.openxmlformats.org/drawingml/2006/main">
               <a:ext uri="{FF2B5EF4-FFF2-40B4-BE49-F238E27FC236}">
-                <a16:creationId xmlns:a16="http://schemas.microsoft.com/office/drawing/2014/main" id="{03DDCB95-1FD6-4F2B-9D24-CDA0D620DB52}"/>
+                <a16:creationId xmlns:a16="http://schemas.microsoft.com/office/drawing/2014/main" id="{C2CD94B1-A54D-471E-B1EC-E1513EC00E8C}"/>
               </a:ext>
             </a:extLst>
           </p:cNvPr>
@@ -11924,7 +11924,7 @@
           <p:cNvPr id="20" name="TextBox 19">
             <a:extLst xmlns:a="http://schemas.openxmlformats.org/drawingml/2006/main">
               <a:ext uri="{FF2B5EF4-FFF2-40B4-BE49-F238E27FC236}">
-                <a16:creationId xmlns:a16="http://schemas.microsoft.com/office/drawing/2014/main" id="{CDE1CFFC-7A85-45CD-A268-09FF7C2177E7}"/>
+                <a16:creationId xmlns:a16="http://schemas.microsoft.com/office/drawing/2014/main" id="{5A12AC0F-2777-4D1C-A728-921E0DCF163B}"/>
               </a:ext>
             </a:extLst>
           </p:cNvPr>
@@ -11971,7 +11971,7 @@
           <p:cNvPr id="21" name="Rounded Rectangle 20">
             <a:extLst xmlns:a="http://schemas.openxmlformats.org/drawingml/2006/main">
               <a:ext uri="{FF2B5EF4-FFF2-40B4-BE49-F238E27FC236}">
-                <a16:creationId xmlns:a16="http://schemas.microsoft.com/office/drawing/2014/main" id="{1D0B8368-FD20-4F91-BEAA-51D577C80EB4}"/>
+                <a16:creationId xmlns:a16="http://schemas.microsoft.com/office/drawing/2014/main" id="{A6A4CAB2-44E2-4A10-B03D-17A3DFF6E3A9}"/>
               </a:ext>
             </a:extLst>
           </p:cNvPr>
@@ -12028,7 +12028,7 @@
           <p:cNvPr id="22" name="TextBox 21">
             <a:extLst xmlns:a="http://schemas.openxmlformats.org/drawingml/2006/main">
               <a:ext uri="{FF2B5EF4-FFF2-40B4-BE49-F238E27FC236}">
-                <a16:creationId xmlns:a16="http://schemas.microsoft.com/office/drawing/2014/main" id="{6D2B58E1-6D1F-4398-B0BE-9602E8C85AF4}"/>
+                <a16:creationId xmlns:a16="http://schemas.microsoft.com/office/drawing/2014/main" id="{5361F01A-1E51-4848-82C6-2B1CDFB340EE}"/>
               </a:ext>
             </a:extLst>
           </p:cNvPr>
@@ -12075,7 +12075,7 @@
           <p:cNvPr id="23" name="TextBox 22">
             <a:extLst xmlns:a="http://schemas.openxmlformats.org/drawingml/2006/main">
               <a:ext uri="{FF2B5EF4-FFF2-40B4-BE49-F238E27FC236}">
-                <a16:creationId xmlns:a16="http://schemas.microsoft.com/office/drawing/2014/main" id="{13B4E639-8C9F-40A7-9B15-0C19B8494252}"/>
+                <a16:creationId xmlns:a16="http://schemas.microsoft.com/office/drawing/2014/main" id="{64379491-4DA6-4252-9665-F836289C6A17}"/>
               </a:ext>
             </a:extLst>
           </p:cNvPr>
@@ -12120,7 +12120,7 @@
     </p:spTree>
     <p:extLst>
       <p:ext uri="{BB962C8B-B14F-4D97-AF65-F5344CB8AC3E}">
-        <p14:creationId xmlns:p14="http://schemas.microsoft.com/office/powerpoint/2010/main" val="1450657840"/>
+        <p14:creationId xmlns:p14="http://schemas.microsoft.com/office/powerpoint/2010/main" val="2145416264"/>
       </p:ext>
     </p:extLst>
   </p:cSld>
@@ -12144,7 +12144,7 @@
           <p:cNvPr id="2" name="TextBox 1">
             <a:extLst xmlns:a="http://schemas.openxmlformats.org/drawingml/2006/main">
               <a:ext uri="{FF2B5EF4-FFF2-40B4-BE49-F238E27FC236}">
-                <a16:creationId xmlns:a16="http://schemas.microsoft.com/office/drawing/2014/main" id="{2C94FC3C-57A1-47B4-BF42-F7B0728BAEC8}"/>
+                <a16:creationId xmlns:a16="http://schemas.microsoft.com/office/drawing/2014/main" id="{F579F6B2-5FA4-441C-91D9-38444A3BB9A0}"/>
               </a:ext>
             </a:extLst>
           </p:cNvPr>
@@ -12191,7 +12191,7 @@
           <p:cNvPr id="3" name="TextBox 2">
             <a:extLst xmlns:a="http://schemas.openxmlformats.org/drawingml/2006/main">
               <a:ext uri="{FF2B5EF4-FFF2-40B4-BE49-F238E27FC236}">
-                <a16:creationId xmlns:a16="http://schemas.microsoft.com/office/drawing/2014/main" id="{4C81910F-849B-4363-8323-9FB7A0E2F769}"/>
+                <a16:creationId xmlns:a16="http://schemas.microsoft.com/office/drawing/2014/main" id="{1B1BD1A8-BE58-4C07-9B31-D7F803A3CE55}"/>
               </a:ext>
             </a:extLst>
           </p:cNvPr>
@@ -12238,7 +12238,7 @@
           <p:cNvPr id="4" name="Rectangle 3">
             <a:extLst xmlns:a="http://schemas.openxmlformats.org/drawingml/2006/main">
               <a:ext uri="{FF2B5EF4-FFF2-40B4-BE49-F238E27FC236}">
-                <a16:creationId xmlns:a16="http://schemas.microsoft.com/office/drawing/2014/main" id="{73AB9490-D07B-46A6-A3E7-F96A1DD536C2}"/>
+                <a16:creationId xmlns:a16="http://schemas.microsoft.com/office/drawing/2014/main" id="{203CD879-9215-45EB-A701-3F2852CBFE12}"/>
               </a:ext>
             </a:extLst>
           </p:cNvPr>
@@ -12293,7 +12293,7 @@
           <p:cNvPr id="5" name="Rectangle 4">
             <a:extLst xmlns:a="http://schemas.openxmlformats.org/drawingml/2006/main">
               <a:ext uri="{FF2B5EF4-FFF2-40B4-BE49-F238E27FC236}">
-                <a16:creationId xmlns:a16="http://schemas.microsoft.com/office/drawing/2014/main" id="{FE3977FC-C5F9-4820-92E9-0A798D7A3A4B}"/>
+                <a16:creationId xmlns:a16="http://schemas.microsoft.com/office/drawing/2014/main" id="{79FD5B1D-84CD-409B-AC84-BE5ADDF905AB}"/>
               </a:ext>
             </a:extLst>
           </p:cNvPr>
@@ -12348,7 +12348,7 @@
           <p:cNvPr id="6" name="TextBox 5">
             <a:extLst xmlns:a="http://schemas.openxmlformats.org/drawingml/2006/main">
               <a:ext uri="{FF2B5EF4-FFF2-40B4-BE49-F238E27FC236}">
-                <a16:creationId xmlns:a16="http://schemas.microsoft.com/office/drawing/2014/main" id="{46B9D90A-E10A-4A81-BD3D-F66FA930BF3C}"/>
+                <a16:creationId xmlns:a16="http://schemas.microsoft.com/office/drawing/2014/main" id="{96ABC329-C5C7-4B04-80DC-5FEAF02624A7}"/>
               </a:ext>
             </a:extLst>
           </p:cNvPr>
@@ -12385,7 +12385,7 @@
                 <a:ea typeface="Aptos"/>
                 <a:cs typeface="Aptos"/>
               </a:rPr>
-              <a:t>Julkinen riippumaton evidenssikooste · 2026.07.24-20 · 2026-07-24 · Lähteet: Statistics Canada; Health Canada; New Zealand Ministry of Health; Destatis; Vero; Sejm; FTC</a:t>
+              <a:t>Julkinen riippumaton evidenssikooste · 2026.07.24-21 · 2026-07-24 · Lähteet: Statistics Canada; Health Canada; New Zealand Ministry of Health; Destatis; Vero; Sejm; FTC</a:t>
             </a:r>
           </a:p>
         </p:txBody>
@@ -12395,7 +12395,7 @@
           <p:cNvPr id="7" name="TextBox 6">
             <a:extLst xmlns:a="http://schemas.openxmlformats.org/drawingml/2006/main">
               <a:ext uri="{FF2B5EF4-FFF2-40B4-BE49-F238E27FC236}">
-                <a16:creationId xmlns:a16="http://schemas.microsoft.com/office/drawing/2014/main" id="{F3855BFC-8241-413D-883E-632CED364ECC}"/>
+                <a16:creationId xmlns:a16="http://schemas.microsoft.com/office/drawing/2014/main" id="{895EDFC8-3028-4887-8D93-29BF2C2499F8}"/>
               </a:ext>
             </a:extLst>
           </p:cNvPr>
@@ -13048,7 +13048,7 @@
           <p:cNvPr id="9" name="TextBox 8">
             <a:extLst xmlns:a="http://schemas.openxmlformats.org/drawingml/2006/main">
               <a:ext uri="{FF2B5EF4-FFF2-40B4-BE49-F238E27FC236}">
-                <a16:creationId xmlns:a16="http://schemas.microsoft.com/office/drawing/2014/main" id="{4E1F3667-57AC-4D1F-BBDF-D071CEE06FAD}"/>
+                <a16:creationId xmlns:a16="http://schemas.microsoft.com/office/drawing/2014/main" id="{B79763D2-E365-47DD-93CA-1134EB56755D}"/>
               </a:ext>
             </a:extLst>
           </p:cNvPr>
@@ -13093,7 +13093,7 @@
     </p:spTree>
     <p:extLst>
       <p:ext uri="{BB962C8B-B14F-4D97-AF65-F5344CB8AC3E}">
-        <p14:creationId xmlns:p14="http://schemas.microsoft.com/office/powerpoint/2010/main" val="288021402"/>
+        <p14:creationId xmlns:p14="http://schemas.microsoft.com/office/powerpoint/2010/main" val="8880445"/>
       </p:ext>
     </p:extLst>
   </p:cSld>
@@ -13117,7 +13117,7 @@
           <p:cNvPr id="2" name="TextBox 1">
             <a:extLst xmlns:a="http://schemas.openxmlformats.org/drawingml/2006/main">
               <a:ext uri="{FF2B5EF4-FFF2-40B4-BE49-F238E27FC236}">
-                <a16:creationId xmlns:a16="http://schemas.microsoft.com/office/drawing/2014/main" id="{6D1E84A9-FE37-49DF-8B4C-E4C448D330B0}"/>
+                <a16:creationId xmlns:a16="http://schemas.microsoft.com/office/drawing/2014/main" id="{4BF08DF6-811E-48DC-87BA-C2F0A635D223}"/>
               </a:ext>
             </a:extLst>
           </p:cNvPr>
@@ -13164,7 +13164,7 @@
           <p:cNvPr id="3" name="TextBox 2">
             <a:extLst xmlns:a="http://schemas.openxmlformats.org/drawingml/2006/main">
               <a:ext uri="{FF2B5EF4-FFF2-40B4-BE49-F238E27FC236}">
-                <a16:creationId xmlns:a16="http://schemas.microsoft.com/office/drawing/2014/main" id="{2FD28F76-59D1-4284-A115-E3B3ACC95C6C}"/>
+                <a16:creationId xmlns:a16="http://schemas.microsoft.com/office/drawing/2014/main" id="{76E3F1B4-2EA0-4BFE-8C40-4CE9DC7F5442}"/>
               </a:ext>
             </a:extLst>
           </p:cNvPr>
@@ -13211,7 +13211,7 @@
           <p:cNvPr id="4" name="Rectangle 3">
             <a:extLst xmlns:a="http://schemas.openxmlformats.org/drawingml/2006/main">
               <a:ext uri="{FF2B5EF4-FFF2-40B4-BE49-F238E27FC236}">
-                <a16:creationId xmlns:a16="http://schemas.microsoft.com/office/drawing/2014/main" id="{B607B7B5-A3AC-4F29-AE9E-8F172A04F19C}"/>
+                <a16:creationId xmlns:a16="http://schemas.microsoft.com/office/drawing/2014/main" id="{8B7E63BD-41EA-4B29-8880-DA15EC72E132}"/>
               </a:ext>
             </a:extLst>
           </p:cNvPr>
@@ -13266,7 +13266,7 @@
           <p:cNvPr id="5" name="Rectangle 4">
             <a:extLst xmlns:a="http://schemas.openxmlformats.org/drawingml/2006/main">
               <a:ext uri="{FF2B5EF4-FFF2-40B4-BE49-F238E27FC236}">
-                <a16:creationId xmlns:a16="http://schemas.microsoft.com/office/drawing/2014/main" id="{9D897D09-BF4F-4EC5-AEF0-4AC878335F2D}"/>
+                <a16:creationId xmlns:a16="http://schemas.microsoft.com/office/drawing/2014/main" id="{8CB23525-D624-4B7A-BA09-7CC6215BC93F}"/>
               </a:ext>
             </a:extLst>
           </p:cNvPr>
@@ -13321,7 +13321,7 @@
           <p:cNvPr id="6" name="TextBox 5">
             <a:extLst xmlns:a="http://schemas.openxmlformats.org/drawingml/2006/main">
               <a:ext uri="{FF2B5EF4-FFF2-40B4-BE49-F238E27FC236}">
-                <a16:creationId xmlns:a16="http://schemas.microsoft.com/office/drawing/2014/main" id="{56348B9A-3BAB-4A41-B215-BF1FC1D97D32}"/>
+                <a16:creationId xmlns:a16="http://schemas.microsoft.com/office/drawing/2014/main" id="{266BD754-2B24-442C-B632-642E688FA8CF}"/>
               </a:ext>
             </a:extLst>
           </p:cNvPr>
@@ -13358,7 +13358,7 @@
                 <a:ea typeface="Aptos"/>
                 <a:cs typeface="Aptos"/>
               </a:rPr>
-              <a:t>Julkinen riippumaton evidenssikooste · 2026.07.24-20 · 2026-07-24 · Lähteet: Statistics Canada; Health Canada 2024</a:t>
+              <a:t>Julkinen riippumaton evidenssikooste · 2026.07.24-21 · 2026-07-24 · Lähteet: Statistics Canada; Health Canada 2024</a:t>
             </a:r>
           </a:p>
         </p:txBody>
@@ -13368,7 +13368,7 @@
           <p:cNvPr id="7" name="TextBox 6">
             <a:extLst xmlns:a="http://schemas.openxmlformats.org/drawingml/2006/main">
               <a:ext uri="{FF2B5EF4-FFF2-40B4-BE49-F238E27FC236}">
-                <a16:creationId xmlns:a16="http://schemas.microsoft.com/office/drawing/2014/main" id="{640E0EA9-AA79-4CD7-9724-96321AA19FCE}"/>
+                <a16:creationId xmlns:a16="http://schemas.microsoft.com/office/drawing/2014/main" id="{CC4939D6-C033-49DC-B910-CC8D8845C871}"/>
               </a:ext>
             </a:extLst>
           </p:cNvPr>
@@ -13415,7 +13415,7 @@
           <p:cNvPr id="8" name="Rounded Rectangle 7">
             <a:extLst xmlns:a="http://schemas.openxmlformats.org/drawingml/2006/main">
               <a:ext uri="{FF2B5EF4-FFF2-40B4-BE49-F238E27FC236}">
-                <a16:creationId xmlns:a16="http://schemas.microsoft.com/office/drawing/2014/main" id="{919492DB-2BF9-46DB-8F04-085679DDC62D}"/>
+                <a16:creationId xmlns:a16="http://schemas.microsoft.com/office/drawing/2014/main" id="{5597DEE6-E2F7-4316-9F6D-EDF3A28C9941}"/>
               </a:ext>
             </a:extLst>
           </p:cNvPr>
@@ -13472,7 +13472,7 @@
           <p:cNvPr id="9" name="TextBox 8">
             <a:extLst xmlns:a="http://schemas.openxmlformats.org/drawingml/2006/main">
               <a:ext uri="{FF2B5EF4-FFF2-40B4-BE49-F238E27FC236}">
-                <a16:creationId xmlns:a16="http://schemas.microsoft.com/office/drawing/2014/main" id="{D0C89BE5-9B29-45F5-B62A-2A6927D5AB8C}"/>
+                <a16:creationId xmlns:a16="http://schemas.microsoft.com/office/drawing/2014/main" id="{9E33C678-9EE3-41C9-8110-C5A4D1500877}"/>
               </a:ext>
             </a:extLst>
           </p:cNvPr>
@@ -13519,7 +13519,7 @@
           <p:cNvPr id="10" name="TextBox 9">
             <a:extLst xmlns:a="http://schemas.openxmlformats.org/drawingml/2006/main">
               <a:ext uri="{FF2B5EF4-FFF2-40B4-BE49-F238E27FC236}">
-                <a16:creationId xmlns:a16="http://schemas.microsoft.com/office/drawing/2014/main" id="{D1E8E49B-E8BA-4E25-960C-935045ADBB08}"/>
+                <a16:creationId xmlns:a16="http://schemas.microsoft.com/office/drawing/2014/main" id="{9125FFE9-762B-4087-AE95-14F03A989F20}"/>
               </a:ext>
             </a:extLst>
           </p:cNvPr>
@@ -13566,7 +13566,7 @@
           <p:cNvPr id="11" name="Rounded Rectangle 10">
             <a:extLst xmlns:a="http://schemas.openxmlformats.org/drawingml/2006/main">
               <a:ext uri="{FF2B5EF4-FFF2-40B4-BE49-F238E27FC236}">
-                <a16:creationId xmlns:a16="http://schemas.microsoft.com/office/drawing/2014/main" id="{3ECD1FA1-28A3-4F55-BAFB-DAD6525657FF}"/>
+                <a16:creationId xmlns:a16="http://schemas.microsoft.com/office/drawing/2014/main" id="{AC5A2E6F-E1AB-41CF-AAE7-B0A7CC06B57E}"/>
               </a:ext>
             </a:extLst>
           </p:cNvPr>
@@ -13623,7 +13623,7 @@
           <p:cNvPr id="12" name="TextBox 11">
             <a:extLst xmlns:a="http://schemas.openxmlformats.org/drawingml/2006/main">
               <a:ext uri="{FF2B5EF4-FFF2-40B4-BE49-F238E27FC236}">
-                <a16:creationId xmlns:a16="http://schemas.microsoft.com/office/drawing/2014/main" id="{B2B6B929-7AD6-43D3-92DD-5A85620747F8}"/>
+                <a16:creationId xmlns:a16="http://schemas.microsoft.com/office/drawing/2014/main" id="{7F0AC96A-D896-49A8-A6F3-267432C0855D}"/>
               </a:ext>
             </a:extLst>
           </p:cNvPr>
@@ -13670,7 +13670,7 @@
           <p:cNvPr id="13" name="TextBox 12">
             <a:extLst xmlns:a="http://schemas.openxmlformats.org/drawingml/2006/main">
               <a:ext uri="{FF2B5EF4-FFF2-40B4-BE49-F238E27FC236}">
-                <a16:creationId xmlns:a16="http://schemas.microsoft.com/office/drawing/2014/main" id="{B90E6B03-F334-4984-8E5D-EC09B941FE34}"/>
+                <a16:creationId xmlns:a16="http://schemas.microsoft.com/office/drawing/2014/main" id="{FE527EFA-A22F-412D-BFCF-1878DCC24FF5}"/>
               </a:ext>
             </a:extLst>
           </p:cNvPr>
@@ -13717,7 +13717,7 @@
           <p:cNvPr id="14" name="Rounded Rectangle 13">
             <a:extLst xmlns:a="http://schemas.openxmlformats.org/drawingml/2006/main">
               <a:ext uri="{FF2B5EF4-FFF2-40B4-BE49-F238E27FC236}">
-                <a16:creationId xmlns:a16="http://schemas.microsoft.com/office/drawing/2014/main" id="{1D9930FA-3A4B-435A-B5BD-B7C293838A4B}"/>
+                <a16:creationId xmlns:a16="http://schemas.microsoft.com/office/drawing/2014/main" id="{ED0C4DC8-84AC-445E-A2A0-67C22C7B0588}"/>
               </a:ext>
             </a:extLst>
           </p:cNvPr>
@@ -13774,7 +13774,7 @@
           <p:cNvPr id="15" name="TextBox 14">
             <a:extLst xmlns:a="http://schemas.openxmlformats.org/drawingml/2006/main">
               <a:ext uri="{FF2B5EF4-FFF2-40B4-BE49-F238E27FC236}">
-                <a16:creationId xmlns:a16="http://schemas.microsoft.com/office/drawing/2014/main" id="{36C50EB4-C38D-4F76-B8A1-0B50C5B6F1E2}"/>
+                <a16:creationId xmlns:a16="http://schemas.microsoft.com/office/drawing/2014/main" id="{E2734311-B8C1-4531-8E15-9280F5C2BFEF}"/>
               </a:ext>
             </a:extLst>
           </p:cNvPr>
@@ -13821,7 +13821,7 @@
           <p:cNvPr id="16" name="TextBox 15">
             <a:extLst xmlns:a="http://schemas.openxmlformats.org/drawingml/2006/main">
               <a:ext uri="{FF2B5EF4-FFF2-40B4-BE49-F238E27FC236}">
-                <a16:creationId xmlns:a16="http://schemas.microsoft.com/office/drawing/2014/main" id="{22F902C2-F9EF-45F8-994D-D5F2B4D052EF}"/>
+                <a16:creationId xmlns:a16="http://schemas.microsoft.com/office/drawing/2014/main" id="{DE21D1E0-744B-49A9-8294-DEB61A2C098E}"/>
               </a:ext>
             </a:extLst>
           </p:cNvPr>
@@ -13868,7 +13868,7 @@
           <p:cNvPr id="17" name="TextBox 16">
             <a:extLst xmlns:a="http://schemas.openxmlformats.org/drawingml/2006/main">
               <a:ext uri="{FF2B5EF4-FFF2-40B4-BE49-F238E27FC236}">
-                <a16:creationId xmlns:a16="http://schemas.microsoft.com/office/drawing/2014/main" id="{12945322-D475-4C3C-B05C-43C22F8D3E8B}"/>
+                <a16:creationId xmlns:a16="http://schemas.microsoft.com/office/drawing/2014/main" id="{D7E39BEE-0E40-47DD-AB2E-A61E9D9315B2}"/>
               </a:ext>
             </a:extLst>
           </p:cNvPr>
@@ -13915,7 +13915,7 @@
           <p:cNvPr id="18" name="Rounded Rectangle 17">
             <a:extLst xmlns:a="http://schemas.openxmlformats.org/drawingml/2006/main">
               <a:ext uri="{FF2B5EF4-FFF2-40B4-BE49-F238E27FC236}">
-                <a16:creationId xmlns:a16="http://schemas.microsoft.com/office/drawing/2014/main" id="{3B4A9E67-AFEB-449B-AEFD-D610751D4787}"/>
+                <a16:creationId xmlns:a16="http://schemas.microsoft.com/office/drawing/2014/main" id="{2122A819-3A5F-4DFE-9A98-B6D5A02C78F6}"/>
               </a:ext>
             </a:extLst>
           </p:cNvPr>
@@ -13972,7 +13972,7 @@
           <p:cNvPr id="19" name="TextBox 18">
             <a:extLst xmlns:a="http://schemas.openxmlformats.org/drawingml/2006/main">
               <a:ext uri="{FF2B5EF4-FFF2-40B4-BE49-F238E27FC236}">
-                <a16:creationId xmlns:a16="http://schemas.microsoft.com/office/drawing/2014/main" id="{2A0FF938-9C7F-4DC7-827A-4DA2E7531366}"/>
+                <a16:creationId xmlns:a16="http://schemas.microsoft.com/office/drawing/2014/main" id="{0BF73D69-DB8B-4CE5-BCA8-979DD3C0DAF6}"/>
               </a:ext>
             </a:extLst>
           </p:cNvPr>
@@ -14019,7 +14019,7 @@
           <p:cNvPr id="20" name="TextBox 19">
             <a:extLst xmlns:a="http://schemas.openxmlformats.org/drawingml/2006/main">
               <a:ext uri="{FF2B5EF4-FFF2-40B4-BE49-F238E27FC236}">
-                <a16:creationId xmlns:a16="http://schemas.microsoft.com/office/drawing/2014/main" id="{8089F536-EFAF-4802-AFF4-4A36FEA47276}"/>
+                <a16:creationId xmlns:a16="http://schemas.microsoft.com/office/drawing/2014/main" id="{24DDC5E9-2B26-4A07-A0CB-C2C8FDAEF18F}"/>
               </a:ext>
             </a:extLst>
           </p:cNvPr>
@@ -14064,7 +14064,7 @@
     </p:spTree>
     <p:extLst>
       <p:ext uri="{BB962C8B-B14F-4D97-AF65-F5344CB8AC3E}">
-        <p14:creationId xmlns:p14="http://schemas.microsoft.com/office/powerpoint/2010/main" val="202645654"/>
+        <p14:creationId xmlns:p14="http://schemas.microsoft.com/office/powerpoint/2010/main" val="364428245"/>
       </p:ext>
     </p:extLst>
   </p:cSld>
@@ -14088,7 +14088,7 @@
           <p:cNvPr id="2" name="TextBox 1">
             <a:extLst xmlns:a="http://schemas.openxmlformats.org/drawingml/2006/main">
               <a:ext uri="{FF2B5EF4-FFF2-40B4-BE49-F238E27FC236}">
-                <a16:creationId xmlns:a16="http://schemas.microsoft.com/office/drawing/2014/main" id="{91C07FAA-6922-4CFD-96EA-8902D45428B6}"/>
+                <a16:creationId xmlns:a16="http://schemas.microsoft.com/office/drawing/2014/main" id="{6BFCA968-C6A1-4CDE-A0D0-7D63618DD5E2}"/>
               </a:ext>
             </a:extLst>
           </p:cNvPr>
@@ -14135,7 +14135,7 @@
           <p:cNvPr id="3" name="TextBox 2">
             <a:extLst xmlns:a="http://schemas.openxmlformats.org/drawingml/2006/main">
               <a:ext uri="{FF2B5EF4-FFF2-40B4-BE49-F238E27FC236}">
-                <a16:creationId xmlns:a16="http://schemas.microsoft.com/office/drawing/2014/main" id="{12AC912D-C016-4F7F-8453-7D3E690D8737}"/>
+                <a16:creationId xmlns:a16="http://schemas.microsoft.com/office/drawing/2014/main" id="{EA63AAF4-38D3-4B4B-B6B2-EFA3D30B728A}"/>
               </a:ext>
             </a:extLst>
           </p:cNvPr>
@@ -14182,7 +14182,7 @@
           <p:cNvPr id="4" name="Rectangle 3">
             <a:extLst xmlns:a="http://schemas.openxmlformats.org/drawingml/2006/main">
               <a:ext uri="{FF2B5EF4-FFF2-40B4-BE49-F238E27FC236}">
-                <a16:creationId xmlns:a16="http://schemas.microsoft.com/office/drawing/2014/main" id="{218CB836-A1A9-4C6E-8399-7E1A69A3C431}"/>
+                <a16:creationId xmlns:a16="http://schemas.microsoft.com/office/drawing/2014/main" id="{9AC23A40-D447-49B6-8724-F10BB78AB208}"/>
               </a:ext>
             </a:extLst>
           </p:cNvPr>
@@ -14237,7 +14237,7 @@
           <p:cNvPr id="5" name="Rectangle 4">
             <a:extLst xmlns:a="http://schemas.openxmlformats.org/drawingml/2006/main">
               <a:ext uri="{FF2B5EF4-FFF2-40B4-BE49-F238E27FC236}">
-                <a16:creationId xmlns:a16="http://schemas.microsoft.com/office/drawing/2014/main" id="{EE114921-9DBB-47A1-B85C-D263737A4517}"/>
+                <a16:creationId xmlns:a16="http://schemas.microsoft.com/office/drawing/2014/main" id="{2B13E307-101A-4329-8602-99503320DA93}"/>
               </a:ext>
             </a:extLst>
           </p:cNvPr>
@@ -14292,7 +14292,7 @@
           <p:cNvPr id="6" name="TextBox 5">
             <a:extLst xmlns:a="http://schemas.openxmlformats.org/drawingml/2006/main">
               <a:ext uri="{FF2B5EF4-FFF2-40B4-BE49-F238E27FC236}">
-                <a16:creationId xmlns:a16="http://schemas.microsoft.com/office/drawing/2014/main" id="{D8CA8D82-EDDF-4A21-8EEB-41991F9C40B4}"/>
+                <a16:creationId xmlns:a16="http://schemas.microsoft.com/office/drawing/2014/main" id="{24995A77-C774-47A9-8A1A-CAF2DFC14810}"/>
               </a:ext>
             </a:extLst>
           </p:cNvPr>
@@ -14329,7 +14329,7 @@
                 <a:ea typeface="Aptos"/>
                 <a:cs typeface="Aptos"/>
               </a:rPr>
-              <a:t>Julkinen riippumaton evidenssikooste · 2026.07.24-20 · 2026-07-24 · Lähteet: Destatis</a:t>
+              <a:t>Julkinen riippumaton evidenssikooste · 2026.07.24-21 · 2026-07-24 · Lähteet: Destatis</a:t>
             </a:r>
           </a:p>
         </p:txBody>
@@ -14339,7 +14339,7 @@
           <p:cNvPr id="7" name="TextBox 6">
             <a:extLst xmlns:a="http://schemas.openxmlformats.org/drawingml/2006/main">
               <a:ext uri="{FF2B5EF4-FFF2-40B4-BE49-F238E27FC236}">
-                <a16:creationId xmlns:a16="http://schemas.microsoft.com/office/drawing/2014/main" id="{E7A2C7C5-A87A-4430-9692-DC950D350771}"/>
+                <a16:creationId xmlns:a16="http://schemas.microsoft.com/office/drawing/2014/main" id="{110F8BF3-7190-47CD-9EC8-73917BF4B3E2}"/>
               </a:ext>
             </a:extLst>
           </p:cNvPr>
@@ -14852,7 +14852,7 @@
           <p:cNvPr id="9" name="TextBox 8">
             <a:extLst xmlns:a="http://schemas.openxmlformats.org/drawingml/2006/main">
               <a:ext uri="{FF2B5EF4-FFF2-40B4-BE49-F238E27FC236}">
-                <a16:creationId xmlns:a16="http://schemas.microsoft.com/office/drawing/2014/main" id="{2EA710DE-426F-4CA6-B0C4-588E79B93940}"/>
+                <a16:creationId xmlns:a16="http://schemas.microsoft.com/office/drawing/2014/main" id="{073790F1-1250-4532-B8E8-B60CCBE885A6}"/>
               </a:ext>
             </a:extLst>
           </p:cNvPr>
@@ -14897,7 +14897,7 @@
     </p:spTree>
     <p:extLst>
       <p:ext uri="{BB962C8B-B14F-4D97-AF65-F5344CB8AC3E}">
-        <p14:creationId xmlns:p14="http://schemas.microsoft.com/office/powerpoint/2010/main" val="1794675182"/>
+        <p14:creationId xmlns:p14="http://schemas.microsoft.com/office/powerpoint/2010/main" val="1406516877"/>
       </p:ext>
     </p:extLst>
   </p:cSld>
@@ -14921,7 +14921,7 @@
           <p:cNvPr id="2" name="TextBox 1">
             <a:extLst xmlns:a="http://schemas.openxmlformats.org/drawingml/2006/main">
               <a:ext uri="{FF2B5EF4-FFF2-40B4-BE49-F238E27FC236}">
-                <a16:creationId xmlns:a16="http://schemas.microsoft.com/office/drawing/2014/main" id="{D00FCA0A-56C8-4F9E-A098-DC272E83060D}"/>
+                <a16:creationId xmlns:a16="http://schemas.microsoft.com/office/drawing/2014/main" id="{39775E0E-4EAA-4C1F-9D1E-A45B93C4D54D}"/>
               </a:ext>
             </a:extLst>
           </p:cNvPr>
@@ -14968,7 +14968,7 @@
           <p:cNvPr id="3" name="TextBox 2">
             <a:extLst xmlns:a="http://schemas.openxmlformats.org/drawingml/2006/main">
               <a:ext uri="{FF2B5EF4-FFF2-40B4-BE49-F238E27FC236}">
-                <a16:creationId xmlns:a16="http://schemas.microsoft.com/office/drawing/2014/main" id="{3F857A1C-8F20-4386-BF0B-6BE363DF6AF3}"/>
+                <a16:creationId xmlns:a16="http://schemas.microsoft.com/office/drawing/2014/main" id="{5C10632B-B4BA-4B56-B283-5186FAB193D9}"/>
               </a:ext>
             </a:extLst>
           </p:cNvPr>
@@ -15015,7 +15015,7 @@
           <p:cNvPr id="4" name="Rectangle 3">
             <a:extLst xmlns:a="http://schemas.openxmlformats.org/drawingml/2006/main">
               <a:ext uri="{FF2B5EF4-FFF2-40B4-BE49-F238E27FC236}">
-                <a16:creationId xmlns:a16="http://schemas.microsoft.com/office/drawing/2014/main" id="{30656DF2-FEDD-4EC4-9AE7-C58DB1AEE26D}"/>
+                <a16:creationId xmlns:a16="http://schemas.microsoft.com/office/drawing/2014/main" id="{609C9BD4-54EB-4025-BDE0-C49D3761F5E3}"/>
               </a:ext>
             </a:extLst>
           </p:cNvPr>
@@ -15070,7 +15070,7 @@
           <p:cNvPr id="5" name="Rectangle 4">
             <a:extLst xmlns:a="http://schemas.openxmlformats.org/drawingml/2006/main">
               <a:ext uri="{FF2B5EF4-FFF2-40B4-BE49-F238E27FC236}">
-                <a16:creationId xmlns:a16="http://schemas.microsoft.com/office/drawing/2014/main" id="{D3A15D57-644A-460D-A636-263BC40A1A69}"/>
+                <a16:creationId xmlns:a16="http://schemas.microsoft.com/office/drawing/2014/main" id="{12CE8683-0FE7-4751-B35A-FDF34B05F8BF}"/>
               </a:ext>
             </a:extLst>
           </p:cNvPr>
@@ -15125,7 +15125,7 @@
           <p:cNvPr id="6" name="TextBox 5">
             <a:extLst xmlns:a="http://schemas.openxmlformats.org/drawingml/2006/main">
               <a:ext uri="{FF2B5EF4-FFF2-40B4-BE49-F238E27FC236}">
-                <a16:creationId xmlns:a16="http://schemas.microsoft.com/office/drawing/2014/main" id="{8DE5375F-5420-44FF-AE30-7CC8AFB8E658}"/>
+                <a16:creationId xmlns:a16="http://schemas.microsoft.com/office/drawing/2014/main" id="{044E1AD1-317B-4E9A-B742-2B2FCBB5F39F}"/>
               </a:ext>
             </a:extLst>
           </p:cNvPr>
@@ -15162,7 +15162,7 @@
                 <a:ea typeface="Aptos"/>
                 <a:cs typeface="Aptos"/>
               </a:rPr>
-              <a:t>Julkinen riippumaton evidenssikooste · 2026.07.24-20 · 2026-07-24 · Lähteet: Destatis; inTaste.de</a:t>
+              <a:t>Julkinen riippumaton evidenssikooste · 2026.07.24-21 · 2026-07-24 · Lähteet: Destatis; inTaste.de</a:t>
             </a:r>
           </a:p>
         </p:txBody>
@@ -15172,7 +15172,7 @@
           <p:cNvPr id="7" name="TextBox 6">
             <a:extLst xmlns:a="http://schemas.openxmlformats.org/drawingml/2006/main">
               <a:ext uri="{FF2B5EF4-FFF2-40B4-BE49-F238E27FC236}">
-                <a16:creationId xmlns:a16="http://schemas.microsoft.com/office/drawing/2014/main" id="{B4EF4705-93F4-4356-8F47-AAAF3F5DBCEE}"/>
+                <a16:creationId xmlns:a16="http://schemas.microsoft.com/office/drawing/2014/main" id="{9B42F01C-5784-4585-A848-CE380F4A648C}"/>
               </a:ext>
             </a:extLst>
           </p:cNvPr>
@@ -15219,7 +15219,7 @@
           <p:cNvPr id="8" name="Rounded Rectangle 7">
             <a:extLst xmlns:a="http://schemas.openxmlformats.org/drawingml/2006/main">
               <a:ext uri="{FF2B5EF4-FFF2-40B4-BE49-F238E27FC236}">
-                <a16:creationId xmlns:a16="http://schemas.microsoft.com/office/drawing/2014/main" id="{481D7C65-E35B-4DBD-9627-FEC99D93A369}"/>
+                <a16:creationId xmlns:a16="http://schemas.microsoft.com/office/drawing/2014/main" id="{8EF43E5D-D668-44CB-8D95-D8AF48C89005}"/>
               </a:ext>
             </a:extLst>
           </p:cNvPr>
@@ -15276,7 +15276,7 @@
           <p:cNvPr id="9" name="TextBox 8">
             <a:extLst xmlns:a="http://schemas.openxmlformats.org/drawingml/2006/main">
               <a:ext uri="{FF2B5EF4-FFF2-40B4-BE49-F238E27FC236}">
-                <a16:creationId xmlns:a16="http://schemas.microsoft.com/office/drawing/2014/main" id="{B8BF0E32-ADF5-4126-B80E-448DAB703C80}"/>
+                <a16:creationId xmlns:a16="http://schemas.microsoft.com/office/drawing/2014/main" id="{4D9855A9-DFE2-4F59-AC22-CCE6CAF0F0F3}"/>
               </a:ext>
             </a:extLst>
           </p:cNvPr>
@@ -15323,7 +15323,7 @@
           <p:cNvPr id="10" name="TextBox 9">
             <a:extLst xmlns:a="http://schemas.openxmlformats.org/drawingml/2006/main">
               <a:ext uri="{FF2B5EF4-FFF2-40B4-BE49-F238E27FC236}">
-                <a16:creationId xmlns:a16="http://schemas.microsoft.com/office/drawing/2014/main" id="{B5970D9A-CB0B-47DD-8E97-8995475A7BC4}"/>
+                <a16:creationId xmlns:a16="http://schemas.microsoft.com/office/drawing/2014/main" id="{E669AB3F-3B5B-48B9-B9FB-E96C412323BB}"/>
               </a:ext>
             </a:extLst>
           </p:cNvPr>
@@ -15370,7 +15370,7 @@
           <p:cNvPr id="11" name="Rounded Rectangle 10">
             <a:extLst xmlns:a="http://schemas.openxmlformats.org/drawingml/2006/main">
               <a:ext uri="{FF2B5EF4-FFF2-40B4-BE49-F238E27FC236}">
-                <a16:creationId xmlns:a16="http://schemas.microsoft.com/office/drawing/2014/main" id="{5E911738-8281-4EB0-AB08-005F502B2374}"/>
+                <a16:creationId xmlns:a16="http://schemas.microsoft.com/office/drawing/2014/main" id="{56695906-9300-451D-B510-2321CBF31DC4}"/>
               </a:ext>
             </a:extLst>
           </p:cNvPr>
@@ -15427,7 +15427,7 @@
           <p:cNvPr id="12" name="TextBox 11">
             <a:extLst xmlns:a="http://schemas.openxmlformats.org/drawingml/2006/main">
               <a:ext uri="{FF2B5EF4-FFF2-40B4-BE49-F238E27FC236}">
-                <a16:creationId xmlns:a16="http://schemas.microsoft.com/office/drawing/2014/main" id="{B00F9AED-72B4-4F07-98DF-B501BBDC03D8}"/>
+                <a16:creationId xmlns:a16="http://schemas.microsoft.com/office/drawing/2014/main" id="{B22A8C9F-2CE9-466F-82DC-ECDD1F9279A4}"/>
               </a:ext>
             </a:extLst>
           </p:cNvPr>
@@ -15474,7 +15474,7 @@
           <p:cNvPr id="13" name="TextBox 12">
             <a:extLst xmlns:a="http://schemas.openxmlformats.org/drawingml/2006/main">
               <a:ext uri="{FF2B5EF4-FFF2-40B4-BE49-F238E27FC236}">
-                <a16:creationId xmlns:a16="http://schemas.microsoft.com/office/drawing/2014/main" id="{E5B076DA-59A8-43C8-8262-75A1621F207A}"/>
+                <a16:creationId xmlns:a16="http://schemas.microsoft.com/office/drawing/2014/main" id="{A850CB7A-FFD5-43E7-8025-A523F725A147}"/>
               </a:ext>
             </a:extLst>
           </p:cNvPr>
@@ -15521,7 +15521,7 @@
           <p:cNvPr id="14" name="Rounded Rectangle 13">
             <a:extLst xmlns:a="http://schemas.openxmlformats.org/drawingml/2006/main">
               <a:ext uri="{FF2B5EF4-FFF2-40B4-BE49-F238E27FC236}">
-                <a16:creationId xmlns:a16="http://schemas.microsoft.com/office/drawing/2014/main" id="{BA79EEA9-A150-419E-A5C5-706B9C98888C}"/>
+                <a16:creationId xmlns:a16="http://schemas.microsoft.com/office/drawing/2014/main" id="{736A2D49-3FE4-4E6D-8C86-022008D5243F}"/>
               </a:ext>
             </a:extLst>
           </p:cNvPr>
@@ -15578,7 +15578,7 @@
           <p:cNvPr id="15" name="TextBox 14">
             <a:extLst xmlns:a="http://schemas.openxmlformats.org/drawingml/2006/main">
               <a:ext uri="{FF2B5EF4-FFF2-40B4-BE49-F238E27FC236}">
-                <a16:creationId xmlns:a16="http://schemas.microsoft.com/office/drawing/2014/main" id="{71F3E263-5096-4DE7-BD1D-1B2830F233A9}"/>
+                <a16:creationId xmlns:a16="http://schemas.microsoft.com/office/drawing/2014/main" id="{AB4565CC-A675-49AF-A65F-045D3A0D5589}"/>
               </a:ext>
             </a:extLst>
           </p:cNvPr>
@@ -15625,7 +15625,7 @@
           <p:cNvPr id="16" name="TextBox 15">
             <a:extLst xmlns:a="http://schemas.openxmlformats.org/drawingml/2006/main">
               <a:ext uri="{FF2B5EF4-FFF2-40B4-BE49-F238E27FC236}">
-                <a16:creationId xmlns:a16="http://schemas.microsoft.com/office/drawing/2014/main" id="{52F965FB-23EE-41C2-A3DF-B3ECC66E524D}"/>
+                <a16:creationId xmlns:a16="http://schemas.microsoft.com/office/drawing/2014/main" id="{9C34F7A2-B143-4DC3-B5AA-7BFCA023F591}"/>
               </a:ext>
             </a:extLst>
           </p:cNvPr>
@@ -15672,7 +15672,7 @@
           <p:cNvPr id="17" name="TextBox 16">
             <a:extLst xmlns:a="http://schemas.openxmlformats.org/drawingml/2006/main">
               <a:ext uri="{FF2B5EF4-FFF2-40B4-BE49-F238E27FC236}">
-                <a16:creationId xmlns:a16="http://schemas.microsoft.com/office/drawing/2014/main" id="{C8D3BCD9-5F6B-4E03-AAE3-BE17B0C1A6BB}"/>
+                <a16:creationId xmlns:a16="http://schemas.microsoft.com/office/drawing/2014/main" id="{A15F2941-EE57-41B9-877A-8EB3202A10FC}"/>
               </a:ext>
             </a:extLst>
           </p:cNvPr>
@@ -15719,7 +15719,7 @@
           <p:cNvPr id="18" name="Rounded Rectangle 17">
             <a:extLst xmlns:a="http://schemas.openxmlformats.org/drawingml/2006/main">
               <a:ext uri="{FF2B5EF4-FFF2-40B4-BE49-F238E27FC236}">
-                <a16:creationId xmlns:a16="http://schemas.microsoft.com/office/drawing/2014/main" id="{36DA7108-6153-41AB-9198-EB44DCCE145E}"/>
+                <a16:creationId xmlns:a16="http://schemas.microsoft.com/office/drawing/2014/main" id="{0872C297-3858-4C27-AFF9-67C22562CA3F}"/>
               </a:ext>
             </a:extLst>
           </p:cNvPr>
@@ -15776,7 +15776,7 @@
           <p:cNvPr id="19" name="TextBox 18">
             <a:extLst xmlns:a="http://schemas.openxmlformats.org/drawingml/2006/main">
               <a:ext uri="{FF2B5EF4-FFF2-40B4-BE49-F238E27FC236}">
-                <a16:creationId xmlns:a16="http://schemas.microsoft.com/office/drawing/2014/main" id="{B8423541-7F5D-43DE-96A9-5C6050BEF708}"/>
+                <a16:creationId xmlns:a16="http://schemas.microsoft.com/office/drawing/2014/main" id="{E6D3A8C6-9557-46FA-86DA-B537D057A7BB}"/>
               </a:ext>
             </a:extLst>
           </p:cNvPr>
@@ -15823,7 +15823,7 @@
           <p:cNvPr id="20" name="TextBox 19">
             <a:extLst xmlns:a="http://schemas.openxmlformats.org/drawingml/2006/main">
               <a:ext uri="{FF2B5EF4-FFF2-40B4-BE49-F238E27FC236}">
-                <a16:creationId xmlns:a16="http://schemas.microsoft.com/office/drawing/2014/main" id="{C62B3FC0-8D08-4576-A8E5-7F6FC7ABCF22}"/>
+                <a16:creationId xmlns:a16="http://schemas.microsoft.com/office/drawing/2014/main" id="{14C38093-48E3-471E-96BC-E2C566BE9294}"/>
               </a:ext>
             </a:extLst>
           </p:cNvPr>
@@ -15868,7 +15868,7 @@
     </p:spTree>
     <p:extLst>
       <p:ext uri="{BB962C8B-B14F-4D97-AF65-F5344CB8AC3E}">
-        <p14:creationId xmlns:p14="http://schemas.microsoft.com/office/powerpoint/2010/main" val="974504377"/>
+        <p14:creationId xmlns:p14="http://schemas.microsoft.com/office/powerpoint/2010/main" val="619024580"/>
       </p:ext>
     </p:extLst>
   </p:cSld>
@@ -15892,7 +15892,7 @@
           <p:cNvPr id="2" name="TextBox 1">
             <a:extLst xmlns:a="http://schemas.openxmlformats.org/drawingml/2006/main">
               <a:ext uri="{FF2B5EF4-FFF2-40B4-BE49-F238E27FC236}">
-                <a16:creationId xmlns:a16="http://schemas.microsoft.com/office/drawing/2014/main" id="{44947909-319B-41B4-8F5B-FEF96B22E904}"/>
+                <a16:creationId xmlns:a16="http://schemas.microsoft.com/office/drawing/2014/main" id="{93E6236D-98A7-4E31-B91A-4D3EA075DE6C}"/>
               </a:ext>
             </a:extLst>
           </p:cNvPr>
@@ -15939,7 +15939,7 @@
           <p:cNvPr id="3" name="TextBox 2">
             <a:extLst xmlns:a="http://schemas.openxmlformats.org/drawingml/2006/main">
               <a:ext uri="{FF2B5EF4-FFF2-40B4-BE49-F238E27FC236}">
-                <a16:creationId xmlns:a16="http://schemas.microsoft.com/office/drawing/2014/main" id="{531A23E7-F0C7-40F9-B399-26E6AAE963C2}"/>
+                <a16:creationId xmlns:a16="http://schemas.microsoft.com/office/drawing/2014/main" id="{AA6D5C2E-CB9D-46BF-B518-912FEC77F837}"/>
               </a:ext>
             </a:extLst>
           </p:cNvPr>
@@ -15986,7 +15986,7 @@
           <p:cNvPr id="4" name="Rectangle 3">
             <a:extLst xmlns:a="http://schemas.openxmlformats.org/drawingml/2006/main">
               <a:ext uri="{FF2B5EF4-FFF2-40B4-BE49-F238E27FC236}">
-                <a16:creationId xmlns:a16="http://schemas.microsoft.com/office/drawing/2014/main" id="{80F7AD57-3F47-47CF-A9EE-35066FABB577}"/>
+                <a16:creationId xmlns:a16="http://schemas.microsoft.com/office/drawing/2014/main" id="{79BABFC5-113A-4C8E-8CDF-0A49E4F1EBDE}"/>
               </a:ext>
             </a:extLst>
           </p:cNvPr>
@@ -16041,7 +16041,7 @@
           <p:cNvPr id="5" name="Rectangle 4">
             <a:extLst xmlns:a="http://schemas.openxmlformats.org/drawingml/2006/main">
               <a:ext uri="{FF2B5EF4-FFF2-40B4-BE49-F238E27FC236}">
-                <a16:creationId xmlns:a16="http://schemas.microsoft.com/office/drawing/2014/main" id="{FA1D8C6A-CAF4-46AB-85D1-6A2987E26D44}"/>
+                <a16:creationId xmlns:a16="http://schemas.microsoft.com/office/drawing/2014/main" id="{FAE2A5EA-7305-42F7-BA67-6D18EFFD310C}"/>
               </a:ext>
             </a:extLst>
           </p:cNvPr>
@@ -16096,7 +16096,7 @@
           <p:cNvPr id="6" name="TextBox 5">
             <a:extLst xmlns:a="http://schemas.openxmlformats.org/drawingml/2006/main">
               <a:ext uri="{FF2B5EF4-FFF2-40B4-BE49-F238E27FC236}">
-                <a16:creationId xmlns:a16="http://schemas.microsoft.com/office/drawing/2014/main" id="{5DA43B04-5113-4117-AFF2-6177DBF26119}"/>
+                <a16:creationId xmlns:a16="http://schemas.microsoft.com/office/drawing/2014/main" id="{567D2E56-5D74-4E9C-92B1-0C96B568ECAA}"/>
               </a:ext>
             </a:extLst>
           </p:cNvPr>
@@ -16133,7 +16133,7 @@
                 <a:ea typeface="Aptos"/>
                 <a:cs typeface="Aptos"/>
               </a:rPr>
-              <a:t>Julkinen riippumaton evidenssikooste · 2026.07.24-20 · 2026-07-24 · Lähteet: IMARC; GVR; Fortune; European Commission</a:t>
+              <a:t>Julkinen riippumaton evidenssikooste · 2026.07.24-21 · 2026-07-24 · Lähteet: IMARC; GVR; Fortune; European Commission</a:t>
             </a:r>
           </a:p>
         </p:txBody>
@@ -16143,7 +16143,7 @@
           <p:cNvPr id="7" name="TextBox 6">
             <a:extLst xmlns:a="http://schemas.openxmlformats.org/drawingml/2006/main">
               <a:ext uri="{FF2B5EF4-FFF2-40B4-BE49-F238E27FC236}">
-                <a16:creationId xmlns:a16="http://schemas.microsoft.com/office/drawing/2014/main" id="{E0160C9B-8883-4EE7-B056-C3AF8F835AB1}"/>
+                <a16:creationId xmlns:a16="http://schemas.microsoft.com/office/drawing/2014/main" id="{E8B2AB88-FF6A-4594-9255-5F82F3079A13}"/>
               </a:ext>
             </a:extLst>
           </p:cNvPr>
@@ -16190,7 +16190,7 @@
           <p:cNvPr id="8" name="Rounded Rectangle 7">
             <a:extLst xmlns:a="http://schemas.openxmlformats.org/drawingml/2006/main">
               <a:ext uri="{FF2B5EF4-FFF2-40B4-BE49-F238E27FC236}">
-                <a16:creationId xmlns:a16="http://schemas.microsoft.com/office/drawing/2014/main" id="{B60633CC-5CAE-4AF7-8F59-3C9E66EFBC35}"/>
+                <a16:creationId xmlns:a16="http://schemas.microsoft.com/office/drawing/2014/main" id="{1508DBFA-3E9C-46D3-8C57-B428EE317A40}"/>
               </a:ext>
             </a:extLst>
           </p:cNvPr>
@@ -16247,7 +16247,7 @@
           <p:cNvPr id="9" name="TextBox 8">
             <a:extLst xmlns:a="http://schemas.openxmlformats.org/drawingml/2006/main">
               <a:ext uri="{FF2B5EF4-FFF2-40B4-BE49-F238E27FC236}">
-                <a16:creationId xmlns:a16="http://schemas.microsoft.com/office/drawing/2014/main" id="{49692032-B05D-4FA8-BDEF-06D7D38E37FD}"/>
+                <a16:creationId xmlns:a16="http://schemas.microsoft.com/office/drawing/2014/main" id="{E1AF5988-7181-4869-9B9B-167C33104F5E}"/>
               </a:ext>
             </a:extLst>
           </p:cNvPr>
@@ -16294,7 +16294,7 @@
           <p:cNvPr id="10" name="TextBox 9">
             <a:extLst xmlns:a="http://schemas.openxmlformats.org/drawingml/2006/main">
               <a:ext uri="{FF2B5EF4-FFF2-40B4-BE49-F238E27FC236}">
-                <a16:creationId xmlns:a16="http://schemas.microsoft.com/office/drawing/2014/main" id="{0019D536-CC5A-4A89-95D1-011B3B600A59}"/>
+                <a16:creationId xmlns:a16="http://schemas.microsoft.com/office/drawing/2014/main" id="{F080FFB6-0475-478B-86CA-4498B54AA375}"/>
               </a:ext>
             </a:extLst>
           </p:cNvPr>
@@ -16341,7 +16341,7 @@
           <p:cNvPr id="11" name="Rounded Rectangle 10">
             <a:extLst xmlns:a="http://schemas.openxmlformats.org/drawingml/2006/main">
               <a:ext uri="{FF2B5EF4-FFF2-40B4-BE49-F238E27FC236}">
-                <a16:creationId xmlns:a16="http://schemas.microsoft.com/office/drawing/2014/main" id="{4E531204-C7AC-4EF5-B3A1-867AC9CC4278}"/>
+                <a16:creationId xmlns:a16="http://schemas.microsoft.com/office/drawing/2014/main" id="{22B78CDB-7468-4966-B204-B9E37C7D5D63}"/>
               </a:ext>
             </a:extLst>
           </p:cNvPr>
@@ -16398,7 +16398,7 @@
           <p:cNvPr id="12" name="TextBox 11">
             <a:extLst xmlns:a="http://schemas.openxmlformats.org/drawingml/2006/main">
               <a:ext uri="{FF2B5EF4-FFF2-40B4-BE49-F238E27FC236}">
-                <a16:creationId xmlns:a16="http://schemas.microsoft.com/office/drawing/2014/main" id="{4EA5F743-46B9-4E86-B461-7529A3A02E28}"/>
+                <a16:creationId xmlns:a16="http://schemas.microsoft.com/office/drawing/2014/main" id="{E5B00338-68AC-4B42-BBF3-EA1A90AAADF9}"/>
               </a:ext>
             </a:extLst>
           </p:cNvPr>
@@ -16445,7 +16445,7 @@
           <p:cNvPr id="13" name="TextBox 12">
             <a:extLst xmlns:a="http://schemas.openxmlformats.org/drawingml/2006/main">
               <a:ext uri="{FF2B5EF4-FFF2-40B4-BE49-F238E27FC236}">
-                <a16:creationId xmlns:a16="http://schemas.microsoft.com/office/drawing/2014/main" id="{BDD9502F-758F-4E45-B4B1-E7D4F3B69E1F}"/>
+                <a16:creationId xmlns:a16="http://schemas.microsoft.com/office/drawing/2014/main" id="{0AEFAD18-8F8C-4DDB-95BA-884206DD2D4E}"/>
               </a:ext>
             </a:extLst>
           </p:cNvPr>
@@ -16492,7 +16492,7 @@
           <p:cNvPr id="14" name="Rounded Rectangle 13">
             <a:extLst xmlns:a="http://schemas.openxmlformats.org/drawingml/2006/main">
               <a:ext uri="{FF2B5EF4-FFF2-40B4-BE49-F238E27FC236}">
-                <a16:creationId xmlns:a16="http://schemas.microsoft.com/office/drawing/2014/main" id="{5CCD5475-B008-42BF-B24D-B2981259E306}"/>
+                <a16:creationId xmlns:a16="http://schemas.microsoft.com/office/drawing/2014/main" id="{B7830E89-39F1-43AF-BDC2-01CD6F5FD5BC}"/>
               </a:ext>
             </a:extLst>
           </p:cNvPr>
@@ -16549,7 +16549,7 @@
           <p:cNvPr id="15" name="TextBox 14">
             <a:extLst xmlns:a="http://schemas.openxmlformats.org/drawingml/2006/main">
               <a:ext uri="{FF2B5EF4-FFF2-40B4-BE49-F238E27FC236}">
-                <a16:creationId xmlns:a16="http://schemas.microsoft.com/office/drawing/2014/main" id="{F5403BF8-8143-4017-9969-D6163E9CD63A}"/>
+                <a16:creationId xmlns:a16="http://schemas.microsoft.com/office/drawing/2014/main" id="{128B6826-4C8C-461D-8A5B-6AAF2F73506C}"/>
               </a:ext>
             </a:extLst>
           </p:cNvPr>
@@ -16596,7 +16596,7 @@
           <p:cNvPr id="16" name="TextBox 15">
             <a:extLst xmlns:a="http://schemas.openxmlformats.org/drawingml/2006/main">
               <a:ext uri="{FF2B5EF4-FFF2-40B4-BE49-F238E27FC236}">
-                <a16:creationId xmlns:a16="http://schemas.microsoft.com/office/drawing/2014/main" id="{9074DA08-AD9A-4F58-B605-5E3A0FF0589B}"/>
+                <a16:creationId xmlns:a16="http://schemas.microsoft.com/office/drawing/2014/main" id="{6F262BFC-C4A4-439E-A8CC-08A3F775FA60}"/>
               </a:ext>
             </a:extLst>
           </p:cNvPr>
@@ -16643,7 +16643,7 @@
           <p:cNvPr id="17" name="Rounded Rectangle 16">
             <a:extLst xmlns:a="http://schemas.openxmlformats.org/drawingml/2006/main">
               <a:ext uri="{FF2B5EF4-FFF2-40B4-BE49-F238E27FC236}">
-                <a16:creationId xmlns:a16="http://schemas.microsoft.com/office/drawing/2014/main" id="{C981BD7E-75C9-44D0-A20C-71BF0F64B2C7}"/>
+                <a16:creationId xmlns:a16="http://schemas.microsoft.com/office/drawing/2014/main" id="{17E3D352-A6F5-4433-B465-5F18778C1757}"/>
               </a:ext>
             </a:extLst>
           </p:cNvPr>
@@ -16700,7 +16700,7 @@
           <p:cNvPr id="18" name="TextBox 17">
             <a:extLst xmlns:a="http://schemas.openxmlformats.org/drawingml/2006/main">
               <a:ext uri="{FF2B5EF4-FFF2-40B4-BE49-F238E27FC236}">
-                <a16:creationId xmlns:a16="http://schemas.microsoft.com/office/drawing/2014/main" id="{558555D1-FAB7-4595-A9B2-2D235A9D8A10}"/>
+                <a16:creationId xmlns:a16="http://schemas.microsoft.com/office/drawing/2014/main" id="{209055FE-9CC7-4DEE-8570-32CC958B636C}"/>
               </a:ext>
             </a:extLst>
           </p:cNvPr>
@@ -16747,7 +16747,7 @@
           <p:cNvPr id="19" name="TextBox 18">
             <a:extLst xmlns:a="http://schemas.openxmlformats.org/drawingml/2006/main">
               <a:ext uri="{FF2B5EF4-FFF2-40B4-BE49-F238E27FC236}">
-                <a16:creationId xmlns:a16="http://schemas.microsoft.com/office/drawing/2014/main" id="{08C6ACCF-3392-4014-AF93-FEF8D840F102}"/>
+                <a16:creationId xmlns:a16="http://schemas.microsoft.com/office/drawing/2014/main" id="{938BAFA9-89C2-4955-8948-D372E858FDBE}"/>
               </a:ext>
             </a:extLst>
           </p:cNvPr>
@@ -16794,7 +16794,7 @@
           <p:cNvPr id="20" name="TextBox 19">
             <a:extLst xmlns:a="http://schemas.openxmlformats.org/drawingml/2006/main">
               <a:ext uri="{FF2B5EF4-FFF2-40B4-BE49-F238E27FC236}">
-                <a16:creationId xmlns:a16="http://schemas.microsoft.com/office/drawing/2014/main" id="{F2B90B76-E323-4D91-89C1-4AF4B13679A6}"/>
+                <a16:creationId xmlns:a16="http://schemas.microsoft.com/office/drawing/2014/main" id="{85C464AF-D1AB-4733-841F-80E4467BAFCF}"/>
               </a:ext>
             </a:extLst>
           </p:cNvPr>
@@ -16841,7 +16841,7 @@
           <p:cNvPr id="21" name="Rounded Rectangle 20">
             <a:extLst xmlns:a="http://schemas.openxmlformats.org/drawingml/2006/main">
               <a:ext uri="{FF2B5EF4-FFF2-40B4-BE49-F238E27FC236}">
-                <a16:creationId xmlns:a16="http://schemas.microsoft.com/office/drawing/2014/main" id="{C67B6673-E7BA-438C-99C4-EAC8FC0EE329}"/>
+                <a16:creationId xmlns:a16="http://schemas.microsoft.com/office/drawing/2014/main" id="{DFB47509-E05F-4C53-974F-4C972C888D5B}"/>
               </a:ext>
             </a:extLst>
           </p:cNvPr>
@@ -16898,7 +16898,7 @@
           <p:cNvPr id="22" name="TextBox 21">
             <a:extLst xmlns:a="http://schemas.openxmlformats.org/drawingml/2006/main">
               <a:ext uri="{FF2B5EF4-FFF2-40B4-BE49-F238E27FC236}">
-                <a16:creationId xmlns:a16="http://schemas.microsoft.com/office/drawing/2014/main" id="{0867112B-9436-458F-895E-449689036B55}"/>
+                <a16:creationId xmlns:a16="http://schemas.microsoft.com/office/drawing/2014/main" id="{E74F7EAF-FA1A-4760-A671-7EACC4F3735F}"/>
               </a:ext>
             </a:extLst>
           </p:cNvPr>
@@ -16945,7 +16945,7 @@
           <p:cNvPr id="23" name="TextBox 22">
             <a:extLst xmlns:a="http://schemas.openxmlformats.org/drawingml/2006/main">
               <a:ext uri="{FF2B5EF4-FFF2-40B4-BE49-F238E27FC236}">
-                <a16:creationId xmlns:a16="http://schemas.microsoft.com/office/drawing/2014/main" id="{65DD4287-9F1C-47E6-BB8F-B687B9BB3C32}"/>
+                <a16:creationId xmlns:a16="http://schemas.microsoft.com/office/drawing/2014/main" id="{6DC562FA-C96D-4E95-A930-41994A5EFEB1}"/>
               </a:ext>
             </a:extLst>
           </p:cNvPr>
@@ -16990,7 +16990,7 @@
     </p:spTree>
     <p:extLst>
       <p:ext uri="{BB962C8B-B14F-4D97-AF65-F5344CB8AC3E}">
-        <p14:creationId xmlns:p14="http://schemas.microsoft.com/office/powerpoint/2010/main" val="2106125401"/>
+        <p14:creationId xmlns:p14="http://schemas.microsoft.com/office/powerpoint/2010/main" val="154847740"/>
       </p:ext>
     </p:extLst>
   </p:cSld>
@@ -17014,7 +17014,7 @@
           <p:cNvPr id="2" name="TextBox 1">
             <a:extLst xmlns:a="http://schemas.openxmlformats.org/drawingml/2006/main">
               <a:ext uri="{FF2B5EF4-FFF2-40B4-BE49-F238E27FC236}">
-                <a16:creationId xmlns:a16="http://schemas.microsoft.com/office/drawing/2014/main" id="{BAED85D1-3C94-4EFE-982F-4359BBBC1B75}"/>
+                <a16:creationId xmlns:a16="http://schemas.microsoft.com/office/drawing/2014/main" id="{F2C9476D-A82A-4DE2-8875-8DA40493AFA1}"/>
               </a:ext>
             </a:extLst>
           </p:cNvPr>
@@ -17061,7 +17061,7 @@
           <p:cNvPr id="3" name="TextBox 2">
             <a:extLst xmlns:a="http://schemas.openxmlformats.org/drawingml/2006/main">
               <a:ext uri="{FF2B5EF4-FFF2-40B4-BE49-F238E27FC236}">
-                <a16:creationId xmlns:a16="http://schemas.microsoft.com/office/drawing/2014/main" id="{D4DF3FCC-79C1-4258-9B84-19920D1768D5}"/>
+                <a16:creationId xmlns:a16="http://schemas.microsoft.com/office/drawing/2014/main" id="{E233B0D7-F562-4215-88FB-D86D556C5541}"/>
               </a:ext>
             </a:extLst>
           </p:cNvPr>
@@ -17108,7 +17108,7 @@
           <p:cNvPr id="4" name="Rectangle 3">
             <a:extLst xmlns:a="http://schemas.openxmlformats.org/drawingml/2006/main">
               <a:ext uri="{FF2B5EF4-FFF2-40B4-BE49-F238E27FC236}">
-                <a16:creationId xmlns:a16="http://schemas.microsoft.com/office/drawing/2014/main" id="{7D2A4A30-B96E-4D69-B1B6-86981C093362}"/>
+                <a16:creationId xmlns:a16="http://schemas.microsoft.com/office/drawing/2014/main" id="{D62EAB72-3584-43D0-832C-E82BA38098A8}"/>
               </a:ext>
             </a:extLst>
           </p:cNvPr>
@@ -17163,7 +17163,7 @@
           <p:cNvPr id="5" name="Rectangle 4">
             <a:extLst xmlns:a="http://schemas.openxmlformats.org/drawingml/2006/main">
               <a:ext uri="{FF2B5EF4-FFF2-40B4-BE49-F238E27FC236}">
-                <a16:creationId xmlns:a16="http://schemas.microsoft.com/office/drawing/2014/main" id="{825CB2E5-8B60-4B73-B59C-B7D4EB0A0BAB}"/>
+                <a16:creationId xmlns:a16="http://schemas.microsoft.com/office/drawing/2014/main" id="{6D36234E-F458-4D6E-9383-9A51AA0A65E7}"/>
               </a:ext>
             </a:extLst>
           </p:cNvPr>
@@ -17218,7 +17218,7 @@
           <p:cNvPr id="6" name="TextBox 5">
             <a:extLst xmlns:a="http://schemas.openxmlformats.org/drawingml/2006/main">
               <a:ext uri="{FF2B5EF4-FFF2-40B4-BE49-F238E27FC236}">
-                <a16:creationId xmlns:a16="http://schemas.microsoft.com/office/drawing/2014/main" id="{01628151-AB61-4910-B70B-B94F61F5E354}"/>
+                <a16:creationId xmlns:a16="http://schemas.microsoft.com/office/drawing/2014/main" id="{78DD2A63-5886-46A7-B16F-FE9C361B1D61}"/>
               </a:ext>
             </a:extLst>
           </p:cNvPr>
@@ -17255,7 +17255,7 @@
                 <a:ea typeface="Aptos"/>
                 <a:cs typeface="Aptos"/>
               </a:rPr>
-              <a:t>Julkinen riippumaton evidenssikooste · 2026.07.24-20 · 2026-07-24 · Lähteet: Market-values modelReadiness, donorProtocol ja donorCandidates</a:t>
+              <a:t>Julkinen riippumaton evidenssikooste · 2026.07.24-21 · 2026-07-24 · Lähteet: Market-values modelReadiness, donorProtocol ja donorCandidates</a:t>
             </a:r>
           </a:p>
         </p:txBody>
@@ -17265,7 +17265,7 @@
           <p:cNvPr id="7" name="TextBox 6">
             <a:extLst xmlns:a="http://schemas.openxmlformats.org/drawingml/2006/main">
               <a:ext uri="{FF2B5EF4-FFF2-40B4-BE49-F238E27FC236}">
-                <a16:creationId xmlns:a16="http://schemas.microsoft.com/office/drawing/2014/main" id="{E3CE3B78-20E1-44EC-9BC9-7F45EE56B1C2}"/>
+                <a16:creationId xmlns:a16="http://schemas.microsoft.com/office/drawing/2014/main" id="{6C2733DF-580A-412C-8C77-9347E9F74896}"/>
               </a:ext>
             </a:extLst>
           </p:cNvPr>
@@ -17312,7 +17312,7 @@
           <p:cNvPr id="8" name="TextBox 7">
             <a:extLst xmlns:a="http://schemas.openxmlformats.org/drawingml/2006/main">
               <a:ext uri="{FF2B5EF4-FFF2-40B4-BE49-F238E27FC236}">
-                <a16:creationId xmlns:a16="http://schemas.microsoft.com/office/drawing/2014/main" id="{FB4D1006-BF82-43FB-B12A-998572DB582E}"/>
+                <a16:creationId xmlns:a16="http://schemas.microsoft.com/office/drawing/2014/main" id="{9894AFE6-A1E1-4EB1-A327-6CAF6DA6A1D7}"/>
               </a:ext>
             </a:extLst>
           </p:cNvPr>
@@ -17359,7 +17359,7 @@
           <p:cNvPr id="9" name="TextBox 8">
             <a:extLst xmlns:a="http://schemas.openxmlformats.org/drawingml/2006/main">
               <a:ext uri="{FF2B5EF4-FFF2-40B4-BE49-F238E27FC236}">
-                <a16:creationId xmlns:a16="http://schemas.microsoft.com/office/drawing/2014/main" id="{9BAC7AB2-1C48-44FF-8DB6-C71E7AF2767E}"/>
+                <a16:creationId xmlns:a16="http://schemas.microsoft.com/office/drawing/2014/main" id="{62DDBBA3-0429-4D69-9B83-C5695397E4C7}"/>
               </a:ext>
             </a:extLst>
           </p:cNvPr>
@@ -17456,7 +17456,7 @@
           <p:cNvPr id="10" name="Rounded Rectangle 9">
             <a:extLst xmlns:a="http://schemas.openxmlformats.org/drawingml/2006/main">
               <a:ext uri="{FF2B5EF4-FFF2-40B4-BE49-F238E27FC236}">
-                <a16:creationId xmlns:a16="http://schemas.microsoft.com/office/drawing/2014/main" id="{2E75376B-A139-4A3E-B811-DB5AD3F88F91}"/>
+                <a16:creationId xmlns:a16="http://schemas.microsoft.com/office/drawing/2014/main" id="{7F54B819-C16C-4602-8940-F55179E1EC92}"/>
               </a:ext>
             </a:extLst>
           </p:cNvPr>
@@ -17513,7 +17513,7 @@
           <p:cNvPr id="11" name="TextBox 10">
             <a:extLst xmlns:a="http://schemas.openxmlformats.org/drawingml/2006/main">
               <a:ext uri="{FF2B5EF4-FFF2-40B4-BE49-F238E27FC236}">
-                <a16:creationId xmlns:a16="http://schemas.microsoft.com/office/drawing/2014/main" id="{B1A5854B-67A7-4FC3-97A1-A5CDDF70BEDD}"/>
+                <a16:creationId xmlns:a16="http://schemas.microsoft.com/office/drawing/2014/main" id="{671FEA3F-1EFB-4DD2-8658-F9D917B768E2}"/>
               </a:ext>
             </a:extLst>
           </p:cNvPr>
@@ -17560,7 +17560,7 @@
           <p:cNvPr id="12" name="TextBox 11">
             <a:extLst xmlns:a="http://schemas.openxmlformats.org/drawingml/2006/main">
               <a:ext uri="{FF2B5EF4-FFF2-40B4-BE49-F238E27FC236}">
-                <a16:creationId xmlns:a16="http://schemas.microsoft.com/office/drawing/2014/main" id="{10F8F236-2D83-4044-924B-6BC9ED4B7B69}"/>
+                <a16:creationId xmlns:a16="http://schemas.microsoft.com/office/drawing/2014/main" id="{1E39F322-C83B-4B28-ABB8-0A8E63F97583}"/>
               </a:ext>
             </a:extLst>
           </p:cNvPr>
@@ -17605,7 +17605,7 @@
     </p:spTree>
     <p:extLst>
       <p:ext uri="{BB962C8B-B14F-4D97-AF65-F5344CB8AC3E}">
-        <p14:creationId xmlns:p14="http://schemas.microsoft.com/office/powerpoint/2010/main" val="746678485"/>
+        <p14:creationId xmlns:p14="http://schemas.microsoft.com/office/powerpoint/2010/main" val="145107274"/>
       </p:ext>
     </p:extLst>
   </p:cSld>
@@ -17629,7 +17629,7 @@
           <p:cNvPr id="2" name="TextBox 1">
             <a:extLst xmlns:a="http://schemas.openxmlformats.org/drawingml/2006/main">
               <a:ext uri="{FF2B5EF4-FFF2-40B4-BE49-F238E27FC236}">
-                <a16:creationId xmlns:a16="http://schemas.microsoft.com/office/drawing/2014/main" id="{0B30552D-FAA4-4458-AD70-F963DE476C1A}"/>
+                <a16:creationId xmlns:a16="http://schemas.microsoft.com/office/drawing/2014/main" id="{7EE9FC88-8FC7-4839-A98E-C66FC5578D3F}"/>
               </a:ext>
             </a:extLst>
           </p:cNvPr>
@@ -17676,7 +17676,7 @@
           <p:cNvPr id="3" name="TextBox 2">
             <a:extLst xmlns:a="http://schemas.openxmlformats.org/drawingml/2006/main">
               <a:ext uri="{FF2B5EF4-FFF2-40B4-BE49-F238E27FC236}">
-                <a16:creationId xmlns:a16="http://schemas.microsoft.com/office/drawing/2014/main" id="{D008B3D3-6BA2-46F3-BBA9-331AF7ADF783}"/>
+                <a16:creationId xmlns:a16="http://schemas.microsoft.com/office/drawing/2014/main" id="{723AB218-BAAA-461E-892C-917869BF8E2A}"/>
               </a:ext>
             </a:extLst>
           </p:cNvPr>
@@ -17723,7 +17723,7 @@
           <p:cNvPr id="4" name="Rectangle 3">
             <a:extLst xmlns:a="http://schemas.openxmlformats.org/drawingml/2006/main">
               <a:ext uri="{FF2B5EF4-FFF2-40B4-BE49-F238E27FC236}">
-                <a16:creationId xmlns:a16="http://schemas.microsoft.com/office/drawing/2014/main" id="{391C3E09-E893-4A7E-BA93-08DEC3BDB4B9}"/>
+                <a16:creationId xmlns:a16="http://schemas.microsoft.com/office/drawing/2014/main" id="{13028BDE-7DBE-4D1B-9B07-3C74FE871535}"/>
               </a:ext>
             </a:extLst>
           </p:cNvPr>
@@ -17778,7 +17778,7 @@
           <p:cNvPr id="5" name="Rectangle 4">
             <a:extLst xmlns:a="http://schemas.openxmlformats.org/drawingml/2006/main">
               <a:ext uri="{FF2B5EF4-FFF2-40B4-BE49-F238E27FC236}">
-                <a16:creationId xmlns:a16="http://schemas.microsoft.com/office/drawing/2014/main" id="{CD6A8457-39EC-4531-A913-5201BB64E965}"/>
+                <a16:creationId xmlns:a16="http://schemas.microsoft.com/office/drawing/2014/main" id="{1DF8C5F9-B89B-4F71-827C-C48F758B19B9}"/>
               </a:ext>
             </a:extLst>
           </p:cNvPr>
@@ -17833,7 +17833,7 @@
           <p:cNvPr id="6" name="TextBox 5">
             <a:extLst xmlns:a="http://schemas.openxmlformats.org/drawingml/2006/main">
               <a:ext uri="{FF2B5EF4-FFF2-40B4-BE49-F238E27FC236}">
-                <a16:creationId xmlns:a16="http://schemas.microsoft.com/office/drawing/2014/main" id="{FF2283A1-CD47-4C57-909E-289FB1F921D6}"/>
+                <a16:creationId xmlns:a16="http://schemas.microsoft.com/office/drawing/2014/main" id="{39B059B9-2BE7-4BD1-8235-7CAACBE187AE}"/>
               </a:ext>
             </a:extLst>
           </p:cNvPr>
@@ -17870,7 +17870,7 @@
                 <a:ea typeface="Aptos"/>
                 <a:cs typeface="Aptos"/>
               </a:rPr>
-              <a:t>Julkinen riippumaton evidenssikooste · 2026.07.24-20 · 2026-07-24 · Lähteet: WIPO valuation; Evidence Register</a:t>
+              <a:t>Julkinen riippumaton evidenssikooste · 2026.07.24-21 · 2026-07-24 · Lähteet: WIPO valuation; Evidence Register</a:t>
             </a:r>
           </a:p>
         </p:txBody>
@@ -17880,7 +17880,7 @@
           <p:cNvPr id="7" name="TextBox 6">
             <a:extLst xmlns:a="http://schemas.openxmlformats.org/drawingml/2006/main">
               <a:ext uri="{FF2B5EF4-FFF2-40B4-BE49-F238E27FC236}">
-                <a16:creationId xmlns:a16="http://schemas.microsoft.com/office/drawing/2014/main" id="{0B318A70-F753-4BBE-9653-06F16368A985}"/>
+                <a16:creationId xmlns:a16="http://schemas.microsoft.com/office/drawing/2014/main" id="{C0C06C63-0CA7-47B9-A344-0335108CF354}"/>
               </a:ext>
             </a:extLst>
           </p:cNvPr>
@@ -18450,7 +18450,7 @@
           <p:cNvPr id="9" name="TextBox 8">
             <a:extLst xmlns:a="http://schemas.openxmlformats.org/drawingml/2006/main">
               <a:ext uri="{FF2B5EF4-FFF2-40B4-BE49-F238E27FC236}">
-                <a16:creationId xmlns:a16="http://schemas.microsoft.com/office/drawing/2014/main" id="{C47E7813-8875-430C-AC35-53470FC110CE}"/>
+                <a16:creationId xmlns:a16="http://schemas.microsoft.com/office/drawing/2014/main" id="{1A038AD1-D630-48BC-B433-96A4DED6B466}"/>
               </a:ext>
             </a:extLst>
           </p:cNvPr>
@@ -18495,7 +18495,7 @@
     </p:spTree>
     <p:extLst>
       <p:ext uri="{BB962C8B-B14F-4D97-AF65-F5344CB8AC3E}">
-        <p14:creationId xmlns:p14="http://schemas.microsoft.com/office/powerpoint/2010/main" val="1969951559"/>
+        <p14:creationId xmlns:p14="http://schemas.microsoft.com/office/powerpoint/2010/main" val="575299911"/>
       </p:ext>
     </p:extLst>
   </p:cSld>
@@ -18519,7 +18519,7 @@
           <p:cNvPr id="2" name="TextBox 1">
             <a:extLst xmlns:a="http://schemas.openxmlformats.org/drawingml/2006/main">
               <a:ext uri="{FF2B5EF4-FFF2-40B4-BE49-F238E27FC236}">
-                <a16:creationId xmlns:a16="http://schemas.microsoft.com/office/drawing/2014/main" id="{B89E0AD3-894A-47F9-85AD-500440E0D9D8}"/>
+                <a16:creationId xmlns:a16="http://schemas.microsoft.com/office/drawing/2014/main" id="{4E3E43E1-9C71-409F-A722-C5C733DEA6F4}"/>
               </a:ext>
             </a:extLst>
           </p:cNvPr>
@@ -18566,7 +18566,7 @@
           <p:cNvPr id="3" name="TextBox 2">
             <a:extLst xmlns:a="http://schemas.openxmlformats.org/drawingml/2006/main">
               <a:ext uri="{FF2B5EF4-FFF2-40B4-BE49-F238E27FC236}">
-                <a16:creationId xmlns:a16="http://schemas.microsoft.com/office/drawing/2014/main" id="{1A94473E-8308-4E69-AC72-679602EA9C49}"/>
+                <a16:creationId xmlns:a16="http://schemas.microsoft.com/office/drawing/2014/main" id="{ED68206B-98D4-48E3-8D26-30DDD2194ADD}"/>
               </a:ext>
             </a:extLst>
           </p:cNvPr>
@@ -18613,7 +18613,7 @@
           <p:cNvPr id="4" name="Rectangle 3">
             <a:extLst xmlns:a="http://schemas.openxmlformats.org/drawingml/2006/main">
               <a:ext uri="{FF2B5EF4-FFF2-40B4-BE49-F238E27FC236}">
-                <a16:creationId xmlns:a16="http://schemas.microsoft.com/office/drawing/2014/main" id="{AA66C874-B56D-4B0D-963C-07E87E10B87B}"/>
+                <a16:creationId xmlns:a16="http://schemas.microsoft.com/office/drawing/2014/main" id="{83B4AC83-D4FB-4908-83FB-7A4D9F0BBB47}"/>
               </a:ext>
             </a:extLst>
           </p:cNvPr>
@@ -18668,7 +18668,7 @@
           <p:cNvPr id="5" name="Rectangle 4">
             <a:extLst xmlns:a="http://schemas.openxmlformats.org/drawingml/2006/main">
               <a:ext uri="{FF2B5EF4-FFF2-40B4-BE49-F238E27FC236}">
-                <a16:creationId xmlns:a16="http://schemas.microsoft.com/office/drawing/2014/main" id="{4CE2BBD6-2DC1-44B2-948A-38F59257F306}"/>
+                <a16:creationId xmlns:a16="http://schemas.microsoft.com/office/drawing/2014/main" id="{24D8BED7-9D5A-4ED7-A0B0-C29592A01626}"/>
               </a:ext>
             </a:extLst>
           </p:cNvPr>
@@ -18723,7 +18723,7 @@
           <p:cNvPr id="6" name="TextBox 5">
             <a:extLst xmlns:a="http://schemas.openxmlformats.org/drawingml/2006/main">
               <a:ext uri="{FF2B5EF4-FFF2-40B4-BE49-F238E27FC236}">
-                <a16:creationId xmlns:a16="http://schemas.microsoft.com/office/drawing/2014/main" id="{C017C405-0791-467F-AEA2-538C9954FCAE}"/>
+                <a16:creationId xmlns:a16="http://schemas.microsoft.com/office/drawing/2014/main" id="{D4F436B9-3BC9-4D8E-BE2D-791B876285F1}"/>
               </a:ext>
             </a:extLst>
           </p:cNvPr>
@@ -18760,7 +18760,7 @@
                 <a:ea typeface="Aptos"/>
                 <a:cs typeface="Aptos"/>
               </a:rPr>
-              <a:t>Julkinen riippumaton evidenssikooste · 2026.07.24-20 · 2026-07-24 · Lähteet: EPO; Saksa — viralliset tuomiot; WIPO</a:t>
+              <a:t>Julkinen riippumaton evidenssikooste · 2026.07.24-21 · 2026-07-24 · Lähteet: EPO; Saksa — viralliset tuomiot; WIPO</a:t>
             </a:r>
           </a:p>
         </p:txBody>
@@ -18770,7 +18770,7 @@
           <p:cNvPr id="7" name="TextBox 6">
             <a:extLst xmlns:a="http://schemas.openxmlformats.org/drawingml/2006/main">
               <a:ext uri="{FF2B5EF4-FFF2-40B4-BE49-F238E27FC236}">
-                <a16:creationId xmlns:a16="http://schemas.microsoft.com/office/drawing/2014/main" id="{6B5032B0-1827-4E00-A744-CF2247466A53}"/>
+                <a16:creationId xmlns:a16="http://schemas.microsoft.com/office/drawing/2014/main" id="{6761AAA6-8B84-4EB0-ADE3-6E25E45BBAB9}"/>
               </a:ext>
             </a:extLst>
           </p:cNvPr>
@@ -18817,7 +18817,7 @@
           <p:cNvPr id="8" name="TextBox 7">
             <a:extLst xmlns:a="http://schemas.openxmlformats.org/drawingml/2006/main">
               <a:ext uri="{FF2B5EF4-FFF2-40B4-BE49-F238E27FC236}">
-                <a16:creationId xmlns:a16="http://schemas.microsoft.com/office/drawing/2014/main" id="{4BBB6EBE-9035-4A3C-9237-4CA258E76E80}"/>
+                <a16:creationId xmlns:a16="http://schemas.microsoft.com/office/drawing/2014/main" id="{43CA5831-E9EE-4A63-960C-E5012F725A04}"/>
               </a:ext>
             </a:extLst>
           </p:cNvPr>
@@ -18864,7 +18864,7 @@
           <p:cNvPr id="9" name="TextBox 8">
             <a:extLst xmlns:a="http://schemas.openxmlformats.org/drawingml/2006/main">
               <a:ext uri="{FF2B5EF4-FFF2-40B4-BE49-F238E27FC236}">
-                <a16:creationId xmlns:a16="http://schemas.microsoft.com/office/drawing/2014/main" id="{B4174022-DBBD-4AF8-83F9-C2E8E3573BC3}"/>
+                <a16:creationId xmlns:a16="http://schemas.microsoft.com/office/drawing/2014/main" id="{EEA94AA3-77A9-4CB7-A180-03B432D8695C}"/>
               </a:ext>
             </a:extLst>
           </p:cNvPr>
@@ -18961,7 +18961,7 @@
           <p:cNvPr id="10" name="Rounded Rectangle 9">
             <a:extLst xmlns:a="http://schemas.openxmlformats.org/drawingml/2006/main">
               <a:ext uri="{FF2B5EF4-FFF2-40B4-BE49-F238E27FC236}">
-                <a16:creationId xmlns:a16="http://schemas.microsoft.com/office/drawing/2014/main" id="{EFB036E4-1A8D-44BB-88DC-B01F67473DDC}"/>
+                <a16:creationId xmlns:a16="http://schemas.microsoft.com/office/drawing/2014/main" id="{0A1EDB3B-EFCE-49C8-B7A8-440C6DB63537}"/>
               </a:ext>
             </a:extLst>
           </p:cNvPr>
@@ -19018,7 +19018,7 @@
           <p:cNvPr id="11" name="TextBox 10">
             <a:extLst xmlns:a="http://schemas.openxmlformats.org/drawingml/2006/main">
               <a:ext uri="{FF2B5EF4-FFF2-40B4-BE49-F238E27FC236}">
-                <a16:creationId xmlns:a16="http://schemas.microsoft.com/office/drawing/2014/main" id="{6A3D8F61-9408-4C4E-B5B9-2B04D8AB8A04}"/>
+                <a16:creationId xmlns:a16="http://schemas.microsoft.com/office/drawing/2014/main" id="{966C4630-9216-47EE-BDA7-AD868BA8922E}"/>
               </a:ext>
             </a:extLst>
           </p:cNvPr>
@@ -19065,7 +19065,7 @@
           <p:cNvPr id="12" name="TextBox 11">
             <a:extLst xmlns:a="http://schemas.openxmlformats.org/drawingml/2006/main">
               <a:ext uri="{FF2B5EF4-FFF2-40B4-BE49-F238E27FC236}">
-                <a16:creationId xmlns:a16="http://schemas.microsoft.com/office/drawing/2014/main" id="{CE5CC4A8-C047-4B14-9F4C-5DFCBF9DEBB1}"/>
+                <a16:creationId xmlns:a16="http://schemas.microsoft.com/office/drawing/2014/main" id="{7C378F19-26C1-4001-A8F1-4DA69534E449}"/>
               </a:ext>
             </a:extLst>
           </p:cNvPr>
@@ -19110,7 +19110,7 @@
     </p:spTree>
     <p:extLst>
       <p:ext uri="{BB962C8B-B14F-4D97-AF65-F5344CB8AC3E}">
-        <p14:creationId xmlns:p14="http://schemas.microsoft.com/office/powerpoint/2010/main" val="1883177472"/>
+        <p14:creationId xmlns:p14="http://schemas.microsoft.com/office/powerpoint/2010/main" val="1585389346"/>
       </p:ext>
     </p:extLst>
   </p:cSld>
@@ -19134,7 +19134,7 @@
           <p:cNvPr id="2" name="TextBox 1">
             <a:extLst xmlns:a="http://schemas.openxmlformats.org/drawingml/2006/main">
               <a:ext uri="{FF2B5EF4-FFF2-40B4-BE49-F238E27FC236}">
-                <a16:creationId xmlns:a16="http://schemas.microsoft.com/office/drawing/2014/main" id="{75D7F0CF-1B7A-45CC-91EB-3D20C5FB5FB6}"/>
+                <a16:creationId xmlns:a16="http://schemas.microsoft.com/office/drawing/2014/main" id="{C50A1A02-C817-4D64-93D0-0A04B8CAA8EF}"/>
               </a:ext>
             </a:extLst>
           </p:cNvPr>
@@ -19181,7 +19181,7 @@
           <p:cNvPr id="3" name="TextBox 2">
             <a:extLst xmlns:a="http://schemas.openxmlformats.org/drawingml/2006/main">
               <a:ext uri="{FF2B5EF4-FFF2-40B4-BE49-F238E27FC236}">
-                <a16:creationId xmlns:a16="http://schemas.microsoft.com/office/drawing/2014/main" id="{460EE18F-30AF-4C26-A035-405B4F943AFC}"/>
+                <a16:creationId xmlns:a16="http://schemas.microsoft.com/office/drawing/2014/main" id="{08A53380-B2DC-498A-8B84-B89529C340E7}"/>
               </a:ext>
             </a:extLst>
           </p:cNvPr>
@@ -19228,7 +19228,7 @@
           <p:cNvPr id="4" name="Rectangle 3">
             <a:extLst xmlns:a="http://schemas.openxmlformats.org/drawingml/2006/main">
               <a:ext uri="{FF2B5EF4-FFF2-40B4-BE49-F238E27FC236}">
-                <a16:creationId xmlns:a16="http://schemas.microsoft.com/office/drawing/2014/main" id="{59DDA4AC-6EE4-408A-83B9-97A5AF6D8573}"/>
+                <a16:creationId xmlns:a16="http://schemas.microsoft.com/office/drawing/2014/main" id="{DF11E86D-EE37-42ED-B38A-58CBC5078DE7}"/>
               </a:ext>
             </a:extLst>
           </p:cNvPr>
@@ -19283,7 +19283,7 @@
           <p:cNvPr id="5" name="Rectangle 4">
             <a:extLst xmlns:a="http://schemas.openxmlformats.org/drawingml/2006/main">
               <a:ext uri="{FF2B5EF4-FFF2-40B4-BE49-F238E27FC236}">
-                <a16:creationId xmlns:a16="http://schemas.microsoft.com/office/drawing/2014/main" id="{5D09F58A-62A4-43E0-B62A-76697D0D194D}"/>
+                <a16:creationId xmlns:a16="http://schemas.microsoft.com/office/drawing/2014/main" id="{5714C3CF-23D5-42FB-A1DA-86B7BCDF2426}"/>
               </a:ext>
             </a:extLst>
           </p:cNvPr>
@@ -19338,7 +19338,7 @@
           <p:cNvPr id="6" name="TextBox 5">
             <a:extLst xmlns:a="http://schemas.openxmlformats.org/drawingml/2006/main">
               <a:ext uri="{FF2B5EF4-FFF2-40B4-BE49-F238E27FC236}">
-                <a16:creationId xmlns:a16="http://schemas.microsoft.com/office/drawing/2014/main" id="{EE5FAE66-3994-4D0C-BE76-55081E40F0C0}"/>
+                <a16:creationId xmlns:a16="http://schemas.microsoft.com/office/drawing/2014/main" id="{8420BAB9-2298-4624-87A8-38A3A86E0865}"/>
               </a:ext>
             </a:extLst>
           </p:cNvPr>
@@ -19375,7 +19375,7 @@
                 <a:ea typeface="Aptos"/>
                 <a:cs typeface="Aptos"/>
               </a:rPr>
-              <a:t>Julkinen riippumaton evidenssikooste · 2026.07.24-20 · 2026-07-24 · Lähteet: WIPO licensing; IP Finance</a:t>
+              <a:t>Julkinen riippumaton evidenssikooste · 2026.07.24-21 · 2026-07-24 · Lähteet: WIPO licensing; IP Finance</a:t>
             </a:r>
           </a:p>
         </p:txBody>
@@ -19385,7 +19385,7 @@
           <p:cNvPr id="7" name="TextBox 6">
             <a:extLst xmlns:a="http://schemas.openxmlformats.org/drawingml/2006/main">
               <a:ext uri="{FF2B5EF4-FFF2-40B4-BE49-F238E27FC236}">
-                <a16:creationId xmlns:a16="http://schemas.microsoft.com/office/drawing/2014/main" id="{84250408-4BA5-4FA6-87FA-C28A6A3BE797}"/>
+                <a16:creationId xmlns:a16="http://schemas.microsoft.com/office/drawing/2014/main" id="{959682E1-F177-4A4A-A5AF-5DC2120B14E8}"/>
               </a:ext>
             </a:extLst>
           </p:cNvPr>
@@ -19432,7 +19432,7 @@
           <p:cNvPr id="8" name="TextBox 7">
             <a:extLst xmlns:a="http://schemas.openxmlformats.org/drawingml/2006/main">
               <a:ext uri="{FF2B5EF4-FFF2-40B4-BE49-F238E27FC236}">
-                <a16:creationId xmlns:a16="http://schemas.microsoft.com/office/drawing/2014/main" id="{25E9415C-8A34-4DA8-949A-2F17461FF5A2}"/>
+                <a16:creationId xmlns:a16="http://schemas.microsoft.com/office/drawing/2014/main" id="{EFE66109-AC3E-4FC3-8B8E-4B63B8F2E2A5}"/>
               </a:ext>
             </a:extLst>
           </p:cNvPr>
@@ -19479,7 +19479,7 @@
           <p:cNvPr id="9" name="TextBox 8">
             <a:extLst xmlns:a="http://schemas.openxmlformats.org/drawingml/2006/main">
               <a:ext uri="{FF2B5EF4-FFF2-40B4-BE49-F238E27FC236}">
-                <a16:creationId xmlns:a16="http://schemas.microsoft.com/office/drawing/2014/main" id="{2C943609-A9F6-4479-8843-F13E84FD1453}"/>
+                <a16:creationId xmlns:a16="http://schemas.microsoft.com/office/drawing/2014/main" id="{E031851C-55C6-43D7-B21D-EAE7B56E391A}"/>
               </a:ext>
             </a:extLst>
           </p:cNvPr>
@@ -19576,7 +19576,7 @@
           <p:cNvPr id="10" name="Rounded Rectangle 9">
             <a:extLst xmlns:a="http://schemas.openxmlformats.org/drawingml/2006/main">
               <a:ext uri="{FF2B5EF4-FFF2-40B4-BE49-F238E27FC236}">
-                <a16:creationId xmlns:a16="http://schemas.microsoft.com/office/drawing/2014/main" id="{EA245A79-24E7-4AA3-BCA9-193FFD0B4858}"/>
+                <a16:creationId xmlns:a16="http://schemas.microsoft.com/office/drawing/2014/main" id="{0E3D0FC8-AE86-49D0-A930-11EC3BA6B1C6}"/>
               </a:ext>
             </a:extLst>
           </p:cNvPr>
@@ -19633,7 +19633,7 @@
           <p:cNvPr id="11" name="TextBox 10">
             <a:extLst xmlns:a="http://schemas.openxmlformats.org/drawingml/2006/main">
               <a:ext uri="{FF2B5EF4-FFF2-40B4-BE49-F238E27FC236}">
-                <a16:creationId xmlns:a16="http://schemas.microsoft.com/office/drawing/2014/main" id="{965EC082-3EC2-4F37-BCA8-AAF9319A8B2D}"/>
+                <a16:creationId xmlns:a16="http://schemas.microsoft.com/office/drawing/2014/main" id="{C9B8AA01-8291-4638-B856-EEB5C61BDCC9}"/>
               </a:ext>
             </a:extLst>
           </p:cNvPr>
@@ -19680,7 +19680,7 @@
           <p:cNvPr id="12" name="TextBox 11">
             <a:extLst xmlns:a="http://schemas.openxmlformats.org/drawingml/2006/main">
               <a:ext uri="{FF2B5EF4-FFF2-40B4-BE49-F238E27FC236}">
-                <a16:creationId xmlns:a16="http://schemas.microsoft.com/office/drawing/2014/main" id="{0849AFE7-677B-4E35-A149-12185DE493E2}"/>
+                <a16:creationId xmlns:a16="http://schemas.microsoft.com/office/drawing/2014/main" id="{0FCD933A-DFD1-4777-8CF7-18000A14F643}"/>
               </a:ext>
             </a:extLst>
           </p:cNvPr>
@@ -19725,7 +19725,7 @@
     </p:spTree>
     <p:extLst>
       <p:ext uri="{BB962C8B-B14F-4D97-AF65-F5344CB8AC3E}">
-        <p14:creationId xmlns:p14="http://schemas.microsoft.com/office/powerpoint/2010/main" val="1345040658"/>
+        <p14:creationId xmlns:p14="http://schemas.microsoft.com/office/powerpoint/2010/main" val="714926592"/>
       </p:ext>
     </p:extLst>
   </p:cSld>
@@ -19749,7 +19749,7 @@
           <p:cNvPr id="2" name="TextBox 1">
             <a:extLst xmlns:a="http://schemas.openxmlformats.org/drawingml/2006/main">
               <a:ext uri="{FF2B5EF4-FFF2-40B4-BE49-F238E27FC236}">
-                <a16:creationId xmlns:a16="http://schemas.microsoft.com/office/drawing/2014/main" id="{848AE8F0-200A-4122-BCE6-4E02B878E980}"/>
+                <a16:creationId xmlns:a16="http://schemas.microsoft.com/office/drawing/2014/main" id="{93313317-628E-43FA-9E2B-27085DF649EB}"/>
               </a:ext>
             </a:extLst>
           </p:cNvPr>
@@ -19796,7 +19796,7 @@
           <p:cNvPr id="3" name="TextBox 2">
             <a:extLst xmlns:a="http://schemas.openxmlformats.org/drawingml/2006/main">
               <a:ext uri="{FF2B5EF4-FFF2-40B4-BE49-F238E27FC236}">
-                <a16:creationId xmlns:a16="http://schemas.microsoft.com/office/drawing/2014/main" id="{0C1F66D1-DEA6-43BB-B627-6F2F7ACA4C79}"/>
+                <a16:creationId xmlns:a16="http://schemas.microsoft.com/office/drawing/2014/main" id="{FD5566BF-313F-4602-809B-EDB825AB105E}"/>
               </a:ext>
             </a:extLst>
           </p:cNvPr>
@@ -19843,7 +19843,7 @@
           <p:cNvPr id="4" name="Rectangle 3">
             <a:extLst xmlns:a="http://schemas.openxmlformats.org/drawingml/2006/main">
               <a:ext uri="{FF2B5EF4-FFF2-40B4-BE49-F238E27FC236}">
-                <a16:creationId xmlns:a16="http://schemas.microsoft.com/office/drawing/2014/main" id="{7E2A1241-437A-4FF9-8F85-9F562FB61854}"/>
+                <a16:creationId xmlns:a16="http://schemas.microsoft.com/office/drawing/2014/main" id="{5ECA6C91-FFCB-4A0F-AF02-09F2CD31FEEC}"/>
               </a:ext>
             </a:extLst>
           </p:cNvPr>
@@ -19898,7 +19898,7 @@
           <p:cNvPr id="5" name="Rectangle 4">
             <a:extLst xmlns:a="http://schemas.openxmlformats.org/drawingml/2006/main">
               <a:ext uri="{FF2B5EF4-FFF2-40B4-BE49-F238E27FC236}">
-                <a16:creationId xmlns:a16="http://schemas.microsoft.com/office/drawing/2014/main" id="{33CBED44-8146-4E3A-9C73-C644E1D26E17}"/>
+                <a16:creationId xmlns:a16="http://schemas.microsoft.com/office/drawing/2014/main" id="{832EAA8E-05D2-483A-873B-36614F3CD757}"/>
               </a:ext>
             </a:extLst>
           </p:cNvPr>
@@ -19953,7 +19953,7 @@
           <p:cNvPr id="6" name="TextBox 5">
             <a:extLst xmlns:a="http://schemas.openxmlformats.org/drawingml/2006/main">
               <a:ext uri="{FF2B5EF4-FFF2-40B4-BE49-F238E27FC236}">
-                <a16:creationId xmlns:a16="http://schemas.microsoft.com/office/drawing/2014/main" id="{DD0A72A0-D270-403F-9089-17E86AB13660}"/>
+                <a16:creationId xmlns:a16="http://schemas.microsoft.com/office/drawing/2014/main" id="{AD970D55-D2AD-4733-AE80-120ED956C37F}"/>
               </a:ext>
             </a:extLst>
           </p:cNvPr>
@@ -19990,7 +19990,7 @@
                 <a:ea typeface="Aptos"/>
                 <a:cs typeface="Aptos"/>
               </a:rPr>
-              <a:t>Julkinen riippumaton evidenssikooste · 2026.07.24-20 · 2026-07-24 · Lähteet: Evidence Register; EPO</a:t>
+              <a:t>Julkinen riippumaton evidenssikooste · 2026.07.24-21 · 2026-07-24 · Lähteet: Evidence Register; EPO</a:t>
             </a:r>
           </a:p>
         </p:txBody>
@@ -20000,7 +20000,7 @@
           <p:cNvPr id="7" name="TextBox 6">
             <a:extLst xmlns:a="http://schemas.openxmlformats.org/drawingml/2006/main">
               <a:ext uri="{FF2B5EF4-FFF2-40B4-BE49-F238E27FC236}">
-                <a16:creationId xmlns:a16="http://schemas.microsoft.com/office/drawing/2014/main" id="{39BAA597-A88E-4A2D-8905-BA2248442020}"/>
+                <a16:creationId xmlns:a16="http://schemas.microsoft.com/office/drawing/2014/main" id="{99CEB556-84ED-494D-931E-EDF9C61F5DF5}"/>
               </a:ext>
             </a:extLst>
           </p:cNvPr>
@@ -20487,7 +20487,7 @@
           <p:cNvPr id="9" name="TextBox 8">
             <a:extLst xmlns:a="http://schemas.openxmlformats.org/drawingml/2006/main">
               <a:ext uri="{FF2B5EF4-FFF2-40B4-BE49-F238E27FC236}">
-                <a16:creationId xmlns:a16="http://schemas.microsoft.com/office/drawing/2014/main" id="{983A8224-F368-4EA5-80E1-F163970DBE5C}"/>
+                <a16:creationId xmlns:a16="http://schemas.microsoft.com/office/drawing/2014/main" id="{5A186492-7CFE-4F6D-A538-8893860C56F8}"/>
               </a:ext>
             </a:extLst>
           </p:cNvPr>
@@ -20532,7 +20532,7 @@
     </p:spTree>
     <p:extLst>
       <p:ext uri="{BB962C8B-B14F-4D97-AF65-F5344CB8AC3E}">
-        <p14:creationId xmlns:p14="http://schemas.microsoft.com/office/powerpoint/2010/main" val="907035686"/>
+        <p14:creationId xmlns:p14="http://schemas.microsoft.com/office/powerpoint/2010/main" val="1226763650"/>
       </p:ext>
     </p:extLst>
   </p:cSld>
@@ -20556,7 +20556,7 @@
           <p:cNvPr id="2" name="TextBox 1">
             <a:extLst xmlns:a="http://schemas.openxmlformats.org/drawingml/2006/main">
               <a:ext uri="{FF2B5EF4-FFF2-40B4-BE49-F238E27FC236}">
-                <a16:creationId xmlns:a16="http://schemas.microsoft.com/office/drawing/2014/main" id="{7F3D1574-2ECE-4BA5-92B9-006FF484E782}"/>
+                <a16:creationId xmlns:a16="http://schemas.microsoft.com/office/drawing/2014/main" id="{25F4C6F6-6DCD-4710-9585-FAFED726D7AD}"/>
               </a:ext>
             </a:extLst>
           </p:cNvPr>
@@ -20603,7 +20603,7 @@
           <p:cNvPr id="3" name="TextBox 2">
             <a:extLst xmlns:a="http://schemas.openxmlformats.org/drawingml/2006/main">
               <a:ext uri="{FF2B5EF4-FFF2-40B4-BE49-F238E27FC236}">
-                <a16:creationId xmlns:a16="http://schemas.microsoft.com/office/drawing/2014/main" id="{A87278F0-E5B7-46BF-BD51-75B1D0C6EF52}"/>
+                <a16:creationId xmlns:a16="http://schemas.microsoft.com/office/drawing/2014/main" id="{8C644A36-E20E-400E-8D9F-695BB0D204BD}"/>
               </a:ext>
             </a:extLst>
           </p:cNvPr>
@@ -20650,7 +20650,7 @@
           <p:cNvPr id="4" name="Rectangle 3">
             <a:extLst xmlns:a="http://schemas.openxmlformats.org/drawingml/2006/main">
               <a:ext uri="{FF2B5EF4-FFF2-40B4-BE49-F238E27FC236}">
-                <a16:creationId xmlns:a16="http://schemas.microsoft.com/office/drawing/2014/main" id="{E9C391FE-1AB1-4BB9-89F0-DBC38E665477}"/>
+                <a16:creationId xmlns:a16="http://schemas.microsoft.com/office/drawing/2014/main" id="{28BACA54-2276-4819-970E-A6C5680DCDCB}"/>
               </a:ext>
             </a:extLst>
           </p:cNvPr>
@@ -20705,7 +20705,7 @@
           <p:cNvPr id="5" name="Rectangle 4">
             <a:extLst xmlns:a="http://schemas.openxmlformats.org/drawingml/2006/main">
               <a:ext uri="{FF2B5EF4-FFF2-40B4-BE49-F238E27FC236}">
-                <a16:creationId xmlns:a16="http://schemas.microsoft.com/office/drawing/2014/main" id="{57AF4980-88FA-4094-9ABD-088220A07E21}"/>
+                <a16:creationId xmlns:a16="http://schemas.microsoft.com/office/drawing/2014/main" id="{0541A8CE-8EB5-4BE5-B7D0-F6649F37181C}"/>
               </a:ext>
             </a:extLst>
           </p:cNvPr>
@@ -20760,7 +20760,7 @@
           <p:cNvPr id="6" name="TextBox 5">
             <a:extLst xmlns:a="http://schemas.openxmlformats.org/drawingml/2006/main">
               <a:ext uri="{FF2B5EF4-FFF2-40B4-BE49-F238E27FC236}">
-                <a16:creationId xmlns:a16="http://schemas.microsoft.com/office/drawing/2014/main" id="{526DF04C-4238-4D07-B6CA-0CACE15CC650}"/>
+                <a16:creationId xmlns:a16="http://schemas.microsoft.com/office/drawing/2014/main" id="{4597C942-4E47-430A-AEA1-9673B17F1C52}"/>
               </a:ext>
             </a:extLst>
           </p:cNvPr>
@@ -20797,7 +20797,7 @@
                 <a:ea typeface="Aptos"/>
                 <a:cs typeface="Aptos"/>
               </a:rPr>
-              <a:t>Julkinen riippumaton evidenssikooste · 2026.07.24-20 · 2026-07-24 · Lähteet: EP3032975B2; 7 O 3341/24</a:t>
+              <a:t>Julkinen riippumaton evidenssikooste · 2026.07.24-21 · 2026-07-24 · Lähteet: EP3032975B2; 7 O 3341/24</a:t>
             </a:r>
           </a:p>
         </p:txBody>
@@ -20807,7 +20807,7 @@
           <p:cNvPr id="7" name="TextBox 6">
             <a:extLst xmlns:a="http://schemas.openxmlformats.org/drawingml/2006/main">
               <a:ext uri="{FF2B5EF4-FFF2-40B4-BE49-F238E27FC236}">
-                <a16:creationId xmlns:a16="http://schemas.microsoft.com/office/drawing/2014/main" id="{46B9E293-07DD-4806-BBBD-8B02FC3DC9CF}"/>
+                <a16:creationId xmlns:a16="http://schemas.microsoft.com/office/drawing/2014/main" id="{87979B29-061E-4648-B0EE-BDEB15B0A6A1}"/>
               </a:ext>
             </a:extLst>
           </p:cNvPr>
@@ -20854,7 +20854,7 @@
           <p:cNvPr id="8" name="Rounded Rectangle 7">
             <a:extLst xmlns:a="http://schemas.openxmlformats.org/drawingml/2006/main">
               <a:ext uri="{FF2B5EF4-FFF2-40B4-BE49-F238E27FC236}">
-                <a16:creationId xmlns:a16="http://schemas.microsoft.com/office/drawing/2014/main" id="{59510592-70FA-40E8-A623-B844E42E17C5}"/>
+                <a16:creationId xmlns:a16="http://schemas.microsoft.com/office/drawing/2014/main" id="{F0F3C5A7-B544-43AC-8ADE-C81F57CCB8FC}"/>
               </a:ext>
             </a:extLst>
           </p:cNvPr>
@@ -20911,7 +20911,7 @@
           <p:cNvPr id="9" name="TextBox 8">
             <a:extLst xmlns:a="http://schemas.openxmlformats.org/drawingml/2006/main">
               <a:ext uri="{FF2B5EF4-FFF2-40B4-BE49-F238E27FC236}">
-                <a16:creationId xmlns:a16="http://schemas.microsoft.com/office/drawing/2014/main" id="{67561CD6-D4F1-4151-B6D0-00ABF616EDC0}"/>
+                <a16:creationId xmlns:a16="http://schemas.microsoft.com/office/drawing/2014/main" id="{5C119E8C-4450-4A08-BCCA-1133E2CFA24F}"/>
               </a:ext>
             </a:extLst>
           </p:cNvPr>
@@ -20958,7 +20958,7 @@
           <p:cNvPr id="10" name="TextBox 9">
             <a:extLst xmlns:a="http://schemas.openxmlformats.org/drawingml/2006/main">
               <a:ext uri="{FF2B5EF4-FFF2-40B4-BE49-F238E27FC236}">
-                <a16:creationId xmlns:a16="http://schemas.microsoft.com/office/drawing/2014/main" id="{86AE85D7-C12D-41AB-8360-601724AA86CB}"/>
+                <a16:creationId xmlns:a16="http://schemas.microsoft.com/office/drawing/2014/main" id="{87AACE4C-8902-432D-AFEA-5B8C6F466FC4}"/>
               </a:ext>
             </a:extLst>
           </p:cNvPr>
@@ -21005,7 +21005,7 @@
           <p:cNvPr id="11" name="TextBox 10">
             <a:extLst xmlns:a="http://schemas.openxmlformats.org/drawingml/2006/main">
               <a:ext uri="{FF2B5EF4-FFF2-40B4-BE49-F238E27FC236}">
-                <a16:creationId xmlns:a16="http://schemas.microsoft.com/office/drawing/2014/main" id="{2447A484-4DF2-4412-B151-A59C289CC72E}"/>
+                <a16:creationId xmlns:a16="http://schemas.microsoft.com/office/drawing/2014/main" id="{66A3C334-D50D-4EFE-B636-E497D85D6D6C}"/>
               </a:ext>
             </a:extLst>
           </p:cNvPr>
@@ -21052,7 +21052,7 @@
           <p:cNvPr id="12" name="Rounded Rectangle 11">
             <a:extLst xmlns:a="http://schemas.openxmlformats.org/drawingml/2006/main">
               <a:ext uri="{FF2B5EF4-FFF2-40B4-BE49-F238E27FC236}">
-                <a16:creationId xmlns:a16="http://schemas.microsoft.com/office/drawing/2014/main" id="{0A7FFE01-CA64-4618-A963-694170A2A53C}"/>
+                <a16:creationId xmlns:a16="http://schemas.microsoft.com/office/drawing/2014/main" id="{26824D13-8B8A-4FF2-832B-7DCD64C2A1B9}"/>
               </a:ext>
             </a:extLst>
           </p:cNvPr>
@@ -21109,7 +21109,7 @@
           <p:cNvPr id="13" name="TextBox 12">
             <a:extLst xmlns:a="http://schemas.openxmlformats.org/drawingml/2006/main">
               <a:ext uri="{FF2B5EF4-FFF2-40B4-BE49-F238E27FC236}">
-                <a16:creationId xmlns:a16="http://schemas.microsoft.com/office/drawing/2014/main" id="{071ECD59-48BF-4931-8EA3-F878F6326CD2}"/>
+                <a16:creationId xmlns:a16="http://schemas.microsoft.com/office/drawing/2014/main" id="{C3E14177-CAAE-4B0D-8FAA-13937A390B37}"/>
               </a:ext>
             </a:extLst>
           </p:cNvPr>
@@ -21156,7 +21156,7 @@
           <p:cNvPr id="14" name="TextBox 13">
             <a:extLst xmlns:a="http://schemas.openxmlformats.org/drawingml/2006/main">
               <a:ext uri="{FF2B5EF4-FFF2-40B4-BE49-F238E27FC236}">
-                <a16:creationId xmlns:a16="http://schemas.microsoft.com/office/drawing/2014/main" id="{5818A4AA-4B7F-45C2-A336-3E7C8F362491}"/>
+                <a16:creationId xmlns:a16="http://schemas.microsoft.com/office/drawing/2014/main" id="{87173C23-1189-4817-B7E3-ADA04BA4B9DB}"/>
               </a:ext>
             </a:extLst>
           </p:cNvPr>
@@ -21203,7 +21203,7 @@
           <p:cNvPr id="15" name="TextBox 14">
             <a:extLst xmlns:a="http://schemas.openxmlformats.org/drawingml/2006/main">
               <a:ext uri="{FF2B5EF4-FFF2-40B4-BE49-F238E27FC236}">
-                <a16:creationId xmlns:a16="http://schemas.microsoft.com/office/drawing/2014/main" id="{ACE0DF85-A183-45F4-BC2A-90E6F3B4C451}"/>
+                <a16:creationId xmlns:a16="http://schemas.microsoft.com/office/drawing/2014/main" id="{4B7DD143-7E7C-4058-B3D3-161AA3569DCA}"/>
               </a:ext>
             </a:extLst>
           </p:cNvPr>
@@ -21250,7 +21250,7 @@
           <p:cNvPr id="16" name="Rounded Rectangle 15">
             <a:extLst xmlns:a="http://schemas.openxmlformats.org/drawingml/2006/main">
               <a:ext uri="{FF2B5EF4-FFF2-40B4-BE49-F238E27FC236}">
-                <a16:creationId xmlns:a16="http://schemas.microsoft.com/office/drawing/2014/main" id="{51D88C8D-529B-4BD5-96BB-0E7EAA9BD9B9}"/>
+                <a16:creationId xmlns:a16="http://schemas.microsoft.com/office/drawing/2014/main" id="{092FFF7E-D5A7-4814-929E-ECE9D7AC12CC}"/>
               </a:ext>
             </a:extLst>
           </p:cNvPr>
@@ -21307,7 +21307,7 @@
           <p:cNvPr id="17" name="TextBox 16">
             <a:extLst xmlns:a="http://schemas.openxmlformats.org/drawingml/2006/main">
               <a:ext uri="{FF2B5EF4-FFF2-40B4-BE49-F238E27FC236}">
-                <a16:creationId xmlns:a16="http://schemas.microsoft.com/office/drawing/2014/main" id="{C9968B3A-7E98-4AB2-9887-403ADE5D6BEF}"/>
+                <a16:creationId xmlns:a16="http://schemas.microsoft.com/office/drawing/2014/main" id="{1A549EDB-C18F-4C4B-A29B-2E32234B1C43}"/>
               </a:ext>
             </a:extLst>
           </p:cNvPr>
@@ -21354,7 +21354,7 @@
           <p:cNvPr id="18" name="TextBox 17">
             <a:extLst xmlns:a="http://schemas.openxmlformats.org/drawingml/2006/main">
               <a:ext uri="{FF2B5EF4-FFF2-40B4-BE49-F238E27FC236}">
-                <a16:creationId xmlns:a16="http://schemas.microsoft.com/office/drawing/2014/main" id="{639936C5-3D98-4728-A180-FF2E6749648F}"/>
+                <a16:creationId xmlns:a16="http://schemas.microsoft.com/office/drawing/2014/main" id="{E62DCF28-B7E5-488B-B3DF-D0ED51BE4545}"/>
               </a:ext>
             </a:extLst>
           </p:cNvPr>
@@ -21401,7 +21401,7 @@
           <p:cNvPr id="19" name="TextBox 18">
             <a:extLst xmlns:a="http://schemas.openxmlformats.org/drawingml/2006/main">
               <a:ext uri="{FF2B5EF4-FFF2-40B4-BE49-F238E27FC236}">
-                <a16:creationId xmlns:a16="http://schemas.microsoft.com/office/drawing/2014/main" id="{12B053B9-9858-4822-9A18-C813CA3F5D47}"/>
+                <a16:creationId xmlns:a16="http://schemas.microsoft.com/office/drawing/2014/main" id="{D1A4C554-E6E5-41D2-ACCE-3E89E55EC2F4}"/>
               </a:ext>
             </a:extLst>
           </p:cNvPr>
@@ -21448,7 +21448,7 @@
           <p:cNvPr id="20" name="Rounded Rectangle 19">
             <a:extLst xmlns:a="http://schemas.openxmlformats.org/drawingml/2006/main">
               <a:ext uri="{FF2B5EF4-FFF2-40B4-BE49-F238E27FC236}">
-                <a16:creationId xmlns:a16="http://schemas.microsoft.com/office/drawing/2014/main" id="{D482B7A5-EA35-4067-8787-7940E346EDA7}"/>
+                <a16:creationId xmlns:a16="http://schemas.microsoft.com/office/drawing/2014/main" id="{01CF5403-A816-44CC-9180-79AC5DF4FB5F}"/>
               </a:ext>
             </a:extLst>
           </p:cNvPr>
@@ -21505,7 +21505,7 @@
           <p:cNvPr id="21" name="TextBox 20">
             <a:extLst xmlns:a="http://schemas.openxmlformats.org/drawingml/2006/main">
               <a:ext uri="{FF2B5EF4-FFF2-40B4-BE49-F238E27FC236}">
-                <a16:creationId xmlns:a16="http://schemas.microsoft.com/office/drawing/2014/main" id="{DF6AAD96-9D70-427B-94FD-3BD5D7D0AA3B}"/>
+                <a16:creationId xmlns:a16="http://schemas.microsoft.com/office/drawing/2014/main" id="{260A79A4-2F26-4C82-9A70-C301F1CC51BF}"/>
               </a:ext>
             </a:extLst>
           </p:cNvPr>
@@ -21552,7 +21552,7 @@
           <p:cNvPr id="22" name="TextBox 21">
             <a:extLst xmlns:a="http://schemas.openxmlformats.org/drawingml/2006/main">
               <a:ext uri="{FF2B5EF4-FFF2-40B4-BE49-F238E27FC236}">
-                <a16:creationId xmlns:a16="http://schemas.microsoft.com/office/drawing/2014/main" id="{4A4E49AC-8CBB-47B1-919F-06B181DE1F62}"/>
+                <a16:creationId xmlns:a16="http://schemas.microsoft.com/office/drawing/2014/main" id="{6685C92C-BA00-4078-A9DC-F4760E4A61B3}"/>
               </a:ext>
             </a:extLst>
           </p:cNvPr>
@@ -21599,7 +21599,7 @@
           <p:cNvPr id="23" name="TextBox 22">
             <a:extLst xmlns:a="http://schemas.openxmlformats.org/drawingml/2006/main">
               <a:ext uri="{FF2B5EF4-FFF2-40B4-BE49-F238E27FC236}">
-                <a16:creationId xmlns:a16="http://schemas.microsoft.com/office/drawing/2014/main" id="{629EDA99-76EE-4756-9A5C-F21D18E73C5F}"/>
+                <a16:creationId xmlns:a16="http://schemas.microsoft.com/office/drawing/2014/main" id="{E5103240-51D9-459A-AA91-FABCB8D2F313}"/>
               </a:ext>
             </a:extLst>
           </p:cNvPr>
@@ -21646,7 +21646,7 @@
           <p:cNvPr id="24" name="TextBox 23">
             <a:extLst xmlns:a="http://schemas.openxmlformats.org/drawingml/2006/main">
               <a:ext uri="{FF2B5EF4-FFF2-40B4-BE49-F238E27FC236}">
-                <a16:creationId xmlns:a16="http://schemas.microsoft.com/office/drawing/2014/main" id="{13EFCEAB-CE6F-4448-80B0-BD76E951E3CF}"/>
+                <a16:creationId xmlns:a16="http://schemas.microsoft.com/office/drawing/2014/main" id="{EE40A5C9-F759-4E71-ABCD-B5B19D9080A5}"/>
               </a:ext>
             </a:extLst>
           </p:cNvPr>
@@ -21691,7 +21691,7 @@
     </p:spTree>
     <p:extLst>
       <p:ext uri="{BB962C8B-B14F-4D97-AF65-F5344CB8AC3E}">
-        <p14:creationId xmlns:p14="http://schemas.microsoft.com/office/powerpoint/2010/main" val="1208677723"/>
+        <p14:creationId xmlns:p14="http://schemas.microsoft.com/office/powerpoint/2010/main" val="2098588220"/>
       </p:ext>
     </p:extLst>
   </p:cSld>
@@ -21715,7 +21715,7 @@
           <p:cNvPr id="2" name="TextBox 1">
             <a:extLst xmlns:a="http://schemas.openxmlformats.org/drawingml/2006/main">
               <a:ext uri="{FF2B5EF4-FFF2-40B4-BE49-F238E27FC236}">
-                <a16:creationId xmlns:a16="http://schemas.microsoft.com/office/drawing/2014/main" id="{B3FCC5F6-480D-4EED-B7CD-D40045DC0446}"/>
+                <a16:creationId xmlns:a16="http://schemas.microsoft.com/office/drawing/2014/main" id="{B271CC34-695F-48A1-9356-0F40FE82EAA8}"/>
               </a:ext>
             </a:extLst>
           </p:cNvPr>
@@ -21762,7 +21762,7 @@
           <p:cNvPr id="3" name="TextBox 2">
             <a:extLst xmlns:a="http://schemas.openxmlformats.org/drawingml/2006/main">
               <a:ext uri="{FF2B5EF4-FFF2-40B4-BE49-F238E27FC236}">
-                <a16:creationId xmlns:a16="http://schemas.microsoft.com/office/drawing/2014/main" id="{D4E8741C-1A80-44DA-93E5-B28B7CA12AD2}"/>
+                <a16:creationId xmlns:a16="http://schemas.microsoft.com/office/drawing/2014/main" id="{94A2840A-C8BA-467A-BE8F-CF7219D36C44}"/>
               </a:ext>
             </a:extLst>
           </p:cNvPr>
@@ -21809,7 +21809,7 @@
           <p:cNvPr id="4" name="Rectangle 3">
             <a:extLst xmlns:a="http://schemas.openxmlformats.org/drawingml/2006/main">
               <a:ext uri="{FF2B5EF4-FFF2-40B4-BE49-F238E27FC236}">
-                <a16:creationId xmlns:a16="http://schemas.microsoft.com/office/drawing/2014/main" id="{BC8290B7-B92F-4D37-8199-211ADDFCFACC}"/>
+                <a16:creationId xmlns:a16="http://schemas.microsoft.com/office/drawing/2014/main" id="{C02707DE-F0A1-44F0-BA52-43AA8537A47B}"/>
               </a:ext>
             </a:extLst>
           </p:cNvPr>
@@ -21864,7 +21864,7 @@
           <p:cNvPr id="5" name="Rectangle 4">
             <a:extLst xmlns:a="http://schemas.openxmlformats.org/drawingml/2006/main">
               <a:ext uri="{FF2B5EF4-FFF2-40B4-BE49-F238E27FC236}">
-                <a16:creationId xmlns:a16="http://schemas.microsoft.com/office/drawing/2014/main" id="{4C9C236A-EFDA-4ECC-B7BB-D70D47ED16EA}"/>
+                <a16:creationId xmlns:a16="http://schemas.microsoft.com/office/drawing/2014/main" id="{E026AD4B-D3FA-4785-89D0-724B96EA78BC}"/>
               </a:ext>
             </a:extLst>
           </p:cNvPr>
@@ -21919,7 +21919,7 @@
           <p:cNvPr id="6" name="TextBox 5">
             <a:extLst xmlns:a="http://schemas.openxmlformats.org/drawingml/2006/main">
               <a:ext uri="{FF2B5EF4-FFF2-40B4-BE49-F238E27FC236}">
-                <a16:creationId xmlns:a16="http://schemas.microsoft.com/office/drawing/2014/main" id="{A58BC071-2525-48FB-BA84-36FAA79DAD7F}"/>
+                <a16:creationId xmlns:a16="http://schemas.microsoft.com/office/drawing/2014/main" id="{A91D5BF3-AED9-4772-B4FA-DCB8CDF9A412}"/>
               </a:ext>
             </a:extLst>
           </p:cNvPr>
@@ -21956,7 +21956,7 @@
                 <a:ea typeface="Aptos"/>
                 <a:cs typeface="Aptos"/>
               </a:rPr>
-              <a:t>Julkinen riippumaton evidenssikooste · 2026.07.24-20 · 2026-07-24 · Lähteet: WIPO dispute resolution; EPO IPscore</a:t>
+              <a:t>Julkinen riippumaton evidenssikooste · 2026.07.24-21 · 2026-07-24 · Lähteet: WIPO dispute resolution; EPO IPscore</a:t>
             </a:r>
           </a:p>
         </p:txBody>
@@ -21966,7 +21966,7 @@
           <p:cNvPr id="7" name="TextBox 6">
             <a:extLst xmlns:a="http://schemas.openxmlformats.org/drawingml/2006/main">
               <a:ext uri="{FF2B5EF4-FFF2-40B4-BE49-F238E27FC236}">
-                <a16:creationId xmlns:a16="http://schemas.microsoft.com/office/drawing/2014/main" id="{D7337746-1218-404F-89AB-1D24B70B7E0A}"/>
+                <a16:creationId xmlns:a16="http://schemas.microsoft.com/office/drawing/2014/main" id="{181F9DCC-E683-49FA-9B25-79E2B9947F3E}"/>
               </a:ext>
             </a:extLst>
           </p:cNvPr>
@@ -22013,7 +22013,7 @@
           <p:cNvPr id="8" name="Rounded Rectangle 7">
             <a:extLst xmlns:a="http://schemas.openxmlformats.org/drawingml/2006/main">
               <a:ext uri="{FF2B5EF4-FFF2-40B4-BE49-F238E27FC236}">
-                <a16:creationId xmlns:a16="http://schemas.microsoft.com/office/drawing/2014/main" id="{6A65728E-E1FB-433A-92FF-59D24FB1764A}"/>
+                <a16:creationId xmlns:a16="http://schemas.microsoft.com/office/drawing/2014/main" id="{633236C5-EDCC-4676-AB6A-31BB18ADEE48}"/>
               </a:ext>
             </a:extLst>
           </p:cNvPr>
@@ -22070,7 +22070,7 @@
           <p:cNvPr id="9" name="TextBox 8">
             <a:extLst xmlns:a="http://schemas.openxmlformats.org/drawingml/2006/main">
               <a:ext uri="{FF2B5EF4-FFF2-40B4-BE49-F238E27FC236}">
-                <a16:creationId xmlns:a16="http://schemas.microsoft.com/office/drawing/2014/main" id="{15A8B2CF-0CC0-4E99-9342-4DB4C9173B1C}"/>
+                <a16:creationId xmlns:a16="http://schemas.microsoft.com/office/drawing/2014/main" id="{8D56E1B8-AD93-4FA2-BEFF-F001BB00D860}"/>
               </a:ext>
             </a:extLst>
           </p:cNvPr>
@@ -22117,7 +22117,7 @@
           <p:cNvPr id="10" name="TextBox 9">
             <a:extLst xmlns:a="http://schemas.openxmlformats.org/drawingml/2006/main">
               <a:ext uri="{FF2B5EF4-FFF2-40B4-BE49-F238E27FC236}">
-                <a16:creationId xmlns:a16="http://schemas.microsoft.com/office/drawing/2014/main" id="{2E889AE1-F800-4992-9CB9-EDD2D9176C1D}"/>
+                <a16:creationId xmlns:a16="http://schemas.microsoft.com/office/drawing/2014/main" id="{38CDE3CE-8614-49D4-AAF5-1CA1ECAE7C4F}"/>
               </a:ext>
             </a:extLst>
           </p:cNvPr>
@@ -22164,7 +22164,7 @@
           <p:cNvPr id="11" name="TextBox 10">
             <a:extLst xmlns:a="http://schemas.openxmlformats.org/drawingml/2006/main">
               <a:ext uri="{FF2B5EF4-FFF2-40B4-BE49-F238E27FC236}">
-                <a16:creationId xmlns:a16="http://schemas.microsoft.com/office/drawing/2014/main" id="{4250D36D-275D-494B-B937-AD43B920B84F}"/>
+                <a16:creationId xmlns:a16="http://schemas.microsoft.com/office/drawing/2014/main" id="{61846415-F65B-4B75-9202-1F19AD50CADC}"/>
               </a:ext>
             </a:extLst>
           </p:cNvPr>
@@ -22211,7 +22211,7 @@
           <p:cNvPr id="12" name="Rounded Rectangle 11">
             <a:extLst xmlns:a="http://schemas.openxmlformats.org/drawingml/2006/main">
               <a:ext uri="{FF2B5EF4-FFF2-40B4-BE49-F238E27FC236}">
-                <a16:creationId xmlns:a16="http://schemas.microsoft.com/office/drawing/2014/main" id="{11EC37EE-4CA5-4BD0-8EC5-605B2F99F6E9}"/>
+                <a16:creationId xmlns:a16="http://schemas.microsoft.com/office/drawing/2014/main" id="{356A22C7-AF82-4F7B-871C-52604ECC72CB}"/>
               </a:ext>
             </a:extLst>
           </p:cNvPr>
@@ -22268,7 +22268,7 @@
           <p:cNvPr id="13" name="TextBox 12">
             <a:extLst xmlns:a="http://schemas.openxmlformats.org/drawingml/2006/main">
               <a:ext uri="{FF2B5EF4-FFF2-40B4-BE49-F238E27FC236}">
-                <a16:creationId xmlns:a16="http://schemas.microsoft.com/office/drawing/2014/main" id="{973D4BD5-C1F3-44E5-9B98-AC81B02CD494}"/>
+                <a16:creationId xmlns:a16="http://schemas.microsoft.com/office/drawing/2014/main" id="{4789A07E-4A7E-48A0-B929-AC6684504DBD}"/>
               </a:ext>
             </a:extLst>
           </p:cNvPr>
@@ -22315,7 +22315,7 @@
           <p:cNvPr id="14" name="TextBox 13">
             <a:extLst xmlns:a="http://schemas.openxmlformats.org/drawingml/2006/main">
               <a:ext uri="{FF2B5EF4-FFF2-40B4-BE49-F238E27FC236}">
-                <a16:creationId xmlns:a16="http://schemas.microsoft.com/office/drawing/2014/main" id="{3A0E7B80-76E1-468F-9DA9-55CA524D8BB4}"/>
+                <a16:creationId xmlns:a16="http://schemas.microsoft.com/office/drawing/2014/main" id="{0133BD79-34B4-461A-A2DF-83867A4C62CE}"/>
               </a:ext>
             </a:extLst>
           </p:cNvPr>
@@ -22362,7 +22362,7 @@
           <p:cNvPr id="15" name="TextBox 14">
             <a:extLst xmlns:a="http://schemas.openxmlformats.org/drawingml/2006/main">
               <a:ext uri="{FF2B5EF4-FFF2-40B4-BE49-F238E27FC236}">
-                <a16:creationId xmlns:a16="http://schemas.microsoft.com/office/drawing/2014/main" id="{BC4755C4-7949-4CCA-B4B7-B58AA9744D93}"/>
+                <a16:creationId xmlns:a16="http://schemas.microsoft.com/office/drawing/2014/main" id="{E4B5F491-01EE-482A-94F6-711AAF8E4843}"/>
               </a:ext>
             </a:extLst>
           </p:cNvPr>
@@ -22409,7 +22409,7 @@
           <p:cNvPr id="16" name="Rounded Rectangle 15">
             <a:extLst xmlns:a="http://schemas.openxmlformats.org/drawingml/2006/main">
               <a:ext uri="{FF2B5EF4-FFF2-40B4-BE49-F238E27FC236}">
-                <a16:creationId xmlns:a16="http://schemas.microsoft.com/office/drawing/2014/main" id="{B11222A1-D118-471B-864C-9F9C9D82F35A}"/>
+                <a16:creationId xmlns:a16="http://schemas.microsoft.com/office/drawing/2014/main" id="{50EA69C1-1C63-4748-88DF-0CE32E298381}"/>
               </a:ext>
             </a:extLst>
           </p:cNvPr>
@@ -22466,7 +22466,7 @@
           <p:cNvPr id="17" name="TextBox 16">
             <a:extLst xmlns:a="http://schemas.openxmlformats.org/drawingml/2006/main">
               <a:ext uri="{FF2B5EF4-FFF2-40B4-BE49-F238E27FC236}">
-                <a16:creationId xmlns:a16="http://schemas.microsoft.com/office/drawing/2014/main" id="{98B91F73-573F-4D12-B6BC-9587420CF19D}"/>
+                <a16:creationId xmlns:a16="http://schemas.microsoft.com/office/drawing/2014/main" id="{2BD5D152-7E7C-4B52-B336-47D6A2BD6F8F}"/>
               </a:ext>
             </a:extLst>
           </p:cNvPr>
@@ -22513,7 +22513,7 @@
           <p:cNvPr id="18" name="TextBox 17">
             <a:extLst xmlns:a="http://schemas.openxmlformats.org/drawingml/2006/main">
               <a:ext uri="{FF2B5EF4-FFF2-40B4-BE49-F238E27FC236}">
-                <a16:creationId xmlns:a16="http://schemas.microsoft.com/office/drawing/2014/main" id="{EE7FE563-23AB-4EDD-97CA-6D09FA18625D}"/>
+                <a16:creationId xmlns:a16="http://schemas.microsoft.com/office/drawing/2014/main" id="{AE3C8E64-4541-4882-B3D3-348618C155FB}"/>
               </a:ext>
             </a:extLst>
           </p:cNvPr>
@@ -22560,7 +22560,7 @@
           <p:cNvPr id="19" name="TextBox 18">
             <a:extLst xmlns:a="http://schemas.openxmlformats.org/drawingml/2006/main">
               <a:ext uri="{FF2B5EF4-FFF2-40B4-BE49-F238E27FC236}">
-                <a16:creationId xmlns:a16="http://schemas.microsoft.com/office/drawing/2014/main" id="{4A12DBBC-0E41-4571-9DA6-C68B364F7A43}"/>
+                <a16:creationId xmlns:a16="http://schemas.microsoft.com/office/drawing/2014/main" id="{EFD3824D-AD12-4544-9474-9CDA7E89397F}"/>
               </a:ext>
             </a:extLst>
           </p:cNvPr>
@@ -22607,7 +22607,7 @@
           <p:cNvPr id="20" name="Rounded Rectangle 19">
             <a:extLst xmlns:a="http://schemas.openxmlformats.org/drawingml/2006/main">
               <a:ext uri="{FF2B5EF4-FFF2-40B4-BE49-F238E27FC236}">
-                <a16:creationId xmlns:a16="http://schemas.microsoft.com/office/drawing/2014/main" id="{C589F1CB-C4FB-47C2-BBAF-6D2FB441C3A2}"/>
+                <a16:creationId xmlns:a16="http://schemas.microsoft.com/office/drawing/2014/main" id="{D32710D2-E91D-4754-B080-AAAA7189220D}"/>
               </a:ext>
             </a:extLst>
           </p:cNvPr>
@@ -22664,7 +22664,7 @@
           <p:cNvPr id="21" name="TextBox 20">
             <a:extLst xmlns:a="http://schemas.openxmlformats.org/drawingml/2006/main">
               <a:ext uri="{FF2B5EF4-FFF2-40B4-BE49-F238E27FC236}">
-                <a16:creationId xmlns:a16="http://schemas.microsoft.com/office/drawing/2014/main" id="{C70902FC-AF54-43B1-AC1D-659AFFCBC400}"/>
+                <a16:creationId xmlns:a16="http://schemas.microsoft.com/office/drawing/2014/main" id="{760A8EBF-9255-4859-B4CB-1FD494A4756C}"/>
               </a:ext>
             </a:extLst>
           </p:cNvPr>
@@ -22711,7 +22711,7 @@
           <p:cNvPr id="22" name="TextBox 21">
             <a:extLst xmlns:a="http://schemas.openxmlformats.org/drawingml/2006/main">
               <a:ext uri="{FF2B5EF4-FFF2-40B4-BE49-F238E27FC236}">
-                <a16:creationId xmlns:a16="http://schemas.microsoft.com/office/drawing/2014/main" id="{4CB47E05-0921-4D06-8E47-43D0B53B0D7B}"/>
+                <a16:creationId xmlns:a16="http://schemas.microsoft.com/office/drawing/2014/main" id="{92BF8AAF-1D6F-4900-977D-6430DFAA4E47}"/>
               </a:ext>
             </a:extLst>
           </p:cNvPr>
@@ -22758,7 +22758,7 @@
           <p:cNvPr id="23" name="TextBox 22">
             <a:extLst xmlns:a="http://schemas.openxmlformats.org/drawingml/2006/main">
               <a:ext uri="{FF2B5EF4-FFF2-40B4-BE49-F238E27FC236}">
-                <a16:creationId xmlns:a16="http://schemas.microsoft.com/office/drawing/2014/main" id="{5D365A7C-748B-4DB3-AE9E-017C829020F7}"/>
+                <a16:creationId xmlns:a16="http://schemas.microsoft.com/office/drawing/2014/main" id="{2D55FB08-1087-4653-A46D-7598AEB0E666}"/>
               </a:ext>
             </a:extLst>
           </p:cNvPr>
@@ -22805,7 +22805,7 @@
           <p:cNvPr id="24" name="TextBox 23">
             <a:extLst xmlns:a="http://schemas.openxmlformats.org/drawingml/2006/main">
               <a:ext uri="{FF2B5EF4-FFF2-40B4-BE49-F238E27FC236}">
-                <a16:creationId xmlns:a16="http://schemas.microsoft.com/office/drawing/2014/main" id="{A81CC85E-3F15-484B-BCD2-84692CF07E77}"/>
+                <a16:creationId xmlns:a16="http://schemas.microsoft.com/office/drawing/2014/main" id="{FE90DC21-E700-4530-AF9C-D155A85B6116}"/>
               </a:ext>
             </a:extLst>
           </p:cNvPr>
@@ -22850,7 +22850,7 @@
     </p:spTree>
     <p:extLst>
       <p:ext uri="{BB962C8B-B14F-4D97-AF65-F5344CB8AC3E}">
-        <p14:creationId xmlns:p14="http://schemas.microsoft.com/office/powerpoint/2010/main" val="1905716766"/>
+        <p14:creationId xmlns:p14="http://schemas.microsoft.com/office/powerpoint/2010/main" val="795244342"/>
       </p:ext>
     </p:extLst>
   </p:cSld>
@@ -22874,7 +22874,7 @@
           <p:cNvPr id="2" name="TextBox 1">
             <a:extLst xmlns:a="http://schemas.openxmlformats.org/drawingml/2006/main">
               <a:ext uri="{FF2B5EF4-FFF2-40B4-BE49-F238E27FC236}">
-                <a16:creationId xmlns:a16="http://schemas.microsoft.com/office/drawing/2014/main" id="{74189021-603E-496E-B29A-D1B1A7F893B7}"/>
+                <a16:creationId xmlns:a16="http://schemas.microsoft.com/office/drawing/2014/main" id="{CC2C83CA-6FA3-408A-BBFB-C2EEB763D88A}"/>
               </a:ext>
             </a:extLst>
           </p:cNvPr>
@@ -22921,7 +22921,7 @@
           <p:cNvPr id="3" name="TextBox 2">
             <a:extLst xmlns:a="http://schemas.openxmlformats.org/drawingml/2006/main">
               <a:ext uri="{FF2B5EF4-FFF2-40B4-BE49-F238E27FC236}">
-                <a16:creationId xmlns:a16="http://schemas.microsoft.com/office/drawing/2014/main" id="{C62F45E1-2D43-43BB-A6E5-8B4ABE8D91C7}"/>
+                <a16:creationId xmlns:a16="http://schemas.microsoft.com/office/drawing/2014/main" id="{DBACC59A-CCCD-46C2-8E5A-6A745CC7E196}"/>
               </a:ext>
             </a:extLst>
           </p:cNvPr>
@@ -22968,7 +22968,7 @@
           <p:cNvPr id="4" name="Rectangle 3">
             <a:extLst xmlns:a="http://schemas.openxmlformats.org/drawingml/2006/main">
               <a:ext uri="{FF2B5EF4-FFF2-40B4-BE49-F238E27FC236}">
-                <a16:creationId xmlns:a16="http://schemas.microsoft.com/office/drawing/2014/main" id="{946901BB-0905-4B94-A781-557CFCF5CDA0}"/>
+                <a16:creationId xmlns:a16="http://schemas.microsoft.com/office/drawing/2014/main" id="{EA85AC66-75A3-4010-ACBA-633AC941CFB3}"/>
               </a:ext>
             </a:extLst>
           </p:cNvPr>
@@ -23023,7 +23023,7 @@
           <p:cNvPr id="5" name="Rectangle 4">
             <a:extLst xmlns:a="http://schemas.openxmlformats.org/drawingml/2006/main">
               <a:ext uri="{FF2B5EF4-FFF2-40B4-BE49-F238E27FC236}">
-                <a16:creationId xmlns:a16="http://schemas.microsoft.com/office/drawing/2014/main" id="{0EA6CD17-3AD1-4A40-9742-CD0B19D301B9}"/>
+                <a16:creationId xmlns:a16="http://schemas.microsoft.com/office/drawing/2014/main" id="{BDAB448B-35C8-46F3-8FC7-95593CCEDD15}"/>
               </a:ext>
             </a:extLst>
           </p:cNvPr>
@@ -23078,7 +23078,7 @@
           <p:cNvPr id="6" name="TextBox 5">
             <a:extLst xmlns:a="http://schemas.openxmlformats.org/drawingml/2006/main">
               <a:ext uri="{FF2B5EF4-FFF2-40B4-BE49-F238E27FC236}">
-                <a16:creationId xmlns:a16="http://schemas.microsoft.com/office/drawing/2014/main" id="{89FC2B57-04B9-4C8C-8CC6-E9F224F8ECF6}"/>
+                <a16:creationId xmlns:a16="http://schemas.microsoft.com/office/drawing/2014/main" id="{9DF381A9-C5F9-4F17-8BCA-08D301B1E82D}"/>
               </a:ext>
             </a:extLst>
           </p:cNvPr>
@@ -23115,7 +23115,7 @@
                 <a:ea typeface="Aptos"/>
                 <a:cs typeface="Aptos"/>
               </a:rPr>
-              <a:t>Julkinen riippumaton evidenssikooste · 2026.07.24-20 · 2026-07-24 · Lähteet: WIPO licensing; IP Finance; TPLF mapping</a:t>
+              <a:t>Julkinen riippumaton evidenssikooste · 2026.07.24-21 · 2026-07-24 · Lähteet: WIPO licensing; IP Finance; TPLF mapping</a:t>
             </a:r>
           </a:p>
         </p:txBody>
@@ -23125,7 +23125,7 @@
           <p:cNvPr id="7" name="TextBox 6">
             <a:extLst xmlns:a="http://schemas.openxmlformats.org/drawingml/2006/main">
               <a:ext uri="{FF2B5EF4-FFF2-40B4-BE49-F238E27FC236}">
-                <a16:creationId xmlns:a16="http://schemas.microsoft.com/office/drawing/2014/main" id="{582CDE32-1FDA-49C4-8E77-A3455551248C}"/>
+                <a16:creationId xmlns:a16="http://schemas.microsoft.com/office/drawing/2014/main" id="{0327D674-0904-4F8F-8F85-FB15635A5BD9}"/>
               </a:ext>
             </a:extLst>
           </p:cNvPr>
@@ -23695,7 +23695,7 @@
           <p:cNvPr id="9" name="TextBox 8">
             <a:extLst xmlns:a="http://schemas.openxmlformats.org/drawingml/2006/main">
               <a:ext uri="{FF2B5EF4-FFF2-40B4-BE49-F238E27FC236}">
-                <a16:creationId xmlns:a16="http://schemas.microsoft.com/office/drawing/2014/main" id="{786A7291-A47C-4F4F-9732-922CA8694A22}"/>
+                <a16:creationId xmlns:a16="http://schemas.microsoft.com/office/drawing/2014/main" id="{6E7A014C-A55A-4366-AD67-6BFBEAAFFA3F}"/>
               </a:ext>
             </a:extLst>
           </p:cNvPr>
@@ -23740,7 +23740,7 @@
     </p:spTree>
     <p:extLst>
       <p:ext uri="{BB962C8B-B14F-4D97-AF65-F5344CB8AC3E}">
-        <p14:creationId xmlns:p14="http://schemas.microsoft.com/office/powerpoint/2010/main" val="849710358"/>
+        <p14:creationId xmlns:p14="http://schemas.microsoft.com/office/powerpoint/2010/main" val="2096013916"/>
       </p:ext>
     </p:extLst>
   </p:cSld>
@@ -23764,7 +23764,7 @@
           <p:cNvPr id="2" name="TextBox 1">
             <a:extLst xmlns:a="http://schemas.openxmlformats.org/drawingml/2006/main">
               <a:ext uri="{FF2B5EF4-FFF2-40B4-BE49-F238E27FC236}">
-                <a16:creationId xmlns:a16="http://schemas.microsoft.com/office/drawing/2014/main" id="{4E48D3FF-8C25-4A4E-ADB7-6BF30E387BE1}"/>
+                <a16:creationId xmlns:a16="http://schemas.microsoft.com/office/drawing/2014/main" id="{02B40C99-2FB7-421C-B8D2-82204297010D}"/>
               </a:ext>
             </a:extLst>
           </p:cNvPr>
@@ -23811,7 +23811,7 @@
           <p:cNvPr id="3" name="TextBox 2">
             <a:extLst xmlns:a="http://schemas.openxmlformats.org/drawingml/2006/main">
               <a:ext uri="{FF2B5EF4-FFF2-40B4-BE49-F238E27FC236}">
-                <a16:creationId xmlns:a16="http://schemas.microsoft.com/office/drawing/2014/main" id="{16D6488F-6F97-4215-8D47-92732B24D423}"/>
+                <a16:creationId xmlns:a16="http://schemas.microsoft.com/office/drawing/2014/main" id="{A3DA847C-421B-4CF4-93BF-F4B226E6E366}"/>
               </a:ext>
             </a:extLst>
           </p:cNvPr>
@@ -23858,7 +23858,7 @@
           <p:cNvPr id="4" name="Rectangle 3">
             <a:extLst xmlns:a="http://schemas.openxmlformats.org/drawingml/2006/main">
               <a:ext uri="{FF2B5EF4-FFF2-40B4-BE49-F238E27FC236}">
-                <a16:creationId xmlns:a16="http://schemas.microsoft.com/office/drawing/2014/main" id="{C1C8394E-3CF9-49A4-BB67-C4C61082CFE7}"/>
+                <a16:creationId xmlns:a16="http://schemas.microsoft.com/office/drawing/2014/main" id="{6CE177BA-C9E8-48AF-AF4C-FA20E91DAF1F}"/>
               </a:ext>
             </a:extLst>
           </p:cNvPr>
@@ -23913,7 +23913,7 @@
           <p:cNvPr id="5" name="Rectangle 4">
             <a:extLst xmlns:a="http://schemas.openxmlformats.org/drawingml/2006/main">
               <a:ext uri="{FF2B5EF4-FFF2-40B4-BE49-F238E27FC236}">
-                <a16:creationId xmlns:a16="http://schemas.microsoft.com/office/drawing/2014/main" id="{66901DE3-C303-4FFB-9D18-1915C54F64EB}"/>
+                <a16:creationId xmlns:a16="http://schemas.microsoft.com/office/drawing/2014/main" id="{7C44A8F8-CDB3-4CAD-977A-2AEEFBC94702}"/>
               </a:ext>
             </a:extLst>
           </p:cNvPr>
@@ -23968,7 +23968,7 @@
           <p:cNvPr id="6" name="TextBox 5">
             <a:extLst xmlns:a="http://schemas.openxmlformats.org/drawingml/2006/main">
               <a:ext uri="{FF2B5EF4-FFF2-40B4-BE49-F238E27FC236}">
-                <a16:creationId xmlns:a16="http://schemas.microsoft.com/office/drawing/2014/main" id="{D7FE12C2-5D64-45D7-AAC2-4F19E46012AE}"/>
+                <a16:creationId xmlns:a16="http://schemas.microsoft.com/office/drawing/2014/main" id="{78481555-8888-491E-97B2-636C31D15CBC}"/>
               </a:ext>
             </a:extLst>
           </p:cNvPr>
@@ -24005,7 +24005,7 @@
                 <a:ea typeface="Aptos"/>
                 <a:cs typeface="Aptos"/>
               </a:rPr>
-              <a:t>Julkinen riippumaton evidenssikooste · 2026.07.24-20 · 2026-07-24 · Lähteet: Evidence Register; WIPO valuation</a:t>
+              <a:t>Julkinen riippumaton evidenssikooste · 2026.07.24-21 · 2026-07-24 · Lähteet: Evidence Register; WIPO valuation</a:t>
             </a:r>
           </a:p>
         </p:txBody>
@@ -24015,7 +24015,7 @@
           <p:cNvPr id="7" name="TextBox 6">
             <a:extLst xmlns:a="http://schemas.openxmlformats.org/drawingml/2006/main">
               <a:ext uri="{FF2B5EF4-FFF2-40B4-BE49-F238E27FC236}">
-                <a16:creationId xmlns:a16="http://schemas.microsoft.com/office/drawing/2014/main" id="{A2F9583A-6811-4322-954C-F92C1D4BBC13}"/>
+                <a16:creationId xmlns:a16="http://schemas.microsoft.com/office/drawing/2014/main" id="{6356678C-9103-43F0-972C-B9C4373143B6}"/>
               </a:ext>
             </a:extLst>
           </p:cNvPr>
@@ -24668,7 +24668,7 @@
           <p:cNvPr id="9" name="TextBox 8">
             <a:extLst xmlns:a="http://schemas.openxmlformats.org/drawingml/2006/main">
               <a:ext uri="{FF2B5EF4-FFF2-40B4-BE49-F238E27FC236}">
-                <a16:creationId xmlns:a16="http://schemas.microsoft.com/office/drawing/2014/main" id="{CFBD3D22-2CB3-4C5F-A268-F34A512A4FB6}"/>
+                <a16:creationId xmlns:a16="http://schemas.microsoft.com/office/drawing/2014/main" id="{57E01117-9475-44D7-8829-42CE18D4C5F3}"/>
               </a:ext>
             </a:extLst>
           </p:cNvPr>
@@ -24713,7 +24713,7 @@
     </p:spTree>
     <p:extLst>
       <p:ext uri="{BB962C8B-B14F-4D97-AF65-F5344CB8AC3E}">
-        <p14:creationId xmlns:p14="http://schemas.microsoft.com/office/powerpoint/2010/main" val="786570971"/>
+        <p14:creationId xmlns:p14="http://schemas.microsoft.com/office/powerpoint/2010/main" val="1100584995"/>
       </p:ext>
     </p:extLst>
   </p:cSld>
@@ -24737,7 +24737,7 @@
           <p:cNvPr id="2" name="TextBox 1">
             <a:extLst xmlns:a="http://schemas.openxmlformats.org/drawingml/2006/main">
               <a:ext uri="{FF2B5EF4-FFF2-40B4-BE49-F238E27FC236}">
-                <a16:creationId xmlns:a16="http://schemas.microsoft.com/office/drawing/2014/main" id="{B0C37848-09DA-4DB8-A545-3F7B37697996}"/>
+                <a16:creationId xmlns:a16="http://schemas.microsoft.com/office/drawing/2014/main" id="{4305B199-AED9-4F4A-8E81-DC4DBBAB4807}"/>
               </a:ext>
             </a:extLst>
           </p:cNvPr>
@@ -24784,7 +24784,7 @@
           <p:cNvPr id="3" name="TextBox 2">
             <a:extLst xmlns:a="http://schemas.openxmlformats.org/drawingml/2006/main">
               <a:ext uri="{FF2B5EF4-FFF2-40B4-BE49-F238E27FC236}">
-                <a16:creationId xmlns:a16="http://schemas.microsoft.com/office/drawing/2014/main" id="{A44ADD56-C0BC-44EC-9867-5B545199670A}"/>
+                <a16:creationId xmlns:a16="http://schemas.microsoft.com/office/drawing/2014/main" id="{601E36F4-BFC6-4A2C-A202-F334828910D6}"/>
               </a:ext>
             </a:extLst>
           </p:cNvPr>
@@ -24831,7 +24831,7 @@
           <p:cNvPr id="4" name="Rectangle 3">
             <a:extLst xmlns:a="http://schemas.openxmlformats.org/drawingml/2006/main">
               <a:ext uri="{FF2B5EF4-FFF2-40B4-BE49-F238E27FC236}">
-                <a16:creationId xmlns:a16="http://schemas.microsoft.com/office/drawing/2014/main" id="{379B8370-992D-4559-ABD1-E750F043C377}"/>
+                <a16:creationId xmlns:a16="http://schemas.microsoft.com/office/drawing/2014/main" id="{4A9D6E14-6D14-4D02-BBE6-3C60D1A8B404}"/>
               </a:ext>
             </a:extLst>
           </p:cNvPr>
@@ -24886,7 +24886,7 @@
           <p:cNvPr id="5" name="Rectangle 4">
             <a:extLst xmlns:a="http://schemas.openxmlformats.org/drawingml/2006/main">
               <a:ext uri="{FF2B5EF4-FFF2-40B4-BE49-F238E27FC236}">
-                <a16:creationId xmlns:a16="http://schemas.microsoft.com/office/drawing/2014/main" id="{DD8BF3D6-5666-46F8-A8D0-98875A5EF80F}"/>
+                <a16:creationId xmlns:a16="http://schemas.microsoft.com/office/drawing/2014/main" id="{56052EC3-D1EB-4866-A76C-AA9182CB1DF5}"/>
               </a:ext>
             </a:extLst>
           </p:cNvPr>
@@ -24941,7 +24941,7 @@
           <p:cNvPr id="6" name="TextBox 5">
             <a:extLst xmlns:a="http://schemas.openxmlformats.org/drawingml/2006/main">
               <a:ext uri="{FF2B5EF4-FFF2-40B4-BE49-F238E27FC236}">
-                <a16:creationId xmlns:a16="http://schemas.microsoft.com/office/drawing/2014/main" id="{A03B69C5-DA03-4DF3-93C0-011A8AAC4244}"/>
+                <a16:creationId xmlns:a16="http://schemas.microsoft.com/office/drawing/2014/main" id="{885E4088-5B82-4913-803B-AA6A865CEF73}"/>
               </a:ext>
             </a:extLst>
           </p:cNvPr>
@@ -24978,7 +24978,7 @@
                 <a:ea typeface="Aptos"/>
                 <a:cs typeface="Aptos"/>
               </a:rPr>
-              <a:t>Julkinen riippumaton evidenssikooste · 2026.07.24-20 · 2026-07-24 · Lähteet: WIPO valuation</a:t>
+              <a:t>Julkinen riippumaton evidenssikooste · 2026.07.24-21 · 2026-07-24 · Lähteet: WIPO valuation</a:t>
             </a:r>
           </a:p>
         </p:txBody>
@@ -24988,7 +24988,7 @@
           <p:cNvPr id="7" name="TextBox 6">
             <a:extLst xmlns:a="http://schemas.openxmlformats.org/drawingml/2006/main">
               <a:ext uri="{FF2B5EF4-FFF2-40B4-BE49-F238E27FC236}">
-                <a16:creationId xmlns:a16="http://schemas.microsoft.com/office/drawing/2014/main" id="{D39B54A0-124D-48EE-B9CB-4ECBDBC74E1D}"/>
+                <a16:creationId xmlns:a16="http://schemas.microsoft.com/office/drawing/2014/main" id="{2623C26D-BD48-4009-BB04-C9B8D72C2AEA}"/>
               </a:ext>
             </a:extLst>
           </p:cNvPr>
@@ -25721,7 +25721,7 @@
           <p:cNvPr id="9" name="TextBox 8">
             <a:extLst xmlns:a="http://schemas.openxmlformats.org/drawingml/2006/main">
               <a:ext uri="{FF2B5EF4-FFF2-40B4-BE49-F238E27FC236}">
-                <a16:creationId xmlns:a16="http://schemas.microsoft.com/office/drawing/2014/main" id="{1C221DE7-D94D-4DDB-982C-BFF2442DBAD0}"/>
+                <a16:creationId xmlns:a16="http://schemas.microsoft.com/office/drawing/2014/main" id="{B5165E1B-79D2-4D67-B80D-D5F12296DC5B}"/>
               </a:ext>
             </a:extLst>
           </p:cNvPr>
@@ -25766,7 +25766,7 @@
     </p:spTree>
     <p:extLst>
       <p:ext uri="{BB962C8B-B14F-4D97-AF65-F5344CB8AC3E}">
-        <p14:creationId xmlns:p14="http://schemas.microsoft.com/office/powerpoint/2010/main" val="1468141974"/>
+        <p14:creationId xmlns:p14="http://schemas.microsoft.com/office/powerpoint/2010/main" val="1945874844"/>
       </p:ext>
     </p:extLst>
   </p:cSld>
@@ -25790,7 +25790,7 @@
           <p:cNvPr id="2" name="TextBox 1">
             <a:extLst xmlns:a="http://schemas.openxmlformats.org/drawingml/2006/main">
               <a:ext uri="{FF2B5EF4-FFF2-40B4-BE49-F238E27FC236}">
-                <a16:creationId xmlns:a16="http://schemas.microsoft.com/office/drawing/2014/main" id="{3DB84208-5E2D-4638-91CF-00B4F25AD63C}"/>
+                <a16:creationId xmlns:a16="http://schemas.microsoft.com/office/drawing/2014/main" id="{DF495CAB-5045-4AF6-96DD-2F6B438CFA0F}"/>
               </a:ext>
             </a:extLst>
           </p:cNvPr>
@@ -25837,7 +25837,7 @@
           <p:cNvPr id="3" name="TextBox 2">
             <a:extLst xmlns:a="http://schemas.openxmlformats.org/drawingml/2006/main">
               <a:ext uri="{FF2B5EF4-FFF2-40B4-BE49-F238E27FC236}">
-                <a16:creationId xmlns:a16="http://schemas.microsoft.com/office/drawing/2014/main" id="{D00C3F3E-84D8-4F9D-A9E5-042D787478DD}"/>
+                <a16:creationId xmlns:a16="http://schemas.microsoft.com/office/drawing/2014/main" id="{6F9A868B-F316-4A11-9663-3C8FCCD983DB}"/>
               </a:ext>
             </a:extLst>
           </p:cNvPr>
@@ -25884,7 +25884,7 @@
           <p:cNvPr id="4" name="Rectangle 3">
             <a:extLst xmlns:a="http://schemas.openxmlformats.org/drawingml/2006/main">
               <a:ext uri="{FF2B5EF4-FFF2-40B4-BE49-F238E27FC236}">
-                <a16:creationId xmlns:a16="http://schemas.microsoft.com/office/drawing/2014/main" id="{05F989CD-A2E1-410F-9B33-09DEFA8AFBD6}"/>
+                <a16:creationId xmlns:a16="http://schemas.microsoft.com/office/drawing/2014/main" id="{23E0B400-3C6F-4DD6-91CD-F60F30458668}"/>
               </a:ext>
             </a:extLst>
           </p:cNvPr>
@@ -25939,7 +25939,7 @@
           <p:cNvPr id="5" name="Rectangle 4">
             <a:extLst xmlns:a="http://schemas.openxmlformats.org/drawingml/2006/main">
               <a:ext uri="{FF2B5EF4-FFF2-40B4-BE49-F238E27FC236}">
-                <a16:creationId xmlns:a16="http://schemas.microsoft.com/office/drawing/2014/main" id="{74379B73-ACFC-445C-AEE6-A3AE83C079A5}"/>
+                <a16:creationId xmlns:a16="http://schemas.microsoft.com/office/drawing/2014/main" id="{23B575C9-41C1-4F45-9CDA-92A813D67E08}"/>
               </a:ext>
             </a:extLst>
           </p:cNvPr>
@@ -25994,7 +25994,7 @@
           <p:cNvPr id="6" name="TextBox 5">
             <a:extLst xmlns:a="http://schemas.openxmlformats.org/drawingml/2006/main">
               <a:ext uri="{FF2B5EF4-FFF2-40B4-BE49-F238E27FC236}">
-                <a16:creationId xmlns:a16="http://schemas.microsoft.com/office/drawing/2014/main" id="{1DA78B7B-7A2A-406D-B3E4-F089923286D1}"/>
+                <a16:creationId xmlns:a16="http://schemas.microsoft.com/office/drawing/2014/main" id="{E1F7F5C4-F1D3-485D-937D-96302D69C103}"/>
               </a:ext>
             </a:extLst>
           </p:cNvPr>
@@ -26031,7 +26031,7 @@
                 <a:ea typeface="Aptos"/>
                 <a:cs typeface="Aptos"/>
               </a:rPr>
-              <a:t>Julkinen riippumaton evidenssikooste · 2026.07.24-20 · 2026-07-24 · Lähteet: Evidence Register</a:t>
+              <a:t>Julkinen riippumaton evidenssikooste · 2026.07.24-21 · 2026-07-24 · Lähteet: Evidence Register</a:t>
             </a:r>
           </a:p>
         </p:txBody>
@@ -26041,7 +26041,7 @@
           <p:cNvPr id="7" name="TextBox 6">
             <a:extLst xmlns:a="http://schemas.openxmlformats.org/drawingml/2006/main">
               <a:ext uri="{FF2B5EF4-FFF2-40B4-BE49-F238E27FC236}">
-                <a16:creationId xmlns:a16="http://schemas.microsoft.com/office/drawing/2014/main" id="{FACDBB3B-41AA-4680-A10F-F408333443F4}"/>
+                <a16:creationId xmlns:a16="http://schemas.microsoft.com/office/drawing/2014/main" id="{12F2BE9D-07CC-4FCA-8F63-B9267B44902F}"/>
               </a:ext>
             </a:extLst>
           </p:cNvPr>
@@ -26611,7 +26611,7 @@
           <p:cNvPr id="9" name="TextBox 8">
             <a:extLst xmlns:a="http://schemas.openxmlformats.org/drawingml/2006/main">
               <a:ext uri="{FF2B5EF4-FFF2-40B4-BE49-F238E27FC236}">
-                <a16:creationId xmlns:a16="http://schemas.microsoft.com/office/drawing/2014/main" id="{BFF4BC1E-903B-44C1-8895-045B5A56E444}"/>
+                <a16:creationId xmlns:a16="http://schemas.microsoft.com/office/drawing/2014/main" id="{C9A79FD8-18EE-453D-B651-AE1F90D8C873}"/>
               </a:ext>
             </a:extLst>
           </p:cNvPr>
@@ -26656,7 +26656,7 @@
     </p:spTree>
     <p:extLst>
       <p:ext uri="{BB962C8B-B14F-4D97-AF65-F5344CB8AC3E}">
-        <p14:creationId xmlns:p14="http://schemas.microsoft.com/office/powerpoint/2010/main" val="874265498"/>
+        <p14:creationId xmlns:p14="http://schemas.microsoft.com/office/powerpoint/2010/main" val="399290955"/>
       </p:ext>
     </p:extLst>
   </p:cSld>
@@ -26680,7 +26680,7 @@
           <p:cNvPr id="2" name="TextBox 1">
             <a:extLst xmlns:a="http://schemas.openxmlformats.org/drawingml/2006/main">
               <a:ext uri="{FF2B5EF4-FFF2-40B4-BE49-F238E27FC236}">
-                <a16:creationId xmlns:a16="http://schemas.microsoft.com/office/drawing/2014/main" id="{D019EBAA-EAF6-44A3-A523-FAD9E701345A}"/>
+                <a16:creationId xmlns:a16="http://schemas.microsoft.com/office/drawing/2014/main" id="{E55F27BB-0045-4EF4-8339-464FE9F4F712}"/>
               </a:ext>
             </a:extLst>
           </p:cNvPr>
@@ -26727,7 +26727,7 @@
           <p:cNvPr id="3" name="TextBox 2">
             <a:extLst xmlns:a="http://schemas.openxmlformats.org/drawingml/2006/main">
               <a:ext uri="{FF2B5EF4-FFF2-40B4-BE49-F238E27FC236}">
-                <a16:creationId xmlns:a16="http://schemas.microsoft.com/office/drawing/2014/main" id="{3C13FB1A-1492-4BDF-A20F-64835E97ED01}"/>
+                <a16:creationId xmlns:a16="http://schemas.microsoft.com/office/drawing/2014/main" id="{A3E5F23A-08AA-4565-9340-13D8DF9C6860}"/>
               </a:ext>
             </a:extLst>
           </p:cNvPr>
@@ -26774,7 +26774,7 @@
           <p:cNvPr id="4" name="Rectangle 3">
             <a:extLst xmlns:a="http://schemas.openxmlformats.org/drawingml/2006/main">
               <a:ext uri="{FF2B5EF4-FFF2-40B4-BE49-F238E27FC236}">
-                <a16:creationId xmlns:a16="http://schemas.microsoft.com/office/drawing/2014/main" id="{C267141C-5759-4A31-95FE-F3CB7FB51C18}"/>
+                <a16:creationId xmlns:a16="http://schemas.microsoft.com/office/drawing/2014/main" id="{6ACA0152-373F-4DC8-AAA5-A4BD61036C19}"/>
               </a:ext>
             </a:extLst>
           </p:cNvPr>
@@ -26829,7 +26829,7 @@
           <p:cNvPr id="5" name="Rectangle 4">
             <a:extLst xmlns:a="http://schemas.openxmlformats.org/drawingml/2006/main">
               <a:ext uri="{FF2B5EF4-FFF2-40B4-BE49-F238E27FC236}">
-                <a16:creationId xmlns:a16="http://schemas.microsoft.com/office/drawing/2014/main" id="{4D666255-8A97-4B51-A758-0DFEC769D665}"/>
+                <a16:creationId xmlns:a16="http://schemas.microsoft.com/office/drawing/2014/main" id="{5BEBD08C-19D6-44A0-9B5D-24FF10681DB8}"/>
               </a:ext>
             </a:extLst>
           </p:cNvPr>
@@ -26884,7 +26884,7 @@
           <p:cNvPr id="6" name="TextBox 5">
             <a:extLst xmlns:a="http://schemas.openxmlformats.org/drawingml/2006/main">
               <a:ext uri="{FF2B5EF4-FFF2-40B4-BE49-F238E27FC236}">
-                <a16:creationId xmlns:a16="http://schemas.microsoft.com/office/drawing/2014/main" id="{7A4C7F38-DE8B-43AE-85FA-252637630A9C}"/>
+                <a16:creationId xmlns:a16="http://schemas.microsoft.com/office/drawing/2014/main" id="{978EEE4C-0A69-4B73-9095-1291C951204C}"/>
               </a:ext>
             </a:extLst>
           </p:cNvPr>
@@ -26921,7 +26921,7 @@
                 <a:ea typeface="Aptos"/>
                 <a:cs typeface="Aptos"/>
               </a:rPr>
-              <a:t>Julkinen riippumaton evidenssikooste · 2026.07.24-20 · 2026-07-24 · Lähteet: Evidence Register</a:t>
+              <a:t>Julkinen riippumaton evidenssikooste · 2026.07.24-21 · 2026-07-24 · Lähteet: Evidence Register</a:t>
             </a:r>
           </a:p>
         </p:txBody>
@@ -26931,7 +26931,7 @@
           <p:cNvPr id="7" name="TextBox 6">
             <a:extLst xmlns:a="http://schemas.openxmlformats.org/drawingml/2006/main">
               <a:ext uri="{FF2B5EF4-FFF2-40B4-BE49-F238E27FC236}">
-                <a16:creationId xmlns:a16="http://schemas.microsoft.com/office/drawing/2014/main" id="{2B6CF3B6-CFA9-472C-A9A5-4FDF43D87E80}"/>
+                <a16:creationId xmlns:a16="http://schemas.microsoft.com/office/drawing/2014/main" id="{FAF8B9D0-B13F-400F-B39F-75756EB942AB}"/>
               </a:ext>
             </a:extLst>
           </p:cNvPr>
@@ -27584,7 +27584,7 @@
           <p:cNvPr id="9" name="TextBox 8">
             <a:extLst xmlns:a="http://schemas.openxmlformats.org/drawingml/2006/main">
               <a:ext uri="{FF2B5EF4-FFF2-40B4-BE49-F238E27FC236}">
-                <a16:creationId xmlns:a16="http://schemas.microsoft.com/office/drawing/2014/main" id="{AE3053F7-164E-470A-ABF3-83C4E1BB7FC8}"/>
+                <a16:creationId xmlns:a16="http://schemas.microsoft.com/office/drawing/2014/main" id="{65EF70E0-93BF-4587-86BC-9F7F606B780E}"/>
               </a:ext>
             </a:extLst>
           </p:cNvPr>
@@ -27629,7 +27629,7 @@
     </p:spTree>
     <p:extLst>
       <p:ext uri="{BB962C8B-B14F-4D97-AF65-F5344CB8AC3E}">
-        <p14:creationId xmlns:p14="http://schemas.microsoft.com/office/powerpoint/2010/main" val="1379093346"/>
+        <p14:creationId xmlns:p14="http://schemas.microsoft.com/office/powerpoint/2010/main" val="1767055897"/>
       </p:ext>
     </p:extLst>
   </p:cSld>
@@ -27653,7 +27653,7 @@
           <p:cNvPr id="2" name="TextBox 1">
             <a:extLst xmlns:a="http://schemas.openxmlformats.org/drawingml/2006/main">
               <a:ext uri="{FF2B5EF4-FFF2-40B4-BE49-F238E27FC236}">
-                <a16:creationId xmlns:a16="http://schemas.microsoft.com/office/drawing/2014/main" id="{F3E730E9-D368-4BF9-8256-1EF6BF6AA6D3}"/>
+                <a16:creationId xmlns:a16="http://schemas.microsoft.com/office/drawing/2014/main" id="{539E759B-76D3-417B-ADBD-B7D8D5303429}"/>
               </a:ext>
             </a:extLst>
           </p:cNvPr>
@@ -27700,7 +27700,7 @@
           <p:cNvPr id="3" name="TextBox 2">
             <a:extLst xmlns:a="http://schemas.openxmlformats.org/drawingml/2006/main">
               <a:ext uri="{FF2B5EF4-FFF2-40B4-BE49-F238E27FC236}">
-                <a16:creationId xmlns:a16="http://schemas.microsoft.com/office/drawing/2014/main" id="{16AD14F9-D35D-4920-AEAE-E572D875E20C}"/>
+                <a16:creationId xmlns:a16="http://schemas.microsoft.com/office/drawing/2014/main" id="{2B3F6DAE-9B43-4840-B15B-16A26904ED87}"/>
               </a:ext>
             </a:extLst>
           </p:cNvPr>
@@ -27747,7 +27747,7 @@
           <p:cNvPr id="4" name="Rectangle 3">
             <a:extLst xmlns:a="http://schemas.openxmlformats.org/drawingml/2006/main">
               <a:ext uri="{FF2B5EF4-FFF2-40B4-BE49-F238E27FC236}">
-                <a16:creationId xmlns:a16="http://schemas.microsoft.com/office/drawing/2014/main" id="{77891FE7-0F99-4F5E-84E7-762353F60FF3}"/>
+                <a16:creationId xmlns:a16="http://schemas.microsoft.com/office/drawing/2014/main" id="{934DC0CE-7BAA-4D2A-B185-660F52091D2A}"/>
               </a:ext>
             </a:extLst>
           </p:cNvPr>
@@ -27802,7 +27802,7 @@
           <p:cNvPr id="5" name="Rectangle 4">
             <a:extLst xmlns:a="http://schemas.openxmlformats.org/drawingml/2006/main">
               <a:ext uri="{FF2B5EF4-FFF2-40B4-BE49-F238E27FC236}">
-                <a16:creationId xmlns:a16="http://schemas.microsoft.com/office/drawing/2014/main" id="{2B0C14E9-9619-4FAF-8492-558C272D981E}"/>
+                <a16:creationId xmlns:a16="http://schemas.microsoft.com/office/drawing/2014/main" id="{DA3E16C8-A983-4C79-BA93-35EC232DFB76}"/>
               </a:ext>
             </a:extLst>
           </p:cNvPr>
@@ -27857,7 +27857,7 @@
           <p:cNvPr id="6" name="TextBox 5">
             <a:extLst xmlns:a="http://schemas.openxmlformats.org/drawingml/2006/main">
               <a:ext uri="{FF2B5EF4-FFF2-40B4-BE49-F238E27FC236}">
-                <a16:creationId xmlns:a16="http://schemas.microsoft.com/office/drawing/2014/main" id="{9717B2A8-63F8-4CBC-B07A-C2C65EAB29F7}"/>
+                <a16:creationId xmlns:a16="http://schemas.microsoft.com/office/drawing/2014/main" id="{06D17B9A-015C-415F-B30B-F538C87F8FFB}"/>
               </a:ext>
             </a:extLst>
           </p:cNvPr>
@@ -27894,7 +27894,7 @@
                 <a:ea typeface="Aptos"/>
                 <a:cs typeface="Aptos"/>
               </a:rPr>
-              <a:t>Julkinen riippumaton evidenssikooste · 2026.07.24-20 · 2026-07-24 · Lähteet: Evidence Register; changelog</a:t>
+              <a:t>Julkinen riippumaton evidenssikooste · 2026.07.24-21 · 2026-07-24 · Lähteet: Evidence Register; changelog</a:t>
             </a:r>
           </a:p>
         </p:txBody>
@@ -27904,7 +27904,7 @@
           <p:cNvPr id="7" name="TextBox 6">
             <a:extLst xmlns:a="http://schemas.openxmlformats.org/drawingml/2006/main">
               <a:ext uri="{FF2B5EF4-FFF2-40B4-BE49-F238E27FC236}">
-                <a16:creationId xmlns:a16="http://schemas.microsoft.com/office/drawing/2014/main" id="{14CF9C4A-CD6F-443B-8F35-1090A11C4167}"/>
+                <a16:creationId xmlns:a16="http://schemas.microsoft.com/office/drawing/2014/main" id="{9699551D-4457-46DB-A3E6-C99B3508B425}"/>
               </a:ext>
             </a:extLst>
           </p:cNvPr>
@@ -27951,7 +27951,7 @@
           <p:cNvPr id="8" name="Rounded Rectangle 7">
             <a:extLst xmlns:a="http://schemas.openxmlformats.org/drawingml/2006/main">
               <a:ext uri="{FF2B5EF4-FFF2-40B4-BE49-F238E27FC236}">
-                <a16:creationId xmlns:a16="http://schemas.microsoft.com/office/drawing/2014/main" id="{00C4CD21-AF76-4D8F-8BD4-98C74C2AD36A}"/>
+                <a16:creationId xmlns:a16="http://schemas.microsoft.com/office/drawing/2014/main" id="{D0859C3C-CEC1-483E-A520-0E26D98EBC40}"/>
               </a:ext>
             </a:extLst>
           </p:cNvPr>
@@ -28008,7 +28008,7 @@
           <p:cNvPr id="9" name="TextBox 8">
             <a:extLst xmlns:a="http://schemas.openxmlformats.org/drawingml/2006/main">
               <a:ext uri="{FF2B5EF4-FFF2-40B4-BE49-F238E27FC236}">
-                <a16:creationId xmlns:a16="http://schemas.microsoft.com/office/drawing/2014/main" id="{5A8A2AAE-951B-4F44-80DA-C8295493F84D}"/>
+                <a16:creationId xmlns:a16="http://schemas.microsoft.com/office/drawing/2014/main" id="{EB59FB24-5FCA-4BDA-93C1-F903F3D056B8}"/>
               </a:ext>
             </a:extLst>
           </p:cNvPr>
@@ -28055,7 +28055,7 @@
           <p:cNvPr id="10" name="TextBox 9">
             <a:extLst xmlns:a="http://schemas.openxmlformats.org/drawingml/2006/main">
               <a:ext uri="{FF2B5EF4-FFF2-40B4-BE49-F238E27FC236}">
-                <a16:creationId xmlns:a16="http://schemas.microsoft.com/office/drawing/2014/main" id="{894559DB-D397-4764-B258-26B56D7ACB19}"/>
+                <a16:creationId xmlns:a16="http://schemas.microsoft.com/office/drawing/2014/main" id="{1A3B6244-CA69-406B-ABAA-727EB2C03B46}"/>
               </a:ext>
             </a:extLst>
           </p:cNvPr>
@@ -28102,7 +28102,7 @@
           <p:cNvPr id="11" name="TextBox 10">
             <a:extLst xmlns:a="http://schemas.openxmlformats.org/drawingml/2006/main">
               <a:ext uri="{FF2B5EF4-FFF2-40B4-BE49-F238E27FC236}">
-                <a16:creationId xmlns:a16="http://schemas.microsoft.com/office/drawing/2014/main" id="{AB2033FB-DE03-4143-87AF-204AFF4C20B4}"/>
+                <a16:creationId xmlns:a16="http://schemas.microsoft.com/office/drawing/2014/main" id="{28682A19-6144-4453-A6BD-4A52BFE8B488}"/>
               </a:ext>
             </a:extLst>
           </p:cNvPr>
@@ -28149,7 +28149,7 @@
           <p:cNvPr id="12" name="Rounded Rectangle 11">
             <a:extLst xmlns:a="http://schemas.openxmlformats.org/drawingml/2006/main">
               <a:ext uri="{FF2B5EF4-FFF2-40B4-BE49-F238E27FC236}">
-                <a16:creationId xmlns:a16="http://schemas.microsoft.com/office/drawing/2014/main" id="{4CBCD23F-33B2-4CFA-AD5D-A77E38DBF651}"/>
+                <a16:creationId xmlns:a16="http://schemas.microsoft.com/office/drawing/2014/main" id="{DCC9D55B-BF75-41E9-8BDF-97D07984BE50}"/>
               </a:ext>
             </a:extLst>
           </p:cNvPr>
@@ -28206,7 +28206,7 @@
           <p:cNvPr id="13" name="TextBox 12">
             <a:extLst xmlns:a="http://schemas.openxmlformats.org/drawingml/2006/main">
               <a:ext uri="{FF2B5EF4-FFF2-40B4-BE49-F238E27FC236}">
-                <a16:creationId xmlns:a16="http://schemas.microsoft.com/office/drawing/2014/main" id="{4C201F4E-5DD9-4933-802F-77DF3AC4A513}"/>
+                <a16:creationId xmlns:a16="http://schemas.microsoft.com/office/drawing/2014/main" id="{1EA2D62A-4146-4640-BAA7-95EBBD3C4093}"/>
               </a:ext>
             </a:extLst>
           </p:cNvPr>
@@ -28253,7 +28253,7 @@
           <p:cNvPr id="14" name="TextBox 13">
             <a:extLst xmlns:a="http://schemas.openxmlformats.org/drawingml/2006/main">
               <a:ext uri="{FF2B5EF4-FFF2-40B4-BE49-F238E27FC236}">
-                <a16:creationId xmlns:a16="http://schemas.microsoft.com/office/drawing/2014/main" id="{992DE2BC-0F4E-40E7-9FAC-53EA3DDE16C7}"/>
+                <a16:creationId xmlns:a16="http://schemas.microsoft.com/office/drawing/2014/main" id="{838498BF-74AA-49AA-B3FD-A6F42A2D64AC}"/>
               </a:ext>
             </a:extLst>
           </p:cNvPr>
@@ -28300,7 +28300,7 @@
           <p:cNvPr id="15" name="TextBox 14">
             <a:extLst xmlns:a="http://schemas.openxmlformats.org/drawingml/2006/main">
               <a:ext uri="{FF2B5EF4-FFF2-40B4-BE49-F238E27FC236}">
-                <a16:creationId xmlns:a16="http://schemas.microsoft.com/office/drawing/2014/main" id="{CF037200-B9FE-4F28-89A5-968A007E8F12}"/>
+                <a16:creationId xmlns:a16="http://schemas.microsoft.com/office/drawing/2014/main" id="{4AE2503D-2072-43C1-924C-E716C1A85FD1}"/>
               </a:ext>
             </a:extLst>
           </p:cNvPr>
@@ -28347,7 +28347,7 @@
           <p:cNvPr id="16" name="Rounded Rectangle 15">
             <a:extLst xmlns:a="http://schemas.openxmlformats.org/drawingml/2006/main">
               <a:ext uri="{FF2B5EF4-FFF2-40B4-BE49-F238E27FC236}">
-                <a16:creationId xmlns:a16="http://schemas.microsoft.com/office/drawing/2014/main" id="{F2436DD2-24DA-475B-A2B3-993116DC9424}"/>
+                <a16:creationId xmlns:a16="http://schemas.microsoft.com/office/drawing/2014/main" id="{4421FFC3-209D-4494-930D-7066C1F2C6FC}"/>
               </a:ext>
             </a:extLst>
           </p:cNvPr>
@@ -28404,7 +28404,7 @@
           <p:cNvPr id="17" name="TextBox 16">
             <a:extLst xmlns:a="http://schemas.openxmlformats.org/drawingml/2006/main">
               <a:ext uri="{FF2B5EF4-FFF2-40B4-BE49-F238E27FC236}">
-                <a16:creationId xmlns:a16="http://schemas.microsoft.com/office/drawing/2014/main" id="{E6A51A16-29B3-4C37-B130-A639373DF8CA}"/>
+                <a16:creationId xmlns:a16="http://schemas.microsoft.com/office/drawing/2014/main" id="{2A0A183A-8E8A-4674-9745-CA560C8A419D}"/>
               </a:ext>
             </a:extLst>
           </p:cNvPr>
@@ -28451,7 +28451,7 @@
           <p:cNvPr id="18" name="TextBox 17">
             <a:extLst xmlns:a="http://schemas.openxmlformats.org/drawingml/2006/main">
               <a:ext uri="{FF2B5EF4-FFF2-40B4-BE49-F238E27FC236}">
-                <a16:creationId xmlns:a16="http://schemas.microsoft.com/office/drawing/2014/main" id="{1ADDAD40-482A-414C-BB1D-3BFEB9221516}"/>
+                <a16:creationId xmlns:a16="http://schemas.microsoft.com/office/drawing/2014/main" id="{B7CB4F24-FAE0-4709-9A56-8A4E8FF2203C}"/>
               </a:ext>
             </a:extLst>
           </p:cNvPr>
@@ -28498,7 +28498,7 @@
           <p:cNvPr id="19" name="TextBox 18">
             <a:extLst xmlns:a="http://schemas.openxmlformats.org/drawingml/2006/main">
               <a:ext uri="{FF2B5EF4-FFF2-40B4-BE49-F238E27FC236}">
-                <a16:creationId xmlns:a16="http://schemas.microsoft.com/office/drawing/2014/main" id="{9E97F099-FFDE-4250-BEF1-6BFA66CF190E}"/>
+                <a16:creationId xmlns:a16="http://schemas.microsoft.com/office/drawing/2014/main" id="{7CB1098A-8676-43C1-A661-502DA74977A7}"/>
               </a:ext>
             </a:extLst>
           </p:cNvPr>
@@ -28545,7 +28545,7 @@
           <p:cNvPr id="20" name="Rounded Rectangle 19">
             <a:extLst xmlns:a="http://schemas.openxmlformats.org/drawingml/2006/main">
               <a:ext uri="{FF2B5EF4-FFF2-40B4-BE49-F238E27FC236}">
-                <a16:creationId xmlns:a16="http://schemas.microsoft.com/office/drawing/2014/main" id="{EA05DC32-5739-4EF5-A956-54C8CAD9705D}"/>
+                <a16:creationId xmlns:a16="http://schemas.microsoft.com/office/drawing/2014/main" id="{A3455DCF-C7E5-4E83-8227-61383A121201}"/>
               </a:ext>
             </a:extLst>
           </p:cNvPr>
@@ -28602,7 +28602,7 @@
           <p:cNvPr id="21" name="TextBox 20">
             <a:extLst xmlns:a="http://schemas.openxmlformats.org/drawingml/2006/main">
               <a:ext uri="{FF2B5EF4-FFF2-40B4-BE49-F238E27FC236}">
-                <a16:creationId xmlns:a16="http://schemas.microsoft.com/office/drawing/2014/main" id="{380CB702-5D36-4289-B513-8B26683EC829}"/>
+                <a16:creationId xmlns:a16="http://schemas.microsoft.com/office/drawing/2014/main" id="{C066282D-23BD-416D-9AC3-A50BF7574521}"/>
               </a:ext>
             </a:extLst>
           </p:cNvPr>
@@ -28649,7 +28649,7 @@
           <p:cNvPr id="22" name="TextBox 21">
             <a:extLst xmlns:a="http://schemas.openxmlformats.org/drawingml/2006/main">
               <a:ext uri="{FF2B5EF4-FFF2-40B4-BE49-F238E27FC236}">
-                <a16:creationId xmlns:a16="http://schemas.microsoft.com/office/drawing/2014/main" id="{A58E4663-F823-48B1-B0BB-082EDB12643C}"/>
+                <a16:creationId xmlns:a16="http://schemas.microsoft.com/office/drawing/2014/main" id="{1379DCAF-DDE3-4964-BA45-AA8B872F4012}"/>
               </a:ext>
             </a:extLst>
           </p:cNvPr>
@@ -28696,7 +28696,7 @@
           <p:cNvPr id="23" name="TextBox 22">
             <a:extLst xmlns:a="http://schemas.openxmlformats.org/drawingml/2006/main">
               <a:ext uri="{FF2B5EF4-FFF2-40B4-BE49-F238E27FC236}">
-                <a16:creationId xmlns:a16="http://schemas.microsoft.com/office/drawing/2014/main" id="{3926ED5D-9B13-4E11-A85A-4114EFC94A1B}"/>
+                <a16:creationId xmlns:a16="http://schemas.microsoft.com/office/drawing/2014/main" id="{F9B2FBB3-7C05-4C46-868B-A21A17F813BC}"/>
               </a:ext>
             </a:extLst>
           </p:cNvPr>
@@ -28743,7 +28743,7 @@
           <p:cNvPr id="24" name="TextBox 23">
             <a:extLst xmlns:a="http://schemas.openxmlformats.org/drawingml/2006/main">
               <a:ext uri="{FF2B5EF4-FFF2-40B4-BE49-F238E27FC236}">
-                <a16:creationId xmlns:a16="http://schemas.microsoft.com/office/drawing/2014/main" id="{C616727E-BA1C-4D62-B93D-3A5079C09D26}"/>
+                <a16:creationId xmlns:a16="http://schemas.microsoft.com/office/drawing/2014/main" id="{5556B1C0-5465-466F-9130-770FF1688702}"/>
               </a:ext>
             </a:extLst>
           </p:cNvPr>
@@ -28788,7 +28788,7 @@
     </p:spTree>
     <p:extLst>
       <p:ext uri="{BB962C8B-B14F-4D97-AF65-F5344CB8AC3E}">
-        <p14:creationId xmlns:p14="http://schemas.microsoft.com/office/powerpoint/2010/main" val="321596649"/>
+        <p14:creationId xmlns:p14="http://schemas.microsoft.com/office/powerpoint/2010/main" val="1497815887"/>
       </p:ext>
     </p:extLst>
   </p:cSld>
@@ -28812,7 +28812,7 @@
           <p:cNvPr id="2" name="TextBox 1">
             <a:extLst xmlns:a="http://schemas.openxmlformats.org/drawingml/2006/main">
               <a:ext uri="{FF2B5EF4-FFF2-40B4-BE49-F238E27FC236}">
-                <a16:creationId xmlns:a16="http://schemas.microsoft.com/office/drawing/2014/main" id="{9CE51233-D9B9-4F19-956E-D7226C004637}"/>
+                <a16:creationId xmlns:a16="http://schemas.microsoft.com/office/drawing/2014/main" id="{B97C759E-5B4E-4EEA-A436-1518F36451D3}"/>
               </a:ext>
             </a:extLst>
           </p:cNvPr>
@@ -28859,7 +28859,7 @@
           <p:cNvPr id="3" name="TextBox 2">
             <a:extLst xmlns:a="http://schemas.openxmlformats.org/drawingml/2006/main">
               <a:ext uri="{FF2B5EF4-FFF2-40B4-BE49-F238E27FC236}">
-                <a16:creationId xmlns:a16="http://schemas.microsoft.com/office/drawing/2014/main" id="{567859C3-8B8D-4A83-9F90-F9DCC99C3C3F}"/>
+                <a16:creationId xmlns:a16="http://schemas.microsoft.com/office/drawing/2014/main" id="{2C161B68-B3B8-4158-B82E-82F5E86C4ADE}"/>
               </a:ext>
             </a:extLst>
           </p:cNvPr>
@@ -28906,7 +28906,7 @@
           <p:cNvPr id="4" name="Rectangle 3">
             <a:extLst xmlns:a="http://schemas.openxmlformats.org/drawingml/2006/main">
               <a:ext uri="{FF2B5EF4-FFF2-40B4-BE49-F238E27FC236}">
-                <a16:creationId xmlns:a16="http://schemas.microsoft.com/office/drawing/2014/main" id="{EC0879B5-53C7-4847-B702-6F2C44A3FB27}"/>
+                <a16:creationId xmlns:a16="http://schemas.microsoft.com/office/drawing/2014/main" id="{8AF2D5C0-7A64-490F-B379-D8D2A720FCBB}"/>
               </a:ext>
             </a:extLst>
           </p:cNvPr>
@@ -28961,7 +28961,7 @@
           <p:cNvPr id="5" name="Rectangle 4">
             <a:extLst xmlns:a="http://schemas.openxmlformats.org/drawingml/2006/main">
               <a:ext uri="{FF2B5EF4-FFF2-40B4-BE49-F238E27FC236}">
-                <a16:creationId xmlns:a16="http://schemas.microsoft.com/office/drawing/2014/main" id="{CCCE5BB4-90A2-4AFC-9BEE-A1B4C6A72DE7}"/>
+                <a16:creationId xmlns:a16="http://schemas.microsoft.com/office/drawing/2014/main" id="{32FDC27C-8E3E-4F2E-96BD-4459015E75CE}"/>
               </a:ext>
             </a:extLst>
           </p:cNvPr>
@@ -29016,7 +29016,7 @@
           <p:cNvPr id="6" name="TextBox 5">
             <a:extLst xmlns:a="http://schemas.openxmlformats.org/drawingml/2006/main">
               <a:ext uri="{FF2B5EF4-FFF2-40B4-BE49-F238E27FC236}">
-                <a16:creationId xmlns:a16="http://schemas.microsoft.com/office/drawing/2014/main" id="{776622F5-9908-4DA0-86A8-3212FB37AB82}"/>
+                <a16:creationId xmlns:a16="http://schemas.microsoft.com/office/drawing/2014/main" id="{4D0092AE-7729-481D-AEDF-5E7292AA4AD4}"/>
               </a:ext>
             </a:extLst>
           </p:cNvPr>
@@ -29053,7 +29053,7 @@
                 <a:ea typeface="Aptos"/>
                 <a:cs typeface="Aptos"/>
               </a:rPr>
-              <a:t>Julkinen riippumaton evidenssikooste · 2026.07.24-20 · 2026-07-24 · Lähteet: EPO; 8 Ni 18/24 (EP); 7 O 3341/24</a:t>
+              <a:t>Julkinen riippumaton evidenssikooste · 2026.07.24-21 · 2026-07-24 · Lähteet: EPO; 8 Ni 18/24 (EP); 7 O 3341/24</a:t>
             </a:r>
           </a:p>
         </p:txBody>
@@ -29063,7 +29063,7 @@
           <p:cNvPr id="7" name="TextBox 6">
             <a:extLst xmlns:a="http://schemas.openxmlformats.org/drawingml/2006/main">
               <a:ext uri="{FF2B5EF4-FFF2-40B4-BE49-F238E27FC236}">
-                <a16:creationId xmlns:a16="http://schemas.microsoft.com/office/drawing/2014/main" id="{8889BB79-E1F6-410E-9960-E01F2FF42833}"/>
+                <a16:creationId xmlns:a16="http://schemas.microsoft.com/office/drawing/2014/main" id="{17CB4749-15C5-422C-8661-9218A5095492}"/>
               </a:ext>
             </a:extLst>
           </p:cNvPr>
@@ -29467,7 +29467,7 @@
           <p:cNvPr id="9" name="TextBox 8">
             <a:extLst xmlns:a="http://schemas.openxmlformats.org/drawingml/2006/main">
               <a:ext uri="{FF2B5EF4-FFF2-40B4-BE49-F238E27FC236}">
-                <a16:creationId xmlns:a16="http://schemas.microsoft.com/office/drawing/2014/main" id="{8C71A6C4-F53C-41E6-988A-A7918682FE2D}"/>
+                <a16:creationId xmlns:a16="http://schemas.microsoft.com/office/drawing/2014/main" id="{33BFC016-9D40-41DE-ACDA-D5538BE0BFDD}"/>
               </a:ext>
             </a:extLst>
           </p:cNvPr>
@@ -29512,7 +29512,7 @@
     </p:spTree>
     <p:extLst>
       <p:ext uri="{BB962C8B-B14F-4D97-AF65-F5344CB8AC3E}">
-        <p14:creationId xmlns:p14="http://schemas.microsoft.com/office/powerpoint/2010/main" val="1298014076"/>
+        <p14:creationId xmlns:p14="http://schemas.microsoft.com/office/powerpoint/2010/main" val="459351442"/>
       </p:ext>
     </p:extLst>
   </p:cSld>
@@ -29543,7 +29543,7 @@
           <p:cNvPr id="2" name="TextBox 1">
             <a:extLst xmlns:a="http://schemas.openxmlformats.org/drawingml/2006/main">
               <a:ext uri="{FF2B5EF4-FFF2-40B4-BE49-F238E27FC236}">
-                <a16:creationId xmlns:a16="http://schemas.microsoft.com/office/drawing/2014/main" id="{CD1CC814-26E8-40E5-9BAB-DED64C0A0868}"/>
+                <a16:creationId xmlns:a16="http://schemas.microsoft.com/office/drawing/2014/main" id="{2F72C4DE-D23D-4F97-BE2C-3F13EF1C468C}"/>
               </a:ext>
             </a:extLst>
           </p:cNvPr>
@@ -29590,7 +29590,7 @@
           <p:cNvPr id="3" name="TextBox 2">
             <a:extLst xmlns:a="http://schemas.openxmlformats.org/drawingml/2006/main">
               <a:ext uri="{FF2B5EF4-FFF2-40B4-BE49-F238E27FC236}">
-                <a16:creationId xmlns:a16="http://schemas.microsoft.com/office/drawing/2014/main" id="{C0C893F9-06DF-49D3-B77F-A11B33A48987}"/>
+                <a16:creationId xmlns:a16="http://schemas.microsoft.com/office/drawing/2014/main" id="{9B162C5A-1D77-4227-8673-42BCD583F7A6}"/>
               </a:ext>
             </a:extLst>
           </p:cNvPr>
@@ -29637,7 +29637,7 @@
           <p:cNvPr id="4" name="TextBox 3">
             <a:extLst xmlns:a="http://schemas.openxmlformats.org/drawingml/2006/main">
               <a:ext uri="{FF2B5EF4-FFF2-40B4-BE49-F238E27FC236}">
-                <a16:creationId xmlns:a16="http://schemas.microsoft.com/office/drawing/2014/main" id="{257A049C-E05F-4278-8DDA-749AB2DD9E7C}"/>
+                <a16:creationId xmlns:a16="http://schemas.microsoft.com/office/drawing/2014/main" id="{3C084997-51C7-41DF-9629-C60AC9F018F9}"/>
               </a:ext>
             </a:extLst>
           </p:cNvPr>
@@ -29756,7 +29756,7 @@
           <p:cNvPr id="5" name="TextBox 4">
             <a:extLst xmlns:a="http://schemas.openxmlformats.org/drawingml/2006/main">
               <a:ext uri="{FF2B5EF4-FFF2-40B4-BE49-F238E27FC236}">
-                <a16:creationId xmlns:a16="http://schemas.microsoft.com/office/drawing/2014/main" id="{2B295E1A-DE26-4922-9924-DAD0A587A9D4}"/>
+                <a16:creationId xmlns:a16="http://schemas.microsoft.com/office/drawing/2014/main" id="{7DA9C574-87FB-48A3-ABC3-BE520DF29E97}"/>
               </a:ext>
             </a:extLst>
           </p:cNvPr>
@@ -29793,7 +29793,7 @@
                 <a:ea typeface="Aptos"/>
                 <a:cs typeface="Aptos"/>
               </a:rPr>
-              <a:t>Versio 2026.07.24-20 · 2026-07-24 · 30 / 30</a:t>
+              <a:t>Versio 2026.07.24-21 · 2026-07-24 · 30 / 30</a:t>
             </a:r>
           </a:p>
         </p:txBody>
@@ -29801,7 +29801,7 @@
     </p:spTree>
     <p:extLst>
       <p:ext uri="{BB962C8B-B14F-4D97-AF65-F5344CB8AC3E}">
-        <p14:creationId xmlns:p14="http://schemas.microsoft.com/office/powerpoint/2010/main" val="1716641101"/>
+        <p14:creationId xmlns:p14="http://schemas.microsoft.com/office/powerpoint/2010/main" val="1473851342"/>
       </p:ext>
     </p:extLst>
   </p:cSld>
@@ -29825,7 +29825,7 @@
           <p:cNvPr id="2" name="TextBox 1">
             <a:extLst xmlns:a="http://schemas.openxmlformats.org/drawingml/2006/main">
               <a:ext uri="{FF2B5EF4-FFF2-40B4-BE49-F238E27FC236}">
-                <a16:creationId xmlns:a16="http://schemas.microsoft.com/office/drawing/2014/main" id="{3F8154E4-438C-4F8E-9896-5474B8E62727}"/>
+                <a16:creationId xmlns:a16="http://schemas.microsoft.com/office/drawing/2014/main" id="{E4DBFE3A-F93F-4CD8-97C9-ACBEAA15860B}"/>
               </a:ext>
             </a:extLst>
           </p:cNvPr>
@@ -29872,7 +29872,7 @@
           <p:cNvPr id="3" name="TextBox 2">
             <a:extLst xmlns:a="http://schemas.openxmlformats.org/drawingml/2006/main">
               <a:ext uri="{FF2B5EF4-FFF2-40B4-BE49-F238E27FC236}">
-                <a16:creationId xmlns:a16="http://schemas.microsoft.com/office/drawing/2014/main" id="{F3F50B5E-7AF3-4255-9706-87318FFD1CD9}"/>
+                <a16:creationId xmlns:a16="http://schemas.microsoft.com/office/drawing/2014/main" id="{4FF65DEA-5C72-498E-A0D3-6E6664672CFB}"/>
               </a:ext>
             </a:extLst>
           </p:cNvPr>
@@ -29919,7 +29919,7 @@
           <p:cNvPr id="4" name="Rectangle 3">
             <a:extLst xmlns:a="http://schemas.openxmlformats.org/drawingml/2006/main">
               <a:ext uri="{FF2B5EF4-FFF2-40B4-BE49-F238E27FC236}">
-                <a16:creationId xmlns:a16="http://schemas.microsoft.com/office/drawing/2014/main" id="{21051BC3-5063-45DC-B7DC-E57081D4F415}"/>
+                <a16:creationId xmlns:a16="http://schemas.microsoft.com/office/drawing/2014/main" id="{81A961E8-8188-4118-BC29-2C2EC4A2E56C}"/>
               </a:ext>
             </a:extLst>
           </p:cNvPr>
@@ -29974,7 +29974,7 @@
           <p:cNvPr id="5" name="Rectangle 4">
             <a:extLst xmlns:a="http://schemas.openxmlformats.org/drawingml/2006/main">
               <a:ext uri="{FF2B5EF4-FFF2-40B4-BE49-F238E27FC236}">
-                <a16:creationId xmlns:a16="http://schemas.microsoft.com/office/drawing/2014/main" id="{B8F682C8-2001-4EFD-81DB-9F497CF0C19D}"/>
+                <a16:creationId xmlns:a16="http://schemas.microsoft.com/office/drawing/2014/main" id="{47221BFE-DCBD-433B-AF58-336593ACE5A5}"/>
               </a:ext>
             </a:extLst>
           </p:cNvPr>
@@ -30029,7 +30029,7 @@
           <p:cNvPr id="6" name="TextBox 5">
             <a:extLst xmlns:a="http://schemas.openxmlformats.org/drawingml/2006/main">
               <a:ext uri="{FF2B5EF4-FFF2-40B4-BE49-F238E27FC236}">
-                <a16:creationId xmlns:a16="http://schemas.microsoft.com/office/drawing/2014/main" id="{2953CC70-242C-4C91-BB2B-BD31A92C9BA1}"/>
+                <a16:creationId xmlns:a16="http://schemas.microsoft.com/office/drawing/2014/main" id="{AB7C3694-4863-4462-919A-EAB6024BB3CF}"/>
               </a:ext>
             </a:extLst>
           </p:cNvPr>
@@ -30066,7 +30066,7 @@
                 <a:ea typeface="Aptos"/>
                 <a:cs typeface="Aptos"/>
               </a:rPr>
-              <a:t>Julkinen riippumaton evidenssikooste · 2026.07.24-20 · 2026-07-24 · Lähteet: Evidence Register; WIPO</a:t>
+              <a:t>Julkinen riippumaton evidenssikooste · 2026.07.24-21 · 2026-07-24 · Lähteet: Evidence Register; WIPO</a:t>
             </a:r>
           </a:p>
         </p:txBody>
@@ -30076,7 +30076,7 @@
           <p:cNvPr id="7" name="TextBox 6">
             <a:extLst xmlns:a="http://schemas.openxmlformats.org/drawingml/2006/main">
               <a:ext uri="{FF2B5EF4-FFF2-40B4-BE49-F238E27FC236}">
-                <a16:creationId xmlns:a16="http://schemas.microsoft.com/office/drawing/2014/main" id="{30890762-5EAB-430A-A424-69CC4FABA423}"/>
+                <a16:creationId xmlns:a16="http://schemas.microsoft.com/office/drawing/2014/main" id="{35D162D5-003B-4848-9959-BA89063AAAB7}"/>
               </a:ext>
             </a:extLst>
           </p:cNvPr>
@@ -30123,7 +30123,7 @@
           <p:cNvPr id="8" name="TextBox 7">
             <a:extLst xmlns:a="http://schemas.openxmlformats.org/drawingml/2006/main">
               <a:ext uri="{FF2B5EF4-FFF2-40B4-BE49-F238E27FC236}">
-                <a16:creationId xmlns:a16="http://schemas.microsoft.com/office/drawing/2014/main" id="{119F4BB7-B049-4540-BF6C-C98633EA7129}"/>
+                <a16:creationId xmlns:a16="http://schemas.microsoft.com/office/drawing/2014/main" id="{3F78257E-0C3F-4373-A1FE-B64DDFF95321}"/>
               </a:ext>
             </a:extLst>
           </p:cNvPr>
@@ -30170,7 +30170,7 @@
           <p:cNvPr id="9" name="TextBox 8">
             <a:extLst xmlns:a="http://schemas.openxmlformats.org/drawingml/2006/main">
               <a:ext uri="{FF2B5EF4-FFF2-40B4-BE49-F238E27FC236}">
-                <a16:creationId xmlns:a16="http://schemas.microsoft.com/office/drawing/2014/main" id="{6EF66C47-98B5-4595-891C-304EBEC26213}"/>
+                <a16:creationId xmlns:a16="http://schemas.microsoft.com/office/drawing/2014/main" id="{A77B3071-69C6-4501-91E3-9708AD529EEA}"/>
               </a:ext>
             </a:extLst>
           </p:cNvPr>
@@ -30267,7 +30267,7 @@
           <p:cNvPr id="10" name="Rounded Rectangle 9">
             <a:extLst xmlns:a="http://schemas.openxmlformats.org/drawingml/2006/main">
               <a:ext uri="{FF2B5EF4-FFF2-40B4-BE49-F238E27FC236}">
-                <a16:creationId xmlns:a16="http://schemas.microsoft.com/office/drawing/2014/main" id="{A1FFD67B-D82F-4B42-BB95-2B81114A506D}"/>
+                <a16:creationId xmlns:a16="http://schemas.microsoft.com/office/drawing/2014/main" id="{F76110E0-FE78-4B3A-89DD-18D328209B35}"/>
               </a:ext>
             </a:extLst>
           </p:cNvPr>
@@ -30324,7 +30324,7 @@
           <p:cNvPr id="11" name="TextBox 10">
             <a:extLst xmlns:a="http://schemas.openxmlformats.org/drawingml/2006/main">
               <a:ext uri="{FF2B5EF4-FFF2-40B4-BE49-F238E27FC236}">
-                <a16:creationId xmlns:a16="http://schemas.microsoft.com/office/drawing/2014/main" id="{E8571A7E-E50A-44D1-938F-23AE75C0DD7C}"/>
+                <a16:creationId xmlns:a16="http://schemas.microsoft.com/office/drawing/2014/main" id="{AC010399-90D6-4E96-964B-F831D71DEF09}"/>
               </a:ext>
             </a:extLst>
           </p:cNvPr>
@@ -30371,7 +30371,7 @@
           <p:cNvPr id="12" name="TextBox 11">
             <a:extLst xmlns:a="http://schemas.openxmlformats.org/drawingml/2006/main">
               <a:ext uri="{FF2B5EF4-FFF2-40B4-BE49-F238E27FC236}">
-                <a16:creationId xmlns:a16="http://schemas.microsoft.com/office/drawing/2014/main" id="{1D6030E3-D80B-4C5F-8EEE-97EC14A87DF6}"/>
+                <a16:creationId xmlns:a16="http://schemas.microsoft.com/office/drawing/2014/main" id="{E01322FD-79E2-46CA-9F58-FA2D2960A4E8}"/>
               </a:ext>
             </a:extLst>
           </p:cNvPr>
@@ -30416,7 +30416,7 @@
     </p:spTree>
     <p:extLst>
       <p:ext uri="{BB962C8B-B14F-4D97-AF65-F5344CB8AC3E}">
-        <p14:creationId xmlns:p14="http://schemas.microsoft.com/office/powerpoint/2010/main" val="759041312"/>
+        <p14:creationId xmlns:p14="http://schemas.microsoft.com/office/powerpoint/2010/main" val="903009505"/>
       </p:ext>
     </p:extLst>
   </p:cSld>
@@ -30440,7 +30440,7 @@
           <p:cNvPr id="2" name="TextBox 1">
             <a:extLst xmlns:a="http://schemas.openxmlformats.org/drawingml/2006/main">
               <a:ext uri="{FF2B5EF4-FFF2-40B4-BE49-F238E27FC236}">
-                <a16:creationId xmlns:a16="http://schemas.microsoft.com/office/drawing/2014/main" id="{39EBEE27-5E50-448D-9925-3D74EAE42FD0}"/>
+                <a16:creationId xmlns:a16="http://schemas.microsoft.com/office/drawing/2014/main" id="{259B88CE-5C80-42B6-81C1-400428D1D7D3}"/>
               </a:ext>
             </a:extLst>
           </p:cNvPr>
@@ -30487,7 +30487,7 @@
           <p:cNvPr id="3" name="TextBox 2">
             <a:extLst xmlns:a="http://schemas.openxmlformats.org/drawingml/2006/main">
               <a:ext uri="{FF2B5EF4-FFF2-40B4-BE49-F238E27FC236}">
-                <a16:creationId xmlns:a16="http://schemas.microsoft.com/office/drawing/2014/main" id="{B94AA2D1-15FF-42AB-B7DF-A574230B42A2}"/>
+                <a16:creationId xmlns:a16="http://schemas.microsoft.com/office/drawing/2014/main" id="{5B190542-4D5E-41B5-8D4A-F810CBFA4DA7}"/>
               </a:ext>
             </a:extLst>
           </p:cNvPr>
@@ -30534,7 +30534,7 @@
           <p:cNvPr id="4" name="Rectangle 3">
             <a:extLst xmlns:a="http://schemas.openxmlformats.org/drawingml/2006/main">
               <a:ext uri="{FF2B5EF4-FFF2-40B4-BE49-F238E27FC236}">
-                <a16:creationId xmlns:a16="http://schemas.microsoft.com/office/drawing/2014/main" id="{CBD0E055-739B-4BF4-B9AC-968A8AB5A48F}"/>
+                <a16:creationId xmlns:a16="http://schemas.microsoft.com/office/drawing/2014/main" id="{BD2CFCDF-1578-4176-8BE9-03017F028EDE}"/>
               </a:ext>
             </a:extLst>
           </p:cNvPr>
@@ -30589,7 +30589,7 @@
           <p:cNvPr id="5" name="Rectangle 4">
             <a:extLst xmlns:a="http://schemas.openxmlformats.org/drawingml/2006/main">
               <a:ext uri="{FF2B5EF4-FFF2-40B4-BE49-F238E27FC236}">
-                <a16:creationId xmlns:a16="http://schemas.microsoft.com/office/drawing/2014/main" id="{04A894D0-907A-42B0-9634-B731B375D2BA}"/>
+                <a16:creationId xmlns:a16="http://schemas.microsoft.com/office/drawing/2014/main" id="{531B7965-3E15-4CDD-9D54-0ED06B1C6127}"/>
               </a:ext>
             </a:extLst>
           </p:cNvPr>
@@ -30644,7 +30644,7 @@
           <p:cNvPr id="6" name="TextBox 5">
             <a:extLst xmlns:a="http://schemas.openxmlformats.org/drawingml/2006/main">
               <a:ext uri="{FF2B5EF4-FFF2-40B4-BE49-F238E27FC236}">
-                <a16:creationId xmlns:a16="http://schemas.microsoft.com/office/drawing/2014/main" id="{EFE302CF-E220-405A-AAD0-B89B4B19E3A2}"/>
+                <a16:creationId xmlns:a16="http://schemas.microsoft.com/office/drawing/2014/main" id="{EDCB41CE-8E38-49D7-81E2-F9A8CCCD380C}"/>
               </a:ext>
             </a:extLst>
           </p:cNvPr>
@@ -30681,7 +30681,7 @@
                 <a:ea typeface="Aptos"/>
                 <a:cs typeface="Aptos"/>
               </a:rPr>
-              <a:t>Julkinen riippumaton evidenssikooste · 2026.07.24-20 · 2026-07-24 · Lähteet: EP3032975B2</a:t>
+              <a:t>Julkinen riippumaton evidenssikooste · 2026.07.24-21 · 2026-07-24 · Lähteet: EP3032975B2</a:t>
             </a:r>
           </a:p>
         </p:txBody>
@@ -30691,7 +30691,7 @@
           <p:cNvPr id="7" name="TextBox 6">
             <a:extLst xmlns:a="http://schemas.openxmlformats.org/drawingml/2006/main">
               <a:ext uri="{FF2B5EF4-FFF2-40B4-BE49-F238E27FC236}">
-                <a16:creationId xmlns:a16="http://schemas.microsoft.com/office/drawing/2014/main" id="{C22104D4-F4E1-48DC-AE68-0D4C44BE7218}"/>
+                <a16:creationId xmlns:a16="http://schemas.microsoft.com/office/drawing/2014/main" id="{408BDDD1-9A8E-4997-BA87-C69569E73F68}"/>
               </a:ext>
             </a:extLst>
           </p:cNvPr>
@@ -30738,7 +30738,7 @@
           <p:cNvPr id="8" name="TextBox 7">
             <a:extLst xmlns:a="http://schemas.openxmlformats.org/drawingml/2006/main">
               <a:ext uri="{FF2B5EF4-FFF2-40B4-BE49-F238E27FC236}">
-                <a16:creationId xmlns:a16="http://schemas.microsoft.com/office/drawing/2014/main" id="{7BAF1E44-C9BB-4F93-BCBF-C39432688B46}"/>
+                <a16:creationId xmlns:a16="http://schemas.microsoft.com/office/drawing/2014/main" id="{8AB21CD8-965F-4A06-9FD3-9533411FECCB}"/>
               </a:ext>
             </a:extLst>
           </p:cNvPr>
@@ -30785,7 +30785,7 @@
           <p:cNvPr id="9" name="TextBox 8">
             <a:extLst xmlns:a="http://schemas.openxmlformats.org/drawingml/2006/main">
               <a:ext uri="{FF2B5EF4-FFF2-40B4-BE49-F238E27FC236}">
-                <a16:creationId xmlns:a16="http://schemas.microsoft.com/office/drawing/2014/main" id="{E8E29D9D-F863-4859-8279-FDC4AFD80043}"/>
+                <a16:creationId xmlns:a16="http://schemas.microsoft.com/office/drawing/2014/main" id="{7382AD49-F66A-4FBD-9242-39BE4F0C9ABC}"/>
               </a:ext>
             </a:extLst>
           </p:cNvPr>
@@ -30882,7 +30882,7 @@
           <p:cNvPr id="10" name="Rounded Rectangle 9">
             <a:extLst xmlns:a="http://schemas.openxmlformats.org/drawingml/2006/main">
               <a:ext uri="{FF2B5EF4-FFF2-40B4-BE49-F238E27FC236}">
-                <a16:creationId xmlns:a16="http://schemas.microsoft.com/office/drawing/2014/main" id="{B881E9BB-05CF-47AC-B373-F9FE08F9A84B}"/>
+                <a16:creationId xmlns:a16="http://schemas.microsoft.com/office/drawing/2014/main" id="{B37115C4-D03C-44B1-A0F2-21BC3A1F5D7F}"/>
               </a:ext>
             </a:extLst>
           </p:cNvPr>
@@ -30939,7 +30939,7 @@
           <p:cNvPr id="11" name="TextBox 10">
             <a:extLst xmlns:a="http://schemas.openxmlformats.org/drawingml/2006/main">
               <a:ext uri="{FF2B5EF4-FFF2-40B4-BE49-F238E27FC236}">
-                <a16:creationId xmlns:a16="http://schemas.microsoft.com/office/drawing/2014/main" id="{5797EE86-5F89-4C1F-8277-2BA7D1ACDF8D}"/>
+                <a16:creationId xmlns:a16="http://schemas.microsoft.com/office/drawing/2014/main" id="{03C49F30-08C1-4690-ABF5-7C7BD46A4BA2}"/>
               </a:ext>
             </a:extLst>
           </p:cNvPr>
@@ -30986,7 +30986,7 @@
           <p:cNvPr id="12" name="TextBox 11">
             <a:extLst xmlns:a="http://schemas.openxmlformats.org/drawingml/2006/main">
               <a:ext uri="{FF2B5EF4-FFF2-40B4-BE49-F238E27FC236}">
-                <a16:creationId xmlns:a16="http://schemas.microsoft.com/office/drawing/2014/main" id="{6D271C89-319E-424D-A451-BC75D54C1542}"/>
+                <a16:creationId xmlns:a16="http://schemas.microsoft.com/office/drawing/2014/main" id="{A6DD8BCD-C505-44F0-9385-18116FB90385}"/>
               </a:ext>
             </a:extLst>
           </p:cNvPr>
@@ -31031,7 +31031,7 @@
     </p:spTree>
     <p:extLst>
       <p:ext uri="{BB962C8B-B14F-4D97-AF65-F5344CB8AC3E}">
-        <p14:creationId xmlns:p14="http://schemas.microsoft.com/office/powerpoint/2010/main" val="992762806"/>
+        <p14:creationId xmlns:p14="http://schemas.microsoft.com/office/powerpoint/2010/main" val="1516849897"/>
       </p:ext>
     </p:extLst>
   </p:cSld>
@@ -31055,7 +31055,7 @@
           <p:cNvPr id="2" name="TextBox 1">
             <a:extLst xmlns:a="http://schemas.openxmlformats.org/drawingml/2006/main">
               <a:ext uri="{FF2B5EF4-FFF2-40B4-BE49-F238E27FC236}">
-                <a16:creationId xmlns:a16="http://schemas.microsoft.com/office/drawing/2014/main" id="{5DB23D99-53F3-47DE-A128-CCFEDD17358C}"/>
+                <a16:creationId xmlns:a16="http://schemas.microsoft.com/office/drawing/2014/main" id="{48721CBA-6A42-4212-B1D0-1D6CA7B88DFC}"/>
               </a:ext>
             </a:extLst>
           </p:cNvPr>
@@ -31102,7 +31102,7 @@
           <p:cNvPr id="3" name="TextBox 2">
             <a:extLst xmlns:a="http://schemas.openxmlformats.org/drawingml/2006/main">
               <a:ext uri="{FF2B5EF4-FFF2-40B4-BE49-F238E27FC236}">
-                <a16:creationId xmlns:a16="http://schemas.microsoft.com/office/drawing/2014/main" id="{97AC3098-90A7-48C8-8237-906C6C682490}"/>
+                <a16:creationId xmlns:a16="http://schemas.microsoft.com/office/drawing/2014/main" id="{58FC189F-E0B5-4A66-8883-3DC994B9913E}"/>
               </a:ext>
             </a:extLst>
           </p:cNvPr>
@@ -31149,7 +31149,7 @@
           <p:cNvPr id="4" name="Rectangle 3">
             <a:extLst xmlns:a="http://schemas.openxmlformats.org/drawingml/2006/main">
               <a:ext uri="{FF2B5EF4-FFF2-40B4-BE49-F238E27FC236}">
-                <a16:creationId xmlns:a16="http://schemas.microsoft.com/office/drawing/2014/main" id="{0F45742C-E0F2-42ED-BD56-2E9B8816BE0A}"/>
+                <a16:creationId xmlns:a16="http://schemas.microsoft.com/office/drawing/2014/main" id="{C45D7E00-72D1-40B1-AE3F-3249F71F6F3C}"/>
               </a:ext>
             </a:extLst>
           </p:cNvPr>
@@ -31204,7 +31204,7 @@
           <p:cNvPr id="5" name="Rectangle 4">
             <a:extLst xmlns:a="http://schemas.openxmlformats.org/drawingml/2006/main">
               <a:ext uri="{FF2B5EF4-FFF2-40B4-BE49-F238E27FC236}">
-                <a16:creationId xmlns:a16="http://schemas.microsoft.com/office/drawing/2014/main" id="{2AD447A0-998F-4ED7-A823-ADB3BC22BAE3}"/>
+                <a16:creationId xmlns:a16="http://schemas.microsoft.com/office/drawing/2014/main" id="{D2572B79-C3FF-4FBA-98BD-46CD429884ED}"/>
               </a:ext>
             </a:extLst>
           </p:cNvPr>
@@ -31259,7 +31259,7 @@
           <p:cNvPr id="6" name="TextBox 5">
             <a:extLst xmlns:a="http://schemas.openxmlformats.org/drawingml/2006/main">
               <a:ext uri="{FF2B5EF4-FFF2-40B4-BE49-F238E27FC236}">
-                <a16:creationId xmlns:a16="http://schemas.microsoft.com/office/drawing/2014/main" id="{62E41758-94C8-4255-8B6E-96AF94B5B7A4}"/>
+                <a16:creationId xmlns:a16="http://schemas.microsoft.com/office/drawing/2014/main" id="{54264035-626C-410B-885C-71936351D4CD}"/>
               </a:ext>
             </a:extLst>
           </p:cNvPr>
@@ -31296,7 +31296,7 @@
                 <a:ea typeface="Aptos"/>
                 <a:cs typeface="Aptos"/>
               </a:rPr>
-              <a:t>Julkinen riippumaton evidenssikooste · 2026.07.24-20 · 2026-07-24 · Lähteet: EP3032975B2</a:t>
+              <a:t>Julkinen riippumaton evidenssikooste · 2026.07.24-21 · 2026-07-24 · Lähteet: EP3032975B2</a:t>
             </a:r>
           </a:p>
         </p:txBody>
@@ -31306,7 +31306,7 @@
           <p:cNvPr id="7" name="TextBox 6">
             <a:extLst xmlns:a="http://schemas.openxmlformats.org/drawingml/2006/main">
               <a:ext uri="{FF2B5EF4-FFF2-40B4-BE49-F238E27FC236}">
-                <a16:creationId xmlns:a16="http://schemas.microsoft.com/office/drawing/2014/main" id="{0F632F4E-7B9E-47E5-B378-B430A218DF54}"/>
+                <a16:creationId xmlns:a16="http://schemas.microsoft.com/office/drawing/2014/main" id="{1B9F430C-331D-4E27-8B98-9F9E89BD6C64}"/>
               </a:ext>
             </a:extLst>
           </p:cNvPr>
@@ -31876,7 +31876,7 @@
           <p:cNvPr id="9" name="TextBox 8">
             <a:extLst xmlns:a="http://schemas.openxmlformats.org/drawingml/2006/main">
               <a:ext uri="{FF2B5EF4-FFF2-40B4-BE49-F238E27FC236}">
-                <a16:creationId xmlns:a16="http://schemas.microsoft.com/office/drawing/2014/main" id="{E32A536A-0EA5-48D5-87ED-0218428E3667}"/>
+                <a16:creationId xmlns:a16="http://schemas.microsoft.com/office/drawing/2014/main" id="{7FE63E0E-A828-42D1-9130-842D1E057E84}"/>
               </a:ext>
             </a:extLst>
           </p:cNvPr>
@@ -31921,7 +31921,7 @@
     </p:spTree>
     <p:extLst>
       <p:ext uri="{BB962C8B-B14F-4D97-AF65-F5344CB8AC3E}">
-        <p14:creationId xmlns:p14="http://schemas.microsoft.com/office/powerpoint/2010/main" val="1245783480"/>
+        <p14:creationId xmlns:p14="http://schemas.microsoft.com/office/powerpoint/2010/main" val="1194872912"/>
       </p:ext>
     </p:extLst>
   </p:cSld>
@@ -31945,7 +31945,7 @@
           <p:cNvPr id="2" name="TextBox 1">
             <a:extLst xmlns:a="http://schemas.openxmlformats.org/drawingml/2006/main">
               <a:ext uri="{FF2B5EF4-FFF2-40B4-BE49-F238E27FC236}">
-                <a16:creationId xmlns:a16="http://schemas.microsoft.com/office/drawing/2014/main" id="{4698E276-6AEB-43A0-9CBC-87FDBBAB5FD5}"/>
+                <a16:creationId xmlns:a16="http://schemas.microsoft.com/office/drawing/2014/main" id="{6465F04C-0B5A-4630-A957-0D290FA05701}"/>
               </a:ext>
             </a:extLst>
           </p:cNvPr>
@@ -31992,7 +31992,7 @@
           <p:cNvPr id="3" name="TextBox 2">
             <a:extLst xmlns:a="http://schemas.openxmlformats.org/drawingml/2006/main">
               <a:ext uri="{FF2B5EF4-FFF2-40B4-BE49-F238E27FC236}">
-                <a16:creationId xmlns:a16="http://schemas.microsoft.com/office/drawing/2014/main" id="{5898BAE3-4A0C-45EF-9F00-99D89AE3E4E9}"/>
+                <a16:creationId xmlns:a16="http://schemas.microsoft.com/office/drawing/2014/main" id="{EBC2225E-5854-4666-96CB-4199AF9BFB7D}"/>
               </a:ext>
             </a:extLst>
           </p:cNvPr>
@@ -32039,7 +32039,7 @@
           <p:cNvPr id="4" name="Rectangle 3">
             <a:extLst xmlns:a="http://schemas.openxmlformats.org/drawingml/2006/main">
               <a:ext uri="{FF2B5EF4-FFF2-40B4-BE49-F238E27FC236}">
-                <a16:creationId xmlns:a16="http://schemas.microsoft.com/office/drawing/2014/main" id="{A2BEE312-AE35-4A12-89BB-F59D49B5D97B}"/>
+                <a16:creationId xmlns:a16="http://schemas.microsoft.com/office/drawing/2014/main" id="{B6DF0B53-A9F5-4CF2-91A0-E573062D2BCB}"/>
               </a:ext>
             </a:extLst>
           </p:cNvPr>
@@ -32094,7 +32094,7 @@
           <p:cNvPr id="5" name="Rectangle 4">
             <a:extLst xmlns:a="http://schemas.openxmlformats.org/drawingml/2006/main">
               <a:ext uri="{FF2B5EF4-FFF2-40B4-BE49-F238E27FC236}">
-                <a16:creationId xmlns:a16="http://schemas.microsoft.com/office/drawing/2014/main" id="{7F8E21BE-9638-4365-9CFD-9733CC917143}"/>
+                <a16:creationId xmlns:a16="http://schemas.microsoft.com/office/drawing/2014/main" id="{EC64255E-9C88-4CA5-BA61-29EA1A9800C3}"/>
               </a:ext>
             </a:extLst>
           </p:cNvPr>
@@ -32149,7 +32149,7 @@
           <p:cNvPr id="6" name="TextBox 5">
             <a:extLst xmlns:a="http://schemas.openxmlformats.org/drawingml/2006/main">
               <a:ext uri="{FF2B5EF4-FFF2-40B4-BE49-F238E27FC236}">
-                <a16:creationId xmlns:a16="http://schemas.microsoft.com/office/drawing/2014/main" id="{6152B4FE-EB5E-433D-9EBD-B19D8F3B8CDA}"/>
+                <a16:creationId xmlns:a16="http://schemas.microsoft.com/office/drawing/2014/main" id="{9E6D98D5-39C5-43C5-9BFD-6BB5EF7A345F}"/>
               </a:ext>
             </a:extLst>
           </p:cNvPr>
@@ -32186,7 +32186,7 @@
                 <a:ea typeface="Aptos"/>
                 <a:cs typeface="Aptos"/>
               </a:rPr>
-              <a:t>Julkinen riippumaton evidenssikooste · 2026.07.24-20 · 2026-07-24 · Lähteet: EPO Register; B2</a:t>
+              <a:t>Julkinen riippumaton evidenssikooste · 2026.07.24-21 · 2026-07-24 · Lähteet: EPO Register; B2</a:t>
             </a:r>
           </a:p>
         </p:txBody>
@@ -32196,7 +32196,7 @@
           <p:cNvPr id="7" name="TextBox 6">
             <a:extLst xmlns:a="http://schemas.openxmlformats.org/drawingml/2006/main">
               <a:ext uri="{FF2B5EF4-FFF2-40B4-BE49-F238E27FC236}">
-                <a16:creationId xmlns:a16="http://schemas.microsoft.com/office/drawing/2014/main" id="{3DDC4FF6-A6A2-474C-B608-08507286C318}"/>
+                <a16:creationId xmlns:a16="http://schemas.microsoft.com/office/drawing/2014/main" id="{B167995E-31D3-42B4-936C-6744A51386BE}"/>
               </a:ext>
             </a:extLst>
           </p:cNvPr>
@@ -32243,7 +32243,7 @@
           <p:cNvPr id="8" name="Rounded Rectangle 7">
             <a:extLst xmlns:a="http://schemas.openxmlformats.org/drawingml/2006/main">
               <a:ext uri="{FF2B5EF4-FFF2-40B4-BE49-F238E27FC236}">
-                <a16:creationId xmlns:a16="http://schemas.microsoft.com/office/drawing/2014/main" id="{56C87431-07C6-4E1E-A482-C3955D1BEA47}"/>
+                <a16:creationId xmlns:a16="http://schemas.microsoft.com/office/drawing/2014/main" id="{5D7A9C57-D0D7-499A-9E86-4CCE1AE95511}"/>
               </a:ext>
             </a:extLst>
           </p:cNvPr>
@@ -32300,7 +32300,7 @@
           <p:cNvPr id="9" name="TextBox 8">
             <a:extLst xmlns:a="http://schemas.openxmlformats.org/drawingml/2006/main">
               <a:ext uri="{FF2B5EF4-FFF2-40B4-BE49-F238E27FC236}">
-                <a16:creationId xmlns:a16="http://schemas.microsoft.com/office/drawing/2014/main" id="{C2D39CFD-7301-4E70-B364-A6E99D7ED306}"/>
+                <a16:creationId xmlns:a16="http://schemas.microsoft.com/office/drawing/2014/main" id="{1A529827-83CA-4726-B3DF-F2D4F1C0118A}"/>
               </a:ext>
             </a:extLst>
           </p:cNvPr>
@@ -32347,7 +32347,7 @@
           <p:cNvPr id="10" name="TextBox 9">
             <a:extLst xmlns:a="http://schemas.openxmlformats.org/drawingml/2006/main">
               <a:ext uri="{FF2B5EF4-FFF2-40B4-BE49-F238E27FC236}">
-                <a16:creationId xmlns:a16="http://schemas.microsoft.com/office/drawing/2014/main" id="{173615FC-8A0F-4351-AD81-01DAD6E7A2F2}"/>
+                <a16:creationId xmlns:a16="http://schemas.microsoft.com/office/drawing/2014/main" id="{386B258D-CC7B-4BA6-A95F-7236D7D82E57}"/>
               </a:ext>
             </a:extLst>
           </p:cNvPr>
@@ -32394,7 +32394,7 @@
           <p:cNvPr id="11" name="Rounded Rectangle 10">
             <a:extLst xmlns:a="http://schemas.openxmlformats.org/drawingml/2006/main">
               <a:ext uri="{FF2B5EF4-FFF2-40B4-BE49-F238E27FC236}">
-                <a16:creationId xmlns:a16="http://schemas.microsoft.com/office/drawing/2014/main" id="{958A4790-829D-4EA9-AE7A-8633370E6F09}"/>
+                <a16:creationId xmlns:a16="http://schemas.microsoft.com/office/drawing/2014/main" id="{D5CF2187-AFAE-45DE-8B01-F38AA8C74FA5}"/>
               </a:ext>
             </a:extLst>
           </p:cNvPr>
@@ -32451,7 +32451,7 @@
           <p:cNvPr id="12" name="TextBox 11">
             <a:extLst xmlns:a="http://schemas.openxmlformats.org/drawingml/2006/main">
               <a:ext uri="{FF2B5EF4-FFF2-40B4-BE49-F238E27FC236}">
-                <a16:creationId xmlns:a16="http://schemas.microsoft.com/office/drawing/2014/main" id="{A2B4F0FD-BE72-491A-BFB5-2983606B97EF}"/>
+                <a16:creationId xmlns:a16="http://schemas.microsoft.com/office/drawing/2014/main" id="{1BFFF249-1D50-42FF-BDBE-DE0239170FCB}"/>
               </a:ext>
             </a:extLst>
           </p:cNvPr>
@@ -32498,7 +32498,7 @@
           <p:cNvPr id="13" name="TextBox 12">
             <a:extLst xmlns:a="http://schemas.openxmlformats.org/drawingml/2006/main">
               <a:ext uri="{FF2B5EF4-FFF2-40B4-BE49-F238E27FC236}">
-                <a16:creationId xmlns:a16="http://schemas.microsoft.com/office/drawing/2014/main" id="{01583D7E-18B4-4FED-B0A1-F528A38CC332}"/>
+                <a16:creationId xmlns:a16="http://schemas.microsoft.com/office/drawing/2014/main" id="{06A2E6CA-870E-4190-9C44-5A1F9BB6650D}"/>
               </a:ext>
             </a:extLst>
           </p:cNvPr>
@@ -32545,7 +32545,7 @@
           <p:cNvPr id="14" name="Rounded Rectangle 13">
             <a:extLst xmlns:a="http://schemas.openxmlformats.org/drawingml/2006/main">
               <a:ext uri="{FF2B5EF4-FFF2-40B4-BE49-F238E27FC236}">
-                <a16:creationId xmlns:a16="http://schemas.microsoft.com/office/drawing/2014/main" id="{C9A71C59-CC37-4FEE-95B7-4AAFF9E968C0}"/>
+                <a16:creationId xmlns:a16="http://schemas.microsoft.com/office/drawing/2014/main" id="{B470D3CA-910A-4AE9-9309-9DEA126F1FDD}"/>
               </a:ext>
             </a:extLst>
           </p:cNvPr>
@@ -32602,7 +32602,7 @@
           <p:cNvPr id="15" name="TextBox 14">
             <a:extLst xmlns:a="http://schemas.openxmlformats.org/drawingml/2006/main">
               <a:ext uri="{FF2B5EF4-FFF2-40B4-BE49-F238E27FC236}">
-                <a16:creationId xmlns:a16="http://schemas.microsoft.com/office/drawing/2014/main" id="{66FEF3C7-2811-4896-8731-FB384DD17CA0}"/>
+                <a16:creationId xmlns:a16="http://schemas.microsoft.com/office/drawing/2014/main" id="{F9E0A2EA-27AA-490E-B044-3A39A1DE5A00}"/>
               </a:ext>
             </a:extLst>
           </p:cNvPr>
@@ -32649,7 +32649,7 @@
           <p:cNvPr id="16" name="TextBox 15">
             <a:extLst xmlns:a="http://schemas.openxmlformats.org/drawingml/2006/main">
               <a:ext uri="{FF2B5EF4-FFF2-40B4-BE49-F238E27FC236}">
-                <a16:creationId xmlns:a16="http://schemas.microsoft.com/office/drawing/2014/main" id="{BA0AEE86-8CC1-46D6-9666-F253288AFE33}"/>
+                <a16:creationId xmlns:a16="http://schemas.microsoft.com/office/drawing/2014/main" id="{9759E402-202A-403A-91BF-EF20D7F8C8A4}"/>
               </a:ext>
             </a:extLst>
           </p:cNvPr>
@@ -32696,7 +32696,7 @@
           <p:cNvPr id="17" name="TextBox 16">
             <a:extLst xmlns:a="http://schemas.openxmlformats.org/drawingml/2006/main">
               <a:ext uri="{FF2B5EF4-FFF2-40B4-BE49-F238E27FC236}">
-                <a16:creationId xmlns:a16="http://schemas.microsoft.com/office/drawing/2014/main" id="{AC52F217-5C33-4C62-9985-36FF44900A1B}"/>
+                <a16:creationId xmlns:a16="http://schemas.microsoft.com/office/drawing/2014/main" id="{E9829A0B-3B16-4C0C-A428-00D5E9042E18}"/>
               </a:ext>
             </a:extLst>
           </p:cNvPr>
@@ -32743,7 +32743,7 @@
           <p:cNvPr id="18" name="Rounded Rectangle 17">
             <a:extLst xmlns:a="http://schemas.openxmlformats.org/drawingml/2006/main">
               <a:ext uri="{FF2B5EF4-FFF2-40B4-BE49-F238E27FC236}">
-                <a16:creationId xmlns:a16="http://schemas.microsoft.com/office/drawing/2014/main" id="{5AFCC17A-6F0B-44D1-924B-7CB5480D8E0E}"/>
+                <a16:creationId xmlns:a16="http://schemas.microsoft.com/office/drawing/2014/main" id="{9172BE7F-71F3-4F1E-909F-35B7CEBE8512}"/>
               </a:ext>
             </a:extLst>
           </p:cNvPr>
@@ -32800,7 +32800,7 @@
           <p:cNvPr id="19" name="TextBox 18">
             <a:extLst xmlns:a="http://schemas.openxmlformats.org/drawingml/2006/main">
               <a:ext uri="{FF2B5EF4-FFF2-40B4-BE49-F238E27FC236}">
-                <a16:creationId xmlns:a16="http://schemas.microsoft.com/office/drawing/2014/main" id="{E50B45C2-64C2-4118-AA05-4C183372B813}"/>
+                <a16:creationId xmlns:a16="http://schemas.microsoft.com/office/drawing/2014/main" id="{F5753ADA-6389-4CDB-861B-E35302497133}"/>
               </a:ext>
             </a:extLst>
           </p:cNvPr>
@@ -32847,7 +32847,7 @@
           <p:cNvPr id="20" name="TextBox 19">
             <a:extLst xmlns:a="http://schemas.openxmlformats.org/drawingml/2006/main">
               <a:ext uri="{FF2B5EF4-FFF2-40B4-BE49-F238E27FC236}">
-                <a16:creationId xmlns:a16="http://schemas.microsoft.com/office/drawing/2014/main" id="{BC38900F-1F90-4C1F-84CA-8EB1A07F8A6C}"/>
+                <a16:creationId xmlns:a16="http://schemas.microsoft.com/office/drawing/2014/main" id="{97C91CC8-B35D-4891-B18B-0528E19E913C}"/>
               </a:ext>
             </a:extLst>
           </p:cNvPr>
@@ -32892,7 +32892,7 @@
     </p:spTree>
     <p:extLst>
       <p:ext uri="{BB962C8B-B14F-4D97-AF65-F5344CB8AC3E}">
-        <p14:creationId xmlns:p14="http://schemas.microsoft.com/office/powerpoint/2010/main" val="1120266598"/>
+        <p14:creationId xmlns:p14="http://schemas.microsoft.com/office/powerpoint/2010/main" val="136383274"/>
       </p:ext>
     </p:extLst>
   </p:cSld>
@@ -32916,7 +32916,7 @@
           <p:cNvPr id="2" name="TextBox 1">
             <a:extLst xmlns:a="http://schemas.openxmlformats.org/drawingml/2006/main">
               <a:ext uri="{FF2B5EF4-FFF2-40B4-BE49-F238E27FC236}">
-                <a16:creationId xmlns:a16="http://schemas.microsoft.com/office/drawing/2014/main" id="{727FD32D-8E22-4A3B-A213-DB412565DDF0}"/>
+                <a16:creationId xmlns:a16="http://schemas.microsoft.com/office/drawing/2014/main" id="{E873A9E4-A875-4B7B-B7E3-5678C8B95D1C}"/>
               </a:ext>
             </a:extLst>
           </p:cNvPr>
@@ -32963,7 +32963,7 @@
           <p:cNvPr id="3" name="TextBox 2">
             <a:extLst xmlns:a="http://schemas.openxmlformats.org/drawingml/2006/main">
               <a:ext uri="{FF2B5EF4-FFF2-40B4-BE49-F238E27FC236}">
-                <a16:creationId xmlns:a16="http://schemas.microsoft.com/office/drawing/2014/main" id="{A81A6B31-F4D7-4B82-A4BA-C0F13BF6E090}"/>
+                <a16:creationId xmlns:a16="http://schemas.microsoft.com/office/drawing/2014/main" id="{853CD2E5-041E-45E2-907C-0C22CBF84CEA}"/>
               </a:ext>
             </a:extLst>
           </p:cNvPr>
@@ -33010,7 +33010,7 @@
           <p:cNvPr id="4" name="Rectangle 3">
             <a:extLst xmlns:a="http://schemas.openxmlformats.org/drawingml/2006/main">
               <a:ext uri="{FF2B5EF4-FFF2-40B4-BE49-F238E27FC236}">
-                <a16:creationId xmlns:a16="http://schemas.microsoft.com/office/drawing/2014/main" id="{4F9CC23B-85AA-493E-ACCD-AF6FC350DC98}"/>
+                <a16:creationId xmlns:a16="http://schemas.microsoft.com/office/drawing/2014/main" id="{FA5DB2A9-7F83-451F-89DC-2E4FCA670F83}"/>
               </a:ext>
             </a:extLst>
           </p:cNvPr>
@@ -33065,7 +33065,7 @@
           <p:cNvPr id="5" name="Rectangle 4">
             <a:extLst xmlns:a="http://schemas.openxmlformats.org/drawingml/2006/main">
               <a:ext uri="{FF2B5EF4-FFF2-40B4-BE49-F238E27FC236}">
-                <a16:creationId xmlns:a16="http://schemas.microsoft.com/office/drawing/2014/main" id="{F6011ABB-677E-4E7C-860C-4380287B1440}"/>
+                <a16:creationId xmlns:a16="http://schemas.microsoft.com/office/drawing/2014/main" id="{E31EDECC-F90A-4EC3-93A8-F465FD5D3CAD}"/>
               </a:ext>
             </a:extLst>
           </p:cNvPr>
@@ -33120,7 +33120,7 @@
           <p:cNvPr id="6" name="TextBox 5">
             <a:extLst xmlns:a="http://schemas.openxmlformats.org/drawingml/2006/main">
               <a:ext uri="{FF2B5EF4-FFF2-40B4-BE49-F238E27FC236}">
-                <a16:creationId xmlns:a16="http://schemas.microsoft.com/office/drawing/2014/main" id="{9928DC17-E959-47F1-B7E0-F7AA1D295997}"/>
+                <a16:creationId xmlns:a16="http://schemas.microsoft.com/office/drawing/2014/main" id="{D66DF376-EFBF-4F9B-98A8-93A7406C0F89}"/>
               </a:ext>
             </a:extLst>
           </p:cNvPr>
@@ -33157,7 +33157,7 @@
                 <a:ea typeface="Aptos"/>
                 <a:cs typeface="Aptos"/>
               </a:rPr>
-              <a:t>Julkinen riippumaton evidenssikooste · 2026.07.24-20 · 2026-07-24 · Lähteet: EPO family; kansalliset rekisterit</a:t>
+              <a:t>Julkinen riippumaton evidenssikooste · 2026.07.24-21 · 2026-07-24 · Lähteet: EPO family; kansalliset rekisterit</a:t>
             </a:r>
           </a:p>
         </p:txBody>
@@ -33167,7 +33167,7 @@
           <p:cNvPr id="7" name="TextBox 6">
             <a:extLst xmlns:a="http://schemas.openxmlformats.org/drawingml/2006/main">
               <a:ext uri="{FF2B5EF4-FFF2-40B4-BE49-F238E27FC236}">
-                <a16:creationId xmlns:a16="http://schemas.microsoft.com/office/drawing/2014/main" id="{228B47BF-1072-4B6F-81C9-735BFD82AB27}"/>
+                <a16:creationId xmlns:a16="http://schemas.microsoft.com/office/drawing/2014/main" id="{734B64C1-0F9E-412B-BD3E-6E35637DE044}"/>
               </a:ext>
             </a:extLst>
           </p:cNvPr>
@@ -33214,7 +33214,7 @@
           <p:cNvPr id="8" name="Rounded Rectangle 7">
             <a:extLst xmlns:a="http://schemas.openxmlformats.org/drawingml/2006/main">
               <a:ext uri="{FF2B5EF4-FFF2-40B4-BE49-F238E27FC236}">
-                <a16:creationId xmlns:a16="http://schemas.microsoft.com/office/drawing/2014/main" id="{3F603813-0068-4F8C-8DB3-1F5E44558539}"/>
+                <a16:creationId xmlns:a16="http://schemas.microsoft.com/office/drawing/2014/main" id="{05E84225-B9AE-468E-94F9-9296C567F3D2}"/>
               </a:ext>
             </a:extLst>
           </p:cNvPr>
@@ -33271,7 +33271,7 @@
           <p:cNvPr id="9" name="TextBox 8">
             <a:extLst xmlns:a="http://schemas.openxmlformats.org/drawingml/2006/main">
               <a:ext uri="{FF2B5EF4-FFF2-40B4-BE49-F238E27FC236}">
-                <a16:creationId xmlns:a16="http://schemas.microsoft.com/office/drawing/2014/main" id="{0451FC0A-8724-4C5E-9E42-3C69CE93832E}"/>
+                <a16:creationId xmlns:a16="http://schemas.microsoft.com/office/drawing/2014/main" id="{64065BEB-0594-414B-8A31-AB3315F18C9B}"/>
               </a:ext>
             </a:extLst>
           </p:cNvPr>
@@ -33318,7 +33318,7 @@
           <p:cNvPr id="10" name="TextBox 9">
             <a:extLst xmlns:a="http://schemas.openxmlformats.org/drawingml/2006/main">
               <a:ext uri="{FF2B5EF4-FFF2-40B4-BE49-F238E27FC236}">
-                <a16:creationId xmlns:a16="http://schemas.microsoft.com/office/drawing/2014/main" id="{5634A007-5773-4FD6-B956-10F397A547C0}"/>
+                <a16:creationId xmlns:a16="http://schemas.microsoft.com/office/drawing/2014/main" id="{F417ED70-F76F-4481-A25D-7AAD142AA561}"/>
               </a:ext>
             </a:extLst>
           </p:cNvPr>
@@ -33365,7 +33365,7 @@
           <p:cNvPr id="11" name="Rounded Rectangle 10">
             <a:extLst xmlns:a="http://schemas.openxmlformats.org/drawingml/2006/main">
               <a:ext uri="{FF2B5EF4-FFF2-40B4-BE49-F238E27FC236}">
-                <a16:creationId xmlns:a16="http://schemas.microsoft.com/office/drawing/2014/main" id="{A015947F-DFDA-46EB-832A-9DCB790D3F2A}"/>
+                <a16:creationId xmlns:a16="http://schemas.microsoft.com/office/drawing/2014/main" id="{5E2EA315-23F8-4D89-B30E-C032D5BAED8E}"/>
               </a:ext>
             </a:extLst>
           </p:cNvPr>
@@ -33422,7 +33422,7 @@
           <p:cNvPr id="12" name="TextBox 11">
             <a:extLst xmlns:a="http://schemas.openxmlformats.org/drawingml/2006/main">
               <a:ext uri="{FF2B5EF4-FFF2-40B4-BE49-F238E27FC236}">
-                <a16:creationId xmlns:a16="http://schemas.microsoft.com/office/drawing/2014/main" id="{AA6DEAD5-526B-493C-A5AD-212CDCB1391A}"/>
+                <a16:creationId xmlns:a16="http://schemas.microsoft.com/office/drawing/2014/main" id="{B803C8F5-1429-473F-A9AB-FF7BA243AC64}"/>
               </a:ext>
             </a:extLst>
           </p:cNvPr>
@@ -33469,7 +33469,7 @@
           <p:cNvPr id="13" name="TextBox 12">
             <a:extLst xmlns:a="http://schemas.openxmlformats.org/drawingml/2006/main">
               <a:ext uri="{FF2B5EF4-FFF2-40B4-BE49-F238E27FC236}">
-                <a16:creationId xmlns:a16="http://schemas.microsoft.com/office/drawing/2014/main" id="{6A62BE38-4EED-4BEC-A999-A143D68024D0}"/>
+                <a16:creationId xmlns:a16="http://schemas.microsoft.com/office/drawing/2014/main" id="{426BB787-8B04-4660-B9B0-E731B5BAE93E}"/>
               </a:ext>
             </a:extLst>
           </p:cNvPr>
@@ -33516,7 +33516,7 @@
           <p:cNvPr id="14" name="Rounded Rectangle 13">
             <a:extLst xmlns:a="http://schemas.openxmlformats.org/drawingml/2006/main">
               <a:ext uri="{FF2B5EF4-FFF2-40B4-BE49-F238E27FC236}">
-                <a16:creationId xmlns:a16="http://schemas.microsoft.com/office/drawing/2014/main" id="{889C2F2D-04C2-4F00-B8CE-8646A43C7234}"/>
+                <a16:creationId xmlns:a16="http://schemas.microsoft.com/office/drawing/2014/main" id="{CEFF244C-28A5-49C1-860A-CF6CE5828647}"/>
               </a:ext>
             </a:extLst>
           </p:cNvPr>
@@ -33573,7 +33573,7 @@
           <p:cNvPr id="15" name="TextBox 14">
             <a:extLst xmlns:a="http://schemas.openxmlformats.org/drawingml/2006/main">
               <a:ext uri="{FF2B5EF4-FFF2-40B4-BE49-F238E27FC236}">
-                <a16:creationId xmlns:a16="http://schemas.microsoft.com/office/drawing/2014/main" id="{CB15AB78-8E44-4D9D-B1D1-F54577699E0D}"/>
+                <a16:creationId xmlns:a16="http://schemas.microsoft.com/office/drawing/2014/main" id="{3B93F4DC-40BD-4094-AA6B-B6FC47BB5027}"/>
               </a:ext>
             </a:extLst>
           </p:cNvPr>
@@ -33620,7 +33620,7 @@
           <p:cNvPr id="16" name="TextBox 15">
             <a:extLst xmlns:a="http://schemas.openxmlformats.org/drawingml/2006/main">
               <a:ext uri="{FF2B5EF4-FFF2-40B4-BE49-F238E27FC236}">
-                <a16:creationId xmlns:a16="http://schemas.microsoft.com/office/drawing/2014/main" id="{D028C666-1F40-4CD6-B6B0-ECF82459C22A}"/>
+                <a16:creationId xmlns:a16="http://schemas.microsoft.com/office/drawing/2014/main" id="{A5D00898-37E2-4F29-9F0F-1364B6121ADC}"/>
               </a:ext>
             </a:extLst>
           </p:cNvPr>
@@ -33667,7 +33667,7 @@
           <p:cNvPr id="17" name="Rounded Rectangle 16">
             <a:extLst xmlns:a="http://schemas.openxmlformats.org/drawingml/2006/main">
               <a:ext uri="{FF2B5EF4-FFF2-40B4-BE49-F238E27FC236}">
-                <a16:creationId xmlns:a16="http://schemas.microsoft.com/office/drawing/2014/main" id="{DB17DCFB-0673-4D3D-858A-D2CFA6FAB800}"/>
+                <a16:creationId xmlns:a16="http://schemas.microsoft.com/office/drawing/2014/main" id="{387E7A1D-34F0-42EB-B437-74E6F9DD6B34}"/>
               </a:ext>
             </a:extLst>
           </p:cNvPr>
@@ -33724,7 +33724,7 @@
           <p:cNvPr id="18" name="TextBox 17">
             <a:extLst xmlns:a="http://schemas.openxmlformats.org/drawingml/2006/main">
               <a:ext uri="{FF2B5EF4-FFF2-40B4-BE49-F238E27FC236}">
-                <a16:creationId xmlns:a16="http://schemas.microsoft.com/office/drawing/2014/main" id="{C35DFF6C-EA50-4B79-9E14-8003FF00FFC0}"/>
+                <a16:creationId xmlns:a16="http://schemas.microsoft.com/office/drawing/2014/main" id="{2B2E896E-D02F-4EAB-9165-F701C7348869}"/>
               </a:ext>
             </a:extLst>
           </p:cNvPr>
@@ -33771,7 +33771,7 @@
           <p:cNvPr id="19" name="TextBox 18">
             <a:extLst xmlns:a="http://schemas.openxmlformats.org/drawingml/2006/main">
               <a:ext uri="{FF2B5EF4-FFF2-40B4-BE49-F238E27FC236}">
-                <a16:creationId xmlns:a16="http://schemas.microsoft.com/office/drawing/2014/main" id="{2C98A2B4-D9BC-4DC0-B605-77F65A85477F}"/>
+                <a16:creationId xmlns:a16="http://schemas.microsoft.com/office/drawing/2014/main" id="{665D9723-882B-4AF4-8362-DABCA24ADD87}"/>
               </a:ext>
             </a:extLst>
           </p:cNvPr>
@@ -33818,7 +33818,7 @@
           <p:cNvPr id="20" name="TextBox 19">
             <a:extLst xmlns:a="http://schemas.openxmlformats.org/drawingml/2006/main">
               <a:ext uri="{FF2B5EF4-FFF2-40B4-BE49-F238E27FC236}">
-                <a16:creationId xmlns:a16="http://schemas.microsoft.com/office/drawing/2014/main" id="{DED57D22-D233-459F-938C-6995FD82265C}"/>
+                <a16:creationId xmlns:a16="http://schemas.microsoft.com/office/drawing/2014/main" id="{522780F9-AFC8-40C7-A9C7-40F123E2E1CD}"/>
               </a:ext>
             </a:extLst>
           </p:cNvPr>
@@ -33865,7 +33865,7 @@
           <p:cNvPr id="21" name="Rounded Rectangle 20">
             <a:extLst xmlns:a="http://schemas.openxmlformats.org/drawingml/2006/main">
               <a:ext uri="{FF2B5EF4-FFF2-40B4-BE49-F238E27FC236}">
-                <a16:creationId xmlns:a16="http://schemas.microsoft.com/office/drawing/2014/main" id="{3BFE6974-BEB8-4148-A87D-740FB7C112F4}"/>
+                <a16:creationId xmlns:a16="http://schemas.microsoft.com/office/drawing/2014/main" id="{26E9E296-16FF-44F5-8A39-A7139817B94D}"/>
               </a:ext>
             </a:extLst>
           </p:cNvPr>
@@ -33922,7 +33922,7 @@
           <p:cNvPr id="22" name="TextBox 21">
             <a:extLst xmlns:a="http://schemas.openxmlformats.org/drawingml/2006/main">
               <a:ext uri="{FF2B5EF4-FFF2-40B4-BE49-F238E27FC236}">
-                <a16:creationId xmlns:a16="http://schemas.microsoft.com/office/drawing/2014/main" id="{AC6D5ACB-CFF6-4B19-B29C-941CE09E34E7}"/>
+                <a16:creationId xmlns:a16="http://schemas.microsoft.com/office/drawing/2014/main" id="{DBEF484C-CBAF-455D-9CD1-A0CBB31C95D0}"/>
               </a:ext>
             </a:extLst>
           </p:cNvPr>
@@ -33969,7 +33969,7 @@
           <p:cNvPr id="23" name="TextBox 22">
             <a:extLst xmlns:a="http://schemas.openxmlformats.org/drawingml/2006/main">
               <a:ext uri="{FF2B5EF4-FFF2-40B4-BE49-F238E27FC236}">
-                <a16:creationId xmlns:a16="http://schemas.microsoft.com/office/drawing/2014/main" id="{8CDC4EB7-6CBC-4431-B723-DC60A12E408A}"/>
+                <a16:creationId xmlns:a16="http://schemas.microsoft.com/office/drawing/2014/main" id="{AD6E53B5-5650-4E42-9D96-1DAC386F63CF}"/>
               </a:ext>
             </a:extLst>
           </p:cNvPr>
@@ -34014,7 +34014,7 @@
     </p:spTree>
     <p:extLst>
       <p:ext uri="{BB962C8B-B14F-4D97-AF65-F5344CB8AC3E}">
-        <p14:creationId xmlns:p14="http://schemas.microsoft.com/office/powerpoint/2010/main" val="237904141"/>
+        <p14:creationId xmlns:p14="http://schemas.microsoft.com/office/powerpoint/2010/main" val="1905829500"/>
       </p:ext>
     </p:extLst>
   </p:cSld>
@@ -34038,7 +34038,7 @@
           <p:cNvPr id="2" name="TextBox 1">
             <a:extLst xmlns:a="http://schemas.openxmlformats.org/drawingml/2006/main">
               <a:ext uri="{FF2B5EF4-FFF2-40B4-BE49-F238E27FC236}">
-                <a16:creationId xmlns:a16="http://schemas.microsoft.com/office/drawing/2014/main" id="{E2B765EC-AF65-4B1F-927E-530C14F6BED9}"/>
+                <a16:creationId xmlns:a16="http://schemas.microsoft.com/office/drawing/2014/main" id="{A6DC0E55-B67A-4010-AF7A-B79B56F8ABE4}"/>
               </a:ext>
             </a:extLst>
           </p:cNvPr>
@@ -34085,7 +34085,7 @@
           <p:cNvPr id="3" name="TextBox 2">
             <a:extLst xmlns:a="http://schemas.openxmlformats.org/drawingml/2006/main">
               <a:ext uri="{FF2B5EF4-FFF2-40B4-BE49-F238E27FC236}">
-                <a16:creationId xmlns:a16="http://schemas.microsoft.com/office/drawing/2014/main" id="{0B58D49D-75DF-4434-9E02-B262F682A0DF}"/>
+                <a16:creationId xmlns:a16="http://schemas.microsoft.com/office/drawing/2014/main" id="{F11A2862-AFBE-46FB-981C-2EDA18AB7A4A}"/>
               </a:ext>
             </a:extLst>
           </p:cNvPr>
@@ -34132,7 +34132,7 @@
           <p:cNvPr id="4" name="Rectangle 3">
             <a:extLst xmlns:a="http://schemas.openxmlformats.org/drawingml/2006/main">
               <a:ext uri="{FF2B5EF4-FFF2-40B4-BE49-F238E27FC236}">
-                <a16:creationId xmlns:a16="http://schemas.microsoft.com/office/drawing/2014/main" id="{AC3C7721-B493-4EA0-A881-1C804A51DAC3}"/>
+                <a16:creationId xmlns:a16="http://schemas.microsoft.com/office/drawing/2014/main" id="{D949D7DE-6D8C-45D0-BE3B-0567DC671C8D}"/>
               </a:ext>
             </a:extLst>
           </p:cNvPr>
@@ -34187,7 +34187,7 @@
           <p:cNvPr id="5" name="Rectangle 4">
             <a:extLst xmlns:a="http://schemas.openxmlformats.org/drawingml/2006/main">
               <a:ext uri="{FF2B5EF4-FFF2-40B4-BE49-F238E27FC236}">
-                <a16:creationId xmlns:a16="http://schemas.microsoft.com/office/drawing/2014/main" id="{5E1AEE62-5DE2-4187-B939-5BA0C5F7806D}"/>
+                <a16:creationId xmlns:a16="http://schemas.microsoft.com/office/drawing/2014/main" id="{E3AF3D5B-0CBC-4DD5-8E29-8B69367DA294}"/>
               </a:ext>
             </a:extLst>
           </p:cNvPr>
@@ -34242,7 +34242,7 @@
           <p:cNvPr id="6" name="TextBox 5">
             <a:extLst xmlns:a="http://schemas.openxmlformats.org/drawingml/2006/main">
               <a:ext uri="{FF2B5EF4-FFF2-40B4-BE49-F238E27FC236}">
-                <a16:creationId xmlns:a16="http://schemas.microsoft.com/office/drawing/2014/main" id="{33998BB5-C20E-4308-9583-7C9B012D3EDC}"/>
+                <a16:creationId xmlns:a16="http://schemas.microsoft.com/office/drawing/2014/main" id="{B066F73C-C156-4EAC-ABEB-8443F47A4178}"/>
               </a:ext>
             </a:extLst>
           </p:cNvPr>
@@ -34279,7 +34279,7 @@
                 <a:ea typeface="Aptos"/>
                 <a:cs typeface="Aptos"/>
               </a:rPr>
-              <a:t>Julkinen riippumaton evidenssikooste · 2026.07.24-20 · 2026-07-24 · Lähteet: Viralliset tuomiot: 8 Ni 18/24 (EP); 7 O 3341/24</a:t>
+              <a:t>Julkinen riippumaton evidenssikooste · 2026.07.24-21 · 2026-07-24 · Lähteet: Viralliset tuomiot: 8 Ni 18/24 (EP); 7 O 3341/24</a:t>
             </a:r>
           </a:p>
         </p:txBody>
@@ -34289,7 +34289,7 @@
           <p:cNvPr id="7" name="TextBox 6">
             <a:extLst xmlns:a="http://schemas.openxmlformats.org/drawingml/2006/main">
               <a:ext uri="{FF2B5EF4-FFF2-40B4-BE49-F238E27FC236}">
-                <a16:creationId xmlns:a16="http://schemas.microsoft.com/office/drawing/2014/main" id="{E8511290-5945-4122-AF99-970EFD5B1569}"/>
+                <a16:creationId xmlns:a16="http://schemas.microsoft.com/office/drawing/2014/main" id="{FE1B6988-507E-4C2D-942E-533DD69ED298}"/>
               </a:ext>
             </a:extLst>
           </p:cNvPr>
@@ -34610,7 +34610,7 @@
           <p:cNvPr id="9" name="TextBox 8">
             <a:extLst xmlns:a="http://schemas.openxmlformats.org/drawingml/2006/main">
               <a:ext uri="{FF2B5EF4-FFF2-40B4-BE49-F238E27FC236}">
-                <a16:creationId xmlns:a16="http://schemas.microsoft.com/office/drawing/2014/main" id="{ECB26DD9-AB64-4DDF-9D16-B208063A0061}"/>
+                <a16:creationId xmlns:a16="http://schemas.microsoft.com/office/drawing/2014/main" id="{FA0B8D8D-426E-41C6-A8C0-D227B8B2D392}"/>
               </a:ext>
             </a:extLst>
           </p:cNvPr>
@@ -34655,7 +34655,7 @@
     </p:spTree>
     <p:extLst>
       <p:ext uri="{BB962C8B-B14F-4D97-AF65-F5344CB8AC3E}">
-        <p14:creationId xmlns:p14="http://schemas.microsoft.com/office/powerpoint/2010/main" val="2073455470"/>
+        <p14:creationId xmlns:p14="http://schemas.microsoft.com/office/powerpoint/2010/main" val="1841317160"/>
       </p:ext>
     </p:extLst>
   </p:cSld>

--- a/site/downloads/pixan-bank-deck-large-fi.pptx
+++ b/site/downloads/pixan-bank-deck-large-fi.pptx
@@ -2,42 +2,42 @@
 <file path=ppt/presentation.xml><?xml version="1.0" encoding="utf-8"?>
 <p:presentation xmlns:p="http://schemas.openxmlformats.org/presentationml/2006/main">
   <p:sldMasterIdLst>
-    <p:sldMasterId xmlns:r="http://schemas.openxmlformats.org/officeDocument/2006/relationships" id="2147483648" r:id="R9c894c71107042cc"/>
+    <p:sldMasterId xmlns:r="http://schemas.openxmlformats.org/officeDocument/2006/relationships" id="2147483648" r:id="R0c5737a7b1e84e05"/>
   </p:sldMasterIdLst>
   <p:notesMasterIdLst>
-    <p:notesMasterId xmlns:r="http://schemas.openxmlformats.org/officeDocument/2006/relationships" r:id="R023bc75353ca41d0"/>
+    <p:notesMasterId xmlns:r="http://schemas.openxmlformats.org/officeDocument/2006/relationships" r:id="Rd4cfd067b0724765"/>
   </p:notesMasterIdLst>
   <p:sldIdLst>
-    <p:sldId xmlns:r="http://schemas.openxmlformats.org/officeDocument/2006/relationships" id="256" r:id="R19079d2ed5f9474a"/>
-    <p:sldId xmlns:r="http://schemas.openxmlformats.org/officeDocument/2006/relationships" id="257" r:id="R6e56e127c56d49ab"/>
-    <p:sldId xmlns:r="http://schemas.openxmlformats.org/officeDocument/2006/relationships" id="258" r:id="Rea48488fd7554fc2"/>
-    <p:sldId xmlns:r="http://schemas.openxmlformats.org/officeDocument/2006/relationships" id="259" r:id="Re31b57a423f04310"/>
-    <p:sldId xmlns:r="http://schemas.openxmlformats.org/officeDocument/2006/relationships" id="260" r:id="Rfb2e39e1b8ae4d32"/>
-    <p:sldId xmlns:r="http://schemas.openxmlformats.org/officeDocument/2006/relationships" id="261" r:id="Rb1406ef8e7424af2"/>
-    <p:sldId xmlns:r="http://schemas.openxmlformats.org/officeDocument/2006/relationships" id="262" r:id="Rbcaf93e689a34247"/>
-    <p:sldId xmlns:r="http://schemas.openxmlformats.org/officeDocument/2006/relationships" id="263" r:id="R20d37395ca934cbc"/>
-    <p:sldId xmlns:r="http://schemas.openxmlformats.org/officeDocument/2006/relationships" id="264" r:id="Rfc946cb778a54794"/>
-    <p:sldId xmlns:r="http://schemas.openxmlformats.org/officeDocument/2006/relationships" id="265" r:id="R6aef8eeb5c724910"/>
-    <p:sldId xmlns:r="http://schemas.openxmlformats.org/officeDocument/2006/relationships" id="266" r:id="R643a04cb56c946e8"/>
-    <p:sldId xmlns:r="http://schemas.openxmlformats.org/officeDocument/2006/relationships" id="267" r:id="Rf80a2eb58f9a4be0"/>
-    <p:sldId xmlns:r="http://schemas.openxmlformats.org/officeDocument/2006/relationships" id="268" r:id="R5a95732c4cfb4c91"/>
-    <p:sldId xmlns:r="http://schemas.openxmlformats.org/officeDocument/2006/relationships" id="269" r:id="R133cd66d655942b3"/>
-    <p:sldId xmlns:r="http://schemas.openxmlformats.org/officeDocument/2006/relationships" id="270" r:id="R91067bf7dacb4f76"/>
-    <p:sldId xmlns:r="http://schemas.openxmlformats.org/officeDocument/2006/relationships" id="271" r:id="R878281c95461483c"/>
-    <p:sldId xmlns:r="http://schemas.openxmlformats.org/officeDocument/2006/relationships" id="272" r:id="Ra158bd4d68a84a96"/>
-    <p:sldId xmlns:r="http://schemas.openxmlformats.org/officeDocument/2006/relationships" id="273" r:id="Ra67760eb438444ff"/>
-    <p:sldId xmlns:r="http://schemas.openxmlformats.org/officeDocument/2006/relationships" id="274" r:id="R44626c82c8054ef6"/>
-    <p:sldId xmlns:r="http://schemas.openxmlformats.org/officeDocument/2006/relationships" id="275" r:id="R9a405b74c41d4ea2"/>
-    <p:sldId xmlns:r="http://schemas.openxmlformats.org/officeDocument/2006/relationships" id="276" r:id="Ra7de1744071a4065"/>
-    <p:sldId xmlns:r="http://schemas.openxmlformats.org/officeDocument/2006/relationships" id="277" r:id="Red2c48c4020d4537"/>
-    <p:sldId xmlns:r="http://schemas.openxmlformats.org/officeDocument/2006/relationships" id="278" r:id="R01bea6ec23614cdd"/>
-    <p:sldId xmlns:r="http://schemas.openxmlformats.org/officeDocument/2006/relationships" id="279" r:id="Ra7fcbe26efee4902"/>
-    <p:sldId xmlns:r="http://schemas.openxmlformats.org/officeDocument/2006/relationships" id="280" r:id="R4a07eb88a4b34d2c"/>
-    <p:sldId xmlns:r="http://schemas.openxmlformats.org/officeDocument/2006/relationships" id="281" r:id="Rd12e9198ea554274"/>
-    <p:sldId xmlns:r="http://schemas.openxmlformats.org/officeDocument/2006/relationships" id="282" r:id="Rd8917c56d4234577"/>
-    <p:sldId xmlns:r="http://schemas.openxmlformats.org/officeDocument/2006/relationships" id="283" r:id="R896d1a3d8e5b4ff5"/>
-    <p:sldId xmlns:r="http://schemas.openxmlformats.org/officeDocument/2006/relationships" id="284" r:id="R0c6024aec81547e7"/>
-    <p:sldId xmlns:r="http://schemas.openxmlformats.org/officeDocument/2006/relationships" id="285" r:id="R6be3f41cb9ad4dd3"/>
+    <p:sldId xmlns:r="http://schemas.openxmlformats.org/officeDocument/2006/relationships" id="256" r:id="R371dbc732ed347e0"/>
+    <p:sldId xmlns:r="http://schemas.openxmlformats.org/officeDocument/2006/relationships" id="257" r:id="R8cdd8686ea334103"/>
+    <p:sldId xmlns:r="http://schemas.openxmlformats.org/officeDocument/2006/relationships" id="258" r:id="Rbd4bdfc7b8444057"/>
+    <p:sldId xmlns:r="http://schemas.openxmlformats.org/officeDocument/2006/relationships" id="259" r:id="R9dfca7bde9b64adb"/>
+    <p:sldId xmlns:r="http://schemas.openxmlformats.org/officeDocument/2006/relationships" id="260" r:id="Re98fc29a0cd4457c"/>
+    <p:sldId xmlns:r="http://schemas.openxmlformats.org/officeDocument/2006/relationships" id="261" r:id="R09efbc528c91453f"/>
+    <p:sldId xmlns:r="http://schemas.openxmlformats.org/officeDocument/2006/relationships" id="262" r:id="R2380c1957a854b4e"/>
+    <p:sldId xmlns:r="http://schemas.openxmlformats.org/officeDocument/2006/relationships" id="263" r:id="Rddf650a5166745cc"/>
+    <p:sldId xmlns:r="http://schemas.openxmlformats.org/officeDocument/2006/relationships" id="264" r:id="R7f8c765a43824af1"/>
+    <p:sldId xmlns:r="http://schemas.openxmlformats.org/officeDocument/2006/relationships" id="265" r:id="R87250ebb29cc4462"/>
+    <p:sldId xmlns:r="http://schemas.openxmlformats.org/officeDocument/2006/relationships" id="266" r:id="Rdaad2013bd2e476d"/>
+    <p:sldId xmlns:r="http://schemas.openxmlformats.org/officeDocument/2006/relationships" id="267" r:id="R0ae2be033973463b"/>
+    <p:sldId xmlns:r="http://schemas.openxmlformats.org/officeDocument/2006/relationships" id="268" r:id="Rd87f1b0cc58b4538"/>
+    <p:sldId xmlns:r="http://schemas.openxmlformats.org/officeDocument/2006/relationships" id="269" r:id="Rd7f497b5a43f4ebe"/>
+    <p:sldId xmlns:r="http://schemas.openxmlformats.org/officeDocument/2006/relationships" id="270" r:id="R0291bf0c5bf748bf"/>
+    <p:sldId xmlns:r="http://schemas.openxmlformats.org/officeDocument/2006/relationships" id="271" r:id="Rd0acaade97cf4042"/>
+    <p:sldId xmlns:r="http://schemas.openxmlformats.org/officeDocument/2006/relationships" id="272" r:id="R9f5ff193a1814f2e"/>
+    <p:sldId xmlns:r="http://schemas.openxmlformats.org/officeDocument/2006/relationships" id="273" r:id="R6564aa95f44d438d"/>
+    <p:sldId xmlns:r="http://schemas.openxmlformats.org/officeDocument/2006/relationships" id="274" r:id="Rb5a1d4c07b404f44"/>
+    <p:sldId xmlns:r="http://schemas.openxmlformats.org/officeDocument/2006/relationships" id="275" r:id="R46be023ee88f4b3e"/>
+    <p:sldId xmlns:r="http://schemas.openxmlformats.org/officeDocument/2006/relationships" id="276" r:id="Rd431cf6ed4d74289"/>
+    <p:sldId xmlns:r="http://schemas.openxmlformats.org/officeDocument/2006/relationships" id="277" r:id="R8d615d29132d431e"/>
+    <p:sldId xmlns:r="http://schemas.openxmlformats.org/officeDocument/2006/relationships" id="278" r:id="Rb78d6039f47a4953"/>
+    <p:sldId xmlns:r="http://schemas.openxmlformats.org/officeDocument/2006/relationships" id="279" r:id="Rd02ca98457294c19"/>
+    <p:sldId xmlns:r="http://schemas.openxmlformats.org/officeDocument/2006/relationships" id="280" r:id="Raf6c356107a840f4"/>
+    <p:sldId xmlns:r="http://schemas.openxmlformats.org/officeDocument/2006/relationships" id="281" r:id="Rd2016a5982f4404f"/>
+    <p:sldId xmlns:r="http://schemas.openxmlformats.org/officeDocument/2006/relationships" id="282" r:id="R6b521c4d2c1a43a3"/>
+    <p:sldId xmlns:r="http://schemas.openxmlformats.org/officeDocument/2006/relationships" id="283" r:id="R864797a447684fdb"/>
+    <p:sldId xmlns:r="http://schemas.openxmlformats.org/officeDocument/2006/relationships" id="284" r:id="Rd0bb45cb067e44ab"/>
+    <p:sldId xmlns:r="http://schemas.openxmlformats.org/officeDocument/2006/relationships" id="285" r:id="R1bd5ca26e3b94ae2"/>
   </p:sldIdLst>
   <p:sldSz cx="12191999" cy="6858000"/>
   <p:notesSz cx="6858000" cy="9144000"/>
@@ -534,6 +534,11 @@
           </a:p>
           <a:p xmlns:a="http://schemas.openxmlformats.org/drawingml/2006/main">
             <a:r>
+              <a:t>- https://www.folkhalsomyndigheten.se/regler-och-tillsyn/tobak-och-nikotinprodukter-regler-for-tillverkning-handel-och-hantering/elektroniska-cigaretter-och-pafyllningsbehallare-sa-foljer-du-reglerna/</a:t>
+            </a:r>
+          </a:p>
+          <a:p xmlns:a="http://schemas.openxmlformats.org/drawingml/2006/main">
+            <a:r>
               <a:t>- https://www.wipo.int/en/web/ip-financing</a:t>
             </a:r>
           </a:p>
@@ -704,6 +709,11 @@
           </a:p>
           <a:p xmlns:a="http://schemas.openxmlformats.org/drawingml/2006/main">
             <a:r>
+              <a:t>- https://www.folkhalsomyndigheten.se/regler-och-tillsyn/tobak-och-nikotinprodukter-regler-for-tillverkning-handel-och-hantering/elektroniska-cigaretter-och-pafyllningsbehallare-sa-foljer-du-reglerna/</a:t>
+            </a:r>
+          </a:p>
+          <a:p xmlns:a="http://schemas.openxmlformats.org/drawingml/2006/main">
+            <a:r>
               <a:t>- https://www.wipo.int/en/web/ip-financing</a:t>
             </a:r>
           </a:p>
@@ -874,6 +884,11 @@
           </a:p>
           <a:p xmlns:a="http://schemas.openxmlformats.org/drawingml/2006/main">
             <a:r>
+              <a:t>- https://www.folkhalsomyndigheten.se/regler-och-tillsyn/tobak-och-nikotinprodukter-regler-for-tillverkning-handel-och-hantering/elektroniska-cigaretter-och-pafyllningsbehallare-sa-foljer-du-reglerna/</a:t>
+            </a:r>
+          </a:p>
+          <a:p xmlns:a="http://schemas.openxmlformats.org/drawingml/2006/main">
+            <a:r>
               <a:t>- https://www.wipo.int/en/web/ip-financing</a:t>
             </a:r>
           </a:p>
@@ -1044,6 +1059,11 @@
           </a:p>
           <a:p xmlns:a="http://schemas.openxmlformats.org/drawingml/2006/main">
             <a:r>
+              <a:t>- https://www.folkhalsomyndigheten.se/regler-och-tillsyn/tobak-och-nikotinprodukter-regler-for-tillverkning-handel-och-hantering/elektroniska-cigaretter-och-pafyllningsbehallare-sa-foljer-du-reglerna/</a:t>
+            </a:r>
+          </a:p>
+          <a:p xmlns:a="http://schemas.openxmlformats.org/drawingml/2006/main">
+            <a:r>
               <a:t>- https://www.wipo.int/en/web/ip-financing</a:t>
             </a:r>
           </a:p>
@@ -1214,6 +1234,11 @@
           </a:p>
           <a:p xmlns:a="http://schemas.openxmlformats.org/drawingml/2006/main">
             <a:r>
+              <a:t>- https://www.folkhalsomyndigheten.se/regler-och-tillsyn/tobak-och-nikotinprodukter-regler-for-tillverkning-handel-och-hantering/elektroniska-cigaretter-och-pafyllningsbehallare-sa-foljer-du-reglerna/</a:t>
+            </a:r>
+          </a:p>
+          <a:p xmlns:a="http://schemas.openxmlformats.org/drawingml/2006/main">
+            <a:r>
               <a:t>- https://www.wipo.int/en/web/ip-financing</a:t>
             </a:r>
           </a:p>
@@ -1384,6 +1409,11 @@
           </a:p>
           <a:p xmlns:a="http://schemas.openxmlformats.org/drawingml/2006/main">
             <a:r>
+              <a:t>- https://www.folkhalsomyndigheten.se/regler-och-tillsyn/tobak-och-nikotinprodukter-regler-for-tillverkning-handel-och-hantering/elektroniska-cigaretter-och-pafyllningsbehallare-sa-foljer-du-reglerna/</a:t>
+            </a:r>
+          </a:p>
+          <a:p xmlns:a="http://schemas.openxmlformats.org/drawingml/2006/main">
+            <a:r>
               <a:t>- https://www.wipo.int/en/web/ip-financing</a:t>
             </a:r>
           </a:p>
@@ -1554,6 +1584,11 @@
           </a:p>
           <a:p xmlns:a="http://schemas.openxmlformats.org/drawingml/2006/main">
             <a:r>
+              <a:t>- https://www.folkhalsomyndigheten.se/regler-och-tillsyn/tobak-och-nikotinprodukter-regler-for-tillverkning-handel-och-hantering/elektroniska-cigaretter-och-pafyllningsbehallare-sa-foljer-du-reglerna/</a:t>
+            </a:r>
+          </a:p>
+          <a:p xmlns:a="http://schemas.openxmlformats.org/drawingml/2006/main">
+            <a:r>
               <a:t>- https://www.wipo.int/en/web/ip-financing</a:t>
             </a:r>
           </a:p>
@@ -1724,6 +1759,11 @@
           </a:p>
           <a:p xmlns:a="http://schemas.openxmlformats.org/drawingml/2006/main">
             <a:r>
+              <a:t>- https://www.folkhalsomyndigheten.se/regler-och-tillsyn/tobak-och-nikotinprodukter-regler-for-tillverkning-handel-och-hantering/elektroniska-cigaretter-och-pafyllningsbehallare-sa-foljer-du-reglerna/</a:t>
+            </a:r>
+          </a:p>
+          <a:p xmlns:a="http://schemas.openxmlformats.org/drawingml/2006/main">
+            <a:r>
               <a:t>- https://www.wipo.int/en/web/ip-financing</a:t>
             </a:r>
           </a:p>
@@ -1894,6 +1934,11 @@
           </a:p>
           <a:p xmlns:a="http://schemas.openxmlformats.org/drawingml/2006/main">
             <a:r>
+              <a:t>- https://www.folkhalsomyndigheten.se/regler-och-tillsyn/tobak-och-nikotinprodukter-regler-for-tillverkning-handel-och-hantering/elektroniska-cigaretter-och-pafyllningsbehallare-sa-foljer-du-reglerna/</a:t>
+            </a:r>
+          </a:p>
+          <a:p xmlns:a="http://schemas.openxmlformats.org/drawingml/2006/main">
+            <a:r>
               <a:t>- https://www.wipo.int/en/web/ip-financing</a:t>
             </a:r>
           </a:p>
@@ -2064,6 +2109,11 @@
           </a:p>
           <a:p xmlns:a="http://schemas.openxmlformats.org/drawingml/2006/main">
             <a:r>
+              <a:t>- https://www.folkhalsomyndigheten.se/regler-och-tillsyn/tobak-och-nikotinprodukter-regler-for-tillverkning-handel-och-hantering/elektroniska-cigaretter-och-pafyllningsbehallare-sa-foljer-du-reglerna/</a:t>
+            </a:r>
+          </a:p>
+          <a:p xmlns:a="http://schemas.openxmlformats.org/drawingml/2006/main">
+            <a:r>
               <a:t>- https://www.wipo.int/en/web/ip-financing</a:t>
             </a:r>
           </a:p>
@@ -2234,6 +2284,11 @@
           </a:p>
           <a:p xmlns:a="http://schemas.openxmlformats.org/drawingml/2006/main">
             <a:r>
+              <a:t>- https://www.folkhalsomyndigheten.se/regler-och-tillsyn/tobak-och-nikotinprodukter-regler-for-tillverkning-handel-och-hantering/elektroniska-cigaretter-och-pafyllningsbehallare-sa-foljer-du-reglerna/</a:t>
+            </a:r>
+          </a:p>
+          <a:p xmlns:a="http://schemas.openxmlformats.org/drawingml/2006/main">
+            <a:r>
               <a:t>- https://www.wipo.int/en/web/ip-financing</a:t>
             </a:r>
           </a:p>
@@ -2404,6 +2459,11 @@
           </a:p>
           <a:p xmlns:a="http://schemas.openxmlformats.org/drawingml/2006/main">
             <a:r>
+              <a:t>- https://www.folkhalsomyndigheten.se/regler-och-tillsyn/tobak-och-nikotinprodukter-regler-for-tillverkning-handel-och-hantering/elektroniska-cigaretter-och-pafyllningsbehallare-sa-foljer-du-reglerna/</a:t>
+            </a:r>
+          </a:p>
+          <a:p xmlns:a="http://schemas.openxmlformats.org/drawingml/2006/main">
+            <a:r>
               <a:t>- https://www.wipo.int/en/web/ip-financing</a:t>
             </a:r>
           </a:p>
@@ -2574,6 +2634,11 @@
           </a:p>
           <a:p xmlns:a="http://schemas.openxmlformats.org/drawingml/2006/main">
             <a:r>
+              <a:t>- https://www.folkhalsomyndigheten.se/regler-och-tillsyn/tobak-och-nikotinprodukter-regler-for-tillverkning-handel-och-hantering/elektroniska-cigaretter-och-pafyllningsbehallare-sa-foljer-du-reglerna/</a:t>
+            </a:r>
+          </a:p>
+          <a:p xmlns:a="http://schemas.openxmlformats.org/drawingml/2006/main">
+            <a:r>
               <a:t>- https://www.wipo.int/en/web/ip-financing</a:t>
             </a:r>
           </a:p>
@@ -2744,6 +2809,11 @@
           </a:p>
           <a:p xmlns:a="http://schemas.openxmlformats.org/drawingml/2006/main">
             <a:r>
+              <a:t>- https://www.folkhalsomyndigheten.se/regler-och-tillsyn/tobak-och-nikotinprodukter-regler-for-tillverkning-handel-och-hantering/elektroniska-cigaretter-och-pafyllningsbehallare-sa-foljer-du-reglerna/</a:t>
+            </a:r>
+          </a:p>
+          <a:p xmlns:a="http://schemas.openxmlformats.org/drawingml/2006/main">
+            <a:r>
               <a:t>- https://www.wipo.int/en/web/ip-financing</a:t>
             </a:r>
           </a:p>
@@ -2914,6 +2984,11 @@
           </a:p>
           <a:p xmlns:a="http://schemas.openxmlformats.org/drawingml/2006/main">
             <a:r>
+              <a:t>- https://www.folkhalsomyndigheten.se/regler-och-tillsyn/tobak-och-nikotinprodukter-regler-for-tillverkning-handel-och-hantering/elektroniska-cigaretter-och-pafyllningsbehallare-sa-foljer-du-reglerna/</a:t>
+            </a:r>
+          </a:p>
+          <a:p xmlns:a="http://schemas.openxmlformats.org/drawingml/2006/main">
+            <a:r>
               <a:t>- https://www.wipo.int/en/web/ip-financing</a:t>
             </a:r>
           </a:p>
@@ -3084,6 +3159,11 @@
           </a:p>
           <a:p xmlns:a="http://schemas.openxmlformats.org/drawingml/2006/main">
             <a:r>
+              <a:t>- https://www.folkhalsomyndigheten.se/regler-och-tillsyn/tobak-och-nikotinprodukter-regler-for-tillverkning-handel-och-hantering/elektroniska-cigaretter-och-pafyllningsbehallare-sa-foljer-du-reglerna/</a:t>
+            </a:r>
+          </a:p>
+          <a:p xmlns:a="http://schemas.openxmlformats.org/drawingml/2006/main">
+            <a:r>
               <a:t>- https://www.wipo.int/en/web/ip-financing</a:t>
             </a:r>
           </a:p>
@@ -3254,6 +3334,11 @@
           </a:p>
           <a:p xmlns:a="http://schemas.openxmlformats.org/drawingml/2006/main">
             <a:r>
+              <a:t>- https://www.folkhalsomyndigheten.se/regler-och-tillsyn/tobak-och-nikotinprodukter-regler-for-tillverkning-handel-och-hantering/elektroniska-cigaretter-och-pafyllningsbehallare-sa-foljer-du-reglerna/</a:t>
+            </a:r>
+          </a:p>
+          <a:p xmlns:a="http://schemas.openxmlformats.org/drawingml/2006/main">
+            <a:r>
               <a:t>- https://www.wipo.int/en/web/ip-financing</a:t>
             </a:r>
           </a:p>
@@ -3424,6 +3509,11 @@
           </a:p>
           <a:p xmlns:a="http://schemas.openxmlformats.org/drawingml/2006/main">
             <a:r>
+              <a:t>- https://www.folkhalsomyndigheten.se/regler-och-tillsyn/tobak-och-nikotinprodukter-regler-for-tillverkning-handel-och-hantering/elektroniska-cigaretter-och-pafyllningsbehallare-sa-foljer-du-reglerna/</a:t>
+            </a:r>
+          </a:p>
+          <a:p xmlns:a="http://schemas.openxmlformats.org/drawingml/2006/main">
+            <a:r>
               <a:t>- https://www.wipo.int/en/web/ip-financing</a:t>
             </a:r>
           </a:p>
@@ -3594,6 +3684,11 @@
           </a:p>
           <a:p xmlns:a="http://schemas.openxmlformats.org/drawingml/2006/main">
             <a:r>
+              <a:t>- https://www.folkhalsomyndigheten.se/regler-och-tillsyn/tobak-och-nikotinprodukter-regler-for-tillverkning-handel-och-hantering/elektroniska-cigaretter-och-pafyllningsbehallare-sa-foljer-du-reglerna/</a:t>
+            </a:r>
+          </a:p>
+          <a:p xmlns:a="http://schemas.openxmlformats.org/drawingml/2006/main">
+            <a:r>
               <a:t>- https://www.wipo.int/en/web/ip-financing</a:t>
             </a:r>
           </a:p>
@@ -3764,6 +3859,11 @@
           </a:p>
           <a:p xmlns:a="http://schemas.openxmlformats.org/drawingml/2006/main">
             <a:r>
+              <a:t>- https://www.folkhalsomyndigheten.se/regler-och-tillsyn/tobak-och-nikotinprodukter-regler-for-tillverkning-handel-och-hantering/elektroniska-cigaretter-och-pafyllningsbehallare-sa-foljer-du-reglerna/</a:t>
+            </a:r>
+          </a:p>
+          <a:p xmlns:a="http://schemas.openxmlformats.org/drawingml/2006/main">
+            <a:r>
               <a:t>- https://www.wipo.int/en/web/ip-financing</a:t>
             </a:r>
           </a:p>
@@ -3934,6 +4034,11 @@
           </a:p>
           <a:p xmlns:a="http://schemas.openxmlformats.org/drawingml/2006/main">
             <a:r>
+              <a:t>- https://www.folkhalsomyndigheten.se/regler-och-tillsyn/tobak-och-nikotinprodukter-regler-for-tillverkning-handel-och-hantering/elektroniska-cigaretter-och-pafyllningsbehallare-sa-foljer-du-reglerna/</a:t>
+            </a:r>
+          </a:p>
+          <a:p xmlns:a="http://schemas.openxmlformats.org/drawingml/2006/main">
+            <a:r>
               <a:t>- https://www.wipo.int/en/web/ip-financing</a:t>
             </a:r>
           </a:p>
@@ -4104,6 +4209,11 @@
           </a:p>
           <a:p xmlns:a="http://schemas.openxmlformats.org/drawingml/2006/main">
             <a:r>
+              <a:t>- https://www.folkhalsomyndigheten.se/regler-och-tillsyn/tobak-och-nikotinprodukter-regler-for-tillverkning-handel-och-hantering/elektroniska-cigaretter-och-pafyllningsbehallare-sa-foljer-du-reglerna/</a:t>
+            </a:r>
+          </a:p>
+          <a:p xmlns:a="http://schemas.openxmlformats.org/drawingml/2006/main">
+            <a:r>
               <a:t>- https://www.wipo.int/en/web/ip-financing</a:t>
             </a:r>
           </a:p>
@@ -4274,6 +4384,11 @@
           </a:p>
           <a:p xmlns:a="http://schemas.openxmlformats.org/drawingml/2006/main">
             <a:r>
+              <a:t>- https://www.folkhalsomyndigheten.se/regler-och-tillsyn/tobak-och-nikotinprodukter-regler-for-tillverkning-handel-och-hantering/elektroniska-cigaretter-och-pafyllningsbehallare-sa-foljer-du-reglerna/</a:t>
+            </a:r>
+          </a:p>
+          <a:p xmlns:a="http://schemas.openxmlformats.org/drawingml/2006/main">
+            <a:r>
               <a:t>- https://www.wipo.int/en/web/ip-financing</a:t>
             </a:r>
           </a:p>
@@ -4444,6 +4559,11 @@
           </a:p>
           <a:p xmlns:a="http://schemas.openxmlformats.org/drawingml/2006/main">
             <a:r>
+              <a:t>- https://www.folkhalsomyndigheten.se/regler-och-tillsyn/tobak-och-nikotinprodukter-regler-for-tillverkning-handel-och-hantering/elektroniska-cigaretter-och-pafyllningsbehallare-sa-foljer-du-reglerna/</a:t>
+            </a:r>
+          </a:p>
+          <a:p xmlns:a="http://schemas.openxmlformats.org/drawingml/2006/main">
+            <a:r>
               <a:t>- https://www.wipo.int/en/web/ip-financing</a:t>
             </a:r>
           </a:p>
@@ -4614,6 +4734,11 @@
           </a:p>
           <a:p xmlns:a="http://schemas.openxmlformats.org/drawingml/2006/main">
             <a:r>
+              <a:t>- https://www.folkhalsomyndigheten.se/regler-och-tillsyn/tobak-och-nikotinprodukter-regler-for-tillverkning-handel-och-hantering/elektroniska-cigaretter-och-pafyllningsbehallare-sa-foljer-du-reglerna/</a:t>
+            </a:r>
+          </a:p>
+          <a:p xmlns:a="http://schemas.openxmlformats.org/drawingml/2006/main">
+            <a:r>
               <a:t>- https://www.wipo.int/en/web/ip-financing</a:t>
             </a:r>
           </a:p>
@@ -4784,6 +4909,11 @@
           </a:p>
           <a:p xmlns:a="http://schemas.openxmlformats.org/drawingml/2006/main">
             <a:r>
+              <a:t>- https://www.folkhalsomyndigheten.se/regler-och-tillsyn/tobak-och-nikotinprodukter-regler-for-tillverkning-handel-och-hantering/elektroniska-cigaretter-och-pafyllningsbehallare-sa-foljer-du-reglerna/</a:t>
+            </a:r>
+          </a:p>
+          <a:p xmlns:a="http://schemas.openxmlformats.org/drawingml/2006/main">
+            <a:r>
               <a:t>- https://www.wipo.int/en/web/ip-financing</a:t>
             </a:r>
           </a:p>
@@ -4954,6 +5084,11 @@
           </a:p>
           <a:p xmlns:a="http://schemas.openxmlformats.org/drawingml/2006/main">
             <a:r>
+              <a:t>- https://www.folkhalsomyndigheten.se/regler-och-tillsyn/tobak-och-nikotinprodukter-regler-for-tillverkning-handel-och-hantering/elektroniska-cigaretter-och-pafyllningsbehallare-sa-foljer-du-reglerna/</a:t>
+            </a:r>
+          </a:p>
+          <a:p xmlns:a="http://schemas.openxmlformats.org/drawingml/2006/main">
+            <a:r>
               <a:t>- https://www.wipo.int/en/web/ip-financing</a:t>
             </a:r>
           </a:p>
@@ -5124,6 +5259,11 @@
           </a:p>
           <a:p xmlns:a="http://schemas.openxmlformats.org/drawingml/2006/main">
             <a:r>
+              <a:t>- https://www.folkhalsomyndigheten.se/regler-och-tillsyn/tobak-och-nikotinprodukter-regler-for-tillverkning-handel-och-hantering/elektroniska-cigaretter-och-pafyllningsbehallare-sa-foljer-du-reglerna/</a:t>
+            </a:r>
+          </a:p>
+          <a:p xmlns:a="http://schemas.openxmlformats.org/drawingml/2006/main">
+            <a:r>
               <a:t>- https://www.wipo.int/en/web/ip-financing</a:t>
             </a:r>
           </a:p>
@@ -5294,6 +5434,11 @@
           </a:p>
           <a:p xmlns:a="http://schemas.openxmlformats.org/drawingml/2006/main">
             <a:r>
+              <a:t>- https://www.folkhalsomyndigheten.se/regler-och-tillsyn/tobak-och-nikotinprodukter-regler-for-tillverkning-handel-och-hantering/elektroniska-cigaretter-och-pafyllningsbehallare-sa-foljer-du-reglerna/</a:t>
+            </a:r>
+          </a:p>
+          <a:p xmlns:a="http://schemas.openxmlformats.org/drawingml/2006/main">
+            <a:r>
               <a:t>- https://www.wipo.int/en/web/ip-financing</a:t>
             </a:r>
           </a:p>
@@ -5464,6 +5609,11 @@
           </a:p>
           <a:p xmlns:a="http://schemas.openxmlformats.org/drawingml/2006/main">
             <a:r>
+              <a:t>- https://www.folkhalsomyndigheten.se/regler-och-tillsyn/tobak-och-nikotinprodukter-regler-for-tillverkning-handel-och-hantering/elektroniska-cigaretter-och-pafyllningsbehallare-sa-foljer-du-reglerna/</a:t>
+            </a:r>
+          </a:p>
+          <a:p xmlns:a="http://schemas.openxmlformats.org/drawingml/2006/main">
+            <a:r>
               <a:t>- https://www.wipo.int/en/web/ip-financing</a:t>
             </a:r>
           </a:p>
@@ -5571,7 +5721,7 @@
           <p:cNvPr id="2" name="Title 1">
             <a:extLst xmlns:a="http://schemas.openxmlformats.org/drawingml/2006/main">
               <a:ext uri="{FF2B5EF4-FFF2-40B4-BE49-F238E27FC236}">
-                <a16:creationId xmlns:a16="http://schemas.microsoft.com/office/drawing/2014/main" id="{D0815720-35D7-47AB-9F9A-D486A584B0A4}"/>
+                <a16:creationId xmlns:a16="http://schemas.microsoft.com/office/drawing/2014/main" id="{283735EB-746B-4C68-85C0-C9C584C753BB}"/>
               </a:ext>
             </a:extLst>
           </p:cNvPr>
@@ -5603,7 +5753,7 @@
           <p:cNvPr id="3" name="Subtitle 2">
             <a:extLst xmlns:a="http://schemas.openxmlformats.org/drawingml/2006/main">
               <a:ext uri="{FF2B5EF4-FFF2-40B4-BE49-F238E27FC236}">
-                <a16:creationId xmlns:a16="http://schemas.microsoft.com/office/drawing/2014/main" id="{1EE26F2F-90AB-426B-AC2B-CD50A1A10232}"/>
+                <a16:creationId xmlns:a16="http://schemas.microsoft.com/office/drawing/2014/main" id="{A9A2C953-B705-4B3E-8B06-38520AE6D2E9}"/>
               </a:ext>
             </a:extLst>
           </p:cNvPr>
@@ -5726,7 +5876,7 @@
           <p:cNvPr id="4" name="Date Placeholder 3">
             <a:extLst xmlns:a="http://schemas.openxmlformats.org/drawingml/2006/main">
               <a:ext uri="{FF2B5EF4-FFF2-40B4-BE49-F238E27FC236}">
-                <a16:creationId xmlns:a16="http://schemas.microsoft.com/office/drawing/2014/main" id="{3CED671A-15D8-4BCA-B615-19920DFBE30E}"/>
+                <a16:creationId xmlns:a16="http://schemas.microsoft.com/office/drawing/2014/main" id="{2BDAAF61-718F-4E4B-9782-7DE49C44139A}"/>
               </a:ext>
             </a:extLst>
           </p:cNvPr>
@@ -5753,7 +5903,7 @@
           <p:cNvPr id="5" name="Footer Placeholder 4">
             <a:extLst xmlns:a="http://schemas.openxmlformats.org/drawingml/2006/main">
               <a:ext uri="{FF2B5EF4-FFF2-40B4-BE49-F238E27FC236}">
-                <a16:creationId xmlns:a16="http://schemas.microsoft.com/office/drawing/2014/main" id="{991EAE9A-34DA-42DE-B010-0F516AE6C971}"/>
+                <a16:creationId xmlns:a16="http://schemas.microsoft.com/office/drawing/2014/main" id="{020D8B82-CA78-4331-86DB-765FF8A5883B}"/>
               </a:ext>
             </a:extLst>
           </p:cNvPr>
@@ -5776,7 +5926,7 @@
           <p:cNvPr id="6" name="Slide Number Placeholder 5">
             <a:extLst xmlns:a="http://schemas.openxmlformats.org/drawingml/2006/main">
               <a:ext uri="{FF2B5EF4-FFF2-40B4-BE49-F238E27FC236}">
-                <a16:creationId xmlns:a16="http://schemas.microsoft.com/office/drawing/2014/main" id="{B027887F-2A18-48EF-8C3D-D96AB9E1BEC3}"/>
+                <a16:creationId xmlns:a16="http://schemas.microsoft.com/office/drawing/2014/main" id="{DB16205D-88DF-497A-B471-B34E8500F308}"/>
               </a:ext>
             </a:extLst>
           </p:cNvPr>
@@ -5820,7 +5970,7 @@
           <p:cNvPr id="2" name="Title 1">
             <a:extLst xmlns:a="http://schemas.openxmlformats.org/drawingml/2006/main">
               <a:ext uri="{FF2B5EF4-FFF2-40B4-BE49-F238E27FC236}">
-                <a16:creationId xmlns:a16="http://schemas.microsoft.com/office/drawing/2014/main" id="{02C2AC1E-1754-4F66-8C50-EE9237CB9E99}"/>
+                <a16:creationId xmlns:a16="http://schemas.microsoft.com/office/drawing/2014/main" id="{97543191-A938-462E-93EB-8C1A062D0ADF}"/>
               </a:ext>
             </a:extLst>
           </p:cNvPr>
@@ -5847,7 +5997,7 @@
           <p:cNvPr id="3" name="Vertical Text Placeholder 2">
             <a:extLst xmlns:a="http://schemas.openxmlformats.org/drawingml/2006/main">
               <a:ext uri="{FF2B5EF4-FFF2-40B4-BE49-F238E27FC236}">
-                <a16:creationId xmlns:a16="http://schemas.microsoft.com/office/drawing/2014/main" id="{4BD07FD3-0534-4C36-BF89-15C4119F94CC}"/>
+                <a16:creationId xmlns:a16="http://schemas.microsoft.com/office/drawing/2014/main" id="{E9C8FBBA-EA4C-421A-BC73-88B709977F29}"/>
               </a:ext>
             </a:extLst>
           </p:cNvPr>
@@ -5909,7 +6059,7 @@
           <p:cNvPr id="4" name="Date Placeholder 3">
             <a:extLst xmlns:a="http://schemas.openxmlformats.org/drawingml/2006/main">
               <a:ext uri="{FF2B5EF4-FFF2-40B4-BE49-F238E27FC236}">
-                <a16:creationId xmlns:a16="http://schemas.microsoft.com/office/drawing/2014/main" id="{2CE428B5-0393-4EFF-88EA-E9D86EB73821}"/>
+                <a16:creationId xmlns:a16="http://schemas.microsoft.com/office/drawing/2014/main" id="{97E478A9-039E-4B24-B86D-D9CDE71EB2DE}"/>
               </a:ext>
             </a:extLst>
           </p:cNvPr>
@@ -5936,7 +6086,7 @@
           <p:cNvPr id="5" name="Footer Placeholder 4">
             <a:extLst xmlns:a="http://schemas.openxmlformats.org/drawingml/2006/main">
               <a:ext uri="{FF2B5EF4-FFF2-40B4-BE49-F238E27FC236}">
-                <a16:creationId xmlns:a16="http://schemas.microsoft.com/office/drawing/2014/main" id="{8C2E03AB-8222-4418-A043-30E24AAED1EB}"/>
+                <a16:creationId xmlns:a16="http://schemas.microsoft.com/office/drawing/2014/main" id="{BA613283-A39B-426A-A420-21490AEBED5E}"/>
               </a:ext>
             </a:extLst>
           </p:cNvPr>
@@ -5959,7 +6109,7 @@
           <p:cNvPr id="6" name="Slide Number Placeholder 5">
             <a:extLst xmlns:a="http://schemas.openxmlformats.org/drawingml/2006/main">
               <a:ext uri="{FF2B5EF4-FFF2-40B4-BE49-F238E27FC236}">
-                <a16:creationId xmlns:a16="http://schemas.microsoft.com/office/drawing/2014/main" id="{96A91AF6-F18F-4ADE-B877-70E0531E596C}"/>
+                <a16:creationId xmlns:a16="http://schemas.microsoft.com/office/drawing/2014/main" id="{5EDE4B4E-8C53-4265-8CA0-472020C80A43}"/>
               </a:ext>
             </a:extLst>
           </p:cNvPr>
@@ -6003,7 +6153,7 @@
           <p:cNvPr id="2" name="Vertical Title 1">
             <a:extLst xmlns:a="http://schemas.openxmlformats.org/drawingml/2006/main">
               <a:ext uri="{FF2B5EF4-FFF2-40B4-BE49-F238E27FC236}">
-                <a16:creationId xmlns:a16="http://schemas.microsoft.com/office/drawing/2014/main" id="{C717A0C2-C42E-4FA9-8FEF-5FD3ACD6C1F1}"/>
+                <a16:creationId xmlns:a16="http://schemas.microsoft.com/office/drawing/2014/main" id="{A4ADD386-7602-49BA-B28B-0F72F3115155}"/>
               </a:ext>
             </a:extLst>
           </p:cNvPr>
@@ -6035,7 +6185,7 @@
           <p:cNvPr id="3" name="Vertical Text Placeholder 2">
             <a:extLst xmlns:a="http://schemas.openxmlformats.org/drawingml/2006/main">
               <a:ext uri="{FF2B5EF4-FFF2-40B4-BE49-F238E27FC236}">
-                <a16:creationId xmlns:a16="http://schemas.microsoft.com/office/drawing/2014/main" id="{4DD874B8-A421-4599-959C-ADF4AEA58081}"/>
+                <a16:creationId xmlns:a16="http://schemas.microsoft.com/office/drawing/2014/main" id="{2FB12611-9FC2-4492-92B7-13E43283D1EA}"/>
               </a:ext>
             </a:extLst>
           </p:cNvPr>
@@ -6102,7 +6252,7 @@
           <p:cNvPr id="4" name="Date Placeholder 3">
             <a:extLst xmlns:a="http://schemas.openxmlformats.org/drawingml/2006/main">
               <a:ext uri="{FF2B5EF4-FFF2-40B4-BE49-F238E27FC236}">
-                <a16:creationId xmlns:a16="http://schemas.microsoft.com/office/drawing/2014/main" id="{BF4C971D-CE7E-4DCA-8DFC-3D896502AF9B}"/>
+                <a16:creationId xmlns:a16="http://schemas.microsoft.com/office/drawing/2014/main" id="{9433329A-62CB-4671-9364-466002601293}"/>
               </a:ext>
             </a:extLst>
           </p:cNvPr>
@@ -6129,7 +6279,7 @@
           <p:cNvPr id="5" name="Footer Placeholder 4">
             <a:extLst xmlns:a="http://schemas.openxmlformats.org/drawingml/2006/main">
               <a:ext uri="{FF2B5EF4-FFF2-40B4-BE49-F238E27FC236}">
-                <a16:creationId xmlns:a16="http://schemas.microsoft.com/office/drawing/2014/main" id="{E8835A79-466C-41D2-A5E4-88DE67A04115}"/>
+                <a16:creationId xmlns:a16="http://schemas.microsoft.com/office/drawing/2014/main" id="{DF8985B1-5D2D-449A-BE4C-5A80A51EA1A3}"/>
               </a:ext>
             </a:extLst>
           </p:cNvPr>
@@ -6152,7 +6302,7 @@
           <p:cNvPr id="6" name="Slide Number Placeholder 5">
             <a:extLst xmlns:a="http://schemas.openxmlformats.org/drawingml/2006/main">
               <a:ext uri="{FF2B5EF4-FFF2-40B4-BE49-F238E27FC236}">
-                <a16:creationId xmlns:a16="http://schemas.microsoft.com/office/drawing/2014/main" id="{4B3028CF-4674-4691-81E7-A414F06F3D09}"/>
+                <a16:creationId xmlns:a16="http://schemas.microsoft.com/office/drawing/2014/main" id="{C2192746-861D-4440-B62B-023491FD728B}"/>
               </a:ext>
             </a:extLst>
           </p:cNvPr>
@@ -6196,7 +6346,7 @@
           <p:cNvPr id="2" name="Title 1">
             <a:extLst xmlns:a="http://schemas.openxmlformats.org/drawingml/2006/main">
               <a:ext uri="{FF2B5EF4-FFF2-40B4-BE49-F238E27FC236}">
-                <a16:creationId xmlns:a16="http://schemas.microsoft.com/office/drawing/2014/main" id="{E2360C37-B7E9-485C-AF4B-4F8F13207BD1}"/>
+                <a16:creationId xmlns:a16="http://schemas.microsoft.com/office/drawing/2014/main" id="{4AD08BA1-50DA-499D-8079-B1CCD97AC7C0}"/>
               </a:ext>
             </a:extLst>
           </p:cNvPr>
@@ -6223,7 +6373,7 @@
           <p:cNvPr id="3" name="Content Placeholder 2">
             <a:extLst xmlns:a="http://schemas.openxmlformats.org/drawingml/2006/main">
               <a:ext uri="{FF2B5EF4-FFF2-40B4-BE49-F238E27FC236}">
-                <a16:creationId xmlns:a16="http://schemas.microsoft.com/office/drawing/2014/main" id="{5313F309-8D23-4E77-B33C-F519569CE5F2}"/>
+                <a16:creationId xmlns:a16="http://schemas.microsoft.com/office/drawing/2014/main" id="{32FFBCFB-0470-4A6E-B00D-94F6AA271D9A}"/>
               </a:ext>
             </a:extLst>
           </p:cNvPr>
@@ -6285,7 +6435,7 @@
           <p:cNvPr id="4" name="Date Placeholder 3">
             <a:extLst xmlns:a="http://schemas.openxmlformats.org/drawingml/2006/main">
               <a:ext uri="{FF2B5EF4-FFF2-40B4-BE49-F238E27FC236}">
-                <a16:creationId xmlns:a16="http://schemas.microsoft.com/office/drawing/2014/main" id="{4D23BFE3-9759-43F9-BAE8-3E24D5A2A30C}"/>
+                <a16:creationId xmlns:a16="http://schemas.microsoft.com/office/drawing/2014/main" id="{36329996-702E-4FFF-A79B-D179E97A9FEC}"/>
               </a:ext>
             </a:extLst>
           </p:cNvPr>
@@ -6312,7 +6462,7 @@
           <p:cNvPr id="5" name="Footer Placeholder 4">
             <a:extLst xmlns:a="http://schemas.openxmlformats.org/drawingml/2006/main">
               <a:ext uri="{FF2B5EF4-FFF2-40B4-BE49-F238E27FC236}">
-                <a16:creationId xmlns:a16="http://schemas.microsoft.com/office/drawing/2014/main" id="{7F59D010-627F-4ABF-BB64-36FD3DD07EF9}"/>
+                <a16:creationId xmlns:a16="http://schemas.microsoft.com/office/drawing/2014/main" id="{A645E14D-F1EF-4B62-9945-8D05C5CDFBF1}"/>
               </a:ext>
             </a:extLst>
           </p:cNvPr>
@@ -6335,7 +6485,7 @@
           <p:cNvPr id="6" name="Slide Number Placeholder 5">
             <a:extLst xmlns:a="http://schemas.openxmlformats.org/drawingml/2006/main">
               <a:ext uri="{FF2B5EF4-FFF2-40B4-BE49-F238E27FC236}">
-                <a16:creationId xmlns:a16="http://schemas.microsoft.com/office/drawing/2014/main" id="{3B70FE0E-46E7-4AF1-A926-F693B7DFB9BB}"/>
+                <a16:creationId xmlns:a16="http://schemas.microsoft.com/office/drawing/2014/main" id="{3CE4D8D7-510F-42EA-A5A9-C5F9AEC55784}"/>
               </a:ext>
             </a:extLst>
           </p:cNvPr>
@@ -6379,7 +6529,7 @@
           <p:cNvPr id="2" name="Title 1">
             <a:extLst xmlns:a="http://schemas.openxmlformats.org/drawingml/2006/main">
               <a:ext uri="{FF2B5EF4-FFF2-40B4-BE49-F238E27FC236}">
-                <a16:creationId xmlns:a16="http://schemas.microsoft.com/office/drawing/2014/main" id="{F1097C91-9BEB-4797-9F25-37076920805C}"/>
+                <a16:creationId xmlns:a16="http://schemas.microsoft.com/office/drawing/2014/main" id="{5D663FD7-07A3-4AFB-BEA4-833A886921EA}"/>
               </a:ext>
             </a:extLst>
           </p:cNvPr>
@@ -6416,7 +6566,7 @@
           <p:cNvPr id="3" name="Text Placeholder 2">
             <a:extLst xmlns:a="http://schemas.openxmlformats.org/drawingml/2006/main">
               <a:ext uri="{FF2B5EF4-FFF2-40B4-BE49-F238E27FC236}">
-                <a16:creationId xmlns:a16="http://schemas.microsoft.com/office/drawing/2014/main" id="{87D79443-DC08-49DF-A65B-27AB168637EF}"/>
+                <a16:creationId xmlns:a16="http://schemas.microsoft.com/office/drawing/2014/main" id="{FFBF151B-40E4-444C-97DA-509F1623FBFC}"/>
               </a:ext>
             </a:extLst>
           </p:cNvPr>
@@ -6542,7 +6692,7 @@
           <p:cNvPr id="4" name="Date Placeholder 3">
             <a:extLst xmlns:a="http://schemas.openxmlformats.org/drawingml/2006/main">
               <a:ext uri="{FF2B5EF4-FFF2-40B4-BE49-F238E27FC236}">
-                <a16:creationId xmlns:a16="http://schemas.microsoft.com/office/drawing/2014/main" id="{6808628F-6C09-4269-9A2C-38C87BAFBA81}"/>
+                <a16:creationId xmlns:a16="http://schemas.microsoft.com/office/drawing/2014/main" id="{AFB714A0-B279-44F5-A38D-F1F292772E1D}"/>
               </a:ext>
             </a:extLst>
           </p:cNvPr>
@@ -6569,7 +6719,7 @@
           <p:cNvPr id="5" name="Footer Placeholder 4">
             <a:extLst xmlns:a="http://schemas.openxmlformats.org/drawingml/2006/main">
               <a:ext uri="{FF2B5EF4-FFF2-40B4-BE49-F238E27FC236}">
-                <a16:creationId xmlns:a16="http://schemas.microsoft.com/office/drawing/2014/main" id="{17F9BEAB-207E-4165-B415-34B3A67FC6BE}"/>
+                <a16:creationId xmlns:a16="http://schemas.microsoft.com/office/drawing/2014/main" id="{4E78F71C-6EBF-431F-9948-6653A4FD7241}"/>
               </a:ext>
             </a:extLst>
           </p:cNvPr>
@@ -6592,7 +6742,7 @@
           <p:cNvPr id="6" name="Slide Number Placeholder 5">
             <a:extLst xmlns:a="http://schemas.openxmlformats.org/drawingml/2006/main">
               <a:ext uri="{FF2B5EF4-FFF2-40B4-BE49-F238E27FC236}">
-                <a16:creationId xmlns:a16="http://schemas.microsoft.com/office/drawing/2014/main" id="{4A8CCB54-C424-44FA-8F8C-D8A2D45F151F}"/>
+                <a16:creationId xmlns:a16="http://schemas.microsoft.com/office/drawing/2014/main" id="{39D2ED96-6D4E-4D55-BAA1-8E92CA478764}"/>
               </a:ext>
             </a:extLst>
           </p:cNvPr>
@@ -6636,7 +6786,7 @@
           <p:cNvPr id="2" name="Title 1">
             <a:extLst xmlns:a="http://schemas.openxmlformats.org/drawingml/2006/main">
               <a:ext uri="{FF2B5EF4-FFF2-40B4-BE49-F238E27FC236}">
-                <a16:creationId xmlns:a16="http://schemas.microsoft.com/office/drawing/2014/main" id="{F9B6843B-C454-4307-BEBE-47ABBA5CF08C}"/>
+                <a16:creationId xmlns:a16="http://schemas.microsoft.com/office/drawing/2014/main" id="{E4B209B5-CD5B-4DFE-9583-D1604C5B1AAA}"/>
               </a:ext>
             </a:extLst>
           </p:cNvPr>
@@ -6663,7 +6813,7 @@
           <p:cNvPr id="3" name="Content Placeholder 2">
             <a:extLst xmlns:a="http://schemas.openxmlformats.org/drawingml/2006/main">
               <a:ext uri="{FF2B5EF4-FFF2-40B4-BE49-F238E27FC236}">
-                <a16:creationId xmlns:a16="http://schemas.microsoft.com/office/drawing/2014/main" id="{F390AF5F-296B-499C-9889-27775BCF87D9}"/>
+                <a16:creationId xmlns:a16="http://schemas.microsoft.com/office/drawing/2014/main" id="{5DAA895D-1E2A-4D77-9F3E-65D30392A908}"/>
               </a:ext>
             </a:extLst>
           </p:cNvPr>
@@ -6767,7 +6917,7 @@
           <p:cNvPr id="4" name="Content Placeholder 3">
             <a:extLst xmlns:a="http://schemas.openxmlformats.org/drawingml/2006/main">
               <a:ext uri="{FF2B5EF4-FFF2-40B4-BE49-F238E27FC236}">
-                <a16:creationId xmlns:a16="http://schemas.microsoft.com/office/drawing/2014/main" id="{89492772-587D-4DD4-BC45-58AE9D993882}"/>
+                <a16:creationId xmlns:a16="http://schemas.microsoft.com/office/drawing/2014/main" id="{4A1DF213-B8C9-4D6E-B1E7-35942F3CAC13}"/>
               </a:ext>
             </a:extLst>
           </p:cNvPr>
@@ -6871,7 +7021,7 @@
           <p:cNvPr id="5" name="Date Placeholder 4">
             <a:extLst xmlns:a="http://schemas.openxmlformats.org/drawingml/2006/main">
               <a:ext uri="{FF2B5EF4-FFF2-40B4-BE49-F238E27FC236}">
-                <a16:creationId xmlns:a16="http://schemas.microsoft.com/office/drawing/2014/main" id="{DEF4CE6A-F011-4A93-9273-C805BD6B6308}"/>
+                <a16:creationId xmlns:a16="http://schemas.microsoft.com/office/drawing/2014/main" id="{B5429068-EDBF-45A1-AF5D-E8071AFC70FF}"/>
               </a:ext>
             </a:extLst>
           </p:cNvPr>
@@ -6898,7 +7048,7 @@
           <p:cNvPr id="6" name="Footer Placeholder 5">
             <a:extLst xmlns:a="http://schemas.openxmlformats.org/drawingml/2006/main">
               <a:ext uri="{FF2B5EF4-FFF2-40B4-BE49-F238E27FC236}">
-                <a16:creationId xmlns:a16="http://schemas.microsoft.com/office/drawing/2014/main" id="{4A967537-CE81-46C3-8573-F6CF4AB35779}"/>
+                <a16:creationId xmlns:a16="http://schemas.microsoft.com/office/drawing/2014/main" id="{9A83A1EF-25C2-4884-8FE9-682669C62CFA}"/>
               </a:ext>
             </a:extLst>
           </p:cNvPr>
@@ -6921,7 +7071,7 @@
           <p:cNvPr id="7" name="Slide Number Placeholder 6">
             <a:extLst xmlns:a="http://schemas.openxmlformats.org/drawingml/2006/main">
               <a:ext uri="{FF2B5EF4-FFF2-40B4-BE49-F238E27FC236}">
-                <a16:creationId xmlns:a16="http://schemas.microsoft.com/office/drawing/2014/main" id="{8993D110-51D2-46D9-9CD6-1C0823816284}"/>
+                <a16:creationId xmlns:a16="http://schemas.microsoft.com/office/drawing/2014/main" id="{FD891F80-2EDA-4A98-A490-51C31FD224A4}"/>
               </a:ext>
             </a:extLst>
           </p:cNvPr>
@@ -6965,7 +7115,7 @@
           <p:cNvPr id="2" name="Title 1">
             <a:extLst xmlns:a="http://schemas.openxmlformats.org/drawingml/2006/main">
               <a:ext uri="{FF2B5EF4-FFF2-40B4-BE49-F238E27FC236}">
-                <a16:creationId xmlns:a16="http://schemas.microsoft.com/office/drawing/2014/main" id="{7638EBC6-64F7-4F25-B27A-8C444FCC3A55}"/>
+                <a16:creationId xmlns:a16="http://schemas.microsoft.com/office/drawing/2014/main" id="{2A0E9607-A5D4-498B-8910-74C18991F0C1}"/>
               </a:ext>
             </a:extLst>
           </p:cNvPr>
@@ -6997,7 +7147,7 @@
           <p:cNvPr id="3" name="Text Placeholder 2">
             <a:extLst xmlns:a="http://schemas.openxmlformats.org/drawingml/2006/main">
               <a:ext uri="{FF2B5EF4-FFF2-40B4-BE49-F238E27FC236}">
-                <a16:creationId xmlns:a16="http://schemas.microsoft.com/office/drawing/2014/main" id="{6A16C816-9BD9-49B8-9297-1421F8CB81C7}"/>
+                <a16:creationId xmlns:a16="http://schemas.microsoft.com/office/drawing/2014/main" id="{1441C52F-C96A-4A45-8467-61F3E5BA5169}"/>
               </a:ext>
             </a:extLst>
           </p:cNvPr>
@@ -7069,7 +7219,7 @@
           <p:cNvPr id="4" name="Content Placeholder 3">
             <a:extLst xmlns:a="http://schemas.openxmlformats.org/drawingml/2006/main">
               <a:ext uri="{FF2B5EF4-FFF2-40B4-BE49-F238E27FC236}">
-                <a16:creationId xmlns:a16="http://schemas.microsoft.com/office/drawing/2014/main" id="{EE0ECA8B-8918-424F-B6C5-C0981053B763}"/>
+                <a16:creationId xmlns:a16="http://schemas.microsoft.com/office/drawing/2014/main" id="{CD947AB7-F4EC-4AB9-A8DD-15D34A5BFDBE}"/>
               </a:ext>
             </a:extLst>
           </p:cNvPr>
@@ -7173,7 +7323,7 @@
           <p:cNvPr id="5" name="Text Placeholder 4">
             <a:extLst xmlns:a="http://schemas.openxmlformats.org/drawingml/2006/main">
               <a:ext uri="{FF2B5EF4-FFF2-40B4-BE49-F238E27FC236}">
-                <a16:creationId xmlns:a16="http://schemas.microsoft.com/office/drawing/2014/main" id="{58E1C61B-8A13-4B03-A198-4DA99A3B5D05}"/>
+                <a16:creationId xmlns:a16="http://schemas.microsoft.com/office/drawing/2014/main" id="{2D0FE8AD-2C12-4DC9-A73E-F3B97004A920}"/>
               </a:ext>
             </a:extLst>
           </p:cNvPr>
@@ -7245,7 +7395,7 @@
           <p:cNvPr id="6" name="Content Placeholder 5">
             <a:extLst xmlns:a="http://schemas.openxmlformats.org/drawingml/2006/main">
               <a:ext uri="{FF2B5EF4-FFF2-40B4-BE49-F238E27FC236}">
-                <a16:creationId xmlns:a16="http://schemas.microsoft.com/office/drawing/2014/main" id="{FF784C1D-F1EA-4160-BD83-E145A7F2EDEF}"/>
+                <a16:creationId xmlns:a16="http://schemas.microsoft.com/office/drawing/2014/main" id="{FBC62794-F415-4343-B239-DD762E6611D1}"/>
               </a:ext>
             </a:extLst>
           </p:cNvPr>
@@ -7349,7 +7499,7 @@
           <p:cNvPr id="7" name="Date Placeholder 6">
             <a:extLst xmlns:a="http://schemas.openxmlformats.org/drawingml/2006/main">
               <a:ext uri="{FF2B5EF4-FFF2-40B4-BE49-F238E27FC236}">
-                <a16:creationId xmlns:a16="http://schemas.microsoft.com/office/drawing/2014/main" id="{2EB468C9-FB26-4A89-9E18-898B76E8BEBF}"/>
+                <a16:creationId xmlns:a16="http://schemas.microsoft.com/office/drawing/2014/main" id="{CE92EE15-F47B-4D07-9574-E31C5C7EF9AE}"/>
               </a:ext>
             </a:extLst>
           </p:cNvPr>
@@ -7376,7 +7526,7 @@
           <p:cNvPr id="8" name="Footer Placeholder 7">
             <a:extLst xmlns:a="http://schemas.openxmlformats.org/drawingml/2006/main">
               <a:ext uri="{FF2B5EF4-FFF2-40B4-BE49-F238E27FC236}">
-                <a16:creationId xmlns:a16="http://schemas.microsoft.com/office/drawing/2014/main" id="{49863939-2468-4D63-A8B0-4AA466D468E9}"/>
+                <a16:creationId xmlns:a16="http://schemas.microsoft.com/office/drawing/2014/main" id="{648DBBF5-7259-4C92-858B-FCB0073149EE}"/>
               </a:ext>
             </a:extLst>
           </p:cNvPr>
@@ -7399,7 +7549,7 @@
           <p:cNvPr id="9" name="Slide Number Placeholder 8">
             <a:extLst xmlns:a="http://schemas.openxmlformats.org/drawingml/2006/main">
               <a:ext uri="{FF2B5EF4-FFF2-40B4-BE49-F238E27FC236}">
-                <a16:creationId xmlns:a16="http://schemas.microsoft.com/office/drawing/2014/main" id="{0C8A1039-A24E-4B09-8E56-298EFEDB735F}"/>
+                <a16:creationId xmlns:a16="http://schemas.microsoft.com/office/drawing/2014/main" id="{DEBB2223-99C0-4222-9B50-8334C5212069}"/>
               </a:ext>
             </a:extLst>
           </p:cNvPr>
@@ -7443,7 +7593,7 @@
           <p:cNvPr id="2" name="Title 1">
             <a:extLst xmlns:a="http://schemas.openxmlformats.org/drawingml/2006/main">
               <a:ext uri="{FF2B5EF4-FFF2-40B4-BE49-F238E27FC236}">
-                <a16:creationId xmlns:a16="http://schemas.microsoft.com/office/drawing/2014/main" id="{4DA4D943-ECFD-4600-98B7-03E7F1DDE1B0}"/>
+                <a16:creationId xmlns:a16="http://schemas.microsoft.com/office/drawing/2014/main" id="{DC9DDD48-DED3-465E-8AB1-E072CE531F28}"/>
               </a:ext>
             </a:extLst>
           </p:cNvPr>
@@ -7470,7 +7620,7 @@
           <p:cNvPr id="3" name="Date Placeholder 2">
             <a:extLst xmlns:a="http://schemas.openxmlformats.org/drawingml/2006/main">
               <a:ext uri="{FF2B5EF4-FFF2-40B4-BE49-F238E27FC236}">
-                <a16:creationId xmlns:a16="http://schemas.microsoft.com/office/drawing/2014/main" id="{9D224667-A7C7-4E92-BCC7-753000CB3BF9}"/>
+                <a16:creationId xmlns:a16="http://schemas.microsoft.com/office/drawing/2014/main" id="{B3491764-0BC4-483D-809D-CBAD0DB5426D}"/>
               </a:ext>
             </a:extLst>
           </p:cNvPr>
@@ -7497,7 +7647,7 @@
           <p:cNvPr id="4" name="Footer Placeholder 3">
             <a:extLst xmlns:a="http://schemas.openxmlformats.org/drawingml/2006/main">
               <a:ext uri="{FF2B5EF4-FFF2-40B4-BE49-F238E27FC236}">
-                <a16:creationId xmlns:a16="http://schemas.microsoft.com/office/drawing/2014/main" id="{DFFBA738-0040-4A96-BFB1-DA14993B143C}"/>
+                <a16:creationId xmlns:a16="http://schemas.microsoft.com/office/drawing/2014/main" id="{1A7F2C13-2609-4D5D-B285-3DBE29A013AA}"/>
               </a:ext>
             </a:extLst>
           </p:cNvPr>
@@ -7520,7 +7670,7 @@
           <p:cNvPr id="5" name="Slide Number Placeholder 4">
             <a:extLst xmlns:a="http://schemas.openxmlformats.org/drawingml/2006/main">
               <a:ext uri="{FF2B5EF4-FFF2-40B4-BE49-F238E27FC236}">
-                <a16:creationId xmlns:a16="http://schemas.microsoft.com/office/drawing/2014/main" id="{2A93CB04-8A2A-4C82-87AC-3117BEAC0518}"/>
+                <a16:creationId xmlns:a16="http://schemas.microsoft.com/office/drawing/2014/main" id="{B5DCE662-09FF-4DAE-9F43-E1FB22875891}"/>
               </a:ext>
             </a:extLst>
           </p:cNvPr>
@@ -7564,7 +7714,7 @@
           <p:cNvPr id="2" name="Date Placeholder 1">
             <a:extLst xmlns:a="http://schemas.openxmlformats.org/drawingml/2006/main">
               <a:ext uri="{FF2B5EF4-FFF2-40B4-BE49-F238E27FC236}">
-                <a16:creationId xmlns:a16="http://schemas.microsoft.com/office/drawing/2014/main" id="{DEB5A4AE-0104-4589-AF72-9EEDF9A21FB2}"/>
+                <a16:creationId xmlns:a16="http://schemas.microsoft.com/office/drawing/2014/main" id="{E1A94698-17B5-4A30-B82B-B84CB539E180}"/>
               </a:ext>
             </a:extLst>
           </p:cNvPr>
@@ -7591,7 +7741,7 @@
           <p:cNvPr id="3" name="Footer Placeholder 2">
             <a:extLst xmlns:a="http://schemas.openxmlformats.org/drawingml/2006/main">
               <a:ext uri="{FF2B5EF4-FFF2-40B4-BE49-F238E27FC236}">
-                <a16:creationId xmlns:a16="http://schemas.microsoft.com/office/drawing/2014/main" id="{3E82B34A-F846-4E57-AEC0-983715F6CABF}"/>
+                <a16:creationId xmlns:a16="http://schemas.microsoft.com/office/drawing/2014/main" id="{F0AC8077-4C60-4AFB-A0F6-643AC791F5EF}"/>
               </a:ext>
             </a:extLst>
           </p:cNvPr>
@@ -7614,7 +7764,7 @@
           <p:cNvPr id="4" name="Slide Number Placeholder 3">
             <a:extLst xmlns:a="http://schemas.openxmlformats.org/drawingml/2006/main">
               <a:ext uri="{FF2B5EF4-FFF2-40B4-BE49-F238E27FC236}">
-                <a16:creationId xmlns:a16="http://schemas.microsoft.com/office/drawing/2014/main" id="{324D920B-ED70-43FF-ABF5-E67B8C11B4B9}"/>
+                <a16:creationId xmlns:a16="http://schemas.microsoft.com/office/drawing/2014/main" id="{F80A796B-EFF2-4928-80DC-77F852577ED8}"/>
               </a:ext>
             </a:extLst>
           </p:cNvPr>
@@ -7658,7 +7808,7 @@
           <p:cNvPr id="2" name="Title 1">
             <a:extLst xmlns:a="http://schemas.openxmlformats.org/drawingml/2006/main">
               <a:ext uri="{FF2B5EF4-FFF2-40B4-BE49-F238E27FC236}">
-                <a16:creationId xmlns:a16="http://schemas.microsoft.com/office/drawing/2014/main" id="{94166E5B-1F1D-4788-B234-3EFC33E3B027}"/>
+                <a16:creationId xmlns:a16="http://schemas.microsoft.com/office/drawing/2014/main" id="{CF6BE994-EE10-49F0-AC43-3D88AECB0B12}"/>
               </a:ext>
             </a:extLst>
           </p:cNvPr>
@@ -7695,7 +7845,7 @@
           <p:cNvPr id="3" name="Content Placeholder 2">
             <a:extLst xmlns:a="http://schemas.openxmlformats.org/drawingml/2006/main">
               <a:ext uri="{FF2B5EF4-FFF2-40B4-BE49-F238E27FC236}">
-                <a16:creationId xmlns:a16="http://schemas.microsoft.com/office/drawing/2014/main" id="{967547F2-0484-4438-A3AF-25639660D824}"/>
+                <a16:creationId xmlns:a16="http://schemas.microsoft.com/office/drawing/2014/main" id="{1EACB8B2-DA0A-4C24-A84B-1478006B2165}"/>
               </a:ext>
             </a:extLst>
           </p:cNvPr>
@@ -7799,7 +7949,7 @@
           <p:cNvPr id="4" name="Text Placeholder 3">
             <a:extLst xmlns:a="http://schemas.openxmlformats.org/drawingml/2006/main">
               <a:ext uri="{FF2B5EF4-FFF2-40B4-BE49-F238E27FC236}">
-                <a16:creationId xmlns:a16="http://schemas.microsoft.com/office/drawing/2014/main" id="{8E43178A-0F80-4919-AD9B-C66F960AB179}"/>
+                <a16:creationId xmlns:a16="http://schemas.microsoft.com/office/drawing/2014/main" id="{CB172D62-2396-46A4-86C4-C207796BB4E2}"/>
               </a:ext>
             </a:extLst>
           </p:cNvPr>
@@ -7871,7 +8021,7 @@
           <p:cNvPr id="5" name="Date Placeholder 4">
             <a:extLst xmlns:a="http://schemas.openxmlformats.org/drawingml/2006/main">
               <a:ext uri="{FF2B5EF4-FFF2-40B4-BE49-F238E27FC236}">
-                <a16:creationId xmlns:a16="http://schemas.microsoft.com/office/drawing/2014/main" id="{7E4853E6-0ABD-4C38-89CA-E72D023B4B68}"/>
+                <a16:creationId xmlns:a16="http://schemas.microsoft.com/office/drawing/2014/main" id="{90A013F0-DE83-4EF9-A637-3B64C722E413}"/>
               </a:ext>
             </a:extLst>
           </p:cNvPr>
@@ -7898,7 +8048,7 @@
           <p:cNvPr id="6" name="Footer Placeholder 5">
             <a:extLst xmlns:a="http://schemas.openxmlformats.org/drawingml/2006/main">
               <a:ext uri="{FF2B5EF4-FFF2-40B4-BE49-F238E27FC236}">
-                <a16:creationId xmlns:a16="http://schemas.microsoft.com/office/drawing/2014/main" id="{E1B2B4FE-E678-4D1B-A538-6B618E81E1D5}"/>
+                <a16:creationId xmlns:a16="http://schemas.microsoft.com/office/drawing/2014/main" id="{767FF579-0953-4107-8B44-F69513E01A62}"/>
               </a:ext>
             </a:extLst>
           </p:cNvPr>
@@ -7921,7 +8071,7 @@
           <p:cNvPr id="7" name="Slide Number Placeholder 6">
             <a:extLst xmlns:a="http://schemas.openxmlformats.org/drawingml/2006/main">
               <a:ext uri="{FF2B5EF4-FFF2-40B4-BE49-F238E27FC236}">
-                <a16:creationId xmlns:a16="http://schemas.microsoft.com/office/drawing/2014/main" id="{790B146F-A3B8-4764-AF98-1C43E311E194}"/>
+                <a16:creationId xmlns:a16="http://schemas.microsoft.com/office/drawing/2014/main" id="{F4D1BAB0-CC06-4264-8ED2-96FCC176109C}"/>
               </a:ext>
             </a:extLst>
           </p:cNvPr>
@@ -7965,7 +8115,7 @@
           <p:cNvPr id="2" name="Title 1">
             <a:extLst xmlns:a="http://schemas.openxmlformats.org/drawingml/2006/main">
               <a:ext uri="{FF2B5EF4-FFF2-40B4-BE49-F238E27FC236}">
-                <a16:creationId xmlns:a16="http://schemas.microsoft.com/office/drawing/2014/main" id="{8E1DA40D-8840-420A-BFDB-8593661FAB64}"/>
+                <a16:creationId xmlns:a16="http://schemas.microsoft.com/office/drawing/2014/main" id="{EC30FC71-3796-4EE2-81ED-BFB57CC120AA}"/>
               </a:ext>
             </a:extLst>
           </p:cNvPr>
@@ -8002,7 +8152,7 @@
           <p:cNvPr id="3" name="Picture Placeholder 2">
             <a:extLst xmlns:a="http://schemas.openxmlformats.org/drawingml/2006/main">
               <a:ext uri="{FF2B5EF4-FFF2-40B4-BE49-F238E27FC236}">
-                <a16:creationId xmlns:a16="http://schemas.microsoft.com/office/drawing/2014/main" id="{6D4FBB96-E047-4A34-8401-C10D43FB2B6F}"/>
+                <a16:creationId xmlns:a16="http://schemas.microsoft.com/office/drawing/2014/main" id="{48218A65-AB0D-4BDD-9BE5-4AE73A9F63DF}"/>
               </a:ext>
             </a:extLst>
           </p:cNvPr>
@@ -8067,7 +8217,7 @@
           <p:cNvPr id="4" name="Text Placeholder 3">
             <a:extLst xmlns:a="http://schemas.openxmlformats.org/drawingml/2006/main">
               <a:ext uri="{FF2B5EF4-FFF2-40B4-BE49-F238E27FC236}">
-                <a16:creationId xmlns:a16="http://schemas.microsoft.com/office/drawing/2014/main" id="{D05D1B57-5371-4322-B7DB-FB9BF8C6A5EE}"/>
+                <a16:creationId xmlns:a16="http://schemas.microsoft.com/office/drawing/2014/main" id="{3E9E5046-C68A-48FD-A0AD-3339924A7939}"/>
               </a:ext>
             </a:extLst>
           </p:cNvPr>
@@ -8139,7 +8289,7 @@
           <p:cNvPr id="5" name="Date Placeholder 4">
             <a:extLst xmlns:a="http://schemas.openxmlformats.org/drawingml/2006/main">
               <a:ext uri="{FF2B5EF4-FFF2-40B4-BE49-F238E27FC236}">
-                <a16:creationId xmlns:a16="http://schemas.microsoft.com/office/drawing/2014/main" id="{C950766E-B75B-4E99-81BC-5ABD172F2877}"/>
+                <a16:creationId xmlns:a16="http://schemas.microsoft.com/office/drawing/2014/main" id="{6F90ECC2-1E60-4194-8516-F6324C86C9D4}"/>
               </a:ext>
             </a:extLst>
           </p:cNvPr>
@@ -8166,7 +8316,7 @@
           <p:cNvPr id="6" name="Footer Placeholder 5">
             <a:extLst xmlns:a="http://schemas.openxmlformats.org/drawingml/2006/main">
               <a:ext uri="{FF2B5EF4-FFF2-40B4-BE49-F238E27FC236}">
-                <a16:creationId xmlns:a16="http://schemas.microsoft.com/office/drawing/2014/main" id="{12BED30D-ECAB-4AE2-8A91-D390E35A4B7B}"/>
+                <a16:creationId xmlns:a16="http://schemas.microsoft.com/office/drawing/2014/main" id="{3CE6BC4D-4EB6-4222-A6F7-F70C6E975B40}"/>
               </a:ext>
             </a:extLst>
           </p:cNvPr>
@@ -8189,7 +8339,7 @@
           <p:cNvPr id="7" name="Slide Number Placeholder 6">
             <a:extLst xmlns:a="http://schemas.openxmlformats.org/drawingml/2006/main">
               <a:ext uri="{FF2B5EF4-FFF2-40B4-BE49-F238E27FC236}">
-                <a16:creationId xmlns:a16="http://schemas.microsoft.com/office/drawing/2014/main" id="{6377FAA4-0FEC-426B-8F69-7C6BD907FF01}"/>
+                <a16:creationId xmlns:a16="http://schemas.microsoft.com/office/drawing/2014/main" id="{215DC537-4321-46DF-B3E0-6DD45E23A84C}"/>
               </a:ext>
             </a:extLst>
           </p:cNvPr>
@@ -8238,7 +8388,7 @@
           <p:cNvPr id="2" name="Title Placeholder 1">
             <a:extLst xmlns:a="http://schemas.openxmlformats.org/drawingml/2006/main">
               <a:ext uri="{FF2B5EF4-FFF2-40B4-BE49-F238E27FC236}">
-                <a16:creationId xmlns:a16="http://schemas.microsoft.com/office/drawing/2014/main" id="{E6D598FD-11FA-4F67-B510-7478A3C5B469}"/>
+                <a16:creationId xmlns:a16="http://schemas.microsoft.com/office/drawing/2014/main" id="{5AA7D070-B0B0-44A4-9C7F-1B932FE9D1CF}"/>
               </a:ext>
             </a:extLst>
           </p:cNvPr>
@@ -8275,7 +8425,7 @@
           <p:cNvPr id="3" name="Text Placeholder 2">
             <a:extLst xmlns:a="http://schemas.openxmlformats.org/drawingml/2006/main">
               <a:ext uri="{FF2B5EF4-FFF2-40B4-BE49-F238E27FC236}">
-                <a16:creationId xmlns:a16="http://schemas.microsoft.com/office/drawing/2014/main" id="{1BBEB3AF-8606-48F5-BFE1-20B120DEA509}"/>
+                <a16:creationId xmlns:a16="http://schemas.microsoft.com/office/drawing/2014/main" id="{FF57E15E-5B52-491E-830F-6517A3880C0C}"/>
               </a:ext>
             </a:extLst>
           </p:cNvPr>
@@ -8347,7 +8497,7 @@
           <p:cNvPr id="4" name="Date Placeholder 3">
             <a:extLst xmlns:a="http://schemas.openxmlformats.org/drawingml/2006/main">
               <a:ext uri="{FF2B5EF4-FFF2-40B4-BE49-F238E27FC236}">
-                <a16:creationId xmlns:a16="http://schemas.microsoft.com/office/drawing/2014/main" id="{2C06F3A9-9C81-4054-8F67-B8F66A07DC39}"/>
+                <a16:creationId xmlns:a16="http://schemas.microsoft.com/office/drawing/2014/main" id="{2FC65436-960B-4309-B4A3-1B15064059B4}"/>
               </a:ext>
             </a:extLst>
           </p:cNvPr>
@@ -8393,7 +8543,7 @@
           <p:cNvPr id="5" name="Footer Placeholder 4">
             <a:extLst xmlns:a="http://schemas.openxmlformats.org/drawingml/2006/main">
               <a:ext uri="{FF2B5EF4-FFF2-40B4-BE49-F238E27FC236}">
-                <a16:creationId xmlns:a16="http://schemas.microsoft.com/office/drawing/2014/main" id="{57809F09-2253-44B8-8698-72335A39D558}"/>
+                <a16:creationId xmlns:a16="http://schemas.microsoft.com/office/drawing/2014/main" id="{C0B70A38-4F0F-40AC-A4EF-3F25D56EA34B}"/>
               </a:ext>
             </a:extLst>
           </p:cNvPr>
@@ -8435,7 +8585,7 @@
           <p:cNvPr id="6" name="Slide Number Placeholder 5">
             <a:extLst xmlns:a="http://schemas.openxmlformats.org/drawingml/2006/main">
               <a:ext uri="{FF2B5EF4-FFF2-40B4-BE49-F238E27FC236}">
-                <a16:creationId xmlns:a16="http://schemas.microsoft.com/office/drawing/2014/main" id="{81B69F8B-341F-4193-907F-1C4DE1936CCE}"/>
+                <a16:creationId xmlns:a16="http://schemas.microsoft.com/office/drawing/2014/main" id="{260D2142-8FD6-40BE-8CC1-A50632C86AAC}"/>
               </a:ext>
             </a:extLst>
           </p:cNvPr>
@@ -8480,17 +8630,17 @@
   </p:cSld>
   <p:clrMap bg1="lt1" tx1="dk1" bg2="lt2" tx2="dk2" accent1="accent1" accent2="accent2" accent3="accent3" accent4="accent4" accent5="accent5" accent6="accent6" hlink="hlink" folHlink="folHlink"/>
   <p:sldLayoutIdLst>
-    <p:sldLayoutId xmlns:r="http://schemas.openxmlformats.org/officeDocument/2006/relationships" id="2147483649" r:id="Rf539fb30d8fa4d25"/>
-    <p:sldLayoutId xmlns:r="http://schemas.openxmlformats.org/officeDocument/2006/relationships" id="2147483650" r:id="Rd2a820b5140148df"/>
-    <p:sldLayoutId xmlns:r="http://schemas.openxmlformats.org/officeDocument/2006/relationships" id="2147483651" r:id="R9d8b5543be5248b3"/>
-    <p:sldLayoutId xmlns:r="http://schemas.openxmlformats.org/officeDocument/2006/relationships" id="2147483652" r:id="R76f96a4384f44996"/>
-    <p:sldLayoutId xmlns:r="http://schemas.openxmlformats.org/officeDocument/2006/relationships" id="2147483653" r:id="Re93b844baa19494b"/>
-    <p:sldLayoutId xmlns:r="http://schemas.openxmlformats.org/officeDocument/2006/relationships" id="2147483654" r:id="Rcb2b54168a63457e"/>
-    <p:sldLayoutId xmlns:r="http://schemas.openxmlformats.org/officeDocument/2006/relationships" id="2147483655" r:id="R7086249235f34ee5"/>
-    <p:sldLayoutId xmlns:r="http://schemas.openxmlformats.org/officeDocument/2006/relationships" id="2147483656" r:id="R11d7e4b4bb2e4db6"/>
-    <p:sldLayoutId xmlns:r="http://schemas.openxmlformats.org/officeDocument/2006/relationships" id="2147483657" r:id="R1e70447e8a2e4eee"/>
-    <p:sldLayoutId xmlns:r="http://schemas.openxmlformats.org/officeDocument/2006/relationships" id="2147483658" r:id="R66d3e065738045b3"/>
-    <p:sldLayoutId xmlns:r="http://schemas.openxmlformats.org/officeDocument/2006/relationships" id="2147483659" r:id="R33bc419b734e4eb3"/>
+    <p:sldLayoutId xmlns:r="http://schemas.openxmlformats.org/officeDocument/2006/relationships" id="2147483649" r:id="R17ad1cbb81424fe8"/>
+    <p:sldLayoutId xmlns:r="http://schemas.openxmlformats.org/officeDocument/2006/relationships" id="2147483650" r:id="Re924789d07924db6"/>
+    <p:sldLayoutId xmlns:r="http://schemas.openxmlformats.org/officeDocument/2006/relationships" id="2147483651" r:id="R66e360aa5be44571"/>
+    <p:sldLayoutId xmlns:r="http://schemas.openxmlformats.org/officeDocument/2006/relationships" id="2147483652" r:id="Reabdfc5fa717410a"/>
+    <p:sldLayoutId xmlns:r="http://schemas.openxmlformats.org/officeDocument/2006/relationships" id="2147483653" r:id="Rcc0b2919dd244f33"/>
+    <p:sldLayoutId xmlns:r="http://schemas.openxmlformats.org/officeDocument/2006/relationships" id="2147483654" r:id="R36f81dfde74c4c3d"/>
+    <p:sldLayoutId xmlns:r="http://schemas.openxmlformats.org/officeDocument/2006/relationships" id="2147483655" r:id="R11ebaf6dd901459f"/>
+    <p:sldLayoutId xmlns:r="http://schemas.openxmlformats.org/officeDocument/2006/relationships" id="2147483656" r:id="R73bb7665652842ef"/>
+    <p:sldLayoutId xmlns:r="http://schemas.openxmlformats.org/officeDocument/2006/relationships" id="2147483657" r:id="R0e487d3a018c4db7"/>
+    <p:sldLayoutId xmlns:r="http://schemas.openxmlformats.org/officeDocument/2006/relationships" id="2147483658" r:id="R168b0b68b4ce4bb1"/>
+    <p:sldLayoutId xmlns:r="http://schemas.openxmlformats.org/officeDocument/2006/relationships" id="2147483659" r:id="Rd674687fcca84749"/>
   </p:sldLayoutIdLst>
   <p:txStyles>
     <p:titleStyle>
@@ -9043,7 +9193,7 @@
           <p:cNvPr id="2" name="Rectangle 1">
             <a:extLst xmlns:a="http://schemas.openxmlformats.org/drawingml/2006/main">
               <a:ext uri="{FF2B5EF4-FFF2-40B4-BE49-F238E27FC236}">
-                <a16:creationId xmlns:a16="http://schemas.microsoft.com/office/drawing/2014/main" id="{E511A9B0-DBAB-469B-8BAE-127EEB9A2357}"/>
+                <a16:creationId xmlns:a16="http://schemas.microsoft.com/office/drawing/2014/main" id="{265B9334-A38F-4CAA-90FB-CE888398BA7B}"/>
               </a:ext>
             </a:extLst>
           </p:cNvPr>
@@ -9098,7 +9248,7 @@
           <p:cNvPr id="3" name="TextBox 2">
             <a:extLst xmlns:a="http://schemas.openxmlformats.org/drawingml/2006/main">
               <a:ext uri="{FF2B5EF4-FFF2-40B4-BE49-F238E27FC236}">
-                <a16:creationId xmlns:a16="http://schemas.microsoft.com/office/drawing/2014/main" id="{7F42237C-4AB0-42B8-B5A4-86E492DA4853}"/>
+                <a16:creationId xmlns:a16="http://schemas.microsoft.com/office/drawing/2014/main" id="{FC8D0A31-3A7C-440F-85AF-C73DB433695C}"/>
               </a:ext>
             </a:extLst>
           </p:cNvPr>
@@ -9145,7 +9295,7 @@
           <p:cNvPr id="4" name="TextBox 3">
             <a:extLst xmlns:a="http://schemas.openxmlformats.org/drawingml/2006/main">
               <a:ext uri="{FF2B5EF4-FFF2-40B4-BE49-F238E27FC236}">
-                <a16:creationId xmlns:a16="http://schemas.microsoft.com/office/drawing/2014/main" id="{402EDB86-F83E-4DE9-9A1B-691FFFC8771E}"/>
+                <a16:creationId xmlns:a16="http://schemas.microsoft.com/office/drawing/2014/main" id="{27A91752-4907-47F3-8590-58AF1C7D02A7}"/>
               </a:ext>
             </a:extLst>
           </p:cNvPr>
@@ -9193,7 +9343,7 @@
           <p:cNvPr id="5" name="TextBox 4">
             <a:extLst xmlns:a="http://schemas.openxmlformats.org/drawingml/2006/main">
               <a:ext uri="{FF2B5EF4-FFF2-40B4-BE49-F238E27FC236}">
-                <a16:creationId xmlns:a16="http://schemas.microsoft.com/office/drawing/2014/main" id="{6DAC7BA3-8A0C-4672-9FBC-E5F73EFB5D42}"/>
+                <a16:creationId xmlns:a16="http://schemas.microsoft.com/office/drawing/2014/main" id="{D48CD8E1-9E6E-46D4-A1FA-83FF0A23645B}"/>
               </a:ext>
             </a:extLst>
           </p:cNvPr>
@@ -9240,7 +9390,7 @@
           <p:cNvPr id="6" name="Rectangle 5">
             <a:extLst xmlns:a="http://schemas.openxmlformats.org/drawingml/2006/main">
               <a:ext uri="{FF2B5EF4-FFF2-40B4-BE49-F238E27FC236}">
-                <a16:creationId xmlns:a16="http://schemas.microsoft.com/office/drawing/2014/main" id="{F84E4700-170E-412B-8CEA-26E4B6A51A19}"/>
+                <a16:creationId xmlns:a16="http://schemas.microsoft.com/office/drawing/2014/main" id="{A33791A1-4858-47CA-AEB5-F22AFB83CE97}"/>
               </a:ext>
             </a:extLst>
           </p:cNvPr>
@@ -9295,7 +9445,7 @@
           <p:cNvPr id="7" name="TextBox 6">
             <a:extLst xmlns:a="http://schemas.openxmlformats.org/drawingml/2006/main">
               <a:ext uri="{FF2B5EF4-FFF2-40B4-BE49-F238E27FC236}">
-                <a16:creationId xmlns:a16="http://schemas.microsoft.com/office/drawing/2014/main" id="{DE263E8A-8796-4E79-9F35-33A818B45599}"/>
+                <a16:creationId xmlns:a16="http://schemas.microsoft.com/office/drawing/2014/main" id="{E03A19B9-80C3-4187-99AC-16772F27D238}"/>
               </a:ext>
             </a:extLst>
           </p:cNvPr>
@@ -9342,7 +9492,7 @@
           <p:cNvPr id="8" name="TextBox 7">
             <a:extLst xmlns:a="http://schemas.openxmlformats.org/drawingml/2006/main">
               <a:ext uri="{FF2B5EF4-FFF2-40B4-BE49-F238E27FC236}">
-                <a16:creationId xmlns:a16="http://schemas.microsoft.com/office/drawing/2014/main" id="{B387FA1F-18E5-42FC-B651-1FA4FA12BCDC}"/>
+                <a16:creationId xmlns:a16="http://schemas.microsoft.com/office/drawing/2014/main" id="{AB1C72D6-4492-4453-951C-306687D155D2}"/>
               </a:ext>
             </a:extLst>
           </p:cNvPr>
@@ -9379,7 +9529,7 @@
                 <a:ea typeface="Aptos"/>
                 <a:cs typeface="Aptos"/>
               </a:rPr>
-              <a:t>2026.07.24-21</a:t>
+              <a:t>2026.07.24-22</a:t>
             </a:r>
           </a:p>
         </p:txBody>
@@ -9389,7 +9539,7 @@
           <p:cNvPr id="9" name="TextBox 8">
             <a:extLst xmlns:a="http://schemas.openxmlformats.org/drawingml/2006/main">
               <a:ext uri="{FF2B5EF4-FFF2-40B4-BE49-F238E27FC236}">
-                <a16:creationId xmlns:a16="http://schemas.microsoft.com/office/drawing/2014/main" id="{7C5E6E29-D8A7-4E02-9A2A-81594EDA99DA}"/>
+                <a16:creationId xmlns:a16="http://schemas.microsoft.com/office/drawing/2014/main" id="{39FCDE83-E88A-4459-93D9-C186ADFEB0C9}"/>
               </a:ext>
             </a:extLst>
           </p:cNvPr>
@@ -9437,7 +9587,7 @@
           <p:cNvPr id="10" name="TextBox 9">
             <a:extLst xmlns:a="http://schemas.openxmlformats.org/drawingml/2006/main">
               <a:ext uri="{FF2B5EF4-FFF2-40B4-BE49-F238E27FC236}">
-                <a16:creationId xmlns:a16="http://schemas.microsoft.com/office/drawing/2014/main" id="{CFE06209-0470-41F7-BF5C-AB7EA289A7DF}"/>
+                <a16:creationId xmlns:a16="http://schemas.microsoft.com/office/drawing/2014/main" id="{6DDEF69C-D26B-4101-A2F8-1EE1BD812922}"/>
               </a:ext>
             </a:extLst>
           </p:cNvPr>
@@ -9484,7 +9634,7 @@
           <p:cNvPr id="11" name="TextBox 10">
             <a:extLst xmlns:a="http://schemas.openxmlformats.org/drawingml/2006/main">
               <a:ext uri="{FF2B5EF4-FFF2-40B4-BE49-F238E27FC236}">
-                <a16:creationId xmlns:a16="http://schemas.microsoft.com/office/drawing/2014/main" id="{4DE11E59-3D8F-412E-B75C-CD2FA1BDAF1B}"/>
+                <a16:creationId xmlns:a16="http://schemas.microsoft.com/office/drawing/2014/main" id="{E401BB98-B799-40D7-B0E6-1EF019E976D4}"/>
               </a:ext>
             </a:extLst>
           </p:cNvPr>
@@ -9531,7 +9681,7 @@
           <p:cNvPr id="12" name="TextBox 11">
             <a:extLst xmlns:a="http://schemas.openxmlformats.org/drawingml/2006/main">
               <a:ext uri="{FF2B5EF4-FFF2-40B4-BE49-F238E27FC236}">
-                <a16:creationId xmlns:a16="http://schemas.microsoft.com/office/drawing/2014/main" id="{B07C7063-E5E2-40DF-AA0B-E2712BA8E38B}"/>
+                <a16:creationId xmlns:a16="http://schemas.microsoft.com/office/drawing/2014/main" id="{F0828EC4-0796-4298-93B3-7898A648C7BF}"/>
               </a:ext>
             </a:extLst>
           </p:cNvPr>
@@ -9576,7 +9726,7 @@
     </p:spTree>
     <p:extLst>
       <p:ext uri="{BB962C8B-B14F-4D97-AF65-F5344CB8AC3E}">
-        <p14:creationId xmlns:p14="http://schemas.microsoft.com/office/powerpoint/2010/main" val="204832985"/>
+        <p14:creationId xmlns:p14="http://schemas.microsoft.com/office/powerpoint/2010/main" val="2132878155"/>
       </p:ext>
     </p:extLst>
   </p:cSld>
@@ -9600,7 +9750,7 @@
           <p:cNvPr id="2" name="TextBox 1">
             <a:extLst xmlns:a="http://schemas.openxmlformats.org/drawingml/2006/main">
               <a:ext uri="{FF2B5EF4-FFF2-40B4-BE49-F238E27FC236}">
-                <a16:creationId xmlns:a16="http://schemas.microsoft.com/office/drawing/2014/main" id="{43B34AAC-EB71-463B-B90A-0B0A5178D805}"/>
+                <a16:creationId xmlns:a16="http://schemas.microsoft.com/office/drawing/2014/main" id="{0408A885-7FAA-44AE-B822-8800B0E32C43}"/>
               </a:ext>
             </a:extLst>
           </p:cNvPr>
@@ -9647,7 +9797,7 @@
           <p:cNvPr id="3" name="TextBox 2">
             <a:extLst xmlns:a="http://schemas.openxmlformats.org/drawingml/2006/main">
               <a:ext uri="{FF2B5EF4-FFF2-40B4-BE49-F238E27FC236}">
-                <a16:creationId xmlns:a16="http://schemas.microsoft.com/office/drawing/2014/main" id="{E6004B96-F78C-4D9C-8E75-56D642ABAF5E}"/>
+                <a16:creationId xmlns:a16="http://schemas.microsoft.com/office/drawing/2014/main" id="{B806FB4B-5B83-4EC3-B70B-3A474E759EB9}"/>
               </a:ext>
             </a:extLst>
           </p:cNvPr>
@@ -9694,7 +9844,7 @@
           <p:cNvPr id="4" name="Rectangle 3">
             <a:extLst xmlns:a="http://schemas.openxmlformats.org/drawingml/2006/main">
               <a:ext uri="{FF2B5EF4-FFF2-40B4-BE49-F238E27FC236}">
-                <a16:creationId xmlns:a16="http://schemas.microsoft.com/office/drawing/2014/main" id="{60794E05-BB2D-4625-B009-4AEB937C7E81}"/>
+                <a16:creationId xmlns:a16="http://schemas.microsoft.com/office/drawing/2014/main" id="{66445A34-F947-4BB6-A47D-B30E45163EBC}"/>
               </a:ext>
             </a:extLst>
           </p:cNvPr>
@@ -9749,7 +9899,7 @@
           <p:cNvPr id="5" name="Rectangle 4">
             <a:extLst xmlns:a="http://schemas.openxmlformats.org/drawingml/2006/main">
               <a:ext uri="{FF2B5EF4-FFF2-40B4-BE49-F238E27FC236}">
-                <a16:creationId xmlns:a16="http://schemas.microsoft.com/office/drawing/2014/main" id="{EABBBE08-6F1A-4F72-AB1B-2C67FA85B8DB}"/>
+                <a16:creationId xmlns:a16="http://schemas.microsoft.com/office/drawing/2014/main" id="{29D5CE0E-D598-4671-B21B-02D3334116E8}"/>
               </a:ext>
             </a:extLst>
           </p:cNvPr>
@@ -9804,7 +9954,7 @@
           <p:cNvPr id="6" name="TextBox 5">
             <a:extLst xmlns:a="http://schemas.openxmlformats.org/drawingml/2006/main">
               <a:ext uri="{FF2B5EF4-FFF2-40B4-BE49-F238E27FC236}">
-                <a16:creationId xmlns:a16="http://schemas.microsoft.com/office/drawing/2014/main" id="{C428A051-262A-4F6B-8074-99EF0A6D03F6}"/>
+                <a16:creationId xmlns:a16="http://schemas.microsoft.com/office/drawing/2014/main" id="{07BC27B2-4DAA-4D0D-B2CC-400C77BF09E5}"/>
               </a:ext>
             </a:extLst>
           </p:cNvPr>
@@ -9841,7 +9991,7 @@
                 <a:ea typeface="Aptos"/>
                 <a:cs typeface="Aptos"/>
               </a:rPr>
-              <a:t>Julkinen riippumaton evidenssikooste · 2026.07.24-21 · 2026-07-24 · Lähteet: RPX; CNIPA guidance; EPO family</a:t>
+              <a:t>Julkinen riippumaton evidenssikooste · 2026.07.24-22 · 2026-07-24 · Lähteet: RPX; CNIPA guidance; EPO family</a:t>
             </a:r>
           </a:p>
         </p:txBody>
@@ -9851,7 +10001,7 @@
           <p:cNvPr id="7" name="TextBox 6">
             <a:extLst xmlns:a="http://schemas.openxmlformats.org/drawingml/2006/main">
               <a:ext uri="{FF2B5EF4-FFF2-40B4-BE49-F238E27FC236}">
-                <a16:creationId xmlns:a16="http://schemas.microsoft.com/office/drawing/2014/main" id="{F1A7AA4B-0F94-4621-AC3C-47F46F26B76C}"/>
+                <a16:creationId xmlns:a16="http://schemas.microsoft.com/office/drawing/2014/main" id="{9F4A6476-7BDD-4981-A14F-4BE8E2DF97B1}"/>
               </a:ext>
             </a:extLst>
           </p:cNvPr>
@@ -9898,7 +10048,7 @@
           <p:cNvPr id="8" name="TextBox 7">
             <a:extLst xmlns:a="http://schemas.openxmlformats.org/drawingml/2006/main">
               <a:ext uri="{FF2B5EF4-FFF2-40B4-BE49-F238E27FC236}">
-                <a16:creationId xmlns:a16="http://schemas.microsoft.com/office/drawing/2014/main" id="{2CA95096-D557-4DF3-970C-3D629BE086D9}"/>
+                <a16:creationId xmlns:a16="http://schemas.microsoft.com/office/drawing/2014/main" id="{9984362F-FAF0-47B8-9CC4-5EAE0C383DA8}"/>
               </a:ext>
             </a:extLst>
           </p:cNvPr>
@@ -9945,7 +10095,7 @@
           <p:cNvPr id="9" name="TextBox 8">
             <a:extLst xmlns:a="http://schemas.openxmlformats.org/drawingml/2006/main">
               <a:ext uri="{FF2B5EF4-FFF2-40B4-BE49-F238E27FC236}">
-                <a16:creationId xmlns:a16="http://schemas.microsoft.com/office/drawing/2014/main" id="{877955E0-F8C5-4E64-9AD0-86E8D70F7272}"/>
+                <a16:creationId xmlns:a16="http://schemas.microsoft.com/office/drawing/2014/main" id="{DB2401E7-3D07-43AB-BFD5-C095BC859F68}"/>
               </a:ext>
             </a:extLst>
           </p:cNvPr>
@@ -10042,7 +10192,7 @@
           <p:cNvPr id="10" name="Rounded Rectangle 9">
             <a:extLst xmlns:a="http://schemas.openxmlformats.org/drawingml/2006/main">
               <a:ext uri="{FF2B5EF4-FFF2-40B4-BE49-F238E27FC236}">
-                <a16:creationId xmlns:a16="http://schemas.microsoft.com/office/drawing/2014/main" id="{A5922C31-063A-46B4-AEDF-7545729A2168}"/>
+                <a16:creationId xmlns:a16="http://schemas.microsoft.com/office/drawing/2014/main" id="{8F35EB86-874A-4B0A-A260-9904F8138CAF}"/>
               </a:ext>
             </a:extLst>
           </p:cNvPr>
@@ -10099,7 +10249,7 @@
           <p:cNvPr id="11" name="TextBox 10">
             <a:extLst xmlns:a="http://schemas.openxmlformats.org/drawingml/2006/main">
               <a:ext uri="{FF2B5EF4-FFF2-40B4-BE49-F238E27FC236}">
-                <a16:creationId xmlns:a16="http://schemas.microsoft.com/office/drawing/2014/main" id="{6075B93C-CB1E-4E63-AAD7-984AB47BC6D0}"/>
+                <a16:creationId xmlns:a16="http://schemas.microsoft.com/office/drawing/2014/main" id="{FED96A89-5437-4B48-8A25-B3E942AAEE37}"/>
               </a:ext>
             </a:extLst>
           </p:cNvPr>
@@ -10146,7 +10296,7 @@
           <p:cNvPr id="12" name="TextBox 11">
             <a:extLst xmlns:a="http://schemas.openxmlformats.org/drawingml/2006/main">
               <a:ext uri="{FF2B5EF4-FFF2-40B4-BE49-F238E27FC236}">
-                <a16:creationId xmlns:a16="http://schemas.microsoft.com/office/drawing/2014/main" id="{0514631B-33B2-4140-AF1E-90E26EF43FE3}"/>
+                <a16:creationId xmlns:a16="http://schemas.microsoft.com/office/drawing/2014/main" id="{97F6DE80-B393-4BC6-ACBE-D927C5C7531C}"/>
               </a:ext>
             </a:extLst>
           </p:cNvPr>
@@ -10191,7 +10341,7 @@
     </p:spTree>
     <p:extLst>
       <p:ext uri="{BB962C8B-B14F-4D97-AF65-F5344CB8AC3E}">
-        <p14:creationId xmlns:p14="http://schemas.microsoft.com/office/powerpoint/2010/main" val="982340429"/>
+        <p14:creationId xmlns:p14="http://schemas.microsoft.com/office/powerpoint/2010/main" val="662652558"/>
       </p:ext>
     </p:extLst>
   </p:cSld>
@@ -10215,7 +10365,7 @@
           <p:cNvPr id="2" name="TextBox 1">
             <a:extLst xmlns:a="http://schemas.openxmlformats.org/drawingml/2006/main">
               <a:ext uri="{FF2B5EF4-FFF2-40B4-BE49-F238E27FC236}">
-                <a16:creationId xmlns:a16="http://schemas.microsoft.com/office/drawing/2014/main" id="{22808EC8-CE6B-45FE-A814-7299F62B1E4C}"/>
+                <a16:creationId xmlns:a16="http://schemas.microsoft.com/office/drawing/2014/main" id="{B105897F-8167-47C5-B4C5-B3FEA731CC8A}"/>
               </a:ext>
             </a:extLst>
           </p:cNvPr>
@@ -10262,7 +10412,7 @@
           <p:cNvPr id="3" name="TextBox 2">
             <a:extLst xmlns:a="http://schemas.openxmlformats.org/drawingml/2006/main">
               <a:ext uri="{FF2B5EF4-FFF2-40B4-BE49-F238E27FC236}">
-                <a16:creationId xmlns:a16="http://schemas.microsoft.com/office/drawing/2014/main" id="{95B1C79F-9CFC-4C1D-BD63-11FC0386308A}"/>
+                <a16:creationId xmlns:a16="http://schemas.microsoft.com/office/drawing/2014/main" id="{5C545B9C-7ED2-4B28-A35B-85E48BB32255}"/>
               </a:ext>
             </a:extLst>
           </p:cNvPr>
@@ -10309,7 +10459,7 @@
           <p:cNvPr id="4" name="Rectangle 3">
             <a:extLst xmlns:a="http://schemas.openxmlformats.org/drawingml/2006/main">
               <a:ext uri="{FF2B5EF4-FFF2-40B4-BE49-F238E27FC236}">
-                <a16:creationId xmlns:a16="http://schemas.microsoft.com/office/drawing/2014/main" id="{6EBB6765-FA7B-4EC3-8DA2-5E1B5F74F3E6}"/>
+                <a16:creationId xmlns:a16="http://schemas.microsoft.com/office/drawing/2014/main" id="{F3EDC7AC-5394-4D31-893D-A910AA7C7EDD}"/>
               </a:ext>
             </a:extLst>
           </p:cNvPr>
@@ -10364,7 +10514,7 @@
           <p:cNvPr id="5" name="Rectangle 4">
             <a:extLst xmlns:a="http://schemas.openxmlformats.org/drawingml/2006/main">
               <a:ext uri="{FF2B5EF4-FFF2-40B4-BE49-F238E27FC236}">
-                <a16:creationId xmlns:a16="http://schemas.microsoft.com/office/drawing/2014/main" id="{BE85F07F-8F6A-494D-BE5B-78FF8BD7BC4B}"/>
+                <a16:creationId xmlns:a16="http://schemas.microsoft.com/office/drawing/2014/main" id="{1149AEF6-3654-4993-828B-0EE44A1C2D6E}"/>
               </a:ext>
             </a:extLst>
           </p:cNvPr>
@@ -10419,7 +10569,7 @@
           <p:cNvPr id="6" name="TextBox 5">
             <a:extLst xmlns:a="http://schemas.openxmlformats.org/drawingml/2006/main">
               <a:ext uri="{FF2B5EF4-FFF2-40B4-BE49-F238E27FC236}">
-                <a16:creationId xmlns:a16="http://schemas.microsoft.com/office/drawing/2014/main" id="{3BC326E1-C17A-4161-83B6-B943C1E6E95A}"/>
+                <a16:creationId xmlns:a16="http://schemas.microsoft.com/office/drawing/2014/main" id="{C74E3BCE-2AFA-44CD-874C-FEFD839419ED}"/>
               </a:ext>
             </a:extLst>
           </p:cNvPr>
@@ -10456,7 +10606,7 @@
                 <a:ea typeface="Aptos"/>
                 <a:cs typeface="Aptos"/>
               </a:rPr>
-              <a:t>Julkinen riippumaton evidenssikooste · 2026.07.24-21 · 2026-07-24 · Lähteet: IP Australia; PRH; EPO; EPO / UPC; USPTO</a:t>
+              <a:t>Julkinen riippumaton evidenssikooste · 2026.07.24-22 · 2026-07-24 · Lähteet: IP Australia; PRH; EPO; EPO / UPC; USPTO</a:t>
             </a:r>
           </a:p>
         </p:txBody>
@@ -10466,7 +10616,7 @@
           <p:cNvPr id="7" name="TextBox 6">
             <a:extLst xmlns:a="http://schemas.openxmlformats.org/drawingml/2006/main">
               <a:ext uri="{FF2B5EF4-FFF2-40B4-BE49-F238E27FC236}">
-                <a16:creationId xmlns:a16="http://schemas.microsoft.com/office/drawing/2014/main" id="{1F85E47C-79C4-4FAC-B4B1-8339CA28F7F7}"/>
+                <a16:creationId xmlns:a16="http://schemas.microsoft.com/office/drawing/2014/main" id="{04BC7305-9222-413D-969F-ECC1A4372256}"/>
               </a:ext>
             </a:extLst>
           </p:cNvPr>
@@ -10953,7 +11103,7 @@
           <p:cNvPr id="9" name="TextBox 8">
             <a:extLst xmlns:a="http://schemas.openxmlformats.org/drawingml/2006/main">
               <a:ext uri="{FF2B5EF4-FFF2-40B4-BE49-F238E27FC236}">
-                <a16:creationId xmlns:a16="http://schemas.microsoft.com/office/drawing/2014/main" id="{F06138B6-5C64-4596-9A77-FF7B06B6E4A9}"/>
+                <a16:creationId xmlns:a16="http://schemas.microsoft.com/office/drawing/2014/main" id="{6ECCEE0E-D65B-46C1-9B86-4E5E22EDA29D}"/>
               </a:ext>
             </a:extLst>
           </p:cNvPr>
@@ -10998,7 +11148,7 @@
     </p:spTree>
     <p:extLst>
       <p:ext uri="{BB962C8B-B14F-4D97-AF65-F5344CB8AC3E}">
-        <p14:creationId xmlns:p14="http://schemas.microsoft.com/office/powerpoint/2010/main" val="1643662956"/>
+        <p14:creationId xmlns:p14="http://schemas.microsoft.com/office/powerpoint/2010/main" val="820159569"/>
       </p:ext>
     </p:extLst>
   </p:cSld>
@@ -11022,7 +11172,7 @@
           <p:cNvPr id="2" name="TextBox 1">
             <a:extLst xmlns:a="http://schemas.openxmlformats.org/drawingml/2006/main">
               <a:ext uri="{FF2B5EF4-FFF2-40B4-BE49-F238E27FC236}">
-                <a16:creationId xmlns:a16="http://schemas.microsoft.com/office/drawing/2014/main" id="{20271595-4D71-48DA-9D29-D60C71BB7CD5}"/>
+                <a16:creationId xmlns:a16="http://schemas.microsoft.com/office/drawing/2014/main" id="{7E0095CC-0877-4D1E-81F8-B32DCB635311}"/>
               </a:ext>
             </a:extLst>
           </p:cNvPr>
@@ -11069,7 +11219,7 @@
           <p:cNvPr id="3" name="TextBox 2">
             <a:extLst xmlns:a="http://schemas.openxmlformats.org/drawingml/2006/main">
               <a:ext uri="{FF2B5EF4-FFF2-40B4-BE49-F238E27FC236}">
-                <a16:creationId xmlns:a16="http://schemas.microsoft.com/office/drawing/2014/main" id="{EF364B76-965D-44ED-B4E8-4415771D963D}"/>
+                <a16:creationId xmlns:a16="http://schemas.microsoft.com/office/drawing/2014/main" id="{732F3274-78EA-49F3-B46D-420FBE215626}"/>
               </a:ext>
             </a:extLst>
           </p:cNvPr>
@@ -11116,7 +11266,7 @@
           <p:cNvPr id="4" name="Rectangle 3">
             <a:extLst xmlns:a="http://schemas.openxmlformats.org/drawingml/2006/main">
               <a:ext uri="{FF2B5EF4-FFF2-40B4-BE49-F238E27FC236}">
-                <a16:creationId xmlns:a16="http://schemas.microsoft.com/office/drawing/2014/main" id="{CD9CFA9A-00D4-47B2-A3DB-DD52AE212238}"/>
+                <a16:creationId xmlns:a16="http://schemas.microsoft.com/office/drawing/2014/main" id="{EC73259F-01F3-499C-9659-17D93FA91534}"/>
               </a:ext>
             </a:extLst>
           </p:cNvPr>
@@ -11171,7 +11321,7 @@
           <p:cNvPr id="5" name="Rectangle 4">
             <a:extLst xmlns:a="http://schemas.openxmlformats.org/drawingml/2006/main">
               <a:ext uri="{FF2B5EF4-FFF2-40B4-BE49-F238E27FC236}">
-                <a16:creationId xmlns:a16="http://schemas.microsoft.com/office/drawing/2014/main" id="{45D0932E-D99B-4DDD-887D-AF41DDC0DB34}"/>
+                <a16:creationId xmlns:a16="http://schemas.microsoft.com/office/drawing/2014/main" id="{FAB1F577-EB00-4F26-AFFB-0630DCD3ADD6}"/>
               </a:ext>
             </a:extLst>
           </p:cNvPr>
@@ -11226,7 +11376,7 @@
           <p:cNvPr id="6" name="TextBox 5">
             <a:extLst xmlns:a="http://schemas.openxmlformats.org/drawingml/2006/main">
               <a:ext uri="{FF2B5EF4-FFF2-40B4-BE49-F238E27FC236}">
-                <a16:creationId xmlns:a16="http://schemas.microsoft.com/office/drawing/2014/main" id="{1FC4A198-C42A-4B23-A16A-049111F33841}"/>
+                <a16:creationId xmlns:a16="http://schemas.microsoft.com/office/drawing/2014/main" id="{0A7FD657-1B8A-4731-A895-C3C69599B3F0}"/>
               </a:ext>
             </a:extLst>
           </p:cNvPr>
@@ -11263,7 +11413,7 @@
                 <a:ea typeface="Aptos"/>
                 <a:cs typeface="Aptos"/>
               </a:rPr>
-              <a:t>Julkinen riippumaton evidenssikooste · 2026.07.24-21 · 2026-07-24 · Lähteet: UN; Atlas</a:t>
+              <a:t>Julkinen riippumaton evidenssikooste · 2026.07.24-22 · 2026-07-24 · Lähteet: UN; Atlas</a:t>
             </a:r>
           </a:p>
         </p:txBody>
@@ -11273,7 +11423,7 @@
           <p:cNvPr id="7" name="TextBox 6">
             <a:extLst xmlns:a="http://schemas.openxmlformats.org/drawingml/2006/main">
               <a:ext uri="{FF2B5EF4-FFF2-40B4-BE49-F238E27FC236}">
-                <a16:creationId xmlns:a16="http://schemas.microsoft.com/office/drawing/2014/main" id="{5C624823-2BB7-4289-954C-7B5BCA66843A}"/>
+                <a16:creationId xmlns:a16="http://schemas.microsoft.com/office/drawing/2014/main" id="{AABDF41C-D21A-435C-9819-6147CE6BD6F2}"/>
               </a:ext>
             </a:extLst>
           </p:cNvPr>
@@ -11320,7 +11470,7 @@
           <p:cNvPr id="8" name="Rounded Rectangle 7">
             <a:extLst xmlns:a="http://schemas.openxmlformats.org/drawingml/2006/main">
               <a:ext uri="{FF2B5EF4-FFF2-40B4-BE49-F238E27FC236}">
-                <a16:creationId xmlns:a16="http://schemas.microsoft.com/office/drawing/2014/main" id="{10E38E74-5494-4E61-AE5E-43B538EAAF53}"/>
+                <a16:creationId xmlns:a16="http://schemas.microsoft.com/office/drawing/2014/main" id="{F0563CAF-948A-432F-B427-940309D51E59}"/>
               </a:ext>
             </a:extLst>
           </p:cNvPr>
@@ -11377,7 +11527,7 @@
           <p:cNvPr id="9" name="TextBox 8">
             <a:extLst xmlns:a="http://schemas.openxmlformats.org/drawingml/2006/main">
               <a:ext uri="{FF2B5EF4-FFF2-40B4-BE49-F238E27FC236}">
-                <a16:creationId xmlns:a16="http://schemas.microsoft.com/office/drawing/2014/main" id="{9CFA29D4-695D-4DA2-8AC0-9E7B91ADA560}"/>
+                <a16:creationId xmlns:a16="http://schemas.microsoft.com/office/drawing/2014/main" id="{BD6D840F-F52B-498A-AD22-8CE87EC00049}"/>
               </a:ext>
             </a:extLst>
           </p:cNvPr>
@@ -11424,7 +11574,7 @@
           <p:cNvPr id="10" name="TextBox 9">
             <a:extLst xmlns:a="http://schemas.openxmlformats.org/drawingml/2006/main">
               <a:ext uri="{FF2B5EF4-FFF2-40B4-BE49-F238E27FC236}">
-                <a16:creationId xmlns:a16="http://schemas.microsoft.com/office/drawing/2014/main" id="{9A001C9D-4BA8-4BA7-ADC0-1B31998D4639}"/>
+                <a16:creationId xmlns:a16="http://schemas.microsoft.com/office/drawing/2014/main" id="{5BB41E66-A948-4D01-97C0-D166808DF14D}"/>
               </a:ext>
             </a:extLst>
           </p:cNvPr>
@@ -11471,7 +11621,7 @@
           <p:cNvPr id="11" name="Rounded Rectangle 10">
             <a:extLst xmlns:a="http://schemas.openxmlformats.org/drawingml/2006/main">
               <a:ext uri="{FF2B5EF4-FFF2-40B4-BE49-F238E27FC236}">
-                <a16:creationId xmlns:a16="http://schemas.microsoft.com/office/drawing/2014/main" id="{DF0EDA77-50C1-4B2D-97C0-665D8B51C1D0}"/>
+                <a16:creationId xmlns:a16="http://schemas.microsoft.com/office/drawing/2014/main" id="{700280DC-56BD-42D4-A10D-273B62B889CF}"/>
               </a:ext>
             </a:extLst>
           </p:cNvPr>
@@ -11528,7 +11678,7 @@
           <p:cNvPr id="12" name="TextBox 11">
             <a:extLst xmlns:a="http://schemas.openxmlformats.org/drawingml/2006/main">
               <a:ext uri="{FF2B5EF4-FFF2-40B4-BE49-F238E27FC236}">
-                <a16:creationId xmlns:a16="http://schemas.microsoft.com/office/drawing/2014/main" id="{0944EA07-E082-4B08-820F-30A440C35513}"/>
+                <a16:creationId xmlns:a16="http://schemas.microsoft.com/office/drawing/2014/main" id="{ED777631-04FF-44FA-B64D-6FD449FF2B96}"/>
               </a:ext>
             </a:extLst>
           </p:cNvPr>
@@ -11575,7 +11725,7 @@
           <p:cNvPr id="13" name="TextBox 12">
             <a:extLst xmlns:a="http://schemas.openxmlformats.org/drawingml/2006/main">
               <a:ext uri="{FF2B5EF4-FFF2-40B4-BE49-F238E27FC236}">
-                <a16:creationId xmlns:a16="http://schemas.microsoft.com/office/drawing/2014/main" id="{2F74DDAA-FF4B-4484-A103-F2AAE5B25BD8}"/>
+                <a16:creationId xmlns:a16="http://schemas.microsoft.com/office/drawing/2014/main" id="{420285AB-E2C2-4775-BC2D-D8E4E10634BC}"/>
               </a:ext>
             </a:extLst>
           </p:cNvPr>
@@ -11622,7 +11772,7 @@
           <p:cNvPr id="14" name="Rounded Rectangle 13">
             <a:extLst xmlns:a="http://schemas.openxmlformats.org/drawingml/2006/main">
               <a:ext uri="{FF2B5EF4-FFF2-40B4-BE49-F238E27FC236}">
-                <a16:creationId xmlns:a16="http://schemas.microsoft.com/office/drawing/2014/main" id="{ABCE9775-356F-428C-ACA7-39458903B6D7}"/>
+                <a16:creationId xmlns:a16="http://schemas.microsoft.com/office/drawing/2014/main" id="{8632F07B-9156-4B85-BA83-FB723B111CC6}"/>
               </a:ext>
             </a:extLst>
           </p:cNvPr>
@@ -11679,7 +11829,7 @@
           <p:cNvPr id="15" name="TextBox 14">
             <a:extLst xmlns:a="http://schemas.openxmlformats.org/drawingml/2006/main">
               <a:ext uri="{FF2B5EF4-FFF2-40B4-BE49-F238E27FC236}">
-                <a16:creationId xmlns:a16="http://schemas.microsoft.com/office/drawing/2014/main" id="{5F4095FB-76CA-4AA5-9165-7C12006DABBB}"/>
+                <a16:creationId xmlns:a16="http://schemas.microsoft.com/office/drawing/2014/main" id="{F6AF4E5D-AFBF-41D2-AB7D-423121A200C7}"/>
               </a:ext>
             </a:extLst>
           </p:cNvPr>
@@ -11726,7 +11876,7 @@
           <p:cNvPr id="16" name="TextBox 15">
             <a:extLst xmlns:a="http://schemas.openxmlformats.org/drawingml/2006/main">
               <a:ext uri="{FF2B5EF4-FFF2-40B4-BE49-F238E27FC236}">
-                <a16:creationId xmlns:a16="http://schemas.microsoft.com/office/drawing/2014/main" id="{2E9C19AF-2008-4CE4-9B7C-E20A36C56DC4}"/>
+                <a16:creationId xmlns:a16="http://schemas.microsoft.com/office/drawing/2014/main" id="{9F0A786C-B175-4C84-B03F-FA4C765B9337}"/>
               </a:ext>
             </a:extLst>
           </p:cNvPr>
@@ -11773,7 +11923,7 @@
           <p:cNvPr id="17" name="Rounded Rectangle 16">
             <a:extLst xmlns:a="http://schemas.openxmlformats.org/drawingml/2006/main">
               <a:ext uri="{FF2B5EF4-FFF2-40B4-BE49-F238E27FC236}">
-                <a16:creationId xmlns:a16="http://schemas.microsoft.com/office/drawing/2014/main" id="{4A785202-7671-4616-9E01-A260794023F1}"/>
+                <a16:creationId xmlns:a16="http://schemas.microsoft.com/office/drawing/2014/main" id="{44986ABE-4FF8-4BF1-BEAF-F57B1B2D0D6B}"/>
               </a:ext>
             </a:extLst>
           </p:cNvPr>
@@ -11830,7 +11980,7 @@
           <p:cNvPr id="18" name="TextBox 17">
             <a:extLst xmlns:a="http://schemas.openxmlformats.org/drawingml/2006/main">
               <a:ext uri="{FF2B5EF4-FFF2-40B4-BE49-F238E27FC236}">
-                <a16:creationId xmlns:a16="http://schemas.microsoft.com/office/drawing/2014/main" id="{4995EE60-89AB-40DE-8BB0-D2F40EC8DD00}"/>
+                <a16:creationId xmlns:a16="http://schemas.microsoft.com/office/drawing/2014/main" id="{F664AE34-9B57-42DB-BC03-0385055C5919}"/>
               </a:ext>
             </a:extLst>
           </p:cNvPr>
@@ -11877,7 +12027,7 @@
           <p:cNvPr id="19" name="TextBox 18">
             <a:extLst xmlns:a="http://schemas.openxmlformats.org/drawingml/2006/main">
               <a:ext uri="{FF2B5EF4-FFF2-40B4-BE49-F238E27FC236}">
-                <a16:creationId xmlns:a16="http://schemas.microsoft.com/office/drawing/2014/main" id="{C2CD94B1-A54D-471E-B1EC-E1513EC00E8C}"/>
+                <a16:creationId xmlns:a16="http://schemas.microsoft.com/office/drawing/2014/main" id="{FC0B47BD-DCFA-41C3-92F9-5755BCE2AF76}"/>
               </a:ext>
             </a:extLst>
           </p:cNvPr>
@@ -11924,7 +12074,7 @@
           <p:cNvPr id="20" name="TextBox 19">
             <a:extLst xmlns:a="http://schemas.openxmlformats.org/drawingml/2006/main">
               <a:ext uri="{FF2B5EF4-FFF2-40B4-BE49-F238E27FC236}">
-                <a16:creationId xmlns:a16="http://schemas.microsoft.com/office/drawing/2014/main" id="{5A12AC0F-2777-4D1C-A728-921E0DCF163B}"/>
+                <a16:creationId xmlns:a16="http://schemas.microsoft.com/office/drawing/2014/main" id="{03D40B7B-BE38-4F75-A8A0-130286CAE6F3}"/>
               </a:ext>
             </a:extLst>
           </p:cNvPr>
@@ -11971,7 +12121,7 @@
           <p:cNvPr id="21" name="Rounded Rectangle 20">
             <a:extLst xmlns:a="http://schemas.openxmlformats.org/drawingml/2006/main">
               <a:ext uri="{FF2B5EF4-FFF2-40B4-BE49-F238E27FC236}">
-                <a16:creationId xmlns:a16="http://schemas.microsoft.com/office/drawing/2014/main" id="{A6A4CAB2-44E2-4A10-B03D-17A3DFF6E3A9}"/>
+                <a16:creationId xmlns:a16="http://schemas.microsoft.com/office/drawing/2014/main" id="{B7D80A8D-E837-4B2E-B211-357FC6BDACF1}"/>
               </a:ext>
             </a:extLst>
           </p:cNvPr>
@@ -12028,7 +12178,7 @@
           <p:cNvPr id="22" name="TextBox 21">
             <a:extLst xmlns:a="http://schemas.openxmlformats.org/drawingml/2006/main">
               <a:ext uri="{FF2B5EF4-FFF2-40B4-BE49-F238E27FC236}">
-                <a16:creationId xmlns:a16="http://schemas.microsoft.com/office/drawing/2014/main" id="{5361F01A-1E51-4848-82C6-2B1CDFB340EE}"/>
+                <a16:creationId xmlns:a16="http://schemas.microsoft.com/office/drawing/2014/main" id="{CC4A94CA-7CA0-4D71-9E19-B838287C3DC5}"/>
               </a:ext>
             </a:extLst>
           </p:cNvPr>
@@ -12075,7 +12225,7 @@
           <p:cNvPr id="23" name="TextBox 22">
             <a:extLst xmlns:a="http://schemas.openxmlformats.org/drawingml/2006/main">
               <a:ext uri="{FF2B5EF4-FFF2-40B4-BE49-F238E27FC236}">
-                <a16:creationId xmlns:a16="http://schemas.microsoft.com/office/drawing/2014/main" id="{64379491-4DA6-4252-9665-F836289C6A17}"/>
+                <a16:creationId xmlns:a16="http://schemas.microsoft.com/office/drawing/2014/main" id="{3890445E-90D1-48C7-9B2F-E944CC467BAB}"/>
               </a:ext>
             </a:extLst>
           </p:cNvPr>
@@ -12120,7 +12270,7 @@
     </p:spTree>
     <p:extLst>
       <p:ext uri="{BB962C8B-B14F-4D97-AF65-F5344CB8AC3E}">
-        <p14:creationId xmlns:p14="http://schemas.microsoft.com/office/powerpoint/2010/main" val="2145416264"/>
+        <p14:creationId xmlns:p14="http://schemas.microsoft.com/office/powerpoint/2010/main" val="401116928"/>
       </p:ext>
     </p:extLst>
   </p:cSld>
@@ -12144,7 +12294,7 @@
           <p:cNvPr id="2" name="TextBox 1">
             <a:extLst xmlns:a="http://schemas.openxmlformats.org/drawingml/2006/main">
               <a:ext uri="{FF2B5EF4-FFF2-40B4-BE49-F238E27FC236}">
-                <a16:creationId xmlns:a16="http://schemas.microsoft.com/office/drawing/2014/main" id="{F579F6B2-5FA4-441C-91D9-38444A3BB9A0}"/>
+                <a16:creationId xmlns:a16="http://schemas.microsoft.com/office/drawing/2014/main" id="{F7EE7DA5-F9A0-46F8-B56A-647B4DFA2D01}"/>
               </a:ext>
             </a:extLst>
           </p:cNvPr>
@@ -12191,7 +12341,7 @@
           <p:cNvPr id="3" name="TextBox 2">
             <a:extLst xmlns:a="http://schemas.openxmlformats.org/drawingml/2006/main">
               <a:ext uri="{FF2B5EF4-FFF2-40B4-BE49-F238E27FC236}">
-                <a16:creationId xmlns:a16="http://schemas.microsoft.com/office/drawing/2014/main" id="{1B1BD1A8-BE58-4C07-9B31-D7F803A3CE55}"/>
+                <a16:creationId xmlns:a16="http://schemas.microsoft.com/office/drawing/2014/main" id="{B522FFEE-1065-4B37-89E0-C552525F4085}"/>
               </a:ext>
             </a:extLst>
           </p:cNvPr>
@@ -12203,7 +12353,7 @@
         <p:spPr>
           <a:xfrm xmlns:a="http://schemas.openxmlformats.org/drawingml/2006/main">
             <a:off x="502920" y="621792"/>
-            <a:ext cx="11109960" cy="804672"/>
+            <a:ext cx="11109960" cy="987552"/>
           </a:xfrm>
           <a:prstGeom xmlns:a="http://schemas.openxmlformats.org/drawingml/2006/main" prst="rect">
             <a:avLst/>
@@ -12228,7 +12378,7 @@
                 <a:ea typeface="Aptos"/>
                 <a:cs typeface="Aptos"/>
               </a:rPr>
-              <a:t>Valitut viralliset reitit: 34 havaintoa 7 maasta</a:t>
+              <a:t>34 markkinamittaria + 36 Ruotsin FHM-rekisterilukua (ei myyntiä)</a:t>
             </a:r>
           </a:p>
         </p:txBody>
@@ -12238,7 +12388,7 @@
           <p:cNvPr id="4" name="Rectangle 3">
             <a:extLst xmlns:a="http://schemas.openxmlformats.org/drawingml/2006/main">
               <a:ext uri="{FF2B5EF4-FFF2-40B4-BE49-F238E27FC236}">
-                <a16:creationId xmlns:a16="http://schemas.microsoft.com/office/drawing/2014/main" id="{203CD879-9215-45EB-A701-3F2852CBFE12}"/>
+                <a16:creationId xmlns:a16="http://schemas.microsoft.com/office/drawing/2014/main" id="{B08710E9-A020-4DF4-9D79-5DAE969D4F5C}"/>
               </a:ext>
             </a:extLst>
           </p:cNvPr>
@@ -12293,7 +12443,7 @@
           <p:cNvPr id="5" name="Rectangle 4">
             <a:extLst xmlns:a="http://schemas.openxmlformats.org/drawingml/2006/main">
               <a:ext uri="{FF2B5EF4-FFF2-40B4-BE49-F238E27FC236}">
-                <a16:creationId xmlns:a16="http://schemas.microsoft.com/office/drawing/2014/main" id="{79FD5B1D-84CD-409B-AC84-BE5ADDF905AB}"/>
+                <a16:creationId xmlns:a16="http://schemas.microsoft.com/office/drawing/2014/main" id="{4ECFB35F-2678-4428-BE3E-174978CFEE21}"/>
               </a:ext>
             </a:extLst>
           </p:cNvPr>
@@ -12348,7 +12498,7 @@
           <p:cNvPr id="6" name="TextBox 5">
             <a:extLst xmlns:a="http://schemas.openxmlformats.org/drawingml/2006/main">
               <a:ext uri="{FF2B5EF4-FFF2-40B4-BE49-F238E27FC236}">
-                <a16:creationId xmlns:a16="http://schemas.microsoft.com/office/drawing/2014/main" id="{96ABC329-C5C7-4B04-80DC-5FEAF02624A7}"/>
+                <a16:creationId xmlns:a16="http://schemas.microsoft.com/office/drawing/2014/main" id="{FA59CA3A-E98E-4D8F-85E9-660647AF1E87}"/>
               </a:ext>
             </a:extLst>
           </p:cNvPr>
@@ -12385,7 +12535,7 @@
                 <a:ea typeface="Aptos"/>
                 <a:cs typeface="Aptos"/>
               </a:rPr>
-              <a:t>Julkinen riippumaton evidenssikooste · 2026.07.24-21 · 2026-07-24 · Lähteet: Statistics Canada; Health Canada; New Zealand Ministry of Health; Destatis; Vero; Sejm; FTC</a:t>
+              <a:t>Julkinen riippumaton evidenssikooste · 2026.07.24-22 · 2026-07-24 · Lähteet: Statistics Canada; Health Canada; New Zealand Ministry of Health; Destatis; Vero; Sejm; FHM; FTC</a:t>
             </a:r>
           </a:p>
         </p:txBody>
@@ -12395,7 +12545,7 @@
           <p:cNvPr id="7" name="TextBox 6">
             <a:extLst xmlns:a="http://schemas.openxmlformats.org/drawingml/2006/main">
               <a:ext uri="{FF2B5EF4-FFF2-40B4-BE49-F238E27FC236}">
-                <a16:creationId xmlns:a16="http://schemas.microsoft.com/office/drawing/2014/main" id="{895EDFC8-3028-4887-8D93-29BF2C2499F8}"/>
+                <a16:creationId xmlns:a16="http://schemas.microsoft.com/office/drawing/2014/main" id="{8355CD69-5569-425E-816B-140FDFF0E291}"/>
               </a:ext>
             </a:extLst>
           </p:cNvPr>
@@ -13048,7 +13198,7 @@
           <p:cNvPr id="9" name="TextBox 8">
             <a:extLst xmlns:a="http://schemas.openxmlformats.org/drawingml/2006/main">
               <a:ext uri="{FF2B5EF4-FFF2-40B4-BE49-F238E27FC236}">
-                <a16:creationId xmlns:a16="http://schemas.microsoft.com/office/drawing/2014/main" id="{B79763D2-E365-47DD-93CA-1134EB56755D}"/>
+                <a16:creationId xmlns:a16="http://schemas.microsoft.com/office/drawing/2014/main" id="{B86979C6-6AB4-4E01-832A-B7A6EB9076A4}"/>
               </a:ext>
             </a:extLst>
           </p:cNvPr>
@@ -13093,7 +13243,7 @@
     </p:spTree>
     <p:extLst>
       <p:ext uri="{BB962C8B-B14F-4D97-AF65-F5344CB8AC3E}">
-        <p14:creationId xmlns:p14="http://schemas.microsoft.com/office/powerpoint/2010/main" val="8880445"/>
+        <p14:creationId xmlns:p14="http://schemas.microsoft.com/office/powerpoint/2010/main" val="1475105761"/>
       </p:ext>
     </p:extLst>
   </p:cSld>
@@ -13117,7 +13267,7 @@
           <p:cNvPr id="2" name="TextBox 1">
             <a:extLst xmlns:a="http://schemas.openxmlformats.org/drawingml/2006/main">
               <a:ext uri="{FF2B5EF4-FFF2-40B4-BE49-F238E27FC236}">
-                <a16:creationId xmlns:a16="http://schemas.microsoft.com/office/drawing/2014/main" id="{4BF08DF6-811E-48DC-87BA-C2F0A635D223}"/>
+                <a16:creationId xmlns:a16="http://schemas.microsoft.com/office/drawing/2014/main" id="{90D41974-7B9F-45C5-BE4C-8B87B828E1DF}"/>
               </a:ext>
             </a:extLst>
           </p:cNvPr>
@@ -13164,7 +13314,7 @@
           <p:cNvPr id="3" name="TextBox 2">
             <a:extLst xmlns:a="http://schemas.openxmlformats.org/drawingml/2006/main">
               <a:ext uri="{FF2B5EF4-FFF2-40B4-BE49-F238E27FC236}">
-                <a16:creationId xmlns:a16="http://schemas.microsoft.com/office/drawing/2014/main" id="{76E3F1B4-2EA0-4BFE-8C40-4CE9DC7F5442}"/>
+                <a16:creationId xmlns:a16="http://schemas.microsoft.com/office/drawing/2014/main" id="{737C20C7-9C33-498F-84C4-FD7104F6A104}"/>
               </a:ext>
             </a:extLst>
           </p:cNvPr>
@@ -13211,7 +13361,7 @@
           <p:cNvPr id="4" name="Rectangle 3">
             <a:extLst xmlns:a="http://schemas.openxmlformats.org/drawingml/2006/main">
               <a:ext uri="{FF2B5EF4-FFF2-40B4-BE49-F238E27FC236}">
-                <a16:creationId xmlns:a16="http://schemas.microsoft.com/office/drawing/2014/main" id="{8B7E63BD-41EA-4B29-8880-DA15EC72E132}"/>
+                <a16:creationId xmlns:a16="http://schemas.microsoft.com/office/drawing/2014/main" id="{6D125A33-D283-4466-87E2-6F969D55E4DF}"/>
               </a:ext>
             </a:extLst>
           </p:cNvPr>
@@ -13266,7 +13416,7 @@
           <p:cNvPr id="5" name="Rectangle 4">
             <a:extLst xmlns:a="http://schemas.openxmlformats.org/drawingml/2006/main">
               <a:ext uri="{FF2B5EF4-FFF2-40B4-BE49-F238E27FC236}">
-                <a16:creationId xmlns:a16="http://schemas.microsoft.com/office/drawing/2014/main" id="{8CB23525-D624-4B7A-BA09-7CC6215BC93F}"/>
+                <a16:creationId xmlns:a16="http://schemas.microsoft.com/office/drawing/2014/main" id="{34672913-9D0B-47DC-A46C-3ACB1F3B976C}"/>
               </a:ext>
             </a:extLst>
           </p:cNvPr>
@@ -13321,7 +13471,7 @@
           <p:cNvPr id="6" name="TextBox 5">
             <a:extLst xmlns:a="http://schemas.openxmlformats.org/drawingml/2006/main">
               <a:ext uri="{FF2B5EF4-FFF2-40B4-BE49-F238E27FC236}">
-                <a16:creationId xmlns:a16="http://schemas.microsoft.com/office/drawing/2014/main" id="{266BD754-2B24-442C-B632-642E688FA8CF}"/>
+                <a16:creationId xmlns:a16="http://schemas.microsoft.com/office/drawing/2014/main" id="{6CB10802-973C-4B33-80DD-A6AB7291989B}"/>
               </a:ext>
             </a:extLst>
           </p:cNvPr>
@@ -13358,7 +13508,7 @@
                 <a:ea typeface="Aptos"/>
                 <a:cs typeface="Aptos"/>
               </a:rPr>
-              <a:t>Julkinen riippumaton evidenssikooste · 2026.07.24-21 · 2026-07-24 · Lähteet: Statistics Canada; Health Canada 2024</a:t>
+              <a:t>Julkinen riippumaton evidenssikooste · 2026.07.24-22 · 2026-07-24 · Lähteet: Statistics Canada; Health Canada 2024</a:t>
             </a:r>
           </a:p>
         </p:txBody>
@@ -13368,7 +13518,7 @@
           <p:cNvPr id="7" name="TextBox 6">
             <a:extLst xmlns:a="http://schemas.openxmlformats.org/drawingml/2006/main">
               <a:ext uri="{FF2B5EF4-FFF2-40B4-BE49-F238E27FC236}">
-                <a16:creationId xmlns:a16="http://schemas.microsoft.com/office/drawing/2014/main" id="{CC4939D6-C033-49DC-B910-CC8D8845C871}"/>
+                <a16:creationId xmlns:a16="http://schemas.microsoft.com/office/drawing/2014/main" id="{8C69A65D-CCD2-4011-BD97-2049B610F56A}"/>
               </a:ext>
             </a:extLst>
           </p:cNvPr>
@@ -13415,7 +13565,7 @@
           <p:cNvPr id="8" name="Rounded Rectangle 7">
             <a:extLst xmlns:a="http://schemas.openxmlformats.org/drawingml/2006/main">
               <a:ext uri="{FF2B5EF4-FFF2-40B4-BE49-F238E27FC236}">
-                <a16:creationId xmlns:a16="http://schemas.microsoft.com/office/drawing/2014/main" id="{5597DEE6-E2F7-4316-9F6D-EDF3A28C9941}"/>
+                <a16:creationId xmlns:a16="http://schemas.microsoft.com/office/drawing/2014/main" id="{E9439C54-AEBE-46D3-AFCA-7D63F0DC48AA}"/>
               </a:ext>
             </a:extLst>
           </p:cNvPr>
@@ -13472,7 +13622,7 @@
           <p:cNvPr id="9" name="TextBox 8">
             <a:extLst xmlns:a="http://schemas.openxmlformats.org/drawingml/2006/main">
               <a:ext uri="{FF2B5EF4-FFF2-40B4-BE49-F238E27FC236}">
-                <a16:creationId xmlns:a16="http://schemas.microsoft.com/office/drawing/2014/main" id="{9E33C678-9EE3-41C9-8110-C5A4D1500877}"/>
+                <a16:creationId xmlns:a16="http://schemas.microsoft.com/office/drawing/2014/main" id="{CFD85C09-DD36-44FD-B94C-3C02CD8D5D41}"/>
               </a:ext>
             </a:extLst>
           </p:cNvPr>
@@ -13519,7 +13669,7 @@
           <p:cNvPr id="10" name="TextBox 9">
             <a:extLst xmlns:a="http://schemas.openxmlformats.org/drawingml/2006/main">
               <a:ext uri="{FF2B5EF4-FFF2-40B4-BE49-F238E27FC236}">
-                <a16:creationId xmlns:a16="http://schemas.microsoft.com/office/drawing/2014/main" id="{9125FFE9-762B-4087-AE95-14F03A989F20}"/>
+                <a16:creationId xmlns:a16="http://schemas.microsoft.com/office/drawing/2014/main" id="{12E067C6-6B83-4AFC-844E-CD6DDBD7F513}"/>
               </a:ext>
             </a:extLst>
           </p:cNvPr>
@@ -13566,7 +13716,7 @@
           <p:cNvPr id="11" name="Rounded Rectangle 10">
             <a:extLst xmlns:a="http://schemas.openxmlformats.org/drawingml/2006/main">
               <a:ext uri="{FF2B5EF4-FFF2-40B4-BE49-F238E27FC236}">
-                <a16:creationId xmlns:a16="http://schemas.microsoft.com/office/drawing/2014/main" id="{AC5A2E6F-E1AB-41CF-AAE7-B0A7CC06B57E}"/>
+                <a16:creationId xmlns:a16="http://schemas.microsoft.com/office/drawing/2014/main" id="{46D3E049-7028-4474-A6B2-4171272B289B}"/>
               </a:ext>
             </a:extLst>
           </p:cNvPr>
@@ -13623,7 +13773,7 @@
           <p:cNvPr id="12" name="TextBox 11">
             <a:extLst xmlns:a="http://schemas.openxmlformats.org/drawingml/2006/main">
               <a:ext uri="{FF2B5EF4-FFF2-40B4-BE49-F238E27FC236}">
-                <a16:creationId xmlns:a16="http://schemas.microsoft.com/office/drawing/2014/main" id="{7F0AC96A-D896-49A8-A6F3-267432C0855D}"/>
+                <a16:creationId xmlns:a16="http://schemas.microsoft.com/office/drawing/2014/main" id="{CDD43425-6469-4DE2-9DBF-2E731528FE68}"/>
               </a:ext>
             </a:extLst>
           </p:cNvPr>
@@ -13670,7 +13820,7 @@
           <p:cNvPr id="13" name="TextBox 12">
             <a:extLst xmlns:a="http://schemas.openxmlformats.org/drawingml/2006/main">
               <a:ext uri="{FF2B5EF4-FFF2-40B4-BE49-F238E27FC236}">
-                <a16:creationId xmlns:a16="http://schemas.microsoft.com/office/drawing/2014/main" id="{FE527EFA-A22F-412D-BFCF-1878DCC24FF5}"/>
+                <a16:creationId xmlns:a16="http://schemas.microsoft.com/office/drawing/2014/main" id="{A3657A3F-B38D-4656-A4EC-E1318FB92A42}"/>
               </a:ext>
             </a:extLst>
           </p:cNvPr>
@@ -13717,7 +13867,7 @@
           <p:cNvPr id="14" name="Rounded Rectangle 13">
             <a:extLst xmlns:a="http://schemas.openxmlformats.org/drawingml/2006/main">
               <a:ext uri="{FF2B5EF4-FFF2-40B4-BE49-F238E27FC236}">
-                <a16:creationId xmlns:a16="http://schemas.microsoft.com/office/drawing/2014/main" id="{ED0C4DC8-84AC-445E-A2A0-67C22C7B0588}"/>
+                <a16:creationId xmlns:a16="http://schemas.microsoft.com/office/drawing/2014/main" id="{2B8F3114-1A92-4C08-B85D-536275213787}"/>
               </a:ext>
             </a:extLst>
           </p:cNvPr>
@@ -13774,7 +13924,7 @@
           <p:cNvPr id="15" name="TextBox 14">
             <a:extLst xmlns:a="http://schemas.openxmlformats.org/drawingml/2006/main">
               <a:ext uri="{FF2B5EF4-FFF2-40B4-BE49-F238E27FC236}">
-                <a16:creationId xmlns:a16="http://schemas.microsoft.com/office/drawing/2014/main" id="{E2734311-B8C1-4531-8E15-9280F5C2BFEF}"/>
+                <a16:creationId xmlns:a16="http://schemas.microsoft.com/office/drawing/2014/main" id="{19A55EB8-CDA4-4BE4-AFED-D03113152632}"/>
               </a:ext>
             </a:extLst>
           </p:cNvPr>
@@ -13821,7 +13971,7 @@
           <p:cNvPr id="16" name="TextBox 15">
             <a:extLst xmlns:a="http://schemas.openxmlformats.org/drawingml/2006/main">
               <a:ext uri="{FF2B5EF4-FFF2-40B4-BE49-F238E27FC236}">
-                <a16:creationId xmlns:a16="http://schemas.microsoft.com/office/drawing/2014/main" id="{DE21D1E0-744B-49A9-8294-DEB61A2C098E}"/>
+                <a16:creationId xmlns:a16="http://schemas.microsoft.com/office/drawing/2014/main" id="{1A878806-DA47-416D-A8BF-937F3769CCDB}"/>
               </a:ext>
             </a:extLst>
           </p:cNvPr>
@@ -13868,7 +14018,7 @@
           <p:cNvPr id="17" name="TextBox 16">
             <a:extLst xmlns:a="http://schemas.openxmlformats.org/drawingml/2006/main">
               <a:ext uri="{FF2B5EF4-FFF2-40B4-BE49-F238E27FC236}">
-                <a16:creationId xmlns:a16="http://schemas.microsoft.com/office/drawing/2014/main" id="{D7E39BEE-0E40-47DD-AB2E-A61E9D9315B2}"/>
+                <a16:creationId xmlns:a16="http://schemas.microsoft.com/office/drawing/2014/main" id="{59360792-D93E-47FF-80C4-FFE0B5AD0BEF}"/>
               </a:ext>
             </a:extLst>
           </p:cNvPr>
@@ -13915,7 +14065,7 @@
           <p:cNvPr id="18" name="Rounded Rectangle 17">
             <a:extLst xmlns:a="http://schemas.openxmlformats.org/drawingml/2006/main">
               <a:ext uri="{FF2B5EF4-FFF2-40B4-BE49-F238E27FC236}">
-                <a16:creationId xmlns:a16="http://schemas.microsoft.com/office/drawing/2014/main" id="{2122A819-3A5F-4DFE-9A98-B6D5A02C78F6}"/>
+                <a16:creationId xmlns:a16="http://schemas.microsoft.com/office/drawing/2014/main" id="{CCCB6224-9D22-43DC-AF39-EDFB4FA75F7D}"/>
               </a:ext>
             </a:extLst>
           </p:cNvPr>
@@ -13972,7 +14122,7 @@
           <p:cNvPr id="19" name="TextBox 18">
             <a:extLst xmlns:a="http://schemas.openxmlformats.org/drawingml/2006/main">
               <a:ext uri="{FF2B5EF4-FFF2-40B4-BE49-F238E27FC236}">
-                <a16:creationId xmlns:a16="http://schemas.microsoft.com/office/drawing/2014/main" id="{0BF73D69-DB8B-4CE5-BCA8-979DD3C0DAF6}"/>
+                <a16:creationId xmlns:a16="http://schemas.microsoft.com/office/drawing/2014/main" id="{57237F85-2AFE-47E9-B63C-096F7C9A3862}"/>
               </a:ext>
             </a:extLst>
           </p:cNvPr>
@@ -14019,7 +14169,7 @@
           <p:cNvPr id="20" name="TextBox 19">
             <a:extLst xmlns:a="http://schemas.openxmlformats.org/drawingml/2006/main">
               <a:ext uri="{FF2B5EF4-FFF2-40B4-BE49-F238E27FC236}">
-                <a16:creationId xmlns:a16="http://schemas.microsoft.com/office/drawing/2014/main" id="{24DDC5E9-2B26-4A07-A0CB-C2C8FDAEF18F}"/>
+                <a16:creationId xmlns:a16="http://schemas.microsoft.com/office/drawing/2014/main" id="{0666B17E-0E6E-49C8-9645-50A5BEF13D4B}"/>
               </a:ext>
             </a:extLst>
           </p:cNvPr>
@@ -14064,7 +14214,7 @@
     </p:spTree>
     <p:extLst>
       <p:ext uri="{BB962C8B-B14F-4D97-AF65-F5344CB8AC3E}">
-        <p14:creationId xmlns:p14="http://schemas.microsoft.com/office/powerpoint/2010/main" val="364428245"/>
+        <p14:creationId xmlns:p14="http://schemas.microsoft.com/office/powerpoint/2010/main" val="1202046478"/>
       </p:ext>
     </p:extLst>
   </p:cSld>
@@ -14088,7 +14238,7 @@
           <p:cNvPr id="2" name="TextBox 1">
             <a:extLst xmlns:a="http://schemas.openxmlformats.org/drawingml/2006/main">
               <a:ext uri="{FF2B5EF4-FFF2-40B4-BE49-F238E27FC236}">
-                <a16:creationId xmlns:a16="http://schemas.microsoft.com/office/drawing/2014/main" id="{6BFCA968-C6A1-4CDE-A0D0-7D63618DD5E2}"/>
+                <a16:creationId xmlns:a16="http://schemas.microsoft.com/office/drawing/2014/main" id="{8576E100-6DF6-424C-8A28-8CBD4E430547}"/>
               </a:ext>
             </a:extLst>
           </p:cNvPr>
@@ -14135,7 +14285,7 @@
           <p:cNvPr id="3" name="TextBox 2">
             <a:extLst xmlns:a="http://schemas.openxmlformats.org/drawingml/2006/main">
               <a:ext uri="{FF2B5EF4-FFF2-40B4-BE49-F238E27FC236}">
-                <a16:creationId xmlns:a16="http://schemas.microsoft.com/office/drawing/2014/main" id="{EA63AAF4-38D3-4B4B-B6B2-EFA3D30B728A}"/>
+                <a16:creationId xmlns:a16="http://schemas.microsoft.com/office/drawing/2014/main" id="{86797CBA-BD00-49AC-972F-0C115D12C4CD}"/>
               </a:ext>
             </a:extLst>
           </p:cNvPr>
@@ -14182,7 +14332,7 @@
           <p:cNvPr id="4" name="Rectangle 3">
             <a:extLst xmlns:a="http://schemas.openxmlformats.org/drawingml/2006/main">
               <a:ext uri="{FF2B5EF4-FFF2-40B4-BE49-F238E27FC236}">
-                <a16:creationId xmlns:a16="http://schemas.microsoft.com/office/drawing/2014/main" id="{9AC23A40-D447-49B6-8724-F10BB78AB208}"/>
+                <a16:creationId xmlns:a16="http://schemas.microsoft.com/office/drawing/2014/main" id="{893275DD-2320-46B2-B88B-7F7BF3797BC6}"/>
               </a:ext>
             </a:extLst>
           </p:cNvPr>
@@ -14237,7 +14387,7 @@
           <p:cNvPr id="5" name="Rectangle 4">
             <a:extLst xmlns:a="http://schemas.openxmlformats.org/drawingml/2006/main">
               <a:ext uri="{FF2B5EF4-FFF2-40B4-BE49-F238E27FC236}">
-                <a16:creationId xmlns:a16="http://schemas.microsoft.com/office/drawing/2014/main" id="{2B13E307-101A-4329-8602-99503320DA93}"/>
+                <a16:creationId xmlns:a16="http://schemas.microsoft.com/office/drawing/2014/main" id="{A7E74ECC-DE39-4885-9669-2964EBFD10B6}"/>
               </a:ext>
             </a:extLst>
           </p:cNvPr>
@@ -14292,7 +14442,7 @@
           <p:cNvPr id="6" name="TextBox 5">
             <a:extLst xmlns:a="http://schemas.openxmlformats.org/drawingml/2006/main">
               <a:ext uri="{FF2B5EF4-FFF2-40B4-BE49-F238E27FC236}">
-                <a16:creationId xmlns:a16="http://schemas.microsoft.com/office/drawing/2014/main" id="{24995A77-C774-47A9-8A1A-CAF2DFC14810}"/>
+                <a16:creationId xmlns:a16="http://schemas.microsoft.com/office/drawing/2014/main" id="{1625FEBF-2924-40C4-BDCA-FDE5645920BD}"/>
               </a:ext>
             </a:extLst>
           </p:cNvPr>
@@ -14329,7 +14479,7 @@
                 <a:ea typeface="Aptos"/>
                 <a:cs typeface="Aptos"/>
               </a:rPr>
-              <a:t>Julkinen riippumaton evidenssikooste · 2026.07.24-21 · 2026-07-24 · Lähteet: Destatis</a:t>
+              <a:t>Julkinen riippumaton evidenssikooste · 2026.07.24-22 · 2026-07-24 · Lähteet: Destatis</a:t>
             </a:r>
           </a:p>
         </p:txBody>
@@ -14339,7 +14489,7 @@
           <p:cNvPr id="7" name="TextBox 6">
             <a:extLst xmlns:a="http://schemas.openxmlformats.org/drawingml/2006/main">
               <a:ext uri="{FF2B5EF4-FFF2-40B4-BE49-F238E27FC236}">
-                <a16:creationId xmlns:a16="http://schemas.microsoft.com/office/drawing/2014/main" id="{110F8BF3-7190-47CD-9EC8-73917BF4B3E2}"/>
+                <a16:creationId xmlns:a16="http://schemas.microsoft.com/office/drawing/2014/main" id="{5689CC12-7CB2-441C-953F-027C7B586F6C}"/>
               </a:ext>
             </a:extLst>
           </p:cNvPr>
@@ -14852,7 +15002,7 @@
           <p:cNvPr id="9" name="TextBox 8">
             <a:extLst xmlns:a="http://schemas.openxmlformats.org/drawingml/2006/main">
               <a:ext uri="{FF2B5EF4-FFF2-40B4-BE49-F238E27FC236}">
-                <a16:creationId xmlns:a16="http://schemas.microsoft.com/office/drawing/2014/main" id="{073790F1-1250-4532-B8E8-B60CCBE885A6}"/>
+                <a16:creationId xmlns:a16="http://schemas.microsoft.com/office/drawing/2014/main" id="{72FBC270-F984-47D1-B45B-45684A10BBBA}"/>
               </a:ext>
             </a:extLst>
           </p:cNvPr>
@@ -14897,7 +15047,7 @@
     </p:spTree>
     <p:extLst>
       <p:ext uri="{BB962C8B-B14F-4D97-AF65-F5344CB8AC3E}">
-        <p14:creationId xmlns:p14="http://schemas.microsoft.com/office/powerpoint/2010/main" val="1406516877"/>
+        <p14:creationId xmlns:p14="http://schemas.microsoft.com/office/powerpoint/2010/main" val="212451897"/>
       </p:ext>
     </p:extLst>
   </p:cSld>
@@ -14921,7 +15071,7 @@
           <p:cNvPr id="2" name="TextBox 1">
             <a:extLst xmlns:a="http://schemas.openxmlformats.org/drawingml/2006/main">
               <a:ext uri="{FF2B5EF4-FFF2-40B4-BE49-F238E27FC236}">
-                <a16:creationId xmlns:a16="http://schemas.microsoft.com/office/drawing/2014/main" id="{39775E0E-4EAA-4C1F-9D1E-A45B93C4D54D}"/>
+                <a16:creationId xmlns:a16="http://schemas.microsoft.com/office/drawing/2014/main" id="{B65427D8-BA0D-49F0-B58F-7BC4BAB6F311}"/>
               </a:ext>
             </a:extLst>
           </p:cNvPr>
@@ -14968,7 +15118,7 @@
           <p:cNvPr id="3" name="TextBox 2">
             <a:extLst xmlns:a="http://schemas.openxmlformats.org/drawingml/2006/main">
               <a:ext uri="{FF2B5EF4-FFF2-40B4-BE49-F238E27FC236}">
-                <a16:creationId xmlns:a16="http://schemas.microsoft.com/office/drawing/2014/main" id="{5C10632B-B4BA-4B56-B283-5186FAB193D9}"/>
+                <a16:creationId xmlns:a16="http://schemas.microsoft.com/office/drawing/2014/main" id="{3F60C1D3-0187-47CB-B066-5F39079BDBDF}"/>
               </a:ext>
             </a:extLst>
           </p:cNvPr>
@@ -15015,7 +15165,7 @@
           <p:cNvPr id="4" name="Rectangle 3">
             <a:extLst xmlns:a="http://schemas.openxmlformats.org/drawingml/2006/main">
               <a:ext uri="{FF2B5EF4-FFF2-40B4-BE49-F238E27FC236}">
-                <a16:creationId xmlns:a16="http://schemas.microsoft.com/office/drawing/2014/main" id="{609C9BD4-54EB-4025-BDE0-C49D3761F5E3}"/>
+                <a16:creationId xmlns:a16="http://schemas.microsoft.com/office/drawing/2014/main" id="{23C0A76F-61FF-4BCC-9F5E-A7BBFA36401E}"/>
               </a:ext>
             </a:extLst>
           </p:cNvPr>
@@ -15070,7 +15220,7 @@
           <p:cNvPr id="5" name="Rectangle 4">
             <a:extLst xmlns:a="http://schemas.openxmlformats.org/drawingml/2006/main">
               <a:ext uri="{FF2B5EF4-FFF2-40B4-BE49-F238E27FC236}">
-                <a16:creationId xmlns:a16="http://schemas.microsoft.com/office/drawing/2014/main" id="{12CE8683-0FE7-4751-B35A-FDF34B05F8BF}"/>
+                <a16:creationId xmlns:a16="http://schemas.microsoft.com/office/drawing/2014/main" id="{611C22C2-ABE3-417A-B0F8-4594E989F322}"/>
               </a:ext>
             </a:extLst>
           </p:cNvPr>
@@ -15125,7 +15275,7 @@
           <p:cNvPr id="6" name="TextBox 5">
             <a:extLst xmlns:a="http://schemas.openxmlformats.org/drawingml/2006/main">
               <a:ext uri="{FF2B5EF4-FFF2-40B4-BE49-F238E27FC236}">
-                <a16:creationId xmlns:a16="http://schemas.microsoft.com/office/drawing/2014/main" id="{044E1AD1-317B-4E9A-B742-2B2FCBB5F39F}"/>
+                <a16:creationId xmlns:a16="http://schemas.microsoft.com/office/drawing/2014/main" id="{75EC8F2B-6F46-46E8-B24D-C2778A8D8413}"/>
               </a:ext>
             </a:extLst>
           </p:cNvPr>
@@ -15162,7 +15312,7 @@
                 <a:ea typeface="Aptos"/>
                 <a:cs typeface="Aptos"/>
               </a:rPr>
-              <a:t>Julkinen riippumaton evidenssikooste · 2026.07.24-21 · 2026-07-24 · Lähteet: Destatis; inTaste.de</a:t>
+              <a:t>Julkinen riippumaton evidenssikooste · 2026.07.24-22 · 2026-07-24 · Lähteet: Destatis; inTaste.de</a:t>
             </a:r>
           </a:p>
         </p:txBody>
@@ -15172,7 +15322,7 @@
           <p:cNvPr id="7" name="TextBox 6">
             <a:extLst xmlns:a="http://schemas.openxmlformats.org/drawingml/2006/main">
               <a:ext uri="{FF2B5EF4-FFF2-40B4-BE49-F238E27FC236}">
-                <a16:creationId xmlns:a16="http://schemas.microsoft.com/office/drawing/2014/main" id="{9B42F01C-5784-4585-A848-CE380F4A648C}"/>
+                <a16:creationId xmlns:a16="http://schemas.microsoft.com/office/drawing/2014/main" id="{0929504F-88FC-4DAB-871E-B83D6791C78A}"/>
               </a:ext>
             </a:extLst>
           </p:cNvPr>
@@ -15219,7 +15369,7 @@
           <p:cNvPr id="8" name="Rounded Rectangle 7">
             <a:extLst xmlns:a="http://schemas.openxmlformats.org/drawingml/2006/main">
               <a:ext uri="{FF2B5EF4-FFF2-40B4-BE49-F238E27FC236}">
-                <a16:creationId xmlns:a16="http://schemas.microsoft.com/office/drawing/2014/main" id="{8EF43E5D-D668-44CB-8D95-D8AF48C89005}"/>
+                <a16:creationId xmlns:a16="http://schemas.microsoft.com/office/drawing/2014/main" id="{6D702931-83F2-492D-8367-6A405A03E558}"/>
               </a:ext>
             </a:extLst>
           </p:cNvPr>
@@ -15276,7 +15426,7 @@
           <p:cNvPr id="9" name="TextBox 8">
             <a:extLst xmlns:a="http://schemas.openxmlformats.org/drawingml/2006/main">
               <a:ext uri="{FF2B5EF4-FFF2-40B4-BE49-F238E27FC236}">
-                <a16:creationId xmlns:a16="http://schemas.microsoft.com/office/drawing/2014/main" id="{4D9855A9-DFE2-4F59-AC22-CCE6CAF0F0F3}"/>
+                <a16:creationId xmlns:a16="http://schemas.microsoft.com/office/drawing/2014/main" id="{22DCB61E-ABD1-467E-861F-10430E9B1662}"/>
               </a:ext>
             </a:extLst>
           </p:cNvPr>
@@ -15323,7 +15473,7 @@
           <p:cNvPr id="10" name="TextBox 9">
             <a:extLst xmlns:a="http://schemas.openxmlformats.org/drawingml/2006/main">
               <a:ext uri="{FF2B5EF4-FFF2-40B4-BE49-F238E27FC236}">
-                <a16:creationId xmlns:a16="http://schemas.microsoft.com/office/drawing/2014/main" id="{E669AB3F-3B5B-48B9-B9FB-E96C412323BB}"/>
+                <a16:creationId xmlns:a16="http://schemas.microsoft.com/office/drawing/2014/main" id="{9275D6CF-27D0-4538-9923-11F5659E8775}"/>
               </a:ext>
             </a:extLst>
           </p:cNvPr>
@@ -15370,7 +15520,7 @@
           <p:cNvPr id="11" name="Rounded Rectangle 10">
             <a:extLst xmlns:a="http://schemas.openxmlformats.org/drawingml/2006/main">
               <a:ext uri="{FF2B5EF4-FFF2-40B4-BE49-F238E27FC236}">
-                <a16:creationId xmlns:a16="http://schemas.microsoft.com/office/drawing/2014/main" id="{56695906-9300-451D-B510-2321CBF31DC4}"/>
+                <a16:creationId xmlns:a16="http://schemas.microsoft.com/office/drawing/2014/main" id="{4ECE53C6-0E89-45E3-8A5D-D27A7E06B1F6}"/>
               </a:ext>
             </a:extLst>
           </p:cNvPr>
@@ -15427,7 +15577,7 @@
           <p:cNvPr id="12" name="TextBox 11">
             <a:extLst xmlns:a="http://schemas.openxmlformats.org/drawingml/2006/main">
               <a:ext uri="{FF2B5EF4-FFF2-40B4-BE49-F238E27FC236}">
-                <a16:creationId xmlns:a16="http://schemas.microsoft.com/office/drawing/2014/main" id="{B22A8C9F-2CE9-466F-82DC-ECDD1F9279A4}"/>
+                <a16:creationId xmlns:a16="http://schemas.microsoft.com/office/drawing/2014/main" id="{D7CA5C36-7439-4514-AC62-FC2BF27C8DEA}"/>
               </a:ext>
             </a:extLst>
           </p:cNvPr>
@@ -15474,7 +15624,7 @@
           <p:cNvPr id="13" name="TextBox 12">
             <a:extLst xmlns:a="http://schemas.openxmlformats.org/drawingml/2006/main">
               <a:ext uri="{FF2B5EF4-FFF2-40B4-BE49-F238E27FC236}">
-                <a16:creationId xmlns:a16="http://schemas.microsoft.com/office/drawing/2014/main" id="{A850CB7A-FFD5-43E7-8025-A523F725A147}"/>
+                <a16:creationId xmlns:a16="http://schemas.microsoft.com/office/drawing/2014/main" id="{09142330-1F0B-4F99-84D3-DB5C96462416}"/>
               </a:ext>
             </a:extLst>
           </p:cNvPr>
@@ -15521,7 +15671,7 @@
           <p:cNvPr id="14" name="Rounded Rectangle 13">
             <a:extLst xmlns:a="http://schemas.openxmlformats.org/drawingml/2006/main">
               <a:ext uri="{FF2B5EF4-FFF2-40B4-BE49-F238E27FC236}">
-                <a16:creationId xmlns:a16="http://schemas.microsoft.com/office/drawing/2014/main" id="{736A2D49-3FE4-4E6D-8C86-022008D5243F}"/>
+                <a16:creationId xmlns:a16="http://schemas.microsoft.com/office/drawing/2014/main" id="{D155AE0F-B975-4BF9-9C1B-B1842C0DB09E}"/>
               </a:ext>
             </a:extLst>
           </p:cNvPr>
@@ -15578,7 +15728,7 @@
           <p:cNvPr id="15" name="TextBox 14">
             <a:extLst xmlns:a="http://schemas.openxmlformats.org/drawingml/2006/main">
               <a:ext uri="{FF2B5EF4-FFF2-40B4-BE49-F238E27FC236}">
-                <a16:creationId xmlns:a16="http://schemas.microsoft.com/office/drawing/2014/main" id="{AB4565CC-A675-49AF-A65F-045D3A0D5589}"/>
+                <a16:creationId xmlns:a16="http://schemas.microsoft.com/office/drawing/2014/main" id="{F2755945-CFFC-4012-9BB7-0E22497FCDFC}"/>
               </a:ext>
             </a:extLst>
           </p:cNvPr>
@@ -15625,7 +15775,7 @@
           <p:cNvPr id="16" name="TextBox 15">
             <a:extLst xmlns:a="http://schemas.openxmlformats.org/drawingml/2006/main">
               <a:ext uri="{FF2B5EF4-FFF2-40B4-BE49-F238E27FC236}">
-                <a16:creationId xmlns:a16="http://schemas.microsoft.com/office/drawing/2014/main" id="{9C34F7A2-B143-4DC3-B5AA-7BFCA023F591}"/>
+                <a16:creationId xmlns:a16="http://schemas.microsoft.com/office/drawing/2014/main" id="{12C37370-1444-4B1C-9384-2EBFAF79507F}"/>
               </a:ext>
             </a:extLst>
           </p:cNvPr>
@@ -15672,7 +15822,7 @@
           <p:cNvPr id="17" name="TextBox 16">
             <a:extLst xmlns:a="http://schemas.openxmlformats.org/drawingml/2006/main">
               <a:ext uri="{FF2B5EF4-FFF2-40B4-BE49-F238E27FC236}">
-                <a16:creationId xmlns:a16="http://schemas.microsoft.com/office/drawing/2014/main" id="{A15F2941-EE57-41B9-877A-8EB3202A10FC}"/>
+                <a16:creationId xmlns:a16="http://schemas.microsoft.com/office/drawing/2014/main" id="{AD943854-2CF5-407E-9EC2-1FBF3D0680BA}"/>
               </a:ext>
             </a:extLst>
           </p:cNvPr>
@@ -15719,7 +15869,7 @@
           <p:cNvPr id="18" name="Rounded Rectangle 17">
             <a:extLst xmlns:a="http://schemas.openxmlformats.org/drawingml/2006/main">
               <a:ext uri="{FF2B5EF4-FFF2-40B4-BE49-F238E27FC236}">
-                <a16:creationId xmlns:a16="http://schemas.microsoft.com/office/drawing/2014/main" id="{0872C297-3858-4C27-AFF9-67C22562CA3F}"/>
+                <a16:creationId xmlns:a16="http://schemas.microsoft.com/office/drawing/2014/main" id="{5371D399-7D80-46D2-8E0C-2B303A79090F}"/>
               </a:ext>
             </a:extLst>
           </p:cNvPr>
@@ -15776,7 +15926,7 @@
           <p:cNvPr id="19" name="TextBox 18">
             <a:extLst xmlns:a="http://schemas.openxmlformats.org/drawingml/2006/main">
               <a:ext uri="{FF2B5EF4-FFF2-40B4-BE49-F238E27FC236}">
-                <a16:creationId xmlns:a16="http://schemas.microsoft.com/office/drawing/2014/main" id="{E6D3A8C6-9557-46FA-86DA-B537D057A7BB}"/>
+                <a16:creationId xmlns:a16="http://schemas.microsoft.com/office/drawing/2014/main" id="{3F304C3E-9AAF-430E-84E3-7279CE5B1C6A}"/>
               </a:ext>
             </a:extLst>
           </p:cNvPr>
@@ -15823,7 +15973,7 @@
           <p:cNvPr id="20" name="TextBox 19">
             <a:extLst xmlns:a="http://schemas.openxmlformats.org/drawingml/2006/main">
               <a:ext uri="{FF2B5EF4-FFF2-40B4-BE49-F238E27FC236}">
-                <a16:creationId xmlns:a16="http://schemas.microsoft.com/office/drawing/2014/main" id="{14C38093-48E3-471E-96BC-E2C566BE9294}"/>
+                <a16:creationId xmlns:a16="http://schemas.microsoft.com/office/drawing/2014/main" id="{41491FE3-52AD-47C6-866A-127C56CBB795}"/>
               </a:ext>
             </a:extLst>
           </p:cNvPr>
@@ -15868,7 +16018,7 @@
     </p:spTree>
     <p:extLst>
       <p:ext uri="{BB962C8B-B14F-4D97-AF65-F5344CB8AC3E}">
-        <p14:creationId xmlns:p14="http://schemas.microsoft.com/office/powerpoint/2010/main" val="619024580"/>
+        <p14:creationId xmlns:p14="http://schemas.microsoft.com/office/powerpoint/2010/main" val="1266954240"/>
       </p:ext>
     </p:extLst>
   </p:cSld>
@@ -15892,7 +16042,7 @@
           <p:cNvPr id="2" name="TextBox 1">
             <a:extLst xmlns:a="http://schemas.openxmlformats.org/drawingml/2006/main">
               <a:ext uri="{FF2B5EF4-FFF2-40B4-BE49-F238E27FC236}">
-                <a16:creationId xmlns:a16="http://schemas.microsoft.com/office/drawing/2014/main" id="{93E6236D-98A7-4E31-B91A-4D3EA075DE6C}"/>
+                <a16:creationId xmlns:a16="http://schemas.microsoft.com/office/drawing/2014/main" id="{4ABD5304-187E-4317-B9B2-BE8C43D172FD}"/>
               </a:ext>
             </a:extLst>
           </p:cNvPr>
@@ -15939,7 +16089,7 @@
           <p:cNvPr id="3" name="TextBox 2">
             <a:extLst xmlns:a="http://schemas.openxmlformats.org/drawingml/2006/main">
               <a:ext uri="{FF2B5EF4-FFF2-40B4-BE49-F238E27FC236}">
-                <a16:creationId xmlns:a16="http://schemas.microsoft.com/office/drawing/2014/main" id="{AA6D5C2E-CB9D-46BF-B518-912FEC77F837}"/>
+                <a16:creationId xmlns:a16="http://schemas.microsoft.com/office/drawing/2014/main" id="{4818269A-3BD5-4A2D-B0F9-C8ECF226D1D4}"/>
               </a:ext>
             </a:extLst>
           </p:cNvPr>
@@ -15986,7 +16136,7 @@
           <p:cNvPr id="4" name="Rectangle 3">
             <a:extLst xmlns:a="http://schemas.openxmlformats.org/drawingml/2006/main">
               <a:ext uri="{FF2B5EF4-FFF2-40B4-BE49-F238E27FC236}">
-                <a16:creationId xmlns:a16="http://schemas.microsoft.com/office/drawing/2014/main" id="{79BABFC5-113A-4C8E-8CDF-0A49E4F1EBDE}"/>
+                <a16:creationId xmlns:a16="http://schemas.microsoft.com/office/drawing/2014/main" id="{6450080A-7D4D-4E42-BF0F-9728AD2AB85F}"/>
               </a:ext>
             </a:extLst>
           </p:cNvPr>
@@ -16041,7 +16191,7 @@
           <p:cNvPr id="5" name="Rectangle 4">
             <a:extLst xmlns:a="http://schemas.openxmlformats.org/drawingml/2006/main">
               <a:ext uri="{FF2B5EF4-FFF2-40B4-BE49-F238E27FC236}">
-                <a16:creationId xmlns:a16="http://schemas.microsoft.com/office/drawing/2014/main" id="{FAE2A5EA-7305-42F7-BA67-6D18EFFD310C}"/>
+                <a16:creationId xmlns:a16="http://schemas.microsoft.com/office/drawing/2014/main" id="{7905DDEA-C2F5-43DC-84CF-CE20E0476BF6}"/>
               </a:ext>
             </a:extLst>
           </p:cNvPr>
@@ -16096,7 +16246,7 @@
           <p:cNvPr id="6" name="TextBox 5">
             <a:extLst xmlns:a="http://schemas.openxmlformats.org/drawingml/2006/main">
               <a:ext uri="{FF2B5EF4-FFF2-40B4-BE49-F238E27FC236}">
-                <a16:creationId xmlns:a16="http://schemas.microsoft.com/office/drawing/2014/main" id="{567D2E56-5D74-4E9C-92B1-0C96B568ECAA}"/>
+                <a16:creationId xmlns:a16="http://schemas.microsoft.com/office/drawing/2014/main" id="{6B360197-FFAC-46EB-B51E-079E9B9BF2E8}"/>
               </a:ext>
             </a:extLst>
           </p:cNvPr>
@@ -16133,7 +16283,7 @@
                 <a:ea typeface="Aptos"/>
                 <a:cs typeface="Aptos"/>
               </a:rPr>
-              <a:t>Julkinen riippumaton evidenssikooste · 2026.07.24-21 · 2026-07-24 · Lähteet: IMARC; GVR; Fortune; European Commission</a:t>
+              <a:t>Julkinen riippumaton evidenssikooste · 2026.07.24-22 · 2026-07-24 · Lähteet: IMARC; GVR; Fortune; European Commission</a:t>
             </a:r>
           </a:p>
         </p:txBody>
@@ -16143,7 +16293,7 @@
           <p:cNvPr id="7" name="TextBox 6">
             <a:extLst xmlns:a="http://schemas.openxmlformats.org/drawingml/2006/main">
               <a:ext uri="{FF2B5EF4-FFF2-40B4-BE49-F238E27FC236}">
-                <a16:creationId xmlns:a16="http://schemas.microsoft.com/office/drawing/2014/main" id="{E8B2AB88-FF6A-4594-9255-5F82F3079A13}"/>
+                <a16:creationId xmlns:a16="http://schemas.microsoft.com/office/drawing/2014/main" id="{6B107A14-6309-4FBD-9209-E2DD2E757930}"/>
               </a:ext>
             </a:extLst>
           </p:cNvPr>
@@ -16190,7 +16340,7 @@
           <p:cNvPr id="8" name="Rounded Rectangle 7">
             <a:extLst xmlns:a="http://schemas.openxmlformats.org/drawingml/2006/main">
               <a:ext uri="{FF2B5EF4-FFF2-40B4-BE49-F238E27FC236}">
-                <a16:creationId xmlns:a16="http://schemas.microsoft.com/office/drawing/2014/main" id="{1508DBFA-3E9C-46D3-8C57-B428EE317A40}"/>
+                <a16:creationId xmlns:a16="http://schemas.microsoft.com/office/drawing/2014/main" id="{F98A8271-B6E1-45C6-9CC0-64301B329598}"/>
               </a:ext>
             </a:extLst>
           </p:cNvPr>
@@ -16247,7 +16397,7 @@
           <p:cNvPr id="9" name="TextBox 8">
             <a:extLst xmlns:a="http://schemas.openxmlformats.org/drawingml/2006/main">
               <a:ext uri="{FF2B5EF4-FFF2-40B4-BE49-F238E27FC236}">
-                <a16:creationId xmlns:a16="http://schemas.microsoft.com/office/drawing/2014/main" id="{E1AF5988-7181-4869-9B9B-167C33104F5E}"/>
+                <a16:creationId xmlns:a16="http://schemas.microsoft.com/office/drawing/2014/main" id="{9A4732FA-3E49-4F66-8E83-2359FE880BE6}"/>
               </a:ext>
             </a:extLst>
           </p:cNvPr>
@@ -16294,7 +16444,7 @@
           <p:cNvPr id="10" name="TextBox 9">
             <a:extLst xmlns:a="http://schemas.openxmlformats.org/drawingml/2006/main">
               <a:ext uri="{FF2B5EF4-FFF2-40B4-BE49-F238E27FC236}">
-                <a16:creationId xmlns:a16="http://schemas.microsoft.com/office/drawing/2014/main" id="{F080FFB6-0475-478B-86CA-4498B54AA375}"/>
+                <a16:creationId xmlns:a16="http://schemas.microsoft.com/office/drawing/2014/main" id="{67541248-4EA5-4E3F-AA18-A8077DEB3C78}"/>
               </a:ext>
             </a:extLst>
           </p:cNvPr>
@@ -16341,7 +16491,7 @@
           <p:cNvPr id="11" name="Rounded Rectangle 10">
             <a:extLst xmlns:a="http://schemas.openxmlformats.org/drawingml/2006/main">
               <a:ext uri="{FF2B5EF4-FFF2-40B4-BE49-F238E27FC236}">
-                <a16:creationId xmlns:a16="http://schemas.microsoft.com/office/drawing/2014/main" id="{22B78CDB-7468-4966-B204-B9E37C7D5D63}"/>
+                <a16:creationId xmlns:a16="http://schemas.microsoft.com/office/drawing/2014/main" id="{8C358269-0A87-4D44-96D2-0CFDD9112065}"/>
               </a:ext>
             </a:extLst>
           </p:cNvPr>
@@ -16398,7 +16548,7 @@
           <p:cNvPr id="12" name="TextBox 11">
             <a:extLst xmlns:a="http://schemas.openxmlformats.org/drawingml/2006/main">
               <a:ext uri="{FF2B5EF4-FFF2-40B4-BE49-F238E27FC236}">
-                <a16:creationId xmlns:a16="http://schemas.microsoft.com/office/drawing/2014/main" id="{E5B00338-68AC-4B42-BBF3-EA1A90AAADF9}"/>
+                <a16:creationId xmlns:a16="http://schemas.microsoft.com/office/drawing/2014/main" id="{6A0AF0B2-F627-4778-81A2-273BFFB23C8B}"/>
               </a:ext>
             </a:extLst>
           </p:cNvPr>
@@ -16445,7 +16595,7 @@
           <p:cNvPr id="13" name="TextBox 12">
             <a:extLst xmlns:a="http://schemas.openxmlformats.org/drawingml/2006/main">
               <a:ext uri="{FF2B5EF4-FFF2-40B4-BE49-F238E27FC236}">
-                <a16:creationId xmlns:a16="http://schemas.microsoft.com/office/drawing/2014/main" id="{0AEFAD18-8F8C-4DDB-95BA-884206DD2D4E}"/>
+                <a16:creationId xmlns:a16="http://schemas.microsoft.com/office/drawing/2014/main" id="{1CC83FDC-0258-47A4-BCA0-EF4B7CE6539C}"/>
               </a:ext>
             </a:extLst>
           </p:cNvPr>
@@ -16492,7 +16642,7 @@
           <p:cNvPr id="14" name="Rounded Rectangle 13">
             <a:extLst xmlns:a="http://schemas.openxmlformats.org/drawingml/2006/main">
               <a:ext uri="{FF2B5EF4-FFF2-40B4-BE49-F238E27FC236}">
-                <a16:creationId xmlns:a16="http://schemas.microsoft.com/office/drawing/2014/main" id="{B7830E89-39F1-43AF-BDC2-01CD6F5FD5BC}"/>
+                <a16:creationId xmlns:a16="http://schemas.microsoft.com/office/drawing/2014/main" id="{BC037DDF-EAA7-43E7-9728-673ABADCA7C6}"/>
               </a:ext>
             </a:extLst>
           </p:cNvPr>
@@ -16549,7 +16699,7 @@
           <p:cNvPr id="15" name="TextBox 14">
             <a:extLst xmlns:a="http://schemas.openxmlformats.org/drawingml/2006/main">
               <a:ext uri="{FF2B5EF4-FFF2-40B4-BE49-F238E27FC236}">
-                <a16:creationId xmlns:a16="http://schemas.microsoft.com/office/drawing/2014/main" id="{128B6826-4C8C-461D-8A5B-6AAF2F73506C}"/>
+                <a16:creationId xmlns:a16="http://schemas.microsoft.com/office/drawing/2014/main" id="{C5027D89-97C3-4359-9A07-6E2A453DC48A}"/>
               </a:ext>
             </a:extLst>
           </p:cNvPr>
@@ -16596,7 +16746,7 @@
           <p:cNvPr id="16" name="TextBox 15">
             <a:extLst xmlns:a="http://schemas.openxmlformats.org/drawingml/2006/main">
               <a:ext uri="{FF2B5EF4-FFF2-40B4-BE49-F238E27FC236}">
-                <a16:creationId xmlns:a16="http://schemas.microsoft.com/office/drawing/2014/main" id="{6F262BFC-C4A4-439E-A8CC-08A3F775FA60}"/>
+                <a16:creationId xmlns:a16="http://schemas.microsoft.com/office/drawing/2014/main" id="{F6D14FF7-9517-449C-99A9-8CDF039A710F}"/>
               </a:ext>
             </a:extLst>
           </p:cNvPr>
@@ -16643,7 +16793,7 @@
           <p:cNvPr id="17" name="Rounded Rectangle 16">
             <a:extLst xmlns:a="http://schemas.openxmlformats.org/drawingml/2006/main">
               <a:ext uri="{FF2B5EF4-FFF2-40B4-BE49-F238E27FC236}">
-                <a16:creationId xmlns:a16="http://schemas.microsoft.com/office/drawing/2014/main" id="{17E3D352-A6F5-4433-B465-5F18778C1757}"/>
+                <a16:creationId xmlns:a16="http://schemas.microsoft.com/office/drawing/2014/main" id="{FB791165-0661-41E5-9786-700C5649F1EF}"/>
               </a:ext>
             </a:extLst>
           </p:cNvPr>
@@ -16700,7 +16850,7 @@
           <p:cNvPr id="18" name="TextBox 17">
             <a:extLst xmlns:a="http://schemas.openxmlformats.org/drawingml/2006/main">
               <a:ext uri="{FF2B5EF4-FFF2-40B4-BE49-F238E27FC236}">
-                <a16:creationId xmlns:a16="http://schemas.microsoft.com/office/drawing/2014/main" id="{209055FE-9CC7-4DEE-8570-32CC958B636C}"/>
+                <a16:creationId xmlns:a16="http://schemas.microsoft.com/office/drawing/2014/main" id="{FDE822D4-A806-495A-970F-3187064BC043}"/>
               </a:ext>
             </a:extLst>
           </p:cNvPr>
@@ -16747,7 +16897,7 @@
           <p:cNvPr id="19" name="TextBox 18">
             <a:extLst xmlns:a="http://schemas.openxmlformats.org/drawingml/2006/main">
               <a:ext uri="{FF2B5EF4-FFF2-40B4-BE49-F238E27FC236}">
-                <a16:creationId xmlns:a16="http://schemas.microsoft.com/office/drawing/2014/main" id="{938BAFA9-89C2-4955-8948-D372E858FDBE}"/>
+                <a16:creationId xmlns:a16="http://schemas.microsoft.com/office/drawing/2014/main" id="{F82E5F04-A8CA-4350-BE37-B1C74083F7CE}"/>
               </a:ext>
             </a:extLst>
           </p:cNvPr>
@@ -16794,7 +16944,7 @@
           <p:cNvPr id="20" name="TextBox 19">
             <a:extLst xmlns:a="http://schemas.openxmlformats.org/drawingml/2006/main">
               <a:ext uri="{FF2B5EF4-FFF2-40B4-BE49-F238E27FC236}">
-                <a16:creationId xmlns:a16="http://schemas.microsoft.com/office/drawing/2014/main" id="{85C464AF-D1AB-4733-841F-80E4467BAFCF}"/>
+                <a16:creationId xmlns:a16="http://schemas.microsoft.com/office/drawing/2014/main" id="{59A12404-F31B-4642-941B-0449904482EA}"/>
               </a:ext>
             </a:extLst>
           </p:cNvPr>
@@ -16841,7 +16991,7 @@
           <p:cNvPr id="21" name="Rounded Rectangle 20">
             <a:extLst xmlns:a="http://schemas.openxmlformats.org/drawingml/2006/main">
               <a:ext uri="{FF2B5EF4-FFF2-40B4-BE49-F238E27FC236}">
-                <a16:creationId xmlns:a16="http://schemas.microsoft.com/office/drawing/2014/main" id="{DFB47509-E05F-4C53-974F-4C972C888D5B}"/>
+                <a16:creationId xmlns:a16="http://schemas.microsoft.com/office/drawing/2014/main" id="{0B177C59-C5F4-41E7-8D37-09244A55CCA1}"/>
               </a:ext>
             </a:extLst>
           </p:cNvPr>
@@ -16898,7 +17048,7 @@
           <p:cNvPr id="22" name="TextBox 21">
             <a:extLst xmlns:a="http://schemas.openxmlformats.org/drawingml/2006/main">
               <a:ext uri="{FF2B5EF4-FFF2-40B4-BE49-F238E27FC236}">
-                <a16:creationId xmlns:a16="http://schemas.microsoft.com/office/drawing/2014/main" id="{E74F7EAF-FA1A-4760-A671-7EACC4F3735F}"/>
+                <a16:creationId xmlns:a16="http://schemas.microsoft.com/office/drawing/2014/main" id="{ECC3AFA1-29F3-4EDA-8D52-41CC3A8B1A3A}"/>
               </a:ext>
             </a:extLst>
           </p:cNvPr>
@@ -16945,7 +17095,7 @@
           <p:cNvPr id="23" name="TextBox 22">
             <a:extLst xmlns:a="http://schemas.openxmlformats.org/drawingml/2006/main">
               <a:ext uri="{FF2B5EF4-FFF2-40B4-BE49-F238E27FC236}">
-                <a16:creationId xmlns:a16="http://schemas.microsoft.com/office/drawing/2014/main" id="{6DC562FA-C96D-4E95-A930-41994A5EFEB1}"/>
+                <a16:creationId xmlns:a16="http://schemas.microsoft.com/office/drawing/2014/main" id="{3AF3135E-E3C3-4EFA-AD7C-C8B30FDEC526}"/>
               </a:ext>
             </a:extLst>
           </p:cNvPr>
@@ -16990,7 +17140,7 @@
     </p:spTree>
     <p:extLst>
       <p:ext uri="{BB962C8B-B14F-4D97-AF65-F5344CB8AC3E}">
-        <p14:creationId xmlns:p14="http://schemas.microsoft.com/office/powerpoint/2010/main" val="154847740"/>
+        <p14:creationId xmlns:p14="http://schemas.microsoft.com/office/powerpoint/2010/main" val="706303706"/>
       </p:ext>
     </p:extLst>
   </p:cSld>
@@ -17014,7 +17164,7 @@
           <p:cNvPr id="2" name="TextBox 1">
             <a:extLst xmlns:a="http://schemas.openxmlformats.org/drawingml/2006/main">
               <a:ext uri="{FF2B5EF4-FFF2-40B4-BE49-F238E27FC236}">
-                <a16:creationId xmlns:a16="http://schemas.microsoft.com/office/drawing/2014/main" id="{F2C9476D-A82A-4DE2-8875-8DA40493AFA1}"/>
+                <a16:creationId xmlns:a16="http://schemas.microsoft.com/office/drawing/2014/main" id="{FD3EE291-7F9A-421F-85D3-BDEE89F9AEB3}"/>
               </a:ext>
             </a:extLst>
           </p:cNvPr>
@@ -17061,7 +17211,7 @@
           <p:cNvPr id="3" name="TextBox 2">
             <a:extLst xmlns:a="http://schemas.openxmlformats.org/drawingml/2006/main">
               <a:ext uri="{FF2B5EF4-FFF2-40B4-BE49-F238E27FC236}">
-                <a16:creationId xmlns:a16="http://schemas.microsoft.com/office/drawing/2014/main" id="{E233B0D7-F562-4215-88FB-D86D556C5541}"/>
+                <a16:creationId xmlns:a16="http://schemas.microsoft.com/office/drawing/2014/main" id="{CC082473-B0C3-4789-9814-F436F6804680}"/>
               </a:ext>
             </a:extLst>
           </p:cNvPr>
@@ -17108,7 +17258,7 @@
           <p:cNvPr id="4" name="Rectangle 3">
             <a:extLst xmlns:a="http://schemas.openxmlformats.org/drawingml/2006/main">
               <a:ext uri="{FF2B5EF4-FFF2-40B4-BE49-F238E27FC236}">
-                <a16:creationId xmlns:a16="http://schemas.microsoft.com/office/drawing/2014/main" id="{D62EAB72-3584-43D0-832C-E82BA38098A8}"/>
+                <a16:creationId xmlns:a16="http://schemas.microsoft.com/office/drawing/2014/main" id="{5C0D17C5-C0F7-45D8-A04B-A1345E60C146}"/>
               </a:ext>
             </a:extLst>
           </p:cNvPr>
@@ -17163,7 +17313,7 @@
           <p:cNvPr id="5" name="Rectangle 4">
             <a:extLst xmlns:a="http://schemas.openxmlformats.org/drawingml/2006/main">
               <a:ext uri="{FF2B5EF4-FFF2-40B4-BE49-F238E27FC236}">
-                <a16:creationId xmlns:a16="http://schemas.microsoft.com/office/drawing/2014/main" id="{6D36234E-F458-4D6E-9383-9A51AA0A65E7}"/>
+                <a16:creationId xmlns:a16="http://schemas.microsoft.com/office/drawing/2014/main" id="{8ECE5115-EBE1-41F3-A1ED-72DBB89380CF}"/>
               </a:ext>
             </a:extLst>
           </p:cNvPr>
@@ -17218,7 +17368,7 @@
           <p:cNvPr id="6" name="TextBox 5">
             <a:extLst xmlns:a="http://schemas.openxmlformats.org/drawingml/2006/main">
               <a:ext uri="{FF2B5EF4-FFF2-40B4-BE49-F238E27FC236}">
-                <a16:creationId xmlns:a16="http://schemas.microsoft.com/office/drawing/2014/main" id="{78DD2A63-5886-46A7-B16F-FE9C361B1D61}"/>
+                <a16:creationId xmlns:a16="http://schemas.microsoft.com/office/drawing/2014/main" id="{CE6AD552-A2D6-401B-B46C-E2A33B50A045}"/>
               </a:ext>
             </a:extLst>
           </p:cNvPr>
@@ -17255,7 +17405,7 @@
                 <a:ea typeface="Aptos"/>
                 <a:cs typeface="Aptos"/>
               </a:rPr>
-              <a:t>Julkinen riippumaton evidenssikooste · 2026.07.24-21 · 2026-07-24 · Lähteet: Market-values modelReadiness, donorProtocol ja donorCandidates</a:t>
+              <a:t>Julkinen riippumaton evidenssikooste · 2026.07.24-22 · 2026-07-24 · Lähteet: Market-values modelReadiness, donorProtocol ja donorCandidates</a:t>
             </a:r>
           </a:p>
         </p:txBody>
@@ -17265,7 +17415,7 @@
           <p:cNvPr id="7" name="TextBox 6">
             <a:extLst xmlns:a="http://schemas.openxmlformats.org/drawingml/2006/main">
               <a:ext uri="{FF2B5EF4-FFF2-40B4-BE49-F238E27FC236}">
-                <a16:creationId xmlns:a16="http://schemas.microsoft.com/office/drawing/2014/main" id="{6C2733DF-580A-412C-8C77-9347E9F74896}"/>
+                <a16:creationId xmlns:a16="http://schemas.microsoft.com/office/drawing/2014/main" id="{AFED8B42-3774-4629-AB89-F5184ABDE5AA}"/>
               </a:ext>
             </a:extLst>
           </p:cNvPr>
@@ -17312,7 +17462,7 @@
           <p:cNvPr id="8" name="TextBox 7">
             <a:extLst xmlns:a="http://schemas.openxmlformats.org/drawingml/2006/main">
               <a:ext uri="{FF2B5EF4-FFF2-40B4-BE49-F238E27FC236}">
-                <a16:creationId xmlns:a16="http://schemas.microsoft.com/office/drawing/2014/main" id="{9894AFE6-A1E1-4EB1-A327-6CAF6DA6A1D7}"/>
+                <a16:creationId xmlns:a16="http://schemas.microsoft.com/office/drawing/2014/main" id="{D83F0F5F-0172-4768-AAF5-71CF32A2FD79}"/>
               </a:ext>
             </a:extLst>
           </p:cNvPr>
@@ -17359,7 +17509,7 @@
           <p:cNvPr id="9" name="TextBox 8">
             <a:extLst xmlns:a="http://schemas.openxmlformats.org/drawingml/2006/main">
               <a:ext uri="{FF2B5EF4-FFF2-40B4-BE49-F238E27FC236}">
-                <a16:creationId xmlns:a16="http://schemas.microsoft.com/office/drawing/2014/main" id="{62DDBBA3-0429-4D69-9B83-C5695397E4C7}"/>
+                <a16:creationId xmlns:a16="http://schemas.microsoft.com/office/drawing/2014/main" id="{7758C20A-57DC-4434-97A7-85E7D74CEB31}"/>
               </a:ext>
             </a:extLst>
           </p:cNvPr>
@@ -17456,7 +17606,7 @@
           <p:cNvPr id="10" name="Rounded Rectangle 9">
             <a:extLst xmlns:a="http://schemas.openxmlformats.org/drawingml/2006/main">
               <a:ext uri="{FF2B5EF4-FFF2-40B4-BE49-F238E27FC236}">
-                <a16:creationId xmlns:a16="http://schemas.microsoft.com/office/drawing/2014/main" id="{7F54B819-C16C-4602-8940-F55179E1EC92}"/>
+                <a16:creationId xmlns:a16="http://schemas.microsoft.com/office/drawing/2014/main" id="{E8A37B01-1221-470B-A566-983DFE777E32}"/>
               </a:ext>
             </a:extLst>
           </p:cNvPr>
@@ -17513,7 +17663,7 @@
           <p:cNvPr id="11" name="TextBox 10">
             <a:extLst xmlns:a="http://schemas.openxmlformats.org/drawingml/2006/main">
               <a:ext uri="{FF2B5EF4-FFF2-40B4-BE49-F238E27FC236}">
-                <a16:creationId xmlns:a16="http://schemas.microsoft.com/office/drawing/2014/main" id="{671FEA3F-1EFB-4DD2-8658-F9D917B768E2}"/>
+                <a16:creationId xmlns:a16="http://schemas.microsoft.com/office/drawing/2014/main" id="{EAE0609E-7814-4E01-9079-B0E71891A32A}"/>
               </a:ext>
             </a:extLst>
           </p:cNvPr>
@@ -17560,7 +17710,7 @@
           <p:cNvPr id="12" name="TextBox 11">
             <a:extLst xmlns:a="http://schemas.openxmlformats.org/drawingml/2006/main">
               <a:ext uri="{FF2B5EF4-FFF2-40B4-BE49-F238E27FC236}">
-                <a16:creationId xmlns:a16="http://schemas.microsoft.com/office/drawing/2014/main" id="{1E39F322-C83B-4B28-ABB8-0A8E63F97583}"/>
+                <a16:creationId xmlns:a16="http://schemas.microsoft.com/office/drawing/2014/main" id="{49E55E7E-85EA-4DC2-B467-C10FA0557868}"/>
               </a:ext>
             </a:extLst>
           </p:cNvPr>
@@ -17605,7 +17755,7 @@
     </p:spTree>
     <p:extLst>
       <p:ext uri="{BB962C8B-B14F-4D97-AF65-F5344CB8AC3E}">
-        <p14:creationId xmlns:p14="http://schemas.microsoft.com/office/powerpoint/2010/main" val="145107274"/>
+        <p14:creationId xmlns:p14="http://schemas.microsoft.com/office/powerpoint/2010/main" val="51580357"/>
       </p:ext>
     </p:extLst>
   </p:cSld>
@@ -17629,7 +17779,7 @@
           <p:cNvPr id="2" name="TextBox 1">
             <a:extLst xmlns:a="http://schemas.openxmlformats.org/drawingml/2006/main">
               <a:ext uri="{FF2B5EF4-FFF2-40B4-BE49-F238E27FC236}">
-                <a16:creationId xmlns:a16="http://schemas.microsoft.com/office/drawing/2014/main" id="{7EE9FC88-8FC7-4839-A98E-C66FC5578D3F}"/>
+                <a16:creationId xmlns:a16="http://schemas.microsoft.com/office/drawing/2014/main" id="{987B3DD2-5BC7-4F0E-A34B-A8215B9DA34F}"/>
               </a:ext>
             </a:extLst>
           </p:cNvPr>
@@ -17676,7 +17826,7 @@
           <p:cNvPr id="3" name="TextBox 2">
             <a:extLst xmlns:a="http://schemas.openxmlformats.org/drawingml/2006/main">
               <a:ext uri="{FF2B5EF4-FFF2-40B4-BE49-F238E27FC236}">
-                <a16:creationId xmlns:a16="http://schemas.microsoft.com/office/drawing/2014/main" id="{723AB218-BAAA-461E-892C-917869BF8E2A}"/>
+                <a16:creationId xmlns:a16="http://schemas.microsoft.com/office/drawing/2014/main" id="{B2948514-F352-4D5F-9093-633CD4F47CF8}"/>
               </a:ext>
             </a:extLst>
           </p:cNvPr>
@@ -17723,7 +17873,7 @@
           <p:cNvPr id="4" name="Rectangle 3">
             <a:extLst xmlns:a="http://schemas.openxmlformats.org/drawingml/2006/main">
               <a:ext uri="{FF2B5EF4-FFF2-40B4-BE49-F238E27FC236}">
-                <a16:creationId xmlns:a16="http://schemas.microsoft.com/office/drawing/2014/main" id="{13028BDE-7DBE-4D1B-9B07-3C74FE871535}"/>
+                <a16:creationId xmlns:a16="http://schemas.microsoft.com/office/drawing/2014/main" id="{9EAEE3C6-2C79-48E5-B096-EAC1D16DE80B}"/>
               </a:ext>
             </a:extLst>
           </p:cNvPr>
@@ -17778,7 +17928,7 @@
           <p:cNvPr id="5" name="Rectangle 4">
             <a:extLst xmlns:a="http://schemas.openxmlformats.org/drawingml/2006/main">
               <a:ext uri="{FF2B5EF4-FFF2-40B4-BE49-F238E27FC236}">
-                <a16:creationId xmlns:a16="http://schemas.microsoft.com/office/drawing/2014/main" id="{1DF8C5F9-B89B-4F71-827C-C48F758B19B9}"/>
+                <a16:creationId xmlns:a16="http://schemas.microsoft.com/office/drawing/2014/main" id="{930F6FD1-FEE8-41FF-9966-067B0A5140C1}"/>
               </a:ext>
             </a:extLst>
           </p:cNvPr>
@@ -17833,7 +17983,7 @@
           <p:cNvPr id="6" name="TextBox 5">
             <a:extLst xmlns:a="http://schemas.openxmlformats.org/drawingml/2006/main">
               <a:ext uri="{FF2B5EF4-FFF2-40B4-BE49-F238E27FC236}">
-                <a16:creationId xmlns:a16="http://schemas.microsoft.com/office/drawing/2014/main" id="{39B059B9-2BE7-4BD1-8235-7CAACBE187AE}"/>
+                <a16:creationId xmlns:a16="http://schemas.microsoft.com/office/drawing/2014/main" id="{FA0B1EFA-0193-4D2F-8AF3-BFA3B268259D}"/>
               </a:ext>
             </a:extLst>
           </p:cNvPr>
@@ -17870,7 +18020,7 @@
                 <a:ea typeface="Aptos"/>
                 <a:cs typeface="Aptos"/>
               </a:rPr>
-              <a:t>Julkinen riippumaton evidenssikooste · 2026.07.24-21 · 2026-07-24 · Lähteet: WIPO valuation; Evidence Register</a:t>
+              <a:t>Julkinen riippumaton evidenssikooste · 2026.07.24-22 · 2026-07-24 · Lähteet: WIPO valuation; Evidence Register</a:t>
             </a:r>
           </a:p>
         </p:txBody>
@@ -17880,7 +18030,7 @@
           <p:cNvPr id="7" name="TextBox 6">
             <a:extLst xmlns:a="http://schemas.openxmlformats.org/drawingml/2006/main">
               <a:ext uri="{FF2B5EF4-FFF2-40B4-BE49-F238E27FC236}">
-                <a16:creationId xmlns:a16="http://schemas.microsoft.com/office/drawing/2014/main" id="{C0C06C63-0CA7-47B9-A344-0335108CF354}"/>
+                <a16:creationId xmlns:a16="http://schemas.microsoft.com/office/drawing/2014/main" id="{3809AA62-2CE3-4ECF-931E-134022223CE3}"/>
               </a:ext>
             </a:extLst>
           </p:cNvPr>
@@ -18450,7 +18600,7 @@
           <p:cNvPr id="9" name="TextBox 8">
             <a:extLst xmlns:a="http://schemas.openxmlformats.org/drawingml/2006/main">
               <a:ext uri="{FF2B5EF4-FFF2-40B4-BE49-F238E27FC236}">
-                <a16:creationId xmlns:a16="http://schemas.microsoft.com/office/drawing/2014/main" id="{1A038AD1-D630-48BC-B433-96A4DED6B466}"/>
+                <a16:creationId xmlns:a16="http://schemas.microsoft.com/office/drawing/2014/main" id="{DE210028-AD8C-4336-BEE7-8971EB8BBC88}"/>
               </a:ext>
             </a:extLst>
           </p:cNvPr>
@@ -18495,7 +18645,7 @@
     </p:spTree>
     <p:extLst>
       <p:ext uri="{BB962C8B-B14F-4D97-AF65-F5344CB8AC3E}">
-        <p14:creationId xmlns:p14="http://schemas.microsoft.com/office/powerpoint/2010/main" val="575299911"/>
+        <p14:creationId xmlns:p14="http://schemas.microsoft.com/office/powerpoint/2010/main" val="884634682"/>
       </p:ext>
     </p:extLst>
   </p:cSld>
@@ -18519,7 +18669,7 @@
           <p:cNvPr id="2" name="TextBox 1">
             <a:extLst xmlns:a="http://schemas.openxmlformats.org/drawingml/2006/main">
               <a:ext uri="{FF2B5EF4-FFF2-40B4-BE49-F238E27FC236}">
-                <a16:creationId xmlns:a16="http://schemas.microsoft.com/office/drawing/2014/main" id="{4E3E43E1-9C71-409F-A722-C5C733DEA6F4}"/>
+                <a16:creationId xmlns:a16="http://schemas.microsoft.com/office/drawing/2014/main" id="{29B2EA0B-83DE-4CE3-A8FA-49B9BA3F0649}"/>
               </a:ext>
             </a:extLst>
           </p:cNvPr>
@@ -18566,7 +18716,7 @@
           <p:cNvPr id="3" name="TextBox 2">
             <a:extLst xmlns:a="http://schemas.openxmlformats.org/drawingml/2006/main">
               <a:ext uri="{FF2B5EF4-FFF2-40B4-BE49-F238E27FC236}">
-                <a16:creationId xmlns:a16="http://schemas.microsoft.com/office/drawing/2014/main" id="{ED68206B-98D4-48E3-8D26-30DDD2194ADD}"/>
+                <a16:creationId xmlns:a16="http://schemas.microsoft.com/office/drawing/2014/main" id="{F9268E5D-4D96-477B-A5E1-D56130E80110}"/>
               </a:ext>
             </a:extLst>
           </p:cNvPr>
@@ -18613,7 +18763,7 @@
           <p:cNvPr id="4" name="Rectangle 3">
             <a:extLst xmlns:a="http://schemas.openxmlformats.org/drawingml/2006/main">
               <a:ext uri="{FF2B5EF4-FFF2-40B4-BE49-F238E27FC236}">
-                <a16:creationId xmlns:a16="http://schemas.microsoft.com/office/drawing/2014/main" id="{83B4AC83-D4FB-4908-83FB-7A4D9F0BBB47}"/>
+                <a16:creationId xmlns:a16="http://schemas.microsoft.com/office/drawing/2014/main" id="{153B1DEB-7657-44E4-943D-4576B8873A62}"/>
               </a:ext>
             </a:extLst>
           </p:cNvPr>
@@ -18668,7 +18818,7 @@
           <p:cNvPr id="5" name="Rectangle 4">
             <a:extLst xmlns:a="http://schemas.openxmlformats.org/drawingml/2006/main">
               <a:ext uri="{FF2B5EF4-FFF2-40B4-BE49-F238E27FC236}">
-                <a16:creationId xmlns:a16="http://schemas.microsoft.com/office/drawing/2014/main" id="{24D8BED7-9D5A-4ED7-A0B0-C29592A01626}"/>
+                <a16:creationId xmlns:a16="http://schemas.microsoft.com/office/drawing/2014/main" id="{7649E109-CC24-490C-B802-66EF4DAC6458}"/>
               </a:ext>
             </a:extLst>
           </p:cNvPr>
@@ -18723,7 +18873,7 @@
           <p:cNvPr id="6" name="TextBox 5">
             <a:extLst xmlns:a="http://schemas.openxmlformats.org/drawingml/2006/main">
               <a:ext uri="{FF2B5EF4-FFF2-40B4-BE49-F238E27FC236}">
-                <a16:creationId xmlns:a16="http://schemas.microsoft.com/office/drawing/2014/main" id="{D4F436B9-3BC9-4D8E-BE2D-791B876285F1}"/>
+                <a16:creationId xmlns:a16="http://schemas.microsoft.com/office/drawing/2014/main" id="{0A385259-D384-48B5-AFD7-F32A8D742202}"/>
               </a:ext>
             </a:extLst>
           </p:cNvPr>
@@ -18760,7 +18910,7 @@
                 <a:ea typeface="Aptos"/>
                 <a:cs typeface="Aptos"/>
               </a:rPr>
-              <a:t>Julkinen riippumaton evidenssikooste · 2026.07.24-21 · 2026-07-24 · Lähteet: EPO; Saksa — viralliset tuomiot; WIPO</a:t>
+              <a:t>Julkinen riippumaton evidenssikooste · 2026.07.24-22 · 2026-07-24 · Lähteet: EPO; Saksa — viralliset tuomiot; WIPO</a:t>
             </a:r>
           </a:p>
         </p:txBody>
@@ -18770,7 +18920,7 @@
           <p:cNvPr id="7" name="TextBox 6">
             <a:extLst xmlns:a="http://schemas.openxmlformats.org/drawingml/2006/main">
               <a:ext uri="{FF2B5EF4-FFF2-40B4-BE49-F238E27FC236}">
-                <a16:creationId xmlns:a16="http://schemas.microsoft.com/office/drawing/2014/main" id="{6761AAA6-8B84-4EB0-ADE3-6E25E45BBAB9}"/>
+                <a16:creationId xmlns:a16="http://schemas.microsoft.com/office/drawing/2014/main" id="{7D373B7B-CCD3-4DF6-9584-BE5248C383C2}"/>
               </a:ext>
             </a:extLst>
           </p:cNvPr>
@@ -18817,7 +18967,7 @@
           <p:cNvPr id="8" name="TextBox 7">
             <a:extLst xmlns:a="http://schemas.openxmlformats.org/drawingml/2006/main">
               <a:ext uri="{FF2B5EF4-FFF2-40B4-BE49-F238E27FC236}">
-                <a16:creationId xmlns:a16="http://schemas.microsoft.com/office/drawing/2014/main" id="{43CA5831-E9EE-4A63-960C-E5012F725A04}"/>
+                <a16:creationId xmlns:a16="http://schemas.microsoft.com/office/drawing/2014/main" id="{6E1770F5-0179-4BF2-A335-91EBC48A6746}"/>
               </a:ext>
             </a:extLst>
           </p:cNvPr>
@@ -18864,7 +19014,7 @@
           <p:cNvPr id="9" name="TextBox 8">
             <a:extLst xmlns:a="http://schemas.openxmlformats.org/drawingml/2006/main">
               <a:ext uri="{FF2B5EF4-FFF2-40B4-BE49-F238E27FC236}">
-                <a16:creationId xmlns:a16="http://schemas.microsoft.com/office/drawing/2014/main" id="{EEA94AA3-77A9-4CB7-A180-03B432D8695C}"/>
+                <a16:creationId xmlns:a16="http://schemas.microsoft.com/office/drawing/2014/main" id="{72C21486-510C-47FE-A4DB-215031816CA5}"/>
               </a:ext>
             </a:extLst>
           </p:cNvPr>
@@ -18929,7 +19079,7 @@
               </a:defRPr>
             </a:pPr>
             <a:r>
-              <a:t>•  Markkina-aineistossa on 34 virallista vuosihavaintoa 7 maasta, mutta luovuttajaportti on 0/3.</a:t>
+              <a:t>•  Markkina-aineistossa on 34 markkinamittaria 7 maasta sekä 36 Ruotsin FHM-rekisterirakenteen lukua vuosilta 2018–2026; luvut eivät ole myyntiä tai markkina-arvoa. Luovuttajaportti on 0/3.</a:t>
             </a:r>
           </a:p>
           <a:p xmlns:a="http://schemas.openxmlformats.org/drawingml/2006/main">
@@ -18961,7 +19111,7 @@
           <p:cNvPr id="10" name="Rounded Rectangle 9">
             <a:extLst xmlns:a="http://schemas.openxmlformats.org/drawingml/2006/main">
               <a:ext uri="{FF2B5EF4-FFF2-40B4-BE49-F238E27FC236}">
-                <a16:creationId xmlns:a16="http://schemas.microsoft.com/office/drawing/2014/main" id="{0A1EDB3B-EFCE-49C8-B7A8-440C6DB63537}"/>
+                <a16:creationId xmlns:a16="http://schemas.microsoft.com/office/drawing/2014/main" id="{D23687BB-490D-4CCC-A06C-ABCA42762802}"/>
               </a:ext>
             </a:extLst>
           </p:cNvPr>
@@ -19018,7 +19168,7 @@
           <p:cNvPr id="11" name="TextBox 10">
             <a:extLst xmlns:a="http://schemas.openxmlformats.org/drawingml/2006/main">
               <a:ext uri="{FF2B5EF4-FFF2-40B4-BE49-F238E27FC236}">
-                <a16:creationId xmlns:a16="http://schemas.microsoft.com/office/drawing/2014/main" id="{966C4630-9216-47EE-BDA7-AD868BA8922E}"/>
+                <a16:creationId xmlns:a16="http://schemas.microsoft.com/office/drawing/2014/main" id="{845DEED6-E76B-4971-8E6F-DEF049B3240F}"/>
               </a:ext>
             </a:extLst>
           </p:cNvPr>
@@ -19065,7 +19215,7 @@
           <p:cNvPr id="12" name="TextBox 11">
             <a:extLst xmlns:a="http://schemas.openxmlformats.org/drawingml/2006/main">
               <a:ext uri="{FF2B5EF4-FFF2-40B4-BE49-F238E27FC236}">
-                <a16:creationId xmlns:a16="http://schemas.microsoft.com/office/drawing/2014/main" id="{7C378F19-26C1-4001-A8F1-4DA69534E449}"/>
+                <a16:creationId xmlns:a16="http://schemas.microsoft.com/office/drawing/2014/main" id="{AF92E6DB-5A51-47D4-B339-712644F6D57F}"/>
               </a:ext>
             </a:extLst>
           </p:cNvPr>
@@ -19110,7 +19260,7 @@
     </p:spTree>
     <p:extLst>
       <p:ext uri="{BB962C8B-B14F-4D97-AF65-F5344CB8AC3E}">
-        <p14:creationId xmlns:p14="http://schemas.microsoft.com/office/powerpoint/2010/main" val="1585389346"/>
+        <p14:creationId xmlns:p14="http://schemas.microsoft.com/office/powerpoint/2010/main" val="89347552"/>
       </p:ext>
     </p:extLst>
   </p:cSld>
@@ -19134,7 +19284,7 @@
           <p:cNvPr id="2" name="TextBox 1">
             <a:extLst xmlns:a="http://schemas.openxmlformats.org/drawingml/2006/main">
               <a:ext uri="{FF2B5EF4-FFF2-40B4-BE49-F238E27FC236}">
-                <a16:creationId xmlns:a16="http://schemas.microsoft.com/office/drawing/2014/main" id="{C50A1A02-C817-4D64-93D0-0A04B8CAA8EF}"/>
+                <a16:creationId xmlns:a16="http://schemas.microsoft.com/office/drawing/2014/main" id="{5BB63842-1663-4DA0-AECC-5ED59CCBD868}"/>
               </a:ext>
             </a:extLst>
           </p:cNvPr>
@@ -19181,7 +19331,7 @@
           <p:cNvPr id="3" name="TextBox 2">
             <a:extLst xmlns:a="http://schemas.openxmlformats.org/drawingml/2006/main">
               <a:ext uri="{FF2B5EF4-FFF2-40B4-BE49-F238E27FC236}">
-                <a16:creationId xmlns:a16="http://schemas.microsoft.com/office/drawing/2014/main" id="{08A53380-B2DC-498A-8B84-B89529C340E7}"/>
+                <a16:creationId xmlns:a16="http://schemas.microsoft.com/office/drawing/2014/main" id="{68EE7C8A-543E-47B7-8C81-74F8D91FED94}"/>
               </a:ext>
             </a:extLst>
           </p:cNvPr>
@@ -19228,7 +19378,7 @@
           <p:cNvPr id="4" name="Rectangle 3">
             <a:extLst xmlns:a="http://schemas.openxmlformats.org/drawingml/2006/main">
               <a:ext uri="{FF2B5EF4-FFF2-40B4-BE49-F238E27FC236}">
-                <a16:creationId xmlns:a16="http://schemas.microsoft.com/office/drawing/2014/main" id="{DF11E86D-EE37-42ED-B38A-58CBC5078DE7}"/>
+                <a16:creationId xmlns:a16="http://schemas.microsoft.com/office/drawing/2014/main" id="{D1C8EBB9-0CE6-4CA6-A8C4-9A776FE00E01}"/>
               </a:ext>
             </a:extLst>
           </p:cNvPr>
@@ -19283,7 +19433,7 @@
           <p:cNvPr id="5" name="Rectangle 4">
             <a:extLst xmlns:a="http://schemas.openxmlformats.org/drawingml/2006/main">
               <a:ext uri="{FF2B5EF4-FFF2-40B4-BE49-F238E27FC236}">
-                <a16:creationId xmlns:a16="http://schemas.microsoft.com/office/drawing/2014/main" id="{5714C3CF-23D5-42FB-A1DA-86B7BCDF2426}"/>
+                <a16:creationId xmlns:a16="http://schemas.microsoft.com/office/drawing/2014/main" id="{D77EF304-D8DA-40F4-A148-174071876C92}"/>
               </a:ext>
             </a:extLst>
           </p:cNvPr>
@@ -19338,7 +19488,7 @@
           <p:cNvPr id="6" name="TextBox 5">
             <a:extLst xmlns:a="http://schemas.openxmlformats.org/drawingml/2006/main">
               <a:ext uri="{FF2B5EF4-FFF2-40B4-BE49-F238E27FC236}">
-                <a16:creationId xmlns:a16="http://schemas.microsoft.com/office/drawing/2014/main" id="{8420BAB9-2298-4624-87A8-38A3A86E0865}"/>
+                <a16:creationId xmlns:a16="http://schemas.microsoft.com/office/drawing/2014/main" id="{1C566831-33D4-4ABF-A668-93B0A3070728}"/>
               </a:ext>
             </a:extLst>
           </p:cNvPr>
@@ -19375,7 +19525,7 @@
                 <a:ea typeface="Aptos"/>
                 <a:cs typeface="Aptos"/>
               </a:rPr>
-              <a:t>Julkinen riippumaton evidenssikooste · 2026.07.24-21 · 2026-07-24 · Lähteet: WIPO licensing; IP Finance</a:t>
+              <a:t>Julkinen riippumaton evidenssikooste · 2026.07.24-22 · 2026-07-24 · Lähteet: WIPO licensing; IP Finance</a:t>
             </a:r>
           </a:p>
         </p:txBody>
@@ -19385,7 +19535,7 @@
           <p:cNvPr id="7" name="TextBox 6">
             <a:extLst xmlns:a="http://schemas.openxmlformats.org/drawingml/2006/main">
               <a:ext uri="{FF2B5EF4-FFF2-40B4-BE49-F238E27FC236}">
-                <a16:creationId xmlns:a16="http://schemas.microsoft.com/office/drawing/2014/main" id="{959682E1-F177-4A4A-A5AF-5DC2120B14E8}"/>
+                <a16:creationId xmlns:a16="http://schemas.microsoft.com/office/drawing/2014/main" id="{71767991-5BB8-49A4-81DA-2F5C2AA15E07}"/>
               </a:ext>
             </a:extLst>
           </p:cNvPr>
@@ -19432,7 +19582,7 @@
           <p:cNvPr id="8" name="TextBox 7">
             <a:extLst xmlns:a="http://schemas.openxmlformats.org/drawingml/2006/main">
               <a:ext uri="{FF2B5EF4-FFF2-40B4-BE49-F238E27FC236}">
-                <a16:creationId xmlns:a16="http://schemas.microsoft.com/office/drawing/2014/main" id="{EFE66109-AC3E-4FC3-8B8E-4B63B8F2E2A5}"/>
+                <a16:creationId xmlns:a16="http://schemas.microsoft.com/office/drawing/2014/main" id="{24DD7541-C97E-4B82-86A5-5D3C4E48B47B}"/>
               </a:ext>
             </a:extLst>
           </p:cNvPr>
@@ -19479,7 +19629,7 @@
           <p:cNvPr id="9" name="TextBox 8">
             <a:extLst xmlns:a="http://schemas.openxmlformats.org/drawingml/2006/main">
               <a:ext uri="{FF2B5EF4-FFF2-40B4-BE49-F238E27FC236}">
-                <a16:creationId xmlns:a16="http://schemas.microsoft.com/office/drawing/2014/main" id="{E031851C-55C6-43D7-B21D-EAE7B56E391A}"/>
+                <a16:creationId xmlns:a16="http://schemas.microsoft.com/office/drawing/2014/main" id="{22E8C5C8-02A3-4BD3-AC5C-25930DE02F9B}"/>
               </a:ext>
             </a:extLst>
           </p:cNvPr>
@@ -19576,7 +19726,7 @@
           <p:cNvPr id="10" name="Rounded Rectangle 9">
             <a:extLst xmlns:a="http://schemas.openxmlformats.org/drawingml/2006/main">
               <a:ext uri="{FF2B5EF4-FFF2-40B4-BE49-F238E27FC236}">
-                <a16:creationId xmlns:a16="http://schemas.microsoft.com/office/drawing/2014/main" id="{0E3D0FC8-AE86-49D0-A930-11EC3BA6B1C6}"/>
+                <a16:creationId xmlns:a16="http://schemas.microsoft.com/office/drawing/2014/main" id="{BFE60CAE-054F-4737-B01B-182C286241D4}"/>
               </a:ext>
             </a:extLst>
           </p:cNvPr>
@@ -19633,7 +19783,7 @@
           <p:cNvPr id="11" name="TextBox 10">
             <a:extLst xmlns:a="http://schemas.openxmlformats.org/drawingml/2006/main">
               <a:ext uri="{FF2B5EF4-FFF2-40B4-BE49-F238E27FC236}">
-                <a16:creationId xmlns:a16="http://schemas.microsoft.com/office/drawing/2014/main" id="{C9B8AA01-8291-4638-B856-EEB5C61BDCC9}"/>
+                <a16:creationId xmlns:a16="http://schemas.microsoft.com/office/drawing/2014/main" id="{98D8B68B-A22D-402F-AD81-0D147EF002AE}"/>
               </a:ext>
             </a:extLst>
           </p:cNvPr>
@@ -19680,7 +19830,7 @@
           <p:cNvPr id="12" name="TextBox 11">
             <a:extLst xmlns:a="http://schemas.openxmlformats.org/drawingml/2006/main">
               <a:ext uri="{FF2B5EF4-FFF2-40B4-BE49-F238E27FC236}">
-                <a16:creationId xmlns:a16="http://schemas.microsoft.com/office/drawing/2014/main" id="{0FCD933A-DFD1-4777-8CF7-18000A14F643}"/>
+                <a16:creationId xmlns:a16="http://schemas.microsoft.com/office/drawing/2014/main" id="{3BFAE48C-019D-44BC-9C45-3DC696CC8947}"/>
               </a:ext>
             </a:extLst>
           </p:cNvPr>
@@ -19725,7 +19875,7 @@
     </p:spTree>
     <p:extLst>
       <p:ext uri="{BB962C8B-B14F-4D97-AF65-F5344CB8AC3E}">
-        <p14:creationId xmlns:p14="http://schemas.microsoft.com/office/powerpoint/2010/main" val="714926592"/>
+        <p14:creationId xmlns:p14="http://schemas.microsoft.com/office/powerpoint/2010/main" val="643302691"/>
       </p:ext>
     </p:extLst>
   </p:cSld>
@@ -19749,7 +19899,7 @@
           <p:cNvPr id="2" name="TextBox 1">
             <a:extLst xmlns:a="http://schemas.openxmlformats.org/drawingml/2006/main">
               <a:ext uri="{FF2B5EF4-FFF2-40B4-BE49-F238E27FC236}">
-                <a16:creationId xmlns:a16="http://schemas.microsoft.com/office/drawing/2014/main" id="{93313317-628E-43FA-9E2B-27085DF649EB}"/>
+                <a16:creationId xmlns:a16="http://schemas.microsoft.com/office/drawing/2014/main" id="{D3B9D7A8-1ADC-45DB-A7D4-A4EDEDC46B02}"/>
               </a:ext>
             </a:extLst>
           </p:cNvPr>
@@ -19796,7 +19946,7 @@
           <p:cNvPr id="3" name="TextBox 2">
             <a:extLst xmlns:a="http://schemas.openxmlformats.org/drawingml/2006/main">
               <a:ext uri="{FF2B5EF4-FFF2-40B4-BE49-F238E27FC236}">
-                <a16:creationId xmlns:a16="http://schemas.microsoft.com/office/drawing/2014/main" id="{FD5566BF-313F-4602-809B-EDB825AB105E}"/>
+                <a16:creationId xmlns:a16="http://schemas.microsoft.com/office/drawing/2014/main" id="{96392DA3-C2DC-4ED9-90F4-6E0853EA7A57}"/>
               </a:ext>
             </a:extLst>
           </p:cNvPr>
@@ -19843,7 +19993,7 @@
           <p:cNvPr id="4" name="Rectangle 3">
             <a:extLst xmlns:a="http://schemas.openxmlformats.org/drawingml/2006/main">
               <a:ext uri="{FF2B5EF4-FFF2-40B4-BE49-F238E27FC236}">
-                <a16:creationId xmlns:a16="http://schemas.microsoft.com/office/drawing/2014/main" id="{5ECA6C91-FFCB-4A0F-AF02-09F2CD31FEEC}"/>
+                <a16:creationId xmlns:a16="http://schemas.microsoft.com/office/drawing/2014/main" id="{64B86B34-622C-44EE-9DF3-E1983965216F}"/>
               </a:ext>
             </a:extLst>
           </p:cNvPr>
@@ -19898,7 +20048,7 @@
           <p:cNvPr id="5" name="Rectangle 4">
             <a:extLst xmlns:a="http://schemas.openxmlformats.org/drawingml/2006/main">
               <a:ext uri="{FF2B5EF4-FFF2-40B4-BE49-F238E27FC236}">
-                <a16:creationId xmlns:a16="http://schemas.microsoft.com/office/drawing/2014/main" id="{832EAA8E-05D2-483A-873B-36614F3CD757}"/>
+                <a16:creationId xmlns:a16="http://schemas.microsoft.com/office/drawing/2014/main" id="{B7217FEE-DDC6-403A-A138-EA979A10C5FF}"/>
               </a:ext>
             </a:extLst>
           </p:cNvPr>
@@ -19953,7 +20103,7 @@
           <p:cNvPr id="6" name="TextBox 5">
             <a:extLst xmlns:a="http://schemas.openxmlformats.org/drawingml/2006/main">
               <a:ext uri="{FF2B5EF4-FFF2-40B4-BE49-F238E27FC236}">
-                <a16:creationId xmlns:a16="http://schemas.microsoft.com/office/drawing/2014/main" id="{AD970D55-D2AD-4733-AE80-120ED956C37F}"/>
+                <a16:creationId xmlns:a16="http://schemas.microsoft.com/office/drawing/2014/main" id="{FD2963FE-773B-4481-9FE7-B967BF1461E0}"/>
               </a:ext>
             </a:extLst>
           </p:cNvPr>
@@ -19990,7 +20140,7 @@
                 <a:ea typeface="Aptos"/>
                 <a:cs typeface="Aptos"/>
               </a:rPr>
-              <a:t>Julkinen riippumaton evidenssikooste · 2026.07.24-21 · 2026-07-24 · Lähteet: Evidence Register; EPO</a:t>
+              <a:t>Julkinen riippumaton evidenssikooste · 2026.07.24-22 · 2026-07-24 · Lähteet: Evidence Register; EPO</a:t>
             </a:r>
           </a:p>
         </p:txBody>
@@ -20000,7 +20150,7 @@
           <p:cNvPr id="7" name="TextBox 6">
             <a:extLst xmlns:a="http://schemas.openxmlformats.org/drawingml/2006/main">
               <a:ext uri="{FF2B5EF4-FFF2-40B4-BE49-F238E27FC236}">
-                <a16:creationId xmlns:a16="http://schemas.microsoft.com/office/drawing/2014/main" id="{99CEB556-84ED-494D-931E-EDF9C61F5DF5}"/>
+                <a16:creationId xmlns:a16="http://schemas.microsoft.com/office/drawing/2014/main" id="{BC607633-200B-44E4-9E8F-A3CCACBDF252}"/>
               </a:ext>
             </a:extLst>
           </p:cNvPr>
@@ -20487,7 +20637,7 @@
           <p:cNvPr id="9" name="TextBox 8">
             <a:extLst xmlns:a="http://schemas.openxmlformats.org/drawingml/2006/main">
               <a:ext uri="{FF2B5EF4-FFF2-40B4-BE49-F238E27FC236}">
-                <a16:creationId xmlns:a16="http://schemas.microsoft.com/office/drawing/2014/main" id="{5A186492-7CFE-4F6D-A538-8893860C56F8}"/>
+                <a16:creationId xmlns:a16="http://schemas.microsoft.com/office/drawing/2014/main" id="{B903F401-204C-43DF-9FAC-AD1A3A84CE51}"/>
               </a:ext>
             </a:extLst>
           </p:cNvPr>
@@ -20532,7 +20682,7 @@
     </p:spTree>
     <p:extLst>
       <p:ext uri="{BB962C8B-B14F-4D97-AF65-F5344CB8AC3E}">
-        <p14:creationId xmlns:p14="http://schemas.microsoft.com/office/powerpoint/2010/main" val="1226763650"/>
+        <p14:creationId xmlns:p14="http://schemas.microsoft.com/office/powerpoint/2010/main" val="656587883"/>
       </p:ext>
     </p:extLst>
   </p:cSld>
@@ -20556,7 +20706,7 @@
           <p:cNvPr id="2" name="TextBox 1">
             <a:extLst xmlns:a="http://schemas.openxmlformats.org/drawingml/2006/main">
               <a:ext uri="{FF2B5EF4-FFF2-40B4-BE49-F238E27FC236}">
-                <a16:creationId xmlns:a16="http://schemas.microsoft.com/office/drawing/2014/main" id="{25F4C6F6-6DCD-4710-9585-FAFED726D7AD}"/>
+                <a16:creationId xmlns:a16="http://schemas.microsoft.com/office/drawing/2014/main" id="{06C7E887-0BE3-4940-99C9-8727120881A2}"/>
               </a:ext>
             </a:extLst>
           </p:cNvPr>
@@ -20603,7 +20753,7 @@
           <p:cNvPr id="3" name="TextBox 2">
             <a:extLst xmlns:a="http://schemas.openxmlformats.org/drawingml/2006/main">
               <a:ext uri="{FF2B5EF4-FFF2-40B4-BE49-F238E27FC236}">
-                <a16:creationId xmlns:a16="http://schemas.microsoft.com/office/drawing/2014/main" id="{8C644A36-E20E-400E-8D9F-695BB0D204BD}"/>
+                <a16:creationId xmlns:a16="http://schemas.microsoft.com/office/drawing/2014/main" id="{CFA13BEA-A001-4B2F-B0E4-3E61CB255D36}"/>
               </a:ext>
             </a:extLst>
           </p:cNvPr>
@@ -20650,7 +20800,7 @@
           <p:cNvPr id="4" name="Rectangle 3">
             <a:extLst xmlns:a="http://schemas.openxmlformats.org/drawingml/2006/main">
               <a:ext uri="{FF2B5EF4-FFF2-40B4-BE49-F238E27FC236}">
-                <a16:creationId xmlns:a16="http://schemas.microsoft.com/office/drawing/2014/main" id="{28BACA54-2276-4819-970E-A6C5680DCDCB}"/>
+                <a16:creationId xmlns:a16="http://schemas.microsoft.com/office/drawing/2014/main" id="{FC4A6358-499C-4777-82FD-F10E24F0C9FE}"/>
               </a:ext>
             </a:extLst>
           </p:cNvPr>
@@ -20705,7 +20855,7 @@
           <p:cNvPr id="5" name="Rectangle 4">
             <a:extLst xmlns:a="http://schemas.openxmlformats.org/drawingml/2006/main">
               <a:ext uri="{FF2B5EF4-FFF2-40B4-BE49-F238E27FC236}">
-                <a16:creationId xmlns:a16="http://schemas.microsoft.com/office/drawing/2014/main" id="{0541A8CE-8EB5-4BE5-B7D0-F6649F37181C}"/>
+                <a16:creationId xmlns:a16="http://schemas.microsoft.com/office/drawing/2014/main" id="{67D4CF94-A3AE-4D77-92AE-D636074FC7D6}"/>
               </a:ext>
             </a:extLst>
           </p:cNvPr>
@@ -20760,7 +20910,7 @@
           <p:cNvPr id="6" name="TextBox 5">
             <a:extLst xmlns:a="http://schemas.openxmlformats.org/drawingml/2006/main">
               <a:ext uri="{FF2B5EF4-FFF2-40B4-BE49-F238E27FC236}">
-                <a16:creationId xmlns:a16="http://schemas.microsoft.com/office/drawing/2014/main" id="{4597C942-4E47-430A-AEA1-9673B17F1C52}"/>
+                <a16:creationId xmlns:a16="http://schemas.microsoft.com/office/drawing/2014/main" id="{F40F396D-47CA-48EF-A880-51701AA535FB}"/>
               </a:ext>
             </a:extLst>
           </p:cNvPr>
@@ -20797,7 +20947,7 @@
                 <a:ea typeface="Aptos"/>
                 <a:cs typeface="Aptos"/>
               </a:rPr>
-              <a:t>Julkinen riippumaton evidenssikooste · 2026.07.24-21 · 2026-07-24 · Lähteet: EP3032975B2; 7 O 3341/24</a:t>
+              <a:t>Julkinen riippumaton evidenssikooste · 2026.07.24-22 · 2026-07-24 · Lähteet: EP3032975B2; 7 O 3341/24</a:t>
             </a:r>
           </a:p>
         </p:txBody>
@@ -20807,7 +20957,7 @@
           <p:cNvPr id="7" name="TextBox 6">
             <a:extLst xmlns:a="http://schemas.openxmlformats.org/drawingml/2006/main">
               <a:ext uri="{FF2B5EF4-FFF2-40B4-BE49-F238E27FC236}">
-                <a16:creationId xmlns:a16="http://schemas.microsoft.com/office/drawing/2014/main" id="{87979B29-061E-4648-B0EE-BDEB15B0A6A1}"/>
+                <a16:creationId xmlns:a16="http://schemas.microsoft.com/office/drawing/2014/main" id="{48B54F97-D54A-45FC-AFFA-037F218D729E}"/>
               </a:ext>
             </a:extLst>
           </p:cNvPr>
@@ -20854,7 +21004,7 @@
           <p:cNvPr id="8" name="Rounded Rectangle 7">
             <a:extLst xmlns:a="http://schemas.openxmlformats.org/drawingml/2006/main">
               <a:ext uri="{FF2B5EF4-FFF2-40B4-BE49-F238E27FC236}">
-                <a16:creationId xmlns:a16="http://schemas.microsoft.com/office/drawing/2014/main" id="{F0F3C5A7-B544-43AC-8ADE-C81F57CCB8FC}"/>
+                <a16:creationId xmlns:a16="http://schemas.microsoft.com/office/drawing/2014/main" id="{D43E8125-A017-4E18-8AD1-6D714E14201B}"/>
               </a:ext>
             </a:extLst>
           </p:cNvPr>
@@ -20911,7 +21061,7 @@
           <p:cNvPr id="9" name="TextBox 8">
             <a:extLst xmlns:a="http://schemas.openxmlformats.org/drawingml/2006/main">
               <a:ext uri="{FF2B5EF4-FFF2-40B4-BE49-F238E27FC236}">
-                <a16:creationId xmlns:a16="http://schemas.microsoft.com/office/drawing/2014/main" id="{5C119E8C-4450-4A08-BCCA-1133E2CFA24F}"/>
+                <a16:creationId xmlns:a16="http://schemas.microsoft.com/office/drawing/2014/main" id="{631BE31B-053A-4E37-B9B1-3DC01A7F6A25}"/>
               </a:ext>
             </a:extLst>
           </p:cNvPr>
@@ -20958,7 +21108,7 @@
           <p:cNvPr id="10" name="TextBox 9">
             <a:extLst xmlns:a="http://schemas.openxmlformats.org/drawingml/2006/main">
               <a:ext uri="{FF2B5EF4-FFF2-40B4-BE49-F238E27FC236}">
-                <a16:creationId xmlns:a16="http://schemas.microsoft.com/office/drawing/2014/main" id="{87AACE4C-8902-432D-AFEA-5B8C6F466FC4}"/>
+                <a16:creationId xmlns:a16="http://schemas.microsoft.com/office/drawing/2014/main" id="{389F8357-8D4B-4599-83F4-64B76B3C38BB}"/>
               </a:ext>
             </a:extLst>
           </p:cNvPr>
@@ -21005,7 +21155,7 @@
           <p:cNvPr id="11" name="TextBox 10">
             <a:extLst xmlns:a="http://schemas.openxmlformats.org/drawingml/2006/main">
               <a:ext uri="{FF2B5EF4-FFF2-40B4-BE49-F238E27FC236}">
-                <a16:creationId xmlns:a16="http://schemas.microsoft.com/office/drawing/2014/main" id="{66A3C334-D50D-4EFE-B636-E497D85D6D6C}"/>
+                <a16:creationId xmlns:a16="http://schemas.microsoft.com/office/drawing/2014/main" id="{4A23C93D-EBAB-4FB4-8253-312468323689}"/>
               </a:ext>
             </a:extLst>
           </p:cNvPr>
@@ -21052,7 +21202,7 @@
           <p:cNvPr id="12" name="Rounded Rectangle 11">
             <a:extLst xmlns:a="http://schemas.openxmlformats.org/drawingml/2006/main">
               <a:ext uri="{FF2B5EF4-FFF2-40B4-BE49-F238E27FC236}">
-                <a16:creationId xmlns:a16="http://schemas.microsoft.com/office/drawing/2014/main" id="{26824D13-8B8A-4FF2-832B-7DCD64C2A1B9}"/>
+                <a16:creationId xmlns:a16="http://schemas.microsoft.com/office/drawing/2014/main" id="{D145FAEF-63A9-4A2E-B1FF-93AAE3DBAE2F}"/>
               </a:ext>
             </a:extLst>
           </p:cNvPr>
@@ -21109,7 +21259,7 @@
           <p:cNvPr id="13" name="TextBox 12">
             <a:extLst xmlns:a="http://schemas.openxmlformats.org/drawingml/2006/main">
               <a:ext uri="{FF2B5EF4-FFF2-40B4-BE49-F238E27FC236}">
-                <a16:creationId xmlns:a16="http://schemas.microsoft.com/office/drawing/2014/main" id="{C3E14177-CAAE-4B0D-8FAA-13937A390B37}"/>
+                <a16:creationId xmlns:a16="http://schemas.microsoft.com/office/drawing/2014/main" id="{6DF934C7-4975-4894-AE22-01E3110A5A80}"/>
               </a:ext>
             </a:extLst>
           </p:cNvPr>
@@ -21156,7 +21306,7 @@
           <p:cNvPr id="14" name="TextBox 13">
             <a:extLst xmlns:a="http://schemas.openxmlformats.org/drawingml/2006/main">
               <a:ext uri="{FF2B5EF4-FFF2-40B4-BE49-F238E27FC236}">
-                <a16:creationId xmlns:a16="http://schemas.microsoft.com/office/drawing/2014/main" id="{87173C23-1189-4817-B7E3-ADA04BA4B9DB}"/>
+                <a16:creationId xmlns:a16="http://schemas.microsoft.com/office/drawing/2014/main" id="{EA4F0A78-4EB8-476A-91CB-EE2F20122FBC}"/>
               </a:ext>
             </a:extLst>
           </p:cNvPr>
@@ -21203,7 +21353,7 @@
           <p:cNvPr id="15" name="TextBox 14">
             <a:extLst xmlns:a="http://schemas.openxmlformats.org/drawingml/2006/main">
               <a:ext uri="{FF2B5EF4-FFF2-40B4-BE49-F238E27FC236}">
-                <a16:creationId xmlns:a16="http://schemas.microsoft.com/office/drawing/2014/main" id="{4B7DD143-7E7C-4058-B3D3-161AA3569DCA}"/>
+                <a16:creationId xmlns:a16="http://schemas.microsoft.com/office/drawing/2014/main" id="{A808315C-1781-411F-A426-FA036C69BC33}"/>
               </a:ext>
             </a:extLst>
           </p:cNvPr>
@@ -21250,7 +21400,7 @@
           <p:cNvPr id="16" name="Rounded Rectangle 15">
             <a:extLst xmlns:a="http://schemas.openxmlformats.org/drawingml/2006/main">
               <a:ext uri="{FF2B5EF4-FFF2-40B4-BE49-F238E27FC236}">
-                <a16:creationId xmlns:a16="http://schemas.microsoft.com/office/drawing/2014/main" id="{092FFF7E-D5A7-4814-929E-ECE9D7AC12CC}"/>
+                <a16:creationId xmlns:a16="http://schemas.microsoft.com/office/drawing/2014/main" id="{D36F3FF6-8000-4C36-8A30-2FE8033E8DAC}"/>
               </a:ext>
             </a:extLst>
           </p:cNvPr>
@@ -21307,7 +21457,7 @@
           <p:cNvPr id="17" name="TextBox 16">
             <a:extLst xmlns:a="http://schemas.openxmlformats.org/drawingml/2006/main">
               <a:ext uri="{FF2B5EF4-FFF2-40B4-BE49-F238E27FC236}">
-                <a16:creationId xmlns:a16="http://schemas.microsoft.com/office/drawing/2014/main" id="{1A549EDB-C18F-4C4B-A29B-2E32234B1C43}"/>
+                <a16:creationId xmlns:a16="http://schemas.microsoft.com/office/drawing/2014/main" id="{A3AC78A0-B093-40D9-9262-D5792C5DC2C3}"/>
               </a:ext>
             </a:extLst>
           </p:cNvPr>
@@ -21354,7 +21504,7 @@
           <p:cNvPr id="18" name="TextBox 17">
             <a:extLst xmlns:a="http://schemas.openxmlformats.org/drawingml/2006/main">
               <a:ext uri="{FF2B5EF4-FFF2-40B4-BE49-F238E27FC236}">
-                <a16:creationId xmlns:a16="http://schemas.microsoft.com/office/drawing/2014/main" id="{E62DCF28-B7E5-488B-B3DF-D0ED51BE4545}"/>
+                <a16:creationId xmlns:a16="http://schemas.microsoft.com/office/drawing/2014/main" id="{159867BE-AD81-4643-83F7-65BE85121C6E}"/>
               </a:ext>
             </a:extLst>
           </p:cNvPr>
@@ -21401,7 +21551,7 @@
           <p:cNvPr id="19" name="TextBox 18">
             <a:extLst xmlns:a="http://schemas.openxmlformats.org/drawingml/2006/main">
               <a:ext uri="{FF2B5EF4-FFF2-40B4-BE49-F238E27FC236}">
-                <a16:creationId xmlns:a16="http://schemas.microsoft.com/office/drawing/2014/main" id="{D1A4C554-E6E5-41D2-ACCE-3E89E55EC2F4}"/>
+                <a16:creationId xmlns:a16="http://schemas.microsoft.com/office/drawing/2014/main" id="{8DF4FB00-DB9E-4A71-945E-3D814396C199}"/>
               </a:ext>
             </a:extLst>
           </p:cNvPr>
@@ -21448,7 +21598,7 @@
           <p:cNvPr id="20" name="Rounded Rectangle 19">
             <a:extLst xmlns:a="http://schemas.openxmlformats.org/drawingml/2006/main">
               <a:ext uri="{FF2B5EF4-FFF2-40B4-BE49-F238E27FC236}">
-                <a16:creationId xmlns:a16="http://schemas.microsoft.com/office/drawing/2014/main" id="{01CF5403-A816-44CC-9180-79AC5DF4FB5F}"/>
+                <a16:creationId xmlns:a16="http://schemas.microsoft.com/office/drawing/2014/main" id="{3CAF3FC1-246F-4D3D-AB31-30957F6F8AF2}"/>
               </a:ext>
             </a:extLst>
           </p:cNvPr>
@@ -21505,7 +21655,7 @@
           <p:cNvPr id="21" name="TextBox 20">
             <a:extLst xmlns:a="http://schemas.openxmlformats.org/drawingml/2006/main">
               <a:ext uri="{FF2B5EF4-FFF2-40B4-BE49-F238E27FC236}">
-                <a16:creationId xmlns:a16="http://schemas.microsoft.com/office/drawing/2014/main" id="{260A79A4-2F26-4C82-9A70-C301F1CC51BF}"/>
+                <a16:creationId xmlns:a16="http://schemas.microsoft.com/office/drawing/2014/main" id="{9D9657CB-444B-46F1-AD1A-69539E9C6854}"/>
               </a:ext>
             </a:extLst>
           </p:cNvPr>
@@ -21552,7 +21702,7 @@
           <p:cNvPr id="22" name="TextBox 21">
             <a:extLst xmlns:a="http://schemas.openxmlformats.org/drawingml/2006/main">
               <a:ext uri="{FF2B5EF4-FFF2-40B4-BE49-F238E27FC236}">
-                <a16:creationId xmlns:a16="http://schemas.microsoft.com/office/drawing/2014/main" id="{6685C92C-BA00-4078-A9DC-F4760E4A61B3}"/>
+                <a16:creationId xmlns:a16="http://schemas.microsoft.com/office/drawing/2014/main" id="{36F4CFDB-A343-4A1C-A6DC-A0D8707F01A2}"/>
               </a:ext>
             </a:extLst>
           </p:cNvPr>
@@ -21599,7 +21749,7 @@
           <p:cNvPr id="23" name="TextBox 22">
             <a:extLst xmlns:a="http://schemas.openxmlformats.org/drawingml/2006/main">
               <a:ext uri="{FF2B5EF4-FFF2-40B4-BE49-F238E27FC236}">
-                <a16:creationId xmlns:a16="http://schemas.microsoft.com/office/drawing/2014/main" id="{E5103240-51D9-459A-AA91-FABCB8D2F313}"/>
+                <a16:creationId xmlns:a16="http://schemas.microsoft.com/office/drawing/2014/main" id="{84EAF969-0B0F-436E-A59D-B9225C0E2B0F}"/>
               </a:ext>
             </a:extLst>
           </p:cNvPr>
@@ -21646,7 +21796,7 @@
           <p:cNvPr id="24" name="TextBox 23">
             <a:extLst xmlns:a="http://schemas.openxmlformats.org/drawingml/2006/main">
               <a:ext uri="{FF2B5EF4-FFF2-40B4-BE49-F238E27FC236}">
-                <a16:creationId xmlns:a16="http://schemas.microsoft.com/office/drawing/2014/main" id="{EE40A5C9-F759-4E71-ABCD-B5B19D9080A5}"/>
+                <a16:creationId xmlns:a16="http://schemas.microsoft.com/office/drawing/2014/main" id="{6D7C7DAD-B6EF-4296-806E-A4D01ECE3BC0}"/>
               </a:ext>
             </a:extLst>
           </p:cNvPr>
@@ -21691,7 +21841,7 @@
     </p:spTree>
     <p:extLst>
       <p:ext uri="{BB962C8B-B14F-4D97-AF65-F5344CB8AC3E}">
-        <p14:creationId xmlns:p14="http://schemas.microsoft.com/office/powerpoint/2010/main" val="2098588220"/>
+        <p14:creationId xmlns:p14="http://schemas.microsoft.com/office/powerpoint/2010/main" val="546280003"/>
       </p:ext>
     </p:extLst>
   </p:cSld>
@@ -21715,7 +21865,7 @@
           <p:cNvPr id="2" name="TextBox 1">
             <a:extLst xmlns:a="http://schemas.openxmlformats.org/drawingml/2006/main">
               <a:ext uri="{FF2B5EF4-FFF2-40B4-BE49-F238E27FC236}">
-                <a16:creationId xmlns:a16="http://schemas.microsoft.com/office/drawing/2014/main" id="{B271CC34-695F-48A1-9356-0F40FE82EAA8}"/>
+                <a16:creationId xmlns:a16="http://schemas.microsoft.com/office/drawing/2014/main" id="{BC437197-F98D-4023-9FA5-C2A886071961}"/>
               </a:ext>
             </a:extLst>
           </p:cNvPr>
@@ -21762,7 +21912,7 @@
           <p:cNvPr id="3" name="TextBox 2">
             <a:extLst xmlns:a="http://schemas.openxmlformats.org/drawingml/2006/main">
               <a:ext uri="{FF2B5EF4-FFF2-40B4-BE49-F238E27FC236}">
-                <a16:creationId xmlns:a16="http://schemas.microsoft.com/office/drawing/2014/main" id="{94A2840A-C8BA-467A-BE8F-CF7219D36C44}"/>
+                <a16:creationId xmlns:a16="http://schemas.microsoft.com/office/drawing/2014/main" id="{43E7DCFE-5BC4-4C42-A8CD-AEE7EAE38035}"/>
               </a:ext>
             </a:extLst>
           </p:cNvPr>
@@ -21809,7 +21959,7 @@
           <p:cNvPr id="4" name="Rectangle 3">
             <a:extLst xmlns:a="http://schemas.openxmlformats.org/drawingml/2006/main">
               <a:ext uri="{FF2B5EF4-FFF2-40B4-BE49-F238E27FC236}">
-                <a16:creationId xmlns:a16="http://schemas.microsoft.com/office/drawing/2014/main" id="{C02707DE-F0A1-44F0-BA52-43AA8537A47B}"/>
+                <a16:creationId xmlns:a16="http://schemas.microsoft.com/office/drawing/2014/main" id="{FBB174D2-0A58-49F6-9F6A-E62252A93B4C}"/>
               </a:ext>
             </a:extLst>
           </p:cNvPr>
@@ -21864,7 +22014,7 @@
           <p:cNvPr id="5" name="Rectangle 4">
             <a:extLst xmlns:a="http://schemas.openxmlformats.org/drawingml/2006/main">
               <a:ext uri="{FF2B5EF4-FFF2-40B4-BE49-F238E27FC236}">
-                <a16:creationId xmlns:a16="http://schemas.microsoft.com/office/drawing/2014/main" id="{E026AD4B-D3FA-4785-89D0-724B96EA78BC}"/>
+                <a16:creationId xmlns:a16="http://schemas.microsoft.com/office/drawing/2014/main" id="{39DDD092-5EFB-4F3B-9006-6C74FAF00587}"/>
               </a:ext>
             </a:extLst>
           </p:cNvPr>
@@ -21919,7 +22069,7 @@
           <p:cNvPr id="6" name="TextBox 5">
             <a:extLst xmlns:a="http://schemas.openxmlformats.org/drawingml/2006/main">
               <a:ext uri="{FF2B5EF4-FFF2-40B4-BE49-F238E27FC236}">
-                <a16:creationId xmlns:a16="http://schemas.microsoft.com/office/drawing/2014/main" id="{A91D5BF3-AED9-4772-B4FA-DCB8CDF9A412}"/>
+                <a16:creationId xmlns:a16="http://schemas.microsoft.com/office/drawing/2014/main" id="{8E370982-7CF8-465C-9A45-2B2E5239C56D}"/>
               </a:ext>
             </a:extLst>
           </p:cNvPr>
@@ -21956,7 +22106,7 @@
                 <a:ea typeface="Aptos"/>
                 <a:cs typeface="Aptos"/>
               </a:rPr>
-              <a:t>Julkinen riippumaton evidenssikooste · 2026.07.24-21 · 2026-07-24 · Lähteet: WIPO dispute resolution; EPO IPscore</a:t>
+              <a:t>Julkinen riippumaton evidenssikooste · 2026.07.24-22 · 2026-07-24 · Lähteet: WIPO dispute resolution; EPO IPscore</a:t>
             </a:r>
           </a:p>
         </p:txBody>
@@ -21966,7 +22116,7 @@
           <p:cNvPr id="7" name="TextBox 6">
             <a:extLst xmlns:a="http://schemas.openxmlformats.org/drawingml/2006/main">
               <a:ext uri="{FF2B5EF4-FFF2-40B4-BE49-F238E27FC236}">
-                <a16:creationId xmlns:a16="http://schemas.microsoft.com/office/drawing/2014/main" id="{181F9DCC-E683-49FA-9B25-79E2B9947F3E}"/>
+                <a16:creationId xmlns:a16="http://schemas.microsoft.com/office/drawing/2014/main" id="{A3A305AB-0DC6-403A-92D9-FEAB48CC7BBF}"/>
               </a:ext>
             </a:extLst>
           </p:cNvPr>
@@ -22013,7 +22163,7 @@
           <p:cNvPr id="8" name="Rounded Rectangle 7">
             <a:extLst xmlns:a="http://schemas.openxmlformats.org/drawingml/2006/main">
               <a:ext uri="{FF2B5EF4-FFF2-40B4-BE49-F238E27FC236}">
-                <a16:creationId xmlns:a16="http://schemas.microsoft.com/office/drawing/2014/main" id="{633236C5-EDCC-4676-AB6A-31BB18ADEE48}"/>
+                <a16:creationId xmlns:a16="http://schemas.microsoft.com/office/drawing/2014/main" id="{A1F595D0-5F61-475D-94D1-0CB4B5470C44}"/>
               </a:ext>
             </a:extLst>
           </p:cNvPr>
@@ -22070,7 +22220,7 @@
           <p:cNvPr id="9" name="TextBox 8">
             <a:extLst xmlns:a="http://schemas.openxmlformats.org/drawingml/2006/main">
               <a:ext uri="{FF2B5EF4-FFF2-40B4-BE49-F238E27FC236}">
-                <a16:creationId xmlns:a16="http://schemas.microsoft.com/office/drawing/2014/main" id="{8D56E1B8-AD93-4FA2-BEFF-F001BB00D860}"/>
+                <a16:creationId xmlns:a16="http://schemas.microsoft.com/office/drawing/2014/main" id="{B55BFCF4-620E-4DD1-8CC0-AF91B1C64B43}"/>
               </a:ext>
             </a:extLst>
           </p:cNvPr>
@@ -22117,7 +22267,7 @@
           <p:cNvPr id="10" name="TextBox 9">
             <a:extLst xmlns:a="http://schemas.openxmlformats.org/drawingml/2006/main">
               <a:ext uri="{FF2B5EF4-FFF2-40B4-BE49-F238E27FC236}">
-                <a16:creationId xmlns:a16="http://schemas.microsoft.com/office/drawing/2014/main" id="{38CDE3CE-8614-49D4-AAF5-1CA1ECAE7C4F}"/>
+                <a16:creationId xmlns:a16="http://schemas.microsoft.com/office/drawing/2014/main" id="{562294AA-A3B9-4ED3-ABAA-69993EF0E3B5}"/>
               </a:ext>
             </a:extLst>
           </p:cNvPr>
@@ -22164,7 +22314,7 @@
           <p:cNvPr id="11" name="TextBox 10">
             <a:extLst xmlns:a="http://schemas.openxmlformats.org/drawingml/2006/main">
               <a:ext uri="{FF2B5EF4-FFF2-40B4-BE49-F238E27FC236}">
-                <a16:creationId xmlns:a16="http://schemas.microsoft.com/office/drawing/2014/main" id="{61846415-F65B-4B75-9202-1F19AD50CADC}"/>
+                <a16:creationId xmlns:a16="http://schemas.microsoft.com/office/drawing/2014/main" id="{81A04180-DE0E-4DC4-BD79-8BDEFB4010F9}"/>
               </a:ext>
             </a:extLst>
           </p:cNvPr>
@@ -22211,7 +22361,7 @@
           <p:cNvPr id="12" name="Rounded Rectangle 11">
             <a:extLst xmlns:a="http://schemas.openxmlformats.org/drawingml/2006/main">
               <a:ext uri="{FF2B5EF4-FFF2-40B4-BE49-F238E27FC236}">
-                <a16:creationId xmlns:a16="http://schemas.microsoft.com/office/drawing/2014/main" id="{356A22C7-AF82-4F7B-871C-52604ECC72CB}"/>
+                <a16:creationId xmlns:a16="http://schemas.microsoft.com/office/drawing/2014/main" id="{5CA8D466-F33C-4966-AD88-1B756CE3D935}"/>
               </a:ext>
             </a:extLst>
           </p:cNvPr>
@@ -22268,7 +22418,7 @@
           <p:cNvPr id="13" name="TextBox 12">
             <a:extLst xmlns:a="http://schemas.openxmlformats.org/drawingml/2006/main">
               <a:ext uri="{FF2B5EF4-FFF2-40B4-BE49-F238E27FC236}">
-                <a16:creationId xmlns:a16="http://schemas.microsoft.com/office/drawing/2014/main" id="{4789A07E-4A7E-48A0-B929-AC6684504DBD}"/>
+                <a16:creationId xmlns:a16="http://schemas.microsoft.com/office/drawing/2014/main" id="{B32DABB3-C6CB-4A95-9988-AA535AC49528}"/>
               </a:ext>
             </a:extLst>
           </p:cNvPr>
@@ -22315,7 +22465,7 @@
           <p:cNvPr id="14" name="TextBox 13">
             <a:extLst xmlns:a="http://schemas.openxmlformats.org/drawingml/2006/main">
               <a:ext uri="{FF2B5EF4-FFF2-40B4-BE49-F238E27FC236}">
-                <a16:creationId xmlns:a16="http://schemas.microsoft.com/office/drawing/2014/main" id="{0133BD79-34B4-461A-A2DF-83867A4C62CE}"/>
+                <a16:creationId xmlns:a16="http://schemas.microsoft.com/office/drawing/2014/main" id="{EA50183A-3AF8-4A3D-BFAB-7939F92409E1}"/>
               </a:ext>
             </a:extLst>
           </p:cNvPr>
@@ -22362,7 +22512,7 @@
           <p:cNvPr id="15" name="TextBox 14">
             <a:extLst xmlns:a="http://schemas.openxmlformats.org/drawingml/2006/main">
               <a:ext uri="{FF2B5EF4-FFF2-40B4-BE49-F238E27FC236}">
-                <a16:creationId xmlns:a16="http://schemas.microsoft.com/office/drawing/2014/main" id="{E4B5F491-01EE-482A-94F6-711AAF8E4843}"/>
+                <a16:creationId xmlns:a16="http://schemas.microsoft.com/office/drawing/2014/main" id="{DFD4E813-79B4-497B-88F6-4B1C65BB7557}"/>
               </a:ext>
             </a:extLst>
           </p:cNvPr>
@@ -22409,7 +22559,7 @@
           <p:cNvPr id="16" name="Rounded Rectangle 15">
             <a:extLst xmlns:a="http://schemas.openxmlformats.org/drawingml/2006/main">
               <a:ext uri="{FF2B5EF4-FFF2-40B4-BE49-F238E27FC236}">
-                <a16:creationId xmlns:a16="http://schemas.microsoft.com/office/drawing/2014/main" id="{50EA69C1-1C63-4748-88DF-0CE32E298381}"/>
+                <a16:creationId xmlns:a16="http://schemas.microsoft.com/office/drawing/2014/main" id="{92C85A9A-AE1F-45EC-A20B-72B11943A5D0}"/>
               </a:ext>
             </a:extLst>
           </p:cNvPr>
@@ -22466,7 +22616,7 @@
           <p:cNvPr id="17" name="TextBox 16">
             <a:extLst xmlns:a="http://schemas.openxmlformats.org/drawingml/2006/main">
               <a:ext uri="{FF2B5EF4-FFF2-40B4-BE49-F238E27FC236}">
-                <a16:creationId xmlns:a16="http://schemas.microsoft.com/office/drawing/2014/main" id="{2BD5D152-7E7C-4B52-B336-47D6A2BD6F8F}"/>
+                <a16:creationId xmlns:a16="http://schemas.microsoft.com/office/drawing/2014/main" id="{F21DC731-AB1A-4B94-AD55-7124A8F75535}"/>
               </a:ext>
             </a:extLst>
           </p:cNvPr>
@@ -22513,7 +22663,7 @@
           <p:cNvPr id="18" name="TextBox 17">
             <a:extLst xmlns:a="http://schemas.openxmlformats.org/drawingml/2006/main">
               <a:ext uri="{FF2B5EF4-FFF2-40B4-BE49-F238E27FC236}">
-                <a16:creationId xmlns:a16="http://schemas.microsoft.com/office/drawing/2014/main" id="{AE3C8E64-4541-4882-B3D3-348618C155FB}"/>
+                <a16:creationId xmlns:a16="http://schemas.microsoft.com/office/drawing/2014/main" id="{5D91453E-88C9-4A69-A0B6-167EB8E95DBE}"/>
               </a:ext>
             </a:extLst>
           </p:cNvPr>
@@ -22560,7 +22710,7 @@
           <p:cNvPr id="19" name="TextBox 18">
             <a:extLst xmlns:a="http://schemas.openxmlformats.org/drawingml/2006/main">
               <a:ext uri="{FF2B5EF4-FFF2-40B4-BE49-F238E27FC236}">
-                <a16:creationId xmlns:a16="http://schemas.microsoft.com/office/drawing/2014/main" id="{EFD3824D-AD12-4544-9474-9CDA7E89397F}"/>
+                <a16:creationId xmlns:a16="http://schemas.microsoft.com/office/drawing/2014/main" id="{CC29713F-16EB-47FC-B644-37C0DC1AF609}"/>
               </a:ext>
             </a:extLst>
           </p:cNvPr>
@@ -22607,7 +22757,7 @@
           <p:cNvPr id="20" name="Rounded Rectangle 19">
             <a:extLst xmlns:a="http://schemas.openxmlformats.org/drawingml/2006/main">
               <a:ext uri="{FF2B5EF4-FFF2-40B4-BE49-F238E27FC236}">
-                <a16:creationId xmlns:a16="http://schemas.microsoft.com/office/drawing/2014/main" id="{D32710D2-E91D-4754-B080-AAAA7189220D}"/>
+                <a16:creationId xmlns:a16="http://schemas.microsoft.com/office/drawing/2014/main" id="{9F6E01DE-D434-4159-84A1-645B13116B92}"/>
               </a:ext>
             </a:extLst>
           </p:cNvPr>
@@ -22664,7 +22814,7 @@
           <p:cNvPr id="21" name="TextBox 20">
             <a:extLst xmlns:a="http://schemas.openxmlformats.org/drawingml/2006/main">
               <a:ext uri="{FF2B5EF4-FFF2-40B4-BE49-F238E27FC236}">
-                <a16:creationId xmlns:a16="http://schemas.microsoft.com/office/drawing/2014/main" id="{760A8EBF-9255-4859-B4CB-1FD494A4756C}"/>
+                <a16:creationId xmlns:a16="http://schemas.microsoft.com/office/drawing/2014/main" id="{D4304870-EB21-4BB1-8EFE-927435F1A09B}"/>
               </a:ext>
             </a:extLst>
           </p:cNvPr>
@@ -22711,7 +22861,7 @@
           <p:cNvPr id="22" name="TextBox 21">
             <a:extLst xmlns:a="http://schemas.openxmlformats.org/drawingml/2006/main">
               <a:ext uri="{FF2B5EF4-FFF2-40B4-BE49-F238E27FC236}">
-                <a16:creationId xmlns:a16="http://schemas.microsoft.com/office/drawing/2014/main" id="{92BF8AAF-1D6F-4900-977D-6430DFAA4E47}"/>
+                <a16:creationId xmlns:a16="http://schemas.microsoft.com/office/drawing/2014/main" id="{2C1B548C-2B06-4DBC-B9A9-5D8D98F47B9C}"/>
               </a:ext>
             </a:extLst>
           </p:cNvPr>
@@ -22758,7 +22908,7 @@
           <p:cNvPr id="23" name="TextBox 22">
             <a:extLst xmlns:a="http://schemas.openxmlformats.org/drawingml/2006/main">
               <a:ext uri="{FF2B5EF4-FFF2-40B4-BE49-F238E27FC236}">
-                <a16:creationId xmlns:a16="http://schemas.microsoft.com/office/drawing/2014/main" id="{2D55FB08-1087-4653-A46D-7598AEB0E666}"/>
+                <a16:creationId xmlns:a16="http://schemas.microsoft.com/office/drawing/2014/main" id="{87856A61-0A39-4A3E-89F1-012172AF0736}"/>
               </a:ext>
             </a:extLst>
           </p:cNvPr>
@@ -22805,7 +22955,7 @@
           <p:cNvPr id="24" name="TextBox 23">
             <a:extLst xmlns:a="http://schemas.openxmlformats.org/drawingml/2006/main">
               <a:ext uri="{FF2B5EF4-FFF2-40B4-BE49-F238E27FC236}">
-                <a16:creationId xmlns:a16="http://schemas.microsoft.com/office/drawing/2014/main" id="{FE90DC21-E700-4530-AF9C-D155A85B6116}"/>
+                <a16:creationId xmlns:a16="http://schemas.microsoft.com/office/drawing/2014/main" id="{B6354672-44D3-44FB-850D-0CD13B3836EF}"/>
               </a:ext>
             </a:extLst>
           </p:cNvPr>
@@ -22850,7 +23000,7 @@
     </p:spTree>
     <p:extLst>
       <p:ext uri="{BB962C8B-B14F-4D97-AF65-F5344CB8AC3E}">
-        <p14:creationId xmlns:p14="http://schemas.microsoft.com/office/powerpoint/2010/main" val="795244342"/>
+        <p14:creationId xmlns:p14="http://schemas.microsoft.com/office/powerpoint/2010/main" val="1501482428"/>
       </p:ext>
     </p:extLst>
   </p:cSld>
@@ -22874,7 +23024,7 @@
           <p:cNvPr id="2" name="TextBox 1">
             <a:extLst xmlns:a="http://schemas.openxmlformats.org/drawingml/2006/main">
               <a:ext uri="{FF2B5EF4-FFF2-40B4-BE49-F238E27FC236}">
-                <a16:creationId xmlns:a16="http://schemas.microsoft.com/office/drawing/2014/main" id="{CC2C83CA-6FA3-408A-BBFB-C2EEB763D88A}"/>
+                <a16:creationId xmlns:a16="http://schemas.microsoft.com/office/drawing/2014/main" id="{5E9D3ED8-8B82-4D2E-A4AF-1B9816CF6038}"/>
               </a:ext>
             </a:extLst>
           </p:cNvPr>
@@ -22921,7 +23071,7 @@
           <p:cNvPr id="3" name="TextBox 2">
             <a:extLst xmlns:a="http://schemas.openxmlformats.org/drawingml/2006/main">
               <a:ext uri="{FF2B5EF4-FFF2-40B4-BE49-F238E27FC236}">
-                <a16:creationId xmlns:a16="http://schemas.microsoft.com/office/drawing/2014/main" id="{DBACC59A-CCCD-46C2-8E5A-6A745CC7E196}"/>
+                <a16:creationId xmlns:a16="http://schemas.microsoft.com/office/drawing/2014/main" id="{B6B74B89-408F-4770-AEAD-E7B6AFA03DAA}"/>
               </a:ext>
             </a:extLst>
           </p:cNvPr>
@@ -22968,7 +23118,7 @@
           <p:cNvPr id="4" name="Rectangle 3">
             <a:extLst xmlns:a="http://schemas.openxmlformats.org/drawingml/2006/main">
               <a:ext uri="{FF2B5EF4-FFF2-40B4-BE49-F238E27FC236}">
-                <a16:creationId xmlns:a16="http://schemas.microsoft.com/office/drawing/2014/main" id="{EA85AC66-75A3-4010-ACBA-633AC941CFB3}"/>
+                <a16:creationId xmlns:a16="http://schemas.microsoft.com/office/drawing/2014/main" id="{28140F74-E93D-4266-AA77-25FDA38A0E01}"/>
               </a:ext>
             </a:extLst>
           </p:cNvPr>
@@ -23023,7 +23173,7 @@
           <p:cNvPr id="5" name="Rectangle 4">
             <a:extLst xmlns:a="http://schemas.openxmlformats.org/drawingml/2006/main">
               <a:ext uri="{FF2B5EF4-FFF2-40B4-BE49-F238E27FC236}">
-                <a16:creationId xmlns:a16="http://schemas.microsoft.com/office/drawing/2014/main" id="{BDAB448B-35C8-46F3-8FC7-95593CCEDD15}"/>
+                <a16:creationId xmlns:a16="http://schemas.microsoft.com/office/drawing/2014/main" id="{BF284EA3-5FD3-4F00-A687-99E4FC0FC7F7}"/>
               </a:ext>
             </a:extLst>
           </p:cNvPr>
@@ -23078,7 +23228,7 @@
           <p:cNvPr id="6" name="TextBox 5">
             <a:extLst xmlns:a="http://schemas.openxmlformats.org/drawingml/2006/main">
               <a:ext uri="{FF2B5EF4-FFF2-40B4-BE49-F238E27FC236}">
-                <a16:creationId xmlns:a16="http://schemas.microsoft.com/office/drawing/2014/main" id="{9DF381A9-C5F9-4F17-8BCA-08D301B1E82D}"/>
+                <a16:creationId xmlns:a16="http://schemas.microsoft.com/office/drawing/2014/main" id="{14EA26F2-418A-4A86-BB12-B2274EC8C70A}"/>
               </a:ext>
             </a:extLst>
           </p:cNvPr>
@@ -23115,7 +23265,7 @@
                 <a:ea typeface="Aptos"/>
                 <a:cs typeface="Aptos"/>
               </a:rPr>
-              <a:t>Julkinen riippumaton evidenssikooste · 2026.07.24-21 · 2026-07-24 · Lähteet: WIPO licensing; IP Finance; TPLF mapping</a:t>
+              <a:t>Julkinen riippumaton evidenssikooste · 2026.07.24-22 · 2026-07-24 · Lähteet: WIPO licensing; IP Finance; TPLF mapping</a:t>
             </a:r>
           </a:p>
         </p:txBody>
@@ -23125,7 +23275,7 @@
           <p:cNvPr id="7" name="TextBox 6">
             <a:extLst xmlns:a="http://schemas.openxmlformats.org/drawingml/2006/main">
               <a:ext uri="{FF2B5EF4-FFF2-40B4-BE49-F238E27FC236}">
-                <a16:creationId xmlns:a16="http://schemas.microsoft.com/office/drawing/2014/main" id="{0327D674-0904-4F8F-8F85-FB15635A5BD9}"/>
+                <a16:creationId xmlns:a16="http://schemas.microsoft.com/office/drawing/2014/main" id="{BC7EA216-78D1-418D-A09E-A5AB3172F223}"/>
               </a:ext>
             </a:extLst>
           </p:cNvPr>
@@ -23695,7 +23845,7 @@
           <p:cNvPr id="9" name="TextBox 8">
             <a:extLst xmlns:a="http://schemas.openxmlformats.org/drawingml/2006/main">
               <a:ext uri="{FF2B5EF4-FFF2-40B4-BE49-F238E27FC236}">
-                <a16:creationId xmlns:a16="http://schemas.microsoft.com/office/drawing/2014/main" id="{6E7A014C-A55A-4366-AD67-6BFBEAAFFA3F}"/>
+                <a16:creationId xmlns:a16="http://schemas.microsoft.com/office/drawing/2014/main" id="{DA3E8E83-9B43-4DA5-B5F4-7FBA1AF54C48}"/>
               </a:ext>
             </a:extLst>
           </p:cNvPr>
@@ -23740,7 +23890,7 @@
     </p:spTree>
     <p:extLst>
       <p:ext uri="{BB962C8B-B14F-4D97-AF65-F5344CB8AC3E}">
-        <p14:creationId xmlns:p14="http://schemas.microsoft.com/office/powerpoint/2010/main" val="2096013916"/>
+        <p14:creationId xmlns:p14="http://schemas.microsoft.com/office/powerpoint/2010/main" val="1144878459"/>
       </p:ext>
     </p:extLst>
   </p:cSld>
@@ -23764,7 +23914,7 @@
           <p:cNvPr id="2" name="TextBox 1">
             <a:extLst xmlns:a="http://schemas.openxmlformats.org/drawingml/2006/main">
               <a:ext uri="{FF2B5EF4-FFF2-40B4-BE49-F238E27FC236}">
-                <a16:creationId xmlns:a16="http://schemas.microsoft.com/office/drawing/2014/main" id="{02B40C99-2FB7-421C-B8D2-82204297010D}"/>
+                <a16:creationId xmlns:a16="http://schemas.microsoft.com/office/drawing/2014/main" id="{CB669A2E-3CCC-4ABE-9EF6-58629B1A6F31}"/>
               </a:ext>
             </a:extLst>
           </p:cNvPr>
@@ -23811,7 +23961,7 @@
           <p:cNvPr id="3" name="TextBox 2">
             <a:extLst xmlns:a="http://schemas.openxmlformats.org/drawingml/2006/main">
               <a:ext uri="{FF2B5EF4-FFF2-40B4-BE49-F238E27FC236}">
-                <a16:creationId xmlns:a16="http://schemas.microsoft.com/office/drawing/2014/main" id="{A3DA847C-421B-4CF4-93BF-F4B226E6E366}"/>
+                <a16:creationId xmlns:a16="http://schemas.microsoft.com/office/drawing/2014/main" id="{FBA12558-75C9-4889-8213-EED050A6AB21}"/>
               </a:ext>
             </a:extLst>
           </p:cNvPr>
@@ -23858,7 +24008,7 @@
           <p:cNvPr id="4" name="Rectangle 3">
             <a:extLst xmlns:a="http://schemas.openxmlformats.org/drawingml/2006/main">
               <a:ext uri="{FF2B5EF4-FFF2-40B4-BE49-F238E27FC236}">
-                <a16:creationId xmlns:a16="http://schemas.microsoft.com/office/drawing/2014/main" id="{6CE177BA-C9E8-48AF-AF4C-FA20E91DAF1F}"/>
+                <a16:creationId xmlns:a16="http://schemas.microsoft.com/office/drawing/2014/main" id="{78AAFC70-8BC4-46F3-A48D-0D498A8D2CB8}"/>
               </a:ext>
             </a:extLst>
           </p:cNvPr>
@@ -23913,7 +24063,7 @@
           <p:cNvPr id="5" name="Rectangle 4">
             <a:extLst xmlns:a="http://schemas.openxmlformats.org/drawingml/2006/main">
               <a:ext uri="{FF2B5EF4-FFF2-40B4-BE49-F238E27FC236}">
-                <a16:creationId xmlns:a16="http://schemas.microsoft.com/office/drawing/2014/main" id="{7C44A8F8-CDB3-4CAD-977A-2AEEFBC94702}"/>
+                <a16:creationId xmlns:a16="http://schemas.microsoft.com/office/drawing/2014/main" id="{2D133DB0-52EE-40D0-B556-24D387C14540}"/>
               </a:ext>
             </a:extLst>
           </p:cNvPr>
@@ -23968,7 +24118,7 @@
           <p:cNvPr id="6" name="TextBox 5">
             <a:extLst xmlns:a="http://schemas.openxmlformats.org/drawingml/2006/main">
               <a:ext uri="{FF2B5EF4-FFF2-40B4-BE49-F238E27FC236}">
-                <a16:creationId xmlns:a16="http://schemas.microsoft.com/office/drawing/2014/main" id="{78481555-8888-491E-97B2-636C31D15CBC}"/>
+                <a16:creationId xmlns:a16="http://schemas.microsoft.com/office/drawing/2014/main" id="{DF511A81-2BE3-4A48-A7AE-AE1B8AE62DB9}"/>
               </a:ext>
             </a:extLst>
           </p:cNvPr>
@@ -24005,7 +24155,7 @@
                 <a:ea typeface="Aptos"/>
                 <a:cs typeface="Aptos"/>
               </a:rPr>
-              <a:t>Julkinen riippumaton evidenssikooste · 2026.07.24-21 · 2026-07-24 · Lähteet: Evidence Register; WIPO valuation</a:t>
+              <a:t>Julkinen riippumaton evidenssikooste · 2026.07.24-22 · 2026-07-24 · Lähteet: Evidence Register; WIPO valuation</a:t>
             </a:r>
           </a:p>
         </p:txBody>
@@ -24015,7 +24165,7 @@
           <p:cNvPr id="7" name="TextBox 6">
             <a:extLst xmlns:a="http://schemas.openxmlformats.org/drawingml/2006/main">
               <a:ext uri="{FF2B5EF4-FFF2-40B4-BE49-F238E27FC236}">
-                <a16:creationId xmlns:a16="http://schemas.microsoft.com/office/drawing/2014/main" id="{6356678C-9103-43F0-972C-B9C4373143B6}"/>
+                <a16:creationId xmlns:a16="http://schemas.microsoft.com/office/drawing/2014/main" id="{CD5667F0-F840-4171-BF67-6E6445C08548}"/>
               </a:ext>
             </a:extLst>
           </p:cNvPr>
@@ -24668,7 +24818,7 @@
           <p:cNvPr id="9" name="TextBox 8">
             <a:extLst xmlns:a="http://schemas.openxmlformats.org/drawingml/2006/main">
               <a:ext uri="{FF2B5EF4-FFF2-40B4-BE49-F238E27FC236}">
-                <a16:creationId xmlns:a16="http://schemas.microsoft.com/office/drawing/2014/main" id="{57E01117-9475-44D7-8829-42CE18D4C5F3}"/>
+                <a16:creationId xmlns:a16="http://schemas.microsoft.com/office/drawing/2014/main" id="{2F35DA58-879E-4D0B-A975-43F87CCC612F}"/>
               </a:ext>
             </a:extLst>
           </p:cNvPr>
@@ -24713,7 +24863,7 @@
     </p:spTree>
     <p:extLst>
       <p:ext uri="{BB962C8B-B14F-4D97-AF65-F5344CB8AC3E}">
-        <p14:creationId xmlns:p14="http://schemas.microsoft.com/office/powerpoint/2010/main" val="1100584995"/>
+        <p14:creationId xmlns:p14="http://schemas.microsoft.com/office/powerpoint/2010/main" val="1021309762"/>
       </p:ext>
     </p:extLst>
   </p:cSld>
@@ -24737,7 +24887,7 @@
           <p:cNvPr id="2" name="TextBox 1">
             <a:extLst xmlns:a="http://schemas.openxmlformats.org/drawingml/2006/main">
               <a:ext uri="{FF2B5EF4-FFF2-40B4-BE49-F238E27FC236}">
-                <a16:creationId xmlns:a16="http://schemas.microsoft.com/office/drawing/2014/main" id="{4305B199-AED9-4F4A-8E81-DC4DBBAB4807}"/>
+                <a16:creationId xmlns:a16="http://schemas.microsoft.com/office/drawing/2014/main" id="{4DEE1841-FAF0-499B-9F07-865CF8BB0369}"/>
               </a:ext>
             </a:extLst>
           </p:cNvPr>
@@ -24784,7 +24934,7 @@
           <p:cNvPr id="3" name="TextBox 2">
             <a:extLst xmlns:a="http://schemas.openxmlformats.org/drawingml/2006/main">
               <a:ext uri="{FF2B5EF4-FFF2-40B4-BE49-F238E27FC236}">
-                <a16:creationId xmlns:a16="http://schemas.microsoft.com/office/drawing/2014/main" id="{601E36F4-BFC6-4A2C-A202-F334828910D6}"/>
+                <a16:creationId xmlns:a16="http://schemas.microsoft.com/office/drawing/2014/main" id="{18CDD2E9-656B-4626-9BFC-6446584A1FBD}"/>
               </a:ext>
             </a:extLst>
           </p:cNvPr>
@@ -24831,7 +24981,7 @@
           <p:cNvPr id="4" name="Rectangle 3">
             <a:extLst xmlns:a="http://schemas.openxmlformats.org/drawingml/2006/main">
               <a:ext uri="{FF2B5EF4-FFF2-40B4-BE49-F238E27FC236}">
-                <a16:creationId xmlns:a16="http://schemas.microsoft.com/office/drawing/2014/main" id="{4A9D6E14-6D14-4D02-BBE6-3C60D1A8B404}"/>
+                <a16:creationId xmlns:a16="http://schemas.microsoft.com/office/drawing/2014/main" id="{CAE97298-88F0-4647-9CEC-3A6AA097BF2A}"/>
               </a:ext>
             </a:extLst>
           </p:cNvPr>
@@ -24886,7 +25036,7 @@
           <p:cNvPr id="5" name="Rectangle 4">
             <a:extLst xmlns:a="http://schemas.openxmlformats.org/drawingml/2006/main">
               <a:ext uri="{FF2B5EF4-FFF2-40B4-BE49-F238E27FC236}">
-                <a16:creationId xmlns:a16="http://schemas.microsoft.com/office/drawing/2014/main" id="{56052EC3-D1EB-4866-A76C-AA9182CB1DF5}"/>
+                <a16:creationId xmlns:a16="http://schemas.microsoft.com/office/drawing/2014/main" id="{F1B9D211-65D2-4A25-9A2F-98082F7BE41F}"/>
               </a:ext>
             </a:extLst>
           </p:cNvPr>
@@ -24941,7 +25091,7 @@
           <p:cNvPr id="6" name="TextBox 5">
             <a:extLst xmlns:a="http://schemas.openxmlformats.org/drawingml/2006/main">
               <a:ext uri="{FF2B5EF4-FFF2-40B4-BE49-F238E27FC236}">
-                <a16:creationId xmlns:a16="http://schemas.microsoft.com/office/drawing/2014/main" id="{885E4088-5B82-4913-803B-AA6A865CEF73}"/>
+                <a16:creationId xmlns:a16="http://schemas.microsoft.com/office/drawing/2014/main" id="{1CB4BBAE-51C7-47AD-BDA7-6B32AAFD1289}"/>
               </a:ext>
             </a:extLst>
           </p:cNvPr>
@@ -24978,7 +25128,7 @@
                 <a:ea typeface="Aptos"/>
                 <a:cs typeface="Aptos"/>
               </a:rPr>
-              <a:t>Julkinen riippumaton evidenssikooste · 2026.07.24-21 · 2026-07-24 · Lähteet: WIPO valuation</a:t>
+              <a:t>Julkinen riippumaton evidenssikooste · 2026.07.24-22 · 2026-07-24 · Lähteet: WIPO valuation</a:t>
             </a:r>
           </a:p>
         </p:txBody>
@@ -24988,7 +25138,7 @@
           <p:cNvPr id="7" name="TextBox 6">
             <a:extLst xmlns:a="http://schemas.openxmlformats.org/drawingml/2006/main">
               <a:ext uri="{FF2B5EF4-FFF2-40B4-BE49-F238E27FC236}">
-                <a16:creationId xmlns:a16="http://schemas.microsoft.com/office/drawing/2014/main" id="{2623C26D-BD48-4009-BB04-C9B8D72C2AEA}"/>
+                <a16:creationId xmlns:a16="http://schemas.microsoft.com/office/drawing/2014/main" id="{F0C618CE-1D5B-4F82-8E35-7DB42C640C55}"/>
               </a:ext>
             </a:extLst>
           </p:cNvPr>
@@ -25721,7 +25871,7 @@
           <p:cNvPr id="9" name="TextBox 8">
             <a:extLst xmlns:a="http://schemas.openxmlformats.org/drawingml/2006/main">
               <a:ext uri="{FF2B5EF4-FFF2-40B4-BE49-F238E27FC236}">
-                <a16:creationId xmlns:a16="http://schemas.microsoft.com/office/drawing/2014/main" id="{B5165E1B-79D2-4D67-B80D-D5F12296DC5B}"/>
+                <a16:creationId xmlns:a16="http://schemas.microsoft.com/office/drawing/2014/main" id="{28CF0789-2A6B-4C0D-9300-B007901C9C00}"/>
               </a:ext>
             </a:extLst>
           </p:cNvPr>
@@ -25766,7 +25916,7 @@
     </p:spTree>
     <p:extLst>
       <p:ext uri="{BB962C8B-B14F-4D97-AF65-F5344CB8AC3E}">
-        <p14:creationId xmlns:p14="http://schemas.microsoft.com/office/powerpoint/2010/main" val="1945874844"/>
+        <p14:creationId xmlns:p14="http://schemas.microsoft.com/office/powerpoint/2010/main" val="428828354"/>
       </p:ext>
     </p:extLst>
   </p:cSld>
@@ -25790,7 +25940,7 @@
           <p:cNvPr id="2" name="TextBox 1">
             <a:extLst xmlns:a="http://schemas.openxmlformats.org/drawingml/2006/main">
               <a:ext uri="{FF2B5EF4-FFF2-40B4-BE49-F238E27FC236}">
-                <a16:creationId xmlns:a16="http://schemas.microsoft.com/office/drawing/2014/main" id="{DF495CAB-5045-4AF6-96DD-2F6B438CFA0F}"/>
+                <a16:creationId xmlns:a16="http://schemas.microsoft.com/office/drawing/2014/main" id="{567A5F81-20E5-4220-AEC9-EA09B427F402}"/>
               </a:ext>
             </a:extLst>
           </p:cNvPr>
@@ -25837,7 +25987,7 @@
           <p:cNvPr id="3" name="TextBox 2">
             <a:extLst xmlns:a="http://schemas.openxmlformats.org/drawingml/2006/main">
               <a:ext uri="{FF2B5EF4-FFF2-40B4-BE49-F238E27FC236}">
-                <a16:creationId xmlns:a16="http://schemas.microsoft.com/office/drawing/2014/main" id="{6F9A868B-F316-4A11-9663-3C8FCCD983DB}"/>
+                <a16:creationId xmlns:a16="http://schemas.microsoft.com/office/drawing/2014/main" id="{C0A8C7E1-4148-4CE6-BB63-895DAD643C06}"/>
               </a:ext>
             </a:extLst>
           </p:cNvPr>
@@ -25884,7 +26034,7 @@
           <p:cNvPr id="4" name="Rectangle 3">
             <a:extLst xmlns:a="http://schemas.openxmlformats.org/drawingml/2006/main">
               <a:ext uri="{FF2B5EF4-FFF2-40B4-BE49-F238E27FC236}">
-                <a16:creationId xmlns:a16="http://schemas.microsoft.com/office/drawing/2014/main" id="{23E0B400-3C6F-4DD6-91CD-F60F30458668}"/>
+                <a16:creationId xmlns:a16="http://schemas.microsoft.com/office/drawing/2014/main" id="{6F2FF429-3CC1-4275-B872-BD11BCB668F1}"/>
               </a:ext>
             </a:extLst>
           </p:cNvPr>
@@ -25939,7 +26089,7 @@
           <p:cNvPr id="5" name="Rectangle 4">
             <a:extLst xmlns:a="http://schemas.openxmlformats.org/drawingml/2006/main">
               <a:ext uri="{FF2B5EF4-FFF2-40B4-BE49-F238E27FC236}">
-                <a16:creationId xmlns:a16="http://schemas.microsoft.com/office/drawing/2014/main" id="{23B575C9-41C1-4F45-9CDA-92A813D67E08}"/>
+                <a16:creationId xmlns:a16="http://schemas.microsoft.com/office/drawing/2014/main" id="{A39ECEB4-A7A9-4A3C-89B2-DED7F83750FE}"/>
               </a:ext>
             </a:extLst>
           </p:cNvPr>
@@ -25994,7 +26144,7 @@
           <p:cNvPr id="6" name="TextBox 5">
             <a:extLst xmlns:a="http://schemas.openxmlformats.org/drawingml/2006/main">
               <a:ext uri="{FF2B5EF4-FFF2-40B4-BE49-F238E27FC236}">
-                <a16:creationId xmlns:a16="http://schemas.microsoft.com/office/drawing/2014/main" id="{E1F7F5C4-F1D3-485D-937D-96302D69C103}"/>
+                <a16:creationId xmlns:a16="http://schemas.microsoft.com/office/drawing/2014/main" id="{18342BB4-4B10-4B95-8CB6-26C63C623266}"/>
               </a:ext>
             </a:extLst>
           </p:cNvPr>
@@ -26031,7 +26181,7 @@
                 <a:ea typeface="Aptos"/>
                 <a:cs typeface="Aptos"/>
               </a:rPr>
-              <a:t>Julkinen riippumaton evidenssikooste · 2026.07.24-21 · 2026-07-24 · Lähteet: Evidence Register</a:t>
+              <a:t>Julkinen riippumaton evidenssikooste · 2026.07.24-22 · 2026-07-24 · Lähteet: Evidence Register</a:t>
             </a:r>
           </a:p>
         </p:txBody>
@@ -26041,7 +26191,7 @@
           <p:cNvPr id="7" name="TextBox 6">
             <a:extLst xmlns:a="http://schemas.openxmlformats.org/drawingml/2006/main">
               <a:ext uri="{FF2B5EF4-FFF2-40B4-BE49-F238E27FC236}">
-                <a16:creationId xmlns:a16="http://schemas.microsoft.com/office/drawing/2014/main" id="{12F2BE9D-07CC-4FCA-8F63-B9267B44902F}"/>
+                <a16:creationId xmlns:a16="http://schemas.microsoft.com/office/drawing/2014/main" id="{F94D26EA-9A77-4A42-8A7A-6D009B1E5D52}"/>
               </a:ext>
             </a:extLst>
           </p:cNvPr>
@@ -26611,7 +26761,7 @@
           <p:cNvPr id="9" name="TextBox 8">
             <a:extLst xmlns:a="http://schemas.openxmlformats.org/drawingml/2006/main">
               <a:ext uri="{FF2B5EF4-FFF2-40B4-BE49-F238E27FC236}">
-                <a16:creationId xmlns:a16="http://schemas.microsoft.com/office/drawing/2014/main" id="{C9A79FD8-18EE-453D-B651-AE1F90D8C873}"/>
+                <a16:creationId xmlns:a16="http://schemas.microsoft.com/office/drawing/2014/main" id="{5668641A-3EF9-4ED3-9378-33A2ACEE8B89}"/>
               </a:ext>
             </a:extLst>
           </p:cNvPr>
@@ -26656,7 +26806,7 @@
     </p:spTree>
     <p:extLst>
       <p:ext uri="{BB962C8B-B14F-4D97-AF65-F5344CB8AC3E}">
-        <p14:creationId xmlns:p14="http://schemas.microsoft.com/office/powerpoint/2010/main" val="399290955"/>
+        <p14:creationId xmlns:p14="http://schemas.microsoft.com/office/powerpoint/2010/main" val="2115131829"/>
       </p:ext>
     </p:extLst>
   </p:cSld>
@@ -26680,7 +26830,7 @@
           <p:cNvPr id="2" name="TextBox 1">
             <a:extLst xmlns:a="http://schemas.openxmlformats.org/drawingml/2006/main">
               <a:ext uri="{FF2B5EF4-FFF2-40B4-BE49-F238E27FC236}">
-                <a16:creationId xmlns:a16="http://schemas.microsoft.com/office/drawing/2014/main" id="{E55F27BB-0045-4EF4-8339-464FE9F4F712}"/>
+                <a16:creationId xmlns:a16="http://schemas.microsoft.com/office/drawing/2014/main" id="{EAFC66C2-2726-4ADB-954C-07C75EF9A2D7}"/>
               </a:ext>
             </a:extLst>
           </p:cNvPr>
@@ -26727,7 +26877,7 @@
           <p:cNvPr id="3" name="TextBox 2">
             <a:extLst xmlns:a="http://schemas.openxmlformats.org/drawingml/2006/main">
               <a:ext uri="{FF2B5EF4-FFF2-40B4-BE49-F238E27FC236}">
-                <a16:creationId xmlns:a16="http://schemas.microsoft.com/office/drawing/2014/main" id="{A3E5F23A-08AA-4565-9340-13D8DF9C6860}"/>
+                <a16:creationId xmlns:a16="http://schemas.microsoft.com/office/drawing/2014/main" id="{BF21E6AC-E148-4B66-8DCB-3972CD0F33B8}"/>
               </a:ext>
             </a:extLst>
           </p:cNvPr>
@@ -26774,7 +26924,7 @@
           <p:cNvPr id="4" name="Rectangle 3">
             <a:extLst xmlns:a="http://schemas.openxmlformats.org/drawingml/2006/main">
               <a:ext uri="{FF2B5EF4-FFF2-40B4-BE49-F238E27FC236}">
-                <a16:creationId xmlns:a16="http://schemas.microsoft.com/office/drawing/2014/main" id="{6ACA0152-373F-4DC8-AAA5-A4BD61036C19}"/>
+                <a16:creationId xmlns:a16="http://schemas.microsoft.com/office/drawing/2014/main" id="{5836959F-473C-46AA-81F1-3DC5C55F6A5C}"/>
               </a:ext>
             </a:extLst>
           </p:cNvPr>
@@ -26829,7 +26979,7 @@
           <p:cNvPr id="5" name="Rectangle 4">
             <a:extLst xmlns:a="http://schemas.openxmlformats.org/drawingml/2006/main">
               <a:ext uri="{FF2B5EF4-FFF2-40B4-BE49-F238E27FC236}">
-                <a16:creationId xmlns:a16="http://schemas.microsoft.com/office/drawing/2014/main" id="{5BEBD08C-19D6-44A0-9B5D-24FF10681DB8}"/>
+                <a16:creationId xmlns:a16="http://schemas.microsoft.com/office/drawing/2014/main" id="{80EF0437-9BDD-4EDE-A081-4A1B70D46F78}"/>
               </a:ext>
             </a:extLst>
           </p:cNvPr>
@@ -26884,7 +27034,7 @@
           <p:cNvPr id="6" name="TextBox 5">
             <a:extLst xmlns:a="http://schemas.openxmlformats.org/drawingml/2006/main">
               <a:ext uri="{FF2B5EF4-FFF2-40B4-BE49-F238E27FC236}">
-                <a16:creationId xmlns:a16="http://schemas.microsoft.com/office/drawing/2014/main" id="{978EEE4C-0A69-4B73-9095-1291C951204C}"/>
+                <a16:creationId xmlns:a16="http://schemas.microsoft.com/office/drawing/2014/main" id="{2D4BBBBF-9C67-42BD-8C3A-966B7D64E5D6}"/>
               </a:ext>
             </a:extLst>
           </p:cNvPr>
@@ -26921,7 +27071,7 @@
                 <a:ea typeface="Aptos"/>
                 <a:cs typeface="Aptos"/>
               </a:rPr>
-              <a:t>Julkinen riippumaton evidenssikooste · 2026.07.24-21 · 2026-07-24 · Lähteet: Evidence Register</a:t>
+              <a:t>Julkinen riippumaton evidenssikooste · 2026.07.24-22 · 2026-07-24 · Lähteet: Evidence Register</a:t>
             </a:r>
           </a:p>
         </p:txBody>
@@ -26931,7 +27081,7 @@
           <p:cNvPr id="7" name="TextBox 6">
             <a:extLst xmlns:a="http://schemas.openxmlformats.org/drawingml/2006/main">
               <a:ext uri="{FF2B5EF4-FFF2-40B4-BE49-F238E27FC236}">
-                <a16:creationId xmlns:a16="http://schemas.microsoft.com/office/drawing/2014/main" id="{FAF8B9D0-B13F-400F-B39F-75756EB942AB}"/>
+                <a16:creationId xmlns:a16="http://schemas.microsoft.com/office/drawing/2014/main" id="{D8E3A772-0452-4B6D-AB2F-1F60904C5F69}"/>
               </a:ext>
             </a:extLst>
           </p:cNvPr>
@@ -27584,7 +27734,7 @@
           <p:cNvPr id="9" name="TextBox 8">
             <a:extLst xmlns:a="http://schemas.openxmlformats.org/drawingml/2006/main">
               <a:ext uri="{FF2B5EF4-FFF2-40B4-BE49-F238E27FC236}">
-                <a16:creationId xmlns:a16="http://schemas.microsoft.com/office/drawing/2014/main" id="{65EF70E0-93BF-4587-86BC-9F7F606B780E}"/>
+                <a16:creationId xmlns:a16="http://schemas.microsoft.com/office/drawing/2014/main" id="{7B40409E-77F8-47E7-BC15-AEC0D150085D}"/>
               </a:ext>
             </a:extLst>
           </p:cNvPr>
@@ -27629,7 +27779,7 @@
     </p:spTree>
     <p:extLst>
       <p:ext uri="{BB962C8B-B14F-4D97-AF65-F5344CB8AC3E}">
-        <p14:creationId xmlns:p14="http://schemas.microsoft.com/office/powerpoint/2010/main" val="1767055897"/>
+        <p14:creationId xmlns:p14="http://schemas.microsoft.com/office/powerpoint/2010/main" val="191409369"/>
       </p:ext>
     </p:extLst>
   </p:cSld>
@@ -27653,7 +27803,7 @@
           <p:cNvPr id="2" name="TextBox 1">
             <a:extLst xmlns:a="http://schemas.openxmlformats.org/drawingml/2006/main">
               <a:ext uri="{FF2B5EF4-FFF2-40B4-BE49-F238E27FC236}">
-                <a16:creationId xmlns:a16="http://schemas.microsoft.com/office/drawing/2014/main" id="{539E759B-76D3-417B-ADBD-B7D8D5303429}"/>
+                <a16:creationId xmlns:a16="http://schemas.microsoft.com/office/drawing/2014/main" id="{3BEAAD63-614D-441F-835D-60CC9FA9F2A6}"/>
               </a:ext>
             </a:extLst>
           </p:cNvPr>
@@ -27700,7 +27850,7 @@
           <p:cNvPr id="3" name="TextBox 2">
             <a:extLst xmlns:a="http://schemas.openxmlformats.org/drawingml/2006/main">
               <a:ext uri="{FF2B5EF4-FFF2-40B4-BE49-F238E27FC236}">
-                <a16:creationId xmlns:a16="http://schemas.microsoft.com/office/drawing/2014/main" id="{2B3F6DAE-9B43-4840-B15B-16A26904ED87}"/>
+                <a16:creationId xmlns:a16="http://schemas.microsoft.com/office/drawing/2014/main" id="{B0C43230-B9F7-4CDE-B211-6AB214AF8D54}"/>
               </a:ext>
             </a:extLst>
           </p:cNvPr>
@@ -27747,7 +27897,7 @@
           <p:cNvPr id="4" name="Rectangle 3">
             <a:extLst xmlns:a="http://schemas.openxmlformats.org/drawingml/2006/main">
               <a:ext uri="{FF2B5EF4-FFF2-40B4-BE49-F238E27FC236}">
-                <a16:creationId xmlns:a16="http://schemas.microsoft.com/office/drawing/2014/main" id="{934DC0CE-7BAA-4D2A-B185-660F52091D2A}"/>
+                <a16:creationId xmlns:a16="http://schemas.microsoft.com/office/drawing/2014/main" id="{4A70D220-9F18-41DB-A811-53A9968B67BD}"/>
               </a:ext>
             </a:extLst>
           </p:cNvPr>
@@ -27802,7 +27952,7 @@
           <p:cNvPr id="5" name="Rectangle 4">
             <a:extLst xmlns:a="http://schemas.openxmlformats.org/drawingml/2006/main">
               <a:ext uri="{FF2B5EF4-FFF2-40B4-BE49-F238E27FC236}">
-                <a16:creationId xmlns:a16="http://schemas.microsoft.com/office/drawing/2014/main" id="{DA3E16C8-A983-4C79-BA93-35EC232DFB76}"/>
+                <a16:creationId xmlns:a16="http://schemas.microsoft.com/office/drawing/2014/main" id="{AA35B710-D482-4295-8554-61C6CFA65E57}"/>
               </a:ext>
             </a:extLst>
           </p:cNvPr>
@@ -27857,7 +28007,7 @@
           <p:cNvPr id="6" name="TextBox 5">
             <a:extLst xmlns:a="http://schemas.openxmlformats.org/drawingml/2006/main">
               <a:ext uri="{FF2B5EF4-FFF2-40B4-BE49-F238E27FC236}">
-                <a16:creationId xmlns:a16="http://schemas.microsoft.com/office/drawing/2014/main" id="{06D17B9A-015C-415F-B30B-F538C87F8FFB}"/>
+                <a16:creationId xmlns:a16="http://schemas.microsoft.com/office/drawing/2014/main" id="{3338B8FD-C80D-41F9-B084-C0D2A16798FC}"/>
               </a:ext>
             </a:extLst>
           </p:cNvPr>
@@ -27894,7 +28044,7 @@
                 <a:ea typeface="Aptos"/>
                 <a:cs typeface="Aptos"/>
               </a:rPr>
-              <a:t>Julkinen riippumaton evidenssikooste · 2026.07.24-21 · 2026-07-24 · Lähteet: Evidence Register; changelog</a:t>
+              <a:t>Julkinen riippumaton evidenssikooste · 2026.07.24-22 · 2026-07-24 · Lähteet: Evidence Register; changelog</a:t>
             </a:r>
           </a:p>
         </p:txBody>
@@ -27904,7 +28054,7 @@
           <p:cNvPr id="7" name="TextBox 6">
             <a:extLst xmlns:a="http://schemas.openxmlformats.org/drawingml/2006/main">
               <a:ext uri="{FF2B5EF4-FFF2-40B4-BE49-F238E27FC236}">
-                <a16:creationId xmlns:a16="http://schemas.microsoft.com/office/drawing/2014/main" id="{9699551D-4457-46DB-A3E6-C99B3508B425}"/>
+                <a16:creationId xmlns:a16="http://schemas.microsoft.com/office/drawing/2014/main" id="{CB852C7E-3565-4783-B84D-C95C979ADF5C}"/>
               </a:ext>
             </a:extLst>
           </p:cNvPr>
@@ -27951,7 +28101,7 @@
           <p:cNvPr id="8" name="Rounded Rectangle 7">
             <a:extLst xmlns:a="http://schemas.openxmlformats.org/drawingml/2006/main">
               <a:ext uri="{FF2B5EF4-FFF2-40B4-BE49-F238E27FC236}">
-                <a16:creationId xmlns:a16="http://schemas.microsoft.com/office/drawing/2014/main" id="{D0859C3C-CEC1-483E-A520-0E26D98EBC40}"/>
+                <a16:creationId xmlns:a16="http://schemas.microsoft.com/office/drawing/2014/main" id="{8E24B6E4-4E49-4C76-91D2-34177FF5B8D5}"/>
               </a:ext>
             </a:extLst>
           </p:cNvPr>
@@ -28008,7 +28158,7 @@
           <p:cNvPr id="9" name="TextBox 8">
             <a:extLst xmlns:a="http://schemas.openxmlformats.org/drawingml/2006/main">
               <a:ext uri="{FF2B5EF4-FFF2-40B4-BE49-F238E27FC236}">
-                <a16:creationId xmlns:a16="http://schemas.microsoft.com/office/drawing/2014/main" id="{EB59FB24-5FCA-4BDA-93C1-F903F3D056B8}"/>
+                <a16:creationId xmlns:a16="http://schemas.microsoft.com/office/drawing/2014/main" id="{AD56A15C-F917-4651-BA15-C9A60BC7090D}"/>
               </a:ext>
             </a:extLst>
           </p:cNvPr>
@@ -28055,7 +28205,7 @@
           <p:cNvPr id="10" name="TextBox 9">
             <a:extLst xmlns:a="http://schemas.openxmlformats.org/drawingml/2006/main">
               <a:ext uri="{FF2B5EF4-FFF2-40B4-BE49-F238E27FC236}">
-                <a16:creationId xmlns:a16="http://schemas.microsoft.com/office/drawing/2014/main" id="{1A3B6244-CA69-406B-ABAA-727EB2C03B46}"/>
+                <a16:creationId xmlns:a16="http://schemas.microsoft.com/office/drawing/2014/main" id="{D443685F-1961-4F19-8B91-A10702CB4889}"/>
               </a:ext>
             </a:extLst>
           </p:cNvPr>
@@ -28102,7 +28252,7 @@
           <p:cNvPr id="11" name="TextBox 10">
             <a:extLst xmlns:a="http://schemas.openxmlformats.org/drawingml/2006/main">
               <a:ext uri="{FF2B5EF4-FFF2-40B4-BE49-F238E27FC236}">
-                <a16:creationId xmlns:a16="http://schemas.microsoft.com/office/drawing/2014/main" id="{28682A19-6144-4453-A6BD-4A52BFE8B488}"/>
+                <a16:creationId xmlns:a16="http://schemas.microsoft.com/office/drawing/2014/main" id="{C8D0007C-8778-4566-A7FB-5B855D2C7C48}"/>
               </a:ext>
             </a:extLst>
           </p:cNvPr>
@@ -28149,7 +28299,7 @@
           <p:cNvPr id="12" name="Rounded Rectangle 11">
             <a:extLst xmlns:a="http://schemas.openxmlformats.org/drawingml/2006/main">
               <a:ext uri="{FF2B5EF4-FFF2-40B4-BE49-F238E27FC236}">
-                <a16:creationId xmlns:a16="http://schemas.microsoft.com/office/drawing/2014/main" id="{DCC9D55B-BF75-41E9-8BDF-97D07984BE50}"/>
+                <a16:creationId xmlns:a16="http://schemas.microsoft.com/office/drawing/2014/main" id="{E692821D-A5ED-4CBA-897A-3BB86A8B9812}"/>
               </a:ext>
             </a:extLst>
           </p:cNvPr>
@@ -28206,7 +28356,7 @@
           <p:cNvPr id="13" name="TextBox 12">
             <a:extLst xmlns:a="http://schemas.openxmlformats.org/drawingml/2006/main">
               <a:ext uri="{FF2B5EF4-FFF2-40B4-BE49-F238E27FC236}">
-                <a16:creationId xmlns:a16="http://schemas.microsoft.com/office/drawing/2014/main" id="{1EA2D62A-4146-4640-BAA7-95EBBD3C4093}"/>
+                <a16:creationId xmlns:a16="http://schemas.microsoft.com/office/drawing/2014/main" id="{96EB5B2D-DE5B-4AF0-9140-1866435D1032}"/>
               </a:ext>
             </a:extLst>
           </p:cNvPr>
@@ -28253,7 +28403,7 @@
           <p:cNvPr id="14" name="TextBox 13">
             <a:extLst xmlns:a="http://schemas.openxmlformats.org/drawingml/2006/main">
               <a:ext uri="{FF2B5EF4-FFF2-40B4-BE49-F238E27FC236}">
-                <a16:creationId xmlns:a16="http://schemas.microsoft.com/office/drawing/2014/main" id="{838498BF-74AA-49AA-B3FD-A6F42A2D64AC}"/>
+                <a16:creationId xmlns:a16="http://schemas.microsoft.com/office/drawing/2014/main" id="{E9EDE640-508D-4AB8-94E2-8C988A7F9EC7}"/>
               </a:ext>
             </a:extLst>
           </p:cNvPr>
@@ -28300,7 +28450,7 @@
           <p:cNvPr id="15" name="TextBox 14">
             <a:extLst xmlns:a="http://schemas.openxmlformats.org/drawingml/2006/main">
               <a:ext uri="{FF2B5EF4-FFF2-40B4-BE49-F238E27FC236}">
-                <a16:creationId xmlns:a16="http://schemas.microsoft.com/office/drawing/2014/main" id="{4AE2503D-2072-43C1-924C-E716C1A85FD1}"/>
+                <a16:creationId xmlns:a16="http://schemas.microsoft.com/office/drawing/2014/main" id="{F007DB4D-4712-4E68-ABE6-C08268460234}"/>
               </a:ext>
             </a:extLst>
           </p:cNvPr>
@@ -28347,7 +28497,7 @@
           <p:cNvPr id="16" name="Rounded Rectangle 15">
             <a:extLst xmlns:a="http://schemas.openxmlformats.org/drawingml/2006/main">
               <a:ext uri="{FF2B5EF4-FFF2-40B4-BE49-F238E27FC236}">
-                <a16:creationId xmlns:a16="http://schemas.microsoft.com/office/drawing/2014/main" id="{4421FFC3-209D-4494-930D-7066C1F2C6FC}"/>
+                <a16:creationId xmlns:a16="http://schemas.microsoft.com/office/drawing/2014/main" id="{4C4D69E9-3774-4B24-8389-2DE31F529520}"/>
               </a:ext>
             </a:extLst>
           </p:cNvPr>
@@ -28404,7 +28554,7 @@
           <p:cNvPr id="17" name="TextBox 16">
             <a:extLst xmlns:a="http://schemas.openxmlformats.org/drawingml/2006/main">
               <a:ext uri="{FF2B5EF4-FFF2-40B4-BE49-F238E27FC236}">
-                <a16:creationId xmlns:a16="http://schemas.microsoft.com/office/drawing/2014/main" id="{2A0A183A-8E8A-4674-9745-CA560C8A419D}"/>
+                <a16:creationId xmlns:a16="http://schemas.microsoft.com/office/drawing/2014/main" id="{D1EECB06-6E09-4698-AABA-05F627A793F4}"/>
               </a:ext>
             </a:extLst>
           </p:cNvPr>
@@ -28451,7 +28601,7 @@
           <p:cNvPr id="18" name="TextBox 17">
             <a:extLst xmlns:a="http://schemas.openxmlformats.org/drawingml/2006/main">
               <a:ext uri="{FF2B5EF4-FFF2-40B4-BE49-F238E27FC236}">
-                <a16:creationId xmlns:a16="http://schemas.microsoft.com/office/drawing/2014/main" id="{B7CB4F24-FAE0-4709-9A56-8A4E8FF2203C}"/>
+                <a16:creationId xmlns:a16="http://schemas.microsoft.com/office/drawing/2014/main" id="{B2596DAA-0D86-4213-BF29-FCC916853860}"/>
               </a:ext>
             </a:extLst>
           </p:cNvPr>
@@ -28498,7 +28648,7 @@
           <p:cNvPr id="19" name="TextBox 18">
             <a:extLst xmlns:a="http://schemas.openxmlformats.org/drawingml/2006/main">
               <a:ext uri="{FF2B5EF4-FFF2-40B4-BE49-F238E27FC236}">
-                <a16:creationId xmlns:a16="http://schemas.microsoft.com/office/drawing/2014/main" id="{7CB1098A-8676-43C1-A661-502DA74977A7}"/>
+                <a16:creationId xmlns:a16="http://schemas.microsoft.com/office/drawing/2014/main" id="{49BFECF9-E626-4402-B328-C4BA1A79FB24}"/>
               </a:ext>
             </a:extLst>
           </p:cNvPr>
@@ -28545,7 +28695,7 @@
           <p:cNvPr id="20" name="Rounded Rectangle 19">
             <a:extLst xmlns:a="http://schemas.openxmlformats.org/drawingml/2006/main">
               <a:ext uri="{FF2B5EF4-FFF2-40B4-BE49-F238E27FC236}">
-                <a16:creationId xmlns:a16="http://schemas.microsoft.com/office/drawing/2014/main" id="{A3455DCF-C7E5-4E83-8227-61383A121201}"/>
+                <a16:creationId xmlns:a16="http://schemas.microsoft.com/office/drawing/2014/main" id="{F80FA3B8-9C11-4455-ADEF-8408DC79F8A3}"/>
               </a:ext>
             </a:extLst>
           </p:cNvPr>
@@ -28602,7 +28752,7 @@
           <p:cNvPr id="21" name="TextBox 20">
             <a:extLst xmlns:a="http://schemas.openxmlformats.org/drawingml/2006/main">
               <a:ext uri="{FF2B5EF4-FFF2-40B4-BE49-F238E27FC236}">
-                <a16:creationId xmlns:a16="http://schemas.microsoft.com/office/drawing/2014/main" id="{C066282D-23BD-416D-9AC3-A50BF7574521}"/>
+                <a16:creationId xmlns:a16="http://schemas.microsoft.com/office/drawing/2014/main" id="{D2F3AD08-D8FC-4EF7-BE4A-6F06796ABFD6}"/>
               </a:ext>
             </a:extLst>
           </p:cNvPr>
@@ -28649,7 +28799,7 @@
           <p:cNvPr id="22" name="TextBox 21">
             <a:extLst xmlns:a="http://schemas.openxmlformats.org/drawingml/2006/main">
               <a:ext uri="{FF2B5EF4-FFF2-40B4-BE49-F238E27FC236}">
-                <a16:creationId xmlns:a16="http://schemas.microsoft.com/office/drawing/2014/main" id="{1379DCAF-DDE3-4964-BA45-AA8B872F4012}"/>
+                <a16:creationId xmlns:a16="http://schemas.microsoft.com/office/drawing/2014/main" id="{96EFE7A0-348C-4003-B833-AA35C0C0E1BC}"/>
               </a:ext>
             </a:extLst>
           </p:cNvPr>
@@ -28696,7 +28846,7 @@
           <p:cNvPr id="23" name="TextBox 22">
             <a:extLst xmlns:a="http://schemas.openxmlformats.org/drawingml/2006/main">
               <a:ext uri="{FF2B5EF4-FFF2-40B4-BE49-F238E27FC236}">
-                <a16:creationId xmlns:a16="http://schemas.microsoft.com/office/drawing/2014/main" id="{F9B2FBB3-7C05-4C46-868B-A21A17F813BC}"/>
+                <a16:creationId xmlns:a16="http://schemas.microsoft.com/office/drawing/2014/main" id="{7C25CA76-0DF2-4067-B174-8BF9F1DA27C3}"/>
               </a:ext>
             </a:extLst>
           </p:cNvPr>
@@ -28743,7 +28893,7 @@
           <p:cNvPr id="24" name="TextBox 23">
             <a:extLst xmlns:a="http://schemas.openxmlformats.org/drawingml/2006/main">
               <a:ext uri="{FF2B5EF4-FFF2-40B4-BE49-F238E27FC236}">
-                <a16:creationId xmlns:a16="http://schemas.microsoft.com/office/drawing/2014/main" id="{5556B1C0-5465-466F-9130-770FF1688702}"/>
+                <a16:creationId xmlns:a16="http://schemas.microsoft.com/office/drawing/2014/main" id="{C209C9ED-8D7A-4127-8A36-C6FA7632A023}"/>
               </a:ext>
             </a:extLst>
           </p:cNvPr>
@@ -28788,7 +28938,7 @@
     </p:spTree>
     <p:extLst>
       <p:ext uri="{BB962C8B-B14F-4D97-AF65-F5344CB8AC3E}">
-        <p14:creationId xmlns:p14="http://schemas.microsoft.com/office/powerpoint/2010/main" val="1497815887"/>
+        <p14:creationId xmlns:p14="http://schemas.microsoft.com/office/powerpoint/2010/main" val="940740762"/>
       </p:ext>
     </p:extLst>
   </p:cSld>
@@ -28812,7 +28962,7 @@
           <p:cNvPr id="2" name="TextBox 1">
             <a:extLst xmlns:a="http://schemas.openxmlformats.org/drawingml/2006/main">
               <a:ext uri="{FF2B5EF4-FFF2-40B4-BE49-F238E27FC236}">
-                <a16:creationId xmlns:a16="http://schemas.microsoft.com/office/drawing/2014/main" id="{B97C759E-5B4E-4EEA-A436-1518F36451D3}"/>
+                <a16:creationId xmlns:a16="http://schemas.microsoft.com/office/drawing/2014/main" id="{DE4DC3DC-9FF8-4E19-9389-ECA9CA1092EA}"/>
               </a:ext>
             </a:extLst>
           </p:cNvPr>
@@ -28859,7 +29009,7 @@
           <p:cNvPr id="3" name="TextBox 2">
             <a:extLst xmlns:a="http://schemas.openxmlformats.org/drawingml/2006/main">
               <a:ext uri="{FF2B5EF4-FFF2-40B4-BE49-F238E27FC236}">
-                <a16:creationId xmlns:a16="http://schemas.microsoft.com/office/drawing/2014/main" id="{2C161B68-B3B8-4158-B82E-82F5E86C4ADE}"/>
+                <a16:creationId xmlns:a16="http://schemas.microsoft.com/office/drawing/2014/main" id="{CF3AFE26-C861-4A5C-9E97-9C6795B86464}"/>
               </a:ext>
             </a:extLst>
           </p:cNvPr>
@@ -28906,7 +29056,7 @@
           <p:cNvPr id="4" name="Rectangle 3">
             <a:extLst xmlns:a="http://schemas.openxmlformats.org/drawingml/2006/main">
               <a:ext uri="{FF2B5EF4-FFF2-40B4-BE49-F238E27FC236}">
-                <a16:creationId xmlns:a16="http://schemas.microsoft.com/office/drawing/2014/main" id="{8AF2D5C0-7A64-490F-B379-D8D2A720FCBB}"/>
+                <a16:creationId xmlns:a16="http://schemas.microsoft.com/office/drawing/2014/main" id="{1887F0DF-5D42-4D54-97FC-4713D3B8B3C7}"/>
               </a:ext>
             </a:extLst>
           </p:cNvPr>
@@ -28961,7 +29111,7 @@
           <p:cNvPr id="5" name="Rectangle 4">
             <a:extLst xmlns:a="http://schemas.openxmlformats.org/drawingml/2006/main">
               <a:ext uri="{FF2B5EF4-FFF2-40B4-BE49-F238E27FC236}">
-                <a16:creationId xmlns:a16="http://schemas.microsoft.com/office/drawing/2014/main" id="{32FDC27C-8E3E-4F2E-96BD-4459015E75CE}"/>
+                <a16:creationId xmlns:a16="http://schemas.microsoft.com/office/drawing/2014/main" id="{BE25D605-F209-442A-AF83-FC64F73381E0}"/>
               </a:ext>
             </a:extLst>
           </p:cNvPr>
@@ -29016,7 +29166,7 @@
           <p:cNvPr id="6" name="TextBox 5">
             <a:extLst xmlns:a="http://schemas.openxmlformats.org/drawingml/2006/main">
               <a:ext uri="{FF2B5EF4-FFF2-40B4-BE49-F238E27FC236}">
-                <a16:creationId xmlns:a16="http://schemas.microsoft.com/office/drawing/2014/main" id="{4D0092AE-7729-481D-AEDF-5E7292AA4AD4}"/>
+                <a16:creationId xmlns:a16="http://schemas.microsoft.com/office/drawing/2014/main" id="{B54ABC09-CF5F-47EC-9A50-EDE8A733C84B}"/>
               </a:ext>
             </a:extLst>
           </p:cNvPr>
@@ -29053,7 +29203,7 @@
                 <a:ea typeface="Aptos"/>
                 <a:cs typeface="Aptos"/>
               </a:rPr>
-              <a:t>Julkinen riippumaton evidenssikooste · 2026.07.24-21 · 2026-07-24 · Lähteet: EPO; 8 Ni 18/24 (EP); 7 O 3341/24</a:t>
+              <a:t>Julkinen riippumaton evidenssikooste · 2026.07.24-22 · 2026-07-24 · Lähteet: EPO; 8 Ni 18/24 (EP); 7 O 3341/24</a:t>
             </a:r>
           </a:p>
         </p:txBody>
@@ -29063,7 +29213,7 @@
           <p:cNvPr id="7" name="TextBox 6">
             <a:extLst xmlns:a="http://schemas.openxmlformats.org/drawingml/2006/main">
               <a:ext uri="{FF2B5EF4-FFF2-40B4-BE49-F238E27FC236}">
-                <a16:creationId xmlns:a16="http://schemas.microsoft.com/office/drawing/2014/main" id="{17CB4749-15C5-422C-8661-9218A5095492}"/>
+                <a16:creationId xmlns:a16="http://schemas.microsoft.com/office/drawing/2014/main" id="{840EB3AD-2559-45BC-9E78-756FE6BB168F}"/>
               </a:ext>
             </a:extLst>
           </p:cNvPr>
@@ -29467,7 +29617,7 @@
           <p:cNvPr id="9" name="TextBox 8">
             <a:extLst xmlns:a="http://schemas.openxmlformats.org/drawingml/2006/main">
               <a:ext uri="{FF2B5EF4-FFF2-40B4-BE49-F238E27FC236}">
-                <a16:creationId xmlns:a16="http://schemas.microsoft.com/office/drawing/2014/main" id="{33BFC016-9D40-41DE-ACDA-D5538BE0BFDD}"/>
+                <a16:creationId xmlns:a16="http://schemas.microsoft.com/office/drawing/2014/main" id="{50875C9D-C73B-4BB1-816F-F9D720E143ED}"/>
               </a:ext>
             </a:extLst>
           </p:cNvPr>
@@ -29512,7 +29662,7 @@
     </p:spTree>
     <p:extLst>
       <p:ext uri="{BB962C8B-B14F-4D97-AF65-F5344CB8AC3E}">
-        <p14:creationId xmlns:p14="http://schemas.microsoft.com/office/powerpoint/2010/main" val="459351442"/>
+        <p14:creationId xmlns:p14="http://schemas.microsoft.com/office/powerpoint/2010/main" val="213318893"/>
       </p:ext>
     </p:extLst>
   </p:cSld>
@@ -29543,7 +29693,7 @@
           <p:cNvPr id="2" name="TextBox 1">
             <a:extLst xmlns:a="http://schemas.openxmlformats.org/drawingml/2006/main">
               <a:ext uri="{FF2B5EF4-FFF2-40B4-BE49-F238E27FC236}">
-                <a16:creationId xmlns:a16="http://schemas.microsoft.com/office/drawing/2014/main" id="{2F72C4DE-D23D-4F97-BE2C-3F13EF1C468C}"/>
+                <a16:creationId xmlns:a16="http://schemas.microsoft.com/office/drawing/2014/main" id="{4DC5E053-6C62-4D15-815F-87DBBA7DB448}"/>
               </a:ext>
             </a:extLst>
           </p:cNvPr>
@@ -29590,7 +29740,7 @@
           <p:cNvPr id="3" name="TextBox 2">
             <a:extLst xmlns:a="http://schemas.openxmlformats.org/drawingml/2006/main">
               <a:ext uri="{FF2B5EF4-FFF2-40B4-BE49-F238E27FC236}">
-                <a16:creationId xmlns:a16="http://schemas.microsoft.com/office/drawing/2014/main" id="{9B162C5A-1D77-4227-8673-42BCD583F7A6}"/>
+                <a16:creationId xmlns:a16="http://schemas.microsoft.com/office/drawing/2014/main" id="{0729DE8E-2CB9-4E29-9893-733AC14FF1EB}"/>
               </a:ext>
             </a:extLst>
           </p:cNvPr>
@@ -29637,7 +29787,7 @@
           <p:cNvPr id="4" name="TextBox 3">
             <a:extLst xmlns:a="http://schemas.openxmlformats.org/drawingml/2006/main">
               <a:ext uri="{FF2B5EF4-FFF2-40B4-BE49-F238E27FC236}">
-                <a16:creationId xmlns:a16="http://schemas.microsoft.com/office/drawing/2014/main" id="{3C084997-51C7-41DF-9629-C60AC9F018F9}"/>
+                <a16:creationId xmlns:a16="http://schemas.microsoft.com/office/drawing/2014/main" id="{D3D159DA-1DC1-43CC-B1E2-A1D2B3C544B9}"/>
               </a:ext>
             </a:extLst>
           </p:cNvPr>
@@ -29756,7 +29906,7 @@
           <p:cNvPr id="5" name="TextBox 4">
             <a:extLst xmlns:a="http://schemas.openxmlformats.org/drawingml/2006/main">
               <a:ext uri="{FF2B5EF4-FFF2-40B4-BE49-F238E27FC236}">
-                <a16:creationId xmlns:a16="http://schemas.microsoft.com/office/drawing/2014/main" id="{7DA9C574-87FB-48A3-ABC3-BE520DF29E97}"/>
+                <a16:creationId xmlns:a16="http://schemas.microsoft.com/office/drawing/2014/main" id="{4D15C988-1D26-4BDA-B368-AB3FC446A104}"/>
               </a:ext>
             </a:extLst>
           </p:cNvPr>
@@ -29793,7 +29943,7 @@
                 <a:ea typeface="Aptos"/>
                 <a:cs typeface="Aptos"/>
               </a:rPr>
-              <a:t>Versio 2026.07.24-21 · 2026-07-24 · 30 / 30</a:t>
+              <a:t>Versio 2026.07.24-22 · 2026-07-24 · 30 / 30</a:t>
             </a:r>
           </a:p>
         </p:txBody>
@@ -29801,7 +29951,7 @@
     </p:spTree>
     <p:extLst>
       <p:ext uri="{BB962C8B-B14F-4D97-AF65-F5344CB8AC3E}">
-        <p14:creationId xmlns:p14="http://schemas.microsoft.com/office/powerpoint/2010/main" val="1473851342"/>
+        <p14:creationId xmlns:p14="http://schemas.microsoft.com/office/powerpoint/2010/main" val="1546630365"/>
       </p:ext>
     </p:extLst>
   </p:cSld>
@@ -29825,7 +29975,7 @@
           <p:cNvPr id="2" name="TextBox 1">
             <a:extLst xmlns:a="http://schemas.openxmlformats.org/drawingml/2006/main">
               <a:ext uri="{FF2B5EF4-FFF2-40B4-BE49-F238E27FC236}">
-                <a16:creationId xmlns:a16="http://schemas.microsoft.com/office/drawing/2014/main" id="{E4DBFE3A-F93F-4CD8-97C9-ACBEAA15860B}"/>
+                <a16:creationId xmlns:a16="http://schemas.microsoft.com/office/drawing/2014/main" id="{56925B1A-DE57-42E2-AA13-2F8A2FE019DF}"/>
               </a:ext>
             </a:extLst>
           </p:cNvPr>
@@ -29872,7 +30022,7 @@
           <p:cNvPr id="3" name="TextBox 2">
             <a:extLst xmlns:a="http://schemas.openxmlformats.org/drawingml/2006/main">
               <a:ext uri="{FF2B5EF4-FFF2-40B4-BE49-F238E27FC236}">
-                <a16:creationId xmlns:a16="http://schemas.microsoft.com/office/drawing/2014/main" id="{4FF65DEA-5C72-498E-A0D3-6E6664672CFB}"/>
+                <a16:creationId xmlns:a16="http://schemas.microsoft.com/office/drawing/2014/main" id="{00A0C050-E88E-437A-9DEC-4657BF8B25BD}"/>
               </a:ext>
             </a:extLst>
           </p:cNvPr>
@@ -29919,7 +30069,7 @@
           <p:cNvPr id="4" name="Rectangle 3">
             <a:extLst xmlns:a="http://schemas.openxmlformats.org/drawingml/2006/main">
               <a:ext uri="{FF2B5EF4-FFF2-40B4-BE49-F238E27FC236}">
-                <a16:creationId xmlns:a16="http://schemas.microsoft.com/office/drawing/2014/main" id="{81A961E8-8188-4118-BC29-2C2EC4A2E56C}"/>
+                <a16:creationId xmlns:a16="http://schemas.microsoft.com/office/drawing/2014/main" id="{FDE54577-A569-4207-A8B5-A8231291B49B}"/>
               </a:ext>
             </a:extLst>
           </p:cNvPr>
@@ -29974,7 +30124,7 @@
           <p:cNvPr id="5" name="Rectangle 4">
             <a:extLst xmlns:a="http://schemas.openxmlformats.org/drawingml/2006/main">
               <a:ext uri="{FF2B5EF4-FFF2-40B4-BE49-F238E27FC236}">
-                <a16:creationId xmlns:a16="http://schemas.microsoft.com/office/drawing/2014/main" id="{47221BFE-DCBD-433B-AF58-336593ACE5A5}"/>
+                <a16:creationId xmlns:a16="http://schemas.microsoft.com/office/drawing/2014/main" id="{7DD91547-864D-4B8B-BF3E-FCAF0B617F61}"/>
               </a:ext>
             </a:extLst>
           </p:cNvPr>
@@ -30029,7 +30179,7 @@
           <p:cNvPr id="6" name="TextBox 5">
             <a:extLst xmlns:a="http://schemas.openxmlformats.org/drawingml/2006/main">
               <a:ext uri="{FF2B5EF4-FFF2-40B4-BE49-F238E27FC236}">
-                <a16:creationId xmlns:a16="http://schemas.microsoft.com/office/drawing/2014/main" id="{AB7C3694-4863-4462-919A-EAB6024BB3CF}"/>
+                <a16:creationId xmlns:a16="http://schemas.microsoft.com/office/drawing/2014/main" id="{319E786C-4D3B-47FE-98F9-9F21CBC6B2D2}"/>
               </a:ext>
             </a:extLst>
           </p:cNvPr>
@@ -30066,7 +30216,7 @@
                 <a:ea typeface="Aptos"/>
                 <a:cs typeface="Aptos"/>
               </a:rPr>
-              <a:t>Julkinen riippumaton evidenssikooste · 2026.07.24-21 · 2026-07-24 · Lähteet: Evidence Register; WIPO</a:t>
+              <a:t>Julkinen riippumaton evidenssikooste · 2026.07.24-22 · 2026-07-24 · Lähteet: Evidence Register; WIPO</a:t>
             </a:r>
           </a:p>
         </p:txBody>
@@ -30076,7 +30226,7 @@
           <p:cNvPr id="7" name="TextBox 6">
             <a:extLst xmlns:a="http://schemas.openxmlformats.org/drawingml/2006/main">
               <a:ext uri="{FF2B5EF4-FFF2-40B4-BE49-F238E27FC236}">
-                <a16:creationId xmlns:a16="http://schemas.microsoft.com/office/drawing/2014/main" id="{35D162D5-003B-4848-9959-BA89063AAAB7}"/>
+                <a16:creationId xmlns:a16="http://schemas.microsoft.com/office/drawing/2014/main" id="{169E5DB2-81F7-4C8C-98A4-C395EC916A98}"/>
               </a:ext>
             </a:extLst>
           </p:cNvPr>
@@ -30123,7 +30273,7 @@
           <p:cNvPr id="8" name="TextBox 7">
             <a:extLst xmlns:a="http://schemas.openxmlformats.org/drawingml/2006/main">
               <a:ext uri="{FF2B5EF4-FFF2-40B4-BE49-F238E27FC236}">
-                <a16:creationId xmlns:a16="http://schemas.microsoft.com/office/drawing/2014/main" id="{3F78257E-0C3F-4373-A1FE-B64DDFF95321}"/>
+                <a16:creationId xmlns:a16="http://schemas.microsoft.com/office/drawing/2014/main" id="{E605ADF3-2F7E-45B1-AC0D-A2C502A857F4}"/>
               </a:ext>
             </a:extLst>
           </p:cNvPr>
@@ -30170,7 +30320,7 @@
           <p:cNvPr id="9" name="TextBox 8">
             <a:extLst xmlns:a="http://schemas.openxmlformats.org/drawingml/2006/main">
               <a:ext uri="{FF2B5EF4-FFF2-40B4-BE49-F238E27FC236}">
-                <a16:creationId xmlns:a16="http://schemas.microsoft.com/office/drawing/2014/main" id="{A77B3071-69C6-4501-91E3-9708AD529EEA}"/>
+                <a16:creationId xmlns:a16="http://schemas.microsoft.com/office/drawing/2014/main" id="{B05762E1-3E99-4659-87A2-C243C0E76BBD}"/>
               </a:ext>
             </a:extLst>
           </p:cNvPr>
@@ -30267,7 +30417,7 @@
           <p:cNvPr id="10" name="Rounded Rectangle 9">
             <a:extLst xmlns:a="http://schemas.openxmlformats.org/drawingml/2006/main">
               <a:ext uri="{FF2B5EF4-FFF2-40B4-BE49-F238E27FC236}">
-                <a16:creationId xmlns:a16="http://schemas.microsoft.com/office/drawing/2014/main" id="{F76110E0-FE78-4B3A-89DD-18D328209B35}"/>
+                <a16:creationId xmlns:a16="http://schemas.microsoft.com/office/drawing/2014/main" id="{8D8D3439-07D9-440D-AE17-2F9E85801BC1}"/>
               </a:ext>
             </a:extLst>
           </p:cNvPr>
@@ -30324,7 +30474,7 @@
           <p:cNvPr id="11" name="TextBox 10">
             <a:extLst xmlns:a="http://schemas.openxmlformats.org/drawingml/2006/main">
               <a:ext uri="{FF2B5EF4-FFF2-40B4-BE49-F238E27FC236}">
-                <a16:creationId xmlns:a16="http://schemas.microsoft.com/office/drawing/2014/main" id="{AC010399-90D6-4E96-964B-F831D71DEF09}"/>
+                <a16:creationId xmlns:a16="http://schemas.microsoft.com/office/drawing/2014/main" id="{B2B67699-0062-46C5-A04C-659AC168B18E}"/>
               </a:ext>
             </a:extLst>
           </p:cNvPr>
@@ -30371,7 +30521,7 @@
           <p:cNvPr id="12" name="TextBox 11">
             <a:extLst xmlns:a="http://schemas.openxmlformats.org/drawingml/2006/main">
               <a:ext uri="{FF2B5EF4-FFF2-40B4-BE49-F238E27FC236}">
-                <a16:creationId xmlns:a16="http://schemas.microsoft.com/office/drawing/2014/main" id="{E01322FD-79E2-46CA-9F58-FA2D2960A4E8}"/>
+                <a16:creationId xmlns:a16="http://schemas.microsoft.com/office/drawing/2014/main" id="{2C85E4EF-4F9C-45F5-A9E8-730402D658A4}"/>
               </a:ext>
             </a:extLst>
           </p:cNvPr>
@@ -30416,7 +30566,7 @@
     </p:spTree>
     <p:extLst>
       <p:ext uri="{BB962C8B-B14F-4D97-AF65-F5344CB8AC3E}">
-        <p14:creationId xmlns:p14="http://schemas.microsoft.com/office/powerpoint/2010/main" val="903009505"/>
+        <p14:creationId xmlns:p14="http://schemas.microsoft.com/office/powerpoint/2010/main" val="934883452"/>
       </p:ext>
     </p:extLst>
   </p:cSld>
@@ -30440,7 +30590,7 @@
           <p:cNvPr id="2" name="TextBox 1">
             <a:extLst xmlns:a="http://schemas.openxmlformats.org/drawingml/2006/main">
               <a:ext uri="{FF2B5EF4-FFF2-40B4-BE49-F238E27FC236}">
-                <a16:creationId xmlns:a16="http://schemas.microsoft.com/office/drawing/2014/main" id="{259B88CE-5C80-42B6-81C1-400428D1D7D3}"/>
+                <a16:creationId xmlns:a16="http://schemas.microsoft.com/office/drawing/2014/main" id="{8FBE31B4-A6EF-47DA-B286-E00CA74A743B}"/>
               </a:ext>
             </a:extLst>
           </p:cNvPr>
@@ -30487,7 +30637,7 @@
           <p:cNvPr id="3" name="TextBox 2">
             <a:extLst xmlns:a="http://schemas.openxmlformats.org/drawingml/2006/main">
               <a:ext uri="{FF2B5EF4-FFF2-40B4-BE49-F238E27FC236}">
-                <a16:creationId xmlns:a16="http://schemas.microsoft.com/office/drawing/2014/main" id="{5B190542-4D5E-41B5-8D4A-F810CBFA4DA7}"/>
+                <a16:creationId xmlns:a16="http://schemas.microsoft.com/office/drawing/2014/main" id="{6CD6D374-94C2-40D1-A979-37EFD8796EEC}"/>
               </a:ext>
             </a:extLst>
           </p:cNvPr>
@@ -30534,7 +30684,7 @@
           <p:cNvPr id="4" name="Rectangle 3">
             <a:extLst xmlns:a="http://schemas.openxmlformats.org/drawingml/2006/main">
               <a:ext uri="{FF2B5EF4-FFF2-40B4-BE49-F238E27FC236}">
-                <a16:creationId xmlns:a16="http://schemas.microsoft.com/office/drawing/2014/main" id="{BD2CFCDF-1578-4176-8BE9-03017F028EDE}"/>
+                <a16:creationId xmlns:a16="http://schemas.microsoft.com/office/drawing/2014/main" id="{A732F7E0-BA5F-4613-88FD-4D36F6C7F325}"/>
               </a:ext>
             </a:extLst>
           </p:cNvPr>
@@ -30589,7 +30739,7 @@
           <p:cNvPr id="5" name="Rectangle 4">
             <a:extLst xmlns:a="http://schemas.openxmlformats.org/drawingml/2006/main">
               <a:ext uri="{FF2B5EF4-FFF2-40B4-BE49-F238E27FC236}">
-                <a16:creationId xmlns:a16="http://schemas.microsoft.com/office/drawing/2014/main" id="{531B7965-3E15-4CDD-9D54-0ED06B1C6127}"/>
+                <a16:creationId xmlns:a16="http://schemas.microsoft.com/office/drawing/2014/main" id="{91265D55-910C-42F6-9DDD-C501179FD0CB}"/>
               </a:ext>
             </a:extLst>
           </p:cNvPr>
@@ -30644,7 +30794,7 @@
           <p:cNvPr id="6" name="TextBox 5">
             <a:extLst xmlns:a="http://schemas.openxmlformats.org/drawingml/2006/main">
               <a:ext uri="{FF2B5EF4-FFF2-40B4-BE49-F238E27FC236}">
-                <a16:creationId xmlns:a16="http://schemas.microsoft.com/office/drawing/2014/main" id="{EDCB41CE-8E38-49D7-81E2-F9A8CCCD380C}"/>
+                <a16:creationId xmlns:a16="http://schemas.microsoft.com/office/drawing/2014/main" id="{5D8A5C34-A675-4181-A441-486CFE1DE6F0}"/>
               </a:ext>
             </a:extLst>
           </p:cNvPr>
@@ -30681,7 +30831,7 @@
                 <a:ea typeface="Aptos"/>
                 <a:cs typeface="Aptos"/>
               </a:rPr>
-              <a:t>Julkinen riippumaton evidenssikooste · 2026.07.24-21 · 2026-07-24 · Lähteet: EP3032975B2</a:t>
+              <a:t>Julkinen riippumaton evidenssikooste · 2026.07.24-22 · 2026-07-24 · Lähteet: EP3032975B2</a:t>
             </a:r>
           </a:p>
         </p:txBody>
@@ -30691,7 +30841,7 @@
           <p:cNvPr id="7" name="TextBox 6">
             <a:extLst xmlns:a="http://schemas.openxmlformats.org/drawingml/2006/main">
               <a:ext uri="{FF2B5EF4-FFF2-40B4-BE49-F238E27FC236}">
-                <a16:creationId xmlns:a16="http://schemas.microsoft.com/office/drawing/2014/main" id="{408BDDD1-9A8E-4997-BA87-C69569E73F68}"/>
+                <a16:creationId xmlns:a16="http://schemas.microsoft.com/office/drawing/2014/main" id="{B8E0A032-BC22-4E07-8556-F164D492EEA8}"/>
               </a:ext>
             </a:extLst>
           </p:cNvPr>
@@ -30738,7 +30888,7 @@
           <p:cNvPr id="8" name="TextBox 7">
             <a:extLst xmlns:a="http://schemas.openxmlformats.org/drawingml/2006/main">
               <a:ext uri="{FF2B5EF4-FFF2-40B4-BE49-F238E27FC236}">
-                <a16:creationId xmlns:a16="http://schemas.microsoft.com/office/drawing/2014/main" id="{8AB21CD8-965F-4A06-9FD3-9533411FECCB}"/>
+                <a16:creationId xmlns:a16="http://schemas.microsoft.com/office/drawing/2014/main" id="{785E0961-3694-469A-AC77-B7B332607A40}"/>
               </a:ext>
             </a:extLst>
           </p:cNvPr>
@@ -30785,7 +30935,7 @@
           <p:cNvPr id="9" name="TextBox 8">
             <a:extLst xmlns:a="http://schemas.openxmlformats.org/drawingml/2006/main">
               <a:ext uri="{FF2B5EF4-FFF2-40B4-BE49-F238E27FC236}">
-                <a16:creationId xmlns:a16="http://schemas.microsoft.com/office/drawing/2014/main" id="{7382AD49-F66A-4FBD-9242-39BE4F0C9ABC}"/>
+                <a16:creationId xmlns:a16="http://schemas.microsoft.com/office/drawing/2014/main" id="{D26CFADC-8EB6-4781-94A6-0DFB305307DA}"/>
               </a:ext>
             </a:extLst>
           </p:cNvPr>
@@ -30882,7 +31032,7 @@
           <p:cNvPr id="10" name="Rounded Rectangle 9">
             <a:extLst xmlns:a="http://schemas.openxmlformats.org/drawingml/2006/main">
               <a:ext uri="{FF2B5EF4-FFF2-40B4-BE49-F238E27FC236}">
-                <a16:creationId xmlns:a16="http://schemas.microsoft.com/office/drawing/2014/main" id="{B37115C4-D03C-44B1-A0F2-21BC3A1F5D7F}"/>
+                <a16:creationId xmlns:a16="http://schemas.microsoft.com/office/drawing/2014/main" id="{05B0F30A-DE43-4282-909A-61D685C0A129}"/>
               </a:ext>
             </a:extLst>
           </p:cNvPr>
@@ -30939,7 +31089,7 @@
           <p:cNvPr id="11" name="TextBox 10">
             <a:extLst xmlns:a="http://schemas.openxmlformats.org/drawingml/2006/main">
               <a:ext uri="{FF2B5EF4-FFF2-40B4-BE49-F238E27FC236}">
-                <a16:creationId xmlns:a16="http://schemas.microsoft.com/office/drawing/2014/main" id="{03C49F30-08C1-4690-ABF5-7C7BD46A4BA2}"/>
+                <a16:creationId xmlns:a16="http://schemas.microsoft.com/office/drawing/2014/main" id="{E84881E4-6775-4FD0-A71B-CB5BA89ACD19}"/>
               </a:ext>
             </a:extLst>
           </p:cNvPr>
@@ -30986,7 +31136,7 @@
           <p:cNvPr id="12" name="TextBox 11">
             <a:extLst xmlns:a="http://schemas.openxmlformats.org/drawingml/2006/main">
               <a:ext uri="{FF2B5EF4-FFF2-40B4-BE49-F238E27FC236}">
-                <a16:creationId xmlns:a16="http://schemas.microsoft.com/office/drawing/2014/main" id="{A6DD8BCD-C505-44F0-9385-18116FB90385}"/>
+                <a16:creationId xmlns:a16="http://schemas.microsoft.com/office/drawing/2014/main" id="{C40B3456-4ABE-47D4-A73E-9DCBA4890DE2}"/>
               </a:ext>
             </a:extLst>
           </p:cNvPr>
@@ -31031,7 +31181,7 @@
     </p:spTree>
     <p:extLst>
       <p:ext uri="{BB962C8B-B14F-4D97-AF65-F5344CB8AC3E}">
-        <p14:creationId xmlns:p14="http://schemas.microsoft.com/office/powerpoint/2010/main" val="1516849897"/>
+        <p14:creationId xmlns:p14="http://schemas.microsoft.com/office/powerpoint/2010/main" val="725703456"/>
       </p:ext>
     </p:extLst>
   </p:cSld>
@@ -31055,7 +31205,7 @@
           <p:cNvPr id="2" name="TextBox 1">
             <a:extLst xmlns:a="http://schemas.openxmlformats.org/drawingml/2006/main">
               <a:ext uri="{FF2B5EF4-FFF2-40B4-BE49-F238E27FC236}">
-                <a16:creationId xmlns:a16="http://schemas.microsoft.com/office/drawing/2014/main" id="{48721CBA-6A42-4212-B1D0-1D6CA7B88DFC}"/>
+                <a16:creationId xmlns:a16="http://schemas.microsoft.com/office/drawing/2014/main" id="{E974AE83-24D7-4A56-AD20-DBF06F0C58C9}"/>
               </a:ext>
             </a:extLst>
           </p:cNvPr>
@@ -31102,7 +31252,7 @@
           <p:cNvPr id="3" name="TextBox 2">
             <a:extLst xmlns:a="http://schemas.openxmlformats.org/drawingml/2006/main">
               <a:ext uri="{FF2B5EF4-FFF2-40B4-BE49-F238E27FC236}">
-                <a16:creationId xmlns:a16="http://schemas.microsoft.com/office/drawing/2014/main" id="{58FC189F-E0B5-4A66-8883-3DC994B9913E}"/>
+                <a16:creationId xmlns:a16="http://schemas.microsoft.com/office/drawing/2014/main" id="{70A7A119-56A1-48EA-9E69-F7CD627DA040}"/>
               </a:ext>
             </a:extLst>
           </p:cNvPr>
@@ -31149,7 +31299,7 @@
           <p:cNvPr id="4" name="Rectangle 3">
             <a:extLst xmlns:a="http://schemas.openxmlformats.org/drawingml/2006/main">
               <a:ext uri="{FF2B5EF4-FFF2-40B4-BE49-F238E27FC236}">
-                <a16:creationId xmlns:a16="http://schemas.microsoft.com/office/drawing/2014/main" id="{C45D7E00-72D1-40B1-AE3F-3249F71F6F3C}"/>
+                <a16:creationId xmlns:a16="http://schemas.microsoft.com/office/drawing/2014/main" id="{CD6C002F-88B7-4C8F-9A07-41C1D02B857C}"/>
               </a:ext>
             </a:extLst>
           </p:cNvPr>
@@ -31204,7 +31354,7 @@
           <p:cNvPr id="5" name="Rectangle 4">
             <a:extLst xmlns:a="http://schemas.openxmlformats.org/drawingml/2006/main">
               <a:ext uri="{FF2B5EF4-FFF2-40B4-BE49-F238E27FC236}">
-                <a16:creationId xmlns:a16="http://schemas.microsoft.com/office/drawing/2014/main" id="{D2572B79-C3FF-4FBA-98BD-46CD429884ED}"/>
+                <a16:creationId xmlns:a16="http://schemas.microsoft.com/office/drawing/2014/main" id="{30CA51E2-BBF6-4882-9521-7111F40DA65D}"/>
               </a:ext>
             </a:extLst>
           </p:cNvPr>
@@ -31259,7 +31409,7 @@
           <p:cNvPr id="6" name="TextBox 5">
             <a:extLst xmlns:a="http://schemas.openxmlformats.org/drawingml/2006/main">
               <a:ext uri="{FF2B5EF4-FFF2-40B4-BE49-F238E27FC236}">
-                <a16:creationId xmlns:a16="http://schemas.microsoft.com/office/drawing/2014/main" id="{54264035-626C-410B-885C-71936351D4CD}"/>
+                <a16:creationId xmlns:a16="http://schemas.microsoft.com/office/drawing/2014/main" id="{6025A065-60F5-4B4B-9336-F768FD014E32}"/>
               </a:ext>
             </a:extLst>
           </p:cNvPr>
@@ -31296,7 +31446,7 @@
                 <a:ea typeface="Aptos"/>
                 <a:cs typeface="Aptos"/>
               </a:rPr>
-              <a:t>Julkinen riippumaton evidenssikooste · 2026.07.24-21 · 2026-07-24 · Lähteet: EP3032975B2</a:t>
+              <a:t>Julkinen riippumaton evidenssikooste · 2026.07.24-22 · 2026-07-24 · Lähteet: EP3032975B2</a:t>
             </a:r>
           </a:p>
         </p:txBody>
@@ -31306,7 +31456,7 @@
           <p:cNvPr id="7" name="TextBox 6">
             <a:extLst xmlns:a="http://schemas.openxmlformats.org/drawingml/2006/main">
               <a:ext uri="{FF2B5EF4-FFF2-40B4-BE49-F238E27FC236}">
-                <a16:creationId xmlns:a16="http://schemas.microsoft.com/office/drawing/2014/main" id="{1B9F430C-331D-4E27-8B98-9F9E89BD6C64}"/>
+                <a16:creationId xmlns:a16="http://schemas.microsoft.com/office/drawing/2014/main" id="{0084B5D3-164A-40FF-B27D-675CF2E810B7}"/>
               </a:ext>
             </a:extLst>
           </p:cNvPr>
@@ -31876,7 +32026,7 @@
           <p:cNvPr id="9" name="TextBox 8">
             <a:extLst xmlns:a="http://schemas.openxmlformats.org/drawingml/2006/main">
               <a:ext uri="{FF2B5EF4-FFF2-40B4-BE49-F238E27FC236}">
-                <a16:creationId xmlns:a16="http://schemas.microsoft.com/office/drawing/2014/main" id="{7FE63E0E-A828-42D1-9130-842D1E057E84}"/>
+                <a16:creationId xmlns:a16="http://schemas.microsoft.com/office/drawing/2014/main" id="{29B99637-DA8C-4C8F-882A-9618B11422C1}"/>
               </a:ext>
             </a:extLst>
           </p:cNvPr>
@@ -31921,7 +32071,7 @@
     </p:spTree>
     <p:extLst>
       <p:ext uri="{BB962C8B-B14F-4D97-AF65-F5344CB8AC3E}">
-        <p14:creationId xmlns:p14="http://schemas.microsoft.com/office/powerpoint/2010/main" val="1194872912"/>
+        <p14:creationId xmlns:p14="http://schemas.microsoft.com/office/powerpoint/2010/main" val="1052488516"/>
       </p:ext>
     </p:extLst>
   </p:cSld>
@@ -31945,7 +32095,7 @@
           <p:cNvPr id="2" name="TextBox 1">
             <a:extLst xmlns:a="http://schemas.openxmlformats.org/drawingml/2006/main">
               <a:ext uri="{FF2B5EF4-FFF2-40B4-BE49-F238E27FC236}">
-                <a16:creationId xmlns:a16="http://schemas.microsoft.com/office/drawing/2014/main" id="{6465F04C-0B5A-4630-A957-0D290FA05701}"/>
+                <a16:creationId xmlns:a16="http://schemas.microsoft.com/office/drawing/2014/main" id="{1E14794A-9F2D-4E05-906C-395936BA77CC}"/>
               </a:ext>
             </a:extLst>
           </p:cNvPr>
@@ -31992,7 +32142,7 @@
           <p:cNvPr id="3" name="TextBox 2">
             <a:extLst xmlns:a="http://schemas.openxmlformats.org/drawingml/2006/main">
               <a:ext uri="{FF2B5EF4-FFF2-40B4-BE49-F238E27FC236}">
-                <a16:creationId xmlns:a16="http://schemas.microsoft.com/office/drawing/2014/main" id="{EBC2225E-5854-4666-96CB-4199AF9BFB7D}"/>
+                <a16:creationId xmlns:a16="http://schemas.microsoft.com/office/drawing/2014/main" id="{CC81001E-DD14-4B6A-904E-0555593F8A72}"/>
               </a:ext>
             </a:extLst>
           </p:cNvPr>
@@ -32039,7 +32189,7 @@
           <p:cNvPr id="4" name="Rectangle 3">
             <a:extLst xmlns:a="http://schemas.openxmlformats.org/drawingml/2006/main">
               <a:ext uri="{FF2B5EF4-FFF2-40B4-BE49-F238E27FC236}">
-                <a16:creationId xmlns:a16="http://schemas.microsoft.com/office/drawing/2014/main" id="{B6DF0B53-A9F5-4CF2-91A0-E573062D2BCB}"/>
+                <a16:creationId xmlns:a16="http://schemas.microsoft.com/office/drawing/2014/main" id="{16E90D96-F05E-46F9-8DB6-E9043BE2893E}"/>
               </a:ext>
             </a:extLst>
           </p:cNvPr>
@@ -32094,7 +32244,7 @@
           <p:cNvPr id="5" name="Rectangle 4">
             <a:extLst xmlns:a="http://schemas.openxmlformats.org/drawingml/2006/main">
               <a:ext uri="{FF2B5EF4-FFF2-40B4-BE49-F238E27FC236}">
-                <a16:creationId xmlns:a16="http://schemas.microsoft.com/office/drawing/2014/main" id="{EC64255E-9C88-4CA5-BA61-29EA1A9800C3}"/>
+                <a16:creationId xmlns:a16="http://schemas.microsoft.com/office/drawing/2014/main" id="{3A38F543-C4C6-412A-AC22-D508C3314A61}"/>
               </a:ext>
             </a:extLst>
           </p:cNvPr>
@@ -32149,7 +32299,7 @@
           <p:cNvPr id="6" name="TextBox 5">
             <a:extLst xmlns:a="http://schemas.openxmlformats.org/drawingml/2006/main">
               <a:ext uri="{FF2B5EF4-FFF2-40B4-BE49-F238E27FC236}">
-                <a16:creationId xmlns:a16="http://schemas.microsoft.com/office/drawing/2014/main" id="{9E6D98D5-39C5-43C5-9BFD-6BB5EF7A345F}"/>
+                <a16:creationId xmlns:a16="http://schemas.microsoft.com/office/drawing/2014/main" id="{3EBA50EF-67B1-45AE-9C3F-688BEEEB4F62}"/>
               </a:ext>
             </a:extLst>
           </p:cNvPr>
@@ -32186,7 +32336,7 @@
                 <a:ea typeface="Aptos"/>
                 <a:cs typeface="Aptos"/>
               </a:rPr>
-              <a:t>Julkinen riippumaton evidenssikooste · 2026.07.24-21 · 2026-07-24 · Lähteet: EPO Register; B2</a:t>
+              <a:t>Julkinen riippumaton evidenssikooste · 2026.07.24-22 · 2026-07-24 · Lähteet: EPO Register; B2</a:t>
             </a:r>
           </a:p>
         </p:txBody>
@@ -32196,7 +32346,7 @@
           <p:cNvPr id="7" name="TextBox 6">
             <a:extLst xmlns:a="http://schemas.openxmlformats.org/drawingml/2006/main">
               <a:ext uri="{FF2B5EF4-FFF2-40B4-BE49-F238E27FC236}">
-                <a16:creationId xmlns:a16="http://schemas.microsoft.com/office/drawing/2014/main" id="{B167995E-31D3-42B4-936C-6744A51386BE}"/>
+                <a16:creationId xmlns:a16="http://schemas.microsoft.com/office/drawing/2014/main" id="{29948173-291E-49F9-AD77-DFBBA3940A05}"/>
               </a:ext>
             </a:extLst>
           </p:cNvPr>
@@ -32243,7 +32393,7 @@
           <p:cNvPr id="8" name="Rounded Rectangle 7">
             <a:extLst xmlns:a="http://schemas.openxmlformats.org/drawingml/2006/main">
               <a:ext uri="{FF2B5EF4-FFF2-40B4-BE49-F238E27FC236}">
-                <a16:creationId xmlns:a16="http://schemas.microsoft.com/office/drawing/2014/main" id="{5D7A9C57-D0D7-499A-9E86-4CCE1AE95511}"/>
+                <a16:creationId xmlns:a16="http://schemas.microsoft.com/office/drawing/2014/main" id="{D5A4475B-1688-424B-8880-D27224EDF447}"/>
               </a:ext>
             </a:extLst>
           </p:cNvPr>
@@ -32300,7 +32450,7 @@
           <p:cNvPr id="9" name="TextBox 8">
             <a:extLst xmlns:a="http://schemas.openxmlformats.org/drawingml/2006/main">
               <a:ext uri="{FF2B5EF4-FFF2-40B4-BE49-F238E27FC236}">
-                <a16:creationId xmlns:a16="http://schemas.microsoft.com/office/drawing/2014/main" id="{1A529827-83CA-4726-B3DF-F2D4F1C0118A}"/>
+                <a16:creationId xmlns:a16="http://schemas.microsoft.com/office/drawing/2014/main" id="{2342A0B2-8691-4085-9D9E-B9D5069C50EC}"/>
               </a:ext>
             </a:extLst>
           </p:cNvPr>
@@ -32347,7 +32497,7 @@
           <p:cNvPr id="10" name="TextBox 9">
             <a:extLst xmlns:a="http://schemas.openxmlformats.org/drawingml/2006/main">
               <a:ext uri="{FF2B5EF4-FFF2-40B4-BE49-F238E27FC236}">
-                <a16:creationId xmlns:a16="http://schemas.microsoft.com/office/drawing/2014/main" id="{386B258D-CC7B-4BA6-A95F-7236D7D82E57}"/>
+                <a16:creationId xmlns:a16="http://schemas.microsoft.com/office/drawing/2014/main" id="{3136936C-C726-4184-AD2C-756A61971F16}"/>
               </a:ext>
             </a:extLst>
           </p:cNvPr>
@@ -32394,7 +32544,7 @@
           <p:cNvPr id="11" name="Rounded Rectangle 10">
             <a:extLst xmlns:a="http://schemas.openxmlformats.org/drawingml/2006/main">
               <a:ext uri="{FF2B5EF4-FFF2-40B4-BE49-F238E27FC236}">
-                <a16:creationId xmlns:a16="http://schemas.microsoft.com/office/drawing/2014/main" id="{D5CF2187-AFAE-45DE-8B01-F38AA8C74FA5}"/>
+                <a16:creationId xmlns:a16="http://schemas.microsoft.com/office/drawing/2014/main" id="{4B5F46CB-AF7A-42DD-85BD-D696FB410291}"/>
               </a:ext>
             </a:extLst>
           </p:cNvPr>
@@ -32451,7 +32601,7 @@
           <p:cNvPr id="12" name="TextBox 11">
             <a:extLst xmlns:a="http://schemas.openxmlformats.org/drawingml/2006/main">
               <a:ext uri="{FF2B5EF4-FFF2-40B4-BE49-F238E27FC236}">
-                <a16:creationId xmlns:a16="http://schemas.microsoft.com/office/drawing/2014/main" id="{1BFFF249-1D50-42FF-BDBE-DE0239170FCB}"/>
+                <a16:creationId xmlns:a16="http://schemas.microsoft.com/office/drawing/2014/main" id="{804DE844-7D81-4BD4-AA8B-8AA622717923}"/>
               </a:ext>
             </a:extLst>
           </p:cNvPr>
@@ -32498,7 +32648,7 @@
           <p:cNvPr id="13" name="TextBox 12">
             <a:extLst xmlns:a="http://schemas.openxmlformats.org/drawingml/2006/main">
               <a:ext uri="{FF2B5EF4-FFF2-40B4-BE49-F238E27FC236}">
-                <a16:creationId xmlns:a16="http://schemas.microsoft.com/office/drawing/2014/main" id="{06A2E6CA-870E-4190-9C44-5A1F9BB6650D}"/>
+                <a16:creationId xmlns:a16="http://schemas.microsoft.com/office/drawing/2014/main" id="{AB45CEB9-379F-4386-88E4-3A5046E7A9BF}"/>
               </a:ext>
             </a:extLst>
           </p:cNvPr>
@@ -32545,7 +32695,7 @@
           <p:cNvPr id="14" name="Rounded Rectangle 13">
             <a:extLst xmlns:a="http://schemas.openxmlformats.org/drawingml/2006/main">
               <a:ext uri="{FF2B5EF4-FFF2-40B4-BE49-F238E27FC236}">
-                <a16:creationId xmlns:a16="http://schemas.microsoft.com/office/drawing/2014/main" id="{B470D3CA-910A-4AE9-9309-9DEA126F1FDD}"/>
+                <a16:creationId xmlns:a16="http://schemas.microsoft.com/office/drawing/2014/main" id="{FD55CA1F-8589-4E70-9DEE-9AE384ABBB02}"/>
               </a:ext>
             </a:extLst>
           </p:cNvPr>
@@ -32602,7 +32752,7 @@
           <p:cNvPr id="15" name="TextBox 14">
             <a:extLst xmlns:a="http://schemas.openxmlformats.org/drawingml/2006/main">
               <a:ext uri="{FF2B5EF4-FFF2-40B4-BE49-F238E27FC236}">
-                <a16:creationId xmlns:a16="http://schemas.microsoft.com/office/drawing/2014/main" id="{F9E0A2EA-27AA-490E-B044-3A39A1DE5A00}"/>
+                <a16:creationId xmlns:a16="http://schemas.microsoft.com/office/drawing/2014/main" id="{7CC304F3-5116-4444-9752-67A6B25C8F05}"/>
               </a:ext>
             </a:extLst>
           </p:cNvPr>
@@ -32649,7 +32799,7 @@
           <p:cNvPr id="16" name="TextBox 15">
             <a:extLst xmlns:a="http://schemas.openxmlformats.org/drawingml/2006/main">
               <a:ext uri="{FF2B5EF4-FFF2-40B4-BE49-F238E27FC236}">
-                <a16:creationId xmlns:a16="http://schemas.microsoft.com/office/drawing/2014/main" id="{9759E402-202A-403A-91BF-EF20D7F8C8A4}"/>
+                <a16:creationId xmlns:a16="http://schemas.microsoft.com/office/drawing/2014/main" id="{75C3E461-84D7-4DF0-B94A-49956D86CAA1}"/>
               </a:ext>
             </a:extLst>
           </p:cNvPr>
@@ -32696,7 +32846,7 @@
           <p:cNvPr id="17" name="TextBox 16">
             <a:extLst xmlns:a="http://schemas.openxmlformats.org/drawingml/2006/main">
               <a:ext uri="{FF2B5EF4-FFF2-40B4-BE49-F238E27FC236}">
-                <a16:creationId xmlns:a16="http://schemas.microsoft.com/office/drawing/2014/main" id="{E9829A0B-3B16-4C0C-A428-00D5E9042E18}"/>
+                <a16:creationId xmlns:a16="http://schemas.microsoft.com/office/drawing/2014/main" id="{DC7848E1-1135-49C2-A545-E7B6F7D3D087}"/>
               </a:ext>
             </a:extLst>
           </p:cNvPr>
@@ -32743,7 +32893,7 @@
           <p:cNvPr id="18" name="Rounded Rectangle 17">
             <a:extLst xmlns:a="http://schemas.openxmlformats.org/drawingml/2006/main">
               <a:ext uri="{FF2B5EF4-FFF2-40B4-BE49-F238E27FC236}">
-                <a16:creationId xmlns:a16="http://schemas.microsoft.com/office/drawing/2014/main" id="{9172BE7F-71F3-4F1E-909F-35B7CEBE8512}"/>
+                <a16:creationId xmlns:a16="http://schemas.microsoft.com/office/drawing/2014/main" id="{4BC98869-DB85-4181-BC61-F99DEBEF1B1E}"/>
               </a:ext>
             </a:extLst>
           </p:cNvPr>
@@ -32800,7 +32950,7 @@
           <p:cNvPr id="19" name="TextBox 18">
             <a:extLst xmlns:a="http://schemas.openxmlformats.org/drawingml/2006/main">
               <a:ext uri="{FF2B5EF4-FFF2-40B4-BE49-F238E27FC236}">
-                <a16:creationId xmlns:a16="http://schemas.microsoft.com/office/drawing/2014/main" id="{F5753ADA-6389-4CDB-861B-E35302497133}"/>
+                <a16:creationId xmlns:a16="http://schemas.microsoft.com/office/drawing/2014/main" id="{C8DFD22F-6DBD-4675-A5BB-7D71E2056882}"/>
               </a:ext>
             </a:extLst>
           </p:cNvPr>
@@ -32847,7 +32997,7 @@
           <p:cNvPr id="20" name="TextBox 19">
             <a:extLst xmlns:a="http://schemas.openxmlformats.org/drawingml/2006/main">
               <a:ext uri="{FF2B5EF4-FFF2-40B4-BE49-F238E27FC236}">
-                <a16:creationId xmlns:a16="http://schemas.microsoft.com/office/drawing/2014/main" id="{97C91CC8-B35D-4891-B18B-0528E19E913C}"/>
+                <a16:creationId xmlns:a16="http://schemas.microsoft.com/office/drawing/2014/main" id="{364CEC11-EA1B-497E-AE84-3E0985C8BF70}"/>
               </a:ext>
             </a:extLst>
           </p:cNvPr>
@@ -32892,7 +33042,7 @@
     </p:spTree>
     <p:extLst>
       <p:ext uri="{BB962C8B-B14F-4D97-AF65-F5344CB8AC3E}">
-        <p14:creationId xmlns:p14="http://schemas.microsoft.com/office/powerpoint/2010/main" val="136383274"/>
+        <p14:creationId xmlns:p14="http://schemas.microsoft.com/office/powerpoint/2010/main" val="411471130"/>
       </p:ext>
     </p:extLst>
   </p:cSld>
@@ -32916,7 +33066,7 @@
           <p:cNvPr id="2" name="TextBox 1">
             <a:extLst xmlns:a="http://schemas.openxmlformats.org/drawingml/2006/main">
               <a:ext uri="{FF2B5EF4-FFF2-40B4-BE49-F238E27FC236}">
-                <a16:creationId xmlns:a16="http://schemas.microsoft.com/office/drawing/2014/main" id="{E873A9E4-A875-4B7B-B7E3-5678C8B95D1C}"/>
+                <a16:creationId xmlns:a16="http://schemas.microsoft.com/office/drawing/2014/main" id="{6AC47CAB-C7AE-48AE-883C-9EE8580BAC28}"/>
               </a:ext>
             </a:extLst>
           </p:cNvPr>
@@ -32963,7 +33113,7 @@
           <p:cNvPr id="3" name="TextBox 2">
             <a:extLst xmlns:a="http://schemas.openxmlformats.org/drawingml/2006/main">
               <a:ext uri="{FF2B5EF4-FFF2-40B4-BE49-F238E27FC236}">
-                <a16:creationId xmlns:a16="http://schemas.microsoft.com/office/drawing/2014/main" id="{853CD2E5-041E-45E2-907C-0C22CBF84CEA}"/>
+                <a16:creationId xmlns:a16="http://schemas.microsoft.com/office/drawing/2014/main" id="{8EE2E39C-71B6-405E-8342-42023F808C60}"/>
               </a:ext>
             </a:extLst>
           </p:cNvPr>
@@ -33010,7 +33160,7 @@
           <p:cNvPr id="4" name="Rectangle 3">
             <a:extLst xmlns:a="http://schemas.openxmlformats.org/drawingml/2006/main">
               <a:ext uri="{FF2B5EF4-FFF2-40B4-BE49-F238E27FC236}">
-                <a16:creationId xmlns:a16="http://schemas.microsoft.com/office/drawing/2014/main" id="{FA5DB2A9-7F83-451F-89DC-2E4FCA670F83}"/>
+                <a16:creationId xmlns:a16="http://schemas.microsoft.com/office/drawing/2014/main" id="{2C5BE32D-8BE4-47D3-A55D-1CC564C40B01}"/>
               </a:ext>
             </a:extLst>
           </p:cNvPr>
@@ -33065,7 +33215,7 @@
           <p:cNvPr id="5" name="Rectangle 4">
             <a:extLst xmlns:a="http://schemas.openxmlformats.org/drawingml/2006/main">
               <a:ext uri="{FF2B5EF4-FFF2-40B4-BE49-F238E27FC236}">
-                <a16:creationId xmlns:a16="http://schemas.microsoft.com/office/drawing/2014/main" id="{E31EDECC-F90A-4EC3-93A8-F465FD5D3CAD}"/>
+                <a16:creationId xmlns:a16="http://schemas.microsoft.com/office/drawing/2014/main" id="{CF2BDF0F-52D7-457F-A918-4AFC147BD935}"/>
               </a:ext>
             </a:extLst>
           </p:cNvPr>
@@ -33120,7 +33270,7 @@
           <p:cNvPr id="6" name="TextBox 5">
             <a:extLst xmlns:a="http://schemas.openxmlformats.org/drawingml/2006/main">
               <a:ext uri="{FF2B5EF4-FFF2-40B4-BE49-F238E27FC236}">
-                <a16:creationId xmlns:a16="http://schemas.microsoft.com/office/drawing/2014/main" id="{D66DF376-EFBF-4F9B-98A8-93A7406C0F89}"/>
+                <a16:creationId xmlns:a16="http://schemas.microsoft.com/office/drawing/2014/main" id="{51DB88DA-0A85-4745-996C-45CCE3BAB5A7}"/>
               </a:ext>
             </a:extLst>
           </p:cNvPr>
@@ -33157,7 +33307,7 @@
                 <a:ea typeface="Aptos"/>
                 <a:cs typeface="Aptos"/>
               </a:rPr>
-              <a:t>Julkinen riippumaton evidenssikooste · 2026.07.24-21 · 2026-07-24 · Lähteet: EPO family; kansalliset rekisterit</a:t>
+              <a:t>Julkinen riippumaton evidenssikooste · 2026.07.24-22 · 2026-07-24 · Lähteet: EPO family; kansalliset rekisterit</a:t>
             </a:r>
           </a:p>
         </p:txBody>
@@ -33167,7 +33317,7 @@
           <p:cNvPr id="7" name="TextBox 6">
             <a:extLst xmlns:a="http://schemas.openxmlformats.org/drawingml/2006/main">
               <a:ext uri="{FF2B5EF4-FFF2-40B4-BE49-F238E27FC236}">
-                <a16:creationId xmlns:a16="http://schemas.microsoft.com/office/drawing/2014/main" id="{734B64C1-0F9E-412B-BD3E-6E35637DE044}"/>
+                <a16:creationId xmlns:a16="http://schemas.microsoft.com/office/drawing/2014/main" id="{9AFB4462-4294-4739-9993-63B7C81B323F}"/>
               </a:ext>
             </a:extLst>
           </p:cNvPr>
@@ -33214,7 +33364,7 @@
           <p:cNvPr id="8" name="Rounded Rectangle 7">
             <a:extLst xmlns:a="http://schemas.openxmlformats.org/drawingml/2006/main">
               <a:ext uri="{FF2B5EF4-FFF2-40B4-BE49-F238E27FC236}">
-                <a16:creationId xmlns:a16="http://schemas.microsoft.com/office/drawing/2014/main" id="{05E84225-B9AE-468E-94F9-9296C567F3D2}"/>
+                <a16:creationId xmlns:a16="http://schemas.microsoft.com/office/drawing/2014/main" id="{17D23874-BC1F-4903-94DC-B5D6DE0AAF78}"/>
               </a:ext>
             </a:extLst>
           </p:cNvPr>
@@ -33271,7 +33421,7 @@
           <p:cNvPr id="9" name="TextBox 8">
             <a:extLst xmlns:a="http://schemas.openxmlformats.org/drawingml/2006/main">
               <a:ext uri="{FF2B5EF4-FFF2-40B4-BE49-F238E27FC236}">
-                <a16:creationId xmlns:a16="http://schemas.microsoft.com/office/drawing/2014/main" id="{64065BEB-0594-414B-8A31-AB3315F18C9B}"/>
+                <a16:creationId xmlns:a16="http://schemas.microsoft.com/office/drawing/2014/main" id="{667F6C28-F7EB-4F2A-A8EC-DF73356E3DC1}"/>
               </a:ext>
             </a:extLst>
           </p:cNvPr>
@@ -33318,7 +33468,7 @@
           <p:cNvPr id="10" name="TextBox 9">
             <a:extLst xmlns:a="http://schemas.openxmlformats.org/drawingml/2006/main">
               <a:ext uri="{FF2B5EF4-FFF2-40B4-BE49-F238E27FC236}">
-                <a16:creationId xmlns:a16="http://schemas.microsoft.com/office/drawing/2014/main" id="{F417ED70-F76F-4481-A25D-7AAD142AA561}"/>
+                <a16:creationId xmlns:a16="http://schemas.microsoft.com/office/drawing/2014/main" id="{F7FBBECE-99A0-46D1-BFA5-7DFB754B3300}"/>
               </a:ext>
             </a:extLst>
           </p:cNvPr>
@@ -33365,7 +33515,7 @@
           <p:cNvPr id="11" name="Rounded Rectangle 10">
             <a:extLst xmlns:a="http://schemas.openxmlformats.org/drawingml/2006/main">
               <a:ext uri="{FF2B5EF4-FFF2-40B4-BE49-F238E27FC236}">
-                <a16:creationId xmlns:a16="http://schemas.microsoft.com/office/drawing/2014/main" id="{5E2EA315-23F8-4D89-B30E-C032D5BAED8E}"/>
+                <a16:creationId xmlns:a16="http://schemas.microsoft.com/office/drawing/2014/main" id="{F1875A40-B8DA-4A18-AC72-8580EBCB7502}"/>
               </a:ext>
             </a:extLst>
           </p:cNvPr>
@@ -33422,7 +33572,7 @@
           <p:cNvPr id="12" name="TextBox 11">
             <a:extLst xmlns:a="http://schemas.openxmlformats.org/drawingml/2006/main">
               <a:ext uri="{FF2B5EF4-FFF2-40B4-BE49-F238E27FC236}">
-                <a16:creationId xmlns:a16="http://schemas.microsoft.com/office/drawing/2014/main" id="{B803C8F5-1429-473F-A9AB-FF7BA243AC64}"/>
+                <a16:creationId xmlns:a16="http://schemas.microsoft.com/office/drawing/2014/main" id="{A85F844C-B054-40F9-8E5B-C1558F1EC560}"/>
               </a:ext>
             </a:extLst>
           </p:cNvPr>
@@ -33469,7 +33619,7 @@
           <p:cNvPr id="13" name="TextBox 12">
             <a:extLst xmlns:a="http://schemas.openxmlformats.org/drawingml/2006/main">
               <a:ext uri="{FF2B5EF4-FFF2-40B4-BE49-F238E27FC236}">
-                <a16:creationId xmlns:a16="http://schemas.microsoft.com/office/drawing/2014/main" id="{426BB787-8B04-4660-B9B0-E731B5BAE93E}"/>
+                <a16:creationId xmlns:a16="http://schemas.microsoft.com/office/drawing/2014/main" id="{286D80D0-3226-4BC7-BE07-7311DE454F61}"/>
               </a:ext>
             </a:extLst>
           </p:cNvPr>
@@ -33516,7 +33666,7 @@
           <p:cNvPr id="14" name="Rounded Rectangle 13">
             <a:extLst xmlns:a="http://schemas.openxmlformats.org/drawingml/2006/main">
               <a:ext uri="{FF2B5EF4-FFF2-40B4-BE49-F238E27FC236}">
-                <a16:creationId xmlns:a16="http://schemas.microsoft.com/office/drawing/2014/main" id="{CEFF244C-28A5-49C1-860A-CF6CE5828647}"/>
+                <a16:creationId xmlns:a16="http://schemas.microsoft.com/office/drawing/2014/main" id="{DDA5711A-F5B1-4C9A-BBDA-24AFD8628396}"/>
               </a:ext>
             </a:extLst>
           </p:cNvPr>
@@ -33573,7 +33723,7 @@
           <p:cNvPr id="15" name="TextBox 14">
             <a:extLst xmlns:a="http://schemas.openxmlformats.org/drawingml/2006/main">
               <a:ext uri="{FF2B5EF4-FFF2-40B4-BE49-F238E27FC236}">
-                <a16:creationId xmlns:a16="http://schemas.microsoft.com/office/drawing/2014/main" id="{3B93F4DC-40BD-4094-AA6B-B6FC47BB5027}"/>
+                <a16:creationId xmlns:a16="http://schemas.microsoft.com/office/drawing/2014/main" id="{5481285E-A0CC-4F00-B3BE-3FE1752EA0E7}"/>
               </a:ext>
             </a:extLst>
           </p:cNvPr>
@@ -33620,7 +33770,7 @@
           <p:cNvPr id="16" name="TextBox 15">
             <a:extLst xmlns:a="http://schemas.openxmlformats.org/drawingml/2006/main">
               <a:ext uri="{FF2B5EF4-FFF2-40B4-BE49-F238E27FC236}">
-                <a16:creationId xmlns:a16="http://schemas.microsoft.com/office/drawing/2014/main" id="{A5D00898-37E2-4F29-9F0F-1364B6121ADC}"/>
+                <a16:creationId xmlns:a16="http://schemas.microsoft.com/office/drawing/2014/main" id="{766B2FEA-5620-4B17-9196-2E777F43E810}"/>
               </a:ext>
             </a:extLst>
           </p:cNvPr>
@@ -33667,7 +33817,7 @@
           <p:cNvPr id="17" name="Rounded Rectangle 16">
             <a:extLst xmlns:a="http://schemas.openxmlformats.org/drawingml/2006/main">
               <a:ext uri="{FF2B5EF4-FFF2-40B4-BE49-F238E27FC236}">
-                <a16:creationId xmlns:a16="http://schemas.microsoft.com/office/drawing/2014/main" id="{387E7A1D-34F0-42EB-B437-74E6F9DD6B34}"/>
+                <a16:creationId xmlns:a16="http://schemas.microsoft.com/office/drawing/2014/main" id="{2BF45081-4625-4293-95B5-0A751F145EDC}"/>
               </a:ext>
             </a:extLst>
           </p:cNvPr>
@@ -33724,7 +33874,7 @@
           <p:cNvPr id="18" name="TextBox 17">
             <a:extLst xmlns:a="http://schemas.openxmlformats.org/drawingml/2006/main">
               <a:ext uri="{FF2B5EF4-FFF2-40B4-BE49-F238E27FC236}">
-                <a16:creationId xmlns:a16="http://schemas.microsoft.com/office/drawing/2014/main" id="{2B2E896E-D02F-4EAB-9165-F701C7348869}"/>
+                <a16:creationId xmlns:a16="http://schemas.microsoft.com/office/drawing/2014/main" id="{16E5C487-0997-4143-B4EE-B3BC4B35EA85}"/>
               </a:ext>
             </a:extLst>
           </p:cNvPr>
@@ -33771,7 +33921,7 @@
           <p:cNvPr id="19" name="TextBox 18">
             <a:extLst xmlns:a="http://schemas.openxmlformats.org/drawingml/2006/main">
               <a:ext uri="{FF2B5EF4-FFF2-40B4-BE49-F238E27FC236}">
-                <a16:creationId xmlns:a16="http://schemas.microsoft.com/office/drawing/2014/main" id="{665D9723-882B-4AF4-8362-DABCA24ADD87}"/>
+                <a16:creationId xmlns:a16="http://schemas.microsoft.com/office/drawing/2014/main" id="{EC7D68D5-C857-4F08-93DF-6C4476572612}"/>
               </a:ext>
             </a:extLst>
           </p:cNvPr>
@@ -33818,7 +33968,7 @@
           <p:cNvPr id="20" name="TextBox 19">
             <a:extLst xmlns:a="http://schemas.openxmlformats.org/drawingml/2006/main">
               <a:ext uri="{FF2B5EF4-FFF2-40B4-BE49-F238E27FC236}">
-                <a16:creationId xmlns:a16="http://schemas.microsoft.com/office/drawing/2014/main" id="{522780F9-AFC8-40C7-A9C7-40F123E2E1CD}"/>
+                <a16:creationId xmlns:a16="http://schemas.microsoft.com/office/drawing/2014/main" id="{9EC53FD9-3F3D-4508-A6A5-754DAD5F14AD}"/>
               </a:ext>
             </a:extLst>
           </p:cNvPr>
@@ -33865,7 +34015,7 @@
           <p:cNvPr id="21" name="Rounded Rectangle 20">
             <a:extLst xmlns:a="http://schemas.openxmlformats.org/drawingml/2006/main">
               <a:ext uri="{FF2B5EF4-FFF2-40B4-BE49-F238E27FC236}">
-                <a16:creationId xmlns:a16="http://schemas.microsoft.com/office/drawing/2014/main" id="{26E9E296-16FF-44F5-8A39-A7139817B94D}"/>
+                <a16:creationId xmlns:a16="http://schemas.microsoft.com/office/drawing/2014/main" id="{645D7DDB-A1FF-4D1A-B47D-2467A977C117}"/>
               </a:ext>
             </a:extLst>
           </p:cNvPr>
@@ -33922,7 +34072,7 @@
           <p:cNvPr id="22" name="TextBox 21">
             <a:extLst xmlns:a="http://schemas.openxmlformats.org/drawingml/2006/main">
               <a:ext uri="{FF2B5EF4-FFF2-40B4-BE49-F238E27FC236}">
-                <a16:creationId xmlns:a16="http://schemas.microsoft.com/office/drawing/2014/main" id="{DBEF484C-CBAF-455D-9CD1-A0CBB31C95D0}"/>
+                <a16:creationId xmlns:a16="http://schemas.microsoft.com/office/drawing/2014/main" id="{EE4A563A-6A28-4175-8227-50ACBDCF8A3D}"/>
               </a:ext>
             </a:extLst>
           </p:cNvPr>
@@ -33969,7 +34119,7 @@
           <p:cNvPr id="23" name="TextBox 22">
             <a:extLst xmlns:a="http://schemas.openxmlformats.org/drawingml/2006/main">
               <a:ext uri="{FF2B5EF4-FFF2-40B4-BE49-F238E27FC236}">
-                <a16:creationId xmlns:a16="http://schemas.microsoft.com/office/drawing/2014/main" id="{AD6E53B5-5650-4E42-9D96-1DAC386F63CF}"/>
+                <a16:creationId xmlns:a16="http://schemas.microsoft.com/office/drawing/2014/main" id="{E5A99056-D111-40E1-BDFE-CCE2C847757D}"/>
               </a:ext>
             </a:extLst>
           </p:cNvPr>
@@ -34014,7 +34164,7 @@
     </p:spTree>
     <p:extLst>
       <p:ext uri="{BB962C8B-B14F-4D97-AF65-F5344CB8AC3E}">
-        <p14:creationId xmlns:p14="http://schemas.microsoft.com/office/powerpoint/2010/main" val="1905829500"/>
+        <p14:creationId xmlns:p14="http://schemas.microsoft.com/office/powerpoint/2010/main" val="2093397172"/>
       </p:ext>
     </p:extLst>
   </p:cSld>
@@ -34038,7 +34188,7 @@
           <p:cNvPr id="2" name="TextBox 1">
             <a:extLst xmlns:a="http://schemas.openxmlformats.org/drawingml/2006/main">
               <a:ext uri="{FF2B5EF4-FFF2-40B4-BE49-F238E27FC236}">
-                <a16:creationId xmlns:a16="http://schemas.microsoft.com/office/drawing/2014/main" id="{A6DC0E55-B67A-4010-AF7A-B79B56F8ABE4}"/>
+                <a16:creationId xmlns:a16="http://schemas.microsoft.com/office/drawing/2014/main" id="{C53D1E28-7C45-4879-B750-A6077EC5A12E}"/>
               </a:ext>
             </a:extLst>
           </p:cNvPr>
@@ -34085,7 +34235,7 @@
           <p:cNvPr id="3" name="TextBox 2">
             <a:extLst xmlns:a="http://schemas.openxmlformats.org/drawingml/2006/main">
               <a:ext uri="{FF2B5EF4-FFF2-40B4-BE49-F238E27FC236}">
-                <a16:creationId xmlns:a16="http://schemas.microsoft.com/office/drawing/2014/main" id="{F11A2862-AFBE-46FB-981C-2EDA18AB7A4A}"/>
+                <a16:creationId xmlns:a16="http://schemas.microsoft.com/office/drawing/2014/main" id="{EE5714EE-3451-4D9D-B919-113CBD8DD245}"/>
               </a:ext>
             </a:extLst>
           </p:cNvPr>
@@ -34132,7 +34282,7 @@
           <p:cNvPr id="4" name="Rectangle 3">
             <a:extLst xmlns:a="http://schemas.openxmlformats.org/drawingml/2006/main">
               <a:ext uri="{FF2B5EF4-FFF2-40B4-BE49-F238E27FC236}">
-                <a16:creationId xmlns:a16="http://schemas.microsoft.com/office/drawing/2014/main" id="{D949D7DE-6D8C-45D0-BE3B-0567DC671C8D}"/>
+                <a16:creationId xmlns:a16="http://schemas.microsoft.com/office/drawing/2014/main" id="{C101CA94-B559-4391-8EAE-81E98C7B9861}"/>
               </a:ext>
             </a:extLst>
           </p:cNvPr>
@@ -34187,7 +34337,7 @@
           <p:cNvPr id="5" name="Rectangle 4">
             <a:extLst xmlns:a="http://schemas.openxmlformats.org/drawingml/2006/main">
               <a:ext uri="{FF2B5EF4-FFF2-40B4-BE49-F238E27FC236}">
-                <a16:creationId xmlns:a16="http://schemas.microsoft.com/office/drawing/2014/main" id="{E3AF3D5B-0CBC-4DD5-8E29-8B69367DA294}"/>
+                <a16:creationId xmlns:a16="http://schemas.microsoft.com/office/drawing/2014/main" id="{D7CDE4EE-6309-40A9-B14B-44417D564A11}"/>
               </a:ext>
             </a:extLst>
           </p:cNvPr>
@@ -34242,7 +34392,7 @@
           <p:cNvPr id="6" name="TextBox 5">
             <a:extLst xmlns:a="http://schemas.openxmlformats.org/drawingml/2006/main">
               <a:ext uri="{FF2B5EF4-FFF2-40B4-BE49-F238E27FC236}">
-                <a16:creationId xmlns:a16="http://schemas.microsoft.com/office/drawing/2014/main" id="{B066F73C-C156-4EAC-ABEB-8443F47A4178}"/>
+                <a16:creationId xmlns:a16="http://schemas.microsoft.com/office/drawing/2014/main" id="{F5AB4599-5A31-4548-83FC-E938715B2395}"/>
               </a:ext>
             </a:extLst>
           </p:cNvPr>
@@ -34279,7 +34429,7 @@
                 <a:ea typeface="Aptos"/>
                 <a:cs typeface="Aptos"/>
               </a:rPr>
-              <a:t>Julkinen riippumaton evidenssikooste · 2026.07.24-21 · 2026-07-24 · Lähteet: Viralliset tuomiot: 8 Ni 18/24 (EP); 7 O 3341/24</a:t>
+              <a:t>Julkinen riippumaton evidenssikooste · 2026.07.24-22 · 2026-07-24 · Lähteet: Viralliset tuomiot: 8 Ni 18/24 (EP); 7 O 3341/24</a:t>
             </a:r>
           </a:p>
         </p:txBody>
@@ -34289,7 +34439,7 @@
           <p:cNvPr id="7" name="TextBox 6">
             <a:extLst xmlns:a="http://schemas.openxmlformats.org/drawingml/2006/main">
               <a:ext uri="{FF2B5EF4-FFF2-40B4-BE49-F238E27FC236}">
-                <a16:creationId xmlns:a16="http://schemas.microsoft.com/office/drawing/2014/main" id="{FE1B6988-507E-4C2D-942E-533DD69ED298}"/>
+                <a16:creationId xmlns:a16="http://schemas.microsoft.com/office/drawing/2014/main" id="{85617D27-9D30-4AFA-9E1D-FE02C1081ED2}"/>
               </a:ext>
             </a:extLst>
           </p:cNvPr>
@@ -34610,7 +34760,7 @@
           <p:cNvPr id="9" name="TextBox 8">
             <a:extLst xmlns:a="http://schemas.openxmlformats.org/drawingml/2006/main">
               <a:ext uri="{FF2B5EF4-FFF2-40B4-BE49-F238E27FC236}">
-                <a16:creationId xmlns:a16="http://schemas.microsoft.com/office/drawing/2014/main" id="{FA0B8D8D-426E-41C6-A8C0-D227B8B2D392}"/>
+                <a16:creationId xmlns:a16="http://schemas.microsoft.com/office/drawing/2014/main" id="{DDF2C82D-CB10-418A-95E2-60DC59992B4E}"/>
               </a:ext>
             </a:extLst>
           </p:cNvPr>
@@ -34655,7 +34805,7 @@
     </p:spTree>
     <p:extLst>
       <p:ext uri="{BB962C8B-B14F-4D97-AF65-F5344CB8AC3E}">
-        <p14:creationId xmlns:p14="http://schemas.microsoft.com/office/powerpoint/2010/main" val="1841317160"/>
+        <p14:creationId xmlns:p14="http://schemas.microsoft.com/office/powerpoint/2010/main" val="1609748342"/>
       </p:ext>
     </p:extLst>
   </p:cSld>

--- a/site/downloads/pixan-bank-deck-large-fi.pptx
+++ b/site/downloads/pixan-bank-deck-large-fi.pptx
@@ -2,42 +2,42 @@
 <file path=ppt/presentation.xml><?xml version="1.0" encoding="utf-8"?>
 <p:presentation xmlns:p="http://schemas.openxmlformats.org/presentationml/2006/main">
   <p:sldMasterIdLst>
-    <p:sldMasterId xmlns:r="http://schemas.openxmlformats.org/officeDocument/2006/relationships" id="2147483648" r:id="R0c5737a7b1e84e05"/>
+    <p:sldMasterId xmlns:r="http://schemas.openxmlformats.org/officeDocument/2006/relationships" id="2147483648" r:id="R1a4792fdcb024cbc"/>
   </p:sldMasterIdLst>
   <p:notesMasterIdLst>
-    <p:notesMasterId xmlns:r="http://schemas.openxmlformats.org/officeDocument/2006/relationships" r:id="Rd4cfd067b0724765"/>
+    <p:notesMasterId xmlns:r="http://schemas.openxmlformats.org/officeDocument/2006/relationships" r:id="Rcb0d8253bf514078"/>
   </p:notesMasterIdLst>
   <p:sldIdLst>
-    <p:sldId xmlns:r="http://schemas.openxmlformats.org/officeDocument/2006/relationships" id="256" r:id="R371dbc732ed347e0"/>
-    <p:sldId xmlns:r="http://schemas.openxmlformats.org/officeDocument/2006/relationships" id="257" r:id="R8cdd8686ea334103"/>
-    <p:sldId xmlns:r="http://schemas.openxmlformats.org/officeDocument/2006/relationships" id="258" r:id="Rbd4bdfc7b8444057"/>
-    <p:sldId xmlns:r="http://schemas.openxmlformats.org/officeDocument/2006/relationships" id="259" r:id="R9dfca7bde9b64adb"/>
-    <p:sldId xmlns:r="http://schemas.openxmlformats.org/officeDocument/2006/relationships" id="260" r:id="Re98fc29a0cd4457c"/>
-    <p:sldId xmlns:r="http://schemas.openxmlformats.org/officeDocument/2006/relationships" id="261" r:id="R09efbc528c91453f"/>
-    <p:sldId xmlns:r="http://schemas.openxmlformats.org/officeDocument/2006/relationships" id="262" r:id="R2380c1957a854b4e"/>
-    <p:sldId xmlns:r="http://schemas.openxmlformats.org/officeDocument/2006/relationships" id="263" r:id="Rddf650a5166745cc"/>
-    <p:sldId xmlns:r="http://schemas.openxmlformats.org/officeDocument/2006/relationships" id="264" r:id="R7f8c765a43824af1"/>
-    <p:sldId xmlns:r="http://schemas.openxmlformats.org/officeDocument/2006/relationships" id="265" r:id="R87250ebb29cc4462"/>
-    <p:sldId xmlns:r="http://schemas.openxmlformats.org/officeDocument/2006/relationships" id="266" r:id="Rdaad2013bd2e476d"/>
-    <p:sldId xmlns:r="http://schemas.openxmlformats.org/officeDocument/2006/relationships" id="267" r:id="R0ae2be033973463b"/>
-    <p:sldId xmlns:r="http://schemas.openxmlformats.org/officeDocument/2006/relationships" id="268" r:id="Rd87f1b0cc58b4538"/>
-    <p:sldId xmlns:r="http://schemas.openxmlformats.org/officeDocument/2006/relationships" id="269" r:id="Rd7f497b5a43f4ebe"/>
-    <p:sldId xmlns:r="http://schemas.openxmlformats.org/officeDocument/2006/relationships" id="270" r:id="R0291bf0c5bf748bf"/>
-    <p:sldId xmlns:r="http://schemas.openxmlformats.org/officeDocument/2006/relationships" id="271" r:id="Rd0acaade97cf4042"/>
-    <p:sldId xmlns:r="http://schemas.openxmlformats.org/officeDocument/2006/relationships" id="272" r:id="R9f5ff193a1814f2e"/>
-    <p:sldId xmlns:r="http://schemas.openxmlformats.org/officeDocument/2006/relationships" id="273" r:id="R6564aa95f44d438d"/>
-    <p:sldId xmlns:r="http://schemas.openxmlformats.org/officeDocument/2006/relationships" id="274" r:id="Rb5a1d4c07b404f44"/>
-    <p:sldId xmlns:r="http://schemas.openxmlformats.org/officeDocument/2006/relationships" id="275" r:id="R46be023ee88f4b3e"/>
-    <p:sldId xmlns:r="http://schemas.openxmlformats.org/officeDocument/2006/relationships" id="276" r:id="Rd431cf6ed4d74289"/>
-    <p:sldId xmlns:r="http://schemas.openxmlformats.org/officeDocument/2006/relationships" id="277" r:id="R8d615d29132d431e"/>
-    <p:sldId xmlns:r="http://schemas.openxmlformats.org/officeDocument/2006/relationships" id="278" r:id="Rb78d6039f47a4953"/>
-    <p:sldId xmlns:r="http://schemas.openxmlformats.org/officeDocument/2006/relationships" id="279" r:id="Rd02ca98457294c19"/>
-    <p:sldId xmlns:r="http://schemas.openxmlformats.org/officeDocument/2006/relationships" id="280" r:id="Raf6c356107a840f4"/>
-    <p:sldId xmlns:r="http://schemas.openxmlformats.org/officeDocument/2006/relationships" id="281" r:id="Rd2016a5982f4404f"/>
-    <p:sldId xmlns:r="http://schemas.openxmlformats.org/officeDocument/2006/relationships" id="282" r:id="R6b521c4d2c1a43a3"/>
-    <p:sldId xmlns:r="http://schemas.openxmlformats.org/officeDocument/2006/relationships" id="283" r:id="R864797a447684fdb"/>
-    <p:sldId xmlns:r="http://schemas.openxmlformats.org/officeDocument/2006/relationships" id="284" r:id="Rd0bb45cb067e44ab"/>
-    <p:sldId xmlns:r="http://schemas.openxmlformats.org/officeDocument/2006/relationships" id="285" r:id="R1bd5ca26e3b94ae2"/>
+    <p:sldId xmlns:r="http://schemas.openxmlformats.org/officeDocument/2006/relationships" id="256" r:id="Re9e111c997944c9e"/>
+    <p:sldId xmlns:r="http://schemas.openxmlformats.org/officeDocument/2006/relationships" id="257" r:id="R02f15866660d4730"/>
+    <p:sldId xmlns:r="http://schemas.openxmlformats.org/officeDocument/2006/relationships" id="258" r:id="Rc78baf87c2da40c3"/>
+    <p:sldId xmlns:r="http://schemas.openxmlformats.org/officeDocument/2006/relationships" id="259" r:id="R4550e3bf226a483e"/>
+    <p:sldId xmlns:r="http://schemas.openxmlformats.org/officeDocument/2006/relationships" id="260" r:id="Rfe8ab2136df04c9d"/>
+    <p:sldId xmlns:r="http://schemas.openxmlformats.org/officeDocument/2006/relationships" id="261" r:id="R8024df425e404edb"/>
+    <p:sldId xmlns:r="http://schemas.openxmlformats.org/officeDocument/2006/relationships" id="262" r:id="Rb455ecc3257d474b"/>
+    <p:sldId xmlns:r="http://schemas.openxmlformats.org/officeDocument/2006/relationships" id="263" r:id="Ra6cef1cd2fdb46ab"/>
+    <p:sldId xmlns:r="http://schemas.openxmlformats.org/officeDocument/2006/relationships" id="264" r:id="R127836798df84d98"/>
+    <p:sldId xmlns:r="http://schemas.openxmlformats.org/officeDocument/2006/relationships" id="265" r:id="Rb7d401af74ff48ee"/>
+    <p:sldId xmlns:r="http://schemas.openxmlformats.org/officeDocument/2006/relationships" id="266" r:id="Rf7214387cf3b4cab"/>
+    <p:sldId xmlns:r="http://schemas.openxmlformats.org/officeDocument/2006/relationships" id="267" r:id="Rcaba9411e8294f3b"/>
+    <p:sldId xmlns:r="http://schemas.openxmlformats.org/officeDocument/2006/relationships" id="268" r:id="R8e135846eac649ca"/>
+    <p:sldId xmlns:r="http://schemas.openxmlformats.org/officeDocument/2006/relationships" id="269" r:id="Rda65ef8934334e90"/>
+    <p:sldId xmlns:r="http://schemas.openxmlformats.org/officeDocument/2006/relationships" id="270" r:id="Rfbaa8d564fb248b3"/>
+    <p:sldId xmlns:r="http://schemas.openxmlformats.org/officeDocument/2006/relationships" id="271" r:id="R7f362c62d43345a7"/>
+    <p:sldId xmlns:r="http://schemas.openxmlformats.org/officeDocument/2006/relationships" id="272" r:id="Rc334e263ce1c432a"/>
+    <p:sldId xmlns:r="http://schemas.openxmlformats.org/officeDocument/2006/relationships" id="273" r:id="R4dcfc6b31beb4c37"/>
+    <p:sldId xmlns:r="http://schemas.openxmlformats.org/officeDocument/2006/relationships" id="274" r:id="Rde4464ab035f4e2e"/>
+    <p:sldId xmlns:r="http://schemas.openxmlformats.org/officeDocument/2006/relationships" id="275" r:id="R8d7c9f0ecc2c41b3"/>
+    <p:sldId xmlns:r="http://schemas.openxmlformats.org/officeDocument/2006/relationships" id="276" r:id="R8ea327dac77c435d"/>
+    <p:sldId xmlns:r="http://schemas.openxmlformats.org/officeDocument/2006/relationships" id="277" r:id="R0422cc78713c4ff8"/>
+    <p:sldId xmlns:r="http://schemas.openxmlformats.org/officeDocument/2006/relationships" id="278" r:id="R948d349a01c94867"/>
+    <p:sldId xmlns:r="http://schemas.openxmlformats.org/officeDocument/2006/relationships" id="279" r:id="Rab602bb0cdd048dc"/>
+    <p:sldId xmlns:r="http://schemas.openxmlformats.org/officeDocument/2006/relationships" id="280" r:id="R39988eb7f3b54b35"/>
+    <p:sldId xmlns:r="http://schemas.openxmlformats.org/officeDocument/2006/relationships" id="281" r:id="Rbdaeb5e224424d84"/>
+    <p:sldId xmlns:r="http://schemas.openxmlformats.org/officeDocument/2006/relationships" id="282" r:id="R9f23f9c1543b4db6"/>
+    <p:sldId xmlns:r="http://schemas.openxmlformats.org/officeDocument/2006/relationships" id="283" r:id="R30059508eb804eea"/>
+    <p:sldId xmlns:r="http://schemas.openxmlformats.org/officeDocument/2006/relationships" id="284" r:id="R1f7a4d7266614dcb"/>
+    <p:sldId xmlns:r="http://schemas.openxmlformats.org/officeDocument/2006/relationships" id="285" r:id="R709298f5c1064292"/>
   </p:sldIdLst>
   <p:sldSz cx="12191999" cy="6858000"/>
   <p:notesSz cx="6858000" cy="9144000"/>
@@ -529,6 +529,21 @@
           </a:p>
           <a:p xmlns:a="http://schemas.openxmlformats.org/drawingml/2006/main">
             <a:r>
+              <a:t>- https://www150.statcan.gc.ca/t1/tbl1/en/tv.action?pid=2010008001</a:t>
+            </a:r>
+          </a:p>
+          <a:p xmlns:a="http://schemas.openxmlformats.org/drawingml/2006/main">
+            <a:r>
+              <a:t>- https://www23.statcan.gc.ca/imdb/p2SV.pl?Function=getSurvey&amp;Id=1544050</a:t>
+            </a:r>
+          </a:p>
+          <a:p xmlns:a="http://schemas.openxmlformats.org/drawingml/2006/main">
+            <a:r>
+              <a:t>- https://www150.statcan.gc.ca/n1/pub/36-28-0001/2025004/article/00001-eng.pdf</a:t>
+            </a:r>
+          </a:p>
+          <a:p xmlns:a="http://schemas.openxmlformats.org/drawingml/2006/main">
+            <a:r>
               <a:t>- https://www.ftc.gov/reports/e-cigarette-report-2021</a:t>
             </a:r>
           </a:p>
@@ -704,6 +719,21 @@
           </a:p>
           <a:p xmlns:a="http://schemas.openxmlformats.org/drawingml/2006/main">
             <a:r>
+              <a:t>- https://www150.statcan.gc.ca/t1/tbl1/en/tv.action?pid=2010008001</a:t>
+            </a:r>
+          </a:p>
+          <a:p xmlns:a="http://schemas.openxmlformats.org/drawingml/2006/main">
+            <a:r>
+              <a:t>- https://www23.statcan.gc.ca/imdb/p2SV.pl?Function=getSurvey&amp;Id=1544050</a:t>
+            </a:r>
+          </a:p>
+          <a:p xmlns:a="http://schemas.openxmlformats.org/drawingml/2006/main">
+            <a:r>
+              <a:t>- https://www150.statcan.gc.ca/n1/pub/36-28-0001/2025004/article/00001-eng.pdf</a:t>
+            </a:r>
+          </a:p>
+          <a:p xmlns:a="http://schemas.openxmlformats.org/drawingml/2006/main">
+            <a:r>
               <a:t>- https://www.ftc.gov/reports/e-cigarette-report-2021</a:t>
             </a:r>
           </a:p>
@@ -879,6 +909,21 @@
           </a:p>
           <a:p xmlns:a="http://schemas.openxmlformats.org/drawingml/2006/main">
             <a:r>
+              <a:t>- https://www150.statcan.gc.ca/t1/tbl1/en/tv.action?pid=2010008001</a:t>
+            </a:r>
+          </a:p>
+          <a:p xmlns:a="http://schemas.openxmlformats.org/drawingml/2006/main">
+            <a:r>
+              <a:t>- https://www23.statcan.gc.ca/imdb/p2SV.pl?Function=getSurvey&amp;Id=1544050</a:t>
+            </a:r>
+          </a:p>
+          <a:p xmlns:a="http://schemas.openxmlformats.org/drawingml/2006/main">
+            <a:r>
+              <a:t>- https://www150.statcan.gc.ca/n1/pub/36-28-0001/2025004/article/00001-eng.pdf</a:t>
+            </a:r>
+          </a:p>
+          <a:p xmlns:a="http://schemas.openxmlformats.org/drawingml/2006/main">
+            <a:r>
               <a:t>- https://www.ftc.gov/reports/e-cigarette-report-2021</a:t>
             </a:r>
           </a:p>
@@ -1054,6 +1099,21 @@
           </a:p>
           <a:p xmlns:a="http://schemas.openxmlformats.org/drawingml/2006/main">
             <a:r>
+              <a:t>- https://www150.statcan.gc.ca/t1/tbl1/en/tv.action?pid=2010008001</a:t>
+            </a:r>
+          </a:p>
+          <a:p xmlns:a="http://schemas.openxmlformats.org/drawingml/2006/main">
+            <a:r>
+              <a:t>- https://www23.statcan.gc.ca/imdb/p2SV.pl?Function=getSurvey&amp;Id=1544050</a:t>
+            </a:r>
+          </a:p>
+          <a:p xmlns:a="http://schemas.openxmlformats.org/drawingml/2006/main">
+            <a:r>
+              <a:t>- https://www150.statcan.gc.ca/n1/pub/36-28-0001/2025004/article/00001-eng.pdf</a:t>
+            </a:r>
+          </a:p>
+          <a:p xmlns:a="http://schemas.openxmlformats.org/drawingml/2006/main">
+            <a:r>
               <a:t>- https://www.ftc.gov/reports/e-cigarette-report-2021</a:t>
             </a:r>
           </a:p>
@@ -1229,6 +1289,21 @@
           </a:p>
           <a:p xmlns:a="http://schemas.openxmlformats.org/drawingml/2006/main">
             <a:r>
+              <a:t>- https://www150.statcan.gc.ca/t1/tbl1/en/tv.action?pid=2010008001</a:t>
+            </a:r>
+          </a:p>
+          <a:p xmlns:a="http://schemas.openxmlformats.org/drawingml/2006/main">
+            <a:r>
+              <a:t>- https://www23.statcan.gc.ca/imdb/p2SV.pl?Function=getSurvey&amp;Id=1544050</a:t>
+            </a:r>
+          </a:p>
+          <a:p xmlns:a="http://schemas.openxmlformats.org/drawingml/2006/main">
+            <a:r>
+              <a:t>- https://www150.statcan.gc.ca/n1/pub/36-28-0001/2025004/article/00001-eng.pdf</a:t>
+            </a:r>
+          </a:p>
+          <a:p xmlns:a="http://schemas.openxmlformats.org/drawingml/2006/main">
+            <a:r>
               <a:t>- https://www.ftc.gov/reports/e-cigarette-report-2021</a:t>
             </a:r>
           </a:p>
@@ -1404,6 +1479,21 @@
           </a:p>
           <a:p xmlns:a="http://schemas.openxmlformats.org/drawingml/2006/main">
             <a:r>
+              <a:t>- https://www150.statcan.gc.ca/t1/tbl1/en/tv.action?pid=2010008001</a:t>
+            </a:r>
+          </a:p>
+          <a:p xmlns:a="http://schemas.openxmlformats.org/drawingml/2006/main">
+            <a:r>
+              <a:t>- https://www23.statcan.gc.ca/imdb/p2SV.pl?Function=getSurvey&amp;Id=1544050</a:t>
+            </a:r>
+          </a:p>
+          <a:p xmlns:a="http://schemas.openxmlformats.org/drawingml/2006/main">
+            <a:r>
+              <a:t>- https://www150.statcan.gc.ca/n1/pub/36-28-0001/2025004/article/00001-eng.pdf</a:t>
+            </a:r>
+          </a:p>
+          <a:p xmlns:a="http://schemas.openxmlformats.org/drawingml/2006/main">
+            <a:r>
               <a:t>- https://www.ftc.gov/reports/e-cigarette-report-2021</a:t>
             </a:r>
           </a:p>
@@ -1579,6 +1669,21 @@
           </a:p>
           <a:p xmlns:a="http://schemas.openxmlformats.org/drawingml/2006/main">
             <a:r>
+              <a:t>- https://www150.statcan.gc.ca/t1/tbl1/en/tv.action?pid=2010008001</a:t>
+            </a:r>
+          </a:p>
+          <a:p xmlns:a="http://schemas.openxmlformats.org/drawingml/2006/main">
+            <a:r>
+              <a:t>- https://www23.statcan.gc.ca/imdb/p2SV.pl?Function=getSurvey&amp;Id=1544050</a:t>
+            </a:r>
+          </a:p>
+          <a:p xmlns:a="http://schemas.openxmlformats.org/drawingml/2006/main">
+            <a:r>
+              <a:t>- https://www150.statcan.gc.ca/n1/pub/36-28-0001/2025004/article/00001-eng.pdf</a:t>
+            </a:r>
+          </a:p>
+          <a:p xmlns:a="http://schemas.openxmlformats.org/drawingml/2006/main">
+            <a:r>
               <a:t>- https://www.ftc.gov/reports/e-cigarette-report-2021</a:t>
             </a:r>
           </a:p>
@@ -1754,6 +1859,21 @@
           </a:p>
           <a:p xmlns:a="http://schemas.openxmlformats.org/drawingml/2006/main">
             <a:r>
+              <a:t>- https://www150.statcan.gc.ca/t1/tbl1/en/tv.action?pid=2010008001</a:t>
+            </a:r>
+          </a:p>
+          <a:p xmlns:a="http://schemas.openxmlformats.org/drawingml/2006/main">
+            <a:r>
+              <a:t>- https://www23.statcan.gc.ca/imdb/p2SV.pl?Function=getSurvey&amp;Id=1544050</a:t>
+            </a:r>
+          </a:p>
+          <a:p xmlns:a="http://schemas.openxmlformats.org/drawingml/2006/main">
+            <a:r>
+              <a:t>- https://www150.statcan.gc.ca/n1/pub/36-28-0001/2025004/article/00001-eng.pdf</a:t>
+            </a:r>
+          </a:p>
+          <a:p xmlns:a="http://schemas.openxmlformats.org/drawingml/2006/main">
+            <a:r>
               <a:t>- https://www.ftc.gov/reports/e-cigarette-report-2021</a:t>
             </a:r>
           </a:p>
@@ -1929,6 +2049,21 @@
           </a:p>
           <a:p xmlns:a="http://schemas.openxmlformats.org/drawingml/2006/main">
             <a:r>
+              <a:t>- https://www150.statcan.gc.ca/t1/tbl1/en/tv.action?pid=2010008001</a:t>
+            </a:r>
+          </a:p>
+          <a:p xmlns:a="http://schemas.openxmlformats.org/drawingml/2006/main">
+            <a:r>
+              <a:t>- https://www23.statcan.gc.ca/imdb/p2SV.pl?Function=getSurvey&amp;Id=1544050</a:t>
+            </a:r>
+          </a:p>
+          <a:p xmlns:a="http://schemas.openxmlformats.org/drawingml/2006/main">
+            <a:r>
+              <a:t>- https://www150.statcan.gc.ca/n1/pub/36-28-0001/2025004/article/00001-eng.pdf</a:t>
+            </a:r>
+          </a:p>
+          <a:p xmlns:a="http://schemas.openxmlformats.org/drawingml/2006/main">
+            <a:r>
               <a:t>- https://www.ftc.gov/reports/e-cigarette-report-2021</a:t>
             </a:r>
           </a:p>
@@ -2104,6 +2239,21 @@
           </a:p>
           <a:p xmlns:a="http://schemas.openxmlformats.org/drawingml/2006/main">
             <a:r>
+              <a:t>- https://www150.statcan.gc.ca/t1/tbl1/en/tv.action?pid=2010008001</a:t>
+            </a:r>
+          </a:p>
+          <a:p xmlns:a="http://schemas.openxmlformats.org/drawingml/2006/main">
+            <a:r>
+              <a:t>- https://www23.statcan.gc.ca/imdb/p2SV.pl?Function=getSurvey&amp;Id=1544050</a:t>
+            </a:r>
+          </a:p>
+          <a:p xmlns:a="http://schemas.openxmlformats.org/drawingml/2006/main">
+            <a:r>
+              <a:t>- https://www150.statcan.gc.ca/n1/pub/36-28-0001/2025004/article/00001-eng.pdf</a:t>
+            </a:r>
+          </a:p>
+          <a:p xmlns:a="http://schemas.openxmlformats.org/drawingml/2006/main">
+            <a:r>
               <a:t>- https://www.ftc.gov/reports/e-cigarette-report-2021</a:t>
             </a:r>
           </a:p>
@@ -2279,6 +2429,21 @@
           </a:p>
           <a:p xmlns:a="http://schemas.openxmlformats.org/drawingml/2006/main">
             <a:r>
+              <a:t>- https://www150.statcan.gc.ca/t1/tbl1/en/tv.action?pid=2010008001</a:t>
+            </a:r>
+          </a:p>
+          <a:p xmlns:a="http://schemas.openxmlformats.org/drawingml/2006/main">
+            <a:r>
+              <a:t>- https://www23.statcan.gc.ca/imdb/p2SV.pl?Function=getSurvey&amp;Id=1544050</a:t>
+            </a:r>
+          </a:p>
+          <a:p xmlns:a="http://schemas.openxmlformats.org/drawingml/2006/main">
+            <a:r>
+              <a:t>- https://www150.statcan.gc.ca/n1/pub/36-28-0001/2025004/article/00001-eng.pdf</a:t>
+            </a:r>
+          </a:p>
+          <a:p xmlns:a="http://schemas.openxmlformats.org/drawingml/2006/main">
+            <a:r>
               <a:t>- https://www.ftc.gov/reports/e-cigarette-report-2021</a:t>
             </a:r>
           </a:p>
@@ -2454,6 +2619,21 @@
           </a:p>
           <a:p xmlns:a="http://schemas.openxmlformats.org/drawingml/2006/main">
             <a:r>
+              <a:t>- https://www150.statcan.gc.ca/t1/tbl1/en/tv.action?pid=2010008001</a:t>
+            </a:r>
+          </a:p>
+          <a:p xmlns:a="http://schemas.openxmlformats.org/drawingml/2006/main">
+            <a:r>
+              <a:t>- https://www23.statcan.gc.ca/imdb/p2SV.pl?Function=getSurvey&amp;Id=1544050</a:t>
+            </a:r>
+          </a:p>
+          <a:p xmlns:a="http://schemas.openxmlformats.org/drawingml/2006/main">
+            <a:r>
+              <a:t>- https://www150.statcan.gc.ca/n1/pub/36-28-0001/2025004/article/00001-eng.pdf</a:t>
+            </a:r>
+          </a:p>
+          <a:p xmlns:a="http://schemas.openxmlformats.org/drawingml/2006/main">
+            <a:r>
               <a:t>- https://www.ftc.gov/reports/e-cigarette-report-2021</a:t>
             </a:r>
           </a:p>
@@ -2629,6 +2809,21 @@
           </a:p>
           <a:p xmlns:a="http://schemas.openxmlformats.org/drawingml/2006/main">
             <a:r>
+              <a:t>- https://www150.statcan.gc.ca/t1/tbl1/en/tv.action?pid=2010008001</a:t>
+            </a:r>
+          </a:p>
+          <a:p xmlns:a="http://schemas.openxmlformats.org/drawingml/2006/main">
+            <a:r>
+              <a:t>- https://www23.statcan.gc.ca/imdb/p2SV.pl?Function=getSurvey&amp;Id=1544050</a:t>
+            </a:r>
+          </a:p>
+          <a:p xmlns:a="http://schemas.openxmlformats.org/drawingml/2006/main">
+            <a:r>
+              <a:t>- https://www150.statcan.gc.ca/n1/pub/36-28-0001/2025004/article/00001-eng.pdf</a:t>
+            </a:r>
+          </a:p>
+          <a:p xmlns:a="http://schemas.openxmlformats.org/drawingml/2006/main">
+            <a:r>
               <a:t>- https://www.ftc.gov/reports/e-cigarette-report-2021</a:t>
             </a:r>
           </a:p>
@@ -2804,6 +2999,21 @@
           </a:p>
           <a:p xmlns:a="http://schemas.openxmlformats.org/drawingml/2006/main">
             <a:r>
+              <a:t>- https://www150.statcan.gc.ca/t1/tbl1/en/tv.action?pid=2010008001</a:t>
+            </a:r>
+          </a:p>
+          <a:p xmlns:a="http://schemas.openxmlformats.org/drawingml/2006/main">
+            <a:r>
+              <a:t>- https://www23.statcan.gc.ca/imdb/p2SV.pl?Function=getSurvey&amp;Id=1544050</a:t>
+            </a:r>
+          </a:p>
+          <a:p xmlns:a="http://schemas.openxmlformats.org/drawingml/2006/main">
+            <a:r>
+              <a:t>- https://www150.statcan.gc.ca/n1/pub/36-28-0001/2025004/article/00001-eng.pdf</a:t>
+            </a:r>
+          </a:p>
+          <a:p xmlns:a="http://schemas.openxmlformats.org/drawingml/2006/main">
+            <a:r>
               <a:t>- https://www.ftc.gov/reports/e-cigarette-report-2021</a:t>
             </a:r>
           </a:p>
@@ -2979,6 +3189,21 @@
           </a:p>
           <a:p xmlns:a="http://schemas.openxmlformats.org/drawingml/2006/main">
             <a:r>
+              <a:t>- https://www150.statcan.gc.ca/t1/tbl1/en/tv.action?pid=2010008001</a:t>
+            </a:r>
+          </a:p>
+          <a:p xmlns:a="http://schemas.openxmlformats.org/drawingml/2006/main">
+            <a:r>
+              <a:t>- https://www23.statcan.gc.ca/imdb/p2SV.pl?Function=getSurvey&amp;Id=1544050</a:t>
+            </a:r>
+          </a:p>
+          <a:p xmlns:a="http://schemas.openxmlformats.org/drawingml/2006/main">
+            <a:r>
+              <a:t>- https://www150.statcan.gc.ca/n1/pub/36-28-0001/2025004/article/00001-eng.pdf</a:t>
+            </a:r>
+          </a:p>
+          <a:p xmlns:a="http://schemas.openxmlformats.org/drawingml/2006/main">
+            <a:r>
               <a:t>- https://www.ftc.gov/reports/e-cigarette-report-2021</a:t>
             </a:r>
           </a:p>
@@ -3154,6 +3379,21 @@
           </a:p>
           <a:p xmlns:a="http://schemas.openxmlformats.org/drawingml/2006/main">
             <a:r>
+              <a:t>- https://www150.statcan.gc.ca/t1/tbl1/en/tv.action?pid=2010008001</a:t>
+            </a:r>
+          </a:p>
+          <a:p xmlns:a="http://schemas.openxmlformats.org/drawingml/2006/main">
+            <a:r>
+              <a:t>- https://www23.statcan.gc.ca/imdb/p2SV.pl?Function=getSurvey&amp;Id=1544050</a:t>
+            </a:r>
+          </a:p>
+          <a:p xmlns:a="http://schemas.openxmlformats.org/drawingml/2006/main">
+            <a:r>
+              <a:t>- https://www150.statcan.gc.ca/n1/pub/36-28-0001/2025004/article/00001-eng.pdf</a:t>
+            </a:r>
+          </a:p>
+          <a:p xmlns:a="http://schemas.openxmlformats.org/drawingml/2006/main">
+            <a:r>
               <a:t>- https://www.ftc.gov/reports/e-cigarette-report-2021</a:t>
             </a:r>
           </a:p>
@@ -3329,6 +3569,21 @@
           </a:p>
           <a:p xmlns:a="http://schemas.openxmlformats.org/drawingml/2006/main">
             <a:r>
+              <a:t>- https://www150.statcan.gc.ca/t1/tbl1/en/tv.action?pid=2010008001</a:t>
+            </a:r>
+          </a:p>
+          <a:p xmlns:a="http://schemas.openxmlformats.org/drawingml/2006/main">
+            <a:r>
+              <a:t>- https://www23.statcan.gc.ca/imdb/p2SV.pl?Function=getSurvey&amp;Id=1544050</a:t>
+            </a:r>
+          </a:p>
+          <a:p xmlns:a="http://schemas.openxmlformats.org/drawingml/2006/main">
+            <a:r>
+              <a:t>- https://www150.statcan.gc.ca/n1/pub/36-28-0001/2025004/article/00001-eng.pdf</a:t>
+            </a:r>
+          </a:p>
+          <a:p xmlns:a="http://schemas.openxmlformats.org/drawingml/2006/main">
+            <a:r>
               <a:t>- https://www.ftc.gov/reports/e-cigarette-report-2021</a:t>
             </a:r>
           </a:p>
@@ -3504,6 +3759,21 @@
           </a:p>
           <a:p xmlns:a="http://schemas.openxmlformats.org/drawingml/2006/main">
             <a:r>
+              <a:t>- https://www150.statcan.gc.ca/t1/tbl1/en/tv.action?pid=2010008001</a:t>
+            </a:r>
+          </a:p>
+          <a:p xmlns:a="http://schemas.openxmlformats.org/drawingml/2006/main">
+            <a:r>
+              <a:t>- https://www23.statcan.gc.ca/imdb/p2SV.pl?Function=getSurvey&amp;Id=1544050</a:t>
+            </a:r>
+          </a:p>
+          <a:p xmlns:a="http://schemas.openxmlformats.org/drawingml/2006/main">
+            <a:r>
+              <a:t>- https://www150.statcan.gc.ca/n1/pub/36-28-0001/2025004/article/00001-eng.pdf</a:t>
+            </a:r>
+          </a:p>
+          <a:p xmlns:a="http://schemas.openxmlformats.org/drawingml/2006/main">
+            <a:r>
               <a:t>- https://www.ftc.gov/reports/e-cigarette-report-2021</a:t>
             </a:r>
           </a:p>
@@ -3679,6 +3949,21 @@
           </a:p>
           <a:p xmlns:a="http://schemas.openxmlformats.org/drawingml/2006/main">
             <a:r>
+              <a:t>- https://www150.statcan.gc.ca/t1/tbl1/en/tv.action?pid=2010008001</a:t>
+            </a:r>
+          </a:p>
+          <a:p xmlns:a="http://schemas.openxmlformats.org/drawingml/2006/main">
+            <a:r>
+              <a:t>- https://www23.statcan.gc.ca/imdb/p2SV.pl?Function=getSurvey&amp;Id=1544050</a:t>
+            </a:r>
+          </a:p>
+          <a:p xmlns:a="http://schemas.openxmlformats.org/drawingml/2006/main">
+            <a:r>
+              <a:t>- https://www150.statcan.gc.ca/n1/pub/36-28-0001/2025004/article/00001-eng.pdf</a:t>
+            </a:r>
+          </a:p>
+          <a:p xmlns:a="http://schemas.openxmlformats.org/drawingml/2006/main">
+            <a:r>
               <a:t>- https://www.ftc.gov/reports/e-cigarette-report-2021</a:t>
             </a:r>
           </a:p>
@@ -3854,6 +4139,21 @@
           </a:p>
           <a:p xmlns:a="http://schemas.openxmlformats.org/drawingml/2006/main">
             <a:r>
+              <a:t>- https://www150.statcan.gc.ca/t1/tbl1/en/tv.action?pid=2010008001</a:t>
+            </a:r>
+          </a:p>
+          <a:p xmlns:a="http://schemas.openxmlformats.org/drawingml/2006/main">
+            <a:r>
+              <a:t>- https://www23.statcan.gc.ca/imdb/p2SV.pl?Function=getSurvey&amp;Id=1544050</a:t>
+            </a:r>
+          </a:p>
+          <a:p xmlns:a="http://schemas.openxmlformats.org/drawingml/2006/main">
+            <a:r>
+              <a:t>- https://www150.statcan.gc.ca/n1/pub/36-28-0001/2025004/article/00001-eng.pdf</a:t>
+            </a:r>
+          </a:p>
+          <a:p xmlns:a="http://schemas.openxmlformats.org/drawingml/2006/main">
+            <a:r>
               <a:t>- https://www.ftc.gov/reports/e-cigarette-report-2021</a:t>
             </a:r>
           </a:p>
@@ -4029,6 +4329,21 @@
           </a:p>
           <a:p xmlns:a="http://schemas.openxmlformats.org/drawingml/2006/main">
             <a:r>
+              <a:t>- https://www150.statcan.gc.ca/t1/tbl1/en/tv.action?pid=2010008001</a:t>
+            </a:r>
+          </a:p>
+          <a:p xmlns:a="http://schemas.openxmlformats.org/drawingml/2006/main">
+            <a:r>
+              <a:t>- https://www23.statcan.gc.ca/imdb/p2SV.pl?Function=getSurvey&amp;Id=1544050</a:t>
+            </a:r>
+          </a:p>
+          <a:p xmlns:a="http://schemas.openxmlformats.org/drawingml/2006/main">
+            <a:r>
+              <a:t>- https://www150.statcan.gc.ca/n1/pub/36-28-0001/2025004/article/00001-eng.pdf</a:t>
+            </a:r>
+          </a:p>
+          <a:p xmlns:a="http://schemas.openxmlformats.org/drawingml/2006/main">
+            <a:r>
               <a:t>- https://www.ftc.gov/reports/e-cigarette-report-2021</a:t>
             </a:r>
           </a:p>
@@ -4204,6 +4519,21 @@
           </a:p>
           <a:p xmlns:a="http://schemas.openxmlformats.org/drawingml/2006/main">
             <a:r>
+              <a:t>- https://www150.statcan.gc.ca/t1/tbl1/en/tv.action?pid=2010008001</a:t>
+            </a:r>
+          </a:p>
+          <a:p xmlns:a="http://schemas.openxmlformats.org/drawingml/2006/main">
+            <a:r>
+              <a:t>- https://www23.statcan.gc.ca/imdb/p2SV.pl?Function=getSurvey&amp;Id=1544050</a:t>
+            </a:r>
+          </a:p>
+          <a:p xmlns:a="http://schemas.openxmlformats.org/drawingml/2006/main">
+            <a:r>
+              <a:t>- https://www150.statcan.gc.ca/n1/pub/36-28-0001/2025004/article/00001-eng.pdf</a:t>
+            </a:r>
+          </a:p>
+          <a:p xmlns:a="http://schemas.openxmlformats.org/drawingml/2006/main">
+            <a:r>
               <a:t>- https://www.ftc.gov/reports/e-cigarette-report-2021</a:t>
             </a:r>
           </a:p>
@@ -4379,6 +4709,21 @@
           </a:p>
           <a:p xmlns:a="http://schemas.openxmlformats.org/drawingml/2006/main">
             <a:r>
+              <a:t>- https://www150.statcan.gc.ca/t1/tbl1/en/tv.action?pid=2010008001</a:t>
+            </a:r>
+          </a:p>
+          <a:p xmlns:a="http://schemas.openxmlformats.org/drawingml/2006/main">
+            <a:r>
+              <a:t>- https://www23.statcan.gc.ca/imdb/p2SV.pl?Function=getSurvey&amp;Id=1544050</a:t>
+            </a:r>
+          </a:p>
+          <a:p xmlns:a="http://schemas.openxmlformats.org/drawingml/2006/main">
+            <a:r>
+              <a:t>- https://www150.statcan.gc.ca/n1/pub/36-28-0001/2025004/article/00001-eng.pdf</a:t>
+            </a:r>
+          </a:p>
+          <a:p xmlns:a="http://schemas.openxmlformats.org/drawingml/2006/main">
+            <a:r>
               <a:t>- https://www.ftc.gov/reports/e-cigarette-report-2021</a:t>
             </a:r>
           </a:p>
@@ -4554,6 +4899,21 @@
           </a:p>
           <a:p xmlns:a="http://schemas.openxmlformats.org/drawingml/2006/main">
             <a:r>
+              <a:t>- https://www150.statcan.gc.ca/t1/tbl1/en/tv.action?pid=2010008001</a:t>
+            </a:r>
+          </a:p>
+          <a:p xmlns:a="http://schemas.openxmlformats.org/drawingml/2006/main">
+            <a:r>
+              <a:t>- https://www23.statcan.gc.ca/imdb/p2SV.pl?Function=getSurvey&amp;Id=1544050</a:t>
+            </a:r>
+          </a:p>
+          <a:p xmlns:a="http://schemas.openxmlformats.org/drawingml/2006/main">
+            <a:r>
+              <a:t>- https://www150.statcan.gc.ca/n1/pub/36-28-0001/2025004/article/00001-eng.pdf</a:t>
+            </a:r>
+          </a:p>
+          <a:p xmlns:a="http://schemas.openxmlformats.org/drawingml/2006/main">
+            <a:r>
               <a:t>- https://www.ftc.gov/reports/e-cigarette-report-2021</a:t>
             </a:r>
           </a:p>
@@ -4729,6 +5089,21 @@
           </a:p>
           <a:p xmlns:a="http://schemas.openxmlformats.org/drawingml/2006/main">
             <a:r>
+              <a:t>- https://www150.statcan.gc.ca/t1/tbl1/en/tv.action?pid=2010008001</a:t>
+            </a:r>
+          </a:p>
+          <a:p xmlns:a="http://schemas.openxmlformats.org/drawingml/2006/main">
+            <a:r>
+              <a:t>- https://www23.statcan.gc.ca/imdb/p2SV.pl?Function=getSurvey&amp;Id=1544050</a:t>
+            </a:r>
+          </a:p>
+          <a:p xmlns:a="http://schemas.openxmlformats.org/drawingml/2006/main">
+            <a:r>
+              <a:t>- https://www150.statcan.gc.ca/n1/pub/36-28-0001/2025004/article/00001-eng.pdf</a:t>
+            </a:r>
+          </a:p>
+          <a:p xmlns:a="http://schemas.openxmlformats.org/drawingml/2006/main">
+            <a:r>
               <a:t>- https://www.ftc.gov/reports/e-cigarette-report-2021</a:t>
             </a:r>
           </a:p>
@@ -4904,6 +5279,21 @@
           </a:p>
           <a:p xmlns:a="http://schemas.openxmlformats.org/drawingml/2006/main">
             <a:r>
+              <a:t>- https://www150.statcan.gc.ca/t1/tbl1/en/tv.action?pid=2010008001</a:t>
+            </a:r>
+          </a:p>
+          <a:p xmlns:a="http://schemas.openxmlformats.org/drawingml/2006/main">
+            <a:r>
+              <a:t>- https://www23.statcan.gc.ca/imdb/p2SV.pl?Function=getSurvey&amp;Id=1544050</a:t>
+            </a:r>
+          </a:p>
+          <a:p xmlns:a="http://schemas.openxmlformats.org/drawingml/2006/main">
+            <a:r>
+              <a:t>- https://www150.statcan.gc.ca/n1/pub/36-28-0001/2025004/article/00001-eng.pdf</a:t>
+            </a:r>
+          </a:p>
+          <a:p xmlns:a="http://schemas.openxmlformats.org/drawingml/2006/main">
+            <a:r>
               <a:t>- https://www.ftc.gov/reports/e-cigarette-report-2021</a:t>
             </a:r>
           </a:p>
@@ -5079,6 +5469,21 @@
           </a:p>
           <a:p xmlns:a="http://schemas.openxmlformats.org/drawingml/2006/main">
             <a:r>
+              <a:t>- https://www150.statcan.gc.ca/t1/tbl1/en/tv.action?pid=2010008001</a:t>
+            </a:r>
+          </a:p>
+          <a:p xmlns:a="http://schemas.openxmlformats.org/drawingml/2006/main">
+            <a:r>
+              <a:t>- https://www23.statcan.gc.ca/imdb/p2SV.pl?Function=getSurvey&amp;Id=1544050</a:t>
+            </a:r>
+          </a:p>
+          <a:p xmlns:a="http://schemas.openxmlformats.org/drawingml/2006/main">
+            <a:r>
+              <a:t>- https://www150.statcan.gc.ca/n1/pub/36-28-0001/2025004/article/00001-eng.pdf</a:t>
+            </a:r>
+          </a:p>
+          <a:p xmlns:a="http://schemas.openxmlformats.org/drawingml/2006/main">
+            <a:r>
               <a:t>- https://www.ftc.gov/reports/e-cigarette-report-2021</a:t>
             </a:r>
           </a:p>
@@ -5254,6 +5659,21 @@
           </a:p>
           <a:p xmlns:a="http://schemas.openxmlformats.org/drawingml/2006/main">
             <a:r>
+              <a:t>- https://www150.statcan.gc.ca/t1/tbl1/en/tv.action?pid=2010008001</a:t>
+            </a:r>
+          </a:p>
+          <a:p xmlns:a="http://schemas.openxmlformats.org/drawingml/2006/main">
+            <a:r>
+              <a:t>- https://www23.statcan.gc.ca/imdb/p2SV.pl?Function=getSurvey&amp;Id=1544050</a:t>
+            </a:r>
+          </a:p>
+          <a:p xmlns:a="http://schemas.openxmlformats.org/drawingml/2006/main">
+            <a:r>
+              <a:t>- https://www150.statcan.gc.ca/n1/pub/36-28-0001/2025004/article/00001-eng.pdf</a:t>
+            </a:r>
+          </a:p>
+          <a:p xmlns:a="http://schemas.openxmlformats.org/drawingml/2006/main">
+            <a:r>
               <a:t>- https://www.ftc.gov/reports/e-cigarette-report-2021</a:t>
             </a:r>
           </a:p>
@@ -5429,6 +5849,21 @@
           </a:p>
           <a:p xmlns:a="http://schemas.openxmlformats.org/drawingml/2006/main">
             <a:r>
+              <a:t>- https://www150.statcan.gc.ca/t1/tbl1/en/tv.action?pid=2010008001</a:t>
+            </a:r>
+          </a:p>
+          <a:p xmlns:a="http://schemas.openxmlformats.org/drawingml/2006/main">
+            <a:r>
+              <a:t>- https://www23.statcan.gc.ca/imdb/p2SV.pl?Function=getSurvey&amp;Id=1544050</a:t>
+            </a:r>
+          </a:p>
+          <a:p xmlns:a="http://schemas.openxmlformats.org/drawingml/2006/main">
+            <a:r>
+              <a:t>- https://www150.statcan.gc.ca/n1/pub/36-28-0001/2025004/article/00001-eng.pdf</a:t>
+            </a:r>
+          </a:p>
+          <a:p xmlns:a="http://schemas.openxmlformats.org/drawingml/2006/main">
+            <a:r>
               <a:t>- https://www.ftc.gov/reports/e-cigarette-report-2021</a:t>
             </a:r>
           </a:p>
@@ -5604,6 +6039,21 @@
           </a:p>
           <a:p xmlns:a="http://schemas.openxmlformats.org/drawingml/2006/main">
             <a:r>
+              <a:t>- https://www150.statcan.gc.ca/t1/tbl1/en/tv.action?pid=2010008001</a:t>
+            </a:r>
+          </a:p>
+          <a:p xmlns:a="http://schemas.openxmlformats.org/drawingml/2006/main">
+            <a:r>
+              <a:t>- https://www23.statcan.gc.ca/imdb/p2SV.pl?Function=getSurvey&amp;Id=1544050</a:t>
+            </a:r>
+          </a:p>
+          <a:p xmlns:a="http://schemas.openxmlformats.org/drawingml/2006/main">
+            <a:r>
+              <a:t>- https://www150.statcan.gc.ca/n1/pub/36-28-0001/2025004/article/00001-eng.pdf</a:t>
+            </a:r>
+          </a:p>
+          <a:p xmlns:a="http://schemas.openxmlformats.org/drawingml/2006/main">
+            <a:r>
               <a:t>- https://www.ftc.gov/reports/e-cigarette-report-2021</a:t>
             </a:r>
           </a:p>
@@ -5721,7 +6171,7 @@
           <p:cNvPr id="2" name="Title 1">
             <a:extLst xmlns:a="http://schemas.openxmlformats.org/drawingml/2006/main">
               <a:ext uri="{FF2B5EF4-FFF2-40B4-BE49-F238E27FC236}">
-                <a16:creationId xmlns:a16="http://schemas.microsoft.com/office/drawing/2014/main" id="{283735EB-746B-4C68-85C0-C9C584C753BB}"/>
+                <a16:creationId xmlns:a16="http://schemas.microsoft.com/office/drawing/2014/main" id="{E32C8C1A-C84B-47D1-A6C5-732A0B89BDD0}"/>
               </a:ext>
             </a:extLst>
           </p:cNvPr>
@@ -5753,7 +6203,7 @@
           <p:cNvPr id="3" name="Subtitle 2">
             <a:extLst xmlns:a="http://schemas.openxmlformats.org/drawingml/2006/main">
               <a:ext uri="{FF2B5EF4-FFF2-40B4-BE49-F238E27FC236}">
-                <a16:creationId xmlns:a16="http://schemas.microsoft.com/office/drawing/2014/main" id="{A9A2C953-B705-4B3E-8B06-38520AE6D2E9}"/>
+                <a16:creationId xmlns:a16="http://schemas.microsoft.com/office/drawing/2014/main" id="{239EFFCE-8986-45A3-881A-48CF3E4F0445}"/>
               </a:ext>
             </a:extLst>
           </p:cNvPr>
@@ -5876,7 +6326,7 @@
           <p:cNvPr id="4" name="Date Placeholder 3">
             <a:extLst xmlns:a="http://schemas.openxmlformats.org/drawingml/2006/main">
               <a:ext uri="{FF2B5EF4-FFF2-40B4-BE49-F238E27FC236}">
-                <a16:creationId xmlns:a16="http://schemas.microsoft.com/office/drawing/2014/main" id="{2BDAAF61-718F-4E4B-9782-7DE49C44139A}"/>
+                <a16:creationId xmlns:a16="http://schemas.microsoft.com/office/drawing/2014/main" id="{A3CA2507-0049-4667-8DA1-2869DB02957D}"/>
               </a:ext>
             </a:extLst>
           </p:cNvPr>
@@ -5903,7 +6353,7 @@
           <p:cNvPr id="5" name="Footer Placeholder 4">
             <a:extLst xmlns:a="http://schemas.openxmlformats.org/drawingml/2006/main">
               <a:ext uri="{FF2B5EF4-FFF2-40B4-BE49-F238E27FC236}">
-                <a16:creationId xmlns:a16="http://schemas.microsoft.com/office/drawing/2014/main" id="{020D8B82-CA78-4331-86DB-765FF8A5883B}"/>
+                <a16:creationId xmlns:a16="http://schemas.microsoft.com/office/drawing/2014/main" id="{9990D1E9-88DA-4218-B76B-33AC83E3257A}"/>
               </a:ext>
             </a:extLst>
           </p:cNvPr>
@@ -5926,7 +6376,7 @@
           <p:cNvPr id="6" name="Slide Number Placeholder 5">
             <a:extLst xmlns:a="http://schemas.openxmlformats.org/drawingml/2006/main">
               <a:ext uri="{FF2B5EF4-FFF2-40B4-BE49-F238E27FC236}">
-                <a16:creationId xmlns:a16="http://schemas.microsoft.com/office/drawing/2014/main" id="{DB16205D-88DF-497A-B471-B34E8500F308}"/>
+                <a16:creationId xmlns:a16="http://schemas.microsoft.com/office/drawing/2014/main" id="{D0496438-B412-40FD-B7EC-2CA3101EE162}"/>
               </a:ext>
             </a:extLst>
           </p:cNvPr>
@@ -5970,7 +6420,7 @@
           <p:cNvPr id="2" name="Title 1">
             <a:extLst xmlns:a="http://schemas.openxmlformats.org/drawingml/2006/main">
               <a:ext uri="{FF2B5EF4-FFF2-40B4-BE49-F238E27FC236}">
-                <a16:creationId xmlns:a16="http://schemas.microsoft.com/office/drawing/2014/main" id="{97543191-A938-462E-93EB-8C1A062D0ADF}"/>
+                <a16:creationId xmlns:a16="http://schemas.microsoft.com/office/drawing/2014/main" id="{3A52105C-056D-4289-9EC9-FA4FD2969CD5}"/>
               </a:ext>
             </a:extLst>
           </p:cNvPr>
@@ -5997,7 +6447,7 @@
           <p:cNvPr id="3" name="Vertical Text Placeholder 2">
             <a:extLst xmlns:a="http://schemas.openxmlformats.org/drawingml/2006/main">
               <a:ext uri="{FF2B5EF4-FFF2-40B4-BE49-F238E27FC236}">
-                <a16:creationId xmlns:a16="http://schemas.microsoft.com/office/drawing/2014/main" id="{E9C8FBBA-EA4C-421A-BC73-88B709977F29}"/>
+                <a16:creationId xmlns:a16="http://schemas.microsoft.com/office/drawing/2014/main" id="{0348E3C2-35E4-4D38-80B7-93C964DE6049}"/>
               </a:ext>
             </a:extLst>
           </p:cNvPr>
@@ -6059,7 +6509,7 @@
           <p:cNvPr id="4" name="Date Placeholder 3">
             <a:extLst xmlns:a="http://schemas.openxmlformats.org/drawingml/2006/main">
               <a:ext uri="{FF2B5EF4-FFF2-40B4-BE49-F238E27FC236}">
-                <a16:creationId xmlns:a16="http://schemas.microsoft.com/office/drawing/2014/main" id="{97E478A9-039E-4B24-B86D-D9CDE71EB2DE}"/>
+                <a16:creationId xmlns:a16="http://schemas.microsoft.com/office/drawing/2014/main" id="{B88FC5FB-FDFD-49AE-96BE-C91394070F15}"/>
               </a:ext>
             </a:extLst>
           </p:cNvPr>
@@ -6086,7 +6536,7 @@
           <p:cNvPr id="5" name="Footer Placeholder 4">
             <a:extLst xmlns:a="http://schemas.openxmlformats.org/drawingml/2006/main">
               <a:ext uri="{FF2B5EF4-FFF2-40B4-BE49-F238E27FC236}">
-                <a16:creationId xmlns:a16="http://schemas.microsoft.com/office/drawing/2014/main" id="{BA613283-A39B-426A-A420-21490AEBED5E}"/>
+                <a16:creationId xmlns:a16="http://schemas.microsoft.com/office/drawing/2014/main" id="{0C3A41DC-A6D8-4D05-9B55-A0842A1A45B2}"/>
               </a:ext>
             </a:extLst>
           </p:cNvPr>
@@ -6109,7 +6559,7 @@
           <p:cNvPr id="6" name="Slide Number Placeholder 5">
             <a:extLst xmlns:a="http://schemas.openxmlformats.org/drawingml/2006/main">
               <a:ext uri="{FF2B5EF4-FFF2-40B4-BE49-F238E27FC236}">
-                <a16:creationId xmlns:a16="http://schemas.microsoft.com/office/drawing/2014/main" id="{5EDE4B4E-8C53-4265-8CA0-472020C80A43}"/>
+                <a16:creationId xmlns:a16="http://schemas.microsoft.com/office/drawing/2014/main" id="{EBFD9247-B9E8-456A-BBE7-7A5BCA3E98EA}"/>
               </a:ext>
             </a:extLst>
           </p:cNvPr>
@@ -6153,7 +6603,7 @@
           <p:cNvPr id="2" name="Vertical Title 1">
             <a:extLst xmlns:a="http://schemas.openxmlformats.org/drawingml/2006/main">
               <a:ext uri="{FF2B5EF4-FFF2-40B4-BE49-F238E27FC236}">
-                <a16:creationId xmlns:a16="http://schemas.microsoft.com/office/drawing/2014/main" id="{A4ADD386-7602-49BA-B28B-0F72F3115155}"/>
+                <a16:creationId xmlns:a16="http://schemas.microsoft.com/office/drawing/2014/main" id="{4FA94581-0588-420F-824E-7B8F611919EC}"/>
               </a:ext>
             </a:extLst>
           </p:cNvPr>
@@ -6185,7 +6635,7 @@
           <p:cNvPr id="3" name="Vertical Text Placeholder 2">
             <a:extLst xmlns:a="http://schemas.openxmlformats.org/drawingml/2006/main">
               <a:ext uri="{FF2B5EF4-FFF2-40B4-BE49-F238E27FC236}">
-                <a16:creationId xmlns:a16="http://schemas.microsoft.com/office/drawing/2014/main" id="{2FB12611-9FC2-4492-92B7-13E43283D1EA}"/>
+                <a16:creationId xmlns:a16="http://schemas.microsoft.com/office/drawing/2014/main" id="{C04CB861-0CA3-4946-9A0C-DDAFD29C6254}"/>
               </a:ext>
             </a:extLst>
           </p:cNvPr>
@@ -6252,7 +6702,7 @@
           <p:cNvPr id="4" name="Date Placeholder 3">
             <a:extLst xmlns:a="http://schemas.openxmlformats.org/drawingml/2006/main">
               <a:ext uri="{FF2B5EF4-FFF2-40B4-BE49-F238E27FC236}">
-                <a16:creationId xmlns:a16="http://schemas.microsoft.com/office/drawing/2014/main" id="{9433329A-62CB-4671-9364-466002601293}"/>
+                <a16:creationId xmlns:a16="http://schemas.microsoft.com/office/drawing/2014/main" id="{E37823B3-383D-4475-811C-607DBD9B8F48}"/>
               </a:ext>
             </a:extLst>
           </p:cNvPr>
@@ -6279,7 +6729,7 @@
           <p:cNvPr id="5" name="Footer Placeholder 4">
             <a:extLst xmlns:a="http://schemas.openxmlformats.org/drawingml/2006/main">
               <a:ext uri="{FF2B5EF4-FFF2-40B4-BE49-F238E27FC236}">
-                <a16:creationId xmlns:a16="http://schemas.microsoft.com/office/drawing/2014/main" id="{DF8985B1-5D2D-449A-BE4C-5A80A51EA1A3}"/>
+                <a16:creationId xmlns:a16="http://schemas.microsoft.com/office/drawing/2014/main" id="{47554406-DAF3-4D6C-BA19-F7172DAB4D7E}"/>
               </a:ext>
             </a:extLst>
           </p:cNvPr>
@@ -6302,7 +6752,7 @@
           <p:cNvPr id="6" name="Slide Number Placeholder 5">
             <a:extLst xmlns:a="http://schemas.openxmlformats.org/drawingml/2006/main">
               <a:ext uri="{FF2B5EF4-FFF2-40B4-BE49-F238E27FC236}">
-                <a16:creationId xmlns:a16="http://schemas.microsoft.com/office/drawing/2014/main" id="{C2192746-861D-4440-B62B-023491FD728B}"/>
+                <a16:creationId xmlns:a16="http://schemas.microsoft.com/office/drawing/2014/main" id="{44CD0DF0-2BCF-4D3B-A2D6-BBCDB863E222}"/>
               </a:ext>
             </a:extLst>
           </p:cNvPr>
@@ -6346,7 +6796,7 @@
           <p:cNvPr id="2" name="Title 1">
             <a:extLst xmlns:a="http://schemas.openxmlformats.org/drawingml/2006/main">
               <a:ext uri="{FF2B5EF4-FFF2-40B4-BE49-F238E27FC236}">
-                <a16:creationId xmlns:a16="http://schemas.microsoft.com/office/drawing/2014/main" id="{4AD08BA1-50DA-499D-8079-B1CCD97AC7C0}"/>
+                <a16:creationId xmlns:a16="http://schemas.microsoft.com/office/drawing/2014/main" id="{5EFDC888-B25D-4572-A707-9A18307713B7}"/>
               </a:ext>
             </a:extLst>
           </p:cNvPr>
@@ -6373,7 +6823,7 @@
           <p:cNvPr id="3" name="Content Placeholder 2">
             <a:extLst xmlns:a="http://schemas.openxmlformats.org/drawingml/2006/main">
               <a:ext uri="{FF2B5EF4-FFF2-40B4-BE49-F238E27FC236}">
-                <a16:creationId xmlns:a16="http://schemas.microsoft.com/office/drawing/2014/main" id="{32FFBCFB-0470-4A6E-B00D-94F6AA271D9A}"/>
+                <a16:creationId xmlns:a16="http://schemas.microsoft.com/office/drawing/2014/main" id="{821A4A95-00EA-4DA8-9ACB-1030E6C45AC2}"/>
               </a:ext>
             </a:extLst>
           </p:cNvPr>
@@ -6435,7 +6885,7 @@
           <p:cNvPr id="4" name="Date Placeholder 3">
             <a:extLst xmlns:a="http://schemas.openxmlformats.org/drawingml/2006/main">
               <a:ext uri="{FF2B5EF4-FFF2-40B4-BE49-F238E27FC236}">
-                <a16:creationId xmlns:a16="http://schemas.microsoft.com/office/drawing/2014/main" id="{36329996-702E-4FFF-A79B-D179E97A9FEC}"/>
+                <a16:creationId xmlns:a16="http://schemas.microsoft.com/office/drawing/2014/main" id="{3C937C25-4088-4086-8E6C-B8390BD61792}"/>
               </a:ext>
             </a:extLst>
           </p:cNvPr>
@@ -6462,7 +6912,7 @@
           <p:cNvPr id="5" name="Footer Placeholder 4">
             <a:extLst xmlns:a="http://schemas.openxmlformats.org/drawingml/2006/main">
               <a:ext uri="{FF2B5EF4-FFF2-40B4-BE49-F238E27FC236}">
-                <a16:creationId xmlns:a16="http://schemas.microsoft.com/office/drawing/2014/main" id="{A645E14D-F1EF-4B62-9945-8D05C5CDFBF1}"/>
+                <a16:creationId xmlns:a16="http://schemas.microsoft.com/office/drawing/2014/main" id="{13DB1AC7-E1F0-4734-861F-085E68963BA7}"/>
               </a:ext>
             </a:extLst>
           </p:cNvPr>
@@ -6485,7 +6935,7 @@
           <p:cNvPr id="6" name="Slide Number Placeholder 5">
             <a:extLst xmlns:a="http://schemas.openxmlformats.org/drawingml/2006/main">
               <a:ext uri="{FF2B5EF4-FFF2-40B4-BE49-F238E27FC236}">
-                <a16:creationId xmlns:a16="http://schemas.microsoft.com/office/drawing/2014/main" id="{3CE4D8D7-510F-42EA-A5A9-C5F9AEC55784}"/>
+                <a16:creationId xmlns:a16="http://schemas.microsoft.com/office/drawing/2014/main" id="{50967485-53F3-42EE-BE13-01294EEE7AC4}"/>
               </a:ext>
             </a:extLst>
           </p:cNvPr>
@@ -6529,7 +6979,7 @@
           <p:cNvPr id="2" name="Title 1">
             <a:extLst xmlns:a="http://schemas.openxmlformats.org/drawingml/2006/main">
               <a:ext uri="{FF2B5EF4-FFF2-40B4-BE49-F238E27FC236}">
-                <a16:creationId xmlns:a16="http://schemas.microsoft.com/office/drawing/2014/main" id="{5D663FD7-07A3-4AFB-BEA4-833A886921EA}"/>
+                <a16:creationId xmlns:a16="http://schemas.microsoft.com/office/drawing/2014/main" id="{442EBEE6-9D34-4941-B8AE-6ED0BC453FDA}"/>
               </a:ext>
             </a:extLst>
           </p:cNvPr>
@@ -6566,7 +7016,7 @@
           <p:cNvPr id="3" name="Text Placeholder 2">
             <a:extLst xmlns:a="http://schemas.openxmlformats.org/drawingml/2006/main">
               <a:ext uri="{FF2B5EF4-FFF2-40B4-BE49-F238E27FC236}">
-                <a16:creationId xmlns:a16="http://schemas.microsoft.com/office/drawing/2014/main" id="{FFBF151B-40E4-444C-97DA-509F1623FBFC}"/>
+                <a16:creationId xmlns:a16="http://schemas.microsoft.com/office/drawing/2014/main" id="{B655BB64-A638-4D7D-B1B8-B5CA2E942F67}"/>
               </a:ext>
             </a:extLst>
           </p:cNvPr>
@@ -6692,7 +7142,7 @@
           <p:cNvPr id="4" name="Date Placeholder 3">
             <a:extLst xmlns:a="http://schemas.openxmlformats.org/drawingml/2006/main">
               <a:ext uri="{FF2B5EF4-FFF2-40B4-BE49-F238E27FC236}">
-                <a16:creationId xmlns:a16="http://schemas.microsoft.com/office/drawing/2014/main" id="{AFB714A0-B279-44F5-A38D-F1F292772E1D}"/>
+                <a16:creationId xmlns:a16="http://schemas.microsoft.com/office/drawing/2014/main" id="{77ADB818-474E-4DD0-8708-6E23D0D1734E}"/>
               </a:ext>
             </a:extLst>
           </p:cNvPr>
@@ -6719,7 +7169,7 @@
           <p:cNvPr id="5" name="Footer Placeholder 4">
             <a:extLst xmlns:a="http://schemas.openxmlformats.org/drawingml/2006/main">
               <a:ext uri="{FF2B5EF4-FFF2-40B4-BE49-F238E27FC236}">
-                <a16:creationId xmlns:a16="http://schemas.microsoft.com/office/drawing/2014/main" id="{4E78F71C-6EBF-431F-9948-6653A4FD7241}"/>
+                <a16:creationId xmlns:a16="http://schemas.microsoft.com/office/drawing/2014/main" id="{154B9087-9680-4A8E-9E57-145B81D4C8EE}"/>
               </a:ext>
             </a:extLst>
           </p:cNvPr>
@@ -6742,7 +7192,7 @@
           <p:cNvPr id="6" name="Slide Number Placeholder 5">
             <a:extLst xmlns:a="http://schemas.openxmlformats.org/drawingml/2006/main">
               <a:ext uri="{FF2B5EF4-FFF2-40B4-BE49-F238E27FC236}">
-                <a16:creationId xmlns:a16="http://schemas.microsoft.com/office/drawing/2014/main" id="{39D2ED96-6D4E-4D55-BAA1-8E92CA478764}"/>
+                <a16:creationId xmlns:a16="http://schemas.microsoft.com/office/drawing/2014/main" id="{2E334050-D002-4B48-9881-8E8CF3E0DDFB}"/>
               </a:ext>
             </a:extLst>
           </p:cNvPr>
@@ -6786,7 +7236,7 @@
           <p:cNvPr id="2" name="Title 1">
             <a:extLst xmlns:a="http://schemas.openxmlformats.org/drawingml/2006/main">
               <a:ext uri="{FF2B5EF4-FFF2-40B4-BE49-F238E27FC236}">
-                <a16:creationId xmlns:a16="http://schemas.microsoft.com/office/drawing/2014/main" id="{E4B209B5-CD5B-4DFE-9583-D1604C5B1AAA}"/>
+                <a16:creationId xmlns:a16="http://schemas.microsoft.com/office/drawing/2014/main" id="{02E3717C-A3DC-4F09-9A46-E13BBA6047C1}"/>
               </a:ext>
             </a:extLst>
           </p:cNvPr>
@@ -6813,7 +7263,7 @@
           <p:cNvPr id="3" name="Content Placeholder 2">
             <a:extLst xmlns:a="http://schemas.openxmlformats.org/drawingml/2006/main">
               <a:ext uri="{FF2B5EF4-FFF2-40B4-BE49-F238E27FC236}">
-                <a16:creationId xmlns:a16="http://schemas.microsoft.com/office/drawing/2014/main" id="{5DAA895D-1E2A-4D77-9F3E-65D30392A908}"/>
+                <a16:creationId xmlns:a16="http://schemas.microsoft.com/office/drawing/2014/main" id="{876B108A-5001-4616-B974-15B2BB644DA5}"/>
               </a:ext>
             </a:extLst>
           </p:cNvPr>
@@ -6917,7 +7367,7 @@
           <p:cNvPr id="4" name="Content Placeholder 3">
             <a:extLst xmlns:a="http://schemas.openxmlformats.org/drawingml/2006/main">
               <a:ext uri="{FF2B5EF4-FFF2-40B4-BE49-F238E27FC236}">
-                <a16:creationId xmlns:a16="http://schemas.microsoft.com/office/drawing/2014/main" id="{4A1DF213-B8C9-4D6E-B1E7-35942F3CAC13}"/>
+                <a16:creationId xmlns:a16="http://schemas.microsoft.com/office/drawing/2014/main" id="{EB3304C6-F295-42AC-B049-F250ECBB414B}"/>
               </a:ext>
             </a:extLst>
           </p:cNvPr>
@@ -7021,7 +7471,7 @@
           <p:cNvPr id="5" name="Date Placeholder 4">
             <a:extLst xmlns:a="http://schemas.openxmlformats.org/drawingml/2006/main">
               <a:ext uri="{FF2B5EF4-FFF2-40B4-BE49-F238E27FC236}">
-                <a16:creationId xmlns:a16="http://schemas.microsoft.com/office/drawing/2014/main" id="{B5429068-EDBF-45A1-AF5D-E8071AFC70FF}"/>
+                <a16:creationId xmlns:a16="http://schemas.microsoft.com/office/drawing/2014/main" id="{3CAE1EBF-7B5E-427F-AD22-1A3AB0EBE975}"/>
               </a:ext>
             </a:extLst>
           </p:cNvPr>
@@ -7048,7 +7498,7 @@
           <p:cNvPr id="6" name="Footer Placeholder 5">
             <a:extLst xmlns:a="http://schemas.openxmlformats.org/drawingml/2006/main">
               <a:ext uri="{FF2B5EF4-FFF2-40B4-BE49-F238E27FC236}">
-                <a16:creationId xmlns:a16="http://schemas.microsoft.com/office/drawing/2014/main" id="{9A83A1EF-25C2-4884-8FE9-682669C62CFA}"/>
+                <a16:creationId xmlns:a16="http://schemas.microsoft.com/office/drawing/2014/main" id="{EFDB5ADC-C317-4086-981A-09764BDA5CAD}"/>
               </a:ext>
             </a:extLst>
           </p:cNvPr>
@@ -7071,7 +7521,7 @@
           <p:cNvPr id="7" name="Slide Number Placeholder 6">
             <a:extLst xmlns:a="http://schemas.openxmlformats.org/drawingml/2006/main">
               <a:ext uri="{FF2B5EF4-FFF2-40B4-BE49-F238E27FC236}">
-                <a16:creationId xmlns:a16="http://schemas.microsoft.com/office/drawing/2014/main" id="{FD891F80-2EDA-4A98-A490-51C31FD224A4}"/>
+                <a16:creationId xmlns:a16="http://schemas.microsoft.com/office/drawing/2014/main" id="{975F2662-F97C-4BFE-8551-0445137DECEB}"/>
               </a:ext>
             </a:extLst>
           </p:cNvPr>
@@ -7115,7 +7565,7 @@
           <p:cNvPr id="2" name="Title 1">
             <a:extLst xmlns:a="http://schemas.openxmlformats.org/drawingml/2006/main">
               <a:ext uri="{FF2B5EF4-FFF2-40B4-BE49-F238E27FC236}">
-                <a16:creationId xmlns:a16="http://schemas.microsoft.com/office/drawing/2014/main" id="{2A0E9607-A5D4-498B-8910-74C18991F0C1}"/>
+                <a16:creationId xmlns:a16="http://schemas.microsoft.com/office/drawing/2014/main" id="{1C095B21-F6CC-41AC-9908-EBEE9884AB6B}"/>
               </a:ext>
             </a:extLst>
           </p:cNvPr>
@@ -7147,7 +7597,7 @@
           <p:cNvPr id="3" name="Text Placeholder 2">
             <a:extLst xmlns:a="http://schemas.openxmlformats.org/drawingml/2006/main">
               <a:ext uri="{FF2B5EF4-FFF2-40B4-BE49-F238E27FC236}">
-                <a16:creationId xmlns:a16="http://schemas.microsoft.com/office/drawing/2014/main" id="{1441C52F-C96A-4A45-8467-61F3E5BA5169}"/>
+                <a16:creationId xmlns:a16="http://schemas.microsoft.com/office/drawing/2014/main" id="{4FBEAC1B-F77C-48BE-BC93-9930A23915DA}"/>
               </a:ext>
             </a:extLst>
           </p:cNvPr>
@@ -7219,7 +7669,7 @@
           <p:cNvPr id="4" name="Content Placeholder 3">
             <a:extLst xmlns:a="http://schemas.openxmlformats.org/drawingml/2006/main">
               <a:ext uri="{FF2B5EF4-FFF2-40B4-BE49-F238E27FC236}">
-                <a16:creationId xmlns:a16="http://schemas.microsoft.com/office/drawing/2014/main" id="{CD947AB7-F4EC-4AB9-A8DD-15D34A5BFDBE}"/>
+                <a16:creationId xmlns:a16="http://schemas.microsoft.com/office/drawing/2014/main" id="{FA8597FB-456F-448E-895D-9D1AD485991A}"/>
               </a:ext>
             </a:extLst>
           </p:cNvPr>
@@ -7323,7 +7773,7 @@
           <p:cNvPr id="5" name="Text Placeholder 4">
             <a:extLst xmlns:a="http://schemas.openxmlformats.org/drawingml/2006/main">
               <a:ext uri="{FF2B5EF4-FFF2-40B4-BE49-F238E27FC236}">
-                <a16:creationId xmlns:a16="http://schemas.microsoft.com/office/drawing/2014/main" id="{2D0FE8AD-2C12-4DC9-A73E-F3B97004A920}"/>
+                <a16:creationId xmlns:a16="http://schemas.microsoft.com/office/drawing/2014/main" id="{34354344-ED16-4330-A9F9-5E5712CEA708}"/>
               </a:ext>
             </a:extLst>
           </p:cNvPr>
@@ -7395,7 +7845,7 @@
           <p:cNvPr id="6" name="Content Placeholder 5">
             <a:extLst xmlns:a="http://schemas.openxmlformats.org/drawingml/2006/main">
               <a:ext uri="{FF2B5EF4-FFF2-40B4-BE49-F238E27FC236}">
-                <a16:creationId xmlns:a16="http://schemas.microsoft.com/office/drawing/2014/main" id="{FBC62794-F415-4343-B239-DD762E6611D1}"/>
+                <a16:creationId xmlns:a16="http://schemas.microsoft.com/office/drawing/2014/main" id="{1EB97DBF-D021-4499-BB01-1972E2128319}"/>
               </a:ext>
             </a:extLst>
           </p:cNvPr>
@@ -7499,7 +7949,7 @@
           <p:cNvPr id="7" name="Date Placeholder 6">
             <a:extLst xmlns:a="http://schemas.openxmlformats.org/drawingml/2006/main">
               <a:ext uri="{FF2B5EF4-FFF2-40B4-BE49-F238E27FC236}">
-                <a16:creationId xmlns:a16="http://schemas.microsoft.com/office/drawing/2014/main" id="{CE92EE15-F47B-4D07-9574-E31C5C7EF9AE}"/>
+                <a16:creationId xmlns:a16="http://schemas.microsoft.com/office/drawing/2014/main" id="{7BBFF7E1-1172-4D62-A813-98F879C1C9BB}"/>
               </a:ext>
             </a:extLst>
           </p:cNvPr>
@@ -7526,7 +7976,7 @@
           <p:cNvPr id="8" name="Footer Placeholder 7">
             <a:extLst xmlns:a="http://schemas.openxmlformats.org/drawingml/2006/main">
               <a:ext uri="{FF2B5EF4-FFF2-40B4-BE49-F238E27FC236}">
-                <a16:creationId xmlns:a16="http://schemas.microsoft.com/office/drawing/2014/main" id="{648DBBF5-7259-4C92-858B-FCB0073149EE}"/>
+                <a16:creationId xmlns:a16="http://schemas.microsoft.com/office/drawing/2014/main" id="{F8946FCB-F0E6-46D2-A713-3694368F312E}"/>
               </a:ext>
             </a:extLst>
           </p:cNvPr>
@@ -7549,7 +7999,7 @@
           <p:cNvPr id="9" name="Slide Number Placeholder 8">
             <a:extLst xmlns:a="http://schemas.openxmlformats.org/drawingml/2006/main">
               <a:ext uri="{FF2B5EF4-FFF2-40B4-BE49-F238E27FC236}">
-                <a16:creationId xmlns:a16="http://schemas.microsoft.com/office/drawing/2014/main" id="{DEBB2223-99C0-4222-9B50-8334C5212069}"/>
+                <a16:creationId xmlns:a16="http://schemas.microsoft.com/office/drawing/2014/main" id="{B7DD6585-9465-4FD0-9247-F6E0D005F42B}"/>
               </a:ext>
             </a:extLst>
           </p:cNvPr>
@@ -7593,7 +8043,7 @@
           <p:cNvPr id="2" name="Title 1">
             <a:extLst xmlns:a="http://schemas.openxmlformats.org/drawingml/2006/main">
               <a:ext uri="{FF2B5EF4-FFF2-40B4-BE49-F238E27FC236}">
-                <a16:creationId xmlns:a16="http://schemas.microsoft.com/office/drawing/2014/main" id="{DC9DDD48-DED3-465E-8AB1-E072CE531F28}"/>
+                <a16:creationId xmlns:a16="http://schemas.microsoft.com/office/drawing/2014/main" id="{602E26FD-BA0B-4B7B-B5AC-63A04B45D6FC}"/>
               </a:ext>
             </a:extLst>
           </p:cNvPr>
@@ -7620,7 +8070,7 @@
           <p:cNvPr id="3" name="Date Placeholder 2">
             <a:extLst xmlns:a="http://schemas.openxmlformats.org/drawingml/2006/main">
               <a:ext uri="{FF2B5EF4-FFF2-40B4-BE49-F238E27FC236}">
-                <a16:creationId xmlns:a16="http://schemas.microsoft.com/office/drawing/2014/main" id="{B3491764-0BC4-483D-809D-CBAD0DB5426D}"/>
+                <a16:creationId xmlns:a16="http://schemas.microsoft.com/office/drawing/2014/main" id="{D9D91387-5763-457E-BB46-A0CCBB4F7583}"/>
               </a:ext>
             </a:extLst>
           </p:cNvPr>
@@ -7647,7 +8097,7 @@
           <p:cNvPr id="4" name="Footer Placeholder 3">
             <a:extLst xmlns:a="http://schemas.openxmlformats.org/drawingml/2006/main">
               <a:ext uri="{FF2B5EF4-FFF2-40B4-BE49-F238E27FC236}">
-                <a16:creationId xmlns:a16="http://schemas.microsoft.com/office/drawing/2014/main" id="{1A7F2C13-2609-4D5D-B285-3DBE29A013AA}"/>
+                <a16:creationId xmlns:a16="http://schemas.microsoft.com/office/drawing/2014/main" id="{1F00CA6B-10BE-4F4E-ADB0-D89FA5203860}"/>
               </a:ext>
             </a:extLst>
           </p:cNvPr>
@@ -7670,7 +8120,7 @@
           <p:cNvPr id="5" name="Slide Number Placeholder 4">
             <a:extLst xmlns:a="http://schemas.openxmlformats.org/drawingml/2006/main">
               <a:ext uri="{FF2B5EF4-FFF2-40B4-BE49-F238E27FC236}">
-                <a16:creationId xmlns:a16="http://schemas.microsoft.com/office/drawing/2014/main" id="{B5DCE662-09FF-4DAE-9F43-E1FB22875891}"/>
+                <a16:creationId xmlns:a16="http://schemas.microsoft.com/office/drawing/2014/main" id="{92AA5434-9882-4696-A817-F5961F75C25D}"/>
               </a:ext>
             </a:extLst>
           </p:cNvPr>
@@ -7714,7 +8164,7 @@
           <p:cNvPr id="2" name="Date Placeholder 1">
             <a:extLst xmlns:a="http://schemas.openxmlformats.org/drawingml/2006/main">
               <a:ext uri="{FF2B5EF4-FFF2-40B4-BE49-F238E27FC236}">
-                <a16:creationId xmlns:a16="http://schemas.microsoft.com/office/drawing/2014/main" id="{E1A94698-17B5-4A30-B82B-B84CB539E180}"/>
+                <a16:creationId xmlns:a16="http://schemas.microsoft.com/office/drawing/2014/main" id="{900729E0-BC84-45BE-A78B-CF191B5D845E}"/>
               </a:ext>
             </a:extLst>
           </p:cNvPr>
@@ -7741,7 +8191,7 @@
           <p:cNvPr id="3" name="Footer Placeholder 2">
             <a:extLst xmlns:a="http://schemas.openxmlformats.org/drawingml/2006/main">
               <a:ext uri="{FF2B5EF4-FFF2-40B4-BE49-F238E27FC236}">
-                <a16:creationId xmlns:a16="http://schemas.microsoft.com/office/drawing/2014/main" id="{F0AC8077-4C60-4AFB-A0F6-643AC791F5EF}"/>
+                <a16:creationId xmlns:a16="http://schemas.microsoft.com/office/drawing/2014/main" id="{1DCA2720-552B-42C7-9AF8-E68F145D5FD7}"/>
               </a:ext>
             </a:extLst>
           </p:cNvPr>
@@ -7764,7 +8214,7 @@
           <p:cNvPr id="4" name="Slide Number Placeholder 3">
             <a:extLst xmlns:a="http://schemas.openxmlformats.org/drawingml/2006/main">
               <a:ext uri="{FF2B5EF4-FFF2-40B4-BE49-F238E27FC236}">
-                <a16:creationId xmlns:a16="http://schemas.microsoft.com/office/drawing/2014/main" id="{F80A796B-EFF2-4928-80DC-77F852577ED8}"/>
+                <a16:creationId xmlns:a16="http://schemas.microsoft.com/office/drawing/2014/main" id="{DEFA0BE9-48D7-4A7A-B418-9279F65FEF0B}"/>
               </a:ext>
             </a:extLst>
           </p:cNvPr>
@@ -7808,7 +8258,7 @@
           <p:cNvPr id="2" name="Title 1">
             <a:extLst xmlns:a="http://schemas.openxmlformats.org/drawingml/2006/main">
               <a:ext uri="{FF2B5EF4-FFF2-40B4-BE49-F238E27FC236}">
-                <a16:creationId xmlns:a16="http://schemas.microsoft.com/office/drawing/2014/main" id="{CF6BE994-EE10-49F0-AC43-3D88AECB0B12}"/>
+                <a16:creationId xmlns:a16="http://schemas.microsoft.com/office/drawing/2014/main" id="{9EF73731-5F66-4F9B-AFC4-4485A82683C7}"/>
               </a:ext>
             </a:extLst>
           </p:cNvPr>
@@ -7845,7 +8295,7 @@
           <p:cNvPr id="3" name="Content Placeholder 2">
             <a:extLst xmlns:a="http://schemas.openxmlformats.org/drawingml/2006/main">
               <a:ext uri="{FF2B5EF4-FFF2-40B4-BE49-F238E27FC236}">
-                <a16:creationId xmlns:a16="http://schemas.microsoft.com/office/drawing/2014/main" id="{1EACB8B2-DA0A-4C24-A84B-1478006B2165}"/>
+                <a16:creationId xmlns:a16="http://schemas.microsoft.com/office/drawing/2014/main" id="{CFB9D3D7-A2F5-4B20-93B2-9337E2D4AFF3}"/>
               </a:ext>
             </a:extLst>
           </p:cNvPr>
@@ -7949,7 +8399,7 @@
           <p:cNvPr id="4" name="Text Placeholder 3">
             <a:extLst xmlns:a="http://schemas.openxmlformats.org/drawingml/2006/main">
               <a:ext uri="{FF2B5EF4-FFF2-40B4-BE49-F238E27FC236}">
-                <a16:creationId xmlns:a16="http://schemas.microsoft.com/office/drawing/2014/main" id="{CB172D62-2396-46A4-86C4-C207796BB4E2}"/>
+                <a16:creationId xmlns:a16="http://schemas.microsoft.com/office/drawing/2014/main" id="{5DE7EF02-DAF8-4479-8921-54C1C0A660D8}"/>
               </a:ext>
             </a:extLst>
           </p:cNvPr>
@@ -8021,7 +8471,7 @@
           <p:cNvPr id="5" name="Date Placeholder 4">
             <a:extLst xmlns:a="http://schemas.openxmlformats.org/drawingml/2006/main">
               <a:ext uri="{FF2B5EF4-FFF2-40B4-BE49-F238E27FC236}">
-                <a16:creationId xmlns:a16="http://schemas.microsoft.com/office/drawing/2014/main" id="{90A013F0-DE83-4EF9-A637-3B64C722E413}"/>
+                <a16:creationId xmlns:a16="http://schemas.microsoft.com/office/drawing/2014/main" id="{0AF68BCB-B077-4062-8C53-41E7673584FB}"/>
               </a:ext>
             </a:extLst>
           </p:cNvPr>
@@ -8048,7 +8498,7 @@
           <p:cNvPr id="6" name="Footer Placeholder 5">
             <a:extLst xmlns:a="http://schemas.openxmlformats.org/drawingml/2006/main">
               <a:ext uri="{FF2B5EF4-FFF2-40B4-BE49-F238E27FC236}">
-                <a16:creationId xmlns:a16="http://schemas.microsoft.com/office/drawing/2014/main" id="{767FF579-0953-4107-8B44-F69513E01A62}"/>
+                <a16:creationId xmlns:a16="http://schemas.microsoft.com/office/drawing/2014/main" id="{951F8356-F279-4E4E-BD5F-6A02F7EE810E}"/>
               </a:ext>
             </a:extLst>
           </p:cNvPr>
@@ -8071,7 +8521,7 @@
           <p:cNvPr id="7" name="Slide Number Placeholder 6">
             <a:extLst xmlns:a="http://schemas.openxmlformats.org/drawingml/2006/main">
               <a:ext uri="{FF2B5EF4-FFF2-40B4-BE49-F238E27FC236}">
-                <a16:creationId xmlns:a16="http://schemas.microsoft.com/office/drawing/2014/main" id="{F4D1BAB0-CC06-4264-8ED2-96FCC176109C}"/>
+                <a16:creationId xmlns:a16="http://schemas.microsoft.com/office/drawing/2014/main" id="{EFBD09BE-14A2-4FD4-A278-AA75276AA207}"/>
               </a:ext>
             </a:extLst>
           </p:cNvPr>
@@ -8115,7 +8565,7 @@
           <p:cNvPr id="2" name="Title 1">
             <a:extLst xmlns:a="http://schemas.openxmlformats.org/drawingml/2006/main">
               <a:ext uri="{FF2B5EF4-FFF2-40B4-BE49-F238E27FC236}">
-                <a16:creationId xmlns:a16="http://schemas.microsoft.com/office/drawing/2014/main" id="{EC30FC71-3796-4EE2-81ED-BFB57CC120AA}"/>
+                <a16:creationId xmlns:a16="http://schemas.microsoft.com/office/drawing/2014/main" id="{943363D8-7960-4442-9A08-5D793C58F626}"/>
               </a:ext>
             </a:extLst>
           </p:cNvPr>
@@ -8152,7 +8602,7 @@
           <p:cNvPr id="3" name="Picture Placeholder 2">
             <a:extLst xmlns:a="http://schemas.openxmlformats.org/drawingml/2006/main">
               <a:ext uri="{FF2B5EF4-FFF2-40B4-BE49-F238E27FC236}">
-                <a16:creationId xmlns:a16="http://schemas.microsoft.com/office/drawing/2014/main" id="{48218A65-AB0D-4BDD-9BE5-4AE73A9F63DF}"/>
+                <a16:creationId xmlns:a16="http://schemas.microsoft.com/office/drawing/2014/main" id="{F30A2087-7C5E-43C7-A635-7BB3C85E15EB}"/>
               </a:ext>
             </a:extLst>
           </p:cNvPr>
@@ -8217,7 +8667,7 @@
           <p:cNvPr id="4" name="Text Placeholder 3">
             <a:extLst xmlns:a="http://schemas.openxmlformats.org/drawingml/2006/main">
               <a:ext uri="{FF2B5EF4-FFF2-40B4-BE49-F238E27FC236}">
-                <a16:creationId xmlns:a16="http://schemas.microsoft.com/office/drawing/2014/main" id="{3E9E5046-C68A-48FD-A0AD-3339924A7939}"/>
+                <a16:creationId xmlns:a16="http://schemas.microsoft.com/office/drawing/2014/main" id="{6989C1CF-203E-4D0C-8C0D-6BE7177B9295}"/>
               </a:ext>
             </a:extLst>
           </p:cNvPr>
@@ -8289,7 +8739,7 @@
           <p:cNvPr id="5" name="Date Placeholder 4">
             <a:extLst xmlns:a="http://schemas.openxmlformats.org/drawingml/2006/main">
               <a:ext uri="{FF2B5EF4-FFF2-40B4-BE49-F238E27FC236}">
-                <a16:creationId xmlns:a16="http://schemas.microsoft.com/office/drawing/2014/main" id="{6F90ECC2-1E60-4194-8516-F6324C86C9D4}"/>
+                <a16:creationId xmlns:a16="http://schemas.microsoft.com/office/drawing/2014/main" id="{2A77BDAA-84A7-465E-A99D-6D33973C99C5}"/>
               </a:ext>
             </a:extLst>
           </p:cNvPr>
@@ -8316,7 +8766,7 @@
           <p:cNvPr id="6" name="Footer Placeholder 5">
             <a:extLst xmlns:a="http://schemas.openxmlformats.org/drawingml/2006/main">
               <a:ext uri="{FF2B5EF4-FFF2-40B4-BE49-F238E27FC236}">
-                <a16:creationId xmlns:a16="http://schemas.microsoft.com/office/drawing/2014/main" id="{3CE6BC4D-4EB6-4222-A6F7-F70C6E975B40}"/>
+                <a16:creationId xmlns:a16="http://schemas.microsoft.com/office/drawing/2014/main" id="{AECE510E-4511-4519-825A-BEBF8A3B6B57}"/>
               </a:ext>
             </a:extLst>
           </p:cNvPr>
@@ -8339,7 +8789,7 @@
           <p:cNvPr id="7" name="Slide Number Placeholder 6">
             <a:extLst xmlns:a="http://schemas.openxmlformats.org/drawingml/2006/main">
               <a:ext uri="{FF2B5EF4-FFF2-40B4-BE49-F238E27FC236}">
-                <a16:creationId xmlns:a16="http://schemas.microsoft.com/office/drawing/2014/main" id="{215DC537-4321-46DF-B3E0-6DD45E23A84C}"/>
+                <a16:creationId xmlns:a16="http://schemas.microsoft.com/office/drawing/2014/main" id="{0DB793D3-2A29-4119-BBF8-20BA176B45DB}"/>
               </a:ext>
             </a:extLst>
           </p:cNvPr>
@@ -8388,7 +8838,7 @@
           <p:cNvPr id="2" name="Title Placeholder 1">
             <a:extLst xmlns:a="http://schemas.openxmlformats.org/drawingml/2006/main">
               <a:ext uri="{FF2B5EF4-FFF2-40B4-BE49-F238E27FC236}">
-                <a16:creationId xmlns:a16="http://schemas.microsoft.com/office/drawing/2014/main" id="{5AA7D070-B0B0-44A4-9C7F-1B932FE9D1CF}"/>
+                <a16:creationId xmlns:a16="http://schemas.microsoft.com/office/drawing/2014/main" id="{A892BB6A-ACD6-4546-A51B-17B22B87753D}"/>
               </a:ext>
             </a:extLst>
           </p:cNvPr>
@@ -8425,7 +8875,7 @@
           <p:cNvPr id="3" name="Text Placeholder 2">
             <a:extLst xmlns:a="http://schemas.openxmlformats.org/drawingml/2006/main">
               <a:ext uri="{FF2B5EF4-FFF2-40B4-BE49-F238E27FC236}">
-                <a16:creationId xmlns:a16="http://schemas.microsoft.com/office/drawing/2014/main" id="{FF57E15E-5B52-491E-830F-6517A3880C0C}"/>
+                <a16:creationId xmlns:a16="http://schemas.microsoft.com/office/drawing/2014/main" id="{8D20B28D-990B-422C-A4FC-7077CCB7E70C}"/>
               </a:ext>
             </a:extLst>
           </p:cNvPr>
@@ -8497,7 +8947,7 @@
           <p:cNvPr id="4" name="Date Placeholder 3">
             <a:extLst xmlns:a="http://schemas.openxmlformats.org/drawingml/2006/main">
               <a:ext uri="{FF2B5EF4-FFF2-40B4-BE49-F238E27FC236}">
-                <a16:creationId xmlns:a16="http://schemas.microsoft.com/office/drawing/2014/main" id="{2FC65436-960B-4309-B4A3-1B15064059B4}"/>
+                <a16:creationId xmlns:a16="http://schemas.microsoft.com/office/drawing/2014/main" id="{3E614040-4227-4F5F-B3FC-DB8B5DB78A01}"/>
               </a:ext>
             </a:extLst>
           </p:cNvPr>
@@ -8543,7 +8993,7 @@
           <p:cNvPr id="5" name="Footer Placeholder 4">
             <a:extLst xmlns:a="http://schemas.openxmlformats.org/drawingml/2006/main">
               <a:ext uri="{FF2B5EF4-FFF2-40B4-BE49-F238E27FC236}">
-                <a16:creationId xmlns:a16="http://schemas.microsoft.com/office/drawing/2014/main" id="{C0B70A38-4F0F-40AC-A4EF-3F25D56EA34B}"/>
+                <a16:creationId xmlns:a16="http://schemas.microsoft.com/office/drawing/2014/main" id="{7D67ADC7-7925-456B-AC21-2DA93483C596}"/>
               </a:ext>
             </a:extLst>
           </p:cNvPr>
@@ -8585,7 +9035,7 @@
           <p:cNvPr id="6" name="Slide Number Placeholder 5">
             <a:extLst xmlns:a="http://schemas.openxmlformats.org/drawingml/2006/main">
               <a:ext uri="{FF2B5EF4-FFF2-40B4-BE49-F238E27FC236}">
-                <a16:creationId xmlns:a16="http://schemas.microsoft.com/office/drawing/2014/main" id="{260D2142-8FD6-40BE-8CC1-A50632C86AAC}"/>
+                <a16:creationId xmlns:a16="http://schemas.microsoft.com/office/drawing/2014/main" id="{FDAE510F-171E-487F-81D5-84DFC4C3780C}"/>
               </a:ext>
             </a:extLst>
           </p:cNvPr>
@@ -8630,17 +9080,17 @@
   </p:cSld>
   <p:clrMap bg1="lt1" tx1="dk1" bg2="lt2" tx2="dk2" accent1="accent1" accent2="accent2" accent3="accent3" accent4="accent4" accent5="accent5" accent6="accent6" hlink="hlink" folHlink="folHlink"/>
   <p:sldLayoutIdLst>
-    <p:sldLayoutId xmlns:r="http://schemas.openxmlformats.org/officeDocument/2006/relationships" id="2147483649" r:id="R17ad1cbb81424fe8"/>
-    <p:sldLayoutId xmlns:r="http://schemas.openxmlformats.org/officeDocument/2006/relationships" id="2147483650" r:id="Re924789d07924db6"/>
-    <p:sldLayoutId xmlns:r="http://schemas.openxmlformats.org/officeDocument/2006/relationships" id="2147483651" r:id="R66e360aa5be44571"/>
-    <p:sldLayoutId xmlns:r="http://schemas.openxmlformats.org/officeDocument/2006/relationships" id="2147483652" r:id="Reabdfc5fa717410a"/>
-    <p:sldLayoutId xmlns:r="http://schemas.openxmlformats.org/officeDocument/2006/relationships" id="2147483653" r:id="Rcc0b2919dd244f33"/>
-    <p:sldLayoutId xmlns:r="http://schemas.openxmlformats.org/officeDocument/2006/relationships" id="2147483654" r:id="R36f81dfde74c4c3d"/>
-    <p:sldLayoutId xmlns:r="http://schemas.openxmlformats.org/officeDocument/2006/relationships" id="2147483655" r:id="R11ebaf6dd901459f"/>
-    <p:sldLayoutId xmlns:r="http://schemas.openxmlformats.org/officeDocument/2006/relationships" id="2147483656" r:id="R73bb7665652842ef"/>
-    <p:sldLayoutId xmlns:r="http://schemas.openxmlformats.org/officeDocument/2006/relationships" id="2147483657" r:id="R0e487d3a018c4db7"/>
-    <p:sldLayoutId xmlns:r="http://schemas.openxmlformats.org/officeDocument/2006/relationships" id="2147483658" r:id="R168b0b68b4ce4bb1"/>
-    <p:sldLayoutId xmlns:r="http://schemas.openxmlformats.org/officeDocument/2006/relationships" id="2147483659" r:id="Rd674687fcca84749"/>
+    <p:sldLayoutId xmlns:r="http://schemas.openxmlformats.org/officeDocument/2006/relationships" id="2147483649" r:id="R0787af64429648de"/>
+    <p:sldLayoutId xmlns:r="http://schemas.openxmlformats.org/officeDocument/2006/relationships" id="2147483650" r:id="R81e408e5e3034793"/>
+    <p:sldLayoutId xmlns:r="http://schemas.openxmlformats.org/officeDocument/2006/relationships" id="2147483651" r:id="R067a12a0a2714f0f"/>
+    <p:sldLayoutId xmlns:r="http://schemas.openxmlformats.org/officeDocument/2006/relationships" id="2147483652" r:id="R81ceb9891fbb4811"/>
+    <p:sldLayoutId xmlns:r="http://schemas.openxmlformats.org/officeDocument/2006/relationships" id="2147483653" r:id="R06c9a384875142b7"/>
+    <p:sldLayoutId xmlns:r="http://schemas.openxmlformats.org/officeDocument/2006/relationships" id="2147483654" r:id="Rb6999fbad4f44cd4"/>
+    <p:sldLayoutId xmlns:r="http://schemas.openxmlformats.org/officeDocument/2006/relationships" id="2147483655" r:id="Rc3ddfe3f824d4ea1"/>
+    <p:sldLayoutId xmlns:r="http://schemas.openxmlformats.org/officeDocument/2006/relationships" id="2147483656" r:id="Rea86b291576c4638"/>
+    <p:sldLayoutId xmlns:r="http://schemas.openxmlformats.org/officeDocument/2006/relationships" id="2147483657" r:id="R7efc08399eaf45d4"/>
+    <p:sldLayoutId xmlns:r="http://schemas.openxmlformats.org/officeDocument/2006/relationships" id="2147483658" r:id="Raf50f63f3b834537"/>
+    <p:sldLayoutId xmlns:r="http://schemas.openxmlformats.org/officeDocument/2006/relationships" id="2147483659" r:id="R677e31f5503343c0"/>
   </p:sldLayoutIdLst>
   <p:txStyles>
     <p:titleStyle>
@@ -9193,7 +9643,7 @@
           <p:cNvPr id="2" name="Rectangle 1">
             <a:extLst xmlns:a="http://schemas.openxmlformats.org/drawingml/2006/main">
               <a:ext uri="{FF2B5EF4-FFF2-40B4-BE49-F238E27FC236}">
-                <a16:creationId xmlns:a16="http://schemas.microsoft.com/office/drawing/2014/main" id="{265B9334-A38F-4CAA-90FB-CE888398BA7B}"/>
+                <a16:creationId xmlns:a16="http://schemas.microsoft.com/office/drawing/2014/main" id="{69237678-840A-4521-A514-1880E79C088E}"/>
               </a:ext>
             </a:extLst>
           </p:cNvPr>
@@ -9248,7 +9698,7 @@
           <p:cNvPr id="3" name="TextBox 2">
             <a:extLst xmlns:a="http://schemas.openxmlformats.org/drawingml/2006/main">
               <a:ext uri="{FF2B5EF4-FFF2-40B4-BE49-F238E27FC236}">
-                <a16:creationId xmlns:a16="http://schemas.microsoft.com/office/drawing/2014/main" id="{FC8D0A31-3A7C-440F-85AF-C73DB433695C}"/>
+                <a16:creationId xmlns:a16="http://schemas.microsoft.com/office/drawing/2014/main" id="{7AA8AB50-756B-412A-B022-6B85D5BC315E}"/>
               </a:ext>
             </a:extLst>
           </p:cNvPr>
@@ -9295,7 +9745,7 @@
           <p:cNvPr id="4" name="TextBox 3">
             <a:extLst xmlns:a="http://schemas.openxmlformats.org/drawingml/2006/main">
               <a:ext uri="{FF2B5EF4-FFF2-40B4-BE49-F238E27FC236}">
-                <a16:creationId xmlns:a16="http://schemas.microsoft.com/office/drawing/2014/main" id="{27A91752-4907-47F3-8590-58AF1C7D02A7}"/>
+                <a16:creationId xmlns:a16="http://schemas.microsoft.com/office/drawing/2014/main" id="{3BBDED82-0949-4A12-869B-31908EE1E93E}"/>
               </a:ext>
             </a:extLst>
           </p:cNvPr>
@@ -9343,7 +9793,7 @@
           <p:cNvPr id="5" name="TextBox 4">
             <a:extLst xmlns:a="http://schemas.openxmlformats.org/drawingml/2006/main">
               <a:ext uri="{FF2B5EF4-FFF2-40B4-BE49-F238E27FC236}">
-                <a16:creationId xmlns:a16="http://schemas.microsoft.com/office/drawing/2014/main" id="{D48CD8E1-9E6E-46D4-A1FA-83FF0A23645B}"/>
+                <a16:creationId xmlns:a16="http://schemas.microsoft.com/office/drawing/2014/main" id="{9F17BBCA-F14B-4A7E-BE5A-88B9C01969CF}"/>
               </a:ext>
             </a:extLst>
           </p:cNvPr>
@@ -9390,7 +9840,7 @@
           <p:cNvPr id="6" name="Rectangle 5">
             <a:extLst xmlns:a="http://schemas.openxmlformats.org/drawingml/2006/main">
               <a:ext uri="{FF2B5EF4-FFF2-40B4-BE49-F238E27FC236}">
-                <a16:creationId xmlns:a16="http://schemas.microsoft.com/office/drawing/2014/main" id="{A33791A1-4858-47CA-AEB5-F22AFB83CE97}"/>
+                <a16:creationId xmlns:a16="http://schemas.microsoft.com/office/drawing/2014/main" id="{ED0C415F-B067-4955-BF4E-9F1D5395C478}"/>
               </a:ext>
             </a:extLst>
           </p:cNvPr>
@@ -9445,7 +9895,7 @@
           <p:cNvPr id="7" name="TextBox 6">
             <a:extLst xmlns:a="http://schemas.openxmlformats.org/drawingml/2006/main">
               <a:ext uri="{FF2B5EF4-FFF2-40B4-BE49-F238E27FC236}">
-                <a16:creationId xmlns:a16="http://schemas.microsoft.com/office/drawing/2014/main" id="{E03A19B9-80C3-4187-99AC-16772F27D238}"/>
+                <a16:creationId xmlns:a16="http://schemas.microsoft.com/office/drawing/2014/main" id="{A1C0C776-C837-4DFC-94CD-CF6F3DDA845D}"/>
               </a:ext>
             </a:extLst>
           </p:cNvPr>
@@ -9492,7 +9942,7 @@
           <p:cNvPr id="8" name="TextBox 7">
             <a:extLst xmlns:a="http://schemas.openxmlformats.org/drawingml/2006/main">
               <a:ext uri="{FF2B5EF4-FFF2-40B4-BE49-F238E27FC236}">
-                <a16:creationId xmlns:a16="http://schemas.microsoft.com/office/drawing/2014/main" id="{AB1C72D6-4492-4453-951C-306687D155D2}"/>
+                <a16:creationId xmlns:a16="http://schemas.microsoft.com/office/drawing/2014/main" id="{15341F8E-7122-448F-BF4B-99F74C2399F9}"/>
               </a:ext>
             </a:extLst>
           </p:cNvPr>
@@ -9529,7 +9979,7 @@
                 <a:ea typeface="Aptos"/>
                 <a:cs typeface="Aptos"/>
               </a:rPr>
-              <a:t>2026.07.24-22</a:t>
+              <a:t>2026.07.25-24</a:t>
             </a:r>
           </a:p>
         </p:txBody>
@@ -9539,7 +9989,7 @@
           <p:cNvPr id="9" name="TextBox 8">
             <a:extLst xmlns:a="http://schemas.openxmlformats.org/drawingml/2006/main">
               <a:ext uri="{FF2B5EF4-FFF2-40B4-BE49-F238E27FC236}">
-                <a16:creationId xmlns:a16="http://schemas.microsoft.com/office/drawing/2014/main" id="{39FCDE83-E88A-4459-93D9-C186ADFEB0C9}"/>
+                <a16:creationId xmlns:a16="http://schemas.microsoft.com/office/drawing/2014/main" id="{EF96864F-9159-4189-932B-1B6AB079BB05}"/>
               </a:ext>
             </a:extLst>
           </p:cNvPr>
@@ -9587,7 +10037,7 @@
           <p:cNvPr id="10" name="TextBox 9">
             <a:extLst xmlns:a="http://schemas.openxmlformats.org/drawingml/2006/main">
               <a:ext uri="{FF2B5EF4-FFF2-40B4-BE49-F238E27FC236}">
-                <a16:creationId xmlns:a16="http://schemas.microsoft.com/office/drawing/2014/main" id="{6DDEF69C-D26B-4101-A2F8-1EE1BD812922}"/>
+                <a16:creationId xmlns:a16="http://schemas.microsoft.com/office/drawing/2014/main" id="{D0E3E26B-32E1-42A3-A14B-4279BB3B3ECA}"/>
               </a:ext>
             </a:extLst>
           </p:cNvPr>
@@ -9634,7 +10084,7 @@
           <p:cNvPr id="11" name="TextBox 10">
             <a:extLst xmlns:a="http://schemas.openxmlformats.org/drawingml/2006/main">
               <a:ext uri="{FF2B5EF4-FFF2-40B4-BE49-F238E27FC236}">
-                <a16:creationId xmlns:a16="http://schemas.microsoft.com/office/drawing/2014/main" id="{E401BB98-B799-40D7-B0E6-1EF019E976D4}"/>
+                <a16:creationId xmlns:a16="http://schemas.microsoft.com/office/drawing/2014/main" id="{643CB8D9-9B1B-48E6-A62F-571B5847D17C}"/>
               </a:ext>
             </a:extLst>
           </p:cNvPr>
@@ -9681,7 +10131,7 @@
           <p:cNvPr id="12" name="TextBox 11">
             <a:extLst xmlns:a="http://schemas.openxmlformats.org/drawingml/2006/main">
               <a:ext uri="{FF2B5EF4-FFF2-40B4-BE49-F238E27FC236}">
-                <a16:creationId xmlns:a16="http://schemas.microsoft.com/office/drawing/2014/main" id="{F0828EC4-0796-4298-93B3-7898A648C7BF}"/>
+                <a16:creationId xmlns:a16="http://schemas.microsoft.com/office/drawing/2014/main" id="{7D94B684-B2C5-4F23-8C02-113CEE36489F}"/>
               </a:ext>
             </a:extLst>
           </p:cNvPr>
@@ -9726,7 +10176,7 @@
     </p:spTree>
     <p:extLst>
       <p:ext uri="{BB962C8B-B14F-4D97-AF65-F5344CB8AC3E}">
-        <p14:creationId xmlns:p14="http://schemas.microsoft.com/office/powerpoint/2010/main" val="2132878155"/>
+        <p14:creationId xmlns:p14="http://schemas.microsoft.com/office/powerpoint/2010/main" val="1737734399"/>
       </p:ext>
     </p:extLst>
   </p:cSld>
@@ -9750,7 +10200,7 @@
           <p:cNvPr id="2" name="TextBox 1">
             <a:extLst xmlns:a="http://schemas.openxmlformats.org/drawingml/2006/main">
               <a:ext uri="{FF2B5EF4-FFF2-40B4-BE49-F238E27FC236}">
-                <a16:creationId xmlns:a16="http://schemas.microsoft.com/office/drawing/2014/main" id="{0408A885-7FAA-44AE-B822-8800B0E32C43}"/>
+                <a16:creationId xmlns:a16="http://schemas.microsoft.com/office/drawing/2014/main" id="{9AFF6E8D-E165-4C12-A594-0E4966619E18}"/>
               </a:ext>
             </a:extLst>
           </p:cNvPr>
@@ -9797,7 +10247,7 @@
           <p:cNvPr id="3" name="TextBox 2">
             <a:extLst xmlns:a="http://schemas.openxmlformats.org/drawingml/2006/main">
               <a:ext uri="{FF2B5EF4-FFF2-40B4-BE49-F238E27FC236}">
-                <a16:creationId xmlns:a16="http://schemas.microsoft.com/office/drawing/2014/main" id="{B806FB4B-5B83-4EC3-B70B-3A474E759EB9}"/>
+                <a16:creationId xmlns:a16="http://schemas.microsoft.com/office/drawing/2014/main" id="{824EDFE5-2D1A-4AF2-B3EB-A1412F4EFA6B}"/>
               </a:ext>
             </a:extLst>
           </p:cNvPr>
@@ -9844,7 +10294,7 @@
           <p:cNvPr id="4" name="Rectangle 3">
             <a:extLst xmlns:a="http://schemas.openxmlformats.org/drawingml/2006/main">
               <a:ext uri="{FF2B5EF4-FFF2-40B4-BE49-F238E27FC236}">
-                <a16:creationId xmlns:a16="http://schemas.microsoft.com/office/drawing/2014/main" id="{66445A34-F947-4BB6-A47D-B30E45163EBC}"/>
+                <a16:creationId xmlns:a16="http://schemas.microsoft.com/office/drawing/2014/main" id="{83F54870-C08B-47B4-962F-BB779FE5A395}"/>
               </a:ext>
             </a:extLst>
           </p:cNvPr>
@@ -9899,7 +10349,7 @@
           <p:cNvPr id="5" name="Rectangle 4">
             <a:extLst xmlns:a="http://schemas.openxmlformats.org/drawingml/2006/main">
               <a:ext uri="{FF2B5EF4-FFF2-40B4-BE49-F238E27FC236}">
-                <a16:creationId xmlns:a16="http://schemas.microsoft.com/office/drawing/2014/main" id="{29D5CE0E-D598-4671-B21B-02D3334116E8}"/>
+                <a16:creationId xmlns:a16="http://schemas.microsoft.com/office/drawing/2014/main" id="{518341B6-8599-4000-8EEF-4E3348E2F95F}"/>
               </a:ext>
             </a:extLst>
           </p:cNvPr>
@@ -9954,7 +10404,7 @@
           <p:cNvPr id="6" name="TextBox 5">
             <a:extLst xmlns:a="http://schemas.openxmlformats.org/drawingml/2006/main">
               <a:ext uri="{FF2B5EF4-FFF2-40B4-BE49-F238E27FC236}">
-                <a16:creationId xmlns:a16="http://schemas.microsoft.com/office/drawing/2014/main" id="{07BC27B2-4DAA-4D0D-B2CC-400C77BF09E5}"/>
+                <a16:creationId xmlns:a16="http://schemas.microsoft.com/office/drawing/2014/main" id="{803B8352-FF89-4255-B00B-32747A6EA474}"/>
               </a:ext>
             </a:extLst>
           </p:cNvPr>
@@ -9991,7 +10441,7 @@
                 <a:ea typeface="Aptos"/>
                 <a:cs typeface="Aptos"/>
               </a:rPr>
-              <a:t>Julkinen riippumaton evidenssikooste · 2026.07.24-22 · 2026-07-24 · Lähteet: RPX; CNIPA guidance; EPO family</a:t>
+              <a:t>Julkinen riippumaton evidenssikooste · 2026.07.25-24 · 2026-07-24 · Lähteet: RPX; CNIPA guidance; EPO family</a:t>
             </a:r>
           </a:p>
         </p:txBody>
@@ -10001,7 +10451,7 @@
           <p:cNvPr id="7" name="TextBox 6">
             <a:extLst xmlns:a="http://schemas.openxmlformats.org/drawingml/2006/main">
               <a:ext uri="{FF2B5EF4-FFF2-40B4-BE49-F238E27FC236}">
-                <a16:creationId xmlns:a16="http://schemas.microsoft.com/office/drawing/2014/main" id="{9F4A6476-7BDD-4981-A14F-4BE8E2DF97B1}"/>
+                <a16:creationId xmlns:a16="http://schemas.microsoft.com/office/drawing/2014/main" id="{2FDFB615-3DCC-4CFD-B858-CDB53E8A1D1B}"/>
               </a:ext>
             </a:extLst>
           </p:cNvPr>
@@ -10048,7 +10498,7 @@
           <p:cNvPr id="8" name="TextBox 7">
             <a:extLst xmlns:a="http://schemas.openxmlformats.org/drawingml/2006/main">
               <a:ext uri="{FF2B5EF4-FFF2-40B4-BE49-F238E27FC236}">
-                <a16:creationId xmlns:a16="http://schemas.microsoft.com/office/drawing/2014/main" id="{9984362F-FAF0-47B8-9CC4-5EAE0C383DA8}"/>
+                <a16:creationId xmlns:a16="http://schemas.microsoft.com/office/drawing/2014/main" id="{2C2C476D-8129-47D8-9AAA-A0329C6DF73D}"/>
               </a:ext>
             </a:extLst>
           </p:cNvPr>
@@ -10095,7 +10545,7 @@
           <p:cNvPr id="9" name="TextBox 8">
             <a:extLst xmlns:a="http://schemas.openxmlformats.org/drawingml/2006/main">
               <a:ext uri="{FF2B5EF4-FFF2-40B4-BE49-F238E27FC236}">
-                <a16:creationId xmlns:a16="http://schemas.microsoft.com/office/drawing/2014/main" id="{DB2401E7-3D07-43AB-BFD5-C095BC859F68}"/>
+                <a16:creationId xmlns:a16="http://schemas.microsoft.com/office/drawing/2014/main" id="{1A0E35B8-C932-462C-96EB-22A4E2D9C80B}"/>
               </a:ext>
             </a:extLst>
           </p:cNvPr>
@@ -10192,7 +10642,7 @@
           <p:cNvPr id="10" name="Rounded Rectangle 9">
             <a:extLst xmlns:a="http://schemas.openxmlformats.org/drawingml/2006/main">
               <a:ext uri="{FF2B5EF4-FFF2-40B4-BE49-F238E27FC236}">
-                <a16:creationId xmlns:a16="http://schemas.microsoft.com/office/drawing/2014/main" id="{8F35EB86-874A-4B0A-A260-9904F8138CAF}"/>
+                <a16:creationId xmlns:a16="http://schemas.microsoft.com/office/drawing/2014/main" id="{21C2D9E5-B545-4337-85A6-FC18173865D9}"/>
               </a:ext>
             </a:extLst>
           </p:cNvPr>
@@ -10249,7 +10699,7 @@
           <p:cNvPr id="11" name="TextBox 10">
             <a:extLst xmlns:a="http://schemas.openxmlformats.org/drawingml/2006/main">
               <a:ext uri="{FF2B5EF4-FFF2-40B4-BE49-F238E27FC236}">
-                <a16:creationId xmlns:a16="http://schemas.microsoft.com/office/drawing/2014/main" id="{FED96A89-5437-4B48-8A25-B3E942AAEE37}"/>
+                <a16:creationId xmlns:a16="http://schemas.microsoft.com/office/drawing/2014/main" id="{962A27FA-D8EC-4FCA-8B26-E8FF44D6FBD3}"/>
               </a:ext>
             </a:extLst>
           </p:cNvPr>
@@ -10296,7 +10746,7 @@
           <p:cNvPr id="12" name="TextBox 11">
             <a:extLst xmlns:a="http://schemas.openxmlformats.org/drawingml/2006/main">
               <a:ext uri="{FF2B5EF4-FFF2-40B4-BE49-F238E27FC236}">
-                <a16:creationId xmlns:a16="http://schemas.microsoft.com/office/drawing/2014/main" id="{97F6DE80-B393-4BC6-ACBE-D927C5C7531C}"/>
+                <a16:creationId xmlns:a16="http://schemas.microsoft.com/office/drawing/2014/main" id="{977FAE90-9589-4BC2-AA48-263507C27C64}"/>
               </a:ext>
             </a:extLst>
           </p:cNvPr>
@@ -10341,7 +10791,7 @@
     </p:spTree>
     <p:extLst>
       <p:ext uri="{BB962C8B-B14F-4D97-AF65-F5344CB8AC3E}">
-        <p14:creationId xmlns:p14="http://schemas.microsoft.com/office/powerpoint/2010/main" val="662652558"/>
+        <p14:creationId xmlns:p14="http://schemas.microsoft.com/office/powerpoint/2010/main" val="1108230506"/>
       </p:ext>
     </p:extLst>
   </p:cSld>
@@ -10365,7 +10815,7 @@
           <p:cNvPr id="2" name="TextBox 1">
             <a:extLst xmlns:a="http://schemas.openxmlformats.org/drawingml/2006/main">
               <a:ext uri="{FF2B5EF4-FFF2-40B4-BE49-F238E27FC236}">
-                <a16:creationId xmlns:a16="http://schemas.microsoft.com/office/drawing/2014/main" id="{B105897F-8167-47C5-B4C5-B3FEA731CC8A}"/>
+                <a16:creationId xmlns:a16="http://schemas.microsoft.com/office/drawing/2014/main" id="{1E5BC4E1-2247-4961-86B5-930116C6C5C2}"/>
               </a:ext>
             </a:extLst>
           </p:cNvPr>
@@ -10412,7 +10862,7 @@
           <p:cNvPr id="3" name="TextBox 2">
             <a:extLst xmlns:a="http://schemas.openxmlformats.org/drawingml/2006/main">
               <a:ext uri="{FF2B5EF4-FFF2-40B4-BE49-F238E27FC236}">
-                <a16:creationId xmlns:a16="http://schemas.microsoft.com/office/drawing/2014/main" id="{5C545B9C-7ED2-4B28-A35B-85E48BB32255}"/>
+                <a16:creationId xmlns:a16="http://schemas.microsoft.com/office/drawing/2014/main" id="{5D8C75CA-6C93-491F-812C-608D1A932B76}"/>
               </a:ext>
             </a:extLst>
           </p:cNvPr>
@@ -10432,8 +10882,8 @@
           <a:noFill xmlns:a="http://schemas.openxmlformats.org/drawingml/2006/main"/>
         </p:spPr>
         <p:txBody>
-          <a:bodyPr xmlns:a="http://schemas.openxmlformats.org/drawingml/2006/main" wrap="square" lIns="36576" tIns="36576" rIns="36576" bIns="36576" anchor="t">
-            <a:spAutoFit/>
+          <a:bodyPr xmlns:a="http://schemas.openxmlformats.org/drawingml/2006/main" wrap="none" lIns="36576" tIns="36576" rIns="36576" bIns="36576" anchor="t">
+            <a:normAutofit fontScale="100000"/>
           </a:bodyPr>
           <a:lstStyle xmlns:a="http://schemas.openxmlformats.org/drawingml/2006/main"/>
           <a:p xmlns:a="http://schemas.openxmlformats.org/drawingml/2006/main">
@@ -10441,7 +10891,7 @@
               <a:buNone/>
             </a:pPr>
             <a:r>
-              <a:rPr sz="3000" b="1">
+              <a:rPr sz="2400" b="1">
                 <a:solidFill>
                   <a:srgbClr val="071A2B"/>
                 </a:solidFill>
@@ -10459,7 +10909,7 @@
           <p:cNvPr id="4" name="Rectangle 3">
             <a:extLst xmlns:a="http://schemas.openxmlformats.org/drawingml/2006/main">
               <a:ext uri="{FF2B5EF4-FFF2-40B4-BE49-F238E27FC236}">
-                <a16:creationId xmlns:a16="http://schemas.microsoft.com/office/drawing/2014/main" id="{F3EDC7AC-5394-4D31-893D-A910AA7C7EDD}"/>
+                <a16:creationId xmlns:a16="http://schemas.microsoft.com/office/drawing/2014/main" id="{2CA7A32A-43DF-4C5C-8E41-3F2DC03610CB}"/>
               </a:ext>
             </a:extLst>
           </p:cNvPr>
@@ -10514,7 +10964,7 @@
           <p:cNvPr id="5" name="Rectangle 4">
             <a:extLst xmlns:a="http://schemas.openxmlformats.org/drawingml/2006/main">
               <a:ext uri="{FF2B5EF4-FFF2-40B4-BE49-F238E27FC236}">
-                <a16:creationId xmlns:a16="http://schemas.microsoft.com/office/drawing/2014/main" id="{1149AEF6-3654-4993-828B-0EE44A1C2D6E}"/>
+                <a16:creationId xmlns:a16="http://schemas.microsoft.com/office/drawing/2014/main" id="{FBD27C5B-2694-4EF3-93E4-7F6929815156}"/>
               </a:ext>
             </a:extLst>
           </p:cNvPr>
@@ -10569,7 +11019,7 @@
           <p:cNvPr id="6" name="TextBox 5">
             <a:extLst xmlns:a="http://schemas.openxmlformats.org/drawingml/2006/main">
               <a:ext uri="{FF2B5EF4-FFF2-40B4-BE49-F238E27FC236}">
-                <a16:creationId xmlns:a16="http://schemas.microsoft.com/office/drawing/2014/main" id="{C74E3BCE-2AFA-44CD-874C-FEFD839419ED}"/>
+                <a16:creationId xmlns:a16="http://schemas.microsoft.com/office/drawing/2014/main" id="{066B9CDB-A2AC-4A35-A53E-6621C5F48D26}"/>
               </a:ext>
             </a:extLst>
           </p:cNvPr>
@@ -10606,7 +11056,7 @@
                 <a:ea typeface="Aptos"/>
                 <a:cs typeface="Aptos"/>
               </a:rPr>
-              <a:t>Julkinen riippumaton evidenssikooste · 2026.07.24-22 · 2026-07-24 · Lähteet: IP Australia; PRH; EPO; EPO / UPC; USPTO</a:t>
+              <a:t>Julkinen riippumaton evidenssikooste · 2026.07.25-24 · 2026-07-24 · Lähteet: IP Australia; PRH; EPO; EPO / UPC; USPTO</a:t>
             </a:r>
           </a:p>
         </p:txBody>
@@ -10616,7 +11066,7 @@
           <p:cNvPr id="7" name="TextBox 6">
             <a:extLst xmlns:a="http://schemas.openxmlformats.org/drawingml/2006/main">
               <a:ext uri="{FF2B5EF4-FFF2-40B4-BE49-F238E27FC236}">
-                <a16:creationId xmlns:a16="http://schemas.microsoft.com/office/drawing/2014/main" id="{04BC7305-9222-413D-969F-ECC1A4372256}"/>
+                <a16:creationId xmlns:a16="http://schemas.microsoft.com/office/drawing/2014/main" id="{FCC5D131-AA06-4694-9B8E-5DCEDCE81A88}"/>
               </a:ext>
             </a:extLst>
           </p:cNvPr>
@@ -11103,7 +11553,7 @@
           <p:cNvPr id="9" name="TextBox 8">
             <a:extLst xmlns:a="http://schemas.openxmlformats.org/drawingml/2006/main">
               <a:ext uri="{FF2B5EF4-FFF2-40B4-BE49-F238E27FC236}">
-                <a16:creationId xmlns:a16="http://schemas.microsoft.com/office/drawing/2014/main" id="{6ECCEE0E-D65B-46C1-9B86-4E5E22EDA29D}"/>
+                <a16:creationId xmlns:a16="http://schemas.microsoft.com/office/drawing/2014/main" id="{6CDAF9FB-DF39-4DA8-8F68-A0A3921BE1CB}"/>
               </a:ext>
             </a:extLst>
           </p:cNvPr>
@@ -11148,7 +11598,7 @@
     </p:spTree>
     <p:extLst>
       <p:ext uri="{BB962C8B-B14F-4D97-AF65-F5344CB8AC3E}">
-        <p14:creationId xmlns:p14="http://schemas.microsoft.com/office/powerpoint/2010/main" val="820159569"/>
+        <p14:creationId xmlns:p14="http://schemas.microsoft.com/office/powerpoint/2010/main" val="1325913336"/>
       </p:ext>
     </p:extLst>
   </p:cSld>
@@ -11172,7 +11622,7 @@
           <p:cNvPr id="2" name="TextBox 1">
             <a:extLst xmlns:a="http://schemas.openxmlformats.org/drawingml/2006/main">
               <a:ext uri="{FF2B5EF4-FFF2-40B4-BE49-F238E27FC236}">
-                <a16:creationId xmlns:a16="http://schemas.microsoft.com/office/drawing/2014/main" id="{7E0095CC-0877-4D1E-81F8-B32DCB635311}"/>
+                <a16:creationId xmlns:a16="http://schemas.microsoft.com/office/drawing/2014/main" id="{11CEDFA9-BCD2-4542-A70C-BC76D2AE655D}"/>
               </a:ext>
             </a:extLst>
           </p:cNvPr>
@@ -11219,7 +11669,7 @@
           <p:cNvPr id="3" name="TextBox 2">
             <a:extLst xmlns:a="http://schemas.openxmlformats.org/drawingml/2006/main">
               <a:ext uri="{FF2B5EF4-FFF2-40B4-BE49-F238E27FC236}">
-                <a16:creationId xmlns:a16="http://schemas.microsoft.com/office/drawing/2014/main" id="{732F3274-78EA-49F3-B46D-420FBE215626}"/>
+                <a16:creationId xmlns:a16="http://schemas.microsoft.com/office/drawing/2014/main" id="{7573CCD5-8856-4F49-B32D-CC3078A5F3E9}"/>
               </a:ext>
             </a:extLst>
           </p:cNvPr>
@@ -11266,7 +11716,7 @@
           <p:cNvPr id="4" name="Rectangle 3">
             <a:extLst xmlns:a="http://schemas.openxmlformats.org/drawingml/2006/main">
               <a:ext uri="{FF2B5EF4-FFF2-40B4-BE49-F238E27FC236}">
-                <a16:creationId xmlns:a16="http://schemas.microsoft.com/office/drawing/2014/main" id="{EC73259F-01F3-499C-9659-17D93FA91534}"/>
+                <a16:creationId xmlns:a16="http://schemas.microsoft.com/office/drawing/2014/main" id="{5E920D8F-BC12-423F-A4B5-B3F04C336E60}"/>
               </a:ext>
             </a:extLst>
           </p:cNvPr>
@@ -11321,7 +11771,7 @@
           <p:cNvPr id="5" name="Rectangle 4">
             <a:extLst xmlns:a="http://schemas.openxmlformats.org/drawingml/2006/main">
               <a:ext uri="{FF2B5EF4-FFF2-40B4-BE49-F238E27FC236}">
-                <a16:creationId xmlns:a16="http://schemas.microsoft.com/office/drawing/2014/main" id="{FAB1F577-EB00-4F26-AFFB-0630DCD3ADD6}"/>
+                <a16:creationId xmlns:a16="http://schemas.microsoft.com/office/drawing/2014/main" id="{2BAA2F05-25B4-41AC-9B35-061A94CA5F3D}"/>
               </a:ext>
             </a:extLst>
           </p:cNvPr>
@@ -11376,7 +11826,7 @@
           <p:cNvPr id="6" name="TextBox 5">
             <a:extLst xmlns:a="http://schemas.openxmlformats.org/drawingml/2006/main">
               <a:ext uri="{FF2B5EF4-FFF2-40B4-BE49-F238E27FC236}">
-                <a16:creationId xmlns:a16="http://schemas.microsoft.com/office/drawing/2014/main" id="{0A7FD657-1B8A-4731-A895-C3C69599B3F0}"/>
+                <a16:creationId xmlns:a16="http://schemas.microsoft.com/office/drawing/2014/main" id="{0990D3B1-E2F1-4D1C-9B0D-ABB15DEC75A4}"/>
               </a:ext>
             </a:extLst>
           </p:cNvPr>
@@ -11413,7 +11863,7 @@
                 <a:ea typeface="Aptos"/>
                 <a:cs typeface="Aptos"/>
               </a:rPr>
-              <a:t>Julkinen riippumaton evidenssikooste · 2026.07.24-22 · 2026-07-24 · Lähteet: UN; Atlas</a:t>
+              <a:t>Julkinen riippumaton evidenssikooste · 2026.07.25-24 · 2026-07-24 · Lähteet: UN; Atlas</a:t>
             </a:r>
           </a:p>
         </p:txBody>
@@ -11423,7 +11873,7 @@
           <p:cNvPr id="7" name="TextBox 6">
             <a:extLst xmlns:a="http://schemas.openxmlformats.org/drawingml/2006/main">
               <a:ext uri="{FF2B5EF4-FFF2-40B4-BE49-F238E27FC236}">
-                <a16:creationId xmlns:a16="http://schemas.microsoft.com/office/drawing/2014/main" id="{AABDF41C-D21A-435C-9819-6147CE6BD6F2}"/>
+                <a16:creationId xmlns:a16="http://schemas.microsoft.com/office/drawing/2014/main" id="{E1B0F2D1-54DB-49A3-9F69-DC39CA2B632A}"/>
               </a:ext>
             </a:extLst>
           </p:cNvPr>
@@ -11470,7 +11920,7 @@
           <p:cNvPr id="8" name="Rounded Rectangle 7">
             <a:extLst xmlns:a="http://schemas.openxmlformats.org/drawingml/2006/main">
               <a:ext uri="{FF2B5EF4-FFF2-40B4-BE49-F238E27FC236}">
-                <a16:creationId xmlns:a16="http://schemas.microsoft.com/office/drawing/2014/main" id="{F0563CAF-948A-432F-B427-940309D51E59}"/>
+                <a16:creationId xmlns:a16="http://schemas.microsoft.com/office/drawing/2014/main" id="{87B751DA-BF87-4BD5-AD3F-1FE2ACBC4513}"/>
               </a:ext>
             </a:extLst>
           </p:cNvPr>
@@ -11527,7 +11977,7 @@
           <p:cNvPr id="9" name="TextBox 8">
             <a:extLst xmlns:a="http://schemas.openxmlformats.org/drawingml/2006/main">
               <a:ext uri="{FF2B5EF4-FFF2-40B4-BE49-F238E27FC236}">
-                <a16:creationId xmlns:a16="http://schemas.microsoft.com/office/drawing/2014/main" id="{BD6D840F-F52B-498A-AD22-8CE87EC00049}"/>
+                <a16:creationId xmlns:a16="http://schemas.microsoft.com/office/drawing/2014/main" id="{7ECB3984-48A7-4D9B-9DCA-5093C90C1B2B}"/>
               </a:ext>
             </a:extLst>
           </p:cNvPr>
@@ -11574,7 +12024,7 @@
           <p:cNvPr id="10" name="TextBox 9">
             <a:extLst xmlns:a="http://schemas.openxmlformats.org/drawingml/2006/main">
               <a:ext uri="{FF2B5EF4-FFF2-40B4-BE49-F238E27FC236}">
-                <a16:creationId xmlns:a16="http://schemas.microsoft.com/office/drawing/2014/main" id="{5BB41E66-A948-4D01-97C0-D166808DF14D}"/>
+                <a16:creationId xmlns:a16="http://schemas.microsoft.com/office/drawing/2014/main" id="{0C68FCFC-898E-4410-BEC6-E8733E55DAC1}"/>
               </a:ext>
             </a:extLst>
           </p:cNvPr>
@@ -11621,7 +12071,7 @@
           <p:cNvPr id="11" name="Rounded Rectangle 10">
             <a:extLst xmlns:a="http://schemas.openxmlformats.org/drawingml/2006/main">
               <a:ext uri="{FF2B5EF4-FFF2-40B4-BE49-F238E27FC236}">
-                <a16:creationId xmlns:a16="http://schemas.microsoft.com/office/drawing/2014/main" id="{700280DC-56BD-42D4-A10D-273B62B889CF}"/>
+                <a16:creationId xmlns:a16="http://schemas.microsoft.com/office/drawing/2014/main" id="{6F6233F1-EC19-4922-AC32-8B45C3688890}"/>
               </a:ext>
             </a:extLst>
           </p:cNvPr>
@@ -11678,7 +12128,7 @@
           <p:cNvPr id="12" name="TextBox 11">
             <a:extLst xmlns:a="http://schemas.openxmlformats.org/drawingml/2006/main">
               <a:ext uri="{FF2B5EF4-FFF2-40B4-BE49-F238E27FC236}">
-                <a16:creationId xmlns:a16="http://schemas.microsoft.com/office/drawing/2014/main" id="{ED777631-04FF-44FA-B64D-6FD449FF2B96}"/>
+                <a16:creationId xmlns:a16="http://schemas.microsoft.com/office/drawing/2014/main" id="{D693A3AD-C5BB-4A7B-832A-01E19C88AD0B}"/>
               </a:ext>
             </a:extLst>
           </p:cNvPr>
@@ -11725,7 +12175,7 @@
           <p:cNvPr id="13" name="TextBox 12">
             <a:extLst xmlns:a="http://schemas.openxmlformats.org/drawingml/2006/main">
               <a:ext uri="{FF2B5EF4-FFF2-40B4-BE49-F238E27FC236}">
-                <a16:creationId xmlns:a16="http://schemas.microsoft.com/office/drawing/2014/main" id="{420285AB-E2C2-4775-BC2D-D8E4E10634BC}"/>
+                <a16:creationId xmlns:a16="http://schemas.microsoft.com/office/drawing/2014/main" id="{EE0E37F2-8B7A-4A84-A39A-1102562CACD7}"/>
               </a:ext>
             </a:extLst>
           </p:cNvPr>
@@ -11772,7 +12222,7 @@
           <p:cNvPr id="14" name="Rounded Rectangle 13">
             <a:extLst xmlns:a="http://schemas.openxmlformats.org/drawingml/2006/main">
               <a:ext uri="{FF2B5EF4-FFF2-40B4-BE49-F238E27FC236}">
-                <a16:creationId xmlns:a16="http://schemas.microsoft.com/office/drawing/2014/main" id="{8632F07B-9156-4B85-BA83-FB723B111CC6}"/>
+                <a16:creationId xmlns:a16="http://schemas.microsoft.com/office/drawing/2014/main" id="{B36F477E-4121-44B2-B505-C8CC9857A380}"/>
               </a:ext>
             </a:extLst>
           </p:cNvPr>
@@ -11829,7 +12279,7 @@
           <p:cNvPr id="15" name="TextBox 14">
             <a:extLst xmlns:a="http://schemas.openxmlformats.org/drawingml/2006/main">
               <a:ext uri="{FF2B5EF4-FFF2-40B4-BE49-F238E27FC236}">
-                <a16:creationId xmlns:a16="http://schemas.microsoft.com/office/drawing/2014/main" id="{F6AF4E5D-AFBF-41D2-AB7D-423121A200C7}"/>
+                <a16:creationId xmlns:a16="http://schemas.microsoft.com/office/drawing/2014/main" id="{305F1A8C-4E85-4A62-9A67-31A3EB719ED9}"/>
               </a:ext>
             </a:extLst>
           </p:cNvPr>
@@ -11876,7 +12326,7 @@
           <p:cNvPr id="16" name="TextBox 15">
             <a:extLst xmlns:a="http://schemas.openxmlformats.org/drawingml/2006/main">
               <a:ext uri="{FF2B5EF4-FFF2-40B4-BE49-F238E27FC236}">
-                <a16:creationId xmlns:a16="http://schemas.microsoft.com/office/drawing/2014/main" id="{9F0A786C-B175-4C84-B03F-FA4C765B9337}"/>
+                <a16:creationId xmlns:a16="http://schemas.microsoft.com/office/drawing/2014/main" id="{246331BD-C577-4AAE-9F77-AD6D6FC68837}"/>
               </a:ext>
             </a:extLst>
           </p:cNvPr>
@@ -11923,7 +12373,7 @@
           <p:cNvPr id="17" name="Rounded Rectangle 16">
             <a:extLst xmlns:a="http://schemas.openxmlformats.org/drawingml/2006/main">
               <a:ext uri="{FF2B5EF4-FFF2-40B4-BE49-F238E27FC236}">
-                <a16:creationId xmlns:a16="http://schemas.microsoft.com/office/drawing/2014/main" id="{44986ABE-4FF8-4BF1-BEAF-F57B1B2D0D6B}"/>
+                <a16:creationId xmlns:a16="http://schemas.microsoft.com/office/drawing/2014/main" id="{E4BF7640-A015-460F-B921-E6577BDDCC4C}"/>
               </a:ext>
             </a:extLst>
           </p:cNvPr>
@@ -11980,7 +12430,7 @@
           <p:cNvPr id="18" name="TextBox 17">
             <a:extLst xmlns:a="http://schemas.openxmlformats.org/drawingml/2006/main">
               <a:ext uri="{FF2B5EF4-FFF2-40B4-BE49-F238E27FC236}">
-                <a16:creationId xmlns:a16="http://schemas.microsoft.com/office/drawing/2014/main" id="{F664AE34-9B57-42DB-BC03-0385055C5919}"/>
+                <a16:creationId xmlns:a16="http://schemas.microsoft.com/office/drawing/2014/main" id="{0982BDBC-7D06-4E2A-8B98-19AACAAD8B0A}"/>
               </a:ext>
             </a:extLst>
           </p:cNvPr>
@@ -12027,7 +12477,7 @@
           <p:cNvPr id="19" name="TextBox 18">
             <a:extLst xmlns:a="http://schemas.openxmlformats.org/drawingml/2006/main">
               <a:ext uri="{FF2B5EF4-FFF2-40B4-BE49-F238E27FC236}">
-                <a16:creationId xmlns:a16="http://schemas.microsoft.com/office/drawing/2014/main" id="{FC0B47BD-DCFA-41C3-92F9-5755BCE2AF76}"/>
+                <a16:creationId xmlns:a16="http://schemas.microsoft.com/office/drawing/2014/main" id="{17D2106D-D910-47CD-B7ED-0290DA8F9D52}"/>
               </a:ext>
             </a:extLst>
           </p:cNvPr>
@@ -12074,7 +12524,7 @@
           <p:cNvPr id="20" name="TextBox 19">
             <a:extLst xmlns:a="http://schemas.openxmlformats.org/drawingml/2006/main">
               <a:ext uri="{FF2B5EF4-FFF2-40B4-BE49-F238E27FC236}">
-                <a16:creationId xmlns:a16="http://schemas.microsoft.com/office/drawing/2014/main" id="{03D40B7B-BE38-4F75-A8A0-130286CAE6F3}"/>
+                <a16:creationId xmlns:a16="http://schemas.microsoft.com/office/drawing/2014/main" id="{F98A1E08-B611-4C44-9F58-89E23E781F24}"/>
               </a:ext>
             </a:extLst>
           </p:cNvPr>
@@ -12121,7 +12571,7 @@
           <p:cNvPr id="21" name="Rounded Rectangle 20">
             <a:extLst xmlns:a="http://schemas.openxmlformats.org/drawingml/2006/main">
               <a:ext uri="{FF2B5EF4-FFF2-40B4-BE49-F238E27FC236}">
-                <a16:creationId xmlns:a16="http://schemas.microsoft.com/office/drawing/2014/main" id="{B7D80A8D-E837-4B2E-B211-357FC6BDACF1}"/>
+                <a16:creationId xmlns:a16="http://schemas.microsoft.com/office/drawing/2014/main" id="{A42B2A53-385F-4FFA-B331-ECF749AB39BE}"/>
               </a:ext>
             </a:extLst>
           </p:cNvPr>
@@ -12178,7 +12628,7 @@
           <p:cNvPr id="22" name="TextBox 21">
             <a:extLst xmlns:a="http://schemas.openxmlformats.org/drawingml/2006/main">
               <a:ext uri="{FF2B5EF4-FFF2-40B4-BE49-F238E27FC236}">
-                <a16:creationId xmlns:a16="http://schemas.microsoft.com/office/drawing/2014/main" id="{CC4A94CA-7CA0-4D71-9E19-B838287C3DC5}"/>
+                <a16:creationId xmlns:a16="http://schemas.microsoft.com/office/drawing/2014/main" id="{C2E67A8B-4E74-4A5E-967D-24BCBB904298}"/>
               </a:ext>
             </a:extLst>
           </p:cNvPr>
@@ -12225,7 +12675,7 @@
           <p:cNvPr id="23" name="TextBox 22">
             <a:extLst xmlns:a="http://schemas.openxmlformats.org/drawingml/2006/main">
               <a:ext uri="{FF2B5EF4-FFF2-40B4-BE49-F238E27FC236}">
-                <a16:creationId xmlns:a16="http://schemas.microsoft.com/office/drawing/2014/main" id="{3890445E-90D1-48C7-9B2F-E944CC467BAB}"/>
+                <a16:creationId xmlns:a16="http://schemas.microsoft.com/office/drawing/2014/main" id="{9D90711E-01FC-4914-AE95-112D833B6CAD}"/>
               </a:ext>
             </a:extLst>
           </p:cNvPr>
@@ -12270,7 +12720,7 @@
     </p:spTree>
     <p:extLst>
       <p:ext uri="{BB962C8B-B14F-4D97-AF65-F5344CB8AC3E}">
-        <p14:creationId xmlns:p14="http://schemas.microsoft.com/office/powerpoint/2010/main" val="401116928"/>
+        <p14:creationId xmlns:p14="http://schemas.microsoft.com/office/powerpoint/2010/main" val="1280753794"/>
       </p:ext>
     </p:extLst>
   </p:cSld>
@@ -12294,7 +12744,7 @@
           <p:cNvPr id="2" name="TextBox 1">
             <a:extLst xmlns:a="http://schemas.openxmlformats.org/drawingml/2006/main">
               <a:ext uri="{FF2B5EF4-FFF2-40B4-BE49-F238E27FC236}">
-                <a16:creationId xmlns:a16="http://schemas.microsoft.com/office/drawing/2014/main" id="{F7EE7DA5-F9A0-46F8-B56A-647B4DFA2D01}"/>
+                <a16:creationId xmlns:a16="http://schemas.microsoft.com/office/drawing/2014/main" id="{A6973A17-7B17-4747-8BA4-9E7FFF9F3107}"/>
               </a:ext>
             </a:extLst>
           </p:cNvPr>
@@ -12341,7 +12791,7 @@
           <p:cNvPr id="3" name="TextBox 2">
             <a:extLst xmlns:a="http://schemas.openxmlformats.org/drawingml/2006/main">
               <a:ext uri="{FF2B5EF4-FFF2-40B4-BE49-F238E27FC236}">
-                <a16:creationId xmlns:a16="http://schemas.microsoft.com/office/drawing/2014/main" id="{B522FFEE-1065-4B37-89E0-C552525F4085}"/>
+                <a16:creationId xmlns:a16="http://schemas.microsoft.com/office/drawing/2014/main" id="{F9AFEA9D-FF96-4BDA-978D-E9A6307A45CE}"/>
               </a:ext>
             </a:extLst>
           </p:cNvPr>
@@ -12361,8 +12811,8 @@
           <a:noFill xmlns:a="http://schemas.openxmlformats.org/drawingml/2006/main"/>
         </p:spPr>
         <p:txBody>
-          <a:bodyPr xmlns:a="http://schemas.openxmlformats.org/drawingml/2006/main" wrap="square" lIns="36576" tIns="36576" rIns="36576" bIns="36576" anchor="t">
-            <a:spAutoFit/>
+          <a:bodyPr xmlns:a="http://schemas.openxmlformats.org/drawingml/2006/main" wrap="none" lIns="36576" tIns="36576" rIns="36576" bIns="36576" anchor="t">
+            <a:normAutofit fontScale="100000"/>
           </a:bodyPr>
           <a:lstStyle xmlns:a="http://schemas.openxmlformats.org/drawingml/2006/main"/>
           <a:p xmlns:a="http://schemas.openxmlformats.org/drawingml/2006/main">
@@ -12370,7 +12820,7 @@
               <a:buNone/>
             </a:pPr>
             <a:r>
-              <a:rPr sz="3000" b="1">
+              <a:rPr sz="2400" b="1">
                 <a:solidFill>
                   <a:srgbClr val="071A2B"/>
                 </a:solidFill>
@@ -12388,7 +12838,7 @@
           <p:cNvPr id="4" name="Rectangle 3">
             <a:extLst xmlns:a="http://schemas.openxmlformats.org/drawingml/2006/main">
               <a:ext uri="{FF2B5EF4-FFF2-40B4-BE49-F238E27FC236}">
-                <a16:creationId xmlns:a16="http://schemas.microsoft.com/office/drawing/2014/main" id="{B08710E9-A020-4DF4-9D79-5DAE969D4F5C}"/>
+                <a16:creationId xmlns:a16="http://schemas.microsoft.com/office/drawing/2014/main" id="{909DD0B9-7329-4670-B30A-0152E3A04EF8}"/>
               </a:ext>
             </a:extLst>
           </p:cNvPr>
@@ -12443,7 +12893,7 @@
           <p:cNvPr id="5" name="Rectangle 4">
             <a:extLst xmlns:a="http://schemas.openxmlformats.org/drawingml/2006/main">
               <a:ext uri="{FF2B5EF4-FFF2-40B4-BE49-F238E27FC236}">
-                <a16:creationId xmlns:a16="http://schemas.microsoft.com/office/drawing/2014/main" id="{4ECFB35F-2678-4428-BE3E-174978CFEE21}"/>
+                <a16:creationId xmlns:a16="http://schemas.microsoft.com/office/drawing/2014/main" id="{02866E37-1B83-4910-996B-9E155D3510D0}"/>
               </a:ext>
             </a:extLst>
           </p:cNvPr>
@@ -12498,7 +12948,7 @@
           <p:cNvPr id="6" name="TextBox 5">
             <a:extLst xmlns:a="http://schemas.openxmlformats.org/drawingml/2006/main">
               <a:ext uri="{FF2B5EF4-FFF2-40B4-BE49-F238E27FC236}">
-                <a16:creationId xmlns:a16="http://schemas.microsoft.com/office/drawing/2014/main" id="{FA59CA3A-E98E-4D8F-85E9-660647AF1E87}"/>
+                <a16:creationId xmlns:a16="http://schemas.microsoft.com/office/drawing/2014/main" id="{6AADDDF5-E648-47E1-85F9-3AECB7FDE0B8}"/>
               </a:ext>
             </a:extLst>
           </p:cNvPr>
@@ -12535,7 +12985,7 @@
                 <a:ea typeface="Aptos"/>
                 <a:cs typeface="Aptos"/>
               </a:rPr>
-              <a:t>Julkinen riippumaton evidenssikooste · 2026.07.24-22 · 2026-07-24 · Lähteet: Statistics Canada; Health Canada; New Zealand Ministry of Health; Destatis; Vero; Sejm; FHM; FTC</a:t>
+              <a:t>Julkinen riippumaton evidenssikooste · 2026.07.25-24 · 2026-07-25 · Lähteet: Statistics Canada; Health Canada; New Zealand Ministry of Health; Destatis; Vero; Sejm; FHM; FTC</a:t>
             </a:r>
           </a:p>
         </p:txBody>
@@ -12545,7 +12995,7 @@
           <p:cNvPr id="7" name="TextBox 6">
             <a:extLst xmlns:a="http://schemas.openxmlformats.org/drawingml/2006/main">
               <a:ext uri="{FF2B5EF4-FFF2-40B4-BE49-F238E27FC236}">
-                <a16:creationId xmlns:a16="http://schemas.microsoft.com/office/drawing/2014/main" id="{8355CD69-5569-425E-816B-140FDFF0E291}"/>
+                <a16:creationId xmlns:a16="http://schemas.microsoft.com/office/drawing/2014/main" id="{4CCE795B-8449-4D2F-8420-16E833F82C90}"/>
               </a:ext>
             </a:extLst>
           </p:cNvPr>
@@ -12763,7 +13213,7 @@
                           <a:ea typeface="Aptos"/>
                           <a:cs typeface="Aptos"/>
                         </a:rPr>
-                        <a:t>StatsCan retail 2024: 1,219 mrd CAD (≈822,6 milj. EUR; ECB 2024); kaikki neljännekset E-laatua. Health Canada -toimitukset: 1,161 mrd CAD (≈783,2 milj. EUR; ECB 2024), 5,03 % alemmat; silta avoin</a:t>
+                        <a:t>StatsCan retail 2024: 1,219160 mrd CAD (≈822,6 milj. EUR; ECB 2024) / 822,58 milj. EUR; kuukausireitti +1 000 CAD. Kanada 7/10; D5, D7 ja D10 avoimia</a:t>
                       </a:r>
                     </a:p>
                   </a:txBody>
@@ -13198,7 +13648,7 @@
           <p:cNvPr id="9" name="TextBox 8">
             <a:extLst xmlns:a="http://schemas.openxmlformats.org/drawingml/2006/main">
               <a:ext uri="{FF2B5EF4-FFF2-40B4-BE49-F238E27FC236}">
-                <a16:creationId xmlns:a16="http://schemas.microsoft.com/office/drawing/2014/main" id="{B86979C6-6AB4-4E01-832A-B7A6EB9076A4}"/>
+                <a16:creationId xmlns:a16="http://schemas.microsoft.com/office/drawing/2014/main" id="{86DC43B7-4D12-4287-8C27-11B4470AA66E}"/>
               </a:ext>
             </a:extLst>
           </p:cNvPr>
@@ -13243,7 +13693,7 @@
     </p:spTree>
     <p:extLst>
       <p:ext uri="{BB962C8B-B14F-4D97-AF65-F5344CB8AC3E}">
-        <p14:creationId xmlns:p14="http://schemas.microsoft.com/office/powerpoint/2010/main" val="1475105761"/>
+        <p14:creationId xmlns:p14="http://schemas.microsoft.com/office/powerpoint/2010/main" val="1158905227"/>
       </p:ext>
     </p:extLst>
   </p:cSld>
@@ -13267,7 +13717,7 @@
           <p:cNvPr id="2" name="TextBox 1">
             <a:extLst xmlns:a="http://schemas.openxmlformats.org/drawingml/2006/main">
               <a:ext uri="{FF2B5EF4-FFF2-40B4-BE49-F238E27FC236}">
-                <a16:creationId xmlns:a16="http://schemas.microsoft.com/office/drawing/2014/main" id="{90D41974-7B9F-45C5-BE4C-8B87B828E1DF}"/>
+                <a16:creationId xmlns:a16="http://schemas.microsoft.com/office/drawing/2014/main" id="{52013A41-F25E-4D17-B90B-6DA32F007D0F}"/>
               </a:ext>
             </a:extLst>
           </p:cNvPr>
@@ -13314,7 +13764,7 @@
           <p:cNvPr id="3" name="TextBox 2">
             <a:extLst xmlns:a="http://schemas.openxmlformats.org/drawingml/2006/main">
               <a:ext uri="{FF2B5EF4-FFF2-40B4-BE49-F238E27FC236}">
-                <a16:creationId xmlns:a16="http://schemas.microsoft.com/office/drawing/2014/main" id="{737C20C7-9C33-498F-84C4-FD7104F6A104}"/>
+                <a16:creationId xmlns:a16="http://schemas.microsoft.com/office/drawing/2014/main" id="{2BF557E7-C83B-4D23-BC82-46AC1E4B1A32}"/>
               </a:ext>
             </a:extLst>
           </p:cNvPr>
@@ -13351,7 +13801,7 @@
                 <a:ea typeface="Aptos"/>
                 <a:cs typeface="Aptos"/>
               </a:rPr>
-              <a:t>Kanadalla on retail- ja toimitusankkurit</a:t>
+              <a:t>Kanada 2024: vahva piste-estimaatti, 7/10</a:t>
             </a:r>
           </a:p>
         </p:txBody>
@@ -13361,7 +13811,7 @@
           <p:cNvPr id="4" name="Rectangle 3">
             <a:extLst xmlns:a="http://schemas.openxmlformats.org/drawingml/2006/main">
               <a:ext uri="{FF2B5EF4-FFF2-40B4-BE49-F238E27FC236}">
-                <a16:creationId xmlns:a16="http://schemas.microsoft.com/office/drawing/2014/main" id="{6D125A33-D283-4466-87E2-6F969D55E4DF}"/>
+                <a16:creationId xmlns:a16="http://schemas.microsoft.com/office/drawing/2014/main" id="{97FC073F-368D-4146-A5E6-BAACA159E9AC}"/>
               </a:ext>
             </a:extLst>
           </p:cNvPr>
@@ -13416,7 +13866,7 @@
           <p:cNvPr id="5" name="Rectangle 4">
             <a:extLst xmlns:a="http://schemas.openxmlformats.org/drawingml/2006/main">
               <a:ext uri="{FF2B5EF4-FFF2-40B4-BE49-F238E27FC236}">
-                <a16:creationId xmlns:a16="http://schemas.microsoft.com/office/drawing/2014/main" id="{34672913-9D0B-47DC-A46C-3ACB1F3B976C}"/>
+                <a16:creationId xmlns:a16="http://schemas.microsoft.com/office/drawing/2014/main" id="{DBAC40DE-AE26-439B-BF3D-D054F0A22255}"/>
               </a:ext>
             </a:extLst>
           </p:cNvPr>
@@ -13471,7 +13921,7 @@
           <p:cNvPr id="6" name="TextBox 5">
             <a:extLst xmlns:a="http://schemas.openxmlformats.org/drawingml/2006/main">
               <a:ext uri="{FF2B5EF4-FFF2-40B4-BE49-F238E27FC236}">
-                <a16:creationId xmlns:a16="http://schemas.microsoft.com/office/drawing/2014/main" id="{6CB10802-973C-4B33-80DD-A6AB7291989B}"/>
+                <a16:creationId xmlns:a16="http://schemas.microsoft.com/office/drawing/2014/main" id="{A4059344-BB12-408E-BF42-1C376F8A449D}"/>
               </a:ext>
             </a:extLst>
           </p:cNvPr>
@@ -13508,7 +13958,7 @@
                 <a:ea typeface="Aptos"/>
                 <a:cs typeface="Aptos"/>
               </a:rPr>
-              <a:t>Julkinen riippumaton evidenssikooste · 2026.07.24-22 · 2026-07-24 · Lähteet: Statistics Canada; Health Canada 2024</a:t>
+              <a:t>Julkinen riippumaton evidenssikooste · 2026.07.25-24 · 2026-07-25 · Lähteet: Statistics Canada; Health Canada 2024</a:t>
             </a:r>
           </a:p>
         </p:txBody>
@@ -13518,7 +13968,7 @@
           <p:cNvPr id="7" name="TextBox 6">
             <a:extLst xmlns:a="http://schemas.openxmlformats.org/drawingml/2006/main">
               <a:ext uri="{FF2B5EF4-FFF2-40B4-BE49-F238E27FC236}">
-                <a16:creationId xmlns:a16="http://schemas.microsoft.com/office/drawing/2014/main" id="{8C69A65D-CCD2-4011-BD97-2049B610F56A}"/>
+                <a16:creationId xmlns:a16="http://schemas.microsoft.com/office/drawing/2014/main" id="{ACE7AC54-1900-4DC4-9D45-5257C508F1B5}"/>
               </a:ext>
             </a:extLst>
           </p:cNvPr>
@@ -13565,7 +14015,7 @@
           <p:cNvPr id="8" name="Rounded Rectangle 7">
             <a:extLst xmlns:a="http://schemas.openxmlformats.org/drawingml/2006/main">
               <a:ext uri="{FF2B5EF4-FFF2-40B4-BE49-F238E27FC236}">
-                <a16:creationId xmlns:a16="http://schemas.microsoft.com/office/drawing/2014/main" id="{E9439C54-AEBE-46D3-AFCA-7D63F0DC48AA}"/>
+                <a16:creationId xmlns:a16="http://schemas.microsoft.com/office/drawing/2014/main" id="{E4A1126B-A3C2-4FA5-85A5-BE28DA2237F2}"/>
               </a:ext>
             </a:extLst>
           </p:cNvPr>
@@ -13622,7 +14072,7 @@
           <p:cNvPr id="9" name="TextBox 8">
             <a:extLst xmlns:a="http://schemas.openxmlformats.org/drawingml/2006/main">
               <a:ext uri="{FF2B5EF4-FFF2-40B4-BE49-F238E27FC236}">
-                <a16:creationId xmlns:a16="http://schemas.microsoft.com/office/drawing/2014/main" id="{CFD85C09-DD36-44FD-B94C-3C02CD8D5D41}"/>
+                <a16:creationId xmlns:a16="http://schemas.microsoft.com/office/drawing/2014/main" id="{A974B582-5FBA-403B-9E17-F93B1181F7F8}"/>
               </a:ext>
             </a:extLst>
           </p:cNvPr>
@@ -13659,7 +14109,7 @@
                 <a:ea typeface="Aptos"/>
                 <a:cs typeface="Aptos"/>
               </a:rPr>
-              <a:t>1,219 mrd CAD</a:t>
+              <a:t>1,219160 mrd CAD</a:t>
             </a:r>
           </a:p>
         </p:txBody>
@@ -13669,7 +14119,7 @@
           <p:cNvPr id="10" name="TextBox 9">
             <a:extLst xmlns:a="http://schemas.openxmlformats.org/drawingml/2006/main">
               <a:ext uri="{FF2B5EF4-FFF2-40B4-BE49-F238E27FC236}">
-                <a16:creationId xmlns:a16="http://schemas.microsoft.com/office/drawing/2014/main" id="{12E067C6-6B83-4AFC-844E-CD6DDBD7F513}"/>
+                <a16:creationId xmlns:a16="http://schemas.microsoft.com/office/drawing/2014/main" id="{4A6E4F69-08F1-4A4B-9D3B-D5C62D165768}"/>
               </a:ext>
             </a:extLst>
           </p:cNvPr>
@@ -13716,7 +14166,7 @@
           <p:cNvPr id="11" name="Rounded Rectangle 10">
             <a:extLst xmlns:a="http://schemas.openxmlformats.org/drawingml/2006/main">
               <a:ext uri="{FF2B5EF4-FFF2-40B4-BE49-F238E27FC236}">
-                <a16:creationId xmlns:a16="http://schemas.microsoft.com/office/drawing/2014/main" id="{46D3E049-7028-4474-A6B2-4171272B289B}"/>
+                <a16:creationId xmlns:a16="http://schemas.microsoft.com/office/drawing/2014/main" id="{087F1794-D8EE-41D4-AE80-04B129E46E2C}"/>
               </a:ext>
             </a:extLst>
           </p:cNvPr>
@@ -13773,7 +14223,7 @@
           <p:cNvPr id="12" name="TextBox 11">
             <a:extLst xmlns:a="http://schemas.openxmlformats.org/drawingml/2006/main">
               <a:ext uri="{FF2B5EF4-FFF2-40B4-BE49-F238E27FC236}">
-                <a16:creationId xmlns:a16="http://schemas.microsoft.com/office/drawing/2014/main" id="{CDD43425-6469-4DE2-9DBF-2E731528FE68}"/>
+                <a16:creationId xmlns:a16="http://schemas.microsoft.com/office/drawing/2014/main" id="{204528EE-A5DA-4850-BB2A-CD619F61C6A2}"/>
               </a:ext>
             </a:extLst>
           </p:cNvPr>
@@ -13810,7 +14260,7 @@
                 <a:ea typeface="Aptos"/>
                 <a:cs typeface="Aptos"/>
               </a:rPr>
-              <a:t>1,161 mrd CAD</a:t>
+              <a:t>1,160754 mrd CAD</a:t>
             </a:r>
           </a:p>
         </p:txBody>
@@ -13820,7 +14270,7 @@
           <p:cNvPr id="13" name="TextBox 12">
             <a:extLst xmlns:a="http://schemas.openxmlformats.org/drawingml/2006/main">
               <a:ext uri="{FF2B5EF4-FFF2-40B4-BE49-F238E27FC236}">
-                <a16:creationId xmlns:a16="http://schemas.microsoft.com/office/drawing/2014/main" id="{A3657A3F-B38D-4656-A4EC-E1318FB92A42}"/>
+                <a16:creationId xmlns:a16="http://schemas.microsoft.com/office/drawing/2014/main" id="{9534A112-5E37-404C-98AD-CF95298A8326}"/>
               </a:ext>
             </a:extLst>
           </p:cNvPr>
@@ -13867,7 +14317,7 @@
           <p:cNvPr id="14" name="Rounded Rectangle 13">
             <a:extLst xmlns:a="http://schemas.openxmlformats.org/drawingml/2006/main">
               <a:ext uri="{FF2B5EF4-FFF2-40B4-BE49-F238E27FC236}">
-                <a16:creationId xmlns:a16="http://schemas.microsoft.com/office/drawing/2014/main" id="{2B8F3114-1A92-4C08-B85D-536275213787}"/>
+                <a16:creationId xmlns:a16="http://schemas.microsoft.com/office/drawing/2014/main" id="{A4B0E506-C672-41AE-8C26-DB4E31CB2B7F}"/>
               </a:ext>
             </a:extLst>
           </p:cNvPr>
@@ -13924,7 +14374,7 @@
           <p:cNvPr id="15" name="TextBox 14">
             <a:extLst xmlns:a="http://schemas.openxmlformats.org/drawingml/2006/main">
               <a:ext uri="{FF2B5EF4-FFF2-40B4-BE49-F238E27FC236}">
-                <a16:creationId xmlns:a16="http://schemas.microsoft.com/office/drawing/2014/main" id="{19A55EB8-CDA4-4BE4-AFED-D03113152632}"/>
+                <a16:creationId xmlns:a16="http://schemas.microsoft.com/office/drawing/2014/main" id="{B9268679-9147-47C0-876C-00B323679077}"/>
               </a:ext>
             </a:extLst>
           </p:cNvPr>
@@ -13961,7 +14411,7 @@
                 <a:ea typeface="Aptos"/>
                 <a:cs typeface="Aptos"/>
               </a:rPr>
-              <a:t>118,9 milj. yks.</a:t>
+              <a:t>1 000 CAD</a:t>
             </a:r>
           </a:p>
         </p:txBody>
@@ -13971,7 +14421,7 @@
           <p:cNvPr id="16" name="TextBox 15">
             <a:extLst xmlns:a="http://schemas.openxmlformats.org/drawingml/2006/main">
               <a:ext uri="{FF2B5EF4-FFF2-40B4-BE49-F238E27FC236}">
-                <a16:creationId xmlns:a16="http://schemas.microsoft.com/office/drawing/2014/main" id="{1A878806-DA47-416D-A8BF-937F3769CCDB}"/>
+                <a16:creationId xmlns:a16="http://schemas.microsoft.com/office/drawing/2014/main" id="{5C0B4814-DAD9-4164-B204-9F8220297D2C}"/>
               </a:ext>
             </a:extLst>
           </p:cNvPr>
@@ -14008,7 +14458,7 @@
                 <a:ea typeface="Aptos"/>
                 <a:cs typeface="Aptos"/>
               </a:rPr>
-              <a:t>lisäksi 1,252 milj. litraa</a:t>
+              <a:t>kuukausi–kvartaali-ero</a:t>
             </a:r>
           </a:p>
         </p:txBody>
@@ -14018,7 +14468,7 @@
           <p:cNvPr id="17" name="TextBox 16">
             <a:extLst xmlns:a="http://schemas.openxmlformats.org/drawingml/2006/main">
               <a:ext uri="{FF2B5EF4-FFF2-40B4-BE49-F238E27FC236}">
-                <a16:creationId xmlns:a16="http://schemas.microsoft.com/office/drawing/2014/main" id="{59360792-D93E-47FF-80C4-FFE0B5AD0BEF}"/>
+                <a16:creationId xmlns:a16="http://schemas.microsoft.com/office/drawing/2014/main" id="{477FE4CF-A3A3-4CA2-A11C-D97075DFD7AF}"/>
               </a:ext>
             </a:extLst>
           </p:cNvPr>
@@ -14055,7 +14505,7 @@
                 <a:ea typeface="Aptos"/>
                 <a:cs typeface="Aptos"/>
               </a:rPr>
-              <a:t>Retail ylittää toimitukset 58,4 milj. CAD (+5,03 %); laatu-, kanava-, scope- ja verokysymykset pitävät Kanadan donor-luvun ulkopuolella.</a:t>
+              <a:t>Retail ylittää toimitukset 58,406 milj. CAD (+5,03 %), mutta jäännös ei ole kate tai markkinahaarukka. D8 on suljettu virallisella veroperustalla.</a:t>
             </a:r>
           </a:p>
         </p:txBody>
@@ -14065,7 +14515,7 @@
           <p:cNvPr id="18" name="Rounded Rectangle 17">
             <a:extLst xmlns:a="http://schemas.openxmlformats.org/drawingml/2006/main">
               <a:ext uri="{FF2B5EF4-FFF2-40B4-BE49-F238E27FC236}">
-                <a16:creationId xmlns:a16="http://schemas.microsoft.com/office/drawing/2014/main" id="{CCCB6224-9D22-43DC-AF39-EDFB4FA75F7D}"/>
+                <a16:creationId xmlns:a16="http://schemas.microsoft.com/office/drawing/2014/main" id="{714DFE19-A631-4ACF-BAE0-9777EE8C9362}"/>
               </a:ext>
             </a:extLst>
           </p:cNvPr>
@@ -14122,7 +14572,7 @@
           <p:cNvPr id="19" name="TextBox 18">
             <a:extLst xmlns:a="http://schemas.openxmlformats.org/drawingml/2006/main">
               <a:ext uri="{FF2B5EF4-FFF2-40B4-BE49-F238E27FC236}">
-                <a16:creationId xmlns:a16="http://schemas.microsoft.com/office/drawing/2014/main" id="{57237F85-2AFE-47E9-B63C-096F7C9A3862}"/>
+                <a16:creationId xmlns:a16="http://schemas.microsoft.com/office/drawing/2014/main" id="{83E51E75-19A4-449D-9608-B883FAB94969}"/>
               </a:ext>
             </a:extLst>
           </p:cNvPr>
@@ -14169,7 +14619,7 @@
           <p:cNvPr id="20" name="TextBox 19">
             <a:extLst xmlns:a="http://schemas.openxmlformats.org/drawingml/2006/main">
               <a:ext uri="{FF2B5EF4-FFF2-40B4-BE49-F238E27FC236}">
-                <a16:creationId xmlns:a16="http://schemas.microsoft.com/office/drawing/2014/main" id="{0666B17E-0E6E-49C8-9645-50A5BEF13D4B}"/>
+                <a16:creationId xmlns:a16="http://schemas.microsoft.com/office/drawing/2014/main" id="{8C9A81C3-4B82-4C68-8CF0-2FB2190049DF}"/>
               </a:ext>
             </a:extLst>
           </p:cNvPr>
@@ -14206,7 +14656,7 @@
                 <a:ea typeface="Aptos"/>
                 <a:cs typeface="Aptos"/>
               </a:rPr>
-              <a:t>Statistics Canadan retail-sarja ja Health Canadan toimitukset ovat eri tapahtumatasoja. Kaikki vuoden 2024 RCS-neljännekset ovat E-laatua; silta on avoin.</a:t>
+              <a:t>Kanada läpäisee 7/10. D5: NAICS 459993/459999 -peitto. D7: tarkka vuositason virheraja puuttuu. D10: eri tapahtumatasojen silta on täsmäyttämättä.</a:t>
             </a:r>
           </a:p>
         </p:txBody>
@@ -14214,7 +14664,7 @@
     </p:spTree>
     <p:extLst>
       <p:ext uri="{BB962C8B-B14F-4D97-AF65-F5344CB8AC3E}">
-        <p14:creationId xmlns:p14="http://schemas.microsoft.com/office/powerpoint/2010/main" val="1202046478"/>
+        <p14:creationId xmlns:p14="http://schemas.microsoft.com/office/powerpoint/2010/main" val="1587937967"/>
       </p:ext>
     </p:extLst>
   </p:cSld>
@@ -14238,7 +14688,7 @@
           <p:cNvPr id="2" name="TextBox 1">
             <a:extLst xmlns:a="http://schemas.openxmlformats.org/drawingml/2006/main">
               <a:ext uri="{FF2B5EF4-FFF2-40B4-BE49-F238E27FC236}">
-                <a16:creationId xmlns:a16="http://schemas.microsoft.com/office/drawing/2014/main" id="{8576E100-6DF6-424C-8A28-8CBD4E430547}"/>
+                <a16:creationId xmlns:a16="http://schemas.microsoft.com/office/drawing/2014/main" id="{8B764819-61CD-4548-8029-A0A5F1316C1F}"/>
               </a:ext>
             </a:extLst>
           </p:cNvPr>
@@ -14285,7 +14735,7 @@
           <p:cNvPr id="3" name="TextBox 2">
             <a:extLst xmlns:a="http://schemas.openxmlformats.org/drawingml/2006/main">
               <a:ext uri="{FF2B5EF4-FFF2-40B4-BE49-F238E27FC236}">
-                <a16:creationId xmlns:a16="http://schemas.microsoft.com/office/drawing/2014/main" id="{86797CBA-BD00-49AC-972F-0C115D12C4CD}"/>
+                <a16:creationId xmlns:a16="http://schemas.microsoft.com/office/drawing/2014/main" id="{EB2A6E96-FDEC-463A-8128-09FCA0CAC425}"/>
               </a:ext>
             </a:extLst>
           </p:cNvPr>
@@ -14305,8 +14755,8 @@
           <a:noFill xmlns:a="http://schemas.openxmlformats.org/drawingml/2006/main"/>
         </p:spPr>
         <p:txBody>
-          <a:bodyPr xmlns:a="http://schemas.openxmlformats.org/drawingml/2006/main" wrap="square" lIns="36576" tIns="36576" rIns="36576" bIns="36576" anchor="t">
-            <a:spAutoFit/>
+          <a:bodyPr xmlns:a="http://schemas.openxmlformats.org/drawingml/2006/main" wrap="none" lIns="36576" tIns="36576" rIns="36576" bIns="36576" anchor="t">
+            <a:normAutofit fontScale="100000"/>
           </a:bodyPr>
           <a:lstStyle xmlns:a="http://schemas.openxmlformats.org/drawingml/2006/main"/>
           <a:p xmlns:a="http://schemas.openxmlformats.org/drawingml/2006/main">
@@ -14314,7 +14764,7 @@
               <a:buNone/>
             </a:pPr>
             <a:r>
-              <a:rPr sz="3000" b="1">
+              <a:rPr sz="2400" b="1">
                 <a:solidFill>
                   <a:srgbClr val="071A2B"/>
                 </a:solidFill>
@@ -14332,7 +14782,7 @@
           <p:cNvPr id="4" name="Rectangle 3">
             <a:extLst xmlns:a="http://schemas.openxmlformats.org/drawingml/2006/main">
               <a:ext uri="{FF2B5EF4-FFF2-40B4-BE49-F238E27FC236}">
-                <a16:creationId xmlns:a16="http://schemas.microsoft.com/office/drawing/2014/main" id="{893275DD-2320-46B2-B88B-7F7BF3797BC6}"/>
+                <a16:creationId xmlns:a16="http://schemas.microsoft.com/office/drawing/2014/main" id="{DD7BA262-C157-481A-9C91-A008BF41B979}"/>
               </a:ext>
             </a:extLst>
           </p:cNvPr>
@@ -14387,7 +14837,7 @@
           <p:cNvPr id="5" name="Rectangle 4">
             <a:extLst xmlns:a="http://schemas.openxmlformats.org/drawingml/2006/main">
               <a:ext uri="{FF2B5EF4-FFF2-40B4-BE49-F238E27FC236}">
-                <a16:creationId xmlns:a16="http://schemas.microsoft.com/office/drawing/2014/main" id="{A7E74ECC-DE39-4885-9669-2964EBFD10B6}"/>
+                <a16:creationId xmlns:a16="http://schemas.microsoft.com/office/drawing/2014/main" id="{FA58A9C3-8448-4684-BFDD-55B126FF9DAD}"/>
               </a:ext>
             </a:extLst>
           </p:cNvPr>
@@ -14442,7 +14892,7 @@
           <p:cNvPr id="6" name="TextBox 5">
             <a:extLst xmlns:a="http://schemas.openxmlformats.org/drawingml/2006/main">
               <a:ext uri="{FF2B5EF4-FFF2-40B4-BE49-F238E27FC236}">
-                <a16:creationId xmlns:a16="http://schemas.microsoft.com/office/drawing/2014/main" id="{1625FEBF-2924-40C4-BDCA-FDE5645920BD}"/>
+                <a16:creationId xmlns:a16="http://schemas.microsoft.com/office/drawing/2014/main" id="{DF5C6B30-3AF8-4248-9165-BEE61BDAD411}"/>
               </a:ext>
             </a:extLst>
           </p:cNvPr>
@@ -14479,7 +14929,7 @@
                 <a:ea typeface="Aptos"/>
                 <a:cs typeface="Aptos"/>
               </a:rPr>
-              <a:t>Julkinen riippumaton evidenssikooste · 2026.07.24-22 · 2026-07-24 · Lähteet: Destatis</a:t>
+              <a:t>Julkinen riippumaton evidenssikooste · 2026.07.25-24 · 2026-07-24 · Lähteet: Destatis</a:t>
             </a:r>
           </a:p>
         </p:txBody>
@@ -14489,7 +14939,7 @@
           <p:cNvPr id="7" name="TextBox 6">
             <a:extLst xmlns:a="http://schemas.openxmlformats.org/drawingml/2006/main">
               <a:ext uri="{FF2B5EF4-FFF2-40B4-BE49-F238E27FC236}">
-                <a16:creationId xmlns:a16="http://schemas.microsoft.com/office/drawing/2014/main" id="{5689CC12-7CB2-441C-953F-027C7B586F6C}"/>
+                <a16:creationId xmlns:a16="http://schemas.microsoft.com/office/drawing/2014/main" id="{DFD5B378-836B-46CA-AAF3-8500248DB82F}"/>
               </a:ext>
             </a:extLst>
           </p:cNvPr>
@@ -15002,7 +15452,7 @@
           <p:cNvPr id="9" name="TextBox 8">
             <a:extLst xmlns:a="http://schemas.openxmlformats.org/drawingml/2006/main">
               <a:ext uri="{FF2B5EF4-FFF2-40B4-BE49-F238E27FC236}">
-                <a16:creationId xmlns:a16="http://schemas.microsoft.com/office/drawing/2014/main" id="{72FBC270-F984-47D1-B45B-45684A10BBBA}"/>
+                <a16:creationId xmlns:a16="http://schemas.microsoft.com/office/drawing/2014/main" id="{B138C230-7529-49D0-9143-555C4F1E6D68}"/>
               </a:ext>
             </a:extLst>
           </p:cNvPr>
@@ -15047,7 +15497,7 @@
     </p:spTree>
     <p:extLst>
       <p:ext uri="{BB962C8B-B14F-4D97-AF65-F5344CB8AC3E}">
-        <p14:creationId xmlns:p14="http://schemas.microsoft.com/office/powerpoint/2010/main" val="212451897"/>
+        <p14:creationId xmlns:p14="http://schemas.microsoft.com/office/powerpoint/2010/main" val="594205297"/>
       </p:ext>
     </p:extLst>
   </p:cSld>
@@ -15071,7 +15521,7 @@
           <p:cNvPr id="2" name="TextBox 1">
             <a:extLst xmlns:a="http://schemas.openxmlformats.org/drawingml/2006/main">
               <a:ext uri="{FF2B5EF4-FFF2-40B4-BE49-F238E27FC236}">
-                <a16:creationId xmlns:a16="http://schemas.microsoft.com/office/drawing/2014/main" id="{B65427D8-BA0D-49F0-B58F-7BC4BAB6F311}"/>
+                <a16:creationId xmlns:a16="http://schemas.microsoft.com/office/drawing/2014/main" id="{56F7CFC4-8DD8-4A28-90E5-59CD5748EC11}"/>
               </a:ext>
             </a:extLst>
           </p:cNvPr>
@@ -15118,7 +15568,7 @@
           <p:cNvPr id="3" name="TextBox 2">
             <a:extLst xmlns:a="http://schemas.openxmlformats.org/drawingml/2006/main">
               <a:ext uri="{FF2B5EF4-FFF2-40B4-BE49-F238E27FC236}">
-                <a16:creationId xmlns:a16="http://schemas.microsoft.com/office/drawing/2014/main" id="{3F60C1D3-0187-47CB-B066-5F39079BDBDF}"/>
+                <a16:creationId xmlns:a16="http://schemas.microsoft.com/office/drawing/2014/main" id="{41E7B81C-3015-4F67-A134-4C31ACABBA16}"/>
               </a:ext>
             </a:extLst>
           </p:cNvPr>
@@ -15165,7 +15615,7 @@
           <p:cNvPr id="4" name="Rectangle 3">
             <a:extLst xmlns:a="http://schemas.openxmlformats.org/drawingml/2006/main">
               <a:ext uri="{FF2B5EF4-FFF2-40B4-BE49-F238E27FC236}">
-                <a16:creationId xmlns:a16="http://schemas.microsoft.com/office/drawing/2014/main" id="{23C0A76F-61FF-4BCC-9F5E-A7BBFA36401E}"/>
+                <a16:creationId xmlns:a16="http://schemas.microsoft.com/office/drawing/2014/main" id="{203130B4-35D1-4D13-AC5D-FAD0F9E36A14}"/>
               </a:ext>
             </a:extLst>
           </p:cNvPr>
@@ -15220,7 +15670,7 @@
           <p:cNvPr id="5" name="Rectangle 4">
             <a:extLst xmlns:a="http://schemas.openxmlformats.org/drawingml/2006/main">
               <a:ext uri="{FF2B5EF4-FFF2-40B4-BE49-F238E27FC236}">
-                <a16:creationId xmlns:a16="http://schemas.microsoft.com/office/drawing/2014/main" id="{611C22C2-ABE3-417A-B0F8-4594E989F322}"/>
+                <a16:creationId xmlns:a16="http://schemas.microsoft.com/office/drawing/2014/main" id="{F637019C-B553-43B2-96DC-75F0D64BB7F8}"/>
               </a:ext>
             </a:extLst>
           </p:cNvPr>
@@ -15275,7 +15725,7 @@
           <p:cNvPr id="6" name="TextBox 5">
             <a:extLst xmlns:a="http://schemas.openxmlformats.org/drawingml/2006/main">
               <a:ext uri="{FF2B5EF4-FFF2-40B4-BE49-F238E27FC236}">
-                <a16:creationId xmlns:a16="http://schemas.microsoft.com/office/drawing/2014/main" id="{75EC8F2B-6F46-46E8-B24D-C2778A8D8413}"/>
+                <a16:creationId xmlns:a16="http://schemas.microsoft.com/office/drawing/2014/main" id="{8DC07F8D-9083-4624-BE81-8E832CC2BD6B}"/>
               </a:ext>
             </a:extLst>
           </p:cNvPr>
@@ -15312,7 +15762,7 @@
                 <a:ea typeface="Aptos"/>
                 <a:cs typeface="Aptos"/>
               </a:rPr>
-              <a:t>Julkinen riippumaton evidenssikooste · 2026.07.24-22 · 2026-07-24 · Lähteet: Destatis; inTaste.de</a:t>
+              <a:t>Julkinen riippumaton evidenssikooste · 2026.07.25-24 · 2026-07-24 · Lähteet: Destatis; inTaste.de</a:t>
             </a:r>
           </a:p>
         </p:txBody>
@@ -15322,7 +15772,7 @@
           <p:cNvPr id="7" name="TextBox 6">
             <a:extLst xmlns:a="http://schemas.openxmlformats.org/drawingml/2006/main">
               <a:ext uri="{FF2B5EF4-FFF2-40B4-BE49-F238E27FC236}">
-                <a16:creationId xmlns:a16="http://schemas.microsoft.com/office/drawing/2014/main" id="{0929504F-88FC-4DAB-871E-B83D6791C78A}"/>
+                <a16:creationId xmlns:a16="http://schemas.microsoft.com/office/drawing/2014/main" id="{F60F545D-FE19-42E6-83BD-22C18BC0FF44}"/>
               </a:ext>
             </a:extLst>
           </p:cNvPr>
@@ -15369,7 +15819,7 @@
           <p:cNvPr id="8" name="Rounded Rectangle 7">
             <a:extLst xmlns:a="http://schemas.openxmlformats.org/drawingml/2006/main">
               <a:ext uri="{FF2B5EF4-FFF2-40B4-BE49-F238E27FC236}">
-                <a16:creationId xmlns:a16="http://schemas.microsoft.com/office/drawing/2014/main" id="{6D702931-83F2-492D-8367-6A405A03E558}"/>
+                <a16:creationId xmlns:a16="http://schemas.microsoft.com/office/drawing/2014/main" id="{3DBC2375-777E-4C90-9E12-EEA82445C0B0}"/>
               </a:ext>
             </a:extLst>
           </p:cNvPr>
@@ -15426,7 +15876,7 @@
           <p:cNvPr id="9" name="TextBox 8">
             <a:extLst xmlns:a="http://schemas.openxmlformats.org/drawingml/2006/main">
               <a:ext uri="{FF2B5EF4-FFF2-40B4-BE49-F238E27FC236}">
-                <a16:creationId xmlns:a16="http://schemas.microsoft.com/office/drawing/2014/main" id="{22DCB61E-ABD1-467E-861F-10430E9B1662}"/>
+                <a16:creationId xmlns:a16="http://schemas.microsoft.com/office/drawing/2014/main" id="{D54E68F6-4982-44F1-A071-0EC3EF488D71}"/>
               </a:ext>
             </a:extLst>
           </p:cNvPr>
@@ -15473,7 +15923,7 @@
           <p:cNvPr id="10" name="TextBox 9">
             <a:extLst xmlns:a="http://schemas.openxmlformats.org/drawingml/2006/main">
               <a:ext uri="{FF2B5EF4-FFF2-40B4-BE49-F238E27FC236}">
-                <a16:creationId xmlns:a16="http://schemas.microsoft.com/office/drawing/2014/main" id="{9275D6CF-27D0-4538-9923-11F5659E8775}"/>
+                <a16:creationId xmlns:a16="http://schemas.microsoft.com/office/drawing/2014/main" id="{9AB9EEA2-B848-43D7-84F0-DE6DD726BE6A}"/>
               </a:ext>
             </a:extLst>
           </p:cNvPr>
@@ -15520,7 +15970,7 @@
           <p:cNvPr id="11" name="Rounded Rectangle 10">
             <a:extLst xmlns:a="http://schemas.openxmlformats.org/drawingml/2006/main">
               <a:ext uri="{FF2B5EF4-FFF2-40B4-BE49-F238E27FC236}">
-                <a16:creationId xmlns:a16="http://schemas.microsoft.com/office/drawing/2014/main" id="{4ECE53C6-0E89-45E3-8A5D-D27A7E06B1F6}"/>
+                <a16:creationId xmlns:a16="http://schemas.microsoft.com/office/drawing/2014/main" id="{9CAFF340-E2B5-4888-9997-C2330994229E}"/>
               </a:ext>
             </a:extLst>
           </p:cNvPr>
@@ -15577,7 +16027,7 @@
           <p:cNvPr id="12" name="TextBox 11">
             <a:extLst xmlns:a="http://schemas.openxmlformats.org/drawingml/2006/main">
               <a:ext uri="{FF2B5EF4-FFF2-40B4-BE49-F238E27FC236}">
-                <a16:creationId xmlns:a16="http://schemas.microsoft.com/office/drawing/2014/main" id="{D7CA5C36-7439-4514-AC62-FC2BF27C8DEA}"/>
+                <a16:creationId xmlns:a16="http://schemas.microsoft.com/office/drawing/2014/main" id="{A6ECBD39-9909-45E9-9044-D00A20238F4A}"/>
               </a:ext>
             </a:extLst>
           </p:cNvPr>
@@ -15624,7 +16074,7 @@
           <p:cNvPr id="13" name="TextBox 12">
             <a:extLst xmlns:a="http://schemas.openxmlformats.org/drawingml/2006/main">
               <a:ext uri="{FF2B5EF4-FFF2-40B4-BE49-F238E27FC236}">
-                <a16:creationId xmlns:a16="http://schemas.microsoft.com/office/drawing/2014/main" id="{09142330-1F0B-4F99-84D3-DB5C96462416}"/>
+                <a16:creationId xmlns:a16="http://schemas.microsoft.com/office/drawing/2014/main" id="{42A6A795-7982-4AA8-9879-9FAD111DCAEB}"/>
               </a:ext>
             </a:extLst>
           </p:cNvPr>
@@ -15671,7 +16121,7 @@
           <p:cNvPr id="14" name="Rounded Rectangle 13">
             <a:extLst xmlns:a="http://schemas.openxmlformats.org/drawingml/2006/main">
               <a:ext uri="{FF2B5EF4-FFF2-40B4-BE49-F238E27FC236}">
-                <a16:creationId xmlns:a16="http://schemas.microsoft.com/office/drawing/2014/main" id="{D155AE0F-B975-4BF9-9C1B-B1842C0DB09E}"/>
+                <a16:creationId xmlns:a16="http://schemas.microsoft.com/office/drawing/2014/main" id="{97218E1B-C140-44CF-8A1B-D14744E9E053}"/>
               </a:ext>
             </a:extLst>
           </p:cNvPr>
@@ -15728,7 +16178,7 @@
           <p:cNvPr id="15" name="TextBox 14">
             <a:extLst xmlns:a="http://schemas.openxmlformats.org/drawingml/2006/main">
               <a:ext uri="{FF2B5EF4-FFF2-40B4-BE49-F238E27FC236}">
-                <a16:creationId xmlns:a16="http://schemas.microsoft.com/office/drawing/2014/main" id="{F2755945-CFFC-4012-9BB7-0E22497FCDFC}"/>
+                <a16:creationId xmlns:a16="http://schemas.microsoft.com/office/drawing/2014/main" id="{16B9A86D-9E51-485D-A00D-2FA2BC5E805D}"/>
               </a:ext>
             </a:extLst>
           </p:cNvPr>
@@ -15775,7 +16225,7 @@
           <p:cNvPr id="16" name="TextBox 15">
             <a:extLst xmlns:a="http://schemas.openxmlformats.org/drawingml/2006/main">
               <a:ext uri="{FF2B5EF4-FFF2-40B4-BE49-F238E27FC236}">
-                <a16:creationId xmlns:a16="http://schemas.microsoft.com/office/drawing/2014/main" id="{12C37370-1444-4B1C-9384-2EBFAF79507F}"/>
+                <a16:creationId xmlns:a16="http://schemas.microsoft.com/office/drawing/2014/main" id="{3B07D29F-DDED-4FC7-8621-9A17087E7F4D}"/>
               </a:ext>
             </a:extLst>
           </p:cNvPr>
@@ -15822,7 +16272,7 @@
           <p:cNvPr id="17" name="TextBox 16">
             <a:extLst xmlns:a="http://schemas.openxmlformats.org/drawingml/2006/main">
               <a:ext uri="{FF2B5EF4-FFF2-40B4-BE49-F238E27FC236}">
-                <a16:creationId xmlns:a16="http://schemas.microsoft.com/office/drawing/2014/main" id="{AD943854-2CF5-407E-9EC2-1FBF3D0680BA}"/>
+                <a16:creationId xmlns:a16="http://schemas.microsoft.com/office/drawing/2014/main" id="{98002460-733F-4728-B58C-D98E662BCC9C}"/>
               </a:ext>
             </a:extLst>
           </p:cNvPr>
@@ -15869,7 +16319,7 @@
           <p:cNvPr id="18" name="Rounded Rectangle 17">
             <a:extLst xmlns:a="http://schemas.openxmlformats.org/drawingml/2006/main">
               <a:ext uri="{FF2B5EF4-FFF2-40B4-BE49-F238E27FC236}">
-                <a16:creationId xmlns:a16="http://schemas.microsoft.com/office/drawing/2014/main" id="{5371D399-7D80-46D2-8E0C-2B303A79090F}"/>
+                <a16:creationId xmlns:a16="http://schemas.microsoft.com/office/drawing/2014/main" id="{800956F9-77B1-437F-ADBC-C900F4E74AB1}"/>
               </a:ext>
             </a:extLst>
           </p:cNvPr>
@@ -15926,7 +16376,7 @@
           <p:cNvPr id="19" name="TextBox 18">
             <a:extLst xmlns:a="http://schemas.openxmlformats.org/drawingml/2006/main">
               <a:ext uri="{FF2B5EF4-FFF2-40B4-BE49-F238E27FC236}">
-                <a16:creationId xmlns:a16="http://schemas.microsoft.com/office/drawing/2014/main" id="{3F304C3E-9AAF-430E-84E3-7279CE5B1C6A}"/>
+                <a16:creationId xmlns:a16="http://schemas.microsoft.com/office/drawing/2014/main" id="{3075B220-B453-46A5-B050-D2830BE8BCBE}"/>
               </a:ext>
             </a:extLst>
           </p:cNvPr>
@@ -15973,7 +16423,7 @@
           <p:cNvPr id="20" name="TextBox 19">
             <a:extLst xmlns:a="http://schemas.openxmlformats.org/drawingml/2006/main">
               <a:ext uri="{FF2B5EF4-FFF2-40B4-BE49-F238E27FC236}">
-                <a16:creationId xmlns:a16="http://schemas.microsoft.com/office/drawing/2014/main" id="{41491FE3-52AD-47C6-866A-127C56CBB795}"/>
+                <a16:creationId xmlns:a16="http://schemas.microsoft.com/office/drawing/2014/main" id="{9E59822E-3888-4DD2-ADFC-699934728558}"/>
               </a:ext>
             </a:extLst>
           </p:cNvPr>
@@ -16018,7 +16468,7 @@
     </p:spTree>
     <p:extLst>
       <p:ext uri="{BB962C8B-B14F-4D97-AF65-F5344CB8AC3E}">
-        <p14:creationId xmlns:p14="http://schemas.microsoft.com/office/powerpoint/2010/main" val="1266954240"/>
+        <p14:creationId xmlns:p14="http://schemas.microsoft.com/office/powerpoint/2010/main" val="508191430"/>
       </p:ext>
     </p:extLst>
   </p:cSld>
@@ -16042,7 +16492,7 @@
           <p:cNvPr id="2" name="TextBox 1">
             <a:extLst xmlns:a="http://schemas.openxmlformats.org/drawingml/2006/main">
               <a:ext uri="{FF2B5EF4-FFF2-40B4-BE49-F238E27FC236}">
-                <a16:creationId xmlns:a16="http://schemas.microsoft.com/office/drawing/2014/main" id="{4ABD5304-187E-4317-B9B2-BE8C43D172FD}"/>
+                <a16:creationId xmlns:a16="http://schemas.microsoft.com/office/drawing/2014/main" id="{22836512-29DA-4C43-BB03-6375C77A6A99}"/>
               </a:ext>
             </a:extLst>
           </p:cNvPr>
@@ -16089,7 +16539,7 @@
           <p:cNvPr id="3" name="TextBox 2">
             <a:extLst xmlns:a="http://schemas.openxmlformats.org/drawingml/2006/main">
               <a:ext uri="{FF2B5EF4-FFF2-40B4-BE49-F238E27FC236}">
-                <a16:creationId xmlns:a16="http://schemas.microsoft.com/office/drawing/2014/main" id="{4818269A-3BD5-4A2D-B0F9-C8ECF226D1D4}"/>
+                <a16:creationId xmlns:a16="http://schemas.microsoft.com/office/drawing/2014/main" id="{8AE1A94A-DCC1-4317-BEB6-834B95F89A6F}"/>
               </a:ext>
             </a:extLst>
           </p:cNvPr>
@@ -16136,7 +16586,7 @@
           <p:cNvPr id="4" name="Rectangle 3">
             <a:extLst xmlns:a="http://schemas.openxmlformats.org/drawingml/2006/main">
               <a:ext uri="{FF2B5EF4-FFF2-40B4-BE49-F238E27FC236}">
-                <a16:creationId xmlns:a16="http://schemas.microsoft.com/office/drawing/2014/main" id="{6450080A-7D4D-4E42-BF0F-9728AD2AB85F}"/>
+                <a16:creationId xmlns:a16="http://schemas.microsoft.com/office/drawing/2014/main" id="{D9AEB806-D4D7-4723-8E1C-039BC07036B5}"/>
               </a:ext>
             </a:extLst>
           </p:cNvPr>
@@ -16191,7 +16641,7 @@
           <p:cNvPr id="5" name="Rectangle 4">
             <a:extLst xmlns:a="http://schemas.openxmlformats.org/drawingml/2006/main">
               <a:ext uri="{FF2B5EF4-FFF2-40B4-BE49-F238E27FC236}">
-                <a16:creationId xmlns:a16="http://schemas.microsoft.com/office/drawing/2014/main" id="{7905DDEA-C2F5-43DC-84CF-CE20E0476BF6}"/>
+                <a16:creationId xmlns:a16="http://schemas.microsoft.com/office/drawing/2014/main" id="{512B0AA6-2F97-4A62-8068-BF7FCDB047B0}"/>
               </a:ext>
             </a:extLst>
           </p:cNvPr>
@@ -16246,7 +16696,7 @@
           <p:cNvPr id="6" name="TextBox 5">
             <a:extLst xmlns:a="http://schemas.openxmlformats.org/drawingml/2006/main">
               <a:ext uri="{FF2B5EF4-FFF2-40B4-BE49-F238E27FC236}">
-                <a16:creationId xmlns:a16="http://schemas.microsoft.com/office/drawing/2014/main" id="{6B360197-FFAC-46EB-B51E-079E9B9BF2E8}"/>
+                <a16:creationId xmlns:a16="http://schemas.microsoft.com/office/drawing/2014/main" id="{ED489B94-C271-4F8A-881E-66C483505806}"/>
               </a:ext>
             </a:extLst>
           </p:cNvPr>
@@ -16283,7 +16733,7 @@
                 <a:ea typeface="Aptos"/>
                 <a:cs typeface="Aptos"/>
               </a:rPr>
-              <a:t>Julkinen riippumaton evidenssikooste · 2026.07.24-22 · 2026-07-24 · Lähteet: IMARC; GVR; Fortune; European Commission</a:t>
+              <a:t>Julkinen riippumaton evidenssikooste · 2026.07.25-24 · 2026-07-24 · Lähteet: IMARC; GVR; Fortune; European Commission</a:t>
             </a:r>
           </a:p>
         </p:txBody>
@@ -16293,7 +16743,7 @@
           <p:cNvPr id="7" name="TextBox 6">
             <a:extLst xmlns:a="http://schemas.openxmlformats.org/drawingml/2006/main">
               <a:ext uri="{FF2B5EF4-FFF2-40B4-BE49-F238E27FC236}">
-                <a16:creationId xmlns:a16="http://schemas.microsoft.com/office/drawing/2014/main" id="{6B107A14-6309-4FBD-9209-E2DD2E757930}"/>
+                <a16:creationId xmlns:a16="http://schemas.microsoft.com/office/drawing/2014/main" id="{6AA875AE-5DF8-49F1-9155-45FE59F50265}"/>
               </a:ext>
             </a:extLst>
           </p:cNvPr>
@@ -16340,7 +16790,7 @@
           <p:cNvPr id="8" name="Rounded Rectangle 7">
             <a:extLst xmlns:a="http://schemas.openxmlformats.org/drawingml/2006/main">
               <a:ext uri="{FF2B5EF4-FFF2-40B4-BE49-F238E27FC236}">
-                <a16:creationId xmlns:a16="http://schemas.microsoft.com/office/drawing/2014/main" id="{F98A8271-B6E1-45C6-9CC0-64301B329598}"/>
+                <a16:creationId xmlns:a16="http://schemas.microsoft.com/office/drawing/2014/main" id="{5E9E22E0-5111-4131-B72E-B1AD22F9AFDF}"/>
               </a:ext>
             </a:extLst>
           </p:cNvPr>
@@ -16397,7 +16847,7 @@
           <p:cNvPr id="9" name="TextBox 8">
             <a:extLst xmlns:a="http://schemas.openxmlformats.org/drawingml/2006/main">
               <a:ext uri="{FF2B5EF4-FFF2-40B4-BE49-F238E27FC236}">
-                <a16:creationId xmlns:a16="http://schemas.microsoft.com/office/drawing/2014/main" id="{9A4732FA-3E49-4F66-8E83-2359FE880BE6}"/>
+                <a16:creationId xmlns:a16="http://schemas.microsoft.com/office/drawing/2014/main" id="{CA6C2A7B-7986-45B6-ABE3-09560F18FF55}"/>
               </a:ext>
             </a:extLst>
           </p:cNvPr>
@@ -16444,7 +16894,7 @@
           <p:cNvPr id="10" name="TextBox 9">
             <a:extLst xmlns:a="http://schemas.openxmlformats.org/drawingml/2006/main">
               <a:ext uri="{FF2B5EF4-FFF2-40B4-BE49-F238E27FC236}">
-                <a16:creationId xmlns:a16="http://schemas.microsoft.com/office/drawing/2014/main" id="{67541248-4EA5-4E3F-AA18-A8077DEB3C78}"/>
+                <a16:creationId xmlns:a16="http://schemas.microsoft.com/office/drawing/2014/main" id="{3B882AE5-6311-4E1B-BD53-BC3131B0BFD5}"/>
               </a:ext>
             </a:extLst>
           </p:cNvPr>
@@ -16491,7 +16941,7 @@
           <p:cNvPr id="11" name="Rounded Rectangle 10">
             <a:extLst xmlns:a="http://schemas.openxmlformats.org/drawingml/2006/main">
               <a:ext uri="{FF2B5EF4-FFF2-40B4-BE49-F238E27FC236}">
-                <a16:creationId xmlns:a16="http://schemas.microsoft.com/office/drawing/2014/main" id="{8C358269-0A87-4D44-96D2-0CFDD9112065}"/>
+                <a16:creationId xmlns:a16="http://schemas.microsoft.com/office/drawing/2014/main" id="{72DFF003-8CC1-4BB6-A075-E76C49012BA0}"/>
               </a:ext>
             </a:extLst>
           </p:cNvPr>
@@ -16548,7 +16998,7 @@
           <p:cNvPr id="12" name="TextBox 11">
             <a:extLst xmlns:a="http://schemas.openxmlformats.org/drawingml/2006/main">
               <a:ext uri="{FF2B5EF4-FFF2-40B4-BE49-F238E27FC236}">
-                <a16:creationId xmlns:a16="http://schemas.microsoft.com/office/drawing/2014/main" id="{6A0AF0B2-F627-4778-81A2-273BFFB23C8B}"/>
+                <a16:creationId xmlns:a16="http://schemas.microsoft.com/office/drawing/2014/main" id="{249A833D-D6F3-41DA-9CF7-DF6DE49177C9}"/>
               </a:ext>
             </a:extLst>
           </p:cNvPr>
@@ -16595,7 +17045,7 @@
           <p:cNvPr id="13" name="TextBox 12">
             <a:extLst xmlns:a="http://schemas.openxmlformats.org/drawingml/2006/main">
               <a:ext uri="{FF2B5EF4-FFF2-40B4-BE49-F238E27FC236}">
-                <a16:creationId xmlns:a16="http://schemas.microsoft.com/office/drawing/2014/main" id="{1CC83FDC-0258-47A4-BCA0-EF4B7CE6539C}"/>
+                <a16:creationId xmlns:a16="http://schemas.microsoft.com/office/drawing/2014/main" id="{A407874B-2C1E-46D5-BB4A-DDE7059281E5}"/>
               </a:ext>
             </a:extLst>
           </p:cNvPr>
@@ -16642,7 +17092,7 @@
           <p:cNvPr id="14" name="Rounded Rectangle 13">
             <a:extLst xmlns:a="http://schemas.openxmlformats.org/drawingml/2006/main">
               <a:ext uri="{FF2B5EF4-FFF2-40B4-BE49-F238E27FC236}">
-                <a16:creationId xmlns:a16="http://schemas.microsoft.com/office/drawing/2014/main" id="{BC037DDF-EAA7-43E7-9728-673ABADCA7C6}"/>
+                <a16:creationId xmlns:a16="http://schemas.microsoft.com/office/drawing/2014/main" id="{D1FD7DBD-F47B-471B-9F70-099D142F0FE4}"/>
               </a:ext>
             </a:extLst>
           </p:cNvPr>
@@ -16699,7 +17149,7 @@
           <p:cNvPr id="15" name="TextBox 14">
             <a:extLst xmlns:a="http://schemas.openxmlformats.org/drawingml/2006/main">
               <a:ext uri="{FF2B5EF4-FFF2-40B4-BE49-F238E27FC236}">
-                <a16:creationId xmlns:a16="http://schemas.microsoft.com/office/drawing/2014/main" id="{C5027D89-97C3-4359-9A07-6E2A453DC48A}"/>
+                <a16:creationId xmlns:a16="http://schemas.microsoft.com/office/drawing/2014/main" id="{084A6F9E-DCEC-4553-83A4-30C2A627AC85}"/>
               </a:ext>
             </a:extLst>
           </p:cNvPr>
@@ -16746,7 +17196,7 @@
           <p:cNvPr id="16" name="TextBox 15">
             <a:extLst xmlns:a="http://schemas.openxmlformats.org/drawingml/2006/main">
               <a:ext uri="{FF2B5EF4-FFF2-40B4-BE49-F238E27FC236}">
-                <a16:creationId xmlns:a16="http://schemas.microsoft.com/office/drawing/2014/main" id="{F6D14FF7-9517-449C-99A9-8CDF039A710F}"/>
+                <a16:creationId xmlns:a16="http://schemas.microsoft.com/office/drawing/2014/main" id="{7154CC2E-C15B-4E98-8700-D76A64CD6C08}"/>
               </a:ext>
             </a:extLst>
           </p:cNvPr>
@@ -16793,7 +17243,7 @@
           <p:cNvPr id="17" name="Rounded Rectangle 16">
             <a:extLst xmlns:a="http://schemas.openxmlformats.org/drawingml/2006/main">
               <a:ext uri="{FF2B5EF4-FFF2-40B4-BE49-F238E27FC236}">
-                <a16:creationId xmlns:a16="http://schemas.microsoft.com/office/drawing/2014/main" id="{FB791165-0661-41E5-9786-700C5649F1EF}"/>
+                <a16:creationId xmlns:a16="http://schemas.microsoft.com/office/drawing/2014/main" id="{AD9C5667-C086-4C9E-BCDB-E8D2BC1AD6EC}"/>
               </a:ext>
             </a:extLst>
           </p:cNvPr>
@@ -16850,7 +17300,7 @@
           <p:cNvPr id="18" name="TextBox 17">
             <a:extLst xmlns:a="http://schemas.openxmlformats.org/drawingml/2006/main">
               <a:ext uri="{FF2B5EF4-FFF2-40B4-BE49-F238E27FC236}">
-                <a16:creationId xmlns:a16="http://schemas.microsoft.com/office/drawing/2014/main" id="{FDE822D4-A806-495A-970F-3187064BC043}"/>
+                <a16:creationId xmlns:a16="http://schemas.microsoft.com/office/drawing/2014/main" id="{7C074645-D7D1-43A8-B1B9-78F4603422E2}"/>
               </a:ext>
             </a:extLst>
           </p:cNvPr>
@@ -16897,7 +17347,7 @@
           <p:cNvPr id="19" name="TextBox 18">
             <a:extLst xmlns:a="http://schemas.openxmlformats.org/drawingml/2006/main">
               <a:ext uri="{FF2B5EF4-FFF2-40B4-BE49-F238E27FC236}">
-                <a16:creationId xmlns:a16="http://schemas.microsoft.com/office/drawing/2014/main" id="{F82E5F04-A8CA-4350-BE37-B1C74083F7CE}"/>
+                <a16:creationId xmlns:a16="http://schemas.microsoft.com/office/drawing/2014/main" id="{EEC93E3D-FEAB-4158-9B33-BDEEFE2B048E}"/>
               </a:ext>
             </a:extLst>
           </p:cNvPr>
@@ -16944,7 +17394,7 @@
           <p:cNvPr id="20" name="TextBox 19">
             <a:extLst xmlns:a="http://schemas.openxmlformats.org/drawingml/2006/main">
               <a:ext uri="{FF2B5EF4-FFF2-40B4-BE49-F238E27FC236}">
-                <a16:creationId xmlns:a16="http://schemas.microsoft.com/office/drawing/2014/main" id="{59A12404-F31B-4642-941B-0449904482EA}"/>
+                <a16:creationId xmlns:a16="http://schemas.microsoft.com/office/drawing/2014/main" id="{7C7BE1B8-F2C1-4378-AFBF-22CC108583F3}"/>
               </a:ext>
             </a:extLst>
           </p:cNvPr>
@@ -16991,7 +17441,7 @@
           <p:cNvPr id="21" name="Rounded Rectangle 20">
             <a:extLst xmlns:a="http://schemas.openxmlformats.org/drawingml/2006/main">
               <a:ext uri="{FF2B5EF4-FFF2-40B4-BE49-F238E27FC236}">
-                <a16:creationId xmlns:a16="http://schemas.microsoft.com/office/drawing/2014/main" id="{0B177C59-C5F4-41E7-8D37-09244A55CCA1}"/>
+                <a16:creationId xmlns:a16="http://schemas.microsoft.com/office/drawing/2014/main" id="{EC6480F6-B3E2-41DF-A9D3-5EB8B3655D13}"/>
               </a:ext>
             </a:extLst>
           </p:cNvPr>
@@ -17048,7 +17498,7 @@
           <p:cNvPr id="22" name="TextBox 21">
             <a:extLst xmlns:a="http://schemas.openxmlformats.org/drawingml/2006/main">
               <a:ext uri="{FF2B5EF4-FFF2-40B4-BE49-F238E27FC236}">
-                <a16:creationId xmlns:a16="http://schemas.microsoft.com/office/drawing/2014/main" id="{ECC3AFA1-29F3-4EDA-8D52-41CC3A8B1A3A}"/>
+                <a16:creationId xmlns:a16="http://schemas.microsoft.com/office/drawing/2014/main" id="{D22FE9E0-CA66-4A6C-9D37-577B1236F152}"/>
               </a:ext>
             </a:extLst>
           </p:cNvPr>
@@ -17095,7 +17545,7 @@
           <p:cNvPr id="23" name="TextBox 22">
             <a:extLst xmlns:a="http://schemas.openxmlformats.org/drawingml/2006/main">
               <a:ext uri="{FF2B5EF4-FFF2-40B4-BE49-F238E27FC236}">
-                <a16:creationId xmlns:a16="http://schemas.microsoft.com/office/drawing/2014/main" id="{3AF3135E-E3C3-4EFA-AD7C-C8B30FDEC526}"/>
+                <a16:creationId xmlns:a16="http://schemas.microsoft.com/office/drawing/2014/main" id="{8B94F67D-69FB-433C-9399-7B088232A9BA}"/>
               </a:ext>
             </a:extLst>
           </p:cNvPr>
@@ -17140,7 +17590,7 @@
     </p:spTree>
     <p:extLst>
       <p:ext uri="{BB962C8B-B14F-4D97-AF65-F5344CB8AC3E}">
-        <p14:creationId xmlns:p14="http://schemas.microsoft.com/office/powerpoint/2010/main" val="706303706"/>
+        <p14:creationId xmlns:p14="http://schemas.microsoft.com/office/powerpoint/2010/main" val="462147149"/>
       </p:ext>
     </p:extLst>
   </p:cSld>
@@ -17164,7 +17614,7 @@
           <p:cNvPr id="2" name="TextBox 1">
             <a:extLst xmlns:a="http://schemas.openxmlformats.org/drawingml/2006/main">
               <a:ext uri="{FF2B5EF4-FFF2-40B4-BE49-F238E27FC236}">
-                <a16:creationId xmlns:a16="http://schemas.microsoft.com/office/drawing/2014/main" id="{FD3EE291-7F9A-421F-85D3-BDEE89F9AEB3}"/>
+                <a16:creationId xmlns:a16="http://schemas.microsoft.com/office/drawing/2014/main" id="{37103061-029B-412E-8F79-3018635FA464}"/>
               </a:ext>
             </a:extLst>
           </p:cNvPr>
@@ -17211,7 +17661,7 @@
           <p:cNvPr id="3" name="TextBox 2">
             <a:extLst xmlns:a="http://schemas.openxmlformats.org/drawingml/2006/main">
               <a:ext uri="{FF2B5EF4-FFF2-40B4-BE49-F238E27FC236}">
-                <a16:creationId xmlns:a16="http://schemas.microsoft.com/office/drawing/2014/main" id="{CC082473-B0C3-4789-9814-F436F6804680}"/>
+                <a16:creationId xmlns:a16="http://schemas.microsoft.com/office/drawing/2014/main" id="{B29399FF-BC29-4349-A27D-83990713BF99}"/>
               </a:ext>
             </a:extLst>
           </p:cNvPr>
@@ -17258,7 +17708,7 @@
           <p:cNvPr id="4" name="Rectangle 3">
             <a:extLst xmlns:a="http://schemas.openxmlformats.org/drawingml/2006/main">
               <a:ext uri="{FF2B5EF4-FFF2-40B4-BE49-F238E27FC236}">
-                <a16:creationId xmlns:a16="http://schemas.microsoft.com/office/drawing/2014/main" id="{5C0D17C5-C0F7-45D8-A04B-A1345E60C146}"/>
+                <a16:creationId xmlns:a16="http://schemas.microsoft.com/office/drawing/2014/main" id="{7392BFA0-6A3F-44EA-BC97-50505EF7D076}"/>
               </a:ext>
             </a:extLst>
           </p:cNvPr>
@@ -17313,7 +17763,7 @@
           <p:cNvPr id="5" name="Rectangle 4">
             <a:extLst xmlns:a="http://schemas.openxmlformats.org/drawingml/2006/main">
               <a:ext uri="{FF2B5EF4-FFF2-40B4-BE49-F238E27FC236}">
-                <a16:creationId xmlns:a16="http://schemas.microsoft.com/office/drawing/2014/main" id="{8ECE5115-EBE1-41F3-A1ED-72DBB89380CF}"/>
+                <a16:creationId xmlns:a16="http://schemas.microsoft.com/office/drawing/2014/main" id="{9B795E48-6192-46DE-9D3E-96FD158EE453}"/>
               </a:ext>
             </a:extLst>
           </p:cNvPr>
@@ -17368,7 +17818,7 @@
           <p:cNvPr id="6" name="TextBox 5">
             <a:extLst xmlns:a="http://schemas.openxmlformats.org/drawingml/2006/main">
               <a:ext uri="{FF2B5EF4-FFF2-40B4-BE49-F238E27FC236}">
-                <a16:creationId xmlns:a16="http://schemas.microsoft.com/office/drawing/2014/main" id="{CE6AD552-A2D6-401B-B46C-E2A33B50A045}"/>
+                <a16:creationId xmlns:a16="http://schemas.microsoft.com/office/drawing/2014/main" id="{38A7FA43-F443-47F8-925D-8388405739E9}"/>
               </a:ext>
             </a:extLst>
           </p:cNvPr>
@@ -17405,7 +17855,7 @@
                 <a:ea typeface="Aptos"/>
                 <a:cs typeface="Aptos"/>
               </a:rPr>
-              <a:t>Julkinen riippumaton evidenssikooste · 2026.07.24-22 · 2026-07-24 · Lähteet: Market-values modelReadiness, donorProtocol ja donorCandidates</a:t>
+              <a:t>Julkinen riippumaton evidenssikooste · 2026.07.25-24 · 2026-07-24 · Lähteet: Market-values modelReadiness, donorProtocol ja donorCandidates</a:t>
             </a:r>
           </a:p>
         </p:txBody>
@@ -17415,7 +17865,7 @@
           <p:cNvPr id="7" name="TextBox 6">
             <a:extLst xmlns:a="http://schemas.openxmlformats.org/drawingml/2006/main">
               <a:ext uri="{FF2B5EF4-FFF2-40B4-BE49-F238E27FC236}">
-                <a16:creationId xmlns:a16="http://schemas.microsoft.com/office/drawing/2014/main" id="{AFED8B42-3774-4629-AB89-F5184ABDE5AA}"/>
+                <a16:creationId xmlns:a16="http://schemas.microsoft.com/office/drawing/2014/main" id="{8D0AA782-DB34-46A1-BA65-C7E2F1652A49}"/>
               </a:ext>
             </a:extLst>
           </p:cNvPr>
@@ -17462,7 +17912,7 @@
           <p:cNvPr id="8" name="TextBox 7">
             <a:extLst xmlns:a="http://schemas.openxmlformats.org/drawingml/2006/main">
               <a:ext uri="{FF2B5EF4-FFF2-40B4-BE49-F238E27FC236}">
-                <a16:creationId xmlns:a16="http://schemas.microsoft.com/office/drawing/2014/main" id="{D83F0F5F-0172-4768-AAF5-71CF32A2FD79}"/>
+                <a16:creationId xmlns:a16="http://schemas.microsoft.com/office/drawing/2014/main" id="{AC40E960-68FA-4148-9A2B-3E7CA8D2C694}"/>
               </a:ext>
             </a:extLst>
           </p:cNvPr>
@@ -17509,7 +17959,7 @@
           <p:cNvPr id="9" name="TextBox 8">
             <a:extLst xmlns:a="http://schemas.openxmlformats.org/drawingml/2006/main">
               <a:ext uri="{FF2B5EF4-FFF2-40B4-BE49-F238E27FC236}">
-                <a16:creationId xmlns:a16="http://schemas.microsoft.com/office/drawing/2014/main" id="{7758C20A-57DC-4434-97A7-85E7D74CEB31}"/>
+                <a16:creationId xmlns:a16="http://schemas.microsoft.com/office/drawing/2014/main" id="{289870A2-DD2E-41F4-B2F7-EFC90C5A76AC}"/>
               </a:ext>
             </a:extLst>
           </p:cNvPr>
@@ -17606,7 +18056,7 @@
           <p:cNvPr id="10" name="Rounded Rectangle 9">
             <a:extLst xmlns:a="http://schemas.openxmlformats.org/drawingml/2006/main">
               <a:ext uri="{FF2B5EF4-FFF2-40B4-BE49-F238E27FC236}">
-                <a16:creationId xmlns:a16="http://schemas.microsoft.com/office/drawing/2014/main" id="{E8A37B01-1221-470B-A566-983DFE777E32}"/>
+                <a16:creationId xmlns:a16="http://schemas.microsoft.com/office/drawing/2014/main" id="{5FBA22B8-1608-4967-AC4B-9C595ACF309B}"/>
               </a:ext>
             </a:extLst>
           </p:cNvPr>
@@ -17663,7 +18113,7 @@
           <p:cNvPr id="11" name="TextBox 10">
             <a:extLst xmlns:a="http://schemas.openxmlformats.org/drawingml/2006/main">
               <a:ext uri="{FF2B5EF4-FFF2-40B4-BE49-F238E27FC236}">
-                <a16:creationId xmlns:a16="http://schemas.microsoft.com/office/drawing/2014/main" id="{EAE0609E-7814-4E01-9079-B0E71891A32A}"/>
+                <a16:creationId xmlns:a16="http://schemas.microsoft.com/office/drawing/2014/main" id="{305528C0-273D-4140-AFD9-726E4B307633}"/>
               </a:ext>
             </a:extLst>
           </p:cNvPr>
@@ -17710,7 +18160,7 @@
           <p:cNvPr id="12" name="TextBox 11">
             <a:extLst xmlns:a="http://schemas.openxmlformats.org/drawingml/2006/main">
               <a:ext uri="{FF2B5EF4-FFF2-40B4-BE49-F238E27FC236}">
-                <a16:creationId xmlns:a16="http://schemas.microsoft.com/office/drawing/2014/main" id="{49E55E7E-85EA-4DC2-B467-C10FA0557868}"/>
+                <a16:creationId xmlns:a16="http://schemas.microsoft.com/office/drawing/2014/main" id="{C4B31B1E-CBA2-4EF9-8560-F4F413B080FC}"/>
               </a:ext>
             </a:extLst>
           </p:cNvPr>
@@ -17755,7 +18205,7 @@
     </p:spTree>
     <p:extLst>
       <p:ext uri="{BB962C8B-B14F-4D97-AF65-F5344CB8AC3E}">
-        <p14:creationId xmlns:p14="http://schemas.microsoft.com/office/powerpoint/2010/main" val="51580357"/>
+        <p14:creationId xmlns:p14="http://schemas.microsoft.com/office/powerpoint/2010/main" val="387743781"/>
       </p:ext>
     </p:extLst>
   </p:cSld>
@@ -17779,7 +18229,7 @@
           <p:cNvPr id="2" name="TextBox 1">
             <a:extLst xmlns:a="http://schemas.openxmlformats.org/drawingml/2006/main">
               <a:ext uri="{FF2B5EF4-FFF2-40B4-BE49-F238E27FC236}">
-                <a16:creationId xmlns:a16="http://schemas.microsoft.com/office/drawing/2014/main" id="{987B3DD2-5BC7-4F0E-A34B-A8215B9DA34F}"/>
+                <a16:creationId xmlns:a16="http://schemas.microsoft.com/office/drawing/2014/main" id="{E7BEECED-FB53-48BF-B56C-68493CE6E341}"/>
               </a:ext>
             </a:extLst>
           </p:cNvPr>
@@ -17826,7 +18276,7 @@
           <p:cNvPr id="3" name="TextBox 2">
             <a:extLst xmlns:a="http://schemas.openxmlformats.org/drawingml/2006/main">
               <a:ext uri="{FF2B5EF4-FFF2-40B4-BE49-F238E27FC236}">
-                <a16:creationId xmlns:a16="http://schemas.microsoft.com/office/drawing/2014/main" id="{B2948514-F352-4D5F-9093-633CD4F47CF8}"/>
+                <a16:creationId xmlns:a16="http://schemas.microsoft.com/office/drawing/2014/main" id="{1FEFF3B3-5A70-4CC6-BDA1-61C28B7CE872}"/>
               </a:ext>
             </a:extLst>
           </p:cNvPr>
@@ -17846,8 +18296,8 @@
           <a:noFill xmlns:a="http://schemas.openxmlformats.org/drawingml/2006/main"/>
         </p:spPr>
         <p:txBody>
-          <a:bodyPr xmlns:a="http://schemas.openxmlformats.org/drawingml/2006/main" wrap="square" lIns="36576" tIns="36576" rIns="36576" bIns="36576" anchor="t">
-            <a:spAutoFit/>
+          <a:bodyPr xmlns:a="http://schemas.openxmlformats.org/drawingml/2006/main" wrap="none" lIns="36576" tIns="36576" rIns="36576" bIns="36576" anchor="t">
+            <a:normAutofit fontScale="100000"/>
           </a:bodyPr>
           <a:lstStyle xmlns:a="http://schemas.openxmlformats.org/drawingml/2006/main"/>
           <a:p xmlns:a="http://schemas.openxmlformats.org/drawingml/2006/main">
@@ -17855,7 +18305,7 @@
               <a:buNone/>
             </a:pPr>
             <a:r>
-              <a:rPr sz="3000" b="1">
+              <a:rPr sz="2400" b="1">
                 <a:solidFill>
                   <a:srgbClr val="071A2B"/>
                 </a:solidFill>
@@ -17873,7 +18323,7 @@
           <p:cNvPr id="4" name="Rectangle 3">
             <a:extLst xmlns:a="http://schemas.openxmlformats.org/drawingml/2006/main">
               <a:ext uri="{FF2B5EF4-FFF2-40B4-BE49-F238E27FC236}">
-                <a16:creationId xmlns:a16="http://schemas.microsoft.com/office/drawing/2014/main" id="{9EAEE3C6-2C79-48E5-B096-EAC1D16DE80B}"/>
+                <a16:creationId xmlns:a16="http://schemas.microsoft.com/office/drawing/2014/main" id="{9D2FC945-CE1F-49F9-94CF-32AAA46A5AAE}"/>
               </a:ext>
             </a:extLst>
           </p:cNvPr>
@@ -17928,7 +18378,7 @@
           <p:cNvPr id="5" name="Rectangle 4">
             <a:extLst xmlns:a="http://schemas.openxmlformats.org/drawingml/2006/main">
               <a:ext uri="{FF2B5EF4-FFF2-40B4-BE49-F238E27FC236}">
-                <a16:creationId xmlns:a16="http://schemas.microsoft.com/office/drawing/2014/main" id="{930F6FD1-FEE8-41FF-9966-067B0A5140C1}"/>
+                <a16:creationId xmlns:a16="http://schemas.microsoft.com/office/drawing/2014/main" id="{22DA88C0-6388-4F69-A78C-A67916DFB5B6}"/>
               </a:ext>
             </a:extLst>
           </p:cNvPr>
@@ -17983,7 +18433,7 @@
           <p:cNvPr id="6" name="TextBox 5">
             <a:extLst xmlns:a="http://schemas.openxmlformats.org/drawingml/2006/main">
               <a:ext uri="{FF2B5EF4-FFF2-40B4-BE49-F238E27FC236}">
-                <a16:creationId xmlns:a16="http://schemas.microsoft.com/office/drawing/2014/main" id="{FA0B1EFA-0193-4D2F-8AF3-BFA3B268259D}"/>
+                <a16:creationId xmlns:a16="http://schemas.microsoft.com/office/drawing/2014/main" id="{03E340A3-7157-4AEC-A7C2-DB1BC1B5F1A2}"/>
               </a:ext>
             </a:extLst>
           </p:cNvPr>
@@ -18020,7 +18470,7 @@
                 <a:ea typeface="Aptos"/>
                 <a:cs typeface="Aptos"/>
               </a:rPr>
-              <a:t>Julkinen riippumaton evidenssikooste · 2026.07.24-22 · 2026-07-24 · Lähteet: WIPO valuation; Evidence Register</a:t>
+              <a:t>Julkinen riippumaton evidenssikooste · 2026.07.25-24 · 2026-07-24 · Lähteet: WIPO valuation; Evidence Register</a:t>
             </a:r>
           </a:p>
         </p:txBody>
@@ -18030,7 +18480,7 @@
           <p:cNvPr id="7" name="TextBox 6">
             <a:extLst xmlns:a="http://schemas.openxmlformats.org/drawingml/2006/main">
               <a:ext uri="{FF2B5EF4-FFF2-40B4-BE49-F238E27FC236}">
-                <a16:creationId xmlns:a16="http://schemas.microsoft.com/office/drawing/2014/main" id="{3809AA62-2CE3-4ECF-931E-134022223CE3}"/>
+                <a16:creationId xmlns:a16="http://schemas.microsoft.com/office/drawing/2014/main" id="{2D279790-D4FF-44D8-B716-CE1BA7A12C96}"/>
               </a:ext>
             </a:extLst>
           </p:cNvPr>
@@ -18600,7 +19050,7 @@
           <p:cNvPr id="9" name="TextBox 8">
             <a:extLst xmlns:a="http://schemas.openxmlformats.org/drawingml/2006/main">
               <a:ext uri="{FF2B5EF4-FFF2-40B4-BE49-F238E27FC236}">
-                <a16:creationId xmlns:a16="http://schemas.microsoft.com/office/drawing/2014/main" id="{DE210028-AD8C-4336-BEE7-8971EB8BBC88}"/>
+                <a16:creationId xmlns:a16="http://schemas.microsoft.com/office/drawing/2014/main" id="{2CD3C79C-6645-4858-9C57-6FEA69DCA90D}"/>
               </a:ext>
             </a:extLst>
           </p:cNvPr>
@@ -18645,7 +19095,7 @@
     </p:spTree>
     <p:extLst>
       <p:ext uri="{BB962C8B-B14F-4D97-AF65-F5344CB8AC3E}">
-        <p14:creationId xmlns:p14="http://schemas.microsoft.com/office/powerpoint/2010/main" val="884634682"/>
+        <p14:creationId xmlns:p14="http://schemas.microsoft.com/office/powerpoint/2010/main" val="1585739683"/>
       </p:ext>
     </p:extLst>
   </p:cSld>
@@ -18669,7 +19119,7 @@
           <p:cNvPr id="2" name="TextBox 1">
             <a:extLst xmlns:a="http://schemas.openxmlformats.org/drawingml/2006/main">
               <a:ext uri="{FF2B5EF4-FFF2-40B4-BE49-F238E27FC236}">
-                <a16:creationId xmlns:a16="http://schemas.microsoft.com/office/drawing/2014/main" id="{29B2EA0B-83DE-4CE3-A8FA-49B9BA3F0649}"/>
+                <a16:creationId xmlns:a16="http://schemas.microsoft.com/office/drawing/2014/main" id="{6839F761-59D3-45C4-8D24-8E643C7D5933}"/>
               </a:ext>
             </a:extLst>
           </p:cNvPr>
@@ -18716,7 +19166,7 @@
           <p:cNvPr id="3" name="TextBox 2">
             <a:extLst xmlns:a="http://schemas.openxmlformats.org/drawingml/2006/main">
               <a:ext uri="{FF2B5EF4-FFF2-40B4-BE49-F238E27FC236}">
-                <a16:creationId xmlns:a16="http://schemas.microsoft.com/office/drawing/2014/main" id="{F9268E5D-4D96-477B-A5E1-D56130E80110}"/>
+                <a16:creationId xmlns:a16="http://schemas.microsoft.com/office/drawing/2014/main" id="{00763BB4-160B-4E20-B971-0EAD938B32DF}"/>
               </a:ext>
             </a:extLst>
           </p:cNvPr>
@@ -18763,7 +19213,7 @@
           <p:cNvPr id="4" name="Rectangle 3">
             <a:extLst xmlns:a="http://schemas.openxmlformats.org/drawingml/2006/main">
               <a:ext uri="{FF2B5EF4-FFF2-40B4-BE49-F238E27FC236}">
-                <a16:creationId xmlns:a16="http://schemas.microsoft.com/office/drawing/2014/main" id="{153B1DEB-7657-44E4-943D-4576B8873A62}"/>
+                <a16:creationId xmlns:a16="http://schemas.microsoft.com/office/drawing/2014/main" id="{4F464C94-FC64-45DA-8B10-94A2A3D0D836}"/>
               </a:ext>
             </a:extLst>
           </p:cNvPr>
@@ -18818,7 +19268,7 @@
           <p:cNvPr id="5" name="Rectangle 4">
             <a:extLst xmlns:a="http://schemas.openxmlformats.org/drawingml/2006/main">
               <a:ext uri="{FF2B5EF4-FFF2-40B4-BE49-F238E27FC236}">
-                <a16:creationId xmlns:a16="http://schemas.microsoft.com/office/drawing/2014/main" id="{7649E109-CC24-490C-B802-66EF4DAC6458}"/>
+                <a16:creationId xmlns:a16="http://schemas.microsoft.com/office/drawing/2014/main" id="{1EC56235-9930-461A-A0C8-5411E6300940}"/>
               </a:ext>
             </a:extLst>
           </p:cNvPr>
@@ -18873,7 +19323,7 @@
           <p:cNvPr id="6" name="TextBox 5">
             <a:extLst xmlns:a="http://schemas.openxmlformats.org/drawingml/2006/main">
               <a:ext uri="{FF2B5EF4-FFF2-40B4-BE49-F238E27FC236}">
-                <a16:creationId xmlns:a16="http://schemas.microsoft.com/office/drawing/2014/main" id="{0A385259-D384-48B5-AFD7-F32A8D742202}"/>
+                <a16:creationId xmlns:a16="http://schemas.microsoft.com/office/drawing/2014/main" id="{7F0BADCB-2406-44D3-A838-9BAA9716BE04}"/>
               </a:ext>
             </a:extLst>
           </p:cNvPr>
@@ -18910,7 +19360,7 @@
                 <a:ea typeface="Aptos"/>
                 <a:cs typeface="Aptos"/>
               </a:rPr>
-              <a:t>Julkinen riippumaton evidenssikooste · 2026.07.24-22 · 2026-07-24 · Lähteet: EPO; Saksa — viralliset tuomiot; WIPO</a:t>
+              <a:t>Julkinen riippumaton evidenssikooste · 2026.07.25-24 · 2026-07-24 · Lähteet: EPO; Saksa — viralliset tuomiot; WIPO</a:t>
             </a:r>
           </a:p>
         </p:txBody>
@@ -18920,7 +19370,7 @@
           <p:cNvPr id="7" name="TextBox 6">
             <a:extLst xmlns:a="http://schemas.openxmlformats.org/drawingml/2006/main">
               <a:ext uri="{FF2B5EF4-FFF2-40B4-BE49-F238E27FC236}">
-                <a16:creationId xmlns:a16="http://schemas.microsoft.com/office/drawing/2014/main" id="{7D373B7B-CCD3-4DF6-9584-BE5248C383C2}"/>
+                <a16:creationId xmlns:a16="http://schemas.microsoft.com/office/drawing/2014/main" id="{C23966C6-F3F6-49D6-BBE6-32D9085109B1}"/>
               </a:ext>
             </a:extLst>
           </p:cNvPr>
@@ -18967,7 +19417,7 @@
           <p:cNvPr id="8" name="TextBox 7">
             <a:extLst xmlns:a="http://schemas.openxmlformats.org/drawingml/2006/main">
               <a:ext uri="{FF2B5EF4-FFF2-40B4-BE49-F238E27FC236}">
-                <a16:creationId xmlns:a16="http://schemas.microsoft.com/office/drawing/2014/main" id="{6E1770F5-0179-4BF2-A335-91EBC48A6746}"/>
+                <a16:creationId xmlns:a16="http://schemas.microsoft.com/office/drawing/2014/main" id="{8BA3FB59-AEC4-455C-AE25-DC5110BE403E}"/>
               </a:ext>
             </a:extLst>
           </p:cNvPr>
@@ -19014,7 +19464,7 @@
           <p:cNvPr id="9" name="TextBox 8">
             <a:extLst xmlns:a="http://schemas.openxmlformats.org/drawingml/2006/main">
               <a:ext uri="{FF2B5EF4-FFF2-40B4-BE49-F238E27FC236}">
-                <a16:creationId xmlns:a16="http://schemas.microsoft.com/office/drawing/2014/main" id="{72C21486-510C-47FE-A4DB-215031816CA5}"/>
+                <a16:creationId xmlns:a16="http://schemas.microsoft.com/office/drawing/2014/main" id="{9312BAFD-F4BF-47F1-8221-850C8B64DDFF}"/>
               </a:ext>
             </a:extLst>
           </p:cNvPr>
@@ -19111,7 +19561,7 @@
           <p:cNvPr id="10" name="Rounded Rectangle 9">
             <a:extLst xmlns:a="http://schemas.openxmlformats.org/drawingml/2006/main">
               <a:ext uri="{FF2B5EF4-FFF2-40B4-BE49-F238E27FC236}">
-                <a16:creationId xmlns:a16="http://schemas.microsoft.com/office/drawing/2014/main" id="{D23687BB-490D-4CCC-A06C-ABCA42762802}"/>
+                <a16:creationId xmlns:a16="http://schemas.microsoft.com/office/drawing/2014/main" id="{5F01A9F8-9F19-456F-B64D-99C728AA3B59}"/>
               </a:ext>
             </a:extLst>
           </p:cNvPr>
@@ -19168,7 +19618,7 @@
           <p:cNvPr id="11" name="TextBox 10">
             <a:extLst xmlns:a="http://schemas.openxmlformats.org/drawingml/2006/main">
               <a:ext uri="{FF2B5EF4-FFF2-40B4-BE49-F238E27FC236}">
-                <a16:creationId xmlns:a16="http://schemas.microsoft.com/office/drawing/2014/main" id="{845DEED6-E76B-4971-8E6F-DEF049B3240F}"/>
+                <a16:creationId xmlns:a16="http://schemas.microsoft.com/office/drawing/2014/main" id="{F5CD2444-8FFD-402D-BBA7-375004D0F8B1}"/>
               </a:ext>
             </a:extLst>
           </p:cNvPr>
@@ -19215,7 +19665,7 @@
           <p:cNvPr id="12" name="TextBox 11">
             <a:extLst xmlns:a="http://schemas.openxmlformats.org/drawingml/2006/main">
               <a:ext uri="{FF2B5EF4-FFF2-40B4-BE49-F238E27FC236}">
-                <a16:creationId xmlns:a16="http://schemas.microsoft.com/office/drawing/2014/main" id="{AF92E6DB-5A51-47D4-B339-712644F6D57F}"/>
+                <a16:creationId xmlns:a16="http://schemas.microsoft.com/office/drawing/2014/main" id="{72EF19AA-27A3-49C7-80E2-0C33CEAF5A06}"/>
               </a:ext>
             </a:extLst>
           </p:cNvPr>
@@ -19260,7 +19710,7 @@
     </p:spTree>
     <p:extLst>
       <p:ext uri="{BB962C8B-B14F-4D97-AF65-F5344CB8AC3E}">
-        <p14:creationId xmlns:p14="http://schemas.microsoft.com/office/powerpoint/2010/main" val="89347552"/>
+        <p14:creationId xmlns:p14="http://schemas.microsoft.com/office/powerpoint/2010/main" val="1293154027"/>
       </p:ext>
     </p:extLst>
   </p:cSld>
@@ -19284,7 +19734,7 @@
           <p:cNvPr id="2" name="TextBox 1">
             <a:extLst xmlns:a="http://schemas.openxmlformats.org/drawingml/2006/main">
               <a:ext uri="{FF2B5EF4-FFF2-40B4-BE49-F238E27FC236}">
-                <a16:creationId xmlns:a16="http://schemas.microsoft.com/office/drawing/2014/main" id="{5BB63842-1663-4DA0-AECC-5ED59CCBD868}"/>
+                <a16:creationId xmlns:a16="http://schemas.microsoft.com/office/drawing/2014/main" id="{7E9AC346-2069-4DDF-AE4B-38071D961785}"/>
               </a:ext>
             </a:extLst>
           </p:cNvPr>
@@ -19331,7 +19781,7 @@
           <p:cNvPr id="3" name="TextBox 2">
             <a:extLst xmlns:a="http://schemas.openxmlformats.org/drawingml/2006/main">
               <a:ext uri="{FF2B5EF4-FFF2-40B4-BE49-F238E27FC236}">
-                <a16:creationId xmlns:a16="http://schemas.microsoft.com/office/drawing/2014/main" id="{68EE7C8A-543E-47B7-8C81-74F8D91FED94}"/>
+                <a16:creationId xmlns:a16="http://schemas.microsoft.com/office/drawing/2014/main" id="{3C431FA1-F311-4D6C-A5E4-A86F4CCB4E50}"/>
               </a:ext>
             </a:extLst>
           </p:cNvPr>
@@ -19378,7 +19828,7 @@
           <p:cNvPr id="4" name="Rectangle 3">
             <a:extLst xmlns:a="http://schemas.openxmlformats.org/drawingml/2006/main">
               <a:ext uri="{FF2B5EF4-FFF2-40B4-BE49-F238E27FC236}">
-                <a16:creationId xmlns:a16="http://schemas.microsoft.com/office/drawing/2014/main" id="{D1C8EBB9-0CE6-4CA6-A8C4-9A776FE00E01}"/>
+                <a16:creationId xmlns:a16="http://schemas.microsoft.com/office/drawing/2014/main" id="{CAA27DA5-745E-4F20-9BA9-C0D49678D87A}"/>
               </a:ext>
             </a:extLst>
           </p:cNvPr>
@@ -19433,7 +19883,7 @@
           <p:cNvPr id="5" name="Rectangle 4">
             <a:extLst xmlns:a="http://schemas.openxmlformats.org/drawingml/2006/main">
               <a:ext uri="{FF2B5EF4-FFF2-40B4-BE49-F238E27FC236}">
-                <a16:creationId xmlns:a16="http://schemas.microsoft.com/office/drawing/2014/main" id="{D77EF304-D8DA-40F4-A148-174071876C92}"/>
+                <a16:creationId xmlns:a16="http://schemas.microsoft.com/office/drawing/2014/main" id="{D6724DFE-EBB4-4A1C-A76B-8FAE3BCCC47C}"/>
               </a:ext>
             </a:extLst>
           </p:cNvPr>
@@ -19488,7 +19938,7 @@
           <p:cNvPr id="6" name="TextBox 5">
             <a:extLst xmlns:a="http://schemas.openxmlformats.org/drawingml/2006/main">
               <a:ext uri="{FF2B5EF4-FFF2-40B4-BE49-F238E27FC236}">
-                <a16:creationId xmlns:a16="http://schemas.microsoft.com/office/drawing/2014/main" id="{1C566831-33D4-4ABF-A668-93B0A3070728}"/>
+                <a16:creationId xmlns:a16="http://schemas.microsoft.com/office/drawing/2014/main" id="{B9AB9C1C-1783-4495-B8F9-3C22619A28C0}"/>
               </a:ext>
             </a:extLst>
           </p:cNvPr>
@@ -19525,7 +19975,7 @@
                 <a:ea typeface="Aptos"/>
                 <a:cs typeface="Aptos"/>
               </a:rPr>
-              <a:t>Julkinen riippumaton evidenssikooste · 2026.07.24-22 · 2026-07-24 · Lähteet: WIPO licensing; IP Finance</a:t>
+              <a:t>Julkinen riippumaton evidenssikooste · 2026.07.25-24 · 2026-07-24 · Lähteet: WIPO licensing; IP Finance</a:t>
             </a:r>
           </a:p>
         </p:txBody>
@@ -19535,7 +19985,7 @@
           <p:cNvPr id="7" name="TextBox 6">
             <a:extLst xmlns:a="http://schemas.openxmlformats.org/drawingml/2006/main">
               <a:ext uri="{FF2B5EF4-FFF2-40B4-BE49-F238E27FC236}">
-                <a16:creationId xmlns:a16="http://schemas.microsoft.com/office/drawing/2014/main" id="{71767991-5BB8-49A4-81DA-2F5C2AA15E07}"/>
+                <a16:creationId xmlns:a16="http://schemas.microsoft.com/office/drawing/2014/main" id="{8FE7522E-042A-44F8-B9D2-1E68FB8C6192}"/>
               </a:ext>
             </a:extLst>
           </p:cNvPr>
@@ -19582,7 +20032,7 @@
           <p:cNvPr id="8" name="TextBox 7">
             <a:extLst xmlns:a="http://schemas.openxmlformats.org/drawingml/2006/main">
               <a:ext uri="{FF2B5EF4-FFF2-40B4-BE49-F238E27FC236}">
-                <a16:creationId xmlns:a16="http://schemas.microsoft.com/office/drawing/2014/main" id="{24DD7541-C97E-4B82-86A5-5D3C4E48B47B}"/>
+                <a16:creationId xmlns:a16="http://schemas.microsoft.com/office/drawing/2014/main" id="{ADECDDB8-011C-4937-BE94-7D66BC04E5C0}"/>
               </a:ext>
             </a:extLst>
           </p:cNvPr>
@@ -19629,7 +20079,7 @@
           <p:cNvPr id="9" name="TextBox 8">
             <a:extLst xmlns:a="http://schemas.openxmlformats.org/drawingml/2006/main">
               <a:ext uri="{FF2B5EF4-FFF2-40B4-BE49-F238E27FC236}">
-                <a16:creationId xmlns:a16="http://schemas.microsoft.com/office/drawing/2014/main" id="{22E8C5C8-02A3-4BD3-AC5C-25930DE02F9B}"/>
+                <a16:creationId xmlns:a16="http://schemas.microsoft.com/office/drawing/2014/main" id="{224A1F75-B9F6-441C-A9A7-72C31DB00740}"/>
               </a:ext>
             </a:extLst>
           </p:cNvPr>
@@ -19726,7 +20176,7 @@
           <p:cNvPr id="10" name="Rounded Rectangle 9">
             <a:extLst xmlns:a="http://schemas.openxmlformats.org/drawingml/2006/main">
               <a:ext uri="{FF2B5EF4-FFF2-40B4-BE49-F238E27FC236}">
-                <a16:creationId xmlns:a16="http://schemas.microsoft.com/office/drawing/2014/main" id="{BFE60CAE-054F-4737-B01B-182C286241D4}"/>
+                <a16:creationId xmlns:a16="http://schemas.microsoft.com/office/drawing/2014/main" id="{33FF6AA8-FDFE-4623-8A9E-7F4A98CF3C2F}"/>
               </a:ext>
             </a:extLst>
           </p:cNvPr>
@@ -19783,7 +20233,7 @@
           <p:cNvPr id="11" name="TextBox 10">
             <a:extLst xmlns:a="http://schemas.openxmlformats.org/drawingml/2006/main">
               <a:ext uri="{FF2B5EF4-FFF2-40B4-BE49-F238E27FC236}">
-                <a16:creationId xmlns:a16="http://schemas.microsoft.com/office/drawing/2014/main" id="{98D8B68B-A22D-402F-AD81-0D147EF002AE}"/>
+                <a16:creationId xmlns:a16="http://schemas.microsoft.com/office/drawing/2014/main" id="{BE41962D-5D06-464A-8434-FEE9FD883898}"/>
               </a:ext>
             </a:extLst>
           </p:cNvPr>
@@ -19830,7 +20280,7 @@
           <p:cNvPr id="12" name="TextBox 11">
             <a:extLst xmlns:a="http://schemas.openxmlformats.org/drawingml/2006/main">
               <a:ext uri="{FF2B5EF4-FFF2-40B4-BE49-F238E27FC236}">
-                <a16:creationId xmlns:a16="http://schemas.microsoft.com/office/drawing/2014/main" id="{3BFAE48C-019D-44BC-9C45-3DC696CC8947}"/>
+                <a16:creationId xmlns:a16="http://schemas.microsoft.com/office/drawing/2014/main" id="{AF2F92E8-1180-4056-A5CC-5CA62354F092}"/>
               </a:ext>
             </a:extLst>
           </p:cNvPr>
@@ -19875,7 +20325,7 @@
     </p:spTree>
     <p:extLst>
       <p:ext uri="{BB962C8B-B14F-4D97-AF65-F5344CB8AC3E}">
-        <p14:creationId xmlns:p14="http://schemas.microsoft.com/office/powerpoint/2010/main" val="643302691"/>
+        <p14:creationId xmlns:p14="http://schemas.microsoft.com/office/powerpoint/2010/main" val="836524784"/>
       </p:ext>
     </p:extLst>
   </p:cSld>
@@ -19899,7 +20349,7 @@
           <p:cNvPr id="2" name="TextBox 1">
             <a:extLst xmlns:a="http://schemas.openxmlformats.org/drawingml/2006/main">
               <a:ext uri="{FF2B5EF4-FFF2-40B4-BE49-F238E27FC236}">
-                <a16:creationId xmlns:a16="http://schemas.microsoft.com/office/drawing/2014/main" id="{D3B9D7A8-1ADC-45DB-A7D4-A4EDEDC46B02}"/>
+                <a16:creationId xmlns:a16="http://schemas.microsoft.com/office/drawing/2014/main" id="{64EF292F-337E-4FB9-80B8-0EA6B098D29D}"/>
               </a:ext>
             </a:extLst>
           </p:cNvPr>
@@ -19946,7 +20396,7 @@
           <p:cNvPr id="3" name="TextBox 2">
             <a:extLst xmlns:a="http://schemas.openxmlformats.org/drawingml/2006/main">
               <a:ext uri="{FF2B5EF4-FFF2-40B4-BE49-F238E27FC236}">
-                <a16:creationId xmlns:a16="http://schemas.microsoft.com/office/drawing/2014/main" id="{96392DA3-C2DC-4ED9-90F4-6E0853EA7A57}"/>
+                <a16:creationId xmlns:a16="http://schemas.microsoft.com/office/drawing/2014/main" id="{D4330A04-D0C1-403F-853F-621E0AD767C2}"/>
               </a:ext>
             </a:extLst>
           </p:cNvPr>
@@ -19993,7 +20443,7 @@
           <p:cNvPr id="4" name="Rectangle 3">
             <a:extLst xmlns:a="http://schemas.openxmlformats.org/drawingml/2006/main">
               <a:ext uri="{FF2B5EF4-FFF2-40B4-BE49-F238E27FC236}">
-                <a16:creationId xmlns:a16="http://schemas.microsoft.com/office/drawing/2014/main" id="{64B86B34-622C-44EE-9DF3-E1983965216F}"/>
+                <a16:creationId xmlns:a16="http://schemas.microsoft.com/office/drawing/2014/main" id="{570A6529-9D86-4E00-A2DF-7A6368B18397}"/>
               </a:ext>
             </a:extLst>
           </p:cNvPr>
@@ -20048,7 +20498,7 @@
           <p:cNvPr id="5" name="Rectangle 4">
             <a:extLst xmlns:a="http://schemas.openxmlformats.org/drawingml/2006/main">
               <a:ext uri="{FF2B5EF4-FFF2-40B4-BE49-F238E27FC236}">
-                <a16:creationId xmlns:a16="http://schemas.microsoft.com/office/drawing/2014/main" id="{B7217FEE-DDC6-403A-A138-EA979A10C5FF}"/>
+                <a16:creationId xmlns:a16="http://schemas.microsoft.com/office/drawing/2014/main" id="{8D90D320-8362-45D6-9D16-EFA9164C816B}"/>
               </a:ext>
             </a:extLst>
           </p:cNvPr>
@@ -20103,7 +20553,7 @@
           <p:cNvPr id="6" name="TextBox 5">
             <a:extLst xmlns:a="http://schemas.openxmlformats.org/drawingml/2006/main">
               <a:ext uri="{FF2B5EF4-FFF2-40B4-BE49-F238E27FC236}">
-                <a16:creationId xmlns:a16="http://schemas.microsoft.com/office/drawing/2014/main" id="{FD2963FE-773B-4481-9FE7-B967BF1461E0}"/>
+                <a16:creationId xmlns:a16="http://schemas.microsoft.com/office/drawing/2014/main" id="{4D84B3D1-5208-455F-AAA1-B43225930C4C}"/>
               </a:ext>
             </a:extLst>
           </p:cNvPr>
@@ -20140,7 +20590,7 @@
                 <a:ea typeface="Aptos"/>
                 <a:cs typeface="Aptos"/>
               </a:rPr>
-              <a:t>Julkinen riippumaton evidenssikooste · 2026.07.24-22 · 2026-07-24 · Lähteet: Evidence Register; EPO</a:t>
+              <a:t>Julkinen riippumaton evidenssikooste · 2026.07.25-24 · 2026-07-24 · Lähteet: Evidence Register; EPO</a:t>
             </a:r>
           </a:p>
         </p:txBody>
@@ -20150,7 +20600,7 @@
           <p:cNvPr id="7" name="TextBox 6">
             <a:extLst xmlns:a="http://schemas.openxmlformats.org/drawingml/2006/main">
               <a:ext uri="{FF2B5EF4-FFF2-40B4-BE49-F238E27FC236}">
-                <a16:creationId xmlns:a16="http://schemas.microsoft.com/office/drawing/2014/main" id="{BC607633-200B-44E4-9E8F-A3CCACBDF252}"/>
+                <a16:creationId xmlns:a16="http://schemas.microsoft.com/office/drawing/2014/main" id="{0F113054-052E-4E61-8FC4-134695B80387}"/>
               </a:ext>
             </a:extLst>
           </p:cNvPr>
@@ -20637,7 +21087,7 @@
           <p:cNvPr id="9" name="TextBox 8">
             <a:extLst xmlns:a="http://schemas.openxmlformats.org/drawingml/2006/main">
               <a:ext uri="{FF2B5EF4-FFF2-40B4-BE49-F238E27FC236}">
-                <a16:creationId xmlns:a16="http://schemas.microsoft.com/office/drawing/2014/main" id="{B903F401-204C-43DF-9FAC-AD1A3A84CE51}"/>
+                <a16:creationId xmlns:a16="http://schemas.microsoft.com/office/drawing/2014/main" id="{525BF2FF-F84A-4156-A8C8-61A9474A206B}"/>
               </a:ext>
             </a:extLst>
           </p:cNvPr>
@@ -20682,7 +21132,7 @@
     </p:spTree>
     <p:extLst>
       <p:ext uri="{BB962C8B-B14F-4D97-AF65-F5344CB8AC3E}">
-        <p14:creationId xmlns:p14="http://schemas.microsoft.com/office/powerpoint/2010/main" val="656587883"/>
+        <p14:creationId xmlns:p14="http://schemas.microsoft.com/office/powerpoint/2010/main" val="882916023"/>
       </p:ext>
     </p:extLst>
   </p:cSld>
@@ -20706,7 +21156,7 @@
           <p:cNvPr id="2" name="TextBox 1">
             <a:extLst xmlns:a="http://schemas.openxmlformats.org/drawingml/2006/main">
               <a:ext uri="{FF2B5EF4-FFF2-40B4-BE49-F238E27FC236}">
-                <a16:creationId xmlns:a16="http://schemas.microsoft.com/office/drawing/2014/main" id="{06C7E887-0BE3-4940-99C9-8727120881A2}"/>
+                <a16:creationId xmlns:a16="http://schemas.microsoft.com/office/drawing/2014/main" id="{03D14537-3EEA-4A6D-94EF-822CCA183148}"/>
               </a:ext>
             </a:extLst>
           </p:cNvPr>
@@ -20753,7 +21203,7 @@
           <p:cNvPr id="3" name="TextBox 2">
             <a:extLst xmlns:a="http://schemas.openxmlformats.org/drawingml/2006/main">
               <a:ext uri="{FF2B5EF4-FFF2-40B4-BE49-F238E27FC236}">
-                <a16:creationId xmlns:a16="http://schemas.microsoft.com/office/drawing/2014/main" id="{CFA13BEA-A001-4B2F-B0E4-3E61CB255D36}"/>
+                <a16:creationId xmlns:a16="http://schemas.microsoft.com/office/drawing/2014/main" id="{D110FAD0-9BE1-4E43-90B7-8C12050D7981}"/>
               </a:ext>
             </a:extLst>
           </p:cNvPr>
@@ -20800,7 +21250,7 @@
           <p:cNvPr id="4" name="Rectangle 3">
             <a:extLst xmlns:a="http://schemas.openxmlformats.org/drawingml/2006/main">
               <a:ext uri="{FF2B5EF4-FFF2-40B4-BE49-F238E27FC236}">
-                <a16:creationId xmlns:a16="http://schemas.microsoft.com/office/drawing/2014/main" id="{FC4A6358-499C-4777-82FD-F10E24F0C9FE}"/>
+                <a16:creationId xmlns:a16="http://schemas.microsoft.com/office/drawing/2014/main" id="{43DDEDFD-3471-4377-A951-165BD749B867}"/>
               </a:ext>
             </a:extLst>
           </p:cNvPr>
@@ -20855,7 +21305,7 @@
           <p:cNvPr id="5" name="Rectangle 4">
             <a:extLst xmlns:a="http://schemas.openxmlformats.org/drawingml/2006/main">
               <a:ext uri="{FF2B5EF4-FFF2-40B4-BE49-F238E27FC236}">
-                <a16:creationId xmlns:a16="http://schemas.microsoft.com/office/drawing/2014/main" id="{67D4CF94-A3AE-4D77-92AE-D636074FC7D6}"/>
+                <a16:creationId xmlns:a16="http://schemas.microsoft.com/office/drawing/2014/main" id="{B3BB11FC-9624-4D65-B9A5-1145F266D1D4}"/>
               </a:ext>
             </a:extLst>
           </p:cNvPr>
@@ -20910,7 +21360,7 @@
           <p:cNvPr id="6" name="TextBox 5">
             <a:extLst xmlns:a="http://schemas.openxmlformats.org/drawingml/2006/main">
               <a:ext uri="{FF2B5EF4-FFF2-40B4-BE49-F238E27FC236}">
-                <a16:creationId xmlns:a16="http://schemas.microsoft.com/office/drawing/2014/main" id="{F40F396D-47CA-48EF-A880-51701AA535FB}"/>
+                <a16:creationId xmlns:a16="http://schemas.microsoft.com/office/drawing/2014/main" id="{379F6577-3053-4D95-A05C-4931EEE986A2}"/>
               </a:ext>
             </a:extLst>
           </p:cNvPr>
@@ -20947,7 +21397,7 @@
                 <a:ea typeface="Aptos"/>
                 <a:cs typeface="Aptos"/>
               </a:rPr>
-              <a:t>Julkinen riippumaton evidenssikooste · 2026.07.24-22 · 2026-07-24 · Lähteet: EP3032975B2; 7 O 3341/24</a:t>
+              <a:t>Julkinen riippumaton evidenssikooste · 2026.07.25-24 · 2026-07-24 · Lähteet: EP3032975B2; 7 O 3341/24</a:t>
             </a:r>
           </a:p>
         </p:txBody>
@@ -20957,7 +21407,7 @@
           <p:cNvPr id="7" name="TextBox 6">
             <a:extLst xmlns:a="http://schemas.openxmlformats.org/drawingml/2006/main">
               <a:ext uri="{FF2B5EF4-FFF2-40B4-BE49-F238E27FC236}">
-                <a16:creationId xmlns:a16="http://schemas.microsoft.com/office/drawing/2014/main" id="{48B54F97-D54A-45FC-AFFA-037F218D729E}"/>
+                <a16:creationId xmlns:a16="http://schemas.microsoft.com/office/drawing/2014/main" id="{430BD54C-CAD6-4FFB-9733-FE29906D926A}"/>
               </a:ext>
             </a:extLst>
           </p:cNvPr>
@@ -21004,7 +21454,7 @@
           <p:cNvPr id="8" name="Rounded Rectangle 7">
             <a:extLst xmlns:a="http://schemas.openxmlformats.org/drawingml/2006/main">
               <a:ext uri="{FF2B5EF4-FFF2-40B4-BE49-F238E27FC236}">
-                <a16:creationId xmlns:a16="http://schemas.microsoft.com/office/drawing/2014/main" id="{D43E8125-A017-4E18-8AD1-6D714E14201B}"/>
+                <a16:creationId xmlns:a16="http://schemas.microsoft.com/office/drawing/2014/main" id="{6BB11499-4DDB-43C9-811F-A170F9B8B7D5}"/>
               </a:ext>
             </a:extLst>
           </p:cNvPr>
@@ -21061,7 +21511,7 @@
           <p:cNvPr id="9" name="TextBox 8">
             <a:extLst xmlns:a="http://schemas.openxmlformats.org/drawingml/2006/main">
               <a:ext uri="{FF2B5EF4-FFF2-40B4-BE49-F238E27FC236}">
-                <a16:creationId xmlns:a16="http://schemas.microsoft.com/office/drawing/2014/main" id="{631BE31B-053A-4E37-B9B1-3DC01A7F6A25}"/>
+                <a16:creationId xmlns:a16="http://schemas.microsoft.com/office/drawing/2014/main" id="{2205827A-8433-4D95-9444-1BEDCC9A3074}"/>
               </a:ext>
             </a:extLst>
           </p:cNvPr>
@@ -21108,7 +21558,7 @@
           <p:cNvPr id="10" name="TextBox 9">
             <a:extLst xmlns:a="http://schemas.openxmlformats.org/drawingml/2006/main">
               <a:ext uri="{FF2B5EF4-FFF2-40B4-BE49-F238E27FC236}">
-                <a16:creationId xmlns:a16="http://schemas.microsoft.com/office/drawing/2014/main" id="{389F8357-8D4B-4599-83F4-64B76B3C38BB}"/>
+                <a16:creationId xmlns:a16="http://schemas.microsoft.com/office/drawing/2014/main" id="{612A26BA-617E-4B39-8670-6FEE6F0C9434}"/>
               </a:ext>
             </a:extLst>
           </p:cNvPr>
@@ -21155,7 +21605,7 @@
           <p:cNvPr id="11" name="TextBox 10">
             <a:extLst xmlns:a="http://schemas.openxmlformats.org/drawingml/2006/main">
               <a:ext uri="{FF2B5EF4-FFF2-40B4-BE49-F238E27FC236}">
-                <a16:creationId xmlns:a16="http://schemas.microsoft.com/office/drawing/2014/main" id="{4A23C93D-EBAB-4FB4-8253-312468323689}"/>
+                <a16:creationId xmlns:a16="http://schemas.microsoft.com/office/drawing/2014/main" id="{0EE22EC9-F936-4955-950A-8202ACEF4D4D}"/>
               </a:ext>
             </a:extLst>
           </p:cNvPr>
@@ -21202,7 +21652,7 @@
           <p:cNvPr id="12" name="Rounded Rectangle 11">
             <a:extLst xmlns:a="http://schemas.openxmlformats.org/drawingml/2006/main">
               <a:ext uri="{FF2B5EF4-FFF2-40B4-BE49-F238E27FC236}">
-                <a16:creationId xmlns:a16="http://schemas.microsoft.com/office/drawing/2014/main" id="{D145FAEF-63A9-4A2E-B1FF-93AAE3DBAE2F}"/>
+                <a16:creationId xmlns:a16="http://schemas.microsoft.com/office/drawing/2014/main" id="{27D56093-8E64-48F0-A6DC-D64663EDECFA}"/>
               </a:ext>
             </a:extLst>
           </p:cNvPr>
@@ -21259,7 +21709,7 @@
           <p:cNvPr id="13" name="TextBox 12">
             <a:extLst xmlns:a="http://schemas.openxmlformats.org/drawingml/2006/main">
               <a:ext uri="{FF2B5EF4-FFF2-40B4-BE49-F238E27FC236}">
-                <a16:creationId xmlns:a16="http://schemas.microsoft.com/office/drawing/2014/main" id="{6DF934C7-4975-4894-AE22-01E3110A5A80}"/>
+                <a16:creationId xmlns:a16="http://schemas.microsoft.com/office/drawing/2014/main" id="{64B0D5B2-66DC-49BE-BAD2-20CD2A02564D}"/>
               </a:ext>
             </a:extLst>
           </p:cNvPr>
@@ -21306,7 +21756,7 @@
           <p:cNvPr id="14" name="TextBox 13">
             <a:extLst xmlns:a="http://schemas.openxmlformats.org/drawingml/2006/main">
               <a:ext uri="{FF2B5EF4-FFF2-40B4-BE49-F238E27FC236}">
-                <a16:creationId xmlns:a16="http://schemas.microsoft.com/office/drawing/2014/main" id="{EA4F0A78-4EB8-476A-91CB-EE2F20122FBC}"/>
+                <a16:creationId xmlns:a16="http://schemas.microsoft.com/office/drawing/2014/main" id="{347A5BB8-A731-4752-8CF5-043E5D8D5682}"/>
               </a:ext>
             </a:extLst>
           </p:cNvPr>
@@ -21353,7 +21803,7 @@
           <p:cNvPr id="15" name="TextBox 14">
             <a:extLst xmlns:a="http://schemas.openxmlformats.org/drawingml/2006/main">
               <a:ext uri="{FF2B5EF4-FFF2-40B4-BE49-F238E27FC236}">
-                <a16:creationId xmlns:a16="http://schemas.microsoft.com/office/drawing/2014/main" id="{A808315C-1781-411F-A426-FA036C69BC33}"/>
+                <a16:creationId xmlns:a16="http://schemas.microsoft.com/office/drawing/2014/main" id="{E7FFB54B-5F89-46BD-86A1-84FEB72991FB}"/>
               </a:ext>
             </a:extLst>
           </p:cNvPr>
@@ -21400,7 +21850,7 @@
           <p:cNvPr id="16" name="Rounded Rectangle 15">
             <a:extLst xmlns:a="http://schemas.openxmlformats.org/drawingml/2006/main">
               <a:ext uri="{FF2B5EF4-FFF2-40B4-BE49-F238E27FC236}">
-                <a16:creationId xmlns:a16="http://schemas.microsoft.com/office/drawing/2014/main" id="{D36F3FF6-8000-4C36-8A30-2FE8033E8DAC}"/>
+                <a16:creationId xmlns:a16="http://schemas.microsoft.com/office/drawing/2014/main" id="{425CFE50-A4FE-4977-84F9-D519E3FF0A7A}"/>
               </a:ext>
             </a:extLst>
           </p:cNvPr>
@@ -21457,7 +21907,7 @@
           <p:cNvPr id="17" name="TextBox 16">
             <a:extLst xmlns:a="http://schemas.openxmlformats.org/drawingml/2006/main">
               <a:ext uri="{FF2B5EF4-FFF2-40B4-BE49-F238E27FC236}">
-                <a16:creationId xmlns:a16="http://schemas.microsoft.com/office/drawing/2014/main" id="{A3AC78A0-B093-40D9-9262-D5792C5DC2C3}"/>
+                <a16:creationId xmlns:a16="http://schemas.microsoft.com/office/drawing/2014/main" id="{EFCE15F4-38AD-4E29-9433-9717E175A8C0}"/>
               </a:ext>
             </a:extLst>
           </p:cNvPr>
@@ -21504,7 +21954,7 @@
           <p:cNvPr id="18" name="TextBox 17">
             <a:extLst xmlns:a="http://schemas.openxmlformats.org/drawingml/2006/main">
               <a:ext uri="{FF2B5EF4-FFF2-40B4-BE49-F238E27FC236}">
-                <a16:creationId xmlns:a16="http://schemas.microsoft.com/office/drawing/2014/main" id="{159867BE-AD81-4643-83F7-65BE85121C6E}"/>
+                <a16:creationId xmlns:a16="http://schemas.microsoft.com/office/drawing/2014/main" id="{1268C5E4-439C-47E6-951A-FD9B4F3CF5B2}"/>
               </a:ext>
             </a:extLst>
           </p:cNvPr>
@@ -21551,7 +22001,7 @@
           <p:cNvPr id="19" name="TextBox 18">
             <a:extLst xmlns:a="http://schemas.openxmlformats.org/drawingml/2006/main">
               <a:ext uri="{FF2B5EF4-FFF2-40B4-BE49-F238E27FC236}">
-                <a16:creationId xmlns:a16="http://schemas.microsoft.com/office/drawing/2014/main" id="{8DF4FB00-DB9E-4A71-945E-3D814396C199}"/>
+                <a16:creationId xmlns:a16="http://schemas.microsoft.com/office/drawing/2014/main" id="{BD951BAA-E194-43EC-86C0-F303D17DBEE1}"/>
               </a:ext>
             </a:extLst>
           </p:cNvPr>
@@ -21598,7 +22048,7 @@
           <p:cNvPr id="20" name="Rounded Rectangle 19">
             <a:extLst xmlns:a="http://schemas.openxmlformats.org/drawingml/2006/main">
               <a:ext uri="{FF2B5EF4-FFF2-40B4-BE49-F238E27FC236}">
-                <a16:creationId xmlns:a16="http://schemas.microsoft.com/office/drawing/2014/main" id="{3CAF3FC1-246F-4D3D-AB31-30957F6F8AF2}"/>
+                <a16:creationId xmlns:a16="http://schemas.microsoft.com/office/drawing/2014/main" id="{DC0C9472-19C2-45F8-A785-3E54F8D788FD}"/>
               </a:ext>
             </a:extLst>
           </p:cNvPr>
@@ -21655,7 +22105,7 @@
           <p:cNvPr id="21" name="TextBox 20">
             <a:extLst xmlns:a="http://schemas.openxmlformats.org/drawingml/2006/main">
               <a:ext uri="{FF2B5EF4-FFF2-40B4-BE49-F238E27FC236}">
-                <a16:creationId xmlns:a16="http://schemas.microsoft.com/office/drawing/2014/main" id="{9D9657CB-444B-46F1-AD1A-69539E9C6854}"/>
+                <a16:creationId xmlns:a16="http://schemas.microsoft.com/office/drawing/2014/main" id="{E169638A-A810-40B6-A7EF-DA997B8EB696}"/>
               </a:ext>
             </a:extLst>
           </p:cNvPr>
@@ -21702,7 +22152,7 @@
           <p:cNvPr id="22" name="TextBox 21">
             <a:extLst xmlns:a="http://schemas.openxmlformats.org/drawingml/2006/main">
               <a:ext uri="{FF2B5EF4-FFF2-40B4-BE49-F238E27FC236}">
-                <a16:creationId xmlns:a16="http://schemas.microsoft.com/office/drawing/2014/main" id="{36F4CFDB-A343-4A1C-A6DC-A0D8707F01A2}"/>
+                <a16:creationId xmlns:a16="http://schemas.microsoft.com/office/drawing/2014/main" id="{0570A1BF-7DF3-42DC-9C21-989AD366A1AE}"/>
               </a:ext>
             </a:extLst>
           </p:cNvPr>
@@ -21749,7 +22199,7 @@
           <p:cNvPr id="23" name="TextBox 22">
             <a:extLst xmlns:a="http://schemas.openxmlformats.org/drawingml/2006/main">
               <a:ext uri="{FF2B5EF4-FFF2-40B4-BE49-F238E27FC236}">
-                <a16:creationId xmlns:a16="http://schemas.microsoft.com/office/drawing/2014/main" id="{84EAF969-0B0F-436E-A59D-B9225C0E2B0F}"/>
+                <a16:creationId xmlns:a16="http://schemas.microsoft.com/office/drawing/2014/main" id="{1ED80CF8-42EC-465B-AB43-8056B8958470}"/>
               </a:ext>
             </a:extLst>
           </p:cNvPr>
@@ -21796,7 +22246,7 @@
           <p:cNvPr id="24" name="TextBox 23">
             <a:extLst xmlns:a="http://schemas.openxmlformats.org/drawingml/2006/main">
               <a:ext uri="{FF2B5EF4-FFF2-40B4-BE49-F238E27FC236}">
-                <a16:creationId xmlns:a16="http://schemas.microsoft.com/office/drawing/2014/main" id="{6D7C7DAD-B6EF-4296-806E-A4D01ECE3BC0}"/>
+                <a16:creationId xmlns:a16="http://schemas.microsoft.com/office/drawing/2014/main" id="{C15D59EB-473A-4A2B-AADA-6E3A568E135C}"/>
               </a:ext>
             </a:extLst>
           </p:cNvPr>
@@ -21841,7 +22291,7 @@
     </p:spTree>
     <p:extLst>
       <p:ext uri="{BB962C8B-B14F-4D97-AF65-F5344CB8AC3E}">
-        <p14:creationId xmlns:p14="http://schemas.microsoft.com/office/powerpoint/2010/main" val="546280003"/>
+        <p14:creationId xmlns:p14="http://schemas.microsoft.com/office/powerpoint/2010/main" val="751563091"/>
       </p:ext>
     </p:extLst>
   </p:cSld>
@@ -21865,7 +22315,7 @@
           <p:cNvPr id="2" name="TextBox 1">
             <a:extLst xmlns:a="http://schemas.openxmlformats.org/drawingml/2006/main">
               <a:ext uri="{FF2B5EF4-FFF2-40B4-BE49-F238E27FC236}">
-                <a16:creationId xmlns:a16="http://schemas.microsoft.com/office/drawing/2014/main" id="{BC437197-F98D-4023-9FA5-C2A886071961}"/>
+                <a16:creationId xmlns:a16="http://schemas.microsoft.com/office/drawing/2014/main" id="{6342FA96-A593-4E5E-81B2-8B2A0C31A669}"/>
               </a:ext>
             </a:extLst>
           </p:cNvPr>
@@ -21912,7 +22362,7 @@
           <p:cNvPr id="3" name="TextBox 2">
             <a:extLst xmlns:a="http://schemas.openxmlformats.org/drawingml/2006/main">
               <a:ext uri="{FF2B5EF4-FFF2-40B4-BE49-F238E27FC236}">
-                <a16:creationId xmlns:a16="http://schemas.microsoft.com/office/drawing/2014/main" id="{43E7DCFE-5BC4-4C42-A8CD-AEE7EAE38035}"/>
+                <a16:creationId xmlns:a16="http://schemas.microsoft.com/office/drawing/2014/main" id="{AFA02EDE-CD0F-4822-97FF-60E1C91E8BBD}"/>
               </a:ext>
             </a:extLst>
           </p:cNvPr>
@@ -21959,7 +22409,7 @@
           <p:cNvPr id="4" name="Rectangle 3">
             <a:extLst xmlns:a="http://schemas.openxmlformats.org/drawingml/2006/main">
               <a:ext uri="{FF2B5EF4-FFF2-40B4-BE49-F238E27FC236}">
-                <a16:creationId xmlns:a16="http://schemas.microsoft.com/office/drawing/2014/main" id="{FBB174D2-0A58-49F6-9F6A-E62252A93B4C}"/>
+                <a16:creationId xmlns:a16="http://schemas.microsoft.com/office/drawing/2014/main" id="{1CF967CB-3B9D-4EB5-AAAA-681BCDDD6AE1}"/>
               </a:ext>
             </a:extLst>
           </p:cNvPr>
@@ -22014,7 +22464,7 @@
           <p:cNvPr id="5" name="Rectangle 4">
             <a:extLst xmlns:a="http://schemas.openxmlformats.org/drawingml/2006/main">
               <a:ext uri="{FF2B5EF4-FFF2-40B4-BE49-F238E27FC236}">
-                <a16:creationId xmlns:a16="http://schemas.microsoft.com/office/drawing/2014/main" id="{39DDD092-5EFB-4F3B-9006-6C74FAF00587}"/>
+                <a16:creationId xmlns:a16="http://schemas.microsoft.com/office/drawing/2014/main" id="{E1D12794-F07F-437F-BDFC-6B3C4EF21BC6}"/>
               </a:ext>
             </a:extLst>
           </p:cNvPr>
@@ -22069,7 +22519,7 @@
           <p:cNvPr id="6" name="TextBox 5">
             <a:extLst xmlns:a="http://schemas.openxmlformats.org/drawingml/2006/main">
               <a:ext uri="{FF2B5EF4-FFF2-40B4-BE49-F238E27FC236}">
-                <a16:creationId xmlns:a16="http://schemas.microsoft.com/office/drawing/2014/main" id="{8E370982-7CF8-465C-9A45-2B2E5239C56D}"/>
+                <a16:creationId xmlns:a16="http://schemas.microsoft.com/office/drawing/2014/main" id="{E06BB212-818A-4ED0-8539-AD6EA77126A9}"/>
               </a:ext>
             </a:extLst>
           </p:cNvPr>
@@ -22106,7 +22556,7 @@
                 <a:ea typeface="Aptos"/>
                 <a:cs typeface="Aptos"/>
               </a:rPr>
-              <a:t>Julkinen riippumaton evidenssikooste · 2026.07.24-22 · 2026-07-24 · Lähteet: WIPO dispute resolution; EPO IPscore</a:t>
+              <a:t>Julkinen riippumaton evidenssikooste · 2026.07.25-24 · 2026-07-24 · Lähteet: WIPO dispute resolution; EPO IPscore</a:t>
             </a:r>
           </a:p>
         </p:txBody>
@@ -22116,7 +22566,7 @@
           <p:cNvPr id="7" name="TextBox 6">
             <a:extLst xmlns:a="http://schemas.openxmlformats.org/drawingml/2006/main">
               <a:ext uri="{FF2B5EF4-FFF2-40B4-BE49-F238E27FC236}">
-                <a16:creationId xmlns:a16="http://schemas.microsoft.com/office/drawing/2014/main" id="{A3A305AB-0DC6-403A-92D9-FEAB48CC7BBF}"/>
+                <a16:creationId xmlns:a16="http://schemas.microsoft.com/office/drawing/2014/main" id="{4DDB3518-337D-462B-A803-C3AE27C31623}"/>
               </a:ext>
             </a:extLst>
           </p:cNvPr>
@@ -22163,7 +22613,7 @@
           <p:cNvPr id="8" name="Rounded Rectangle 7">
             <a:extLst xmlns:a="http://schemas.openxmlformats.org/drawingml/2006/main">
               <a:ext uri="{FF2B5EF4-FFF2-40B4-BE49-F238E27FC236}">
-                <a16:creationId xmlns:a16="http://schemas.microsoft.com/office/drawing/2014/main" id="{A1F595D0-5F61-475D-94D1-0CB4B5470C44}"/>
+                <a16:creationId xmlns:a16="http://schemas.microsoft.com/office/drawing/2014/main" id="{81F231AA-D23D-4FE0-AFBD-057787AB7EB6}"/>
               </a:ext>
             </a:extLst>
           </p:cNvPr>
@@ -22220,7 +22670,7 @@
           <p:cNvPr id="9" name="TextBox 8">
             <a:extLst xmlns:a="http://schemas.openxmlformats.org/drawingml/2006/main">
               <a:ext uri="{FF2B5EF4-FFF2-40B4-BE49-F238E27FC236}">
-                <a16:creationId xmlns:a16="http://schemas.microsoft.com/office/drawing/2014/main" id="{B55BFCF4-620E-4DD1-8CC0-AF91B1C64B43}"/>
+                <a16:creationId xmlns:a16="http://schemas.microsoft.com/office/drawing/2014/main" id="{CD22A9C0-B566-4C7C-B580-C7CD84667FC5}"/>
               </a:ext>
             </a:extLst>
           </p:cNvPr>
@@ -22267,7 +22717,7 @@
           <p:cNvPr id="10" name="TextBox 9">
             <a:extLst xmlns:a="http://schemas.openxmlformats.org/drawingml/2006/main">
               <a:ext uri="{FF2B5EF4-FFF2-40B4-BE49-F238E27FC236}">
-                <a16:creationId xmlns:a16="http://schemas.microsoft.com/office/drawing/2014/main" id="{562294AA-A3B9-4ED3-ABAA-69993EF0E3B5}"/>
+                <a16:creationId xmlns:a16="http://schemas.microsoft.com/office/drawing/2014/main" id="{7E848F06-8826-487C-A0FE-47113DCBAE86}"/>
               </a:ext>
             </a:extLst>
           </p:cNvPr>
@@ -22314,7 +22764,7 @@
           <p:cNvPr id="11" name="TextBox 10">
             <a:extLst xmlns:a="http://schemas.openxmlformats.org/drawingml/2006/main">
               <a:ext uri="{FF2B5EF4-FFF2-40B4-BE49-F238E27FC236}">
-                <a16:creationId xmlns:a16="http://schemas.microsoft.com/office/drawing/2014/main" id="{81A04180-DE0E-4DC4-BD79-8BDEFB4010F9}"/>
+                <a16:creationId xmlns:a16="http://schemas.microsoft.com/office/drawing/2014/main" id="{26805231-6ABB-46F8-AE77-C5DEA67F6556}"/>
               </a:ext>
             </a:extLst>
           </p:cNvPr>
@@ -22361,7 +22811,7 @@
           <p:cNvPr id="12" name="Rounded Rectangle 11">
             <a:extLst xmlns:a="http://schemas.openxmlformats.org/drawingml/2006/main">
               <a:ext uri="{FF2B5EF4-FFF2-40B4-BE49-F238E27FC236}">
-                <a16:creationId xmlns:a16="http://schemas.microsoft.com/office/drawing/2014/main" id="{5CA8D466-F33C-4966-AD88-1B756CE3D935}"/>
+                <a16:creationId xmlns:a16="http://schemas.microsoft.com/office/drawing/2014/main" id="{B3AF21AE-14D5-4B2F-A3EF-8726A3EFF020}"/>
               </a:ext>
             </a:extLst>
           </p:cNvPr>
@@ -22418,7 +22868,7 @@
           <p:cNvPr id="13" name="TextBox 12">
             <a:extLst xmlns:a="http://schemas.openxmlformats.org/drawingml/2006/main">
               <a:ext uri="{FF2B5EF4-FFF2-40B4-BE49-F238E27FC236}">
-                <a16:creationId xmlns:a16="http://schemas.microsoft.com/office/drawing/2014/main" id="{B32DABB3-C6CB-4A95-9988-AA535AC49528}"/>
+                <a16:creationId xmlns:a16="http://schemas.microsoft.com/office/drawing/2014/main" id="{44917A01-9394-4DA8-B97A-EFCE026FD3DB}"/>
               </a:ext>
             </a:extLst>
           </p:cNvPr>
@@ -22465,7 +22915,7 @@
           <p:cNvPr id="14" name="TextBox 13">
             <a:extLst xmlns:a="http://schemas.openxmlformats.org/drawingml/2006/main">
               <a:ext uri="{FF2B5EF4-FFF2-40B4-BE49-F238E27FC236}">
-                <a16:creationId xmlns:a16="http://schemas.microsoft.com/office/drawing/2014/main" id="{EA50183A-3AF8-4A3D-BFAB-7939F92409E1}"/>
+                <a16:creationId xmlns:a16="http://schemas.microsoft.com/office/drawing/2014/main" id="{15C3427A-DE94-4FAC-871B-DA106F4C2912}"/>
               </a:ext>
             </a:extLst>
           </p:cNvPr>
@@ -22512,7 +22962,7 @@
           <p:cNvPr id="15" name="TextBox 14">
             <a:extLst xmlns:a="http://schemas.openxmlformats.org/drawingml/2006/main">
               <a:ext uri="{FF2B5EF4-FFF2-40B4-BE49-F238E27FC236}">
-                <a16:creationId xmlns:a16="http://schemas.microsoft.com/office/drawing/2014/main" id="{DFD4E813-79B4-497B-88F6-4B1C65BB7557}"/>
+                <a16:creationId xmlns:a16="http://schemas.microsoft.com/office/drawing/2014/main" id="{9E660486-B03C-422D-B65F-7A25866598E2}"/>
               </a:ext>
             </a:extLst>
           </p:cNvPr>
@@ -22559,7 +23009,7 @@
           <p:cNvPr id="16" name="Rounded Rectangle 15">
             <a:extLst xmlns:a="http://schemas.openxmlformats.org/drawingml/2006/main">
               <a:ext uri="{FF2B5EF4-FFF2-40B4-BE49-F238E27FC236}">
-                <a16:creationId xmlns:a16="http://schemas.microsoft.com/office/drawing/2014/main" id="{92C85A9A-AE1F-45EC-A20B-72B11943A5D0}"/>
+                <a16:creationId xmlns:a16="http://schemas.microsoft.com/office/drawing/2014/main" id="{F253B96B-6F07-4FB5-BB5E-AA213258D921}"/>
               </a:ext>
             </a:extLst>
           </p:cNvPr>
@@ -22616,7 +23066,7 @@
           <p:cNvPr id="17" name="TextBox 16">
             <a:extLst xmlns:a="http://schemas.openxmlformats.org/drawingml/2006/main">
               <a:ext uri="{FF2B5EF4-FFF2-40B4-BE49-F238E27FC236}">
-                <a16:creationId xmlns:a16="http://schemas.microsoft.com/office/drawing/2014/main" id="{F21DC731-AB1A-4B94-AD55-7124A8F75535}"/>
+                <a16:creationId xmlns:a16="http://schemas.microsoft.com/office/drawing/2014/main" id="{B84FA941-EFA7-4B01-BB12-FEBB7EDFA58D}"/>
               </a:ext>
             </a:extLst>
           </p:cNvPr>
@@ -22663,7 +23113,7 @@
           <p:cNvPr id="18" name="TextBox 17">
             <a:extLst xmlns:a="http://schemas.openxmlformats.org/drawingml/2006/main">
               <a:ext uri="{FF2B5EF4-FFF2-40B4-BE49-F238E27FC236}">
-                <a16:creationId xmlns:a16="http://schemas.microsoft.com/office/drawing/2014/main" id="{5D91453E-88C9-4A69-A0B6-167EB8E95DBE}"/>
+                <a16:creationId xmlns:a16="http://schemas.microsoft.com/office/drawing/2014/main" id="{16949695-C15E-421A-B3F9-F81BD7402FF7}"/>
               </a:ext>
             </a:extLst>
           </p:cNvPr>
@@ -22710,7 +23160,7 @@
           <p:cNvPr id="19" name="TextBox 18">
             <a:extLst xmlns:a="http://schemas.openxmlformats.org/drawingml/2006/main">
               <a:ext uri="{FF2B5EF4-FFF2-40B4-BE49-F238E27FC236}">
-                <a16:creationId xmlns:a16="http://schemas.microsoft.com/office/drawing/2014/main" id="{CC29713F-16EB-47FC-B644-37C0DC1AF609}"/>
+                <a16:creationId xmlns:a16="http://schemas.microsoft.com/office/drawing/2014/main" id="{BEA977A8-2383-4795-9FC8-80BF1DAE3DE5}"/>
               </a:ext>
             </a:extLst>
           </p:cNvPr>
@@ -22757,7 +23207,7 @@
           <p:cNvPr id="20" name="Rounded Rectangle 19">
             <a:extLst xmlns:a="http://schemas.openxmlformats.org/drawingml/2006/main">
               <a:ext uri="{FF2B5EF4-FFF2-40B4-BE49-F238E27FC236}">
-                <a16:creationId xmlns:a16="http://schemas.microsoft.com/office/drawing/2014/main" id="{9F6E01DE-D434-4159-84A1-645B13116B92}"/>
+                <a16:creationId xmlns:a16="http://schemas.microsoft.com/office/drawing/2014/main" id="{945CAB00-5E1E-4311-9C19-595B60787D4F}"/>
               </a:ext>
             </a:extLst>
           </p:cNvPr>
@@ -22814,7 +23264,7 @@
           <p:cNvPr id="21" name="TextBox 20">
             <a:extLst xmlns:a="http://schemas.openxmlformats.org/drawingml/2006/main">
               <a:ext uri="{FF2B5EF4-FFF2-40B4-BE49-F238E27FC236}">
-                <a16:creationId xmlns:a16="http://schemas.microsoft.com/office/drawing/2014/main" id="{D4304870-EB21-4BB1-8EFE-927435F1A09B}"/>
+                <a16:creationId xmlns:a16="http://schemas.microsoft.com/office/drawing/2014/main" id="{480B47F6-0E37-4182-9358-F1BE24A469AE}"/>
               </a:ext>
             </a:extLst>
           </p:cNvPr>
@@ -22861,7 +23311,7 @@
           <p:cNvPr id="22" name="TextBox 21">
             <a:extLst xmlns:a="http://schemas.openxmlformats.org/drawingml/2006/main">
               <a:ext uri="{FF2B5EF4-FFF2-40B4-BE49-F238E27FC236}">
-                <a16:creationId xmlns:a16="http://schemas.microsoft.com/office/drawing/2014/main" id="{2C1B548C-2B06-4DBC-B9A9-5D8D98F47B9C}"/>
+                <a16:creationId xmlns:a16="http://schemas.microsoft.com/office/drawing/2014/main" id="{477F286E-E77E-404D-ADF5-9256B30FFAB1}"/>
               </a:ext>
             </a:extLst>
           </p:cNvPr>
@@ -22908,7 +23358,7 @@
           <p:cNvPr id="23" name="TextBox 22">
             <a:extLst xmlns:a="http://schemas.openxmlformats.org/drawingml/2006/main">
               <a:ext uri="{FF2B5EF4-FFF2-40B4-BE49-F238E27FC236}">
-                <a16:creationId xmlns:a16="http://schemas.microsoft.com/office/drawing/2014/main" id="{87856A61-0A39-4A3E-89F1-012172AF0736}"/>
+                <a16:creationId xmlns:a16="http://schemas.microsoft.com/office/drawing/2014/main" id="{C80D98D1-F506-43A6-B47F-DCB5081DB813}"/>
               </a:ext>
             </a:extLst>
           </p:cNvPr>
@@ -22955,7 +23405,7 @@
           <p:cNvPr id="24" name="TextBox 23">
             <a:extLst xmlns:a="http://schemas.openxmlformats.org/drawingml/2006/main">
               <a:ext uri="{FF2B5EF4-FFF2-40B4-BE49-F238E27FC236}">
-                <a16:creationId xmlns:a16="http://schemas.microsoft.com/office/drawing/2014/main" id="{B6354672-44D3-44FB-850D-0CD13B3836EF}"/>
+                <a16:creationId xmlns:a16="http://schemas.microsoft.com/office/drawing/2014/main" id="{9BA29551-2337-40F9-904C-ED5B5A353F15}"/>
               </a:ext>
             </a:extLst>
           </p:cNvPr>
@@ -23000,7 +23450,7 @@
     </p:spTree>
     <p:extLst>
       <p:ext uri="{BB962C8B-B14F-4D97-AF65-F5344CB8AC3E}">
-        <p14:creationId xmlns:p14="http://schemas.microsoft.com/office/powerpoint/2010/main" val="1501482428"/>
+        <p14:creationId xmlns:p14="http://schemas.microsoft.com/office/powerpoint/2010/main" val="1537342598"/>
       </p:ext>
     </p:extLst>
   </p:cSld>
@@ -23024,7 +23474,7 @@
           <p:cNvPr id="2" name="TextBox 1">
             <a:extLst xmlns:a="http://schemas.openxmlformats.org/drawingml/2006/main">
               <a:ext uri="{FF2B5EF4-FFF2-40B4-BE49-F238E27FC236}">
-                <a16:creationId xmlns:a16="http://schemas.microsoft.com/office/drawing/2014/main" id="{5E9D3ED8-8B82-4D2E-A4AF-1B9816CF6038}"/>
+                <a16:creationId xmlns:a16="http://schemas.microsoft.com/office/drawing/2014/main" id="{D189B097-9DDE-4408-8D43-D3550B22915C}"/>
               </a:ext>
             </a:extLst>
           </p:cNvPr>
@@ -23071,7 +23521,7 @@
           <p:cNvPr id="3" name="TextBox 2">
             <a:extLst xmlns:a="http://schemas.openxmlformats.org/drawingml/2006/main">
               <a:ext uri="{FF2B5EF4-FFF2-40B4-BE49-F238E27FC236}">
-                <a16:creationId xmlns:a16="http://schemas.microsoft.com/office/drawing/2014/main" id="{B6B74B89-408F-4770-AEAD-E7B6AFA03DAA}"/>
+                <a16:creationId xmlns:a16="http://schemas.microsoft.com/office/drawing/2014/main" id="{033B948E-0DA1-45C9-8A69-DC807B599FED}"/>
               </a:ext>
             </a:extLst>
           </p:cNvPr>
@@ -23091,8 +23541,8 @@
           <a:noFill xmlns:a="http://schemas.openxmlformats.org/drawingml/2006/main"/>
         </p:spPr>
         <p:txBody>
-          <a:bodyPr xmlns:a="http://schemas.openxmlformats.org/drawingml/2006/main" wrap="square" lIns="36576" tIns="36576" rIns="36576" bIns="36576" anchor="t">
-            <a:spAutoFit/>
+          <a:bodyPr xmlns:a="http://schemas.openxmlformats.org/drawingml/2006/main" wrap="none" lIns="36576" tIns="36576" rIns="36576" bIns="36576" anchor="t">
+            <a:normAutofit fontScale="100000"/>
           </a:bodyPr>
           <a:lstStyle xmlns:a="http://schemas.openxmlformats.org/drawingml/2006/main"/>
           <a:p xmlns:a="http://schemas.openxmlformats.org/drawingml/2006/main">
@@ -23100,7 +23550,7 @@
               <a:buNone/>
             </a:pPr>
             <a:r>
-              <a:rPr sz="3000" b="1">
+              <a:rPr sz="2400" b="1">
                 <a:solidFill>
                   <a:srgbClr val="071A2B"/>
                 </a:solidFill>
@@ -23118,7 +23568,7 @@
           <p:cNvPr id="4" name="Rectangle 3">
             <a:extLst xmlns:a="http://schemas.openxmlformats.org/drawingml/2006/main">
               <a:ext uri="{FF2B5EF4-FFF2-40B4-BE49-F238E27FC236}">
-                <a16:creationId xmlns:a16="http://schemas.microsoft.com/office/drawing/2014/main" id="{28140F74-E93D-4266-AA77-25FDA38A0E01}"/>
+                <a16:creationId xmlns:a16="http://schemas.microsoft.com/office/drawing/2014/main" id="{22061EB5-0529-4F92-A905-F1E3F63CDA09}"/>
               </a:ext>
             </a:extLst>
           </p:cNvPr>
@@ -23173,7 +23623,7 @@
           <p:cNvPr id="5" name="Rectangle 4">
             <a:extLst xmlns:a="http://schemas.openxmlformats.org/drawingml/2006/main">
               <a:ext uri="{FF2B5EF4-FFF2-40B4-BE49-F238E27FC236}">
-                <a16:creationId xmlns:a16="http://schemas.microsoft.com/office/drawing/2014/main" id="{BF284EA3-5FD3-4F00-A687-99E4FC0FC7F7}"/>
+                <a16:creationId xmlns:a16="http://schemas.microsoft.com/office/drawing/2014/main" id="{E739376C-1A53-4F03-B8AD-C3E0E9D80420}"/>
               </a:ext>
             </a:extLst>
           </p:cNvPr>
@@ -23228,7 +23678,7 @@
           <p:cNvPr id="6" name="TextBox 5">
             <a:extLst xmlns:a="http://schemas.openxmlformats.org/drawingml/2006/main">
               <a:ext uri="{FF2B5EF4-FFF2-40B4-BE49-F238E27FC236}">
-                <a16:creationId xmlns:a16="http://schemas.microsoft.com/office/drawing/2014/main" id="{14EA26F2-418A-4A86-BB12-B2274EC8C70A}"/>
+                <a16:creationId xmlns:a16="http://schemas.microsoft.com/office/drawing/2014/main" id="{75546D6F-33D5-4740-AE1F-3763FF1F917A}"/>
               </a:ext>
             </a:extLst>
           </p:cNvPr>
@@ -23265,7 +23715,7 @@
                 <a:ea typeface="Aptos"/>
                 <a:cs typeface="Aptos"/>
               </a:rPr>
-              <a:t>Julkinen riippumaton evidenssikooste · 2026.07.24-22 · 2026-07-24 · Lähteet: WIPO licensing; IP Finance; TPLF mapping</a:t>
+              <a:t>Julkinen riippumaton evidenssikooste · 2026.07.25-24 · 2026-07-24 · Lähteet: WIPO licensing; IP Finance; TPLF mapping</a:t>
             </a:r>
           </a:p>
         </p:txBody>
@@ -23275,7 +23725,7 @@
           <p:cNvPr id="7" name="TextBox 6">
             <a:extLst xmlns:a="http://schemas.openxmlformats.org/drawingml/2006/main">
               <a:ext uri="{FF2B5EF4-FFF2-40B4-BE49-F238E27FC236}">
-                <a16:creationId xmlns:a16="http://schemas.microsoft.com/office/drawing/2014/main" id="{BC7EA216-78D1-418D-A09E-A5AB3172F223}"/>
+                <a16:creationId xmlns:a16="http://schemas.microsoft.com/office/drawing/2014/main" id="{BD39F3A4-EDF7-4E72-8945-FA525E97255C}"/>
               </a:ext>
             </a:extLst>
           </p:cNvPr>
@@ -23845,7 +24295,7 @@
           <p:cNvPr id="9" name="TextBox 8">
             <a:extLst xmlns:a="http://schemas.openxmlformats.org/drawingml/2006/main">
               <a:ext uri="{FF2B5EF4-FFF2-40B4-BE49-F238E27FC236}">
-                <a16:creationId xmlns:a16="http://schemas.microsoft.com/office/drawing/2014/main" id="{DA3E8E83-9B43-4DA5-B5F4-7FBA1AF54C48}"/>
+                <a16:creationId xmlns:a16="http://schemas.microsoft.com/office/drawing/2014/main" id="{6A32500D-8CE2-41A5-BF76-9BA68119E4B2}"/>
               </a:ext>
             </a:extLst>
           </p:cNvPr>
@@ -23890,7 +24340,7 @@
     </p:spTree>
     <p:extLst>
       <p:ext uri="{BB962C8B-B14F-4D97-AF65-F5344CB8AC3E}">
-        <p14:creationId xmlns:p14="http://schemas.microsoft.com/office/powerpoint/2010/main" val="1144878459"/>
+        <p14:creationId xmlns:p14="http://schemas.microsoft.com/office/powerpoint/2010/main" val="419388638"/>
       </p:ext>
     </p:extLst>
   </p:cSld>
@@ -23914,7 +24364,7 @@
           <p:cNvPr id="2" name="TextBox 1">
             <a:extLst xmlns:a="http://schemas.openxmlformats.org/drawingml/2006/main">
               <a:ext uri="{FF2B5EF4-FFF2-40B4-BE49-F238E27FC236}">
-                <a16:creationId xmlns:a16="http://schemas.microsoft.com/office/drawing/2014/main" id="{CB669A2E-3CCC-4ABE-9EF6-58629B1A6F31}"/>
+                <a16:creationId xmlns:a16="http://schemas.microsoft.com/office/drawing/2014/main" id="{2A50E203-66C4-4E59-91DF-E14CB3996347}"/>
               </a:ext>
             </a:extLst>
           </p:cNvPr>
@@ -23961,7 +24411,7 @@
           <p:cNvPr id="3" name="TextBox 2">
             <a:extLst xmlns:a="http://schemas.openxmlformats.org/drawingml/2006/main">
               <a:ext uri="{FF2B5EF4-FFF2-40B4-BE49-F238E27FC236}">
-                <a16:creationId xmlns:a16="http://schemas.microsoft.com/office/drawing/2014/main" id="{FBA12558-75C9-4889-8213-EED050A6AB21}"/>
+                <a16:creationId xmlns:a16="http://schemas.microsoft.com/office/drawing/2014/main" id="{738D4DA5-3E00-42C3-979F-1A80D1AB3B7A}"/>
               </a:ext>
             </a:extLst>
           </p:cNvPr>
@@ -24008,7 +24458,7 @@
           <p:cNvPr id="4" name="Rectangle 3">
             <a:extLst xmlns:a="http://schemas.openxmlformats.org/drawingml/2006/main">
               <a:ext uri="{FF2B5EF4-FFF2-40B4-BE49-F238E27FC236}">
-                <a16:creationId xmlns:a16="http://schemas.microsoft.com/office/drawing/2014/main" id="{78AAFC70-8BC4-46F3-A48D-0D498A8D2CB8}"/>
+                <a16:creationId xmlns:a16="http://schemas.microsoft.com/office/drawing/2014/main" id="{4F77972C-9C25-47B4-9F6A-6AE9B0008FCE}"/>
               </a:ext>
             </a:extLst>
           </p:cNvPr>
@@ -24063,7 +24513,7 @@
           <p:cNvPr id="5" name="Rectangle 4">
             <a:extLst xmlns:a="http://schemas.openxmlformats.org/drawingml/2006/main">
               <a:ext uri="{FF2B5EF4-FFF2-40B4-BE49-F238E27FC236}">
-                <a16:creationId xmlns:a16="http://schemas.microsoft.com/office/drawing/2014/main" id="{2D133DB0-52EE-40D0-B556-24D387C14540}"/>
+                <a16:creationId xmlns:a16="http://schemas.microsoft.com/office/drawing/2014/main" id="{C5C42C6B-7303-40AF-A092-B7D905F1F79A}"/>
               </a:ext>
             </a:extLst>
           </p:cNvPr>
@@ -24118,7 +24568,7 @@
           <p:cNvPr id="6" name="TextBox 5">
             <a:extLst xmlns:a="http://schemas.openxmlformats.org/drawingml/2006/main">
               <a:ext uri="{FF2B5EF4-FFF2-40B4-BE49-F238E27FC236}">
-                <a16:creationId xmlns:a16="http://schemas.microsoft.com/office/drawing/2014/main" id="{DF511A81-2BE3-4A48-A7AE-AE1B8AE62DB9}"/>
+                <a16:creationId xmlns:a16="http://schemas.microsoft.com/office/drawing/2014/main" id="{B2C78FBA-8108-4A1E-9AB2-9D29DBEBAC55}"/>
               </a:ext>
             </a:extLst>
           </p:cNvPr>
@@ -24155,7 +24605,7 @@
                 <a:ea typeface="Aptos"/>
                 <a:cs typeface="Aptos"/>
               </a:rPr>
-              <a:t>Julkinen riippumaton evidenssikooste · 2026.07.24-22 · 2026-07-24 · Lähteet: Evidence Register; WIPO valuation</a:t>
+              <a:t>Julkinen riippumaton evidenssikooste · 2026.07.25-24 · 2026-07-24 · Lähteet: Evidence Register; WIPO valuation</a:t>
             </a:r>
           </a:p>
         </p:txBody>
@@ -24165,7 +24615,7 @@
           <p:cNvPr id="7" name="TextBox 6">
             <a:extLst xmlns:a="http://schemas.openxmlformats.org/drawingml/2006/main">
               <a:ext uri="{FF2B5EF4-FFF2-40B4-BE49-F238E27FC236}">
-                <a16:creationId xmlns:a16="http://schemas.microsoft.com/office/drawing/2014/main" id="{CD5667F0-F840-4171-BF67-6E6445C08548}"/>
+                <a16:creationId xmlns:a16="http://schemas.microsoft.com/office/drawing/2014/main" id="{B42CBBE3-BB42-45CF-9000-161FAB31F049}"/>
               </a:ext>
             </a:extLst>
           </p:cNvPr>
@@ -24818,7 +25268,7 @@
           <p:cNvPr id="9" name="TextBox 8">
             <a:extLst xmlns:a="http://schemas.openxmlformats.org/drawingml/2006/main">
               <a:ext uri="{FF2B5EF4-FFF2-40B4-BE49-F238E27FC236}">
-                <a16:creationId xmlns:a16="http://schemas.microsoft.com/office/drawing/2014/main" id="{2F35DA58-879E-4D0B-A975-43F87CCC612F}"/>
+                <a16:creationId xmlns:a16="http://schemas.microsoft.com/office/drawing/2014/main" id="{4A6BEFF5-34A2-47BB-BDF9-17249D337738}"/>
               </a:ext>
             </a:extLst>
           </p:cNvPr>
@@ -24863,7 +25313,7 @@
     </p:spTree>
     <p:extLst>
       <p:ext uri="{BB962C8B-B14F-4D97-AF65-F5344CB8AC3E}">
-        <p14:creationId xmlns:p14="http://schemas.microsoft.com/office/powerpoint/2010/main" val="1021309762"/>
+        <p14:creationId xmlns:p14="http://schemas.microsoft.com/office/powerpoint/2010/main" val="880871407"/>
       </p:ext>
     </p:extLst>
   </p:cSld>
@@ -24887,7 +25337,7 @@
           <p:cNvPr id="2" name="TextBox 1">
             <a:extLst xmlns:a="http://schemas.openxmlformats.org/drawingml/2006/main">
               <a:ext uri="{FF2B5EF4-FFF2-40B4-BE49-F238E27FC236}">
-                <a16:creationId xmlns:a16="http://schemas.microsoft.com/office/drawing/2014/main" id="{4DEE1841-FAF0-499B-9F07-865CF8BB0369}"/>
+                <a16:creationId xmlns:a16="http://schemas.microsoft.com/office/drawing/2014/main" id="{CF7C3925-4CE8-469C-9FCC-4193E5B94406}"/>
               </a:ext>
             </a:extLst>
           </p:cNvPr>
@@ -24934,7 +25384,7 @@
           <p:cNvPr id="3" name="TextBox 2">
             <a:extLst xmlns:a="http://schemas.openxmlformats.org/drawingml/2006/main">
               <a:ext uri="{FF2B5EF4-FFF2-40B4-BE49-F238E27FC236}">
-                <a16:creationId xmlns:a16="http://schemas.microsoft.com/office/drawing/2014/main" id="{18CDD2E9-656B-4626-9BFC-6446584A1FBD}"/>
+                <a16:creationId xmlns:a16="http://schemas.microsoft.com/office/drawing/2014/main" id="{E795E8C3-D4BB-4292-B6EB-B79229453211}"/>
               </a:ext>
             </a:extLst>
           </p:cNvPr>
@@ -24981,7 +25431,7 @@
           <p:cNvPr id="4" name="Rectangle 3">
             <a:extLst xmlns:a="http://schemas.openxmlformats.org/drawingml/2006/main">
               <a:ext uri="{FF2B5EF4-FFF2-40B4-BE49-F238E27FC236}">
-                <a16:creationId xmlns:a16="http://schemas.microsoft.com/office/drawing/2014/main" id="{CAE97298-88F0-4647-9CEC-3A6AA097BF2A}"/>
+                <a16:creationId xmlns:a16="http://schemas.microsoft.com/office/drawing/2014/main" id="{39378215-6630-4F09-84D6-64932A937743}"/>
               </a:ext>
             </a:extLst>
           </p:cNvPr>
@@ -25036,7 +25486,7 @@
           <p:cNvPr id="5" name="Rectangle 4">
             <a:extLst xmlns:a="http://schemas.openxmlformats.org/drawingml/2006/main">
               <a:ext uri="{FF2B5EF4-FFF2-40B4-BE49-F238E27FC236}">
-                <a16:creationId xmlns:a16="http://schemas.microsoft.com/office/drawing/2014/main" id="{F1B9D211-65D2-4A25-9A2F-98082F7BE41F}"/>
+                <a16:creationId xmlns:a16="http://schemas.microsoft.com/office/drawing/2014/main" id="{92956DFF-851B-4E60-9320-8C0B7452755E}"/>
               </a:ext>
             </a:extLst>
           </p:cNvPr>
@@ -25091,7 +25541,7 @@
           <p:cNvPr id="6" name="TextBox 5">
             <a:extLst xmlns:a="http://schemas.openxmlformats.org/drawingml/2006/main">
               <a:ext uri="{FF2B5EF4-FFF2-40B4-BE49-F238E27FC236}">
-                <a16:creationId xmlns:a16="http://schemas.microsoft.com/office/drawing/2014/main" id="{1CB4BBAE-51C7-47AD-BDA7-6B32AAFD1289}"/>
+                <a16:creationId xmlns:a16="http://schemas.microsoft.com/office/drawing/2014/main" id="{38B06C5F-BD09-4002-92A1-D3EF8F1A8048}"/>
               </a:ext>
             </a:extLst>
           </p:cNvPr>
@@ -25128,7 +25578,7 @@
                 <a:ea typeface="Aptos"/>
                 <a:cs typeface="Aptos"/>
               </a:rPr>
-              <a:t>Julkinen riippumaton evidenssikooste · 2026.07.24-22 · 2026-07-24 · Lähteet: WIPO valuation</a:t>
+              <a:t>Julkinen riippumaton evidenssikooste · 2026.07.25-24 · 2026-07-24 · Lähteet: WIPO valuation</a:t>
             </a:r>
           </a:p>
         </p:txBody>
@@ -25138,7 +25588,7 @@
           <p:cNvPr id="7" name="TextBox 6">
             <a:extLst xmlns:a="http://schemas.openxmlformats.org/drawingml/2006/main">
               <a:ext uri="{FF2B5EF4-FFF2-40B4-BE49-F238E27FC236}">
-                <a16:creationId xmlns:a16="http://schemas.microsoft.com/office/drawing/2014/main" id="{F0C618CE-1D5B-4F82-8E35-7DB42C640C55}"/>
+                <a16:creationId xmlns:a16="http://schemas.microsoft.com/office/drawing/2014/main" id="{DD2EA471-2DCC-4DEE-A4BC-84410AA4B1EE}"/>
               </a:ext>
             </a:extLst>
           </p:cNvPr>
@@ -25871,7 +26321,7 @@
           <p:cNvPr id="9" name="TextBox 8">
             <a:extLst xmlns:a="http://schemas.openxmlformats.org/drawingml/2006/main">
               <a:ext uri="{FF2B5EF4-FFF2-40B4-BE49-F238E27FC236}">
-                <a16:creationId xmlns:a16="http://schemas.microsoft.com/office/drawing/2014/main" id="{28CF0789-2A6B-4C0D-9300-B007901C9C00}"/>
+                <a16:creationId xmlns:a16="http://schemas.microsoft.com/office/drawing/2014/main" id="{F83503A4-8E13-45F6-94F4-05DD14F626F2}"/>
               </a:ext>
             </a:extLst>
           </p:cNvPr>
@@ -25916,7 +26366,7 @@
     </p:spTree>
     <p:extLst>
       <p:ext uri="{BB962C8B-B14F-4D97-AF65-F5344CB8AC3E}">
-        <p14:creationId xmlns:p14="http://schemas.microsoft.com/office/powerpoint/2010/main" val="428828354"/>
+        <p14:creationId xmlns:p14="http://schemas.microsoft.com/office/powerpoint/2010/main" val="1518412269"/>
       </p:ext>
     </p:extLst>
   </p:cSld>
@@ -25940,7 +26390,7 @@
           <p:cNvPr id="2" name="TextBox 1">
             <a:extLst xmlns:a="http://schemas.openxmlformats.org/drawingml/2006/main">
               <a:ext uri="{FF2B5EF4-FFF2-40B4-BE49-F238E27FC236}">
-                <a16:creationId xmlns:a16="http://schemas.microsoft.com/office/drawing/2014/main" id="{567A5F81-20E5-4220-AEC9-EA09B427F402}"/>
+                <a16:creationId xmlns:a16="http://schemas.microsoft.com/office/drawing/2014/main" id="{5675FF94-ED51-4FF7-8F91-134662BC8661}"/>
               </a:ext>
             </a:extLst>
           </p:cNvPr>
@@ -25987,7 +26437,7 @@
           <p:cNvPr id="3" name="TextBox 2">
             <a:extLst xmlns:a="http://schemas.openxmlformats.org/drawingml/2006/main">
               <a:ext uri="{FF2B5EF4-FFF2-40B4-BE49-F238E27FC236}">
-                <a16:creationId xmlns:a16="http://schemas.microsoft.com/office/drawing/2014/main" id="{C0A8C7E1-4148-4CE6-BB63-895DAD643C06}"/>
+                <a16:creationId xmlns:a16="http://schemas.microsoft.com/office/drawing/2014/main" id="{871890FD-36FE-41D2-BC23-2DE5E325954D}"/>
               </a:ext>
             </a:extLst>
           </p:cNvPr>
@@ -26034,7 +26484,7 @@
           <p:cNvPr id="4" name="Rectangle 3">
             <a:extLst xmlns:a="http://schemas.openxmlformats.org/drawingml/2006/main">
               <a:ext uri="{FF2B5EF4-FFF2-40B4-BE49-F238E27FC236}">
-                <a16:creationId xmlns:a16="http://schemas.microsoft.com/office/drawing/2014/main" id="{6F2FF429-3CC1-4275-B872-BD11BCB668F1}"/>
+                <a16:creationId xmlns:a16="http://schemas.microsoft.com/office/drawing/2014/main" id="{EB1E7B9A-C177-4FD8-B5E3-C030E04B4045}"/>
               </a:ext>
             </a:extLst>
           </p:cNvPr>
@@ -26089,7 +26539,7 @@
           <p:cNvPr id="5" name="Rectangle 4">
             <a:extLst xmlns:a="http://schemas.openxmlformats.org/drawingml/2006/main">
               <a:ext uri="{FF2B5EF4-FFF2-40B4-BE49-F238E27FC236}">
-                <a16:creationId xmlns:a16="http://schemas.microsoft.com/office/drawing/2014/main" id="{A39ECEB4-A7A9-4A3C-89B2-DED7F83750FE}"/>
+                <a16:creationId xmlns:a16="http://schemas.microsoft.com/office/drawing/2014/main" id="{0F2A5D8C-944C-479C-95F7-0875B6E12A64}"/>
               </a:ext>
             </a:extLst>
           </p:cNvPr>
@@ -26144,7 +26594,7 @@
           <p:cNvPr id="6" name="TextBox 5">
             <a:extLst xmlns:a="http://schemas.openxmlformats.org/drawingml/2006/main">
               <a:ext uri="{FF2B5EF4-FFF2-40B4-BE49-F238E27FC236}">
-                <a16:creationId xmlns:a16="http://schemas.microsoft.com/office/drawing/2014/main" id="{18342BB4-4B10-4B95-8CB6-26C63C623266}"/>
+                <a16:creationId xmlns:a16="http://schemas.microsoft.com/office/drawing/2014/main" id="{8DC4E749-2C86-4A61-84AC-BA4DE3D4CEF1}"/>
               </a:ext>
             </a:extLst>
           </p:cNvPr>
@@ -26181,7 +26631,7 @@
                 <a:ea typeface="Aptos"/>
                 <a:cs typeface="Aptos"/>
               </a:rPr>
-              <a:t>Julkinen riippumaton evidenssikooste · 2026.07.24-22 · 2026-07-24 · Lähteet: Evidence Register</a:t>
+              <a:t>Julkinen riippumaton evidenssikooste · 2026.07.25-24 · 2026-07-24 · Lähteet: Evidence Register</a:t>
             </a:r>
           </a:p>
         </p:txBody>
@@ -26191,7 +26641,7 @@
           <p:cNvPr id="7" name="TextBox 6">
             <a:extLst xmlns:a="http://schemas.openxmlformats.org/drawingml/2006/main">
               <a:ext uri="{FF2B5EF4-FFF2-40B4-BE49-F238E27FC236}">
-                <a16:creationId xmlns:a16="http://schemas.microsoft.com/office/drawing/2014/main" id="{F94D26EA-9A77-4A42-8A7A-6D009B1E5D52}"/>
+                <a16:creationId xmlns:a16="http://schemas.microsoft.com/office/drawing/2014/main" id="{B06BB621-2B12-4829-AAC4-E988BEF2C51F}"/>
               </a:ext>
             </a:extLst>
           </p:cNvPr>
@@ -26761,7 +27211,7 @@
           <p:cNvPr id="9" name="TextBox 8">
             <a:extLst xmlns:a="http://schemas.openxmlformats.org/drawingml/2006/main">
               <a:ext uri="{FF2B5EF4-FFF2-40B4-BE49-F238E27FC236}">
-                <a16:creationId xmlns:a16="http://schemas.microsoft.com/office/drawing/2014/main" id="{5668641A-3EF9-4ED3-9378-33A2ACEE8B89}"/>
+                <a16:creationId xmlns:a16="http://schemas.microsoft.com/office/drawing/2014/main" id="{B94CCB05-370F-408D-A704-ED1959A1178A}"/>
               </a:ext>
             </a:extLst>
           </p:cNvPr>
@@ -26806,7 +27256,7 @@
     </p:spTree>
     <p:extLst>
       <p:ext uri="{BB962C8B-B14F-4D97-AF65-F5344CB8AC3E}">
-        <p14:creationId xmlns:p14="http://schemas.microsoft.com/office/powerpoint/2010/main" val="2115131829"/>
+        <p14:creationId xmlns:p14="http://schemas.microsoft.com/office/powerpoint/2010/main" val="520108769"/>
       </p:ext>
     </p:extLst>
   </p:cSld>
@@ -26830,7 +27280,7 @@
           <p:cNvPr id="2" name="TextBox 1">
             <a:extLst xmlns:a="http://schemas.openxmlformats.org/drawingml/2006/main">
               <a:ext uri="{FF2B5EF4-FFF2-40B4-BE49-F238E27FC236}">
-                <a16:creationId xmlns:a16="http://schemas.microsoft.com/office/drawing/2014/main" id="{EAFC66C2-2726-4ADB-954C-07C75EF9A2D7}"/>
+                <a16:creationId xmlns:a16="http://schemas.microsoft.com/office/drawing/2014/main" id="{41B404F7-15B8-44EE-8D5B-6C2DCA197B2E}"/>
               </a:ext>
             </a:extLst>
           </p:cNvPr>
@@ -26877,7 +27327,7 @@
           <p:cNvPr id="3" name="TextBox 2">
             <a:extLst xmlns:a="http://schemas.openxmlformats.org/drawingml/2006/main">
               <a:ext uri="{FF2B5EF4-FFF2-40B4-BE49-F238E27FC236}">
-                <a16:creationId xmlns:a16="http://schemas.microsoft.com/office/drawing/2014/main" id="{BF21E6AC-E148-4B66-8DCB-3972CD0F33B8}"/>
+                <a16:creationId xmlns:a16="http://schemas.microsoft.com/office/drawing/2014/main" id="{66265B0C-9938-4B76-918E-6AEE3F90ACE1}"/>
               </a:ext>
             </a:extLst>
           </p:cNvPr>
@@ -26897,8 +27347,8 @@
           <a:noFill xmlns:a="http://schemas.openxmlformats.org/drawingml/2006/main"/>
         </p:spPr>
         <p:txBody>
-          <a:bodyPr xmlns:a="http://schemas.openxmlformats.org/drawingml/2006/main" wrap="square" lIns="36576" tIns="36576" rIns="36576" bIns="36576" anchor="t">
-            <a:spAutoFit/>
+          <a:bodyPr xmlns:a="http://schemas.openxmlformats.org/drawingml/2006/main" wrap="none" lIns="36576" tIns="36576" rIns="36576" bIns="36576" anchor="t">
+            <a:normAutofit fontScale="100000"/>
           </a:bodyPr>
           <a:lstStyle xmlns:a="http://schemas.openxmlformats.org/drawingml/2006/main"/>
           <a:p xmlns:a="http://schemas.openxmlformats.org/drawingml/2006/main">
@@ -26906,7 +27356,7 @@
               <a:buNone/>
             </a:pPr>
             <a:r>
-              <a:rPr sz="3000" b="1">
+              <a:rPr sz="2400" b="1">
                 <a:solidFill>
                   <a:srgbClr val="071A2B"/>
                 </a:solidFill>
@@ -26924,7 +27374,7 @@
           <p:cNvPr id="4" name="Rectangle 3">
             <a:extLst xmlns:a="http://schemas.openxmlformats.org/drawingml/2006/main">
               <a:ext uri="{FF2B5EF4-FFF2-40B4-BE49-F238E27FC236}">
-                <a16:creationId xmlns:a16="http://schemas.microsoft.com/office/drawing/2014/main" id="{5836959F-473C-46AA-81F1-3DC5C55F6A5C}"/>
+                <a16:creationId xmlns:a16="http://schemas.microsoft.com/office/drawing/2014/main" id="{831E6448-7DD3-4D24-80DC-92F3C733DA72}"/>
               </a:ext>
             </a:extLst>
           </p:cNvPr>
@@ -26979,7 +27429,7 @@
           <p:cNvPr id="5" name="Rectangle 4">
             <a:extLst xmlns:a="http://schemas.openxmlformats.org/drawingml/2006/main">
               <a:ext uri="{FF2B5EF4-FFF2-40B4-BE49-F238E27FC236}">
-                <a16:creationId xmlns:a16="http://schemas.microsoft.com/office/drawing/2014/main" id="{80EF0437-9BDD-4EDE-A081-4A1B70D46F78}"/>
+                <a16:creationId xmlns:a16="http://schemas.microsoft.com/office/drawing/2014/main" id="{930A75FB-98E2-4E44-BCD6-21D273B2AB3D}"/>
               </a:ext>
             </a:extLst>
           </p:cNvPr>
@@ -27034,7 +27484,7 @@
           <p:cNvPr id="6" name="TextBox 5">
             <a:extLst xmlns:a="http://schemas.openxmlformats.org/drawingml/2006/main">
               <a:ext uri="{FF2B5EF4-FFF2-40B4-BE49-F238E27FC236}">
-                <a16:creationId xmlns:a16="http://schemas.microsoft.com/office/drawing/2014/main" id="{2D4BBBBF-9C67-42BD-8C3A-966B7D64E5D6}"/>
+                <a16:creationId xmlns:a16="http://schemas.microsoft.com/office/drawing/2014/main" id="{56B7D87D-75DE-478D-BA34-71BC030AC095}"/>
               </a:ext>
             </a:extLst>
           </p:cNvPr>
@@ -27071,7 +27521,7 @@
                 <a:ea typeface="Aptos"/>
                 <a:cs typeface="Aptos"/>
               </a:rPr>
-              <a:t>Julkinen riippumaton evidenssikooste · 2026.07.24-22 · 2026-07-24 · Lähteet: Evidence Register</a:t>
+              <a:t>Julkinen riippumaton evidenssikooste · 2026.07.25-24 · 2026-07-24 · Lähteet: Evidence Register</a:t>
             </a:r>
           </a:p>
         </p:txBody>
@@ -27081,7 +27531,7 @@
           <p:cNvPr id="7" name="TextBox 6">
             <a:extLst xmlns:a="http://schemas.openxmlformats.org/drawingml/2006/main">
               <a:ext uri="{FF2B5EF4-FFF2-40B4-BE49-F238E27FC236}">
-                <a16:creationId xmlns:a16="http://schemas.microsoft.com/office/drawing/2014/main" id="{D8E3A772-0452-4B6D-AB2F-1F60904C5F69}"/>
+                <a16:creationId xmlns:a16="http://schemas.microsoft.com/office/drawing/2014/main" id="{4D8B35B0-6FD4-4369-8A92-03D2A6D7F2B3}"/>
               </a:ext>
             </a:extLst>
           </p:cNvPr>
@@ -27734,7 +28184,7 @@
           <p:cNvPr id="9" name="TextBox 8">
             <a:extLst xmlns:a="http://schemas.openxmlformats.org/drawingml/2006/main">
               <a:ext uri="{FF2B5EF4-FFF2-40B4-BE49-F238E27FC236}">
-                <a16:creationId xmlns:a16="http://schemas.microsoft.com/office/drawing/2014/main" id="{7B40409E-77F8-47E7-BC15-AEC0D150085D}"/>
+                <a16:creationId xmlns:a16="http://schemas.microsoft.com/office/drawing/2014/main" id="{766E3CD2-6577-4BEF-BE00-26991321098B}"/>
               </a:ext>
             </a:extLst>
           </p:cNvPr>
@@ -27779,7 +28229,7 @@
     </p:spTree>
     <p:extLst>
       <p:ext uri="{BB962C8B-B14F-4D97-AF65-F5344CB8AC3E}">
-        <p14:creationId xmlns:p14="http://schemas.microsoft.com/office/powerpoint/2010/main" val="191409369"/>
+        <p14:creationId xmlns:p14="http://schemas.microsoft.com/office/powerpoint/2010/main" val="394185637"/>
       </p:ext>
     </p:extLst>
   </p:cSld>
@@ -27803,7 +28253,7 @@
           <p:cNvPr id="2" name="TextBox 1">
             <a:extLst xmlns:a="http://schemas.openxmlformats.org/drawingml/2006/main">
               <a:ext uri="{FF2B5EF4-FFF2-40B4-BE49-F238E27FC236}">
-                <a16:creationId xmlns:a16="http://schemas.microsoft.com/office/drawing/2014/main" id="{3BEAAD63-614D-441F-835D-60CC9FA9F2A6}"/>
+                <a16:creationId xmlns:a16="http://schemas.microsoft.com/office/drawing/2014/main" id="{1D98C99C-C8BD-4815-90AB-46C706773D90}"/>
               </a:ext>
             </a:extLst>
           </p:cNvPr>
@@ -27850,7 +28300,7 @@
           <p:cNvPr id="3" name="TextBox 2">
             <a:extLst xmlns:a="http://schemas.openxmlformats.org/drawingml/2006/main">
               <a:ext uri="{FF2B5EF4-FFF2-40B4-BE49-F238E27FC236}">
-                <a16:creationId xmlns:a16="http://schemas.microsoft.com/office/drawing/2014/main" id="{B0C43230-B9F7-4CDE-B211-6AB214AF8D54}"/>
+                <a16:creationId xmlns:a16="http://schemas.microsoft.com/office/drawing/2014/main" id="{07D06D17-080E-4FD3-BF01-9CA55A8B654C}"/>
               </a:ext>
             </a:extLst>
           </p:cNvPr>
@@ -27897,7 +28347,7 @@
           <p:cNvPr id="4" name="Rectangle 3">
             <a:extLst xmlns:a="http://schemas.openxmlformats.org/drawingml/2006/main">
               <a:ext uri="{FF2B5EF4-FFF2-40B4-BE49-F238E27FC236}">
-                <a16:creationId xmlns:a16="http://schemas.microsoft.com/office/drawing/2014/main" id="{4A70D220-9F18-41DB-A811-53A9968B67BD}"/>
+                <a16:creationId xmlns:a16="http://schemas.microsoft.com/office/drawing/2014/main" id="{457FAA51-8789-49A2-9584-A37651B9BB3D}"/>
               </a:ext>
             </a:extLst>
           </p:cNvPr>
@@ -27952,7 +28402,7 @@
           <p:cNvPr id="5" name="Rectangle 4">
             <a:extLst xmlns:a="http://schemas.openxmlformats.org/drawingml/2006/main">
               <a:ext uri="{FF2B5EF4-FFF2-40B4-BE49-F238E27FC236}">
-                <a16:creationId xmlns:a16="http://schemas.microsoft.com/office/drawing/2014/main" id="{AA35B710-D482-4295-8554-61C6CFA65E57}"/>
+                <a16:creationId xmlns:a16="http://schemas.microsoft.com/office/drawing/2014/main" id="{A8665FFD-F57B-496D-9FA0-62898FC31622}"/>
               </a:ext>
             </a:extLst>
           </p:cNvPr>
@@ -28007,7 +28457,7 @@
           <p:cNvPr id="6" name="TextBox 5">
             <a:extLst xmlns:a="http://schemas.openxmlformats.org/drawingml/2006/main">
               <a:ext uri="{FF2B5EF4-FFF2-40B4-BE49-F238E27FC236}">
-                <a16:creationId xmlns:a16="http://schemas.microsoft.com/office/drawing/2014/main" id="{3338B8FD-C80D-41F9-B084-C0D2A16798FC}"/>
+                <a16:creationId xmlns:a16="http://schemas.microsoft.com/office/drawing/2014/main" id="{CE0A4605-81F1-4C6E-BF59-5705842E7AC4}"/>
               </a:ext>
             </a:extLst>
           </p:cNvPr>
@@ -28044,7 +28494,7 @@
                 <a:ea typeface="Aptos"/>
                 <a:cs typeface="Aptos"/>
               </a:rPr>
-              <a:t>Julkinen riippumaton evidenssikooste · 2026.07.24-22 · 2026-07-24 · Lähteet: Evidence Register; changelog</a:t>
+              <a:t>Julkinen riippumaton evidenssikooste · 2026.07.25-24 · 2026-07-24 · Lähteet: Evidence Register; changelog</a:t>
             </a:r>
           </a:p>
         </p:txBody>
@@ -28054,7 +28504,7 @@
           <p:cNvPr id="7" name="TextBox 6">
             <a:extLst xmlns:a="http://schemas.openxmlformats.org/drawingml/2006/main">
               <a:ext uri="{FF2B5EF4-FFF2-40B4-BE49-F238E27FC236}">
-                <a16:creationId xmlns:a16="http://schemas.microsoft.com/office/drawing/2014/main" id="{CB852C7E-3565-4783-B84D-C95C979ADF5C}"/>
+                <a16:creationId xmlns:a16="http://schemas.microsoft.com/office/drawing/2014/main" id="{C77FBB73-3BCB-4C11-BF62-83B71B756266}"/>
               </a:ext>
             </a:extLst>
           </p:cNvPr>
@@ -28101,7 +28551,7 @@
           <p:cNvPr id="8" name="Rounded Rectangle 7">
             <a:extLst xmlns:a="http://schemas.openxmlformats.org/drawingml/2006/main">
               <a:ext uri="{FF2B5EF4-FFF2-40B4-BE49-F238E27FC236}">
-                <a16:creationId xmlns:a16="http://schemas.microsoft.com/office/drawing/2014/main" id="{8E24B6E4-4E49-4C76-91D2-34177FF5B8D5}"/>
+                <a16:creationId xmlns:a16="http://schemas.microsoft.com/office/drawing/2014/main" id="{3DD415F2-952A-45D3-83D4-5C9CB6076D20}"/>
               </a:ext>
             </a:extLst>
           </p:cNvPr>
@@ -28158,7 +28608,7 @@
           <p:cNvPr id="9" name="TextBox 8">
             <a:extLst xmlns:a="http://schemas.openxmlformats.org/drawingml/2006/main">
               <a:ext uri="{FF2B5EF4-FFF2-40B4-BE49-F238E27FC236}">
-                <a16:creationId xmlns:a16="http://schemas.microsoft.com/office/drawing/2014/main" id="{AD56A15C-F917-4651-BA15-C9A60BC7090D}"/>
+                <a16:creationId xmlns:a16="http://schemas.microsoft.com/office/drawing/2014/main" id="{51C162F6-EF2C-47AA-9E34-407E943FD361}"/>
               </a:ext>
             </a:extLst>
           </p:cNvPr>
@@ -28205,7 +28655,7 @@
           <p:cNvPr id="10" name="TextBox 9">
             <a:extLst xmlns:a="http://schemas.openxmlformats.org/drawingml/2006/main">
               <a:ext uri="{FF2B5EF4-FFF2-40B4-BE49-F238E27FC236}">
-                <a16:creationId xmlns:a16="http://schemas.microsoft.com/office/drawing/2014/main" id="{D443685F-1961-4F19-8B91-A10702CB4889}"/>
+                <a16:creationId xmlns:a16="http://schemas.microsoft.com/office/drawing/2014/main" id="{BCE2EABD-3B50-4FE2-8FEC-F1655959C898}"/>
               </a:ext>
             </a:extLst>
           </p:cNvPr>
@@ -28252,7 +28702,7 @@
           <p:cNvPr id="11" name="TextBox 10">
             <a:extLst xmlns:a="http://schemas.openxmlformats.org/drawingml/2006/main">
               <a:ext uri="{FF2B5EF4-FFF2-40B4-BE49-F238E27FC236}">
-                <a16:creationId xmlns:a16="http://schemas.microsoft.com/office/drawing/2014/main" id="{C8D0007C-8778-4566-A7FB-5B855D2C7C48}"/>
+                <a16:creationId xmlns:a16="http://schemas.microsoft.com/office/drawing/2014/main" id="{A7420488-9166-4C5A-B8CE-552D7C21C880}"/>
               </a:ext>
             </a:extLst>
           </p:cNvPr>
@@ -28299,7 +28749,7 @@
           <p:cNvPr id="12" name="Rounded Rectangle 11">
             <a:extLst xmlns:a="http://schemas.openxmlformats.org/drawingml/2006/main">
               <a:ext uri="{FF2B5EF4-FFF2-40B4-BE49-F238E27FC236}">
-                <a16:creationId xmlns:a16="http://schemas.microsoft.com/office/drawing/2014/main" id="{E692821D-A5ED-4CBA-897A-3BB86A8B9812}"/>
+                <a16:creationId xmlns:a16="http://schemas.microsoft.com/office/drawing/2014/main" id="{BFABD9C7-B2CD-4F56-B0FE-B473E352AD9F}"/>
               </a:ext>
             </a:extLst>
           </p:cNvPr>
@@ -28356,7 +28806,7 @@
           <p:cNvPr id="13" name="TextBox 12">
             <a:extLst xmlns:a="http://schemas.openxmlformats.org/drawingml/2006/main">
               <a:ext uri="{FF2B5EF4-FFF2-40B4-BE49-F238E27FC236}">
-                <a16:creationId xmlns:a16="http://schemas.microsoft.com/office/drawing/2014/main" id="{96EB5B2D-DE5B-4AF0-9140-1866435D1032}"/>
+                <a16:creationId xmlns:a16="http://schemas.microsoft.com/office/drawing/2014/main" id="{A24A98E6-0CEA-4D19-9C00-0C9CEF6F8E10}"/>
               </a:ext>
             </a:extLst>
           </p:cNvPr>
@@ -28403,7 +28853,7 @@
           <p:cNvPr id="14" name="TextBox 13">
             <a:extLst xmlns:a="http://schemas.openxmlformats.org/drawingml/2006/main">
               <a:ext uri="{FF2B5EF4-FFF2-40B4-BE49-F238E27FC236}">
-                <a16:creationId xmlns:a16="http://schemas.microsoft.com/office/drawing/2014/main" id="{E9EDE640-508D-4AB8-94E2-8C988A7F9EC7}"/>
+                <a16:creationId xmlns:a16="http://schemas.microsoft.com/office/drawing/2014/main" id="{88F48FA1-9D2B-4FC2-936A-68353495FA8A}"/>
               </a:ext>
             </a:extLst>
           </p:cNvPr>
@@ -28450,7 +28900,7 @@
           <p:cNvPr id="15" name="TextBox 14">
             <a:extLst xmlns:a="http://schemas.openxmlformats.org/drawingml/2006/main">
               <a:ext uri="{FF2B5EF4-FFF2-40B4-BE49-F238E27FC236}">
-                <a16:creationId xmlns:a16="http://schemas.microsoft.com/office/drawing/2014/main" id="{F007DB4D-4712-4E68-ABE6-C08268460234}"/>
+                <a16:creationId xmlns:a16="http://schemas.microsoft.com/office/drawing/2014/main" id="{2E0547F1-83D6-4ED3-B6E5-0006501FEEB2}"/>
               </a:ext>
             </a:extLst>
           </p:cNvPr>
@@ -28497,7 +28947,7 @@
           <p:cNvPr id="16" name="Rounded Rectangle 15">
             <a:extLst xmlns:a="http://schemas.openxmlformats.org/drawingml/2006/main">
               <a:ext uri="{FF2B5EF4-FFF2-40B4-BE49-F238E27FC236}">
-                <a16:creationId xmlns:a16="http://schemas.microsoft.com/office/drawing/2014/main" id="{4C4D69E9-3774-4B24-8389-2DE31F529520}"/>
+                <a16:creationId xmlns:a16="http://schemas.microsoft.com/office/drawing/2014/main" id="{47F33D26-09FA-4F2A-9834-EA648C6B28EA}"/>
               </a:ext>
             </a:extLst>
           </p:cNvPr>
@@ -28554,7 +29004,7 @@
           <p:cNvPr id="17" name="TextBox 16">
             <a:extLst xmlns:a="http://schemas.openxmlformats.org/drawingml/2006/main">
               <a:ext uri="{FF2B5EF4-FFF2-40B4-BE49-F238E27FC236}">
-                <a16:creationId xmlns:a16="http://schemas.microsoft.com/office/drawing/2014/main" id="{D1EECB06-6E09-4698-AABA-05F627A793F4}"/>
+                <a16:creationId xmlns:a16="http://schemas.microsoft.com/office/drawing/2014/main" id="{63AF303E-8ADA-43D2-9AED-EE3614EC9EA2}"/>
               </a:ext>
             </a:extLst>
           </p:cNvPr>
@@ -28601,7 +29051,7 @@
           <p:cNvPr id="18" name="TextBox 17">
             <a:extLst xmlns:a="http://schemas.openxmlformats.org/drawingml/2006/main">
               <a:ext uri="{FF2B5EF4-FFF2-40B4-BE49-F238E27FC236}">
-                <a16:creationId xmlns:a16="http://schemas.microsoft.com/office/drawing/2014/main" id="{B2596DAA-0D86-4213-BF29-FCC916853860}"/>
+                <a16:creationId xmlns:a16="http://schemas.microsoft.com/office/drawing/2014/main" id="{3B2CC845-793C-4F58-ADF2-9FE5CFAA975E}"/>
               </a:ext>
             </a:extLst>
           </p:cNvPr>
@@ -28648,7 +29098,7 @@
           <p:cNvPr id="19" name="TextBox 18">
             <a:extLst xmlns:a="http://schemas.openxmlformats.org/drawingml/2006/main">
               <a:ext uri="{FF2B5EF4-FFF2-40B4-BE49-F238E27FC236}">
-                <a16:creationId xmlns:a16="http://schemas.microsoft.com/office/drawing/2014/main" id="{49BFECF9-E626-4402-B328-C4BA1A79FB24}"/>
+                <a16:creationId xmlns:a16="http://schemas.microsoft.com/office/drawing/2014/main" id="{836F3789-D35A-481C-B1C7-179B1BD17AAB}"/>
               </a:ext>
             </a:extLst>
           </p:cNvPr>
@@ -28695,7 +29145,7 @@
           <p:cNvPr id="20" name="Rounded Rectangle 19">
             <a:extLst xmlns:a="http://schemas.openxmlformats.org/drawingml/2006/main">
               <a:ext uri="{FF2B5EF4-FFF2-40B4-BE49-F238E27FC236}">
-                <a16:creationId xmlns:a16="http://schemas.microsoft.com/office/drawing/2014/main" id="{F80FA3B8-9C11-4455-ADEF-8408DC79F8A3}"/>
+                <a16:creationId xmlns:a16="http://schemas.microsoft.com/office/drawing/2014/main" id="{4E31E5D4-7E72-4911-AFEE-1BADB1BDA4FE}"/>
               </a:ext>
             </a:extLst>
           </p:cNvPr>
@@ -28752,7 +29202,7 @@
           <p:cNvPr id="21" name="TextBox 20">
             <a:extLst xmlns:a="http://schemas.openxmlformats.org/drawingml/2006/main">
               <a:ext uri="{FF2B5EF4-FFF2-40B4-BE49-F238E27FC236}">
-                <a16:creationId xmlns:a16="http://schemas.microsoft.com/office/drawing/2014/main" id="{D2F3AD08-D8FC-4EF7-BE4A-6F06796ABFD6}"/>
+                <a16:creationId xmlns:a16="http://schemas.microsoft.com/office/drawing/2014/main" id="{75C83D9B-E30B-459C-BE8E-CF155B94F461}"/>
               </a:ext>
             </a:extLst>
           </p:cNvPr>
@@ -28799,7 +29249,7 @@
           <p:cNvPr id="22" name="TextBox 21">
             <a:extLst xmlns:a="http://schemas.openxmlformats.org/drawingml/2006/main">
               <a:ext uri="{FF2B5EF4-FFF2-40B4-BE49-F238E27FC236}">
-                <a16:creationId xmlns:a16="http://schemas.microsoft.com/office/drawing/2014/main" id="{96EFE7A0-348C-4003-B833-AA35C0C0E1BC}"/>
+                <a16:creationId xmlns:a16="http://schemas.microsoft.com/office/drawing/2014/main" id="{E8DDAB35-4E14-4F5F-82F9-228AA17A66E0}"/>
               </a:ext>
             </a:extLst>
           </p:cNvPr>
@@ -28846,7 +29296,7 @@
           <p:cNvPr id="23" name="TextBox 22">
             <a:extLst xmlns:a="http://schemas.openxmlformats.org/drawingml/2006/main">
               <a:ext uri="{FF2B5EF4-FFF2-40B4-BE49-F238E27FC236}">
-                <a16:creationId xmlns:a16="http://schemas.microsoft.com/office/drawing/2014/main" id="{7C25CA76-0DF2-4067-B174-8BF9F1DA27C3}"/>
+                <a16:creationId xmlns:a16="http://schemas.microsoft.com/office/drawing/2014/main" id="{75CCCB56-6F05-4E39-B811-B37C25A96708}"/>
               </a:ext>
             </a:extLst>
           </p:cNvPr>
@@ -28893,7 +29343,7 @@
           <p:cNvPr id="24" name="TextBox 23">
             <a:extLst xmlns:a="http://schemas.openxmlformats.org/drawingml/2006/main">
               <a:ext uri="{FF2B5EF4-FFF2-40B4-BE49-F238E27FC236}">
-                <a16:creationId xmlns:a16="http://schemas.microsoft.com/office/drawing/2014/main" id="{C209C9ED-8D7A-4127-8A36-C6FA7632A023}"/>
+                <a16:creationId xmlns:a16="http://schemas.microsoft.com/office/drawing/2014/main" id="{30066C61-F373-48E0-B37C-683DAA66B976}"/>
               </a:ext>
             </a:extLst>
           </p:cNvPr>
@@ -28938,7 +29388,7 @@
     </p:spTree>
     <p:extLst>
       <p:ext uri="{BB962C8B-B14F-4D97-AF65-F5344CB8AC3E}">
-        <p14:creationId xmlns:p14="http://schemas.microsoft.com/office/powerpoint/2010/main" val="940740762"/>
+        <p14:creationId xmlns:p14="http://schemas.microsoft.com/office/powerpoint/2010/main" val="1778502340"/>
       </p:ext>
     </p:extLst>
   </p:cSld>
@@ -28962,7 +29412,7 @@
           <p:cNvPr id="2" name="TextBox 1">
             <a:extLst xmlns:a="http://schemas.openxmlformats.org/drawingml/2006/main">
               <a:ext uri="{FF2B5EF4-FFF2-40B4-BE49-F238E27FC236}">
-                <a16:creationId xmlns:a16="http://schemas.microsoft.com/office/drawing/2014/main" id="{DE4DC3DC-9FF8-4E19-9389-ECA9CA1092EA}"/>
+                <a16:creationId xmlns:a16="http://schemas.microsoft.com/office/drawing/2014/main" id="{1C3B64F9-8B52-44E1-88D4-8D7881BBE85D}"/>
               </a:ext>
             </a:extLst>
           </p:cNvPr>
@@ -29009,7 +29459,7 @@
           <p:cNvPr id="3" name="TextBox 2">
             <a:extLst xmlns:a="http://schemas.openxmlformats.org/drawingml/2006/main">
               <a:ext uri="{FF2B5EF4-FFF2-40B4-BE49-F238E27FC236}">
-                <a16:creationId xmlns:a16="http://schemas.microsoft.com/office/drawing/2014/main" id="{CF3AFE26-C861-4A5C-9E97-9C6795B86464}"/>
+                <a16:creationId xmlns:a16="http://schemas.microsoft.com/office/drawing/2014/main" id="{6A047ED3-6D3F-41C7-87CB-128E9557CC2C}"/>
               </a:ext>
             </a:extLst>
           </p:cNvPr>
@@ -29056,7 +29506,7 @@
           <p:cNvPr id="4" name="Rectangle 3">
             <a:extLst xmlns:a="http://schemas.openxmlformats.org/drawingml/2006/main">
               <a:ext uri="{FF2B5EF4-FFF2-40B4-BE49-F238E27FC236}">
-                <a16:creationId xmlns:a16="http://schemas.microsoft.com/office/drawing/2014/main" id="{1887F0DF-5D42-4D54-97FC-4713D3B8B3C7}"/>
+                <a16:creationId xmlns:a16="http://schemas.microsoft.com/office/drawing/2014/main" id="{9E120458-5291-4A8E-9395-F8E0AE4398C4}"/>
               </a:ext>
             </a:extLst>
           </p:cNvPr>
@@ -29111,7 +29561,7 @@
           <p:cNvPr id="5" name="Rectangle 4">
             <a:extLst xmlns:a="http://schemas.openxmlformats.org/drawingml/2006/main">
               <a:ext uri="{FF2B5EF4-FFF2-40B4-BE49-F238E27FC236}">
-                <a16:creationId xmlns:a16="http://schemas.microsoft.com/office/drawing/2014/main" id="{BE25D605-F209-442A-AF83-FC64F73381E0}"/>
+                <a16:creationId xmlns:a16="http://schemas.microsoft.com/office/drawing/2014/main" id="{62E2B6AD-C788-4F77-BD50-117D8F20C584}"/>
               </a:ext>
             </a:extLst>
           </p:cNvPr>
@@ -29166,7 +29616,7 @@
           <p:cNvPr id="6" name="TextBox 5">
             <a:extLst xmlns:a="http://schemas.openxmlformats.org/drawingml/2006/main">
               <a:ext uri="{FF2B5EF4-FFF2-40B4-BE49-F238E27FC236}">
-                <a16:creationId xmlns:a16="http://schemas.microsoft.com/office/drawing/2014/main" id="{B54ABC09-CF5F-47EC-9A50-EDE8A733C84B}"/>
+                <a16:creationId xmlns:a16="http://schemas.microsoft.com/office/drawing/2014/main" id="{2E817199-EC05-4D18-B9C2-732E41362C41}"/>
               </a:ext>
             </a:extLst>
           </p:cNvPr>
@@ -29203,7 +29653,7 @@
                 <a:ea typeface="Aptos"/>
                 <a:cs typeface="Aptos"/>
               </a:rPr>
-              <a:t>Julkinen riippumaton evidenssikooste · 2026.07.24-22 · 2026-07-24 · Lähteet: EPO; 8 Ni 18/24 (EP); 7 O 3341/24</a:t>
+              <a:t>Julkinen riippumaton evidenssikooste · 2026.07.25-24 · 2026-07-24 · Lähteet: EPO; 8 Ni 18/24 (EP); 7 O 3341/24</a:t>
             </a:r>
           </a:p>
         </p:txBody>
@@ -29213,7 +29663,7 @@
           <p:cNvPr id="7" name="TextBox 6">
             <a:extLst xmlns:a="http://schemas.openxmlformats.org/drawingml/2006/main">
               <a:ext uri="{FF2B5EF4-FFF2-40B4-BE49-F238E27FC236}">
-                <a16:creationId xmlns:a16="http://schemas.microsoft.com/office/drawing/2014/main" id="{840EB3AD-2559-45BC-9E78-756FE6BB168F}"/>
+                <a16:creationId xmlns:a16="http://schemas.microsoft.com/office/drawing/2014/main" id="{9BF82474-9312-486E-875B-719BEE15F01B}"/>
               </a:ext>
             </a:extLst>
           </p:cNvPr>
@@ -29617,7 +30067,7 @@
           <p:cNvPr id="9" name="TextBox 8">
             <a:extLst xmlns:a="http://schemas.openxmlformats.org/drawingml/2006/main">
               <a:ext uri="{FF2B5EF4-FFF2-40B4-BE49-F238E27FC236}">
-                <a16:creationId xmlns:a16="http://schemas.microsoft.com/office/drawing/2014/main" id="{50875C9D-C73B-4BB1-816F-F9D720E143ED}"/>
+                <a16:creationId xmlns:a16="http://schemas.microsoft.com/office/drawing/2014/main" id="{1A483C70-0B54-4AAD-A90A-592D9D288A9B}"/>
               </a:ext>
             </a:extLst>
           </p:cNvPr>
@@ -29662,7 +30112,7 @@
     </p:spTree>
     <p:extLst>
       <p:ext uri="{BB962C8B-B14F-4D97-AF65-F5344CB8AC3E}">
-        <p14:creationId xmlns:p14="http://schemas.microsoft.com/office/powerpoint/2010/main" val="213318893"/>
+        <p14:creationId xmlns:p14="http://schemas.microsoft.com/office/powerpoint/2010/main" val="838095926"/>
       </p:ext>
     </p:extLst>
   </p:cSld>
@@ -29693,7 +30143,7 @@
           <p:cNvPr id="2" name="TextBox 1">
             <a:extLst xmlns:a="http://schemas.openxmlformats.org/drawingml/2006/main">
               <a:ext uri="{FF2B5EF4-FFF2-40B4-BE49-F238E27FC236}">
-                <a16:creationId xmlns:a16="http://schemas.microsoft.com/office/drawing/2014/main" id="{4DC5E053-6C62-4D15-815F-87DBBA7DB448}"/>
+                <a16:creationId xmlns:a16="http://schemas.microsoft.com/office/drawing/2014/main" id="{DCD9A711-F370-4B0A-A2B1-8BD1EAD90ADE}"/>
               </a:ext>
             </a:extLst>
           </p:cNvPr>
@@ -29740,7 +30190,7 @@
           <p:cNvPr id="3" name="TextBox 2">
             <a:extLst xmlns:a="http://schemas.openxmlformats.org/drawingml/2006/main">
               <a:ext uri="{FF2B5EF4-FFF2-40B4-BE49-F238E27FC236}">
-                <a16:creationId xmlns:a16="http://schemas.microsoft.com/office/drawing/2014/main" id="{0729DE8E-2CB9-4E29-9893-733AC14FF1EB}"/>
+                <a16:creationId xmlns:a16="http://schemas.microsoft.com/office/drawing/2014/main" id="{F515597D-C10D-41BA-82A1-34AD31FECDE7}"/>
               </a:ext>
             </a:extLst>
           </p:cNvPr>
@@ -29787,7 +30237,7 @@
           <p:cNvPr id="4" name="TextBox 3">
             <a:extLst xmlns:a="http://schemas.openxmlformats.org/drawingml/2006/main">
               <a:ext uri="{FF2B5EF4-FFF2-40B4-BE49-F238E27FC236}">
-                <a16:creationId xmlns:a16="http://schemas.microsoft.com/office/drawing/2014/main" id="{D3D159DA-1DC1-43CC-B1E2-A1D2B3C544B9}"/>
+                <a16:creationId xmlns:a16="http://schemas.microsoft.com/office/drawing/2014/main" id="{4794BA67-C81F-440F-9AA8-FF65FCF66F9B}"/>
               </a:ext>
             </a:extLst>
           </p:cNvPr>
@@ -29906,7 +30356,7 @@
           <p:cNvPr id="5" name="TextBox 4">
             <a:extLst xmlns:a="http://schemas.openxmlformats.org/drawingml/2006/main">
               <a:ext uri="{FF2B5EF4-FFF2-40B4-BE49-F238E27FC236}">
-                <a16:creationId xmlns:a16="http://schemas.microsoft.com/office/drawing/2014/main" id="{4D15C988-1D26-4BDA-B368-AB3FC446A104}"/>
+                <a16:creationId xmlns:a16="http://schemas.microsoft.com/office/drawing/2014/main" id="{058C8192-5A79-45FA-8F83-87687297ADAE}"/>
               </a:ext>
             </a:extLst>
           </p:cNvPr>
@@ -29943,7 +30393,7 @@
                 <a:ea typeface="Aptos"/>
                 <a:cs typeface="Aptos"/>
               </a:rPr>
-              <a:t>Versio 2026.07.24-22 · 2026-07-24 · 30 / 30</a:t>
+              <a:t>Versio 2026.07.25-24 · 2026-07-24 · 30 / 30</a:t>
             </a:r>
           </a:p>
         </p:txBody>
@@ -29951,7 +30401,7 @@
     </p:spTree>
     <p:extLst>
       <p:ext uri="{BB962C8B-B14F-4D97-AF65-F5344CB8AC3E}">
-        <p14:creationId xmlns:p14="http://schemas.microsoft.com/office/powerpoint/2010/main" val="1546630365"/>
+        <p14:creationId xmlns:p14="http://schemas.microsoft.com/office/powerpoint/2010/main" val="1518475855"/>
       </p:ext>
     </p:extLst>
   </p:cSld>
@@ -29975,7 +30425,7 @@
           <p:cNvPr id="2" name="TextBox 1">
             <a:extLst xmlns:a="http://schemas.openxmlformats.org/drawingml/2006/main">
               <a:ext uri="{FF2B5EF4-FFF2-40B4-BE49-F238E27FC236}">
-                <a16:creationId xmlns:a16="http://schemas.microsoft.com/office/drawing/2014/main" id="{56925B1A-DE57-42E2-AA13-2F8A2FE019DF}"/>
+                <a16:creationId xmlns:a16="http://schemas.microsoft.com/office/drawing/2014/main" id="{8378F607-8940-484E-BB3C-018D67BDC802}"/>
               </a:ext>
             </a:extLst>
           </p:cNvPr>
@@ -30022,7 +30472,7 @@
           <p:cNvPr id="3" name="TextBox 2">
             <a:extLst xmlns:a="http://schemas.openxmlformats.org/drawingml/2006/main">
               <a:ext uri="{FF2B5EF4-FFF2-40B4-BE49-F238E27FC236}">
-                <a16:creationId xmlns:a16="http://schemas.microsoft.com/office/drawing/2014/main" id="{00A0C050-E88E-437A-9DEC-4657BF8B25BD}"/>
+                <a16:creationId xmlns:a16="http://schemas.microsoft.com/office/drawing/2014/main" id="{B455359E-27C3-4834-B803-F1459E35C2DC}"/>
               </a:ext>
             </a:extLst>
           </p:cNvPr>
@@ -30069,7 +30519,7 @@
           <p:cNvPr id="4" name="Rectangle 3">
             <a:extLst xmlns:a="http://schemas.openxmlformats.org/drawingml/2006/main">
               <a:ext uri="{FF2B5EF4-FFF2-40B4-BE49-F238E27FC236}">
-                <a16:creationId xmlns:a16="http://schemas.microsoft.com/office/drawing/2014/main" id="{FDE54577-A569-4207-A8B5-A8231291B49B}"/>
+                <a16:creationId xmlns:a16="http://schemas.microsoft.com/office/drawing/2014/main" id="{0F6C542B-BC4A-4C57-95F6-2459B23734B1}"/>
               </a:ext>
             </a:extLst>
           </p:cNvPr>
@@ -30124,7 +30574,7 @@
           <p:cNvPr id="5" name="Rectangle 4">
             <a:extLst xmlns:a="http://schemas.openxmlformats.org/drawingml/2006/main">
               <a:ext uri="{FF2B5EF4-FFF2-40B4-BE49-F238E27FC236}">
-                <a16:creationId xmlns:a16="http://schemas.microsoft.com/office/drawing/2014/main" id="{7DD91547-864D-4B8B-BF3E-FCAF0B617F61}"/>
+                <a16:creationId xmlns:a16="http://schemas.microsoft.com/office/drawing/2014/main" id="{649EF035-5F97-4646-A45A-80F287D83C25}"/>
               </a:ext>
             </a:extLst>
           </p:cNvPr>
@@ -30179,7 +30629,7 @@
           <p:cNvPr id="6" name="TextBox 5">
             <a:extLst xmlns:a="http://schemas.openxmlformats.org/drawingml/2006/main">
               <a:ext uri="{FF2B5EF4-FFF2-40B4-BE49-F238E27FC236}">
-                <a16:creationId xmlns:a16="http://schemas.microsoft.com/office/drawing/2014/main" id="{319E786C-4D3B-47FE-98F9-9F21CBC6B2D2}"/>
+                <a16:creationId xmlns:a16="http://schemas.microsoft.com/office/drawing/2014/main" id="{0C45AE41-38CB-4D0D-A50C-2FEEDDA7A7B9}"/>
               </a:ext>
             </a:extLst>
           </p:cNvPr>
@@ -30216,7 +30666,7 @@
                 <a:ea typeface="Aptos"/>
                 <a:cs typeface="Aptos"/>
               </a:rPr>
-              <a:t>Julkinen riippumaton evidenssikooste · 2026.07.24-22 · 2026-07-24 · Lähteet: Evidence Register; WIPO</a:t>
+              <a:t>Julkinen riippumaton evidenssikooste · 2026.07.25-24 · 2026-07-24 · Lähteet: Evidence Register; WIPO</a:t>
             </a:r>
           </a:p>
         </p:txBody>
@@ -30226,7 +30676,7 @@
           <p:cNvPr id="7" name="TextBox 6">
             <a:extLst xmlns:a="http://schemas.openxmlformats.org/drawingml/2006/main">
               <a:ext uri="{FF2B5EF4-FFF2-40B4-BE49-F238E27FC236}">
-                <a16:creationId xmlns:a16="http://schemas.microsoft.com/office/drawing/2014/main" id="{169E5DB2-81F7-4C8C-98A4-C395EC916A98}"/>
+                <a16:creationId xmlns:a16="http://schemas.microsoft.com/office/drawing/2014/main" id="{065D1487-5E32-40C1-A647-E6FCD107ABD7}"/>
               </a:ext>
             </a:extLst>
           </p:cNvPr>
@@ -30273,7 +30723,7 @@
           <p:cNvPr id="8" name="TextBox 7">
             <a:extLst xmlns:a="http://schemas.openxmlformats.org/drawingml/2006/main">
               <a:ext uri="{FF2B5EF4-FFF2-40B4-BE49-F238E27FC236}">
-                <a16:creationId xmlns:a16="http://schemas.microsoft.com/office/drawing/2014/main" id="{E605ADF3-2F7E-45B1-AC0D-A2C502A857F4}"/>
+                <a16:creationId xmlns:a16="http://schemas.microsoft.com/office/drawing/2014/main" id="{97F8E365-7F6A-4EFB-9BB9-FA70F7860D8C}"/>
               </a:ext>
             </a:extLst>
           </p:cNvPr>
@@ -30320,7 +30770,7 @@
           <p:cNvPr id="9" name="TextBox 8">
             <a:extLst xmlns:a="http://schemas.openxmlformats.org/drawingml/2006/main">
               <a:ext uri="{FF2B5EF4-FFF2-40B4-BE49-F238E27FC236}">
-                <a16:creationId xmlns:a16="http://schemas.microsoft.com/office/drawing/2014/main" id="{B05762E1-3E99-4659-87A2-C243C0E76BBD}"/>
+                <a16:creationId xmlns:a16="http://schemas.microsoft.com/office/drawing/2014/main" id="{3C2752DD-C58E-40AD-8543-0EDC619FD029}"/>
               </a:ext>
             </a:extLst>
           </p:cNvPr>
@@ -30417,7 +30867,7 @@
           <p:cNvPr id="10" name="Rounded Rectangle 9">
             <a:extLst xmlns:a="http://schemas.openxmlformats.org/drawingml/2006/main">
               <a:ext uri="{FF2B5EF4-FFF2-40B4-BE49-F238E27FC236}">
-                <a16:creationId xmlns:a16="http://schemas.microsoft.com/office/drawing/2014/main" id="{8D8D3439-07D9-440D-AE17-2F9E85801BC1}"/>
+                <a16:creationId xmlns:a16="http://schemas.microsoft.com/office/drawing/2014/main" id="{E575F90E-D87E-40C5-8DCB-4B869B8095D6}"/>
               </a:ext>
             </a:extLst>
           </p:cNvPr>
@@ -30474,7 +30924,7 @@
           <p:cNvPr id="11" name="TextBox 10">
             <a:extLst xmlns:a="http://schemas.openxmlformats.org/drawingml/2006/main">
               <a:ext uri="{FF2B5EF4-FFF2-40B4-BE49-F238E27FC236}">
-                <a16:creationId xmlns:a16="http://schemas.microsoft.com/office/drawing/2014/main" id="{B2B67699-0062-46C5-A04C-659AC168B18E}"/>
+                <a16:creationId xmlns:a16="http://schemas.microsoft.com/office/drawing/2014/main" id="{61953520-454B-4BF6-A31E-5F5D98D83453}"/>
               </a:ext>
             </a:extLst>
           </p:cNvPr>
@@ -30521,7 +30971,7 @@
           <p:cNvPr id="12" name="TextBox 11">
             <a:extLst xmlns:a="http://schemas.openxmlformats.org/drawingml/2006/main">
               <a:ext uri="{FF2B5EF4-FFF2-40B4-BE49-F238E27FC236}">
-                <a16:creationId xmlns:a16="http://schemas.microsoft.com/office/drawing/2014/main" id="{2C85E4EF-4F9C-45F5-A9E8-730402D658A4}"/>
+                <a16:creationId xmlns:a16="http://schemas.microsoft.com/office/drawing/2014/main" id="{D50F0D4C-090B-4C1D-A8E8-977A6C9A3748}"/>
               </a:ext>
             </a:extLst>
           </p:cNvPr>
@@ -30566,7 +31016,7 @@
     </p:spTree>
     <p:extLst>
       <p:ext uri="{BB962C8B-B14F-4D97-AF65-F5344CB8AC3E}">
-        <p14:creationId xmlns:p14="http://schemas.microsoft.com/office/powerpoint/2010/main" val="934883452"/>
+        <p14:creationId xmlns:p14="http://schemas.microsoft.com/office/powerpoint/2010/main" val="1070222725"/>
       </p:ext>
     </p:extLst>
   </p:cSld>
@@ -30590,7 +31040,7 @@
           <p:cNvPr id="2" name="TextBox 1">
             <a:extLst xmlns:a="http://schemas.openxmlformats.org/drawingml/2006/main">
               <a:ext uri="{FF2B5EF4-FFF2-40B4-BE49-F238E27FC236}">
-                <a16:creationId xmlns:a16="http://schemas.microsoft.com/office/drawing/2014/main" id="{8FBE31B4-A6EF-47DA-B286-E00CA74A743B}"/>
+                <a16:creationId xmlns:a16="http://schemas.microsoft.com/office/drawing/2014/main" id="{6AA4A1F0-F8D5-441B-98D1-3F3A57BD3472}"/>
               </a:ext>
             </a:extLst>
           </p:cNvPr>
@@ -30637,7 +31087,7 @@
           <p:cNvPr id="3" name="TextBox 2">
             <a:extLst xmlns:a="http://schemas.openxmlformats.org/drawingml/2006/main">
               <a:ext uri="{FF2B5EF4-FFF2-40B4-BE49-F238E27FC236}">
-                <a16:creationId xmlns:a16="http://schemas.microsoft.com/office/drawing/2014/main" id="{6CD6D374-94C2-40D1-A979-37EFD8796EEC}"/>
+                <a16:creationId xmlns:a16="http://schemas.microsoft.com/office/drawing/2014/main" id="{A72849FB-4B64-4154-8971-5C2A0B275B84}"/>
               </a:ext>
             </a:extLst>
           </p:cNvPr>
@@ -30684,7 +31134,7 @@
           <p:cNvPr id="4" name="Rectangle 3">
             <a:extLst xmlns:a="http://schemas.openxmlformats.org/drawingml/2006/main">
               <a:ext uri="{FF2B5EF4-FFF2-40B4-BE49-F238E27FC236}">
-                <a16:creationId xmlns:a16="http://schemas.microsoft.com/office/drawing/2014/main" id="{A732F7E0-BA5F-4613-88FD-4D36F6C7F325}"/>
+                <a16:creationId xmlns:a16="http://schemas.microsoft.com/office/drawing/2014/main" id="{9079EE0C-F6E2-4B1E-8215-84300C0D770D}"/>
               </a:ext>
             </a:extLst>
           </p:cNvPr>
@@ -30739,7 +31189,7 @@
           <p:cNvPr id="5" name="Rectangle 4">
             <a:extLst xmlns:a="http://schemas.openxmlformats.org/drawingml/2006/main">
               <a:ext uri="{FF2B5EF4-FFF2-40B4-BE49-F238E27FC236}">
-                <a16:creationId xmlns:a16="http://schemas.microsoft.com/office/drawing/2014/main" id="{91265D55-910C-42F6-9DDD-C501179FD0CB}"/>
+                <a16:creationId xmlns:a16="http://schemas.microsoft.com/office/drawing/2014/main" id="{EBA44A03-A8DC-4D23-9A06-0184E8AF55C8}"/>
               </a:ext>
             </a:extLst>
           </p:cNvPr>
@@ -30794,7 +31244,7 @@
           <p:cNvPr id="6" name="TextBox 5">
             <a:extLst xmlns:a="http://schemas.openxmlformats.org/drawingml/2006/main">
               <a:ext uri="{FF2B5EF4-FFF2-40B4-BE49-F238E27FC236}">
-                <a16:creationId xmlns:a16="http://schemas.microsoft.com/office/drawing/2014/main" id="{5D8A5C34-A675-4181-A441-486CFE1DE6F0}"/>
+                <a16:creationId xmlns:a16="http://schemas.microsoft.com/office/drawing/2014/main" id="{5640D745-D9EE-45D2-8AD1-1521B9CCA050}"/>
               </a:ext>
             </a:extLst>
           </p:cNvPr>
@@ -30831,7 +31281,7 @@
                 <a:ea typeface="Aptos"/>
                 <a:cs typeface="Aptos"/>
               </a:rPr>
-              <a:t>Julkinen riippumaton evidenssikooste · 2026.07.24-22 · 2026-07-24 · Lähteet: EP3032975B2</a:t>
+              <a:t>Julkinen riippumaton evidenssikooste · 2026.07.25-24 · 2026-07-24 · Lähteet: EP3032975B2</a:t>
             </a:r>
           </a:p>
         </p:txBody>
@@ -30841,7 +31291,7 @@
           <p:cNvPr id="7" name="TextBox 6">
             <a:extLst xmlns:a="http://schemas.openxmlformats.org/drawingml/2006/main">
               <a:ext uri="{FF2B5EF4-FFF2-40B4-BE49-F238E27FC236}">
-                <a16:creationId xmlns:a16="http://schemas.microsoft.com/office/drawing/2014/main" id="{B8E0A032-BC22-4E07-8556-F164D492EEA8}"/>
+                <a16:creationId xmlns:a16="http://schemas.microsoft.com/office/drawing/2014/main" id="{21F890A8-2EDF-483E-BA8F-868A4C7D1EEA}"/>
               </a:ext>
             </a:extLst>
           </p:cNvPr>
@@ -30888,7 +31338,7 @@
           <p:cNvPr id="8" name="TextBox 7">
             <a:extLst xmlns:a="http://schemas.openxmlformats.org/drawingml/2006/main">
               <a:ext uri="{FF2B5EF4-FFF2-40B4-BE49-F238E27FC236}">
-                <a16:creationId xmlns:a16="http://schemas.microsoft.com/office/drawing/2014/main" id="{785E0961-3694-469A-AC77-B7B332607A40}"/>
+                <a16:creationId xmlns:a16="http://schemas.microsoft.com/office/drawing/2014/main" id="{677BAEC5-A186-454F-BC76-AE3E22FDB3EF}"/>
               </a:ext>
             </a:extLst>
           </p:cNvPr>
@@ -30935,7 +31385,7 @@
           <p:cNvPr id="9" name="TextBox 8">
             <a:extLst xmlns:a="http://schemas.openxmlformats.org/drawingml/2006/main">
               <a:ext uri="{FF2B5EF4-FFF2-40B4-BE49-F238E27FC236}">
-                <a16:creationId xmlns:a16="http://schemas.microsoft.com/office/drawing/2014/main" id="{D26CFADC-8EB6-4781-94A6-0DFB305307DA}"/>
+                <a16:creationId xmlns:a16="http://schemas.microsoft.com/office/drawing/2014/main" id="{60055AEE-3655-4A0B-89CC-855EB1C05522}"/>
               </a:ext>
             </a:extLst>
           </p:cNvPr>
@@ -31032,7 +31482,7 @@
           <p:cNvPr id="10" name="Rounded Rectangle 9">
             <a:extLst xmlns:a="http://schemas.openxmlformats.org/drawingml/2006/main">
               <a:ext uri="{FF2B5EF4-FFF2-40B4-BE49-F238E27FC236}">
-                <a16:creationId xmlns:a16="http://schemas.microsoft.com/office/drawing/2014/main" id="{05B0F30A-DE43-4282-909A-61D685C0A129}"/>
+                <a16:creationId xmlns:a16="http://schemas.microsoft.com/office/drawing/2014/main" id="{189C8F0C-2FA7-468E-8D58-579F3C046B89}"/>
               </a:ext>
             </a:extLst>
           </p:cNvPr>
@@ -31089,7 +31539,7 @@
           <p:cNvPr id="11" name="TextBox 10">
             <a:extLst xmlns:a="http://schemas.openxmlformats.org/drawingml/2006/main">
               <a:ext uri="{FF2B5EF4-FFF2-40B4-BE49-F238E27FC236}">
-                <a16:creationId xmlns:a16="http://schemas.microsoft.com/office/drawing/2014/main" id="{E84881E4-6775-4FD0-A71B-CB5BA89ACD19}"/>
+                <a16:creationId xmlns:a16="http://schemas.microsoft.com/office/drawing/2014/main" id="{3909BE39-DD64-47F4-A7EC-08B20656CBE7}"/>
               </a:ext>
             </a:extLst>
           </p:cNvPr>
@@ -31136,7 +31586,7 @@
           <p:cNvPr id="12" name="TextBox 11">
             <a:extLst xmlns:a="http://schemas.openxmlformats.org/drawingml/2006/main">
               <a:ext uri="{FF2B5EF4-FFF2-40B4-BE49-F238E27FC236}">
-                <a16:creationId xmlns:a16="http://schemas.microsoft.com/office/drawing/2014/main" id="{C40B3456-4ABE-47D4-A73E-9DCBA4890DE2}"/>
+                <a16:creationId xmlns:a16="http://schemas.microsoft.com/office/drawing/2014/main" id="{A17E24DB-EF4F-463B-AEAD-7A4329EFA489}"/>
               </a:ext>
             </a:extLst>
           </p:cNvPr>
@@ -31181,7 +31631,7 @@
     </p:spTree>
     <p:extLst>
       <p:ext uri="{BB962C8B-B14F-4D97-AF65-F5344CB8AC3E}">
-        <p14:creationId xmlns:p14="http://schemas.microsoft.com/office/powerpoint/2010/main" val="725703456"/>
+        <p14:creationId xmlns:p14="http://schemas.microsoft.com/office/powerpoint/2010/main" val="1522311336"/>
       </p:ext>
     </p:extLst>
   </p:cSld>
@@ -31205,7 +31655,7 @@
           <p:cNvPr id="2" name="TextBox 1">
             <a:extLst xmlns:a="http://schemas.openxmlformats.org/drawingml/2006/main">
               <a:ext uri="{FF2B5EF4-FFF2-40B4-BE49-F238E27FC236}">
-                <a16:creationId xmlns:a16="http://schemas.microsoft.com/office/drawing/2014/main" id="{E974AE83-24D7-4A56-AD20-DBF06F0C58C9}"/>
+                <a16:creationId xmlns:a16="http://schemas.microsoft.com/office/drawing/2014/main" id="{FBD1592E-57C7-4152-B712-477746307551}"/>
               </a:ext>
             </a:extLst>
           </p:cNvPr>
@@ -31252,7 +31702,7 @@
           <p:cNvPr id="3" name="TextBox 2">
             <a:extLst xmlns:a="http://schemas.openxmlformats.org/drawingml/2006/main">
               <a:ext uri="{FF2B5EF4-FFF2-40B4-BE49-F238E27FC236}">
-                <a16:creationId xmlns:a16="http://schemas.microsoft.com/office/drawing/2014/main" id="{70A7A119-56A1-48EA-9E69-F7CD627DA040}"/>
+                <a16:creationId xmlns:a16="http://schemas.microsoft.com/office/drawing/2014/main" id="{DA24C213-0611-441B-AC50-29A7FA736F5D}"/>
               </a:ext>
             </a:extLst>
           </p:cNvPr>
@@ -31299,7 +31749,7 @@
           <p:cNvPr id="4" name="Rectangle 3">
             <a:extLst xmlns:a="http://schemas.openxmlformats.org/drawingml/2006/main">
               <a:ext uri="{FF2B5EF4-FFF2-40B4-BE49-F238E27FC236}">
-                <a16:creationId xmlns:a16="http://schemas.microsoft.com/office/drawing/2014/main" id="{CD6C002F-88B7-4C8F-9A07-41C1D02B857C}"/>
+                <a16:creationId xmlns:a16="http://schemas.microsoft.com/office/drawing/2014/main" id="{BBE97B28-CB73-4CBA-B9D6-FA50FE5ABCC7}"/>
               </a:ext>
             </a:extLst>
           </p:cNvPr>
@@ -31354,7 +31804,7 @@
           <p:cNvPr id="5" name="Rectangle 4">
             <a:extLst xmlns:a="http://schemas.openxmlformats.org/drawingml/2006/main">
               <a:ext uri="{FF2B5EF4-FFF2-40B4-BE49-F238E27FC236}">
-                <a16:creationId xmlns:a16="http://schemas.microsoft.com/office/drawing/2014/main" id="{30CA51E2-BBF6-4882-9521-7111F40DA65D}"/>
+                <a16:creationId xmlns:a16="http://schemas.microsoft.com/office/drawing/2014/main" id="{AF9661AD-3BF5-4AE8-AF77-88D1C20890AB}"/>
               </a:ext>
             </a:extLst>
           </p:cNvPr>
@@ -31409,7 +31859,7 @@
           <p:cNvPr id="6" name="TextBox 5">
             <a:extLst xmlns:a="http://schemas.openxmlformats.org/drawingml/2006/main">
               <a:ext uri="{FF2B5EF4-FFF2-40B4-BE49-F238E27FC236}">
-                <a16:creationId xmlns:a16="http://schemas.microsoft.com/office/drawing/2014/main" id="{6025A065-60F5-4B4B-9336-F768FD014E32}"/>
+                <a16:creationId xmlns:a16="http://schemas.microsoft.com/office/drawing/2014/main" id="{669D0280-2FC8-40EB-B467-B9500545C708}"/>
               </a:ext>
             </a:extLst>
           </p:cNvPr>
@@ -31446,7 +31896,7 @@
                 <a:ea typeface="Aptos"/>
                 <a:cs typeface="Aptos"/>
               </a:rPr>
-              <a:t>Julkinen riippumaton evidenssikooste · 2026.07.24-22 · 2026-07-24 · Lähteet: EP3032975B2</a:t>
+              <a:t>Julkinen riippumaton evidenssikooste · 2026.07.25-24 · 2026-07-24 · Lähteet: EP3032975B2</a:t>
             </a:r>
           </a:p>
         </p:txBody>
@@ -31456,7 +31906,7 @@
           <p:cNvPr id="7" name="TextBox 6">
             <a:extLst xmlns:a="http://schemas.openxmlformats.org/drawingml/2006/main">
               <a:ext uri="{FF2B5EF4-FFF2-40B4-BE49-F238E27FC236}">
-                <a16:creationId xmlns:a16="http://schemas.microsoft.com/office/drawing/2014/main" id="{0084B5D3-164A-40FF-B27D-675CF2E810B7}"/>
+                <a16:creationId xmlns:a16="http://schemas.microsoft.com/office/drawing/2014/main" id="{063B65FA-85D2-411E-97E7-8BECCBE1D990}"/>
               </a:ext>
             </a:extLst>
           </p:cNvPr>
@@ -32026,7 +32476,7 @@
           <p:cNvPr id="9" name="TextBox 8">
             <a:extLst xmlns:a="http://schemas.openxmlformats.org/drawingml/2006/main">
               <a:ext uri="{FF2B5EF4-FFF2-40B4-BE49-F238E27FC236}">
-                <a16:creationId xmlns:a16="http://schemas.microsoft.com/office/drawing/2014/main" id="{29B99637-DA8C-4C8F-882A-9618B11422C1}"/>
+                <a16:creationId xmlns:a16="http://schemas.microsoft.com/office/drawing/2014/main" id="{C44664DE-0C5D-440F-BD7A-92811C7336C6}"/>
               </a:ext>
             </a:extLst>
           </p:cNvPr>
@@ -32071,7 +32521,7 @@
     </p:spTree>
     <p:extLst>
       <p:ext uri="{BB962C8B-B14F-4D97-AF65-F5344CB8AC3E}">
-        <p14:creationId xmlns:p14="http://schemas.microsoft.com/office/powerpoint/2010/main" val="1052488516"/>
+        <p14:creationId xmlns:p14="http://schemas.microsoft.com/office/powerpoint/2010/main" val="1804747804"/>
       </p:ext>
     </p:extLst>
   </p:cSld>
@@ -32095,7 +32545,7 @@
           <p:cNvPr id="2" name="TextBox 1">
             <a:extLst xmlns:a="http://schemas.openxmlformats.org/drawingml/2006/main">
               <a:ext uri="{FF2B5EF4-FFF2-40B4-BE49-F238E27FC236}">
-                <a16:creationId xmlns:a16="http://schemas.microsoft.com/office/drawing/2014/main" id="{1E14794A-9F2D-4E05-906C-395936BA77CC}"/>
+                <a16:creationId xmlns:a16="http://schemas.microsoft.com/office/drawing/2014/main" id="{269393A2-BAD4-47C3-A2A4-9E0F1C6EC26B}"/>
               </a:ext>
             </a:extLst>
           </p:cNvPr>
@@ -32142,7 +32592,7 @@
           <p:cNvPr id="3" name="TextBox 2">
             <a:extLst xmlns:a="http://schemas.openxmlformats.org/drawingml/2006/main">
               <a:ext uri="{FF2B5EF4-FFF2-40B4-BE49-F238E27FC236}">
-                <a16:creationId xmlns:a16="http://schemas.microsoft.com/office/drawing/2014/main" id="{CC81001E-DD14-4B6A-904E-0555593F8A72}"/>
+                <a16:creationId xmlns:a16="http://schemas.microsoft.com/office/drawing/2014/main" id="{27FD5B27-5938-494C-B8E8-41355565C090}"/>
               </a:ext>
             </a:extLst>
           </p:cNvPr>
@@ -32189,7 +32639,7 @@
           <p:cNvPr id="4" name="Rectangle 3">
             <a:extLst xmlns:a="http://schemas.openxmlformats.org/drawingml/2006/main">
               <a:ext uri="{FF2B5EF4-FFF2-40B4-BE49-F238E27FC236}">
-                <a16:creationId xmlns:a16="http://schemas.microsoft.com/office/drawing/2014/main" id="{16E90D96-F05E-46F9-8DB6-E9043BE2893E}"/>
+                <a16:creationId xmlns:a16="http://schemas.microsoft.com/office/drawing/2014/main" id="{862ED000-83C9-4CC1-A59E-DA6874937B90}"/>
               </a:ext>
             </a:extLst>
           </p:cNvPr>
@@ -32244,7 +32694,7 @@
           <p:cNvPr id="5" name="Rectangle 4">
             <a:extLst xmlns:a="http://schemas.openxmlformats.org/drawingml/2006/main">
               <a:ext uri="{FF2B5EF4-FFF2-40B4-BE49-F238E27FC236}">
-                <a16:creationId xmlns:a16="http://schemas.microsoft.com/office/drawing/2014/main" id="{3A38F543-C4C6-412A-AC22-D508C3314A61}"/>
+                <a16:creationId xmlns:a16="http://schemas.microsoft.com/office/drawing/2014/main" id="{12750343-6BCB-45DE-B1CC-D1CEEE4FF375}"/>
               </a:ext>
             </a:extLst>
           </p:cNvPr>
@@ -32299,7 +32749,7 @@
           <p:cNvPr id="6" name="TextBox 5">
             <a:extLst xmlns:a="http://schemas.openxmlformats.org/drawingml/2006/main">
               <a:ext uri="{FF2B5EF4-FFF2-40B4-BE49-F238E27FC236}">
-                <a16:creationId xmlns:a16="http://schemas.microsoft.com/office/drawing/2014/main" id="{3EBA50EF-67B1-45AE-9C3F-688BEEEB4F62}"/>
+                <a16:creationId xmlns:a16="http://schemas.microsoft.com/office/drawing/2014/main" id="{EB7A74F2-103A-4A83-AAE4-CE61ACFE7786}"/>
               </a:ext>
             </a:extLst>
           </p:cNvPr>
@@ -32336,7 +32786,7 @@
                 <a:ea typeface="Aptos"/>
                 <a:cs typeface="Aptos"/>
               </a:rPr>
-              <a:t>Julkinen riippumaton evidenssikooste · 2026.07.24-22 · 2026-07-24 · Lähteet: EPO Register; B2</a:t>
+              <a:t>Julkinen riippumaton evidenssikooste · 2026.07.25-24 · 2026-07-24 · Lähteet: EPO Register; B2</a:t>
             </a:r>
           </a:p>
         </p:txBody>
@@ -32346,7 +32796,7 @@
           <p:cNvPr id="7" name="TextBox 6">
             <a:extLst xmlns:a="http://schemas.openxmlformats.org/drawingml/2006/main">
               <a:ext uri="{FF2B5EF4-FFF2-40B4-BE49-F238E27FC236}">
-                <a16:creationId xmlns:a16="http://schemas.microsoft.com/office/drawing/2014/main" id="{29948173-291E-49F9-AD77-DFBBA3940A05}"/>
+                <a16:creationId xmlns:a16="http://schemas.microsoft.com/office/drawing/2014/main" id="{F62CA4C9-A4AE-4C61-A1A2-4BF00B39087D}"/>
               </a:ext>
             </a:extLst>
           </p:cNvPr>
@@ -32393,7 +32843,7 @@
           <p:cNvPr id="8" name="Rounded Rectangle 7">
             <a:extLst xmlns:a="http://schemas.openxmlformats.org/drawingml/2006/main">
               <a:ext uri="{FF2B5EF4-FFF2-40B4-BE49-F238E27FC236}">
-                <a16:creationId xmlns:a16="http://schemas.microsoft.com/office/drawing/2014/main" id="{D5A4475B-1688-424B-8880-D27224EDF447}"/>
+                <a16:creationId xmlns:a16="http://schemas.microsoft.com/office/drawing/2014/main" id="{F9A73879-A929-4051-B959-3C041E608B04}"/>
               </a:ext>
             </a:extLst>
           </p:cNvPr>
@@ -32450,7 +32900,7 @@
           <p:cNvPr id="9" name="TextBox 8">
             <a:extLst xmlns:a="http://schemas.openxmlformats.org/drawingml/2006/main">
               <a:ext uri="{FF2B5EF4-FFF2-40B4-BE49-F238E27FC236}">
-                <a16:creationId xmlns:a16="http://schemas.microsoft.com/office/drawing/2014/main" id="{2342A0B2-8691-4085-9D9E-B9D5069C50EC}"/>
+                <a16:creationId xmlns:a16="http://schemas.microsoft.com/office/drawing/2014/main" id="{8F4D5740-3C83-499E-96CD-1A4197B03D71}"/>
               </a:ext>
             </a:extLst>
           </p:cNvPr>
@@ -32497,7 +32947,7 @@
           <p:cNvPr id="10" name="TextBox 9">
             <a:extLst xmlns:a="http://schemas.openxmlformats.org/drawingml/2006/main">
               <a:ext uri="{FF2B5EF4-FFF2-40B4-BE49-F238E27FC236}">
-                <a16:creationId xmlns:a16="http://schemas.microsoft.com/office/drawing/2014/main" id="{3136936C-C726-4184-AD2C-756A61971F16}"/>
+                <a16:creationId xmlns:a16="http://schemas.microsoft.com/office/drawing/2014/main" id="{69FD7333-6629-40BA-B3E4-57CDE6114C55}"/>
               </a:ext>
             </a:extLst>
           </p:cNvPr>
@@ -32544,7 +32994,7 @@
           <p:cNvPr id="11" name="Rounded Rectangle 10">
             <a:extLst xmlns:a="http://schemas.openxmlformats.org/drawingml/2006/main">
               <a:ext uri="{FF2B5EF4-FFF2-40B4-BE49-F238E27FC236}">
-                <a16:creationId xmlns:a16="http://schemas.microsoft.com/office/drawing/2014/main" id="{4B5F46CB-AF7A-42DD-85BD-D696FB410291}"/>
+                <a16:creationId xmlns:a16="http://schemas.microsoft.com/office/drawing/2014/main" id="{26EB7771-AEEB-4BC7-84C4-A8E792173EE4}"/>
               </a:ext>
             </a:extLst>
           </p:cNvPr>
@@ -32601,7 +33051,7 @@
           <p:cNvPr id="12" name="TextBox 11">
             <a:extLst xmlns:a="http://schemas.openxmlformats.org/drawingml/2006/main">
               <a:ext uri="{FF2B5EF4-FFF2-40B4-BE49-F238E27FC236}">
-                <a16:creationId xmlns:a16="http://schemas.microsoft.com/office/drawing/2014/main" id="{804DE844-7D81-4BD4-AA8B-8AA622717923}"/>
+                <a16:creationId xmlns:a16="http://schemas.microsoft.com/office/drawing/2014/main" id="{ED314C95-428C-4F8A-98E1-AA907FBEE516}"/>
               </a:ext>
             </a:extLst>
           </p:cNvPr>
@@ -32648,7 +33098,7 @@
           <p:cNvPr id="13" name="TextBox 12">
             <a:extLst xmlns:a="http://schemas.openxmlformats.org/drawingml/2006/main">
               <a:ext uri="{FF2B5EF4-FFF2-40B4-BE49-F238E27FC236}">
-                <a16:creationId xmlns:a16="http://schemas.microsoft.com/office/drawing/2014/main" id="{AB45CEB9-379F-4386-88E4-3A5046E7A9BF}"/>
+                <a16:creationId xmlns:a16="http://schemas.microsoft.com/office/drawing/2014/main" id="{8AE11271-05B6-47DA-A605-735B3FD31A20}"/>
               </a:ext>
             </a:extLst>
           </p:cNvPr>
@@ -32695,7 +33145,7 @@
           <p:cNvPr id="14" name="Rounded Rectangle 13">
             <a:extLst xmlns:a="http://schemas.openxmlformats.org/drawingml/2006/main">
               <a:ext uri="{FF2B5EF4-FFF2-40B4-BE49-F238E27FC236}">
-                <a16:creationId xmlns:a16="http://schemas.microsoft.com/office/drawing/2014/main" id="{FD55CA1F-8589-4E70-9DEE-9AE384ABBB02}"/>
+                <a16:creationId xmlns:a16="http://schemas.microsoft.com/office/drawing/2014/main" id="{F2D8294E-8DBF-4A9C-AAFE-AB74F779B3DD}"/>
               </a:ext>
             </a:extLst>
           </p:cNvPr>
@@ -32752,7 +33202,7 @@
           <p:cNvPr id="15" name="TextBox 14">
             <a:extLst xmlns:a="http://schemas.openxmlformats.org/drawingml/2006/main">
               <a:ext uri="{FF2B5EF4-FFF2-40B4-BE49-F238E27FC236}">
-                <a16:creationId xmlns:a16="http://schemas.microsoft.com/office/drawing/2014/main" id="{7CC304F3-5116-4444-9752-67A6B25C8F05}"/>
+                <a16:creationId xmlns:a16="http://schemas.microsoft.com/office/drawing/2014/main" id="{4D4ECF6C-7025-4745-977C-805B01F6E462}"/>
               </a:ext>
             </a:extLst>
           </p:cNvPr>
@@ -32799,7 +33249,7 @@
           <p:cNvPr id="16" name="TextBox 15">
             <a:extLst xmlns:a="http://schemas.openxmlformats.org/drawingml/2006/main">
               <a:ext uri="{FF2B5EF4-FFF2-40B4-BE49-F238E27FC236}">
-                <a16:creationId xmlns:a16="http://schemas.microsoft.com/office/drawing/2014/main" id="{75C3E461-84D7-4DF0-B94A-49956D86CAA1}"/>
+                <a16:creationId xmlns:a16="http://schemas.microsoft.com/office/drawing/2014/main" id="{CD5BDF61-EF8C-44A0-BB30-E06E8C831AD4}"/>
               </a:ext>
             </a:extLst>
           </p:cNvPr>
@@ -32846,7 +33296,7 @@
           <p:cNvPr id="17" name="TextBox 16">
             <a:extLst xmlns:a="http://schemas.openxmlformats.org/drawingml/2006/main">
               <a:ext uri="{FF2B5EF4-FFF2-40B4-BE49-F238E27FC236}">
-                <a16:creationId xmlns:a16="http://schemas.microsoft.com/office/drawing/2014/main" id="{DC7848E1-1135-49C2-A545-E7B6F7D3D087}"/>
+                <a16:creationId xmlns:a16="http://schemas.microsoft.com/office/drawing/2014/main" id="{D8439E19-79C6-4FF6-8BA8-A915281495F1}"/>
               </a:ext>
             </a:extLst>
           </p:cNvPr>
@@ -32893,7 +33343,7 @@
           <p:cNvPr id="18" name="Rounded Rectangle 17">
             <a:extLst xmlns:a="http://schemas.openxmlformats.org/drawingml/2006/main">
               <a:ext uri="{FF2B5EF4-FFF2-40B4-BE49-F238E27FC236}">
-                <a16:creationId xmlns:a16="http://schemas.microsoft.com/office/drawing/2014/main" id="{4BC98869-DB85-4181-BC61-F99DEBEF1B1E}"/>
+                <a16:creationId xmlns:a16="http://schemas.microsoft.com/office/drawing/2014/main" id="{709EA89C-98A8-43BF-90F8-C2EB19D44073}"/>
               </a:ext>
             </a:extLst>
           </p:cNvPr>
@@ -32950,7 +33400,7 @@
           <p:cNvPr id="19" name="TextBox 18">
             <a:extLst xmlns:a="http://schemas.openxmlformats.org/drawingml/2006/main">
               <a:ext uri="{FF2B5EF4-FFF2-40B4-BE49-F238E27FC236}">
-                <a16:creationId xmlns:a16="http://schemas.microsoft.com/office/drawing/2014/main" id="{C8DFD22F-6DBD-4675-A5BB-7D71E2056882}"/>
+                <a16:creationId xmlns:a16="http://schemas.microsoft.com/office/drawing/2014/main" id="{14FFCAAC-9BB8-4B89-BA87-3FEA99E4F4B1}"/>
               </a:ext>
             </a:extLst>
           </p:cNvPr>
@@ -32997,7 +33447,7 @@
           <p:cNvPr id="20" name="TextBox 19">
             <a:extLst xmlns:a="http://schemas.openxmlformats.org/drawingml/2006/main">
               <a:ext uri="{FF2B5EF4-FFF2-40B4-BE49-F238E27FC236}">
-                <a16:creationId xmlns:a16="http://schemas.microsoft.com/office/drawing/2014/main" id="{364CEC11-EA1B-497E-AE84-3E0985C8BF70}"/>
+                <a16:creationId xmlns:a16="http://schemas.microsoft.com/office/drawing/2014/main" id="{90CFBE4E-DB7F-4DCA-A422-DFA8BD4193D6}"/>
               </a:ext>
             </a:extLst>
           </p:cNvPr>
@@ -33042,7 +33492,7 @@
     </p:spTree>
     <p:extLst>
       <p:ext uri="{BB962C8B-B14F-4D97-AF65-F5344CB8AC3E}">
-        <p14:creationId xmlns:p14="http://schemas.microsoft.com/office/powerpoint/2010/main" val="411471130"/>
+        <p14:creationId xmlns:p14="http://schemas.microsoft.com/office/powerpoint/2010/main" val="227532665"/>
       </p:ext>
     </p:extLst>
   </p:cSld>
@@ -33066,7 +33516,7 @@
           <p:cNvPr id="2" name="TextBox 1">
             <a:extLst xmlns:a="http://schemas.openxmlformats.org/drawingml/2006/main">
               <a:ext uri="{FF2B5EF4-FFF2-40B4-BE49-F238E27FC236}">
-                <a16:creationId xmlns:a16="http://schemas.microsoft.com/office/drawing/2014/main" id="{6AC47CAB-C7AE-48AE-883C-9EE8580BAC28}"/>
+                <a16:creationId xmlns:a16="http://schemas.microsoft.com/office/drawing/2014/main" id="{27FC253B-3C63-49AD-9031-855C16FDC74E}"/>
               </a:ext>
             </a:extLst>
           </p:cNvPr>
@@ -33113,7 +33563,7 @@
           <p:cNvPr id="3" name="TextBox 2">
             <a:extLst xmlns:a="http://schemas.openxmlformats.org/drawingml/2006/main">
               <a:ext uri="{FF2B5EF4-FFF2-40B4-BE49-F238E27FC236}">
-                <a16:creationId xmlns:a16="http://schemas.microsoft.com/office/drawing/2014/main" id="{8EE2E39C-71B6-405E-8342-42023F808C60}"/>
+                <a16:creationId xmlns:a16="http://schemas.microsoft.com/office/drawing/2014/main" id="{0398D641-9266-4802-B9D7-3461B4B5B816}"/>
               </a:ext>
             </a:extLst>
           </p:cNvPr>
@@ -33160,7 +33610,7 @@
           <p:cNvPr id="4" name="Rectangle 3">
             <a:extLst xmlns:a="http://schemas.openxmlformats.org/drawingml/2006/main">
               <a:ext uri="{FF2B5EF4-FFF2-40B4-BE49-F238E27FC236}">
-                <a16:creationId xmlns:a16="http://schemas.microsoft.com/office/drawing/2014/main" id="{2C5BE32D-8BE4-47D3-A55D-1CC564C40B01}"/>
+                <a16:creationId xmlns:a16="http://schemas.microsoft.com/office/drawing/2014/main" id="{772990DB-4F19-4FF4-9D58-9D3AB977BFBA}"/>
               </a:ext>
             </a:extLst>
           </p:cNvPr>
@@ -33215,7 +33665,7 @@
           <p:cNvPr id="5" name="Rectangle 4">
             <a:extLst xmlns:a="http://schemas.openxmlformats.org/drawingml/2006/main">
               <a:ext uri="{FF2B5EF4-FFF2-40B4-BE49-F238E27FC236}">
-                <a16:creationId xmlns:a16="http://schemas.microsoft.com/office/drawing/2014/main" id="{CF2BDF0F-52D7-457F-A918-4AFC147BD935}"/>
+                <a16:creationId xmlns:a16="http://schemas.microsoft.com/office/drawing/2014/main" id="{8DE62651-AAD1-4C10-973F-CA84C0343A39}"/>
               </a:ext>
             </a:extLst>
           </p:cNvPr>
@@ -33270,7 +33720,7 @@
           <p:cNvPr id="6" name="TextBox 5">
             <a:extLst xmlns:a="http://schemas.openxmlformats.org/drawingml/2006/main">
               <a:ext uri="{FF2B5EF4-FFF2-40B4-BE49-F238E27FC236}">
-                <a16:creationId xmlns:a16="http://schemas.microsoft.com/office/drawing/2014/main" id="{51DB88DA-0A85-4745-996C-45CCE3BAB5A7}"/>
+                <a16:creationId xmlns:a16="http://schemas.microsoft.com/office/drawing/2014/main" id="{1490E07D-F11E-4E60-A205-5784B8F104EB}"/>
               </a:ext>
             </a:extLst>
           </p:cNvPr>
@@ -33307,7 +33757,7 @@
                 <a:ea typeface="Aptos"/>
                 <a:cs typeface="Aptos"/>
               </a:rPr>
-              <a:t>Julkinen riippumaton evidenssikooste · 2026.07.24-22 · 2026-07-24 · Lähteet: EPO family; kansalliset rekisterit</a:t>
+              <a:t>Julkinen riippumaton evidenssikooste · 2026.07.25-24 · 2026-07-24 · Lähteet: EPO family; kansalliset rekisterit</a:t>
             </a:r>
           </a:p>
         </p:txBody>
@@ -33317,7 +33767,7 @@
           <p:cNvPr id="7" name="TextBox 6">
             <a:extLst xmlns:a="http://schemas.openxmlformats.org/drawingml/2006/main">
               <a:ext uri="{FF2B5EF4-FFF2-40B4-BE49-F238E27FC236}">
-                <a16:creationId xmlns:a16="http://schemas.microsoft.com/office/drawing/2014/main" id="{9AFB4462-4294-4739-9993-63B7C81B323F}"/>
+                <a16:creationId xmlns:a16="http://schemas.microsoft.com/office/drawing/2014/main" id="{30431C11-97B5-4B07-9B87-0011EDBAFEDE}"/>
               </a:ext>
             </a:extLst>
           </p:cNvPr>
@@ -33364,7 +33814,7 @@
           <p:cNvPr id="8" name="Rounded Rectangle 7">
             <a:extLst xmlns:a="http://schemas.openxmlformats.org/drawingml/2006/main">
               <a:ext uri="{FF2B5EF4-FFF2-40B4-BE49-F238E27FC236}">
-                <a16:creationId xmlns:a16="http://schemas.microsoft.com/office/drawing/2014/main" id="{17D23874-BC1F-4903-94DC-B5D6DE0AAF78}"/>
+                <a16:creationId xmlns:a16="http://schemas.microsoft.com/office/drawing/2014/main" id="{76033198-3BAB-4D62-896E-7DD91A072FEF}"/>
               </a:ext>
             </a:extLst>
           </p:cNvPr>
@@ -33421,7 +33871,7 @@
           <p:cNvPr id="9" name="TextBox 8">
             <a:extLst xmlns:a="http://schemas.openxmlformats.org/drawingml/2006/main">
               <a:ext uri="{FF2B5EF4-FFF2-40B4-BE49-F238E27FC236}">
-                <a16:creationId xmlns:a16="http://schemas.microsoft.com/office/drawing/2014/main" id="{667F6C28-F7EB-4F2A-A8EC-DF73356E3DC1}"/>
+                <a16:creationId xmlns:a16="http://schemas.microsoft.com/office/drawing/2014/main" id="{088A630B-21DA-4D1D-8FDD-C3B800909EE2}"/>
               </a:ext>
             </a:extLst>
           </p:cNvPr>
@@ -33468,7 +33918,7 @@
           <p:cNvPr id="10" name="TextBox 9">
             <a:extLst xmlns:a="http://schemas.openxmlformats.org/drawingml/2006/main">
               <a:ext uri="{FF2B5EF4-FFF2-40B4-BE49-F238E27FC236}">
-                <a16:creationId xmlns:a16="http://schemas.microsoft.com/office/drawing/2014/main" id="{F7FBBECE-99A0-46D1-BFA5-7DFB754B3300}"/>
+                <a16:creationId xmlns:a16="http://schemas.microsoft.com/office/drawing/2014/main" id="{4399F745-89F5-4F36-AD75-BFC049578557}"/>
               </a:ext>
             </a:extLst>
           </p:cNvPr>
@@ -33515,7 +33965,7 @@
           <p:cNvPr id="11" name="Rounded Rectangle 10">
             <a:extLst xmlns:a="http://schemas.openxmlformats.org/drawingml/2006/main">
               <a:ext uri="{FF2B5EF4-FFF2-40B4-BE49-F238E27FC236}">
-                <a16:creationId xmlns:a16="http://schemas.microsoft.com/office/drawing/2014/main" id="{F1875A40-B8DA-4A18-AC72-8580EBCB7502}"/>
+                <a16:creationId xmlns:a16="http://schemas.microsoft.com/office/drawing/2014/main" id="{09F87FEB-DE50-44D8-9BD8-B6444FF45583}"/>
               </a:ext>
             </a:extLst>
           </p:cNvPr>
@@ -33572,7 +34022,7 @@
           <p:cNvPr id="12" name="TextBox 11">
             <a:extLst xmlns:a="http://schemas.openxmlformats.org/drawingml/2006/main">
               <a:ext uri="{FF2B5EF4-FFF2-40B4-BE49-F238E27FC236}">
-                <a16:creationId xmlns:a16="http://schemas.microsoft.com/office/drawing/2014/main" id="{A85F844C-B054-40F9-8E5B-C1558F1EC560}"/>
+                <a16:creationId xmlns:a16="http://schemas.microsoft.com/office/drawing/2014/main" id="{3C5348C6-7404-48A7-A33A-90841991A267}"/>
               </a:ext>
             </a:extLst>
           </p:cNvPr>
@@ -33619,7 +34069,7 @@
           <p:cNvPr id="13" name="TextBox 12">
             <a:extLst xmlns:a="http://schemas.openxmlformats.org/drawingml/2006/main">
               <a:ext uri="{FF2B5EF4-FFF2-40B4-BE49-F238E27FC236}">
-                <a16:creationId xmlns:a16="http://schemas.microsoft.com/office/drawing/2014/main" id="{286D80D0-3226-4BC7-BE07-7311DE454F61}"/>
+                <a16:creationId xmlns:a16="http://schemas.microsoft.com/office/drawing/2014/main" id="{DD1344D6-5267-4F30-A8BF-2C412817F2C2}"/>
               </a:ext>
             </a:extLst>
           </p:cNvPr>
@@ -33666,7 +34116,7 @@
           <p:cNvPr id="14" name="Rounded Rectangle 13">
             <a:extLst xmlns:a="http://schemas.openxmlformats.org/drawingml/2006/main">
               <a:ext uri="{FF2B5EF4-FFF2-40B4-BE49-F238E27FC236}">
-                <a16:creationId xmlns:a16="http://schemas.microsoft.com/office/drawing/2014/main" id="{DDA5711A-F5B1-4C9A-BBDA-24AFD8628396}"/>
+                <a16:creationId xmlns:a16="http://schemas.microsoft.com/office/drawing/2014/main" id="{F900262A-EAB4-4F76-AE95-FC12419B5A1B}"/>
               </a:ext>
             </a:extLst>
           </p:cNvPr>
@@ -33723,7 +34173,7 @@
           <p:cNvPr id="15" name="TextBox 14">
             <a:extLst xmlns:a="http://schemas.openxmlformats.org/drawingml/2006/main">
               <a:ext uri="{FF2B5EF4-FFF2-40B4-BE49-F238E27FC236}">
-                <a16:creationId xmlns:a16="http://schemas.microsoft.com/office/drawing/2014/main" id="{5481285E-A0CC-4F00-B3BE-3FE1752EA0E7}"/>
+                <a16:creationId xmlns:a16="http://schemas.microsoft.com/office/drawing/2014/main" id="{C7FB8097-3B5F-48BF-B960-EB4A4A915A45}"/>
               </a:ext>
             </a:extLst>
           </p:cNvPr>
@@ -33770,7 +34220,7 @@
           <p:cNvPr id="16" name="TextBox 15">
             <a:extLst xmlns:a="http://schemas.openxmlformats.org/drawingml/2006/main">
               <a:ext uri="{FF2B5EF4-FFF2-40B4-BE49-F238E27FC236}">
-                <a16:creationId xmlns:a16="http://schemas.microsoft.com/office/drawing/2014/main" id="{766B2FEA-5620-4B17-9196-2E777F43E810}"/>
+                <a16:creationId xmlns:a16="http://schemas.microsoft.com/office/drawing/2014/main" id="{626F4BC1-5910-4F81-BC3E-84DFAFB1FDFE}"/>
               </a:ext>
             </a:extLst>
           </p:cNvPr>
@@ -33817,7 +34267,7 @@
           <p:cNvPr id="17" name="Rounded Rectangle 16">
             <a:extLst xmlns:a="http://schemas.openxmlformats.org/drawingml/2006/main">
               <a:ext uri="{FF2B5EF4-FFF2-40B4-BE49-F238E27FC236}">
-                <a16:creationId xmlns:a16="http://schemas.microsoft.com/office/drawing/2014/main" id="{2BF45081-4625-4293-95B5-0A751F145EDC}"/>
+                <a16:creationId xmlns:a16="http://schemas.microsoft.com/office/drawing/2014/main" id="{851CB873-3896-4FF8-B501-B8078E0C8C67}"/>
               </a:ext>
             </a:extLst>
           </p:cNvPr>
@@ -33874,7 +34324,7 @@
           <p:cNvPr id="18" name="TextBox 17">
             <a:extLst xmlns:a="http://schemas.openxmlformats.org/drawingml/2006/main">
               <a:ext uri="{FF2B5EF4-FFF2-40B4-BE49-F238E27FC236}">
-                <a16:creationId xmlns:a16="http://schemas.microsoft.com/office/drawing/2014/main" id="{16E5C487-0997-4143-B4EE-B3BC4B35EA85}"/>
+                <a16:creationId xmlns:a16="http://schemas.microsoft.com/office/drawing/2014/main" id="{905A8EA1-F6E9-46F7-B0B9-C728D17A6886}"/>
               </a:ext>
             </a:extLst>
           </p:cNvPr>
@@ -33921,7 +34371,7 @@
           <p:cNvPr id="19" name="TextBox 18">
             <a:extLst xmlns:a="http://schemas.openxmlformats.org/drawingml/2006/main">
               <a:ext uri="{FF2B5EF4-FFF2-40B4-BE49-F238E27FC236}">
-                <a16:creationId xmlns:a16="http://schemas.microsoft.com/office/drawing/2014/main" id="{EC7D68D5-C857-4F08-93DF-6C4476572612}"/>
+                <a16:creationId xmlns:a16="http://schemas.microsoft.com/office/drawing/2014/main" id="{9AF35D15-8884-4977-9048-A39E8C997A55}"/>
               </a:ext>
             </a:extLst>
           </p:cNvPr>
@@ -33968,7 +34418,7 @@
           <p:cNvPr id="20" name="TextBox 19">
             <a:extLst xmlns:a="http://schemas.openxmlformats.org/drawingml/2006/main">
               <a:ext uri="{FF2B5EF4-FFF2-40B4-BE49-F238E27FC236}">
-                <a16:creationId xmlns:a16="http://schemas.microsoft.com/office/drawing/2014/main" id="{9EC53FD9-3F3D-4508-A6A5-754DAD5F14AD}"/>
+                <a16:creationId xmlns:a16="http://schemas.microsoft.com/office/drawing/2014/main" id="{D47202BD-241C-452A-BCB9-93C788F70CAA}"/>
               </a:ext>
             </a:extLst>
           </p:cNvPr>
@@ -34015,7 +34465,7 @@
           <p:cNvPr id="21" name="Rounded Rectangle 20">
             <a:extLst xmlns:a="http://schemas.openxmlformats.org/drawingml/2006/main">
               <a:ext uri="{FF2B5EF4-FFF2-40B4-BE49-F238E27FC236}">
-                <a16:creationId xmlns:a16="http://schemas.microsoft.com/office/drawing/2014/main" id="{645D7DDB-A1FF-4D1A-B47D-2467A977C117}"/>
+                <a16:creationId xmlns:a16="http://schemas.microsoft.com/office/drawing/2014/main" id="{95096CB9-1F22-439A-932C-942291D4A9F4}"/>
               </a:ext>
             </a:extLst>
           </p:cNvPr>
@@ -34072,7 +34522,7 @@
           <p:cNvPr id="22" name="TextBox 21">
             <a:extLst xmlns:a="http://schemas.openxmlformats.org/drawingml/2006/main">
               <a:ext uri="{FF2B5EF4-FFF2-40B4-BE49-F238E27FC236}">
-                <a16:creationId xmlns:a16="http://schemas.microsoft.com/office/drawing/2014/main" id="{EE4A563A-6A28-4175-8227-50ACBDCF8A3D}"/>
+                <a16:creationId xmlns:a16="http://schemas.microsoft.com/office/drawing/2014/main" id="{0D76379D-1873-4B41-9109-9A755CBC2844}"/>
               </a:ext>
             </a:extLst>
           </p:cNvPr>
@@ -34119,7 +34569,7 @@
           <p:cNvPr id="23" name="TextBox 22">
             <a:extLst xmlns:a="http://schemas.openxmlformats.org/drawingml/2006/main">
               <a:ext uri="{FF2B5EF4-FFF2-40B4-BE49-F238E27FC236}">
-                <a16:creationId xmlns:a16="http://schemas.microsoft.com/office/drawing/2014/main" id="{E5A99056-D111-40E1-BDFE-CCE2C847757D}"/>
+                <a16:creationId xmlns:a16="http://schemas.microsoft.com/office/drawing/2014/main" id="{7EB40A99-C027-458E-9C64-CBAA85E11850}"/>
               </a:ext>
             </a:extLst>
           </p:cNvPr>
@@ -34164,7 +34614,7 @@
     </p:spTree>
     <p:extLst>
       <p:ext uri="{BB962C8B-B14F-4D97-AF65-F5344CB8AC3E}">
-        <p14:creationId xmlns:p14="http://schemas.microsoft.com/office/powerpoint/2010/main" val="2093397172"/>
+        <p14:creationId xmlns:p14="http://schemas.microsoft.com/office/powerpoint/2010/main" val="1830834453"/>
       </p:ext>
     </p:extLst>
   </p:cSld>
@@ -34188,7 +34638,7 @@
           <p:cNvPr id="2" name="TextBox 1">
             <a:extLst xmlns:a="http://schemas.openxmlformats.org/drawingml/2006/main">
               <a:ext uri="{FF2B5EF4-FFF2-40B4-BE49-F238E27FC236}">
-                <a16:creationId xmlns:a16="http://schemas.microsoft.com/office/drawing/2014/main" id="{C53D1E28-7C45-4879-B750-A6077EC5A12E}"/>
+                <a16:creationId xmlns:a16="http://schemas.microsoft.com/office/drawing/2014/main" id="{7C342000-799E-4BBA-B43F-C063F50E04AA}"/>
               </a:ext>
             </a:extLst>
           </p:cNvPr>
@@ -34235,7 +34685,7 @@
           <p:cNvPr id="3" name="TextBox 2">
             <a:extLst xmlns:a="http://schemas.openxmlformats.org/drawingml/2006/main">
               <a:ext uri="{FF2B5EF4-FFF2-40B4-BE49-F238E27FC236}">
-                <a16:creationId xmlns:a16="http://schemas.microsoft.com/office/drawing/2014/main" id="{EE5714EE-3451-4D9D-B919-113CBD8DD245}"/>
+                <a16:creationId xmlns:a16="http://schemas.microsoft.com/office/drawing/2014/main" id="{AA59A12F-CF98-420D-B74F-83B22887F041}"/>
               </a:ext>
             </a:extLst>
           </p:cNvPr>
@@ -34255,8 +34705,8 @@
           <a:noFill xmlns:a="http://schemas.openxmlformats.org/drawingml/2006/main"/>
         </p:spPr>
         <p:txBody>
-          <a:bodyPr xmlns:a="http://schemas.openxmlformats.org/drawingml/2006/main" wrap="square" lIns="36576" tIns="36576" rIns="36576" bIns="36576" anchor="t">
-            <a:spAutoFit/>
+          <a:bodyPr xmlns:a="http://schemas.openxmlformats.org/drawingml/2006/main" wrap="none" lIns="36576" tIns="36576" rIns="36576" bIns="36576" anchor="t">
+            <a:normAutofit fontScale="100000"/>
           </a:bodyPr>
           <a:lstStyle xmlns:a="http://schemas.openxmlformats.org/drawingml/2006/main"/>
           <a:p xmlns:a="http://schemas.openxmlformats.org/drawingml/2006/main">
@@ -34264,7 +34714,7 @@
               <a:buNone/>
             </a:pPr>
             <a:r>
-              <a:rPr sz="3000" b="1">
+              <a:rPr sz="2400" b="1">
                 <a:solidFill>
                   <a:srgbClr val="071A2B"/>
                 </a:solidFill>
@@ -34282,7 +34732,7 @@
           <p:cNvPr id="4" name="Rectangle 3">
             <a:extLst xmlns:a="http://schemas.openxmlformats.org/drawingml/2006/main">
               <a:ext uri="{FF2B5EF4-FFF2-40B4-BE49-F238E27FC236}">
-                <a16:creationId xmlns:a16="http://schemas.microsoft.com/office/drawing/2014/main" id="{C101CA94-B559-4391-8EAE-81E98C7B9861}"/>
+                <a16:creationId xmlns:a16="http://schemas.microsoft.com/office/drawing/2014/main" id="{52500841-13CD-4664-BE3E-A616D80682E6}"/>
               </a:ext>
             </a:extLst>
           </p:cNvPr>
@@ -34337,7 +34787,7 @@
           <p:cNvPr id="5" name="Rectangle 4">
             <a:extLst xmlns:a="http://schemas.openxmlformats.org/drawingml/2006/main">
               <a:ext uri="{FF2B5EF4-FFF2-40B4-BE49-F238E27FC236}">
-                <a16:creationId xmlns:a16="http://schemas.microsoft.com/office/drawing/2014/main" id="{D7CDE4EE-6309-40A9-B14B-44417D564A11}"/>
+                <a16:creationId xmlns:a16="http://schemas.microsoft.com/office/drawing/2014/main" id="{CFF7CF55-ED2B-4EFF-91CA-052D66DA48A6}"/>
               </a:ext>
             </a:extLst>
           </p:cNvPr>
@@ -34392,7 +34842,7 @@
           <p:cNvPr id="6" name="TextBox 5">
             <a:extLst xmlns:a="http://schemas.openxmlformats.org/drawingml/2006/main">
               <a:ext uri="{FF2B5EF4-FFF2-40B4-BE49-F238E27FC236}">
-                <a16:creationId xmlns:a16="http://schemas.microsoft.com/office/drawing/2014/main" id="{F5AB4599-5A31-4548-83FC-E938715B2395}"/>
+                <a16:creationId xmlns:a16="http://schemas.microsoft.com/office/drawing/2014/main" id="{1D907F56-1B00-47B4-AD24-902A1A4E6181}"/>
               </a:ext>
             </a:extLst>
           </p:cNvPr>
@@ -34429,7 +34879,7 @@
                 <a:ea typeface="Aptos"/>
                 <a:cs typeface="Aptos"/>
               </a:rPr>
-              <a:t>Julkinen riippumaton evidenssikooste · 2026.07.24-22 · 2026-07-24 · Lähteet: Viralliset tuomiot: 8 Ni 18/24 (EP); 7 O 3341/24</a:t>
+              <a:t>Julkinen riippumaton evidenssikooste · 2026.07.25-24 · 2026-07-24 · Lähteet: Viralliset tuomiot: 8 Ni 18/24 (EP); 7 O 3341/24</a:t>
             </a:r>
           </a:p>
         </p:txBody>
@@ -34439,7 +34889,7 @@
           <p:cNvPr id="7" name="TextBox 6">
             <a:extLst xmlns:a="http://schemas.openxmlformats.org/drawingml/2006/main">
               <a:ext uri="{FF2B5EF4-FFF2-40B4-BE49-F238E27FC236}">
-                <a16:creationId xmlns:a16="http://schemas.microsoft.com/office/drawing/2014/main" id="{85617D27-9D30-4AFA-9E1D-FE02C1081ED2}"/>
+                <a16:creationId xmlns:a16="http://schemas.microsoft.com/office/drawing/2014/main" id="{55F8428E-904A-4127-880D-34FFF97B9A34}"/>
               </a:ext>
             </a:extLst>
           </p:cNvPr>
@@ -34760,7 +35210,7 @@
           <p:cNvPr id="9" name="TextBox 8">
             <a:extLst xmlns:a="http://schemas.openxmlformats.org/drawingml/2006/main">
               <a:ext uri="{FF2B5EF4-FFF2-40B4-BE49-F238E27FC236}">
-                <a16:creationId xmlns:a16="http://schemas.microsoft.com/office/drawing/2014/main" id="{DDF2C82D-CB10-418A-95E2-60DC59992B4E}"/>
+                <a16:creationId xmlns:a16="http://schemas.microsoft.com/office/drawing/2014/main" id="{376CF584-F1D9-475C-816B-7741C6BC3268}"/>
               </a:ext>
             </a:extLst>
           </p:cNvPr>
@@ -34805,7 +35255,7 @@
     </p:spTree>
     <p:extLst>
       <p:ext uri="{BB962C8B-B14F-4D97-AF65-F5344CB8AC3E}">
-        <p14:creationId xmlns:p14="http://schemas.microsoft.com/office/powerpoint/2010/main" val="1609748342"/>
+        <p14:creationId xmlns:p14="http://schemas.microsoft.com/office/powerpoint/2010/main" val="174098133"/>
       </p:ext>
     </p:extLst>
   </p:cSld>

--- a/site/downloads/pixan-bank-deck-large-fi.pptx
+++ b/site/downloads/pixan-bank-deck-large-fi.pptx
@@ -2,42 +2,42 @@
 <file path=ppt/presentation.xml><?xml version="1.0" encoding="utf-8"?>
 <p:presentation xmlns:p="http://schemas.openxmlformats.org/presentationml/2006/main">
   <p:sldMasterIdLst>
-    <p:sldMasterId xmlns:r="http://schemas.openxmlformats.org/officeDocument/2006/relationships" id="2147483648" r:id="R1a4792fdcb024cbc"/>
+    <p:sldMasterId xmlns:r="http://schemas.openxmlformats.org/officeDocument/2006/relationships" id="2147483648" r:id="Rfbcbead296f34713"/>
   </p:sldMasterIdLst>
   <p:notesMasterIdLst>
-    <p:notesMasterId xmlns:r="http://schemas.openxmlformats.org/officeDocument/2006/relationships" r:id="Rcb0d8253bf514078"/>
+    <p:notesMasterId xmlns:r="http://schemas.openxmlformats.org/officeDocument/2006/relationships" r:id="R7f9d34d583a34e9f"/>
   </p:notesMasterIdLst>
   <p:sldIdLst>
-    <p:sldId xmlns:r="http://schemas.openxmlformats.org/officeDocument/2006/relationships" id="256" r:id="Re9e111c997944c9e"/>
-    <p:sldId xmlns:r="http://schemas.openxmlformats.org/officeDocument/2006/relationships" id="257" r:id="R02f15866660d4730"/>
-    <p:sldId xmlns:r="http://schemas.openxmlformats.org/officeDocument/2006/relationships" id="258" r:id="Rc78baf87c2da40c3"/>
-    <p:sldId xmlns:r="http://schemas.openxmlformats.org/officeDocument/2006/relationships" id="259" r:id="R4550e3bf226a483e"/>
-    <p:sldId xmlns:r="http://schemas.openxmlformats.org/officeDocument/2006/relationships" id="260" r:id="Rfe8ab2136df04c9d"/>
-    <p:sldId xmlns:r="http://schemas.openxmlformats.org/officeDocument/2006/relationships" id="261" r:id="R8024df425e404edb"/>
-    <p:sldId xmlns:r="http://schemas.openxmlformats.org/officeDocument/2006/relationships" id="262" r:id="Rb455ecc3257d474b"/>
-    <p:sldId xmlns:r="http://schemas.openxmlformats.org/officeDocument/2006/relationships" id="263" r:id="Ra6cef1cd2fdb46ab"/>
-    <p:sldId xmlns:r="http://schemas.openxmlformats.org/officeDocument/2006/relationships" id="264" r:id="R127836798df84d98"/>
-    <p:sldId xmlns:r="http://schemas.openxmlformats.org/officeDocument/2006/relationships" id="265" r:id="Rb7d401af74ff48ee"/>
-    <p:sldId xmlns:r="http://schemas.openxmlformats.org/officeDocument/2006/relationships" id="266" r:id="Rf7214387cf3b4cab"/>
-    <p:sldId xmlns:r="http://schemas.openxmlformats.org/officeDocument/2006/relationships" id="267" r:id="Rcaba9411e8294f3b"/>
-    <p:sldId xmlns:r="http://schemas.openxmlformats.org/officeDocument/2006/relationships" id="268" r:id="R8e135846eac649ca"/>
-    <p:sldId xmlns:r="http://schemas.openxmlformats.org/officeDocument/2006/relationships" id="269" r:id="Rda65ef8934334e90"/>
-    <p:sldId xmlns:r="http://schemas.openxmlformats.org/officeDocument/2006/relationships" id="270" r:id="Rfbaa8d564fb248b3"/>
-    <p:sldId xmlns:r="http://schemas.openxmlformats.org/officeDocument/2006/relationships" id="271" r:id="R7f362c62d43345a7"/>
-    <p:sldId xmlns:r="http://schemas.openxmlformats.org/officeDocument/2006/relationships" id="272" r:id="Rc334e263ce1c432a"/>
-    <p:sldId xmlns:r="http://schemas.openxmlformats.org/officeDocument/2006/relationships" id="273" r:id="R4dcfc6b31beb4c37"/>
-    <p:sldId xmlns:r="http://schemas.openxmlformats.org/officeDocument/2006/relationships" id="274" r:id="Rde4464ab035f4e2e"/>
-    <p:sldId xmlns:r="http://schemas.openxmlformats.org/officeDocument/2006/relationships" id="275" r:id="R8d7c9f0ecc2c41b3"/>
-    <p:sldId xmlns:r="http://schemas.openxmlformats.org/officeDocument/2006/relationships" id="276" r:id="R8ea327dac77c435d"/>
-    <p:sldId xmlns:r="http://schemas.openxmlformats.org/officeDocument/2006/relationships" id="277" r:id="R0422cc78713c4ff8"/>
-    <p:sldId xmlns:r="http://schemas.openxmlformats.org/officeDocument/2006/relationships" id="278" r:id="R948d349a01c94867"/>
-    <p:sldId xmlns:r="http://schemas.openxmlformats.org/officeDocument/2006/relationships" id="279" r:id="Rab602bb0cdd048dc"/>
-    <p:sldId xmlns:r="http://schemas.openxmlformats.org/officeDocument/2006/relationships" id="280" r:id="R39988eb7f3b54b35"/>
-    <p:sldId xmlns:r="http://schemas.openxmlformats.org/officeDocument/2006/relationships" id="281" r:id="Rbdaeb5e224424d84"/>
-    <p:sldId xmlns:r="http://schemas.openxmlformats.org/officeDocument/2006/relationships" id="282" r:id="R9f23f9c1543b4db6"/>
-    <p:sldId xmlns:r="http://schemas.openxmlformats.org/officeDocument/2006/relationships" id="283" r:id="R30059508eb804eea"/>
-    <p:sldId xmlns:r="http://schemas.openxmlformats.org/officeDocument/2006/relationships" id="284" r:id="R1f7a4d7266614dcb"/>
-    <p:sldId xmlns:r="http://schemas.openxmlformats.org/officeDocument/2006/relationships" id="285" r:id="R709298f5c1064292"/>
+    <p:sldId xmlns:r="http://schemas.openxmlformats.org/officeDocument/2006/relationships" id="256" r:id="R853a5dcb4d2943e6"/>
+    <p:sldId xmlns:r="http://schemas.openxmlformats.org/officeDocument/2006/relationships" id="257" r:id="Rf82cf3fe26ac43cf"/>
+    <p:sldId xmlns:r="http://schemas.openxmlformats.org/officeDocument/2006/relationships" id="258" r:id="R3833e3f97a464e78"/>
+    <p:sldId xmlns:r="http://schemas.openxmlformats.org/officeDocument/2006/relationships" id="259" r:id="R30ee0026398b449d"/>
+    <p:sldId xmlns:r="http://schemas.openxmlformats.org/officeDocument/2006/relationships" id="260" r:id="R74d5c4dbe08342b1"/>
+    <p:sldId xmlns:r="http://schemas.openxmlformats.org/officeDocument/2006/relationships" id="261" r:id="R5cc330af9bd44840"/>
+    <p:sldId xmlns:r="http://schemas.openxmlformats.org/officeDocument/2006/relationships" id="262" r:id="Rb344dd4dd0544a24"/>
+    <p:sldId xmlns:r="http://schemas.openxmlformats.org/officeDocument/2006/relationships" id="263" r:id="Rb5fc856529fd434d"/>
+    <p:sldId xmlns:r="http://schemas.openxmlformats.org/officeDocument/2006/relationships" id="264" r:id="R9c78016e9f6f4b02"/>
+    <p:sldId xmlns:r="http://schemas.openxmlformats.org/officeDocument/2006/relationships" id="265" r:id="R98e1aa9105db4f1d"/>
+    <p:sldId xmlns:r="http://schemas.openxmlformats.org/officeDocument/2006/relationships" id="266" r:id="Redc309d91a4948b6"/>
+    <p:sldId xmlns:r="http://schemas.openxmlformats.org/officeDocument/2006/relationships" id="267" r:id="Rd945a878798e416b"/>
+    <p:sldId xmlns:r="http://schemas.openxmlformats.org/officeDocument/2006/relationships" id="268" r:id="R08607a4bc65e48a8"/>
+    <p:sldId xmlns:r="http://schemas.openxmlformats.org/officeDocument/2006/relationships" id="269" r:id="R33530a998488486d"/>
+    <p:sldId xmlns:r="http://schemas.openxmlformats.org/officeDocument/2006/relationships" id="270" r:id="R67fec809b9714292"/>
+    <p:sldId xmlns:r="http://schemas.openxmlformats.org/officeDocument/2006/relationships" id="271" r:id="R65c7cb4143124201"/>
+    <p:sldId xmlns:r="http://schemas.openxmlformats.org/officeDocument/2006/relationships" id="272" r:id="R16c9f8e993524231"/>
+    <p:sldId xmlns:r="http://schemas.openxmlformats.org/officeDocument/2006/relationships" id="273" r:id="R97e5e94e1fe8453f"/>
+    <p:sldId xmlns:r="http://schemas.openxmlformats.org/officeDocument/2006/relationships" id="274" r:id="R23584ac446e24696"/>
+    <p:sldId xmlns:r="http://schemas.openxmlformats.org/officeDocument/2006/relationships" id="275" r:id="Rf6b8ea5c71d24769"/>
+    <p:sldId xmlns:r="http://schemas.openxmlformats.org/officeDocument/2006/relationships" id="276" r:id="Rb1e7e9c2b04a4320"/>
+    <p:sldId xmlns:r="http://schemas.openxmlformats.org/officeDocument/2006/relationships" id="277" r:id="Rdb34d4eeaaa2401e"/>
+    <p:sldId xmlns:r="http://schemas.openxmlformats.org/officeDocument/2006/relationships" id="278" r:id="Refa9713a09aa44b1"/>
+    <p:sldId xmlns:r="http://schemas.openxmlformats.org/officeDocument/2006/relationships" id="279" r:id="R86415e8164874f3d"/>
+    <p:sldId xmlns:r="http://schemas.openxmlformats.org/officeDocument/2006/relationships" id="280" r:id="Rb72230bce47b4afa"/>
+    <p:sldId xmlns:r="http://schemas.openxmlformats.org/officeDocument/2006/relationships" id="281" r:id="R17ae240b8d1d4e01"/>
+    <p:sldId xmlns:r="http://schemas.openxmlformats.org/officeDocument/2006/relationships" id="282" r:id="R1abafa1902eb4169"/>
+    <p:sldId xmlns:r="http://schemas.openxmlformats.org/officeDocument/2006/relationships" id="283" r:id="R4fd21da4a0bc4213"/>
+    <p:sldId xmlns:r="http://schemas.openxmlformats.org/officeDocument/2006/relationships" id="284" r:id="Rdbbd6fe6291a4f44"/>
+    <p:sldId xmlns:r="http://schemas.openxmlformats.org/officeDocument/2006/relationships" id="285" r:id="R72082b43efcd4c2c"/>
   </p:sldIdLst>
   <p:sldSz cx="12191999" cy="6858000"/>
   <p:notesSz cx="6858000" cy="9144000"/>
@@ -524,6 +524,16 @@
           </a:p>
           <a:p xmlns:a="http://schemas.openxmlformats.org/drawingml/2006/main">
             <a:r>
+              <a:t>- https://www.health.govt.nz/regulation-legislation/vaping-herbal-smoking-and-smokeless-tobacco/requirements/complete-a-notifiable-product-annual-return</a:t>
+            </a:r>
+          </a:p>
+          <a:p xmlns:a="http://schemas.openxmlformats.org/drawingml/2006/main">
+            <a:r>
+              <a:t>- https://www.health.govt.nz/system/files/2024-12/2024-annual-returns-user-guide.pdf</a:t>
+            </a:r>
+          </a:p>
+          <a:p xmlns:a="http://schemas.openxmlformats.org/drawingml/2006/main">
+            <a:r>
               <a:t>- https://www150.statcan.gc.ca/t1/tbl1/en/tv.action?pid=2010007101</a:t>
             </a:r>
           </a:p>
@@ -714,6 +724,16 @@
           </a:p>
           <a:p xmlns:a="http://schemas.openxmlformats.org/drawingml/2006/main">
             <a:r>
+              <a:t>- https://www.health.govt.nz/regulation-legislation/vaping-herbal-smoking-and-smokeless-tobacco/requirements/complete-a-notifiable-product-annual-return</a:t>
+            </a:r>
+          </a:p>
+          <a:p xmlns:a="http://schemas.openxmlformats.org/drawingml/2006/main">
+            <a:r>
+              <a:t>- https://www.health.govt.nz/system/files/2024-12/2024-annual-returns-user-guide.pdf</a:t>
+            </a:r>
+          </a:p>
+          <a:p xmlns:a="http://schemas.openxmlformats.org/drawingml/2006/main">
+            <a:r>
               <a:t>- https://www150.statcan.gc.ca/t1/tbl1/en/tv.action?pid=2010007101</a:t>
             </a:r>
           </a:p>
@@ -904,6 +924,16 @@
           </a:p>
           <a:p xmlns:a="http://schemas.openxmlformats.org/drawingml/2006/main">
             <a:r>
+              <a:t>- https://www.health.govt.nz/regulation-legislation/vaping-herbal-smoking-and-smokeless-tobacco/requirements/complete-a-notifiable-product-annual-return</a:t>
+            </a:r>
+          </a:p>
+          <a:p xmlns:a="http://schemas.openxmlformats.org/drawingml/2006/main">
+            <a:r>
+              <a:t>- https://www.health.govt.nz/system/files/2024-12/2024-annual-returns-user-guide.pdf</a:t>
+            </a:r>
+          </a:p>
+          <a:p xmlns:a="http://schemas.openxmlformats.org/drawingml/2006/main">
+            <a:r>
               <a:t>- https://www150.statcan.gc.ca/t1/tbl1/en/tv.action?pid=2010007101</a:t>
             </a:r>
           </a:p>
@@ -1094,6 +1124,16 @@
           </a:p>
           <a:p xmlns:a="http://schemas.openxmlformats.org/drawingml/2006/main">
             <a:r>
+              <a:t>- https://www.health.govt.nz/regulation-legislation/vaping-herbal-smoking-and-smokeless-tobacco/requirements/complete-a-notifiable-product-annual-return</a:t>
+            </a:r>
+          </a:p>
+          <a:p xmlns:a="http://schemas.openxmlformats.org/drawingml/2006/main">
+            <a:r>
+              <a:t>- https://www.health.govt.nz/system/files/2024-12/2024-annual-returns-user-guide.pdf</a:t>
+            </a:r>
+          </a:p>
+          <a:p xmlns:a="http://schemas.openxmlformats.org/drawingml/2006/main">
+            <a:r>
               <a:t>- https://www150.statcan.gc.ca/t1/tbl1/en/tv.action?pid=2010007101</a:t>
             </a:r>
           </a:p>
@@ -1284,6 +1324,16 @@
           </a:p>
           <a:p xmlns:a="http://schemas.openxmlformats.org/drawingml/2006/main">
             <a:r>
+              <a:t>- https://www.health.govt.nz/regulation-legislation/vaping-herbal-smoking-and-smokeless-tobacco/requirements/complete-a-notifiable-product-annual-return</a:t>
+            </a:r>
+          </a:p>
+          <a:p xmlns:a="http://schemas.openxmlformats.org/drawingml/2006/main">
+            <a:r>
+              <a:t>- https://www.health.govt.nz/system/files/2024-12/2024-annual-returns-user-guide.pdf</a:t>
+            </a:r>
+          </a:p>
+          <a:p xmlns:a="http://schemas.openxmlformats.org/drawingml/2006/main">
+            <a:r>
               <a:t>- https://www150.statcan.gc.ca/t1/tbl1/en/tv.action?pid=2010007101</a:t>
             </a:r>
           </a:p>
@@ -1474,6 +1524,16 @@
           </a:p>
           <a:p xmlns:a="http://schemas.openxmlformats.org/drawingml/2006/main">
             <a:r>
+              <a:t>- https://www.health.govt.nz/regulation-legislation/vaping-herbal-smoking-and-smokeless-tobacco/requirements/complete-a-notifiable-product-annual-return</a:t>
+            </a:r>
+          </a:p>
+          <a:p xmlns:a="http://schemas.openxmlformats.org/drawingml/2006/main">
+            <a:r>
+              <a:t>- https://www.health.govt.nz/system/files/2024-12/2024-annual-returns-user-guide.pdf</a:t>
+            </a:r>
+          </a:p>
+          <a:p xmlns:a="http://schemas.openxmlformats.org/drawingml/2006/main">
+            <a:r>
               <a:t>- https://www150.statcan.gc.ca/t1/tbl1/en/tv.action?pid=2010007101</a:t>
             </a:r>
           </a:p>
@@ -1664,6 +1724,16 @@
           </a:p>
           <a:p xmlns:a="http://schemas.openxmlformats.org/drawingml/2006/main">
             <a:r>
+              <a:t>- https://www.health.govt.nz/regulation-legislation/vaping-herbal-smoking-and-smokeless-tobacco/requirements/complete-a-notifiable-product-annual-return</a:t>
+            </a:r>
+          </a:p>
+          <a:p xmlns:a="http://schemas.openxmlformats.org/drawingml/2006/main">
+            <a:r>
+              <a:t>- https://www.health.govt.nz/system/files/2024-12/2024-annual-returns-user-guide.pdf</a:t>
+            </a:r>
+          </a:p>
+          <a:p xmlns:a="http://schemas.openxmlformats.org/drawingml/2006/main">
+            <a:r>
               <a:t>- https://www150.statcan.gc.ca/t1/tbl1/en/tv.action?pid=2010007101</a:t>
             </a:r>
           </a:p>
@@ -1854,6 +1924,16 @@
           </a:p>
           <a:p xmlns:a="http://schemas.openxmlformats.org/drawingml/2006/main">
             <a:r>
+              <a:t>- https://www.health.govt.nz/regulation-legislation/vaping-herbal-smoking-and-smokeless-tobacco/requirements/complete-a-notifiable-product-annual-return</a:t>
+            </a:r>
+          </a:p>
+          <a:p xmlns:a="http://schemas.openxmlformats.org/drawingml/2006/main">
+            <a:r>
+              <a:t>- https://www.health.govt.nz/system/files/2024-12/2024-annual-returns-user-guide.pdf</a:t>
+            </a:r>
+          </a:p>
+          <a:p xmlns:a="http://schemas.openxmlformats.org/drawingml/2006/main">
+            <a:r>
               <a:t>- https://www150.statcan.gc.ca/t1/tbl1/en/tv.action?pid=2010007101</a:t>
             </a:r>
           </a:p>
@@ -2044,6 +2124,16 @@
           </a:p>
           <a:p xmlns:a="http://schemas.openxmlformats.org/drawingml/2006/main">
             <a:r>
+              <a:t>- https://www.health.govt.nz/regulation-legislation/vaping-herbal-smoking-and-smokeless-tobacco/requirements/complete-a-notifiable-product-annual-return</a:t>
+            </a:r>
+          </a:p>
+          <a:p xmlns:a="http://schemas.openxmlformats.org/drawingml/2006/main">
+            <a:r>
+              <a:t>- https://www.health.govt.nz/system/files/2024-12/2024-annual-returns-user-guide.pdf</a:t>
+            </a:r>
+          </a:p>
+          <a:p xmlns:a="http://schemas.openxmlformats.org/drawingml/2006/main">
+            <a:r>
               <a:t>- https://www150.statcan.gc.ca/t1/tbl1/en/tv.action?pid=2010007101</a:t>
             </a:r>
           </a:p>
@@ -2234,6 +2324,16 @@
           </a:p>
           <a:p xmlns:a="http://schemas.openxmlformats.org/drawingml/2006/main">
             <a:r>
+              <a:t>- https://www.health.govt.nz/regulation-legislation/vaping-herbal-smoking-and-smokeless-tobacco/requirements/complete-a-notifiable-product-annual-return</a:t>
+            </a:r>
+          </a:p>
+          <a:p xmlns:a="http://schemas.openxmlformats.org/drawingml/2006/main">
+            <a:r>
+              <a:t>- https://www.health.govt.nz/system/files/2024-12/2024-annual-returns-user-guide.pdf</a:t>
+            </a:r>
+          </a:p>
+          <a:p xmlns:a="http://schemas.openxmlformats.org/drawingml/2006/main">
+            <a:r>
               <a:t>- https://www150.statcan.gc.ca/t1/tbl1/en/tv.action?pid=2010007101</a:t>
             </a:r>
           </a:p>
@@ -2424,6 +2524,16 @@
           </a:p>
           <a:p xmlns:a="http://schemas.openxmlformats.org/drawingml/2006/main">
             <a:r>
+              <a:t>- https://www.health.govt.nz/regulation-legislation/vaping-herbal-smoking-and-smokeless-tobacco/requirements/complete-a-notifiable-product-annual-return</a:t>
+            </a:r>
+          </a:p>
+          <a:p xmlns:a="http://schemas.openxmlformats.org/drawingml/2006/main">
+            <a:r>
+              <a:t>- https://www.health.govt.nz/system/files/2024-12/2024-annual-returns-user-guide.pdf</a:t>
+            </a:r>
+          </a:p>
+          <a:p xmlns:a="http://schemas.openxmlformats.org/drawingml/2006/main">
+            <a:r>
               <a:t>- https://www150.statcan.gc.ca/t1/tbl1/en/tv.action?pid=2010007101</a:t>
             </a:r>
           </a:p>
@@ -2614,6 +2724,16 @@
           </a:p>
           <a:p xmlns:a="http://schemas.openxmlformats.org/drawingml/2006/main">
             <a:r>
+              <a:t>- https://www.health.govt.nz/regulation-legislation/vaping-herbal-smoking-and-smokeless-tobacco/requirements/complete-a-notifiable-product-annual-return</a:t>
+            </a:r>
+          </a:p>
+          <a:p xmlns:a="http://schemas.openxmlformats.org/drawingml/2006/main">
+            <a:r>
+              <a:t>- https://www.health.govt.nz/system/files/2024-12/2024-annual-returns-user-guide.pdf</a:t>
+            </a:r>
+          </a:p>
+          <a:p xmlns:a="http://schemas.openxmlformats.org/drawingml/2006/main">
+            <a:r>
               <a:t>- https://www150.statcan.gc.ca/t1/tbl1/en/tv.action?pid=2010007101</a:t>
             </a:r>
           </a:p>
@@ -2804,6 +2924,16 @@
           </a:p>
           <a:p xmlns:a="http://schemas.openxmlformats.org/drawingml/2006/main">
             <a:r>
+              <a:t>- https://www.health.govt.nz/regulation-legislation/vaping-herbal-smoking-and-smokeless-tobacco/requirements/complete-a-notifiable-product-annual-return</a:t>
+            </a:r>
+          </a:p>
+          <a:p xmlns:a="http://schemas.openxmlformats.org/drawingml/2006/main">
+            <a:r>
+              <a:t>- https://www.health.govt.nz/system/files/2024-12/2024-annual-returns-user-guide.pdf</a:t>
+            </a:r>
+          </a:p>
+          <a:p xmlns:a="http://schemas.openxmlformats.org/drawingml/2006/main">
+            <a:r>
               <a:t>- https://www150.statcan.gc.ca/t1/tbl1/en/tv.action?pid=2010007101</a:t>
             </a:r>
           </a:p>
@@ -2994,6 +3124,16 @@
           </a:p>
           <a:p xmlns:a="http://schemas.openxmlformats.org/drawingml/2006/main">
             <a:r>
+              <a:t>- https://www.health.govt.nz/regulation-legislation/vaping-herbal-smoking-and-smokeless-tobacco/requirements/complete-a-notifiable-product-annual-return</a:t>
+            </a:r>
+          </a:p>
+          <a:p xmlns:a="http://schemas.openxmlformats.org/drawingml/2006/main">
+            <a:r>
+              <a:t>- https://www.health.govt.nz/system/files/2024-12/2024-annual-returns-user-guide.pdf</a:t>
+            </a:r>
+          </a:p>
+          <a:p xmlns:a="http://schemas.openxmlformats.org/drawingml/2006/main">
+            <a:r>
               <a:t>- https://www150.statcan.gc.ca/t1/tbl1/en/tv.action?pid=2010007101</a:t>
             </a:r>
           </a:p>
@@ -3184,6 +3324,16 @@
           </a:p>
           <a:p xmlns:a="http://schemas.openxmlformats.org/drawingml/2006/main">
             <a:r>
+              <a:t>- https://www.health.govt.nz/regulation-legislation/vaping-herbal-smoking-and-smokeless-tobacco/requirements/complete-a-notifiable-product-annual-return</a:t>
+            </a:r>
+          </a:p>
+          <a:p xmlns:a="http://schemas.openxmlformats.org/drawingml/2006/main">
+            <a:r>
+              <a:t>- https://www.health.govt.nz/system/files/2024-12/2024-annual-returns-user-guide.pdf</a:t>
+            </a:r>
+          </a:p>
+          <a:p xmlns:a="http://schemas.openxmlformats.org/drawingml/2006/main">
+            <a:r>
               <a:t>- https://www150.statcan.gc.ca/t1/tbl1/en/tv.action?pid=2010007101</a:t>
             </a:r>
           </a:p>
@@ -3374,6 +3524,16 @@
           </a:p>
           <a:p xmlns:a="http://schemas.openxmlformats.org/drawingml/2006/main">
             <a:r>
+              <a:t>- https://www.health.govt.nz/regulation-legislation/vaping-herbal-smoking-and-smokeless-tobacco/requirements/complete-a-notifiable-product-annual-return</a:t>
+            </a:r>
+          </a:p>
+          <a:p xmlns:a="http://schemas.openxmlformats.org/drawingml/2006/main">
+            <a:r>
+              <a:t>- https://www.health.govt.nz/system/files/2024-12/2024-annual-returns-user-guide.pdf</a:t>
+            </a:r>
+          </a:p>
+          <a:p xmlns:a="http://schemas.openxmlformats.org/drawingml/2006/main">
+            <a:r>
               <a:t>- https://www150.statcan.gc.ca/t1/tbl1/en/tv.action?pid=2010007101</a:t>
             </a:r>
           </a:p>
@@ -3564,6 +3724,16 @@
           </a:p>
           <a:p xmlns:a="http://schemas.openxmlformats.org/drawingml/2006/main">
             <a:r>
+              <a:t>- https://www.health.govt.nz/regulation-legislation/vaping-herbal-smoking-and-smokeless-tobacco/requirements/complete-a-notifiable-product-annual-return</a:t>
+            </a:r>
+          </a:p>
+          <a:p xmlns:a="http://schemas.openxmlformats.org/drawingml/2006/main">
+            <a:r>
+              <a:t>- https://www.health.govt.nz/system/files/2024-12/2024-annual-returns-user-guide.pdf</a:t>
+            </a:r>
+          </a:p>
+          <a:p xmlns:a="http://schemas.openxmlformats.org/drawingml/2006/main">
+            <a:r>
               <a:t>- https://www150.statcan.gc.ca/t1/tbl1/en/tv.action?pid=2010007101</a:t>
             </a:r>
           </a:p>
@@ -3754,6 +3924,16 @@
           </a:p>
           <a:p xmlns:a="http://schemas.openxmlformats.org/drawingml/2006/main">
             <a:r>
+              <a:t>- https://www.health.govt.nz/regulation-legislation/vaping-herbal-smoking-and-smokeless-tobacco/requirements/complete-a-notifiable-product-annual-return</a:t>
+            </a:r>
+          </a:p>
+          <a:p xmlns:a="http://schemas.openxmlformats.org/drawingml/2006/main">
+            <a:r>
+              <a:t>- https://www.health.govt.nz/system/files/2024-12/2024-annual-returns-user-guide.pdf</a:t>
+            </a:r>
+          </a:p>
+          <a:p xmlns:a="http://schemas.openxmlformats.org/drawingml/2006/main">
+            <a:r>
               <a:t>- https://www150.statcan.gc.ca/t1/tbl1/en/tv.action?pid=2010007101</a:t>
             </a:r>
           </a:p>
@@ -3944,6 +4124,16 @@
           </a:p>
           <a:p xmlns:a="http://schemas.openxmlformats.org/drawingml/2006/main">
             <a:r>
+              <a:t>- https://www.health.govt.nz/regulation-legislation/vaping-herbal-smoking-and-smokeless-tobacco/requirements/complete-a-notifiable-product-annual-return</a:t>
+            </a:r>
+          </a:p>
+          <a:p xmlns:a="http://schemas.openxmlformats.org/drawingml/2006/main">
+            <a:r>
+              <a:t>- https://www.health.govt.nz/system/files/2024-12/2024-annual-returns-user-guide.pdf</a:t>
+            </a:r>
+          </a:p>
+          <a:p xmlns:a="http://schemas.openxmlformats.org/drawingml/2006/main">
+            <a:r>
               <a:t>- https://www150.statcan.gc.ca/t1/tbl1/en/tv.action?pid=2010007101</a:t>
             </a:r>
           </a:p>
@@ -4134,6 +4324,16 @@
           </a:p>
           <a:p xmlns:a="http://schemas.openxmlformats.org/drawingml/2006/main">
             <a:r>
+              <a:t>- https://www.health.govt.nz/regulation-legislation/vaping-herbal-smoking-and-smokeless-tobacco/requirements/complete-a-notifiable-product-annual-return</a:t>
+            </a:r>
+          </a:p>
+          <a:p xmlns:a="http://schemas.openxmlformats.org/drawingml/2006/main">
+            <a:r>
+              <a:t>- https://www.health.govt.nz/system/files/2024-12/2024-annual-returns-user-guide.pdf</a:t>
+            </a:r>
+          </a:p>
+          <a:p xmlns:a="http://schemas.openxmlformats.org/drawingml/2006/main">
+            <a:r>
               <a:t>- https://www150.statcan.gc.ca/t1/tbl1/en/tv.action?pid=2010007101</a:t>
             </a:r>
           </a:p>
@@ -4324,6 +4524,16 @@
           </a:p>
           <a:p xmlns:a="http://schemas.openxmlformats.org/drawingml/2006/main">
             <a:r>
+              <a:t>- https://www.health.govt.nz/regulation-legislation/vaping-herbal-smoking-and-smokeless-tobacco/requirements/complete-a-notifiable-product-annual-return</a:t>
+            </a:r>
+          </a:p>
+          <a:p xmlns:a="http://schemas.openxmlformats.org/drawingml/2006/main">
+            <a:r>
+              <a:t>- https://www.health.govt.nz/system/files/2024-12/2024-annual-returns-user-guide.pdf</a:t>
+            </a:r>
+          </a:p>
+          <a:p xmlns:a="http://schemas.openxmlformats.org/drawingml/2006/main">
+            <a:r>
               <a:t>- https://www150.statcan.gc.ca/t1/tbl1/en/tv.action?pid=2010007101</a:t>
             </a:r>
           </a:p>
@@ -4514,6 +4724,16 @@
           </a:p>
           <a:p xmlns:a="http://schemas.openxmlformats.org/drawingml/2006/main">
             <a:r>
+              <a:t>- https://www.health.govt.nz/regulation-legislation/vaping-herbal-smoking-and-smokeless-tobacco/requirements/complete-a-notifiable-product-annual-return</a:t>
+            </a:r>
+          </a:p>
+          <a:p xmlns:a="http://schemas.openxmlformats.org/drawingml/2006/main">
+            <a:r>
+              <a:t>- https://www.health.govt.nz/system/files/2024-12/2024-annual-returns-user-guide.pdf</a:t>
+            </a:r>
+          </a:p>
+          <a:p xmlns:a="http://schemas.openxmlformats.org/drawingml/2006/main">
+            <a:r>
               <a:t>- https://www150.statcan.gc.ca/t1/tbl1/en/tv.action?pid=2010007101</a:t>
             </a:r>
           </a:p>
@@ -4704,6 +4924,16 @@
           </a:p>
           <a:p xmlns:a="http://schemas.openxmlformats.org/drawingml/2006/main">
             <a:r>
+              <a:t>- https://www.health.govt.nz/regulation-legislation/vaping-herbal-smoking-and-smokeless-tobacco/requirements/complete-a-notifiable-product-annual-return</a:t>
+            </a:r>
+          </a:p>
+          <a:p xmlns:a="http://schemas.openxmlformats.org/drawingml/2006/main">
+            <a:r>
+              <a:t>- https://www.health.govt.nz/system/files/2024-12/2024-annual-returns-user-guide.pdf</a:t>
+            </a:r>
+          </a:p>
+          <a:p xmlns:a="http://schemas.openxmlformats.org/drawingml/2006/main">
+            <a:r>
               <a:t>- https://www150.statcan.gc.ca/t1/tbl1/en/tv.action?pid=2010007101</a:t>
             </a:r>
           </a:p>
@@ -4894,6 +5124,16 @@
           </a:p>
           <a:p xmlns:a="http://schemas.openxmlformats.org/drawingml/2006/main">
             <a:r>
+              <a:t>- https://www.health.govt.nz/regulation-legislation/vaping-herbal-smoking-and-smokeless-tobacco/requirements/complete-a-notifiable-product-annual-return</a:t>
+            </a:r>
+          </a:p>
+          <a:p xmlns:a="http://schemas.openxmlformats.org/drawingml/2006/main">
+            <a:r>
+              <a:t>- https://www.health.govt.nz/system/files/2024-12/2024-annual-returns-user-guide.pdf</a:t>
+            </a:r>
+          </a:p>
+          <a:p xmlns:a="http://schemas.openxmlformats.org/drawingml/2006/main">
+            <a:r>
               <a:t>- https://www150.statcan.gc.ca/t1/tbl1/en/tv.action?pid=2010007101</a:t>
             </a:r>
           </a:p>
@@ -5084,6 +5324,16 @@
           </a:p>
           <a:p xmlns:a="http://schemas.openxmlformats.org/drawingml/2006/main">
             <a:r>
+              <a:t>- https://www.health.govt.nz/regulation-legislation/vaping-herbal-smoking-and-smokeless-tobacco/requirements/complete-a-notifiable-product-annual-return</a:t>
+            </a:r>
+          </a:p>
+          <a:p xmlns:a="http://schemas.openxmlformats.org/drawingml/2006/main">
+            <a:r>
+              <a:t>- https://www.health.govt.nz/system/files/2024-12/2024-annual-returns-user-guide.pdf</a:t>
+            </a:r>
+          </a:p>
+          <a:p xmlns:a="http://schemas.openxmlformats.org/drawingml/2006/main">
+            <a:r>
               <a:t>- https://www150.statcan.gc.ca/t1/tbl1/en/tv.action?pid=2010007101</a:t>
             </a:r>
           </a:p>
@@ -5274,6 +5524,16 @@
           </a:p>
           <a:p xmlns:a="http://schemas.openxmlformats.org/drawingml/2006/main">
             <a:r>
+              <a:t>- https://www.health.govt.nz/regulation-legislation/vaping-herbal-smoking-and-smokeless-tobacco/requirements/complete-a-notifiable-product-annual-return</a:t>
+            </a:r>
+          </a:p>
+          <a:p xmlns:a="http://schemas.openxmlformats.org/drawingml/2006/main">
+            <a:r>
+              <a:t>- https://www.health.govt.nz/system/files/2024-12/2024-annual-returns-user-guide.pdf</a:t>
+            </a:r>
+          </a:p>
+          <a:p xmlns:a="http://schemas.openxmlformats.org/drawingml/2006/main">
+            <a:r>
               <a:t>- https://www150.statcan.gc.ca/t1/tbl1/en/tv.action?pid=2010007101</a:t>
             </a:r>
           </a:p>
@@ -5464,6 +5724,16 @@
           </a:p>
           <a:p xmlns:a="http://schemas.openxmlformats.org/drawingml/2006/main">
             <a:r>
+              <a:t>- https://www.health.govt.nz/regulation-legislation/vaping-herbal-smoking-and-smokeless-tobacco/requirements/complete-a-notifiable-product-annual-return</a:t>
+            </a:r>
+          </a:p>
+          <a:p xmlns:a="http://schemas.openxmlformats.org/drawingml/2006/main">
+            <a:r>
+              <a:t>- https://www.health.govt.nz/system/files/2024-12/2024-annual-returns-user-guide.pdf</a:t>
+            </a:r>
+          </a:p>
+          <a:p xmlns:a="http://schemas.openxmlformats.org/drawingml/2006/main">
+            <a:r>
               <a:t>- https://www150.statcan.gc.ca/t1/tbl1/en/tv.action?pid=2010007101</a:t>
             </a:r>
           </a:p>
@@ -5654,6 +5924,16 @@
           </a:p>
           <a:p xmlns:a="http://schemas.openxmlformats.org/drawingml/2006/main">
             <a:r>
+              <a:t>- https://www.health.govt.nz/regulation-legislation/vaping-herbal-smoking-and-smokeless-tobacco/requirements/complete-a-notifiable-product-annual-return</a:t>
+            </a:r>
+          </a:p>
+          <a:p xmlns:a="http://schemas.openxmlformats.org/drawingml/2006/main">
+            <a:r>
+              <a:t>- https://www.health.govt.nz/system/files/2024-12/2024-annual-returns-user-guide.pdf</a:t>
+            </a:r>
+          </a:p>
+          <a:p xmlns:a="http://schemas.openxmlformats.org/drawingml/2006/main">
+            <a:r>
               <a:t>- https://www150.statcan.gc.ca/t1/tbl1/en/tv.action?pid=2010007101</a:t>
             </a:r>
           </a:p>
@@ -5844,6 +6124,16 @@
           </a:p>
           <a:p xmlns:a="http://schemas.openxmlformats.org/drawingml/2006/main">
             <a:r>
+              <a:t>- https://www.health.govt.nz/regulation-legislation/vaping-herbal-smoking-and-smokeless-tobacco/requirements/complete-a-notifiable-product-annual-return</a:t>
+            </a:r>
+          </a:p>
+          <a:p xmlns:a="http://schemas.openxmlformats.org/drawingml/2006/main">
+            <a:r>
+              <a:t>- https://www.health.govt.nz/system/files/2024-12/2024-annual-returns-user-guide.pdf</a:t>
+            </a:r>
+          </a:p>
+          <a:p xmlns:a="http://schemas.openxmlformats.org/drawingml/2006/main">
+            <a:r>
               <a:t>- https://www150.statcan.gc.ca/t1/tbl1/en/tv.action?pid=2010007101</a:t>
             </a:r>
           </a:p>
@@ -6034,6 +6324,16 @@
           </a:p>
           <a:p xmlns:a="http://schemas.openxmlformats.org/drawingml/2006/main">
             <a:r>
+              <a:t>- https://www.health.govt.nz/regulation-legislation/vaping-herbal-smoking-and-smokeless-tobacco/requirements/complete-a-notifiable-product-annual-return</a:t>
+            </a:r>
+          </a:p>
+          <a:p xmlns:a="http://schemas.openxmlformats.org/drawingml/2006/main">
+            <a:r>
+              <a:t>- https://www.health.govt.nz/system/files/2024-12/2024-annual-returns-user-guide.pdf</a:t>
+            </a:r>
+          </a:p>
+          <a:p xmlns:a="http://schemas.openxmlformats.org/drawingml/2006/main">
+            <a:r>
               <a:t>- https://www150.statcan.gc.ca/t1/tbl1/en/tv.action?pid=2010007101</a:t>
             </a:r>
           </a:p>
@@ -6171,7 +6471,7 @@
           <p:cNvPr id="2" name="Title 1">
             <a:extLst xmlns:a="http://schemas.openxmlformats.org/drawingml/2006/main">
               <a:ext uri="{FF2B5EF4-FFF2-40B4-BE49-F238E27FC236}">
-                <a16:creationId xmlns:a16="http://schemas.microsoft.com/office/drawing/2014/main" id="{E32C8C1A-C84B-47D1-A6C5-732A0B89BDD0}"/>
+                <a16:creationId xmlns:a16="http://schemas.microsoft.com/office/drawing/2014/main" id="{DDF2D9F3-0EA0-4D18-87A4-273077F9B3CD}"/>
               </a:ext>
             </a:extLst>
           </p:cNvPr>
@@ -6203,7 +6503,7 @@
           <p:cNvPr id="3" name="Subtitle 2">
             <a:extLst xmlns:a="http://schemas.openxmlformats.org/drawingml/2006/main">
               <a:ext uri="{FF2B5EF4-FFF2-40B4-BE49-F238E27FC236}">
-                <a16:creationId xmlns:a16="http://schemas.microsoft.com/office/drawing/2014/main" id="{239EFFCE-8986-45A3-881A-48CF3E4F0445}"/>
+                <a16:creationId xmlns:a16="http://schemas.microsoft.com/office/drawing/2014/main" id="{36FD930C-94A3-4B0C-B7FE-63A2F53DBBB6}"/>
               </a:ext>
             </a:extLst>
           </p:cNvPr>
@@ -6326,7 +6626,7 @@
           <p:cNvPr id="4" name="Date Placeholder 3">
             <a:extLst xmlns:a="http://schemas.openxmlformats.org/drawingml/2006/main">
               <a:ext uri="{FF2B5EF4-FFF2-40B4-BE49-F238E27FC236}">
-                <a16:creationId xmlns:a16="http://schemas.microsoft.com/office/drawing/2014/main" id="{A3CA2507-0049-4667-8DA1-2869DB02957D}"/>
+                <a16:creationId xmlns:a16="http://schemas.microsoft.com/office/drawing/2014/main" id="{0A94D750-3D8B-4269-B80F-74CFFB70DF4F}"/>
               </a:ext>
             </a:extLst>
           </p:cNvPr>
@@ -6353,7 +6653,7 @@
           <p:cNvPr id="5" name="Footer Placeholder 4">
             <a:extLst xmlns:a="http://schemas.openxmlformats.org/drawingml/2006/main">
               <a:ext uri="{FF2B5EF4-FFF2-40B4-BE49-F238E27FC236}">
-                <a16:creationId xmlns:a16="http://schemas.microsoft.com/office/drawing/2014/main" id="{9990D1E9-88DA-4218-B76B-33AC83E3257A}"/>
+                <a16:creationId xmlns:a16="http://schemas.microsoft.com/office/drawing/2014/main" id="{E8537BFC-1B3F-4D81-BB78-025C08F2DECB}"/>
               </a:ext>
             </a:extLst>
           </p:cNvPr>
@@ -6376,7 +6676,7 @@
           <p:cNvPr id="6" name="Slide Number Placeholder 5">
             <a:extLst xmlns:a="http://schemas.openxmlformats.org/drawingml/2006/main">
               <a:ext uri="{FF2B5EF4-FFF2-40B4-BE49-F238E27FC236}">
-                <a16:creationId xmlns:a16="http://schemas.microsoft.com/office/drawing/2014/main" id="{D0496438-B412-40FD-B7EC-2CA3101EE162}"/>
+                <a16:creationId xmlns:a16="http://schemas.microsoft.com/office/drawing/2014/main" id="{947423BE-57ED-4895-A4CB-52FD4C9C81BD}"/>
               </a:ext>
             </a:extLst>
           </p:cNvPr>
@@ -6420,7 +6720,7 @@
           <p:cNvPr id="2" name="Title 1">
             <a:extLst xmlns:a="http://schemas.openxmlformats.org/drawingml/2006/main">
               <a:ext uri="{FF2B5EF4-FFF2-40B4-BE49-F238E27FC236}">
-                <a16:creationId xmlns:a16="http://schemas.microsoft.com/office/drawing/2014/main" id="{3A52105C-056D-4289-9EC9-FA4FD2969CD5}"/>
+                <a16:creationId xmlns:a16="http://schemas.microsoft.com/office/drawing/2014/main" id="{9F85137C-23CE-40D0-A025-5B46CE63370F}"/>
               </a:ext>
             </a:extLst>
           </p:cNvPr>
@@ -6447,7 +6747,7 @@
           <p:cNvPr id="3" name="Vertical Text Placeholder 2">
             <a:extLst xmlns:a="http://schemas.openxmlformats.org/drawingml/2006/main">
               <a:ext uri="{FF2B5EF4-FFF2-40B4-BE49-F238E27FC236}">
-                <a16:creationId xmlns:a16="http://schemas.microsoft.com/office/drawing/2014/main" id="{0348E3C2-35E4-4D38-80B7-93C964DE6049}"/>
+                <a16:creationId xmlns:a16="http://schemas.microsoft.com/office/drawing/2014/main" id="{F1A98B34-0528-4E9D-8530-9B6E73A069C7}"/>
               </a:ext>
             </a:extLst>
           </p:cNvPr>
@@ -6509,7 +6809,7 @@
           <p:cNvPr id="4" name="Date Placeholder 3">
             <a:extLst xmlns:a="http://schemas.openxmlformats.org/drawingml/2006/main">
               <a:ext uri="{FF2B5EF4-FFF2-40B4-BE49-F238E27FC236}">
-                <a16:creationId xmlns:a16="http://schemas.microsoft.com/office/drawing/2014/main" id="{B88FC5FB-FDFD-49AE-96BE-C91394070F15}"/>
+                <a16:creationId xmlns:a16="http://schemas.microsoft.com/office/drawing/2014/main" id="{C331FAD5-9ECE-4380-BF3A-C60D78B1BE6C}"/>
               </a:ext>
             </a:extLst>
           </p:cNvPr>
@@ -6536,7 +6836,7 @@
           <p:cNvPr id="5" name="Footer Placeholder 4">
             <a:extLst xmlns:a="http://schemas.openxmlformats.org/drawingml/2006/main">
               <a:ext uri="{FF2B5EF4-FFF2-40B4-BE49-F238E27FC236}">
-                <a16:creationId xmlns:a16="http://schemas.microsoft.com/office/drawing/2014/main" id="{0C3A41DC-A6D8-4D05-9B55-A0842A1A45B2}"/>
+                <a16:creationId xmlns:a16="http://schemas.microsoft.com/office/drawing/2014/main" id="{600A23AE-156A-4AB4-BEFE-64A6D2726858}"/>
               </a:ext>
             </a:extLst>
           </p:cNvPr>
@@ -6559,7 +6859,7 @@
           <p:cNvPr id="6" name="Slide Number Placeholder 5">
             <a:extLst xmlns:a="http://schemas.openxmlformats.org/drawingml/2006/main">
               <a:ext uri="{FF2B5EF4-FFF2-40B4-BE49-F238E27FC236}">
-                <a16:creationId xmlns:a16="http://schemas.microsoft.com/office/drawing/2014/main" id="{EBFD9247-B9E8-456A-BBE7-7A5BCA3E98EA}"/>
+                <a16:creationId xmlns:a16="http://schemas.microsoft.com/office/drawing/2014/main" id="{A1F8CEAA-3B67-48B0-ABCF-3C53B1DE00B4}"/>
               </a:ext>
             </a:extLst>
           </p:cNvPr>
@@ -6603,7 +6903,7 @@
           <p:cNvPr id="2" name="Vertical Title 1">
             <a:extLst xmlns:a="http://schemas.openxmlformats.org/drawingml/2006/main">
               <a:ext uri="{FF2B5EF4-FFF2-40B4-BE49-F238E27FC236}">
-                <a16:creationId xmlns:a16="http://schemas.microsoft.com/office/drawing/2014/main" id="{4FA94581-0588-420F-824E-7B8F611919EC}"/>
+                <a16:creationId xmlns:a16="http://schemas.microsoft.com/office/drawing/2014/main" id="{EA27E98E-19C8-4B0C-9039-F24FFE729A59}"/>
               </a:ext>
             </a:extLst>
           </p:cNvPr>
@@ -6635,7 +6935,7 @@
           <p:cNvPr id="3" name="Vertical Text Placeholder 2">
             <a:extLst xmlns:a="http://schemas.openxmlformats.org/drawingml/2006/main">
               <a:ext uri="{FF2B5EF4-FFF2-40B4-BE49-F238E27FC236}">
-                <a16:creationId xmlns:a16="http://schemas.microsoft.com/office/drawing/2014/main" id="{C04CB861-0CA3-4946-9A0C-DDAFD29C6254}"/>
+                <a16:creationId xmlns:a16="http://schemas.microsoft.com/office/drawing/2014/main" id="{795D927A-DBA2-49E9-9F21-777A108C06BA}"/>
               </a:ext>
             </a:extLst>
           </p:cNvPr>
@@ -6702,7 +7002,7 @@
           <p:cNvPr id="4" name="Date Placeholder 3">
             <a:extLst xmlns:a="http://schemas.openxmlformats.org/drawingml/2006/main">
               <a:ext uri="{FF2B5EF4-FFF2-40B4-BE49-F238E27FC236}">
-                <a16:creationId xmlns:a16="http://schemas.microsoft.com/office/drawing/2014/main" id="{E37823B3-383D-4475-811C-607DBD9B8F48}"/>
+                <a16:creationId xmlns:a16="http://schemas.microsoft.com/office/drawing/2014/main" id="{240327E6-1E18-441A-87BD-48FF6D015A14}"/>
               </a:ext>
             </a:extLst>
           </p:cNvPr>
@@ -6729,7 +7029,7 @@
           <p:cNvPr id="5" name="Footer Placeholder 4">
             <a:extLst xmlns:a="http://schemas.openxmlformats.org/drawingml/2006/main">
               <a:ext uri="{FF2B5EF4-FFF2-40B4-BE49-F238E27FC236}">
-                <a16:creationId xmlns:a16="http://schemas.microsoft.com/office/drawing/2014/main" id="{47554406-DAF3-4D6C-BA19-F7172DAB4D7E}"/>
+                <a16:creationId xmlns:a16="http://schemas.microsoft.com/office/drawing/2014/main" id="{1A52EF65-E59D-495C-BF32-23C7456FE613}"/>
               </a:ext>
             </a:extLst>
           </p:cNvPr>
@@ -6752,7 +7052,7 @@
           <p:cNvPr id="6" name="Slide Number Placeholder 5">
             <a:extLst xmlns:a="http://schemas.openxmlformats.org/drawingml/2006/main">
               <a:ext uri="{FF2B5EF4-FFF2-40B4-BE49-F238E27FC236}">
-                <a16:creationId xmlns:a16="http://schemas.microsoft.com/office/drawing/2014/main" id="{44CD0DF0-2BCF-4D3B-A2D6-BBCDB863E222}"/>
+                <a16:creationId xmlns:a16="http://schemas.microsoft.com/office/drawing/2014/main" id="{F6E60B34-6625-497D-ABE2-E1554019F790}"/>
               </a:ext>
             </a:extLst>
           </p:cNvPr>
@@ -6796,7 +7096,7 @@
           <p:cNvPr id="2" name="Title 1">
             <a:extLst xmlns:a="http://schemas.openxmlformats.org/drawingml/2006/main">
               <a:ext uri="{FF2B5EF4-FFF2-40B4-BE49-F238E27FC236}">
-                <a16:creationId xmlns:a16="http://schemas.microsoft.com/office/drawing/2014/main" id="{5EFDC888-B25D-4572-A707-9A18307713B7}"/>
+                <a16:creationId xmlns:a16="http://schemas.microsoft.com/office/drawing/2014/main" id="{76F0C7D6-E70A-462D-968C-3428B4749176}"/>
               </a:ext>
             </a:extLst>
           </p:cNvPr>
@@ -6823,7 +7123,7 @@
           <p:cNvPr id="3" name="Content Placeholder 2">
             <a:extLst xmlns:a="http://schemas.openxmlformats.org/drawingml/2006/main">
               <a:ext uri="{FF2B5EF4-FFF2-40B4-BE49-F238E27FC236}">
-                <a16:creationId xmlns:a16="http://schemas.microsoft.com/office/drawing/2014/main" id="{821A4A95-00EA-4DA8-9ACB-1030E6C45AC2}"/>
+                <a16:creationId xmlns:a16="http://schemas.microsoft.com/office/drawing/2014/main" id="{C559F899-5152-4BCA-9C3A-5E10B66CDFAC}"/>
               </a:ext>
             </a:extLst>
           </p:cNvPr>
@@ -6885,7 +7185,7 @@
           <p:cNvPr id="4" name="Date Placeholder 3">
             <a:extLst xmlns:a="http://schemas.openxmlformats.org/drawingml/2006/main">
               <a:ext uri="{FF2B5EF4-FFF2-40B4-BE49-F238E27FC236}">
-                <a16:creationId xmlns:a16="http://schemas.microsoft.com/office/drawing/2014/main" id="{3C937C25-4088-4086-8E6C-B8390BD61792}"/>
+                <a16:creationId xmlns:a16="http://schemas.microsoft.com/office/drawing/2014/main" id="{9AD7ABAD-3D0B-4AE6-B47F-6A8EEF204EE9}"/>
               </a:ext>
             </a:extLst>
           </p:cNvPr>
@@ -6912,7 +7212,7 @@
           <p:cNvPr id="5" name="Footer Placeholder 4">
             <a:extLst xmlns:a="http://schemas.openxmlformats.org/drawingml/2006/main">
               <a:ext uri="{FF2B5EF4-FFF2-40B4-BE49-F238E27FC236}">
-                <a16:creationId xmlns:a16="http://schemas.microsoft.com/office/drawing/2014/main" id="{13DB1AC7-E1F0-4734-861F-085E68963BA7}"/>
+                <a16:creationId xmlns:a16="http://schemas.microsoft.com/office/drawing/2014/main" id="{22AA49B5-CFDD-45BF-94BB-061458C7392D}"/>
               </a:ext>
             </a:extLst>
           </p:cNvPr>
@@ -6935,7 +7235,7 @@
           <p:cNvPr id="6" name="Slide Number Placeholder 5">
             <a:extLst xmlns:a="http://schemas.openxmlformats.org/drawingml/2006/main">
               <a:ext uri="{FF2B5EF4-FFF2-40B4-BE49-F238E27FC236}">
-                <a16:creationId xmlns:a16="http://schemas.microsoft.com/office/drawing/2014/main" id="{50967485-53F3-42EE-BE13-01294EEE7AC4}"/>
+                <a16:creationId xmlns:a16="http://schemas.microsoft.com/office/drawing/2014/main" id="{F66A3FB3-8349-4A0B-9412-ADCACABB9755}"/>
               </a:ext>
             </a:extLst>
           </p:cNvPr>
@@ -6979,7 +7279,7 @@
           <p:cNvPr id="2" name="Title 1">
             <a:extLst xmlns:a="http://schemas.openxmlformats.org/drawingml/2006/main">
               <a:ext uri="{FF2B5EF4-FFF2-40B4-BE49-F238E27FC236}">
-                <a16:creationId xmlns:a16="http://schemas.microsoft.com/office/drawing/2014/main" id="{442EBEE6-9D34-4941-B8AE-6ED0BC453FDA}"/>
+                <a16:creationId xmlns:a16="http://schemas.microsoft.com/office/drawing/2014/main" id="{8BA1856A-B497-4AE5-BA76-2EB7C3F3C07C}"/>
               </a:ext>
             </a:extLst>
           </p:cNvPr>
@@ -7016,7 +7316,7 @@
           <p:cNvPr id="3" name="Text Placeholder 2">
             <a:extLst xmlns:a="http://schemas.openxmlformats.org/drawingml/2006/main">
               <a:ext uri="{FF2B5EF4-FFF2-40B4-BE49-F238E27FC236}">
-                <a16:creationId xmlns:a16="http://schemas.microsoft.com/office/drawing/2014/main" id="{B655BB64-A638-4D7D-B1B8-B5CA2E942F67}"/>
+                <a16:creationId xmlns:a16="http://schemas.microsoft.com/office/drawing/2014/main" id="{8B3B6B11-841F-4FC1-AB12-BA2382A5827F}"/>
               </a:ext>
             </a:extLst>
           </p:cNvPr>
@@ -7142,7 +7442,7 @@
           <p:cNvPr id="4" name="Date Placeholder 3">
             <a:extLst xmlns:a="http://schemas.openxmlformats.org/drawingml/2006/main">
               <a:ext uri="{FF2B5EF4-FFF2-40B4-BE49-F238E27FC236}">
-                <a16:creationId xmlns:a16="http://schemas.microsoft.com/office/drawing/2014/main" id="{77ADB818-474E-4DD0-8708-6E23D0D1734E}"/>
+                <a16:creationId xmlns:a16="http://schemas.microsoft.com/office/drawing/2014/main" id="{36AFB6C7-7058-4AEF-93B1-32DC1A3FD301}"/>
               </a:ext>
             </a:extLst>
           </p:cNvPr>
@@ -7169,7 +7469,7 @@
           <p:cNvPr id="5" name="Footer Placeholder 4">
             <a:extLst xmlns:a="http://schemas.openxmlformats.org/drawingml/2006/main">
               <a:ext uri="{FF2B5EF4-FFF2-40B4-BE49-F238E27FC236}">
-                <a16:creationId xmlns:a16="http://schemas.microsoft.com/office/drawing/2014/main" id="{154B9087-9680-4A8E-9E57-145B81D4C8EE}"/>
+                <a16:creationId xmlns:a16="http://schemas.microsoft.com/office/drawing/2014/main" id="{2CABDB87-4A11-4AFA-819E-6575D78495C1}"/>
               </a:ext>
             </a:extLst>
           </p:cNvPr>
@@ -7192,7 +7492,7 @@
           <p:cNvPr id="6" name="Slide Number Placeholder 5">
             <a:extLst xmlns:a="http://schemas.openxmlformats.org/drawingml/2006/main">
               <a:ext uri="{FF2B5EF4-FFF2-40B4-BE49-F238E27FC236}">
-                <a16:creationId xmlns:a16="http://schemas.microsoft.com/office/drawing/2014/main" id="{2E334050-D002-4B48-9881-8E8CF3E0DDFB}"/>
+                <a16:creationId xmlns:a16="http://schemas.microsoft.com/office/drawing/2014/main" id="{54BD0E92-7E6E-48C7-9917-6E63BF280735}"/>
               </a:ext>
             </a:extLst>
           </p:cNvPr>
@@ -7236,7 +7536,7 @@
           <p:cNvPr id="2" name="Title 1">
             <a:extLst xmlns:a="http://schemas.openxmlformats.org/drawingml/2006/main">
               <a:ext uri="{FF2B5EF4-FFF2-40B4-BE49-F238E27FC236}">
-                <a16:creationId xmlns:a16="http://schemas.microsoft.com/office/drawing/2014/main" id="{02E3717C-A3DC-4F09-9A46-E13BBA6047C1}"/>
+                <a16:creationId xmlns:a16="http://schemas.microsoft.com/office/drawing/2014/main" id="{302D0DCF-2740-41F1-908D-8FF1F29360BE}"/>
               </a:ext>
             </a:extLst>
           </p:cNvPr>
@@ -7263,7 +7563,7 @@
           <p:cNvPr id="3" name="Content Placeholder 2">
             <a:extLst xmlns:a="http://schemas.openxmlformats.org/drawingml/2006/main">
               <a:ext uri="{FF2B5EF4-FFF2-40B4-BE49-F238E27FC236}">
-                <a16:creationId xmlns:a16="http://schemas.microsoft.com/office/drawing/2014/main" id="{876B108A-5001-4616-B974-15B2BB644DA5}"/>
+                <a16:creationId xmlns:a16="http://schemas.microsoft.com/office/drawing/2014/main" id="{46559AF4-9432-4D8F-9D8F-087F9F08C472}"/>
               </a:ext>
             </a:extLst>
           </p:cNvPr>
@@ -7367,7 +7667,7 @@
           <p:cNvPr id="4" name="Content Placeholder 3">
             <a:extLst xmlns:a="http://schemas.openxmlformats.org/drawingml/2006/main">
               <a:ext uri="{FF2B5EF4-FFF2-40B4-BE49-F238E27FC236}">
-                <a16:creationId xmlns:a16="http://schemas.microsoft.com/office/drawing/2014/main" id="{EB3304C6-F295-42AC-B049-F250ECBB414B}"/>
+                <a16:creationId xmlns:a16="http://schemas.microsoft.com/office/drawing/2014/main" id="{6A0EDC06-1B50-4447-917A-8A192B2FDA58}"/>
               </a:ext>
             </a:extLst>
           </p:cNvPr>
@@ -7471,7 +7771,7 @@
           <p:cNvPr id="5" name="Date Placeholder 4">
             <a:extLst xmlns:a="http://schemas.openxmlformats.org/drawingml/2006/main">
               <a:ext uri="{FF2B5EF4-FFF2-40B4-BE49-F238E27FC236}">
-                <a16:creationId xmlns:a16="http://schemas.microsoft.com/office/drawing/2014/main" id="{3CAE1EBF-7B5E-427F-AD22-1A3AB0EBE975}"/>
+                <a16:creationId xmlns:a16="http://schemas.microsoft.com/office/drawing/2014/main" id="{B0D51B8A-8085-4767-96D1-B0B62B6EF48B}"/>
               </a:ext>
             </a:extLst>
           </p:cNvPr>
@@ -7498,7 +7798,7 @@
           <p:cNvPr id="6" name="Footer Placeholder 5">
             <a:extLst xmlns:a="http://schemas.openxmlformats.org/drawingml/2006/main">
               <a:ext uri="{FF2B5EF4-FFF2-40B4-BE49-F238E27FC236}">
-                <a16:creationId xmlns:a16="http://schemas.microsoft.com/office/drawing/2014/main" id="{EFDB5ADC-C317-4086-981A-09764BDA5CAD}"/>
+                <a16:creationId xmlns:a16="http://schemas.microsoft.com/office/drawing/2014/main" id="{98290C23-362A-4477-8765-03B9CA906992}"/>
               </a:ext>
             </a:extLst>
           </p:cNvPr>
@@ -7521,7 +7821,7 @@
           <p:cNvPr id="7" name="Slide Number Placeholder 6">
             <a:extLst xmlns:a="http://schemas.openxmlformats.org/drawingml/2006/main">
               <a:ext uri="{FF2B5EF4-FFF2-40B4-BE49-F238E27FC236}">
-                <a16:creationId xmlns:a16="http://schemas.microsoft.com/office/drawing/2014/main" id="{975F2662-F97C-4BFE-8551-0445137DECEB}"/>
+                <a16:creationId xmlns:a16="http://schemas.microsoft.com/office/drawing/2014/main" id="{59117F96-B078-4CCC-834A-2A3F9A878965}"/>
               </a:ext>
             </a:extLst>
           </p:cNvPr>
@@ -7565,7 +7865,7 @@
           <p:cNvPr id="2" name="Title 1">
             <a:extLst xmlns:a="http://schemas.openxmlformats.org/drawingml/2006/main">
               <a:ext uri="{FF2B5EF4-FFF2-40B4-BE49-F238E27FC236}">
-                <a16:creationId xmlns:a16="http://schemas.microsoft.com/office/drawing/2014/main" id="{1C095B21-F6CC-41AC-9908-EBEE9884AB6B}"/>
+                <a16:creationId xmlns:a16="http://schemas.microsoft.com/office/drawing/2014/main" id="{0380127B-1BF8-4E82-9326-C2529F6D4431}"/>
               </a:ext>
             </a:extLst>
           </p:cNvPr>
@@ -7597,7 +7897,7 @@
           <p:cNvPr id="3" name="Text Placeholder 2">
             <a:extLst xmlns:a="http://schemas.openxmlformats.org/drawingml/2006/main">
               <a:ext uri="{FF2B5EF4-FFF2-40B4-BE49-F238E27FC236}">
-                <a16:creationId xmlns:a16="http://schemas.microsoft.com/office/drawing/2014/main" id="{4FBEAC1B-F77C-48BE-BC93-9930A23915DA}"/>
+                <a16:creationId xmlns:a16="http://schemas.microsoft.com/office/drawing/2014/main" id="{B35B9FFD-540F-4499-8414-E69533C7A708}"/>
               </a:ext>
             </a:extLst>
           </p:cNvPr>
@@ -7669,7 +7969,7 @@
           <p:cNvPr id="4" name="Content Placeholder 3">
             <a:extLst xmlns:a="http://schemas.openxmlformats.org/drawingml/2006/main">
               <a:ext uri="{FF2B5EF4-FFF2-40B4-BE49-F238E27FC236}">
-                <a16:creationId xmlns:a16="http://schemas.microsoft.com/office/drawing/2014/main" id="{FA8597FB-456F-448E-895D-9D1AD485991A}"/>
+                <a16:creationId xmlns:a16="http://schemas.microsoft.com/office/drawing/2014/main" id="{CA189067-27B0-40A6-90A1-A9C851D2B480}"/>
               </a:ext>
             </a:extLst>
           </p:cNvPr>
@@ -7773,7 +8073,7 @@
           <p:cNvPr id="5" name="Text Placeholder 4">
             <a:extLst xmlns:a="http://schemas.openxmlformats.org/drawingml/2006/main">
               <a:ext uri="{FF2B5EF4-FFF2-40B4-BE49-F238E27FC236}">
-                <a16:creationId xmlns:a16="http://schemas.microsoft.com/office/drawing/2014/main" id="{34354344-ED16-4330-A9F9-5E5712CEA708}"/>
+                <a16:creationId xmlns:a16="http://schemas.microsoft.com/office/drawing/2014/main" id="{4400C098-A139-4EF1-9F40-2BCA87AAD19E}"/>
               </a:ext>
             </a:extLst>
           </p:cNvPr>
@@ -7845,7 +8145,7 @@
           <p:cNvPr id="6" name="Content Placeholder 5">
             <a:extLst xmlns:a="http://schemas.openxmlformats.org/drawingml/2006/main">
               <a:ext uri="{FF2B5EF4-FFF2-40B4-BE49-F238E27FC236}">
-                <a16:creationId xmlns:a16="http://schemas.microsoft.com/office/drawing/2014/main" id="{1EB97DBF-D021-4499-BB01-1972E2128319}"/>
+                <a16:creationId xmlns:a16="http://schemas.microsoft.com/office/drawing/2014/main" id="{712DC838-5939-4919-8C2E-D52FD5F98E0B}"/>
               </a:ext>
             </a:extLst>
           </p:cNvPr>
@@ -7949,7 +8249,7 @@
           <p:cNvPr id="7" name="Date Placeholder 6">
             <a:extLst xmlns:a="http://schemas.openxmlformats.org/drawingml/2006/main">
               <a:ext uri="{FF2B5EF4-FFF2-40B4-BE49-F238E27FC236}">
-                <a16:creationId xmlns:a16="http://schemas.microsoft.com/office/drawing/2014/main" id="{7BBFF7E1-1172-4D62-A813-98F879C1C9BB}"/>
+                <a16:creationId xmlns:a16="http://schemas.microsoft.com/office/drawing/2014/main" id="{8710B9C1-6E27-4702-A296-021F99C4D577}"/>
               </a:ext>
             </a:extLst>
           </p:cNvPr>
@@ -7976,7 +8276,7 @@
           <p:cNvPr id="8" name="Footer Placeholder 7">
             <a:extLst xmlns:a="http://schemas.openxmlformats.org/drawingml/2006/main">
               <a:ext uri="{FF2B5EF4-FFF2-40B4-BE49-F238E27FC236}">
-                <a16:creationId xmlns:a16="http://schemas.microsoft.com/office/drawing/2014/main" id="{F8946FCB-F0E6-46D2-A713-3694368F312E}"/>
+                <a16:creationId xmlns:a16="http://schemas.microsoft.com/office/drawing/2014/main" id="{90556675-3DCD-4F37-8719-98F78269A61D}"/>
               </a:ext>
             </a:extLst>
           </p:cNvPr>
@@ -7999,7 +8299,7 @@
           <p:cNvPr id="9" name="Slide Number Placeholder 8">
             <a:extLst xmlns:a="http://schemas.openxmlformats.org/drawingml/2006/main">
               <a:ext uri="{FF2B5EF4-FFF2-40B4-BE49-F238E27FC236}">
-                <a16:creationId xmlns:a16="http://schemas.microsoft.com/office/drawing/2014/main" id="{B7DD6585-9465-4FD0-9247-F6E0D005F42B}"/>
+                <a16:creationId xmlns:a16="http://schemas.microsoft.com/office/drawing/2014/main" id="{3294BDFA-AB0F-406E-96AA-70AF736222A9}"/>
               </a:ext>
             </a:extLst>
           </p:cNvPr>
@@ -8043,7 +8343,7 @@
           <p:cNvPr id="2" name="Title 1">
             <a:extLst xmlns:a="http://schemas.openxmlformats.org/drawingml/2006/main">
               <a:ext uri="{FF2B5EF4-FFF2-40B4-BE49-F238E27FC236}">
-                <a16:creationId xmlns:a16="http://schemas.microsoft.com/office/drawing/2014/main" id="{602E26FD-BA0B-4B7B-B5AC-63A04B45D6FC}"/>
+                <a16:creationId xmlns:a16="http://schemas.microsoft.com/office/drawing/2014/main" id="{1EF52B85-020B-4E2B-B38C-D6BD10F21F4D}"/>
               </a:ext>
             </a:extLst>
           </p:cNvPr>
@@ -8070,7 +8370,7 @@
           <p:cNvPr id="3" name="Date Placeholder 2">
             <a:extLst xmlns:a="http://schemas.openxmlformats.org/drawingml/2006/main">
               <a:ext uri="{FF2B5EF4-FFF2-40B4-BE49-F238E27FC236}">
-                <a16:creationId xmlns:a16="http://schemas.microsoft.com/office/drawing/2014/main" id="{D9D91387-5763-457E-BB46-A0CCBB4F7583}"/>
+                <a16:creationId xmlns:a16="http://schemas.microsoft.com/office/drawing/2014/main" id="{B67C13D2-849C-4B36-9DB8-7ED9E88EE92E}"/>
               </a:ext>
             </a:extLst>
           </p:cNvPr>
@@ -8097,7 +8397,7 @@
           <p:cNvPr id="4" name="Footer Placeholder 3">
             <a:extLst xmlns:a="http://schemas.openxmlformats.org/drawingml/2006/main">
               <a:ext uri="{FF2B5EF4-FFF2-40B4-BE49-F238E27FC236}">
-                <a16:creationId xmlns:a16="http://schemas.microsoft.com/office/drawing/2014/main" id="{1F00CA6B-10BE-4F4E-ADB0-D89FA5203860}"/>
+                <a16:creationId xmlns:a16="http://schemas.microsoft.com/office/drawing/2014/main" id="{D77BB6A6-0C74-43B2-AF8C-DFEB904F6591}"/>
               </a:ext>
             </a:extLst>
           </p:cNvPr>
@@ -8120,7 +8420,7 @@
           <p:cNvPr id="5" name="Slide Number Placeholder 4">
             <a:extLst xmlns:a="http://schemas.openxmlformats.org/drawingml/2006/main">
               <a:ext uri="{FF2B5EF4-FFF2-40B4-BE49-F238E27FC236}">
-                <a16:creationId xmlns:a16="http://schemas.microsoft.com/office/drawing/2014/main" id="{92AA5434-9882-4696-A817-F5961F75C25D}"/>
+                <a16:creationId xmlns:a16="http://schemas.microsoft.com/office/drawing/2014/main" id="{5A57661C-E50B-47E0-B60A-F4524E164A8B}"/>
               </a:ext>
             </a:extLst>
           </p:cNvPr>
@@ -8164,7 +8464,7 @@
           <p:cNvPr id="2" name="Date Placeholder 1">
             <a:extLst xmlns:a="http://schemas.openxmlformats.org/drawingml/2006/main">
               <a:ext uri="{FF2B5EF4-FFF2-40B4-BE49-F238E27FC236}">
-                <a16:creationId xmlns:a16="http://schemas.microsoft.com/office/drawing/2014/main" id="{900729E0-BC84-45BE-A78B-CF191B5D845E}"/>
+                <a16:creationId xmlns:a16="http://schemas.microsoft.com/office/drawing/2014/main" id="{C1B296C0-55DF-47B4-9E51-8EFED5A1FA66}"/>
               </a:ext>
             </a:extLst>
           </p:cNvPr>
@@ -8191,7 +8491,7 @@
           <p:cNvPr id="3" name="Footer Placeholder 2">
             <a:extLst xmlns:a="http://schemas.openxmlformats.org/drawingml/2006/main">
               <a:ext uri="{FF2B5EF4-FFF2-40B4-BE49-F238E27FC236}">
-                <a16:creationId xmlns:a16="http://schemas.microsoft.com/office/drawing/2014/main" id="{1DCA2720-552B-42C7-9AF8-E68F145D5FD7}"/>
+                <a16:creationId xmlns:a16="http://schemas.microsoft.com/office/drawing/2014/main" id="{1891A710-32FA-41D7-A7F6-D40E6CF5AE65}"/>
               </a:ext>
             </a:extLst>
           </p:cNvPr>
@@ -8214,7 +8514,7 @@
           <p:cNvPr id="4" name="Slide Number Placeholder 3">
             <a:extLst xmlns:a="http://schemas.openxmlformats.org/drawingml/2006/main">
               <a:ext uri="{FF2B5EF4-FFF2-40B4-BE49-F238E27FC236}">
-                <a16:creationId xmlns:a16="http://schemas.microsoft.com/office/drawing/2014/main" id="{DEFA0BE9-48D7-4A7A-B418-9279F65FEF0B}"/>
+                <a16:creationId xmlns:a16="http://schemas.microsoft.com/office/drawing/2014/main" id="{4306BE23-3478-4A79-A2CE-BD797CF3EE4D}"/>
               </a:ext>
             </a:extLst>
           </p:cNvPr>
@@ -8258,7 +8558,7 @@
           <p:cNvPr id="2" name="Title 1">
             <a:extLst xmlns:a="http://schemas.openxmlformats.org/drawingml/2006/main">
               <a:ext uri="{FF2B5EF4-FFF2-40B4-BE49-F238E27FC236}">
-                <a16:creationId xmlns:a16="http://schemas.microsoft.com/office/drawing/2014/main" id="{9EF73731-5F66-4F9B-AFC4-4485A82683C7}"/>
+                <a16:creationId xmlns:a16="http://schemas.microsoft.com/office/drawing/2014/main" id="{C8B40F70-1370-4E4D-8E8A-D9FF20BE3299}"/>
               </a:ext>
             </a:extLst>
           </p:cNvPr>
@@ -8295,7 +8595,7 @@
           <p:cNvPr id="3" name="Content Placeholder 2">
             <a:extLst xmlns:a="http://schemas.openxmlformats.org/drawingml/2006/main">
               <a:ext uri="{FF2B5EF4-FFF2-40B4-BE49-F238E27FC236}">
-                <a16:creationId xmlns:a16="http://schemas.microsoft.com/office/drawing/2014/main" id="{CFB9D3D7-A2F5-4B20-93B2-9337E2D4AFF3}"/>
+                <a16:creationId xmlns:a16="http://schemas.microsoft.com/office/drawing/2014/main" id="{E6B4BA6C-D1CC-4455-BAA5-8B3841587D9B}"/>
               </a:ext>
             </a:extLst>
           </p:cNvPr>
@@ -8399,7 +8699,7 @@
           <p:cNvPr id="4" name="Text Placeholder 3">
             <a:extLst xmlns:a="http://schemas.openxmlformats.org/drawingml/2006/main">
               <a:ext uri="{FF2B5EF4-FFF2-40B4-BE49-F238E27FC236}">
-                <a16:creationId xmlns:a16="http://schemas.microsoft.com/office/drawing/2014/main" id="{5DE7EF02-DAF8-4479-8921-54C1C0A660D8}"/>
+                <a16:creationId xmlns:a16="http://schemas.microsoft.com/office/drawing/2014/main" id="{612CDEEB-31BA-4A20-BA88-20036CBB8ABE}"/>
               </a:ext>
             </a:extLst>
           </p:cNvPr>
@@ -8471,7 +8771,7 @@
           <p:cNvPr id="5" name="Date Placeholder 4">
             <a:extLst xmlns:a="http://schemas.openxmlformats.org/drawingml/2006/main">
               <a:ext uri="{FF2B5EF4-FFF2-40B4-BE49-F238E27FC236}">
-                <a16:creationId xmlns:a16="http://schemas.microsoft.com/office/drawing/2014/main" id="{0AF68BCB-B077-4062-8C53-41E7673584FB}"/>
+                <a16:creationId xmlns:a16="http://schemas.microsoft.com/office/drawing/2014/main" id="{F413714A-47BB-49A3-8D7A-D17BB0EF1ADD}"/>
               </a:ext>
             </a:extLst>
           </p:cNvPr>
@@ -8498,7 +8798,7 @@
           <p:cNvPr id="6" name="Footer Placeholder 5">
             <a:extLst xmlns:a="http://schemas.openxmlformats.org/drawingml/2006/main">
               <a:ext uri="{FF2B5EF4-FFF2-40B4-BE49-F238E27FC236}">
-                <a16:creationId xmlns:a16="http://schemas.microsoft.com/office/drawing/2014/main" id="{951F8356-F279-4E4E-BD5F-6A02F7EE810E}"/>
+                <a16:creationId xmlns:a16="http://schemas.microsoft.com/office/drawing/2014/main" id="{616AFFF3-6EC5-4D1C-8285-71F4BA6F48A6}"/>
               </a:ext>
             </a:extLst>
           </p:cNvPr>
@@ -8521,7 +8821,7 @@
           <p:cNvPr id="7" name="Slide Number Placeholder 6">
             <a:extLst xmlns:a="http://schemas.openxmlformats.org/drawingml/2006/main">
               <a:ext uri="{FF2B5EF4-FFF2-40B4-BE49-F238E27FC236}">
-                <a16:creationId xmlns:a16="http://schemas.microsoft.com/office/drawing/2014/main" id="{EFBD09BE-14A2-4FD4-A278-AA75276AA207}"/>
+                <a16:creationId xmlns:a16="http://schemas.microsoft.com/office/drawing/2014/main" id="{1FCBE67D-A3D2-4914-85F9-7BD91E7B8554}"/>
               </a:ext>
             </a:extLst>
           </p:cNvPr>
@@ -8565,7 +8865,7 @@
           <p:cNvPr id="2" name="Title 1">
             <a:extLst xmlns:a="http://schemas.openxmlformats.org/drawingml/2006/main">
               <a:ext uri="{FF2B5EF4-FFF2-40B4-BE49-F238E27FC236}">
-                <a16:creationId xmlns:a16="http://schemas.microsoft.com/office/drawing/2014/main" id="{943363D8-7960-4442-9A08-5D793C58F626}"/>
+                <a16:creationId xmlns:a16="http://schemas.microsoft.com/office/drawing/2014/main" id="{4F4D8A13-0DF5-47E8-88B5-66254BDF526C}"/>
               </a:ext>
             </a:extLst>
           </p:cNvPr>
@@ -8602,7 +8902,7 @@
           <p:cNvPr id="3" name="Picture Placeholder 2">
             <a:extLst xmlns:a="http://schemas.openxmlformats.org/drawingml/2006/main">
               <a:ext uri="{FF2B5EF4-FFF2-40B4-BE49-F238E27FC236}">
-                <a16:creationId xmlns:a16="http://schemas.microsoft.com/office/drawing/2014/main" id="{F30A2087-7C5E-43C7-A635-7BB3C85E15EB}"/>
+                <a16:creationId xmlns:a16="http://schemas.microsoft.com/office/drawing/2014/main" id="{E86D3CEC-4CE5-4C4F-A1F8-85DBC85799DA}"/>
               </a:ext>
             </a:extLst>
           </p:cNvPr>
@@ -8667,7 +8967,7 @@
           <p:cNvPr id="4" name="Text Placeholder 3">
             <a:extLst xmlns:a="http://schemas.openxmlformats.org/drawingml/2006/main">
               <a:ext uri="{FF2B5EF4-FFF2-40B4-BE49-F238E27FC236}">
-                <a16:creationId xmlns:a16="http://schemas.microsoft.com/office/drawing/2014/main" id="{6989C1CF-203E-4D0C-8C0D-6BE7177B9295}"/>
+                <a16:creationId xmlns:a16="http://schemas.microsoft.com/office/drawing/2014/main" id="{BAB5306E-F969-4B0E-8AA6-9836110C4673}"/>
               </a:ext>
             </a:extLst>
           </p:cNvPr>
@@ -8739,7 +9039,7 @@
           <p:cNvPr id="5" name="Date Placeholder 4">
             <a:extLst xmlns:a="http://schemas.openxmlformats.org/drawingml/2006/main">
               <a:ext uri="{FF2B5EF4-FFF2-40B4-BE49-F238E27FC236}">
-                <a16:creationId xmlns:a16="http://schemas.microsoft.com/office/drawing/2014/main" id="{2A77BDAA-84A7-465E-A99D-6D33973C99C5}"/>
+                <a16:creationId xmlns:a16="http://schemas.microsoft.com/office/drawing/2014/main" id="{4B336356-75BA-4A05-B83A-CAC2DE9489EB}"/>
               </a:ext>
             </a:extLst>
           </p:cNvPr>
@@ -8766,7 +9066,7 @@
           <p:cNvPr id="6" name="Footer Placeholder 5">
             <a:extLst xmlns:a="http://schemas.openxmlformats.org/drawingml/2006/main">
               <a:ext uri="{FF2B5EF4-FFF2-40B4-BE49-F238E27FC236}">
-                <a16:creationId xmlns:a16="http://schemas.microsoft.com/office/drawing/2014/main" id="{AECE510E-4511-4519-825A-BEBF8A3B6B57}"/>
+                <a16:creationId xmlns:a16="http://schemas.microsoft.com/office/drawing/2014/main" id="{FB6E037B-1640-4703-83F3-BCEB649E58C3}"/>
               </a:ext>
             </a:extLst>
           </p:cNvPr>
@@ -8789,7 +9089,7 @@
           <p:cNvPr id="7" name="Slide Number Placeholder 6">
             <a:extLst xmlns:a="http://schemas.openxmlformats.org/drawingml/2006/main">
               <a:ext uri="{FF2B5EF4-FFF2-40B4-BE49-F238E27FC236}">
-                <a16:creationId xmlns:a16="http://schemas.microsoft.com/office/drawing/2014/main" id="{0DB793D3-2A29-4119-BBF8-20BA176B45DB}"/>
+                <a16:creationId xmlns:a16="http://schemas.microsoft.com/office/drawing/2014/main" id="{9B0E3D97-7031-4D58-A952-A452A3BFC869}"/>
               </a:ext>
             </a:extLst>
           </p:cNvPr>
@@ -8838,7 +9138,7 @@
           <p:cNvPr id="2" name="Title Placeholder 1">
             <a:extLst xmlns:a="http://schemas.openxmlformats.org/drawingml/2006/main">
               <a:ext uri="{FF2B5EF4-FFF2-40B4-BE49-F238E27FC236}">
-                <a16:creationId xmlns:a16="http://schemas.microsoft.com/office/drawing/2014/main" id="{A892BB6A-ACD6-4546-A51B-17B22B87753D}"/>
+                <a16:creationId xmlns:a16="http://schemas.microsoft.com/office/drawing/2014/main" id="{E20F37F1-4A59-41D7-97E7-A3247514C28B}"/>
               </a:ext>
             </a:extLst>
           </p:cNvPr>
@@ -8875,7 +9175,7 @@
           <p:cNvPr id="3" name="Text Placeholder 2">
             <a:extLst xmlns:a="http://schemas.openxmlformats.org/drawingml/2006/main">
               <a:ext uri="{FF2B5EF4-FFF2-40B4-BE49-F238E27FC236}">
-                <a16:creationId xmlns:a16="http://schemas.microsoft.com/office/drawing/2014/main" id="{8D20B28D-990B-422C-A4FC-7077CCB7E70C}"/>
+                <a16:creationId xmlns:a16="http://schemas.microsoft.com/office/drawing/2014/main" id="{349BF36A-4E2A-4BCE-8AE6-EA3460EC7FD7}"/>
               </a:ext>
             </a:extLst>
           </p:cNvPr>
@@ -8947,7 +9247,7 @@
           <p:cNvPr id="4" name="Date Placeholder 3">
             <a:extLst xmlns:a="http://schemas.openxmlformats.org/drawingml/2006/main">
               <a:ext uri="{FF2B5EF4-FFF2-40B4-BE49-F238E27FC236}">
-                <a16:creationId xmlns:a16="http://schemas.microsoft.com/office/drawing/2014/main" id="{3E614040-4227-4F5F-B3FC-DB8B5DB78A01}"/>
+                <a16:creationId xmlns:a16="http://schemas.microsoft.com/office/drawing/2014/main" id="{37CB1D53-931E-4BA3-B1E2-CA672AEB1F83}"/>
               </a:ext>
             </a:extLst>
           </p:cNvPr>
@@ -8993,7 +9293,7 @@
           <p:cNvPr id="5" name="Footer Placeholder 4">
             <a:extLst xmlns:a="http://schemas.openxmlformats.org/drawingml/2006/main">
               <a:ext uri="{FF2B5EF4-FFF2-40B4-BE49-F238E27FC236}">
-                <a16:creationId xmlns:a16="http://schemas.microsoft.com/office/drawing/2014/main" id="{7D67ADC7-7925-456B-AC21-2DA93483C596}"/>
+                <a16:creationId xmlns:a16="http://schemas.microsoft.com/office/drawing/2014/main" id="{99174CAD-8DF0-4C34-8E26-F8BDDEAC5C19}"/>
               </a:ext>
             </a:extLst>
           </p:cNvPr>
@@ -9035,7 +9335,7 @@
           <p:cNvPr id="6" name="Slide Number Placeholder 5">
             <a:extLst xmlns:a="http://schemas.openxmlformats.org/drawingml/2006/main">
               <a:ext uri="{FF2B5EF4-FFF2-40B4-BE49-F238E27FC236}">
-                <a16:creationId xmlns:a16="http://schemas.microsoft.com/office/drawing/2014/main" id="{FDAE510F-171E-487F-81D5-84DFC4C3780C}"/>
+                <a16:creationId xmlns:a16="http://schemas.microsoft.com/office/drawing/2014/main" id="{F710BC91-08AD-4240-B905-D7CF170F9C4C}"/>
               </a:ext>
             </a:extLst>
           </p:cNvPr>
@@ -9080,17 +9380,17 @@
   </p:cSld>
   <p:clrMap bg1="lt1" tx1="dk1" bg2="lt2" tx2="dk2" accent1="accent1" accent2="accent2" accent3="accent3" accent4="accent4" accent5="accent5" accent6="accent6" hlink="hlink" folHlink="folHlink"/>
   <p:sldLayoutIdLst>
-    <p:sldLayoutId xmlns:r="http://schemas.openxmlformats.org/officeDocument/2006/relationships" id="2147483649" r:id="R0787af64429648de"/>
-    <p:sldLayoutId xmlns:r="http://schemas.openxmlformats.org/officeDocument/2006/relationships" id="2147483650" r:id="R81e408e5e3034793"/>
-    <p:sldLayoutId xmlns:r="http://schemas.openxmlformats.org/officeDocument/2006/relationships" id="2147483651" r:id="R067a12a0a2714f0f"/>
-    <p:sldLayoutId xmlns:r="http://schemas.openxmlformats.org/officeDocument/2006/relationships" id="2147483652" r:id="R81ceb9891fbb4811"/>
-    <p:sldLayoutId xmlns:r="http://schemas.openxmlformats.org/officeDocument/2006/relationships" id="2147483653" r:id="R06c9a384875142b7"/>
-    <p:sldLayoutId xmlns:r="http://schemas.openxmlformats.org/officeDocument/2006/relationships" id="2147483654" r:id="Rb6999fbad4f44cd4"/>
-    <p:sldLayoutId xmlns:r="http://schemas.openxmlformats.org/officeDocument/2006/relationships" id="2147483655" r:id="Rc3ddfe3f824d4ea1"/>
-    <p:sldLayoutId xmlns:r="http://schemas.openxmlformats.org/officeDocument/2006/relationships" id="2147483656" r:id="Rea86b291576c4638"/>
-    <p:sldLayoutId xmlns:r="http://schemas.openxmlformats.org/officeDocument/2006/relationships" id="2147483657" r:id="R7efc08399eaf45d4"/>
-    <p:sldLayoutId xmlns:r="http://schemas.openxmlformats.org/officeDocument/2006/relationships" id="2147483658" r:id="Raf50f63f3b834537"/>
-    <p:sldLayoutId xmlns:r="http://schemas.openxmlformats.org/officeDocument/2006/relationships" id="2147483659" r:id="R677e31f5503343c0"/>
+    <p:sldLayoutId xmlns:r="http://schemas.openxmlformats.org/officeDocument/2006/relationships" id="2147483649" r:id="R7adde88893c140ba"/>
+    <p:sldLayoutId xmlns:r="http://schemas.openxmlformats.org/officeDocument/2006/relationships" id="2147483650" r:id="R1f2622d6510d4798"/>
+    <p:sldLayoutId xmlns:r="http://schemas.openxmlformats.org/officeDocument/2006/relationships" id="2147483651" r:id="Ra353c41d2f194fa7"/>
+    <p:sldLayoutId xmlns:r="http://schemas.openxmlformats.org/officeDocument/2006/relationships" id="2147483652" r:id="Rf673acfdf8a0486c"/>
+    <p:sldLayoutId xmlns:r="http://schemas.openxmlformats.org/officeDocument/2006/relationships" id="2147483653" r:id="R000c3aba95c14310"/>
+    <p:sldLayoutId xmlns:r="http://schemas.openxmlformats.org/officeDocument/2006/relationships" id="2147483654" r:id="Rfdb99c7b998e438c"/>
+    <p:sldLayoutId xmlns:r="http://schemas.openxmlformats.org/officeDocument/2006/relationships" id="2147483655" r:id="Rbc00bb94b90640ab"/>
+    <p:sldLayoutId xmlns:r="http://schemas.openxmlformats.org/officeDocument/2006/relationships" id="2147483656" r:id="R4ee3b1e2ac4c4fdb"/>
+    <p:sldLayoutId xmlns:r="http://schemas.openxmlformats.org/officeDocument/2006/relationships" id="2147483657" r:id="R690c51d6f5114fb5"/>
+    <p:sldLayoutId xmlns:r="http://schemas.openxmlformats.org/officeDocument/2006/relationships" id="2147483658" r:id="R8ab748f3d5b145ae"/>
+    <p:sldLayoutId xmlns:r="http://schemas.openxmlformats.org/officeDocument/2006/relationships" id="2147483659" r:id="R62d9d6c2764445aa"/>
   </p:sldLayoutIdLst>
   <p:txStyles>
     <p:titleStyle>
@@ -9643,7 +9943,7 @@
           <p:cNvPr id="2" name="Rectangle 1">
             <a:extLst xmlns:a="http://schemas.openxmlformats.org/drawingml/2006/main">
               <a:ext uri="{FF2B5EF4-FFF2-40B4-BE49-F238E27FC236}">
-                <a16:creationId xmlns:a16="http://schemas.microsoft.com/office/drawing/2014/main" id="{69237678-840A-4521-A514-1880E79C088E}"/>
+                <a16:creationId xmlns:a16="http://schemas.microsoft.com/office/drawing/2014/main" id="{4310FDC1-83F6-4DF2-B6E0-2BF548FEEE88}"/>
               </a:ext>
             </a:extLst>
           </p:cNvPr>
@@ -9698,7 +9998,7 @@
           <p:cNvPr id="3" name="TextBox 2">
             <a:extLst xmlns:a="http://schemas.openxmlformats.org/drawingml/2006/main">
               <a:ext uri="{FF2B5EF4-FFF2-40B4-BE49-F238E27FC236}">
-                <a16:creationId xmlns:a16="http://schemas.microsoft.com/office/drawing/2014/main" id="{7AA8AB50-756B-412A-B022-6B85D5BC315E}"/>
+                <a16:creationId xmlns:a16="http://schemas.microsoft.com/office/drawing/2014/main" id="{999CA740-E2EF-4E1C-B045-3C9567A04BD4}"/>
               </a:ext>
             </a:extLst>
           </p:cNvPr>
@@ -9745,7 +10045,7 @@
           <p:cNvPr id="4" name="TextBox 3">
             <a:extLst xmlns:a="http://schemas.openxmlformats.org/drawingml/2006/main">
               <a:ext uri="{FF2B5EF4-FFF2-40B4-BE49-F238E27FC236}">
-                <a16:creationId xmlns:a16="http://schemas.microsoft.com/office/drawing/2014/main" id="{3BBDED82-0949-4A12-869B-31908EE1E93E}"/>
+                <a16:creationId xmlns:a16="http://schemas.microsoft.com/office/drawing/2014/main" id="{B3EF6704-DB31-4AD5-A9E5-EE102D5DD99B}"/>
               </a:ext>
             </a:extLst>
           </p:cNvPr>
@@ -9793,7 +10093,7 @@
           <p:cNvPr id="5" name="TextBox 4">
             <a:extLst xmlns:a="http://schemas.openxmlformats.org/drawingml/2006/main">
               <a:ext uri="{FF2B5EF4-FFF2-40B4-BE49-F238E27FC236}">
-                <a16:creationId xmlns:a16="http://schemas.microsoft.com/office/drawing/2014/main" id="{9F17BBCA-F14B-4A7E-BE5A-88B9C01969CF}"/>
+                <a16:creationId xmlns:a16="http://schemas.microsoft.com/office/drawing/2014/main" id="{55429B4F-D364-4038-A8D9-31A687A86EFF}"/>
               </a:ext>
             </a:extLst>
           </p:cNvPr>
@@ -9840,7 +10140,7 @@
           <p:cNvPr id="6" name="Rectangle 5">
             <a:extLst xmlns:a="http://schemas.openxmlformats.org/drawingml/2006/main">
               <a:ext uri="{FF2B5EF4-FFF2-40B4-BE49-F238E27FC236}">
-                <a16:creationId xmlns:a16="http://schemas.microsoft.com/office/drawing/2014/main" id="{ED0C415F-B067-4955-BF4E-9F1D5395C478}"/>
+                <a16:creationId xmlns:a16="http://schemas.microsoft.com/office/drawing/2014/main" id="{32B1B3D5-468E-4EF1-B9CB-BC5D8D6B0FD3}"/>
               </a:ext>
             </a:extLst>
           </p:cNvPr>
@@ -9895,7 +10195,7 @@
           <p:cNvPr id="7" name="TextBox 6">
             <a:extLst xmlns:a="http://schemas.openxmlformats.org/drawingml/2006/main">
               <a:ext uri="{FF2B5EF4-FFF2-40B4-BE49-F238E27FC236}">
-                <a16:creationId xmlns:a16="http://schemas.microsoft.com/office/drawing/2014/main" id="{A1C0C776-C837-4DFC-94CD-CF6F3DDA845D}"/>
+                <a16:creationId xmlns:a16="http://schemas.microsoft.com/office/drawing/2014/main" id="{CF31B0A9-4BD2-464D-8E7F-5E031C279C10}"/>
               </a:ext>
             </a:extLst>
           </p:cNvPr>
@@ -9942,7 +10242,7 @@
           <p:cNvPr id="8" name="TextBox 7">
             <a:extLst xmlns:a="http://schemas.openxmlformats.org/drawingml/2006/main">
               <a:ext uri="{FF2B5EF4-FFF2-40B4-BE49-F238E27FC236}">
-                <a16:creationId xmlns:a16="http://schemas.microsoft.com/office/drawing/2014/main" id="{15341F8E-7122-448F-BF4B-99F74C2399F9}"/>
+                <a16:creationId xmlns:a16="http://schemas.microsoft.com/office/drawing/2014/main" id="{1541064B-CA92-49FF-83C8-D6F8C1E3488F}"/>
               </a:ext>
             </a:extLst>
           </p:cNvPr>
@@ -9979,7 +10279,7 @@
                 <a:ea typeface="Aptos"/>
                 <a:cs typeface="Aptos"/>
               </a:rPr>
-              <a:t>2026.07.25-24</a:t>
+              <a:t>2026.07.26-25</a:t>
             </a:r>
           </a:p>
         </p:txBody>
@@ -9989,7 +10289,7 @@
           <p:cNvPr id="9" name="TextBox 8">
             <a:extLst xmlns:a="http://schemas.openxmlformats.org/drawingml/2006/main">
               <a:ext uri="{FF2B5EF4-FFF2-40B4-BE49-F238E27FC236}">
-                <a16:creationId xmlns:a16="http://schemas.microsoft.com/office/drawing/2014/main" id="{EF96864F-9159-4189-932B-1B6AB079BB05}"/>
+                <a16:creationId xmlns:a16="http://schemas.microsoft.com/office/drawing/2014/main" id="{6C4410A8-3E20-4417-B4AC-0CE932AE22A7}"/>
               </a:ext>
             </a:extLst>
           </p:cNvPr>
@@ -10026,8 +10326,28 @@
                 <a:ea typeface="Aptos"/>
                 <a:cs typeface="Aptos"/>
               </a:rPr>
-              <a:t>Päivitetty 2026-07-24
-30 diaa · suomeksi</a:t>
+              <a:t>Päivitetty 2026-07-26</a:t>
+            </a:r>
+            <a:br>
+              <a:rPr sz="1700" b="0">
+                <a:solidFill>
+                  <a:srgbClr val="FFFFFF"/>
+                </a:solidFill>
+                <a:latin typeface="Aptos"/>
+                <a:ea typeface="Aptos"/>
+                <a:cs typeface="Aptos"/>
+              </a:rPr>
+            </a:br>
+            <a:r>
+              <a:rPr sz="1700" b="0">
+                <a:solidFill>
+                  <a:srgbClr val="FFFFFF"/>
+                </a:solidFill>
+                <a:latin typeface="Aptos"/>
+                <a:ea typeface="Aptos"/>
+                <a:cs typeface="Aptos"/>
+              </a:rPr>
+              <a:t>30 diaa · suomeksi</a:t>
             </a:r>
           </a:p>
         </p:txBody>
@@ -10037,7 +10357,7 @@
           <p:cNvPr id="10" name="TextBox 9">
             <a:extLst xmlns:a="http://schemas.openxmlformats.org/drawingml/2006/main">
               <a:ext uri="{FF2B5EF4-FFF2-40B4-BE49-F238E27FC236}">
-                <a16:creationId xmlns:a16="http://schemas.microsoft.com/office/drawing/2014/main" id="{D0E3E26B-32E1-42A3-A14B-4279BB3B3ECA}"/>
+                <a16:creationId xmlns:a16="http://schemas.microsoft.com/office/drawing/2014/main" id="{3C100B9B-1483-4840-86C6-E0AC9F39E9DB}"/>
               </a:ext>
             </a:extLst>
           </p:cNvPr>
@@ -10084,7 +10404,7 @@
           <p:cNvPr id="11" name="TextBox 10">
             <a:extLst xmlns:a="http://schemas.openxmlformats.org/drawingml/2006/main">
               <a:ext uri="{FF2B5EF4-FFF2-40B4-BE49-F238E27FC236}">
-                <a16:creationId xmlns:a16="http://schemas.microsoft.com/office/drawing/2014/main" id="{643CB8D9-9B1B-48E6-A62F-571B5847D17C}"/>
+                <a16:creationId xmlns:a16="http://schemas.microsoft.com/office/drawing/2014/main" id="{2B1BBC79-1932-4684-8721-8AE8152D9DF4}"/>
               </a:ext>
             </a:extLst>
           </p:cNvPr>
@@ -10131,7 +10451,7 @@
           <p:cNvPr id="12" name="TextBox 11">
             <a:extLst xmlns:a="http://schemas.openxmlformats.org/drawingml/2006/main">
               <a:ext uri="{FF2B5EF4-FFF2-40B4-BE49-F238E27FC236}">
-                <a16:creationId xmlns:a16="http://schemas.microsoft.com/office/drawing/2014/main" id="{7D94B684-B2C5-4F23-8C02-113CEE36489F}"/>
+                <a16:creationId xmlns:a16="http://schemas.microsoft.com/office/drawing/2014/main" id="{2CCAE7E0-AD3D-462F-9394-6AA0A33801C2}"/>
               </a:ext>
             </a:extLst>
           </p:cNvPr>
@@ -10176,7 +10496,7 @@
     </p:spTree>
     <p:extLst>
       <p:ext uri="{BB962C8B-B14F-4D97-AF65-F5344CB8AC3E}">
-        <p14:creationId xmlns:p14="http://schemas.microsoft.com/office/powerpoint/2010/main" val="1737734399"/>
+        <p14:creationId xmlns:p14="http://schemas.microsoft.com/office/powerpoint/2010/main" val="1797505075"/>
       </p:ext>
     </p:extLst>
   </p:cSld>
@@ -10200,7 +10520,7 @@
           <p:cNvPr id="2" name="TextBox 1">
             <a:extLst xmlns:a="http://schemas.openxmlformats.org/drawingml/2006/main">
               <a:ext uri="{FF2B5EF4-FFF2-40B4-BE49-F238E27FC236}">
-                <a16:creationId xmlns:a16="http://schemas.microsoft.com/office/drawing/2014/main" id="{9AFF6E8D-E165-4C12-A594-0E4966619E18}"/>
+                <a16:creationId xmlns:a16="http://schemas.microsoft.com/office/drawing/2014/main" id="{1A7D6FE2-5682-4966-ACFD-6F1F11BD3CA3}"/>
               </a:ext>
             </a:extLst>
           </p:cNvPr>
@@ -10247,7 +10567,7 @@
           <p:cNvPr id="3" name="TextBox 2">
             <a:extLst xmlns:a="http://schemas.openxmlformats.org/drawingml/2006/main">
               <a:ext uri="{FF2B5EF4-FFF2-40B4-BE49-F238E27FC236}">
-                <a16:creationId xmlns:a16="http://schemas.microsoft.com/office/drawing/2014/main" id="{824EDFE5-2D1A-4AF2-B3EB-A1412F4EFA6B}"/>
+                <a16:creationId xmlns:a16="http://schemas.microsoft.com/office/drawing/2014/main" id="{47AF3E9B-8735-47FE-A071-72C9C2B434C9}"/>
               </a:ext>
             </a:extLst>
           </p:cNvPr>
@@ -10294,7 +10614,7 @@
           <p:cNvPr id="4" name="Rectangle 3">
             <a:extLst xmlns:a="http://schemas.openxmlformats.org/drawingml/2006/main">
               <a:ext uri="{FF2B5EF4-FFF2-40B4-BE49-F238E27FC236}">
-                <a16:creationId xmlns:a16="http://schemas.microsoft.com/office/drawing/2014/main" id="{83F54870-C08B-47B4-962F-BB779FE5A395}"/>
+                <a16:creationId xmlns:a16="http://schemas.microsoft.com/office/drawing/2014/main" id="{C80B9B8A-2052-497D-8DFC-C9B5D6AA8795}"/>
               </a:ext>
             </a:extLst>
           </p:cNvPr>
@@ -10349,7 +10669,7 @@
           <p:cNvPr id="5" name="Rectangle 4">
             <a:extLst xmlns:a="http://schemas.openxmlformats.org/drawingml/2006/main">
               <a:ext uri="{FF2B5EF4-FFF2-40B4-BE49-F238E27FC236}">
-                <a16:creationId xmlns:a16="http://schemas.microsoft.com/office/drawing/2014/main" id="{518341B6-8599-4000-8EEF-4E3348E2F95F}"/>
+                <a16:creationId xmlns:a16="http://schemas.microsoft.com/office/drawing/2014/main" id="{BE85AC53-4B53-43AC-A13E-C844909DE653}"/>
               </a:ext>
             </a:extLst>
           </p:cNvPr>
@@ -10404,7 +10724,7 @@
           <p:cNvPr id="6" name="TextBox 5">
             <a:extLst xmlns:a="http://schemas.openxmlformats.org/drawingml/2006/main">
               <a:ext uri="{FF2B5EF4-FFF2-40B4-BE49-F238E27FC236}">
-                <a16:creationId xmlns:a16="http://schemas.microsoft.com/office/drawing/2014/main" id="{803B8352-FF89-4255-B00B-32747A6EA474}"/>
+                <a16:creationId xmlns:a16="http://schemas.microsoft.com/office/drawing/2014/main" id="{1E2A1C55-4CAA-441E-8040-16B9BE2DCE7F}"/>
               </a:ext>
             </a:extLst>
           </p:cNvPr>
@@ -10441,7 +10761,7 @@
                 <a:ea typeface="Aptos"/>
                 <a:cs typeface="Aptos"/>
               </a:rPr>
-              <a:t>Julkinen riippumaton evidenssikooste · 2026.07.25-24 · 2026-07-24 · Lähteet: RPX; CNIPA guidance; EPO family</a:t>
+              <a:t>Julkinen riippumaton evidenssikooste · 2026.07.26-25 · 2026-07-26 · Lähteet: RPX; CNIPA guidance; EPO family</a:t>
             </a:r>
           </a:p>
         </p:txBody>
@@ -10451,7 +10771,7 @@
           <p:cNvPr id="7" name="TextBox 6">
             <a:extLst xmlns:a="http://schemas.openxmlformats.org/drawingml/2006/main">
               <a:ext uri="{FF2B5EF4-FFF2-40B4-BE49-F238E27FC236}">
-                <a16:creationId xmlns:a16="http://schemas.microsoft.com/office/drawing/2014/main" id="{2FDFB615-3DCC-4CFD-B858-CDB53E8A1D1B}"/>
+                <a16:creationId xmlns:a16="http://schemas.microsoft.com/office/drawing/2014/main" id="{10CA871A-66B5-4C19-8F04-962986C20913}"/>
               </a:ext>
             </a:extLst>
           </p:cNvPr>
@@ -10498,7 +10818,7 @@
           <p:cNvPr id="8" name="TextBox 7">
             <a:extLst xmlns:a="http://schemas.openxmlformats.org/drawingml/2006/main">
               <a:ext uri="{FF2B5EF4-FFF2-40B4-BE49-F238E27FC236}">
-                <a16:creationId xmlns:a16="http://schemas.microsoft.com/office/drawing/2014/main" id="{2C2C476D-8129-47D8-9AAA-A0329C6DF73D}"/>
+                <a16:creationId xmlns:a16="http://schemas.microsoft.com/office/drawing/2014/main" id="{7BC4671B-1E23-4E69-8346-26606F09345A}"/>
               </a:ext>
             </a:extLst>
           </p:cNvPr>
@@ -10545,7 +10865,7 @@
           <p:cNvPr id="9" name="TextBox 8">
             <a:extLst xmlns:a="http://schemas.openxmlformats.org/drawingml/2006/main">
               <a:ext uri="{FF2B5EF4-FFF2-40B4-BE49-F238E27FC236}">
-                <a16:creationId xmlns:a16="http://schemas.microsoft.com/office/drawing/2014/main" id="{1A0E35B8-C932-462C-96EB-22A4E2D9C80B}"/>
+                <a16:creationId xmlns:a16="http://schemas.microsoft.com/office/drawing/2014/main" id="{CA29283A-E569-4295-8FD9-E5BC2FC29312}"/>
               </a:ext>
             </a:extLst>
           </p:cNvPr>
@@ -10642,7 +10962,7 @@
           <p:cNvPr id="10" name="Rounded Rectangle 9">
             <a:extLst xmlns:a="http://schemas.openxmlformats.org/drawingml/2006/main">
               <a:ext uri="{FF2B5EF4-FFF2-40B4-BE49-F238E27FC236}">
-                <a16:creationId xmlns:a16="http://schemas.microsoft.com/office/drawing/2014/main" id="{21C2D9E5-B545-4337-85A6-FC18173865D9}"/>
+                <a16:creationId xmlns:a16="http://schemas.microsoft.com/office/drawing/2014/main" id="{AAC440DF-0AEF-4C34-9B76-5A4CC98AF3BC}"/>
               </a:ext>
             </a:extLst>
           </p:cNvPr>
@@ -10699,7 +11019,7 @@
           <p:cNvPr id="11" name="TextBox 10">
             <a:extLst xmlns:a="http://schemas.openxmlformats.org/drawingml/2006/main">
               <a:ext uri="{FF2B5EF4-FFF2-40B4-BE49-F238E27FC236}">
-                <a16:creationId xmlns:a16="http://schemas.microsoft.com/office/drawing/2014/main" id="{962A27FA-D8EC-4FCA-8B26-E8FF44D6FBD3}"/>
+                <a16:creationId xmlns:a16="http://schemas.microsoft.com/office/drawing/2014/main" id="{24AD12DB-6C6F-401C-850C-00D89A57F1C0}"/>
               </a:ext>
             </a:extLst>
           </p:cNvPr>
@@ -10746,7 +11066,7 @@
           <p:cNvPr id="12" name="TextBox 11">
             <a:extLst xmlns:a="http://schemas.openxmlformats.org/drawingml/2006/main">
               <a:ext uri="{FF2B5EF4-FFF2-40B4-BE49-F238E27FC236}">
-                <a16:creationId xmlns:a16="http://schemas.microsoft.com/office/drawing/2014/main" id="{977FAE90-9589-4BC2-AA48-263507C27C64}"/>
+                <a16:creationId xmlns:a16="http://schemas.microsoft.com/office/drawing/2014/main" id="{EB620416-46BF-44CD-AF01-AABB17D39EFB}"/>
               </a:ext>
             </a:extLst>
           </p:cNvPr>
@@ -10791,7 +11111,7 @@
     </p:spTree>
     <p:extLst>
       <p:ext uri="{BB962C8B-B14F-4D97-AF65-F5344CB8AC3E}">
-        <p14:creationId xmlns:p14="http://schemas.microsoft.com/office/powerpoint/2010/main" val="1108230506"/>
+        <p14:creationId xmlns:p14="http://schemas.microsoft.com/office/powerpoint/2010/main" val="1021078920"/>
       </p:ext>
     </p:extLst>
   </p:cSld>
@@ -10815,7 +11135,7 @@
           <p:cNvPr id="2" name="TextBox 1">
             <a:extLst xmlns:a="http://schemas.openxmlformats.org/drawingml/2006/main">
               <a:ext uri="{FF2B5EF4-FFF2-40B4-BE49-F238E27FC236}">
-                <a16:creationId xmlns:a16="http://schemas.microsoft.com/office/drawing/2014/main" id="{1E5BC4E1-2247-4961-86B5-930116C6C5C2}"/>
+                <a16:creationId xmlns:a16="http://schemas.microsoft.com/office/drawing/2014/main" id="{835E5D0E-1775-4DB8-A00D-68EE361BE61D}"/>
               </a:ext>
             </a:extLst>
           </p:cNvPr>
@@ -10862,7 +11182,7 @@
           <p:cNvPr id="3" name="TextBox 2">
             <a:extLst xmlns:a="http://schemas.openxmlformats.org/drawingml/2006/main">
               <a:ext uri="{FF2B5EF4-FFF2-40B4-BE49-F238E27FC236}">
-                <a16:creationId xmlns:a16="http://schemas.microsoft.com/office/drawing/2014/main" id="{5D8C75CA-6C93-491F-812C-608D1A932B76}"/>
+                <a16:creationId xmlns:a16="http://schemas.microsoft.com/office/drawing/2014/main" id="{98043527-6496-47C4-8AD4-26A71C8829A1}"/>
               </a:ext>
             </a:extLst>
           </p:cNvPr>
@@ -10909,7 +11229,7 @@
           <p:cNvPr id="4" name="Rectangle 3">
             <a:extLst xmlns:a="http://schemas.openxmlformats.org/drawingml/2006/main">
               <a:ext uri="{FF2B5EF4-FFF2-40B4-BE49-F238E27FC236}">
-                <a16:creationId xmlns:a16="http://schemas.microsoft.com/office/drawing/2014/main" id="{2CA7A32A-43DF-4C5C-8E41-3F2DC03610CB}"/>
+                <a16:creationId xmlns:a16="http://schemas.microsoft.com/office/drawing/2014/main" id="{84F5CB64-41DA-49C0-A70B-4050862DBEA0}"/>
               </a:ext>
             </a:extLst>
           </p:cNvPr>
@@ -10964,7 +11284,7 @@
           <p:cNvPr id="5" name="Rectangle 4">
             <a:extLst xmlns:a="http://schemas.openxmlformats.org/drawingml/2006/main">
               <a:ext uri="{FF2B5EF4-FFF2-40B4-BE49-F238E27FC236}">
-                <a16:creationId xmlns:a16="http://schemas.microsoft.com/office/drawing/2014/main" id="{FBD27C5B-2694-4EF3-93E4-7F6929815156}"/>
+                <a16:creationId xmlns:a16="http://schemas.microsoft.com/office/drawing/2014/main" id="{F5794D39-015D-4C14-8ECD-7AAFA566CC9B}"/>
               </a:ext>
             </a:extLst>
           </p:cNvPr>
@@ -11019,7 +11339,7 @@
           <p:cNvPr id="6" name="TextBox 5">
             <a:extLst xmlns:a="http://schemas.openxmlformats.org/drawingml/2006/main">
               <a:ext uri="{FF2B5EF4-FFF2-40B4-BE49-F238E27FC236}">
-                <a16:creationId xmlns:a16="http://schemas.microsoft.com/office/drawing/2014/main" id="{066B9CDB-A2AC-4A35-A53E-6621C5F48D26}"/>
+                <a16:creationId xmlns:a16="http://schemas.microsoft.com/office/drawing/2014/main" id="{74C75BDA-3447-46E8-8A57-25219E795677}"/>
               </a:ext>
             </a:extLst>
           </p:cNvPr>
@@ -11056,7 +11376,7 @@
                 <a:ea typeface="Aptos"/>
                 <a:cs typeface="Aptos"/>
               </a:rPr>
-              <a:t>Julkinen riippumaton evidenssikooste · 2026.07.25-24 · 2026-07-24 · Lähteet: IP Australia; PRH; EPO; EPO / UPC; USPTO</a:t>
+              <a:t>Julkinen riippumaton evidenssikooste · 2026.07.26-25 · 2026-07-26 · Lähteet: IP Australia; PRH; EPO; EPO / UPC; USPTO</a:t>
             </a:r>
           </a:p>
         </p:txBody>
@@ -11066,7 +11386,7 @@
           <p:cNvPr id="7" name="TextBox 6">
             <a:extLst xmlns:a="http://schemas.openxmlformats.org/drawingml/2006/main">
               <a:ext uri="{FF2B5EF4-FFF2-40B4-BE49-F238E27FC236}">
-                <a16:creationId xmlns:a16="http://schemas.microsoft.com/office/drawing/2014/main" id="{FCC5D131-AA06-4694-9B8E-5DCEDCE81A88}"/>
+                <a16:creationId xmlns:a16="http://schemas.microsoft.com/office/drawing/2014/main" id="{B0ADE59A-5F02-4F01-B6B9-ACE611BAFC9F}"/>
               </a:ext>
             </a:extLst>
           </p:cNvPr>
@@ -11553,7 +11873,7 @@
           <p:cNvPr id="9" name="TextBox 8">
             <a:extLst xmlns:a="http://schemas.openxmlformats.org/drawingml/2006/main">
               <a:ext uri="{FF2B5EF4-FFF2-40B4-BE49-F238E27FC236}">
-                <a16:creationId xmlns:a16="http://schemas.microsoft.com/office/drawing/2014/main" id="{6CDAF9FB-DF39-4DA8-8F68-A0A3921BE1CB}"/>
+                <a16:creationId xmlns:a16="http://schemas.microsoft.com/office/drawing/2014/main" id="{57B5E7B7-FB43-4306-B732-48666202EED5}"/>
               </a:ext>
             </a:extLst>
           </p:cNvPr>
@@ -11598,7 +11918,7 @@
     </p:spTree>
     <p:extLst>
       <p:ext uri="{BB962C8B-B14F-4D97-AF65-F5344CB8AC3E}">
-        <p14:creationId xmlns:p14="http://schemas.microsoft.com/office/powerpoint/2010/main" val="1325913336"/>
+        <p14:creationId xmlns:p14="http://schemas.microsoft.com/office/powerpoint/2010/main" val="1259390860"/>
       </p:ext>
     </p:extLst>
   </p:cSld>
@@ -11622,7 +11942,7 @@
           <p:cNvPr id="2" name="TextBox 1">
             <a:extLst xmlns:a="http://schemas.openxmlformats.org/drawingml/2006/main">
               <a:ext uri="{FF2B5EF4-FFF2-40B4-BE49-F238E27FC236}">
-                <a16:creationId xmlns:a16="http://schemas.microsoft.com/office/drawing/2014/main" id="{11CEDFA9-BCD2-4542-A70C-BC76D2AE655D}"/>
+                <a16:creationId xmlns:a16="http://schemas.microsoft.com/office/drawing/2014/main" id="{C0EE6D36-A4BE-456F-BAF8-D937F277E4B6}"/>
               </a:ext>
             </a:extLst>
           </p:cNvPr>
@@ -11669,7 +11989,7 @@
           <p:cNvPr id="3" name="TextBox 2">
             <a:extLst xmlns:a="http://schemas.openxmlformats.org/drawingml/2006/main">
               <a:ext uri="{FF2B5EF4-FFF2-40B4-BE49-F238E27FC236}">
-                <a16:creationId xmlns:a16="http://schemas.microsoft.com/office/drawing/2014/main" id="{7573CCD5-8856-4F49-B32D-CC3078A5F3E9}"/>
+                <a16:creationId xmlns:a16="http://schemas.microsoft.com/office/drawing/2014/main" id="{AD6D80AE-B8B7-4D8B-A2EE-ED694817B745}"/>
               </a:ext>
             </a:extLst>
           </p:cNvPr>
@@ -11716,7 +12036,7 @@
           <p:cNvPr id="4" name="Rectangle 3">
             <a:extLst xmlns:a="http://schemas.openxmlformats.org/drawingml/2006/main">
               <a:ext uri="{FF2B5EF4-FFF2-40B4-BE49-F238E27FC236}">
-                <a16:creationId xmlns:a16="http://schemas.microsoft.com/office/drawing/2014/main" id="{5E920D8F-BC12-423F-A4B5-B3F04C336E60}"/>
+                <a16:creationId xmlns:a16="http://schemas.microsoft.com/office/drawing/2014/main" id="{AB8AFA3B-0781-4C2C-84D6-0999EF0BA641}"/>
               </a:ext>
             </a:extLst>
           </p:cNvPr>
@@ -11771,7 +12091,7 @@
           <p:cNvPr id="5" name="Rectangle 4">
             <a:extLst xmlns:a="http://schemas.openxmlformats.org/drawingml/2006/main">
               <a:ext uri="{FF2B5EF4-FFF2-40B4-BE49-F238E27FC236}">
-                <a16:creationId xmlns:a16="http://schemas.microsoft.com/office/drawing/2014/main" id="{2BAA2F05-25B4-41AC-9B35-061A94CA5F3D}"/>
+                <a16:creationId xmlns:a16="http://schemas.microsoft.com/office/drawing/2014/main" id="{4DF5C8E8-F299-4446-9125-FDF398E5AB8A}"/>
               </a:ext>
             </a:extLst>
           </p:cNvPr>
@@ -11826,7 +12146,7 @@
           <p:cNvPr id="6" name="TextBox 5">
             <a:extLst xmlns:a="http://schemas.openxmlformats.org/drawingml/2006/main">
               <a:ext uri="{FF2B5EF4-FFF2-40B4-BE49-F238E27FC236}">
-                <a16:creationId xmlns:a16="http://schemas.microsoft.com/office/drawing/2014/main" id="{0990D3B1-E2F1-4D1C-9B0D-ABB15DEC75A4}"/>
+                <a16:creationId xmlns:a16="http://schemas.microsoft.com/office/drawing/2014/main" id="{5EC675D5-765F-4827-9929-9467988DD05A}"/>
               </a:ext>
             </a:extLst>
           </p:cNvPr>
@@ -11863,7 +12183,7 @@
                 <a:ea typeface="Aptos"/>
                 <a:cs typeface="Aptos"/>
               </a:rPr>
-              <a:t>Julkinen riippumaton evidenssikooste · 2026.07.25-24 · 2026-07-24 · Lähteet: UN; Atlas</a:t>
+              <a:t>Julkinen riippumaton evidenssikooste · 2026.07.26-25 · 2026-07-26 · Lähteet: UN; Atlas</a:t>
             </a:r>
           </a:p>
         </p:txBody>
@@ -11873,7 +12193,7 @@
           <p:cNvPr id="7" name="TextBox 6">
             <a:extLst xmlns:a="http://schemas.openxmlformats.org/drawingml/2006/main">
               <a:ext uri="{FF2B5EF4-FFF2-40B4-BE49-F238E27FC236}">
-                <a16:creationId xmlns:a16="http://schemas.microsoft.com/office/drawing/2014/main" id="{E1B0F2D1-54DB-49A3-9F69-DC39CA2B632A}"/>
+                <a16:creationId xmlns:a16="http://schemas.microsoft.com/office/drawing/2014/main" id="{2021DA3F-5B72-4824-B026-EEDD5BCE1EB8}"/>
               </a:ext>
             </a:extLst>
           </p:cNvPr>
@@ -11920,7 +12240,7 @@
           <p:cNvPr id="8" name="Rounded Rectangle 7">
             <a:extLst xmlns:a="http://schemas.openxmlformats.org/drawingml/2006/main">
               <a:ext uri="{FF2B5EF4-FFF2-40B4-BE49-F238E27FC236}">
-                <a16:creationId xmlns:a16="http://schemas.microsoft.com/office/drawing/2014/main" id="{87B751DA-BF87-4BD5-AD3F-1FE2ACBC4513}"/>
+                <a16:creationId xmlns:a16="http://schemas.microsoft.com/office/drawing/2014/main" id="{8E820834-8F05-487B-B375-94C964C6F654}"/>
               </a:ext>
             </a:extLst>
           </p:cNvPr>
@@ -11977,7 +12297,7 @@
           <p:cNvPr id="9" name="TextBox 8">
             <a:extLst xmlns:a="http://schemas.openxmlformats.org/drawingml/2006/main">
               <a:ext uri="{FF2B5EF4-FFF2-40B4-BE49-F238E27FC236}">
-                <a16:creationId xmlns:a16="http://schemas.microsoft.com/office/drawing/2014/main" id="{7ECB3984-48A7-4D9B-9DCA-5093C90C1B2B}"/>
+                <a16:creationId xmlns:a16="http://schemas.microsoft.com/office/drawing/2014/main" id="{02458E08-74DF-4D36-934D-6D3C43995CF5}"/>
               </a:ext>
             </a:extLst>
           </p:cNvPr>
@@ -12024,7 +12344,7 @@
           <p:cNvPr id="10" name="TextBox 9">
             <a:extLst xmlns:a="http://schemas.openxmlformats.org/drawingml/2006/main">
               <a:ext uri="{FF2B5EF4-FFF2-40B4-BE49-F238E27FC236}">
-                <a16:creationId xmlns:a16="http://schemas.microsoft.com/office/drawing/2014/main" id="{0C68FCFC-898E-4410-BEC6-E8733E55DAC1}"/>
+                <a16:creationId xmlns:a16="http://schemas.microsoft.com/office/drawing/2014/main" id="{EEA47CCD-CCFD-40FE-AFF9-798CD957B4E2}"/>
               </a:ext>
             </a:extLst>
           </p:cNvPr>
@@ -12071,7 +12391,7 @@
           <p:cNvPr id="11" name="Rounded Rectangle 10">
             <a:extLst xmlns:a="http://schemas.openxmlformats.org/drawingml/2006/main">
               <a:ext uri="{FF2B5EF4-FFF2-40B4-BE49-F238E27FC236}">
-                <a16:creationId xmlns:a16="http://schemas.microsoft.com/office/drawing/2014/main" id="{6F6233F1-EC19-4922-AC32-8B45C3688890}"/>
+                <a16:creationId xmlns:a16="http://schemas.microsoft.com/office/drawing/2014/main" id="{BC475451-2768-4985-8B4B-C9031927B0E3}"/>
               </a:ext>
             </a:extLst>
           </p:cNvPr>
@@ -12128,7 +12448,7 @@
           <p:cNvPr id="12" name="TextBox 11">
             <a:extLst xmlns:a="http://schemas.openxmlformats.org/drawingml/2006/main">
               <a:ext uri="{FF2B5EF4-FFF2-40B4-BE49-F238E27FC236}">
-                <a16:creationId xmlns:a16="http://schemas.microsoft.com/office/drawing/2014/main" id="{D693A3AD-C5BB-4A7B-832A-01E19C88AD0B}"/>
+                <a16:creationId xmlns:a16="http://schemas.microsoft.com/office/drawing/2014/main" id="{851F148B-74BF-4B88-A2F9-50BC8A41E6AA}"/>
               </a:ext>
             </a:extLst>
           </p:cNvPr>
@@ -12175,7 +12495,7 @@
           <p:cNvPr id="13" name="TextBox 12">
             <a:extLst xmlns:a="http://schemas.openxmlformats.org/drawingml/2006/main">
               <a:ext uri="{FF2B5EF4-FFF2-40B4-BE49-F238E27FC236}">
-                <a16:creationId xmlns:a16="http://schemas.microsoft.com/office/drawing/2014/main" id="{EE0E37F2-8B7A-4A84-A39A-1102562CACD7}"/>
+                <a16:creationId xmlns:a16="http://schemas.microsoft.com/office/drawing/2014/main" id="{33860CC5-DACE-4083-9B50-491AFA7368FB}"/>
               </a:ext>
             </a:extLst>
           </p:cNvPr>
@@ -12222,7 +12542,7 @@
           <p:cNvPr id="14" name="Rounded Rectangle 13">
             <a:extLst xmlns:a="http://schemas.openxmlformats.org/drawingml/2006/main">
               <a:ext uri="{FF2B5EF4-FFF2-40B4-BE49-F238E27FC236}">
-                <a16:creationId xmlns:a16="http://schemas.microsoft.com/office/drawing/2014/main" id="{B36F477E-4121-44B2-B505-C8CC9857A380}"/>
+                <a16:creationId xmlns:a16="http://schemas.microsoft.com/office/drawing/2014/main" id="{F059F55C-A83C-47E0-80CD-8FB5AC4633B4}"/>
               </a:ext>
             </a:extLst>
           </p:cNvPr>
@@ -12279,7 +12599,7 @@
           <p:cNvPr id="15" name="TextBox 14">
             <a:extLst xmlns:a="http://schemas.openxmlformats.org/drawingml/2006/main">
               <a:ext uri="{FF2B5EF4-FFF2-40B4-BE49-F238E27FC236}">
-                <a16:creationId xmlns:a16="http://schemas.microsoft.com/office/drawing/2014/main" id="{305F1A8C-4E85-4A62-9A67-31A3EB719ED9}"/>
+                <a16:creationId xmlns:a16="http://schemas.microsoft.com/office/drawing/2014/main" id="{B8CDC340-958D-4C8E-9A4D-AB2477D16714}"/>
               </a:ext>
             </a:extLst>
           </p:cNvPr>
@@ -12326,7 +12646,7 @@
           <p:cNvPr id="16" name="TextBox 15">
             <a:extLst xmlns:a="http://schemas.openxmlformats.org/drawingml/2006/main">
               <a:ext uri="{FF2B5EF4-FFF2-40B4-BE49-F238E27FC236}">
-                <a16:creationId xmlns:a16="http://schemas.microsoft.com/office/drawing/2014/main" id="{246331BD-C577-4AAE-9F77-AD6D6FC68837}"/>
+                <a16:creationId xmlns:a16="http://schemas.microsoft.com/office/drawing/2014/main" id="{8063D71C-B267-4D20-8A5C-B4C1456C0106}"/>
               </a:ext>
             </a:extLst>
           </p:cNvPr>
@@ -12373,7 +12693,7 @@
           <p:cNvPr id="17" name="Rounded Rectangle 16">
             <a:extLst xmlns:a="http://schemas.openxmlformats.org/drawingml/2006/main">
               <a:ext uri="{FF2B5EF4-FFF2-40B4-BE49-F238E27FC236}">
-                <a16:creationId xmlns:a16="http://schemas.microsoft.com/office/drawing/2014/main" id="{E4BF7640-A015-460F-B921-E6577BDDCC4C}"/>
+                <a16:creationId xmlns:a16="http://schemas.microsoft.com/office/drawing/2014/main" id="{E74A8F87-8D04-4C1F-BABA-156BBA629FD4}"/>
               </a:ext>
             </a:extLst>
           </p:cNvPr>
@@ -12430,7 +12750,7 @@
           <p:cNvPr id="18" name="TextBox 17">
             <a:extLst xmlns:a="http://schemas.openxmlformats.org/drawingml/2006/main">
               <a:ext uri="{FF2B5EF4-FFF2-40B4-BE49-F238E27FC236}">
-                <a16:creationId xmlns:a16="http://schemas.microsoft.com/office/drawing/2014/main" id="{0982BDBC-7D06-4E2A-8B98-19AACAAD8B0A}"/>
+                <a16:creationId xmlns:a16="http://schemas.microsoft.com/office/drawing/2014/main" id="{FA43A3BC-23FE-43AE-B629-465112CA1A02}"/>
               </a:ext>
             </a:extLst>
           </p:cNvPr>
@@ -12477,7 +12797,7 @@
           <p:cNvPr id="19" name="TextBox 18">
             <a:extLst xmlns:a="http://schemas.openxmlformats.org/drawingml/2006/main">
               <a:ext uri="{FF2B5EF4-FFF2-40B4-BE49-F238E27FC236}">
-                <a16:creationId xmlns:a16="http://schemas.microsoft.com/office/drawing/2014/main" id="{17D2106D-D910-47CD-B7ED-0290DA8F9D52}"/>
+                <a16:creationId xmlns:a16="http://schemas.microsoft.com/office/drawing/2014/main" id="{6490EEF6-7DA5-4D92-8535-1831EFB597C3}"/>
               </a:ext>
             </a:extLst>
           </p:cNvPr>
@@ -12524,7 +12844,7 @@
           <p:cNvPr id="20" name="TextBox 19">
             <a:extLst xmlns:a="http://schemas.openxmlformats.org/drawingml/2006/main">
               <a:ext uri="{FF2B5EF4-FFF2-40B4-BE49-F238E27FC236}">
-                <a16:creationId xmlns:a16="http://schemas.microsoft.com/office/drawing/2014/main" id="{F98A1E08-B611-4C44-9F58-89E23E781F24}"/>
+                <a16:creationId xmlns:a16="http://schemas.microsoft.com/office/drawing/2014/main" id="{5A3510E1-4672-4F12-9C3C-0F7CE467463D}"/>
               </a:ext>
             </a:extLst>
           </p:cNvPr>
@@ -12571,7 +12891,7 @@
           <p:cNvPr id="21" name="Rounded Rectangle 20">
             <a:extLst xmlns:a="http://schemas.openxmlformats.org/drawingml/2006/main">
               <a:ext uri="{FF2B5EF4-FFF2-40B4-BE49-F238E27FC236}">
-                <a16:creationId xmlns:a16="http://schemas.microsoft.com/office/drawing/2014/main" id="{A42B2A53-385F-4FFA-B331-ECF749AB39BE}"/>
+                <a16:creationId xmlns:a16="http://schemas.microsoft.com/office/drawing/2014/main" id="{2960DAF5-7BD6-4E54-A12D-5B070040446F}"/>
               </a:ext>
             </a:extLst>
           </p:cNvPr>
@@ -12628,7 +12948,7 @@
           <p:cNvPr id="22" name="TextBox 21">
             <a:extLst xmlns:a="http://schemas.openxmlformats.org/drawingml/2006/main">
               <a:ext uri="{FF2B5EF4-FFF2-40B4-BE49-F238E27FC236}">
-                <a16:creationId xmlns:a16="http://schemas.microsoft.com/office/drawing/2014/main" id="{C2E67A8B-4E74-4A5E-967D-24BCBB904298}"/>
+                <a16:creationId xmlns:a16="http://schemas.microsoft.com/office/drawing/2014/main" id="{FE75279D-9265-4146-B923-3AB07A940DB4}"/>
               </a:ext>
             </a:extLst>
           </p:cNvPr>
@@ -12675,7 +12995,7 @@
           <p:cNvPr id="23" name="TextBox 22">
             <a:extLst xmlns:a="http://schemas.openxmlformats.org/drawingml/2006/main">
               <a:ext uri="{FF2B5EF4-FFF2-40B4-BE49-F238E27FC236}">
-                <a16:creationId xmlns:a16="http://schemas.microsoft.com/office/drawing/2014/main" id="{9D90711E-01FC-4914-AE95-112D833B6CAD}"/>
+                <a16:creationId xmlns:a16="http://schemas.microsoft.com/office/drawing/2014/main" id="{FF7D3369-C517-47BE-B30A-46E5B4002AA1}"/>
               </a:ext>
             </a:extLst>
           </p:cNvPr>
@@ -12720,7 +13040,7 @@
     </p:spTree>
     <p:extLst>
       <p:ext uri="{BB962C8B-B14F-4D97-AF65-F5344CB8AC3E}">
-        <p14:creationId xmlns:p14="http://schemas.microsoft.com/office/powerpoint/2010/main" val="1280753794"/>
+        <p14:creationId xmlns:p14="http://schemas.microsoft.com/office/powerpoint/2010/main" val="1820330293"/>
       </p:ext>
     </p:extLst>
   </p:cSld>
@@ -12744,7 +13064,7 @@
           <p:cNvPr id="2" name="TextBox 1">
             <a:extLst xmlns:a="http://schemas.openxmlformats.org/drawingml/2006/main">
               <a:ext uri="{FF2B5EF4-FFF2-40B4-BE49-F238E27FC236}">
-                <a16:creationId xmlns:a16="http://schemas.microsoft.com/office/drawing/2014/main" id="{A6973A17-7B17-4747-8BA4-9E7FFF9F3107}"/>
+                <a16:creationId xmlns:a16="http://schemas.microsoft.com/office/drawing/2014/main" id="{25227FBB-FC93-4596-B61F-EBCD962C150E}"/>
               </a:ext>
             </a:extLst>
           </p:cNvPr>
@@ -12791,7 +13111,7 @@
           <p:cNvPr id="3" name="TextBox 2">
             <a:extLst xmlns:a="http://schemas.openxmlformats.org/drawingml/2006/main">
               <a:ext uri="{FF2B5EF4-FFF2-40B4-BE49-F238E27FC236}">
-                <a16:creationId xmlns:a16="http://schemas.microsoft.com/office/drawing/2014/main" id="{F9AFEA9D-FF96-4BDA-978D-E9A6307A45CE}"/>
+                <a16:creationId xmlns:a16="http://schemas.microsoft.com/office/drawing/2014/main" id="{E16F9C71-75BE-4AAA-9B3C-2315D9075830}"/>
               </a:ext>
             </a:extLst>
           </p:cNvPr>
@@ -12838,7 +13158,7 @@
           <p:cNvPr id="4" name="Rectangle 3">
             <a:extLst xmlns:a="http://schemas.openxmlformats.org/drawingml/2006/main">
               <a:ext uri="{FF2B5EF4-FFF2-40B4-BE49-F238E27FC236}">
-                <a16:creationId xmlns:a16="http://schemas.microsoft.com/office/drawing/2014/main" id="{909DD0B9-7329-4670-B30A-0152E3A04EF8}"/>
+                <a16:creationId xmlns:a16="http://schemas.microsoft.com/office/drawing/2014/main" id="{9E708DC1-B22A-47DC-832E-D13F59332F26}"/>
               </a:ext>
             </a:extLst>
           </p:cNvPr>
@@ -12893,7 +13213,7 @@
           <p:cNvPr id="5" name="Rectangle 4">
             <a:extLst xmlns:a="http://schemas.openxmlformats.org/drawingml/2006/main">
               <a:ext uri="{FF2B5EF4-FFF2-40B4-BE49-F238E27FC236}">
-                <a16:creationId xmlns:a16="http://schemas.microsoft.com/office/drawing/2014/main" id="{02866E37-1B83-4910-996B-9E155D3510D0}"/>
+                <a16:creationId xmlns:a16="http://schemas.microsoft.com/office/drawing/2014/main" id="{265E1904-8D2A-41D6-9029-BCA36D555196}"/>
               </a:ext>
             </a:extLst>
           </p:cNvPr>
@@ -12948,7 +13268,7 @@
           <p:cNvPr id="6" name="TextBox 5">
             <a:extLst xmlns:a="http://schemas.openxmlformats.org/drawingml/2006/main">
               <a:ext uri="{FF2B5EF4-FFF2-40B4-BE49-F238E27FC236}">
-                <a16:creationId xmlns:a16="http://schemas.microsoft.com/office/drawing/2014/main" id="{6AADDDF5-E648-47E1-85F9-3AECB7FDE0B8}"/>
+                <a16:creationId xmlns:a16="http://schemas.microsoft.com/office/drawing/2014/main" id="{982C554A-8A49-4266-A30D-048B7ECED7ED}"/>
               </a:ext>
             </a:extLst>
           </p:cNvPr>
@@ -12985,7 +13305,7 @@
                 <a:ea typeface="Aptos"/>
                 <a:cs typeface="Aptos"/>
               </a:rPr>
-              <a:t>Julkinen riippumaton evidenssikooste · 2026.07.25-24 · 2026-07-25 · Lähteet: Statistics Canada; Health Canada; New Zealand Ministry of Health; Destatis; Vero; Sejm; FHM; FTC</a:t>
+              <a:t>Julkinen riippumaton evidenssikooste · 2026.07.26-25 · 2026-07-26 · Lähteet: Statistics Canada; Health Canada; New Zealand Ministry of Health; Destatis; Vero; Sejm; FHM; FTC</a:t>
             </a:r>
           </a:p>
         </p:txBody>
@@ -12995,7 +13315,7 @@
           <p:cNvPr id="7" name="TextBox 6">
             <a:extLst xmlns:a="http://schemas.openxmlformats.org/drawingml/2006/main">
               <a:ext uri="{FF2B5EF4-FFF2-40B4-BE49-F238E27FC236}">
-                <a16:creationId xmlns:a16="http://schemas.microsoft.com/office/drawing/2014/main" id="{4CCE795B-8449-4D2F-8420-16E833F82C90}"/>
+                <a16:creationId xmlns:a16="http://schemas.microsoft.com/office/drawing/2014/main" id="{F6C7EF5A-BBC3-4AED-88B6-E00E203211DF}"/>
               </a:ext>
             </a:extLst>
           </p:cNvPr>
@@ -13462,7 +13782,7 @@
                           <a:ea typeface="Aptos"/>
                           <a:cs typeface="Aptos"/>
                         </a:rPr>
-                        <a:t>virallinen raakareitti 280,685 milj. NZD; tunnistetun vaping-vähittäismyynnin tuettu herkkyys 533,7–731,2 milj. NZD (≈298,5–408,9 milj. EUR; ECB 2024), ei havaittu markkina-arvo</a:t>
+                        <a:t>tunnistettu AIS/AVP-vaping-summa 274,180 milj. NZD (≈153,3 milj. EUR; ECB 2024); kulutustarvikkeet 189,402 + laitteet/hardware 84,709 + sekajärjestelmät 0,069 milj. NZD. NZ 7/10; D5 hylätty, D8/D10 avoinna</a:t>
                       </a:r>
                     </a:p>
                   </a:txBody>
@@ -13648,7 +13968,7 @@
           <p:cNvPr id="9" name="TextBox 8">
             <a:extLst xmlns:a="http://schemas.openxmlformats.org/drawingml/2006/main">
               <a:ext uri="{FF2B5EF4-FFF2-40B4-BE49-F238E27FC236}">
-                <a16:creationId xmlns:a16="http://schemas.microsoft.com/office/drawing/2014/main" id="{86DC43B7-4D12-4287-8C27-11B4470AA66E}"/>
+                <a16:creationId xmlns:a16="http://schemas.microsoft.com/office/drawing/2014/main" id="{DDF4F106-EA4B-458B-B446-DDB048C7A4F3}"/>
               </a:ext>
             </a:extLst>
           </p:cNvPr>
@@ -13693,7 +14013,7 @@
     </p:spTree>
     <p:extLst>
       <p:ext uri="{BB962C8B-B14F-4D97-AF65-F5344CB8AC3E}">
-        <p14:creationId xmlns:p14="http://schemas.microsoft.com/office/powerpoint/2010/main" val="1158905227"/>
+        <p14:creationId xmlns:p14="http://schemas.microsoft.com/office/powerpoint/2010/main" val="1594477296"/>
       </p:ext>
     </p:extLst>
   </p:cSld>
@@ -13717,7 +14037,7 @@
           <p:cNvPr id="2" name="TextBox 1">
             <a:extLst xmlns:a="http://schemas.openxmlformats.org/drawingml/2006/main">
               <a:ext uri="{FF2B5EF4-FFF2-40B4-BE49-F238E27FC236}">
-                <a16:creationId xmlns:a16="http://schemas.microsoft.com/office/drawing/2014/main" id="{52013A41-F25E-4D17-B90B-6DA32F007D0F}"/>
+                <a16:creationId xmlns:a16="http://schemas.microsoft.com/office/drawing/2014/main" id="{83063186-0F60-4A7B-80A1-B36B43884857}"/>
               </a:ext>
             </a:extLst>
           </p:cNvPr>
@@ -13764,7 +14084,7 @@
           <p:cNvPr id="3" name="TextBox 2">
             <a:extLst xmlns:a="http://schemas.openxmlformats.org/drawingml/2006/main">
               <a:ext uri="{FF2B5EF4-FFF2-40B4-BE49-F238E27FC236}">
-                <a16:creationId xmlns:a16="http://schemas.microsoft.com/office/drawing/2014/main" id="{2BF557E7-C83B-4D23-BC82-46AC1E4B1A32}"/>
+                <a16:creationId xmlns:a16="http://schemas.microsoft.com/office/drawing/2014/main" id="{93B54F8B-7E1C-425C-B31B-F2864726A460}"/>
               </a:ext>
             </a:extLst>
           </p:cNvPr>
@@ -13811,7 +14131,7 @@
           <p:cNvPr id="4" name="Rectangle 3">
             <a:extLst xmlns:a="http://schemas.openxmlformats.org/drawingml/2006/main">
               <a:ext uri="{FF2B5EF4-FFF2-40B4-BE49-F238E27FC236}">
-                <a16:creationId xmlns:a16="http://schemas.microsoft.com/office/drawing/2014/main" id="{97FC073F-368D-4146-A5E6-BAACA159E9AC}"/>
+                <a16:creationId xmlns:a16="http://schemas.microsoft.com/office/drawing/2014/main" id="{56424C91-5175-445B-B165-E2D8CA07E3FD}"/>
               </a:ext>
             </a:extLst>
           </p:cNvPr>
@@ -13866,7 +14186,7 @@
           <p:cNvPr id="5" name="Rectangle 4">
             <a:extLst xmlns:a="http://schemas.openxmlformats.org/drawingml/2006/main">
               <a:ext uri="{FF2B5EF4-FFF2-40B4-BE49-F238E27FC236}">
-                <a16:creationId xmlns:a16="http://schemas.microsoft.com/office/drawing/2014/main" id="{DBAC40DE-AE26-439B-BF3D-D054F0A22255}"/>
+                <a16:creationId xmlns:a16="http://schemas.microsoft.com/office/drawing/2014/main" id="{833D052C-7384-455D-BDFA-B855DA3EBE58}"/>
               </a:ext>
             </a:extLst>
           </p:cNvPr>
@@ -13921,7 +14241,7 @@
           <p:cNvPr id="6" name="TextBox 5">
             <a:extLst xmlns:a="http://schemas.openxmlformats.org/drawingml/2006/main">
               <a:ext uri="{FF2B5EF4-FFF2-40B4-BE49-F238E27FC236}">
-                <a16:creationId xmlns:a16="http://schemas.microsoft.com/office/drawing/2014/main" id="{A4059344-BB12-408E-BF42-1C376F8A449D}"/>
+                <a16:creationId xmlns:a16="http://schemas.microsoft.com/office/drawing/2014/main" id="{481FD478-9724-4E22-947A-F865E675CADB}"/>
               </a:ext>
             </a:extLst>
           </p:cNvPr>
@@ -13958,7 +14278,7 @@
                 <a:ea typeface="Aptos"/>
                 <a:cs typeface="Aptos"/>
               </a:rPr>
-              <a:t>Julkinen riippumaton evidenssikooste · 2026.07.25-24 · 2026-07-25 · Lähteet: Statistics Canada; Health Canada 2024</a:t>
+              <a:t>Julkinen riippumaton evidenssikooste · 2026.07.26-25 · 2026-07-26 · Lähteet: Statistics Canada; Health Canada 2024</a:t>
             </a:r>
           </a:p>
         </p:txBody>
@@ -13968,7 +14288,7 @@
           <p:cNvPr id="7" name="TextBox 6">
             <a:extLst xmlns:a="http://schemas.openxmlformats.org/drawingml/2006/main">
               <a:ext uri="{FF2B5EF4-FFF2-40B4-BE49-F238E27FC236}">
-                <a16:creationId xmlns:a16="http://schemas.microsoft.com/office/drawing/2014/main" id="{ACE7AC54-1900-4DC4-9D45-5257C508F1B5}"/>
+                <a16:creationId xmlns:a16="http://schemas.microsoft.com/office/drawing/2014/main" id="{A845117B-4368-4846-96E4-51AC391B8DDE}"/>
               </a:ext>
             </a:extLst>
           </p:cNvPr>
@@ -14015,7 +14335,7 @@
           <p:cNvPr id="8" name="Rounded Rectangle 7">
             <a:extLst xmlns:a="http://schemas.openxmlformats.org/drawingml/2006/main">
               <a:ext uri="{FF2B5EF4-FFF2-40B4-BE49-F238E27FC236}">
-                <a16:creationId xmlns:a16="http://schemas.microsoft.com/office/drawing/2014/main" id="{E4A1126B-A3C2-4FA5-85A5-BE28DA2237F2}"/>
+                <a16:creationId xmlns:a16="http://schemas.microsoft.com/office/drawing/2014/main" id="{2A73D13D-D25F-408D-A5A1-BFFF125152C2}"/>
               </a:ext>
             </a:extLst>
           </p:cNvPr>
@@ -14072,7 +14392,7 @@
           <p:cNvPr id="9" name="TextBox 8">
             <a:extLst xmlns:a="http://schemas.openxmlformats.org/drawingml/2006/main">
               <a:ext uri="{FF2B5EF4-FFF2-40B4-BE49-F238E27FC236}">
-                <a16:creationId xmlns:a16="http://schemas.microsoft.com/office/drawing/2014/main" id="{A974B582-5FBA-403B-9E17-F93B1181F7F8}"/>
+                <a16:creationId xmlns:a16="http://schemas.microsoft.com/office/drawing/2014/main" id="{886B19E0-910F-4489-81EB-FBA0F2E5C551}"/>
               </a:ext>
             </a:extLst>
           </p:cNvPr>
@@ -14119,7 +14439,7 @@
           <p:cNvPr id="10" name="TextBox 9">
             <a:extLst xmlns:a="http://schemas.openxmlformats.org/drawingml/2006/main">
               <a:ext uri="{FF2B5EF4-FFF2-40B4-BE49-F238E27FC236}">
-                <a16:creationId xmlns:a16="http://schemas.microsoft.com/office/drawing/2014/main" id="{4A6E4F69-08F1-4A4B-9D3B-D5C62D165768}"/>
+                <a16:creationId xmlns:a16="http://schemas.microsoft.com/office/drawing/2014/main" id="{975C1385-2BDE-469E-8AB1-E6DDA3A57127}"/>
               </a:ext>
             </a:extLst>
           </p:cNvPr>
@@ -14166,7 +14486,7 @@
           <p:cNvPr id="11" name="Rounded Rectangle 10">
             <a:extLst xmlns:a="http://schemas.openxmlformats.org/drawingml/2006/main">
               <a:ext uri="{FF2B5EF4-FFF2-40B4-BE49-F238E27FC236}">
-                <a16:creationId xmlns:a16="http://schemas.microsoft.com/office/drawing/2014/main" id="{087F1794-D8EE-41D4-AE80-04B129E46E2C}"/>
+                <a16:creationId xmlns:a16="http://schemas.microsoft.com/office/drawing/2014/main" id="{E33C3EDA-80E1-4798-8379-75E8A0A8C171}"/>
               </a:ext>
             </a:extLst>
           </p:cNvPr>
@@ -14223,7 +14543,7 @@
           <p:cNvPr id="12" name="TextBox 11">
             <a:extLst xmlns:a="http://schemas.openxmlformats.org/drawingml/2006/main">
               <a:ext uri="{FF2B5EF4-FFF2-40B4-BE49-F238E27FC236}">
-                <a16:creationId xmlns:a16="http://schemas.microsoft.com/office/drawing/2014/main" id="{204528EE-A5DA-4850-BB2A-CD619F61C6A2}"/>
+                <a16:creationId xmlns:a16="http://schemas.microsoft.com/office/drawing/2014/main" id="{67896992-2EB1-40CE-A747-39B3BAA7F67A}"/>
               </a:ext>
             </a:extLst>
           </p:cNvPr>
@@ -14270,7 +14590,7 @@
           <p:cNvPr id="13" name="TextBox 12">
             <a:extLst xmlns:a="http://schemas.openxmlformats.org/drawingml/2006/main">
               <a:ext uri="{FF2B5EF4-FFF2-40B4-BE49-F238E27FC236}">
-                <a16:creationId xmlns:a16="http://schemas.microsoft.com/office/drawing/2014/main" id="{9534A112-5E37-404C-98AD-CF95298A8326}"/>
+                <a16:creationId xmlns:a16="http://schemas.microsoft.com/office/drawing/2014/main" id="{BF0D3A7F-68D2-424C-BACD-AA0857AE37B7}"/>
               </a:ext>
             </a:extLst>
           </p:cNvPr>
@@ -14317,7 +14637,7 @@
           <p:cNvPr id="14" name="Rounded Rectangle 13">
             <a:extLst xmlns:a="http://schemas.openxmlformats.org/drawingml/2006/main">
               <a:ext uri="{FF2B5EF4-FFF2-40B4-BE49-F238E27FC236}">
-                <a16:creationId xmlns:a16="http://schemas.microsoft.com/office/drawing/2014/main" id="{A4B0E506-C672-41AE-8C26-DB4E31CB2B7F}"/>
+                <a16:creationId xmlns:a16="http://schemas.microsoft.com/office/drawing/2014/main" id="{030614F7-1B4F-4C5A-B76B-78C3ADDC9754}"/>
               </a:ext>
             </a:extLst>
           </p:cNvPr>
@@ -14374,7 +14694,7 @@
           <p:cNvPr id="15" name="TextBox 14">
             <a:extLst xmlns:a="http://schemas.openxmlformats.org/drawingml/2006/main">
               <a:ext uri="{FF2B5EF4-FFF2-40B4-BE49-F238E27FC236}">
-                <a16:creationId xmlns:a16="http://schemas.microsoft.com/office/drawing/2014/main" id="{B9268679-9147-47C0-876C-00B323679077}"/>
+                <a16:creationId xmlns:a16="http://schemas.microsoft.com/office/drawing/2014/main" id="{BE68EC49-015D-4D72-B06A-66A4BCB94178}"/>
               </a:ext>
             </a:extLst>
           </p:cNvPr>
@@ -14421,7 +14741,7 @@
           <p:cNvPr id="16" name="TextBox 15">
             <a:extLst xmlns:a="http://schemas.openxmlformats.org/drawingml/2006/main">
               <a:ext uri="{FF2B5EF4-FFF2-40B4-BE49-F238E27FC236}">
-                <a16:creationId xmlns:a16="http://schemas.microsoft.com/office/drawing/2014/main" id="{5C0B4814-DAD9-4164-B204-9F8220297D2C}"/>
+                <a16:creationId xmlns:a16="http://schemas.microsoft.com/office/drawing/2014/main" id="{390DBE64-267E-43B9-87D3-B248829A9366}"/>
               </a:ext>
             </a:extLst>
           </p:cNvPr>
@@ -14468,7 +14788,7 @@
           <p:cNvPr id="17" name="TextBox 16">
             <a:extLst xmlns:a="http://schemas.openxmlformats.org/drawingml/2006/main">
               <a:ext uri="{FF2B5EF4-FFF2-40B4-BE49-F238E27FC236}">
-                <a16:creationId xmlns:a16="http://schemas.microsoft.com/office/drawing/2014/main" id="{477FE4CF-A3A3-4CA2-A11C-D97075DFD7AF}"/>
+                <a16:creationId xmlns:a16="http://schemas.microsoft.com/office/drawing/2014/main" id="{311F9100-8FAD-4BC3-9659-88CE616B7D6E}"/>
               </a:ext>
             </a:extLst>
           </p:cNvPr>
@@ -14515,7 +14835,7 @@
           <p:cNvPr id="18" name="Rounded Rectangle 17">
             <a:extLst xmlns:a="http://schemas.openxmlformats.org/drawingml/2006/main">
               <a:ext uri="{FF2B5EF4-FFF2-40B4-BE49-F238E27FC236}">
-                <a16:creationId xmlns:a16="http://schemas.microsoft.com/office/drawing/2014/main" id="{714DFE19-A631-4ACF-BAE0-9777EE8C9362}"/>
+                <a16:creationId xmlns:a16="http://schemas.microsoft.com/office/drawing/2014/main" id="{99D30240-3FC3-4B76-99D2-12DC4ED0F1BF}"/>
               </a:ext>
             </a:extLst>
           </p:cNvPr>
@@ -14572,7 +14892,7 @@
           <p:cNvPr id="19" name="TextBox 18">
             <a:extLst xmlns:a="http://schemas.openxmlformats.org/drawingml/2006/main">
               <a:ext uri="{FF2B5EF4-FFF2-40B4-BE49-F238E27FC236}">
-                <a16:creationId xmlns:a16="http://schemas.microsoft.com/office/drawing/2014/main" id="{83E51E75-19A4-449D-9608-B883FAB94969}"/>
+                <a16:creationId xmlns:a16="http://schemas.microsoft.com/office/drawing/2014/main" id="{1A9F35E5-F36F-4B94-A204-9454245B7535}"/>
               </a:ext>
             </a:extLst>
           </p:cNvPr>
@@ -14619,7 +14939,7 @@
           <p:cNvPr id="20" name="TextBox 19">
             <a:extLst xmlns:a="http://schemas.openxmlformats.org/drawingml/2006/main">
               <a:ext uri="{FF2B5EF4-FFF2-40B4-BE49-F238E27FC236}">
-                <a16:creationId xmlns:a16="http://schemas.microsoft.com/office/drawing/2014/main" id="{8C9A81C3-4B82-4C68-8CF0-2FB2190049DF}"/>
+                <a16:creationId xmlns:a16="http://schemas.microsoft.com/office/drawing/2014/main" id="{E7E04E6F-E809-4F18-84A3-0F0EDE6C12CA}"/>
               </a:ext>
             </a:extLst>
           </p:cNvPr>
@@ -14664,7 +14984,7 @@
     </p:spTree>
     <p:extLst>
       <p:ext uri="{BB962C8B-B14F-4D97-AF65-F5344CB8AC3E}">
-        <p14:creationId xmlns:p14="http://schemas.microsoft.com/office/powerpoint/2010/main" val="1587937967"/>
+        <p14:creationId xmlns:p14="http://schemas.microsoft.com/office/powerpoint/2010/main" val="699025715"/>
       </p:ext>
     </p:extLst>
   </p:cSld>
@@ -14688,7 +15008,7 @@
           <p:cNvPr id="2" name="TextBox 1">
             <a:extLst xmlns:a="http://schemas.openxmlformats.org/drawingml/2006/main">
               <a:ext uri="{FF2B5EF4-FFF2-40B4-BE49-F238E27FC236}">
-                <a16:creationId xmlns:a16="http://schemas.microsoft.com/office/drawing/2014/main" id="{8B764819-61CD-4548-8029-A0A5F1316C1F}"/>
+                <a16:creationId xmlns:a16="http://schemas.microsoft.com/office/drawing/2014/main" id="{60688A44-045B-484C-9C40-276DD03286CE}"/>
               </a:ext>
             </a:extLst>
           </p:cNvPr>
@@ -14735,7 +15055,7 @@
           <p:cNvPr id="3" name="TextBox 2">
             <a:extLst xmlns:a="http://schemas.openxmlformats.org/drawingml/2006/main">
               <a:ext uri="{FF2B5EF4-FFF2-40B4-BE49-F238E27FC236}">
-                <a16:creationId xmlns:a16="http://schemas.microsoft.com/office/drawing/2014/main" id="{EB2A6E96-FDEC-463A-8128-09FCA0CAC425}"/>
+                <a16:creationId xmlns:a16="http://schemas.microsoft.com/office/drawing/2014/main" id="{67B895F6-66E2-4BE5-B312-3BBD00222385}"/>
               </a:ext>
             </a:extLst>
           </p:cNvPr>
@@ -14782,7 +15102,7 @@
           <p:cNvPr id="4" name="Rectangle 3">
             <a:extLst xmlns:a="http://schemas.openxmlformats.org/drawingml/2006/main">
               <a:ext uri="{FF2B5EF4-FFF2-40B4-BE49-F238E27FC236}">
-                <a16:creationId xmlns:a16="http://schemas.microsoft.com/office/drawing/2014/main" id="{DD7BA262-C157-481A-9C91-A008BF41B979}"/>
+                <a16:creationId xmlns:a16="http://schemas.microsoft.com/office/drawing/2014/main" id="{D9807A64-E501-4DFA-960B-494673ECD705}"/>
               </a:ext>
             </a:extLst>
           </p:cNvPr>
@@ -14837,7 +15157,7 @@
           <p:cNvPr id="5" name="Rectangle 4">
             <a:extLst xmlns:a="http://schemas.openxmlformats.org/drawingml/2006/main">
               <a:ext uri="{FF2B5EF4-FFF2-40B4-BE49-F238E27FC236}">
-                <a16:creationId xmlns:a16="http://schemas.microsoft.com/office/drawing/2014/main" id="{FA58A9C3-8448-4684-BFDD-55B126FF9DAD}"/>
+                <a16:creationId xmlns:a16="http://schemas.microsoft.com/office/drawing/2014/main" id="{B4384ADF-79B9-4303-845B-6BA322324048}"/>
               </a:ext>
             </a:extLst>
           </p:cNvPr>
@@ -14892,7 +15212,7 @@
           <p:cNvPr id="6" name="TextBox 5">
             <a:extLst xmlns:a="http://schemas.openxmlformats.org/drawingml/2006/main">
               <a:ext uri="{FF2B5EF4-FFF2-40B4-BE49-F238E27FC236}">
-                <a16:creationId xmlns:a16="http://schemas.microsoft.com/office/drawing/2014/main" id="{DF5C6B30-3AF8-4248-9165-BEE61BDAD411}"/>
+                <a16:creationId xmlns:a16="http://schemas.microsoft.com/office/drawing/2014/main" id="{FACC3696-8DD6-49DC-9327-62D488C6A422}"/>
               </a:ext>
             </a:extLst>
           </p:cNvPr>
@@ -14929,7 +15249,7 @@
                 <a:ea typeface="Aptos"/>
                 <a:cs typeface="Aptos"/>
               </a:rPr>
-              <a:t>Julkinen riippumaton evidenssikooste · 2026.07.25-24 · 2026-07-24 · Lähteet: Destatis</a:t>
+              <a:t>Julkinen riippumaton evidenssikooste · 2026.07.26-25 · 2026-07-26 · Lähteet: Destatis</a:t>
             </a:r>
           </a:p>
         </p:txBody>
@@ -14939,7 +15259,7 @@
           <p:cNvPr id="7" name="TextBox 6">
             <a:extLst xmlns:a="http://schemas.openxmlformats.org/drawingml/2006/main">
               <a:ext uri="{FF2B5EF4-FFF2-40B4-BE49-F238E27FC236}">
-                <a16:creationId xmlns:a16="http://schemas.microsoft.com/office/drawing/2014/main" id="{DFD5B378-836B-46CA-AAF3-8500248DB82F}"/>
+                <a16:creationId xmlns:a16="http://schemas.microsoft.com/office/drawing/2014/main" id="{13E98479-3D7A-43EE-8D6D-26D4FD77237D}"/>
               </a:ext>
             </a:extLst>
           </p:cNvPr>
@@ -15452,7 +15772,7 @@
           <p:cNvPr id="9" name="TextBox 8">
             <a:extLst xmlns:a="http://schemas.openxmlformats.org/drawingml/2006/main">
               <a:ext uri="{FF2B5EF4-FFF2-40B4-BE49-F238E27FC236}">
-                <a16:creationId xmlns:a16="http://schemas.microsoft.com/office/drawing/2014/main" id="{B138C230-7529-49D0-9143-555C4F1E6D68}"/>
+                <a16:creationId xmlns:a16="http://schemas.microsoft.com/office/drawing/2014/main" id="{D43526D8-1661-45B9-B8E9-4349599B5722}"/>
               </a:ext>
             </a:extLst>
           </p:cNvPr>
@@ -15497,7 +15817,7 @@
     </p:spTree>
     <p:extLst>
       <p:ext uri="{BB962C8B-B14F-4D97-AF65-F5344CB8AC3E}">
-        <p14:creationId xmlns:p14="http://schemas.microsoft.com/office/powerpoint/2010/main" val="594205297"/>
+        <p14:creationId xmlns:p14="http://schemas.microsoft.com/office/powerpoint/2010/main" val="782471855"/>
       </p:ext>
     </p:extLst>
   </p:cSld>
@@ -15521,7 +15841,7 @@
           <p:cNvPr id="2" name="TextBox 1">
             <a:extLst xmlns:a="http://schemas.openxmlformats.org/drawingml/2006/main">
               <a:ext uri="{FF2B5EF4-FFF2-40B4-BE49-F238E27FC236}">
-                <a16:creationId xmlns:a16="http://schemas.microsoft.com/office/drawing/2014/main" id="{56F7CFC4-8DD8-4A28-90E5-59CD5748EC11}"/>
+                <a16:creationId xmlns:a16="http://schemas.microsoft.com/office/drawing/2014/main" id="{8CB47731-C9F7-4487-9A8D-F2907CC275D6}"/>
               </a:ext>
             </a:extLst>
           </p:cNvPr>
@@ -15568,7 +15888,7 @@
           <p:cNvPr id="3" name="TextBox 2">
             <a:extLst xmlns:a="http://schemas.openxmlformats.org/drawingml/2006/main">
               <a:ext uri="{FF2B5EF4-FFF2-40B4-BE49-F238E27FC236}">
-                <a16:creationId xmlns:a16="http://schemas.microsoft.com/office/drawing/2014/main" id="{41E7B81C-3015-4F67-A134-4C31ACABBA16}"/>
+                <a16:creationId xmlns:a16="http://schemas.microsoft.com/office/drawing/2014/main" id="{1D9BD281-F884-4B4D-B8C5-FA2F5CE40168}"/>
               </a:ext>
             </a:extLst>
           </p:cNvPr>
@@ -15615,7 +15935,7 @@
           <p:cNvPr id="4" name="Rectangle 3">
             <a:extLst xmlns:a="http://schemas.openxmlformats.org/drawingml/2006/main">
               <a:ext uri="{FF2B5EF4-FFF2-40B4-BE49-F238E27FC236}">
-                <a16:creationId xmlns:a16="http://schemas.microsoft.com/office/drawing/2014/main" id="{203130B4-35D1-4D13-AC5D-FAD0F9E36A14}"/>
+                <a16:creationId xmlns:a16="http://schemas.microsoft.com/office/drawing/2014/main" id="{B51C9098-0D80-4E64-8D39-722A9ED379E3}"/>
               </a:ext>
             </a:extLst>
           </p:cNvPr>
@@ -15670,7 +15990,7 @@
           <p:cNvPr id="5" name="Rectangle 4">
             <a:extLst xmlns:a="http://schemas.openxmlformats.org/drawingml/2006/main">
               <a:ext uri="{FF2B5EF4-FFF2-40B4-BE49-F238E27FC236}">
-                <a16:creationId xmlns:a16="http://schemas.microsoft.com/office/drawing/2014/main" id="{F637019C-B553-43B2-96DC-75F0D64BB7F8}"/>
+                <a16:creationId xmlns:a16="http://schemas.microsoft.com/office/drawing/2014/main" id="{19FB9099-EBCD-4D2D-8B77-1685C81A7422}"/>
               </a:ext>
             </a:extLst>
           </p:cNvPr>
@@ -15725,7 +16045,7 @@
           <p:cNvPr id="6" name="TextBox 5">
             <a:extLst xmlns:a="http://schemas.openxmlformats.org/drawingml/2006/main">
               <a:ext uri="{FF2B5EF4-FFF2-40B4-BE49-F238E27FC236}">
-                <a16:creationId xmlns:a16="http://schemas.microsoft.com/office/drawing/2014/main" id="{8DC07F8D-9083-4624-BE81-8E832CC2BD6B}"/>
+                <a16:creationId xmlns:a16="http://schemas.microsoft.com/office/drawing/2014/main" id="{E4651B89-2F5C-40D8-A745-7BF39F47BFF6}"/>
               </a:ext>
             </a:extLst>
           </p:cNvPr>
@@ -15762,7 +16082,7 @@
                 <a:ea typeface="Aptos"/>
                 <a:cs typeface="Aptos"/>
               </a:rPr>
-              <a:t>Julkinen riippumaton evidenssikooste · 2026.07.25-24 · 2026-07-24 · Lähteet: Destatis; inTaste.de</a:t>
+              <a:t>Julkinen riippumaton evidenssikooste · 2026.07.26-25 · 2026-07-26 · Lähteet: Destatis; inTaste.de</a:t>
             </a:r>
           </a:p>
         </p:txBody>
@@ -15772,7 +16092,7 @@
           <p:cNvPr id="7" name="TextBox 6">
             <a:extLst xmlns:a="http://schemas.openxmlformats.org/drawingml/2006/main">
               <a:ext uri="{FF2B5EF4-FFF2-40B4-BE49-F238E27FC236}">
-                <a16:creationId xmlns:a16="http://schemas.microsoft.com/office/drawing/2014/main" id="{F60F545D-FE19-42E6-83BD-22C18BC0FF44}"/>
+                <a16:creationId xmlns:a16="http://schemas.microsoft.com/office/drawing/2014/main" id="{2471A107-C390-4FAA-8730-4850DF023AF9}"/>
               </a:ext>
             </a:extLst>
           </p:cNvPr>
@@ -15819,7 +16139,7 @@
           <p:cNvPr id="8" name="Rounded Rectangle 7">
             <a:extLst xmlns:a="http://schemas.openxmlformats.org/drawingml/2006/main">
               <a:ext uri="{FF2B5EF4-FFF2-40B4-BE49-F238E27FC236}">
-                <a16:creationId xmlns:a16="http://schemas.microsoft.com/office/drawing/2014/main" id="{3DBC2375-777E-4C90-9E12-EEA82445C0B0}"/>
+                <a16:creationId xmlns:a16="http://schemas.microsoft.com/office/drawing/2014/main" id="{7D495667-C193-4D37-9F15-56719033023A}"/>
               </a:ext>
             </a:extLst>
           </p:cNvPr>
@@ -15876,7 +16196,7 @@
           <p:cNvPr id="9" name="TextBox 8">
             <a:extLst xmlns:a="http://schemas.openxmlformats.org/drawingml/2006/main">
               <a:ext uri="{FF2B5EF4-FFF2-40B4-BE49-F238E27FC236}">
-                <a16:creationId xmlns:a16="http://schemas.microsoft.com/office/drawing/2014/main" id="{D54E68F6-4982-44F1-A071-0EC3EF488D71}"/>
+                <a16:creationId xmlns:a16="http://schemas.microsoft.com/office/drawing/2014/main" id="{425859CE-4D01-47F0-9157-C1087C9F6201}"/>
               </a:ext>
             </a:extLst>
           </p:cNvPr>
@@ -15923,7 +16243,7 @@
           <p:cNvPr id="10" name="TextBox 9">
             <a:extLst xmlns:a="http://schemas.openxmlformats.org/drawingml/2006/main">
               <a:ext uri="{FF2B5EF4-FFF2-40B4-BE49-F238E27FC236}">
-                <a16:creationId xmlns:a16="http://schemas.microsoft.com/office/drawing/2014/main" id="{9AB9EEA2-B848-43D7-84F0-DE6DD726BE6A}"/>
+                <a16:creationId xmlns:a16="http://schemas.microsoft.com/office/drawing/2014/main" id="{731732D0-2DC4-4BA0-A8D6-BE237C82FF16}"/>
               </a:ext>
             </a:extLst>
           </p:cNvPr>
@@ -15970,7 +16290,7 @@
           <p:cNvPr id="11" name="Rounded Rectangle 10">
             <a:extLst xmlns:a="http://schemas.openxmlformats.org/drawingml/2006/main">
               <a:ext uri="{FF2B5EF4-FFF2-40B4-BE49-F238E27FC236}">
-                <a16:creationId xmlns:a16="http://schemas.microsoft.com/office/drawing/2014/main" id="{9CAFF340-E2B5-4888-9997-C2330994229E}"/>
+                <a16:creationId xmlns:a16="http://schemas.microsoft.com/office/drawing/2014/main" id="{A09358A9-97A1-4CCE-9BE2-D823C2E552B5}"/>
               </a:ext>
             </a:extLst>
           </p:cNvPr>
@@ -16027,7 +16347,7 @@
           <p:cNvPr id="12" name="TextBox 11">
             <a:extLst xmlns:a="http://schemas.openxmlformats.org/drawingml/2006/main">
               <a:ext uri="{FF2B5EF4-FFF2-40B4-BE49-F238E27FC236}">
-                <a16:creationId xmlns:a16="http://schemas.microsoft.com/office/drawing/2014/main" id="{A6ECBD39-9909-45E9-9044-D00A20238F4A}"/>
+                <a16:creationId xmlns:a16="http://schemas.microsoft.com/office/drawing/2014/main" id="{91E2C687-87EE-4443-8629-E92F523882CE}"/>
               </a:ext>
             </a:extLst>
           </p:cNvPr>
@@ -16074,7 +16394,7 @@
           <p:cNvPr id="13" name="TextBox 12">
             <a:extLst xmlns:a="http://schemas.openxmlformats.org/drawingml/2006/main">
               <a:ext uri="{FF2B5EF4-FFF2-40B4-BE49-F238E27FC236}">
-                <a16:creationId xmlns:a16="http://schemas.microsoft.com/office/drawing/2014/main" id="{42A6A795-7982-4AA8-9879-9FAD111DCAEB}"/>
+                <a16:creationId xmlns:a16="http://schemas.microsoft.com/office/drawing/2014/main" id="{A716C0F2-0FD4-429F-BE59-4B2209454FD0}"/>
               </a:ext>
             </a:extLst>
           </p:cNvPr>
@@ -16121,7 +16441,7 @@
           <p:cNvPr id="14" name="Rounded Rectangle 13">
             <a:extLst xmlns:a="http://schemas.openxmlformats.org/drawingml/2006/main">
               <a:ext uri="{FF2B5EF4-FFF2-40B4-BE49-F238E27FC236}">
-                <a16:creationId xmlns:a16="http://schemas.microsoft.com/office/drawing/2014/main" id="{97218E1B-C140-44CF-8A1B-D14744E9E053}"/>
+                <a16:creationId xmlns:a16="http://schemas.microsoft.com/office/drawing/2014/main" id="{C68CCCE0-CF88-4C4A-91EF-A8F04D53C90B}"/>
               </a:ext>
             </a:extLst>
           </p:cNvPr>
@@ -16178,7 +16498,7 @@
           <p:cNvPr id="15" name="TextBox 14">
             <a:extLst xmlns:a="http://schemas.openxmlformats.org/drawingml/2006/main">
               <a:ext uri="{FF2B5EF4-FFF2-40B4-BE49-F238E27FC236}">
-                <a16:creationId xmlns:a16="http://schemas.microsoft.com/office/drawing/2014/main" id="{16B9A86D-9E51-485D-A00D-2FA2BC5E805D}"/>
+                <a16:creationId xmlns:a16="http://schemas.microsoft.com/office/drawing/2014/main" id="{F73D9F42-1454-4AC6-9957-B4055B881DCC}"/>
               </a:ext>
             </a:extLst>
           </p:cNvPr>
@@ -16225,7 +16545,7 @@
           <p:cNvPr id="16" name="TextBox 15">
             <a:extLst xmlns:a="http://schemas.openxmlformats.org/drawingml/2006/main">
               <a:ext uri="{FF2B5EF4-FFF2-40B4-BE49-F238E27FC236}">
-                <a16:creationId xmlns:a16="http://schemas.microsoft.com/office/drawing/2014/main" id="{3B07D29F-DDED-4FC7-8621-9A17087E7F4D}"/>
+                <a16:creationId xmlns:a16="http://schemas.microsoft.com/office/drawing/2014/main" id="{BBB30F4E-FD34-4ABA-98B2-F8605D378511}"/>
               </a:ext>
             </a:extLst>
           </p:cNvPr>
@@ -16272,7 +16592,7 @@
           <p:cNvPr id="17" name="TextBox 16">
             <a:extLst xmlns:a="http://schemas.openxmlformats.org/drawingml/2006/main">
               <a:ext uri="{FF2B5EF4-FFF2-40B4-BE49-F238E27FC236}">
-                <a16:creationId xmlns:a16="http://schemas.microsoft.com/office/drawing/2014/main" id="{98002460-733F-4728-B58C-D98E662BCC9C}"/>
+                <a16:creationId xmlns:a16="http://schemas.microsoft.com/office/drawing/2014/main" id="{4FC3F3AA-9F53-4626-A3C0-29484380A66B}"/>
               </a:ext>
             </a:extLst>
           </p:cNvPr>
@@ -16319,7 +16639,7 @@
           <p:cNvPr id="18" name="Rounded Rectangle 17">
             <a:extLst xmlns:a="http://schemas.openxmlformats.org/drawingml/2006/main">
               <a:ext uri="{FF2B5EF4-FFF2-40B4-BE49-F238E27FC236}">
-                <a16:creationId xmlns:a16="http://schemas.microsoft.com/office/drawing/2014/main" id="{800956F9-77B1-437F-ADBC-C900F4E74AB1}"/>
+                <a16:creationId xmlns:a16="http://schemas.microsoft.com/office/drawing/2014/main" id="{16B7396D-BA82-4A42-9FEE-F03158AEF9D8}"/>
               </a:ext>
             </a:extLst>
           </p:cNvPr>
@@ -16376,7 +16696,7 @@
           <p:cNvPr id="19" name="TextBox 18">
             <a:extLst xmlns:a="http://schemas.openxmlformats.org/drawingml/2006/main">
               <a:ext uri="{FF2B5EF4-FFF2-40B4-BE49-F238E27FC236}">
-                <a16:creationId xmlns:a16="http://schemas.microsoft.com/office/drawing/2014/main" id="{3075B220-B453-46A5-B050-D2830BE8BCBE}"/>
+                <a16:creationId xmlns:a16="http://schemas.microsoft.com/office/drawing/2014/main" id="{58E05131-9B36-4442-A978-DBA030838AA7}"/>
               </a:ext>
             </a:extLst>
           </p:cNvPr>
@@ -16423,7 +16743,7 @@
           <p:cNvPr id="20" name="TextBox 19">
             <a:extLst xmlns:a="http://schemas.openxmlformats.org/drawingml/2006/main">
               <a:ext uri="{FF2B5EF4-FFF2-40B4-BE49-F238E27FC236}">
-                <a16:creationId xmlns:a16="http://schemas.microsoft.com/office/drawing/2014/main" id="{9E59822E-3888-4DD2-ADFC-699934728558}"/>
+                <a16:creationId xmlns:a16="http://schemas.microsoft.com/office/drawing/2014/main" id="{A4CD7ED3-9A58-49C7-80F8-F0AF30401A68}"/>
               </a:ext>
             </a:extLst>
           </p:cNvPr>
@@ -16468,7 +16788,7 @@
     </p:spTree>
     <p:extLst>
       <p:ext uri="{BB962C8B-B14F-4D97-AF65-F5344CB8AC3E}">
-        <p14:creationId xmlns:p14="http://schemas.microsoft.com/office/powerpoint/2010/main" val="508191430"/>
+        <p14:creationId xmlns:p14="http://schemas.microsoft.com/office/powerpoint/2010/main" val="1325011347"/>
       </p:ext>
     </p:extLst>
   </p:cSld>
@@ -16492,7 +16812,7 @@
           <p:cNvPr id="2" name="TextBox 1">
             <a:extLst xmlns:a="http://schemas.openxmlformats.org/drawingml/2006/main">
               <a:ext uri="{FF2B5EF4-FFF2-40B4-BE49-F238E27FC236}">
-                <a16:creationId xmlns:a16="http://schemas.microsoft.com/office/drawing/2014/main" id="{22836512-29DA-4C43-BB03-6375C77A6A99}"/>
+                <a16:creationId xmlns:a16="http://schemas.microsoft.com/office/drawing/2014/main" id="{BAAF108F-4B2F-4C5D-9F2B-79D5B9157ED6}"/>
               </a:ext>
             </a:extLst>
           </p:cNvPr>
@@ -16539,7 +16859,7 @@
           <p:cNvPr id="3" name="TextBox 2">
             <a:extLst xmlns:a="http://schemas.openxmlformats.org/drawingml/2006/main">
               <a:ext uri="{FF2B5EF4-FFF2-40B4-BE49-F238E27FC236}">
-                <a16:creationId xmlns:a16="http://schemas.microsoft.com/office/drawing/2014/main" id="{8AE1A94A-DCC1-4317-BEB6-834B95F89A6F}"/>
+                <a16:creationId xmlns:a16="http://schemas.microsoft.com/office/drawing/2014/main" id="{7A5D8A3F-191F-41F7-A8E8-DCA34EC0E3A6}"/>
               </a:ext>
             </a:extLst>
           </p:cNvPr>
@@ -16586,7 +16906,7 @@
           <p:cNvPr id="4" name="Rectangle 3">
             <a:extLst xmlns:a="http://schemas.openxmlformats.org/drawingml/2006/main">
               <a:ext uri="{FF2B5EF4-FFF2-40B4-BE49-F238E27FC236}">
-                <a16:creationId xmlns:a16="http://schemas.microsoft.com/office/drawing/2014/main" id="{D9AEB806-D4D7-4723-8E1C-039BC07036B5}"/>
+                <a16:creationId xmlns:a16="http://schemas.microsoft.com/office/drawing/2014/main" id="{B6D31E3F-0926-4CA0-8F1D-145BB69146A7}"/>
               </a:ext>
             </a:extLst>
           </p:cNvPr>
@@ -16641,7 +16961,7 @@
           <p:cNvPr id="5" name="Rectangle 4">
             <a:extLst xmlns:a="http://schemas.openxmlformats.org/drawingml/2006/main">
               <a:ext uri="{FF2B5EF4-FFF2-40B4-BE49-F238E27FC236}">
-                <a16:creationId xmlns:a16="http://schemas.microsoft.com/office/drawing/2014/main" id="{512B0AA6-2F97-4A62-8068-BF7FCDB047B0}"/>
+                <a16:creationId xmlns:a16="http://schemas.microsoft.com/office/drawing/2014/main" id="{E4CF7262-97A6-404C-B9A3-6459C01CFF91}"/>
               </a:ext>
             </a:extLst>
           </p:cNvPr>
@@ -16696,7 +17016,7 @@
           <p:cNvPr id="6" name="TextBox 5">
             <a:extLst xmlns:a="http://schemas.openxmlformats.org/drawingml/2006/main">
               <a:ext uri="{FF2B5EF4-FFF2-40B4-BE49-F238E27FC236}">
-                <a16:creationId xmlns:a16="http://schemas.microsoft.com/office/drawing/2014/main" id="{ED489B94-C271-4F8A-881E-66C483505806}"/>
+                <a16:creationId xmlns:a16="http://schemas.microsoft.com/office/drawing/2014/main" id="{CDCF9B07-4B54-4679-87A5-B017ECFFE597}"/>
               </a:ext>
             </a:extLst>
           </p:cNvPr>
@@ -16733,7 +17053,7 @@
                 <a:ea typeface="Aptos"/>
                 <a:cs typeface="Aptos"/>
               </a:rPr>
-              <a:t>Julkinen riippumaton evidenssikooste · 2026.07.25-24 · 2026-07-24 · Lähteet: IMARC; GVR; Fortune; European Commission</a:t>
+              <a:t>Julkinen riippumaton evidenssikooste · 2026.07.26-25 · 2026-07-26 · Lähteet: IMARC; GVR; Fortune; European Commission</a:t>
             </a:r>
           </a:p>
         </p:txBody>
@@ -16743,7 +17063,7 @@
           <p:cNvPr id="7" name="TextBox 6">
             <a:extLst xmlns:a="http://schemas.openxmlformats.org/drawingml/2006/main">
               <a:ext uri="{FF2B5EF4-FFF2-40B4-BE49-F238E27FC236}">
-                <a16:creationId xmlns:a16="http://schemas.microsoft.com/office/drawing/2014/main" id="{6AA875AE-5DF8-49F1-9155-45FE59F50265}"/>
+                <a16:creationId xmlns:a16="http://schemas.microsoft.com/office/drawing/2014/main" id="{1C30D9AC-0BA0-45C2-85B8-47C6EB40E6B3}"/>
               </a:ext>
             </a:extLst>
           </p:cNvPr>
@@ -16790,7 +17110,7 @@
           <p:cNvPr id="8" name="Rounded Rectangle 7">
             <a:extLst xmlns:a="http://schemas.openxmlformats.org/drawingml/2006/main">
               <a:ext uri="{FF2B5EF4-FFF2-40B4-BE49-F238E27FC236}">
-                <a16:creationId xmlns:a16="http://schemas.microsoft.com/office/drawing/2014/main" id="{5E9E22E0-5111-4131-B72E-B1AD22F9AFDF}"/>
+                <a16:creationId xmlns:a16="http://schemas.microsoft.com/office/drawing/2014/main" id="{9A8CD598-F87A-4A55-956E-60DF99F789B6}"/>
               </a:ext>
             </a:extLst>
           </p:cNvPr>
@@ -16847,7 +17167,7 @@
           <p:cNvPr id="9" name="TextBox 8">
             <a:extLst xmlns:a="http://schemas.openxmlformats.org/drawingml/2006/main">
               <a:ext uri="{FF2B5EF4-FFF2-40B4-BE49-F238E27FC236}">
-                <a16:creationId xmlns:a16="http://schemas.microsoft.com/office/drawing/2014/main" id="{CA6C2A7B-7986-45B6-ABE3-09560F18FF55}"/>
+                <a16:creationId xmlns:a16="http://schemas.microsoft.com/office/drawing/2014/main" id="{EF691543-5F62-4CA7-B4BB-91DB65841985}"/>
               </a:ext>
             </a:extLst>
           </p:cNvPr>
@@ -16894,7 +17214,7 @@
           <p:cNvPr id="10" name="TextBox 9">
             <a:extLst xmlns:a="http://schemas.openxmlformats.org/drawingml/2006/main">
               <a:ext uri="{FF2B5EF4-FFF2-40B4-BE49-F238E27FC236}">
-                <a16:creationId xmlns:a16="http://schemas.microsoft.com/office/drawing/2014/main" id="{3B882AE5-6311-4E1B-BD53-BC3131B0BFD5}"/>
+                <a16:creationId xmlns:a16="http://schemas.microsoft.com/office/drawing/2014/main" id="{64FD39A8-BE26-4F31-B7F5-79D6C5E3ADCC}"/>
               </a:ext>
             </a:extLst>
           </p:cNvPr>
@@ -16941,7 +17261,7 @@
           <p:cNvPr id="11" name="Rounded Rectangle 10">
             <a:extLst xmlns:a="http://schemas.openxmlformats.org/drawingml/2006/main">
               <a:ext uri="{FF2B5EF4-FFF2-40B4-BE49-F238E27FC236}">
-                <a16:creationId xmlns:a16="http://schemas.microsoft.com/office/drawing/2014/main" id="{72DFF003-8CC1-4BB6-A075-E76C49012BA0}"/>
+                <a16:creationId xmlns:a16="http://schemas.microsoft.com/office/drawing/2014/main" id="{DB1CFD57-98DC-40FB-AE97-511C4D1F73D8}"/>
               </a:ext>
             </a:extLst>
           </p:cNvPr>
@@ -16998,7 +17318,7 @@
           <p:cNvPr id="12" name="TextBox 11">
             <a:extLst xmlns:a="http://schemas.openxmlformats.org/drawingml/2006/main">
               <a:ext uri="{FF2B5EF4-FFF2-40B4-BE49-F238E27FC236}">
-                <a16:creationId xmlns:a16="http://schemas.microsoft.com/office/drawing/2014/main" id="{249A833D-D6F3-41DA-9CF7-DF6DE49177C9}"/>
+                <a16:creationId xmlns:a16="http://schemas.microsoft.com/office/drawing/2014/main" id="{8AAE039A-D9A0-4DBA-9BD5-D8F2FEE227F0}"/>
               </a:ext>
             </a:extLst>
           </p:cNvPr>
@@ -17045,7 +17365,7 @@
           <p:cNvPr id="13" name="TextBox 12">
             <a:extLst xmlns:a="http://schemas.openxmlformats.org/drawingml/2006/main">
               <a:ext uri="{FF2B5EF4-FFF2-40B4-BE49-F238E27FC236}">
-                <a16:creationId xmlns:a16="http://schemas.microsoft.com/office/drawing/2014/main" id="{A407874B-2C1E-46D5-BB4A-DDE7059281E5}"/>
+                <a16:creationId xmlns:a16="http://schemas.microsoft.com/office/drawing/2014/main" id="{F7D84292-F99F-4336-AFAA-7E9A517CFEBF}"/>
               </a:ext>
             </a:extLst>
           </p:cNvPr>
@@ -17092,7 +17412,7 @@
           <p:cNvPr id="14" name="Rounded Rectangle 13">
             <a:extLst xmlns:a="http://schemas.openxmlformats.org/drawingml/2006/main">
               <a:ext uri="{FF2B5EF4-FFF2-40B4-BE49-F238E27FC236}">
-                <a16:creationId xmlns:a16="http://schemas.microsoft.com/office/drawing/2014/main" id="{D1FD7DBD-F47B-471B-9F70-099D142F0FE4}"/>
+                <a16:creationId xmlns:a16="http://schemas.microsoft.com/office/drawing/2014/main" id="{F842D220-18BE-4AE7-BC4C-D1C05DA9B319}"/>
               </a:ext>
             </a:extLst>
           </p:cNvPr>
@@ -17149,7 +17469,7 @@
           <p:cNvPr id="15" name="TextBox 14">
             <a:extLst xmlns:a="http://schemas.openxmlformats.org/drawingml/2006/main">
               <a:ext uri="{FF2B5EF4-FFF2-40B4-BE49-F238E27FC236}">
-                <a16:creationId xmlns:a16="http://schemas.microsoft.com/office/drawing/2014/main" id="{084A6F9E-DCEC-4553-83A4-30C2A627AC85}"/>
+                <a16:creationId xmlns:a16="http://schemas.microsoft.com/office/drawing/2014/main" id="{2C40A668-8BAB-45C0-A10D-31661E195670}"/>
               </a:ext>
             </a:extLst>
           </p:cNvPr>
@@ -17196,7 +17516,7 @@
           <p:cNvPr id="16" name="TextBox 15">
             <a:extLst xmlns:a="http://schemas.openxmlformats.org/drawingml/2006/main">
               <a:ext uri="{FF2B5EF4-FFF2-40B4-BE49-F238E27FC236}">
-                <a16:creationId xmlns:a16="http://schemas.microsoft.com/office/drawing/2014/main" id="{7154CC2E-C15B-4E98-8700-D76A64CD6C08}"/>
+                <a16:creationId xmlns:a16="http://schemas.microsoft.com/office/drawing/2014/main" id="{861075EB-467F-4087-AC29-C437049A377F}"/>
               </a:ext>
             </a:extLst>
           </p:cNvPr>
@@ -17243,7 +17563,7 @@
           <p:cNvPr id="17" name="Rounded Rectangle 16">
             <a:extLst xmlns:a="http://schemas.openxmlformats.org/drawingml/2006/main">
               <a:ext uri="{FF2B5EF4-FFF2-40B4-BE49-F238E27FC236}">
-                <a16:creationId xmlns:a16="http://schemas.microsoft.com/office/drawing/2014/main" id="{AD9C5667-C086-4C9E-BCDB-E8D2BC1AD6EC}"/>
+                <a16:creationId xmlns:a16="http://schemas.microsoft.com/office/drawing/2014/main" id="{A9D678FE-2BED-4D2F-A69E-8665E7056754}"/>
               </a:ext>
             </a:extLst>
           </p:cNvPr>
@@ -17300,7 +17620,7 @@
           <p:cNvPr id="18" name="TextBox 17">
             <a:extLst xmlns:a="http://schemas.openxmlformats.org/drawingml/2006/main">
               <a:ext uri="{FF2B5EF4-FFF2-40B4-BE49-F238E27FC236}">
-                <a16:creationId xmlns:a16="http://schemas.microsoft.com/office/drawing/2014/main" id="{7C074645-D7D1-43A8-B1B9-78F4603422E2}"/>
+                <a16:creationId xmlns:a16="http://schemas.microsoft.com/office/drawing/2014/main" id="{DD5F705A-9F5F-4F54-98F1-84CDC207A23A}"/>
               </a:ext>
             </a:extLst>
           </p:cNvPr>
@@ -17347,7 +17667,7 @@
           <p:cNvPr id="19" name="TextBox 18">
             <a:extLst xmlns:a="http://schemas.openxmlformats.org/drawingml/2006/main">
               <a:ext uri="{FF2B5EF4-FFF2-40B4-BE49-F238E27FC236}">
-                <a16:creationId xmlns:a16="http://schemas.microsoft.com/office/drawing/2014/main" id="{EEC93E3D-FEAB-4158-9B33-BDEEFE2B048E}"/>
+                <a16:creationId xmlns:a16="http://schemas.microsoft.com/office/drawing/2014/main" id="{5ADC1442-7D32-4F16-93E7-7C6BD223902D}"/>
               </a:ext>
             </a:extLst>
           </p:cNvPr>
@@ -17394,7 +17714,7 @@
           <p:cNvPr id="20" name="TextBox 19">
             <a:extLst xmlns:a="http://schemas.openxmlformats.org/drawingml/2006/main">
               <a:ext uri="{FF2B5EF4-FFF2-40B4-BE49-F238E27FC236}">
-                <a16:creationId xmlns:a16="http://schemas.microsoft.com/office/drawing/2014/main" id="{7C7BE1B8-F2C1-4378-AFBF-22CC108583F3}"/>
+                <a16:creationId xmlns:a16="http://schemas.microsoft.com/office/drawing/2014/main" id="{BA152733-9D46-4342-87C3-4B434B1F6335}"/>
               </a:ext>
             </a:extLst>
           </p:cNvPr>
@@ -17441,7 +17761,7 @@
           <p:cNvPr id="21" name="Rounded Rectangle 20">
             <a:extLst xmlns:a="http://schemas.openxmlformats.org/drawingml/2006/main">
               <a:ext uri="{FF2B5EF4-FFF2-40B4-BE49-F238E27FC236}">
-                <a16:creationId xmlns:a16="http://schemas.microsoft.com/office/drawing/2014/main" id="{EC6480F6-B3E2-41DF-A9D3-5EB8B3655D13}"/>
+                <a16:creationId xmlns:a16="http://schemas.microsoft.com/office/drawing/2014/main" id="{6A720F62-85BF-4D19-A2D8-31748AD43011}"/>
               </a:ext>
             </a:extLst>
           </p:cNvPr>
@@ -17498,7 +17818,7 @@
           <p:cNvPr id="22" name="TextBox 21">
             <a:extLst xmlns:a="http://schemas.openxmlformats.org/drawingml/2006/main">
               <a:ext uri="{FF2B5EF4-FFF2-40B4-BE49-F238E27FC236}">
-                <a16:creationId xmlns:a16="http://schemas.microsoft.com/office/drawing/2014/main" id="{D22FE9E0-CA66-4A6C-9D37-577B1236F152}"/>
+                <a16:creationId xmlns:a16="http://schemas.microsoft.com/office/drawing/2014/main" id="{47D8B76B-EC91-4C9D-B684-1B34DD79B0CC}"/>
               </a:ext>
             </a:extLst>
           </p:cNvPr>
@@ -17545,7 +17865,7 @@
           <p:cNvPr id="23" name="TextBox 22">
             <a:extLst xmlns:a="http://schemas.openxmlformats.org/drawingml/2006/main">
               <a:ext uri="{FF2B5EF4-FFF2-40B4-BE49-F238E27FC236}">
-                <a16:creationId xmlns:a16="http://schemas.microsoft.com/office/drawing/2014/main" id="{8B94F67D-69FB-433C-9399-7B088232A9BA}"/>
+                <a16:creationId xmlns:a16="http://schemas.microsoft.com/office/drawing/2014/main" id="{055FF6E1-EDBD-4833-9882-9221DDF7A803}"/>
               </a:ext>
             </a:extLst>
           </p:cNvPr>
@@ -17590,7 +17910,7 @@
     </p:spTree>
     <p:extLst>
       <p:ext uri="{BB962C8B-B14F-4D97-AF65-F5344CB8AC3E}">
-        <p14:creationId xmlns:p14="http://schemas.microsoft.com/office/powerpoint/2010/main" val="462147149"/>
+        <p14:creationId xmlns:p14="http://schemas.microsoft.com/office/powerpoint/2010/main" val="1009636792"/>
       </p:ext>
     </p:extLst>
   </p:cSld>
@@ -17614,7 +17934,7 @@
           <p:cNvPr id="2" name="TextBox 1">
             <a:extLst xmlns:a="http://schemas.openxmlformats.org/drawingml/2006/main">
               <a:ext uri="{FF2B5EF4-FFF2-40B4-BE49-F238E27FC236}">
-                <a16:creationId xmlns:a16="http://schemas.microsoft.com/office/drawing/2014/main" id="{37103061-029B-412E-8F79-3018635FA464}"/>
+                <a16:creationId xmlns:a16="http://schemas.microsoft.com/office/drawing/2014/main" id="{30D26DF5-1ADA-4FFB-86E8-E2402F0D078A}"/>
               </a:ext>
             </a:extLst>
           </p:cNvPr>
@@ -17661,7 +17981,7 @@
           <p:cNvPr id="3" name="TextBox 2">
             <a:extLst xmlns:a="http://schemas.openxmlformats.org/drawingml/2006/main">
               <a:ext uri="{FF2B5EF4-FFF2-40B4-BE49-F238E27FC236}">
-                <a16:creationId xmlns:a16="http://schemas.microsoft.com/office/drawing/2014/main" id="{B29399FF-BC29-4349-A27D-83990713BF99}"/>
+                <a16:creationId xmlns:a16="http://schemas.microsoft.com/office/drawing/2014/main" id="{A2828E24-C1DB-4953-9A2F-62C4302E17CE}"/>
               </a:ext>
             </a:extLst>
           </p:cNvPr>
@@ -17708,7 +18028,7 @@
           <p:cNvPr id="4" name="Rectangle 3">
             <a:extLst xmlns:a="http://schemas.openxmlformats.org/drawingml/2006/main">
               <a:ext uri="{FF2B5EF4-FFF2-40B4-BE49-F238E27FC236}">
-                <a16:creationId xmlns:a16="http://schemas.microsoft.com/office/drawing/2014/main" id="{7392BFA0-6A3F-44EA-BC97-50505EF7D076}"/>
+                <a16:creationId xmlns:a16="http://schemas.microsoft.com/office/drawing/2014/main" id="{4A6A9DD9-C665-40A1-A53C-9B3140BC1E48}"/>
               </a:ext>
             </a:extLst>
           </p:cNvPr>
@@ -17763,7 +18083,7 @@
           <p:cNvPr id="5" name="Rectangle 4">
             <a:extLst xmlns:a="http://schemas.openxmlformats.org/drawingml/2006/main">
               <a:ext uri="{FF2B5EF4-FFF2-40B4-BE49-F238E27FC236}">
-                <a16:creationId xmlns:a16="http://schemas.microsoft.com/office/drawing/2014/main" id="{9B795E48-6192-46DE-9D3E-96FD158EE453}"/>
+                <a16:creationId xmlns:a16="http://schemas.microsoft.com/office/drawing/2014/main" id="{9B85B53B-C5B1-4B6B-8B0C-C263C1B68E63}"/>
               </a:ext>
             </a:extLst>
           </p:cNvPr>
@@ -17818,7 +18138,7 @@
           <p:cNvPr id="6" name="TextBox 5">
             <a:extLst xmlns:a="http://schemas.openxmlformats.org/drawingml/2006/main">
               <a:ext uri="{FF2B5EF4-FFF2-40B4-BE49-F238E27FC236}">
-                <a16:creationId xmlns:a16="http://schemas.microsoft.com/office/drawing/2014/main" id="{38A7FA43-F443-47F8-925D-8388405739E9}"/>
+                <a16:creationId xmlns:a16="http://schemas.microsoft.com/office/drawing/2014/main" id="{7C113AA4-FAEA-4303-94DD-BE2767A49672}"/>
               </a:ext>
             </a:extLst>
           </p:cNvPr>
@@ -17855,7 +18175,7 @@
                 <a:ea typeface="Aptos"/>
                 <a:cs typeface="Aptos"/>
               </a:rPr>
-              <a:t>Julkinen riippumaton evidenssikooste · 2026.07.25-24 · 2026-07-24 · Lähteet: Market-values modelReadiness, donorProtocol ja donorCandidates</a:t>
+              <a:t>Julkinen riippumaton evidenssikooste · 2026.07.26-25 · 2026-07-26 · Lähteet: Market-values modelReadiness, donorProtocol ja donorCandidates</a:t>
             </a:r>
           </a:p>
         </p:txBody>
@@ -17865,7 +18185,7 @@
           <p:cNvPr id="7" name="TextBox 6">
             <a:extLst xmlns:a="http://schemas.openxmlformats.org/drawingml/2006/main">
               <a:ext uri="{FF2B5EF4-FFF2-40B4-BE49-F238E27FC236}">
-                <a16:creationId xmlns:a16="http://schemas.microsoft.com/office/drawing/2014/main" id="{8D0AA782-DB34-46A1-BA65-C7E2F1652A49}"/>
+                <a16:creationId xmlns:a16="http://schemas.microsoft.com/office/drawing/2014/main" id="{31694BFE-F24B-4006-ACA8-836411EB10AA}"/>
               </a:ext>
             </a:extLst>
           </p:cNvPr>
@@ -17912,7 +18232,7 @@
           <p:cNvPr id="8" name="TextBox 7">
             <a:extLst xmlns:a="http://schemas.openxmlformats.org/drawingml/2006/main">
               <a:ext uri="{FF2B5EF4-FFF2-40B4-BE49-F238E27FC236}">
-                <a16:creationId xmlns:a16="http://schemas.microsoft.com/office/drawing/2014/main" id="{AC40E960-68FA-4148-9A2B-3E7CA8D2C694}"/>
+                <a16:creationId xmlns:a16="http://schemas.microsoft.com/office/drawing/2014/main" id="{551ACF4E-ED52-4290-8F01-6F26A9CB76B0}"/>
               </a:ext>
             </a:extLst>
           </p:cNvPr>
@@ -17924,7 +18244,7 @@
         <p:spPr>
           <a:xfrm xmlns:a="http://schemas.openxmlformats.org/drawingml/2006/main">
             <a:off x="548640" y="1554480"/>
-            <a:ext cx="6766560" cy="1024128"/>
+            <a:ext cx="6766560" cy="1124712"/>
           </a:xfrm>
           <a:prstGeom xmlns:a="http://schemas.openxmlformats.org/drawingml/2006/main" prst="rect">
             <a:avLst/>
@@ -17949,7 +18269,7 @@
                 <a:ea typeface="Aptos"/>
                 <a:cs typeface="Aptos"/>
               </a:rPr>
-              <a:t>Nykyinen hyväksytty donor-portti on 0/3; kaikki 5 ehdokasta jäivät ulkopuolelle.</a:t>
+              <a:t>Uusi-Seelanti 7/10: D5 hylätty, D8 ja D10 avoinna. Kaikki 5 ehdokasta ovat ulkona; donor-portti 0/3.</a:t>
             </a:r>
           </a:p>
         </p:txBody>
@@ -17959,7 +18279,7 @@
           <p:cNvPr id="9" name="TextBox 8">
             <a:extLst xmlns:a="http://schemas.openxmlformats.org/drawingml/2006/main">
               <a:ext uri="{FF2B5EF4-FFF2-40B4-BE49-F238E27FC236}">
-                <a16:creationId xmlns:a16="http://schemas.microsoft.com/office/drawing/2014/main" id="{289870A2-DD2E-41F4-B2F7-EFC90C5A76AC}"/>
+                <a16:creationId xmlns:a16="http://schemas.microsoft.com/office/drawing/2014/main" id="{CDD7A20A-82D0-4FE0-B774-B5A12EF51A65}"/>
               </a:ext>
             </a:extLst>
           </p:cNvPr>
@@ -18002,7 +18322,7 @@
               </a:defRPr>
             </a:pPr>
             <a:r>
-              <a:t>•  Jokaisen ehdokkaan on läpäistävä kaikki 10 ehtoa (D1–D10).</a:t>
+              <a:t>•  Uuden-Seelannin tunnistettu AIS/AVP-summa 274,180 milj. NZD (≈153,3 milj. EUR; ECB 2024) jakautuu kulutustarvikkeisiin 189 402 451,96, laitteisiin/hardwareen 84 709 409,85 ja sekajärjestelmiin 68 548,40 NZD.</a:t>
             </a:r>
           </a:p>
           <a:p xmlns:a="http://schemas.openxmlformats.org/drawingml/2006/main">
@@ -18024,7 +18344,7 @@
               </a:defRPr>
             </a:pPr>
             <a:r>
-              <a:t>•  Uuden-Seelannin 533,7–731,2 milj. NZD (≈298,5–408,9 milj. EUR; ECB 2024) vähittäisherkkyys on tuettu malli; FTC:n 2,763 mrd USD (≈2,336 mrd EUR; ECB 2021) vuoden 2021 reitti on valmistajaraportointia. Kumpikaan ei ole täydellinen kuluttajavähittäisarvo tai hyväksytty donor.</a:t>
+              <a:t>•  Viereiset 2 137 085,24 ja ratkaisemattomat 4 367 017,37 NZD rajataan pois. Maa läpäisee 7/10; D5 hylätään sekä D8 ja D10 ovat avoimia.</a:t>
             </a:r>
           </a:p>
           <a:p xmlns:a="http://schemas.openxmlformats.org/drawingml/2006/main">
@@ -18046,7 +18366,7 @@
               </a:defRPr>
             </a:pPr>
             <a:r>
-              <a:t>•  Alue- ja sääntelytyyppien peitto sekä suora validointi suurissa talouksissa vaaditaan vielä.</a:t>
+              <a:t>•  Erillinen 533,7–731,2 milj. NZD (≈298,5–408,9 milj. EUR; ECB 2024) RPS-herkkyys on tuettu malli, ei havaittu kansallinen arvo. Donor-portti pysyy 0/3:ssa.</a:t>
             </a:r>
           </a:p>
         </p:txBody>
@@ -18056,7 +18376,7 @@
           <p:cNvPr id="10" name="Rounded Rectangle 9">
             <a:extLst xmlns:a="http://schemas.openxmlformats.org/drawingml/2006/main">
               <a:ext uri="{FF2B5EF4-FFF2-40B4-BE49-F238E27FC236}">
-                <a16:creationId xmlns:a16="http://schemas.microsoft.com/office/drawing/2014/main" id="{5FBA22B8-1608-4967-AC4B-9C595ACF309B}"/>
+                <a16:creationId xmlns:a16="http://schemas.microsoft.com/office/drawing/2014/main" id="{2CBF4C07-2EEC-401B-903A-F81462209271}"/>
               </a:ext>
             </a:extLst>
           </p:cNvPr>
@@ -18113,7 +18433,7 @@
           <p:cNvPr id="11" name="TextBox 10">
             <a:extLst xmlns:a="http://schemas.openxmlformats.org/drawingml/2006/main">
               <a:ext uri="{FF2B5EF4-FFF2-40B4-BE49-F238E27FC236}">
-                <a16:creationId xmlns:a16="http://schemas.microsoft.com/office/drawing/2014/main" id="{305528C0-273D-4140-AFD9-726E4B307633}"/>
+                <a16:creationId xmlns:a16="http://schemas.microsoft.com/office/drawing/2014/main" id="{47021D7E-B65E-4C62-AA02-3FE9CB89F8A1}"/>
               </a:ext>
             </a:extLst>
           </p:cNvPr>
@@ -18160,7 +18480,7 @@
           <p:cNvPr id="12" name="TextBox 11">
             <a:extLst xmlns:a="http://schemas.openxmlformats.org/drawingml/2006/main">
               <a:ext uri="{FF2B5EF4-FFF2-40B4-BE49-F238E27FC236}">
-                <a16:creationId xmlns:a16="http://schemas.microsoft.com/office/drawing/2014/main" id="{C4B31B1E-CBA2-4EF9-8560-F4F413B080FC}"/>
+                <a16:creationId xmlns:a16="http://schemas.microsoft.com/office/drawing/2014/main" id="{6EBDC1C9-B275-4F74-8B48-71334B50391B}"/>
               </a:ext>
             </a:extLst>
           </p:cNvPr>
@@ -18205,7 +18525,7 @@
     </p:spTree>
     <p:extLst>
       <p:ext uri="{BB962C8B-B14F-4D97-AF65-F5344CB8AC3E}">
-        <p14:creationId xmlns:p14="http://schemas.microsoft.com/office/powerpoint/2010/main" val="387743781"/>
+        <p14:creationId xmlns:p14="http://schemas.microsoft.com/office/powerpoint/2010/main" val="1874049849"/>
       </p:ext>
     </p:extLst>
   </p:cSld>
@@ -18229,7 +18549,7 @@
           <p:cNvPr id="2" name="TextBox 1">
             <a:extLst xmlns:a="http://schemas.openxmlformats.org/drawingml/2006/main">
               <a:ext uri="{FF2B5EF4-FFF2-40B4-BE49-F238E27FC236}">
-                <a16:creationId xmlns:a16="http://schemas.microsoft.com/office/drawing/2014/main" id="{E7BEECED-FB53-48BF-B56C-68493CE6E341}"/>
+                <a16:creationId xmlns:a16="http://schemas.microsoft.com/office/drawing/2014/main" id="{CE698450-72D0-49D3-9C5D-37AB62B95682}"/>
               </a:ext>
             </a:extLst>
           </p:cNvPr>
@@ -18276,7 +18596,7 @@
           <p:cNvPr id="3" name="TextBox 2">
             <a:extLst xmlns:a="http://schemas.openxmlformats.org/drawingml/2006/main">
               <a:ext uri="{FF2B5EF4-FFF2-40B4-BE49-F238E27FC236}">
-                <a16:creationId xmlns:a16="http://schemas.microsoft.com/office/drawing/2014/main" id="{1FEFF3B3-5A70-4CC6-BDA1-61C28B7CE872}"/>
+                <a16:creationId xmlns:a16="http://schemas.microsoft.com/office/drawing/2014/main" id="{CD712179-0324-4A83-8E52-D2549B084BF9}"/>
               </a:ext>
             </a:extLst>
           </p:cNvPr>
@@ -18323,7 +18643,7 @@
           <p:cNvPr id="4" name="Rectangle 3">
             <a:extLst xmlns:a="http://schemas.openxmlformats.org/drawingml/2006/main">
               <a:ext uri="{FF2B5EF4-FFF2-40B4-BE49-F238E27FC236}">
-                <a16:creationId xmlns:a16="http://schemas.microsoft.com/office/drawing/2014/main" id="{9D2FC945-CE1F-49F9-94CF-32AAA46A5AAE}"/>
+                <a16:creationId xmlns:a16="http://schemas.microsoft.com/office/drawing/2014/main" id="{1EF68938-445F-44D1-92F6-33403EE91226}"/>
               </a:ext>
             </a:extLst>
           </p:cNvPr>
@@ -18378,7 +18698,7 @@
           <p:cNvPr id="5" name="Rectangle 4">
             <a:extLst xmlns:a="http://schemas.openxmlformats.org/drawingml/2006/main">
               <a:ext uri="{FF2B5EF4-FFF2-40B4-BE49-F238E27FC236}">
-                <a16:creationId xmlns:a16="http://schemas.microsoft.com/office/drawing/2014/main" id="{22DA88C0-6388-4F69-A78C-A67916DFB5B6}"/>
+                <a16:creationId xmlns:a16="http://schemas.microsoft.com/office/drawing/2014/main" id="{1C17290C-8FC5-404B-9DCA-2FCC2B7178BA}"/>
               </a:ext>
             </a:extLst>
           </p:cNvPr>
@@ -18433,7 +18753,7 @@
           <p:cNvPr id="6" name="TextBox 5">
             <a:extLst xmlns:a="http://schemas.openxmlformats.org/drawingml/2006/main">
               <a:ext uri="{FF2B5EF4-FFF2-40B4-BE49-F238E27FC236}">
-                <a16:creationId xmlns:a16="http://schemas.microsoft.com/office/drawing/2014/main" id="{03E340A3-7157-4AEC-A7C2-DB1BC1B5F1A2}"/>
+                <a16:creationId xmlns:a16="http://schemas.microsoft.com/office/drawing/2014/main" id="{4E1A8289-60DA-454F-9968-2A5ADC758BA0}"/>
               </a:ext>
             </a:extLst>
           </p:cNvPr>
@@ -18470,7 +18790,7 @@
                 <a:ea typeface="Aptos"/>
                 <a:cs typeface="Aptos"/>
               </a:rPr>
-              <a:t>Julkinen riippumaton evidenssikooste · 2026.07.25-24 · 2026-07-24 · Lähteet: WIPO valuation; Evidence Register</a:t>
+              <a:t>Julkinen riippumaton evidenssikooste · 2026.07.26-25 · 2026-07-26 · Lähteet: WIPO valuation; Evidence Register</a:t>
             </a:r>
           </a:p>
         </p:txBody>
@@ -18480,7 +18800,7 @@
           <p:cNvPr id="7" name="TextBox 6">
             <a:extLst xmlns:a="http://schemas.openxmlformats.org/drawingml/2006/main">
               <a:ext uri="{FF2B5EF4-FFF2-40B4-BE49-F238E27FC236}">
-                <a16:creationId xmlns:a16="http://schemas.microsoft.com/office/drawing/2014/main" id="{2D279790-D4FF-44D8-B716-CE1BA7A12C96}"/>
+                <a16:creationId xmlns:a16="http://schemas.microsoft.com/office/drawing/2014/main" id="{59FDC43A-237D-4838-B862-E8C0136FB916}"/>
               </a:ext>
             </a:extLst>
           </p:cNvPr>
@@ -19050,7 +19370,7 @@
           <p:cNvPr id="9" name="TextBox 8">
             <a:extLst xmlns:a="http://schemas.openxmlformats.org/drawingml/2006/main">
               <a:ext uri="{FF2B5EF4-FFF2-40B4-BE49-F238E27FC236}">
-                <a16:creationId xmlns:a16="http://schemas.microsoft.com/office/drawing/2014/main" id="{2CD3C79C-6645-4858-9C57-6FEA69DCA90D}"/>
+                <a16:creationId xmlns:a16="http://schemas.microsoft.com/office/drawing/2014/main" id="{C8CE29EA-C5EA-487F-9D63-81B67DD25C94}"/>
               </a:ext>
             </a:extLst>
           </p:cNvPr>
@@ -19095,7 +19415,7 @@
     </p:spTree>
     <p:extLst>
       <p:ext uri="{BB962C8B-B14F-4D97-AF65-F5344CB8AC3E}">
-        <p14:creationId xmlns:p14="http://schemas.microsoft.com/office/powerpoint/2010/main" val="1585739683"/>
+        <p14:creationId xmlns:p14="http://schemas.microsoft.com/office/powerpoint/2010/main" val="2114504026"/>
       </p:ext>
     </p:extLst>
   </p:cSld>
@@ -19119,7 +19439,7 @@
           <p:cNvPr id="2" name="TextBox 1">
             <a:extLst xmlns:a="http://schemas.openxmlformats.org/drawingml/2006/main">
               <a:ext uri="{FF2B5EF4-FFF2-40B4-BE49-F238E27FC236}">
-                <a16:creationId xmlns:a16="http://schemas.microsoft.com/office/drawing/2014/main" id="{6839F761-59D3-45C4-8D24-8E643C7D5933}"/>
+                <a16:creationId xmlns:a16="http://schemas.microsoft.com/office/drawing/2014/main" id="{A79B1A0F-6198-4977-8A05-797B7CD2D206}"/>
               </a:ext>
             </a:extLst>
           </p:cNvPr>
@@ -19166,7 +19486,7 @@
           <p:cNvPr id="3" name="TextBox 2">
             <a:extLst xmlns:a="http://schemas.openxmlformats.org/drawingml/2006/main">
               <a:ext uri="{FF2B5EF4-FFF2-40B4-BE49-F238E27FC236}">
-                <a16:creationId xmlns:a16="http://schemas.microsoft.com/office/drawing/2014/main" id="{00763BB4-160B-4E20-B971-0EAD938B32DF}"/>
+                <a16:creationId xmlns:a16="http://schemas.microsoft.com/office/drawing/2014/main" id="{02655687-1C8A-43E2-9434-2F52422B91ED}"/>
               </a:ext>
             </a:extLst>
           </p:cNvPr>
@@ -19213,7 +19533,7 @@
           <p:cNvPr id="4" name="Rectangle 3">
             <a:extLst xmlns:a="http://schemas.openxmlformats.org/drawingml/2006/main">
               <a:ext uri="{FF2B5EF4-FFF2-40B4-BE49-F238E27FC236}">
-                <a16:creationId xmlns:a16="http://schemas.microsoft.com/office/drawing/2014/main" id="{4F464C94-FC64-45DA-8B10-94A2A3D0D836}"/>
+                <a16:creationId xmlns:a16="http://schemas.microsoft.com/office/drawing/2014/main" id="{C538118B-346D-4D44-91C0-8512B143EBDE}"/>
               </a:ext>
             </a:extLst>
           </p:cNvPr>
@@ -19268,7 +19588,7 @@
           <p:cNvPr id="5" name="Rectangle 4">
             <a:extLst xmlns:a="http://schemas.openxmlformats.org/drawingml/2006/main">
               <a:ext uri="{FF2B5EF4-FFF2-40B4-BE49-F238E27FC236}">
-                <a16:creationId xmlns:a16="http://schemas.microsoft.com/office/drawing/2014/main" id="{1EC56235-9930-461A-A0C8-5411E6300940}"/>
+                <a16:creationId xmlns:a16="http://schemas.microsoft.com/office/drawing/2014/main" id="{ADB0B711-857C-4F0F-BAD0-533DEE37BB7C}"/>
               </a:ext>
             </a:extLst>
           </p:cNvPr>
@@ -19323,7 +19643,7 @@
           <p:cNvPr id="6" name="TextBox 5">
             <a:extLst xmlns:a="http://schemas.openxmlformats.org/drawingml/2006/main">
               <a:ext uri="{FF2B5EF4-FFF2-40B4-BE49-F238E27FC236}">
-                <a16:creationId xmlns:a16="http://schemas.microsoft.com/office/drawing/2014/main" id="{7F0BADCB-2406-44D3-A838-9BAA9716BE04}"/>
+                <a16:creationId xmlns:a16="http://schemas.microsoft.com/office/drawing/2014/main" id="{2A11A234-91CB-48CA-BB38-60E98DCE39A6}"/>
               </a:ext>
             </a:extLst>
           </p:cNvPr>
@@ -19360,7 +19680,7 @@
                 <a:ea typeface="Aptos"/>
                 <a:cs typeface="Aptos"/>
               </a:rPr>
-              <a:t>Julkinen riippumaton evidenssikooste · 2026.07.25-24 · 2026-07-24 · Lähteet: EPO; Saksa — viralliset tuomiot; WIPO</a:t>
+              <a:t>Julkinen riippumaton evidenssikooste · 2026.07.26-25 · 2026-07-26 · Lähteet: EPO; Saksa — viralliset tuomiot; WIPO</a:t>
             </a:r>
           </a:p>
         </p:txBody>
@@ -19370,7 +19690,7 @@
           <p:cNvPr id="7" name="TextBox 6">
             <a:extLst xmlns:a="http://schemas.openxmlformats.org/drawingml/2006/main">
               <a:ext uri="{FF2B5EF4-FFF2-40B4-BE49-F238E27FC236}">
-                <a16:creationId xmlns:a16="http://schemas.microsoft.com/office/drawing/2014/main" id="{C23966C6-F3F6-49D6-BBE6-32D9085109B1}"/>
+                <a16:creationId xmlns:a16="http://schemas.microsoft.com/office/drawing/2014/main" id="{F78F5C65-239B-4AB6-BC09-5CEAD121CD2E}"/>
               </a:ext>
             </a:extLst>
           </p:cNvPr>
@@ -19417,7 +19737,7 @@
           <p:cNvPr id="8" name="TextBox 7">
             <a:extLst xmlns:a="http://schemas.openxmlformats.org/drawingml/2006/main">
               <a:ext uri="{FF2B5EF4-FFF2-40B4-BE49-F238E27FC236}">
-                <a16:creationId xmlns:a16="http://schemas.microsoft.com/office/drawing/2014/main" id="{8BA3FB59-AEC4-455C-AE25-DC5110BE403E}"/>
+                <a16:creationId xmlns:a16="http://schemas.microsoft.com/office/drawing/2014/main" id="{1D95C16D-3D09-4A7D-BA73-7776F67BF674}"/>
               </a:ext>
             </a:extLst>
           </p:cNvPr>
@@ -19464,7 +19784,7 @@
           <p:cNvPr id="9" name="TextBox 8">
             <a:extLst xmlns:a="http://schemas.openxmlformats.org/drawingml/2006/main">
               <a:ext uri="{FF2B5EF4-FFF2-40B4-BE49-F238E27FC236}">
-                <a16:creationId xmlns:a16="http://schemas.microsoft.com/office/drawing/2014/main" id="{9312BAFD-F4BF-47F1-8221-850C8B64DDFF}"/>
+                <a16:creationId xmlns:a16="http://schemas.microsoft.com/office/drawing/2014/main" id="{89919C76-99C3-4683-B89A-C96CD6927A9F}"/>
               </a:ext>
             </a:extLst>
           </p:cNvPr>
@@ -19529,7 +19849,7 @@
               </a:defRPr>
             </a:pPr>
             <a:r>
-              <a:t>•  Markkina-aineistossa on 34 markkinamittaria 7 maasta sekä 36 Ruotsin FHM-rekisterirakenteen lukua vuosilta 2018–2026; luvut eivät ole myyntiä tai markkina-arvoa. Luovuttajaportti on 0/3.</a:t>
+              <a:t>•  Uuden-Seelannin toistettava AIS/AVP-summa on 274 180 410,21 NZD; maa läpäisee 7/10, mutta D5 hylätään sekä D8 ja D10 ovat avoimia. Donor-portti pysyy 0/3:ssa.</a:t>
             </a:r>
           </a:p>
           <a:p xmlns:a="http://schemas.openxmlformats.org/drawingml/2006/main">
@@ -19561,7 +19881,7 @@
           <p:cNvPr id="10" name="Rounded Rectangle 9">
             <a:extLst xmlns:a="http://schemas.openxmlformats.org/drawingml/2006/main">
               <a:ext uri="{FF2B5EF4-FFF2-40B4-BE49-F238E27FC236}">
-                <a16:creationId xmlns:a16="http://schemas.microsoft.com/office/drawing/2014/main" id="{5F01A9F8-9F19-456F-B64D-99C728AA3B59}"/>
+                <a16:creationId xmlns:a16="http://schemas.microsoft.com/office/drawing/2014/main" id="{6F6C9663-8C7D-4C4B-B113-4DB2D31DC616}"/>
               </a:ext>
             </a:extLst>
           </p:cNvPr>
@@ -19618,7 +19938,7 @@
           <p:cNvPr id="11" name="TextBox 10">
             <a:extLst xmlns:a="http://schemas.openxmlformats.org/drawingml/2006/main">
               <a:ext uri="{FF2B5EF4-FFF2-40B4-BE49-F238E27FC236}">
-                <a16:creationId xmlns:a16="http://schemas.microsoft.com/office/drawing/2014/main" id="{F5CD2444-8FFD-402D-BBA7-375004D0F8B1}"/>
+                <a16:creationId xmlns:a16="http://schemas.microsoft.com/office/drawing/2014/main" id="{0EB0E402-8517-4E35-A5D1-29EB977BF25A}"/>
               </a:ext>
             </a:extLst>
           </p:cNvPr>
@@ -19665,7 +19985,7 @@
           <p:cNvPr id="12" name="TextBox 11">
             <a:extLst xmlns:a="http://schemas.openxmlformats.org/drawingml/2006/main">
               <a:ext uri="{FF2B5EF4-FFF2-40B4-BE49-F238E27FC236}">
-                <a16:creationId xmlns:a16="http://schemas.microsoft.com/office/drawing/2014/main" id="{72EF19AA-27A3-49C7-80E2-0C33CEAF5A06}"/>
+                <a16:creationId xmlns:a16="http://schemas.microsoft.com/office/drawing/2014/main" id="{A8ACA9D2-A73F-4F31-9308-282ADAE790A8}"/>
               </a:ext>
             </a:extLst>
           </p:cNvPr>
@@ -19710,7 +20030,7 @@
     </p:spTree>
     <p:extLst>
       <p:ext uri="{BB962C8B-B14F-4D97-AF65-F5344CB8AC3E}">
-        <p14:creationId xmlns:p14="http://schemas.microsoft.com/office/powerpoint/2010/main" val="1293154027"/>
+        <p14:creationId xmlns:p14="http://schemas.microsoft.com/office/powerpoint/2010/main" val="607807165"/>
       </p:ext>
     </p:extLst>
   </p:cSld>
@@ -19734,7 +20054,7 @@
           <p:cNvPr id="2" name="TextBox 1">
             <a:extLst xmlns:a="http://schemas.openxmlformats.org/drawingml/2006/main">
               <a:ext uri="{FF2B5EF4-FFF2-40B4-BE49-F238E27FC236}">
-                <a16:creationId xmlns:a16="http://schemas.microsoft.com/office/drawing/2014/main" id="{7E9AC346-2069-4DDF-AE4B-38071D961785}"/>
+                <a16:creationId xmlns:a16="http://schemas.microsoft.com/office/drawing/2014/main" id="{0861D29E-1FDC-467F-A332-283F5835429E}"/>
               </a:ext>
             </a:extLst>
           </p:cNvPr>
@@ -19781,7 +20101,7 @@
           <p:cNvPr id="3" name="TextBox 2">
             <a:extLst xmlns:a="http://schemas.openxmlformats.org/drawingml/2006/main">
               <a:ext uri="{FF2B5EF4-FFF2-40B4-BE49-F238E27FC236}">
-                <a16:creationId xmlns:a16="http://schemas.microsoft.com/office/drawing/2014/main" id="{3C431FA1-F311-4D6C-A5E4-A86F4CCB4E50}"/>
+                <a16:creationId xmlns:a16="http://schemas.microsoft.com/office/drawing/2014/main" id="{6933513B-CB82-42E6-8BAC-7F657080C0D8}"/>
               </a:ext>
             </a:extLst>
           </p:cNvPr>
@@ -19828,7 +20148,7 @@
           <p:cNvPr id="4" name="Rectangle 3">
             <a:extLst xmlns:a="http://schemas.openxmlformats.org/drawingml/2006/main">
               <a:ext uri="{FF2B5EF4-FFF2-40B4-BE49-F238E27FC236}">
-                <a16:creationId xmlns:a16="http://schemas.microsoft.com/office/drawing/2014/main" id="{CAA27DA5-745E-4F20-9BA9-C0D49678D87A}"/>
+                <a16:creationId xmlns:a16="http://schemas.microsoft.com/office/drawing/2014/main" id="{63FDD0F7-A335-42F4-A216-50EF095FF919}"/>
               </a:ext>
             </a:extLst>
           </p:cNvPr>
@@ -19883,7 +20203,7 @@
           <p:cNvPr id="5" name="Rectangle 4">
             <a:extLst xmlns:a="http://schemas.openxmlformats.org/drawingml/2006/main">
               <a:ext uri="{FF2B5EF4-FFF2-40B4-BE49-F238E27FC236}">
-                <a16:creationId xmlns:a16="http://schemas.microsoft.com/office/drawing/2014/main" id="{D6724DFE-EBB4-4A1C-A76B-8FAE3BCCC47C}"/>
+                <a16:creationId xmlns:a16="http://schemas.microsoft.com/office/drawing/2014/main" id="{D870FCDC-BDD2-4A09-84FA-731C9E90D432}"/>
               </a:ext>
             </a:extLst>
           </p:cNvPr>
@@ -19938,7 +20258,7 @@
           <p:cNvPr id="6" name="TextBox 5">
             <a:extLst xmlns:a="http://schemas.openxmlformats.org/drawingml/2006/main">
               <a:ext uri="{FF2B5EF4-FFF2-40B4-BE49-F238E27FC236}">
-                <a16:creationId xmlns:a16="http://schemas.microsoft.com/office/drawing/2014/main" id="{B9AB9C1C-1783-4495-B8F9-3C22619A28C0}"/>
+                <a16:creationId xmlns:a16="http://schemas.microsoft.com/office/drawing/2014/main" id="{AE46496E-E158-4676-8B5C-F0720E1BBA88}"/>
               </a:ext>
             </a:extLst>
           </p:cNvPr>
@@ -19975,7 +20295,7 @@
                 <a:ea typeface="Aptos"/>
                 <a:cs typeface="Aptos"/>
               </a:rPr>
-              <a:t>Julkinen riippumaton evidenssikooste · 2026.07.25-24 · 2026-07-24 · Lähteet: WIPO licensing; IP Finance</a:t>
+              <a:t>Julkinen riippumaton evidenssikooste · 2026.07.26-25 · 2026-07-26 · Lähteet: WIPO licensing; IP Finance</a:t>
             </a:r>
           </a:p>
         </p:txBody>
@@ -19985,7 +20305,7 @@
           <p:cNvPr id="7" name="TextBox 6">
             <a:extLst xmlns:a="http://schemas.openxmlformats.org/drawingml/2006/main">
               <a:ext uri="{FF2B5EF4-FFF2-40B4-BE49-F238E27FC236}">
-                <a16:creationId xmlns:a16="http://schemas.microsoft.com/office/drawing/2014/main" id="{8FE7522E-042A-44F8-B9D2-1E68FB8C6192}"/>
+                <a16:creationId xmlns:a16="http://schemas.microsoft.com/office/drawing/2014/main" id="{B33CF353-AE6D-4C83-8513-88B80505F016}"/>
               </a:ext>
             </a:extLst>
           </p:cNvPr>
@@ -20032,7 +20352,7 @@
           <p:cNvPr id="8" name="TextBox 7">
             <a:extLst xmlns:a="http://schemas.openxmlformats.org/drawingml/2006/main">
               <a:ext uri="{FF2B5EF4-FFF2-40B4-BE49-F238E27FC236}">
-                <a16:creationId xmlns:a16="http://schemas.microsoft.com/office/drawing/2014/main" id="{ADECDDB8-011C-4937-BE94-7D66BC04E5C0}"/>
+                <a16:creationId xmlns:a16="http://schemas.microsoft.com/office/drawing/2014/main" id="{96FC54F7-3D1E-4806-9391-AA98CE683BCB}"/>
               </a:ext>
             </a:extLst>
           </p:cNvPr>
@@ -20079,7 +20399,7 @@
           <p:cNvPr id="9" name="TextBox 8">
             <a:extLst xmlns:a="http://schemas.openxmlformats.org/drawingml/2006/main">
               <a:ext uri="{FF2B5EF4-FFF2-40B4-BE49-F238E27FC236}">
-                <a16:creationId xmlns:a16="http://schemas.microsoft.com/office/drawing/2014/main" id="{224A1F75-B9F6-441C-A9A7-72C31DB00740}"/>
+                <a16:creationId xmlns:a16="http://schemas.microsoft.com/office/drawing/2014/main" id="{422CBFAC-2400-4BB9-8EB3-789575DD9433}"/>
               </a:ext>
             </a:extLst>
           </p:cNvPr>
@@ -20176,7 +20496,7 @@
           <p:cNvPr id="10" name="Rounded Rectangle 9">
             <a:extLst xmlns:a="http://schemas.openxmlformats.org/drawingml/2006/main">
               <a:ext uri="{FF2B5EF4-FFF2-40B4-BE49-F238E27FC236}">
-                <a16:creationId xmlns:a16="http://schemas.microsoft.com/office/drawing/2014/main" id="{33FF6AA8-FDFE-4623-8A9E-7F4A98CF3C2F}"/>
+                <a16:creationId xmlns:a16="http://schemas.microsoft.com/office/drawing/2014/main" id="{5A1C7C41-C47C-4BAD-BA03-DB10384A10AA}"/>
               </a:ext>
             </a:extLst>
           </p:cNvPr>
@@ -20233,7 +20553,7 @@
           <p:cNvPr id="11" name="TextBox 10">
             <a:extLst xmlns:a="http://schemas.openxmlformats.org/drawingml/2006/main">
               <a:ext uri="{FF2B5EF4-FFF2-40B4-BE49-F238E27FC236}">
-                <a16:creationId xmlns:a16="http://schemas.microsoft.com/office/drawing/2014/main" id="{BE41962D-5D06-464A-8434-FEE9FD883898}"/>
+                <a16:creationId xmlns:a16="http://schemas.microsoft.com/office/drawing/2014/main" id="{85019815-EB72-49B6-9F72-52C2D8229C7B}"/>
               </a:ext>
             </a:extLst>
           </p:cNvPr>
@@ -20280,7 +20600,7 @@
           <p:cNvPr id="12" name="TextBox 11">
             <a:extLst xmlns:a="http://schemas.openxmlformats.org/drawingml/2006/main">
               <a:ext uri="{FF2B5EF4-FFF2-40B4-BE49-F238E27FC236}">
-                <a16:creationId xmlns:a16="http://schemas.microsoft.com/office/drawing/2014/main" id="{AF2F92E8-1180-4056-A5CC-5CA62354F092}"/>
+                <a16:creationId xmlns:a16="http://schemas.microsoft.com/office/drawing/2014/main" id="{5066E6F6-736D-41DB-90B7-EDD69579A11B}"/>
               </a:ext>
             </a:extLst>
           </p:cNvPr>
@@ -20325,7 +20645,7 @@
     </p:spTree>
     <p:extLst>
       <p:ext uri="{BB962C8B-B14F-4D97-AF65-F5344CB8AC3E}">
-        <p14:creationId xmlns:p14="http://schemas.microsoft.com/office/powerpoint/2010/main" val="836524784"/>
+        <p14:creationId xmlns:p14="http://schemas.microsoft.com/office/powerpoint/2010/main" val="1375912582"/>
       </p:ext>
     </p:extLst>
   </p:cSld>
@@ -20349,7 +20669,7 @@
           <p:cNvPr id="2" name="TextBox 1">
             <a:extLst xmlns:a="http://schemas.openxmlformats.org/drawingml/2006/main">
               <a:ext uri="{FF2B5EF4-FFF2-40B4-BE49-F238E27FC236}">
-                <a16:creationId xmlns:a16="http://schemas.microsoft.com/office/drawing/2014/main" id="{64EF292F-337E-4FB9-80B8-0EA6B098D29D}"/>
+                <a16:creationId xmlns:a16="http://schemas.microsoft.com/office/drawing/2014/main" id="{2830E86D-9427-475C-A303-89B7F4A313DD}"/>
               </a:ext>
             </a:extLst>
           </p:cNvPr>
@@ -20396,7 +20716,7 @@
           <p:cNvPr id="3" name="TextBox 2">
             <a:extLst xmlns:a="http://schemas.openxmlformats.org/drawingml/2006/main">
               <a:ext uri="{FF2B5EF4-FFF2-40B4-BE49-F238E27FC236}">
-                <a16:creationId xmlns:a16="http://schemas.microsoft.com/office/drawing/2014/main" id="{D4330A04-D0C1-403F-853F-621E0AD767C2}"/>
+                <a16:creationId xmlns:a16="http://schemas.microsoft.com/office/drawing/2014/main" id="{1ED682DA-A9CC-4363-A486-1CCFA67D0262}"/>
               </a:ext>
             </a:extLst>
           </p:cNvPr>
@@ -20443,7 +20763,7 @@
           <p:cNvPr id="4" name="Rectangle 3">
             <a:extLst xmlns:a="http://schemas.openxmlformats.org/drawingml/2006/main">
               <a:ext uri="{FF2B5EF4-FFF2-40B4-BE49-F238E27FC236}">
-                <a16:creationId xmlns:a16="http://schemas.microsoft.com/office/drawing/2014/main" id="{570A6529-9D86-4E00-A2DF-7A6368B18397}"/>
+                <a16:creationId xmlns:a16="http://schemas.microsoft.com/office/drawing/2014/main" id="{07564C75-E3E1-45DC-BAD7-98CBC4BEE35B}"/>
               </a:ext>
             </a:extLst>
           </p:cNvPr>
@@ -20498,7 +20818,7 @@
           <p:cNvPr id="5" name="Rectangle 4">
             <a:extLst xmlns:a="http://schemas.openxmlformats.org/drawingml/2006/main">
               <a:ext uri="{FF2B5EF4-FFF2-40B4-BE49-F238E27FC236}">
-                <a16:creationId xmlns:a16="http://schemas.microsoft.com/office/drawing/2014/main" id="{8D90D320-8362-45D6-9D16-EFA9164C816B}"/>
+                <a16:creationId xmlns:a16="http://schemas.microsoft.com/office/drawing/2014/main" id="{29BF99CA-9B57-4CE0-ACAB-553B92DE1B33}"/>
               </a:ext>
             </a:extLst>
           </p:cNvPr>
@@ -20553,7 +20873,7 @@
           <p:cNvPr id="6" name="TextBox 5">
             <a:extLst xmlns:a="http://schemas.openxmlformats.org/drawingml/2006/main">
               <a:ext uri="{FF2B5EF4-FFF2-40B4-BE49-F238E27FC236}">
-                <a16:creationId xmlns:a16="http://schemas.microsoft.com/office/drawing/2014/main" id="{4D84B3D1-5208-455F-AAA1-B43225930C4C}"/>
+                <a16:creationId xmlns:a16="http://schemas.microsoft.com/office/drawing/2014/main" id="{A81DE7B9-A5F2-496B-BBAE-39D1864A4033}"/>
               </a:ext>
             </a:extLst>
           </p:cNvPr>
@@ -20590,7 +20910,7 @@
                 <a:ea typeface="Aptos"/>
                 <a:cs typeface="Aptos"/>
               </a:rPr>
-              <a:t>Julkinen riippumaton evidenssikooste · 2026.07.25-24 · 2026-07-24 · Lähteet: Evidence Register; EPO</a:t>
+              <a:t>Julkinen riippumaton evidenssikooste · 2026.07.26-25 · 2026-07-26 · Lähteet: Evidence Register; EPO</a:t>
             </a:r>
           </a:p>
         </p:txBody>
@@ -20600,7 +20920,7 @@
           <p:cNvPr id="7" name="TextBox 6">
             <a:extLst xmlns:a="http://schemas.openxmlformats.org/drawingml/2006/main">
               <a:ext uri="{FF2B5EF4-FFF2-40B4-BE49-F238E27FC236}">
-                <a16:creationId xmlns:a16="http://schemas.microsoft.com/office/drawing/2014/main" id="{0F113054-052E-4E61-8FC4-134695B80387}"/>
+                <a16:creationId xmlns:a16="http://schemas.microsoft.com/office/drawing/2014/main" id="{098F5A7A-FFE2-4B24-85F5-213BA189D200}"/>
               </a:ext>
             </a:extLst>
           </p:cNvPr>
@@ -21087,7 +21407,7 @@
           <p:cNvPr id="9" name="TextBox 8">
             <a:extLst xmlns:a="http://schemas.openxmlformats.org/drawingml/2006/main">
               <a:ext uri="{FF2B5EF4-FFF2-40B4-BE49-F238E27FC236}">
-                <a16:creationId xmlns:a16="http://schemas.microsoft.com/office/drawing/2014/main" id="{525BF2FF-F84A-4156-A8C8-61A9474A206B}"/>
+                <a16:creationId xmlns:a16="http://schemas.microsoft.com/office/drawing/2014/main" id="{B00731C3-6578-4C84-AEAE-D4B637F4E4FD}"/>
               </a:ext>
             </a:extLst>
           </p:cNvPr>
@@ -21132,7 +21452,7 @@
     </p:spTree>
     <p:extLst>
       <p:ext uri="{BB962C8B-B14F-4D97-AF65-F5344CB8AC3E}">
-        <p14:creationId xmlns:p14="http://schemas.microsoft.com/office/powerpoint/2010/main" val="882916023"/>
+        <p14:creationId xmlns:p14="http://schemas.microsoft.com/office/powerpoint/2010/main" val="1290251457"/>
       </p:ext>
     </p:extLst>
   </p:cSld>
@@ -21156,7 +21476,7 @@
           <p:cNvPr id="2" name="TextBox 1">
             <a:extLst xmlns:a="http://schemas.openxmlformats.org/drawingml/2006/main">
               <a:ext uri="{FF2B5EF4-FFF2-40B4-BE49-F238E27FC236}">
-                <a16:creationId xmlns:a16="http://schemas.microsoft.com/office/drawing/2014/main" id="{03D14537-3EEA-4A6D-94EF-822CCA183148}"/>
+                <a16:creationId xmlns:a16="http://schemas.microsoft.com/office/drawing/2014/main" id="{45978085-C344-481B-B9D9-904988C795DF}"/>
               </a:ext>
             </a:extLst>
           </p:cNvPr>
@@ -21203,7 +21523,7 @@
           <p:cNvPr id="3" name="TextBox 2">
             <a:extLst xmlns:a="http://schemas.openxmlformats.org/drawingml/2006/main">
               <a:ext uri="{FF2B5EF4-FFF2-40B4-BE49-F238E27FC236}">
-                <a16:creationId xmlns:a16="http://schemas.microsoft.com/office/drawing/2014/main" id="{D110FAD0-9BE1-4E43-90B7-8C12050D7981}"/>
+                <a16:creationId xmlns:a16="http://schemas.microsoft.com/office/drawing/2014/main" id="{E5B3CA6F-38C4-4BF8-A90D-4B77A0F7EEA7}"/>
               </a:ext>
             </a:extLst>
           </p:cNvPr>
@@ -21250,7 +21570,7 @@
           <p:cNvPr id="4" name="Rectangle 3">
             <a:extLst xmlns:a="http://schemas.openxmlformats.org/drawingml/2006/main">
               <a:ext uri="{FF2B5EF4-FFF2-40B4-BE49-F238E27FC236}">
-                <a16:creationId xmlns:a16="http://schemas.microsoft.com/office/drawing/2014/main" id="{43DDEDFD-3471-4377-A951-165BD749B867}"/>
+                <a16:creationId xmlns:a16="http://schemas.microsoft.com/office/drawing/2014/main" id="{484614EE-8737-4C32-AD99-FC06CD67E236}"/>
               </a:ext>
             </a:extLst>
           </p:cNvPr>
@@ -21305,7 +21625,7 @@
           <p:cNvPr id="5" name="Rectangle 4">
             <a:extLst xmlns:a="http://schemas.openxmlformats.org/drawingml/2006/main">
               <a:ext uri="{FF2B5EF4-FFF2-40B4-BE49-F238E27FC236}">
-                <a16:creationId xmlns:a16="http://schemas.microsoft.com/office/drawing/2014/main" id="{B3BB11FC-9624-4D65-B9A5-1145F266D1D4}"/>
+                <a16:creationId xmlns:a16="http://schemas.microsoft.com/office/drawing/2014/main" id="{1F5938F7-8C7D-41AA-B520-16A7F85B8DE7}"/>
               </a:ext>
             </a:extLst>
           </p:cNvPr>
@@ -21360,7 +21680,7 @@
           <p:cNvPr id="6" name="TextBox 5">
             <a:extLst xmlns:a="http://schemas.openxmlformats.org/drawingml/2006/main">
               <a:ext uri="{FF2B5EF4-FFF2-40B4-BE49-F238E27FC236}">
-                <a16:creationId xmlns:a16="http://schemas.microsoft.com/office/drawing/2014/main" id="{379F6577-3053-4D95-A05C-4931EEE986A2}"/>
+                <a16:creationId xmlns:a16="http://schemas.microsoft.com/office/drawing/2014/main" id="{9DADAFB7-E6FD-458B-A563-1CBDAF2518A4}"/>
               </a:ext>
             </a:extLst>
           </p:cNvPr>
@@ -21397,7 +21717,7 @@
                 <a:ea typeface="Aptos"/>
                 <a:cs typeface="Aptos"/>
               </a:rPr>
-              <a:t>Julkinen riippumaton evidenssikooste · 2026.07.25-24 · 2026-07-24 · Lähteet: EP3032975B2; 7 O 3341/24</a:t>
+              <a:t>Julkinen riippumaton evidenssikooste · 2026.07.26-25 · 2026-07-26 · Lähteet: EP3032975B2; 7 O 3341/24</a:t>
             </a:r>
           </a:p>
         </p:txBody>
@@ -21407,7 +21727,7 @@
           <p:cNvPr id="7" name="TextBox 6">
             <a:extLst xmlns:a="http://schemas.openxmlformats.org/drawingml/2006/main">
               <a:ext uri="{FF2B5EF4-FFF2-40B4-BE49-F238E27FC236}">
-                <a16:creationId xmlns:a16="http://schemas.microsoft.com/office/drawing/2014/main" id="{430BD54C-CAD6-4FFB-9733-FE29906D926A}"/>
+                <a16:creationId xmlns:a16="http://schemas.microsoft.com/office/drawing/2014/main" id="{5C085A3C-ABBB-4348-B2B5-09BBB95C6D38}"/>
               </a:ext>
             </a:extLst>
           </p:cNvPr>
@@ -21454,7 +21774,7 @@
           <p:cNvPr id="8" name="Rounded Rectangle 7">
             <a:extLst xmlns:a="http://schemas.openxmlformats.org/drawingml/2006/main">
               <a:ext uri="{FF2B5EF4-FFF2-40B4-BE49-F238E27FC236}">
-                <a16:creationId xmlns:a16="http://schemas.microsoft.com/office/drawing/2014/main" id="{6BB11499-4DDB-43C9-811F-A170F9B8B7D5}"/>
+                <a16:creationId xmlns:a16="http://schemas.microsoft.com/office/drawing/2014/main" id="{78786DF2-C248-45C8-91A2-C7B7D33179C1}"/>
               </a:ext>
             </a:extLst>
           </p:cNvPr>
@@ -21511,7 +21831,7 @@
           <p:cNvPr id="9" name="TextBox 8">
             <a:extLst xmlns:a="http://schemas.openxmlformats.org/drawingml/2006/main">
               <a:ext uri="{FF2B5EF4-FFF2-40B4-BE49-F238E27FC236}">
-                <a16:creationId xmlns:a16="http://schemas.microsoft.com/office/drawing/2014/main" id="{2205827A-8433-4D95-9444-1BEDCC9A3074}"/>
+                <a16:creationId xmlns:a16="http://schemas.microsoft.com/office/drawing/2014/main" id="{3100090E-35F7-4746-91CF-A9C0B6403D22}"/>
               </a:ext>
             </a:extLst>
           </p:cNvPr>
@@ -21558,7 +21878,7 @@
           <p:cNvPr id="10" name="TextBox 9">
             <a:extLst xmlns:a="http://schemas.openxmlformats.org/drawingml/2006/main">
               <a:ext uri="{FF2B5EF4-FFF2-40B4-BE49-F238E27FC236}">
-                <a16:creationId xmlns:a16="http://schemas.microsoft.com/office/drawing/2014/main" id="{612A26BA-617E-4B39-8670-6FEE6F0C9434}"/>
+                <a16:creationId xmlns:a16="http://schemas.microsoft.com/office/drawing/2014/main" id="{CE730F48-9200-437A-9A3E-E6A1055BF3BD}"/>
               </a:ext>
             </a:extLst>
           </p:cNvPr>
@@ -21605,7 +21925,7 @@
           <p:cNvPr id="11" name="TextBox 10">
             <a:extLst xmlns:a="http://schemas.openxmlformats.org/drawingml/2006/main">
               <a:ext uri="{FF2B5EF4-FFF2-40B4-BE49-F238E27FC236}">
-                <a16:creationId xmlns:a16="http://schemas.microsoft.com/office/drawing/2014/main" id="{0EE22EC9-F936-4955-950A-8202ACEF4D4D}"/>
+                <a16:creationId xmlns:a16="http://schemas.microsoft.com/office/drawing/2014/main" id="{4AD7DFE5-A3B7-495F-B215-5D92673ECEF4}"/>
               </a:ext>
             </a:extLst>
           </p:cNvPr>
@@ -21652,7 +21972,7 @@
           <p:cNvPr id="12" name="Rounded Rectangle 11">
             <a:extLst xmlns:a="http://schemas.openxmlformats.org/drawingml/2006/main">
               <a:ext uri="{FF2B5EF4-FFF2-40B4-BE49-F238E27FC236}">
-                <a16:creationId xmlns:a16="http://schemas.microsoft.com/office/drawing/2014/main" id="{27D56093-8E64-48F0-A6DC-D64663EDECFA}"/>
+                <a16:creationId xmlns:a16="http://schemas.microsoft.com/office/drawing/2014/main" id="{D1E566B3-893D-4D74-A2DA-D1C77500F184}"/>
               </a:ext>
             </a:extLst>
           </p:cNvPr>
@@ -21709,7 +22029,7 @@
           <p:cNvPr id="13" name="TextBox 12">
             <a:extLst xmlns:a="http://schemas.openxmlformats.org/drawingml/2006/main">
               <a:ext uri="{FF2B5EF4-FFF2-40B4-BE49-F238E27FC236}">
-                <a16:creationId xmlns:a16="http://schemas.microsoft.com/office/drawing/2014/main" id="{64B0D5B2-66DC-49BE-BAD2-20CD2A02564D}"/>
+                <a16:creationId xmlns:a16="http://schemas.microsoft.com/office/drawing/2014/main" id="{A29CFB09-4E32-4263-9598-B496EB131AD3}"/>
               </a:ext>
             </a:extLst>
           </p:cNvPr>
@@ -21756,7 +22076,7 @@
           <p:cNvPr id="14" name="TextBox 13">
             <a:extLst xmlns:a="http://schemas.openxmlformats.org/drawingml/2006/main">
               <a:ext uri="{FF2B5EF4-FFF2-40B4-BE49-F238E27FC236}">
-                <a16:creationId xmlns:a16="http://schemas.microsoft.com/office/drawing/2014/main" id="{347A5BB8-A731-4752-8CF5-043E5D8D5682}"/>
+                <a16:creationId xmlns:a16="http://schemas.microsoft.com/office/drawing/2014/main" id="{0ABE371B-6E57-4A84-94CC-AF7D937185A4}"/>
               </a:ext>
             </a:extLst>
           </p:cNvPr>
@@ -21803,7 +22123,7 @@
           <p:cNvPr id="15" name="TextBox 14">
             <a:extLst xmlns:a="http://schemas.openxmlformats.org/drawingml/2006/main">
               <a:ext uri="{FF2B5EF4-FFF2-40B4-BE49-F238E27FC236}">
-                <a16:creationId xmlns:a16="http://schemas.microsoft.com/office/drawing/2014/main" id="{E7FFB54B-5F89-46BD-86A1-84FEB72991FB}"/>
+                <a16:creationId xmlns:a16="http://schemas.microsoft.com/office/drawing/2014/main" id="{6B775A5C-BAC7-4494-A1E6-9590D8F35F52}"/>
               </a:ext>
             </a:extLst>
           </p:cNvPr>
@@ -21850,7 +22170,7 @@
           <p:cNvPr id="16" name="Rounded Rectangle 15">
             <a:extLst xmlns:a="http://schemas.openxmlformats.org/drawingml/2006/main">
               <a:ext uri="{FF2B5EF4-FFF2-40B4-BE49-F238E27FC236}">
-                <a16:creationId xmlns:a16="http://schemas.microsoft.com/office/drawing/2014/main" id="{425CFE50-A4FE-4977-84F9-D519E3FF0A7A}"/>
+                <a16:creationId xmlns:a16="http://schemas.microsoft.com/office/drawing/2014/main" id="{F2CEE9E9-2879-41C2-BE4D-77D03860B371}"/>
               </a:ext>
             </a:extLst>
           </p:cNvPr>
@@ -21907,7 +22227,7 @@
           <p:cNvPr id="17" name="TextBox 16">
             <a:extLst xmlns:a="http://schemas.openxmlformats.org/drawingml/2006/main">
               <a:ext uri="{FF2B5EF4-FFF2-40B4-BE49-F238E27FC236}">
-                <a16:creationId xmlns:a16="http://schemas.microsoft.com/office/drawing/2014/main" id="{EFCE15F4-38AD-4E29-9433-9717E175A8C0}"/>
+                <a16:creationId xmlns:a16="http://schemas.microsoft.com/office/drawing/2014/main" id="{8658283D-1D8E-4DA2-90CE-2C2F13798811}"/>
               </a:ext>
             </a:extLst>
           </p:cNvPr>
@@ -21954,7 +22274,7 @@
           <p:cNvPr id="18" name="TextBox 17">
             <a:extLst xmlns:a="http://schemas.openxmlformats.org/drawingml/2006/main">
               <a:ext uri="{FF2B5EF4-FFF2-40B4-BE49-F238E27FC236}">
-                <a16:creationId xmlns:a16="http://schemas.microsoft.com/office/drawing/2014/main" id="{1268C5E4-439C-47E6-951A-FD9B4F3CF5B2}"/>
+                <a16:creationId xmlns:a16="http://schemas.microsoft.com/office/drawing/2014/main" id="{7018C5CF-CE2B-4195-8A31-167CB63F558B}"/>
               </a:ext>
             </a:extLst>
           </p:cNvPr>
@@ -22001,7 +22321,7 @@
           <p:cNvPr id="19" name="TextBox 18">
             <a:extLst xmlns:a="http://schemas.openxmlformats.org/drawingml/2006/main">
               <a:ext uri="{FF2B5EF4-FFF2-40B4-BE49-F238E27FC236}">
-                <a16:creationId xmlns:a16="http://schemas.microsoft.com/office/drawing/2014/main" id="{BD951BAA-E194-43EC-86C0-F303D17DBEE1}"/>
+                <a16:creationId xmlns:a16="http://schemas.microsoft.com/office/drawing/2014/main" id="{159E9D51-D205-4547-B76B-57AB418C10FB}"/>
               </a:ext>
             </a:extLst>
           </p:cNvPr>
@@ -22048,7 +22368,7 @@
           <p:cNvPr id="20" name="Rounded Rectangle 19">
             <a:extLst xmlns:a="http://schemas.openxmlformats.org/drawingml/2006/main">
               <a:ext uri="{FF2B5EF4-FFF2-40B4-BE49-F238E27FC236}">
-                <a16:creationId xmlns:a16="http://schemas.microsoft.com/office/drawing/2014/main" id="{DC0C9472-19C2-45F8-A785-3E54F8D788FD}"/>
+                <a16:creationId xmlns:a16="http://schemas.microsoft.com/office/drawing/2014/main" id="{D92B4665-E19E-4CEE-97F0-E4A7F7BAE9FE}"/>
               </a:ext>
             </a:extLst>
           </p:cNvPr>
@@ -22105,7 +22425,7 @@
           <p:cNvPr id="21" name="TextBox 20">
             <a:extLst xmlns:a="http://schemas.openxmlformats.org/drawingml/2006/main">
               <a:ext uri="{FF2B5EF4-FFF2-40B4-BE49-F238E27FC236}">
-                <a16:creationId xmlns:a16="http://schemas.microsoft.com/office/drawing/2014/main" id="{E169638A-A810-40B6-A7EF-DA997B8EB696}"/>
+                <a16:creationId xmlns:a16="http://schemas.microsoft.com/office/drawing/2014/main" id="{4294D9DD-177C-4692-A075-EC7A14BFF878}"/>
               </a:ext>
             </a:extLst>
           </p:cNvPr>
@@ -22152,7 +22472,7 @@
           <p:cNvPr id="22" name="TextBox 21">
             <a:extLst xmlns:a="http://schemas.openxmlformats.org/drawingml/2006/main">
               <a:ext uri="{FF2B5EF4-FFF2-40B4-BE49-F238E27FC236}">
-                <a16:creationId xmlns:a16="http://schemas.microsoft.com/office/drawing/2014/main" id="{0570A1BF-7DF3-42DC-9C21-989AD366A1AE}"/>
+                <a16:creationId xmlns:a16="http://schemas.microsoft.com/office/drawing/2014/main" id="{F82A32EB-919E-4185-9515-C4CCA13D8916}"/>
               </a:ext>
             </a:extLst>
           </p:cNvPr>
@@ -22199,7 +22519,7 @@
           <p:cNvPr id="23" name="TextBox 22">
             <a:extLst xmlns:a="http://schemas.openxmlformats.org/drawingml/2006/main">
               <a:ext uri="{FF2B5EF4-FFF2-40B4-BE49-F238E27FC236}">
-                <a16:creationId xmlns:a16="http://schemas.microsoft.com/office/drawing/2014/main" id="{1ED80CF8-42EC-465B-AB43-8056B8958470}"/>
+                <a16:creationId xmlns:a16="http://schemas.microsoft.com/office/drawing/2014/main" id="{8AA28C6D-E0D1-4A5E-9110-CE65567E0D9D}"/>
               </a:ext>
             </a:extLst>
           </p:cNvPr>
@@ -22246,7 +22566,7 @@
           <p:cNvPr id="24" name="TextBox 23">
             <a:extLst xmlns:a="http://schemas.openxmlformats.org/drawingml/2006/main">
               <a:ext uri="{FF2B5EF4-FFF2-40B4-BE49-F238E27FC236}">
-                <a16:creationId xmlns:a16="http://schemas.microsoft.com/office/drawing/2014/main" id="{C15D59EB-473A-4A2B-AADA-6E3A568E135C}"/>
+                <a16